--- a/image process/drawings sifi.pptx
+++ b/image process/drawings sifi.pptx
@@ -15618,6 +15618,1599 @@
           </p:sp>
         </p:grpSp>
       </p:grpSp>
+      <p:grpSp>
+        <p:nvGrpSpPr>
+          <p:cNvPr id="313" name="Group 312">
+            <a:extLst>
+              <a:ext uri="{FF2B5EF4-FFF2-40B4-BE49-F238E27FC236}">
+                <a16:creationId xmlns:a16="http://schemas.microsoft.com/office/drawing/2014/main" id="{4B513A1D-2CCC-EF6A-93BC-E0617E3D96F5}"/>
+              </a:ext>
+            </a:extLst>
+          </p:cNvPr>
+          <p:cNvGrpSpPr/>
+          <p:nvPr/>
+        </p:nvGrpSpPr>
+        <p:grpSpPr>
+          <a:xfrm>
+            <a:off x="5304150" y="3827635"/>
+            <a:ext cx="1143909" cy="1520774"/>
+            <a:chOff x="3363817" y="813583"/>
+            <a:chExt cx="2044395" cy="2717927"/>
+          </a:xfrm>
+        </p:grpSpPr>
+        <p:sp>
+          <p:nvSpPr>
+            <p:cNvPr id="314" name="Diamond 313">
+              <a:extLst>
+                <a:ext uri="{FF2B5EF4-FFF2-40B4-BE49-F238E27FC236}">
+                  <a16:creationId xmlns:a16="http://schemas.microsoft.com/office/drawing/2014/main" id="{7A672C02-9737-5135-5BA6-1AF03FF3762D}"/>
+                </a:ext>
+              </a:extLst>
+            </p:cNvPr>
+            <p:cNvSpPr/>
+            <p:nvPr/>
+          </p:nvSpPr>
+          <p:spPr>
+            <a:xfrm>
+              <a:off x="3975100" y="1439970"/>
+              <a:ext cx="816608" cy="1449279"/>
+            </a:xfrm>
+            <a:prstGeom prst="diamond">
+              <a:avLst/>
+            </a:prstGeom>
+          </p:spPr>
+          <p:style>
+            <a:lnRef idx="2">
+              <a:schemeClr val="dk1">
+                <a:shade val="50000"/>
+              </a:schemeClr>
+            </a:lnRef>
+            <a:fillRef idx="1">
+              <a:schemeClr val="dk1"/>
+            </a:fillRef>
+            <a:effectRef idx="0">
+              <a:schemeClr val="dk1"/>
+            </a:effectRef>
+            <a:fontRef idx="minor">
+              <a:schemeClr val="lt1"/>
+            </a:fontRef>
+          </p:style>
+          <p:txBody>
+            <a:bodyPr rtlCol="0" anchor="ctr"/>
+            <a:lstStyle/>
+            <a:p>
+              <a:pPr algn="ctr"/>
+              <a:endParaRPr lang="en-US"/>
+            </a:p>
+          </p:txBody>
+        </p:sp>
+        <p:grpSp>
+          <p:nvGrpSpPr>
+            <p:cNvPr id="315" name="Group 314">
+              <a:extLst>
+                <a:ext uri="{FF2B5EF4-FFF2-40B4-BE49-F238E27FC236}">
+                  <a16:creationId xmlns:a16="http://schemas.microsoft.com/office/drawing/2014/main" id="{4A1AD818-C367-9D21-7F04-D309CB3408B0}"/>
+                </a:ext>
+              </a:extLst>
+            </p:cNvPr>
+            <p:cNvGrpSpPr/>
+            <p:nvPr/>
+          </p:nvGrpSpPr>
+          <p:grpSpPr>
+            <a:xfrm>
+              <a:off x="3363817" y="813583"/>
+              <a:ext cx="935545" cy="2708402"/>
+              <a:chOff x="3363817" y="813583"/>
+              <a:chExt cx="935545" cy="2708402"/>
+            </a:xfrm>
+          </p:grpSpPr>
+          <p:sp>
+            <p:nvSpPr>
+              <p:cNvPr id="344" name="Oval 343">
+                <a:extLst>
+                  <a:ext uri="{FF2B5EF4-FFF2-40B4-BE49-F238E27FC236}">
+                    <a16:creationId xmlns:a16="http://schemas.microsoft.com/office/drawing/2014/main" id="{A39745CB-08C6-1697-B7E5-574690AAE96B}"/>
+                  </a:ext>
+                </a:extLst>
+              </p:cNvPr>
+              <p:cNvSpPr/>
+              <p:nvPr/>
+            </p:nvSpPr>
+            <p:spPr>
+              <a:xfrm rot="1729643">
+                <a:off x="3363818" y="813583"/>
+                <a:ext cx="935544" cy="1529359"/>
+              </a:xfrm>
+              <a:prstGeom prst="ellipse">
+                <a:avLst/>
+              </a:prstGeom>
+              <a:ln>
+                <a:noFill/>
+              </a:ln>
+            </p:spPr>
+            <p:style>
+              <a:lnRef idx="2">
+                <a:schemeClr val="dk1"/>
+              </a:lnRef>
+              <a:fillRef idx="1">
+                <a:schemeClr val="lt1"/>
+              </a:fillRef>
+              <a:effectRef idx="0">
+                <a:schemeClr val="dk1"/>
+              </a:effectRef>
+              <a:fontRef idx="minor">
+                <a:schemeClr val="dk1"/>
+              </a:fontRef>
+            </p:style>
+            <p:txBody>
+              <a:bodyPr rtlCol="0" anchor="ctr"/>
+              <a:lstStyle/>
+              <a:p>
+                <a:pPr algn="ctr"/>
+                <a:endParaRPr lang="en-US"/>
+              </a:p>
+            </p:txBody>
+          </p:sp>
+          <p:sp>
+            <p:nvSpPr>
+              <p:cNvPr id="345" name="Oval 344">
+                <a:extLst>
+                  <a:ext uri="{FF2B5EF4-FFF2-40B4-BE49-F238E27FC236}">
+                    <a16:creationId xmlns:a16="http://schemas.microsoft.com/office/drawing/2014/main" id="{30334C54-BAC3-39A0-9D89-09DC125581C0}"/>
+                  </a:ext>
+                </a:extLst>
+              </p:cNvPr>
+              <p:cNvSpPr/>
+              <p:nvPr/>
+            </p:nvSpPr>
+            <p:spPr>
+              <a:xfrm rot="19870357" flipV="1">
+                <a:off x="3363817" y="1992626"/>
+                <a:ext cx="935544" cy="1529359"/>
+              </a:xfrm>
+              <a:prstGeom prst="ellipse">
+                <a:avLst/>
+              </a:prstGeom>
+              <a:ln>
+                <a:noFill/>
+              </a:ln>
+            </p:spPr>
+            <p:style>
+              <a:lnRef idx="2">
+                <a:schemeClr val="dk1"/>
+              </a:lnRef>
+              <a:fillRef idx="1">
+                <a:schemeClr val="lt1"/>
+              </a:fillRef>
+              <a:effectRef idx="0">
+                <a:schemeClr val="dk1"/>
+              </a:effectRef>
+              <a:fontRef idx="minor">
+                <a:schemeClr val="dk1"/>
+              </a:fontRef>
+            </p:style>
+            <p:txBody>
+              <a:bodyPr rtlCol="0" anchor="ctr"/>
+              <a:lstStyle/>
+              <a:p>
+                <a:pPr algn="ctr"/>
+                <a:endParaRPr lang="en-US"/>
+              </a:p>
+            </p:txBody>
+          </p:sp>
+        </p:grpSp>
+        <p:grpSp>
+          <p:nvGrpSpPr>
+            <p:cNvPr id="336" name="Group 335">
+              <a:extLst>
+                <a:ext uri="{FF2B5EF4-FFF2-40B4-BE49-F238E27FC236}">
+                  <a16:creationId xmlns:a16="http://schemas.microsoft.com/office/drawing/2014/main" id="{E8149E00-3552-BEC3-8D28-7397C814E243}"/>
+                </a:ext>
+              </a:extLst>
+            </p:cNvPr>
+            <p:cNvGrpSpPr/>
+            <p:nvPr/>
+          </p:nvGrpSpPr>
+          <p:grpSpPr>
+            <a:xfrm flipH="1">
+              <a:off x="4472667" y="823108"/>
+              <a:ext cx="935545" cy="2708402"/>
+              <a:chOff x="3363817" y="813583"/>
+              <a:chExt cx="935545" cy="2708402"/>
+            </a:xfrm>
+          </p:grpSpPr>
+          <p:sp>
+            <p:nvSpPr>
+              <p:cNvPr id="342" name="Oval 341">
+                <a:extLst>
+                  <a:ext uri="{FF2B5EF4-FFF2-40B4-BE49-F238E27FC236}">
+                    <a16:creationId xmlns:a16="http://schemas.microsoft.com/office/drawing/2014/main" id="{85EF25FD-C6A2-2A37-0976-FC12EAFCDEF6}"/>
+                  </a:ext>
+                </a:extLst>
+              </p:cNvPr>
+              <p:cNvSpPr/>
+              <p:nvPr/>
+            </p:nvSpPr>
+            <p:spPr>
+              <a:xfrm rot="1729643">
+                <a:off x="3363818" y="813583"/>
+                <a:ext cx="935544" cy="1529359"/>
+              </a:xfrm>
+              <a:prstGeom prst="ellipse">
+                <a:avLst/>
+              </a:prstGeom>
+              <a:ln>
+                <a:noFill/>
+              </a:ln>
+            </p:spPr>
+            <p:style>
+              <a:lnRef idx="2">
+                <a:schemeClr val="dk1"/>
+              </a:lnRef>
+              <a:fillRef idx="1">
+                <a:schemeClr val="lt1"/>
+              </a:fillRef>
+              <a:effectRef idx="0">
+                <a:schemeClr val="dk1"/>
+              </a:effectRef>
+              <a:fontRef idx="minor">
+                <a:schemeClr val="dk1"/>
+              </a:fontRef>
+            </p:style>
+            <p:txBody>
+              <a:bodyPr rtlCol="0" anchor="ctr"/>
+              <a:lstStyle/>
+              <a:p>
+                <a:pPr algn="ctr"/>
+                <a:endParaRPr lang="en-US"/>
+              </a:p>
+            </p:txBody>
+          </p:sp>
+          <p:sp>
+            <p:nvSpPr>
+              <p:cNvPr id="343" name="Oval 342">
+                <a:extLst>
+                  <a:ext uri="{FF2B5EF4-FFF2-40B4-BE49-F238E27FC236}">
+                    <a16:creationId xmlns:a16="http://schemas.microsoft.com/office/drawing/2014/main" id="{15A388CC-FA78-6A13-CF9E-4C283C272804}"/>
+                  </a:ext>
+                </a:extLst>
+              </p:cNvPr>
+              <p:cNvSpPr/>
+              <p:nvPr/>
+            </p:nvSpPr>
+            <p:spPr>
+              <a:xfrm rot="19870357" flipV="1">
+                <a:off x="3363817" y="1992626"/>
+                <a:ext cx="935544" cy="1529359"/>
+              </a:xfrm>
+              <a:prstGeom prst="ellipse">
+                <a:avLst/>
+              </a:prstGeom>
+              <a:ln>
+                <a:noFill/>
+              </a:ln>
+            </p:spPr>
+            <p:style>
+              <a:lnRef idx="2">
+                <a:schemeClr val="dk1"/>
+              </a:lnRef>
+              <a:fillRef idx="1">
+                <a:schemeClr val="lt1"/>
+              </a:fillRef>
+              <a:effectRef idx="0">
+                <a:schemeClr val="dk1"/>
+              </a:effectRef>
+              <a:fontRef idx="minor">
+                <a:schemeClr val="dk1"/>
+              </a:fontRef>
+            </p:style>
+            <p:txBody>
+              <a:bodyPr rtlCol="0" anchor="ctr"/>
+              <a:lstStyle/>
+              <a:p>
+                <a:pPr algn="ctr"/>
+                <a:endParaRPr lang="en-US"/>
+              </a:p>
+            </p:txBody>
+          </p:sp>
+        </p:grpSp>
+        <p:sp>
+          <p:nvSpPr>
+            <p:cNvPr id="337" name="Rectangle 336">
+              <a:extLst>
+                <a:ext uri="{FF2B5EF4-FFF2-40B4-BE49-F238E27FC236}">
+                  <a16:creationId xmlns:a16="http://schemas.microsoft.com/office/drawing/2014/main" id="{70A353CF-583C-F469-D83F-694B20FC2505}"/>
+                </a:ext>
+              </a:extLst>
+            </p:cNvPr>
+            <p:cNvSpPr/>
+            <p:nvPr/>
+          </p:nvSpPr>
+          <p:spPr>
+            <a:xfrm>
+              <a:off x="3683000" y="2068915"/>
+              <a:ext cx="1397000" cy="279400"/>
+            </a:xfrm>
+            <a:prstGeom prst="rect">
+              <a:avLst/>
+            </a:prstGeom>
+          </p:spPr>
+          <p:style>
+            <a:lnRef idx="2">
+              <a:schemeClr val="dk1">
+                <a:shade val="50000"/>
+              </a:schemeClr>
+            </a:lnRef>
+            <a:fillRef idx="1">
+              <a:schemeClr val="dk1"/>
+            </a:fillRef>
+            <a:effectRef idx="0">
+              <a:schemeClr val="dk1"/>
+            </a:effectRef>
+            <a:fontRef idx="minor">
+              <a:schemeClr val="lt1"/>
+            </a:fontRef>
+          </p:style>
+          <p:txBody>
+            <a:bodyPr rtlCol="0" anchor="ctr"/>
+            <a:lstStyle/>
+            <a:p>
+              <a:pPr algn="ctr"/>
+              <a:endParaRPr lang="en-US"/>
+            </a:p>
+          </p:txBody>
+        </p:sp>
+        <p:sp>
+          <p:nvSpPr>
+            <p:cNvPr id="338" name="Rectangle 337">
+              <a:extLst>
+                <a:ext uri="{FF2B5EF4-FFF2-40B4-BE49-F238E27FC236}">
+                  <a16:creationId xmlns:a16="http://schemas.microsoft.com/office/drawing/2014/main" id="{783DD2F9-A0D2-9A30-B40B-28E4C4B25B57}"/>
+                </a:ext>
+              </a:extLst>
+            </p:cNvPr>
+            <p:cNvSpPr/>
+            <p:nvPr/>
+          </p:nvSpPr>
+          <p:spPr>
+            <a:xfrm>
+              <a:off x="3756163" y="1876629"/>
+              <a:ext cx="181606" cy="663971"/>
+            </a:xfrm>
+            <a:prstGeom prst="rect">
+              <a:avLst/>
+            </a:prstGeom>
+          </p:spPr>
+          <p:style>
+            <a:lnRef idx="2">
+              <a:schemeClr val="dk1"/>
+            </a:lnRef>
+            <a:fillRef idx="1">
+              <a:schemeClr val="lt1"/>
+            </a:fillRef>
+            <a:effectRef idx="0">
+              <a:schemeClr val="dk1"/>
+            </a:effectRef>
+            <a:fontRef idx="minor">
+              <a:schemeClr val="dk1"/>
+            </a:fontRef>
+          </p:style>
+          <p:txBody>
+            <a:bodyPr rtlCol="0" anchor="ctr"/>
+            <a:lstStyle/>
+            <a:p>
+              <a:pPr algn="ctr"/>
+              <a:endParaRPr lang="en-US"/>
+            </a:p>
+          </p:txBody>
+        </p:sp>
+        <p:sp>
+          <p:nvSpPr>
+            <p:cNvPr id="339" name="Rectangle 338">
+              <a:extLst>
+                <a:ext uri="{FF2B5EF4-FFF2-40B4-BE49-F238E27FC236}">
+                  <a16:creationId xmlns:a16="http://schemas.microsoft.com/office/drawing/2014/main" id="{2E533B33-5B76-1638-3440-B4995CC510A7}"/>
+                </a:ext>
+              </a:extLst>
+            </p:cNvPr>
+            <p:cNvSpPr/>
+            <p:nvPr/>
+          </p:nvSpPr>
+          <p:spPr>
+            <a:xfrm>
+              <a:off x="4823219" y="1861841"/>
+              <a:ext cx="181606" cy="663971"/>
+            </a:xfrm>
+            <a:prstGeom prst="rect">
+              <a:avLst/>
+            </a:prstGeom>
+          </p:spPr>
+          <p:style>
+            <a:lnRef idx="2">
+              <a:schemeClr val="dk1"/>
+            </a:lnRef>
+            <a:fillRef idx="1">
+              <a:schemeClr val="lt1"/>
+            </a:fillRef>
+            <a:effectRef idx="0">
+              <a:schemeClr val="dk1"/>
+            </a:effectRef>
+            <a:fontRef idx="minor">
+              <a:schemeClr val="dk1"/>
+            </a:fontRef>
+          </p:style>
+          <p:txBody>
+            <a:bodyPr rtlCol="0" anchor="ctr"/>
+            <a:lstStyle/>
+            <a:p>
+              <a:pPr algn="ctr"/>
+              <a:endParaRPr lang="en-US"/>
+            </a:p>
+          </p:txBody>
+        </p:sp>
+        <p:sp>
+          <p:nvSpPr>
+            <p:cNvPr id="340" name="Cross 339">
+              <a:extLst>
+                <a:ext uri="{FF2B5EF4-FFF2-40B4-BE49-F238E27FC236}">
+                  <a16:creationId xmlns:a16="http://schemas.microsoft.com/office/drawing/2014/main" id="{279329A5-23D7-552E-2E7F-2F9A6C57923E}"/>
+                </a:ext>
+              </a:extLst>
+            </p:cNvPr>
+            <p:cNvSpPr/>
+            <p:nvPr/>
+          </p:nvSpPr>
+          <p:spPr>
+            <a:xfrm>
+              <a:off x="4610101" y="1555630"/>
+              <a:ext cx="277271" cy="263881"/>
+            </a:xfrm>
+            <a:prstGeom prst="plus">
+              <a:avLst>
+                <a:gd name="adj" fmla="val 37697"/>
+              </a:avLst>
+            </a:prstGeom>
+          </p:spPr>
+          <p:style>
+            <a:lnRef idx="2">
+              <a:schemeClr val="dk1">
+                <a:shade val="50000"/>
+              </a:schemeClr>
+            </a:lnRef>
+            <a:fillRef idx="1">
+              <a:schemeClr val="dk1"/>
+            </a:fillRef>
+            <a:effectRef idx="0">
+              <a:schemeClr val="dk1"/>
+            </a:effectRef>
+            <a:fontRef idx="minor">
+              <a:schemeClr val="lt1"/>
+            </a:fontRef>
+          </p:style>
+          <p:txBody>
+            <a:bodyPr rtlCol="0" anchor="ctr"/>
+            <a:lstStyle/>
+            <a:p>
+              <a:pPr algn="ctr"/>
+              <a:endParaRPr lang="en-US"/>
+            </a:p>
+          </p:txBody>
+        </p:sp>
+        <p:sp>
+          <p:nvSpPr>
+            <p:cNvPr id="341" name="Cross 340">
+              <a:extLst>
+                <a:ext uri="{FF2B5EF4-FFF2-40B4-BE49-F238E27FC236}">
+                  <a16:creationId xmlns:a16="http://schemas.microsoft.com/office/drawing/2014/main" id="{ED1DAF97-8F33-5282-959F-454BD2C6C5E0}"/>
+                </a:ext>
+              </a:extLst>
+            </p:cNvPr>
+            <p:cNvSpPr/>
+            <p:nvPr/>
+          </p:nvSpPr>
+          <p:spPr>
+            <a:xfrm>
+              <a:off x="4784233" y="1414162"/>
+              <a:ext cx="185026" cy="176091"/>
+            </a:xfrm>
+            <a:prstGeom prst="plus">
+              <a:avLst>
+                <a:gd name="adj" fmla="val 37697"/>
+              </a:avLst>
+            </a:prstGeom>
+          </p:spPr>
+          <p:style>
+            <a:lnRef idx="2">
+              <a:schemeClr val="dk1">
+                <a:shade val="50000"/>
+              </a:schemeClr>
+            </a:lnRef>
+            <a:fillRef idx="1">
+              <a:schemeClr val="dk1"/>
+            </a:fillRef>
+            <a:effectRef idx="0">
+              <a:schemeClr val="dk1"/>
+            </a:effectRef>
+            <a:fontRef idx="minor">
+              <a:schemeClr val="lt1"/>
+            </a:fontRef>
+          </p:style>
+          <p:txBody>
+            <a:bodyPr rtlCol="0" anchor="ctr"/>
+            <a:lstStyle/>
+            <a:p>
+              <a:pPr algn="ctr"/>
+              <a:endParaRPr lang="en-US"/>
+            </a:p>
+          </p:txBody>
+        </p:sp>
+      </p:grpSp>
+      <p:grpSp>
+        <p:nvGrpSpPr>
+          <p:cNvPr id="346" name="Group 345">
+            <a:extLst>
+              <a:ext uri="{FF2B5EF4-FFF2-40B4-BE49-F238E27FC236}">
+                <a16:creationId xmlns:a16="http://schemas.microsoft.com/office/drawing/2014/main" id="{A87E1107-DACA-E244-17C7-C4B29E932667}"/>
+              </a:ext>
+            </a:extLst>
+          </p:cNvPr>
+          <p:cNvGrpSpPr/>
+          <p:nvPr/>
+        </p:nvGrpSpPr>
+        <p:grpSpPr>
+          <a:xfrm>
+            <a:off x="5190305" y="3897729"/>
+            <a:ext cx="1371600" cy="1371600"/>
+            <a:chOff x="1298501" y="962272"/>
+            <a:chExt cx="1371600" cy="1371600"/>
+          </a:xfrm>
+        </p:grpSpPr>
+        <p:sp>
+          <p:nvSpPr>
+            <p:cNvPr id="347" name="Rectangle 346">
+              <a:extLst>
+                <a:ext uri="{FF2B5EF4-FFF2-40B4-BE49-F238E27FC236}">
+                  <a16:creationId xmlns:a16="http://schemas.microsoft.com/office/drawing/2014/main" id="{B2AF726B-211F-464E-2DB1-FDEC9CE26139}"/>
+                </a:ext>
+              </a:extLst>
+            </p:cNvPr>
+            <p:cNvSpPr/>
+            <p:nvPr/>
+          </p:nvSpPr>
+          <p:spPr>
+            <a:xfrm>
+              <a:off x="1298501" y="962272"/>
+              <a:ext cx="1371600" cy="1371600"/>
+            </a:xfrm>
+            <a:prstGeom prst="rect">
+              <a:avLst/>
+            </a:prstGeom>
+            <a:noFill/>
+            <a:ln w="76200">
+              <a:solidFill>
+                <a:schemeClr val="tx1"/>
+              </a:solidFill>
+            </a:ln>
+          </p:spPr>
+          <p:style>
+            <a:lnRef idx="2">
+              <a:schemeClr val="accent1">
+                <a:shade val="50000"/>
+              </a:schemeClr>
+            </a:lnRef>
+            <a:fillRef idx="1">
+              <a:schemeClr val="accent1"/>
+            </a:fillRef>
+            <a:effectRef idx="0">
+              <a:schemeClr val="accent1"/>
+            </a:effectRef>
+            <a:fontRef idx="minor">
+              <a:schemeClr val="lt1"/>
+            </a:fontRef>
+          </p:style>
+          <p:txBody>
+            <a:bodyPr rtlCol="0" anchor="ctr"/>
+            <a:lstStyle/>
+            <a:p>
+              <a:pPr algn="ctr"/>
+              <a:endParaRPr lang="en-US"/>
+            </a:p>
+          </p:txBody>
+        </p:sp>
+        <p:sp>
+          <p:nvSpPr>
+            <p:cNvPr id="348" name="Arrow: Pentagon 347">
+              <a:extLst>
+                <a:ext uri="{FF2B5EF4-FFF2-40B4-BE49-F238E27FC236}">
+                  <a16:creationId xmlns:a16="http://schemas.microsoft.com/office/drawing/2014/main" id="{980D8276-CE82-A926-2594-431EC68E9E6A}"/>
+                </a:ext>
+              </a:extLst>
+            </p:cNvPr>
+            <p:cNvSpPr/>
+            <p:nvPr/>
+          </p:nvSpPr>
+          <p:spPr>
+            <a:xfrm rot="5400000">
+              <a:off x="1435661" y="1173775"/>
+              <a:ext cx="1097280" cy="1097280"/>
+            </a:xfrm>
+            <a:prstGeom prst="homePlate">
+              <a:avLst/>
+            </a:prstGeom>
+            <a:noFill/>
+            <a:ln w="38100" cap="flat" cmpd="sng" algn="ctr">
+              <a:solidFill>
+                <a:schemeClr val="dk1"/>
+              </a:solidFill>
+              <a:prstDash val="solid"/>
+              <a:round/>
+              <a:headEnd type="none" w="med" len="med"/>
+              <a:tailEnd type="none" w="med" len="med"/>
+            </a:ln>
+          </p:spPr>
+          <p:style>
+            <a:lnRef idx="0">
+              <a:scrgbClr r="0" g="0" b="0"/>
+            </a:lnRef>
+            <a:fillRef idx="0">
+              <a:scrgbClr r="0" g="0" b="0"/>
+            </a:fillRef>
+            <a:effectRef idx="0">
+              <a:scrgbClr r="0" g="0" b="0"/>
+            </a:effectRef>
+            <a:fontRef idx="minor">
+              <a:schemeClr val="dk1"/>
+            </a:fontRef>
+          </p:style>
+          <p:txBody>
+            <a:bodyPr rtlCol="0" anchor="ctr"/>
+            <a:lstStyle/>
+            <a:p>
+              <a:pPr algn="ctr"/>
+              <a:endParaRPr lang="en-US"/>
+            </a:p>
+          </p:txBody>
+        </p:sp>
+      </p:grpSp>
+      <p:grpSp>
+        <p:nvGrpSpPr>
+          <p:cNvPr id="349" name="Group 348">
+            <a:extLst>
+              <a:ext uri="{FF2B5EF4-FFF2-40B4-BE49-F238E27FC236}">
+                <a16:creationId xmlns:a16="http://schemas.microsoft.com/office/drawing/2014/main" id="{FA54B203-559E-CC5F-7B15-F1613B87A630}"/>
+              </a:ext>
+            </a:extLst>
+          </p:cNvPr>
+          <p:cNvGrpSpPr/>
+          <p:nvPr/>
+        </p:nvGrpSpPr>
+        <p:grpSpPr>
+          <a:xfrm>
+            <a:off x="6777598" y="3883442"/>
+            <a:ext cx="1371600" cy="1371600"/>
+            <a:chOff x="1298501" y="962272"/>
+            <a:chExt cx="1371600" cy="1371600"/>
+          </a:xfrm>
+        </p:grpSpPr>
+        <p:sp>
+          <p:nvSpPr>
+            <p:cNvPr id="350" name="Rectangle 349">
+              <a:extLst>
+                <a:ext uri="{FF2B5EF4-FFF2-40B4-BE49-F238E27FC236}">
+                  <a16:creationId xmlns:a16="http://schemas.microsoft.com/office/drawing/2014/main" id="{51B3470A-F1D5-ABD7-63F4-8DE2475ED1F2}"/>
+                </a:ext>
+              </a:extLst>
+            </p:cNvPr>
+            <p:cNvSpPr/>
+            <p:nvPr/>
+          </p:nvSpPr>
+          <p:spPr>
+            <a:xfrm>
+              <a:off x="1298501" y="962272"/>
+              <a:ext cx="1371600" cy="1371600"/>
+            </a:xfrm>
+            <a:prstGeom prst="rect">
+              <a:avLst/>
+            </a:prstGeom>
+            <a:noFill/>
+            <a:ln w="76200">
+              <a:solidFill>
+                <a:schemeClr val="tx1"/>
+              </a:solidFill>
+            </a:ln>
+          </p:spPr>
+          <p:style>
+            <a:lnRef idx="2">
+              <a:schemeClr val="accent1">
+                <a:shade val="50000"/>
+              </a:schemeClr>
+            </a:lnRef>
+            <a:fillRef idx="1">
+              <a:schemeClr val="accent1"/>
+            </a:fillRef>
+            <a:effectRef idx="0">
+              <a:schemeClr val="accent1"/>
+            </a:effectRef>
+            <a:fontRef idx="minor">
+              <a:schemeClr val="lt1"/>
+            </a:fontRef>
+          </p:style>
+          <p:txBody>
+            <a:bodyPr rtlCol="0" anchor="ctr"/>
+            <a:lstStyle/>
+            <a:p>
+              <a:pPr algn="ctr"/>
+              <a:endParaRPr lang="en-US"/>
+            </a:p>
+          </p:txBody>
+        </p:sp>
+        <p:sp>
+          <p:nvSpPr>
+            <p:cNvPr id="351" name="Arrow: Pentagon 350">
+              <a:extLst>
+                <a:ext uri="{FF2B5EF4-FFF2-40B4-BE49-F238E27FC236}">
+                  <a16:creationId xmlns:a16="http://schemas.microsoft.com/office/drawing/2014/main" id="{1FF83E73-E8BC-235B-310D-CC6CFD180A6C}"/>
+                </a:ext>
+              </a:extLst>
+            </p:cNvPr>
+            <p:cNvSpPr/>
+            <p:nvPr/>
+          </p:nvSpPr>
+          <p:spPr>
+            <a:xfrm rot="5400000">
+              <a:off x="1435661" y="1173775"/>
+              <a:ext cx="1097280" cy="1097280"/>
+            </a:xfrm>
+            <a:prstGeom prst="homePlate">
+              <a:avLst/>
+            </a:prstGeom>
+            <a:noFill/>
+            <a:ln w="38100" cap="flat" cmpd="sng" algn="ctr">
+              <a:solidFill>
+                <a:schemeClr val="dk1"/>
+              </a:solidFill>
+              <a:prstDash val="solid"/>
+              <a:round/>
+              <a:headEnd type="none" w="med" len="med"/>
+              <a:tailEnd type="none" w="med" len="med"/>
+            </a:ln>
+          </p:spPr>
+          <p:style>
+            <a:lnRef idx="0">
+              <a:scrgbClr r="0" g="0" b="0"/>
+            </a:lnRef>
+            <a:fillRef idx="0">
+              <a:scrgbClr r="0" g="0" b="0"/>
+            </a:fillRef>
+            <a:effectRef idx="0">
+              <a:scrgbClr r="0" g="0" b="0"/>
+            </a:effectRef>
+            <a:fontRef idx="minor">
+              <a:schemeClr val="dk1"/>
+            </a:fontRef>
+          </p:style>
+          <p:txBody>
+            <a:bodyPr rtlCol="0" anchor="ctr"/>
+            <a:lstStyle/>
+            <a:p>
+              <a:pPr algn="ctr"/>
+              <a:endParaRPr lang="en-US"/>
+            </a:p>
+          </p:txBody>
+        </p:sp>
+      </p:grpSp>
+      <p:pic>
+        <p:nvPicPr>
+          <p:cNvPr id="360" name="Picture 2" descr="Sniper rifle vector Images, Stock Photos &amp; Vectors | Shutterstock">
+            <a:extLst>
+              <a:ext uri="{FF2B5EF4-FFF2-40B4-BE49-F238E27FC236}">
+                <a16:creationId xmlns:a16="http://schemas.microsoft.com/office/drawing/2014/main" id="{B4CF7F24-532F-72B1-793F-E57155EF7B34}"/>
+              </a:ext>
+            </a:extLst>
+          </p:cNvPr>
+          <p:cNvPicPr>
+            <a:picLocks noChangeAspect="1" noChangeArrowheads="1"/>
+          </p:cNvPicPr>
+          <p:nvPr/>
+        </p:nvPicPr>
+        <p:blipFill rotWithShape="1">
+          <a:blip r:embed="rId6">
+            <a:extLst>
+              <a:ext uri="{28A0092B-C50C-407E-A947-70E740481C1C}">
+                <a14:useLocalDpi xmlns:a14="http://schemas.microsoft.com/office/drawing/2010/main" val="0"/>
+              </a:ext>
+            </a:extLst>
+          </a:blip>
+          <a:srcRect l="3957" t="13333" r="2963" b="12143"/>
+          <a:stretch/>
+        </p:blipFill>
+        <p:spPr bwMode="auto">
+          <a:xfrm rot="1675474" flipH="1">
+            <a:off x="8471739" y="4374492"/>
+            <a:ext cx="1046633" cy="342583"/>
+          </a:xfrm>
+          <a:prstGeom prst="rect">
+            <a:avLst/>
+          </a:prstGeom>
+          <a:noFill/>
+          <a:extLst>
+            <a:ext uri="{909E8E84-426E-40DD-AFC4-6F175D3DCCD1}">
+              <a14:hiddenFill xmlns:a14="http://schemas.microsoft.com/office/drawing/2010/main">
+                <a:solidFill>
+                  <a:srgbClr val="FFFFFF"/>
+                </a:solidFill>
+              </a14:hiddenFill>
+            </a:ext>
+          </a:extLst>
+        </p:spPr>
+      </p:pic>
+      <p:grpSp>
+        <p:nvGrpSpPr>
+          <p:cNvPr id="361" name="Group 360">
+            <a:extLst>
+              <a:ext uri="{FF2B5EF4-FFF2-40B4-BE49-F238E27FC236}">
+                <a16:creationId xmlns:a16="http://schemas.microsoft.com/office/drawing/2014/main" id="{30166513-C7A2-6888-F33C-D462D55D75FE}"/>
+              </a:ext>
+            </a:extLst>
+          </p:cNvPr>
+          <p:cNvGrpSpPr/>
+          <p:nvPr/>
+        </p:nvGrpSpPr>
+        <p:grpSpPr>
+          <a:xfrm>
+            <a:off x="8351685" y="3959505"/>
+            <a:ext cx="1371600" cy="1371600"/>
+            <a:chOff x="1298501" y="962272"/>
+            <a:chExt cx="1371600" cy="1371600"/>
+          </a:xfrm>
+        </p:grpSpPr>
+        <p:sp>
+          <p:nvSpPr>
+            <p:cNvPr id="362" name="Rectangle 361">
+              <a:extLst>
+                <a:ext uri="{FF2B5EF4-FFF2-40B4-BE49-F238E27FC236}">
+                  <a16:creationId xmlns:a16="http://schemas.microsoft.com/office/drawing/2014/main" id="{768123B9-3E7F-EF9A-147D-57B21696125C}"/>
+                </a:ext>
+              </a:extLst>
+            </p:cNvPr>
+            <p:cNvSpPr/>
+            <p:nvPr/>
+          </p:nvSpPr>
+          <p:spPr>
+            <a:xfrm>
+              <a:off x="1298501" y="962272"/>
+              <a:ext cx="1371600" cy="1371600"/>
+            </a:xfrm>
+            <a:prstGeom prst="rect">
+              <a:avLst/>
+            </a:prstGeom>
+            <a:noFill/>
+            <a:ln w="76200">
+              <a:solidFill>
+                <a:schemeClr val="tx1"/>
+              </a:solidFill>
+            </a:ln>
+          </p:spPr>
+          <p:style>
+            <a:lnRef idx="2">
+              <a:schemeClr val="accent1">
+                <a:shade val="50000"/>
+              </a:schemeClr>
+            </a:lnRef>
+            <a:fillRef idx="1">
+              <a:schemeClr val="accent1"/>
+            </a:fillRef>
+            <a:effectRef idx="0">
+              <a:schemeClr val="accent1"/>
+            </a:effectRef>
+            <a:fontRef idx="minor">
+              <a:schemeClr val="lt1"/>
+            </a:fontRef>
+          </p:style>
+          <p:txBody>
+            <a:bodyPr rtlCol="0" anchor="ctr"/>
+            <a:lstStyle/>
+            <a:p>
+              <a:pPr algn="ctr"/>
+              <a:endParaRPr lang="en-US"/>
+            </a:p>
+          </p:txBody>
+        </p:sp>
+        <p:sp>
+          <p:nvSpPr>
+            <p:cNvPr id="363" name="Arrow: Pentagon 362">
+              <a:extLst>
+                <a:ext uri="{FF2B5EF4-FFF2-40B4-BE49-F238E27FC236}">
+                  <a16:creationId xmlns:a16="http://schemas.microsoft.com/office/drawing/2014/main" id="{C7E9948F-0BB1-566D-8EF2-3BA5D3005B15}"/>
+                </a:ext>
+              </a:extLst>
+            </p:cNvPr>
+            <p:cNvSpPr/>
+            <p:nvPr/>
+          </p:nvSpPr>
+          <p:spPr>
+            <a:xfrm rot="5400000">
+              <a:off x="1435661" y="1173775"/>
+              <a:ext cx="1097280" cy="1097280"/>
+            </a:xfrm>
+            <a:prstGeom prst="homePlate">
+              <a:avLst/>
+            </a:prstGeom>
+            <a:noFill/>
+            <a:ln w="38100" cap="flat" cmpd="sng" algn="ctr">
+              <a:solidFill>
+                <a:schemeClr val="dk1"/>
+              </a:solidFill>
+              <a:prstDash val="solid"/>
+              <a:round/>
+              <a:headEnd type="none" w="med" len="med"/>
+              <a:tailEnd type="none" w="med" len="med"/>
+            </a:ln>
+          </p:spPr>
+          <p:style>
+            <a:lnRef idx="0">
+              <a:scrgbClr r="0" g="0" b="0"/>
+            </a:lnRef>
+            <a:fillRef idx="0">
+              <a:scrgbClr r="0" g="0" b="0"/>
+            </a:fillRef>
+            <a:effectRef idx="0">
+              <a:scrgbClr r="0" g="0" b="0"/>
+            </a:effectRef>
+            <a:fontRef idx="minor">
+              <a:schemeClr val="dk1"/>
+            </a:fontRef>
+          </p:style>
+          <p:txBody>
+            <a:bodyPr rtlCol="0" anchor="ctr"/>
+            <a:lstStyle/>
+            <a:p>
+              <a:pPr algn="ctr"/>
+              <a:endParaRPr lang="en-US"/>
+            </a:p>
+          </p:txBody>
+        </p:sp>
+      </p:grpSp>
+      <p:grpSp>
+        <p:nvGrpSpPr>
+          <p:cNvPr id="364" name="Group 363">
+            <a:extLst>
+              <a:ext uri="{FF2B5EF4-FFF2-40B4-BE49-F238E27FC236}">
+                <a16:creationId xmlns:a16="http://schemas.microsoft.com/office/drawing/2014/main" id="{AEC83E13-CFEB-66EB-8317-FC342E162DC9}"/>
+              </a:ext>
+            </a:extLst>
+          </p:cNvPr>
+          <p:cNvGrpSpPr/>
+          <p:nvPr/>
+        </p:nvGrpSpPr>
+        <p:grpSpPr>
+          <a:xfrm>
+            <a:off x="7060096" y="4202711"/>
+            <a:ext cx="794436" cy="794436"/>
+            <a:chOff x="6791479" y="4800533"/>
+            <a:chExt cx="514930" cy="514930"/>
+          </a:xfrm>
+        </p:grpSpPr>
+        <p:sp>
+          <p:nvSpPr>
+            <p:cNvPr id="365" name="Oval 364">
+              <a:extLst>
+                <a:ext uri="{FF2B5EF4-FFF2-40B4-BE49-F238E27FC236}">
+                  <a16:creationId xmlns:a16="http://schemas.microsoft.com/office/drawing/2014/main" id="{30EF48A3-5B08-11AA-0084-02FDDB66A024}"/>
+                </a:ext>
+              </a:extLst>
+            </p:cNvPr>
+            <p:cNvSpPr/>
+            <p:nvPr/>
+          </p:nvSpPr>
+          <p:spPr>
+            <a:xfrm>
+              <a:off x="6885419" y="4892733"/>
+              <a:ext cx="327050" cy="327050"/>
+            </a:xfrm>
+            <a:prstGeom prst="ellipse">
+              <a:avLst/>
+            </a:prstGeom>
+            <a:noFill/>
+            <a:ln w="28575"/>
+          </p:spPr>
+          <p:style>
+            <a:lnRef idx="2">
+              <a:schemeClr val="dk1"/>
+            </a:lnRef>
+            <a:fillRef idx="1">
+              <a:schemeClr val="lt1"/>
+            </a:fillRef>
+            <a:effectRef idx="0">
+              <a:schemeClr val="dk1"/>
+            </a:effectRef>
+            <a:fontRef idx="minor">
+              <a:schemeClr val="dk1"/>
+            </a:fontRef>
+          </p:style>
+          <p:txBody>
+            <a:bodyPr rtlCol="0" anchor="ctr"/>
+            <a:lstStyle/>
+            <a:p>
+              <a:pPr algn="ctr"/>
+              <a:endParaRPr lang="en-US" dirty="0"/>
+            </a:p>
+          </p:txBody>
+        </p:sp>
+        <p:sp>
+          <p:nvSpPr>
+            <p:cNvPr id="366" name="Oval 365">
+              <a:extLst>
+                <a:ext uri="{FF2B5EF4-FFF2-40B4-BE49-F238E27FC236}">
+                  <a16:creationId xmlns:a16="http://schemas.microsoft.com/office/drawing/2014/main" id="{9ACE968B-343C-F2EC-6056-037742F8AD6C}"/>
+                </a:ext>
+              </a:extLst>
+            </p:cNvPr>
+            <p:cNvSpPr/>
+            <p:nvPr/>
+          </p:nvSpPr>
+          <p:spPr>
+            <a:xfrm>
+              <a:off x="7026609" y="5035571"/>
+              <a:ext cx="45720" cy="45720"/>
+            </a:xfrm>
+            <a:prstGeom prst="ellipse">
+              <a:avLst/>
+            </a:prstGeom>
+            <a:solidFill>
+              <a:schemeClr val="tx1"/>
+            </a:solidFill>
+            <a:ln w="3175"/>
+          </p:spPr>
+          <p:style>
+            <a:lnRef idx="2">
+              <a:schemeClr val="dk1"/>
+            </a:lnRef>
+            <a:fillRef idx="1">
+              <a:schemeClr val="lt1"/>
+            </a:fillRef>
+            <a:effectRef idx="0">
+              <a:schemeClr val="dk1"/>
+            </a:effectRef>
+            <a:fontRef idx="minor">
+              <a:schemeClr val="dk1"/>
+            </a:fontRef>
+          </p:style>
+          <p:txBody>
+            <a:bodyPr rtlCol="0" anchor="ctr"/>
+            <a:lstStyle/>
+            <a:p>
+              <a:pPr algn="ctr"/>
+              <a:endParaRPr lang="en-US"/>
+            </a:p>
+          </p:txBody>
+        </p:sp>
+        <p:sp>
+          <p:nvSpPr>
+            <p:cNvPr id="367" name="Rectangle: Rounded Corners 366">
+              <a:extLst>
+                <a:ext uri="{FF2B5EF4-FFF2-40B4-BE49-F238E27FC236}">
+                  <a16:creationId xmlns:a16="http://schemas.microsoft.com/office/drawing/2014/main" id="{F7475214-9BED-C97F-EDE6-2DBE904021E1}"/>
+                </a:ext>
+              </a:extLst>
+            </p:cNvPr>
+            <p:cNvSpPr/>
+            <p:nvPr/>
+          </p:nvSpPr>
+          <p:spPr>
+            <a:xfrm>
+              <a:off x="7038745" y="4800533"/>
+              <a:ext cx="20398" cy="184400"/>
+            </a:xfrm>
+            <a:prstGeom prst="roundRect">
+              <a:avLst/>
+            </a:prstGeom>
+          </p:spPr>
+          <p:style>
+            <a:lnRef idx="2">
+              <a:schemeClr val="dk1">
+                <a:shade val="50000"/>
+              </a:schemeClr>
+            </a:lnRef>
+            <a:fillRef idx="1">
+              <a:schemeClr val="dk1"/>
+            </a:fillRef>
+            <a:effectRef idx="0">
+              <a:schemeClr val="dk1"/>
+            </a:effectRef>
+            <a:fontRef idx="minor">
+              <a:schemeClr val="lt1"/>
+            </a:fontRef>
+          </p:style>
+          <p:txBody>
+            <a:bodyPr rtlCol="0" anchor="ctr"/>
+            <a:lstStyle/>
+            <a:p>
+              <a:pPr algn="ctr"/>
+              <a:endParaRPr lang="en-US"/>
+            </a:p>
+          </p:txBody>
+        </p:sp>
+        <p:sp>
+          <p:nvSpPr>
+            <p:cNvPr id="368" name="Rectangle: Rounded Corners 367">
+              <a:extLst>
+                <a:ext uri="{FF2B5EF4-FFF2-40B4-BE49-F238E27FC236}">
+                  <a16:creationId xmlns:a16="http://schemas.microsoft.com/office/drawing/2014/main" id="{55F32FB3-2597-26CE-2278-7EA2AE28C745}"/>
+                </a:ext>
+              </a:extLst>
+            </p:cNvPr>
+            <p:cNvSpPr/>
+            <p:nvPr/>
+          </p:nvSpPr>
+          <p:spPr>
+            <a:xfrm>
+              <a:off x="7038745" y="5131063"/>
+              <a:ext cx="20398" cy="184400"/>
+            </a:xfrm>
+            <a:prstGeom prst="roundRect">
+              <a:avLst/>
+            </a:prstGeom>
+          </p:spPr>
+          <p:style>
+            <a:lnRef idx="2">
+              <a:schemeClr val="dk1">
+                <a:shade val="50000"/>
+              </a:schemeClr>
+            </a:lnRef>
+            <a:fillRef idx="1">
+              <a:schemeClr val="dk1"/>
+            </a:fillRef>
+            <a:effectRef idx="0">
+              <a:schemeClr val="dk1"/>
+            </a:effectRef>
+            <a:fontRef idx="minor">
+              <a:schemeClr val="lt1"/>
+            </a:fontRef>
+          </p:style>
+          <p:txBody>
+            <a:bodyPr rtlCol="0" anchor="ctr"/>
+            <a:lstStyle/>
+            <a:p>
+              <a:pPr algn="ctr"/>
+              <a:endParaRPr lang="en-US"/>
+            </a:p>
+          </p:txBody>
+        </p:sp>
+        <p:grpSp>
+          <p:nvGrpSpPr>
+            <p:cNvPr id="369" name="Group 368">
+              <a:extLst>
+                <a:ext uri="{FF2B5EF4-FFF2-40B4-BE49-F238E27FC236}">
+                  <a16:creationId xmlns:a16="http://schemas.microsoft.com/office/drawing/2014/main" id="{602761F3-63EE-3F11-D7BC-1B997EDC2CDF}"/>
+                </a:ext>
+              </a:extLst>
+            </p:cNvPr>
+            <p:cNvGrpSpPr/>
+            <p:nvPr/>
+          </p:nvGrpSpPr>
+          <p:grpSpPr>
+            <a:xfrm rot="16200000">
+              <a:off x="7038745" y="4798793"/>
+              <a:ext cx="20398" cy="514930"/>
+              <a:chOff x="5815666" y="3167062"/>
+              <a:chExt cx="55844" cy="1409701"/>
+            </a:xfrm>
+          </p:grpSpPr>
+          <p:sp>
+            <p:nvSpPr>
+              <p:cNvPr id="370" name="Rectangle: Rounded Corners 369">
+                <a:extLst>
+                  <a:ext uri="{FF2B5EF4-FFF2-40B4-BE49-F238E27FC236}">
+                    <a16:creationId xmlns:a16="http://schemas.microsoft.com/office/drawing/2014/main" id="{4A801049-1FE7-4BF3-4737-0145267EB8D0}"/>
+                  </a:ext>
+                </a:extLst>
+              </p:cNvPr>
+              <p:cNvSpPr/>
+              <p:nvPr/>
+            </p:nvSpPr>
+            <p:spPr>
+              <a:xfrm>
+                <a:off x="5815666" y="3167062"/>
+                <a:ext cx="55844" cy="504825"/>
+              </a:xfrm>
+              <a:prstGeom prst="roundRect">
+                <a:avLst/>
+              </a:prstGeom>
+            </p:spPr>
+            <p:style>
+              <a:lnRef idx="2">
+                <a:schemeClr val="dk1">
+                  <a:shade val="50000"/>
+                </a:schemeClr>
+              </a:lnRef>
+              <a:fillRef idx="1">
+                <a:schemeClr val="dk1"/>
+              </a:fillRef>
+              <a:effectRef idx="0">
+                <a:schemeClr val="dk1"/>
+              </a:effectRef>
+              <a:fontRef idx="minor">
+                <a:schemeClr val="lt1"/>
+              </a:fontRef>
+            </p:style>
+            <p:txBody>
+              <a:bodyPr rtlCol="0" anchor="ctr"/>
+              <a:lstStyle/>
+              <a:p>
+                <a:pPr algn="ctr"/>
+                <a:endParaRPr lang="en-US"/>
+              </a:p>
+            </p:txBody>
+          </p:sp>
+          <p:sp>
+            <p:nvSpPr>
+              <p:cNvPr id="371" name="Rectangle: Rounded Corners 370">
+                <a:extLst>
+                  <a:ext uri="{FF2B5EF4-FFF2-40B4-BE49-F238E27FC236}">
+                    <a16:creationId xmlns:a16="http://schemas.microsoft.com/office/drawing/2014/main" id="{D2DC7F5D-B1A7-FFEA-ED36-56BFCE066180}"/>
+                  </a:ext>
+                </a:extLst>
+              </p:cNvPr>
+              <p:cNvSpPr/>
+              <p:nvPr/>
+            </p:nvSpPr>
+            <p:spPr>
+              <a:xfrm>
+                <a:off x="5815666" y="4071938"/>
+                <a:ext cx="55844" cy="504825"/>
+              </a:xfrm>
+              <a:prstGeom prst="roundRect">
+                <a:avLst/>
+              </a:prstGeom>
+            </p:spPr>
+            <p:style>
+              <a:lnRef idx="2">
+                <a:schemeClr val="dk1">
+                  <a:shade val="50000"/>
+                </a:schemeClr>
+              </a:lnRef>
+              <a:fillRef idx="1">
+                <a:schemeClr val="dk1"/>
+              </a:fillRef>
+              <a:effectRef idx="0">
+                <a:schemeClr val="dk1"/>
+              </a:effectRef>
+              <a:fontRef idx="minor">
+                <a:schemeClr val="lt1"/>
+              </a:fontRef>
+            </p:style>
+            <p:txBody>
+              <a:bodyPr rtlCol="0" anchor="ctr"/>
+              <a:lstStyle/>
+              <a:p>
+                <a:pPr algn="ctr"/>
+                <a:endParaRPr lang="en-US"/>
+              </a:p>
+            </p:txBody>
+          </p:sp>
+        </p:grpSp>
+      </p:grpSp>
+      <p:grpSp>
+        <p:nvGrpSpPr>
+          <p:cNvPr id="352" name="Group 351">
+            <a:extLst>
+              <a:ext uri="{FF2B5EF4-FFF2-40B4-BE49-F238E27FC236}">
+                <a16:creationId xmlns:a16="http://schemas.microsoft.com/office/drawing/2014/main" id="{7975261B-F0A3-A2C2-C8FD-5C0E9453C925}"/>
+              </a:ext>
+            </a:extLst>
+          </p:cNvPr>
+          <p:cNvGrpSpPr/>
+          <p:nvPr/>
+        </p:nvGrpSpPr>
+        <p:grpSpPr>
+          <a:xfrm>
+            <a:off x="8833936" y="4658676"/>
+            <a:ext cx="390985" cy="390985"/>
+            <a:chOff x="6791479" y="4800533"/>
+            <a:chExt cx="514930" cy="514930"/>
+          </a:xfrm>
+        </p:grpSpPr>
+        <p:sp>
+          <p:nvSpPr>
+            <p:cNvPr id="353" name="Oval 352">
+              <a:extLst>
+                <a:ext uri="{FF2B5EF4-FFF2-40B4-BE49-F238E27FC236}">
+                  <a16:creationId xmlns:a16="http://schemas.microsoft.com/office/drawing/2014/main" id="{9F96B78D-50C4-CF68-90D2-1E54B57DCDE0}"/>
+                </a:ext>
+              </a:extLst>
+            </p:cNvPr>
+            <p:cNvSpPr/>
+            <p:nvPr/>
+          </p:nvSpPr>
+          <p:spPr>
+            <a:xfrm>
+              <a:off x="6885419" y="4892733"/>
+              <a:ext cx="327050" cy="327050"/>
+            </a:xfrm>
+            <a:prstGeom prst="ellipse">
+              <a:avLst/>
+            </a:prstGeom>
+            <a:noFill/>
+            <a:ln w="28575"/>
+          </p:spPr>
+          <p:style>
+            <a:lnRef idx="2">
+              <a:schemeClr val="dk1"/>
+            </a:lnRef>
+            <a:fillRef idx="1">
+              <a:schemeClr val="lt1"/>
+            </a:fillRef>
+            <a:effectRef idx="0">
+              <a:schemeClr val="dk1"/>
+            </a:effectRef>
+            <a:fontRef idx="minor">
+              <a:schemeClr val="dk1"/>
+            </a:fontRef>
+          </p:style>
+          <p:txBody>
+            <a:bodyPr rtlCol="0" anchor="ctr"/>
+            <a:lstStyle/>
+            <a:p>
+              <a:pPr algn="ctr"/>
+              <a:endParaRPr lang="en-US" dirty="0"/>
+            </a:p>
+          </p:txBody>
+        </p:sp>
+        <p:sp>
+          <p:nvSpPr>
+            <p:cNvPr id="354" name="Oval 353">
+              <a:extLst>
+                <a:ext uri="{FF2B5EF4-FFF2-40B4-BE49-F238E27FC236}">
+                  <a16:creationId xmlns:a16="http://schemas.microsoft.com/office/drawing/2014/main" id="{38C76F8A-2AAA-EA1F-9CE8-48FA18DE6D68}"/>
+                </a:ext>
+              </a:extLst>
+            </p:cNvPr>
+            <p:cNvSpPr/>
+            <p:nvPr/>
+          </p:nvSpPr>
+          <p:spPr>
+            <a:xfrm>
+              <a:off x="7026609" y="5035571"/>
+              <a:ext cx="45720" cy="45720"/>
+            </a:xfrm>
+            <a:prstGeom prst="ellipse">
+              <a:avLst/>
+            </a:prstGeom>
+            <a:solidFill>
+              <a:schemeClr val="tx1"/>
+            </a:solidFill>
+            <a:ln w="3175"/>
+          </p:spPr>
+          <p:style>
+            <a:lnRef idx="2">
+              <a:schemeClr val="dk1"/>
+            </a:lnRef>
+            <a:fillRef idx="1">
+              <a:schemeClr val="lt1"/>
+            </a:fillRef>
+            <a:effectRef idx="0">
+              <a:schemeClr val="dk1"/>
+            </a:effectRef>
+            <a:fontRef idx="minor">
+              <a:schemeClr val="dk1"/>
+            </a:fontRef>
+          </p:style>
+          <p:txBody>
+            <a:bodyPr rtlCol="0" anchor="ctr"/>
+            <a:lstStyle/>
+            <a:p>
+              <a:pPr algn="ctr"/>
+              <a:endParaRPr lang="en-US"/>
+            </a:p>
+          </p:txBody>
+        </p:sp>
+        <p:sp>
+          <p:nvSpPr>
+            <p:cNvPr id="355" name="Rectangle: Rounded Corners 354">
+              <a:extLst>
+                <a:ext uri="{FF2B5EF4-FFF2-40B4-BE49-F238E27FC236}">
+                  <a16:creationId xmlns:a16="http://schemas.microsoft.com/office/drawing/2014/main" id="{C53B2A92-99B0-21DE-121E-F35844E82C88}"/>
+                </a:ext>
+              </a:extLst>
+            </p:cNvPr>
+            <p:cNvSpPr/>
+            <p:nvPr/>
+          </p:nvSpPr>
+          <p:spPr>
+            <a:xfrm>
+              <a:off x="7038745" y="4800533"/>
+              <a:ext cx="20398" cy="184400"/>
+            </a:xfrm>
+            <a:prstGeom prst="roundRect">
+              <a:avLst/>
+            </a:prstGeom>
+          </p:spPr>
+          <p:style>
+            <a:lnRef idx="2">
+              <a:schemeClr val="dk1">
+                <a:shade val="50000"/>
+              </a:schemeClr>
+            </a:lnRef>
+            <a:fillRef idx="1">
+              <a:schemeClr val="dk1"/>
+            </a:fillRef>
+            <a:effectRef idx="0">
+              <a:schemeClr val="dk1"/>
+            </a:effectRef>
+            <a:fontRef idx="minor">
+              <a:schemeClr val="lt1"/>
+            </a:fontRef>
+          </p:style>
+          <p:txBody>
+            <a:bodyPr rtlCol="0" anchor="ctr"/>
+            <a:lstStyle/>
+            <a:p>
+              <a:pPr algn="ctr"/>
+              <a:endParaRPr lang="en-US"/>
+            </a:p>
+          </p:txBody>
+        </p:sp>
+        <p:sp>
+          <p:nvSpPr>
+            <p:cNvPr id="356" name="Rectangle: Rounded Corners 355">
+              <a:extLst>
+                <a:ext uri="{FF2B5EF4-FFF2-40B4-BE49-F238E27FC236}">
+                  <a16:creationId xmlns:a16="http://schemas.microsoft.com/office/drawing/2014/main" id="{65B4F66E-E337-04A4-DAED-68C243536C04}"/>
+                </a:ext>
+              </a:extLst>
+            </p:cNvPr>
+            <p:cNvSpPr/>
+            <p:nvPr/>
+          </p:nvSpPr>
+          <p:spPr>
+            <a:xfrm>
+              <a:off x="7038745" y="5131063"/>
+              <a:ext cx="20398" cy="184400"/>
+            </a:xfrm>
+            <a:prstGeom prst="roundRect">
+              <a:avLst/>
+            </a:prstGeom>
+          </p:spPr>
+          <p:style>
+            <a:lnRef idx="2">
+              <a:schemeClr val="dk1">
+                <a:shade val="50000"/>
+              </a:schemeClr>
+            </a:lnRef>
+            <a:fillRef idx="1">
+              <a:schemeClr val="dk1"/>
+            </a:fillRef>
+            <a:effectRef idx="0">
+              <a:schemeClr val="dk1"/>
+            </a:effectRef>
+            <a:fontRef idx="minor">
+              <a:schemeClr val="lt1"/>
+            </a:fontRef>
+          </p:style>
+          <p:txBody>
+            <a:bodyPr rtlCol="0" anchor="ctr"/>
+            <a:lstStyle/>
+            <a:p>
+              <a:pPr algn="ctr"/>
+              <a:endParaRPr lang="en-US"/>
+            </a:p>
+          </p:txBody>
+        </p:sp>
+        <p:grpSp>
+          <p:nvGrpSpPr>
+            <p:cNvPr id="357" name="Group 356">
+              <a:extLst>
+                <a:ext uri="{FF2B5EF4-FFF2-40B4-BE49-F238E27FC236}">
+                  <a16:creationId xmlns:a16="http://schemas.microsoft.com/office/drawing/2014/main" id="{195A7780-E781-2BA1-860F-FCA60B830359}"/>
+                </a:ext>
+              </a:extLst>
+            </p:cNvPr>
+            <p:cNvGrpSpPr/>
+            <p:nvPr/>
+          </p:nvGrpSpPr>
+          <p:grpSpPr>
+            <a:xfrm rot="16200000">
+              <a:off x="7038745" y="4798793"/>
+              <a:ext cx="20398" cy="514930"/>
+              <a:chOff x="5815666" y="3167062"/>
+              <a:chExt cx="55844" cy="1409701"/>
+            </a:xfrm>
+          </p:grpSpPr>
+          <p:sp>
+            <p:nvSpPr>
+              <p:cNvPr id="358" name="Rectangle: Rounded Corners 357">
+                <a:extLst>
+                  <a:ext uri="{FF2B5EF4-FFF2-40B4-BE49-F238E27FC236}">
+                    <a16:creationId xmlns:a16="http://schemas.microsoft.com/office/drawing/2014/main" id="{665C9D39-F57C-7D67-285D-44E28976F8C4}"/>
+                  </a:ext>
+                </a:extLst>
+              </p:cNvPr>
+              <p:cNvSpPr/>
+              <p:nvPr/>
+            </p:nvSpPr>
+            <p:spPr>
+              <a:xfrm>
+                <a:off x="5815666" y="3167062"/>
+                <a:ext cx="55844" cy="504825"/>
+              </a:xfrm>
+              <a:prstGeom prst="roundRect">
+                <a:avLst/>
+              </a:prstGeom>
+            </p:spPr>
+            <p:style>
+              <a:lnRef idx="2">
+                <a:schemeClr val="dk1">
+                  <a:shade val="50000"/>
+                </a:schemeClr>
+              </a:lnRef>
+              <a:fillRef idx="1">
+                <a:schemeClr val="dk1"/>
+              </a:fillRef>
+              <a:effectRef idx="0">
+                <a:schemeClr val="dk1"/>
+              </a:effectRef>
+              <a:fontRef idx="minor">
+                <a:schemeClr val="lt1"/>
+              </a:fontRef>
+            </p:style>
+            <p:txBody>
+              <a:bodyPr rtlCol="0" anchor="ctr"/>
+              <a:lstStyle/>
+              <a:p>
+                <a:pPr algn="ctr"/>
+                <a:endParaRPr lang="en-US"/>
+              </a:p>
+            </p:txBody>
+          </p:sp>
+          <p:sp>
+            <p:nvSpPr>
+              <p:cNvPr id="359" name="Rectangle: Rounded Corners 358">
+                <a:extLst>
+                  <a:ext uri="{FF2B5EF4-FFF2-40B4-BE49-F238E27FC236}">
+                    <a16:creationId xmlns:a16="http://schemas.microsoft.com/office/drawing/2014/main" id="{58A05DA4-8278-E679-F59F-D271FA8CB18E}"/>
+                  </a:ext>
+                </a:extLst>
+              </p:cNvPr>
+              <p:cNvSpPr/>
+              <p:nvPr/>
+            </p:nvSpPr>
+            <p:spPr>
+              <a:xfrm>
+                <a:off x="5815666" y="4071938"/>
+                <a:ext cx="55844" cy="504825"/>
+              </a:xfrm>
+              <a:prstGeom prst="roundRect">
+                <a:avLst/>
+              </a:prstGeom>
+            </p:spPr>
+            <p:style>
+              <a:lnRef idx="2">
+                <a:schemeClr val="dk1">
+                  <a:shade val="50000"/>
+                </a:schemeClr>
+              </a:lnRef>
+              <a:fillRef idx="1">
+                <a:schemeClr val="dk1"/>
+              </a:fillRef>
+              <a:effectRef idx="0">
+                <a:schemeClr val="dk1"/>
+              </a:effectRef>
+              <a:fontRef idx="minor">
+                <a:schemeClr val="lt1"/>
+              </a:fontRef>
+            </p:style>
+            <p:txBody>
+              <a:bodyPr rtlCol="0" anchor="ctr"/>
+              <a:lstStyle/>
+              <a:p>
+                <a:pPr algn="ctr"/>
+                <a:endParaRPr lang="en-US"/>
+              </a:p>
+            </p:txBody>
+          </p:sp>
+        </p:grpSp>
+      </p:grpSp>
     </p:spTree>
     <p:extLst>
       <p:ext uri="{BB962C8B-B14F-4D97-AF65-F5344CB8AC3E}">
@@ -15648,6 +17241,51 @@
           <a:chExt cx="0" cy="0"/>
         </a:xfrm>
       </p:grpSpPr>
+      <p:pic>
+        <p:nvPicPr>
+          <p:cNvPr id="1026" name="Picture 2" descr="Sniper rifle vector Images, Stock Photos &amp; Vectors | Shutterstock">
+            <a:extLst>
+              <a:ext uri="{FF2B5EF4-FFF2-40B4-BE49-F238E27FC236}">
+                <a16:creationId xmlns:a16="http://schemas.microsoft.com/office/drawing/2014/main" id="{32B415FD-D9B9-075D-6565-2F67902D516F}"/>
+              </a:ext>
+            </a:extLst>
+          </p:cNvPr>
+          <p:cNvPicPr>
+            <a:picLocks noChangeAspect="1" noChangeArrowheads="1"/>
+          </p:cNvPicPr>
+          <p:nvPr/>
+        </p:nvPicPr>
+        <p:blipFill rotWithShape="1">
+          <a:blip r:embed="rId2">
+            <a:extLst>
+              <a:ext uri="{28A0092B-C50C-407E-A947-70E740481C1C}">
+                <a14:useLocalDpi xmlns:a14="http://schemas.microsoft.com/office/drawing/2010/main" val="0"/>
+              </a:ext>
+            </a:extLst>
+          </a:blip>
+          <a:srcRect l="3957" t="13333" r="2963" b="12143"/>
+          <a:stretch/>
+        </p:blipFill>
+        <p:spPr bwMode="auto">
+          <a:xfrm rot="19924526">
+            <a:off x="664183" y="699761"/>
+            <a:ext cx="1046633" cy="342583"/>
+          </a:xfrm>
+          <a:prstGeom prst="rect">
+            <a:avLst/>
+          </a:prstGeom>
+          <a:noFill/>
+          <a:extLst>
+            <a:ext uri="{909E8E84-426E-40DD-AFC4-6F175D3DCCD1}">
+              <a14:hiddenFill xmlns:a14="http://schemas.microsoft.com/office/drawing/2010/main">
+                <a:solidFill>
+                  <a:srgbClr val="FFFFFF"/>
+                </a:solidFill>
+              </a14:hiddenFill>
+            </a:ext>
+          </a:extLst>
+        </p:spPr>
+      </p:pic>
       <p:grpSp>
         <p:nvGrpSpPr>
           <p:cNvPr id="14" name="Group 13">
@@ -15774,706 +17412,6 @@
             </a:p>
           </p:txBody>
         </p:sp>
-      </p:grpSp>
-      <p:grpSp>
-        <p:nvGrpSpPr>
-          <p:cNvPr id="90" name="Group 89">
-            <a:extLst>
-              <a:ext uri="{FF2B5EF4-FFF2-40B4-BE49-F238E27FC236}">
-                <a16:creationId xmlns:a16="http://schemas.microsoft.com/office/drawing/2014/main" id="{90CFE9EA-7180-B24D-626B-8F0220F9CB85}"/>
-              </a:ext>
-            </a:extLst>
-          </p:cNvPr>
-          <p:cNvGrpSpPr/>
-          <p:nvPr/>
-        </p:nvGrpSpPr>
-        <p:grpSpPr>
-          <a:xfrm>
-            <a:off x="684024" y="534589"/>
-            <a:ext cx="870414" cy="803280"/>
-            <a:chOff x="2841994" y="930562"/>
-            <a:chExt cx="3529486" cy="3257264"/>
-          </a:xfrm>
-        </p:grpSpPr>
-        <p:sp>
-          <p:nvSpPr>
-            <p:cNvPr id="71" name="Oval 70">
-              <a:extLst>
-                <a:ext uri="{FF2B5EF4-FFF2-40B4-BE49-F238E27FC236}">
-                  <a16:creationId xmlns:a16="http://schemas.microsoft.com/office/drawing/2014/main" id="{D19F045B-D5CF-5692-F8ED-B3998977D532}"/>
-                </a:ext>
-              </a:extLst>
-            </p:cNvPr>
-            <p:cNvSpPr/>
-            <p:nvPr/>
-          </p:nvSpPr>
-          <p:spPr>
-            <a:xfrm>
-              <a:off x="4305300" y="930562"/>
-              <a:ext cx="590550" cy="3181350"/>
-            </a:xfrm>
-            <a:prstGeom prst="ellipse">
-              <a:avLst/>
-            </a:prstGeom>
-            <a:ln/>
-          </p:spPr>
-          <p:style>
-            <a:lnRef idx="2">
-              <a:schemeClr val="dk1">
-                <a:shade val="50000"/>
-              </a:schemeClr>
-            </a:lnRef>
-            <a:fillRef idx="1">
-              <a:schemeClr val="dk1"/>
-            </a:fillRef>
-            <a:effectRef idx="0">
-              <a:schemeClr val="dk1"/>
-            </a:effectRef>
-            <a:fontRef idx="minor">
-              <a:schemeClr val="lt1"/>
-            </a:fontRef>
-          </p:style>
-          <p:txBody>
-            <a:bodyPr rtlCol="0" anchor="ctr"/>
-            <a:lstStyle/>
-            <a:p>
-              <a:pPr algn="ctr"/>
-              <a:endParaRPr lang="en-US"/>
-            </a:p>
-          </p:txBody>
-        </p:sp>
-        <p:sp>
-          <p:nvSpPr>
-            <p:cNvPr id="72" name="Isosceles Triangle 71">
-              <a:extLst>
-                <a:ext uri="{FF2B5EF4-FFF2-40B4-BE49-F238E27FC236}">
-                  <a16:creationId xmlns:a16="http://schemas.microsoft.com/office/drawing/2014/main" id="{DC47E2F9-DD91-CC65-D2E0-0C66D2C42895}"/>
-                </a:ext>
-              </a:extLst>
-            </p:cNvPr>
-            <p:cNvSpPr/>
-            <p:nvPr/>
-          </p:nvSpPr>
-          <p:spPr>
-            <a:xfrm rot="15097803">
-              <a:off x="3816522" y="3530601"/>
-              <a:ext cx="590550" cy="723900"/>
-            </a:xfrm>
-            <a:prstGeom prst="triangle">
-              <a:avLst/>
-            </a:prstGeom>
-          </p:spPr>
-          <p:style>
-            <a:lnRef idx="2">
-              <a:schemeClr val="dk1">
-                <a:shade val="50000"/>
-              </a:schemeClr>
-            </a:lnRef>
-            <a:fillRef idx="1">
-              <a:schemeClr val="dk1"/>
-            </a:fillRef>
-            <a:effectRef idx="0">
-              <a:schemeClr val="dk1"/>
-            </a:effectRef>
-            <a:fontRef idx="minor">
-              <a:schemeClr val="lt1"/>
-            </a:fontRef>
-          </p:style>
-          <p:txBody>
-            <a:bodyPr rtlCol="0" anchor="ctr"/>
-            <a:lstStyle/>
-            <a:p>
-              <a:pPr algn="ctr"/>
-              <a:endParaRPr lang="en-US"/>
-            </a:p>
-          </p:txBody>
-        </p:sp>
-        <p:sp>
-          <p:nvSpPr>
-            <p:cNvPr id="73" name="Isosceles Triangle 72">
-              <a:extLst>
-                <a:ext uri="{FF2B5EF4-FFF2-40B4-BE49-F238E27FC236}">
-                  <a16:creationId xmlns:a16="http://schemas.microsoft.com/office/drawing/2014/main" id="{1D41C8E3-B0EC-3063-76E9-F9FC03818F39}"/>
-                </a:ext>
-              </a:extLst>
-            </p:cNvPr>
-            <p:cNvSpPr/>
-            <p:nvPr/>
-          </p:nvSpPr>
-          <p:spPr>
-            <a:xfrm rot="6456753">
-              <a:off x="4789963" y="3527597"/>
-              <a:ext cx="590550" cy="723900"/>
-            </a:xfrm>
-            <a:prstGeom prst="triangle">
-              <a:avLst/>
-            </a:prstGeom>
-          </p:spPr>
-          <p:style>
-            <a:lnRef idx="2">
-              <a:schemeClr val="dk1">
-                <a:shade val="50000"/>
-              </a:schemeClr>
-            </a:lnRef>
-            <a:fillRef idx="1">
-              <a:schemeClr val="dk1"/>
-            </a:fillRef>
-            <a:effectRef idx="0">
-              <a:schemeClr val="dk1"/>
-            </a:effectRef>
-            <a:fontRef idx="minor">
-              <a:schemeClr val="lt1"/>
-            </a:fontRef>
-          </p:style>
-          <p:txBody>
-            <a:bodyPr rtlCol="0" anchor="ctr"/>
-            <a:lstStyle/>
-            <a:p>
-              <a:pPr algn="ctr"/>
-              <a:endParaRPr lang="en-US"/>
-            </a:p>
-          </p:txBody>
-        </p:sp>
-        <p:grpSp>
-          <p:nvGrpSpPr>
-            <p:cNvPr id="83" name="Group 82">
-              <a:extLst>
-                <a:ext uri="{FF2B5EF4-FFF2-40B4-BE49-F238E27FC236}">
-                  <a16:creationId xmlns:a16="http://schemas.microsoft.com/office/drawing/2014/main" id="{B46AD532-33DF-3A32-6AF3-10E363352270}"/>
-                </a:ext>
-              </a:extLst>
-            </p:cNvPr>
-            <p:cNvGrpSpPr/>
-            <p:nvPr/>
-          </p:nvGrpSpPr>
-          <p:grpSpPr>
-            <a:xfrm>
-              <a:off x="2841994" y="1514299"/>
-              <a:ext cx="1562063" cy="1372483"/>
-              <a:chOff x="2841994" y="1514299"/>
-              <a:chExt cx="1562063" cy="1372483"/>
-            </a:xfrm>
-          </p:grpSpPr>
-          <p:sp>
-            <p:nvSpPr>
-              <p:cNvPr id="81" name="Rectangle 80">
-                <a:extLst>
-                  <a:ext uri="{FF2B5EF4-FFF2-40B4-BE49-F238E27FC236}">
-                    <a16:creationId xmlns:a16="http://schemas.microsoft.com/office/drawing/2014/main" id="{A576555C-ECED-A69E-2AA5-9C9C040766A6}"/>
-                  </a:ext>
-                </a:extLst>
-              </p:cNvPr>
-              <p:cNvSpPr/>
-              <p:nvPr/>
-            </p:nvSpPr>
-            <p:spPr>
-              <a:xfrm>
-                <a:off x="3453258" y="1667895"/>
-                <a:ext cx="241300" cy="1016415"/>
-              </a:xfrm>
-              <a:prstGeom prst="rect">
-                <a:avLst/>
-              </a:prstGeom>
-            </p:spPr>
-            <p:style>
-              <a:lnRef idx="2">
-                <a:schemeClr val="dk1"/>
-              </a:lnRef>
-              <a:fillRef idx="1">
-                <a:schemeClr val="lt1"/>
-              </a:fillRef>
-              <a:effectRef idx="0">
-                <a:schemeClr val="dk1"/>
-              </a:effectRef>
-              <a:fontRef idx="minor">
-                <a:schemeClr val="dk1"/>
-              </a:fontRef>
-            </p:style>
-            <p:txBody>
-              <a:bodyPr rtlCol="0" anchor="ctr"/>
-              <a:lstStyle/>
-              <a:p>
-                <a:pPr algn="ctr"/>
-                <a:endParaRPr lang="en-US"/>
-              </a:p>
-            </p:txBody>
-          </p:sp>
-          <p:sp>
-            <p:nvSpPr>
-              <p:cNvPr id="82" name="Rectangle 81">
-                <a:extLst>
-                  <a:ext uri="{FF2B5EF4-FFF2-40B4-BE49-F238E27FC236}">
-                    <a16:creationId xmlns:a16="http://schemas.microsoft.com/office/drawing/2014/main" id="{0F1A57D8-5827-B6EC-A49E-990EE25B294A}"/>
-                  </a:ext>
-                </a:extLst>
-              </p:cNvPr>
-              <p:cNvSpPr/>
-              <p:nvPr/>
-            </p:nvSpPr>
-            <p:spPr>
-              <a:xfrm>
-                <a:off x="3879279" y="1514299"/>
-                <a:ext cx="241300" cy="1016415"/>
-              </a:xfrm>
-              <a:prstGeom prst="rect">
-                <a:avLst/>
-              </a:prstGeom>
-            </p:spPr>
-            <p:style>
-              <a:lnRef idx="2">
-                <a:schemeClr val="dk1"/>
-              </a:lnRef>
-              <a:fillRef idx="1">
-                <a:schemeClr val="lt1"/>
-              </a:fillRef>
-              <a:effectRef idx="0">
-                <a:schemeClr val="dk1"/>
-              </a:effectRef>
-              <a:fontRef idx="minor">
-                <a:schemeClr val="dk1"/>
-              </a:fontRef>
-            </p:style>
-            <p:txBody>
-              <a:bodyPr rtlCol="0" anchor="ctr"/>
-              <a:lstStyle/>
-              <a:p>
-                <a:pPr algn="ctr"/>
-                <a:endParaRPr lang="en-US"/>
-              </a:p>
-            </p:txBody>
-          </p:sp>
-          <p:sp>
-            <p:nvSpPr>
-              <p:cNvPr id="74" name="Trapezoid 73">
-                <a:extLst>
-                  <a:ext uri="{FF2B5EF4-FFF2-40B4-BE49-F238E27FC236}">
-                    <a16:creationId xmlns:a16="http://schemas.microsoft.com/office/drawing/2014/main" id="{30420B43-5CDB-E385-B3CA-3E77CCA73958}"/>
-                  </a:ext>
-                </a:extLst>
-              </p:cNvPr>
-              <p:cNvSpPr/>
-              <p:nvPr/>
-            </p:nvSpPr>
-            <p:spPr>
-              <a:xfrm rot="15639411">
-                <a:off x="3588611" y="1898339"/>
-                <a:ext cx="806450" cy="824442"/>
-              </a:xfrm>
-              <a:prstGeom prst="trapezoid">
-                <a:avLst>
-                  <a:gd name="adj" fmla="val 15303"/>
-                </a:avLst>
-              </a:prstGeom>
-            </p:spPr>
-            <p:style>
-              <a:lnRef idx="2">
-                <a:schemeClr val="dk1">
-                  <a:shade val="50000"/>
-                </a:schemeClr>
-              </a:lnRef>
-              <a:fillRef idx="1">
-                <a:schemeClr val="dk1"/>
-              </a:fillRef>
-              <a:effectRef idx="0">
-                <a:schemeClr val="dk1"/>
-              </a:effectRef>
-              <a:fontRef idx="minor">
-                <a:schemeClr val="lt1"/>
-              </a:fontRef>
-            </p:style>
-            <p:txBody>
-              <a:bodyPr rtlCol="0" anchor="ctr"/>
-              <a:lstStyle/>
-              <a:p>
-                <a:pPr algn="ctr"/>
-                <a:endParaRPr lang="en-US"/>
-              </a:p>
-            </p:txBody>
-          </p:sp>
-          <p:sp>
-            <p:nvSpPr>
-              <p:cNvPr id="77" name="Isosceles Triangle 76">
-                <a:extLst>
-                  <a:ext uri="{FF2B5EF4-FFF2-40B4-BE49-F238E27FC236}">
-                    <a16:creationId xmlns:a16="http://schemas.microsoft.com/office/drawing/2014/main" id="{7601BBF1-31EB-4668-75E9-E8E7786A318A}"/>
-                  </a:ext>
-                </a:extLst>
-              </p:cNvPr>
-              <p:cNvSpPr/>
-              <p:nvPr/>
-            </p:nvSpPr>
-            <p:spPr>
-              <a:xfrm rot="14248003">
-                <a:off x="2851235" y="2409712"/>
-                <a:ext cx="388815" cy="407297"/>
-              </a:xfrm>
-              <a:prstGeom prst="triangle">
-                <a:avLst/>
-              </a:prstGeom>
-            </p:spPr>
-            <p:style>
-              <a:lnRef idx="2">
-                <a:schemeClr val="dk1">
-                  <a:shade val="50000"/>
-                </a:schemeClr>
-              </a:lnRef>
-              <a:fillRef idx="1">
-                <a:schemeClr val="dk1"/>
-              </a:fillRef>
-              <a:effectRef idx="0">
-                <a:schemeClr val="dk1"/>
-              </a:effectRef>
-              <a:fontRef idx="minor">
-                <a:schemeClr val="lt1"/>
-              </a:fontRef>
-            </p:style>
-            <p:txBody>
-              <a:bodyPr rtlCol="0" anchor="ctr"/>
-              <a:lstStyle/>
-              <a:p>
-                <a:pPr algn="ctr"/>
-                <a:endParaRPr lang="en-US"/>
-              </a:p>
-            </p:txBody>
-          </p:sp>
-          <p:sp>
-            <p:nvSpPr>
-              <p:cNvPr id="76" name="Oval 75">
-                <a:extLst>
-                  <a:ext uri="{FF2B5EF4-FFF2-40B4-BE49-F238E27FC236}">
-                    <a16:creationId xmlns:a16="http://schemas.microsoft.com/office/drawing/2014/main" id="{5D9EAB30-49D5-555A-31D5-8D3193FB1DE0}"/>
-                  </a:ext>
-                </a:extLst>
-              </p:cNvPr>
-              <p:cNvSpPr/>
-              <p:nvPr/>
-            </p:nvSpPr>
-            <p:spPr>
-              <a:xfrm>
-                <a:off x="3087822" y="1907372"/>
-                <a:ext cx="979410" cy="979410"/>
-              </a:xfrm>
-              <a:prstGeom prst="ellipse">
-                <a:avLst/>
-              </a:prstGeom>
-              <a:ln w="19050"/>
-            </p:spPr>
-            <p:style>
-              <a:lnRef idx="2">
-                <a:schemeClr val="dk1"/>
-              </a:lnRef>
-              <a:fillRef idx="1">
-                <a:schemeClr val="lt1"/>
-              </a:fillRef>
-              <a:effectRef idx="0">
-                <a:schemeClr val="dk1"/>
-              </a:effectRef>
-              <a:fontRef idx="minor">
-                <a:schemeClr val="dk1"/>
-              </a:fontRef>
-            </p:style>
-            <p:txBody>
-              <a:bodyPr rtlCol="0" anchor="ctr"/>
-              <a:lstStyle/>
-              <a:p>
-                <a:pPr algn="ctr"/>
-                <a:endParaRPr lang="en-US"/>
-              </a:p>
-            </p:txBody>
-          </p:sp>
-        </p:grpSp>
-        <p:sp>
-          <p:nvSpPr>
-            <p:cNvPr id="79" name="Trapezoid 78">
-              <a:extLst>
-                <a:ext uri="{FF2B5EF4-FFF2-40B4-BE49-F238E27FC236}">
-                  <a16:creationId xmlns:a16="http://schemas.microsoft.com/office/drawing/2014/main" id="{CC2BF88B-AB8E-C872-6384-A5DC1F6008FA}"/>
-                </a:ext>
-              </a:extLst>
-            </p:cNvPr>
-            <p:cNvSpPr/>
-            <p:nvPr/>
-          </p:nvSpPr>
-          <p:spPr>
-            <a:xfrm>
-              <a:off x="4391733" y="1120756"/>
-              <a:ext cx="417684" cy="428229"/>
-            </a:xfrm>
-            <a:prstGeom prst="trapezoid">
-              <a:avLst/>
-            </a:prstGeom>
-          </p:spPr>
-          <p:style>
-            <a:lnRef idx="2">
-              <a:schemeClr val="dk1"/>
-            </a:lnRef>
-            <a:fillRef idx="1">
-              <a:schemeClr val="lt1"/>
-            </a:fillRef>
-            <a:effectRef idx="0">
-              <a:schemeClr val="dk1"/>
-            </a:effectRef>
-            <a:fontRef idx="minor">
-              <a:schemeClr val="dk1"/>
-            </a:fontRef>
-          </p:style>
-          <p:txBody>
-            <a:bodyPr rtlCol="0" anchor="ctr"/>
-            <a:lstStyle/>
-            <a:p>
-              <a:pPr algn="ctr"/>
-              <a:endParaRPr lang="en-US"/>
-            </a:p>
-          </p:txBody>
-        </p:sp>
-        <p:grpSp>
-          <p:nvGrpSpPr>
-            <p:cNvPr id="84" name="Group 83">
-              <a:extLst>
-                <a:ext uri="{FF2B5EF4-FFF2-40B4-BE49-F238E27FC236}">
-                  <a16:creationId xmlns:a16="http://schemas.microsoft.com/office/drawing/2014/main" id="{54471559-76A8-0495-2483-E454885D680C}"/>
-                </a:ext>
-              </a:extLst>
-            </p:cNvPr>
-            <p:cNvGrpSpPr/>
-            <p:nvPr/>
-          </p:nvGrpSpPr>
-          <p:grpSpPr>
-            <a:xfrm flipH="1">
-              <a:off x="4809417" y="1514012"/>
-              <a:ext cx="1562063" cy="1372483"/>
-              <a:chOff x="2841994" y="1514299"/>
-              <a:chExt cx="1562063" cy="1372483"/>
-            </a:xfrm>
-          </p:grpSpPr>
-          <p:sp>
-            <p:nvSpPr>
-              <p:cNvPr id="85" name="Rectangle 84">
-                <a:extLst>
-                  <a:ext uri="{FF2B5EF4-FFF2-40B4-BE49-F238E27FC236}">
-                    <a16:creationId xmlns:a16="http://schemas.microsoft.com/office/drawing/2014/main" id="{765EE275-187C-9030-20D4-CAFEB7BF5373}"/>
-                  </a:ext>
-                </a:extLst>
-              </p:cNvPr>
-              <p:cNvSpPr/>
-              <p:nvPr/>
-            </p:nvSpPr>
-            <p:spPr>
-              <a:xfrm>
-                <a:off x="3453258" y="1667895"/>
-                <a:ext cx="241300" cy="1016415"/>
-              </a:xfrm>
-              <a:prstGeom prst="rect">
-                <a:avLst/>
-              </a:prstGeom>
-            </p:spPr>
-            <p:style>
-              <a:lnRef idx="2">
-                <a:schemeClr val="dk1"/>
-              </a:lnRef>
-              <a:fillRef idx="1">
-                <a:schemeClr val="lt1"/>
-              </a:fillRef>
-              <a:effectRef idx="0">
-                <a:schemeClr val="dk1"/>
-              </a:effectRef>
-              <a:fontRef idx="minor">
-                <a:schemeClr val="dk1"/>
-              </a:fontRef>
-            </p:style>
-            <p:txBody>
-              <a:bodyPr rtlCol="0" anchor="ctr"/>
-              <a:lstStyle/>
-              <a:p>
-                <a:pPr algn="ctr"/>
-                <a:endParaRPr lang="en-US"/>
-              </a:p>
-            </p:txBody>
-          </p:sp>
-          <p:sp>
-            <p:nvSpPr>
-              <p:cNvPr id="86" name="Rectangle 85">
-                <a:extLst>
-                  <a:ext uri="{FF2B5EF4-FFF2-40B4-BE49-F238E27FC236}">
-                    <a16:creationId xmlns:a16="http://schemas.microsoft.com/office/drawing/2014/main" id="{EA0449D4-6BE1-A022-D55A-CB15F248CF42}"/>
-                  </a:ext>
-                </a:extLst>
-              </p:cNvPr>
-              <p:cNvSpPr/>
-              <p:nvPr/>
-            </p:nvSpPr>
-            <p:spPr>
-              <a:xfrm>
-                <a:off x="3879279" y="1514299"/>
-                <a:ext cx="241300" cy="1016415"/>
-              </a:xfrm>
-              <a:prstGeom prst="rect">
-                <a:avLst/>
-              </a:prstGeom>
-            </p:spPr>
-            <p:style>
-              <a:lnRef idx="2">
-                <a:schemeClr val="dk1"/>
-              </a:lnRef>
-              <a:fillRef idx="1">
-                <a:schemeClr val="lt1"/>
-              </a:fillRef>
-              <a:effectRef idx="0">
-                <a:schemeClr val="dk1"/>
-              </a:effectRef>
-              <a:fontRef idx="minor">
-                <a:schemeClr val="dk1"/>
-              </a:fontRef>
-            </p:style>
-            <p:txBody>
-              <a:bodyPr rtlCol="0" anchor="ctr"/>
-              <a:lstStyle/>
-              <a:p>
-                <a:pPr algn="ctr"/>
-                <a:endParaRPr lang="en-US"/>
-              </a:p>
-            </p:txBody>
-          </p:sp>
-          <p:sp>
-            <p:nvSpPr>
-              <p:cNvPr id="87" name="Trapezoid 86">
-                <a:extLst>
-                  <a:ext uri="{FF2B5EF4-FFF2-40B4-BE49-F238E27FC236}">
-                    <a16:creationId xmlns:a16="http://schemas.microsoft.com/office/drawing/2014/main" id="{AD5C3D9B-3DC5-9188-F181-FF8ABE1F6E44}"/>
-                  </a:ext>
-                </a:extLst>
-              </p:cNvPr>
-              <p:cNvSpPr/>
-              <p:nvPr/>
-            </p:nvSpPr>
-            <p:spPr>
-              <a:xfrm rot="15639411">
-                <a:off x="3588611" y="1898339"/>
-                <a:ext cx="806450" cy="824442"/>
-              </a:xfrm>
-              <a:prstGeom prst="trapezoid">
-                <a:avLst>
-                  <a:gd name="adj" fmla="val 15303"/>
-                </a:avLst>
-              </a:prstGeom>
-            </p:spPr>
-            <p:style>
-              <a:lnRef idx="2">
-                <a:schemeClr val="dk1">
-                  <a:shade val="50000"/>
-                </a:schemeClr>
-              </a:lnRef>
-              <a:fillRef idx="1">
-                <a:schemeClr val="dk1"/>
-              </a:fillRef>
-              <a:effectRef idx="0">
-                <a:schemeClr val="dk1"/>
-              </a:effectRef>
-              <a:fontRef idx="minor">
-                <a:schemeClr val="lt1"/>
-              </a:fontRef>
-            </p:style>
-            <p:txBody>
-              <a:bodyPr rtlCol="0" anchor="ctr"/>
-              <a:lstStyle/>
-              <a:p>
-                <a:pPr algn="ctr"/>
-                <a:endParaRPr lang="en-US"/>
-              </a:p>
-            </p:txBody>
-          </p:sp>
-          <p:sp>
-            <p:nvSpPr>
-              <p:cNvPr id="88" name="Isosceles Triangle 87">
-                <a:extLst>
-                  <a:ext uri="{FF2B5EF4-FFF2-40B4-BE49-F238E27FC236}">
-                    <a16:creationId xmlns:a16="http://schemas.microsoft.com/office/drawing/2014/main" id="{E1A7F761-3124-8F6C-95DA-D2FFD02DDCA1}"/>
-                  </a:ext>
-                </a:extLst>
-              </p:cNvPr>
-              <p:cNvSpPr/>
-              <p:nvPr/>
-            </p:nvSpPr>
-            <p:spPr>
-              <a:xfrm rot="14248003">
-                <a:off x="2851235" y="2409712"/>
-                <a:ext cx="388815" cy="407297"/>
-              </a:xfrm>
-              <a:prstGeom prst="triangle">
-                <a:avLst/>
-              </a:prstGeom>
-            </p:spPr>
-            <p:style>
-              <a:lnRef idx="2">
-                <a:schemeClr val="dk1">
-                  <a:shade val="50000"/>
-                </a:schemeClr>
-              </a:lnRef>
-              <a:fillRef idx="1">
-                <a:schemeClr val="dk1"/>
-              </a:fillRef>
-              <a:effectRef idx="0">
-                <a:schemeClr val="dk1"/>
-              </a:effectRef>
-              <a:fontRef idx="minor">
-                <a:schemeClr val="lt1"/>
-              </a:fontRef>
-            </p:style>
-            <p:txBody>
-              <a:bodyPr rtlCol="0" anchor="ctr"/>
-              <a:lstStyle/>
-              <a:p>
-                <a:pPr algn="ctr"/>
-                <a:endParaRPr lang="en-US"/>
-              </a:p>
-            </p:txBody>
-          </p:sp>
-          <p:sp>
-            <p:nvSpPr>
-              <p:cNvPr id="89" name="Oval 88">
-                <a:extLst>
-                  <a:ext uri="{FF2B5EF4-FFF2-40B4-BE49-F238E27FC236}">
-                    <a16:creationId xmlns:a16="http://schemas.microsoft.com/office/drawing/2014/main" id="{E48ABA8F-3BB8-3304-80D4-82564456A528}"/>
-                  </a:ext>
-                </a:extLst>
-              </p:cNvPr>
-              <p:cNvSpPr/>
-              <p:nvPr/>
-            </p:nvSpPr>
-            <p:spPr>
-              <a:xfrm>
-                <a:off x="3087822" y="1907372"/>
-                <a:ext cx="979410" cy="979410"/>
-              </a:xfrm>
-              <a:prstGeom prst="ellipse">
-                <a:avLst/>
-              </a:prstGeom>
-              <a:ln w="19050"/>
-            </p:spPr>
-            <p:style>
-              <a:lnRef idx="2">
-                <a:schemeClr val="dk1"/>
-              </a:lnRef>
-              <a:fillRef idx="1">
-                <a:schemeClr val="lt1"/>
-              </a:fillRef>
-              <a:effectRef idx="0">
-                <a:schemeClr val="dk1"/>
-              </a:effectRef>
-              <a:fontRef idx="minor">
-                <a:schemeClr val="dk1"/>
-              </a:fontRef>
-            </p:style>
-            <p:txBody>
-              <a:bodyPr rtlCol="0" anchor="ctr"/>
-              <a:lstStyle/>
-              <a:p>
-                <a:pPr algn="ctr"/>
-                <a:endParaRPr lang="en-US"/>
-              </a:p>
-            </p:txBody>
-          </p:sp>
-        </p:grpSp>
       </p:grpSp>
     </p:spTree>
     <p:extLst>

--- a/image process/drawings sifi.pptx
+++ b/image process/drawings sifi.pptx
@@ -200,7 +200,7 @@
           <a:p>
             <a:fld id="{7700C406-2328-4788-AE79-437B6607AD22}" type="datetimeFigureOut">
               <a:rPr lang="en-US" smtClean="0"/>
-              <a:t>6/2/2022</a:t>
+              <a:t>6/3/2022</a:t>
             </a:fld>
             <a:endParaRPr lang="en-US"/>
           </a:p>
@@ -614,7 +614,7 @@
           <a:p>
             <a:fld id="{9EC8CD53-0620-48F2-A3BB-2B10BDA60E52}" type="datetimeFigureOut">
               <a:rPr lang="en-US" smtClean="0"/>
-              <a:t>6/2/2022</a:t>
+              <a:t>6/3/2022</a:t>
             </a:fld>
             <a:endParaRPr lang="en-US"/>
           </a:p>
@@ -812,7 +812,7 @@
           <a:p>
             <a:fld id="{9EC8CD53-0620-48F2-A3BB-2B10BDA60E52}" type="datetimeFigureOut">
               <a:rPr lang="en-US" smtClean="0"/>
-              <a:t>6/2/2022</a:t>
+              <a:t>6/3/2022</a:t>
             </a:fld>
             <a:endParaRPr lang="en-US"/>
           </a:p>
@@ -1020,7 +1020,7 @@
           <a:p>
             <a:fld id="{9EC8CD53-0620-48F2-A3BB-2B10BDA60E52}" type="datetimeFigureOut">
               <a:rPr lang="en-US" smtClean="0"/>
-              <a:t>6/2/2022</a:t>
+              <a:t>6/3/2022</a:t>
             </a:fld>
             <a:endParaRPr lang="en-US"/>
           </a:p>
@@ -1218,7 +1218,7 @@
           <a:p>
             <a:fld id="{9EC8CD53-0620-48F2-A3BB-2B10BDA60E52}" type="datetimeFigureOut">
               <a:rPr lang="en-US" smtClean="0"/>
-              <a:t>6/2/2022</a:t>
+              <a:t>6/3/2022</a:t>
             </a:fld>
             <a:endParaRPr lang="en-US"/>
           </a:p>
@@ -1493,7 +1493,7 @@
           <a:p>
             <a:fld id="{9EC8CD53-0620-48F2-A3BB-2B10BDA60E52}" type="datetimeFigureOut">
               <a:rPr lang="en-US" smtClean="0"/>
-              <a:t>6/2/2022</a:t>
+              <a:t>6/3/2022</a:t>
             </a:fld>
             <a:endParaRPr lang="en-US"/>
           </a:p>
@@ -1758,7 +1758,7 @@
           <a:p>
             <a:fld id="{9EC8CD53-0620-48F2-A3BB-2B10BDA60E52}" type="datetimeFigureOut">
               <a:rPr lang="en-US" smtClean="0"/>
-              <a:t>6/2/2022</a:t>
+              <a:t>6/3/2022</a:t>
             </a:fld>
             <a:endParaRPr lang="en-US"/>
           </a:p>
@@ -2170,7 +2170,7 @@
           <a:p>
             <a:fld id="{9EC8CD53-0620-48F2-A3BB-2B10BDA60E52}" type="datetimeFigureOut">
               <a:rPr lang="en-US" smtClean="0"/>
-              <a:t>6/2/2022</a:t>
+              <a:t>6/3/2022</a:t>
             </a:fld>
             <a:endParaRPr lang="en-US"/>
           </a:p>
@@ -2311,7 +2311,7 @@
           <a:p>
             <a:fld id="{9EC8CD53-0620-48F2-A3BB-2B10BDA60E52}" type="datetimeFigureOut">
               <a:rPr lang="en-US" smtClean="0"/>
-              <a:t>6/2/2022</a:t>
+              <a:t>6/3/2022</a:t>
             </a:fld>
             <a:endParaRPr lang="en-US"/>
           </a:p>
@@ -2424,7 +2424,7 @@
           <a:p>
             <a:fld id="{9EC8CD53-0620-48F2-A3BB-2B10BDA60E52}" type="datetimeFigureOut">
               <a:rPr lang="en-US" smtClean="0"/>
-              <a:t>6/2/2022</a:t>
+              <a:t>6/3/2022</a:t>
             </a:fld>
             <a:endParaRPr lang="en-US"/>
           </a:p>
@@ -2735,7 +2735,7 @@
           <a:p>
             <a:fld id="{9EC8CD53-0620-48F2-A3BB-2B10BDA60E52}" type="datetimeFigureOut">
               <a:rPr lang="en-US" smtClean="0"/>
-              <a:t>6/2/2022</a:t>
+              <a:t>6/3/2022</a:t>
             </a:fld>
             <a:endParaRPr lang="en-US"/>
           </a:p>
@@ -3023,7 +3023,7 @@
           <a:p>
             <a:fld id="{9EC8CD53-0620-48F2-A3BB-2B10BDA60E52}" type="datetimeFigureOut">
               <a:rPr lang="en-US" smtClean="0"/>
-              <a:t>6/2/2022</a:t>
+              <a:t>6/3/2022</a:t>
             </a:fld>
             <a:endParaRPr lang="en-US"/>
           </a:p>
@@ -3264,7 +3264,7 @@
           <a:p>
             <a:fld id="{9EC8CD53-0620-48F2-A3BB-2B10BDA60E52}" type="datetimeFigureOut">
               <a:rPr lang="en-US" smtClean="0"/>
-              <a:t>6/2/2022</a:t>
+              <a:t>6/3/2022</a:t>
             </a:fld>
             <a:endParaRPr lang="en-US"/>
           </a:p>
@@ -17241,51 +17241,6 @@
           <a:chExt cx="0" cy="0"/>
         </a:xfrm>
       </p:grpSpPr>
-      <p:pic>
-        <p:nvPicPr>
-          <p:cNvPr id="1026" name="Picture 2" descr="Sniper rifle vector Images, Stock Photos &amp; Vectors | Shutterstock">
-            <a:extLst>
-              <a:ext uri="{FF2B5EF4-FFF2-40B4-BE49-F238E27FC236}">
-                <a16:creationId xmlns:a16="http://schemas.microsoft.com/office/drawing/2014/main" id="{32B415FD-D9B9-075D-6565-2F67902D516F}"/>
-              </a:ext>
-            </a:extLst>
-          </p:cNvPr>
-          <p:cNvPicPr>
-            <a:picLocks noChangeAspect="1" noChangeArrowheads="1"/>
-          </p:cNvPicPr>
-          <p:nvPr/>
-        </p:nvPicPr>
-        <p:blipFill rotWithShape="1">
-          <a:blip r:embed="rId2">
-            <a:extLst>
-              <a:ext uri="{28A0092B-C50C-407E-A947-70E740481C1C}">
-                <a14:useLocalDpi xmlns:a14="http://schemas.microsoft.com/office/drawing/2010/main" val="0"/>
-              </a:ext>
-            </a:extLst>
-          </a:blip>
-          <a:srcRect l="3957" t="13333" r="2963" b="12143"/>
-          <a:stretch/>
-        </p:blipFill>
-        <p:spPr bwMode="auto">
-          <a:xfrm rot="19924526">
-            <a:off x="664183" y="699761"/>
-            <a:ext cx="1046633" cy="342583"/>
-          </a:xfrm>
-          <a:prstGeom prst="rect">
-            <a:avLst/>
-          </a:prstGeom>
-          <a:noFill/>
-          <a:extLst>
-            <a:ext uri="{909E8E84-426E-40DD-AFC4-6F175D3DCCD1}">
-              <a14:hiddenFill xmlns:a14="http://schemas.microsoft.com/office/drawing/2010/main">
-                <a:solidFill>
-                  <a:srgbClr val="FFFFFF"/>
-                </a:solidFill>
-              </a14:hiddenFill>
-            </a:ext>
-          </a:extLst>
-        </p:spPr>
-      </p:pic>
       <p:grpSp>
         <p:nvGrpSpPr>
           <p:cNvPr id="14" name="Group 13">
@@ -17401,6 +17356,573 @@
             </a:effectRef>
             <a:fontRef idx="minor">
               <a:schemeClr val="dk1"/>
+            </a:fontRef>
+          </p:style>
+          <p:txBody>
+            <a:bodyPr rtlCol="0" anchor="ctr"/>
+            <a:lstStyle/>
+            <a:p>
+              <a:pPr algn="ctr"/>
+              <a:endParaRPr lang="en-US"/>
+            </a:p>
+          </p:txBody>
+        </p:sp>
+      </p:grpSp>
+      <p:grpSp>
+        <p:nvGrpSpPr>
+          <p:cNvPr id="8" name="Group 7">
+            <a:extLst>
+              <a:ext uri="{FF2B5EF4-FFF2-40B4-BE49-F238E27FC236}">
+                <a16:creationId xmlns:a16="http://schemas.microsoft.com/office/drawing/2014/main" id="{21825E4F-8AC5-9352-030D-A0FC544E2896}"/>
+              </a:ext>
+            </a:extLst>
+          </p:cNvPr>
+          <p:cNvGrpSpPr/>
+          <p:nvPr/>
+        </p:nvGrpSpPr>
+        <p:grpSpPr>
+          <a:xfrm>
+            <a:off x="884599" y="574669"/>
+            <a:ext cx="620351" cy="783524"/>
+            <a:chOff x="2752725" y="1271400"/>
+            <a:chExt cx="1871663" cy="2363975"/>
+          </a:xfrm>
+        </p:grpSpPr>
+        <p:sp>
+          <p:nvSpPr>
+            <p:cNvPr id="2" name="Trapezoid 1">
+              <a:extLst>
+                <a:ext uri="{FF2B5EF4-FFF2-40B4-BE49-F238E27FC236}">
+                  <a16:creationId xmlns:a16="http://schemas.microsoft.com/office/drawing/2014/main" id="{8C470383-045C-5411-C2D2-BC7BABE266C3}"/>
+                </a:ext>
+              </a:extLst>
+            </p:cNvPr>
+            <p:cNvSpPr/>
+            <p:nvPr/>
+          </p:nvSpPr>
+          <p:spPr>
+            <a:xfrm rot="16200000">
+              <a:off x="2319338" y="2703909"/>
+              <a:ext cx="1174750" cy="307975"/>
+            </a:xfrm>
+            <a:prstGeom prst="trapezoid">
+              <a:avLst/>
+            </a:prstGeom>
+          </p:spPr>
+          <p:style>
+            <a:lnRef idx="2">
+              <a:schemeClr val="dk1">
+                <a:shade val="50000"/>
+              </a:schemeClr>
+            </a:lnRef>
+            <a:fillRef idx="1">
+              <a:schemeClr val="dk1"/>
+            </a:fillRef>
+            <a:effectRef idx="0">
+              <a:schemeClr val="dk1"/>
+            </a:effectRef>
+            <a:fontRef idx="minor">
+              <a:schemeClr val="lt1"/>
+            </a:fontRef>
+          </p:style>
+          <p:txBody>
+            <a:bodyPr rtlCol="0" anchor="ctr"/>
+            <a:lstStyle/>
+            <a:p>
+              <a:pPr algn="ctr"/>
+              <a:endParaRPr lang="en-US"/>
+            </a:p>
+          </p:txBody>
+        </p:sp>
+        <p:sp>
+          <p:nvSpPr>
+            <p:cNvPr id="7" name="Trapezoid 6">
+              <a:extLst>
+                <a:ext uri="{FF2B5EF4-FFF2-40B4-BE49-F238E27FC236}">
+                  <a16:creationId xmlns:a16="http://schemas.microsoft.com/office/drawing/2014/main" id="{814BED74-62B9-52F3-28FB-B1E64ED96C57}"/>
+                </a:ext>
+              </a:extLst>
+            </p:cNvPr>
+            <p:cNvSpPr/>
+            <p:nvPr/>
+          </p:nvSpPr>
+          <p:spPr>
+            <a:xfrm rot="5400000">
+              <a:off x="3405188" y="2703909"/>
+              <a:ext cx="1174750" cy="307975"/>
+            </a:xfrm>
+            <a:prstGeom prst="trapezoid">
+              <a:avLst/>
+            </a:prstGeom>
+          </p:spPr>
+          <p:style>
+            <a:lnRef idx="2">
+              <a:schemeClr val="dk1">
+                <a:shade val="50000"/>
+              </a:schemeClr>
+            </a:lnRef>
+            <a:fillRef idx="1">
+              <a:schemeClr val="dk1"/>
+            </a:fillRef>
+            <a:effectRef idx="0">
+              <a:schemeClr val="dk1"/>
+            </a:effectRef>
+            <a:fontRef idx="minor">
+              <a:schemeClr val="lt1"/>
+            </a:fontRef>
+          </p:style>
+          <p:txBody>
+            <a:bodyPr rtlCol="0" anchor="ctr"/>
+            <a:lstStyle/>
+            <a:p>
+              <a:pPr algn="ctr"/>
+              <a:endParaRPr lang="en-US"/>
+            </a:p>
+          </p:txBody>
+        </p:sp>
+        <p:sp>
+          <p:nvSpPr>
+            <p:cNvPr id="3" name="Rectangle 2">
+              <a:extLst>
+                <a:ext uri="{FF2B5EF4-FFF2-40B4-BE49-F238E27FC236}">
+                  <a16:creationId xmlns:a16="http://schemas.microsoft.com/office/drawing/2014/main" id="{0FF762E7-0063-A587-799C-0A081E04260B}"/>
+                </a:ext>
+              </a:extLst>
+            </p:cNvPr>
+            <p:cNvSpPr/>
+            <p:nvPr/>
+          </p:nvSpPr>
+          <p:spPr>
+            <a:xfrm>
+              <a:off x="3133725" y="1952625"/>
+              <a:ext cx="631825" cy="1682750"/>
+            </a:xfrm>
+            <a:prstGeom prst="rect">
+              <a:avLst/>
+            </a:prstGeom>
+          </p:spPr>
+          <p:style>
+            <a:lnRef idx="2">
+              <a:schemeClr val="dk1">
+                <a:shade val="50000"/>
+              </a:schemeClr>
+            </a:lnRef>
+            <a:fillRef idx="1">
+              <a:schemeClr val="dk1"/>
+            </a:fillRef>
+            <a:effectRef idx="0">
+              <a:schemeClr val="dk1"/>
+            </a:effectRef>
+            <a:fontRef idx="minor">
+              <a:schemeClr val="lt1"/>
+            </a:fontRef>
+          </p:style>
+          <p:txBody>
+            <a:bodyPr rtlCol="0" anchor="ctr"/>
+            <a:lstStyle/>
+            <a:p>
+              <a:pPr algn="ctr"/>
+              <a:endParaRPr lang="en-US"/>
+            </a:p>
+          </p:txBody>
+        </p:sp>
+        <p:sp>
+          <p:nvSpPr>
+            <p:cNvPr id="4" name="Trapezoid 3">
+              <a:extLst>
+                <a:ext uri="{FF2B5EF4-FFF2-40B4-BE49-F238E27FC236}">
+                  <a16:creationId xmlns:a16="http://schemas.microsoft.com/office/drawing/2014/main" id="{BF0CD330-77FD-17E8-E1D2-DBD54C605016}"/>
+                </a:ext>
+              </a:extLst>
+            </p:cNvPr>
+            <p:cNvSpPr/>
+            <p:nvPr/>
+          </p:nvSpPr>
+          <p:spPr>
+            <a:xfrm>
+              <a:off x="3214687" y="1634729"/>
+              <a:ext cx="469900" cy="317896"/>
+            </a:xfrm>
+            <a:prstGeom prst="trapezoid">
+              <a:avLst/>
+            </a:prstGeom>
+          </p:spPr>
+          <p:style>
+            <a:lnRef idx="2">
+              <a:schemeClr val="dk1">
+                <a:shade val="50000"/>
+              </a:schemeClr>
+            </a:lnRef>
+            <a:fillRef idx="1">
+              <a:schemeClr val="dk1"/>
+            </a:fillRef>
+            <a:effectRef idx="0">
+              <a:schemeClr val="dk1"/>
+            </a:effectRef>
+            <a:fontRef idx="minor">
+              <a:schemeClr val="lt1"/>
+            </a:fontRef>
+          </p:style>
+          <p:txBody>
+            <a:bodyPr rtlCol="0" anchor="ctr"/>
+            <a:lstStyle/>
+            <a:p>
+              <a:pPr algn="ctr"/>
+              <a:endParaRPr lang="en-US"/>
+            </a:p>
+          </p:txBody>
+        </p:sp>
+        <p:grpSp>
+          <p:nvGrpSpPr>
+            <p:cNvPr id="6" name="Group 5">
+              <a:extLst>
+                <a:ext uri="{FF2B5EF4-FFF2-40B4-BE49-F238E27FC236}">
+                  <a16:creationId xmlns:a16="http://schemas.microsoft.com/office/drawing/2014/main" id="{DC5365B3-642A-F8CF-7278-3789509BB57E}"/>
+                </a:ext>
+              </a:extLst>
+            </p:cNvPr>
+            <p:cNvGrpSpPr/>
+            <p:nvPr/>
+          </p:nvGrpSpPr>
+          <p:grpSpPr>
+            <a:xfrm>
+              <a:off x="3992563" y="1271400"/>
+              <a:ext cx="631825" cy="833912"/>
+              <a:chOff x="5200606" y="948929"/>
+              <a:chExt cx="895394" cy="1181783"/>
+            </a:xfrm>
+          </p:grpSpPr>
+          <p:sp>
+            <p:nvSpPr>
+              <p:cNvPr id="5" name="Isosceles Triangle 4">
+                <a:extLst>
+                  <a:ext uri="{FF2B5EF4-FFF2-40B4-BE49-F238E27FC236}">
+                    <a16:creationId xmlns:a16="http://schemas.microsoft.com/office/drawing/2014/main" id="{238DF57D-4C2E-FB8A-5DA3-DBF004C45A08}"/>
+                  </a:ext>
+                </a:extLst>
+              </p:cNvPr>
+              <p:cNvSpPr/>
+              <p:nvPr/>
+            </p:nvSpPr>
+            <p:spPr>
+              <a:xfrm>
+                <a:off x="5448300" y="948929"/>
+                <a:ext cx="406400" cy="558800"/>
+              </a:xfrm>
+              <a:prstGeom prst="triangle">
+                <a:avLst/>
+              </a:prstGeom>
+            </p:spPr>
+            <p:style>
+              <a:lnRef idx="2">
+                <a:schemeClr val="dk1">
+                  <a:shade val="50000"/>
+                </a:schemeClr>
+              </a:lnRef>
+              <a:fillRef idx="1">
+                <a:schemeClr val="dk1"/>
+              </a:fillRef>
+              <a:effectRef idx="0">
+                <a:schemeClr val="dk1"/>
+              </a:effectRef>
+              <a:fontRef idx="minor">
+                <a:schemeClr val="lt1"/>
+              </a:fontRef>
+            </p:style>
+            <p:txBody>
+              <a:bodyPr rtlCol="0" anchor="ctr"/>
+              <a:lstStyle/>
+              <a:p>
+                <a:pPr algn="ctr"/>
+                <a:endParaRPr lang="en-US"/>
+              </a:p>
+            </p:txBody>
+          </p:sp>
+          <p:sp>
+            <p:nvSpPr>
+              <p:cNvPr id="11" name="Isosceles Triangle 10">
+                <a:extLst>
+                  <a:ext uri="{FF2B5EF4-FFF2-40B4-BE49-F238E27FC236}">
+                    <a16:creationId xmlns:a16="http://schemas.microsoft.com/office/drawing/2014/main" id="{7764D3A5-8B89-01F6-7C6A-B77DD8072791}"/>
+                  </a:ext>
+                </a:extLst>
+              </p:cNvPr>
+              <p:cNvSpPr/>
+              <p:nvPr/>
+            </p:nvSpPr>
+            <p:spPr>
+              <a:xfrm>
+                <a:off x="5200606" y="1571912"/>
+                <a:ext cx="406400" cy="558800"/>
+              </a:xfrm>
+              <a:prstGeom prst="triangle">
+                <a:avLst/>
+              </a:prstGeom>
+            </p:spPr>
+            <p:style>
+              <a:lnRef idx="2">
+                <a:schemeClr val="dk1">
+                  <a:shade val="50000"/>
+                </a:schemeClr>
+              </a:lnRef>
+              <a:fillRef idx="1">
+                <a:schemeClr val="dk1"/>
+              </a:fillRef>
+              <a:effectRef idx="0">
+                <a:schemeClr val="dk1"/>
+              </a:effectRef>
+              <a:fontRef idx="minor">
+                <a:schemeClr val="lt1"/>
+              </a:fontRef>
+            </p:style>
+            <p:txBody>
+              <a:bodyPr rtlCol="0" anchor="ctr"/>
+              <a:lstStyle/>
+              <a:p>
+                <a:pPr algn="ctr"/>
+                <a:endParaRPr lang="en-US"/>
+              </a:p>
+            </p:txBody>
+          </p:sp>
+          <p:sp>
+            <p:nvSpPr>
+              <p:cNvPr id="12" name="Isosceles Triangle 11">
+                <a:extLst>
+                  <a:ext uri="{FF2B5EF4-FFF2-40B4-BE49-F238E27FC236}">
+                    <a16:creationId xmlns:a16="http://schemas.microsoft.com/office/drawing/2014/main" id="{566873F6-C88A-37F1-FA3E-45F1FFCAC0B6}"/>
+                  </a:ext>
+                </a:extLst>
+              </p:cNvPr>
+              <p:cNvSpPr/>
+              <p:nvPr/>
+            </p:nvSpPr>
+            <p:spPr>
+              <a:xfrm>
+                <a:off x="5689600" y="1571912"/>
+                <a:ext cx="406400" cy="558800"/>
+              </a:xfrm>
+              <a:prstGeom prst="triangle">
+                <a:avLst/>
+              </a:prstGeom>
+            </p:spPr>
+            <p:style>
+              <a:lnRef idx="2">
+                <a:schemeClr val="dk1">
+                  <a:shade val="50000"/>
+                </a:schemeClr>
+              </a:lnRef>
+              <a:fillRef idx="1">
+                <a:schemeClr val="dk1"/>
+              </a:fillRef>
+              <a:effectRef idx="0">
+                <a:schemeClr val="dk1"/>
+              </a:effectRef>
+              <a:fontRef idx="minor">
+                <a:schemeClr val="lt1"/>
+              </a:fontRef>
+            </p:style>
+            <p:txBody>
+              <a:bodyPr rtlCol="0" anchor="ctr"/>
+              <a:lstStyle/>
+              <a:p>
+                <a:pPr algn="ctr"/>
+                <a:endParaRPr lang="en-US"/>
+              </a:p>
+            </p:txBody>
+          </p:sp>
+        </p:grpSp>
+      </p:grpSp>
+      <p:grpSp>
+        <p:nvGrpSpPr>
+          <p:cNvPr id="18" name="Group 17">
+            <a:extLst>
+              <a:ext uri="{FF2B5EF4-FFF2-40B4-BE49-F238E27FC236}">
+                <a16:creationId xmlns:a16="http://schemas.microsoft.com/office/drawing/2014/main" id="{EB7A861A-C26B-E4B4-C971-E01C44809BB1}"/>
+              </a:ext>
+            </a:extLst>
+          </p:cNvPr>
+          <p:cNvGrpSpPr/>
+          <p:nvPr/>
+        </p:nvGrpSpPr>
+        <p:grpSpPr>
+          <a:xfrm>
+            <a:off x="4521200" y="672885"/>
+            <a:ext cx="961844" cy="961844"/>
+            <a:chOff x="3282950" y="1689100"/>
+            <a:chExt cx="1371600" cy="1371600"/>
+          </a:xfrm>
+        </p:grpSpPr>
+        <p:sp>
+          <p:nvSpPr>
+            <p:cNvPr id="9" name="Oval 8">
+              <a:extLst>
+                <a:ext uri="{FF2B5EF4-FFF2-40B4-BE49-F238E27FC236}">
+                  <a16:creationId xmlns:a16="http://schemas.microsoft.com/office/drawing/2014/main" id="{366D3BB3-1C64-61F5-7CE8-0832E835B675}"/>
+                </a:ext>
+              </a:extLst>
+            </p:cNvPr>
+            <p:cNvSpPr/>
+            <p:nvPr/>
+          </p:nvSpPr>
+          <p:spPr>
+            <a:xfrm>
+              <a:off x="3282950" y="1689100"/>
+              <a:ext cx="1371600" cy="1371600"/>
+            </a:xfrm>
+            <a:prstGeom prst="ellipse">
+              <a:avLst/>
+            </a:prstGeom>
+          </p:spPr>
+          <p:style>
+            <a:lnRef idx="2">
+              <a:schemeClr val="dk1"/>
+            </a:lnRef>
+            <a:fillRef idx="1">
+              <a:schemeClr val="lt1"/>
+            </a:fillRef>
+            <a:effectRef idx="0">
+              <a:schemeClr val="dk1"/>
+            </a:effectRef>
+            <a:fontRef idx="minor">
+              <a:schemeClr val="dk1"/>
+            </a:fontRef>
+          </p:style>
+          <p:txBody>
+            <a:bodyPr rtlCol="0" anchor="ctr"/>
+            <a:lstStyle/>
+            <a:p>
+              <a:pPr algn="ctr"/>
+              <a:endParaRPr lang="en-US"/>
+            </a:p>
+          </p:txBody>
+        </p:sp>
+        <p:sp>
+          <p:nvSpPr>
+            <p:cNvPr id="17" name="Isosceles Triangle 16">
+              <a:extLst>
+                <a:ext uri="{FF2B5EF4-FFF2-40B4-BE49-F238E27FC236}">
+                  <a16:creationId xmlns:a16="http://schemas.microsoft.com/office/drawing/2014/main" id="{ABAD0CEE-48E4-CA0D-6D0B-DA629D06CD1C}"/>
+                </a:ext>
+              </a:extLst>
+            </p:cNvPr>
+            <p:cNvSpPr/>
+            <p:nvPr/>
+          </p:nvSpPr>
+          <p:spPr>
+            <a:xfrm>
+              <a:off x="3706811" y="1689100"/>
+              <a:ext cx="547689" cy="501650"/>
+            </a:xfrm>
+            <a:prstGeom prst="triangle">
+              <a:avLst/>
+            </a:prstGeom>
+          </p:spPr>
+          <p:style>
+            <a:lnRef idx="2">
+              <a:schemeClr val="dk1">
+                <a:shade val="50000"/>
+              </a:schemeClr>
+            </a:lnRef>
+            <a:fillRef idx="1">
+              <a:schemeClr val="dk1"/>
+            </a:fillRef>
+            <a:effectRef idx="0">
+              <a:schemeClr val="dk1"/>
+            </a:effectRef>
+            <a:fontRef idx="minor">
+              <a:schemeClr val="lt1"/>
+            </a:fontRef>
+          </p:style>
+          <p:txBody>
+            <a:bodyPr rtlCol="0" anchor="ctr"/>
+            <a:lstStyle/>
+            <a:p>
+              <a:pPr algn="ctr"/>
+              <a:endParaRPr lang="en-US"/>
+            </a:p>
+          </p:txBody>
+        </p:sp>
+        <p:sp>
+          <p:nvSpPr>
+            <p:cNvPr id="19" name="Isosceles Triangle 18">
+              <a:extLst>
+                <a:ext uri="{FF2B5EF4-FFF2-40B4-BE49-F238E27FC236}">
+                  <a16:creationId xmlns:a16="http://schemas.microsoft.com/office/drawing/2014/main" id="{F3153657-DC18-D948-B16A-BAB5CD46AB23}"/>
+                </a:ext>
+              </a:extLst>
+            </p:cNvPr>
+            <p:cNvSpPr/>
+            <p:nvPr/>
+          </p:nvSpPr>
+          <p:spPr>
+            <a:xfrm>
+              <a:off x="3409950" y="2266950"/>
+              <a:ext cx="547689" cy="501650"/>
+            </a:xfrm>
+            <a:prstGeom prst="triangle">
+              <a:avLst/>
+            </a:prstGeom>
+          </p:spPr>
+          <p:style>
+            <a:lnRef idx="2">
+              <a:schemeClr val="dk1">
+                <a:shade val="50000"/>
+              </a:schemeClr>
+            </a:lnRef>
+            <a:fillRef idx="1">
+              <a:schemeClr val="dk1"/>
+            </a:fillRef>
+            <a:effectRef idx="0">
+              <a:schemeClr val="dk1"/>
+            </a:effectRef>
+            <a:fontRef idx="minor">
+              <a:schemeClr val="lt1"/>
+            </a:fontRef>
+          </p:style>
+          <p:txBody>
+            <a:bodyPr rtlCol="0" anchor="ctr"/>
+            <a:lstStyle/>
+            <a:p>
+              <a:pPr algn="ctr"/>
+              <a:endParaRPr lang="en-US"/>
+            </a:p>
+          </p:txBody>
+        </p:sp>
+        <p:sp>
+          <p:nvSpPr>
+            <p:cNvPr id="20" name="Isosceles Triangle 19">
+              <a:extLst>
+                <a:ext uri="{FF2B5EF4-FFF2-40B4-BE49-F238E27FC236}">
+                  <a16:creationId xmlns:a16="http://schemas.microsoft.com/office/drawing/2014/main" id="{425C61B8-0B76-6EE8-8883-005F096B9F6E}"/>
+                </a:ext>
+              </a:extLst>
+            </p:cNvPr>
+            <p:cNvSpPr/>
+            <p:nvPr/>
+          </p:nvSpPr>
+          <p:spPr>
+            <a:xfrm>
+              <a:off x="3998910" y="2260600"/>
+              <a:ext cx="547689" cy="501650"/>
+            </a:xfrm>
+            <a:prstGeom prst="triangle">
+              <a:avLst/>
+            </a:prstGeom>
+          </p:spPr>
+          <p:style>
+            <a:lnRef idx="2">
+              <a:schemeClr val="dk1">
+                <a:shade val="50000"/>
+              </a:schemeClr>
+            </a:lnRef>
+            <a:fillRef idx="1">
+              <a:schemeClr val="dk1"/>
+            </a:fillRef>
+            <a:effectRef idx="0">
+              <a:schemeClr val="dk1"/>
+            </a:effectRef>
+            <a:fontRef idx="minor">
+              <a:schemeClr val="lt1"/>
             </a:fontRef>
           </p:style>
           <p:txBody>

--- a/image process/drawings sifi.pptx
+++ b/image process/drawings sifi.pptx
@@ -17243,10 +17243,10 @@
       </p:grpSpPr>
       <p:grpSp>
         <p:nvGrpSpPr>
-          <p:cNvPr id="14" name="Group 13">
+          <p:cNvPr id="13" name="Group 12">
             <a:extLst>
               <a:ext uri="{FF2B5EF4-FFF2-40B4-BE49-F238E27FC236}">
-                <a16:creationId xmlns:a16="http://schemas.microsoft.com/office/drawing/2014/main" id="{18272C8C-2A25-6D98-5B2D-3C5E6038863B}"/>
+                <a16:creationId xmlns:a16="http://schemas.microsoft.com/office/drawing/2014/main" id="{7246E687-0EF4-4F45-FA5D-C56722D7831E}"/>
               </a:ext>
             </a:extLst>
           </p:cNvPr>
@@ -17257,7 +17257,7 @@
           <a:xfrm>
             <a:off x="427081" y="263129"/>
             <a:ext cx="1371600" cy="1371600"/>
-            <a:chOff x="1298501" y="962272"/>
+            <a:chOff x="427081" y="263129"/>
             <a:chExt cx="1371600" cy="1371600"/>
           </a:xfrm>
         </p:grpSpPr>
@@ -17275,7 +17275,7 @@
           </p:nvSpPr>
           <p:spPr>
             <a:xfrm>
-              <a:off x="1298501" y="962272"/>
+              <a:off x="427081" y="263129"/>
               <a:ext cx="1371600" cy="1371600"/>
             </a:xfrm>
             <a:prstGeom prst="rect">
@@ -17315,10 +17315,10 @@
         </p:sp>
         <p:sp>
           <p:nvSpPr>
-            <p:cNvPr id="16" name="Arrow: Pentagon 15">
-              <a:extLst>
-                <a:ext uri="{FF2B5EF4-FFF2-40B4-BE49-F238E27FC236}">
-                  <a16:creationId xmlns:a16="http://schemas.microsoft.com/office/drawing/2014/main" id="{021E595E-CA0D-FED6-142F-636BD408FA81}"/>
+            <p:cNvPr id="10" name="Plaque 9">
+              <a:extLst>
+                <a:ext uri="{FF2B5EF4-FFF2-40B4-BE49-F238E27FC236}">
+                  <a16:creationId xmlns:a16="http://schemas.microsoft.com/office/drawing/2014/main" id="{547A9B6C-82B4-6187-4C4A-2C056096AE99}"/>
                 </a:ext>
               </a:extLst>
             </p:cNvPr>
@@ -17326,11 +17326,11 @@
             <p:nvPr/>
           </p:nvSpPr>
           <p:spPr>
-            <a:xfrm rot="5400000">
-              <a:off x="1435661" y="1173775"/>
+            <a:xfrm>
+              <a:off x="573033" y="478473"/>
               <a:ext cx="1097280" cy="1097280"/>
             </a:xfrm>
-            <a:prstGeom prst="homePlate">
+            <a:prstGeom prst="plaque">
               <a:avLst/>
             </a:prstGeom>
             <a:noFill/>
@@ -17370,10 +17370,10 @@
       </p:grpSp>
       <p:grpSp>
         <p:nvGrpSpPr>
-          <p:cNvPr id="8" name="Group 7">
+          <p:cNvPr id="82" name="Group 81">
             <a:extLst>
               <a:ext uri="{FF2B5EF4-FFF2-40B4-BE49-F238E27FC236}">
-                <a16:creationId xmlns:a16="http://schemas.microsoft.com/office/drawing/2014/main" id="{21825E4F-8AC5-9352-030D-A0FC544E2896}"/>
+                <a16:creationId xmlns:a16="http://schemas.microsoft.com/office/drawing/2014/main" id="{69B2A179-E1E8-665F-F368-D461DAB87650}"/>
               </a:ext>
             </a:extLst>
           </p:cNvPr>
@@ -17382,18 +17382,18 @@
         </p:nvGrpSpPr>
         <p:grpSpPr>
           <a:xfrm>
-            <a:off x="884599" y="574669"/>
-            <a:ext cx="620351" cy="783524"/>
-            <a:chOff x="2752725" y="1271400"/>
-            <a:chExt cx="1871663" cy="2363975"/>
+            <a:off x="664458" y="683072"/>
+            <a:ext cx="907668" cy="622697"/>
+            <a:chOff x="2768462" y="1630604"/>
+            <a:chExt cx="3099528" cy="2126402"/>
           </a:xfrm>
         </p:grpSpPr>
         <p:sp>
           <p:nvSpPr>
-            <p:cNvPr id="2" name="Trapezoid 1">
-              <a:extLst>
-                <a:ext uri="{FF2B5EF4-FFF2-40B4-BE49-F238E27FC236}">
-                  <a16:creationId xmlns:a16="http://schemas.microsoft.com/office/drawing/2014/main" id="{8C470383-045C-5411-C2D2-BC7BABE266C3}"/>
+            <p:cNvPr id="62" name="Rectangle 61">
+              <a:extLst>
+                <a:ext uri="{FF2B5EF4-FFF2-40B4-BE49-F238E27FC236}">
+                  <a16:creationId xmlns:a16="http://schemas.microsoft.com/office/drawing/2014/main" id="{88BD95FA-38DB-6FF3-AE61-0006E0068860}"/>
                 </a:ext>
               </a:extLst>
             </p:cNvPr>
@@ -17401,11 +17401,11 @@
             <p:nvPr/>
           </p:nvSpPr>
           <p:spPr>
-            <a:xfrm rot="16200000">
-              <a:off x="2319338" y="2703909"/>
-              <a:ext cx="1174750" cy="307975"/>
-            </a:xfrm>
-            <a:prstGeom prst="trapezoid">
+            <a:xfrm>
+              <a:off x="3951162" y="3217961"/>
+              <a:ext cx="894382" cy="386255"/>
+            </a:xfrm>
+            <a:prstGeom prst="rect">
               <a:avLst/>
             </a:prstGeom>
           </p:spPr>
@@ -17436,10 +17436,10 @@
         </p:sp>
         <p:sp>
           <p:nvSpPr>
-            <p:cNvPr id="7" name="Trapezoid 6">
-              <a:extLst>
-                <a:ext uri="{FF2B5EF4-FFF2-40B4-BE49-F238E27FC236}">
-                  <a16:creationId xmlns:a16="http://schemas.microsoft.com/office/drawing/2014/main" id="{814BED74-62B9-52F3-28FB-B1E64ED96C57}"/>
+            <p:cNvPr id="27" name="Rectangle 26">
+              <a:extLst>
+                <a:ext uri="{FF2B5EF4-FFF2-40B4-BE49-F238E27FC236}">
+                  <a16:creationId xmlns:a16="http://schemas.microsoft.com/office/drawing/2014/main" id="{E2A2E51D-04D7-1817-DD54-31B9901A89B1}"/>
                 </a:ext>
               </a:extLst>
             </p:cNvPr>
@@ -17447,11 +17447,11 @@
             <p:nvPr/>
           </p:nvSpPr>
           <p:spPr>
-            <a:xfrm rot="5400000">
-              <a:off x="3405188" y="2703909"/>
-              <a:ext cx="1174750" cy="307975"/>
-            </a:xfrm>
-            <a:prstGeom prst="trapezoid">
+            <a:xfrm>
+              <a:off x="3745275" y="2561897"/>
+              <a:ext cx="1305472" cy="617557"/>
+            </a:xfrm>
+            <a:prstGeom prst="rect">
               <a:avLst/>
             </a:prstGeom>
           </p:spPr>
@@ -17482,10 +17482,10 @@
         </p:sp>
         <p:sp>
           <p:nvSpPr>
-            <p:cNvPr id="3" name="Rectangle 2">
-              <a:extLst>
-                <a:ext uri="{FF2B5EF4-FFF2-40B4-BE49-F238E27FC236}">
-                  <a16:creationId xmlns:a16="http://schemas.microsoft.com/office/drawing/2014/main" id="{0FF762E7-0063-A587-799C-0A081E04260B}"/>
+            <p:cNvPr id="28" name="Rectangle 27">
+              <a:extLst>
+                <a:ext uri="{FF2B5EF4-FFF2-40B4-BE49-F238E27FC236}">
+                  <a16:creationId xmlns:a16="http://schemas.microsoft.com/office/drawing/2014/main" id="{BBBFF7AA-5FD3-AC55-593C-92FE3B31594C}"/>
                 </a:ext>
               </a:extLst>
             </p:cNvPr>
@@ -17494,8 +17494,8 @@
           </p:nvSpPr>
           <p:spPr>
             <a:xfrm>
-              <a:off x="3133725" y="1952625"/>
-              <a:ext cx="631825" cy="1682750"/>
+              <a:off x="3786206" y="1808785"/>
+              <a:ext cx="248338" cy="464424"/>
             </a:xfrm>
             <a:prstGeom prst="rect">
               <a:avLst/>
@@ -17528,10 +17528,10 @@
         </p:sp>
         <p:sp>
           <p:nvSpPr>
-            <p:cNvPr id="4" name="Trapezoid 3">
-              <a:extLst>
-                <a:ext uri="{FF2B5EF4-FFF2-40B4-BE49-F238E27FC236}">
-                  <a16:creationId xmlns:a16="http://schemas.microsoft.com/office/drawing/2014/main" id="{BF0CD330-77FD-17E8-E1D2-DBD54C605016}"/>
+            <p:cNvPr id="57" name="Plaque 56">
+              <a:extLst>
+                <a:ext uri="{FF2B5EF4-FFF2-40B4-BE49-F238E27FC236}">
+                  <a16:creationId xmlns:a16="http://schemas.microsoft.com/office/drawing/2014/main" id="{D3308D06-9878-B246-3449-D16662A633D4}"/>
                 </a:ext>
               </a:extLst>
             </p:cNvPr>
@@ -17540,11 +17540,13 @@
           </p:nvSpPr>
           <p:spPr>
             <a:xfrm>
-              <a:off x="3214687" y="1634729"/>
-              <a:ext cx="469900" cy="317896"/>
-            </a:xfrm>
-            <a:prstGeom prst="trapezoid">
-              <a:avLst/>
+              <a:off x="4136527" y="1630604"/>
+              <a:ext cx="853168" cy="839875"/>
+            </a:xfrm>
+            <a:prstGeom prst="plaque">
+              <a:avLst>
+                <a:gd name="adj" fmla="val 25032"/>
+              </a:avLst>
             </a:prstGeom>
           </p:spPr>
           <p:style>
@@ -17572,12 +17574,194 @@
             </a:p>
           </p:txBody>
         </p:sp>
+        <p:sp>
+          <p:nvSpPr>
+            <p:cNvPr id="60" name="Rectangle 59">
+              <a:extLst>
+                <a:ext uri="{FF2B5EF4-FFF2-40B4-BE49-F238E27FC236}">
+                  <a16:creationId xmlns:a16="http://schemas.microsoft.com/office/drawing/2014/main" id="{F013E3FD-8053-F657-0435-0C23988B0B0C}"/>
+                </a:ext>
+              </a:extLst>
+            </p:cNvPr>
+            <p:cNvSpPr/>
+            <p:nvPr/>
+          </p:nvSpPr>
+          <p:spPr>
+            <a:xfrm rot="20548458">
+              <a:off x="5595262" y="3142160"/>
+              <a:ext cx="272728" cy="614846"/>
+            </a:xfrm>
+            <a:prstGeom prst="rect">
+              <a:avLst/>
+            </a:prstGeom>
+          </p:spPr>
+          <p:style>
+            <a:lnRef idx="2">
+              <a:schemeClr val="dk1">
+                <a:shade val="50000"/>
+              </a:schemeClr>
+            </a:lnRef>
+            <a:fillRef idx="1">
+              <a:schemeClr val="dk1"/>
+            </a:fillRef>
+            <a:effectRef idx="0">
+              <a:schemeClr val="dk1"/>
+            </a:effectRef>
+            <a:fontRef idx="minor">
+              <a:schemeClr val="lt1"/>
+            </a:fontRef>
+          </p:style>
+          <p:txBody>
+            <a:bodyPr rtlCol="0" anchor="ctr"/>
+            <a:lstStyle/>
+            <a:p>
+              <a:pPr algn="ctr"/>
+              <a:endParaRPr lang="en-US"/>
+            </a:p>
+          </p:txBody>
+        </p:sp>
+        <p:sp>
+          <p:nvSpPr>
+            <p:cNvPr id="58" name="Rectangle 57">
+              <a:extLst>
+                <a:ext uri="{FF2B5EF4-FFF2-40B4-BE49-F238E27FC236}">
+                  <a16:creationId xmlns:a16="http://schemas.microsoft.com/office/drawing/2014/main" id="{31DEDA76-EE1A-F46C-B29C-E80E1134A795}"/>
+                </a:ext>
+              </a:extLst>
+            </p:cNvPr>
+            <p:cNvSpPr/>
+            <p:nvPr/>
+          </p:nvSpPr>
+          <p:spPr>
+            <a:xfrm rot="18038434">
+              <a:off x="5084956" y="2698459"/>
+              <a:ext cx="421902" cy="614846"/>
+            </a:xfrm>
+            <a:prstGeom prst="rect">
+              <a:avLst/>
+            </a:prstGeom>
+          </p:spPr>
+          <p:style>
+            <a:lnRef idx="2">
+              <a:schemeClr val="dk1">
+                <a:shade val="50000"/>
+              </a:schemeClr>
+            </a:lnRef>
+            <a:fillRef idx="1">
+              <a:schemeClr val="dk1"/>
+            </a:fillRef>
+            <a:effectRef idx="0">
+              <a:schemeClr val="dk1"/>
+            </a:effectRef>
+            <a:fontRef idx="minor">
+              <a:schemeClr val="lt1"/>
+            </a:fontRef>
+          </p:style>
+          <p:txBody>
+            <a:bodyPr rtlCol="0" anchor="ctr"/>
+            <a:lstStyle/>
+            <a:p>
+              <a:pPr algn="ctr"/>
+              <a:endParaRPr lang="en-US"/>
+            </a:p>
+          </p:txBody>
+        </p:sp>
+        <p:sp>
+          <p:nvSpPr>
+            <p:cNvPr id="59" name="Oval 58">
+              <a:extLst>
+                <a:ext uri="{FF2B5EF4-FFF2-40B4-BE49-F238E27FC236}">
+                  <a16:creationId xmlns:a16="http://schemas.microsoft.com/office/drawing/2014/main" id="{668655E6-A1D1-A645-459C-87F702AE7D54}"/>
+                </a:ext>
+              </a:extLst>
+            </p:cNvPr>
+            <p:cNvSpPr/>
+            <p:nvPr/>
+          </p:nvSpPr>
+          <p:spPr>
+            <a:xfrm rot="15253353">
+              <a:off x="5371321" y="2954379"/>
+              <a:ext cx="432581" cy="432581"/>
+            </a:xfrm>
+            <a:prstGeom prst="ellipse">
+              <a:avLst/>
+            </a:prstGeom>
+            <a:ln w="38100"/>
+          </p:spPr>
+          <p:style>
+            <a:lnRef idx="2">
+              <a:schemeClr val="dk1"/>
+            </a:lnRef>
+            <a:fillRef idx="1">
+              <a:schemeClr val="lt1"/>
+            </a:fillRef>
+            <a:effectRef idx="0">
+              <a:schemeClr val="dk1"/>
+            </a:effectRef>
+            <a:fontRef idx="minor">
+              <a:schemeClr val="dk1"/>
+            </a:fontRef>
+          </p:style>
+          <p:txBody>
+            <a:bodyPr rtlCol="0" anchor="ctr"/>
+            <a:lstStyle/>
+            <a:p>
+              <a:pPr algn="ctr"/>
+              <a:endParaRPr lang="en-US"/>
+            </a:p>
+          </p:txBody>
+        </p:sp>
+        <p:sp>
+          <p:nvSpPr>
+            <p:cNvPr id="56" name="Oval 55">
+              <a:extLst>
+                <a:ext uri="{FF2B5EF4-FFF2-40B4-BE49-F238E27FC236}">
+                  <a16:creationId xmlns:a16="http://schemas.microsoft.com/office/drawing/2014/main" id="{A050B2F7-858D-AC78-CC83-644C43409C38}"/>
+                </a:ext>
+              </a:extLst>
+            </p:cNvPr>
+            <p:cNvSpPr/>
+            <p:nvPr/>
+          </p:nvSpPr>
+          <p:spPr>
+            <a:xfrm rot="15710661">
+              <a:off x="4683975" y="2593993"/>
+              <a:ext cx="531646" cy="531646"/>
+            </a:xfrm>
+            <a:prstGeom prst="ellipse">
+              <a:avLst/>
+            </a:prstGeom>
+            <a:ln w="38100"/>
+          </p:spPr>
+          <p:style>
+            <a:lnRef idx="2">
+              <a:schemeClr val="dk1"/>
+            </a:lnRef>
+            <a:fillRef idx="1">
+              <a:schemeClr val="lt1"/>
+            </a:fillRef>
+            <a:effectRef idx="0">
+              <a:schemeClr val="dk1"/>
+            </a:effectRef>
+            <a:fontRef idx="minor">
+              <a:schemeClr val="dk1"/>
+            </a:fontRef>
+          </p:style>
+          <p:txBody>
+            <a:bodyPr rtlCol="0" anchor="ctr"/>
+            <a:lstStyle/>
+            <a:p>
+              <a:pPr algn="ctr"/>
+              <a:endParaRPr lang="en-US"/>
+            </a:p>
+          </p:txBody>
+        </p:sp>
         <p:grpSp>
           <p:nvGrpSpPr>
-            <p:cNvPr id="6" name="Group 5">
-              <a:extLst>
-                <a:ext uri="{FF2B5EF4-FFF2-40B4-BE49-F238E27FC236}">
-                  <a16:creationId xmlns:a16="http://schemas.microsoft.com/office/drawing/2014/main" id="{DC5365B3-642A-F8CF-7278-3789509BB57E}"/>
+            <p:cNvPr id="75" name="Group 74">
+              <a:extLst>
+                <a:ext uri="{FF2B5EF4-FFF2-40B4-BE49-F238E27FC236}">
+                  <a16:creationId xmlns:a16="http://schemas.microsoft.com/office/drawing/2014/main" id="{9B336AC7-3972-B11B-12A3-C78C86D110B4}"/>
                 </a:ext>
               </a:extLst>
             </p:cNvPr>
@@ -17585,19 +17769,19 @@
             <p:nvPr/>
           </p:nvGrpSpPr>
           <p:grpSpPr>
-            <a:xfrm>
-              <a:off x="3992563" y="1271400"/>
-              <a:ext cx="631825" cy="833912"/>
-              <a:chOff x="5200606" y="948929"/>
-              <a:chExt cx="895394" cy="1181783"/>
+            <a:xfrm flipH="1">
+              <a:off x="2768462" y="2618875"/>
+              <a:ext cx="1199848" cy="1121157"/>
+              <a:chOff x="4817477" y="2615266"/>
+              <a:chExt cx="1199848" cy="1121157"/>
             </a:xfrm>
           </p:grpSpPr>
           <p:sp>
             <p:nvSpPr>
-              <p:cNvPr id="5" name="Isosceles Triangle 4">
+              <p:cNvPr id="76" name="Rectangle 75">
                 <a:extLst>
                   <a:ext uri="{FF2B5EF4-FFF2-40B4-BE49-F238E27FC236}">
-                    <a16:creationId xmlns:a16="http://schemas.microsoft.com/office/drawing/2014/main" id="{238DF57D-4C2E-FB8A-5DA3-DBF004C45A08}"/>
+                    <a16:creationId xmlns:a16="http://schemas.microsoft.com/office/drawing/2014/main" id="{81AD9E0F-5324-3015-1D2B-2AE7E1CC37E6}"/>
                   </a:ext>
                 </a:extLst>
               </p:cNvPr>
@@ -17605,11 +17789,11 @@
               <p:nvPr/>
             </p:nvSpPr>
             <p:spPr>
-              <a:xfrm>
-                <a:off x="5448300" y="948929"/>
-                <a:ext cx="406400" cy="558800"/>
+              <a:xfrm rot="20354995">
+                <a:off x="5744597" y="3121577"/>
+                <a:ext cx="272728" cy="614846"/>
               </a:xfrm>
-              <a:prstGeom prst="triangle">
+              <a:prstGeom prst="rect">
                 <a:avLst/>
               </a:prstGeom>
             </p:spPr>
@@ -17640,10 +17824,10 @@
           </p:sp>
           <p:sp>
             <p:nvSpPr>
-              <p:cNvPr id="11" name="Isosceles Triangle 10">
+              <p:cNvPr id="77" name="Rectangle 76">
                 <a:extLst>
                   <a:ext uri="{FF2B5EF4-FFF2-40B4-BE49-F238E27FC236}">
-                    <a16:creationId xmlns:a16="http://schemas.microsoft.com/office/drawing/2014/main" id="{7764D3A5-8B89-01F6-7C6A-B77DD8072791}"/>
+                    <a16:creationId xmlns:a16="http://schemas.microsoft.com/office/drawing/2014/main" id="{26693838-BBDC-965D-CC06-07BEDAB7E3E4}"/>
                   </a:ext>
                 </a:extLst>
               </p:cNvPr>
@@ -17651,11 +17835,11 @@
               <p:nvPr/>
             </p:nvSpPr>
             <p:spPr>
-              <a:xfrm>
-                <a:off x="5200606" y="1571912"/>
-                <a:ext cx="406400" cy="558800"/>
+              <a:xfrm rot="17844971">
+                <a:off x="5210024" y="2703085"/>
+                <a:ext cx="421902" cy="614846"/>
               </a:xfrm>
-              <a:prstGeom prst="triangle">
+              <a:prstGeom prst="rect">
                 <a:avLst/>
               </a:prstGeom>
             </p:spPr>
@@ -17686,10 +17870,10 @@
           </p:sp>
           <p:sp>
             <p:nvSpPr>
-              <p:cNvPr id="12" name="Isosceles Triangle 11">
+              <p:cNvPr id="78" name="Oval 77">
                 <a:extLst>
                   <a:ext uri="{FF2B5EF4-FFF2-40B4-BE49-F238E27FC236}">
-                    <a16:creationId xmlns:a16="http://schemas.microsoft.com/office/drawing/2014/main" id="{566873F6-C88A-37F1-FA3E-45F1FFCAC0B6}"/>
+                    <a16:creationId xmlns:a16="http://schemas.microsoft.com/office/drawing/2014/main" id="{F0691E16-B9A8-7886-F07A-EBB7B4824219}"/>
                   </a:ext>
                 </a:extLst>
               </p:cNvPr>
@@ -17697,28 +17881,72 @@
               <p:nvPr/>
             </p:nvSpPr>
             <p:spPr>
-              <a:xfrm>
-                <a:off x="5689600" y="1571912"/>
-                <a:ext cx="406400" cy="558800"/>
+              <a:xfrm rot="15059890">
+                <a:off x="5505196" y="2942338"/>
+                <a:ext cx="432581" cy="432581"/>
               </a:xfrm>
-              <a:prstGeom prst="triangle">
+              <a:prstGeom prst="ellipse">
                 <a:avLst/>
               </a:prstGeom>
+              <a:ln w="38100"/>
             </p:spPr>
             <p:style>
               <a:lnRef idx="2">
-                <a:schemeClr val="dk1">
-                  <a:shade val="50000"/>
-                </a:schemeClr>
+                <a:schemeClr val="dk1"/>
               </a:lnRef>
               <a:fillRef idx="1">
-                <a:schemeClr val="dk1"/>
+                <a:schemeClr val="lt1"/>
               </a:fillRef>
               <a:effectRef idx="0">
                 <a:schemeClr val="dk1"/>
               </a:effectRef>
               <a:fontRef idx="minor">
+                <a:schemeClr val="dk1"/>
+              </a:fontRef>
+            </p:style>
+            <p:txBody>
+              <a:bodyPr rtlCol="0" anchor="ctr"/>
+              <a:lstStyle/>
+              <a:p>
+                <a:pPr algn="ctr"/>
+                <a:endParaRPr lang="en-US"/>
+              </a:p>
+            </p:txBody>
+          </p:sp>
+          <p:sp>
+            <p:nvSpPr>
+              <p:cNvPr id="79" name="Oval 78">
+                <a:extLst>
+                  <a:ext uri="{FF2B5EF4-FFF2-40B4-BE49-F238E27FC236}">
+                    <a16:creationId xmlns:a16="http://schemas.microsoft.com/office/drawing/2014/main" id="{9894AF7C-2CFA-0746-1276-A4AEF1396B8E}"/>
+                  </a:ext>
+                </a:extLst>
+              </p:cNvPr>
+              <p:cNvSpPr/>
+              <p:nvPr/>
+            </p:nvSpPr>
+            <p:spPr>
+              <a:xfrm rot="14919487">
+                <a:off x="4817477" y="2615266"/>
+                <a:ext cx="531646" cy="531646"/>
+              </a:xfrm>
+              <a:prstGeom prst="ellipse">
+                <a:avLst/>
+              </a:prstGeom>
+              <a:ln w="38100"/>
+            </p:spPr>
+            <p:style>
+              <a:lnRef idx="2">
+                <a:schemeClr val="dk1"/>
+              </a:lnRef>
+              <a:fillRef idx="1">
                 <a:schemeClr val="lt1"/>
+              </a:fillRef>
+              <a:effectRef idx="0">
+                <a:schemeClr val="dk1"/>
+              </a:effectRef>
+              <a:fontRef idx="minor">
+                <a:schemeClr val="dk1"/>
               </a:fontRef>
             </p:style>
             <p:txBody>
@@ -17731,33 +17959,12 @@
             </p:txBody>
           </p:sp>
         </p:grpSp>
-      </p:grpSp>
-      <p:grpSp>
-        <p:nvGrpSpPr>
-          <p:cNvPr id="18" name="Group 17">
-            <a:extLst>
-              <a:ext uri="{FF2B5EF4-FFF2-40B4-BE49-F238E27FC236}">
-                <a16:creationId xmlns:a16="http://schemas.microsoft.com/office/drawing/2014/main" id="{EB7A861A-C26B-E4B4-C971-E01C44809BB1}"/>
-              </a:ext>
-            </a:extLst>
-          </p:cNvPr>
-          <p:cNvGrpSpPr/>
-          <p:nvPr/>
-        </p:nvGrpSpPr>
-        <p:grpSpPr>
-          <a:xfrm>
-            <a:off x="4521200" y="672885"/>
-            <a:ext cx="961844" cy="961844"/>
-            <a:chOff x="3282950" y="1689100"/>
-            <a:chExt cx="1371600" cy="1371600"/>
-          </a:xfrm>
-        </p:grpSpPr>
         <p:sp>
           <p:nvSpPr>
-            <p:cNvPr id="9" name="Oval 8">
-              <a:extLst>
-                <a:ext uri="{FF2B5EF4-FFF2-40B4-BE49-F238E27FC236}">
-                  <a16:creationId xmlns:a16="http://schemas.microsoft.com/office/drawing/2014/main" id="{366D3BB3-1C64-61F5-7CE8-0832E835B675}"/>
+            <p:cNvPr id="81" name="Rectangle 80">
+              <a:extLst>
+                <a:ext uri="{FF2B5EF4-FFF2-40B4-BE49-F238E27FC236}">
+                  <a16:creationId xmlns:a16="http://schemas.microsoft.com/office/drawing/2014/main" id="{23F1AE68-0182-7D84-6B0D-4442D0AF8D56}"/>
                 </a:ext>
               </a:extLst>
             </p:cNvPr>
@@ -17766,146 +17973,10 @@
           </p:nvSpPr>
           <p:spPr>
             <a:xfrm>
-              <a:off x="3282950" y="1689100"/>
-              <a:ext cx="1371600" cy="1371600"/>
-            </a:xfrm>
-            <a:prstGeom prst="ellipse">
-              <a:avLst/>
-            </a:prstGeom>
-          </p:spPr>
-          <p:style>
-            <a:lnRef idx="2">
-              <a:schemeClr val="dk1"/>
-            </a:lnRef>
-            <a:fillRef idx="1">
-              <a:schemeClr val="lt1"/>
-            </a:fillRef>
-            <a:effectRef idx="0">
-              <a:schemeClr val="dk1"/>
-            </a:effectRef>
-            <a:fontRef idx="minor">
-              <a:schemeClr val="dk1"/>
-            </a:fontRef>
-          </p:style>
-          <p:txBody>
-            <a:bodyPr rtlCol="0" anchor="ctr"/>
-            <a:lstStyle/>
-            <a:p>
-              <a:pPr algn="ctr"/>
-              <a:endParaRPr lang="en-US"/>
-            </a:p>
-          </p:txBody>
-        </p:sp>
-        <p:sp>
-          <p:nvSpPr>
-            <p:cNvPr id="17" name="Isosceles Triangle 16">
-              <a:extLst>
-                <a:ext uri="{FF2B5EF4-FFF2-40B4-BE49-F238E27FC236}">
-                  <a16:creationId xmlns:a16="http://schemas.microsoft.com/office/drawing/2014/main" id="{ABAD0CEE-48E4-CA0D-6D0B-DA629D06CD1C}"/>
-                </a:ext>
-              </a:extLst>
-            </p:cNvPr>
-            <p:cNvSpPr/>
-            <p:nvPr/>
-          </p:nvSpPr>
-          <p:spPr>
-            <a:xfrm>
-              <a:off x="3706811" y="1689100"/>
-              <a:ext cx="547689" cy="501650"/>
-            </a:xfrm>
-            <a:prstGeom prst="triangle">
-              <a:avLst/>
-            </a:prstGeom>
-          </p:spPr>
-          <p:style>
-            <a:lnRef idx="2">
-              <a:schemeClr val="dk1">
-                <a:shade val="50000"/>
-              </a:schemeClr>
-            </a:lnRef>
-            <a:fillRef idx="1">
-              <a:schemeClr val="dk1"/>
-            </a:fillRef>
-            <a:effectRef idx="0">
-              <a:schemeClr val="dk1"/>
-            </a:effectRef>
-            <a:fontRef idx="minor">
-              <a:schemeClr val="lt1"/>
-            </a:fontRef>
-          </p:style>
-          <p:txBody>
-            <a:bodyPr rtlCol="0" anchor="ctr"/>
-            <a:lstStyle/>
-            <a:p>
-              <a:pPr algn="ctr"/>
-              <a:endParaRPr lang="en-US"/>
-            </a:p>
-          </p:txBody>
-        </p:sp>
-        <p:sp>
-          <p:nvSpPr>
-            <p:cNvPr id="19" name="Isosceles Triangle 18">
-              <a:extLst>
-                <a:ext uri="{FF2B5EF4-FFF2-40B4-BE49-F238E27FC236}">
-                  <a16:creationId xmlns:a16="http://schemas.microsoft.com/office/drawing/2014/main" id="{F3153657-DC18-D948-B16A-BAB5CD46AB23}"/>
-                </a:ext>
-              </a:extLst>
-            </p:cNvPr>
-            <p:cNvSpPr/>
-            <p:nvPr/>
-          </p:nvSpPr>
-          <p:spPr>
-            <a:xfrm>
-              <a:off x="3409950" y="2266950"/>
-              <a:ext cx="547689" cy="501650"/>
-            </a:xfrm>
-            <a:prstGeom prst="triangle">
-              <a:avLst/>
-            </a:prstGeom>
-          </p:spPr>
-          <p:style>
-            <a:lnRef idx="2">
-              <a:schemeClr val="dk1">
-                <a:shade val="50000"/>
-              </a:schemeClr>
-            </a:lnRef>
-            <a:fillRef idx="1">
-              <a:schemeClr val="dk1"/>
-            </a:fillRef>
-            <a:effectRef idx="0">
-              <a:schemeClr val="dk1"/>
-            </a:effectRef>
-            <a:fontRef idx="minor">
-              <a:schemeClr val="lt1"/>
-            </a:fontRef>
-          </p:style>
-          <p:txBody>
-            <a:bodyPr rtlCol="0" anchor="ctr"/>
-            <a:lstStyle/>
-            <a:p>
-              <a:pPr algn="ctr"/>
-              <a:endParaRPr lang="en-US"/>
-            </a:p>
-          </p:txBody>
-        </p:sp>
-        <p:sp>
-          <p:nvSpPr>
-            <p:cNvPr id="20" name="Isosceles Triangle 19">
-              <a:extLst>
-                <a:ext uri="{FF2B5EF4-FFF2-40B4-BE49-F238E27FC236}">
-                  <a16:creationId xmlns:a16="http://schemas.microsoft.com/office/drawing/2014/main" id="{425C61B8-0B76-6EE8-8883-005F096B9F6E}"/>
-                </a:ext>
-              </a:extLst>
-            </p:cNvPr>
-            <p:cNvSpPr/>
-            <p:nvPr/>
-          </p:nvSpPr>
-          <p:spPr>
-            <a:xfrm>
-              <a:off x="3998910" y="2260600"/>
-              <a:ext cx="547689" cy="501650"/>
-            </a:xfrm>
-            <a:prstGeom prst="triangle">
+              <a:off x="3435885" y="1869791"/>
+              <a:ext cx="248338" cy="339333"/>
+            </a:xfrm>
+            <a:prstGeom prst="rect">
               <a:avLst/>
             </a:prstGeom>
           </p:spPr>
@@ -17965,6 +18036,2788 @@
           <a:chExt cx="0" cy="0"/>
         </a:xfrm>
       </p:grpSpPr>
+      <p:sp>
+        <p:nvSpPr>
+          <p:cNvPr id="2" name="TextBox 1">
+            <a:extLst>
+              <a:ext uri="{FF2B5EF4-FFF2-40B4-BE49-F238E27FC236}">
+                <a16:creationId xmlns:a16="http://schemas.microsoft.com/office/drawing/2014/main" id="{F25AF539-8DF3-E9AA-FEBD-859DF58420A3}"/>
+              </a:ext>
+            </a:extLst>
+          </p:cNvPr>
+          <p:cNvSpPr txBox="1"/>
+          <p:nvPr/>
+        </p:nvSpPr>
+        <p:spPr>
+          <a:xfrm>
+            <a:off x="188462" y="114301"/>
+            <a:ext cx="1124539" cy="369332"/>
+          </a:xfrm>
+          <a:prstGeom prst="rect">
+            <a:avLst/>
+          </a:prstGeom>
+          <a:noFill/>
+        </p:spPr>
+        <p:txBody>
+          <a:bodyPr wrap="none" rtlCol="0">
+            <a:spAutoFit/>
+          </a:bodyPr>
+          <a:lstStyle/>
+          <a:p>
+            <a:r>
+              <a:rPr lang="en-US" altLang="zh-CN" dirty="0" err="1"/>
+              <a:t>Paragarde</a:t>
+            </a:r>
+            <a:endParaRPr lang="en-US" dirty="0"/>
+          </a:p>
+        </p:txBody>
+      </p:sp>
+      <p:grpSp>
+        <p:nvGrpSpPr>
+          <p:cNvPr id="15" name="Group 14">
+            <a:extLst>
+              <a:ext uri="{FF2B5EF4-FFF2-40B4-BE49-F238E27FC236}">
+                <a16:creationId xmlns:a16="http://schemas.microsoft.com/office/drawing/2014/main" id="{2A54E977-C7EE-8B6D-6CC5-7690DE97EC3B}"/>
+              </a:ext>
+            </a:extLst>
+          </p:cNvPr>
+          <p:cNvGrpSpPr/>
+          <p:nvPr/>
+        </p:nvGrpSpPr>
+        <p:grpSpPr>
+          <a:xfrm>
+            <a:off x="9122738" y="3515455"/>
+            <a:ext cx="735385" cy="928816"/>
+            <a:chOff x="2752725" y="1271400"/>
+            <a:chExt cx="1871663" cy="2363975"/>
+          </a:xfrm>
+        </p:grpSpPr>
+        <p:sp>
+          <p:nvSpPr>
+            <p:cNvPr id="16" name="Trapezoid 15">
+              <a:extLst>
+                <a:ext uri="{FF2B5EF4-FFF2-40B4-BE49-F238E27FC236}">
+                  <a16:creationId xmlns:a16="http://schemas.microsoft.com/office/drawing/2014/main" id="{6EB25D7E-166F-1F3C-CD94-A7C9F6B7CF23}"/>
+                </a:ext>
+              </a:extLst>
+            </p:cNvPr>
+            <p:cNvSpPr/>
+            <p:nvPr/>
+          </p:nvSpPr>
+          <p:spPr>
+            <a:xfrm rot="16200000">
+              <a:off x="2319338" y="2703909"/>
+              <a:ext cx="1174750" cy="307975"/>
+            </a:xfrm>
+            <a:prstGeom prst="trapezoid">
+              <a:avLst/>
+            </a:prstGeom>
+          </p:spPr>
+          <p:style>
+            <a:lnRef idx="2">
+              <a:schemeClr val="dk1">
+                <a:shade val="50000"/>
+              </a:schemeClr>
+            </a:lnRef>
+            <a:fillRef idx="1">
+              <a:schemeClr val="dk1"/>
+            </a:fillRef>
+            <a:effectRef idx="0">
+              <a:schemeClr val="dk1"/>
+            </a:effectRef>
+            <a:fontRef idx="minor">
+              <a:schemeClr val="lt1"/>
+            </a:fontRef>
+          </p:style>
+          <p:txBody>
+            <a:bodyPr rtlCol="0" anchor="ctr"/>
+            <a:lstStyle/>
+            <a:p>
+              <a:pPr algn="ctr"/>
+              <a:endParaRPr lang="en-US"/>
+            </a:p>
+          </p:txBody>
+        </p:sp>
+        <p:sp>
+          <p:nvSpPr>
+            <p:cNvPr id="17" name="Trapezoid 16">
+              <a:extLst>
+                <a:ext uri="{FF2B5EF4-FFF2-40B4-BE49-F238E27FC236}">
+                  <a16:creationId xmlns:a16="http://schemas.microsoft.com/office/drawing/2014/main" id="{E1B8F03A-B916-1757-5A7A-EC26152733DD}"/>
+                </a:ext>
+              </a:extLst>
+            </p:cNvPr>
+            <p:cNvSpPr/>
+            <p:nvPr/>
+          </p:nvSpPr>
+          <p:spPr>
+            <a:xfrm rot="5400000">
+              <a:off x="3405188" y="2703909"/>
+              <a:ext cx="1174750" cy="307975"/>
+            </a:xfrm>
+            <a:prstGeom prst="trapezoid">
+              <a:avLst/>
+            </a:prstGeom>
+          </p:spPr>
+          <p:style>
+            <a:lnRef idx="2">
+              <a:schemeClr val="dk1">
+                <a:shade val="50000"/>
+              </a:schemeClr>
+            </a:lnRef>
+            <a:fillRef idx="1">
+              <a:schemeClr val="dk1"/>
+            </a:fillRef>
+            <a:effectRef idx="0">
+              <a:schemeClr val="dk1"/>
+            </a:effectRef>
+            <a:fontRef idx="minor">
+              <a:schemeClr val="lt1"/>
+            </a:fontRef>
+          </p:style>
+          <p:txBody>
+            <a:bodyPr rtlCol="0" anchor="ctr"/>
+            <a:lstStyle/>
+            <a:p>
+              <a:pPr algn="ctr"/>
+              <a:endParaRPr lang="en-US"/>
+            </a:p>
+          </p:txBody>
+        </p:sp>
+        <p:sp>
+          <p:nvSpPr>
+            <p:cNvPr id="18" name="Rectangle 17">
+              <a:extLst>
+                <a:ext uri="{FF2B5EF4-FFF2-40B4-BE49-F238E27FC236}">
+                  <a16:creationId xmlns:a16="http://schemas.microsoft.com/office/drawing/2014/main" id="{F5F206B3-5D6A-1529-3AD0-972D93EEAA42}"/>
+                </a:ext>
+              </a:extLst>
+            </p:cNvPr>
+            <p:cNvSpPr/>
+            <p:nvPr/>
+          </p:nvSpPr>
+          <p:spPr>
+            <a:xfrm>
+              <a:off x="3133725" y="1952625"/>
+              <a:ext cx="631825" cy="1682750"/>
+            </a:xfrm>
+            <a:prstGeom prst="rect">
+              <a:avLst/>
+            </a:prstGeom>
+          </p:spPr>
+          <p:style>
+            <a:lnRef idx="2">
+              <a:schemeClr val="dk1">
+                <a:shade val="50000"/>
+              </a:schemeClr>
+            </a:lnRef>
+            <a:fillRef idx="1">
+              <a:schemeClr val="dk1"/>
+            </a:fillRef>
+            <a:effectRef idx="0">
+              <a:schemeClr val="dk1"/>
+            </a:effectRef>
+            <a:fontRef idx="minor">
+              <a:schemeClr val="lt1"/>
+            </a:fontRef>
+          </p:style>
+          <p:txBody>
+            <a:bodyPr rtlCol="0" anchor="ctr"/>
+            <a:lstStyle/>
+            <a:p>
+              <a:pPr algn="ctr"/>
+              <a:endParaRPr lang="en-US"/>
+            </a:p>
+          </p:txBody>
+        </p:sp>
+        <p:sp>
+          <p:nvSpPr>
+            <p:cNvPr id="19" name="Trapezoid 18">
+              <a:extLst>
+                <a:ext uri="{FF2B5EF4-FFF2-40B4-BE49-F238E27FC236}">
+                  <a16:creationId xmlns:a16="http://schemas.microsoft.com/office/drawing/2014/main" id="{08F76E5A-78F9-2E19-44D4-C9793EA555AF}"/>
+                </a:ext>
+              </a:extLst>
+            </p:cNvPr>
+            <p:cNvSpPr/>
+            <p:nvPr/>
+          </p:nvSpPr>
+          <p:spPr>
+            <a:xfrm>
+              <a:off x="3214687" y="1634729"/>
+              <a:ext cx="469900" cy="317896"/>
+            </a:xfrm>
+            <a:prstGeom prst="trapezoid">
+              <a:avLst/>
+            </a:prstGeom>
+          </p:spPr>
+          <p:style>
+            <a:lnRef idx="2">
+              <a:schemeClr val="dk1">
+                <a:shade val="50000"/>
+              </a:schemeClr>
+            </a:lnRef>
+            <a:fillRef idx="1">
+              <a:schemeClr val="dk1"/>
+            </a:fillRef>
+            <a:effectRef idx="0">
+              <a:schemeClr val="dk1"/>
+            </a:effectRef>
+            <a:fontRef idx="minor">
+              <a:schemeClr val="lt1"/>
+            </a:fontRef>
+          </p:style>
+          <p:txBody>
+            <a:bodyPr rtlCol="0" anchor="ctr"/>
+            <a:lstStyle/>
+            <a:p>
+              <a:pPr algn="ctr"/>
+              <a:endParaRPr lang="en-US"/>
+            </a:p>
+          </p:txBody>
+        </p:sp>
+        <p:grpSp>
+          <p:nvGrpSpPr>
+            <p:cNvPr id="20" name="Group 19">
+              <a:extLst>
+                <a:ext uri="{FF2B5EF4-FFF2-40B4-BE49-F238E27FC236}">
+                  <a16:creationId xmlns:a16="http://schemas.microsoft.com/office/drawing/2014/main" id="{6828C396-A816-763A-1ADF-83AB481D720D}"/>
+                </a:ext>
+              </a:extLst>
+            </p:cNvPr>
+            <p:cNvGrpSpPr/>
+            <p:nvPr/>
+          </p:nvGrpSpPr>
+          <p:grpSpPr>
+            <a:xfrm>
+              <a:off x="3992563" y="1271400"/>
+              <a:ext cx="631825" cy="833912"/>
+              <a:chOff x="5200606" y="948929"/>
+              <a:chExt cx="895394" cy="1181783"/>
+            </a:xfrm>
+          </p:grpSpPr>
+          <p:sp>
+            <p:nvSpPr>
+              <p:cNvPr id="21" name="Isosceles Triangle 20">
+                <a:extLst>
+                  <a:ext uri="{FF2B5EF4-FFF2-40B4-BE49-F238E27FC236}">
+                    <a16:creationId xmlns:a16="http://schemas.microsoft.com/office/drawing/2014/main" id="{BA40175C-13C0-AA9E-4D8B-4E15E9311475}"/>
+                  </a:ext>
+                </a:extLst>
+              </p:cNvPr>
+              <p:cNvSpPr/>
+              <p:nvPr/>
+            </p:nvSpPr>
+            <p:spPr>
+              <a:xfrm>
+                <a:off x="5448300" y="948929"/>
+                <a:ext cx="406400" cy="558800"/>
+              </a:xfrm>
+              <a:prstGeom prst="triangle">
+                <a:avLst/>
+              </a:prstGeom>
+            </p:spPr>
+            <p:style>
+              <a:lnRef idx="2">
+                <a:schemeClr val="dk1">
+                  <a:shade val="50000"/>
+                </a:schemeClr>
+              </a:lnRef>
+              <a:fillRef idx="1">
+                <a:schemeClr val="dk1"/>
+              </a:fillRef>
+              <a:effectRef idx="0">
+                <a:schemeClr val="dk1"/>
+              </a:effectRef>
+              <a:fontRef idx="minor">
+                <a:schemeClr val="lt1"/>
+              </a:fontRef>
+            </p:style>
+            <p:txBody>
+              <a:bodyPr rtlCol="0" anchor="ctr"/>
+              <a:lstStyle/>
+              <a:p>
+                <a:pPr algn="ctr"/>
+                <a:endParaRPr lang="en-US"/>
+              </a:p>
+            </p:txBody>
+          </p:sp>
+          <p:sp>
+            <p:nvSpPr>
+              <p:cNvPr id="22" name="Isosceles Triangle 21">
+                <a:extLst>
+                  <a:ext uri="{FF2B5EF4-FFF2-40B4-BE49-F238E27FC236}">
+                    <a16:creationId xmlns:a16="http://schemas.microsoft.com/office/drawing/2014/main" id="{1891406D-FD18-EFEF-8F9C-FB574222ACB0}"/>
+                  </a:ext>
+                </a:extLst>
+              </p:cNvPr>
+              <p:cNvSpPr/>
+              <p:nvPr/>
+            </p:nvSpPr>
+            <p:spPr>
+              <a:xfrm>
+                <a:off x="5200606" y="1571912"/>
+                <a:ext cx="406400" cy="558800"/>
+              </a:xfrm>
+              <a:prstGeom prst="triangle">
+                <a:avLst/>
+              </a:prstGeom>
+            </p:spPr>
+            <p:style>
+              <a:lnRef idx="2">
+                <a:schemeClr val="dk1">
+                  <a:shade val="50000"/>
+                </a:schemeClr>
+              </a:lnRef>
+              <a:fillRef idx="1">
+                <a:schemeClr val="dk1"/>
+              </a:fillRef>
+              <a:effectRef idx="0">
+                <a:schemeClr val="dk1"/>
+              </a:effectRef>
+              <a:fontRef idx="minor">
+                <a:schemeClr val="lt1"/>
+              </a:fontRef>
+            </p:style>
+            <p:txBody>
+              <a:bodyPr rtlCol="0" anchor="ctr"/>
+              <a:lstStyle/>
+              <a:p>
+                <a:pPr algn="ctr"/>
+                <a:endParaRPr lang="en-US"/>
+              </a:p>
+            </p:txBody>
+          </p:sp>
+          <p:sp>
+            <p:nvSpPr>
+              <p:cNvPr id="23" name="Isosceles Triangle 22">
+                <a:extLst>
+                  <a:ext uri="{FF2B5EF4-FFF2-40B4-BE49-F238E27FC236}">
+                    <a16:creationId xmlns:a16="http://schemas.microsoft.com/office/drawing/2014/main" id="{95056BC6-8302-B0A8-889C-E3A5487849B4}"/>
+                  </a:ext>
+                </a:extLst>
+              </p:cNvPr>
+              <p:cNvSpPr/>
+              <p:nvPr/>
+            </p:nvSpPr>
+            <p:spPr>
+              <a:xfrm>
+                <a:off x="5689600" y="1571912"/>
+                <a:ext cx="406400" cy="558800"/>
+              </a:xfrm>
+              <a:prstGeom prst="triangle">
+                <a:avLst/>
+              </a:prstGeom>
+            </p:spPr>
+            <p:style>
+              <a:lnRef idx="2">
+                <a:schemeClr val="dk1">
+                  <a:shade val="50000"/>
+                </a:schemeClr>
+              </a:lnRef>
+              <a:fillRef idx="1">
+                <a:schemeClr val="dk1"/>
+              </a:fillRef>
+              <a:effectRef idx="0">
+                <a:schemeClr val="dk1"/>
+              </a:effectRef>
+              <a:fontRef idx="minor">
+                <a:schemeClr val="lt1"/>
+              </a:fontRef>
+            </p:style>
+            <p:txBody>
+              <a:bodyPr rtlCol="0" anchor="ctr"/>
+              <a:lstStyle/>
+              <a:p>
+                <a:pPr algn="ctr"/>
+                <a:endParaRPr lang="en-US"/>
+              </a:p>
+            </p:txBody>
+          </p:sp>
+        </p:grpSp>
+      </p:grpSp>
+      <p:grpSp>
+        <p:nvGrpSpPr>
+          <p:cNvPr id="24" name="Group 23">
+            <a:extLst>
+              <a:ext uri="{FF2B5EF4-FFF2-40B4-BE49-F238E27FC236}">
+                <a16:creationId xmlns:a16="http://schemas.microsoft.com/office/drawing/2014/main" id="{9FBC270D-C912-6F64-DFE9-522019AE3957}"/>
+              </a:ext>
+            </a:extLst>
+          </p:cNvPr>
+          <p:cNvGrpSpPr/>
+          <p:nvPr/>
+        </p:nvGrpSpPr>
+        <p:grpSpPr>
+          <a:xfrm>
+            <a:off x="8790031" y="3209529"/>
+            <a:ext cx="1371600" cy="1371600"/>
+            <a:chOff x="427081" y="263129"/>
+            <a:chExt cx="1371600" cy="1371600"/>
+          </a:xfrm>
+        </p:grpSpPr>
+        <p:sp>
+          <p:nvSpPr>
+            <p:cNvPr id="25" name="Rectangle 24">
+              <a:extLst>
+                <a:ext uri="{FF2B5EF4-FFF2-40B4-BE49-F238E27FC236}">
+                  <a16:creationId xmlns:a16="http://schemas.microsoft.com/office/drawing/2014/main" id="{B5393B3D-4FBE-A671-0C0F-BD62AE35861D}"/>
+                </a:ext>
+              </a:extLst>
+            </p:cNvPr>
+            <p:cNvSpPr/>
+            <p:nvPr/>
+          </p:nvSpPr>
+          <p:spPr>
+            <a:xfrm>
+              <a:off x="427081" y="263129"/>
+              <a:ext cx="1371600" cy="1371600"/>
+            </a:xfrm>
+            <a:prstGeom prst="rect">
+              <a:avLst/>
+            </a:prstGeom>
+            <a:noFill/>
+            <a:ln w="76200">
+              <a:solidFill>
+                <a:schemeClr val="tx1"/>
+              </a:solidFill>
+            </a:ln>
+          </p:spPr>
+          <p:style>
+            <a:lnRef idx="2">
+              <a:schemeClr val="accent1">
+                <a:shade val="50000"/>
+              </a:schemeClr>
+            </a:lnRef>
+            <a:fillRef idx="1">
+              <a:schemeClr val="accent1"/>
+            </a:fillRef>
+            <a:effectRef idx="0">
+              <a:schemeClr val="accent1"/>
+            </a:effectRef>
+            <a:fontRef idx="minor">
+              <a:schemeClr val="lt1"/>
+            </a:fontRef>
+          </p:style>
+          <p:txBody>
+            <a:bodyPr rtlCol="0" anchor="ctr"/>
+            <a:lstStyle/>
+            <a:p>
+              <a:pPr algn="ctr"/>
+              <a:endParaRPr lang="en-US"/>
+            </a:p>
+          </p:txBody>
+        </p:sp>
+        <p:sp>
+          <p:nvSpPr>
+            <p:cNvPr id="26" name="Plaque 25">
+              <a:extLst>
+                <a:ext uri="{FF2B5EF4-FFF2-40B4-BE49-F238E27FC236}">
+                  <a16:creationId xmlns:a16="http://schemas.microsoft.com/office/drawing/2014/main" id="{722FD166-4579-271F-F976-2590B33D6258}"/>
+                </a:ext>
+              </a:extLst>
+            </p:cNvPr>
+            <p:cNvSpPr/>
+            <p:nvPr/>
+          </p:nvSpPr>
+          <p:spPr>
+            <a:xfrm>
+              <a:off x="573033" y="478473"/>
+              <a:ext cx="1097280" cy="1097280"/>
+            </a:xfrm>
+            <a:prstGeom prst="plaque">
+              <a:avLst/>
+            </a:prstGeom>
+            <a:noFill/>
+            <a:ln w="38100" cap="flat" cmpd="sng" algn="ctr">
+              <a:solidFill>
+                <a:schemeClr val="dk1"/>
+              </a:solidFill>
+              <a:prstDash val="solid"/>
+              <a:round/>
+              <a:headEnd type="none" w="med" len="med"/>
+              <a:tailEnd type="none" w="med" len="med"/>
+            </a:ln>
+          </p:spPr>
+          <p:style>
+            <a:lnRef idx="0">
+              <a:scrgbClr r="0" g="0" b="0"/>
+            </a:lnRef>
+            <a:fillRef idx="0">
+              <a:scrgbClr r="0" g="0" b="0"/>
+            </a:fillRef>
+            <a:effectRef idx="0">
+              <a:scrgbClr r="0" g="0" b="0"/>
+            </a:effectRef>
+            <a:fontRef idx="minor">
+              <a:schemeClr val="dk1"/>
+            </a:fontRef>
+          </p:style>
+          <p:txBody>
+            <a:bodyPr rtlCol="0" anchor="ctr"/>
+            <a:lstStyle/>
+            <a:p>
+              <a:pPr algn="ctr"/>
+              <a:endParaRPr lang="en-US"/>
+            </a:p>
+          </p:txBody>
+        </p:sp>
+      </p:grpSp>
+      <p:grpSp>
+        <p:nvGrpSpPr>
+          <p:cNvPr id="27" name="Group 26">
+            <a:extLst>
+              <a:ext uri="{FF2B5EF4-FFF2-40B4-BE49-F238E27FC236}">
+                <a16:creationId xmlns:a16="http://schemas.microsoft.com/office/drawing/2014/main" id="{2CD3CB12-E2D0-5C30-4A6F-506F54B07124}"/>
+              </a:ext>
+            </a:extLst>
+          </p:cNvPr>
+          <p:cNvGrpSpPr/>
+          <p:nvPr/>
+        </p:nvGrpSpPr>
+        <p:grpSpPr>
+          <a:xfrm>
+            <a:off x="10250825" y="3427092"/>
+            <a:ext cx="961844" cy="961844"/>
+            <a:chOff x="3282950" y="1689100"/>
+            <a:chExt cx="1371600" cy="1371600"/>
+          </a:xfrm>
+        </p:grpSpPr>
+        <p:sp>
+          <p:nvSpPr>
+            <p:cNvPr id="28" name="Oval 27">
+              <a:extLst>
+                <a:ext uri="{FF2B5EF4-FFF2-40B4-BE49-F238E27FC236}">
+                  <a16:creationId xmlns:a16="http://schemas.microsoft.com/office/drawing/2014/main" id="{A32074B7-5055-399D-A4AE-A1104E3499F6}"/>
+                </a:ext>
+              </a:extLst>
+            </p:cNvPr>
+            <p:cNvSpPr/>
+            <p:nvPr/>
+          </p:nvSpPr>
+          <p:spPr>
+            <a:xfrm>
+              <a:off x="3282950" y="1689100"/>
+              <a:ext cx="1371600" cy="1371600"/>
+            </a:xfrm>
+            <a:prstGeom prst="ellipse">
+              <a:avLst/>
+            </a:prstGeom>
+          </p:spPr>
+          <p:style>
+            <a:lnRef idx="2">
+              <a:schemeClr val="dk1"/>
+            </a:lnRef>
+            <a:fillRef idx="1">
+              <a:schemeClr val="lt1"/>
+            </a:fillRef>
+            <a:effectRef idx="0">
+              <a:schemeClr val="dk1"/>
+            </a:effectRef>
+            <a:fontRef idx="minor">
+              <a:schemeClr val="dk1"/>
+            </a:fontRef>
+          </p:style>
+          <p:txBody>
+            <a:bodyPr rtlCol="0" anchor="ctr"/>
+            <a:lstStyle/>
+            <a:p>
+              <a:pPr algn="ctr"/>
+              <a:endParaRPr lang="en-US"/>
+            </a:p>
+          </p:txBody>
+        </p:sp>
+        <p:sp>
+          <p:nvSpPr>
+            <p:cNvPr id="29" name="Isosceles Triangle 28">
+              <a:extLst>
+                <a:ext uri="{FF2B5EF4-FFF2-40B4-BE49-F238E27FC236}">
+                  <a16:creationId xmlns:a16="http://schemas.microsoft.com/office/drawing/2014/main" id="{C2DD6A86-C952-C453-D0D6-ECA34B6DCED7}"/>
+                </a:ext>
+              </a:extLst>
+            </p:cNvPr>
+            <p:cNvSpPr/>
+            <p:nvPr/>
+          </p:nvSpPr>
+          <p:spPr>
+            <a:xfrm>
+              <a:off x="3706811" y="1689100"/>
+              <a:ext cx="547689" cy="501650"/>
+            </a:xfrm>
+            <a:prstGeom prst="triangle">
+              <a:avLst/>
+            </a:prstGeom>
+          </p:spPr>
+          <p:style>
+            <a:lnRef idx="2">
+              <a:schemeClr val="dk1">
+                <a:shade val="50000"/>
+              </a:schemeClr>
+            </a:lnRef>
+            <a:fillRef idx="1">
+              <a:schemeClr val="dk1"/>
+            </a:fillRef>
+            <a:effectRef idx="0">
+              <a:schemeClr val="dk1"/>
+            </a:effectRef>
+            <a:fontRef idx="minor">
+              <a:schemeClr val="lt1"/>
+            </a:fontRef>
+          </p:style>
+          <p:txBody>
+            <a:bodyPr rtlCol="0" anchor="ctr"/>
+            <a:lstStyle/>
+            <a:p>
+              <a:pPr algn="ctr"/>
+              <a:endParaRPr lang="en-US"/>
+            </a:p>
+          </p:txBody>
+        </p:sp>
+        <p:sp>
+          <p:nvSpPr>
+            <p:cNvPr id="30" name="Isosceles Triangle 29">
+              <a:extLst>
+                <a:ext uri="{FF2B5EF4-FFF2-40B4-BE49-F238E27FC236}">
+                  <a16:creationId xmlns:a16="http://schemas.microsoft.com/office/drawing/2014/main" id="{C7BEC5FE-DAD5-FA0F-88AD-8A0014D1261F}"/>
+                </a:ext>
+              </a:extLst>
+            </p:cNvPr>
+            <p:cNvSpPr/>
+            <p:nvPr/>
+          </p:nvSpPr>
+          <p:spPr>
+            <a:xfrm>
+              <a:off x="3409950" y="2266950"/>
+              <a:ext cx="547689" cy="501650"/>
+            </a:xfrm>
+            <a:prstGeom prst="triangle">
+              <a:avLst/>
+            </a:prstGeom>
+          </p:spPr>
+          <p:style>
+            <a:lnRef idx="2">
+              <a:schemeClr val="dk1">
+                <a:shade val="50000"/>
+              </a:schemeClr>
+            </a:lnRef>
+            <a:fillRef idx="1">
+              <a:schemeClr val="dk1"/>
+            </a:fillRef>
+            <a:effectRef idx="0">
+              <a:schemeClr val="dk1"/>
+            </a:effectRef>
+            <a:fontRef idx="minor">
+              <a:schemeClr val="lt1"/>
+            </a:fontRef>
+          </p:style>
+          <p:txBody>
+            <a:bodyPr rtlCol="0" anchor="ctr"/>
+            <a:lstStyle/>
+            <a:p>
+              <a:pPr algn="ctr"/>
+              <a:endParaRPr lang="en-US"/>
+            </a:p>
+          </p:txBody>
+        </p:sp>
+        <p:sp>
+          <p:nvSpPr>
+            <p:cNvPr id="31" name="Isosceles Triangle 30">
+              <a:extLst>
+                <a:ext uri="{FF2B5EF4-FFF2-40B4-BE49-F238E27FC236}">
+                  <a16:creationId xmlns:a16="http://schemas.microsoft.com/office/drawing/2014/main" id="{0D04A301-12DC-CAA7-64D2-E7C43DF7446F}"/>
+                </a:ext>
+              </a:extLst>
+            </p:cNvPr>
+            <p:cNvSpPr/>
+            <p:nvPr/>
+          </p:nvSpPr>
+          <p:spPr>
+            <a:xfrm>
+              <a:off x="3998910" y="2260600"/>
+              <a:ext cx="547689" cy="501650"/>
+            </a:xfrm>
+            <a:prstGeom prst="triangle">
+              <a:avLst/>
+            </a:prstGeom>
+          </p:spPr>
+          <p:style>
+            <a:lnRef idx="2">
+              <a:schemeClr val="dk1">
+                <a:shade val="50000"/>
+              </a:schemeClr>
+            </a:lnRef>
+            <a:fillRef idx="1">
+              <a:schemeClr val="dk1"/>
+            </a:fillRef>
+            <a:effectRef idx="0">
+              <a:schemeClr val="dk1"/>
+            </a:effectRef>
+            <a:fontRef idx="minor">
+              <a:schemeClr val="lt1"/>
+            </a:fontRef>
+          </p:style>
+          <p:txBody>
+            <a:bodyPr rtlCol="0" anchor="ctr"/>
+            <a:lstStyle/>
+            <a:p>
+              <a:pPr algn="ctr"/>
+              <a:endParaRPr lang="en-US"/>
+            </a:p>
+          </p:txBody>
+        </p:sp>
+      </p:grpSp>
+      <p:pic>
+        <p:nvPicPr>
+          <p:cNvPr id="32" name="Picture 31">
+            <a:extLst>
+              <a:ext uri="{FF2B5EF4-FFF2-40B4-BE49-F238E27FC236}">
+                <a16:creationId xmlns:a16="http://schemas.microsoft.com/office/drawing/2014/main" id="{C90A3DD0-3E29-5DDE-B5E2-6054DE9AE50B}"/>
+              </a:ext>
+            </a:extLst>
+          </p:cNvPr>
+          <p:cNvPicPr>
+            <a:picLocks noChangeAspect="1"/>
+          </p:cNvPicPr>
+          <p:nvPr/>
+        </p:nvPicPr>
+        <p:blipFill>
+          <a:blip r:embed="rId2"/>
+          <a:stretch>
+            <a:fillRect/>
+          </a:stretch>
+        </p:blipFill>
+        <p:spPr>
+          <a:xfrm>
+            <a:off x="609314" y="896969"/>
+            <a:ext cx="703687" cy="887381"/>
+          </a:xfrm>
+          <a:prstGeom prst="rect">
+            <a:avLst/>
+          </a:prstGeom>
+        </p:spPr>
+      </p:pic>
+      <p:grpSp>
+        <p:nvGrpSpPr>
+          <p:cNvPr id="33" name="Group 32">
+            <a:extLst>
+              <a:ext uri="{FF2B5EF4-FFF2-40B4-BE49-F238E27FC236}">
+                <a16:creationId xmlns:a16="http://schemas.microsoft.com/office/drawing/2014/main" id="{087708C9-D29F-DDD8-2031-EC5AC406CA77}"/>
+              </a:ext>
+            </a:extLst>
+          </p:cNvPr>
+          <p:cNvGrpSpPr/>
+          <p:nvPr/>
+        </p:nvGrpSpPr>
+        <p:grpSpPr>
+          <a:xfrm>
+            <a:off x="265805" y="561579"/>
+            <a:ext cx="1371600" cy="1371600"/>
+            <a:chOff x="427081" y="263129"/>
+            <a:chExt cx="1371600" cy="1371600"/>
+          </a:xfrm>
+        </p:grpSpPr>
+        <p:sp>
+          <p:nvSpPr>
+            <p:cNvPr id="34" name="Rectangle 33">
+              <a:extLst>
+                <a:ext uri="{FF2B5EF4-FFF2-40B4-BE49-F238E27FC236}">
+                  <a16:creationId xmlns:a16="http://schemas.microsoft.com/office/drawing/2014/main" id="{974176EC-4ECD-1A8D-B8AD-9DB54DB18756}"/>
+                </a:ext>
+              </a:extLst>
+            </p:cNvPr>
+            <p:cNvSpPr/>
+            <p:nvPr/>
+          </p:nvSpPr>
+          <p:spPr>
+            <a:xfrm>
+              <a:off x="427081" y="263129"/>
+              <a:ext cx="1371600" cy="1371600"/>
+            </a:xfrm>
+            <a:prstGeom prst="rect">
+              <a:avLst/>
+            </a:prstGeom>
+            <a:noFill/>
+            <a:ln w="76200">
+              <a:solidFill>
+                <a:schemeClr val="tx1"/>
+              </a:solidFill>
+            </a:ln>
+          </p:spPr>
+          <p:style>
+            <a:lnRef idx="2">
+              <a:schemeClr val="accent1">
+                <a:shade val="50000"/>
+              </a:schemeClr>
+            </a:lnRef>
+            <a:fillRef idx="1">
+              <a:schemeClr val="accent1"/>
+            </a:fillRef>
+            <a:effectRef idx="0">
+              <a:schemeClr val="accent1"/>
+            </a:effectRef>
+            <a:fontRef idx="minor">
+              <a:schemeClr val="lt1"/>
+            </a:fontRef>
+          </p:style>
+          <p:txBody>
+            <a:bodyPr rtlCol="0" anchor="ctr"/>
+            <a:lstStyle/>
+            <a:p>
+              <a:pPr algn="ctr"/>
+              <a:endParaRPr lang="en-US"/>
+            </a:p>
+          </p:txBody>
+        </p:sp>
+        <p:sp>
+          <p:nvSpPr>
+            <p:cNvPr id="35" name="Plaque 34">
+              <a:extLst>
+                <a:ext uri="{FF2B5EF4-FFF2-40B4-BE49-F238E27FC236}">
+                  <a16:creationId xmlns:a16="http://schemas.microsoft.com/office/drawing/2014/main" id="{32808C6A-D00B-6106-24DD-7AB6BE774B8E}"/>
+                </a:ext>
+              </a:extLst>
+            </p:cNvPr>
+            <p:cNvSpPr/>
+            <p:nvPr/>
+          </p:nvSpPr>
+          <p:spPr>
+            <a:xfrm>
+              <a:off x="573033" y="478473"/>
+              <a:ext cx="1097280" cy="1097280"/>
+            </a:xfrm>
+            <a:prstGeom prst="plaque">
+              <a:avLst/>
+            </a:prstGeom>
+            <a:noFill/>
+            <a:ln w="38100" cap="flat" cmpd="sng" algn="ctr">
+              <a:solidFill>
+                <a:schemeClr val="dk1"/>
+              </a:solidFill>
+              <a:prstDash val="solid"/>
+              <a:round/>
+              <a:headEnd type="none" w="med" len="med"/>
+              <a:tailEnd type="none" w="med" len="med"/>
+            </a:ln>
+          </p:spPr>
+          <p:style>
+            <a:lnRef idx="0">
+              <a:scrgbClr r="0" g="0" b="0"/>
+            </a:lnRef>
+            <a:fillRef idx="0">
+              <a:scrgbClr r="0" g="0" b="0"/>
+            </a:fillRef>
+            <a:effectRef idx="0">
+              <a:scrgbClr r="0" g="0" b="0"/>
+            </a:effectRef>
+            <a:fontRef idx="minor">
+              <a:schemeClr val="dk1"/>
+            </a:fontRef>
+          </p:style>
+          <p:txBody>
+            <a:bodyPr rtlCol="0" anchor="ctr"/>
+            <a:lstStyle/>
+            <a:p>
+              <a:pPr algn="ctr"/>
+              <a:endParaRPr lang="en-US"/>
+            </a:p>
+          </p:txBody>
+        </p:sp>
+      </p:grpSp>
+      <p:grpSp>
+        <p:nvGrpSpPr>
+          <p:cNvPr id="59" name="Group 58">
+            <a:extLst>
+              <a:ext uri="{FF2B5EF4-FFF2-40B4-BE49-F238E27FC236}">
+                <a16:creationId xmlns:a16="http://schemas.microsoft.com/office/drawing/2014/main" id="{DEA7A942-8890-2AAC-63E7-9BF5554FEFC9}"/>
+              </a:ext>
+            </a:extLst>
+          </p:cNvPr>
+          <p:cNvGrpSpPr/>
+          <p:nvPr/>
+        </p:nvGrpSpPr>
+        <p:grpSpPr>
+          <a:xfrm>
+            <a:off x="1774744" y="561579"/>
+            <a:ext cx="1371600" cy="1371600"/>
+            <a:chOff x="427081" y="263129"/>
+            <a:chExt cx="1371600" cy="1371600"/>
+          </a:xfrm>
+        </p:grpSpPr>
+        <p:sp>
+          <p:nvSpPr>
+            <p:cNvPr id="60" name="Rectangle 59">
+              <a:extLst>
+                <a:ext uri="{FF2B5EF4-FFF2-40B4-BE49-F238E27FC236}">
+                  <a16:creationId xmlns:a16="http://schemas.microsoft.com/office/drawing/2014/main" id="{14714752-E4A5-26ED-3C8E-83294F5509AE}"/>
+                </a:ext>
+              </a:extLst>
+            </p:cNvPr>
+            <p:cNvSpPr/>
+            <p:nvPr/>
+          </p:nvSpPr>
+          <p:spPr>
+            <a:xfrm>
+              <a:off x="427081" y="263129"/>
+              <a:ext cx="1371600" cy="1371600"/>
+            </a:xfrm>
+            <a:prstGeom prst="rect">
+              <a:avLst/>
+            </a:prstGeom>
+            <a:noFill/>
+            <a:ln w="76200">
+              <a:solidFill>
+                <a:schemeClr val="tx1"/>
+              </a:solidFill>
+            </a:ln>
+          </p:spPr>
+          <p:style>
+            <a:lnRef idx="2">
+              <a:schemeClr val="accent1">
+                <a:shade val="50000"/>
+              </a:schemeClr>
+            </a:lnRef>
+            <a:fillRef idx="1">
+              <a:schemeClr val="accent1"/>
+            </a:fillRef>
+            <a:effectRef idx="0">
+              <a:schemeClr val="accent1"/>
+            </a:effectRef>
+            <a:fontRef idx="minor">
+              <a:schemeClr val="lt1"/>
+            </a:fontRef>
+          </p:style>
+          <p:txBody>
+            <a:bodyPr rtlCol="0" anchor="ctr"/>
+            <a:lstStyle/>
+            <a:p>
+              <a:pPr algn="ctr"/>
+              <a:endParaRPr lang="en-US"/>
+            </a:p>
+          </p:txBody>
+        </p:sp>
+        <p:sp>
+          <p:nvSpPr>
+            <p:cNvPr id="61" name="Plaque 60">
+              <a:extLst>
+                <a:ext uri="{FF2B5EF4-FFF2-40B4-BE49-F238E27FC236}">
+                  <a16:creationId xmlns:a16="http://schemas.microsoft.com/office/drawing/2014/main" id="{394BA3E6-9E19-9F9B-57DA-95234356586E}"/>
+                </a:ext>
+              </a:extLst>
+            </p:cNvPr>
+            <p:cNvSpPr/>
+            <p:nvPr/>
+          </p:nvSpPr>
+          <p:spPr>
+            <a:xfrm>
+              <a:off x="573033" y="478473"/>
+              <a:ext cx="1097280" cy="1097280"/>
+            </a:xfrm>
+            <a:prstGeom prst="plaque">
+              <a:avLst/>
+            </a:prstGeom>
+            <a:noFill/>
+            <a:ln w="38100" cap="flat" cmpd="sng" algn="ctr">
+              <a:solidFill>
+                <a:schemeClr val="dk1"/>
+              </a:solidFill>
+              <a:prstDash val="solid"/>
+              <a:round/>
+              <a:headEnd type="none" w="med" len="med"/>
+              <a:tailEnd type="none" w="med" len="med"/>
+            </a:ln>
+          </p:spPr>
+          <p:style>
+            <a:lnRef idx="0">
+              <a:scrgbClr r="0" g="0" b="0"/>
+            </a:lnRef>
+            <a:fillRef idx="0">
+              <a:scrgbClr r="0" g="0" b="0"/>
+            </a:fillRef>
+            <a:effectRef idx="0">
+              <a:scrgbClr r="0" g="0" b="0"/>
+            </a:effectRef>
+            <a:fontRef idx="minor">
+              <a:schemeClr val="dk1"/>
+            </a:fontRef>
+          </p:style>
+          <p:txBody>
+            <a:bodyPr rtlCol="0" anchor="ctr"/>
+            <a:lstStyle/>
+            <a:p>
+              <a:pPr algn="ctr"/>
+              <a:endParaRPr lang="en-US"/>
+            </a:p>
+          </p:txBody>
+        </p:sp>
+      </p:grpSp>
+      <p:grpSp>
+        <p:nvGrpSpPr>
+          <p:cNvPr id="62" name="Group 61">
+            <a:extLst>
+              <a:ext uri="{FF2B5EF4-FFF2-40B4-BE49-F238E27FC236}">
+                <a16:creationId xmlns:a16="http://schemas.microsoft.com/office/drawing/2014/main" id="{2E75E3D7-A70B-C907-CC6D-29D73D63C577}"/>
+              </a:ext>
+            </a:extLst>
+          </p:cNvPr>
+          <p:cNvGrpSpPr/>
+          <p:nvPr/>
+        </p:nvGrpSpPr>
+        <p:grpSpPr>
+          <a:xfrm>
+            <a:off x="1996314" y="1042516"/>
+            <a:ext cx="963261" cy="626255"/>
+            <a:chOff x="648651" y="744066"/>
+            <a:chExt cx="963261" cy="626255"/>
+          </a:xfrm>
+        </p:grpSpPr>
+        <p:sp>
+          <p:nvSpPr>
+            <p:cNvPr id="63" name="Rectangle 62">
+              <a:extLst>
+                <a:ext uri="{FF2B5EF4-FFF2-40B4-BE49-F238E27FC236}">
+                  <a16:creationId xmlns:a16="http://schemas.microsoft.com/office/drawing/2014/main" id="{6C8D67DB-46FD-1704-C0D8-276B5725887D}"/>
+                </a:ext>
+              </a:extLst>
+            </p:cNvPr>
+            <p:cNvSpPr/>
+            <p:nvPr/>
+          </p:nvSpPr>
+          <p:spPr>
+            <a:xfrm rot="209926">
+              <a:off x="666143" y="770809"/>
+              <a:ext cx="239261" cy="52309"/>
+            </a:xfrm>
+            <a:prstGeom prst="rect">
+              <a:avLst/>
+            </a:prstGeom>
+          </p:spPr>
+          <p:style>
+            <a:lnRef idx="2">
+              <a:schemeClr val="dk1"/>
+            </a:lnRef>
+            <a:fillRef idx="1">
+              <a:schemeClr val="lt1"/>
+            </a:fillRef>
+            <a:effectRef idx="0">
+              <a:schemeClr val="dk1"/>
+            </a:effectRef>
+            <a:fontRef idx="minor">
+              <a:schemeClr val="dk1"/>
+            </a:fontRef>
+          </p:style>
+          <p:txBody>
+            <a:bodyPr rtlCol="0" anchor="ctr"/>
+            <a:lstStyle/>
+            <a:p>
+              <a:pPr algn="ctr"/>
+              <a:endParaRPr lang="en-US"/>
+            </a:p>
+          </p:txBody>
+        </p:sp>
+        <p:sp>
+          <p:nvSpPr>
+            <p:cNvPr id="64" name="Rectangle 63">
+              <a:extLst>
+                <a:ext uri="{FF2B5EF4-FFF2-40B4-BE49-F238E27FC236}">
+                  <a16:creationId xmlns:a16="http://schemas.microsoft.com/office/drawing/2014/main" id="{C0BE7C0D-4754-2FF7-89ED-F7EEF5677263}"/>
+                </a:ext>
+              </a:extLst>
+            </p:cNvPr>
+            <p:cNvSpPr/>
+            <p:nvPr/>
+          </p:nvSpPr>
+          <p:spPr>
+            <a:xfrm rot="2298692">
+              <a:off x="937159" y="1175450"/>
+              <a:ext cx="80573" cy="181646"/>
+            </a:xfrm>
+            <a:prstGeom prst="rect">
+              <a:avLst/>
+            </a:prstGeom>
+          </p:spPr>
+          <p:style>
+            <a:lnRef idx="2">
+              <a:schemeClr val="dk1">
+                <a:shade val="50000"/>
+              </a:schemeClr>
+            </a:lnRef>
+            <a:fillRef idx="1">
+              <a:schemeClr val="dk1"/>
+            </a:fillRef>
+            <a:effectRef idx="0">
+              <a:schemeClr val="dk1"/>
+            </a:effectRef>
+            <a:fontRef idx="minor">
+              <a:schemeClr val="lt1"/>
+            </a:fontRef>
+          </p:style>
+          <p:txBody>
+            <a:bodyPr rtlCol="0" anchor="ctr"/>
+            <a:lstStyle/>
+            <a:p>
+              <a:pPr algn="ctr"/>
+              <a:endParaRPr lang="en-US"/>
+            </a:p>
+          </p:txBody>
+        </p:sp>
+        <p:sp>
+          <p:nvSpPr>
+            <p:cNvPr id="65" name="Rectangle 64">
+              <a:extLst>
+                <a:ext uri="{FF2B5EF4-FFF2-40B4-BE49-F238E27FC236}">
+                  <a16:creationId xmlns:a16="http://schemas.microsoft.com/office/drawing/2014/main" id="{BB2C1F20-39DD-E5C0-6216-064224E2D397}"/>
+                </a:ext>
+              </a:extLst>
+            </p:cNvPr>
+            <p:cNvSpPr/>
+            <p:nvPr/>
+          </p:nvSpPr>
+          <p:spPr>
+            <a:xfrm rot="19125484">
+              <a:off x="895519" y="1010551"/>
+              <a:ext cx="124644" cy="181646"/>
+            </a:xfrm>
+            <a:prstGeom prst="rect">
+              <a:avLst/>
+            </a:prstGeom>
+          </p:spPr>
+          <p:style>
+            <a:lnRef idx="2">
+              <a:schemeClr val="dk1">
+                <a:shade val="50000"/>
+              </a:schemeClr>
+            </a:lnRef>
+            <a:fillRef idx="1">
+              <a:schemeClr val="dk1"/>
+            </a:fillRef>
+            <a:effectRef idx="0">
+              <a:schemeClr val="dk1"/>
+            </a:effectRef>
+            <a:fontRef idx="minor">
+              <a:schemeClr val="lt1"/>
+            </a:fontRef>
+          </p:style>
+          <p:txBody>
+            <a:bodyPr rtlCol="0" anchor="ctr"/>
+            <a:lstStyle/>
+            <a:p>
+              <a:pPr algn="ctr"/>
+              <a:endParaRPr lang="en-US"/>
+            </a:p>
+          </p:txBody>
+        </p:sp>
+        <p:sp>
+          <p:nvSpPr>
+            <p:cNvPr id="66" name="Oval 65">
+              <a:extLst>
+                <a:ext uri="{FF2B5EF4-FFF2-40B4-BE49-F238E27FC236}">
+                  <a16:creationId xmlns:a16="http://schemas.microsoft.com/office/drawing/2014/main" id="{35CBFBD6-BE5D-AD3B-14CA-B8163ECBA34E}"/>
+                </a:ext>
+              </a:extLst>
+            </p:cNvPr>
+            <p:cNvSpPr/>
+            <p:nvPr/>
+          </p:nvSpPr>
+          <p:spPr>
+            <a:xfrm rot="16340403">
+              <a:off x="960709" y="1110544"/>
+              <a:ext cx="127799" cy="127799"/>
+            </a:xfrm>
+            <a:prstGeom prst="ellipse">
+              <a:avLst/>
+            </a:prstGeom>
+            <a:ln w="38100"/>
+          </p:spPr>
+          <p:style>
+            <a:lnRef idx="2">
+              <a:schemeClr val="dk1"/>
+            </a:lnRef>
+            <a:fillRef idx="1">
+              <a:schemeClr val="lt1"/>
+            </a:fillRef>
+            <a:effectRef idx="0">
+              <a:schemeClr val="dk1"/>
+            </a:effectRef>
+            <a:fontRef idx="minor">
+              <a:schemeClr val="dk1"/>
+            </a:fontRef>
+          </p:style>
+          <p:txBody>
+            <a:bodyPr rtlCol="0" anchor="ctr"/>
+            <a:lstStyle/>
+            <a:p>
+              <a:pPr algn="ctr"/>
+              <a:endParaRPr lang="en-US"/>
+            </a:p>
+          </p:txBody>
+        </p:sp>
+        <p:sp>
+          <p:nvSpPr>
+            <p:cNvPr id="67" name="Rectangle 66">
+              <a:extLst>
+                <a:ext uri="{FF2B5EF4-FFF2-40B4-BE49-F238E27FC236}">
+                  <a16:creationId xmlns:a16="http://schemas.microsoft.com/office/drawing/2014/main" id="{4C2C217D-1677-FF14-1925-03FDC0C0B4D2}"/>
+                </a:ext>
+              </a:extLst>
+            </p:cNvPr>
+            <p:cNvSpPr/>
+            <p:nvPr/>
+          </p:nvSpPr>
+          <p:spPr>
+            <a:xfrm rot="21559864">
+              <a:off x="827784" y="1308483"/>
+              <a:ext cx="176985" cy="61838"/>
+            </a:xfrm>
+            <a:prstGeom prst="rect">
+              <a:avLst/>
+            </a:prstGeom>
+          </p:spPr>
+          <p:style>
+            <a:lnRef idx="2">
+              <a:schemeClr val="dk1">
+                <a:shade val="50000"/>
+              </a:schemeClr>
+            </a:lnRef>
+            <a:fillRef idx="1">
+              <a:schemeClr val="dk1"/>
+            </a:fillRef>
+            <a:effectRef idx="0">
+              <a:schemeClr val="dk1"/>
+            </a:effectRef>
+            <a:fontRef idx="minor">
+              <a:schemeClr val="lt1"/>
+            </a:fontRef>
+          </p:style>
+          <p:txBody>
+            <a:bodyPr rtlCol="0" anchor="ctr"/>
+            <a:lstStyle/>
+            <a:p>
+              <a:pPr algn="ctr"/>
+              <a:endParaRPr lang="en-US"/>
+            </a:p>
+          </p:txBody>
+        </p:sp>
+        <p:sp>
+          <p:nvSpPr>
+            <p:cNvPr id="68" name="Rectangle 67">
+              <a:extLst>
+                <a:ext uri="{FF2B5EF4-FFF2-40B4-BE49-F238E27FC236}">
+                  <a16:creationId xmlns:a16="http://schemas.microsoft.com/office/drawing/2014/main" id="{FE89511A-15B1-E55D-AFE7-72B827EAE297}"/>
+                </a:ext>
+              </a:extLst>
+            </p:cNvPr>
+            <p:cNvSpPr/>
+            <p:nvPr/>
+          </p:nvSpPr>
+          <p:spPr>
+            <a:xfrm>
+              <a:off x="730780" y="884797"/>
+              <a:ext cx="385680" cy="182447"/>
+            </a:xfrm>
+            <a:prstGeom prst="rect">
+              <a:avLst/>
+            </a:prstGeom>
+          </p:spPr>
+          <p:style>
+            <a:lnRef idx="2">
+              <a:schemeClr val="dk1">
+                <a:shade val="50000"/>
+              </a:schemeClr>
+            </a:lnRef>
+            <a:fillRef idx="1">
+              <a:schemeClr val="dk1"/>
+            </a:fillRef>
+            <a:effectRef idx="0">
+              <a:schemeClr val="dk1"/>
+            </a:effectRef>
+            <a:fontRef idx="minor">
+              <a:schemeClr val="lt1"/>
+            </a:fontRef>
+          </p:style>
+          <p:txBody>
+            <a:bodyPr rtlCol="0" anchor="ctr"/>
+            <a:lstStyle/>
+            <a:p>
+              <a:pPr algn="ctr"/>
+              <a:endParaRPr lang="en-US"/>
+            </a:p>
+          </p:txBody>
+        </p:sp>
+        <p:sp>
+          <p:nvSpPr>
+            <p:cNvPr id="69" name="Rectangle 68">
+              <a:extLst>
+                <a:ext uri="{FF2B5EF4-FFF2-40B4-BE49-F238E27FC236}">
+                  <a16:creationId xmlns:a16="http://schemas.microsoft.com/office/drawing/2014/main" id="{62541D4B-6E6B-B928-A71E-B08D808BF098}"/>
+                </a:ext>
+              </a:extLst>
+            </p:cNvPr>
+            <p:cNvSpPr/>
+            <p:nvPr/>
+          </p:nvSpPr>
+          <p:spPr>
+            <a:xfrm rot="1347909">
+              <a:off x="1129217" y="948909"/>
+              <a:ext cx="127799" cy="101971"/>
+            </a:xfrm>
+            <a:prstGeom prst="rect">
+              <a:avLst/>
+            </a:prstGeom>
+          </p:spPr>
+          <p:style>
+            <a:lnRef idx="2">
+              <a:schemeClr val="dk1">
+                <a:shade val="50000"/>
+              </a:schemeClr>
+            </a:lnRef>
+            <a:fillRef idx="1">
+              <a:schemeClr val="dk1"/>
+            </a:fillRef>
+            <a:effectRef idx="0">
+              <a:schemeClr val="dk1"/>
+            </a:effectRef>
+            <a:fontRef idx="minor">
+              <a:schemeClr val="lt1"/>
+            </a:fontRef>
+          </p:style>
+          <p:txBody>
+            <a:bodyPr rtlCol="0" anchor="ctr"/>
+            <a:lstStyle/>
+            <a:p>
+              <a:pPr algn="ctr"/>
+              <a:endParaRPr lang="en-US"/>
+            </a:p>
+          </p:txBody>
+        </p:sp>
+        <p:sp>
+          <p:nvSpPr>
+            <p:cNvPr id="70" name="Oval 69">
+              <a:extLst>
+                <a:ext uri="{FF2B5EF4-FFF2-40B4-BE49-F238E27FC236}">
+                  <a16:creationId xmlns:a16="http://schemas.microsoft.com/office/drawing/2014/main" id="{DC1F132F-1D16-74FF-4344-D7067A1D43A9}"/>
+                </a:ext>
+              </a:extLst>
+            </p:cNvPr>
+            <p:cNvSpPr/>
+            <p:nvPr/>
+          </p:nvSpPr>
+          <p:spPr>
+            <a:xfrm rot="16200000">
+              <a:off x="1050684" y="904153"/>
+              <a:ext cx="127799" cy="127799"/>
+            </a:xfrm>
+            <a:prstGeom prst="ellipse">
+              <a:avLst/>
+            </a:prstGeom>
+            <a:ln w="38100"/>
+          </p:spPr>
+          <p:style>
+            <a:lnRef idx="2">
+              <a:schemeClr val="dk1"/>
+            </a:lnRef>
+            <a:fillRef idx="1">
+              <a:schemeClr val="lt1"/>
+            </a:fillRef>
+            <a:effectRef idx="0">
+              <a:schemeClr val="dk1"/>
+            </a:effectRef>
+            <a:fontRef idx="minor">
+              <a:schemeClr val="dk1"/>
+            </a:fontRef>
+          </p:style>
+          <p:txBody>
+            <a:bodyPr rtlCol="0" anchor="ctr"/>
+            <a:lstStyle/>
+            <a:p>
+              <a:pPr algn="ctr"/>
+              <a:endParaRPr lang="en-US"/>
+            </a:p>
+          </p:txBody>
+        </p:sp>
+        <p:sp>
+          <p:nvSpPr>
+            <p:cNvPr id="71" name="Rectangle 70">
+              <a:extLst>
+                <a:ext uri="{FF2B5EF4-FFF2-40B4-BE49-F238E27FC236}">
+                  <a16:creationId xmlns:a16="http://schemas.microsoft.com/office/drawing/2014/main" id="{1D753AA5-7D00-39DC-3F62-102773C138BE}"/>
+                </a:ext>
+              </a:extLst>
+            </p:cNvPr>
+            <p:cNvSpPr/>
+            <p:nvPr/>
+          </p:nvSpPr>
+          <p:spPr>
+            <a:xfrm rot="470651">
+              <a:off x="1233938" y="976327"/>
+              <a:ext cx="127799" cy="95167"/>
+            </a:xfrm>
+            <a:prstGeom prst="rect">
+              <a:avLst/>
+            </a:prstGeom>
+          </p:spPr>
+          <p:style>
+            <a:lnRef idx="2">
+              <a:schemeClr val="dk1">
+                <a:shade val="50000"/>
+              </a:schemeClr>
+            </a:lnRef>
+            <a:fillRef idx="1">
+              <a:schemeClr val="dk1"/>
+            </a:fillRef>
+            <a:effectRef idx="0">
+              <a:schemeClr val="dk1"/>
+            </a:effectRef>
+            <a:fontRef idx="minor">
+              <a:schemeClr val="lt1"/>
+            </a:fontRef>
+          </p:style>
+          <p:txBody>
+            <a:bodyPr rtlCol="0" anchor="ctr"/>
+            <a:lstStyle/>
+            <a:p>
+              <a:pPr algn="ctr"/>
+              <a:endParaRPr lang="en-US"/>
+            </a:p>
+          </p:txBody>
+        </p:sp>
+        <p:sp>
+          <p:nvSpPr>
+            <p:cNvPr id="72" name="Rectangle 71">
+              <a:extLst>
+                <a:ext uri="{FF2B5EF4-FFF2-40B4-BE49-F238E27FC236}">
+                  <a16:creationId xmlns:a16="http://schemas.microsoft.com/office/drawing/2014/main" id="{D0490D8A-BB54-87B5-FBAE-8D49FA6FB878}"/>
+                </a:ext>
+              </a:extLst>
+            </p:cNvPr>
+            <p:cNvSpPr/>
+            <p:nvPr/>
+          </p:nvSpPr>
+          <p:spPr>
+            <a:xfrm rot="21265202">
+              <a:off x="1317139" y="974084"/>
+              <a:ext cx="127799" cy="75981"/>
+            </a:xfrm>
+            <a:prstGeom prst="rect">
+              <a:avLst/>
+            </a:prstGeom>
+          </p:spPr>
+          <p:style>
+            <a:lnRef idx="2">
+              <a:schemeClr val="dk1">
+                <a:shade val="50000"/>
+              </a:schemeClr>
+            </a:lnRef>
+            <a:fillRef idx="1">
+              <a:schemeClr val="dk1"/>
+            </a:fillRef>
+            <a:effectRef idx="0">
+              <a:schemeClr val="dk1"/>
+            </a:effectRef>
+            <a:fontRef idx="minor">
+              <a:schemeClr val="lt1"/>
+            </a:fontRef>
+          </p:style>
+          <p:txBody>
+            <a:bodyPr rtlCol="0" anchor="ctr"/>
+            <a:lstStyle/>
+            <a:p>
+              <a:pPr algn="ctr"/>
+              <a:endParaRPr lang="en-US"/>
+            </a:p>
+          </p:txBody>
+        </p:sp>
+        <p:sp>
+          <p:nvSpPr>
+            <p:cNvPr id="73" name="Rectangle 72">
+              <a:extLst>
+                <a:ext uri="{FF2B5EF4-FFF2-40B4-BE49-F238E27FC236}">
+                  <a16:creationId xmlns:a16="http://schemas.microsoft.com/office/drawing/2014/main" id="{59936618-E9A8-6B09-A705-098026B1641B}"/>
+                </a:ext>
+              </a:extLst>
+            </p:cNvPr>
+            <p:cNvSpPr/>
+            <p:nvPr/>
+          </p:nvSpPr>
+          <p:spPr>
+            <a:xfrm rot="20266641">
+              <a:off x="1391056" y="950213"/>
+              <a:ext cx="127799" cy="71395"/>
+            </a:xfrm>
+            <a:prstGeom prst="rect">
+              <a:avLst/>
+            </a:prstGeom>
+          </p:spPr>
+          <p:style>
+            <a:lnRef idx="2">
+              <a:schemeClr val="dk1">
+                <a:shade val="50000"/>
+              </a:schemeClr>
+            </a:lnRef>
+            <a:fillRef idx="1">
+              <a:schemeClr val="dk1"/>
+            </a:fillRef>
+            <a:effectRef idx="0">
+              <a:schemeClr val="dk1"/>
+            </a:effectRef>
+            <a:fontRef idx="minor">
+              <a:schemeClr val="lt1"/>
+            </a:fontRef>
+          </p:style>
+          <p:txBody>
+            <a:bodyPr rtlCol="0" anchor="ctr"/>
+            <a:lstStyle/>
+            <a:p>
+              <a:pPr algn="ctr"/>
+              <a:endParaRPr lang="en-US"/>
+            </a:p>
+          </p:txBody>
+        </p:sp>
+        <p:sp>
+          <p:nvSpPr>
+            <p:cNvPr id="74" name="Rectangle 73">
+              <a:extLst>
+                <a:ext uri="{FF2B5EF4-FFF2-40B4-BE49-F238E27FC236}">
+                  <a16:creationId xmlns:a16="http://schemas.microsoft.com/office/drawing/2014/main" id="{E1BC772E-B803-B031-69E2-01013AA023EA}"/>
+                </a:ext>
+              </a:extLst>
+            </p:cNvPr>
+            <p:cNvSpPr/>
+            <p:nvPr/>
+          </p:nvSpPr>
+          <p:spPr>
+            <a:xfrm rot="21118181">
+              <a:off x="1466604" y="928247"/>
+              <a:ext cx="145308" cy="61838"/>
+            </a:xfrm>
+            <a:prstGeom prst="rect">
+              <a:avLst/>
+            </a:prstGeom>
+          </p:spPr>
+          <p:style>
+            <a:lnRef idx="2">
+              <a:schemeClr val="dk1">
+                <a:shade val="50000"/>
+              </a:schemeClr>
+            </a:lnRef>
+            <a:fillRef idx="1">
+              <a:schemeClr val="dk1"/>
+            </a:fillRef>
+            <a:effectRef idx="0">
+              <a:schemeClr val="dk1"/>
+            </a:effectRef>
+            <a:fontRef idx="minor">
+              <a:schemeClr val="lt1"/>
+            </a:fontRef>
+          </p:style>
+          <p:txBody>
+            <a:bodyPr rtlCol="0" anchor="ctr"/>
+            <a:lstStyle/>
+            <a:p>
+              <a:pPr algn="ctr"/>
+              <a:endParaRPr lang="en-US"/>
+            </a:p>
+          </p:txBody>
+        </p:sp>
+        <p:sp>
+          <p:nvSpPr>
+            <p:cNvPr id="75" name="Plaque 74">
+              <a:extLst>
+                <a:ext uri="{FF2B5EF4-FFF2-40B4-BE49-F238E27FC236}">
+                  <a16:creationId xmlns:a16="http://schemas.microsoft.com/office/drawing/2014/main" id="{0EBE46AE-E2C8-3B6B-35F2-CB0B30F61C86}"/>
+                </a:ext>
+              </a:extLst>
+            </p:cNvPr>
+            <p:cNvSpPr/>
+            <p:nvPr/>
+          </p:nvSpPr>
+          <p:spPr>
+            <a:xfrm rot="20943061">
+              <a:off x="648651" y="892255"/>
+              <a:ext cx="176184" cy="173439"/>
+            </a:xfrm>
+            <a:prstGeom prst="plaque">
+              <a:avLst>
+                <a:gd name="adj" fmla="val 25032"/>
+              </a:avLst>
+            </a:prstGeom>
+          </p:spPr>
+          <p:style>
+            <a:lnRef idx="2">
+              <a:schemeClr val="dk1">
+                <a:shade val="50000"/>
+              </a:schemeClr>
+            </a:lnRef>
+            <a:fillRef idx="1">
+              <a:schemeClr val="dk1"/>
+            </a:fillRef>
+            <a:effectRef idx="0">
+              <a:schemeClr val="dk1"/>
+            </a:effectRef>
+            <a:fontRef idx="minor">
+              <a:schemeClr val="lt1"/>
+            </a:fontRef>
+          </p:style>
+          <p:txBody>
+            <a:bodyPr rtlCol="0" anchor="ctr"/>
+            <a:lstStyle/>
+            <a:p>
+              <a:pPr algn="ctr"/>
+              <a:endParaRPr lang="en-US"/>
+            </a:p>
+          </p:txBody>
+        </p:sp>
+        <p:sp>
+          <p:nvSpPr>
+            <p:cNvPr id="76" name="Oval 75">
+              <a:extLst>
+                <a:ext uri="{FF2B5EF4-FFF2-40B4-BE49-F238E27FC236}">
+                  <a16:creationId xmlns:a16="http://schemas.microsoft.com/office/drawing/2014/main" id="{9D4B0599-80DE-EABF-9FE4-A62DF41D7A99}"/>
+                </a:ext>
+              </a:extLst>
+            </p:cNvPr>
+            <p:cNvSpPr/>
+            <p:nvPr/>
+          </p:nvSpPr>
+          <p:spPr>
+            <a:xfrm rot="16200000">
+              <a:off x="806291" y="940142"/>
+              <a:ext cx="157066" cy="157066"/>
+            </a:xfrm>
+            <a:prstGeom prst="ellipse">
+              <a:avLst/>
+            </a:prstGeom>
+            <a:ln w="38100"/>
+          </p:spPr>
+          <p:style>
+            <a:lnRef idx="2">
+              <a:schemeClr val="dk1"/>
+            </a:lnRef>
+            <a:fillRef idx="1">
+              <a:schemeClr val="lt1"/>
+            </a:fillRef>
+            <a:effectRef idx="0">
+              <a:schemeClr val="dk1"/>
+            </a:effectRef>
+            <a:fontRef idx="minor">
+              <a:schemeClr val="dk1"/>
+            </a:fontRef>
+          </p:style>
+          <p:txBody>
+            <a:bodyPr rtlCol="0" anchor="ctr"/>
+            <a:lstStyle/>
+            <a:p>
+              <a:pPr algn="ctr"/>
+              <a:endParaRPr lang="en-US"/>
+            </a:p>
+          </p:txBody>
+        </p:sp>
+        <p:sp>
+          <p:nvSpPr>
+            <p:cNvPr id="77" name="Rectangle: Diagonal Corners Snipped 76">
+              <a:extLst>
+                <a:ext uri="{FF2B5EF4-FFF2-40B4-BE49-F238E27FC236}">
+                  <a16:creationId xmlns:a16="http://schemas.microsoft.com/office/drawing/2014/main" id="{021E0D86-BC24-C55D-88AA-3C41B9B7B2D6}"/>
+                </a:ext>
+              </a:extLst>
+            </p:cNvPr>
+            <p:cNvSpPr/>
+            <p:nvPr/>
+          </p:nvSpPr>
+          <p:spPr>
+            <a:xfrm flipH="1">
+              <a:off x="820699" y="744066"/>
+              <a:ext cx="229986" cy="123357"/>
+            </a:xfrm>
+            <a:prstGeom prst="snip2DiagRect">
+              <a:avLst>
+                <a:gd name="adj1" fmla="val 0"/>
+                <a:gd name="adj2" fmla="val 50000"/>
+              </a:avLst>
+            </a:prstGeom>
+          </p:spPr>
+          <p:style>
+            <a:lnRef idx="2">
+              <a:schemeClr val="dk1">
+                <a:shade val="50000"/>
+              </a:schemeClr>
+            </a:lnRef>
+            <a:fillRef idx="1">
+              <a:schemeClr val="dk1"/>
+            </a:fillRef>
+            <a:effectRef idx="0">
+              <a:schemeClr val="dk1"/>
+            </a:effectRef>
+            <a:fontRef idx="minor">
+              <a:schemeClr val="lt1"/>
+            </a:fontRef>
+          </p:style>
+          <p:txBody>
+            <a:bodyPr rtlCol="0" anchor="ctr"/>
+            <a:lstStyle/>
+            <a:p>
+              <a:pPr algn="ctr"/>
+              <a:endParaRPr lang="en-US"/>
+            </a:p>
+          </p:txBody>
+        </p:sp>
+      </p:grpSp>
+      <p:grpSp>
+        <p:nvGrpSpPr>
+          <p:cNvPr id="78" name="Group 77">
+            <a:extLst>
+              <a:ext uri="{FF2B5EF4-FFF2-40B4-BE49-F238E27FC236}">
+                <a16:creationId xmlns:a16="http://schemas.microsoft.com/office/drawing/2014/main" id="{B2890390-503C-D5A8-EC43-6C168A666691}"/>
+              </a:ext>
+            </a:extLst>
+          </p:cNvPr>
+          <p:cNvGrpSpPr/>
+          <p:nvPr/>
+        </p:nvGrpSpPr>
+        <p:grpSpPr>
+          <a:xfrm>
+            <a:off x="3283683" y="561579"/>
+            <a:ext cx="1371600" cy="1371600"/>
+            <a:chOff x="427081" y="263129"/>
+            <a:chExt cx="1371600" cy="1371600"/>
+          </a:xfrm>
+        </p:grpSpPr>
+        <p:sp>
+          <p:nvSpPr>
+            <p:cNvPr id="79" name="Rectangle 78">
+              <a:extLst>
+                <a:ext uri="{FF2B5EF4-FFF2-40B4-BE49-F238E27FC236}">
+                  <a16:creationId xmlns:a16="http://schemas.microsoft.com/office/drawing/2014/main" id="{830C43A6-41E0-62A4-BD0B-D14C98A2742E}"/>
+                </a:ext>
+              </a:extLst>
+            </p:cNvPr>
+            <p:cNvSpPr/>
+            <p:nvPr/>
+          </p:nvSpPr>
+          <p:spPr>
+            <a:xfrm>
+              <a:off x="427081" y="263129"/>
+              <a:ext cx="1371600" cy="1371600"/>
+            </a:xfrm>
+            <a:prstGeom prst="rect">
+              <a:avLst/>
+            </a:prstGeom>
+            <a:noFill/>
+            <a:ln w="76200">
+              <a:solidFill>
+                <a:schemeClr val="tx1"/>
+              </a:solidFill>
+            </a:ln>
+          </p:spPr>
+          <p:style>
+            <a:lnRef idx="2">
+              <a:schemeClr val="accent1">
+                <a:shade val="50000"/>
+              </a:schemeClr>
+            </a:lnRef>
+            <a:fillRef idx="1">
+              <a:schemeClr val="accent1"/>
+            </a:fillRef>
+            <a:effectRef idx="0">
+              <a:schemeClr val="accent1"/>
+            </a:effectRef>
+            <a:fontRef idx="minor">
+              <a:schemeClr val="lt1"/>
+            </a:fontRef>
+          </p:style>
+          <p:txBody>
+            <a:bodyPr rtlCol="0" anchor="ctr"/>
+            <a:lstStyle/>
+            <a:p>
+              <a:pPr algn="ctr"/>
+              <a:endParaRPr lang="en-US"/>
+            </a:p>
+          </p:txBody>
+        </p:sp>
+        <p:sp>
+          <p:nvSpPr>
+            <p:cNvPr id="80" name="Plaque 79">
+              <a:extLst>
+                <a:ext uri="{FF2B5EF4-FFF2-40B4-BE49-F238E27FC236}">
+                  <a16:creationId xmlns:a16="http://schemas.microsoft.com/office/drawing/2014/main" id="{1FB2D449-1D66-1624-2472-12B05274EAA2}"/>
+                </a:ext>
+              </a:extLst>
+            </p:cNvPr>
+            <p:cNvSpPr/>
+            <p:nvPr/>
+          </p:nvSpPr>
+          <p:spPr>
+            <a:xfrm>
+              <a:off x="573033" y="478473"/>
+              <a:ext cx="1097280" cy="1097280"/>
+            </a:xfrm>
+            <a:prstGeom prst="plaque">
+              <a:avLst/>
+            </a:prstGeom>
+            <a:noFill/>
+            <a:ln w="38100" cap="flat" cmpd="sng" algn="ctr">
+              <a:solidFill>
+                <a:schemeClr val="dk1"/>
+              </a:solidFill>
+              <a:prstDash val="solid"/>
+              <a:round/>
+              <a:headEnd type="none" w="med" len="med"/>
+              <a:tailEnd type="none" w="med" len="med"/>
+            </a:ln>
+          </p:spPr>
+          <p:style>
+            <a:lnRef idx="0">
+              <a:scrgbClr r="0" g="0" b="0"/>
+            </a:lnRef>
+            <a:fillRef idx="0">
+              <a:scrgbClr r="0" g="0" b="0"/>
+            </a:fillRef>
+            <a:effectRef idx="0">
+              <a:scrgbClr r="0" g="0" b="0"/>
+            </a:effectRef>
+            <a:fontRef idx="minor">
+              <a:schemeClr val="dk1"/>
+            </a:fontRef>
+          </p:style>
+          <p:txBody>
+            <a:bodyPr rtlCol="0" anchor="ctr"/>
+            <a:lstStyle/>
+            <a:p>
+              <a:pPr algn="ctr"/>
+              <a:endParaRPr lang="en-US"/>
+            </a:p>
+          </p:txBody>
+        </p:sp>
+      </p:grpSp>
+      <p:grpSp>
+        <p:nvGrpSpPr>
+          <p:cNvPr id="81" name="Group 80">
+            <a:extLst>
+              <a:ext uri="{FF2B5EF4-FFF2-40B4-BE49-F238E27FC236}">
+                <a16:creationId xmlns:a16="http://schemas.microsoft.com/office/drawing/2014/main" id="{2CE8F478-2321-90BC-D24F-1F403E408287}"/>
+              </a:ext>
+            </a:extLst>
+          </p:cNvPr>
+          <p:cNvGrpSpPr/>
+          <p:nvPr/>
+        </p:nvGrpSpPr>
+        <p:grpSpPr>
+          <a:xfrm>
+            <a:off x="3521060" y="981522"/>
+            <a:ext cx="907668" cy="622697"/>
+            <a:chOff x="2768462" y="1630604"/>
+            <a:chExt cx="3099528" cy="2126402"/>
+          </a:xfrm>
+        </p:grpSpPr>
+        <p:sp>
+          <p:nvSpPr>
+            <p:cNvPr id="82" name="Rectangle 81">
+              <a:extLst>
+                <a:ext uri="{FF2B5EF4-FFF2-40B4-BE49-F238E27FC236}">
+                  <a16:creationId xmlns:a16="http://schemas.microsoft.com/office/drawing/2014/main" id="{B261C09D-CCF5-B178-2678-EEA171700145}"/>
+                </a:ext>
+              </a:extLst>
+            </p:cNvPr>
+            <p:cNvSpPr/>
+            <p:nvPr/>
+          </p:nvSpPr>
+          <p:spPr>
+            <a:xfrm>
+              <a:off x="3951162" y="3217961"/>
+              <a:ext cx="894382" cy="386255"/>
+            </a:xfrm>
+            <a:prstGeom prst="rect">
+              <a:avLst/>
+            </a:prstGeom>
+          </p:spPr>
+          <p:style>
+            <a:lnRef idx="2">
+              <a:schemeClr val="dk1">
+                <a:shade val="50000"/>
+              </a:schemeClr>
+            </a:lnRef>
+            <a:fillRef idx="1">
+              <a:schemeClr val="dk1"/>
+            </a:fillRef>
+            <a:effectRef idx="0">
+              <a:schemeClr val="dk1"/>
+            </a:effectRef>
+            <a:fontRef idx="minor">
+              <a:schemeClr val="lt1"/>
+            </a:fontRef>
+          </p:style>
+          <p:txBody>
+            <a:bodyPr rtlCol="0" anchor="ctr"/>
+            <a:lstStyle/>
+            <a:p>
+              <a:pPr algn="ctr"/>
+              <a:endParaRPr lang="en-US"/>
+            </a:p>
+          </p:txBody>
+        </p:sp>
+        <p:sp>
+          <p:nvSpPr>
+            <p:cNvPr id="83" name="Rectangle 82">
+              <a:extLst>
+                <a:ext uri="{FF2B5EF4-FFF2-40B4-BE49-F238E27FC236}">
+                  <a16:creationId xmlns:a16="http://schemas.microsoft.com/office/drawing/2014/main" id="{B2465D73-F0D0-A956-0EF5-3A057A8A04D2}"/>
+                </a:ext>
+              </a:extLst>
+            </p:cNvPr>
+            <p:cNvSpPr/>
+            <p:nvPr/>
+          </p:nvSpPr>
+          <p:spPr>
+            <a:xfrm>
+              <a:off x="3745275" y="2561897"/>
+              <a:ext cx="1305472" cy="617557"/>
+            </a:xfrm>
+            <a:prstGeom prst="rect">
+              <a:avLst/>
+            </a:prstGeom>
+          </p:spPr>
+          <p:style>
+            <a:lnRef idx="2">
+              <a:schemeClr val="dk1">
+                <a:shade val="50000"/>
+              </a:schemeClr>
+            </a:lnRef>
+            <a:fillRef idx="1">
+              <a:schemeClr val="dk1"/>
+            </a:fillRef>
+            <a:effectRef idx="0">
+              <a:schemeClr val="dk1"/>
+            </a:effectRef>
+            <a:fontRef idx="minor">
+              <a:schemeClr val="lt1"/>
+            </a:fontRef>
+          </p:style>
+          <p:txBody>
+            <a:bodyPr rtlCol="0" anchor="ctr"/>
+            <a:lstStyle/>
+            <a:p>
+              <a:pPr algn="ctr"/>
+              <a:endParaRPr lang="en-US"/>
+            </a:p>
+          </p:txBody>
+        </p:sp>
+        <p:sp>
+          <p:nvSpPr>
+            <p:cNvPr id="84" name="Rectangle 83">
+              <a:extLst>
+                <a:ext uri="{FF2B5EF4-FFF2-40B4-BE49-F238E27FC236}">
+                  <a16:creationId xmlns:a16="http://schemas.microsoft.com/office/drawing/2014/main" id="{DA803D24-3631-49E4-240C-746713F69A43}"/>
+                </a:ext>
+              </a:extLst>
+            </p:cNvPr>
+            <p:cNvSpPr/>
+            <p:nvPr/>
+          </p:nvSpPr>
+          <p:spPr>
+            <a:xfrm>
+              <a:off x="3786206" y="1808785"/>
+              <a:ext cx="248338" cy="464424"/>
+            </a:xfrm>
+            <a:prstGeom prst="rect">
+              <a:avLst/>
+            </a:prstGeom>
+          </p:spPr>
+          <p:style>
+            <a:lnRef idx="2">
+              <a:schemeClr val="dk1">
+                <a:shade val="50000"/>
+              </a:schemeClr>
+            </a:lnRef>
+            <a:fillRef idx="1">
+              <a:schemeClr val="dk1"/>
+            </a:fillRef>
+            <a:effectRef idx="0">
+              <a:schemeClr val="dk1"/>
+            </a:effectRef>
+            <a:fontRef idx="minor">
+              <a:schemeClr val="lt1"/>
+            </a:fontRef>
+          </p:style>
+          <p:txBody>
+            <a:bodyPr rtlCol="0" anchor="ctr"/>
+            <a:lstStyle/>
+            <a:p>
+              <a:pPr algn="ctr"/>
+              <a:endParaRPr lang="en-US"/>
+            </a:p>
+          </p:txBody>
+        </p:sp>
+        <p:sp>
+          <p:nvSpPr>
+            <p:cNvPr id="85" name="Plaque 84">
+              <a:extLst>
+                <a:ext uri="{FF2B5EF4-FFF2-40B4-BE49-F238E27FC236}">
+                  <a16:creationId xmlns:a16="http://schemas.microsoft.com/office/drawing/2014/main" id="{678E60B8-6249-51C3-0843-E3E8F82B2204}"/>
+                </a:ext>
+              </a:extLst>
+            </p:cNvPr>
+            <p:cNvSpPr/>
+            <p:nvPr/>
+          </p:nvSpPr>
+          <p:spPr>
+            <a:xfrm>
+              <a:off x="4136527" y="1630604"/>
+              <a:ext cx="853168" cy="839875"/>
+            </a:xfrm>
+            <a:prstGeom prst="plaque">
+              <a:avLst>
+                <a:gd name="adj" fmla="val 25032"/>
+              </a:avLst>
+            </a:prstGeom>
+          </p:spPr>
+          <p:style>
+            <a:lnRef idx="2">
+              <a:schemeClr val="dk1">
+                <a:shade val="50000"/>
+              </a:schemeClr>
+            </a:lnRef>
+            <a:fillRef idx="1">
+              <a:schemeClr val="dk1"/>
+            </a:fillRef>
+            <a:effectRef idx="0">
+              <a:schemeClr val="dk1"/>
+            </a:effectRef>
+            <a:fontRef idx="minor">
+              <a:schemeClr val="lt1"/>
+            </a:fontRef>
+          </p:style>
+          <p:txBody>
+            <a:bodyPr rtlCol="0" anchor="ctr"/>
+            <a:lstStyle/>
+            <a:p>
+              <a:pPr algn="ctr"/>
+              <a:endParaRPr lang="en-US"/>
+            </a:p>
+          </p:txBody>
+        </p:sp>
+        <p:sp>
+          <p:nvSpPr>
+            <p:cNvPr id="86" name="Rectangle 85">
+              <a:extLst>
+                <a:ext uri="{FF2B5EF4-FFF2-40B4-BE49-F238E27FC236}">
+                  <a16:creationId xmlns:a16="http://schemas.microsoft.com/office/drawing/2014/main" id="{2404115D-9564-754E-B57A-E2D653AEB6FA}"/>
+                </a:ext>
+              </a:extLst>
+            </p:cNvPr>
+            <p:cNvSpPr/>
+            <p:nvPr/>
+          </p:nvSpPr>
+          <p:spPr>
+            <a:xfrm rot="20548458">
+              <a:off x="5595262" y="3142160"/>
+              <a:ext cx="272728" cy="614846"/>
+            </a:xfrm>
+            <a:prstGeom prst="rect">
+              <a:avLst/>
+            </a:prstGeom>
+          </p:spPr>
+          <p:style>
+            <a:lnRef idx="2">
+              <a:schemeClr val="dk1">
+                <a:shade val="50000"/>
+              </a:schemeClr>
+            </a:lnRef>
+            <a:fillRef idx="1">
+              <a:schemeClr val="dk1"/>
+            </a:fillRef>
+            <a:effectRef idx="0">
+              <a:schemeClr val="dk1"/>
+            </a:effectRef>
+            <a:fontRef idx="minor">
+              <a:schemeClr val="lt1"/>
+            </a:fontRef>
+          </p:style>
+          <p:txBody>
+            <a:bodyPr rtlCol="0" anchor="ctr"/>
+            <a:lstStyle/>
+            <a:p>
+              <a:pPr algn="ctr"/>
+              <a:endParaRPr lang="en-US"/>
+            </a:p>
+          </p:txBody>
+        </p:sp>
+        <p:sp>
+          <p:nvSpPr>
+            <p:cNvPr id="87" name="Rectangle 86">
+              <a:extLst>
+                <a:ext uri="{FF2B5EF4-FFF2-40B4-BE49-F238E27FC236}">
+                  <a16:creationId xmlns:a16="http://schemas.microsoft.com/office/drawing/2014/main" id="{F00F8EC1-4E31-B495-BD64-ECC8D7B60E65}"/>
+                </a:ext>
+              </a:extLst>
+            </p:cNvPr>
+            <p:cNvSpPr/>
+            <p:nvPr/>
+          </p:nvSpPr>
+          <p:spPr>
+            <a:xfrm rot="18038434">
+              <a:off x="5084956" y="2698459"/>
+              <a:ext cx="421902" cy="614846"/>
+            </a:xfrm>
+            <a:prstGeom prst="rect">
+              <a:avLst/>
+            </a:prstGeom>
+          </p:spPr>
+          <p:style>
+            <a:lnRef idx="2">
+              <a:schemeClr val="dk1">
+                <a:shade val="50000"/>
+              </a:schemeClr>
+            </a:lnRef>
+            <a:fillRef idx="1">
+              <a:schemeClr val="dk1"/>
+            </a:fillRef>
+            <a:effectRef idx="0">
+              <a:schemeClr val="dk1"/>
+            </a:effectRef>
+            <a:fontRef idx="minor">
+              <a:schemeClr val="lt1"/>
+            </a:fontRef>
+          </p:style>
+          <p:txBody>
+            <a:bodyPr rtlCol="0" anchor="ctr"/>
+            <a:lstStyle/>
+            <a:p>
+              <a:pPr algn="ctr"/>
+              <a:endParaRPr lang="en-US"/>
+            </a:p>
+          </p:txBody>
+        </p:sp>
+        <p:sp>
+          <p:nvSpPr>
+            <p:cNvPr id="88" name="Oval 87">
+              <a:extLst>
+                <a:ext uri="{FF2B5EF4-FFF2-40B4-BE49-F238E27FC236}">
+                  <a16:creationId xmlns:a16="http://schemas.microsoft.com/office/drawing/2014/main" id="{74DBB9D4-9A60-7375-1825-FE12E296487C}"/>
+                </a:ext>
+              </a:extLst>
+            </p:cNvPr>
+            <p:cNvSpPr/>
+            <p:nvPr/>
+          </p:nvSpPr>
+          <p:spPr>
+            <a:xfrm rot="15253353">
+              <a:off x="5371321" y="2954379"/>
+              <a:ext cx="432581" cy="432581"/>
+            </a:xfrm>
+            <a:prstGeom prst="ellipse">
+              <a:avLst/>
+            </a:prstGeom>
+            <a:ln w="38100"/>
+          </p:spPr>
+          <p:style>
+            <a:lnRef idx="2">
+              <a:schemeClr val="dk1"/>
+            </a:lnRef>
+            <a:fillRef idx="1">
+              <a:schemeClr val="lt1"/>
+            </a:fillRef>
+            <a:effectRef idx="0">
+              <a:schemeClr val="dk1"/>
+            </a:effectRef>
+            <a:fontRef idx="minor">
+              <a:schemeClr val="dk1"/>
+            </a:fontRef>
+          </p:style>
+          <p:txBody>
+            <a:bodyPr rtlCol="0" anchor="ctr"/>
+            <a:lstStyle/>
+            <a:p>
+              <a:pPr algn="ctr"/>
+              <a:endParaRPr lang="en-US"/>
+            </a:p>
+          </p:txBody>
+        </p:sp>
+        <p:sp>
+          <p:nvSpPr>
+            <p:cNvPr id="89" name="Oval 88">
+              <a:extLst>
+                <a:ext uri="{FF2B5EF4-FFF2-40B4-BE49-F238E27FC236}">
+                  <a16:creationId xmlns:a16="http://schemas.microsoft.com/office/drawing/2014/main" id="{30FDEDEF-317E-A6A1-84CB-A902333133B9}"/>
+                </a:ext>
+              </a:extLst>
+            </p:cNvPr>
+            <p:cNvSpPr/>
+            <p:nvPr/>
+          </p:nvSpPr>
+          <p:spPr>
+            <a:xfrm rot="15710661">
+              <a:off x="4683975" y="2593993"/>
+              <a:ext cx="531646" cy="531646"/>
+            </a:xfrm>
+            <a:prstGeom prst="ellipse">
+              <a:avLst/>
+            </a:prstGeom>
+            <a:ln w="38100"/>
+          </p:spPr>
+          <p:style>
+            <a:lnRef idx="2">
+              <a:schemeClr val="dk1"/>
+            </a:lnRef>
+            <a:fillRef idx="1">
+              <a:schemeClr val="lt1"/>
+            </a:fillRef>
+            <a:effectRef idx="0">
+              <a:schemeClr val="dk1"/>
+            </a:effectRef>
+            <a:fontRef idx="minor">
+              <a:schemeClr val="dk1"/>
+            </a:fontRef>
+          </p:style>
+          <p:txBody>
+            <a:bodyPr rtlCol="0" anchor="ctr"/>
+            <a:lstStyle/>
+            <a:p>
+              <a:pPr algn="ctr"/>
+              <a:endParaRPr lang="en-US"/>
+            </a:p>
+          </p:txBody>
+        </p:sp>
+        <p:grpSp>
+          <p:nvGrpSpPr>
+            <p:cNvPr id="90" name="Group 89">
+              <a:extLst>
+                <a:ext uri="{FF2B5EF4-FFF2-40B4-BE49-F238E27FC236}">
+                  <a16:creationId xmlns:a16="http://schemas.microsoft.com/office/drawing/2014/main" id="{2E279596-F229-9267-73E9-9F70E87DAD03}"/>
+                </a:ext>
+              </a:extLst>
+            </p:cNvPr>
+            <p:cNvGrpSpPr/>
+            <p:nvPr/>
+          </p:nvGrpSpPr>
+          <p:grpSpPr>
+            <a:xfrm flipH="1">
+              <a:off x="2768462" y="2618875"/>
+              <a:ext cx="1199848" cy="1121157"/>
+              <a:chOff x="4817477" y="2615266"/>
+              <a:chExt cx="1199848" cy="1121157"/>
+            </a:xfrm>
+          </p:grpSpPr>
+          <p:sp>
+            <p:nvSpPr>
+              <p:cNvPr id="92" name="Rectangle 91">
+                <a:extLst>
+                  <a:ext uri="{FF2B5EF4-FFF2-40B4-BE49-F238E27FC236}">
+                    <a16:creationId xmlns:a16="http://schemas.microsoft.com/office/drawing/2014/main" id="{8539937D-7168-52DD-4A71-E2E205BB2F9B}"/>
+                  </a:ext>
+                </a:extLst>
+              </p:cNvPr>
+              <p:cNvSpPr/>
+              <p:nvPr/>
+            </p:nvSpPr>
+            <p:spPr>
+              <a:xfrm rot="20354995">
+                <a:off x="5744597" y="3121577"/>
+                <a:ext cx="272728" cy="614846"/>
+              </a:xfrm>
+              <a:prstGeom prst="rect">
+                <a:avLst/>
+              </a:prstGeom>
+            </p:spPr>
+            <p:style>
+              <a:lnRef idx="2">
+                <a:schemeClr val="dk1">
+                  <a:shade val="50000"/>
+                </a:schemeClr>
+              </a:lnRef>
+              <a:fillRef idx="1">
+                <a:schemeClr val="dk1"/>
+              </a:fillRef>
+              <a:effectRef idx="0">
+                <a:schemeClr val="dk1"/>
+              </a:effectRef>
+              <a:fontRef idx="minor">
+                <a:schemeClr val="lt1"/>
+              </a:fontRef>
+            </p:style>
+            <p:txBody>
+              <a:bodyPr rtlCol="0" anchor="ctr"/>
+              <a:lstStyle/>
+              <a:p>
+                <a:pPr algn="ctr"/>
+                <a:endParaRPr lang="en-US"/>
+              </a:p>
+            </p:txBody>
+          </p:sp>
+          <p:sp>
+            <p:nvSpPr>
+              <p:cNvPr id="93" name="Rectangle 92">
+                <a:extLst>
+                  <a:ext uri="{FF2B5EF4-FFF2-40B4-BE49-F238E27FC236}">
+                    <a16:creationId xmlns:a16="http://schemas.microsoft.com/office/drawing/2014/main" id="{68F7FA16-7EDC-415F-4EC4-504D3D4C69AC}"/>
+                  </a:ext>
+                </a:extLst>
+              </p:cNvPr>
+              <p:cNvSpPr/>
+              <p:nvPr/>
+            </p:nvSpPr>
+            <p:spPr>
+              <a:xfrm rot="17844971">
+                <a:off x="5210024" y="2703085"/>
+                <a:ext cx="421902" cy="614846"/>
+              </a:xfrm>
+              <a:prstGeom prst="rect">
+                <a:avLst/>
+              </a:prstGeom>
+            </p:spPr>
+            <p:style>
+              <a:lnRef idx="2">
+                <a:schemeClr val="dk1">
+                  <a:shade val="50000"/>
+                </a:schemeClr>
+              </a:lnRef>
+              <a:fillRef idx="1">
+                <a:schemeClr val="dk1"/>
+              </a:fillRef>
+              <a:effectRef idx="0">
+                <a:schemeClr val="dk1"/>
+              </a:effectRef>
+              <a:fontRef idx="minor">
+                <a:schemeClr val="lt1"/>
+              </a:fontRef>
+            </p:style>
+            <p:txBody>
+              <a:bodyPr rtlCol="0" anchor="ctr"/>
+              <a:lstStyle/>
+              <a:p>
+                <a:pPr algn="ctr"/>
+                <a:endParaRPr lang="en-US"/>
+              </a:p>
+            </p:txBody>
+          </p:sp>
+          <p:sp>
+            <p:nvSpPr>
+              <p:cNvPr id="94" name="Oval 93">
+                <a:extLst>
+                  <a:ext uri="{FF2B5EF4-FFF2-40B4-BE49-F238E27FC236}">
+                    <a16:creationId xmlns:a16="http://schemas.microsoft.com/office/drawing/2014/main" id="{FA479874-BA41-7CB4-BA0D-BBAEC32B5A4D}"/>
+                  </a:ext>
+                </a:extLst>
+              </p:cNvPr>
+              <p:cNvSpPr/>
+              <p:nvPr/>
+            </p:nvSpPr>
+            <p:spPr>
+              <a:xfrm rot="15059890">
+                <a:off x="5505196" y="2942338"/>
+                <a:ext cx="432581" cy="432581"/>
+              </a:xfrm>
+              <a:prstGeom prst="ellipse">
+                <a:avLst/>
+              </a:prstGeom>
+              <a:ln w="38100"/>
+            </p:spPr>
+            <p:style>
+              <a:lnRef idx="2">
+                <a:schemeClr val="dk1"/>
+              </a:lnRef>
+              <a:fillRef idx="1">
+                <a:schemeClr val="lt1"/>
+              </a:fillRef>
+              <a:effectRef idx="0">
+                <a:schemeClr val="dk1"/>
+              </a:effectRef>
+              <a:fontRef idx="minor">
+                <a:schemeClr val="dk1"/>
+              </a:fontRef>
+            </p:style>
+            <p:txBody>
+              <a:bodyPr rtlCol="0" anchor="ctr"/>
+              <a:lstStyle/>
+              <a:p>
+                <a:pPr algn="ctr"/>
+                <a:endParaRPr lang="en-US"/>
+              </a:p>
+            </p:txBody>
+          </p:sp>
+          <p:sp>
+            <p:nvSpPr>
+              <p:cNvPr id="95" name="Oval 94">
+                <a:extLst>
+                  <a:ext uri="{FF2B5EF4-FFF2-40B4-BE49-F238E27FC236}">
+                    <a16:creationId xmlns:a16="http://schemas.microsoft.com/office/drawing/2014/main" id="{92AE47F5-AA9A-0350-839F-6B4485C66FED}"/>
+                  </a:ext>
+                </a:extLst>
+              </p:cNvPr>
+              <p:cNvSpPr/>
+              <p:nvPr/>
+            </p:nvSpPr>
+            <p:spPr>
+              <a:xfrm rot="14919487">
+                <a:off x="4817477" y="2615266"/>
+                <a:ext cx="531646" cy="531646"/>
+              </a:xfrm>
+              <a:prstGeom prst="ellipse">
+                <a:avLst/>
+              </a:prstGeom>
+              <a:ln w="38100"/>
+            </p:spPr>
+            <p:style>
+              <a:lnRef idx="2">
+                <a:schemeClr val="dk1"/>
+              </a:lnRef>
+              <a:fillRef idx="1">
+                <a:schemeClr val="lt1"/>
+              </a:fillRef>
+              <a:effectRef idx="0">
+                <a:schemeClr val="dk1"/>
+              </a:effectRef>
+              <a:fontRef idx="minor">
+                <a:schemeClr val="dk1"/>
+              </a:fontRef>
+            </p:style>
+            <p:txBody>
+              <a:bodyPr rtlCol="0" anchor="ctr"/>
+              <a:lstStyle/>
+              <a:p>
+                <a:pPr algn="ctr"/>
+                <a:endParaRPr lang="en-US"/>
+              </a:p>
+            </p:txBody>
+          </p:sp>
+        </p:grpSp>
+        <p:sp>
+          <p:nvSpPr>
+            <p:cNvPr id="91" name="Rectangle 90">
+              <a:extLst>
+                <a:ext uri="{FF2B5EF4-FFF2-40B4-BE49-F238E27FC236}">
+                  <a16:creationId xmlns:a16="http://schemas.microsoft.com/office/drawing/2014/main" id="{9DF6776C-C694-A0BD-43D5-603E5559659A}"/>
+                </a:ext>
+              </a:extLst>
+            </p:cNvPr>
+            <p:cNvSpPr/>
+            <p:nvPr/>
+          </p:nvSpPr>
+          <p:spPr>
+            <a:xfrm>
+              <a:off x="3435885" y="1869791"/>
+              <a:ext cx="248338" cy="339333"/>
+            </a:xfrm>
+            <a:prstGeom prst="rect">
+              <a:avLst/>
+            </a:prstGeom>
+          </p:spPr>
+          <p:style>
+            <a:lnRef idx="2">
+              <a:schemeClr val="dk1">
+                <a:shade val="50000"/>
+              </a:schemeClr>
+            </a:lnRef>
+            <a:fillRef idx="1">
+              <a:schemeClr val="dk1"/>
+            </a:fillRef>
+            <a:effectRef idx="0">
+              <a:schemeClr val="dk1"/>
+            </a:effectRef>
+            <a:fontRef idx="minor">
+              <a:schemeClr val="lt1"/>
+            </a:fontRef>
+          </p:style>
+          <p:txBody>
+            <a:bodyPr rtlCol="0" anchor="ctr"/>
+            <a:lstStyle/>
+            <a:p>
+              <a:pPr algn="ctr"/>
+              <a:endParaRPr lang="en-US"/>
+            </a:p>
+          </p:txBody>
+        </p:sp>
+      </p:grpSp>
+      <p:grpSp>
+        <p:nvGrpSpPr>
+          <p:cNvPr id="96" name="Group 95">
+            <a:extLst>
+              <a:ext uri="{FF2B5EF4-FFF2-40B4-BE49-F238E27FC236}">
+                <a16:creationId xmlns:a16="http://schemas.microsoft.com/office/drawing/2014/main" id="{87C06D19-23BB-BD98-38DF-EB96AF04F425}"/>
+              </a:ext>
+            </a:extLst>
+          </p:cNvPr>
+          <p:cNvGrpSpPr/>
+          <p:nvPr/>
+        </p:nvGrpSpPr>
+        <p:grpSpPr>
+          <a:xfrm>
+            <a:off x="1782882" y="2084445"/>
+            <a:ext cx="1371600" cy="1371600"/>
+            <a:chOff x="427081" y="263129"/>
+            <a:chExt cx="1371600" cy="1371600"/>
+          </a:xfrm>
+        </p:grpSpPr>
+        <p:sp>
+          <p:nvSpPr>
+            <p:cNvPr id="97" name="Rectangle 96">
+              <a:extLst>
+                <a:ext uri="{FF2B5EF4-FFF2-40B4-BE49-F238E27FC236}">
+                  <a16:creationId xmlns:a16="http://schemas.microsoft.com/office/drawing/2014/main" id="{AEF10381-431C-6638-C921-12451A1C2BB8}"/>
+                </a:ext>
+              </a:extLst>
+            </p:cNvPr>
+            <p:cNvSpPr/>
+            <p:nvPr/>
+          </p:nvSpPr>
+          <p:spPr>
+            <a:xfrm>
+              <a:off x="427081" y="263129"/>
+              <a:ext cx="1371600" cy="1371600"/>
+            </a:xfrm>
+            <a:prstGeom prst="rect">
+              <a:avLst/>
+            </a:prstGeom>
+            <a:noFill/>
+            <a:ln w="76200">
+              <a:solidFill>
+                <a:schemeClr val="tx1"/>
+              </a:solidFill>
+            </a:ln>
+          </p:spPr>
+          <p:style>
+            <a:lnRef idx="2">
+              <a:schemeClr val="accent1">
+                <a:shade val="50000"/>
+              </a:schemeClr>
+            </a:lnRef>
+            <a:fillRef idx="1">
+              <a:schemeClr val="accent1"/>
+            </a:fillRef>
+            <a:effectRef idx="0">
+              <a:schemeClr val="accent1"/>
+            </a:effectRef>
+            <a:fontRef idx="minor">
+              <a:schemeClr val="lt1"/>
+            </a:fontRef>
+          </p:style>
+          <p:txBody>
+            <a:bodyPr rtlCol="0" anchor="ctr"/>
+            <a:lstStyle/>
+            <a:p>
+              <a:pPr algn="ctr"/>
+              <a:endParaRPr lang="en-US"/>
+            </a:p>
+          </p:txBody>
+        </p:sp>
+        <p:sp>
+          <p:nvSpPr>
+            <p:cNvPr id="98" name="Plaque 97">
+              <a:extLst>
+                <a:ext uri="{FF2B5EF4-FFF2-40B4-BE49-F238E27FC236}">
+                  <a16:creationId xmlns:a16="http://schemas.microsoft.com/office/drawing/2014/main" id="{721CCECA-4878-CD85-2A87-70481563EA44}"/>
+                </a:ext>
+              </a:extLst>
+            </p:cNvPr>
+            <p:cNvSpPr/>
+            <p:nvPr/>
+          </p:nvSpPr>
+          <p:spPr>
+            <a:xfrm>
+              <a:off x="573033" y="478473"/>
+              <a:ext cx="1097280" cy="1097280"/>
+            </a:xfrm>
+            <a:prstGeom prst="plaque">
+              <a:avLst/>
+            </a:prstGeom>
+            <a:noFill/>
+            <a:ln w="38100" cap="flat" cmpd="sng" algn="ctr">
+              <a:solidFill>
+                <a:schemeClr val="dk1"/>
+              </a:solidFill>
+              <a:prstDash val="solid"/>
+              <a:round/>
+              <a:headEnd type="none" w="med" len="med"/>
+              <a:tailEnd type="none" w="med" len="med"/>
+            </a:ln>
+          </p:spPr>
+          <p:style>
+            <a:lnRef idx="0">
+              <a:scrgbClr r="0" g="0" b="0"/>
+            </a:lnRef>
+            <a:fillRef idx="0">
+              <a:scrgbClr r="0" g="0" b="0"/>
+            </a:fillRef>
+            <a:effectRef idx="0">
+              <a:scrgbClr r="0" g="0" b="0"/>
+            </a:effectRef>
+            <a:fontRef idx="minor">
+              <a:schemeClr val="dk1"/>
+            </a:fontRef>
+          </p:style>
+          <p:txBody>
+            <a:bodyPr rtlCol="0" anchor="ctr"/>
+            <a:lstStyle/>
+            <a:p>
+              <a:pPr algn="ctr"/>
+              <a:endParaRPr lang="en-US"/>
+            </a:p>
+          </p:txBody>
+        </p:sp>
+      </p:grpSp>
+      <p:grpSp>
+        <p:nvGrpSpPr>
+          <p:cNvPr id="6" name="Group 5">
+            <a:extLst>
+              <a:ext uri="{FF2B5EF4-FFF2-40B4-BE49-F238E27FC236}">
+                <a16:creationId xmlns:a16="http://schemas.microsoft.com/office/drawing/2014/main" id="{E2D7A8A2-8F40-C6E5-C837-1A4EEA777EAD}"/>
+              </a:ext>
+            </a:extLst>
+          </p:cNvPr>
+          <p:cNvGrpSpPr/>
+          <p:nvPr/>
+        </p:nvGrpSpPr>
+        <p:grpSpPr>
+          <a:xfrm>
+            <a:off x="1953043" y="2348722"/>
+            <a:ext cx="1034201" cy="950766"/>
+            <a:chOff x="1086869" y="3336948"/>
+            <a:chExt cx="1034201" cy="950766"/>
+          </a:xfrm>
+        </p:grpSpPr>
+        <p:sp>
+          <p:nvSpPr>
+            <p:cNvPr id="4" name="Star: 4 Points 3">
+              <a:extLst>
+                <a:ext uri="{FF2B5EF4-FFF2-40B4-BE49-F238E27FC236}">
+                  <a16:creationId xmlns:a16="http://schemas.microsoft.com/office/drawing/2014/main" id="{5ED583C2-8222-0641-D6DA-41D154409B65}"/>
+                </a:ext>
+              </a:extLst>
+            </p:cNvPr>
+            <p:cNvSpPr/>
+            <p:nvPr/>
+          </p:nvSpPr>
+          <p:spPr>
+            <a:xfrm>
+              <a:off x="1086869" y="3360224"/>
+              <a:ext cx="714588" cy="714588"/>
+            </a:xfrm>
+            <a:prstGeom prst="star4">
+              <a:avLst>
+                <a:gd name="adj" fmla="val 18269"/>
+              </a:avLst>
+            </a:prstGeom>
+          </p:spPr>
+          <p:style>
+            <a:lnRef idx="2">
+              <a:schemeClr val="dk1">
+                <a:shade val="50000"/>
+              </a:schemeClr>
+            </a:lnRef>
+            <a:fillRef idx="1">
+              <a:schemeClr val="dk1"/>
+            </a:fillRef>
+            <a:effectRef idx="0">
+              <a:schemeClr val="dk1"/>
+            </a:effectRef>
+            <a:fontRef idx="minor">
+              <a:schemeClr val="lt1"/>
+            </a:fontRef>
+          </p:style>
+          <p:txBody>
+            <a:bodyPr rtlCol="0" anchor="ctr"/>
+            <a:lstStyle/>
+            <a:p>
+              <a:pPr algn="ctr"/>
+              <a:endParaRPr lang="en-US"/>
+            </a:p>
+          </p:txBody>
+        </p:sp>
+        <p:sp>
+          <p:nvSpPr>
+            <p:cNvPr id="100" name="Star: 4 Points 99">
+              <a:extLst>
+                <a:ext uri="{FF2B5EF4-FFF2-40B4-BE49-F238E27FC236}">
+                  <a16:creationId xmlns:a16="http://schemas.microsoft.com/office/drawing/2014/main" id="{4FF00EBA-474F-22E3-579F-CB3F93767AF0}"/>
+                </a:ext>
+              </a:extLst>
+            </p:cNvPr>
+            <p:cNvSpPr/>
+            <p:nvPr/>
+          </p:nvSpPr>
+          <p:spPr>
+            <a:xfrm>
+              <a:off x="1615699" y="3782343"/>
+              <a:ext cx="505371" cy="505371"/>
+            </a:xfrm>
+            <a:prstGeom prst="star4">
+              <a:avLst>
+                <a:gd name="adj" fmla="val 18269"/>
+              </a:avLst>
+            </a:prstGeom>
+          </p:spPr>
+          <p:style>
+            <a:lnRef idx="2">
+              <a:schemeClr val="dk1">
+                <a:shade val="50000"/>
+              </a:schemeClr>
+            </a:lnRef>
+            <a:fillRef idx="1">
+              <a:schemeClr val="dk1"/>
+            </a:fillRef>
+            <a:effectRef idx="0">
+              <a:schemeClr val="dk1"/>
+            </a:effectRef>
+            <a:fontRef idx="minor">
+              <a:schemeClr val="lt1"/>
+            </a:fontRef>
+          </p:style>
+          <p:txBody>
+            <a:bodyPr rtlCol="0" anchor="ctr"/>
+            <a:lstStyle/>
+            <a:p>
+              <a:pPr algn="ctr"/>
+              <a:endParaRPr lang="en-US"/>
+            </a:p>
+          </p:txBody>
+        </p:sp>
+        <p:sp>
+          <p:nvSpPr>
+            <p:cNvPr id="101" name="Star: 4 Points 100">
+              <a:extLst>
+                <a:ext uri="{FF2B5EF4-FFF2-40B4-BE49-F238E27FC236}">
+                  <a16:creationId xmlns:a16="http://schemas.microsoft.com/office/drawing/2014/main" id="{3C0D3FD9-2CEC-3BD7-0F17-FE83F726A068}"/>
+                </a:ext>
+              </a:extLst>
+            </p:cNvPr>
+            <p:cNvSpPr/>
+            <p:nvPr/>
+          </p:nvSpPr>
+          <p:spPr>
+            <a:xfrm>
+              <a:off x="1662807" y="3336948"/>
+              <a:ext cx="269691" cy="258071"/>
+            </a:xfrm>
+            <a:prstGeom prst="star4">
+              <a:avLst>
+                <a:gd name="adj" fmla="val 18269"/>
+              </a:avLst>
+            </a:prstGeom>
+          </p:spPr>
+          <p:style>
+            <a:lnRef idx="2">
+              <a:schemeClr val="dk1">
+                <a:shade val="50000"/>
+              </a:schemeClr>
+            </a:lnRef>
+            <a:fillRef idx="1">
+              <a:schemeClr val="dk1"/>
+            </a:fillRef>
+            <a:effectRef idx="0">
+              <a:schemeClr val="dk1"/>
+            </a:effectRef>
+            <a:fontRef idx="minor">
+              <a:schemeClr val="lt1"/>
+            </a:fontRef>
+          </p:style>
+          <p:txBody>
+            <a:bodyPr rtlCol="0" anchor="ctr"/>
+            <a:lstStyle/>
+            <a:p>
+              <a:pPr algn="ctr"/>
+              <a:endParaRPr lang="en-US"/>
+            </a:p>
+          </p:txBody>
+        </p:sp>
+      </p:grpSp>
     </p:spTree>
     <p:extLst>
       <p:ext uri="{BB962C8B-B14F-4D97-AF65-F5344CB8AC3E}">

--- a/image process/drawings sifi.pptx
+++ b/image process/drawings sifi.pptx
@@ -200,7 +200,7 @@
           <a:p>
             <a:fld id="{7700C406-2328-4788-AE79-437B6607AD22}" type="datetimeFigureOut">
               <a:rPr lang="en-US" smtClean="0"/>
-              <a:t>6/3/2022</a:t>
+              <a:t>6/4/2022</a:t>
             </a:fld>
             <a:endParaRPr lang="en-US"/>
           </a:p>
@@ -614,7 +614,7 @@
           <a:p>
             <a:fld id="{9EC8CD53-0620-48F2-A3BB-2B10BDA60E52}" type="datetimeFigureOut">
               <a:rPr lang="en-US" smtClean="0"/>
-              <a:t>6/3/2022</a:t>
+              <a:t>6/4/2022</a:t>
             </a:fld>
             <a:endParaRPr lang="en-US"/>
           </a:p>
@@ -812,7 +812,7 @@
           <a:p>
             <a:fld id="{9EC8CD53-0620-48F2-A3BB-2B10BDA60E52}" type="datetimeFigureOut">
               <a:rPr lang="en-US" smtClean="0"/>
-              <a:t>6/3/2022</a:t>
+              <a:t>6/4/2022</a:t>
             </a:fld>
             <a:endParaRPr lang="en-US"/>
           </a:p>
@@ -1020,7 +1020,7 @@
           <a:p>
             <a:fld id="{9EC8CD53-0620-48F2-A3BB-2B10BDA60E52}" type="datetimeFigureOut">
               <a:rPr lang="en-US" smtClean="0"/>
-              <a:t>6/3/2022</a:t>
+              <a:t>6/4/2022</a:t>
             </a:fld>
             <a:endParaRPr lang="en-US"/>
           </a:p>
@@ -1218,7 +1218,7 @@
           <a:p>
             <a:fld id="{9EC8CD53-0620-48F2-A3BB-2B10BDA60E52}" type="datetimeFigureOut">
               <a:rPr lang="en-US" smtClean="0"/>
-              <a:t>6/3/2022</a:t>
+              <a:t>6/4/2022</a:t>
             </a:fld>
             <a:endParaRPr lang="en-US"/>
           </a:p>
@@ -1493,7 +1493,7 @@
           <a:p>
             <a:fld id="{9EC8CD53-0620-48F2-A3BB-2B10BDA60E52}" type="datetimeFigureOut">
               <a:rPr lang="en-US" smtClean="0"/>
-              <a:t>6/3/2022</a:t>
+              <a:t>6/4/2022</a:t>
             </a:fld>
             <a:endParaRPr lang="en-US"/>
           </a:p>
@@ -1758,7 +1758,7 @@
           <a:p>
             <a:fld id="{9EC8CD53-0620-48F2-A3BB-2B10BDA60E52}" type="datetimeFigureOut">
               <a:rPr lang="en-US" smtClean="0"/>
-              <a:t>6/3/2022</a:t>
+              <a:t>6/4/2022</a:t>
             </a:fld>
             <a:endParaRPr lang="en-US"/>
           </a:p>
@@ -2170,7 +2170,7 @@
           <a:p>
             <a:fld id="{9EC8CD53-0620-48F2-A3BB-2B10BDA60E52}" type="datetimeFigureOut">
               <a:rPr lang="en-US" smtClean="0"/>
-              <a:t>6/3/2022</a:t>
+              <a:t>6/4/2022</a:t>
             </a:fld>
             <a:endParaRPr lang="en-US"/>
           </a:p>
@@ -2311,7 +2311,7 @@
           <a:p>
             <a:fld id="{9EC8CD53-0620-48F2-A3BB-2B10BDA60E52}" type="datetimeFigureOut">
               <a:rPr lang="en-US" smtClean="0"/>
-              <a:t>6/3/2022</a:t>
+              <a:t>6/4/2022</a:t>
             </a:fld>
             <a:endParaRPr lang="en-US"/>
           </a:p>
@@ -2424,7 +2424,7 @@
           <a:p>
             <a:fld id="{9EC8CD53-0620-48F2-A3BB-2B10BDA60E52}" type="datetimeFigureOut">
               <a:rPr lang="en-US" smtClean="0"/>
-              <a:t>6/3/2022</a:t>
+              <a:t>6/4/2022</a:t>
             </a:fld>
             <a:endParaRPr lang="en-US"/>
           </a:p>
@@ -2735,7 +2735,7 @@
           <a:p>
             <a:fld id="{9EC8CD53-0620-48F2-A3BB-2B10BDA60E52}" type="datetimeFigureOut">
               <a:rPr lang="en-US" smtClean="0"/>
-              <a:t>6/3/2022</a:t>
+              <a:t>6/4/2022</a:t>
             </a:fld>
             <a:endParaRPr lang="en-US"/>
           </a:p>
@@ -3023,7 +3023,7 @@
           <a:p>
             <a:fld id="{9EC8CD53-0620-48F2-A3BB-2B10BDA60E52}" type="datetimeFigureOut">
               <a:rPr lang="en-US" smtClean="0"/>
-              <a:t>6/3/2022</a:t>
+              <a:t>6/4/2022</a:t>
             </a:fld>
             <a:endParaRPr lang="en-US"/>
           </a:p>
@@ -3264,7 +3264,7 @@
           <a:p>
             <a:fld id="{9EC8CD53-0620-48F2-A3BB-2B10BDA60E52}" type="datetimeFigureOut">
               <a:rPr lang="en-US" smtClean="0"/>
-              <a:t>6/3/2022</a:t>
+              <a:t>6/4/2022</a:t>
             </a:fld>
             <a:endParaRPr lang="en-US"/>
           </a:p>
@@ -17241,6 +17241,36 @@
           <a:chExt cx="0" cy="0"/>
         </a:xfrm>
       </p:grpSpPr>
+      <p:pic>
+        <p:nvPicPr>
+          <p:cNvPr id="30" name="Picture 29">
+            <a:extLst>
+              <a:ext uri="{FF2B5EF4-FFF2-40B4-BE49-F238E27FC236}">
+                <a16:creationId xmlns:a16="http://schemas.microsoft.com/office/drawing/2014/main" id="{BD0E5BCE-5376-9B10-FC7E-2D121E8F69D3}"/>
+              </a:ext>
+            </a:extLst>
+          </p:cNvPr>
+          <p:cNvPicPr>
+            <a:picLocks noChangeAspect="1"/>
+          </p:cNvPicPr>
+          <p:nvPr/>
+        </p:nvPicPr>
+        <p:blipFill>
+          <a:blip r:embed="rId2"/>
+          <a:stretch>
+            <a:fillRect/>
+          </a:stretch>
+        </p:blipFill>
+        <p:spPr>
+          <a:xfrm>
+            <a:off x="594436" y="841877"/>
+            <a:ext cx="433388" cy="444277"/>
+          </a:xfrm>
+          <a:prstGeom prst="rect">
+            <a:avLst/>
+          </a:prstGeom>
+        </p:spPr>
+      </p:pic>
       <p:grpSp>
         <p:nvGrpSpPr>
           <p:cNvPr id="13" name="Group 12">
@@ -17370,10 +17400,10 @@
       </p:grpSp>
       <p:grpSp>
         <p:nvGrpSpPr>
-          <p:cNvPr id="82" name="Group 81">
+          <p:cNvPr id="21" name="Group 20">
             <a:extLst>
               <a:ext uri="{FF2B5EF4-FFF2-40B4-BE49-F238E27FC236}">
-                <a16:creationId xmlns:a16="http://schemas.microsoft.com/office/drawing/2014/main" id="{69B2A179-E1E8-665F-F368-D461DAB87650}"/>
+                <a16:creationId xmlns:a16="http://schemas.microsoft.com/office/drawing/2014/main" id="{E2A2CBEA-E93F-5FBE-BF5E-6728063DE48D}"/>
               </a:ext>
             </a:extLst>
           </p:cNvPr>
@@ -17382,18 +17412,18 @@
         </p:nvGrpSpPr>
         <p:grpSpPr>
           <a:xfrm>
-            <a:off x="664458" y="683072"/>
-            <a:ext cx="907668" cy="622697"/>
-            <a:chOff x="2768462" y="1630604"/>
-            <a:chExt cx="3099528" cy="2126402"/>
+            <a:off x="1019174" y="536319"/>
+            <a:ext cx="441325" cy="1012069"/>
+            <a:chOff x="3248025" y="1009650"/>
+            <a:chExt cx="1390650" cy="3189114"/>
           </a:xfrm>
         </p:grpSpPr>
         <p:sp>
           <p:nvSpPr>
-            <p:cNvPr id="62" name="Rectangle 61">
-              <a:extLst>
-                <a:ext uri="{FF2B5EF4-FFF2-40B4-BE49-F238E27FC236}">
-                  <a16:creationId xmlns:a16="http://schemas.microsoft.com/office/drawing/2014/main" id="{88BD95FA-38DB-6FF3-AE61-0006E0068860}"/>
+            <p:cNvPr id="9" name="Oval 8">
+              <a:extLst>
+                <a:ext uri="{FF2B5EF4-FFF2-40B4-BE49-F238E27FC236}">
+                  <a16:creationId xmlns:a16="http://schemas.microsoft.com/office/drawing/2014/main" id="{9D5510EF-2548-EA85-62B8-9ADA85182350}"/>
                 </a:ext>
               </a:extLst>
             </p:cNvPr>
@@ -17402,10 +17432,10 @@
           </p:nvSpPr>
           <p:spPr>
             <a:xfrm>
-              <a:off x="3951162" y="3217961"/>
-              <a:ext cx="894382" cy="386255"/>
-            </a:xfrm>
-            <a:prstGeom prst="rect">
+              <a:off x="3549650" y="1009650"/>
+              <a:ext cx="787400" cy="984250"/>
+            </a:xfrm>
+            <a:prstGeom prst="ellipse">
               <a:avLst/>
             </a:prstGeom>
           </p:spPr>
@@ -17436,10 +17466,10 @@
         </p:sp>
         <p:sp>
           <p:nvSpPr>
-            <p:cNvPr id="27" name="Rectangle 26">
-              <a:extLst>
-                <a:ext uri="{FF2B5EF4-FFF2-40B4-BE49-F238E27FC236}">
-                  <a16:creationId xmlns:a16="http://schemas.microsoft.com/office/drawing/2014/main" id="{E2A2E51D-04D7-1817-DD54-31B9901A89B1}"/>
+            <p:cNvPr id="11" name="Rectangle: Rounded Corners 10">
+              <a:extLst>
+                <a:ext uri="{FF2B5EF4-FFF2-40B4-BE49-F238E27FC236}">
+                  <a16:creationId xmlns:a16="http://schemas.microsoft.com/office/drawing/2014/main" id="{104BD941-8C1D-03B6-2D46-9AD123AB3AAA}"/>
                 </a:ext>
               </a:extLst>
             </p:cNvPr>
@@ -17448,10 +17478,10 @@
           </p:nvSpPr>
           <p:spPr>
             <a:xfrm>
-              <a:off x="3745275" y="2561897"/>
-              <a:ext cx="1305472" cy="617557"/>
-            </a:xfrm>
-            <a:prstGeom prst="rect">
+              <a:off x="3600450" y="2051050"/>
+              <a:ext cx="692150" cy="292100"/>
+            </a:xfrm>
+            <a:prstGeom prst="roundRect">
               <a:avLst/>
             </a:prstGeom>
           </p:spPr>
@@ -17469,282 +17499,6 @@
             </a:effectRef>
             <a:fontRef idx="minor">
               <a:schemeClr val="lt1"/>
-            </a:fontRef>
-          </p:style>
-          <p:txBody>
-            <a:bodyPr rtlCol="0" anchor="ctr"/>
-            <a:lstStyle/>
-            <a:p>
-              <a:pPr algn="ctr"/>
-              <a:endParaRPr lang="en-US"/>
-            </a:p>
-          </p:txBody>
-        </p:sp>
-        <p:sp>
-          <p:nvSpPr>
-            <p:cNvPr id="28" name="Rectangle 27">
-              <a:extLst>
-                <a:ext uri="{FF2B5EF4-FFF2-40B4-BE49-F238E27FC236}">
-                  <a16:creationId xmlns:a16="http://schemas.microsoft.com/office/drawing/2014/main" id="{BBBFF7AA-5FD3-AC55-593C-92FE3B31594C}"/>
-                </a:ext>
-              </a:extLst>
-            </p:cNvPr>
-            <p:cNvSpPr/>
-            <p:nvPr/>
-          </p:nvSpPr>
-          <p:spPr>
-            <a:xfrm>
-              <a:off x="3786206" y="1808785"/>
-              <a:ext cx="248338" cy="464424"/>
-            </a:xfrm>
-            <a:prstGeom prst="rect">
-              <a:avLst/>
-            </a:prstGeom>
-          </p:spPr>
-          <p:style>
-            <a:lnRef idx="2">
-              <a:schemeClr val="dk1">
-                <a:shade val="50000"/>
-              </a:schemeClr>
-            </a:lnRef>
-            <a:fillRef idx="1">
-              <a:schemeClr val="dk1"/>
-            </a:fillRef>
-            <a:effectRef idx="0">
-              <a:schemeClr val="dk1"/>
-            </a:effectRef>
-            <a:fontRef idx="minor">
-              <a:schemeClr val="lt1"/>
-            </a:fontRef>
-          </p:style>
-          <p:txBody>
-            <a:bodyPr rtlCol="0" anchor="ctr"/>
-            <a:lstStyle/>
-            <a:p>
-              <a:pPr algn="ctr"/>
-              <a:endParaRPr lang="en-US"/>
-            </a:p>
-          </p:txBody>
-        </p:sp>
-        <p:sp>
-          <p:nvSpPr>
-            <p:cNvPr id="57" name="Plaque 56">
-              <a:extLst>
-                <a:ext uri="{FF2B5EF4-FFF2-40B4-BE49-F238E27FC236}">
-                  <a16:creationId xmlns:a16="http://schemas.microsoft.com/office/drawing/2014/main" id="{D3308D06-9878-B246-3449-D16662A633D4}"/>
-                </a:ext>
-              </a:extLst>
-            </p:cNvPr>
-            <p:cNvSpPr/>
-            <p:nvPr/>
-          </p:nvSpPr>
-          <p:spPr>
-            <a:xfrm>
-              <a:off x="4136527" y="1630604"/>
-              <a:ext cx="853168" cy="839875"/>
-            </a:xfrm>
-            <a:prstGeom prst="plaque">
-              <a:avLst>
-                <a:gd name="adj" fmla="val 25032"/>
-              </a:avLst>
-            </a:prstGeom>
-          </p:spPr>
-          <p:style>
-            <a:lnRef idx="2">
-              <a:schemeClr val="dk1">
-                <a:shade val="50000"/>
-              </a:schemeClr>
-            </a:lnRef>
-            <a:fillRef idx="1">
-              <a:schemeClr val="dk1"/>
-            </a:fillRef>
-            <a:effectRef idx="0">
-              <a:schemeClr val="dk1"/>
-            </a:effectRef>
-            <a:fontRef idx="minor">
-              <a:schemeClr val="lt1"/>
-            </a:fontRef>
-          </p:style>
-          <p:txBody>
-            <a:bodyPr rtlCol="0" anchor="ctr"/>
-            <a:lstStyle/>
-            <a:p>
-              <a:pPr algn="ctr"/>
-              <a:endParaRPr lang="en-US"/>
-            </a:p>
-          </p:txBody>
-        </p:sp>
-        <p:sp>
-          <p:nvSpPr>
-            <p:cNvPr id="60" name="Rectangle 59">
-              <a:extLst>
-                <a:ext uri="{FF2B5EF4-FFF2-40B4-BE49-F238E27FC236}">
-                  <a16:creationId xmlns:a16="http://schemas.microsoft.com/office/drawing/2014/main" id="{F013E3FD-8053-F657-0435-0C23988B0B0C}"/>
-                </a:ext>
-              </a:extLst>
-            </p:cNvPr>
-            <p:cNvSpPr/>
-            <p:nvPr/>
-          </p:nvSpPr>
-          <p:spPr>
-            <a:xfrm rot="20548458">
-              <a:off x="5595262" y="3142160"/>
-              <a:ext cx="272728" cy="614846"/>
-            </a:xfrm>
-            <a:prstGeom prst="rect">
-              <a:avLst/>
-            </a:prstGeom>
-          </p:spPr>
-          <p:style>
-            <a:lnRef idx="2">
-              <a:schemeClr val="dk1">
-                <a:shade val="50000"/>
-              </a:schemeClr>
-            </a:lnRef>
-            <a:fillRef idx="1">
-              <a:schemeClr val="dk1"/>
-            </a:fillRef>
-            <a:effectRef idx="0">
-              <a:schemeClr val="dk1"/>
-            </a:effectRef>
-            <a:fontRef idx="minor">
-              <a:schemeClr val="lt1"/>
-            </a:fontRef>
-          </p:style>
-          <p:txBody>
-            <a:bodyPr rtlCol="0" anchor="ctr"/>
-            <a:lstStyle/>
-            <a:p>
-              <a:pPr algn="ctr"/>
-              <a:endParaRPr lang="en-US"/>
-            </a:p>
-          </p:txBody>
-        </p:sp>
-        <p:sp>
-          <p:nvSpPr>
-            <p:cNvPr id="58" name="Rectangle 57">
-              <a:extLst>
-                <a:ext uri="{FF2B5EF4-FFF2-40B4-BE49-F238E27FC236}">
-                  <a16:creationId xmlns:a16="http://schemas.microsoft.com/office/drawing/2014/main" id="{31DEDA76-EE1A-F46C-B29C-E80E1134A795}"/>
-                </a:ext>
-              </a:extLst>
-            </p:cNvPr>
-            <p:cNvSpPr/>
-            <p:nvPr/>
-          </p:nvSpPr>
-          <p:spPr>
-            <a:xfrm rot="18038434">
-              <a:off x="5084956" y="2698459"/>
-              <a:ext cx="421902" cy="614846"/>
-            </a:xfrm>
-            <a:prstGeom prst="rect">
-              <a:avLst/>
-            </a:prstGeom>
-          </p:spPr>
-          <p:style>
-            <a:lnRef idx="2">
-              <a:schemeClr val="dk1">
-                <a:shade val="50000"/>
-              </a:schemeClr>
-            </a:lnRef>
-            <a:fillRef idx="1">
-              <a:schemeClr val="dk1"/>
-            </a:fillRef>
-            <a:effectRef idx="0">
-              <a:schemeClr val="dk1"/>
-            </a:effectRef>
-            <a:fontRef idx="minor">
-              <a:schemeClr val="lt1"/>
-            </a:fontRef>
-          </p:style>
-          <p:txBody>
-            <a:bodyPr rtlCol="0" anchor="ctr"/>
-            <a:lstStyle/>
-            <a:p>
-              <a:pPr algn="ctr"/>
-              <a:endParaRPr lang="en-US"/>
-            </a:p>
-          </p:txBody>
-        </p:sp>
-        <p:sp>
-          <p:nvSpPr>
-            <p:cNvPr id="59" name="Oval 58">
-              <a:extLst>
-                <a:ext uri="{FF2B5EF4-FFF2-40B4-BE49-F238E27FC236}">
-                  <a16:creationId xmlns:a16="http://schemas.microsoft.com/office/drawing/2014/main" id="{668655E6-A1D1-A645-459C-87F702AE7D54}"/>
-                </a:ext>
-              </a:extLst>
-            </p:cNvPr>
-            <p:cNvSpPr/>
-            <p:nvPr/>
-          </p:nvSpPr>
-          <p:spPr>
-            <a:xfrm rot="15253353">
-              <a:off x="5371321" y="2954379"/>
-              <a:ext cx="432581" cy="432581"/>
-            </a:xfrm>
-            <a:prstGeom prst="ellipse">
-              <a:avLst/>
-            </a:prstGeom>
-            <a:ln w="38100"/>
-          </p:spPr>
-          <p:style>
-            <a:lnRef idx="2">
-              <a:schemeClr val="dk1"/>
-            </a:lnRef>
-            <a:fillRef idx="1">
-              <a:schemeClr val="lt1"/>
-            </a:fillRef>
-            <a:effectRef idx="0">
-              <a:schemeClr val="dk1"/>
-            </a:effectRef>
-            <a:fontRef idx="minor">
-              <a:schemeClr val="dk1"/>
-            </a:fontRef>
-          </p:style>
-          <p:txBody>
-            <a:bodyPr rtlCol="0" anchor="ctr"/>
-            <a:lstStyle/>
-            <a:p>
-              <a:pPr algn="ctr"/>
-              <a:endParaRPr lang="en-US"/>
-            </a:p>
-          </p:txBody>
-        </p:sp>
-        <p:sp>
-          <p:nvSpPr>
-            <p:cNvPr id="56" name="Oval 55">
-              <a:extLst>
-                <a:ext uri="{FF2B5EF4-FFF2-40B4-BE49-F238E27FC236}">
-                  <a16:creationId xmlns:a16="http://schemas.microsoft.com/office/drawing/2014/main" id="{A050B2F7-858D-AC78-CC83-644C43409C38}"/>
-                </a:ext>
-              </a:extLst>
-            </p:cNvPr>
-            <p:cNvSpPr/>
-            <p:nvPr/>
-          </p:nvSpPr>
-          <p:spPr>
-            <a:xfrm rot="15710661">
-              <a:off x="4683975" y="2593993"/>
-              <a:ext cx="531646" cy="531646"/>
-            </a:xfrm>
-            <a:prstGeom prst="ellipse">
-              <a:avLst/>
-            </a:prstGeom>
-            <a:ln w="38100"/>
-          </p:spPr>
-          <p:style>
-            <a:lnRef idx="2">
-              <a:schemeClr val="dk1"/>
-            </a:lnRef>
-            <a:fillRef idx="1">
-              <a:schemeClr val="lt1"/>
-            </a:fillRef>
-            <a:effectRef idx="0">
-              <a:schemeClr val="dk1"/>
-            </a:effectRef>
-            <a:fontRef idx="minor">
-              <a:schemeClr val="dk1"/>
             </a:fontRef>
           </p:style>
           <p:txBody>
@@ -17758,10 +17512,10 @@
         </p:sp>
         <p:grpSp>
           <p:nvGrpSpPr>
-            <p:cNvPr id="75" name="Group 74">
-              <a:extLst>
-                <a:ext uri="{FF2B5EF4-FFF2-40B4-BE49-F238E27FC236}">
-                  <a16:creationId xmlns:a16="http://schemas.microsoft.com/office/drawing/2014/main" id="{9B336AC7-3972-B11B-12A3-C78C86D110B4}"/>
+            <p:cNvPr id="17" name="Group 16">
+              <a:extLst>
+                <a:ext uri="{FF2B5EF4-FFF2-40B4-BE49-F238E27FC236}">
+                  <a16:creationId xmlns:a16="http://schemas.microsoft.com/office/drawing/2014/main" id="{8D4E8C95-B2D6-2625-DFAC-E9625432CFC0}"/>
                 </a:ext>
               </a:extLst>
             </p:cNvPr>
@@ -17769,19 +17523,19 @@
             <p:nvPr/>
           </p:nvGrpSpPr>
           <p:grpSpPr>
-            <a:xfrm flipH="1">
-              <a:off x="2768462" y="2618875"/>
-              <a:ext cx="1199848" cy="1121157"/>
-              <a:chOff x="4817477" y="2615266"/>
-              <a:chExt cx="1199848" cy="1121157"/>
+            <a:xfrm>
+              <a:off x="4282383" y="2120161"/>
+              <a:ext cx="291335" cy="2073380"/>
+              <a:chOff x="4282383" y="2120161"/>
+              <a:chExt cx="291335" cy="2073380"/>
             </a:xfrm>
           </p:grpSpPr>
           <p:sp>
             <p:nvSpPr>
-              <p:cNvPr id="76" name="Rectangle 75">
+              <p:cNvPr id="12" name="Rectangle 11">
                 <a:extLst>
                   <a:ext uri="{FF2B5EF4-FFF2-40B4-BE49-F238E27FC236}">
-                    <a16:creationId xmlns:a16="http://schemas.microsoft.com/office/drawing/2014/main" id="{81AD9E0F-5324-3015-1D2B-2AE7E1CC37E6}"/>
+                    <a16:creationId xmlns:a16="http://schemas.microsoft.com/office/drawing/2014/main" id="{9B4DCC3F-3F93-BD4A-39A6-47EB5B8E46EE}"/>
                   </a:ext>
                 </a:extLst>
               </p:cNvPr>
@@ -17789,9 +17543,9 @@
               <p:nvPr/>
             </p:nvSpPr>
             <p:spPr>
-              <a:xfrm rot="20354995">
-                <a:off x="5744597" y="3121577"/>
-                <a:ext cx="272728" cy="614846"/>
+              <a:xfrm rot="3958351">
+                <a:off x="3893446" y="2509098"/>
+                <a:ext cx="996950" cy="219075"/>
               </a:xfrm>
               <a:prstGeom prst="rect">
                 <a:avLst/>
@@ -17824,10 +17578,10 @@
           </p:sp>
           <p:sp>
             <p:nvSpPr>
-              <p:cNvPr id="77" name="Rectangle 76">
+              <p:cNvPr id="14" name="Isosceles Triangle 13">
                 <a:extLst>
                   <a:ext uri="{FF2B5EF4-FFF2-40B4-BE49-F238E27FC236}">
-                    <a16:creationId xmlns:a16="http://schemas.microsoft.com/office/drawing/2014/main" id="{26693838-BBDC-965D-CC06-07BEDAB7E3E4}"/>
+                    <a16:creationId xmlns:a16="http://schemas.microsoft.com/office/drawing/2014/main" id="{1E09283E-E602-4561-BA1B-639728EE4302}"/>
                   </a:ext>
                 </a:extLst>
               </p:cNvPr>
@@ -17835,9 +17589,76 @@
               <p:nvPr/>
             </p:nvSpPr>
             <p:spPr>
-              <a:xfrm rot="17844971">
-                <a:off x="5210024" y="2703085"/>
-                <a:ext cx="421902" cy="614846"/>
+              <a:xfrm rot="11268472">
+                <a:off x="4421316" y="2942591"/>
+                <a:ext cx="152402" cy="1250950"/>
+              </a:xfrm>
+              <a:prstGeom prst="triangle">
+                <a:avLst/>
+              </a:prstGeom>
+            </p:spPr>
+            <p:style>
+              <a:lnRef idx="2">
+                <a:schemeClr val="dk1">
+                  <a:shade val="50000"/>
+                </a:schemeClr>
+              </a:lnRef>
+              <a:fillRef idx="1">
+                <a:schemeClr val="dk1"/>
+              </a:fillRef>
+              <a:effectRef idx="0">
+                <a:schemeClr val="dk1"/>
+              </a:effectRef>
+              <a:fontRef idx="minor">
+                <a:schemeClr val="lt1"/>
+              </a:fontRef>
+            </p:style>
+            <p:txBody>
+              <a:bodyPr rtlCol="0" anchor="ctr"/>
+              <a:lstStyle/>
+              <a:p>
+                <a:pPr algn="ctr"/>
+                <a:endParaRPr lang="en-US"/>
+              </a:p>
+            </p:txBody>
+          </p:sp>
+        </p:grpSp>
+        <p:grpSp>
+          <p:nvGrpSpPr>
+            <p:cNvPr id="35" name="Group 34">
+              <a:extLst>
+                <a:ext uri="{FF2B5EF4-FFF2-40B4-BE49-F238E27FC236}">
+                  <a16:creationId xmlns:a16="http://schemas.microsoft.com/office/drawing/2014/main" id="{11CE8681-7007-B528-1489-2C083FAB07E4}"/>
+                </a:ext>
+              </a:extLst>
+            </p:cNvPr>
+            <p:cNvGrpSpPr/>
+            <p:nvPr/>
+          </p:nvGrpSpPr>
+          <p:grpSpPr>
+            <a:xfrm flipH="1">
+              <a:off x="3309115" y="2124715"/>
+              <a:ext cx="291335" cy="2073380"/>
+              <a:chOff x="4282383" y="2120161"/>
+              <a:chExt cx="291335" cy="2073380"/>
+            </a:xfrm>
+          </p:grpSpPr>
+          <p:sp>
+            <p:nvSpPr>
+              <p:cNvPr id="36" name="Rectangle 35">
+                <a:extLst>
+                  <a:ext uri="{FF2B5EF4-FFF2-40B4-BE49-F238E27FC236}">
+                    <a16:creationId xmlns:a16="http://schemas.microsoft.com/office/drawing/2014/main" id="{7146EEE4-FE28-A545-C368-14A7CBAFCCD3}"/>
+                  </a:ext>
+                </a:extLst>
+              </p:cNvPr>
+              <p:cNvSpPr/>
+              <p:nvPr/>
+            </p:nvSpPr>
+            <p:spPr>
+              <a:xfrm rot="3958351">
+                <a:off x="3893446" y="2509098"/>
+                <a:ext cx="996950" cy="219075"/>
               </a:xfrm>
               <a:prstGeom prst="rect">
                 <a:avLst/>
@@ -17870,10 +17691,10 @@
           </p:sp>
           <p:sp>
             <p:nvSpPr>
-              <p:cNvPr id="78" name="Oval 77">
+              <p:cNvPr id="37" name="Isosceles Triangle 36">
                 <a:extLst>
                   <a:ext uri="{FF2B5EF4-FFF2-40B4-BE49-F238E27FC236}">
-                    <a16:creationId xmlns:a16="http://schemas.microsoft.com/office/drawing/2014/main" id="{F0691E16-B9A8-7886-F07A-EBB7B4824219}"/>
+                    <a16:creationId xmlns:a16="http://schemas.microsoft.com/office/drawing/2014/main" id="{B62C4A42-F1EE-4E15-A845-CB1E95F23D9F}"/>
                   </a:ext>
                 </a:extLst>
               </p:cNvPr>
@@ -17881,72 +17702,28 @@
               <p:nvPr/>
             </p:nvSpPr>
             <p:spPr>
-              <a:xfrm rot="15059890">
-                <a:off x="5505196" y="2942338"/>
-                <a:ext cx="432581" cy="432581"/>
+              <a:xfrm rot="11268472">
+                <a:off x="4421316" y="2942591"/>
+                <a:ext cx="152402" cy="1250950"/>
               </a:xfrm>
-              <a:prstGeom prst="ellipse">
+              <a:prstGeom prst="triangle">
                 <a:avLst/>
               </a:prstGeom>
-              <a:ln w="38100"/>
             </p:spPr>
             <p:style>
               <a:lnRef idx="2">
-                <a:schemeClr val="dk1"/>
+                <a:schemeClr val="dk1">
+                  <a:shade val="50000"/>
+                </a:schemeClr>
               </a:lnRef>
               <a:fillRef idx="1">
-                <a:schemeClr val="lt1"/>
+                <a:schemeClr val="dk1"/>
               </a:fillRef>
               <a:effectRef idx="0">
                 <a:schemeClr val="dk1"/>
               </a:effectRef>
               <a:fontRef idx="minor">
-                <a:schemeClr val="dk1"/>
-              </a:fontRef>
-            </p:style>
-            <p:txBody>
-              <a:bodyPr rtlCol="0" anchor="ctr"/>
-              <a:lstStyle/>
-              <a:p>
-                <a:pPr algn="ctr"/>
-                <a:endParaRPr lang="en-US"/>
-              </a:p>
-            </p:txBody>
-          </p:sp>
-          <p:sp>
-            <p:nvSpPr>
-              <p:cNvPr id="79" name="Oval 78">
-                <a:extLst>
-                  <a:ext uri="{FF2B5EF4-FFF2-40B4-BE49-F238E27FC236}">
-                    <a16:creationId xmlns:a16="http://schemas.microsoft.com/office/drawing/2014/main" id="{9894AF7C-2CFA-0746-1276-A4AEF1396B8E}"/>
-                  </a:ext>
-                </a:extLst>
-              </p:cNvPr>
-              <p:cNvSpPr/>
-              <p:nvPr/>
-            </p:nvSpPr>
-            <p:spPr>
-              <a:xfrm rot="14919487">
-                <a:off x="4817477" y="2615266"/>
-                <a:ext cx="531646" cy="531646"/>
-              </a:xfrm>
-              <a:prstGeom prst="ellipse">
-                <a:avLst/>
-              </a:prstGeom>
-              <a:ln w="38100"/>
-            </p:spPr>
-            <p:style>
-              <a:lnRef idx="2">
-                <a:schemeClr val="dk1"/>
-              </a:lnRef>
-              <a:fillRef idx="1">
                 <a:schemeClr val="lt1"/>
-              </a:fillRef>
-              <a:effectRef idx="0">
-                <a:schemeClr val="dk1"/>
-              </a:effectRef>
-              <a:fontRef idx="minor">
-                <a:schemeClr val="dk1"/>
               </a:fontRef>
             </p:style>
             <p:txBody>
@@ -17961,10 +17738,10 @@
         </p:grpSp>
         <p:sp>
           <p:nvSpPr>
-            <p:cNvPr id="81" name="Rectangle 80">
-              <a:extLst>
-                <a:ext uri="{FF2B5EF4-FFF2-40B4-BE49-F238E27FC236}">
-                  <a16:creationId xmlns:a16="http://schemas.microsoft.com/office/drawing/2014/main" id="{23F1AE68-0182-7D84-6B0D-4442D0AF8D56}"/>
+            <p:cNvPr id="39" name="Rectangle 38">
+              <a:extLst>
+                <a:ext uri="{FF2B5EF4-FFF2-40B4-BE49-F238E27FC236}">
+                  <a16:creationId xmlns:a16="http://schemas.microsoft.com/office/drawing/2014/main" id="{289333CA-5D8F-C6FC-1B71-A2036F1FEC27}"/>
                 </a:ext>
               </a:extLst>
             </p:cNvPr>
@@ -17972,9 +17749,9 @@
             <p:nvPr/>
           </p:nvSpPr>
           <p:spPr>
-            <a:xfrm>
-              <a:off x="3435885" y="1869791"/>
-              <a:ext cx="248338" cy="339333"/>
+            <a:xfrm rot="5400000">
+              <a:off x="3441937" y="2586038"/>
+              <a:ext cx="996950" cy="219075"/>
             </a:xfrm>
             <a:prstGeom prst="rect">
               <a:avLst/>
@@ -17994,6 +17771,140 @@
             </a:effectRef>
             <a:fontRef idx="minor">
               <a:schemeClr val="lt1"/>
+            </a:fontRef>
+          </p:style>
+          <p:txBody>
+            <a:bodyPr rtlCol="0" anchor="ctr"/>
+            <a:lstStyle/>
+            <a:p>
+              <a:pPr algn="ctr"/>
+              <a:endParaRPr lang="en-US"/>
+            </a:p>
+          </p:txBody>
+        </p:sp>
+        <p:sp>
+          <p:nvSpPr>
+            <p:cNvPr id="40" name="Isosceles Triangle 39">
+              <a:extLst>
+                <a:ext uri="{FF2B5EF4-FFF2-40B4-BE49-F238E27FC236}">
+                  <a16:creationId xmlns:a16="http://schemas.microsoft.com/office/drawing/2014/main" id="{99B87BC8-4AA1-49F4-1A86-6E5B0A124EED}"/>
+                </a:ext>
+              </a:extLst>
+            </p:cNvPr>
+            <p:cNvSpPr/>
+            <p:nvPr/>
+          </p:nvSpPr>
+          <p:spPr>
+            <a:xfrm rot="10800000">
+              <a:off x="3869157" y="2947814"/>
+              <a:ext cx="152402" cy="1250950"/>
+            </a:xfrm>
+            <a:prstGeom prst="triangle">
+              <a:avLst/>
+            </a:prstGeom>
+          </p:spPr>
+          <p:style>
+            <a:lnRef idx="2">
+              <a:schemeClr val="dk1">
+                <a:shade val="50000"/>
+              </a:schemeClr>
+            </a:lnRef>
+            <a:fillRef idx="1">
+              <a:schemeClr val="dk1"/>
+            </a:fillRef>
+            <a:effectRef idx="0">
+              <a:schemeClr val="dk1"/>
+            </a:effectRef>
+            <a:fontRef idx="minor">
+              <a:schemeClr val="lt1"/>
+            </a:fontRef>
+          </p:style>
+          <p:txBody>
+            <a:bodyPr rtlCol="0" anchor="ctr"/>
+            <a:lstStyle/>
+            <a:p>
+              <a:pPr algn="ctr"/>
+              <a:endParaRPr lang="en-US"/>
+            </a:p>
+          </p:txBody>
+        </p:sp>
+        <p:sp>
+          <p:nvSpPr>
+            <p:cNvPr id="18" name="Rectangle 17">
+              <a:extLst>
+                <a:ext uri="{FF2B5EF4-FFF2-40B4-BE49-F238E27FC236}">
+                  <a16:creationId xmlns:a16="http://schemas.microsoft.com/office/drawing/2014/main" id="{B94ABFCB-E0CF-2FE9-1D1D-847E59D4ECDC}"/>
+                </a:ext>
+              </a:extLst>
+            </p:cNvPr>
+            <p:cNvSpPr/>
+            <p:nvPr/>
+          </p:nvSpPr>
+          <p:spPr>
+            <a:xfrm>
+              <a:off x="3248025" y="1227137"/>
+              <a:ext cx="215900" cy="766763"/>
+            </a:xfrm>
+            <a:prstGeom prst="rect">
+              <a:avLst/>
+            </a:prstGeom>
+          </p:spPr>
+          <p:style>
+            <a:lnRef idx="2">
+              <a:schemeClr val="dk1"/>
+            </a:lnRef>
+            <a:fillRef idx="1">
+              <a:schemeClr val="lt1"/>
+            </a:fillRef>
+            <a:effectRef idx="0">
+              <a:schemeClr val="dk1"/>
+            </a:effectRef>
+            <a:fontRef idx="minor">
+              <a:schemeClr val="dk1"/>
+            </a:fontRef>
+          </p:style>
+          <p:txBody>
+            <a:bodyPr rtlCol="0" anchor="ctr"/>
+            <a:lstStyle/>
+            <a:p>
+              <a:pPr algn="ctr"/>
+              <a:endParaRPr lang="en-US"/>
+            </a:p>
+          </p:txBody>
+        </p:sp>
+        <p:sp>
+          <p:nvSpPr>
+            <p:cNvPr id="42" name="Rectangle 41">
+              <a:extLst>
+                <a:ext uri="{FF2B5EF4-FFF2-40B4-BE49-F238E27FC236}">
+                  <a16:creationId xmlns:a16="http://schemas.microsoft.com/office/drawing/2014/main" id="{FC055838-3FDF-25B4-2A9B-5B79F532EB71}"/>
+                </a:ext>
+              </a:extLst>
+            </p:cNvPr>
+            <p:cNvSpPr/>
+            <p:nvPr/>
+          </p:nvSpPr>
+          <p:spPr>
+            <a:xfrm>
+              <a:off x="4422775" y="1227136"/>
+              <a:ext cx="215900" cy="766764"/>
+            </a:xfrm>
+            <a:prstGeom prst="rect">
+              <a:avLst/>
+            </a:prstGeom>
+          </p:spPr>
+          <p:style>
+            <a:lnRef idx="2">
+              <a:schemeClr val="dk1"/>
+            </a:lnRef>
+            <a:fillRef idx="1">
+              <a:schemeClr val="lt1"/>
+            </a:fillRef>
+            <a:effectRef idx="0">
+              <a:schemeClr val="dk1"/>
+            </a:effectRef>
+            <a:fontRef idx="minor">
+              <a:schemeClr val="dk1"/>
             </a:fontRef>
           </p:style>
           <p:txBody>
@@ -18006,6 +17917,682 @@
           </p:txBody>
         </p:sp>
       </p:grpSp>
+      <p:grpSp>
+        <p:nvGrpSpPr>
+          <p:cNvPr id="22" name="Group 21">
+            <a:extLst>
+              <a:ext uri="{FF2B5EF4-FFF2-40B4-BE49-F238E27FC236}">
+                <a16:creationId xmlns:a16="http://schemas.microsoft.com/office/drawing/2014/main" id="{18BE5F6B-478D-573E-9C76-37A0135DBE17}"/>
+              </a:ext>
+            </a:extLst>
+          </p:cNvPr>
+          <p:cNvGrpSpPr/>
+          <p:nvPr/>
+        </p:nvGrpSpPr>
+        <p:grpSpPr>
+          <a:xfrm>
+            <a:off x="2296423" y="548069"/>
+            <a:ext cx="502920" cy="1014984"/>
+            <a:chOff x="5380031" y="966102"/>
+            <a:chExt cx="1727200" cy="3248141"/>
+          </a:xfrm>
+        </p:grpSpPr>
+        <p:sp>
+          <p:nvSpPr>
+            <p:cNvPr id="20" name="Moon 19">
+              <a:extLst>
+                <a:ext uri="{FF2B5EF4-FFF2-40B4-BE49-F238E27FC236}">
+                  <a16:creationId xmlns:a16="http://schemas.microsoft.com/office/drawing/2014/main" id="{E95D41D4-AD08-AD39-A14F-F05C5D38C635}"/>
+                </a:ext>
+              </a:extLst>
+            </p:cNvPr>
+            <p:cNvSpPr/>
+            <p:nvPr/>
+          </p:nvSpPr>
+          <p:spPr>
+            <a:xfrm rot="19627358">
+              <a:off x="5549196" y="966102"/>
+              <a:ext cx="450850" cy="984250"/>
+            </a:xfrm>
+            <a:prstGeom prst="moon">
+              <a:avLst/>
+            </a:prstGeom>
+          </p:spPr>
+          <p:style>
+            <a:lnRef idx="2">
+              <a:schemeClr val="dk1"/>
+            </a:lnRef>
+            <a:fillRef idx="1">
+              <a:schemeClr val="lt1"/>
+            </a:fillRef>
+            <a:effectRef idx="0">
+              <a:schemeClr val="dk1"/>
+            </a:effectRef>
+            <a:fontRef idx="minor">
+              <a:schemeClr val="dk1"/>
+            </a:fontRef>
+          </p:style>
+          <p:txBody>
+            <a:bodyPr rtlCol="0" anchor="ctr"/>
+            <a:lstStyle/>
+            <a:p>
+              <a:pPr algn="ctr"/>
+              <a:endParaRPr lang="en-US"/>
+            </a:p>
+          </p:txBody>
+        </p:sp>
+        <p:sp>
+          <p:nvSpPr>
+            <p:cNvPr id="61" name="Moon 60">
+              <a:extLst>
+                <a:ext uri="{FF2B5EF4-FFF2-40B4-BE49-F238E27FC236}">
+                  <a16:creationId xmlns:a16="http://schemas.microsoft.com/office/drawing/2014/main" id="{1EAC84D0-0BB6-E938-EC63-7135681FB63F}"/>
+                </a:ext>
+              </a:extLst>
+            </p:cNvPr>
+            <p:cNvSpPr/>
+            <p:nvPr/>
+          </p:nvSpPr>
+          <p:spPr>
+            <a:xfrm rot="1972642" flipH="1">
+              <a:off x="6518602" y="966104"/>
+              <a:ext cx="450850" cy="984250"/>
+            </a:xfrm>
+            <a:prstGeom prst="moon">
+              <a:avLst/>
+            </a:prstGeom>
+          </p:spPr>
+          <p:style>
+            <a:lnRef idx="2">
+              <a:schemeClr val="dk1"/>
+            </a:lnRef>
+            <a:fillRef idx="1">
+              <a:schemeClr val="lt1"/>
+            </a:fillRef>
+            <a:effectRef idx="0">
+              <a:schemeClr val="dk1"/>
+            </a:effectRef>
+            <a:fontRef idx="minor">
+              <a:schemeClr val="dk1"/>
+            </a:fontRef>
+          </p:style>
+          <p:txBody>
+            <a:bodyPr rtlCol="0" anchor="ctr"/>
+            <a:lstStyle/>
+            <a:p>
+              <a:pPr algn="ctr"/>
+              <a:endParaRPr lang="en-US"/>
+            </a:p>
+          </p:txBody>
+        </p:sp>
+        <p:sp>
+          <p:nvSpPr>
+            <p:cNvPr id="43" name="Oval 42">
+              <a:extLst>
+                <a:ext uri="{FF2B5EF4-FFF2-40B4-BE49-F238E27FC236}">
+                  <a16:creationId xmlns:a16="http://schemas.microsoft.com/office/drawing/2014/main" id="{08329DD8-9A31-5259-0D08-5C3CC972588F}"/>
+                </a:ext>
+              </a:extLst>
+            </p:cNvPr>
+            <p:cNvSpPr/>
+            <p:nvPr/>
+          </p:nvSpPr>
+          <p:spPr>
+            <a:xfrm>
+              <a:off x="5852869" y="1025129"/>
+              <a:ext cx="787400" cy="984250"/>
+            </a:xfrm>
+            <a:prstGeom prst="ellipse">
+              <a:avLst/>
+            </a:prstGeom>
+          </p:spPr>
+          <p:style>
+            <a:lnRef idx="2">
+              <a:schemeClr val="dk1">
+                <a:shade val="50000"/>
+              </a:schemeClr>
+            </a:lnRef>
+            <a:fillRef idx="1">
+              <a:schemeClr val="dk1"/>
+            </a:fillRef>
+            <a:effectRef idx="0">
+              <a:schemeClr val="dk1"/>
+            </a:effectRef>
+            <a:fontRef idx="minor">
+              <a:schemeClr val="lt1"/>
+            </a:fontRef>
+          </p:style>
+          <p:txBody>
+            <a:bodyPr rtlCol="0" anchor="ctr"/>
+            <a:lstStyle/>
+            <a:p>
+              <a:pPr algn="ctr"/>
+              <a:endParaRPr lang="en-US"/>
+            </a:p>
+          </p:txBody>
+        </p:sp>
+        <p:grpSp>
+          <p:nvGrpSpPr>
+            <p:cNvPr id="45" name="Group 44">
+              <a:extLst>
+                <a:ext uri="{FF2B5EF4-FFF2-40B4-BE49-F238E27FC236}">
+                  <a16:creationId xmlns:a16="http://schemas.microsoft.com/office/drawing/2014/main" id="{E3D82530-25BB-7B78-F396-EC90FDCFBBD1}"/>
+                </a:ext>
+              </a:extLst>
+            </p:cNvPr>
+            <p:cNvGrpSpPr/>
+            <p:nvPr/>
+          </p:nvGrpSpPr>
+          <p:grpSpPr>
+            <a:xfrm>
+              <a:off x="6585602" y="2135640"/>
+              <a:ext cx="291335" cy="2073380"/>
+              <a:chOff x="4282383" y="2120161"/>
+              <a:chExt cx="291335" cy="2073380"/>
+            </a:xfrm>
+          </p:grpSpPr>
+          <p:sp>
+            <p:nvSpPr>
+              <p:cNvPr id="46" name="Rectangle 45">
+                <a:extLst>
+                  <a:ext uri="{FF2B5EF4-FFF2-40B4-BE49-F238E27FC236}">
+                    <a16:creationId xmlns:a16="http://schemas.microsoft.com/office/drawing/2014/main" id="{23252941-D171-D4AC-9958-B7370AFD1A74}"/>
+                  </a:ext>
+                </a:extLst>
+              </p:cNvPr>
+              <p:cNvSpPr/>
+              <p:nvPr/>
+            </p:nvSpPr>
+            <p:spPr>
+              <a:xfrm rot="3958351">
+                <a:off x="3893446" y="2509098"/>
+                <a:ext cx="996950" cy="219075"/>
+              </a:xfrm>
+              <a:prstGeom prst="rect">
+                <a:avLst/>
+              </a:prstGeom>
+            </p:spPr>
+            <p:style>
+              <a:lnRef idx="2">
+                <a:schemeClr val="dk1">
+                  <a:shade val="50000"/>
+                </a:schemeClr>
+              </a:lnRef>
+              <a:fillRef idx="1">
+                <a:schemeClr val="dk1"/>
+              </a:fillRef>
+              <a:effectRef idx="0">
+                <a:schemeClr val="dk1"/>
+              </a:effectRef>
+              <a:fontRef idx="minor">
+                <a:schemeClr val="lt1"/>
+              </a:fontRef>
+            </p:style>
+            <p:txBody>
+              <a:bodyPr rtlCol="0" anchor="ctr"/>
+              <a:lstStyle/>
+              <a:p>
+                <a:pPr algn="ctr"/>
+                <a:endParaRPr lang="en-US"/>
+              </a:p>
+            </p:txBody>
+          </p:sp>
+          <p:sp>
+            <p:nvSpPr>
+              <p:cNvPr id="47" name="Isosceles Triangle 46">
+                <a:extLst>
+                  <a:ext uri="{FF2B5EF4-FFF2-40B4-BE49-F238E27FC236}">
+                    <a16:creationId xmlns:a16="http://schemas.microsoft.com/office/drawing/2014/main" id="{C4379557-A972-423D-3572-9827516BEC4C}"/>
+                  </a:ext>
+                </a:extLst>
+              </p:cNvPr>
+              <p:cNvSpPr/>
+              <p:nvPr/>
+            </p:nvSpPr>
+            <p:spPr>
+              <a:xfrm rot="11268472">
+                <a:off x="4421316" y="2942591"/>
+                <a:ext cx="152402" cy="1250950"/>
+              </a:xfrm>
+              <a:prstGeom prst="triangle">
+                <a:avLst/>
+              </a:prstGeom>
+            </p:spPr>
+            <p:style>
+              <a:lnRef idx="2">
+                <a:schemeClr val="dk1">
+                  <a:shade val="50000"/>
+                </a:schemeClr>
+              </a:lnRef>
+              <a:fillRef idx="1">
+                <a:schemeClr val="dk1"/>
+              </a:fillRef>
+              <a:effectRef idx="0">
+                <a:schemeClr val="dk1"/>
+              </a:effectRef>
+              <a:fontRef idx="minor">
+                <a:schemeClr val="lt1"/>
+              </a:fontRef>
+            </p:style>
+            <p:txBody>
+              <a:bodyPr rtlCol="0" anchor="ctr"/>
+              <a:lstStyle/>
+              <a:p>
+                <a:pPr algn="ctr"/>
+                <a:endParaRPr lang="en-US"/>
+              </a:p>
+            </p:txBody>
+          </p:sp>
+        </p:grpSp>
+        <p:grpSp>
+          <p:nvGrpSpPr>
+            <p:cNvPr id="48" name="Group 47">
+              <a:extLst>
+                <a:ext uri="{FF2B5EF4-FFF2-40B4-BE49-F238E27FC236}">
+                  <a16:creationId xmlns:a16="http://schemas.microsoft.com/office/drawing/2014/main" id="{2D2BD7C5-76A9-A619-C8B7-FE03919E99A0}"/>
+                </a:ext>
+              </a:extLst>
+            </p:cNvPr>
+            <p:cNvGrpSpPr/>
+            <p:nvPr/>
+          </p:nvGrpSpPr>
+          <p:grpSpPr>
+            <a:xfrm flipH="1">
+              <a:off x="5612334" y="2140194"/>
+              <a:ext cx="291335" cy="2073380"/>
+              <a:chOff x="4282383" y="2120161"/>
+              <a:chExt cx="291335" cy="2073380"/>
+            </a:xfrm>
+          </p:grpSpPr>
+          <p:sp>
+            <p:nvSpPr>
+              <p:cNvPr id="49" name="Rectangle 48">
+                <a:extLst>
+                  <a:ext uri="{FF2B5EF4-FFF2-40B4-BE49-F238E27FC236}">
+                    <a16:creationId xmlns:a16="http://schemas.microsoft.com/office/drawing/2014/main" id="{2FAAE068-751B-49DC-5680-34E68D0A3C9F}"/>
+                  </a:ext>
+                </a:extLst>
+              </p:cNvPr>
+              <p:cNvSpPr/>
+              <p:nvPr/>
+            </p:nvSpPr>
+            <p:spPr>
+              <a:xfrm rot="3958351">
+                <a:off x="3893446" y="2509098"/>
+                <a:ext cx="996950" cy="219075"/>
+              </a:xfrm>
+              <a:prstGeom prst="rect">
+                <a:avLst/>
+              </a:prstGeom>
+            </p:spPr>
+            <p:style>
+              <a:lnRef idx="2">
+                <a:schemeClr val="dk1">
+                  <a:shade val="50000"/>
+                </a:schemeClr>
+              </a:lnRef>
+              <a:fillRef idx="1">
+                <a:schemeClr val="dk1"/>
+              </a:fillRef>
+              <a:effectRef idx="0">
+                <a:schemeClr val="dk1"/>
+              </a:effectRef>
+              <a:fontRef idx="minor">
+                <a:schemeClr val="lt1"/>
+              </a:fontRef>
+            </p:style>
+            <p:txBody>
+              <a:bodyPr rtlCol="0" anchor="ctr"/>
+              <a:lstStyle/>
+              <a:p>
+                <a:pPr algn="ctr"/>
+                <a:endParaRPr lang="en-US"/>
+              </a:p>
+            </p:txBody>
+          </p:sp>
+          <p:sp>
+            <p:nvSpPr>
+              <p:cNvPr id="50" name="Isosceles Triangle 49">
+                <a:extLst>
+                  <a:ext uri="{FF2B5EF4-FFF2-40B4-BE49-F238E27FC236}">
+                    <a16:creationId xmlns:a16="http://schemas.microsoft.com/office/drawing/2014/main" id="{9AA4BCE5-F4F1-B611-C793-F485A6748A3A}"/>
+                  </a:ext>
+                </a:extLst>
+              </p:cNvPr>
+              <p:cNvSpPr/>
+              <p:nvPr/>
+            </p:nvSpPr>
+            <p:spPr>
+              <a:xfrm rot="11268472">
+                <a:off x="4421316" y="2942591"/>
+                <a:ext cx="152402" cy="1250950"/>
+              </a:xfrm>
+              <a:prstGeom prst="triangle">
+                <a:avLst/>
+              </a:prstGeom>
+            </p:spPr>
+            <p:style>
+              <a:lnRef idx="2">
+                <a:schemeClr val="dk1">
+                  <a:shade val="50000"/>
+                </a:schemeClr>
+              </a:lnRef>
+              <a:fillRef idx="1">
+                <a:schemeClr val="dk1"/>
+              </a:fillRef>
+              <a:effectRef idx="0">
+                <a:schemeClr val="dk1"/>
+              </a:effectRef>
+              <a:fontRef idx="minor">
+                <a:schemeClr val="lt1"/>
+              </a:fontRef>
+            </p:style>
+            <p:txBody>
+              <a:bodyPr rtlCol="0" anchor="ctr"/>
+              <a:lstStyle/>
+              <a:p>
+                <a:pPr algn="ctr"/>
+                <a:endParaRPr lang="en-US"/>
+              </a:p>
+            </p:txBody>
+          </p:sp>
+        </p:grpSp>
+        <p:sp>
+          <p:nvSpPr>
+            <p:cNvPr id="51" name="Rectangle 50">
+              <a:extLst>
+                <a:ext uri="{FF2B5EF4-FFF2-40B4-BE49-F238E27FC236}">
+                  <a16:creationId xmlns:a16="http://schemas.microsoft.com/office/drawing/2014/main" id="{0F48EA78-F7DC-B13A-6157-459D28BD6199}"/>
+                </a:ext>
+              </a:extLst>
+            </p:cNvPr>
+            <p:cNvSpPr/>
+            <p:nvPr/>
+          </p:nvSpPr>
+          <p:spPr>
+            <a:xfrm rot="5400000">
+              <a:off x="5745156" y="2601517"/>
+              <a:ext cx="996950" cy="219075"/>
+            </a:xfrm>
+            <a:prstGeom prst="rect">
+              <a:avLst/>
+            </a:prstGeom>
+          </p:spPr>
+          <p:style>
+            <a:lnRef idx="2">
+              <a:schemeClr val="dk1">
+                <a:shade val="50000"/>
+              </a:schemeClr>
+            </a:lnRef>
+            <a:fillRef idx="1">
+              <a:schemeClr val="dk1"/>
+            </a:fillRef>
+            <a:effectRef idx="0">
+              <a:schemeClr val="dk1"/>
+            </a:effectRef>
+            <a:fontRef idx="minor">
+              <a:schemeClr val="lt1"/>
+            </a:fontRef>
+          </p:style>
+          <p:txBody>
+            <a:bodyPr rtlCol="0" anchor="ctr"/>
+            <a:lstStyle/>
+            <a:p>
+              <a:pPr algn="ctr"/>
+              <a:endParaRPr lang="en-US"/>
+            </a:p>
+          </p:txBody>
+        </p:sp>
+        <p:sp>
+          <p:nvSpPr>
+            <p:cNvPr id="52" name="Isosceles Triangle 51">
+              <a:extLst>
+                <a:ext uri="{FF2B5EF4-FFF2-40B4-BE49-F238E27FC236}">
+                  <a16:creationId xmlns:a16="http://schemas.microsoft.com/office/drawing/2014/main" id="{DCFCA97B-0D8E-7C80-06D2-684CA14063C8}"/>
+                </a:ext>
+              </a:extLst>
+            </p:cNvPr>
+            <p:cNvSpPr/>
+            <p:nvPr/>
+          </p:nvSpPr>
+          <p:spPr>
+            <a:xfrm rot="10800000">
+              <a:off x="6172376" y="2963293"/>
+              <a:ext cx="152402" cy="1250950"/>
+            </a:xfrm>
+            <a:prstGeom prst="triangle">
+              <a:avLst/>
+            </a:prstGeom>
+          </p:spPr>
+          <p:style>
+            <a:lnRef idx="2">
+              <a:schemeClr val="dk1">
+                <a:shade val="50000"/>
+              </a:schemeClr>
+            </a:lnRef>
+            <a:fillRef idx="1">
+              <a:schemeClr val="dk1"/>
+            </a:fillRef>
+            <a:effectRef idx="0">
+              <a:schemeClr val="dk1"/>
+            </a:effectRef>
+            <a:fontRef idx="minor">
+              <a:schemeClr val="lt1"/>
+            </a:fontRef>
+          </p:style>
+          <p:txBody>
+            <a:bodyPr rtlCol="0" anchor="ctr"/>
+            <a:lstStyle/>
+            <a:p>
+              <a:pPr algn="ctr"/>
+              <a:endParaRPr lang="en-US"/>
+            </a:p>
+          </p:txBody>
+        </p:sp>
+        <p:sp>
+          <p:nvSpPr>
+            <p:cNvPr id="19" name="Moon 18">
+              <a:extLst>
+                <a:ext uri="{FF2B5EF4-FFF2-40B4-BE49-F238E27FC236}">
+                  <a16:creationId xmlns:a16="http://schemas.microsoft.com/office/drawing/2014/main" id="{5DFC7713-3DA5-1972-0709-F93537967C67}"/>
+                </a:ext>
+              </a:extLst>
+            </p:cNvPr>
+            <p:cNvSpPr/>
+            <p:nvPr/>
+          </p:nvSpPr>
+          <p:spPr>
+            <a:xfrm rot="16200000">
+              <a:off x="6002331" y="1326503"/>
+              <a:ext cx="482600" cy="1727200"/>
+            </a:xfrm>
+            <a:prstGeom prst="moon">
+              <a:avLst/>
+            </a:prstGeom>
+          </p:spPr>
+          <p:style>
+            <a:lnRef idx="2">
+              <a:schemeClr val="dk1">
+                <a:shade val="50000"/>
+              </a:schemeClr>
+            </a:lnRef>
+            <a:fillRef idx="1">
+              <a:schemeClr val="dk1"/>
+            </a:fillRef>
+            <a:effectRef idx="0">
+              <a:schemeClr val="dk1"/>
+            </a:effectRef>
+            <a:fontRef idx="minor">
+              <a:schemeClr val="lt1"/>
+            </a:fontRef>
+          </p:style>
+          <p:txBody>
+            <a:bodyPr rtlCol="0" anchor="ctr"/>
+            <a:lstStyle/>
+            <a:p>
+              <a:pPr algn="ctr"/>
+              <a:endParaRPr lang="en-US"/>
+            </a:p>
+          </p:txBody>
+        </p:sp>
+      </p:grpSp>
+      <p:grpSp>
+        <p:nvGrpSpPr>
+          <p:cNvPr id="63" name="Group 62">
+            <a:extLst>
+              <a:ext uri="{FF2B5EF4-FFF2-40B4-BE49-F238E27FC236}">
+                <a16:creationId xmlns:a16="http://schemas.microsoft.com/office/drawing/2014/main" id="{EDA4668C-A6C9-9F29-1BEE-74169349C720}"/>
+              </a:ext>
+            </a:extLst>
+          </p:cNvPr>
+          <p:cNvGrpSpPr/>
+          <p:nvPr/>
+        </p:nvGrpSpPr>
+        <p:grpSpPr>
+          <a:xfrm>
+            <a:off x="1944633" y="278608"/>
+            <a:ext cx="1371600" cy="1371600"/>
+            <a:chOff x="427081" y="263129"/>
+            <a:chExt cx="1371600" cy="1371600"/>
+          </a:xfrm>
+        </p:grpSpPr>
+        <p:sp>
+          <p:nvSpPr>
+            <p:cNvPr id="64" name="Rectangle 63">
+              <a:extLst>
+                <a:ext uri="{FF2B5EF4-FFF2-40B4-BE49-F238E27FC236}">
+                  <a16:creationId xmlns:a16="http://schemas.microsoft.com/office/drawing/2014/main" id="{60E49F26-BC07-08BD-7B2E-1FB683E489ED}"/>
+                </a:ext>
+              </a:extLst>
+            </p:cNvPr>
+            <p:cNvSpPr/>
+            <p:nvPr/>
+          </p:nvSpPr>
+          <p:spPr>
+            <a:xfrm>
+              <a:off x="427081" y="263129"/>
+              <a:ext cx="1371600" cy="1371600"/>
+            </a:xfrm>
+            <a:prstGeom prst="rect">
+              <a:avLst/>
+            </a:prstGeom>
+            <a:noFill/>
+            <a:ln w="76200">
+              <a:solidFill>
+                <a:schemeClr val="tx1"/>
+              </a:solidFill>
+            </a:ln>
+          </p:spPr>
+          <p:style>
+            <a:lnRef idx="2">
+              <a:schemeClr val="accent1">
+                <a:shade val="50000"/>
+              </a:schemeClr>
+            </a:lnRef>
+            <a:fillRef idx="1">
+              <a:schemeClr val="accent1"/>
+            </a:fillRef>
+            <a:effectRef idx="0">
+              <a:schemeClr val="accent1"/>
+            </a:effectRef>
+            <a:fontRef idx="minor">
+              <a:schemeClr val="lt1"/>
+            </a:fontRef>
+          </p:style>
+          <p:txBody>
+            <a:bodyPr rtlCol="0" anchor="ctr"/>
+            <a:lstStyle/>
+            <a:p>
+              <a:pPr algn="ctr"/>
+              <a:endParaRPr lang="en-US"/>
+            </a:p>
+          </p:txBody>
+        </p:sp>
+        <p:sp>
+          <p:nvSpPr>
+            <p:cNvPr id="65" name="Plaque 64">
+              <a:extLst>
+                <a:ext uri="{FF2B5EF4-FFF2-40B4-BE49-F238E27FC236}">
+                  <a16:creationId xmlns:a16="http://schemas.microsoft.com/office/drawing/2014/main" id="{15C63D43-8589-2F16-9341-F86DC4EE75BF}"/>
+                </a:ext>
+              </a:extLst>
+            </p:cNvPr>
+            <p:cNvSpPr/>
+            <p:nvPr/>
+          </p:nvSpPr>
+          <p:spPr>
+            <a:xfrm>
+              <a:off x="573033" y="478473"/>
+              <a:ext cx="1097280" cy="1097280"/>
+            </a:xfrm>
+            <a:prstGeom prst="plaque">
+              <a:avLst/>
+            </a:prstGeom>
+            <a:noFill/>
+            <a:ln w="38100" cap="flat" cmpd="sng" algn="ctr">
+              <a:solidFill>
+                <a:schemeClr val="dk1"/>
+              </a:solidFill>
+              <a:prstDash val="solid"/>
+              <a:round/>
+              <a:headEnd type="none" w="med" len="med"/>
+              <a:tailEnd type="none" w="med" len="med"/>
+            </a:ln>
+          </p:spPr>
+          <p:style>
+            <a:lnRef idx="0">
+              <a:scrgbClr r="0" g="0" b="0"/>
+            </a:lnRef>
+            <a:fillRef idx="0">
+              <a:scrgbClr r="0" g="0" b="0"/>
+            </a:fillRef>
+            <a:effectRef idx="0">
+              <a:scrgbClr r="0" g="0" b="0"/>
+            </a:effectRef>
+            <a:fontRef idx="minor">
+              <a:schemeClr val="dk1"/>
+            </a:fontRef>
+          </p:style>
+          <p:txBody>
+            <a:bodyPr rtlCol="0" anchor="ctr"/>
+            <a:lstStyle/>
+            <a:p>
+              <a:pPr algn="ctr"/>
+              <a:endParaRPr lang="en-US"/>
+            </a:p>
+          </p:txBody>
+        </p:sp>
+      </p:grpSp>
+      <p:pic>
+        <p:nvPicPr>
+          <p:cNvPr id="24" name="Picture 23">
+            <a:extLst>
+              <a:ext uri="{FF2B5EF4-FFF2-40B4-BE49-F238E27FC236}">
+                <a16:creationId xmlns:a16="http://schemas.microsoft.com/office/drawing/2014/main" id="{2F2ED8C1-53DF-F73B-F74C-0D7AC6528101}"/>
+              </a:ext>
+            </a:extLst>
+          </p:cNvPr>
+          <p:cNvPicPr>
+            <a:picLocks noChangeAspect="1"/>
+          </p:cNvPicPr>
+          <p:nvPr/>
+        </p:nvPicPr>
+        <p:blipFill>
+          <a:blip r:embed="rId3"/>
+          <a:stretch>
+            <a:fillRect/>
+          </a:stretch>
+        </p:blipFill>
+        <p:spPr>
+          <a:xfrm>
+            <a:off x="2836236" y="813118"/>
+            <a:ext cx="277209" cy="415814"/>
+          </a:xfrm>
+          <a:prstGeom prst="rect">
+            <a:avLst/>
+          </a:prstGeom>
+        </p:spPr>
+      </p:pic>
     </p:spTree>
     <p:extLst>
       <p:ext uri="{BB962C8B-B14F-4D97-AF65-F5344CB8AC3E}">
@@ -20818,6 +21405,1780 @@
           </p:txBody>
         </p:sp>
       </p:grpSp>
+      <p:grpSp>
+        <p:nvGrpSpPr>
+          <p:cNvPr id="99" name="Group 98">
+            <a:extLst>
+              <a:ext uri="{FF2B5EF4-FFF2-40B4-BE49-F238E27FC236}">
+                <a16:creationId xmlns:a16="http://schemas.microsoft.com/office/drawing/2014/main" id="{F11DB8E8-EE35-3D49-409A-FC44766739AA}"/>
+              </a:ext>
+            </a:extLst>
+          </p:cNvPr>
+          <p:cNvGrpSpPr/>
+          <p:nvPr/>
+        </p:nvGrpSpPr>
+        <p:grpSpPr>
+          <a:xfrm>
+            <a:off x="4812983" y="561579"/>
+            <a:ext cx="1371600" cy="1371600"/>
+            <a:chOff x="427081" y="263129"/>
+            <a:chExt cx="1371600" cy="1371600"/>
+          </a:xfrm>
+        </p:grpSpPr>
+        <p:sp>
+          <p:nvSpPr>
+            <p:cNvPr id="102" name="Rectangle 101">
+              <a:extLst>
+                <a:ext uri="{FF2B5EF4-FFF2-40B4-BE49-F238E27FC236}">
+                  <a16:creationId xmlns:a16="http://schemas.microsoft.com/office/drawing/2014/main" id="{4B490ED9-FCA4-4573-99ED-442C37B5CEEF}"/>
+                </a:ext>
+              </a:extLst>
+            </p:cNvPr>
+            <p:cNvSpPr/>
+            <p:nvPr/>
+          </p:nvSpPr>
+          <p:spPr>
+            <a:xfrm>
+              <a:off x="427081" y="263129"/>
+              <a:ext cx="1371600" cy="1371600"/>
+            </a:xfrm>
+            <a:prstGeom prst="rect">
+              <a:avLst/>
+            </a:prstGeom>
+            <a:noFill/>
+            <a:ln w="76200">
+              <a:solidFill>
+                <a:schemeClr val="tx1"/>
+              </a:solidFill>
+            </a:ln>
+          </p:spPr>
+          <p:style>
+            <a:lnRef idx="2">
+              <a:schemeClr val="accent1">
+                <a:shade val="50000"/>
+              </a:schemeClr>
+            </a:lnRef>
+            <a:fillRef idx="1">
+              <a:schemeClr val="accent1"/>
+            </a:fillRef>
+            <a:effectRef idx="0">
+              <a:schemeClr val="accent1"/>
+            </a:effectRef>
+            <a:fontRef idx="minor">
+              <a:schemeClr val="lt1"/>
+            </a:fontRef>
+          </p:style>
+          <p:txBody>
+            <a:bodyPr rtlCol="0" anchor="ctr"/>
+            <a:lstStyle/>
+            <a:p>
+              <a:pPr algn="ctr"/>
+              <a:endParaRPr lang="en-US"/>
+            </a:p>
+          </p:txBody>
+        </p:sp>
+        <p:sp>
+          <p:nvSpPr>
+            <p:cNvPr id="103" name="Plaque 102">
+              <a:extLst>
+                <a:ext uri="{FF2B5EF4-FFF2-40B4-BE49-F238E27FC236}">
+                  <a16:creationId xmlns:a16="http://schemas.microsoft.com/office/drawing/2014/main" id="{8C56A696-8B73-72E8-0B33-501EF34C3DA0}"/>
+                </a:ext>
+              </a:extLst>
+            </p:cNvPr>
+            <p:cNvSpPr/>
+            <p:nvPr/>
+          </p:nvSpPr>
+          <p:spPr>
+            <a:xfrm>
+              <a:off x="573033" y="478473"/>
+              <a:ext cx="1097280" cy="1097280"/>
+            </a:xfrm>
+            <a:prstGeom prst="plaque">
+              <a:avLst/>
+            </a:prstGeom>
+            <a:noFill/>
+            <a:ln w="38100" cap="flat" cmpd="sng" algn="ctr">
+              <a:solidFill>
+                <a:schemeClr val="dk1"/>
+              </a:solidFill>
+              <a:prstDash val="solid"/>
+              <a:round/>
+              <a:headEnd type="none" w="med" len="med"/>
+              <a:tailEnd type="none" w="med" len="med"/>
+            </a:ln>
+          </p:spPr>
+          <p:style>
+            <a:lnRef idx="0">
+              <a:scrgbClr r="0" g="0" b="0"/>
+            </a:lnRef>
+            <a:fillRef idx="0">
+              <a:scrgbClr r="0" g="0" b="0"/>
+            </a:fillRef>
+            <a:effectRef idx="0">
+              <a:scrgbClr r="0" g="0" b="0"/>
+            </a:effectRef>
+            <a:fontRef idx="minor">
+              <a:schemeClr val="dk1"/>
+            </a:fontRef>
+          </p:style>
+          <p:txBody>
+            <a:bodyPr rtlCol="0" anchor="ctr"/>
+            <a:lstStyle/>
+            <a:p>
+              <a:pPr algn="ctr"/>
+              <a:endParaRPr lang="en-US"/>
+            </a:p>
+          </p:txBody>
+        </p:sp>
+      </p:grpSp>
+      <p:grpSp>
+        <p:nvGrpSpPr>
+          <p:cNvPr id="104" name="Group 103">
+            <a:extLst>
+              <a:ext uri="{FF2B5EF4-FFF2-40B4-BE49-F238E27FC236}">
+                <a16:creationId xmlns:a16="http://schemas.microsoft.com/office/drawing/2014/main" id="{344850BE-B9B8-B88E-F156-006BB031DC56}"/>
+              </a:ext>
+            </a:extLst>
+          </p:cNvPr>
+          <p:cNvGrpSpPr/>
+          <p:nvPr/>
+        </p:nvGrpSpPr>
+        <p:grpSpPr>
+          <a:xfrm>
+            <a:off x="5028480" y="893686"/>
+            <a:ext cx="932742" cy="801763"/>
+            <a:chOff x="3387725" y="1634730"/>
+            <a:chExt cx="1466850" cy="1260870"/>
+          </a:xfrm>
+        </p:grpSpPr>
+        <p:sp>
+          <p:nvSpPr>
+            <p:cNvPr id="105" name="Moon 104">
+              <a:extLst>
+                <a:ext uri="{FF2B5EF4-FFF2-40B4-BE49-F238E27FC236}">
+                  <a16:creationId xmlns:a16="http://schemas.microsoft.com/office/drawing/2014/main" id="{5E4ABBEB-6C6C-B442-9BFC-B32F11B97771}"/>
+                </a:ext>
+              </a:extLst>
+            </p:cNvPr>
+            <p:cNvSpPr/>
+            <p:nvPr/>
+          </p:nvSpPr>
+          <p:spPr>
+            <a:xfrm rot="16200000">
+              <a:off x="3873500" y="1651000"/>
+              <a:ext cx="495300" cy="1466850"/>
+            </a:xfrm>
+            <a:prstGeom prst="moon">
+              <a:avLst/>
+            </a:prstGeom>
+          </p:spPr>
+          <p:style>
+            <a:lnRef idx="2">
+              <a:schemeClr val="dk1">
+                <a:shade val="50000"/>
+              </a:schemeClr>
+            </a:lnRef>
+            <a:fillRef idx="1">
+              <a:schemeClr val="dk1"/>
+            </a:fillRef>
+            <a:effectRef idx="0">
+              <a:schemeClr val="dk1"/>
+            </a:effectRef>
+            <a:fontRef idx="minor">
+              <a:schemeClr val="lt1"/>
+            </a:fontRef>
+          </p:style>
+          <p:txBody>
+            <a:bodyPr rtlCol="0" anchor="ctr"/>
+            <a:lstStyle/>
+            <a:p>
+              <a:pPr algn="ctr"/>
+              <a:endParaRPr lang="en-US"/>
+            </a:p>
+          </p:txBody>
+        </p:sp>
+        <p:sp>
+          <p:nvSpPr>
+            <p:cNvPr id="106" name="Rectangle 105">
+              <a:extLst>
+                <a:ext uri="{FF2B5EF4-FFF2-40B4-BE49-F238E27FC236}">
+                  <a16:creationId xmlns:a16="http://schemas.microsoft.com/office/drawing/2014/main" id="{5548C35D-41BC-E62E-C3D1-8FCFE763691A}"/>
+                </a:ext>
+              </a:extLst>
+            </p:cNvPr>
+            <p:cNvSpPr/>
+            <p:nvPr/>
+          </p:nvSpPr>
+          <p:spPr>
+            <a:xfrm>
+              <a:off x="3651250" y="2682875"/>
+              <a:ext cx="939800" cy="212725"/>
+            </a:xfrm>
+            <a:prstGeom prst="rect">
+              <a:avLst/>
+            </a:prstGeom>
+          </p:spPr>
+          <p:style>
+            <a:lnRef idx="2">
+              <a:schemeClr val="dk1">
+                <a:shade val="50000"/>
+              </a:schemeClr>
+            </a:lnRef>
+            <a:fillRef idx="1">
+              <a:schemeClr val="dk1"/>
+            </a:fillRef>
+            <a:effectRef idx="0">
+              <a:schemeClr val="dk1"/>
+            </a:effectRef>
+            <a:fontRef idx="minor">
+              <a:schemeClr val="lt1"/>
+            </a:fontRef>
+          </p:style>
+          <p:txBody>
+            <a:bodyPr rtlCol="0" anchor="ctr"/>
+            <a:lstStyle/>
+            <a:p>
+              <a:pPr algn="ctr"/>
+              <a:endParaRPr lang="en-US"/>
+            </a:p>
+          </p:txBody>
+        </p:sp>
+        <p:sp>
+          <p:nvSpPr>
+            <p:cNvPr id="107" name="Moon 106">
+              <a:extLst>
+                <a:ext uri="{FF2B5EF4-FFF2-40B4-BE49-F238E27FC236}">
+                  <a16:creationId xmlns:a16="http://schemas.microsoft.com/office/drawing/2014/main" id="{7ECF0F48-64CD-379B-838B-3DECE932618F}"/>
+                </a:ext>
+              </a:extLst>
+            </p:cNvPr>
+            <p:cNvSpPr/>
+            <p:nvPr/>
+          </p:nvSpPr>
+          <p:spPr>
+            <a:xfrm rot="5400000">
+              <a:off x="4025900" y="1322786"/>
+              <a:ext cx="190500" cy="814387"/>
+            </a:xfrm>
+            <a:prstGeom prst="moon">
+              <a:avLst/>
+            </a:prstGeom>
+          </p:spPr>
+          <p:style>
+            <a:lnRef idx="2">
+              <a:schemeClr val="dk1">
+                <a:shade val="50000"/>
+              </a:schemeClr>
+            </a:lnRef>
+            <a:fillRef idx="1">
+              <a:schemeClr val="dk1"/>
+            </a:fillRef>
+            <a:effectRef idx="0">
+              <a:schemeClr val="dk1"/>
+            </a:effectRef>
+            <a:fontRef idx="minor">
+              <a:schemeClr val="lt1"/>
+            </a:fontRef>
+          </p:style>
+          <p:txBody>
+            <a:bodyPr rtlCol="0" anchor="ctr"/>
+            <a:lstStyle/>
+            <a:p>
+              <a:pPr algn="ctr"/>
+              <a:endParaRPr lang="en-US"/>
+            </a:p>
+          </p:txBody>
+        </p:sp>
+        <p:sp>
+          <p:nvSpPr>
+            <p:cNvPr id="108" name="Oval 107">
+              <a:extLst>
+                <a:ext uri="{FF2B5EF4-FFF2-40B4-BE49-F238E27FC236}">
+                  <a16:creationId xmlns:a16="http://schemas.microsoft.com/office/drawing/2014/main" id="{6680EE1B-8139-1873-5A63-D46F1DED7F99}"/>
+                </a:ext>
+              </a:extLst>
+            </p:cNvPr>
+            <p:cNvSpPr/>
+            <p:nvPr/>
+          </p:nvSpPr>
+          <p:spPr>
+            <a:xfrm rot="5400000">
+              <a:off x="3919196" y="1788661"/>
+              <a:ext cx="393192" cy="390129"/>
+            </a:xfrm>
+            <a:prstGeom prst="ellipse">
+              <a:avLst/>
+            </a:prstGeom>
+          </p:spPr>
+          <p:style>
+            <a:lnRef idx="2">
+              <a:schemeClr val="dk1"/>
+            </a:lnRef>
+            <a:fillRef idx="1">
+              <a:schemeClr val="lt1"/>
+            </a:fillRef>
+            <a:effectRef idx="0">
+              <a:schemeClr val="dk1"/>
+            </a:effectRef>
+            <a:fontRef idx="minor">
+              <a:schemeClr val="dk1"/>
+            </a:fontRef>
+          </p:style>
+          <p:txBody>
+            <a:bodyPr rtlCol="0" anchor="ctr"/>
+            <a:lstStyle/>
+            <a:p>
+              <a:pPr algn="ctr"/>
+              <a:endParaRPr lang="en-US"/>
+            </a:p>
+          </p:txBody>
+        </p:sp>
+        <p:sp>
+          <p:nvSpPr>
+            <p:cNvPr id="109" name="Moon 108">
+              <a:extLst>
+                <a:ext uri="{FF2B5EF4-FFF2-40B4-BE49-F238E27FC236}">
+                  <a16:creationId xmlns:a16="http://schemas.microsoft.com/office/drawing/2014/main" id="{5A80FCAA-ED70-CC7A-D67C-3DCF76DD8165}"/>
+                </a:ext>
+              </a:extLst>
+            </p:cNvPr>
+            <p:cNvSpPr/>
+            <p:nvPr/>
+          </p:nvSpPr>
+          <p:spPr>
+            <a:xfrm rot="5400000" flipH="1">
+              <a:off x="4025901" y="1830278"/>
+              <a:ext cx="190500" cy="814387"/>
+            </a:xfrm>
+            <a:prstGeom prst="moon">
+              <a:avLst/>
+            </a:prstGeom>
+          </p:spPr>
+          <p:style>
+            <a:lnRef idx="2">
+              <a:schemeClr val="dk1">
+                <a:shade val="50000"/>
+              </a:schemeClr>
+            </a:lnRef>
+            <a:fillRef idx="1">
+              <a:schemeClr val="dk1"/>
+            </a:fillRef>
+            <a:effectRef idx="0">
+              <a:schemeClr val="dk1"/>
+            </a:effectRef>
+            <a:fontRef idx="minor">
+              <a:schemeClr val="lt1"/>
+            </a:fontRef>
+          </p:style>
+          <p:txBody>
+            <a:bodyPr rtlCol="0" anchor="ctr"/>
+            <a:lstStyle/>
+            <a:p>
+              <a:pPr algn="ctr"/>
+              <a:endParaRPr lang="en-US"/>
+            </a:p>
+          </p:txBody>
+        </p:sp>
+        <p:sp>
+          <p:nvSpPr>
+            <p:cNvPr id="110" name="Oval 109">
+              <a:extLst>
+                <a:ext uri="{FF2B5EF4-FFF2-40B4-BE49-F238E27FC236}">
+                  <a16:creationId xmlns:a16="http://schemas.microsoft.com/office/drawing/2014/main" id="{3565B637-E4BD-792D-8380-B415A9C87FB6}"/>
+                </a:ext>
+              </a:extLst>
+            </p:cNvPr>
+            <p:cNvSpPr/>
+            <p:nvPr/>
+          </p:nvSpPr>
+          <p:spPr>
+            <a:xfrm rot="5400000">
+              <a:off x="3978632" y="1843842"/>
+              <a:ext cx="274320" cy="274320"/>
+            </a:xfrm>
+            <a:prstGeom prst="ellipse">
+              <a:avLst/>
+            </a:prstGeom>
+          </p:spPr>
+          <p:style>
+            <a:lnRef idx="2">
+              <a:schemeClr val="dk1">
+                <a:shade val="50000"/>
+              </a:schemeClr>
+            </a:lnRef>
+            <a:fillRef idx="1">
+              <a:schemeClr val="dk1"/>
+            </a:fillRef>
+            <a:effectRef idx="0">
+              <a:schemeClr val="dk1"/>
+            </a:effectRef>
+            <a:fontRef idx="minor">
+              <a:schemeClr val="lt1"/>
+            </a:fontRef>
+          </p:style>
+          <p:txBody>
+            <a:bodyPr rtlCol="0" anchor="ctr"/>
+            <a:lstStyle/>
+            <a:p>
+              <a:pPr algn="ctr"/>
+              <a:endParaRPr lang="en-US"/>
+            </a:p>
+          </p:txBody>
+        </p:sp>
+      </p:grpSp>
+      <p:pic>
+        <p:nvPicPr>
+          <p:cNvPr id="111" name="Picture 110">
+            <a:extLst>
+              <a:ext uri="{FF2B5EF4-FFF2-40B4-BE49-F238E27FC236}">
+                <a16:creationId xmlns:a16="http://schemas.microsoft.com/office/drawing/2014/main" id="{79436266-120D-34F5-3032-FA2C90F7477B}"/>
+              </a:ext>
+            </a:extLst>
+          </p:cNvPr>
+          <p:cNvPicPr>
+            <a:picLocks noChangeAspect="1"/>
+          </p:cNvPicPr>
+          <p:nvPr/>
+        </p:nvPicPr>
+        <p:blipFill>
+          <a:blip r:embed="rId3"/>
+          <a:stretch>
+            <a:fillRect/>
+          </a:stretch>
+        </p:blipFill>
+        <p:spPr>
+          <a:xfrm>
+            <a:off x="6483418" y="1143969"/>
+            <a:ext cx="433388" cy="444277"/>
+          </a:xfrm>
+          <a:prstGeom prst="rect">
+            <a:avLst/>
+          </a:prstGeom>
+        </p:spPr>
+      </p:pic>
+      <p:grpSp>
+        <p:nvGrpSpPr>
+          <p:cNvPr id="112" name="Group 111">
+            <a:extLst>
+              <a:ext uri="{FF2B5EF4-FFF2-40B4-BE49-F238E27FC236}">
+                <a16:creationId xmlns:a16="http://schemas.microsoft.com/office/drawing/2014/main" id="{BEF675C1-49FD-3043-DD0B-02D8BC581AA9}"/>
+              </a:ext>
+            </a:extLst>
+          </p:cNvPr>
+          <p:cNvGrpSpPr/>
+          <p:nvPr/>
+        </p:nvGrpSpPr>
+        <p:grpSpPr>
+          <a:xfrm>
+            <a:off x="6316063" y="565221"/>
+            <a:ext cx="1371600" cy="1371600"/>
+            <a:chOff x="427081" y="263129"/>
+            <a:chExt cx="1371600" cy="1371600"/>
+          </a:xfrm>
+        </p:grpSpPr>
+        <p:sp>
+          <p:nvSpPr>
+            <p:cNvPr id="113" name="Rectangle 112">
+              <a:extLst>
+                <a:ext uri="{FF2B5EF4-FFF2-40B4-BE49-F238E27FC236}">
+                  <a16:creationId xmlns:a16="http://schemas.microsoft.com/office/drawing/2014/main" id="{E0EA321F-0F29-9ACF-0936-8964356B8717}"/>
+                </a:ext>
+              </a:extLst>
+            </p:cNvPr>
+            <p:cNvSpPr/>
+            <p:nvPr/>
+          </p:nvSpPr>
+          <p:spPr>
+            <a:xfrm>
+              <a:off x="427081" y="263129"/>
+              <a:ext cx="1371600" cy="1371600"/>
+            </a:xfrm>
+            <a:prstGeom prst="rect">
+              <a:avLst/>
+            </a:prstGeom>
+            <a:noFill/>
+            <a:ln w="76200">
+              <a:solidFill>
+                <a:schemeClr val="tx1"/>
+              </a:solidFill>
+            </a:ln>
+          </p:spPr>
+          <p:style>
+            <a:lnRef idx="2">
+              <a:schemeClr val="accent1">
+                <a:shade val="50000"/>
+              </a:schemeClr>
+            </a:lnRef>
+            <a:fillRef idx="1">
+              <a:schemeClr val="accent1"/>
+            </a:fillRef>
+            <a:effectRef idx="0">
+              <a:schemeClr val="accent1"/>
+            </a:effectRef>
+            <a:fontRef idx="minor">
+              <a:schemeClr val="lt1"/>
+            </a:fontRef>
+          </p:style>
+          <p:txBody>
+            <a:bodyPr rtlCol="0" anchor="ctr"/>
+            <a:lstStyle/>
+            <a:p>
+              <a:pPr algn="ctr"/>
+              <a:endParaRPr lang="en-US"/>
+            </a:p>
+          </p:txBody>
+        </p:sp>
+        <p:sp>
+          <p:nvSpPr>
+            <p:cNvPr id="114" name="Plaque 113">
+              <a:extLst>
+                <a:ext uri="{FF2B5EF4-FFF2-40B4-BE49-F238E27FC236}">
+                  <a16:creationId xmlns:a16="http://schemas.microsoft.com/office/drawing/2014/main" id="{A0A1451F-7329-6283-78CF-101E83297B9D}"/>
+                </a:ext>
+              </a:extLst>
+            </p:cNvPr>
+            <p:cNvSpPr/>
+            <p:nvPr/>
+          </p:nvSpPr>
+          <p:spPr>
+            <a:xfrm>
+              <a:off x="573033" y="478473"/>
+              <a:ext cx="1097280" cy="1097280"/>
+            </a:xfrm>
+            <a:prstGeom prst="plaque">
+              <a:avLst/>
+            </a:prstGeom>
+            <a:noFill/>
+            <a:ln w="38100" cap="flat" cmpd="sng" algn="ctr">
+              <a:solidFill>
+                <a:schemeClr val="dk1"/>
+              </a:solidFill>
+              <a:prstDash val="solid"/>
+              <a:round/>
+              <a:headEnd type="none" w="med" len="med"/>
+              <a:tailEnd type="none" w="med" len="med"/>
+            </a:ln>
+          </p:spPr>
+          <p:style>
+            <a:lnRef idx="0">
+              <a:scrgbClr r="0" g="0" b="0"/>
+            </a:lnRef>
+            <a:fillRef idx="0">
+              <a:scrgbClr r="0" g="0" b="0"/>
+            </a:fillRef>
+            <a:effectRef idx="0">
+              <a:scrgbClr r="0" g="0" b="0"/>
+            </a:effectRef>
+            <a:fontRef idx="minor">
+              <a:schemeClr val="dk1"/>
+            </a:fontRef>
+          </p:style>
+          <p:txBody>
+            <a:bodyPr rtlCol="0" anchor="ctr"/>
+            <a:lstStyle/>
+            <a:p>
+              <a:pPr algn="ctr"/>
+              <a:endParaRPr lang="en-US"/>
+            </a:p>
+          </p:txBody>
+        </p:sp>
+      </p:grpSp>
+      <p:grpSp>
+        <p:nvGrpSpPr>
+          <p:cNvPr id="115" name="Group 114">
+            <a:extLst>
+              <a:ext uri="{FF2B5EF4-FFF2-40B4-BE49-F238E27FC236}">
+                <a16:creationId xmlns:a16="http://schemas.microsoft.com/office/drawing/2014/main" id="{539B77C6-8303-82EE-0E34-097907BCE64D}"/>
+              </a:ext>
+            </a:extLst>
+          </p:cNvPr>
+          <p:cNvGrpSpPr/>
+          <p:nvPr/>
+        </p:nvGrpSpPr>
+        <p:grpSpPr>
+          <a:xfrm>
+            <a:off x="6908156" y="838411"/>
+            <a:ext cx="441325" cy="1012069"/>
+            <a:chOff x="3248025" y="1009650"/>
+            <a:chExt cx="1390650" cy="3189114"/>
+          </a:xfrm>
+        </p:grpSpPr>
+        <p:sp>
+          <p:nvSpPr>
+            <p:cNvPr id="116" name="Oval 115">
+              <a:extLst>
+                <a:ext uri="{FF2B5EF4-FFF2-40B4-BE49-F238E27FC236}">
+                  <a16:creationId xmlns:a16="http://schemas.microsoft.com/office/drawing/2014/main" id="{CCABD792-2FDA-7827-8E93-864D69CD76BD}"/>
+                </a:ext>
+              </a:extLst>
+            </p:cNvPr>
+            <p:cNvSpPr/>
+            <p:nvPr/>
+          </p:nvSpPr>
+          <p:spPr>
+            <a:xfrm>
+              <a:off x="3549650" y="1009650"/>
+              <a:ext cx="787400" cy="984250"/>
+            </a:xfrm>
+            <a:prstGeom prst="ellipse">
+              <a:avLst/>
+            </a:prstGeom>
+          </p:spPr>
+          <p:style>
+            <a:lnRef idx="2">
+              <a:schemeClr val="dk1">
+                <a:shade val="50000"/>
+              </a:schemeClr>
+            </a:lnRef>
+            <a:fillRef idx="1">
+              <a:schemeClr val="dk1"/>
+            </a:fillRef>
+            <a:effectRef idx="0">
+              <a:schemeClr val="dk1"/>
+            </a:effectRef>
+            <a:fontRef idx="minor">
+              <a:schemeClr val="lt1"/>
+            </a:fontRef>
+          </p:style>
+          <p:txBody>
+            <a:bodyPr rtlCol="0" anchor="ctr"/>
+            <a:lstStyle/>
+            <a:p>
+              <a:pPr algn="ctr"/>
+              <a:endParaRPr lang="en-US"/>
+            </a:p>
+          </p:txBody>
+        </p:sp>
+        <p:sp>
+          <p:nvSpPr>
+            <p:cNvPr id="117" name="Rectangle: Rounded Corners 116">
+              <a:extLst>
+                <a:ext uri="{FF2B5EF4-FFF2-40B4-BE49-F238E27FC236}">
+                  <a16:creationId xmlns:a16="http://schemas.microsoft.com/office/drawing/2014/main" id="{D3B1102E-ED8A-9E8A-036E-AEE12AD8CF5D}"/>
+                </a:ext>
+              </a:extLst>
+            </p:cNvPr>
+            <p:cNvSpPr/>
+            <p:nvPr/>
+          </p:nvSpPr>
+          <p:spPr>
+            <a:xfrm>
+              <a:off x="3600450" y="2051050"/>
+              <a:ext cx="692150" cy="292100"/>
+            </a:xfrm>
+            <a:prstGeom prst="roundRect">
+              <a:avLst/>
+            </a:prstGeom>
+          </p:spPr>
+          <p:style>
+            <a:lnRef idx="2">
+              <a:schemeClr val="dk1">
+                <a:shade val="50000"/>
+              </a:schemeClr>
+            </a:lnRef>
+            <a:fillRef idx="1">
+              <a:schemeClr val="dk1"/>
+            </a:fillRef>
+            <a:effectRef idx="0">
+              <a:schemeClr val="dk1"/>
+            </a:effectRef>
+            <a:fontRef idx="minor">
+              <a:schemeClr val="lt1"/>
+            </a:fontRef>
+          </p:style>
+          <p:txBody>
+            <a:bodyPr rtlCol="0" anchor="ctr"/>
+            <a:lstStyle/>
+            <a:p>
+              <a:pPr algn="ctr"/>
+              <a:endParaRPr lang="en-US"/>
+            </a:p>
+          </p:txBody>
+        </p:sp>
+        <p:grpSp>
+          <p:nvGrpSpPr>
+            <p:cNvPr id="118" name="Group 117">
+              <a:extLst>
+                <a:ext uri="{FF2B5EF4-FFF2-40B4-BE49-F238E27FC236}">
+                  <a16:creationId xmlns:a16="http://schemas.microsoft.com/office/drawing/2014/main" id="{705D1440-C936-92DD-520B-327151D33532}"/>
+                </a:ext>
+              </a:extLst>
+            </p:cNvPr>
+            <p:cNvGrpSpPr/>
+            <p:nvPr/>
+          </p:nvGrpSpPr>
+          <p:grpSpPr>
+            <a:xfrm>
+              <a:off x="4282383" y="2120161"/>
+              <a:ext cx="291335" cy="2073380"/>
+              <a:chOff x="4282383" y="2120161"/>
+              <a:chExt cx="291335" cy="2073380"/>
+            </a:xfrm>
+          </p:grpSpPr>
+          <p:sp>
+            <p:nvSpPr>
+              <p:cNvPr id="126" name="Rectangle 125">
+                <a:extLst>
+                  <a:ext uri="{FF2B5EF4-FFF2-40B4-BE49-F238E27FC236}">
+                    <a16:creationId xmlns:a16="http://schemas.microsoft.com/office/drawing/2014/main" id="{EFC745F0-08C9-D4E6-BFF4-6C2618E0AF3F}"/>
+                  </a:ext>
+                </a:extLst>
+              </p:cNvPr>
+              <p:cNvSpPr/>
+              <p:nvPr/>
+            </p:nvSpPr>
+            <p:spPr>
+              <a:xfrm rot="3958351">
+                <a:off x="3893446" y="2509098"/>
+                <a:ext cx="996950" cy="219075"/>
+              </a:xfrm>
+              <a:prstGeom prst="rect">
+                <a:avLst/>
+              </a:prstGeom>
+            </p:spPr>
+            <p:style>
+              <a:lnRef idx="2">
+                <a:schemeClr val="dk1">
+                  <a:shade val="50000"/>
+                </a:schemeClr>
+              </a:lnRef>
+              <a:fillRef idx="1">
+                <a:schemeClr val="dk1"/>
+              </a:fillRef>
+              <a:effectRef idx="0">
+                <a:schemeClr val="dk1"/>
+              </a:effectRef>
+              <a:fontRef idx="minor">
+                <a:schemeClr val="lt1"/>
+              </a:fontRef>
+            </p:style>
+            <p:txBody>
+              <a:bodyPr rtlCol="0" anchor="ctr"/>
+              <a:lstStyle/>
+              <a:p>
+                <a:pPr algn="ctr"/>
+                <a:endParaRPr lang="en-US"/>
+              </a:p>
+            </p:txBody>
+          </p:sp>
+          <p:sp>
+            <p:nvSpPr>
+              <p:cNvPr id="127" name="Isosceles Triangle 126">
+                <a:extLst>
+                  <a:ext uri="{FF2B5EF4-FFF2-40B4-BE49-F238E27FC236}">
+                    <a16:creationId xmlns:a16="http://schemas.microsoft.com/office/drawing/2014/main" id="{45EE1AE7-D978-91D4-EC1B-BBB3E66D75DA}"/>
+                  </a:ext>
+                </a:extLst>
+              </p:cNvPr>
+              <p:cNvSpPr/>
+              <p:nvPr/>
+            </p:nvSpPr>
+            <p:spPr>
+              <a:xfrm rot="11268472">
+                <a:off x="4421316" y="2942591"/>
+                <a:ext cx="152402" cy="1250950"/>
+              </a:xfrm>
+              <a:prstGeom prst="triangle">
+                <a:avLst/>
+              </a:prstGeom>
+            </p:spPr>
+            <p:style>
+              <a:lnRef idx="2">
+                <a:schemeClr val="dk1">
+                  <a:shade val="50000"/>
+                </a:schemeClr>
+              </a:lnRef>
+              <a:fillRef idx="1">
+                <a:schemeClr val="dk1"/>
+              </a:fillRef>
+              <a:effectRef idx="0">
+                <a:schemeClr val="dk1"/>
+              </a:effectRef>
+              <a:fontRef idx="minor">
+                <a:schemeClr val="lt1"/>
+              </a:fontRef>
+            </p:style>
+            <p:txBody>
+              <a:bodyPr rtlCol="0" anchor="ctr"/>
+              <a:lstStyle/>
+              <a:p>
+                <a:pPr algn="ctr"/>
+                <a:endParaRPr lang="en-US"/>
+              </a:p>
+            </p:txBody>
+          </p:sp>
+        </p:grpSp>
+        <p:grpSp>
+          <p:nvGrpSpPr>
+            <p:cNvPr id="119" name="Group 118">
+              <a:extLst>
+                <a:ext uri="{FF2B5EF4-FFF2-40B4-BE49-F238E27FC236}">
+                  <a16:creationId xmlns:a16="http://schemas.microsoft.com/office/drawing/2014/main" id="{99CA7249-E45C-C3D9-EA78-4EDA9C69BE00}"/>
+                </a:ext>
+              </a:extLst>
+            </p:cNvPr>
+            <p:cNvGrpSpPr/>
+            <p:nvPr/>
+          </p:nvGrpSpPr>
+          <p:grpSpPr>
+            <a:xfrm flipH="1">
+              <a:off x="3309115" y="2124715"/>
+              <a:ext cx="291335" cy="2073380"/>
+              <a:chOff x="4282383" y="2120161"/>
+              <a:chExt cx="291335" cy="2073380"/>
+            </a:xfrm>
+          </p:grpSpPr>
+          <p:sp>
+            <p:nvSpPr>
+              <p:cNvPr id="124" name="Rectangle 123">
+                <a:extLst>
+                  <a:ext uri="{FF2B5EF4-FFF2-40B4-BE49-F238E27FC236}">
+                    <a16:creationId xmlns:a16="http://schemas.microsoft.com/office/drawing/2014/main" id="{48646A6F-8DFD-1D0E-A891-A4FE5EF75AAD}"/>
+                  </a:ext>
+                </a:extLst>
+              </p:cNvPr>
+              <p:cNvSpPr/>
+              <p:nvPr/>
+            </p:nvSpPr>
+            <p:spPr>
+              <a:xfrm rot="3958351">
+                <a:off x="3893446" y="2509098"/>
+                <a:ext cx="996950" cy="219075"/>
+              </a:xfrm>
+              <a:prstGeom prst="rect">
+                <a:avLst/>
+              </a:prstGeom>
+            </p:spPr>
+            <p:style>
+              <a:lnRef idx="2">
+                <a:schemeClr val="dk1">
+                  <a:shade val="50000"/>
+                </a:schemeClr>
+              </a:lnRef>
+              <a:fillRef idx="1">
+                <a:schemeClr val="dk1"/>
+              </a:fillRef>
+              <a:effectRef idx="0">
+                <a:schemeClr val="dk1"/>
+              </a:effectRef>
+              <a:fontRef idx="minor">
+                <a:schemeClr val="lt1"/>
+              </a:fontRef>
+            </p:style>
+            <p:txBody>
+              <a:bodyPr rtlCol="0" anchor="ctr"/>
+              <a:lstStyle/>
+              <a:p>
+                <a:pPr algn="ctr"/>
+                <a:endParaRPr lang="en-US"/>
+              </a:p>
+            </p:txBody>
+          </p:sp>
+          <p:sp>
+            <p:nvSpPr>
+              <p:cNvPr id="125" name="Isosceles Triangle 124">
+                <a:extLst>
+                  <a:ext uri="{FF2B5EF4-FFF2-40B4-BE49-F238E27FC236}">
+                    <a16:creationId xmlns:a16="http://schemas.microsoft.com/office/drawing/2014/main" id="{87BAEFD1-5B6A-FB9D-48E0-4051514343DF}"/>
+                  </a:ext>
+                </a:extLst>
+              </p:cNvPr>
+              <p:cNvSpPr/>
+              <p:nvPr/>
+            </p:nvSpPr>
+            <p:spPr>
+              <a:xfrm rot="11268472">
+                <a:off x="4421316" y="2942591"/>
+                <a:ext cx="152402" cy="1250950"/>
+              </a:xfrm>
+              <a:prstGeom prst="triangle">
+                <a:avLst/>
+              </a:prstGeom>
+            </p:spPr>
+            <p:style>
+              <a:lnRef idx="2">
+                <a:schemeClr val="dk1">
+                  <a:shade val="50000"/>
+                </a:schemeClr>
+              </a:lnRef>
+              <a:fillRef idx="1">
+                <a:schemeClr val="dk1"/>
+              </a:fillRef>
+              <a:effectRef idx="0">
+                <a:schemeClr val="dk1"/>
+              </a:effectRef>
+              <a:fontRef idx="minor">
+                <a:schemeClr val="lt1"/>
+              </a:fontRef>
+            </p:style>
+            <p:txBody>
+              <a:bodyPr rtlCol="0" anchor="ctr"/>
+              <a:lstStyle/>
+              <a:p>
+                <a:pPr algn="ctr"/>
+                <a:endParaRPr lang="en-US"/>
+              </a:p>
+            </p:txBody>
+          </p:sp>
+        </p:grpSp>
+        <p:sp>
+          <p:nvSpPr>
+            <p:cNvPr id="120" name="Rectangle 119">
+              <a:extLst>
+                <a:ext uri="{FF2B5EF4-FFF2-40B4-BE49-F238E27FC236}">
+                  <a16:creationId xmlns:a16="http://schemas.microsoft.com/office/drawing/2014/main" id="{F39ABCC3-247B-DCB6-D696-2F3371B30E28}"/>
+                </a:ext>
+              </a:extLst>
+            </p:cNvPr>
+            <p:cNvSpPr/>
+            <p:nvPr/>
+          </p:nvSpPr>
+          <p:spPr>
+            <a:xfrm rot="5400000">
+              <a:off x="3441937" y="2586038"/>
+              <a:ext cx="996950" cy="219075"/>
+            </a:xfrm>
+            <a:prstGeom prst="rect">
+              <a:avLst/>
+            </a:prstGeom>
+          </p:spPr>
+          <p:style>
+            <a:lnRef idx="2">
+              <a:schemeClr val="dk1">
+                <a:shade val="50000"/>
+              </a:schemeClr>
+            </a:lnRef>
+            <a:fillRef idx="1">
+              <a:schemeClr val="dk1"/>
+            </a:fillRef>
+            <a:effectRef idx="0">
+              <a:schemeClr val="dk1"/>
+            </a:effectRef>
+            <a:fontRef idx="minor">
+              <a:schemeClr val="lt1"/>
+            </a:fontRef>
+          </p:style>
+          <p:txBody>
+            <a:bodyPr rtlCol="0" anchor="ctr"/>
+            <a:lstStyle/>
+            <a:p>
+              <a:pPr algn="ctr"/>
+              <a:endParaRPr lang="en-US"/>
+            </a:p>
+          </p:txBody>
+        </p:sp>
+        <p:sp>
+          <p:nvSpPr>
+            <p:cNvPr id="121" name="Isosceles Triangle 120">
+              <a:extLst>
+                <a:ext uri="{FF2B5EF4-FFF2-40B4-BE49-F238E27FC236}">
+                  <a16:creationId xmlns:a16="http://schemas.microsoft.com/office/drawing/2014/main" id="{FF5FE758-D19C-43CE-63D7-A683DFCEE47A}"/>
+                </a:ext>
+              </a:extLst>
+            </p:cNvPr>
+            <p:cNvSpPr/>
+            <p:nvPr/>
+          </p:nvSpPr>
+          <p:spPr>
+            <a:xfrm rot="10800000">
+              <a:off x="3869157" y="2947814"/>
+              <a:ext cx="152402" cy="1250950"/>
+            </a:xfrm>
+            <a:prstGeom prst="triangle">
+              <a:avLst/>
+            </a:prstGeom>
+          </p:spPr>
+          <p:style>
+            <a:lnRef idx="2">
+              <a:schemeClr val="dk1">
+                <a:shade val="50000"/>
+              </a:schemeClr>
+            </a:lnRef>
+            <a:fillRef idx="1">
+              <a:schemeClr val="dk1"/>
+            </a:fillRef>
+            <a:effectRef idx="0">
+              <a:schemeClr val="dk1"/>
+            </a:effectRef>
+            <a:fontRef idx="minor">
+              <a:schemeClr val="lt1"/>
+            </a:fontRef>
+          </p:style>
+          <p:txBody>
+            <a:bodyPr rtlCol="0" anchor="ctr"/>
+            <a:lstStyle/>
+            <a:p>
+              <a:pPr algn="ctr"/>
+              <a:endParaRPr lang="en-US"/>
+            </a:p>
+          </p:txBody>
+        </p:sp>
+        <p:sp>
+          <p:nvSpPr>
+            <p:cNvPr id="122" name="Rectangle 121">
+              <a:extLst>
+                <a:ext uri="{FF2B5EF4-FFF2-40B4-BE49-F238E27FC236}">
+                  <a16:creationId xmlns:a16="http://schemas.microsoft.com/office/drawing/2014/main" id="{5E3A751D-E390-B0CE-CE91-3372421EA670}"/>
+                </a:ext>
+              </a:extLst>
+            </p:cNvPr>
+            <p:cNvSpPr/>
+            <p:nvPr/>
+          </p:nvSpPr>
+          <p:spPr>
+            <a:xfrm>
+              <a:off x="3248025" y="1227137"/>
+              <a:ext cx="215900" cy="766763"/>
+            </a:xfrm>
+            <a:prstGeom prst="rect">
+              <a:avLst/>
+            </a:prstGeom>
+          </p:spPr>
+          <p:style>
+            <a:lnRef idx="2">
+              <a:schemeClr val="dk1"/>
+            </a:lnRef>
+            <a:fillRef idx="1">
+              <a:schemeClr val="lt1"/>
+            </a:fillRef>
+            <a:effectRef idx="0">
+              <a:schemeClr val="dk1"/>
+            </a:effectRef>
+            <a:fontRef idx="minor">
+              <a:schemeClr val="dk1"/>
+            </a:fontRef>
+          </p:style>
+          <p:txBody>
+            <a:bodyPr rtlCol="0" anchor="ctr"/>
+            <a:lstStyle/>
+            <a:p>
+              <a:pPr algn="ctr"/>
+              <a:endParaRPr lang="en-US"/>
+            </a:p>
+          </p:txBody>
+        </p:sp>
+        <p:sp>
+          <p:nvSpPr>
+            <p:cNvPr id="123" name="Rectangle 122">
+              <a:extLst>
+                <a:ext uri="{FF2B5EF4-FFF2-40B4-BE49-F238E27FC236}">
+                  <a16:creationId xmlns:a16="http://schemas.microsoft.com/office/drawing/2014/main" id="{6684F01C-868A-46F1-C59D-147B79A345FD}"/>
+                </a:ext>
+              </a:extLst>
+            </p:cNvPr>
+            <p:cNvSpPr/>
+            <p:nvPr/>
+          </p:nvSpPr>
+          <p:spPr>
+            <a:xfrm>
+              <a:off x="4422775" y="1227136"/>
+              <a:ext cx="215900" cy="766764"/>
+            </a:xfrm>
+            <a:prstGeom prst="rect">
+              <a:avLst/>
+            </a:prstGeom>
+          </p:spPr>
+          <p:style>
+            <a:lnRef idx="2">
+              <a:schemeClr val="dk1"/>
+            </a:lnRef>
+            <a:fillRef idx="1">
+              <a:schemeClr val="lt1"/>
+            </a:fillRef>
+            <a:effectRef idx="0">
+              <a:schemeClr val="dk1"/>
+            </a:effectRef>
+            <a:fontRef idx="minor">
+              <a:schemeClr val="dk1"/>
+            </a:fontRef>
+          </p:style>
+          <p:txBody>
+            <a:bodyPr rtlCol="0" anchor="ctr"/>
+            <a:lstStyle/>
+            <a:p>
+              <a:pPr algn="ctr"/>
+              <a:endParaRPr lang="en-US"/>
+            </a:p>
+          </p:txBody>
+        </p:sp>
+      </p:grpSp>
+      <p:grpSp>
+        <p:nvGrpSpPr>
+          <p:cNvPr id="128" name="Group 127">
+            <a:extLst>
+              <a:ext uri="{FF2B5EF4-FFF2-40B4-BE49-F238E27FC236}">
+                <a16:creationId xmlns:a16="http://schemas.microsoft.com/office/drawing/2014/main" id="{61FE4039-9F6C-0F3B-B9F5-4DFB51F1C2DD}"/>
+              </a:ext>
+            </a:extLst>
+          </p:cNvPr>
+          <p:cNvGrpSpPr/>
+          <p:nvPr/>
+        </p:nvGrpSpPr>
+        <p:grpSpPr>
+          <a:xfrm>
+            <a:off x="8185405" y="850161"/>
+            <a:ext cx="502920" cy="1014984"/>
+            <a:chOff x="5380031" y="966102"/>
+            <a:chExt cx="1727200" cy="3248141"/>
+          </a:xfrm>
+        </p:grpSpPr>
+        <p:sp>
+          <p:nvSpPr>
+            <p:cNvPr id="129" name="Moon 128">
+              <a:extLst>
+                <a:ext uri="{FF2B5EF4-FFF2-40B4-BE49-F238E27FC236}">
+                  <a16:creationId xmlns:a16="http://schemas.microsoft.com/office/drawing/2014/main" id="{8DDEF991-F11D-8A27-4175-D37941E0CB22}"/>
+                </a:ext>
+              </a:extLst>
+            </p:cNvPr>
+            <p:cNvSpPr/>
+            <p:nvPr/>
+          </p:nvSpPr>
+          <p:spPr>
+            <a:xfrm rot="19627358">
+              <a:off x="5549196" y="966102"/>
+              <a:ext cx="450850" cy="984250"/>
+            </a:xfrm>
+            <a:prstGeom prst="moon">
+              <a:avLst/>
+            </a:prstGeom>
+          </p:spPr>
+          <p:style>
+            <a:lnRef idx="2">
+              <a:schemeClr val="dk1"/>
+            </a:lnRef>
+            <a:fillRef idx="1">
+              <a:schemeClr val="lt1"/>
+            </a:fillRef>
+            <a:effectRef idx="0">
+              <a:schemeClr val="dk1"/>
+            </a:effectRef>
+            <a:fontRef idx="minor">
+              <a:schemeClr val="dk1"/>
+            </a:fontRef>
+          </p:style>
+          <p:txBody>
+            <a:bodyPr rtlCol="0" anchor="ctr"/>
+            <a:lstStyle/>
+            <a:p>
+              <a:pPr algn="ctr"/>
+              <a:endParaRPr lang="en-US"/>
+            </a:p>
+          </p:txBody>
+        </p:sp>
+        <p:sp>
+          <p:nvSpPr>
+            <p:cNvPr id="130" name="Moon 129">
+              <a:extLst>
+                <a:ext uri="{FF2B5EF4-FFF2-40B4-BE49-F238E27FC236}">
+                  <a16:creationId xmlns:a16="http://schemas.microsoft.com/office/drawing/2014/main" id="{C7B09D35-7F15-B3EC-FED3-3129F20C173D}"/>
+                </a:ext>
+              </a:extLst>
+            </p:cNvPr>
+            <p:cNvSpPr/>
+            <p:nvPr/>
+          </p:nvSpPr>
+          <p:spPr>
+            <a:xfrm rot="1972642" flipH="1">
+              <a:off x="6518602" y="966104"/>
+              <a:ext cx="450850" cy="984250"/>
+            </a:xfrm>
+            <a:prstGeom prst="moon">
+              <a:avLst/>
+            </a:prstGeom>
+          </p:spPr>
+          <p:style>
+            <a:lnRef idx="2">
+              <a:schemeClr val="dk1"/>
+            </a:lnRef>
+            <a:fillRef idx="1">
+              <a:schemeClr val="lt1"/>
+            </a:fillRef>
+            <a:effectRef idx="0">
+              <a:schemeClr val="dk1"/>
+            </a:effectRef>
+            <a:fontRef idx="minor">
+              <a:schemeClr val="dk1"/>
+            </a:fontRef>
+          </p:style>
+          <p:txBody>
+            <a:bodyPr rtlCol="0" anchor="ctr"/>
+            <a:lstStyle/>
+            <a:p>
+              <a:pPr algn="ctr"/>
+              <a:endParaRPr lang="en-US"/>
+            </a:p>
+          </p:txBody>
+        </p:sp>
+        <p:sp>
+          <p:nvSpPr>
+            <p:cNvPr id="131" name="Oval 130">
+              <a:extLst>
+                <a:ext uri="{FF2B5EF4-FFF2-40B4-BE49-F238E27FC236}">
+                  <a16:creationId xmlns:a16="http://schemas.microsoft.com/office/drawing/2014/main" id="{DC5E7395-5F99-9EA9-C394-AB96EEF0000A}"/>
+                </a:ext>
+              </a:extLst>
+            </p:cNvPr>
+            <p:cNvSpPr/>
+            <p:nvPr/>
+          </p:nvSpPr>
+          <p:spPr>
+            <a:xfrm>
+              <a:off x="5852869" y="1025129"/>
+              <a:ext cx="787400" cy="984250"/>
+            </a:xfrm>
+            <a:prstGeom prst="ellipse">
+              <a:avLst/>
+            </a:prstGeom>
+          </p:spPr>
+          <p:style>
+            <a:lnRef idx="2">
+              <a:schemeClr val="dk1">
+                <a:shade val="50000"/>
+              </a:schemeClr>
+            </a:lnRef>
+            <a:fillRef idx="1">
+              <a:schemeClr val="dk1"/>
+            </a:fillRef>
+            <a:effectRef idx="0">
+              <a:schemeClr val="dk1"/>
+            </a:effectRef>
+            <a:fontRef idx="minor">
+              <a:schemeClr val="lt1"/>
+            </a:fontRef>
+          </p:style>
+          <p:txBody>
+            <a:bodyPr rtlCol="0" anchor="ctr"/>
+            <a:lstStyle/>
+            <a:p>
+              <a:pPr algn="ctr"/>
+              <a:endParaRPr lang="en-US"/>
+            </a:p>
+          </p:txBody>
+        </p:sp>
+        <p:grpSp>
+          <p:nvGrpSpPr>
+            <p:cNvPr id="132" name="Group 131">
+              <a:extLst>
+                <a:ext uri="{FF2B5EF4-FFF2-40B4-BE49-F238E27FC236}">
+                  <a16:creationId xmlns:a16="http://schemas.microsoft.com/office/drawing/2014/main" id="{DB435DA5-3DDB-1AC2-1654-04F749C61787}"/>
+                </a:ext>
+              </a:extLst>
+            </p:cNvPr>
+            <p:cNvGrpSpPr/>
+            <p:nvPr/>
+          </p:nvGrpSpPr>
+          <p:grpSpPr>
+            <a:xfrm>
+              <a:off x="6585602" y="2135640"/>
+              <a:ext cx="291335" cy="2073380"/>
+              <a:chOff x="4282383" y="2120161"/>
+              <a:chExt cx="291335" cy="2073380"/>
+            </a:xfrm>
+          </p:grpSpPr>
+          <p:sp>
+            <p:nvSpPr>
+              <p:cNvPr id="139" name="Rectangle 138">
+                <a:extLst>
+                  <a:ext uri="{FF2B5EF4-FFF2-40B4-BE49-F238E27FC236}">
+                    <a16:creationId xmlns:a16="http://schemas.microsoft.com/office/drawing/2014/main" id="{2D8B5AB9-88C1-EF34-7A2C-039F754A5857}"/>
+                  </a:ext>
+                </a:extLst>
+              </p:cNvPr>
+              <p:cNvSpPr/>
+              <p:nvPr/>
+            </p:nvSpPr>
+            <p:spPr>
+              <a:xfrm rot="3958351">
+                <a:off x="3893446" y="2509098"/>
+                <a:ext cx="996950" cy="219075"/>
+              </a:xfrm>
+              <a:prstGeom prst="rect">
+                <a:avLst/>
+              </a:prstGeom>
+            </p:spPr>
+            <p:style>
+              <a:lnRef idx="2">
+                <a:schemeClr val="dk1">
+                  <a:shade val="50000"/>
+                </a:schemeClr>
+              </a:lnRef>
+              <a:fillRef idx="1">
+                <a:schemeClr val="dk1"/>
+              </a:fillRef>
+              <a:effectRef idx="0">
+                <a:schemeClr val="dk1"/>
+              </a:effectRef>
+              <a:fontRef idx="minor">
+                <a:schemeClr val="lt1"/>
+              </a:fontRef>
+            </p:style>
+            <p:txBody>
+              <a:bodyPr rtlCol="0" anchor="ctr"/>
+              <a:lstStyle/>
+              <a:p>
+                <a:pPr algn="ctr"/>
+                <a:endParaRPr lang="en-US"/>
+              </a:p>
+            </p:txBody>
+          </p:sp>
+          <p:sp>
+            <p:nvSpPr>
+              <p:cNvPr id="140" name="Isosceles Triangle 139">
+                <a:extLst>
+                  <a:ext uri="{FF2B5EF4-FFF2-40B4-BE49-F238E27FC236}">
+                    <a16:creationId xmlns:a16="http://schemas.microsoft.com/office/drawing/2014/main" id="{52F91A51-5B0D-2458-CE0B-D24E9A7D5581}"/>
+                  </a:ext>
+                </a:extLst>
+              </p:cNvPr>
+              <p:cNvSpPr/>
+              <p:nvPr/>
+            </p:nvSpPr>
+            <p:spPr>
+              <a:xfrm rot="11268472">
+                <a:off x="4421316" y="2942591"/>
+                <a:ext cx="152402" cy="1250950"/>
+              </a:xfrm>
+              <a:prstGeom prst="triangle">
+                <a:avLst/>
+              </a:prstGeom>
+            </p:spPr>
+            <p:style>
+              <a:lnRef idx="2">
+                <a:schemeClr val="dk1">
+                  <a:shade val="50000"/>
+                </a:schemeClr>
+              </a:lnRef>
+              <a:fillRef idx="1">
+                <a:schemeClr val="dk1"/>
+              </a:fillRef>
+              <a:effectRef idx="0">
+                <a:schemeClr val="dk1"/>
+              </a:effectRef>
+              <a:fontRef idx="minor">
+                <a:schemeClr val="lt1"/>
+              </a:fontRef>
+            </p:style>
+            <p:txBody>
+              <a:bodyPr rtlCol="0" anchor="ctr"/>
+              <a:lstStyle/>
+              <a:p>
+                <a:pPr algn="ctr"/>
+                <a:endParaRPr lang="en-US"/>
+              </a:p>
+            </p:txBody>
+          </p:sp>
+        </p:grpSp>
+        <p:grpSp>
+          <p:nvGrpSpPr>
+            <p:cNvPr id="133" name="Group 132">
+              <a:extLst>
+                <a:ext uri="{FF2B5EF4-FFF2-40B4-BE49-F238E27FC236}">
+                  <a16:creationId xmlns:a16="http://schemas.microsoft.com/office/drawing/2014/main" id="{E9B745D0-6FD1-62FE-D9B0-6E9D994400AF}"/>
+                </a:ext>
+              </a:extLst>
+            </p:cNvPr>
+            <p:cNvGrpSpPr/>
+            <p:nvPr/>
+          </p:nvGrpSpPr>
+          <p:grpSpPr>
+            <a:xfrm flipH="1">
+              <a:off x="5612334" y="2140194"/>
+              <a:ext cx="291335" cy="2073380"/>
+              <a:chOff x="4282383" y="2120161"/>
+              <a:chExt cx="291335" cy="2073380"/>
+            </a:xfrm>
+          </p:grpSpPr>
+          <p:sp>
+            <p:nvSpPr>
+              <p:cNvPr id="137" name="Rectangle 136">
+                <a:extLst>
+                  <a:ext uri="{FF2B5EF4-FFF2-40B4-BE49-F238E27FC236}">
+                    <a16:creationId xmlns:a16="http://schemas.microsoft.com/office/drawing/2014/main" id="{3F3411FB-E562-047A-4276-7E00D086B6D3}"/>
+                  </a:ext>
+                </a:extLst>
+              </p:cNvPr>
+              <p:cNvSpPr/>
+              <p:nvPr/>
+            </p:nvSpPr>
+            <p:spPr>
+              <a:xfrm rot="3958351">
+                <a:off x="3893446" y="2509098"/>
+                <a:ext cx="996950" cy="219075"/>
+              </a:xfrm>
+              <a:prstGeom prst="rect">
+                <a:avLst/>
+              </a:prstGeom>
+            </p:spPr>
+            <p:style>
+              <a:lnRef idx="2">
+                <a:schemeClr val="dk1">
+                  <a:shade val="50000"/>
+                </a:schemeClr>
+              </a:lnRef>
+              <a:fillRef idx="1">
+                <a:schemeClr val="dk1"/>
+              </a:fillRef>
+              <a:effectRef idx="0">
+                <a:schemeClr val="dk1"/>
+              </a:effectRef>
+              <a:fontRef idx="minor">
+                <a:schemeClr val="lt1"/>
+              </a:fontRef>
+            </p:style>
+            <p:txBody>
+              <a:bodyPr rtlCol="0" anchor="ctr"/>
+              <a:lstStyle/>
+              <a:p>
+                <a:pPr algn="ctr"/>
+                <a:endParaRPr lang="en-US"/>
+              </a:p>
+            </p:txBody>
+          </p:sp>
+          <p:sp>
+            <p:nvSpPr>
+              <p:cNvPr id="138" name="Isosceles Triangle 137">
+                <a:extLst>
+                  <a:ext uri="{FF2B5EF4-FFF2-40B4-BE49-F238E27FC236}">
+                    <a16:creationId xmlns:a16="http://schemas.microsoft.com/office/drawing/2014/main" id="{E0590651-B38F-9EA0-51A2-93AB851DACAD}"/>
+                  </a:ext>
+                </a:extLst>
+              </p:cNvPr>
+              <p:cNvSpPr/>
+              <p:nvPr/>
+            </p:nvSpPr>
+            <p:spPr>
+              <a:xfrm rot="11268472">
+                <a:off x="4421316" y="2942591"/>
+                <a:ext cx="152402" cy="1250950"/>
+              </a:xfrm>
+              <a:prstGeom prst="triangle">
+                <a:avLst/>
+              </a:prstGeom>
+            </p:spPr>
+            <p:style>
+              <a:lnRef idx="2">
+                <a:schemeClr val="dk1">
+                  <a:shade val="50000"/>
+                </a:schemeClr>
+              </a:lnRef>
+              <a:fillRef idx="1">
+                <a:schemeClr val="dk1"/>
+              </a:fillRef>
+              <a:effectRef idx="0">
+                <a:schemeClr val="dk1"/>
+              </a:effectRef>
+              <a:fontRef idx="minor">
+                <a:schemeClr val="lt1"/>
+              </a:fontRef>
+            </p:style>
+            <p:txBody>
+              <a:bodyPr rtlCol="0" anchor="ctr"/>
+              <a:lstStyle/>
+              <a:p>
+                <a:pPr algn="ctr"/>
+                <a:endParaRPr lang="en-US"/>
+              </a:p>
+            </p:txBody>
+          </p:sp>
+        </p:grpSp>
+        <p:sp>
+          <p:nvSpPr>
+            <p:cNvPr id="134" name="Rectangle 133">
+              <a:extLst>
+                <a:ext uri="{FF2B5EF4-FFF2-40B4-BE49-F238E27FC236}">
+                  <a16:creationId xmlns:a16="http://schemas.microsoft.com/office/drawing/2014/main" id="{04FB4227-1C85-B0D9-4FC1-23BCB0028BA4}"/>
+                </a:ext>
+              </a:extLst>
+            </p:cNvPr>
+            <p:cNvSpPr/>
+            <p:nvPr/>
+          </p:nvSpPr>
+          <p:spPr>
+            <a:xfrm rot="5400000">
+              <a:off x="5745156" y="2601517"/>
+              <a:ext cx="996950" cy="219075"/>
+            </a:xfrm>
+            <a:prstGeom prst="rect">
+              <a:avLst/>
+            </a:prstGeom>
+          </p:spPr>
+          <p:style>
+            <a:lnRef idx="2">
+              <a:schemeClr val="dk1">
+                <a:shade val="50000"/>
+              </a:schemeClr>
+            </a:lnRef>
+            <a:fillRef idx="1">
+              <a:schemeClr val="dk1"/>
+            </a:fillRef>
+            <a:effectRef idx="0">
+              <a:schemeClr val="dk1"/>
+            </a:effectRef>
+            <a:fontRef idx="minor">
+              <a:schemeClr val="lt1"/>
+            </a:fontRef>
+          </p:style>
+          <p:txBody>
+            <a:bodyPr rtlCol="0" anchor="ctr"/>
+            <a:lstStyle/>
+            <a:p>
+              <a:pPr algn="ctr"/>
+              <a:endParaRPr lang="en-US"/>
+            </a:p>
+          </p:txBody>
+        </p:sp>
+        <p:sp>
+          <p:nvSpPr>
+            <p:cNvPr id="135" name="Isosceles Triangle 134">
+              <a:extLst>
+                <a:ext uri="{FF2B5EF4-FFF2-40B4-BE49-F238E27FC236}">
+                  <a16:creationId xmlns:a16="http://schemas.microsoft.com/office/drawing/2014/main" id="{A668C68C-83EB-2D4C-1A77-115B8ADA7B91}"/>
+                </a:ext>
+              </a:extLst>
+            </p:cNvPr>
+            <p:cNvSpPr/>
+            <p:nvPr/>
+          </p:nvSpPr>
+          <p:spPr>
+            <a:xfrm rot="10800000">
+              <a:off x="6172376" y="2963293"/>
+              <a:ext cx="152402" cy="1250950"/>
+            </a:xfrm>
+            <a:prstGeom prst="triangle">
+              <a:avLst/>
+            </a:prstGeom>
+          </p:spPr>
+          <p:style>
+            <a:lnRef idx="2">
+              <a:schemeClr val="dk1">
+                <a:shade val="50000"/>
+              </a:schemeClr>
+            </a:lnRef>
+            <a:fillRef idx="1">
+              <a:schemeClr val="dk1"/>
+            </a:fillRef>
+            <a:effectRef idx="0">
+              <a:schemeClr val="dk1"/>
+            </a:effectRef>
+            <a:fontRef idx="minor">
+              <a:schemeClr val="lt1"/>
+            </a:fontRef>
+          </p:style>
+          <p:txBody>
+            <a:bodyPr rtlCol="0" anchor="ctr"/>
+            <a:lstStyle/>
+            <a:p>
+              <a:pPr algn="ctr"/>
+              <a:endParaRPr lang="en-US"/>
+            </a:p>
+          </p:txBody>
+        </p:sp>
+        <p:sp>
+          <p:nvSpPr>
+            <p:cNvPr id="136" name="Moon 135">
+              <a:extLst>
+                <a:ext uri="{FF2B5EF4-FFF2-40B4-BE49-F238E27FC236}">
+                  <a16:creationId xmlns:a16="http://schemas.microsoft.com/office/drawing/2014/main" id="{4B78DC09-4993-05F0-89D8-43515C7EDD76}"/>
+                </a:ext>
+              </a:extLst>
+            </p:cNvPr>
+            <p:cNvSpPr/>
+            <p:nvPr/>
+          </p:nvSpPr>
+          <p:spPr>
+            <a:xfrm rot="16200000">
+              <a:off x="6002331" y="1326503"/>
+              <a:ext cx="482600" cy="1727200"/>
+            </a:xfrm>
+            <a:prstGeom prst="moon">
+              <a:avLst/>
+            </a:prstGeom>
+          </p:spPr>
+          <p:style>
+            <a:lnRef idx="2">
+              <a:schemeClr val="dk1">
+                <a:shade val="50000"/>
+              </a:schemeClr>
+            </a:lnRef>
+            <a:fillRef idx="1">
+              <a:schemeClr val="dk1"/>
+            </a:fillRef>
+            <a:effectRef idx="0">
+              <a:schemeClr val="dk1"/>
+            </a:effectRef>
+            <a:fontRef idx="minor">
+              <a:schemeClr val="lt1"/>
+            </a:fontRef>
+          </p:style>
+          <p:txBody>
+            <a:bodyPr rtlCol="0" anchor="ctr"/>
+            <a:lstStyle/>
+            <a:p>
+              <a:pPr algn="ctr"/>
+              <a:endParaRPr lang="en-US"/>
+            </a:p>
+          </p:txBody>
+        </p:sp>
+      </p:grpSp>
+      <p:grpSp>
+        <p:nvGrpSpPr>
+          <p:cNvPr id="141" name="Group 140">
+            <a:extLst>
+              <a:ext uri="{FF2B5EF4-FFF2-40B4-BE49-F238E27FC236}">
+                <a16:creationId xmlns:a16="http://schemas.microsoft.com/office/drawing/2014/main" id="{F1CCEF7B-5E54-1244-C1B1-926CDB930713}"/>
+              </a:ext>
+            </a:extLst>
+          </p:cNvPr>
+          <p:cNvGrpSpPr/>
+          <p:nvPr/>
+        </p:nvGrpSpPr>
+        <p:grpSpPr>
+          <a:xfrm>
+            <a:off x="7833615" y="580700"/>
+            <a:ext cx="1371600" cy="1371600"/>
+            <a:chOff x="427081" y="263129"/>
+            <a:chExt cx="1371600" cy="1371600"/>
+          </a:xfrm>
+        </p:grpSpPr>
+        <p:sp>
+          <p:nvSpPr>
+            <p:cNvPr id="142" name="Rectangle 141">
+              <a:extLst>
+                <a:ext uri="{FF2B5EF4-FFF2-40B4-BE49-F238E27FC236}">
+                  <a16:creationId xmlns:a16="http://schemas.microsoft.com/office/drawing/2014/main" id="{7E99B9E7-0D24-D05E-E503-BABA5320C10A}"/>
+                </a:ext>
+              </a:extLst>
+            </p:cNvPr>
+            <p:cNvSpPr/>
+            <p:nvPr/>
+          </p:nvSpPr>
+          <p:spPr>
+            <a:xfrm>
+              <a:off x="427081" y="263129"/>
+              <a:ext cx="1371600" cy="1371600"/>
+            </a:xfrm>
+            <a:prstGeom prst="rect">
+              <a:avLst/>
+            </a:prstGeom>
+            <a:noFill/>
+            <a:ln w="76200">
+              <a:solidFill>
+                <a:schemeClr val="tx1"/>
+              </a:solidFill>
+            </a:ln>
+          </p:spPr>
+          <p:style>
+            <a:lnRef idx="2">
+              <a:schemeClr val="accent1">
+                <a:shade val="50000"/>
+              </a:schemeClr>
+            </a:lnRef>
+            <a:fillRef idx="1">
+              <a:schemeClr val="accent1"/>
+            </a:fillRef>
+            <a:effectRef idx="0">
+              <a:schemeClr val="accent1"/>
+            </a:effectRef>
+            <a:fontRef idx="minor">
+              <a:schemeClr val="lt1"/>
+            </a:fontRef>
+          </p:style>
+          <p:txBody>
+            <a:bodyPr rtlCol="0" anchor="ctr"/>
+            <a:lstStyle/>
+            <a:p>
+              <a:pPr algn="ctr"/>
+              <a:endParaRPr lang="en-US"/>
+            </a:p>
+          </p:txBody>
+        </p:sp>
+        <p:sp>
+          <p:nvSpPr>
+            <p:cNvPr id="143" name="Plaque 142">
+              <a:extLst>
+                <a:ext uri="{FF2B5EF4-FFF2-40B4-BE49-F238E27FC236}">
+                  <a16:creationId xmlns:a16="http://schemas.microsoft.com/office/drawing/2014/main" id="{3EEA1C03-1FCF-F490-764A-9B0A86A049BC}"/>
+                </a:ext>
+              </a:extLst>
+            </p:cNvPr>
+            <p:cNvSpPr/>
+            <p:nvPr/>
+          </p:nvSpPr>
+          <p:spPr>
+            <a:xfrm>
+              <a:off x="573033" y="478473"/>
+              <a:ext cx="1097280" cy="1097280"/>
+            </a:xfrm>
+            <a:prstGeom prst="plaque">
+              <a:avLst/>
+            </a:prstGeom>
+            <a:noFill/>
+            <a:ln w="38100" cap="flat" cmpd="sng" algn="ctr">
+              <a:solidFill>
+                <a:schemeClr val="dk1"/>
+              </a:solidFill>
+              <a:prstDash val="solid"/>
+              <a:round/>
+              <a:headEnd type="none" w="med" len="med"/>
+              <a:tailEnd type="none" w="med" len="med"/>
+            </a:ln>
+          </p:spPr>
+          <p:style>
+            <a:lnRef idx="0">
+              <a:scrgbClr r="0" g="0" b="0"/>
+            </a:lnRef>
+            <a:fillRef idx="0">
+              <a:scrgbClr r="0" g="0" b="0"/>
+            </a:fillRef>
+            <a:effectRef idx="0">
+              <a:scrgbClr r="0" g="0" b="0"/>
+            </a:effectRef>
+            <a:fontRef idx="minor">
+              <a:schemeClr val="dk1"/>
+            </a:fontRef>
+          </p:style>
+          <p:txBody>
+            <a:bodyPr rtlCol="0" anchor="ctr"/>
+            <a:lstStyle/>
+            <a:p>
+              <a:pPr algn="ctr"/>
+              <a:endParaRPr lang="en-US"/>
+            </a:p>
+          </p:txBody>
+        </p:sp>
+      </p:grpSp>
+      <p:pic>
+        <p:nvPicPr>
+          <p:cNvPr id="144" name="Picture 143">
+            <a:extLst>
+              <a:ext uri="{FF2B5EF4-FFF2-40B4-BE49-F238E27FC236}">
+                <a16:creationId xmlns:a16="http://schemas.microsoft.com/office/drawing/2014/main" id="{C7E93A14-ECA2-44CE-2A0A-26C4B3781477}"/>
+              </a:ext>
+            </a:extLst>
+          </p:cNvPr>
+          <p:cNvPicPr>
+            <a:picLocks noChangeAspect="1"/>
+          </p:cNvPicPr>
+          <p:nvPr/>
+        </p:nvPicPr>
+        <p:blipFill>
+          <a:blip r:embed="rId4"/>
+          <a:stretch>
+            <a:fillRect/>
+          </a:stretch>
+        </p:blipFill>
+        <p:spPr>
+          <a:xfrm>
+            <a:off x="8725218" y="1115210"/>
+            <a:ext cx="277209" cy="415814"/>
+          </a:xfrm>
+          <a:prstGeom prst="rect">
+            <a:avLst/>
+          </a:prstGeom>
+        </p:spPr>
+      </p:pic>
     </p:spTree>
     <p:extLst>
       <p:ext uri="{BB962C8B-B14F-4D97-AF65-F5344CB8AC3E}">

--- a/image process/drawings sifi.pptx
+++ b/image process/drawings sifi.pptx
@@ -17243,10 +17243,10 @@
       </p:grpSpPr>
       <p:pic>
         <p:nvPicPr>
-          <p:cNvPr id="30" name="Picture 29">
+          <p:cNvPr id="28" name="Picture 27">
             <a:extLst>
               <a:ext uri="{FF2B5EF4-FFF2-40B4-BE49-F238E27FC236}">
-                <a16:creationId xmlns:a16="http://schemas.microsoft.com/office/drawing/2014/main" id="{BD0E5BCE-5376-9B10-FC7E-2D121E8F69D3}"/>
+                <a16:creationId xmlns:a16="http://schemas.microsoft.com/office/drawing/2014/main" id="{611C9ED2-34B1-652C-46AE-EF6035935DD0}"/>
               </a:ext>
             </a:extLst>
           </p:cNvPr>
@@ -17262,15 +17262,789 @@
           </a:stretch>
         </p:blipFill>
         <p:spPr>
-          <a:xfrm>
-            <a:off x="594436" y="841877"/>
-            <a:ext cx="433388" cy="444277"/>
+          <a:xfrm rot="20165155">
+            <a:off x="2293315" y="662456"/>
+            <a:ext cx="551005" cy="906820"/>
           </a:xfrm>
           <a:prstGeom prst="rect">
             <a:avLst/>
           </a:prstGeom>
         </p:spPr>
       </p:pic>
+      <p:grpSp>
+        <p:nvGrpSpPr>
+          <p:cNvPr id="26" name="Group 25">
+            <a:extLst>
+              <a:ext uri="{FF2B5EF4-FFF2-40B4-BE49-F238E27FC236}">
+                <a16:creationId xmlns:a16="http://schemas.microsoft.com/office/drawing/2014/main" id="{E6D5F2B4-CC15-2413-E222-F40E8932B52E}"/>
+              </a:ext>
+            </a:extLst>
+          </p:cNvPr>
+          <p:cNvGrpSpPr/>
+          <p:nvPr/>
+        </p:nvGrpSpPr>
+        <p:grpSpPr>
+          <a:xfrm>
+            <a:off x="608089" y="493952"/>
+            <a:ext cx="1027167" cy="1035721"/>
+            <a:chOff x="4165279" y="376316"/>
+            <a:chExt cx="4372510" cy="4408922"/>
+          </a:xfrm>
+        </p:grpSpPr>
+        <p:grpSp>
+          <p:nvGrpSpPr>
+            <p:cNvPr id="8" name="Group 7">
+              <a:extLst>
+                <a:ext uri="{FF2B5EF4-FFF2-40B4-BE49-F238E27FC236}">
+                  <a16:creationId xmlns:a16="http://schemas.microsoft.com/office/drawing/2014/main" id="{900E8C98-AB38-E16B-E603-41C7A4CC6A24}"/>
+                </a:ext>
+              </a:extLst>
+            </p:cNvPr>
+            <p:cNvGrpSpPr/>
+            <p:nvPr/>
+          </p:nvGrpSpPr>
+          <p:grpSpPr>
+            <a:xfrm>
+              <a:off x="5618932" y="1546108"/>
+              <a:ext cx="1540121" cy="2162098"/>
+              <a:chOff x="5452330" y="1708793"/>
+              <a:chExt cx="1186621" cy="1665837"/>
+            </a:xfrm>
+          </p:grpSpPr>
+          <p:sp>
+            <p:nvSpPr>
+              <p:cNvPr id="2" name="Isosceles Triangle 1">
+                <a:extLst>
+                  <a:ext uri="{FF2B5EF4-FFF2-40B4-BE49-F238E27FC236}">
+                    <a16:creationId xmlns:a16="http://schemas.microsoft.com/office/drawing/2014/main" id="{64834EAC-F76B-ADEA-3CD4-205D2CBC6386}"/>
+                  </a:ext>
+                </a:extLst>
+              </p:cNvPr>
+              <p:cNvSpPr/>
+              <p:nvPr/>
+            </p:nvSpPr>
+            <p:spPr>
+              <a:xfrm>
+                <a:off x="5794991" y="1708793"/>
+                <a:ext cx="501300" cy="440002"/>
+              </a:xfrm>
+              <a:prstGeom prst="triangle">
+                <a:avLst/>
+              </a:prstGeom>
+            </p:spPr>
+            <p:style>
+              <a:lnRef idx="2">
+                <a:schemeClr val="dk1">
+                  <a:shade val="50000"/>
+                </a:schemeClr>
+              </a:lnRef>
+              <a:fillRef idx="1">
+                <a:schemeClr val="dk1"/>
+              </a:fillRef>
+              <a:effectRef idx="0">
+                <a:schemeClr val="dk1"/>
+              </a:effectRef>
+              <a:fontRef idx="minor">
+                <a:schemeClr val="lt1"/>
+              </a:fontRef>
+            </p:style>
+            <p:txBody>
+              <a:bodyPr rtlCol="0" anchor="ctr"/>
+              <a:lstStyle/>
+              <a:p>
+                <a:pPr algn="ctr"/>
+                <a:endParaRPr lang="en-US"/>
+              </a:p>
+            </p:txBody>
+          </p:sp>
+          <p:sp>
+            <p:nvSpPr>
+              <p:cNvPr id="3" name="Isosceles Triangle 2">
+                <a:extLst>
+                  <a:ext uri="{FF2B5EF4-FFF2-40B4-BE49-F238E27FC236}">
+                    <a16:creationId xmlns:a16="http://schemas.microsoft.com/office/drawing/2014/main" id="{6AA7D6DD-0D31-13D6-8AA1-5DE532DB6F3D}"/>
+                  </a:ext>
+                </a:extLst>
+              </p:cNvPr>
+              <p:cNvSpPr/>
+              <p:nvPr/>
+            </p:nvSpPr>
+            <p:spPr>
+              <a:xfrm rot="10800000">
+                <a:off x="5794991" y="2236075"/>
+                <a:ext cx="501300" cy="1138555"/>
+              </a:xfrm>
+              <a:prstGeom prst="triangle">
+                <a:avLst/>
+              </a:prstGeom>
+            </p:spPr>
+            <p:style>
+              <a:lnRef idx="2">
+                <a:schemeClr val="dk1">
+                  <a:shade val="50000"/>
+                </a:schemeClr>
+              </a:lnRef>
+              <a:fillRef idx="1">
+                <a:schemeClr val="dk1"/>
+              </a:fillRef>
+              <a:effectRef idx="0">
+                <a:schemeClr val="dk1"/>
+              </a:effectRef>
+              <a:fontRef idx="minor">
+                <a:schemeClr val="lt1"/>
+              </a:fontRef>
+            </p:style>
+            <p:txBody>
+              <a:bodyPr rtlCol="0" anchor="ctr"/>
+              <a:lstStyle/>
+              <a:p>
+                <a:pPr algn="ctr"/>
+                <a:endParaRPr lang="en-US"/>
+              </a:p>
+            </p:txBody>
+          </p:sp>
+          <p:sp>
+            <p:nvSpPr>
+              <p:cNvPr id="4" name="Rectangle 3">
+                <a:extLst>
+                  <a:ext uri="{FF2B5EF4-FFF2-40B4-BE49-F238E27FC236}">
+                    <a16:creationId xmlns:a16="http://schemas.microsoft.com/office/drawing/2014/main" id="{05E4FBE9-446A-A891-35DC-490EF5253060}"/>
+                  </a:ext>
+                </a:extLst>
+              </p:cNvPr>
+              <p:cNvSpPr/>
+              <p:nvPr/>
+            </p:nvSpPr>
+            <p:spPr>
+              <a:xfrm rot="1172583">
+                <a:off x="5452330" y="2155246"/>
+                <a:ext cx="161133" cy="711668"/>
+              </a:xfrm>
+              <a:prstGeom prst="rect">
+                <a:avLst/>
+              </a:prstGeom>
+            </p:spPr>
+            <p:style>
+              <a:lnRef idx="2">
+                <a:schemeClr val="dk1">
+                  <a:shade val="50000"/>
+                </a:schemeClr>
+              </a:lnRef>
+              <a:fillRef idx="1">
+                <a:schemeClr val="dk1"/>
+              </a:fillRef>
+              <a:effectRef idx="0">
+                <a:schemeClr val="dk1"/>
+              </a:effectRef>
+              <a:fontRef idx="minor">
+                <a:schemeClr val="lt1"/>
+              </a:fontRef>
+            </p:style>
+            <p:txBody>
+              <a:bodyPr rtlCol="0" anchor="ctr"/>
+              <a:lstStyle/>
+              <a:p>
+                <a:pPr algn="ctr"/>
+                <a:endParaRPr lang="en-US"/>
+              </a:p>
+            </p:txBody>
+          </p:sp>
+          <p:sp>
+            <p:nvSpPr>
+              <p:cNvPr id="54" name="Rectangle 53">
+                <a:extLst>
+                  <a:ext uri="{FF2B5EF4-FFF2-40B4-BE49-F238E27FC236}">
+                    <a16:creationId xmlns:a16="http://schemas.microsoft.com/office/drawing/2014/main" id="{14509484-877F-4AC3-2064-FAE3DA3BFD62}"/>
+                  </a:ext>
+                </a:extLst>
+              </p:cNvPr>
+              <p:cNvSpPr/>
+              <p:nvPr/>
+            </p:nvSpPr>
+            <p:spPr>
+              <a:xfrm rot="20427417" flipH="1">
+                <a:off x="6477818" y="2155248"/>
+                <a:ext cx="161133" cy="711668"/>
+              </a:xfrm>
+              <a:prstGeom prst="rect">
+                <a:avLst/>
+              </a:prstGeom>
+            </p:spPr>
+            <p:style>
+              <a:lnRef idx="2">
+                <a:schemeClr val="dk1">
+                  <a:shade val="50000"/>
+                </a:schemeClr>
+              </a:lnRef>
+              <a:fillRef idx="1">
+                <a:schemeClr val="dk1"/>
+              </a:fillRef>
+              <a:effectRef idx="0">
+                <a:schemeClr val="dk1"/>
+              </a:effectRef>
+              <a:fontRef idx="minor">
+                <a:schemeClr val="lt1"/>
+              </a:fontRef>
+            </p:style>
+            <p:txBody>
+              <a:bodyPr rtlCol="0" anchor="ctr"/>
+              <a:lstStyle/>
+              <a:p>
+                <a:pPr algn="ctr"/>
+                <a:endParaRPr lang="en-US"/>
+              </a:p>
+            </p:txBody>
+          </p:sp>
+        </p:grpSp>
+        <p:grpSp>
+          <p:nvGrpSpPr>
+            <p:cNvPr id="25" name="Group 24">
+              <a:extLst>
+                <a:ext uri="{FF2B5EF4-FFF2-40B4-BE49-F238E27FC236}">
+                  <a16:creationId xmlns:a16="http://schemas.microsoft.com/office/drawing/2014/main" id="{CC6A0B7A-C9DA-21AE-0EA2-662956AA2572}"/>
+                </a:ext>
+              </a:extLst>
+            </p:cNvPr>
+            <p:cNvGrpSpPr/>
+            <p:nvPr/>
+          </p:nvGrpSpPr>
+          <p:grpSpPr>
+            <a:xfrm>
+              <a:off x="5223090" y="376316"/>
+              <a:ext cx="2327564" cy="1339103"/>
+              <a:chOff x="5223090" y="758463"/>
+              <a:chExt cx="2327564" cy="1339103"/>
+            </a:xfrm>
+          </p:grpSpPr>
+          <p:pic>
+            <p:nvPicPr>
+              <p:cNvPr id="23" name="Picture 22">
+                <a:extLst>
+                  <a:ext uri="{FF2B5EF4-FFF2-40B4-BE49-F238E27FC236}">
+                    <a16:creationId xmlns:a16="http://schemas.microsoft.com/office/drawing/2014/main" id="{6C4E511F-2CE1-6C42-C5DF-0CF42D13AAF1}"/>
+                  </a:ext>
+                </a:extLst>
+              </p:cNvPr>
+              <p:cNvPicPr>
+                <a:picLocks noChangeAspect="1"/>
+              </p:cNvPicPr>
+              <p:nvPr/>
+            </p:nvPicPr>
+            <p:blipFill rotWithShape="1">
+              <a:blip r:embed="rId3"/>
+              <a:srcRect l="7265" t="2149" r="2137"/>
+              <a:stretch/>
+            </p:blipFill>
+            <p:spPr>
+              <a:xfrm rot="9499472">
+                <a:off x="5791200" y="758463"/>
+                <a:ext cx="501300" cy="1119886"/>
+              </a:xfrm>
+              <a:prstGeom prst="rect">
+                <a:avLst/>
+              </a:prstGeom>
+            </p:spPr>
+          </p:pic>
+          <p:pic>
+            <p:nvPicPr>
+              <p:cNvPr id="76" name="Picture 75">
+                <a:extLst>
+                  <a:ext uri="{FF2B5EF4-FFF2-40B4-BE49-F238E27FC236}">
+                    <a16:creationId xmlns:a16="http://schemas.microsoft.com/office/drawing/2014/main" id="{F4985C61-0B7A-DD00-D291-D2A339C87F78}"/>
+                  </a:ext>
+                </a:extLst>
+              </p:cNvPr>
+              <p:cNvPicPr>
+                <a:picLocks noChangeAspect="1"/>
+              </p:cNvPicPr>
+              <p:nvPr/>
+            </p:nvPicPr>
+            <p:blipFill rotWithShape="1">
+              <a:blip r:embed="rId3"/>
+              <a:srcRect l="7265" t="2149" r="2137"/>
+              <a:stretch/>
+            </p:blipFill>
+            <p:spPr>
+              <a:xfrm rot="11335141">
+                <a:off x="6459893" y="776279"/>
+                <a:ext cx="501300" cy="1119886"/>
+              </a:xfrm>
+              <a:prstGeom prst="rect">
+                <a:avLst/>
+              </a:prstGeom>
+            </p:spPr>
+          </p:pic>
+          <p:pic>
+            <p:nvPicPr>
+              <p:cNvPr id="77" name="Picture 76">
+                <a:extLst>
+                  <a:ext uri="{FF2B5EF4-FFF2-40B4-BE49-F238E27FC236}">
+                    <a16:creationId xmlns:a16="http://schemas.microsoft.com/office/drawing/2014/main" id="{01C3493D-A7F6-7A3C-562A-7944049AB6F6}"/>
+                  </a:ext>
+                </a:extLst>
+              </p:cNvPr>
+              <p:cNvPicPr>
+                <a:picLocks noChangeAspect="1"/>
+              </p:cNvPicPr>
+              <p:nvPr/>
+            </p:nvPicPr>
+            <p:blipFill rotWithShape="1">
+              <a:blip r:embed="rId3"/>
+              <a:srcRect l="7265" t="2149" r="2137"/>
+              <a:stretch/>
+            </p:blipFill>
+            <p:spPr>
+              <a:xfrm rot="9323264" flipH="1">
+                <a:off x="5223090" y="977680"/>
+                <a:ext cx="501300" cy="1119886"/>
+              </a:xfrm>
+              <a:prstGeom prst="rect">
+                <a:avLst/>
+              </a:prstGeom>
+            </p:spPr>
+          </p:pic>
+          <p:pic>
+            <p:nvPicPr>
+              <p:cNvPr id="78" name="Picture 77">
+                <a:extLst>
+                  <a:ext uri="{FF2B5EF4-FFF2-40B4-BE49-F238E27FC236}">
+                    <a16:creationId xmlns:a16="http://schemas.microsoft.com/office/drawing/2014/main" id="{A371ADE2-AB8E-450C-C726-0BFE20FA3A2E}"/>
+                  </a:ext>
+                </a:extLst>
+              </p:cNvPr>
+              <p:cNvPicPr>
+                <a:picLocks noChangeAspect="1"/>
+              </p:cNvPicPr>
+              <p:nvPr/>
+            </p:nvPicPr>
+            <p:blipFill rotWithShape="1">
+              <a:blip r:embed="rId3"/>
+              <a:srcRect l="7265" t="2149" r="2137"/>
+              <a:stretch/>
+            </p:blipFill>
+            <p:spPr>
+              <a:xfrm rot="13424503" flipH="1">
+                <a:off x="7049354" y="966826"/>
+                <a:ext cx="501300" cy="1119886"/>
+              </a:xfrm>
+              <a:prstGeom prst="rect">
+                <a:avLst/>
+              </a:prstGeom>
+            </p:spPr>
+          </p:pic>
+        </p:grpSp>
+        <p:grpSp>
+          <p:nvGrpSpPr>
+            <p:cNvPr id="79" name="Group 78">
+              <a:extLst>
+                <a:ext uri="{FF2B5EF4-FFF2-40B4-BE49-F238E27FC236}">
+                  <a16:creationId xmlns:a16="http://schemas.microsoft.com/office/drawing/2014/main" id="{BCDCAAAD-9B8E-CA71-0085-48CF26E405D8}"/>
+                </a:ext>
+              </a:extLst>
+            </p:cNvPr>
+            <p:cNvGrpSpPr/>
+            <p:nvPr/>
+          </p:nvGrpSpPr>
+          <p:grpSpPr>
+            <a:xfrm rot="10800000">
+              <a:off x="5212329" y="3446135"/>
+              <a:ext cx="2327564" cy="1339103"/>
+              <a:chOff x="5223090" y="758463"/>
+              <a:chExt cx="2327564" cy="1339103"/>
+            </a:xfrm>
+          </p:grpSpPr>
+          <p:pic>
+            <p:nvPicPr>
+              <p:cNvPr id="80" name="Picture 79">
+                <a:extLst>
+                  <a:ext uri="{FF2B5EF4-FFF2-40B4-BE49-F238E27FC236}">
+                    <a16:creationId xmlns:a16="http://schemas.microsoft.com/office/drawing/2014/main" id="{5742BE29-CEBF-34A9-715C-44003FAF2AF9}"/>
+                  </a:ext>
+                </a:extLst>
+              </p:cNvPr>
+              <p:cNvPicPr>
+                <a:picLocks noChangeAspect="1"/>
+              </p:cNvPicPr>
+              <p:nvPr/>
+            </p:nvPicPr>
+            <p:blipFill rotWithShape="1">
+              <a:blip r:embed="rId3"/>
+              <a:srcRect l="7265" t="2149" r="2137"/>
+              <a:stretch/>
+            </p:blipFill>
+            <p:spPr>
+              <a:xfrm rot="9499472">
+                <a:off x="5791200" y="758463"/>
+                <a:ext cx="501300" cy="1119886"/>
+              </a:xfrm>
+              <a:prstGeom prst="rect">
+                <a:avLst/>
+              </a:prstGeom>
+            </p:spPr>
+          </p:pic>
+          <p:pic>
+            <p:nvPicPr>
+              <p:cNvPr id="81" name="Picture 80">
+                <a:extLst>
+                  <a:ext uri="{FF2B5EF4-FFF2-40B4-BE49-F238E27FC236}">
+                    <a16:creationId xmlns:a16="http://schemas.microsoft.com/office/drawing/2014/main" id="{EBF05BCA-59FD-E14C-25C9-ABFF697BB194}"/>
+                  </a:ext>
+                </a:extLst>
+              </p:cNvPr>
+              <p:cNvPicPr>
+                <a:picLocks noChangeAspect="1"/>
+              </p:cNvPicPr>
+              <p:nvPr/>
+            </p:nvPicPr>
+            <p:blipFill rotWithShape="1">
+              <a:blip r:embed="rId3"/>
+              <a:srcRect l="7265" t="2149" r="2137"/>
+              <a:stretch/>
+            </p:blipFill>
+            <p:spPr>
+              <a:xfrm rot="11335141">
+                <a:off x="6459893" y="776279"/>
+                <a:ext cx="501300" cy="1119886"/>
+              </a:xfrm>
+              <a:prstGeom prst="rect">
+                <a:avLst/>
+              </a:prstGeom>
+            </p:spPr>
+          </p:pic>
+          <p:pic>
+            <p:nvPicPr>
+              <p:cNvPr id="82" name="Picture 81">
+                <a:extLst>
+                  <a:ext uri="{FF2B5EF4-FFF2-40B4-BE49-F238E27FC236}">
+                    <a16:creationId xmlns:a16="http://schemas.microsoft.com/office/drawing/2014/main" id="{9EB53265-F1D0-58A5-73B0-6D94B5905AF2}"/>
+                  </a:ext>
+                </a:extLst>
+              </p:cNvPr>
+              <p:cNvPicPr>
+                <a:picLocks noChangeAspect="1"/>
+              </p:cNvPicPr>
+              <p:nvPr/>
+            </p:nvPicPr>
+            <p:blipFill rotWithShape="1">
+              <a:blip r:embed="rId3"/>
+              <a:srcRect l="7265" t="2149" r="2137"/>
+              <a:stretch/>
+            </p:blipFill>
+            <p:spPr>
+              <a:xfrm rot="9323264" flipH="1">
+                <a:off x="5223090" y="977680"/>
+                <a:ext cx="501300" cy="1119886"/>
+              </a:xfrm>
+              <a:prstGeom prst="rect">
+                <a:avLst/>
+              </a:prstGeom>
+            </p:spPr>
+          </p:pic>
+          <p:pic>
+            <p:nvPicPr>
+              <p:cNvPr id="83" name="Picture 82">
+                <a:extLst>
+                  <a:ext uri="{FF2B5EF4-FFF2-40B4-BE49-F238E27FC236}">
+                    <a16:creationId xmlns:a16="http://schemas.microsoft.com/office/drawing/2014/main" id="{680E964E-CEE1-1EFF-5185-C0B4782BC12F}"/>
+                  </a:ext>
+                </a:extLst>
+              </p:cNvPr>
+              <p:cNvPicPr>
+                <a:picLocks noChangeAspect="1"/>
+              </p:cNvPicPr>
+              <p:nvPr/>
+            </p:nvPicPr>
+            <p:blipFill rotWithShape="1">
+              <a:blip r:embed="rId3"/>
+              <a:srcRect l="7265" t="2149" r="2137"/>
+              <a:stretch/>
+            </p:blipFill>
+            <p:spPr>
+              <a:xfrm rot="13424503" flipH="1">
+                <a:off x="7049354" y="966826"/>
+                <a:ext cx="501300" cy="1119886"/>
+              </a:xfrm>
+              <a:prstGeom prst="rect">
+                <a:avLst/>
+              </a:prstGeom>
+            </p:spPr>
+          </p:pic>
+        </p:grpSp>
+        <p:grpSp>
+          <p:nvGrpSpPr>
+            <p:cNvPr id="84" name="Group 83">
+              <a:extLst>
+                <a:ext uri="{FF2B5EF4-FFF2-40B4-BE49-F238E27FC236}">
+                  <a16:creationId xmlns:a16="http://schemas.microsoft.com/office/drawing/2014/main" id="{FA22BA67-F0E7-33B1-9C63-A4BB9E5B0831}"/>
+                </a:ext>
+              </a:extLst>
+            </p:cNvPr>
+            <p:cNvGrpSpPr/>
+            <p:nvPr/>
+          </p:nvGrpSpPr>
+          <p:grpSpPr>
+            <a:xfrm rot="16367590">
+              <a:off x="3671049" y="1904396"/>
+              <a:ext cx="2327564" cy="1339103"/>
+              <a:chOff x="5223090" y="758463"/>
+              <a:chExt cx="2327564" cy="1339103"/>
+            </a:xfrm>
+          </p:grpSpPr>
+          <p:pic>
+            <p:nvPicPr>
+              <p:cNvPr id="85" name="Picture 84">
+                <a:extLst>
+                  <a:ext uri="{FF2B5EF4-FFF2-40B4-BE49-F238E27FC236}">
+                    <a16:creationId xmlns:a16="http://schemas.microsoft.com/office/drawing/2014/main" id="{4C16ACBF-B81A-6C1A-16F3-B566ABD3E759}"/>
+                  </a:ext>
+                </a:extLst>
+              </p:cNvPr>
+              <p:cNvPicPr>
+                <a:picLocks noChangeAspect="1"/>
+              </p:cNvPicPr>
+              <p:nvPr/>
+            </p:nvPicPr>
+            <p:blipFill rotWithShape="1">
+              <a:blip r:embed="rId3"/>
+              <a:srcRect l="7265" t="2149" r="2137"/>
+              <a:stretch/>
+            </p:blipFill>
+            <p:spPr>
+              <a:xfrm rot="9499472">
+                <a:off x="5791200" y="758463"/>
+                <a:ext cx="501300" cy="1119886"/>
+              </a:xfrm>
+              <a:prstGeom prst="rect">
+                <a:avLst/>
+              </a:prstGeom>
+            </p:spPr>
+          </p:pic>
+          <p:pic>
+            <p:nvPicPr>
+              <p:cNvPr id="86" name="Picture 85">
+                <a:extLst>
+                  <a:ext uri="{FF2B5EF4-FFF2-40B4-BE49-F238E27FC236}">
+                    <a16:creationId xmlns:a16="http://schemas.microsoft.com/office/drawing/2014/main" id="{AA831C4D-C844-073B-90BD-EAC348AE5FE1}"/>
+                  </a:ext>
+                </a:extLst>
+              </p:cNvPr>
+              <p:cNvPicPr>
+                <a:picLocks noChangeAspect="1"/>
+              </p:cNvPicPr>
+              <p:nvPr/>
+            </p:nvPicPr>
+            <p:blipFill rotWithShape="1">
+              <a:blip r:embed="rId3"/>
+              <a:srcRect l="7265" t="2149" r="2137"/>
+              <a:stretch/>
+            </p:blipFill>
+            <p:spPr>
+              <a:xfrm rot="11335141">
+                <a:off x="6459893" y="776279"/>
+                <a:ext cx="501300" cy="1119886"/>
+              </a:xfrm>
+              <a:prstGeom prst="rect">
+                <a:avLst/>
+              </a:prstGeom>
+            </p:spPr>
+          </p:pic>
+          <p:pic>
+            <p:nvPicPr>
+              <p:cNvPr id="87" name="Picture 86">
+                <a:extLst>
+                  <a:ext uri="{FF2B5EF4-FFF2-40B4-BE49-F238E27FC236}">
+                    <a16:creationId xmlns:a16="http://schemas.microsoft.com/office/drawing/2014/main" id="{330FE7B5-2CBD-164D-648F-9AFDB5E2DDC3}"/>
+                  </a:ext>
+                </a:extLst>
+              </p:cNvPr>
+              <p:cNvPicPr>
+                <a:picLocks noChangeAspect="1"/>
+              </p:cNvPicPr>
+              <p:nvPr/>
+            </p:nvPicPr>
+            <p:blipFill rotWithShape="1">
+              <a:blip r:embed="rId3"/>
+              <a:srcRect l="7265" t="2149" r="2137"/>
+              <a:stretch/>
+            </p:blipFill>
+            <p:spPr>
+              <a:xfrm rot="9323264" flipH="1">
+                <a:off x="5223090" y="977680"/>
+                <a:ext cx="501300" cy="1119886"/>
+              </a:xfrm>
+              <a:prstGeom prst="rect">
+                <a:avLst/>
+              </a:prstGeom>
+            </p:spPr>
+          </p:pic>
+          <p:pic>
+            <p:nvPicPr>
+              <p:cNvPr id="88" name="Picture 87">
+                <a:extLst>
+                  <a:ext uri="{FF2B5EF4-FFF2-40B4-BE49-F238E27FC236}">
+                    <a16:creationId xmlns:a16="http://schemas.microsoft.com/office/drawing/2014/main" id="{9D840451-CF6B-5B63-AE0E-D6A19467266D}"/>
+                  </a:ext>
+                </a:extLst>
+              </p:cNvPr>
+              <p:cNvPicPr>
+                <a:picLocks noChangeAspect="1"/>
+              </p:cNvPicPr>
+              <p:nvPr/>
+            </p:nvPicPr>
+            <p:blipFill rotWithShape="1">
+              <a:blip r:embed="rId3"/>
+              <a:srcRect l="7265" t="2149" r="2137"/>
+              <a:stretch/>
+            </p:blipFill>
+            <p:spPr>
+              <a:xfrm rot="13424503" flipH="1">
+                <a:off x="7049354" y="966826"/>
+                <a:ext cx="501300" cy="1119886"/>
+              </a:xfrm>
+              <a:prstGeom prst="rect">
+                <a:avLst/>
+              </a:prstGeom>
+            </p:spPr>
+          </p:pic>
+        </p:grpSp>
+        <p:grpSp>
+          <p:nvGrpSpPr>
+            <p:cNvPr id="89" name="Group 88">
+              <a:extLst>
+                <a:ext uri="{FF2B5EF4-FFF2-40B4-BE49-F238E27FC236}">
+                  <a16:creationId xmlns:a16="http://schemas.microsoft.com/office/drawing/2014/main" id="{FEF045B2-0948-65B1-3362-7DB766FFBBE7}"/>
+                </a:ext>
+              </a:extLst>
+            </p:cNvPr>
+            <p:cNvGrpSpPr/>
+            <p:nvPr/>
+          </p:nvGrpSpPr>
+          <p:grpSpPr>
+            <a:xfrm rot="5400000">
+              <a:off x="6704456" y="2000299"/>
+              <a:ext cx="2327564" cy="1339103"/>
+              <a:chOff x="5223090" y="758463"/>
+              <a:chExt cx="2327564" cy="1339103"/>
+            </a:xfrm>
+          </p:grpSpPr>
+          <p:pic>
+            <p:nvPicPr>
+              <p:cNvPr id="90" name="Picture 89">
+                <a:extLst>
+                  <a:ext uri="{FF2B5EF4-FFF2-40B4-BE49-F238E27FC236}">
+                    <a16:creationId xmlns:a16="http://schemas.microsoft.com/office/drawing/2014/main" id="{F04C856E-A956-D0A5-EDBC-8D14833F86DC}"/>
+                  </a:ext>
+                </a:extLst>
+              </p:cNvPr>
+              <p:cNvPicPr>
+                <a:picLocks noChangeAspect="1"/>
+              </p:cNvPicPr>
+              <p:nvPr/>
+            </p:nvPicPr>
+            <p:blipFill rotWithShape="1">
+              <a:blip r:embed="rId3"/>
+              <a:srcRect l="7265" t="2149" r="2137"/>
+              <a:stretch/>
+            </p:blipFill>
+            <p:spPr>
+              <a:xfrm rot="9499472">
+                <a:off x="5791200" y="758463"/>
+                <a:ext cx="501300" cy="1119886"/>
+              </a:xfrm>
+              <a:prstGeom prst="rect">
+                <a:avLst/>
+              </a:prstGeom>
+            </p:spPr>
+          </p:pic>
+          <p:pic>
+            <p:nvPicPr>
+              <p:cNvPr id="91" name="Picture 90">
+                <a:extLst>
+                  <a:ext uri="{FF2B5EF4-FFF2-40B4-BE49-F238E27FC236}">
+                    <a16:creationId xmlns:a16="http://schemas.microsoft.com/office/drawing/2014/main" id="{7363800B-F2BB-4F5F-FE92-1CFB48C58F42}"/>
+                  </a:ext>
+                </a:extLst>
+              </p:cNvPr>
+              <p:cNvPicPr>
+                <a:picLocks noChangeAspect="1"/>
+              </p:cNvPicPr>
+              <p:nvPr/>
+            </p:nvPicPr>
+            <p:blipFill rotWithShape="1">
+              <a:blip r:embed="rId3"/>
+              <a:srcRect l="7265" t="2149" r="2137"/>
+              <a:stretch/>
+            </p:blipFill>
+            <p:spPr>
+              <a:xfrm rot="11335141">
+                <a:off x="6459893" y="776279"/>
+                <a:ext cx="501300" cy="1119886"/>
+              </a:xfrm>
+              <a:prstGeom prst="rect">
+                <a:avLst/>
+              </a:prstGeom>
+            </p:spPr>
+          </p:pic>
+          <p:pic>
+            <p:nvPicPr>
+              <p:cNvPr id="92" name="Picture 91">
+                <a:extLst>
+                  <a:ext uri="{FF2B5EF4-FFF2-40B4-BE49-F238E27FC236}">
+                    <a16:creationId xmlns:a16="http://schemas.microsoft.com/office/drawing/2014/main" id="{1AD0E70B-066F-9828-19B3-5877D64FA2F6}"/>
+                  </a:ext>
+                </a:extLst>
+              </p:cNvPr>
+              <p:cNvPicPr>
+                <a:picLocks noChangeAspect="1"/>
+              </p:cNvPicPr>
+              <p:nvPr/>
+            </p:nvPicPr>
+            <p:blipFill rotWithShape="1">
+              <a:blip r:embed="rId3"/>
+              <a:srcRect l="7265" t="2149" r="2137"/>
+              <a:stretch/>
+            </p:blipFill>
+            <p:spPr>
+              <a:xfrm rot="9323264" flipH="1">
+                <a:off x="5223090" y="977680"/>
+                <a:ext cx="501300" cy="1119886"/>
+              </a:xfrm>
+              <a:prstGeom prst="rect">
+                <a:avLst/>
+              </a:prstGeom>
+            </p:spPr>
+          </p:pic>
+          <p:pic>
+            <p:nvPicPr>
+              <p:cNvPr id="93" name="Picture 92">
+                <a:extLst>
+                  <a:ext uri="{FF2B5EF4-FFF2-40B4-BE49-F238E27FC236}">
+                    <a16:creationId xmlns:a16="http://schemas.microsoft.com/office/drawing/2014/main" id="{77EA80CC-02E2-AA59-B36E-6C332D55C1F1}"/>
+                  </a:ext>
+                </a:extLst>
+              </p:cNvPr>
+              <p:cNvPicPr>
+                <a:picLocks noChangeAspect="1"/>
+              </p:cNvPicPr>
+              <p:nvPr/>
+            </p:nvPicPr>
+            <p:blipFill rotWithShape="1">
+              <a:blip r:embed="rId3"/>
+              <a:srcRect l="7265" t="2149" r="2137"/>
+              <a:stretch/>
+            </p:blipFill>
+            <p:spPr>
+              <a:xfrm rot="13424503" flipH="1">
+                <a:off x="7049354" y="966826"/>
+                <a:ext cx="501300" cy="1119886"/>
+              </a:xfrm>
+              <a:prstGeom prst="rect">
+                <a:avLst/>
+              </a:prstGeom>
+            </p:spPr>
+          </p:pic>
+        </p:grpSp>
+      </p:grpSp>
       <p:grpSp>
         <p:nvGrpSpPr>
           <p:cNvPr id="13" name="Group 12">
@@ -17400,1044 +18174,6 @@
       </p:grpSp>
       <p:grpSp>
         <p:nvGrpSpPr>
-          <p:cNvPr id="21" name="Group 20">
-            <a:extLst>
-              <a:ext uri="{FF2B5EF4-FFF2-40B4-BE49-F238E27FC236}">
-                <a16:creationId xmlns:a16="http://schemas.microsoft.com/office/drawing/2014/main" id="{E2A2CBEA-E93F-5FBE-BF5E-6728063DE48D}"/>
-              </a:ext>
-            </a:extLst>
-          </p:cNvPr>
-          <p:cNvGrpSpPr/>
-          <p:nvPr/>
-        </p:nvGrpSpPr>
-        <p:grpSpPr>
-          <a:xfrm>
-            <a:off x="1019174" y="536319"/>
-            <a:ext cx="441325" cy="1012069"/>
-            <a:chOff x="3248025" y="1009650"/>
-            <a:chExt cx="1390650" cy="3189114"/>
-          </a:xfrm>
-        </p:grpSpPr>
-        <p:sp>
-          <p:nvSpPr>
-            <p:cNvPr id="9" name="Oval 8">
-              <a:extLst>
-                <a:ext uri="{FF2B5EF4-FFF2-40B4-BE49-F238E27FC236}">
-                  <a16:creationId xmlns:a16="http://schemas.microsoft.com/office/drawing/2014/main" id="{9D5510EF-2548-EA85-62B8-9ADA85182350}"/>
-                </a:ext>
-              </a:extLst>
-            </p:cNvPr>
-            <p:cNvSpPr/>
-            <p:nvPr/>
-          </p:nvSpPr>
-          <p:spPr>
-            <a:xfrm>
-              <a:off x="3549650" y="1009650"/>
-              <a:ext cx="787400" cy="984250"/>
-            </a:xfrm>
-            <a:prstGeom prst="ellipse">
-              <a:avLst/>
-            </a:prstGeom>
-          </p:spPr>
-          <p:style>
-            <a:lnRef idx="2">
-              <a:schemeClr val="dk1">
-                <a:shade val="50000"/>
-              </a:schemeClr>
-            </a:lnRef>
-            <a:fillRef idx="1">
-              <a:schemeClr val="dk1"/>
-            </a:fillRef>
-            <a:effectRef idx="0">
-              <a:schemeClr val="dk1"/>
-            </a:effectRef>
-            <a:fontRef idx="minor">
-              <a:schemeClr val="lt1"/>
-            </a:fontRef>
-          </p:style>
-          <p:txBody>
-            <a:bodyPr rtlCol="0" anchor="ctr"/>
-            <a:lstStyle/>
-            <a:p>
-              <a:pPr algn="ctr"/>
-              <a:endParaRPr lang="en-US"/>
-            </a:p>
-          </p:txBody>
-        </p:sp>
-        <p:sp>
-          <p:nvSpPr>
-            <p:cNvPr id="11" name="Rectangle: Rounded Corners 10">
-              <a:extLst>
-                <a:ext uri="{FF2B5EF4-FFF2-40B4-BE49-F238E27FC236}">
-                  <a16:creationId xmlns:a16="http://schemas.microsoft.com/office/drawing/2014/main" id="{104BD941-8C1D-03B6-2D46-9AD123AB3AAA}"/>
-                </a:ext>
-              </a:extLst>
-            </p:cNvPr>
-            <p:cNvSpPr/>
-            <p:nvPr/>
-          </p:nvSpPr>
-          <p:spPr>
-            <a:xfrm>
-              <a:off x="3600450" y="2051050"/>
-              <a:ext cx="692150" cy="292100"/>
-            </a:xfrm>
-            <a:prstGeom prst="roundRect">
-              <a:avLst/>
-            </a:prstGeom>
-          </p:spPr>
-          <p:style>
-            <a:lnRef idx="2">
-              <a:schemeClr val="dk1">
-                <a:shade val="50000"/>
-              </a:schemeClr>
-            </a:lnRef>
-            <a:fillRef idx="1">
-              <a:schemeClr val="dk1"/>
-            </a:fillRef>
-            <a:effectRef idx="0">
-              <a:schemeClr val="dk1"/>
-            </a:effectRef>
-            <a:fontRef idx="minor">
-              <a:schemeClr val="lt1"/>
-            </a:fontRef>
-          </p:style>
-          <p:txBody>
-            <a:bodyPr rtlCol="0" anchor="ctr"/>
-            <a:lstStyle/>
-            <a:p>
-              <a:pPr algn="ctr"/>
-              <a:endParaRPr lang="en-US"/>
-            </a:p>
-          </p:txBody>
-        </p:sp>
-        <p:grpSp>
-          <p:nvGrpSpPr>
-            <p:cNvPr id="17" name="Group 16">
-              <a:extLst>
-                <a:ext uri="{FF2B5EF4-FFF2-40B4-BE49-F238E27FC236}">
-                  <a16:creationId xmlns:a16="http://schemas.microsoft.com/office/drawing/2014/main" id="{8D4E8C95-B2D6-2625-DFAC-E9625432CFC0}"/>
-                </a:ext>
-              </a:extLst>
-            </p:cNvPr>
-            <p:cNvGrpSpPr/>
-            <p:nvPr/>
-          </p:nvGrpSpPr>
-          <p:grpSpPr>
-            <a:xfrm>
-              <a:off x="4282383" y="2120161"/>
-              <a:ext cx="291335" cy="2073380"/>
-              <a:chOff x="4282383" y="2120161"/>
-              <a:chExt cx="291335" cy="2073380"/>
-            </a:xfrm>
-          </p:grpSpPr>
-          <p:sp>
-            <p:nvSpPr>
-              <p:cNvPr id="12" name="Rectangle 11">
-                <a:extLst>
-                  <a:ext uri="{FF2B5EF4-FFF2-40B4-BE49-F238E27FC236}">
-                    <a16:creationId xmlns:a16="http://schemas.microsoft.com/office/drawing/2014/main" id="{9B4DCC3F-3F93-BD4A-39A6-47EB5B8E46EE}"/>
-                  </a:ext>
-                </a:extLst>
-              </p:cNvPr>
-              <p:cNvSpPr/>
-              <p:nvPr/>
-            </p:nvSpPr>
-            <p:spPr>
-              <a:xfrm rot="3958351">
-                <a:off x="3893446" y="2509098"/>
-                <a:ext cx="996950" cy="219075"/>
-              </a:xfrm>
-              <a:prstGeom prst="rect">
-                <a:avLst/>
-              </a:prstGeom>
-            </p:spPr>
-            <p:style>
-              <a:lnRef idx="2">
-                <a:schemeClr val="dk1">
-                  <a:shade val="50000"/>
-                </a:schemeClr>
-              </a:lnRef>
-              <a:fillRef idx="1">
-                <a:schemeClr val="dk1"/>
-              </a:fillRef>
-              <a:effectRef idx="0">
-                <a:schemeClr val="dk1"/>
-              </a:effectRef>
-              <a:fontRef idx="minor">
-                <a:schemeClr val="lt1"/>
-              </a:fontRef>
-            </p:style>
-            <p:txBody>
-              <a:bodyPr rtlCol="0" anchor="ctr"/>
-              <a:lstStyle/>
-              <a:p>
-                <a:pPr algn="ctr"/>
-                <a:endParaRPr lang="en-US"/>
-              </a:p>
-            </p:txBody>
-          </p:sp>
-          <p:sp>
-            <p:nvSpPr>
-              <p:cNvPr id="14" name="Isosceles Triangle 13">
-                <a:extLst>
-                  <a:ext uri="{FF2B5EF4-FFF2-40B4-BE49-F238E27FC236}">
-                    <a16:creationId xmlns:a16="http://schemas.microsoft.com/office/drawing/2014/main" id="{1E09283E-E602-4561-BA1B-639728EE4302}"/>
-                  </a:ext>
-                </a:extLst>
-              </p:cNvPr>
-              <p:cNvSpPr/>
-              <p:nvPr/>
-            </p:nvSpPr>
-            <p:spPr>
-              <a:xfrm rot="11268472">
-                <a:off x="4421316" y="2942591"/>
-                <a:ext cx="152402" cy="1250950"/>
-              </a:xfrm>
-              <a:prstGeom prst="triangle">
-                <a:avLst/>
-              </a:prstGeom>
-            </p:spPr>
-            <p:style>
-              <a:lnRef idx="2">
-                <a:schemeClr val="dk1">
-                  <a:shade val="50000"/>
-                </a:schemeClr>
-              </a:lnRef>
-              <a:fillRef idx="1">
-                <a:schemeClr val="dk1"/>
-              </a:fillRef>
-              <a:effectRef idx="0">
-                <a:schemeClr val="dk1"/>
-              </a:effectRef>
-              <a:fontRef idx="minor">
-                <a:schemeClr val="lt1"/>
-              </a:fontRef>
-            </p:style>
-            <p:txBody>
-              <a:bodyPr rtlCol="0" anchor="ctr"/>
-              <a:lstStyle/>
-              <a:p>
-                <a:pPr algn="ctr"/>
-                <a:endParaRPr lang="en-US"/>
-              </a:p>
-            </p:txBody>
-          </p:sp>
-        </p:grpSp>
-        <p:grpSp>
-          <p:nvGrpSpPr>
-            <p:cNvPr id="35" name="Group 34">
-              <a:extLst>
-                <a:ext uri="{FF2B5EF4-FFF2-40B4-BE49-F238E27FC236}">
-                  <a16:creationId xmlns:a16="http://schemas.microsoft.com/office/drawing/2014/main" id="{11CE8681-7007-B528-1489-2C083FAB07E4}"/>
-                </a:ext>
-              </a:extLst>
-            </p:cNvPr>
-            <p:cNvGrpSpPr/>
-            <p:nvPr/>
-          </p:nvGrpSpPr>
-          <p:grpSpPr>
-            <a:xfrm flipH="1">
-              <a:off x="3309115" y="2124715"/>
-              <a:ext cx="291335" cy="2073380"/>
-              <a:chOff x="4282383" y="2120161"/>
-              <a:chExt cx="291335" cy="2073380"/>
-            </a:xfrm>
-          </p:grpSpPr>
-          <p:sp>
-            <p:nvSpPr>
-              <p:cNvPr id="36" name="Rectangle 35">
-                <a:extLst>
-                  <a:ext uri="{FF2B5EF4-FFF2-40B4-BE49-F238E27FC236}">
-                    <a16:creationId xmlns:a16="http://schemas.microsoft.com/office/drawing/2014/main" id="{7146EEE4-FE28-A545-C368-14A7CBAFCCD3}"/>
-                  </a:ext>
-                </a:extLst>
-              </p:cNvPr>
-              <p:cNvSpPr/>
-              <p:nvPr/>
-            </p:nvSpPr>
-            <p:spPr>
-              <a:xfrm rot="3958351">
-                <a:off x="3893446" y="2509098"/>
-                <a:ext cx="996950" cy="219075"/>
-              </a:xfrm>
-              <a:prstGeom prst="rect">
-                <a:avLst/>
-              </a:prstGeom>
-            </p:spPr>
-            <p:style>
-              <a:lnRef idx="2">
-                <a:schemeClr val="dk1">
-                  <a:shade val="50000"/>
-                </a:schemeClr>
-              </a:lnRef>
-              <a:fillRef idx="1">
-                <a:schemeClr val="dk1"/>
-              </a:fillRef>
-              <a:effectRef idx="0">
-                <a:schemeClr val="dk1"/>
-              </a:effectRef>
-              <a:fontRef idx="minor">
-                <a:schemeClr val="lt1"/>
-              </a:fontRef>
-            </p:style>
-            <p:txBody>
-              <a:bodyPr rtlCol="0" anchor="ctr"/>
-              <a:lstStyle/>
-              <a:p>
-                <a:pPr algn="ctr"/>
-                <a:endParaRPr lang="en-US"/>
-              </a:p>
-            </p:txBody>
-          </p:sp>
-          <p:sp>
-            <p:nvSpPr>
-              <p:cNvPr id="37" name="Isosceles Triangle 36">
-                <a:extLst>
-                  <a:ext uri="{FF2B5EF4-FFF2-40B4-BE49-F238E27FC236}">
-                    <a16:creationId xmlns:a16="http://schemas.microsoft.com/office/drawing/2014/main" id="{B62C4A42-F1EE-4E15-A845-CB1E95F23D9F}"/>
-                  </a:ext>
-                </a:extLst>
-              </p:cNvPr>
-              <p:cNvSpPr/>
-              <p:nvPr/>
-            </p:nvSpPr>
-            <p:spPr>
-              <a:xfrm rot="11268472">
-                <a:off x="4421316" y="2942591"/>
-                <a:ext cx="152402" cy="1250950"/>
-              </a:xfrm>
-              <a:prstGeom prst="triangle">
-                <a:avLst/>
-              </a:prstGeom>
-            </p:spPr>
-            <p:style>
-              <a:lnRef idx="2">
-                <a:schemeClr val="dk1">
-                  <a:shade val="50000"/>
-                </a:schemeClr>
-              </a:lnRef>
-              <a:fillRef idx="1">
-                <a:schemeClr val="dk1"/>
-              </a:fillRef>
-              <a:effectRef idx="0">
-                <a:schemeClr val="dk1"/>
-              </a:effectRef>
-              <a:fontRef idx="minor">
-                <a:schemeClr val="lt1"/>
-              </a:fontRef>
-            </p:style>
-            <p:txBody>
-              <a:bodyPr rtlCol="0" anchor="ctr"/>
-              <a:lstStyle/>
-              <a:p>
-                <a:pPr algn="ctr"/>
-                <a:endParaRPr lang="en-US"/>
-              </a:p>
-            </p:txBody>
-          </p:sp>
-        </p:grpSp>
-        <p:sp>
-          <p:nvSpPr>
-            <p:cNvPr id="39" name="Rectangle 38">
-              <a:extLst>
-                <a:ext uri="{FF2B5EF4-FFF2-40B4-BE49-F238E27FC236}">
-                  <a16:creationId xmlns:a16="http://schemas.microsoft.com/office/drawing/2014/main" id="{289333CA-5D8F-C6FC-1B71-A2036F1FEC27}"/>
-                </a:ext>
-              </a:extLst>
-            </p:cNvPr>
-            <p:cNvSpPr/>
-            <p:nvPr/>
-          </p:nvSpPr>
-          <p:spPr>
-            <a:xfrm rot="5400000">
-              <a:off x="3441937" y="2586038"/>
-              <a:ext cx="996950" cy="219075"/>
-            </a:xfrm>
-            <a:prstGeom prst="rect">
-              <a:avLst/>
-            </a:prstGeom>
-          </p:spPr>
-          <p:style>
-            <a:lnRef idx="2">
-              <a:schemeClr val="dk1">
-                <a:shade val="50000"/>
-              </a:schemeClr>
-            </a:lnRef>
-            <a:fillRef idx="1">
-              <a:schemeClr val="dk1"/>
-            </a:fillRef>
-            <a:effectRef idx="0">
-              <a:schemeClr val="dk1"/>
-            </a:effectRef>
-            <a:fontRef idx="minor">
-              <a:schemeClr val="lt1"/>
-            </a:fontRef>
-          </p:style>
-          <p:txBody>
-            <a:bodyPr rtlCol="0" anchor="ctr"/>
-            <a:lstStyle/>
-            <a:p>
-              <a:pPr algn="ctr"/>
-              <a:endParaRPr lang="en-US"/>
-            </a:p>
-          </p:txBody>
-        </p:sp>
-        <p:sp>
-          <p:nvSpPr>
-            <p:cNvPr id="40" name="Isosceles Triangle 39">
-              <a:extLst>
-                <a:ext uri="{FF2B5EF4-FFF2-40B4-BE49-F238E27FC236}">
-                  <a16:creationId xmlns:a16="http://schemas.microsoft.com/office/drawing/2014/main" id="{99B87BC8-4AA1-49F4-1A86-6E5B0A124EED}"/>
-                </a:ext>
-              </a:extLst>
-            </p:cNvPr>
-            <p:cNvSpPr/>
-            <p:nvPr/>
-          </p:nvSpPr>
-          <p:spPr>
-            <a:xfrm rot="10800000">
-              <a:off x="3869157" y="2947814"/>
-              <a:ext cx="152402" cy="1250950"/>
-            </a:xfrm>
-            <a:prstGeom prst="triangle">
-              <a:avLst/>
-            </a:prstGeom>
-          </p:spPr>
-          <p:style>
-            <a:lnRef idx="2">
-              <a:schemeClr val="dk1">
-                <a:shade val="50000"/>
-              </a:schemeClr>
-            </a:lnRef>
-            <a:fillRef idx="1">
-              <a:schemeClr val="dk1"/>
-            </a:fillRef>
-            <a:effectRef idx="0">
-              <a:schemeClr val="dk1"/>
-            </a:effectRef>
-            <a:fontRef idx="minor">
-              <a:schemeClr val="lt1"/>
-            </a:fontRef>
-          </p:style>
-          <p:txBody>
-            <a:bodyPr rtlCol="0" anchor="ctr"/>
-            <a:lstStyle/>
-            <a:p>
-              <a:pPr algn="ctr"/>
-              <a:endParaRPr lang="en-US"/>
-            </a:p>
-          </p:txBody>
-        </p:sp>
-        <p:sp>
-          <p:nvSpPr>
-            <p:cNvPr id="18" name="Rectangle 17">
-              <a:extLst>
-                <a:ext uri="{FF2B5EF4-FFF2-40B4-BE49-F238E27FC236}">
-                  <a16:creationId xmlns:a16="http://schemas.microsoft.com/office/drawing/2014/main" id="{B94ABFCB-E0CF-2FE9-1D1D-847E59D4ECDC}"/>
-                </a:ext>
-              </a:extLst>
-            </p:cNvPr>
-            <p:cNvSpPr/>
-            <p:nvPr/>
-          </p:nvSpPr>
-          <p:spPr>
-            <a:xfrm>
-              <a:off x="3248025" y="1227137"/>
-              <a:ext cx="215900" cy="766763"/>
-            </a:xfrm>
-            <a:prstGeom prst="rect">
-              <a:avLst/>
-            </a:prstGeom>
-          </p:spPr>
-          <p:style>
-            <a:lnRef idx="2">
-              <a:schemeClr val="dk1"/>
-            </a:lnRef>
-            <a:fillRef idx="1">
-              <a:schemeClr val="lt1"/>
-            </a:fillRef>
-            <a:effectRef idx="0">
-              <a:schemeClr val="dk1"/>
-            </a:effectRef>
-            <a:fontRef idx="minor">
-              <a:schemeClr val="dk1"/>
-            </a:fontRef>
-          </p:style>
-          <p:txBody>
-            <a:bodyPr rtlCol="0" anchor="ctr"/>
-            <a:lstStyle/>
-            <a:p>
-              <a:pPr algn="ctr"/>
-              <a:endParaRPr lang="en-US"/>
-            </a:p>
-          </p:txBody>
-        </p:sp>
-        <p:sp>
-          <p:nvSpPr>
-            <p:cNvPr id="42" name="Rectangle 41">
-              <a:extLst>
-                <a:ext uri="{FF2B5EF4-FFF2-40B4-BE49-F238E27FC236}">
-                  <a16:creationId xmlns:a16="http://schemas.microsoft.com/office/drawing/2014/main" id="{FC055838-3FDF-25B4-2A9B-5B79F532EB71}"/>
-                </a:ext>
-              </a:extLst>
-            </p:cNvPr>
-            <p:cNvSpPr/>
-            <p:nvPr/>
-          </p:nvSpPr>
-          <p:spPr>
-            <a:xfrm>
-              <a:off x="4422775" y="1227136"/>
-              <a:ext cx="215900" cy="766764"/>
-            </a:xfrm>
-            <a:prstGeom prst="rect">
-              <a:avLst/>
-            </a:prstGeom>
-          </p:spPr>
-          <p:style>
-            <a:lnRef idx="2">
-              <a:schemeClr val="dk1"/>
-            </a:lnRef>
-            <a:fillRef idx="1">
-              <a:schemeClr val="lt1"/>
-            </a:fillRef>
-            <a:effectRef idx="0">
-              <a:schemeClr val="dk1"/>
-            </a:effectRef>
-            <a:fontRef idx="minor">
-              <a:schemeClr val="dk1"/>
-            </a:fontRef>
-          </p:style>
-          <p:txBody>
-            <a:bodyPr rtlCol="0" anchor="ctr"/>
-            <a:lstStyle/>
-            <a:p>
-              <a:pPr algn="ctr"/>
-              <a:endParaRPr lang="en-US"/>
-            </a:p>
-          </p:txBody>
-        </p:sp>
-      </p:grpSp>
-      <p:grpSp>
-        <p:nvGrpSpPr>
-          <p:cNvPr id="22" name="Group 21">
-            <a:extLst>
-              <a:ext uri="{FF2B5EF4-FFF2-40B4-BE49-F238E27FC236}">
-                <a16:creationId xmlns:a16="http://schemas.microsoft.com/office/drawing/2014/main" id="{18BE5F6B-478D-573E-9C76-37A0135DBE17}"/>
-              </a:ext>
-            </a:extLst>
-          </p:cNvPr>
-          <p:cNvGrpSpPr/>
-          <p:nvPr/>
-        </p:nvGrpSpPr>
-        <p:grpSpPr>
-          <a:xfrm>
-            <a:off x="2296423" y="548069"/>
-            <a:ext cx="502920" cy="1014984"/>
-            <a:chOff x="5380031" y="966102"/>
-            <a:chExt cx="1727200" cy="3248141"/>
-          </a:xfrm>
-        </p:grpSpPr>
-        <p:sp>
-          <p:nvSpPr>
-            <p:cNvPr id="20" name="Moon 19">
-              <a:extLst>
-                <a:ext uri="{FF2B5EF4-FFF2-40B4-BE49-F238E27FC236}">
-                  <a16:creationId xmlns:a16="http://schemas.microsoft.com/office/drawing/2014/main" id="{E95D41D4-AD08-AD39-A14F-F05C5D38C635}"/>
-                </a:ext>
-              </a:extLst>
-            </p:cNvPr>
-            <p:cNvSpPr/>
-            <p:nvPr/>
-          </p:nvSpPr>
-          <p:spPr>
-            <a:xfrm rot="19627358">
-              <a:off x="5549196" y="966102"/>
-              <a:ext cx="450850" cy="984250"/>
-            </a:xfrm>
-            <a:prstGeom prst="moon">
-              <a:avLst/>
-            </a:prstGeom>
-          </p:spPr>
-          <p:style>
-            <a:lnRef idx="2">
-              <a:schemeClr val="dk1"/>
-            </a:lnRef>
-            <a:fillRef idx="1">
-              <a:schemeClr val="lt1"/>
-            </a:fillRef>
-            <a:effectRef idx="0">
-              <a:schemeClr val="dk1"/>
-            </a:effectRef>
-            <a:fontRef idx="minor">
-              <a:schemeClr val="dk1"/>
-            </a:fontRef>
-          </p:style>
-          <p:txBody>
-            <a:bodyPr rtlCol="0" anchor="ctr"/>
-            <a:lstStyle/>
-            <a:p>
-              <a:pPr algn="ctr"/>
-              <a:endParaRPr lang="en-US"/>
-            </a:p>
-          </p:txBody>
-        </p:sp>
-        <p:sp>
-          <p:nvSpPr>
-            <p:cNvPr id="61" name="Moon 60">
-              <a:extLst>
-                <a:ext uri="{FF2B5EF4-FFF2-40B4-BE49-F238E27FC236}">
-                  <a16:creationId xmlns:a16="http://schemas.microsoft.com/office/drawing/2014/main" id="{1EAC84D0-0BB6-E938-EC63-7135681FB63F}"/>
-                </a:ext>
-              </a:extLst>
-            </p:cNvPr>
-            <p:cNvSpPr/>
-            <p:nvPr/>
-          </p:nvSpPr>
-          <p:spPr>
-            <a:xfrm rot="1972642" flipH="1">
-              <a:off x="6518602" y="966104"/>
-              <a:ext cx="450850" cy="984250"/>
-            </a:xfrm>
-            <a:prstGeom prst="moon">
-              <a:avLst/>
-            </a:prstGeom>
-          </p:spPr>
-          <p:style>
-            <a:lnRef idx="2">
-              <a:schemeClr val="dk1"/>
-            </a:lnRef>
-            <a:fillRef idx="1">
-              <a:schemeClr val="lt1"/>
-            </a:fillRef>
-            <a:effectRef idx="0">
-              <a:schemeClr val="dk1"/>
-            </a:effectRef>
-            <a:fontRef idx="minor">
-              <a:schemeClr val="dk1"/>
-            </a:fontRef>
-          </p:style>
-          <p:txBody>
-            <a:bodyPr rtlCol="0" anchor="ctr"/>
-            <a:lstStyle/>
-            <a:p>
-              <a:pPr algn="ctr"/>
-              <a:endParaRPr lang="en-US"/>
-            </a:p>
-          </p:txBody>
-        </p:sp>
-        <p:sp>
-          <p:nvSpPr>
-            <p:cNvPr id="43" name="Oval 42">
-              <a:extLst>
-                <a:ext uri="{FF2B5EF4-FFF2-40B4-BE49-F238E27FC236}">
-                  <a16:creationId xmlns:a16="http://schemas.microsoft.com/office/drawing/2014/main" id="{08329DD8-9A31-5259-0D08-5C3CC972588F}"/>
-                </a:ext>
-              </a:extLst>
-            </p:cNvPr>
-            <p:cNvSpPr/>
-            <p:nvPr/>
-          </p:nvSpPr>
-          <p:spPr>
-            <a:xfrm>
-              <a:off x="5852869" y="1025129"/>
-              <a:ext cx="787400" cy="984250"/>
-            </a:xfrm>
-            <a:prstGeom prst="ellipse">
-              <a:avLst/>
-            </a:prstGeom>
-          </p:spPr>
-          <p:style>
-            <a:lnRef idx="2">
-              <a:schemeClr val="dk1">
-                <a:shade val="50000"/>
-              </a:schemeClr>
-            </a:lnRef>
-            <a:fillRef idx="1">
-              <a:schemeClr val="dk1"/>
-            </a:fillRef>
-            <a:effectRef idx="0">
-              <a:schemeClr val="dk1"/>
-            </a:effectRef>
-            <a:fontRef idx="minor">
-              <a:schemeClr val="lt1"/>
-            </a:fontRef>
-          </p:style>
-          <p:txBody>
-            <a:bodyPr rtlCol="0" anchor="ctr"/>
-            <a:lstStyle/>
-            <a:p>
-              <a:pPr algn="ctr"/>
-              <a:endParaRPr lang="en-US"/>
-            </a:p>
-          </p:txBody>
-        </p:sp>
-        <p:grpSp>
-          <p:nvGrpSpPr>
-            <p:cNvPr id="45" name="Group 44">
-              <a:extLst>
-                <a:ext uri="{FF2B5EF4-FFF2-40B4-BE49-F238E27FC236}">
-                  <a16:creationId xmlns:a16="http://schemas.microsoft.com/office/drawing/2014/main" id="{E3D82530-25BB-7B78-F396-EC90FDCFBBD1}"/>
-                </a:ext>
-              </a:extLst>
-            </p:cNvPr>
-            <p:cNvGrpSpPr/>
-            <p:nvPr/>
-          </p:nvGrpSpPr>
-          <p:grpSpPr>
-            <a:xfrm>
-              <a:off x="6585602" y="2135640"/>
-              <a:ext cx="291335" cy="2073380"/>
-              <a:chOff x="4282383" y="2120161"/>
-              <a:chExt cx="291335" cy="2073380"/>
-            </a:xfrm>
-          </p:grpSpPr>
-          <p:sp>
-            <p:nvSpPr>
-              <p:cNvPr id="46" name="Rectangle 45">
-                <a:extLst>
-                  <a:ext uri="{FF2B5EF4-FFF2-40B4-BE49-F238E27FC236}">
-                    <a16:creationId xmlns:a16="http://schemas.microsoft.com/office/drawing/2014/main" id="{23252941-D171-D4AC-9958-B7370AFD1A74}"/>
-                  </a:ext>
-                </a:extLst>
-              </p:cNvPr>
-              <p:cNvSpPr/>
-              <p:nvPr/>
-            </p:nvSpPr>
-            <p:spPr>
-              <a:xfrm rot="3958351">
-                <a:off x="3893446" y="2509098"/>
-                <a:ext cx="996950" cy="219075"/>
-              </a:xfrm>
-              <a:prstGeom prst="rect">
-                <a:avLst/>
-              </a:prstGeom>
-            </p:spPr>
-            <p:style>
-              <a:lnRef idx="2">
-                <a:schemeClr val="dk1">
-                  <a:shade val="50000"/>
-                </a:schemeClr>
-              </a:lnRef>
-              <a:fillRef idx="1">
-                <a:schemeClr val="dk1"/>
-              </a:fillRef>
-              <a:effectRef idx="0">
-                <a:schemeClr val="dk1"/>
-              </a:effectRef>
-              <a:fontRef idx="minor">
-                <a:schemeClr val="lt1"/>
-              </a:fontRef>
-            </p:style>
-            <p:txBody>
-              <a:bodyPr rtlCol="0" anchor="ctr"/>
-              <a:lstStyle/>
-              <a:p>
-                <a:pPr algn="ctr"/>
-                <a:endParaRPr lang="en-US"/>
-              </a:p>
-            </p:txBody>
-          </p:sp>
-          <p:sp>
-            <p:nvSpPr>
-              <p:cNvPr id="47" name="Isosceles Triangle 46">
-                <a:extLst>
-                  <a:ext uri="{FF2B5EF4-FFF2-40B4-BE49-F238E27FC236}">
-                    <a16:creationId xmlns:a16="http://schemas.microsoft.com/office/drawing/2014/main" id="{C4379557-A972-423D-3572-9827516BEC4C}"/>
-                  </a:ext>
-                </a:extLst>
-              </p:cNvPr>
-              <p:cNvSpPr/>
-              <p:nvPr/>
-            </p:nvSpPr>
-            <p:spPr>
-              <a:xfrm rot="11268472">
-                <a:off x="4421316" y="2942591"/>
-                <a:ext cx="152402" cy="1250950"/>
-              </a:xfrm>
-              <a:prstGeom prst="triangle">
-                <a:avLst/>
-              </a:prstGeom>
-            </p:spPr>
-            <p:style>
-              <a:lnRef idx="2">
-                <a:schemeClr val="dk1">
-                  <a:shade val="50000"/>
-                </a:schemeClr>
-              </a:lnRef>
-              <a:fillRef idx="1">
-                <a:schemeClr val="dk1"/>
-              </a:fillRef>
-              <a:effectRef idx="0">
-                <a:schemeClr val="dk1"/>
-              </a:effectRef>
-              <a:fontRef idx="minor">
-                <a:schemeClr val="lt1"/>
-              </a:fontRef>
-            </p:style>
-            <p:txBody>
-              <a:bodyPr rtlCol="0" anchor="ctr"/>
-              <a:lstStyle/>
-              <a:p>
-                <a:pPr algn="ctr"/>
-                <a:endParaRPr lang="en-US"/>
-              </a:p>
-            </p:txBody>
-          </p:sp>
-        </p:grpSp>
-        <p:grpSp>
-          <p:nvGrpSpPr>
-            <p:cNvPr id="48" name="Group 47">
-              <a:extLst>
-                <a:ext uri="{FF2B5EF4-FFF2-40B4-BE49-F238E27FC236}">
-                  <a16:creationId xmlns:a16="http://schemas.microsoft.com/office/drawing/2014/main" id="{2D2BD7C5-76A9-A619-C8B7-FE03919E99A0}"/>
-                </a:ext>
-              </a:extLst>
-            </p:cNvPr>
-            <p:cNvGrpSpPr/>
-            <p:nvPr/>
-          </p:nvGrpSpPr>
-          <p:grpSpPr>
-            <a:xfrm flipH="1">
-              <a:off x="5612334" y="2140194"/>
-              <a:ext cx="291335" cy="2073380"/>
-              <a:chOff x="4282383" y="2120161"/>
-              <a:chExt cx="291335" cy="2073380"/>
-            </a:xfrm>
-          </p:grpSpPr>
-          <p:sp>
-            <p:nvSpPr>
-              <p:cNvPr id="49" name="Rectangle 48">
-                <a:extLst>
-                  <a:ext uri="{FF2B5EF4-FFF2-40B4-BE49-F238E27FC236}">
-                    <a16:creationId xmlns:a16="http://schemas.microsoft.com/office/drawing/2014/main" id="{2FAAE068-751B-49DC-5680-34E68D0A3C9F}"/>
-                  </a:ext>
-                </a:extLst>
-              </p:cNvPr>
-              <p:cNvSpPr/>
-              <p:nvPr/>
-            </p:nvSpPr>
-            <p:spPr>
-              <a:xfrm rot="3958351">
-                <a:off x="3893446" y="2509098"/>
-                <a:ext cx="996950" cy="219075"/>
-              </a:xfrm>
-              <a:prstGeom prst="rect">
-                <a:avLst/>
-              </a:prstGeom>
-            </p:spPr>
-            <p:style>
-              <a:lnRef idx="2">
-                <a:schemeClr val="dk1">
-                  <a:shade val="50000"/>
-                </a:schemeClr>
-              </a:lnRef>
-              <a:fillRef idx="1">
-                <a:schemeClr val="dk1"/>
-              </a:fillRef>
-              <a:effectRef idx="0">
-                <a:schemeClr val="dk1"/>
-              </a:effectRef>
-              <a:fontRef idx="minor">
-                <a:schemeClr val="lt1"/>
-              </a:fontRef>
-            </p:style>
-            <p:txBody>
-              <a:bodyPr rtlCol="0" anchor="ctr"/>
-              <a:lstStyle/>
-              <a:p>
-                <a:pPr algn="ctr"/>
-                <a:endParaRPr lang="en-US"/>
-              </a:p>
-            </p:txBody>
-          </p:sp>
-          <p:sp>
-            <p:nvSpPr>
-              <p:cNvPr id="50" name="Isosceles Triangle 49">
-                <a:extLst>
-                  <a:ext uri="{FF2B5EF4-FFF2-40B4-BE49-F238E27FC236}">
-                    <a16:creationId xmlns:a16="http://schemas.microsoft.com/office/drawing/2014/main" id="{9AA4BCE5-F4F1-B611-C793-F485A6748A3A}"/>
-                  </a:ext>
-                </a:extLst>
-              </p:cNvPr>
-              <p:cNvSpPr/>
-              <p:nvPr/>
-            </p:nvSpPr>
-            <p:spPr>
-              <a:xfrm rot="11268472">
-                <a:off x="4421316" y="2942591"/>
-                <a:ext cx="152402" cy="1250950"/>
-              </a:xfrm>
-              <a:prstGeom prst="triangle">
-                <a:avLst/>
-              </a:prstGeom>
-            </p:spPr>
-            <p:style>
-              <a:lnRef idx="2">
-                <a:schemeClr val="dk1">
-                  <a:shade val="50000"/>
-                </a:schemeClr>
-              </a:lnRef>
-              <a:fillRef idx="1">
-                <a:schemeClr val="dk1"/>
-              </a:fillRef>
-              <a:effectRef idx="0">
-                <a:schemeClr val="dk1"/>
-              </a:effectRef>
-              <a:fontRef idx="minor">
-                <a:schemeClr val="lt1"/>
-              </a:fontRef>
-            </p:style>
-            <p:txBody>
-              <a:bodyPr rtlCol="0" anchor="ctr"/>
-              <a:lstStyle/>
-              <a:p>
-                <a:pPr algn="ctr"/>
-                <a:endParaRPr lang="en-US"/>
-              </a:p>
-            </p:txBody>
-          </p:sp>
-        </p:grpSp>
-        <p:sp>
-          <p:nvSpPr>
-            <p:cNvPr id="51" name="Rectangle 50">
-              <a:extLst>
-                <a:ext uri="{FF2B5EF4-FFF2-40B4-BE49-F238E27FC236}">
-                  <a16:creationId xmlns:a16="http://schemas.microsoft.com/office/drawing/2014/main" id="{0F48EA78-F7DC-B13A-6157-459D28BD6199}"/>
-                </a:ext>
-              </a:extLst>
-            </p:cNvPr>
-            <p:cNvSpPr/>
-            <p:nvPr/>
-          </p:nvSpPr>
-          <p:spPr>
-            <a:xfrm rot="5400000">
-              <a:off x="5745156" y="2601517"/>
-              <a:ext cx="996950" cy="219075"/>
-            </a:xfrm>
-            <a:prstGeom prst="rect">
-              <a:avLst/>
-            </a:prstGeom>
-          </p:spPr>
-          <p:style>
-            <a:lnRef idx="2">
-              <a:schemeClr val="dk1">
-                <a:shade val="50000"/>
-              </a:schemeClr>
-            </a:lnRef>
-            <a:fillRef idx="1">
-              <a:schemeClr val="dk1"/>
-            </a:fillRef>
-            <a:effectRef idx="0">
-              <a:schemeClr val="dk1"/>
-            </a:effectRef>
-            <a:fontRef idx="minor">
-              <a:schemeClr val="lt1"/>
-            </a:fontRef>
-          </p:style>
-          <p:txBody>
-            <a:bodyPr rtlCol="0" anchor="ctr"/>
-            <a:lstStyle/>
-            <a:p>
-              <a:pPr algn="ctr"/>
-              <a:endParaRPr lang="en-US"/>
-            </a:p>
-          </p:txBody>
-        </p:sp>
-        <p:sp>
-          <p:nvSpPr>
-            <p:cNvPr id="52" name="Isosceles Triangle 51">
-              <a:extLst>
-                <a:ext uri="{FF2B5EF4-FFF2-40B4-BE49-F238E27FC236}">
-                  <a16:creationId xmlns:a16="http://schemas.microsoft.com/office/drawing/2014/main" id="{DCFCA97B-0D8E-7C80-06D2-684CA14063C8}"/>
-                </a:ext>
-              </a:extLst>
-            </p:cNvPr>
-            <p:cNvSpPr/>
-            <p:nvPr/>
-          </p:nvSpPr>
-          <p:spPr>
-            <a:xfrm rot="10800000">
-              <a:off x="6172376" y="2963293"/>
-              <a:ext cx="152402" cy="1250950"/>
-            </a:xfrm>
-            <a:prstGeom prst="triangle">
-              <a:avLst/>
-            </a:prstGeom>
-          </p:spPr>
-          <p:style>
-            <a:lnRef idx="2">
-              <a:schemeClr val="dk1">
-                <a:shade val="50000"/>
-              </a:schemeClr>
-            </a:lnRef>
-            <a:fillRef idx="1">
-              <a:schemeClr val="dk1"/>
-            </a:fillRef>
-            <a:effectRef idx="0">
-              <a:schemeClr val="dk1"/>
-            </a:effectRef>
-            <a:fontRef idx="minor">
-              <a:schemeClr val="lt1"/>
-            </a:fontRef>
-          </p:style>
-          <p:txBody>
-            <a:bodyPr rtlCol="0" anchor="ctr"/>
-            <a:lstStyle/>
-            <a:p>
-              <a:pPr algn="ctr"/>
-              <a:endParaRPr lang="en-US"/>
-            </a:p>
-          </p:txBody>
-        </p:sp>
-        <p:sp>
-          <p:nvSpPr>
-            <p:cNvPr id="19" name="Moon 18">
-              <a:extLst>
-                <a:ext uri="{FF2B5EF4-FFF2-40B4-BE49-F238E27FC236}">
-                  <a16:creationId xmlns:a16="http://schemas.microsoft.com/office/drawing/2014/main" id="{5DFC7713-3DA5-1972-0709-F93537967C67}"/>
-                </a:ext>
-              </a:extLst>
-            </p:cNvPr>
-            <p:cNvSpPr/>
-            <p:nvPr/>
-          </p:nvSpPr>
-          <p:spPr>
-            <a:xfrm rot="16200000">
-              <a:off x="6002331" y="1326503"/>
-              <a:ext cx="482600" cy="1727200"/>
-            </a:xfrm>
-            <a:prstGeom prst="moon">
-              <a:avLst/>
-            </a:prstGeom>
-          </p:spPr>
-          <p:style>
-            <a:lnRef idx="2">
-              <a:schemeClr val="dk1">
-                <a:shade val="50000"/>
-              </a:schemeClr>
-            </a:lnRef>
-            <a:fillRef idx="1">
-              <a:schemeClr val="dk1"/>
-            </a:fillRef>
-            <a:effectRef idx="0">
-              <a:schemeClr val="dk1"/>
-            </a:effectRef>
-            <a:fontRef idx="minor">
-              <a:schemeClr val="lt1"/>
-            </a:fontRef>
-          </p:style>
-          <p:txBody>
-            <a:bodyPr rtlCol="0" anchor="ctr"/>
-            <a:lstStyle/>
-            <a:p>
-              <a:pPr algn="ctr"/>
-              <a:endParaRPr lang="en-US"/>
-            </a:p>
-          </p:txBody>
-        </p:sp>
-      </p:grpSp>
-      <p:grpSp>
-        <p:nvGrpSpPr>
           <p:cNvPr id="63" name="Group 62">
             <a:extLst>
               <a:ext uri="{FF2B5EF4-FFF2-40B4-BE49-F238E27FC236}">
@@ -18563,36 +18299,6 @@
           </p:txBody>
         </p:sp>
       </p:grpSp>
-      <p:pic>
-        <p:nvPicPr>
-          <p:cNvPr id="24" name="Picture 23">
-            <a:extLst>
-              <a:ext uri="{FF2B5EF4-FFF2-40B4-BE49-F238E27FC236}">
-                <a16:creationId xmlns:a16="http://schemas.microsoft.com/office/drawing/2014/main" id="{2F2ED8C1-53DF-F73B-F74C-0D7AC6528101}"/>
-              </a:ext>
-            </a:extLst>
-          </p:cNvPr>
-          <p:cNvPicPr>
-            <a:picLocks noChangeAspect="1"/>
-          </p:cNvPicPr>
-          <p:nvPr/>
-        </p:nvPicPr>
-        <p:blipFill>
-          <a:blip r:embed="rId3"/>
-          <a:stretch>
-            <a:fillRect/>
-          </a:stretch>
-        </p:blipFill>
-        <p:spPr>
-          <a:xfrm>
-            <a:off x="2836236" y="813118"/>
-            <a:ext cx="277209" cy="415814"/>
-          </a:xfrm>
-          <a:prstGeom prst="rect">
-            <a:avLst/>
-          </a:prstGeom>
-        </p:spPr>
-      </p:pic>
     </p:spTree>
     <p:extLst>
       <p:ext uri="{BB962C8B-B14F-4D97-AF65-F5344CB8AC3E}">
@@ -23179,6 +22885,907 @@
           </a:prstGeom>
         </p:spPr>
       </p:pic>
+      <p:grpSp>
+        <p:nvGrpSpPr>
+          <p:cNvPr id="145" name="Group 144">
+            <a:extLst>
+              <a:ext uri="{FF2B5EF4-FFF2-40B4-BE49-F238E27FC236}">
+                <a16:creationId xmlns:a16="http://schemas.microsoft.com/office/drawing/2014/main" id="{DBB0B142-B0B1-9AB0-A578-7503645128F2}"/>
+              </a:ext>
+            </a:extLst>
+          </p:cNvPr>
+          <p:cNvGrpSpPr/>
+          <p:nvPr/>
+        </p:nvGrpSpPr>
+        <p:grpSpPr>
+          <a:xfrm>
+            <a:off x="9539183" y="811523"/>
+            <a:ext cx="1027167" cy="1035721"/>
+            <a:chOff x="4165279" y="376316"/>
+            <a:chExt cx="4372510" cy="4408922"/>
+          </a:xfrm>
+        </p:grpSpPr>
+        <p:grpSp>
+          <p:nvGrpSpPr>
+            <p:cNvPr id="146" name="Group 145">
+              <a:extLst>
+                <a:ext uri="{FF2B5EF4-FFF2-40B4-BE49-F238E27FC236}">
+                  <a16:creationId xmlns:a16="http://schemas.microsoft.com/office/drawing/2014/main" id="{B4F1C6C6-B6B3-3951-8A2A-B125FDC763A1}"/>
+                </a:ext>
+              </a:extLst>
+            </p:cNvPr>
+            <p:cNvGrpSpPr/>
+            <p:nvPr/>
+          </p:nvGrpSpPr>
+          <p:grpSpPr>
+            <a:xfrm>
+              <a:off x="5618932" y="1546108"/>
+              <a:ext cx="1540121" cy="2162098"/>
+              <a:chOff x="5452330" y="1708793"/>
+              <a:chExt cx="1186621" cy="1665837"/>
+            </a:xfrm>
+          </p:grpSpPr>
+          <p:sp>
+            <p:nvSpPr>
+              <p:cNvPr id="167" name="Isosceles Triangle 166">
+                <a:extLst>
+                  <a:ext uri="{FF2B5EF4-FFF2-40B4-BE49-F238E27FC236}">
+                    <a16:creationId xmlns:a16="http://schemas.microsoft.com/office/drawing/2014/main" id="{77184497-6B7E-1444-A5CA-EA936053CBE6}"/>
+                  </a:ext>
+                </a:extLst>
+              </p:cNvPr>
+              <p:cNvSpPr/>
+              <p:nvPr/>
+            </p:nvSpPr>
+            <p:spPr>
+              <a:xfrm>
+                <a:off x="5794991" y="1708793"/>
+                <a:ext cx="501300" cy="440002"/>
+              </a:xfrm>
+              <a:prstGeom prst="triangle">
+                <a:avLst/>
+              </a:prstGeom>
+            </p:spPr>
+            <p:style>
+              <a:lnRef idx="2">
+                <a:schemeClr val="dk1">
+                  <a:shade val="50000"/>
+                </a:schemeClr>
+              </a:lnRef>
+              <a:fillRef idx="1">
+                <a:schemeClr val="dk1"/>
+              </a:fillRef>
+              <a:effectRef idx="0">
+                <a:schemeClr val="dk1"/>
+              </a:effectRef>
+              <a:fontRef idx="minor">
+                <a:schemeClr val="lt1"/>
+              </a:fontRef>
+            </p:style>
+            <p:txBody>
+              <a:bodyPr rtlCol="0" anchor="ctr"/>
+              <a:lstStyle/>
+              <a:p>
+                <a:pPr algn="ctr"/>
+                <a:endParaRPr lang="en-US"/>
+              </a:p>
+            </p:txBody>
+          </p:sp>
+          <p:sp>
+            <p:nvSpPr>
+              <p:cNvPr id="168" name="Isosceles Triangle 167">
+                <a:extLst>
+                  <a:ext uri="{FF2B5EF4-FFF2-40B4-BE49-F238E27FC236}">
+                    <a16:creationId xmlns:a16="http://schemas.microsoft.com/office/drawing/2014/main" id="{A485807E-27D8-4D66-1A94-3E2FD526D3EC}"/>
+                  </a:ext>
+                </a:extLst>
+              </p:cNvPr>
+              <p:cNvSpPr/>
+              <p:nvPr/>
+            </p:nvSpPr>
+            <p:spPr>
+              <a:xfrm rot="10800000">
+                <a:off x="5794991" y="2236075"/>
+                <a:ext cx="501300" cy="1138555"/>
+              </a:xfrm>
+              <a:prstGeom prst="triangle">
+                <a:avLst/>
+              </a:prstGeom>
+            </p:spPr>
+            <p:style>
+              <a:lnRef idx="2">
+                <a:schemeClr val="dk1">
+                  <a:shade val="50000"/>
+                </a:schemeClr>
+              </a:lnRef>
+              <a:fillRef idx="1">
+                <a:schemeClr val="dk1"/>
+              </a:fillRef>
+              <a:effectRef idx="0">
+                <a:schemeClr val="dk1"/>
+              </a:effectRef>
+              <a:fontRef idx="minor">
+                <a:schemeClr val="lt1"/>
+              </a:fontRef>
+            </p:style>
+            <p:txBody>
+              <a:bodyPr rtlCol="0" anchor="ctr"/>
+              <a:lstStyle/>
+              <a:p>
+                <a:pPr algn="ctr"/>
+                <a:endParaRPr lang="en-US"/>
+              </a:p>
+            </p:txBody>
+          </p:sp>
+          <p:sp>
+            <p:nvSpPr>
+              <p:cNvPr id="169" name="Rectangle 168">
+                <a:extLst>
+                  <a:ext uri="{FF2B5EF4-FFF2-40B4-BE49-F238E27FC236}">
+                    <a16:creationId xmlns:a16="http://schemas.microsoft.com/office/drawing/2014/main" id="{7FD55D15-2BB7-955F-D820-D4D61FC0CF10}"/>
+                  </a:ext>
+                </a:extLst>
+              </p:cNvPr>
+              <p:cNvSpPr/>
+              <p:nvPr/>
+            </p:nvSpPr>
+            <p:spPr>
+              <a:xfrm rot="1172583">
+                <a:off x="5452330" y="2155246"/>
+                <a:ext cx="161133" cy="711668"/>
+              </a:xfrm>
+              <a:prstGeom prst="rect">
+                <a:avLst/>
+              </a:prstGeom>
+            </p:spPr>
+            <p:style>
+              <a:lnRef idx="2">
+                <a:schemeClr val="dk1">
+                  <a:shade val="50000"/>
+                </a:schemeClr>
+              </a:lnRef>
+              <a:fillRef idx="1">
+                <a:schemeClr val="dk1"/>
+              </a:fillRef>
+              <a:effectRef idx="0">
+                <a:schemeClr val="dk1"/>
+              </a:effectRef>
+              <a:fontRef idx="minor">
+                <a:schemeClr val="lt1"/>
+              </a:fontRef>
+            </p:style>
+            <p:txBody>
+              <a:bodyPr rtlCol="0" anchor="ctr"/>
+              <a:lstStyle/>
+              <a:p>
+                <a:pPr algn="ctr"/>
+                <a:endParaRPr lang="en-US"/>
+              </a:p>
+            </p:txBody>
+          </p:sp>
+          <p:sp>
+            <p:nvSpPr>
+              <p:cNvPr id="170" name="Rectangle 169">
+                <a:extLst>
+                  <a:ext uri="{FF2B5EF4-FFF2-40B4-BE49-F238E27FC236}">
+                    <a16:creationId xmlns:a16="http://schemas.microsoft.com/office/drawing/2014/main" id="{EBCBB169-2CFC-856A-AE60-53A760D9C6BE}"/>
+                  </a:ext>
+                </a:extLst>
+              </p:cNvPr>
+              <p:cNvSpPr/>
+              <p:nvPr/>
+            </p:nvSpPr>
+            <p:spPr>
+              <a:xfrm rot="20427417" flipH="1">
+                <a:off x="6477818" y="2155248"/>
+                <a:ext cx="161133" cy="711668"/>
+              </a:xfrm>
+              <a:prstGeom prst="rect">
+                <a:avLst/>
+              </a:prstGeom>
+            </p:spPr>
+            <p:style>
+              <a:lnRef idx="2">
+                <a:schemeClr val="dk1">
+                  <a:shade val="50000"/>
+                </a:schemeClr>
+              </a:lnRef>
+              <a:fillRef idx="1">
+                <a:schemeClr val="dk1"/>
+              </a:fillRef>
+              <a:effectRef idx="0">
+                <a:schemeClr val="dk1"/>
+              </a:effectRef>
+              <a:fontRef idx="minor">
+                <a:schemeClr val="lt1"/>
+              </a:fontRef>
+            </p:style>
+            <p:txBody>
+              <a:bodyPr rtlCol="0" anchor="ctr"/>
+              <a:lstStyle/>
+              <a:p>
+                <a:pPr algn="ctr"/>
+                <a:endParaRPr lang="en-US"/>
+              </a:p>
+            </p:txBody>
+          </p:sp>
+        </p:grpSp>
+        <p:grpSp>
+          <p:nvGrpSpPr>
+            <p:cNvPr id="147" name="Group 146">
+              <a:extLst>
+                <a:ext uri="{FF2B5EF4-FFF2-40B4-BE49-F238E27FC236}">
+                  <a16:creationId xmlns:a16="http://schemas.microsoft.com/office/drawing/2014/main" id="{64987AF0-3461-5A21-711E-4566429B1A75}"/>
+                </a:ext>
+              </a:extLst>
+            </p:cNvPr>
+            <p:cNvGrpSpPr/>
+            <p:nvPr/>
+          </p:nvGrpSpPr>
+          <p:grpSpPr>
+            <a:xfrm>
+              <a:off x="5223090" y="376316"/>
+              <a:ext cx="2327564" cy="1339103"/>
+              <a:chOff x="5223090" y="758463"/>
+              <a:chExt cx="2327564" cy="1339103"/>
+            </a:xfrm>
+          </p:grpSpPr>
+          <p:pic>
+            <p:nvPicPr>
+              <p:cNvPr id="163" name="Picture 162">
+                <a:extLst>
+                  <a:ext uri="{FF2B5EF4-FFF2-40B4-BE49-F238E27FC236}">
+                    <a16:creationId xmlns:a16="http://schemas.microsoft.com/office/drawing/2014/main" id="{E6E2D24E-9922-BB33-168F-F4B3BA27BAFD}"/>
+                  </a:ext>
+                </a:extLst>
+              </p:cNvPr>
+              <p:cNvPicPr>
+                <a:picLocks noChangeAspect="1"/>
+              </p:cNvPicPr>
+              <p:nvPr/>
+            </p:nvPicPr>
+            <p:blipFill rotWithShape="1">
+              <a:blip r:embed="rId5"/>
+              <a:srcRect l="7265" t="2149" r="2137"/>
+              <a:stretch/>
+            </p:blipFill>
+            <p:spPr>
+              <a:xfrm rot="9499472">
+                <a:off x="5791200" y="758463"/>
+                <a:ext cx="501300" cy="1119886"/>
+              </a:xfrm>
+              <a:prstGeom prst="rect">
+                <a:avLst/>
+              </a:prstGeom>
+            </p:spPr>
+          </p:pic>
+          <p:pic>
+            <p:nvPicPr>
+              <p:cNvPr id="164" name="Picture 163">
+                <a:extLst>
+                  <a:ext uri="{FF2B5EF4-FFF2-40B4-BE49-F238E27FC236}">
+                    <a16:creationId xmlns:a16="http://schemas.microsoft.com/office/drawing/2014/main" id="{8BA8976D-786C-2F00-0C6F-4FD9BA408651}"/>
+                  </a:ext>
+                </a:extLst>
+              </p:cNvPr>
+              <p:cNvPicPr>
+                <a:picLocks noChangeAspect="1"/>
+              </p:cNvPicPr>
+              <p:nvPr/>
+            </p:nvPicPr>
+            <p:blipFill rotWithShape="1">
+              <a:blip r:embed="rId5"/>
+              <a:srcRect l="7265" t="2149" r="2137"/>
+              <a:stretch/>
+            </p:blipFill>
+            <p:spPr>
+              <a:xfrm rot="11335141">
+                <a:off x="6459893" y="776279"/>
+                <a:ext cx="501300" cy="1119886"/>
+              </a:xfrm>
+              <a:prstGeom prst="rect">
+                <a:avLst/>
+              </a:prstGeom>
+            </p:spPr>
+          </p:pic>
+          <p:pic>
+            <p:nvPicPr>
+              <p:cNvPr id="165" name="Picture 164">
+                <a:extLst>
+                  <a:ext uri="{FF2B5EF4-FFF2-40B4-BE49-F238E27FC236}">
+                    <a16:creationId xmlns:a16="http://schemas.microsoft.com/office/drawing/2014/main" id="{D3799764-8805-159B-12EF-6C6C9FAF5A7E}"/>
+                  </a:ext>
+                </a:extLst>
+              </p:cNvPr>
+              <p:cNvPicPr>
+                <a:picLocks noChangeAspect="1"/>
+              </p:cNvPicPr>
+              <p:nvPr/>
+            </p:nvPicPr>
+            <p:blipFill rotWithShape="1">
+              <a:blip r:embed="rId5"/>
+              <a:srcRect l="7265" t="2149" r="2137"/>
+              <a:stretch/>
+            </p:blipFill>
+            <p:spPr>
+              <a:xfrm rot="9323264" flipH="1">
+                <a:off x="5223090" y="977680"/>
+                <a:ext cx="501300" cy="1119886"/>
+              </a:xfrm>
+              <a:prstGeom prst="rect">
+                <a:avLst/>
+              </a:prstGeom>
+            </p:spPr>
+          </p:pic>
+          <p:pic>
+            <p:nvPicPr>
+              <p:cNvPr id="166" name="Picture 165">
+                <a:extLst>
+                  <a:ext uri="{FF2B5EF4-FFF2-40B4-BE49-F238E27FC236}">
+                    <a16:creationId xmlns:a16="http://schemas.microsoft.com/office/drawing/2014/main" id="{85540936-B0B9-39A1-7E20-A5DB9117623A}"/>
+                  </a:ext>
+                </a:extLst>
+              </p:cNvPr>
+              <p:cNvPicPr>
+                <a:picLocks noChangeAspect="1"/>
+              </p:cNvPicPr>
+              <p:nvPr/>
+            </p:nvPicPr>
+            <p:blipFill rotWithShape="1">
+              <a:blip r:embed="rId5"/>
+              <a:srcRect l="7265" t="2149" r="2137"/>
+              <a:stretch/>
+            </p:blipFill>
+            <p:spPr>
+              <a:xfrm rot="13424503" flipH="1">
+                <a:off x="7049354" y="966826"/>
+                <a:ext cx="501300" cy="1119886"/>
+              </a:xfrm>
+              <a:prstGeom prst="rect">
+                <a:avLst/>
+              </a:prstGeom>
+            </p:spPr>
+          </p:pic>
+        </p:grpSp>
+        <p:grpSp>
+          <p:nvGrpSpPr>
+            <p:cNvPr id="148" name="Group 147">
+              <a:extLst>
+                <a:ext uri="{FF2B5EF4-FFF2-40B4-BE49-F238E27FC236}">
+                  <a16:creationId xmlns:a16="http://schemas.microsoft.com/office/drawing/2014/main" id="{AD3D8339-98CF-FF7C-59A6-78E7DCA3BED8}"/>
+                </a:ext>
+              </a:extLst>
+            </p:cNvPr>
+            <p:cNvGrpSpPr/>
+            <p:nvPr/>
+          </p:nvGrpSpPr>
+          <p:grpSpPr>
+            <a:xfrm rot="10800000">
+              <a:off x="5212329" y="3446135"/>
+              <a:ext cx="2327564" cy="1339103"/>
+              <a:chOff x="5223090" y="758463"/>
+              <a:chExt cx="2327564" cy="1339103"/>
+            </a:xfrm>
+          </p:grpSpPr>
+          <p:pic>
+            <p:nvPicPr>
+              <p:cNvPr id="159" name="Picture 158">
+                <a:extLst>
+                  <a:ext uri="{FF2B5EF4-FFF2-40B4-BE49-F238E27FC236}">
+                    <a16:creationId xmlns:a16="http://schemas.microsoft.com/office/drawing/2014/main" id="{9A69E514-2B3E-9F3B-9B10-CBEBF2D7FC71}"/>
+                  </a:ext>
+                </a:extLst>
+              </p:cNvPr>
+              <p:cNvPicPr>
+                <a:picLocks noChangeAspect="1"/>
+              </p:cNvPicPr>
+              <p:nvPr/>
+            </p:nvPicPr>
+            <p:blipFill rotWithShape="1">
+              <a:blip r:embed="rId5"/>
+              <a:srcRect l="7265" t="2149" r="2137"/>
+              <a:stretch/>
+            </p:blipFill>
+            <p:spPr>
+              <a:xfrm rot="9499472">
+                <a:off x="5791200" y="758463"/>
+                <a:ext cx="501300" cy="1119886"/>
+              </a:xfrm>
+              <a:prstGeom prst="rect">
+                <a:avLst/>
+              </a:prstGeom>
+            </p:spPr>
+          </p:pic>
+          <p:pic>
+            <p:nvPicPr>
+              <p:cNvPr id="160" name="Picture 159">
+                <a:extLst>
+                  <a:ext uri="{FF2B5EF4-FFF2-40B4-BE49-F238E27FC236}">
+                    <a16:creationId xmlns:a16="http://schemas.microsoft.com/office/drawing/2014/main" id="{969C04AB-92B7-3D62-580F-2A56B8E905FE}"/>
+                  </a:ext>
+                </a:extLst>
+              </p:cNvPr>
+              <p:cNvPicPr>
+                <a:picLocks noChangeAspect="1"/>
+              </p:cNvPicPr>
+              <p:nvPr/>
+            </p:nvPicPr>
+            <p:blipFill rotWithShape="1">
+              <a:blip r:embed="rId5"/>
+              <a:srcRect l="7265" t="2149" r="2137"/>
+              <a:stretch/>
+            </p:blipFill>
+            <p:spPr>
+              <a:xfrm rot="11335141">
+                <a:off x="6459893" y="776279"/>
+                <a:ext cx="501300" cy="1119886"/>
+              </a:xfrm>
+              <a:prstGeom prst="rect">
+                <a:avLst/>
+              </a:prstGeom>
+            </p:spPr>
+          </p:pic>
+          <p:pic>
+            <p:nvPicPr>
+              <p:cNvPr id="161" name="Picture 160">
+                <a:extLst>
+                  <a:ext uri="{FF2B5EF4-FFF2-40B4-BE49-F238E27FC236}">
+                    <a16:creationId xmlns:a16="http://schemas.microsoft.com/office/drawing/2014/main" id="{08FF41A6-26AA-784D-C07D-A1DA628C17A6}"/>
+                  </a:ext>
+                </a:extLst>
+              </p:cNvPr>
+              <p:cNvPicPr>
+                <a:picLocks noChangeAspect="1"/>
+              </p:cNvPicPr>
+              <p:nvPr/>
+            </p:nvPicPr>
+            <p:blipFill rotWithShape="1">
+              <a:blip r:embed="rId5"/>
+              <a:srcRect l="7265" t="2149" r="2137"/>
+              <a:stretch/>
+            </p:blipFill>
+            <p:spPr>
+              <a:xfrm rot="9323264" flipH="1">
+                <a:off x="5223090" y="977680"/>
+                <a:ext cx="501300" cy="1119886"/>
+              </a:xfrm>
+              <a:prstGeom prst="rect">
+                <a:avLst/>
+              </a:prstGeom>
+            </p:spPr>
+          </p:pic>
+          <p:pic>
+            <p:nvPicPr>
+              <p:cNvPr id="162" name="Picture 161">
+                <a:extLst>
+                  <a:ext uri="{FF2B5EF4-FFF2-40B4-BE49-F238E27FC236}">
+                    <a16:creationId xmlns:a16="http://schemas.microsoft.com/office/drawing/2014/main" id="{DE7FDF25-4BE1-F272-4C1A-4C1860B8BA95}"/>
+                  </a:ext>
+                </a:extLst>
+              </p:cNvPr>
+              <p:cNvPicPr>
+                <a:picLocks noChangeAspect="1"/>
+              </p:cNvPicPr>
+              <p:nvPr/>
+            </p:nvPicPr>
+            <p:blipFill rotWithShape="1">
+              <a:blip r:embed="rId5"/>
+              <a:srcRect l="7265" t="2149" r="2137"/>
+              <a:stretch/>
+            </p:blipFill>
+            <p:spPr>
+              <a:xfrm rot="13424503" flipH="1">
+                <a:off x="7049354" y="966826"/>
+                <a:ext cx="501300" cy="1119886"/>
+              </a:xfrm>
+              <a:prstGeom prst="rect">
+                <a:avLst/>
+              </a:prstGeom>
+            </p:spPr>
+          </p:pic>
+        </p:grpSp>
+        <p:grpSp>
+          <p:nvGrpSpPr>
+            <p:cNvPr id="149" name="Group 148">
+              <a:extLst>
+                <a:ext uri="{FF2B5EF4-FFF2-40B4-BE49-F238E27FC236}">
+                  <a16:creationId xmlns:a16="http://schemas.microsoft.com/office/drawing/2014/main" id="{24F2669A-27A2-B41B-E16D-BAE52A2620ED}"/>
+                </a:ext>
+              </a:extLst>
+            </p:cNvPr>
+            <p:cNvGrpSpPr/>
+            <p:nvPr/>
+          </p:nvGrpSpPr>
+          <p:grpSpPr>
+            <a:xfrm rot="16367590">
+              <a:off x="3671049" y="1904396"/>
+              <a:ext cx="2327564" cy="1339103"/>
+              <a:chOff x="5223090" y="758463"/>
+              <a:chExt cx="2327564" cy="1339103"/>
+            </a:xfrm>
+          </p:grpSpPr>
+          <p:pic>
+            <p:nvPicPr>
+              <p:cNvPr id="155" name="Picture 154">
+                <a:extLst>
+                  <a:ext uri="{FF2B5EF4-FFF2-40B4-BE49-F238E27FC236}">
+                    <a16:creationId xmlns:a16="http://schemas.microsoft.com/office/drawing/2014/main" id="{48A1BEED-2797-183B-02B7-A6C29622C988}"/>
+                  </a:ext>
+                </a:extLst>
+              </p:cNvPr>
+              <p:cNvPicPr>
+                <a:picLocks noChangeAspect="1"/>
+              </p:cNvPicPr>
+              <p:nvPr/>
+            </p:nvPicPr>
+            <p:blipFill rotWithShape="1">
+              <a:blip r:embed="rId5"/>
+              <a:srcRect l="7265" t="2149" r="2137"/>
+              <a:stretch/>
+            </p:blipFill>
+            <p:spPr>
+              <a:xfrm rot="9499472">
+                <a:off x="5791200" y="758463"/>
+                <a:ext cx="501300" cy="1119886"/>
+              </a:xfrm>
+              <a:prstGeom prst="rect">
+                <a:avLst/>
+              </a:prstGeom>
+            </p:spPr>
+          </p:pic>
+          <p:pic>
+            <p:nvPicPr>
+              <p:cNvPr id="156" name="Picture 155">
+                <a:extLst>
+                  <a:ext uri="{FF2B5EF4-FFF2-40B4-BE49-F238E27FC236}">
+                    <a16:creationId xmlns:a16="http://schemas.microsoft.com/office/drawing/2014/main" id="{FCAA1D9B-2BE3-AFB6-C030-984D7845E00B}"/>
+                  </a:ext>
+                </a:extLst>
+              </p:cNvPr>
+              <p:cNvPicPr>
+                <a:picLocks noChangeAspect="1"/>
+              </p:cNvPicPr>
+              <p:nvPr/>
+            </p:nvPicPr>
+            <p:blipFill rotWithShape="1">
+              <a:blip r:embed="rId5"/>
+              <a:srcRect l="7265" t="2149" r="2137"/>
+              <a:stretch/>
+            </p:blipFill>
+            <p:spPr>
+              <a:xfrm rot="11335141">
+                <a:off x="6459893" y="776279"/>
+                <a:ext cx="501300" cy="1119886"/>
+              </a:xfrm>
+              <a:prstGeom prst="rect">
+                <a:avLst/>
+              </a:prstGeom>
+            </p:spPr>
+          </p:pic>
+          <p:pic>
+            <p:nvPicPr>
+              <p:cNvPr id="157" name="Picture 156">
+                <a:extLst>
+                  <a:ext uri="{FF2B5EF4-FFF2-40B4-BE49-F238E27FC236}">
+                    <a16:creationId xmlns:a16="http://schemas.microsoft.com/office/drawing/2014/main" id="{A1C7CBAD-5FD9-D36C-E5BF-62B057C3A0F5}"/>
+                  </a:ext>
+                </a:extLst>
+              </p:cNvPr>
+              <p:cNvPicPr>
+                <a:picLocks noChangeAspect="1"/>
+              </p:cNvPicPr>
+              <p:nvPr/>
+            </p:nvPicPr>
+            <p:blipFill rotWithShape="1">
+              <a:blip r:embed="rId5"/>
+              <a:srcRect l="7265" t="2149" r="2137"/>
+              <a:stretch/>
+            </p:blipFill>
+            <p:spPr>
+              <a:xfrm rot="9323264" flipH="1">
+                <a:off x="5223090" y="977680"/>
+                <a:ext cx="501300" cy="1119886"/>
+              </a:xfrm>
+              <a:prstGeom prst="rect">
+                <a:avLst/>
+              </a:prstGeom>
+            </p:spPr>
+          </p:pic>
+          <p:pic>
+            <p:nvPicPr>
+              <p:cNvPr id="158" name="Picture 157">
+                <a:extLst>
+                  <a:ext uri="{FF2B5EF4-FFF2-40B4-BE49-F238E27FC236}">
+                    <a16:creationId xmlns:a16="http://schemas.microsoft.com/office/drawing/2014/main" id="{3D37B3B9-EF90-D8EA-47A4-5CF6797268D9}"/>
+                  </a:ext>
+                </a:extLst>
+              </p:cNvPr>
+              <p:cNvPicPr>
+                <a:picLocks noChangeAspect="1"/>
+              </p:cNvPicPr>
+              <p:nvPr/>
+            </p:nvPicPr>
+            <p:blipFill rotWithShape="1">
+              <a:blip r:embed="rId5"/>
+              <a:srcRect l="7265" t="2149" r="2137"/>
+              <a:stretch/>
+            </p:blipFill>
+            <p:spPr>
+              <a:xfrm rot="13424503" flipH="1">
+                <a:off x="7049354" y="966826"/>
+                <a:ext cx="501300" cy="1119886"/>
+              </a:xfrm>
+              <a:prstGeom prst="rect">
+                <a:avLst/>
+              </a:prstGeom>
+            </p:spPr>
+          </p:pic>
+        </p:grpSp>
+        <p:grpSp>
+          <p:nvGrpSpPr>
+            <p:cNvPr id="150" name="Group 149">
+              <a:extLst>
+                <a:ext uri="{FF2B5EF4-FFF2-40B4-BE49-F238E27FC236}">
+                  <a16:creationId xmlns:a16="http://schemas.microsoft.com/office/drawing/2014/main" id="{9379E66C-653E-D856-F3DF-A33518A3DCB3}"/>
+                </a:ext>
+              </a:extLst>
+            </p:cNvPr>
+            <p:cNvGrpSpPr/>
+            <p:nvPr/>
+          </p:nvGrpSpPr>
+          <p:grpSpPr>
+            <a:xfrm rot="5400000">
+              <a:off x="6704456" y="2000299"/>
+              <a:ext cx="2327564" cy="1339103"/>
+              <a:chOff x="5223090" y="758463"/>
+              <a:chExt cx="2327564" cy="1339103"/>
+            </a:xfrm>
+          </p:grpSpPr>
+          <p:pic>
+            <p:nvPicPr>
+              <p:cNvPr id="151" name="Picture 150">
+                <a:extLst>
+                  <a:ext uri="{FF2B5EF4-FFF2-40B4-BE49-F238E27FC236}">
+                    <a16:creationId xmlns:a16="http://schemas.microsoft.com/office/drawing/2014/main" id="{89AA0170-CCB4-8528-4C37-16DA2701F131}"/>
+                  </a:ext>
+                </a:extLst>
+              </p:cNvPr>
+              <p:cNvPicPr>
+                <a:picLocks noChangeAspect="1"/>
+              </p:cNvPicPr>
+              <p:nvPr/>
+            </p:nvPicPr>
+            <p:blipFill rotWithShape="1">
+              <a:blip r:embed="rId5"/>
+              <a:srcRect l="7265" t="2149" r="2137"/>
+              <a:stretch/>
+            </p:blipFill>
+            <p:spPr>
+              <a:xfrm rot="9499472">
+                <a:off x="5791200" y="758463"/>
+                <a:ext cx="501300" cy="1119886"/>
+              </a:xfrm>
+              <a:prstGeom prst="rect">
+                <a:avLst/>
+              </a:prstGeom>
+            </p:spPr>
+          </p:pic>
+          <p:pic>
+            <p:nvPicPr>
+              <p:cNvPr id="152" name="Picture 151">
+                <a:extLst>
+                  <a:ext uri="{FF2B5EF4-FFF2-40B4-BE49-F238E27FC236}">
+                    <a16:creationId xmlns:a16="http://schemas.microsoft.com/office/drawing/2014/main" id="{E09E8C20-9267-B79E-DC18-D9C96C8ACDE9}"/>
+                  </a:ext>
+                </a:extLst>
+              </p:cNvPr>
+              <p:cNvPicPr>
+                <a:picLocks noChangeAspect="1"/>
+              </p:cNvPicPr>
+              <p:nvPr/>
+            </p:nvPicPr>
+            <p:blipFill rotWithShape="1">
+              <a:blip r:embed="rId5"/>
+              <a:srcRect l="7265" t="2149" r="2137"/>
+              <a:stretch/>
+            </p:blipFill>
+            <p:spPr>
+              <a:xfrm rot="11335141">
+                <a:off x="6459893" y="776279"/>
+                <a:ext cx="501300" cy="1119886"/>
+              </a:xfrm>
+              <a:prstGeom prst="rect">
+                <a:avLst/>
+              </a:prstGeom>
+            </p:spPr>
+          </p:pic>
+          <p:pic>
+            <p:nvPicPr>
+              <p:cNvPr id="153" name="Picture 152">
+                <a:extLst>
+                  <a:ext uri="{FF2B5EF4-FFF2-40B4-BE49-F238E27FC236}">
+                    <a16:creationId xmlns:a16="http://schemas.microsoft.com/office/drawing/2014/main" id="{DCA90085-B0ED-7C6F-AA98-67586961E22C}"/>
+                  </a:ext>
+                </a:extLst>
+              </p:cNvPr>
+              <p:cNvPicPr>
+                <a:picLocks noChangeAspect="1"/>
+              </p:cNvPicPr>
+              <p:nvPr/>
+            </p:nvPicPr>
+            <p:blipFill rotWithShape="1">
+              <a:blip r:embed="rId5"/>
+              <a:srcRect l="7265" t="2149" r="2137"/>
+              <a:stretch/>
+            </p:blipFill>
+            <p:spPr>
+              <a:xfrm rot="9323264" flipH="1">
+                <a:off x="5223090" y="977680"/>
+                <a:ext cx="501300" cy="1119886"/>
+              </a:xfrm>
+              <a:prstGeom prst="rect">
+                <a:avLst/>
+              </a:prstGeom>
+            </p:spPr>
+          </p:pic>
+          <p:pic>
+            <p:nvPicPr>
+              <p:cNvPr id="154" name="Picture 153">
+                <a:extLst>
+                  <a:ext uri="{FF2B5EF4-FFF2-40B4-BE49-F238E27FC236}">
+                    <a16:creationId xmlns:a16="http://schemas.microsoft.com/office/drawing/2014/main" id="{B57A8535-ECD3-455E-B1E1-AC71B9E2A843}"/>
+                  </a:ext>
+                </a:extLst>
+              </p:cNvPr>
+              <p:cNvPicPr>
+                <a:picLocks noChangeAspect="1"/>
+              </p:cNvPicPr>
+              <p:nvPr/>
+            </p:nvPicPr>
+            <p:blipFill rotWithShape="1">
+              <a:blip r:embed="rId5"/>
+              <a:srcRect l="7265" t="2149" r="2137"/>
+              <a:stretch/>
+            </p:blipFill>
+            <p:spPr>
+              <a:xfrm rot="13424503" flipH="1">
+                <a:off x="7049354" y="966826"/>
+                <a:ext cx="501300" cy="1119886"/>
+              </a:xfrm>
+              <a:prstGeom prst="rect">
+                <a:avLst/>
+              </a:prstGeom>
+            </p:spPr>
+          </p:pic>
+        </p:grpSp>
+      </p:grpSp>
+      <p:grpSp>
+        <p:nvGrpSpPr>
+          <p:cNvPr id="171" name="Group 170">
+            <a:extLst>
+              <a:ext uri="{FF2B5EF4-FFF2-40B4-BE49-F238E27FC236}">
+                <a16:creationId xmlns:a16="http://schemas.microsoft.com/office/drawing/2014/main" id="{51292E69-46B4-6A7D-4379-5C53511BFD90}"/>
+              </a:ext>
+            </a:extLst>
+          </p:cNvPr>
+          <p:cNvGrpSpPr/>
+          <p:nvPr/>
+        </p:nvGrpSpPr>
+        <p:grpSpPr>
+          <a:xfrm>
+            <a:off x="9358175" y="580700"/>
+            <a:ext cx="1371600" cy="1371600"/>
+            <a:chOff x="427081" y="263129"/>
+            <a:chExt cx="1371600" cy="1371600"/>
+          </a:xfrm>
+        </p:grpSpPr>
+        <p:sp>
+          <p:nvSpPr>
+            <p:cNvPr id="172" name="Rectangle 171">
+              <a:extLst>
+                <a:ext uri="{FF2B5EF4-FFF2-40B4-BE49-F238E27FC236}">
+                  <a16:creationId xmlns:a16="http://schemas.microsoft.com/office/drawing/2014/main" id="{F88DE9E8-A6EE-5604-FBE1-A5854BCB701D}"/>
+                </a:ext>
+              </a:extLst>
+            </p:cNvPr>
+            <p:cNvSpPr/>
+            <p:nvPr/>
+          </p:nvSpPr>
+          <p:spPr>
+            <a:xfrm>
+              <a:off x="427081" y="263129"/>
+              <a:ext cx="1371600" cy="1371600"/>
+            </a:xfrm>
+            <a:prstGeom prst="rect">
+              <a:avLst/>
+            </a:prstGeom>
+            <a:noFill/>
+            <a:ln w="76200">
+              <a:solidFill>
+                <a:schemeClr val="tx1"/>
+              </a:solidFill>
+            </a:ln>
+          </p:spPr>
+          <p:style>
+            <a:lnRef idx="2">
+              <a:schemeClr val="accent1">
+                <a:shade val="50000"/>
+              </a:schemeClr>
+            </a:lnRef>
+            <a:fillRef idx="1">
+              <a:schemeClr val="accent1"/>
+            </a:fillRef>
+            <a:effectRef idx="0">
+              <a:schemeClr val="accent1"/>
+            </a:effectRef>
+            <a:fontRef idx="minor">
+              <a:schemeClr val="lt1"/>
+            </a:fontRef>
+          </p:style>
+          <p:txBody>
+            <a:bodyPr rtlCol="0" anchor="ctr"/>
+            <a:lstStyle/>
+            <a:p>
+              <a:pPr algn="ctr"/>
+              <a:endParaRPr lang="en-US"/>
+            </a:p>
+          </p:txBody>
+        </p:sp>
+        <p:sp>
+          <p:nvSpPr>
+            <p:cNvPr id="173" name="Plaque 172">
+              <a:extLst>
+                <a:ext uri="{FF2B5EF4-FFF2-40B4-BE49-F238E27FC236}">
+                  <a16:creationId xmlns:a16="http://schemas.microsoft.com/office/drawing/2014/main" id="{370ADBE4-6701-B452-B189-D65C68DF8CAB}"/>
+                </a:ext>
+              </a:extLst>
+            </p:cNvPr>
+            <p:cNvSpPr/>
+            <p:nvPr/>
+          </p:nvSpPr>
+          <p:spPr>
+            <a:xfrm>
+              <a:off x="573033" y="478473"/>
+              <a:ext cx="1097280" cy="1097280"/>
+            </a:xfrm>
+            <a:prstGeom prst="plaque">
+              <a:avLst/>
+            </a:prstGeom>
+            <a:noFill/>
+            <a:ln w="38100" cap="flat" cmpd="sng" algn="ctr">
+              <a:solidFill>
+                <a:schemeClr val="dk1"/>
+              </a:solidFill>
+              <a:prstDash val="solid"/>
+              <a:round/>
+              <a:headEnd type="none" w="med" len="med"/>
+              <a:tailEnd type="none" w="med" len="med"/>
+            </a:ln>
+          </p:spPr>
+          <p:style>
+            <a:lnRef idx="0">
+              <a:scrgbClr r="0" g="0" b="0"/>
+            </a:lnRef>
+            <a:fillRef idx="0">
+              <a:scrgbClr r="0" g="0" b="0"/>
+            </a:fillRef>
+            <a:effectRef idx="0">
+              <a:scrgbClr r="0" g="0" b="0"/>
+            </a:effectRef>
+            <a:fontRef idx="minor">
+              <a:schemeClr val="dk1"/>
+            </a:fontRef>
+          </p:style>
+          <p:txBody>
+            <a:bodyPr rtlCol="0" anchor="ctr"/>
+            <a:lstStyle/>
+            <a:p>
+              <a:pPr algn="ctr"/>
+              <a:endParaRPr lang="en-US"/>
+            </a:p>
+          </p:txBody>
+        </p:sp>
+      </p:grpSp>
     </p:spTree>
     <p:extLst>
       <p:ext uri="{BB962C8B-B14F-4D97-AF65-F5344CB8AC3E}">

--- a/image process/drawings sifi.pptx
+++ b/image process/drawings sifi.pptx
@@ -200,7 +200,7 @@
           <a:p>
             <a:fld id="{7700C406-2328-4788-AE79-437B6607AD22}" type="datetimeFigureOut">
               <a:rPr lang="en-US" smtClean="0"/>
-              <a:t>6/4/2022</a:t>
+              <a:t>6/6/2022</a:t>
             </a:fld>
             <a:endParaRPr lang="en-US"/>
           </a:p>
@@ -614,7 +614,7 @@
           <a:p>
             <a:fld id="{9EC8CD53-0620-48F2-A3BB-2B10BDA60E52}" type="datetimeFigureOut">
               <a:rPr lang="en-US" smtClean="0"/>
-              <a:t>6/4/2022</a:t>
+              <a:t>6/6/2022</a:t>
             </a:fld>
             <a:endParaRPr lang="en-US"/>
           </a:p>
@@ -812,7 +812,7 @@
           <a:p>
             <a:fld id="{9EC8CD53-0620-48F2-A3BB-2B10BDA60E52}" type="datetimeFigureOut">
               <a:rPr lang="en-US" smtClean="0"/>
-              <a:t>6/4/2022</a:t>
+              <a:t>6/6/2022</a:t>
             </a:fld>
             <a:endParaRPr lang="en-US"/>
           </a:p>
@@ -1020,7 +1020,7 @@
           <a:p>
             <a:fld id="{9EC8CD53-0620-48F2-A3BB-2B10BDA60E52}" type="datetimeFigureOut">
               <a:rPr lang="en-US" smtClean="0"/>
-              <a:t>6/4/2022</a:t>
+              <a:t>6/6/2022</a:t>
             </a:fld>
             <a:endParaRPr lang="en-US"/>
           </a:p>
@@ -1218,7 +1218,7 @@
           <a:p>
             <a:fld id="{9EC8CD53-0620-48F2-A3BB-2B10BDA60E52}" type="datetimeFigureOut">
               <a:rPr lang="en-US" smtClean="0"/>
-              <a:t>6/4/2022</a:t>
+              <a:t>6/6/2022</a:t>
             </a:fld>
             <a:endParaRPr lang="en-US"/>
           </a:p>
@@ -1493,7 +1493,7 @@
           <a:p>
             <a:fld id="{9EC8CD53-0620-48F2-A3BB-2B10BDA60E52}" type="datetimeFigureOut">
               <a:rPr lang="en-US" smtClean="0"/>
-              <a:t>6/4/2022</a:t>
+              <a:t>6/6/2022</a:t>
             </a:fld>
             <a:endParaRPr lang="en-US"/>
           </a:p>
@@ -1758,7 +1758,7 @@
           <a:p>
             <a:fld id="{9EC8CD53-0620-48F2-A3BB-2B10BDA60E52}" type="datetimeFigureOut">
               <a:rPr lang="en-US" smtClean="0"/>
-              <a:t>6/4/2022</a:t>
+              <a:t>6/6/2022</a:t>
             </a:fld>
             <a:endParaRPr lang="en-US"/>
           </a:p>
@@ -2170,7 +2170,7 @@
           <a:p>
             <a:fld id="{9EC8CD53-0620-48F2-A3BB-2B10BDA60E52}" type="datetimeFigureOut">
               <a:rPr lang="en-US" smtClean="0"/>
-              <a:t>6/4/2022</a:t>
+              <a:t>6/6/2022</a:t>
             </a:fld>
             <a:endParaRPr lang="en-US"/>
           </a:p>
@@ -2311,7 +2311,7 @@
           <a:p>
             <a:fld id="{9EC8CD53-0620-48F2-A3BB-2B10BDA60E52}" type="datetimeFigureOut">
               <a:rPr lang="en-US" smtClean="0"/>
-              <a:t>6/4/2022</a:t>
+              <a:t>6/6/2022</a:t>
             </a:fld>
             <a:endParaRPr lang="en-US"/>
           </a:p>
@@ -2424,7 +2424,7 @@
           <a:p>
             <a:fld id="{9EC8CD53-0620-48F2-A3BB-2B10BDA60E52}" type="datetimeFigureOut">
               <a:rPr lang="en-US" smtClean="0"/>
-              <a:t>6/4/2022</a:t>
+              <a:t>6/6/2022</a:t>
             </a:fld>
             <a:endParaRPr lang="en-US"/>
           </a:p>
@@ -2735,7 +2735,7 @@
           <a:p>
             <a:fld id="{9EC8CD53-0620-48F2-A3BB-2B10BDA60E52}" type="datetimeFigureOut">
               <a:rPr lang="en-US" smtClean="0"/>
-              <a:t>6/4/2022</a:t>
+              <a:t>6/6/2022</a:t>
             </a:fld>
             <a:endParaRPr lang="en-US"/>
           </a:p>
@@ -3023,7 +3023,7 @@
           <a:p>
             <a:fld id="{9EC8CD53-0620-48F2-A3BB-2B10BDA60E52}" type="datetimeFigureOut">
               <a:rPr lang="en-US" smtClean="0"/>
-              <a:t>6/4/2022</a:t>
+              <a:t>6/6/2022</a:t>
             </a:fld>
             <a:endParaRPr lang="en-US"/>
           </a:p>
@@ -3264,7 +3264,7 @@
           <a:p>
             <a:fld id="{9EC8CD53-0620-48F2-A3BB-2B10BDA60E52}" type="datetimeFigureOut">
               <a:rPr lang="en-US" smtClean="0"/>
-              <a:t>6/4/2022</a:t>
+              <a:t>6/6/2022</a:t>
             </a:fld>
             <a:endParaRPr lang="en-US"/>
           </a:p>
@@ -17241,810 +17241,6 @@
           <a:chExt cx="0" cy="0"/>
         </a:xfrm>
       </p:grpSpPr>
-      <p:pic>
-        <p:nvPicPr>
-          <p:cNvPr id="28" name="Picture 27">
-            <a:extLst>
-              <a:ext uri="{FF2B5EF4-FFF2-40B4-BE49-F238E27FC236}">
-                <a16:creationId xmlns:a16="http://schemas.microsoft.com/office/drawing/2014/main" id="{611C9ED2-34B1-652C-46AE-EF6035935DD0}"/>
-              </a:ext>
-            </a:extLst>
-          </p:cNvPr>
-          <p:cNvPicPr>
-            <a:picLocks noChangeAspect="1"/>
-          </p:cNvPicPr>
-          <p:nvPr/>
-        </p:nvPicPr>
-        <p:blipFill>
-          <a:blip r:embed="rId2"/>
-          <a:stretch>
-            <a:fillRect/>
-          </a:stretch>
-        </p:blipFill>
-        <p:spPr>
-          <a:xfrm rot="20165155">
-            <a:off x="2293315" y="662456"/>
-            <a:ext cx="551005" cy="906820"/>
-          </a:xfrm>
-          <a:prstGeom prst="rect">
-            <a:avLst/>
-          </a:prstGeom>
-        </p:spPr>
-      </p:pic>
-      <p:grpSp>
-        <p:nvGrpSpPr>
-          <p:cNvPr id="26" name="Group 25">
-            <a:extLst>
-              <a:ext uri="{FF2B5EF4-FFF2-40B4-BE49-F238E27FC236}">
-                <a16:creationId xmlns:a16="http://schemas.microsoft.com/office/drawing/2014/main" id="{E6D5F2B4-CC15-2413-E222-F40E8932B52E}"/>
-              </a:ext>
-            </a:extLst>
-          </p:cNvPr>
-          <p:cNvGrpSpPr/>
-          <p:nvPr/>
-        </p:nvGrpSpPr>
-        <p:grpSpPr>
-          <a:xfrm>
-            <a:off x="608089" y="493952"/>
-            <a:ext cx="1027167" cy="1035721"/>
-            <a:chOff x="4165279" y="376316"/>
-            <a:chExt cx="4372510" cy="4408922"/>
-          </a:xfrm>
-        </p:grpSpPr>
-        <p:grpSp>
-          <p:nvGrpSpPr>
-            <p:cNvPr id="8" name="Group 7">
-              <a:extLst>
-                <a:ext uri="{FF2B5EF4-FFF2-40B4-BE49-F238E27FC236}">
-                  <a16:creationId xmlns:a16="http://schemas.microsoft.com/office/drawing/2014/main" id="{900E8C98-AB38-E16B-E603-41C7A4CC6A24}"/>
-                </a:ext>
-              </a:extLst>
-            </p:cNvPr>
-            <p:cNvGrpSpPr/>
-            <p:nvPr/>
-          </p:nvGrpSpPr>
-          <p:grpSpPr>
-            <a:xfrm>
-              <a:off x="5618932" y="1546108"/>
-              <a:ext cx="1540121" cy="2162098"/>
-              <a:chOff x="5452330" y="1708793"/>
-              <a:chExt cx="1186621" cy="1665837"/>
-            </a:xfrm>
-          </p:grpSpPr>
-          <p:sp>
-            <p:nvSpPr>
-              <p:cNvPr id="2" name="Isosceles Triangle 1">
-                <a:extLst>
-                  <a:ext uri="{FF2B5EF4-FFF2-40B4-BE49-F238E27FC236}">
-                    <a16:creationId xmlns:a16="http://schemas.microsoft.com/office/drawing/2014/main" id="{64834EAC-F76B-ADEA-3CD4-205D2CBC6386}"/>
-                  </a:ext>
-                </a:extLst>
-              </p:cNvPr>
-              <p:cNvSpPr/>
-              <p:nvPr/>
-            </p:nvSpPr>
-            <p:spPr>
-              <a:xfrm>
-                <a:off x="5794991" y="1708793"/>
-                <a:ext cx="501300" cy="440002"/>
-              </a:xfrm>
-              <a:prstGeom prst="triangle">
-                <a:avLst/>
-              </a:prstGeom>
-            </p:spPr>
-            <p:style>
-              <a:lnRef idx="2">
-                <a:schemeClr val="dk1">
-                  <a:shade val="50000"/>
-                </a:schemeClr>
-              </a:lnRef>
-              <a:fillRef idx="1">
-                <a:schemeClr val="dk1"/>
-              </a:fillRef>
-              <a:effectRef idx="0">
-                <a:schemeClr val="dk1"/>
-              </a:effectRef>
-              <a:fontRef idx="minor">
-                <a:schemeClr val="lt1"/>
-              </a:fontRef>
-            </p:style>
-            <p:txBody>
-              <a:bodyPr rtlCol="0" anchor="ctr"/>
-              <a:lstStyle/>
-              <a:p>
-                <a:pPr algn="ctr"/>
-                <a:endParaRPr lang="en-US"/>
-              </a:p>
-            </p:txBody>
-          </p:sp>
-          <p:sp>
-            <p:nvSpPr>
-              <p:cNvPr id="3" name="Isosceles Triangle 2">
-                <a:extLst>
-                  <a:ext uri="{FF2B5EF4-FFF2-40B4-BE49-F238E27FC236}">
-                    <a16:creationId xmlns:a16="http://schemas.microsoft.com/office/drawing/2014/main" id="{6AA7D6DD-0D31-13D6-8AA1-5DE532DB6F3D}"/>
-                  </a:ext>
-                </a:extLst>
-              </p:cNvPr>
-              <p:cNvSpPr/>
-              <p:nvPr/>
-            </p:nvSpPr>
-            <p:spPr>
-              <a:xfrm rot="10800000">
-                <a:off x="5794991" y="2236075"/>
-                <a:ext cx="501300" cy="1138555"/>
-              </a:xfrm>
-              <a:prstGeom prst="triangle">
-                <a:avLst/>
-              </a:prstGeom>
-            </p:spPr>
-            <p:style>
-              <a:lnRef idx="2">
-                <a:schemeClr val="dk1">
-                  <a:shade val="50000"/>
-                </a:schemeClr>
-              </a:lnRef>
-              <a:fillRef idx="1">
-                <a:schemeClr val="dk1"/>
-              </a:fillRef>
-              <a:effectRef idx="0">
-                <a:schemeClr val="dk1"/>
-              </a:effectRef>
-              <a:fontRef idx="minor">
-                <a:schemeClr val="lt1"/>
-              </a:fontRef>
-            </p:style>
-            <p:txBody>
-              <a:bodyPr rtlCol="0" anchor="ctr"/>
-              <a:lstStyle/>
-              <a:p>
-                <a:pPr algn="ctr"/>
-                <a:endParaRPr lang="en-US"/>
-              </a:p>
-            </p:txBody>
-          </p:sp>
-          <p:sp>
-            <p:nvSpPr>
-              <p:cNvPr id="4" name="Rectangle 3">
-                <a:extLst>
-                  <a:ext uri="{FF2B5EF4-FFF2-40B4-BE49-F238E27FC236}">
-                    <a16:creationId xmlns:a16="http://schemas.microsoft.com/office/drawing/2014/main" id="{05E4FBE9-446A-A891-35DC-490EF5253060}"/>
-                  </a:ext>
-                </a:extLst>
-              </p:cNvPr>
-              <p:cNvSpPr/>
-              <p:nvPr/>
-            </p:nvSpPr>
-            <p:spPr>
-              <a:xfrm rot="1172583">
-                <a:off x="5452330" y="2155246"/>
-                <a:ext cx="161133" cy="711668"/>
-              </a:xfrm>
-              <a:prstGeom prst="rect">
-                <a:avLst/>
-              </a:prstGeom>
-            </p:spPr>
-            <p:style>
-              <a:lnRef idx="2">
-                <a:schemeClr val="dk1">
-                  <a:shade val="50000"/>
-                </a:schemeClr>
-              </a:lnRef>
-              <a:fillRef idx="1">
-                <a:schemeClr val="dk1"/>
-              </a:fillRef>
-              <a:effectRef idx="0">
-                <a:schemeClr val="dk1"/>
-              </a:effectRef>
-              <a:fontRef idx="minor">
-                <a:schemeClr val="lt1"/>
-              </a:fontRef>
-            </p:style>
-            <p:txBody>
-              <a:bodyPr rtlCol="0" anchor="ctr"/>
-              <a:lstStyle/>
-              <a:p>
-                <a:pPr algn="ctr"/>
-                <a:endParaRPr lang="en-US"/>
-              </a:p>
-            </p:txBody>
-          </p:sp>
-          <p:sp>
-            <p:nvSpPr>
-              <p:cNvPr id="54" name="Rectangle 53">
-                <a:extLst>
-                  <a:ext uri="{FF2B5EF4-FFF2-40B4-BE49-F238E27FC236}">
-                    <a16:creationId xmlns:a16="http://schemas.microsoft.com/office/drawing/2014/main" id="{14509484-877F-4AC3-2064-FAE3DA3BFD62}"/>
-                  </a:ext>
-                </a:extLst>
-              </p:cNvPr>
-              <p:cNvSpPr/>
-              <p:nvPr/>
-            </p:nvSpPr>
-            <p:spPr>
-              <a:xfrm rot="20427417" flipH="1">
-                <a:off x="6477818" y="2155248"/>
-                <a:ext cx="161133" cy="711668"/>
-              </a:xfrm>
-              <a:prstGeom prst="rect">
-                <a:avLst/>
-              </a:prstGeom>
-            </p:spPr>
-            <p:style>
-              <a:lnRef idx="2">
-                <a:schemeClr val="dk1">
-                  <a:shade val="50000"/>
-                </a:schemeClr>
-              </a:lnRef>
-              <a:fillRef idx="1">
-                <a:schemeClr val="dk1"/>
-              </a:fillRef>
-              <a:effectRef idx="0">
-                <a:schemeClr val="dk1"/>
-              </a:effectRef>
-              <a:fontRef idx="minor">
-                <a:schemeClr val="lt1"/>
-              </a:fontRef>
-            </p:style>
-            <p:txBody>
-              <a:bodyPr rtlCol="0" anchor="ctr"/>
-              <a:lstStyle/>
-              <a:p>
-                <a:pPr algn="ctr"/>
-                <a:endParaRPr lang="en-US"/>
-              </a:p>
-            </p:txBody>
-          </p:sp>
-        </p:grpSp>
-        <p:grpSp>
-          <p:nvGrpSpPr>
-            <p:cNvPr id="25" name="Group 24">
-              <a:extLst>
-                <a:ext uri="{FF2B5EF4-FFF2-40B4-BE49-F238E27FC236}">
-                  <a16:creationId xmlns:a16="http://schemas.microsoft.com/office/drawing/2014/main" id="{CC6A0B7A-C9DA-21AE-0EA2-662956AA2572}"/>
-                </a:ext>
-              </a:extLst>
-            </p:cNvPr>
-            <p:cNvGrpSpPr/>
-            <p:nvPr/>
-          </p:nvGrpSpPr>
-          <p:grpSpPr>
-            <a:xfrm>
-              <a:off x="5223090" y="376316"/>
-              <a:ext cx="2327564" cy="1339103"/>
-              <a:chOff x="5223090" y="758463"/>
-              <a:chExt cx="2327564" cy="1339103"/>
-            </a:xfrm>
-          </p:grpSpPr>
-          <p:pic>
-            <p:nvPicPr>
-              <p:cNvPr id="23" name="Picture 22">
-                <a:extLst>
-                  <a:ext uri="{FF2B5EF4-FFF2-40B4-BE49-F238E27FC236}">
-                    <a16:creationId xmlns:a16="http://schemas.microsoft.com/office/drawing/2014/main" id="{6C4E511F-2CE1-6C42-C5DF-0CF42D13AAF1}"/>
-                  </a:ext>
-                </a:extLst>
-              </p:cNvPr>
-              <p:cNvPicPr>
-                <a:picLocks noChangeAspect="1"/>
-              </p:cNvPicPr>
-              <p:nvPr/>
-            </p:nvPicPr>
-            <p:blipFill rotWithShape="1">
-              <a:blip r:embed="rId3"/>
-              <a:srcRect l="7265" t="2149" r="2137"/>
-              <a:stretch/>
-            </p:blipFill>
-            <p:spPr>
-              <a:xfrm rot="9499472">
-                <a:off x="5791200" y="758463"/>
-                <a:ext cx="501300" cy="1119886"/>
-              </a:xfrm>
-              <a:prstGeom prst="rect">
-                <a:avLst/>
-              </a:prstGeom>
-            </p:spPr>
-          </p:pic>
-          <p:pic>
-            <p:nvPicPr>
-              <p:cNvPr id="76" name="Picture 75">
-                <a:extLst>
-                  <a:ext uri="{FF2B5EF4-FFF2-40B4-BE49-F238E27FC236}">
-                    <a16:creationId xmlns:a16="http://schemas.microsoft.com/office/drawing/2014/main" id="{F4985C61-0B7A-DD00-D291-D2A339C87F78}"/>
-                  </a:ext>
-                </a:extLst>
-              </p:cNvPr>
-              <p:cNvPicPr>
-                <a:picLocks noChangeAspect="1"/>
-              </p:cNvPicPr>
-              <p:nvPr/>
-            </p:nvPicPr>
-            <p:blipFill rotWithShape="1">
-              <a:blip r:embed="rId3"/>
-              <a:srcRect l="7265" t="2149" r="2137"/>
-              <a:stretch/>
-            </p:blipFill>
-            <p:spPr>
-              <a:xfrm rot="11335141">
-                <a:off x="6459893" y="776279"/>
-                <a:ext cx="501300" cy="1119886"/>
-              </a:xfrm>
-              <a:prstGeom prst="rect">
-                <a:avLst/>
-              </a:prstGeom>
-            </p:spPr>
-          </p:pic>
-          <p:pic>
-            <p:nvPicPr>
-              <p:cNvPr id="77" name="Picture 76">
-                <a:extLst>
-                  <a:ext uri="{FF2B5EF4-FFF2-40B4-BE49-F238E27FC236}">
-                    <a16:creationId xmlns:a16="http://schemas.microsoft.com/office/drawing/2014/main" id="{01C3493D-A7F6-7A3C-562A-7944049AB6F6}"/>
-                  </a:ext>
-                </a:extLst>
-              </p:cNvPr>
-              <p:cNvPicPr>
-                <a:picLocks noChangeAspect="1"/>
-              </p:cNvPicPr>
-              <p:nvPr/>
-            </p:nvPicPr>
-            <p:blipFill rotWithShape="1">
-              <a:blip r:embed="rId3"/>
-              <a:srcRect l="7265" t="2149" r="2137"/>
-              <a:stretch/>
-            </p:blipFill>
-            <p:spPr>
-              <a:xfrm rot="9323264" flipH="1">
-                <a:off x="5223090" y="977680"/>
-                <a:ext cx="501300" cy="1119886"/>
-              </a:xfrm>
-              <a:prstGeom prst="rect">
-                <a:avLst/>
-              </a:prstGeom>
-            </p:spPr>
-          </p:pic>
-          <p:pic>
-            <p:nvPicPr>
-              <p:cNvPr id="78" name="Picture 77">
-                <a:extLst>
-                  <a:ext uri="{FF2B5EF4-FFF2-40B4-BE49-F238E27FC236}">
-                    <a16:creationId xmlns:a16="http://schemas.microsoft.com/office/drawing/2014/main" id="{A371ADE2-AB8E-450C-C726-0BFE20FA3A2E}"/>
-                  </a:ext>
-                </a:extLst>
-              </p:cNvPr>
-              <p:cNvPicPr>
-                <a:picLocks noChangeAspect="1"/>
-              </p:cNvPicPr>
-              <p:nvPr/>
-            </p:nvPicPr>
-            <p:blipFill rotWithShape="1">
-              <a:blip r:embed="rId3"/>
-              <a:srcRect l="7265" t="2149" r="2137"/>
-              <a:stretch/>
-            </p:blipFill>
-            <p:spPr>
-              <a:xfrm rot="13424503" flipH="1">
-                <a:off x="7049354" y="966826"/>
-                <a:ext cx="501300" cy="1119886"/>
-              </a:xfrm>
-              <a:prstGeom prst="rect">
-                <a:avLst/>
-              </a:prstGeom>
-            </p:spPr>
-          </p:pic>
-        </p:grpSp>
-        <p:grpSp>
-          <p:nvGrpSpPr>
-            <p:cNvPr id="79" name="Group 78">
-              <a:extLst>
-                <a:ext uri="{FF2B5EF4-FFF2-40B4-BE49-F238E27FC236}">
-                  <a16:creationId xmlns:a16="http://schemas.microsoft.com/office/drawing/2014/main" id="{BCDCAAAD-9B8E-CA71-0085-48CF26E405D8}"/>
-                </a:ext>
-              </a:extLst>
-            </p:cNvPr>
-            <p:cNvGrpSpPr/>
-            <p:nvPr/>
-          </p:nvGrpSpPr>
-          <p:grpSpPr>
-            <a:xfrm rot="10800000">
-              <a:off x="5212329" y="3446135"/>
-              <a:ext cx="2327564" cy="1339103"/>
-              <a:chOff x="5223090" y="758463"/>
-              <a:chExt cx="2327564" cy="1339103"/>
-            </a:xfrm>
-          </p:grpSpPr>
-          <p:pic>
-            <p:nvPicPr>
-              <p:cNvPr id="80" name="Picture 79">
-                <a:extLst>
-                  <a:ext uri="{FF2B5EF4-FFF2-40B4-BE49-F238E27FC236}">
-                    <a16:creationId xmlns:a16="http://schemas.microsoft.com/office/drawing/2014/main" id="{5742BE29-CEBF-34A9-715C-44003FAF2AF9}"/>
-                  </a:ext>
-                </a:extLst>
-              </p:cNvPr>
-              <p:cNvPicPr>
-                <a:picLocks noChangeAspect="1"/>
-              </p:cNvPicPr>
-              <p:nvPr/>
-            </p:nvPicPr>
-            <p:blipFill rotWithShape="1">
-              <a:blip r:embed="rId3"/>
-              <a:srcRect l="7265" t="2149" r="2137"/>
-              <a:stretch/>
-            </p:blipFill>
-            <p:spPr>
-              <a:xfrm rot="9499472">
-                <a:off x="5791200" y="758463"/>
-                <a:ext cx="501300" cy="1119886"/>
-              </a:xfrm>
-              <a:prstGeom prst="rect">
-                <a:avLst/>
-              </a:prstGeom>
-            </p:spPr>
-          </p:pic>
-          <p:pic>
-            <p:nvPicPr>
-              <p:cNvPr id="81" name="Picture 80">
-                <a:extLst>
-                  <a:ext uri="{FF2B5EF4-FFF2-40B4-BE49-F238E27FC236}">
-                    <a16:creationId xmlns:a16="http://schemas.microsoft.com/office/drawing/2014/main" id="{EBF05BCA-59FD-E14C-25C9-ABFF697BB194}"/>
-                  </a:ext>
-                </a:extLst>
-              </p:cNvPr>
-              <p:cNvPicPr>
-                <a:picLocks noChangeAspect="1"/>
-              </p:cNvPicPr>
-              <p:nvPr/>
-            </p:nvPicPr>
-            <p:blipFill rotWithShape="1">
-              <a:blip r:embed="rId3"/>
-              <a:srcRect l="7265" t="2149" r="2137"/>
-              <a:stretch/>
-            </p:blipFill>
-            <p:spPr>
-              <a:xfrm rot="11335141">
-                <a:off x="6459893" y="776279"/>
-                <a:ext cx="501300" cy="1119886"/>
-              </a:xfrm>
-              <a:prstGeom prst="rect">
-                <a:avLst/>
-              </a:prstGeom>
-            </p:spPr>
-          </p:pic>
-          <p:pic>
-            <p:nvPicPr>
-              <p:cNvPr id="82" name="Picture 81">
-                <a:extLst>
-                  <a:ext uri="{FF2B5EF4-FFF2-40B4-BE49-F238E27FC236}">
-                    <a16:creationId xmlns:a16="http://schemas.microsoft.com/office/drawing/2014/main" id="{9EB53265-F1D0-58A5-73B0-6D94B5905AF2}"/>
-                  </a:ext>
-                </a:extLst>
-              </p:cNvPr>
-              <p:cNvPicPr>
-                <a:picLocks noChangeAspect="1"/>
-              </p:cNvPicPr>
-              <p:nvPr/>
-            </p:nvPicPr>
-            <p:blipFill rotWithShape="1">
-              <a:blip r:embed="rId3"/>
-              <a:srcRect l="7265" t="2149" r="2137"/>
-              <a:stretch/>
-            </p:blipFill>
-            <p:spPr>
-              <a:xfrm rot="9323264" flipH="1">
-                <a:off x="5223090" y="977680"/>
-                <a:ext cx="501300" cy="1119886"/>
-              </a:xfrm>
-              <a:prstGeom prst="rect">
-                <a:avLst/>
-              </a:prstGeom>
-            </p:spPr>
-          </p:pic>
-          <p:pic>
-            <p:nvPicPr>
-              <p:cNvPr id="83" name="Picture 82">
-                <a:extLst>
-                  <a:ext uri="{FF2B5EF4-FFF2-40B4-BE49-F238E27FC236}">
-                    <a16:creationId xmlns:a16="http://schemas.microsoft.com/office/drawing/2014/main" id="{680E964E-CEE1-1EFF-5185-C0B4782BC12F}"/>
-                  </a:ext>
-                </a:extLst>
-              </p:cNvPr>
-              <p:cNvPicPr>
-                <a:picLocks noChangeAspect="1"/>
-              </p:cNvPicPr>
-              <p:nvPr/>
-            </p:nvPicPr>
-            <p:blipFill rotWithShape="1">
-              <a:blip r:embed="rId3"/>
-              <a:srcRect l="7265" t="2149" r="2137"/>
-              <a:stretch/>
-            </p:blipFill>
-            <p:spPr>
-              <a:xfrm rot="13424503" flipH="1">
-                <a:off x="7049354" y="966826"/>
-                <a:ext cx="501300" cy="1119886"/>
-              </a:xfrm>
-              <a:prstGeom prst="rect">
-                <a:avLst/>
-              </a:prstGeom>
-            </p:spPr>
-          </p:pic>
-        </p:grpSp>
-        <p:grpSp>
-          <p:nvGrpSpPr>
-            <p:cNvPr id="84" name="Group 83">
-              <a:extLst>
-                <a:ext uri="{FF2B5EF4-FFF2-40B4-BE49-F238E27FC236}">
-                  <a16:creationId xmlns:a16="http://schemas.microsoft.com/office/drawing/2014/main" id="{FA22BA67-F0E7-33B1-9C63-A4BB9E5B0831}"/>
-                </a:ext>
-              </a:extLst>
-            </p:cNvPr>
-            <p:cNvGrpSpPr/>
-            <p:nvPr/>
-          </p:nvGrpSpPr>
-          <p:grpSpPr>
-            <a:xfrm rot="16367590">
-              <a:off x="3671049" y="1904396"/>
-              <a:ext cx="2327564" cy="1339103"/>
-              <a:chOff x="5223090" y="758463"/>
-              <a:chExt cx="2327564" cy="1339103"/>
-            </a:xfrm>
-          </p:grpSpPr>
-          <p:pic>
-            <p:nvPicPr>
-              <p:cNvPr id="85" name="Picture 84">
-                <a:extLst>
-                  <a:ext uri="{FF2B5EF4-FFF2-40B4-BE49-F238E27FC236}">
-                    <a16:creationId xmlns:a16="http://schemas.microsoft.com/office/drawing/2014/main" id="{4C16ACBF-B81A-6C1A-16F3-B566ABD3E759}"/>
-                  </a:ext>
-                </a:extLst>
-              </p:cNvPr>
-              <p:cNvPicPr>
-                <a:picLocks noChangeAspect="1"/>
-              </p:cNvPicPr>
-              <p:nvPr/>
-            </p:nvPicPr>
-            <p:blipFill rotWithShape="1">
-              <a:blip r:embed="rId3"/>
-              <a:srcRect l="7265" t="2149" r="2137"/>
-              <a:stretch/>
-            </p:blipFill>
-            <p:spPr>
-              <a:xfrm rot="9499472">
-                <a:off x="5791200" y="758463"/>
-                <a:ext cx="501300" cy="1119886"/>
-              </a:xfrm>
-              <a:prstGeom prst="rect">
-                <a:avLst/>
-              </a:prstGeom>
-            </p:spPr>
-          </p:pic>
-          <p:pic>
-            <p:nvPicPr>
-              <p:cNvPr id="86" name="Picture 85">
-                <a:extLst>
-                  <a:ext uri="{FF2B5EF4-FFF2-40B4-BE49-F238E27FC236}">
-                    <a16:creationId xmlns:a16="http://schemas.microsoft.com/office/drawing/2014/main" id="{AA831C4D-C844-073B-90BD-EAC348AE5FE1}"/>
-                  </a:ext>
-                </a:extLst>
-              </p:cNvPr>
-              <p:cNvPicPr>
-                <a:picLocks noChangeAspect="1"/>
-              </p:cNvPicPr>
-              <p:nvPr/>
-            </p:nvPicPr>
-            <p:blipFill rotWithShape="1">
-              <a:blip r:embed="rId3"/>
-              <a:srcRect l="7265" t="2149" r="2137"/>
-              <a:stretch/>
-            </p:blipFill>
-            <p:spPr>
-              <a:xfrm rot="11335141">
-                <a:off x="6459893" y="776279"/>
-                <a:ext cx="501300" cy="1119886"/>
-              </a:xfrm>
-              <a:prstGeom prst="rect">
-                <a:avLst/>
-              </a:prstGeom>
-            </p:spPr>
-          </p:pic>
-          <p:pic>
-            <p:nvPicPr>
-              <p:cNvPr id="87" name="Picture 86">
-                <a:extLst>
-                  <a:ext uri="{FF2B5EF4-FFF2-40B4-BE49-F238E27FC236}">
-                    <a16:creationId xmlns:a16="http://schemas.microsoft.com/office/drawing/2014/main" id="{330FE7B5-2CBD-164D-648F-9AFDB5E2DDC3}"/>
-                  </a:ext>
-                </a:extLst>
-              </p:cNvPr>
-              <p:cNvPicPr>
-                <a:picLocks noChangeAspect="1"/>
-              </p:cNvPicPr>
-              <p:nvPr/>
-            </p:nvPicPr>
-            <p:blipFill rotWithShape="1">
-              <a:blip r:embed="rId3"/>
-              <a:srcRect l="7265" t="2149" r="2137"/>
-              <a:stretch/>
-            </p:blipFill>
-            <p:spPr>
-              <a:xfrm rot="9323264" flipH="1">
-                <a:off x="5223090" y="977680"/>
-                <a:ext cx="501300" cy="1119886"/>
-              </a:xfrm>
-              <a:prstGeom prst="rect">
-                <a:avLst/>
-              </a:prstGeom>
-            </p:spPr>
-          </p:pic>
-          <p:pic>
-            <p:nvPicPr>
-              <p:cNvPr id="88" name="Picture 87">
-                <a:extLst>
-                  <a:ext uri="{FF2B5EF4-FFF2-40B4-BE49-F238E27FC236}">
-                    <a16:creationId xmlns:a16="http://schemas.microsoft.com/office/drawing/2014/main" id="{9D840451-CF6B-5B63-AE0E-D6A19467266D}"/>
-                  </a:ext>
-                </a:extLst>
-              </p:cNvPr>
-              <p:cNvPicPr>
-                <a:picLocks noChangeAspect="1"/>
-              </p:cNvPicPr>
-              <p:nvPr/>
-            </p:nvPicPr>
-            <p:blipFill rotWithShape="1">
-              <a:blip r:embed="rId3"/>
-              <a:srcRect l="7265" t="2149" r="2137"/>
-              <a:stretch/>
-            </p:blipFill>
-            <p:spPr>
-              <a:xfrm rot="13424503" flipH="1">
-                <a:off x="7049354" y="966826"/>
-                <a:ext cx="501300" cy="1119886"/>
-              </a:xfrm>
-              <a:prstGeom prst="rect">
-                <a:avLst/>
-              </a:prstGeom>
-            </p:spPr>
-          </p:pic>
-        </p:grpSp>
-        <p:grpSp>
-          <p:nvGrpSpPr>
-            <p:cNvPr id="89" name="Group 88">
-              <a:extLst>
-                <a:ext uri="{FF2B5EF4-FFF2-40B4-BE49-F238E27FC236}">
-                  <a16:creationId xmlns:a16="http://schemas.microsoft.com/office/drawing/2014/main" id="{FEF045B2-0948-65B1-3362-7DB766FFBBE7}"/>
-                </a:ext>
-              </a:extLst>
-            </p:cNvPr>
-            <p:cNvGrpSpPr/>
-            <p:nvPr/>
-          </p:nvGrpSpPr>
-          <p:grpSpPr>
-            <a:xfrm rot="5400000">
-              <a:off x="6704456" y="2000299"/>
-              <a:ext cx="2327564" cy="1339103"/>
-              <a:chOff x="5223090" y="758463"/>
-              <a:chExt cx="2327564" cy="1339103"/>
-            </a:xfrm>
-          </p:grpSpPr>
-          <p:pic>
-            <p:nvPicPr>
-              <p:cNvPr id="90" name="Picture 89">
-                <a:extLst>
-                  <a:ext uri="{FF2B5EF4-FFF2-40B4-BE49-F238E27FC236}">
-                    <a16:creationId xmlns:a16="http://schemas.microsoft.com/office/drawing/2014/main" id="{F04C856E-A956-D0A5-EDBC-8D14833F86DC}"/>
-                  </a:ext>
-                </a:extLst>
-              </p:cNvPr>
-              <p:cNvPicPr>
-                <a:picLocks noChangeAspect="1"/>
-              </p:cNvPicPr>
-              <p:nvPr/>
-            </p:nvPicPr>
-            <p:blipFill rotWithShape="1">
-              <a:blip r:embed="rId3"/>
-              <a:srcRect l="7265" t="2149" r="2137"/>
-              <a:stretch/>
-            </p:blipFill>
-            <p:spPr>
-              <a:xfrm rot="9499472">
-                <a:off x="5791200" y="758463"/>
-                <a:ext cx="501300" cy="1119886"/>
-              </a:xfrm>
-              <a:prstGeom prst="rect">
-                <a:avLst/>
-              </a:prstGeom>
-            </p:spPr>
-          </p:pic>
-          <p:pic>
-            <p:nvPicPr>
-              <p:cNvPr id="91" name="Picture 90">
-                <a:extLst>
-                  <a:ext uri="{FF2B5EF4-FFF2-40B4-BE49-F238E27FC236}">
-                    <a16:creationId xmlns:a16="http://schemas.microsoft.com/office/drawing/2014/main" id="{7363800B-F2BB-4F5F-FE92-1CFB48C58F42}"/>
-                  </a:ext>
-                </a:extLst>
-              </p:cNvPr>
-              <p:cNvPicPr>
-                <a:picLocks noChangeAspect="1"/>
-              </p:cNvPicPr>
-              <p:nvPr/>
-            </p:nvPicPr>
-            <p:blipFill rotWithShape="1">
-              <a:blip r:embed="rId3"/>
-              <a:srcRect l="7265" t="2149" r="2137"/>
-              <a:stretch/>
-            </p:blipFill>
-            <p:spPr>
-              <a:xfrm rot="11335141">
-                <a:off x="6459893" y="776279"/>
-                <a:ext cx="501300" cy="1119886"/>
-              </a:xfrm>
-              <a:prstGeom prst="rect">
-                <a:avLst/>
-              </a:prstGeom>
-            </p:spPr>
-          </p:pic>
-          <p:pic>
-            <p:nvPicPr>
-              <p:cNvPr id="92" name="Picture 91">
-                <a:extLst>
-                  <a:ext uri="{FF2B5EF4-FFF2-40B4-BE49-F238E27FC236}">
-                    <a16:creationId xmlns:a16="http://schemas.microsoft.com/office/drawing/2014/main" id="{1AD0E70B-066F-9828-19B3-5877D64FA2F6}"/>
-                  </a:ext>
-                </a:extLst>
-              </p:cNvPr>
-              <p:cNvPicPr>
-                <a:picLocks noChangeAspect="1"/>
-              </p:cNvPicPr>
-              <p:nvPr/>
-            </p:nvPicPr>
-            <p:blipFill rotWithShape="1">
-              <a:blip r:embed="rId3"/>
-              <a:srcRect l="7265" t="2149" r="2137"/>
-              <a:stretch/>
-            </p:blipFill>
-            <p:spPr>
-              <a:xfrm rot="9323264" flipH="1">
-                <a:off x="5223090" y="977680"/>
-                <a:ext cx="501300" cy="1119886"/>
-              </a:xfrm>
-              <a:prstGeom prst="rect">
-                <a:avLst/>
-              </a:prstGeom>
-            </p:spPr>
-          </p:pic>
-          <p:pic>
-            <p:nvPicPr>
-              <p:cNvPr id="93" name="Picture 92">
-                <a:extLst>
-                  <a:ext uri="{FF2B5EF4-FFF2-40B4-BE49-F238E27FC236}">
-                    <a16:creationId xmlns:a16="http://schemas.microsoft.com/office/drawing/2014/main" id="{77EA80CC-02E2-AA59-B36E-6C332D55C1F1}"/>
-                  </a:ext>
-                </a:extLst>
-              </p:cNvPr>
-              <p:cNvPicPr>
-                <a:picLocks noChangeAspect="1"/>
-              </p:cNvPicPr>
-              <p:nvPr/>
-            </p:nvPicPr>
-            <p:blipFill rotWithShape="1">
-              <a:blip r:embed="rId3"/>
-              <a:srcRect l="7265" t="2149" r="2137"/>
-              <a:stretch/>
-            </p:blipFill>
-            <p:spPr>
-              <a:xfrm rot="13424503" flipH="1">
-                <a:off x="7049354" y="966826"/>
-                <a:ext cx="501300" cy="1119886"/>
-              </a:xfrm>
-              <a:prstGeom prst="rect">
-                <a:avLst/>
-              </a:prstGeom>
-            </p:spPr>
-          </p:pic>
-        </p:grpSp>
-      </p:grpSp>
       <p:grpSp>
         <p:nvGrpSpPr>
           <p:cNvPr id="13" name="Group 12">
@@ -18186,7 +17382,7 @@
         </p:nvGrpSpPr>
         <p:grpSpPr>
           <a:xfrm>
-            <a:off x="1944633" y="278608"/>
+            <a:off x="3766985" y="263129"/>
             <a:ext cx="1371600" cy="1371600"/>
             <a:chOff x="427081" y="263129"/>
             <a:chExt cx="1371600" cy="1371600"/>
@@ -18284,6 +17480,1363 @@
             </a:fillRef>
             <a:effectRef idx="0">
               <a:scrgbClr r="0" g="0" b="0"/>
+            </a:effectRef>
+            <a:fontRef idx="minor">
+              <a:schemeClr val="dk1"/>
+            </a:fontRef>
+          </p:style>
+          <p:txBody>
+            <a:bodyPr rtlCol="0" anchor="ctr"/>
+            <a:lstStyle/>
+            <a:p>
+              <a:pPr algn="ctr"/>
+              <a:endParaRPr lang="en-US"/>
+            </a:p>
+          </p:txBody>
+        </p:sp>
+      </p:grpSp>
+      <p:grpSp>
+        <p:nvGrpSpPr>
+          <p:cNvPr id="35" name="Group 34">
+            <a:extLst>
+              <a:ext uri="{FF2B5EF4-FFF2-40B4-BE49-F238E27FC236}">
+                <a16:creationId xmlns:a16="http://schemas.microsoft.com/office/drawing/2014/main" id="{F985A505-5ACA-9E14-43B5-58A564CE814A}"/>
+              </a:ext>
+            </a:extLst>
+          </p:cNvPr>
+          <p:cNvGrpSpPr/>
+          <p:nvPr/>
+        </p:nvGrpSpPr>
+        <p:grpSpPr>
+          <a:xfrm>
+            <a:off x="2101497" y="263314"/>
+            <a:ext cx="1371600" cy="1371600"/>
+            <a:chOff x="427081" y="263129"/>
+            <a:chExt cx="1371600" cy="1371600"/>
+          </a:xfrm>
+        </p:grpSpPr>
+        <p:sp>
+          <p:nvSpPr>
+            <p:cNvPr id="36" name="Rectangle 35">
+              <a:extLst>
+                <a:ext uri="{FF2B5EF4-FFF2-40B4-BE49-F238E27FC236}">
+                  <a16:creationId xmlns:a16="http://schemas.microsoft.com/office/drawing/2014/main" id="{09D05DF3-DD40-1AEB-7D57-D5E4C724C096}"/>
+                </a:ext>
+              </a:extLst>
+            </p:cNvPr>
+            <p:cNvSpPr/>
+            <p:nvPr/>
+          </p:nvSpPr>
+          <p:spPr>
+            <a:xfrm>
+              <a:off x="427081" y="263129"/>
+              <a:ext cx="1371600" cy="1371600"/>
+            </a:xfrm>
+            <a:prstGeom prst="rect">
+              <a:avLst/>
+            </a:prstGeom>
+            <a:noFill/>
+            <a:ln w="76200">
+              <a:solidFill>
+                <a:schemeClr val="tx1"/>
+              </a:solidFill>
+            </a:ln>
+          </p:spPr>
+          <p:style>
+            <a:lnRef idx="2">
+              <a:schemeClr val="accent1">
+                <a:shade val="50000"/>
+              </a:schemeClr>
+            </a:lnRef>
+            <a:fillRef idx="1">
+              <a:schemeClr val="accent1"/>
+            </a:fillRef>
+            <a:effectRef idx="0">
+              <a:schemeClr val="accent1"/>
+            </a:effectRef>
+            <a:fontRef idx="minor">
+              <a:schemeClr val="lt1"/>
+            </a:fontRef>
+          </p:style>
+          <p:txBody>
+            <a:bodyPr rtlCol="0" anchor="ctr"/>
+            <a:lstStyle/>
+            <a:p>
+              <a:pPr algn="ctr"/>
+              <a:endParaRPr lang="en-US"/>
+            </a:p>
+          </p:txBody>
+        </p:sp>
+        <p:sp>
+          <p:nvSpPr>
+            <p:cNvPr id="37" name="Plaque 36">
+              <a:extLst>
+                <a:ext uri="{FF2B5EF4-FFF2-40B4-BE49-F238E27FC236}">
+                  <a16:creationId xmlns:a16="http://schemas.microsoft.com/office/drawing/2014/main" id="{7D3FD1FF-3D3C-99F2-F927-A664EB88A6A5}"/>
+                </a:ext>
+              </a:extLst>
+            </p:cNvPr>
+            <p:cNvSpPr/>
+            <p:nvPr/>
+          </p:nvSpPr>
+          <p:spPr>
+            <a:xfrm>
+              <a:off x="573033" y="478473"/>
+              <a:ext cx="1097280" cy="1097280"/>
+            </a:xfrm>
+            <a:prstGeom prst="plaque">
+              <a:avLst/>
+            </a:prstGeom>
+            <a:noFill/>
+            <a:ln w="38100" cap="flat" cmpd="sng" algn="ctr">
+              <a:solidFill>
+                <a:schemeClr val="dk1"/>
+              </a:solidFill>
+              <a:prstDash val="solid"/>
+              <a:round/>
+              <a:headEnd type="none" w="med" len="med"/>
+              <a:tailEnd type="none" w="med" len="med"/>
+            </a:ln>
+          </p:spPr>
+          <p:style>
+            <a:lnRef idx="0">
+              <a:scrgbClr r="0" g="0" b="0"/>
+            </a:lnRef>
+            <a:fillRef idx="0">
+              <a:scrgbClr r="0" g="0" b="0"/>
+            </a:fillRef>
+            <a:effectRef idx="0">
+              <a:scrgbClr r="0" g="0" b="0"/>
+            </a:effectRef>
+            <a:fontRef idx="minor">
+              <a:schemeClr val="dk1"/>
+            </a:fontRef>
+          </p:style>
+          <p:txBody>
+            <a:bodyPr rtlCol="0" anchor="ctr"/>
+            <a:lstStyle/>
+            <a:p>
+              <a:pPr algn="ctr"/>
+              <a:endParaRPr lang="en-US"/>
+            </a:p>
+          </p:txBody>
+        </p:sp>
+      </p:grpSp>
+      <p:grpSp>
+        <p:nvGrpSpPr>
+          <p:cNvPr id="11" name="Group 10">
+            <a:extLst>
+              <a:ext uri="{FF2B5EF4-FFF2-40B4-BE49-F238E27FC236}">
+                <a16:creationId xmlns:a16="http://schemas.microsoft.com/office/drawing/2014/main" id="{C3562DA8-7EC5-D62F-3CD0-47837ED87B1F}"/>
+              </a:ext>
+            </a:extLst>
+          </p:cNvPr>
+          <p:cNvGrpSpPr/>
+          <p:nvPr/>
+        </p:nvGrpSpPr>
+        <p:grpSpPr>
+          <a:xfrm>
+            <a:off x="797409" y="781866"/>
+            <a:ext cx="631137" cy="505972"/>
+            <a:chOff x="5010218" y="2694841"/>
+            <a:chExt cx="2523392" cy="2022962"/>
+          </a:xfrm>
+        </p:grpSpPr>
+        <p:sp>
+          <p:nvSpPr>
+            <p:cNvPr id="5" name="Moon 4">
+              <a:extLst>
+                <a:ext uri="{FF2B5EF4-FFF2-40B4-BE49-F238E27FC236}">
+                  <a16:creationId xmlns:a16="http://schemas.microsoft.com/office/drawing/2014/main" id="{A9874143-2A82-2D3B-F797-BECFB101D068}"/>
+                </a:ext>
+              </a:extLst>
+            </p:cNvPr>
+            <p:cNvSpPr/>
+            <p:nvPr/>
+          </p:nvSpPr>
+          <p:spPr>
+            <a:xfrm rot="16200000">
+              <a:off x="5683528" y="2021531"/>
+              <a:ext cx="1176771" cy="2523392"/>
+            </a:xfrm>
+            <a:prstGeom prst="moon">
+              <a:avLst>
+                <a:gd name="adj" fmla="val 55230"/>
+              </a:avLst>
+            </a:prstGeom>
+          </p:spPr>
+          <p:style>
+            <a:lnRef idx="2">
+              <a:schemeClr val="dk1">
+                <a:shade val="50000"/>
+              </a:schemeClr>
+            </a:lnRef>
+            <a:fillRef idx="1">
+              <a:schemeClr val="dk1"/>
+            </a:fillRef>
+            <a:effectRef idx="0">
+              <a:schemeClr val="dk1"/>
+            </a:effectRef>
+            <a:fontRef idx="minor">
+              <a:schemeClr val="lt1"/>
+            </a:fontRef>
+          </p:style>
+          <p:txBody>
+            <a:bodyPr rtlCol="0" anchor="ctr"/>
+            <a:lstStyle/>
+            <a:p>
+              <a:pPr algn="ctr"/>
+              <a:endParaRPr lang="en-US"/>
+            </a:p>
+          </p:txBody>
+        </p:sp>
+        <p:sp>
+          <p:nvSpPr>
+            <p:cNvPr id="6" name="Isosceles Triangle 5">
+              <a:extLst>
+                <a:ext uri="{FF2B5EF4-FFF2-40B4-BE49-F238E27FC236}">
+                  <a16:creationId xmlns:a16="http://schemas.microsoft.com/office/drawing/2014/main" id="{B6AA356D-404B-7FFC-B885-3A63994A92C0}"/>
+                </a:ext>
+              </a:extLst>
+            </p:cNvPr>
+            <p:cNvSpPr/>
+            <p:nvPr/>
+          </p:nvSpPr>
+          <p:spPr>
+            <a:xfrm>
+              <a:off x="6132701" y="2694841"/>
+              <a:ext cx="278423" cy="1723292"/>
+            </a:xfrm>
+            <a:prstGeom prst="triangle">
+              <a:avLst/>
+            </a:prstGeom>
+          </p:spPr>
+          <p:style>
+            <a:lnRef idx="2">
+              <a:schemeClr val="dk1">
+                <a:shade val="50000"/>
+              </a:schemeClr>
+            </a:lnRef>
+            <a:fillRef idx="1">
+              <a:schemeClr val="dk1"/>
+            </a:fillRef>
+            <a:effectRef idx="0">
+              <a:schemeClr val="dk1"/>
+            </a:effectRef>
+            <a:fontRef idx="minor">
+              <a:schemeClr val="lt1"/>
+            </a:fontRef>
+          </p:style>
+          <p:txBody>
+            <a:bodyPr rtlCol="0" anchor="ctr"/>
+            <a:lstStyle/>
+            <a:p>
+              <a:pPr algn="ctr"/>
+              <a:endParaRPr lang="en-US"/>
+            </a:p>
+          </p:txBody>
+        </p:sp>
+        <p:sp>
+          <p:nvSpPr>
+            <p:cNvPr id="40" name="Moon 39">
+              <a:extLst>
+                <a:ext uri="{FF2B5EF4-FFF2-40B4-BE49-F238E27FC236}">
+                  <a16:creationId xmlns:a16="http://schemas.microsoft.com/office/drawing/2014/main" id="{E3293EBD-1F05-06C9-1DAF-114AB42DFCF7}"/>
+                </a:ext>
+              </a:extLst>
+            </p:cNvPr>
+            <p:cNvSpPr/>
+            <p:nvPr/>
+          </p:nvSpPr>
+          <p:spPr>
+            <a:xfrm rot="5400000">
+              <a:off x="5972241" y="3787285"/>
+              <a:ext cx="599341" cy="1261696"/>
+            </a:xfrm>
+            <a:prstGeom prst="moon">
+              <a:avLst>
+                <a:gd name="adj" fmla="val 37626"/>
+              </a:avLst>
+            </a:prstGeom>
+          </p:spPr>
+          <p:style>
+            <a:lnRef idx="2">
+              <a:schemeClr val="dk1">
+                <a:shade val="50000"/>
+              </a:schemeClr>
+            </a:lnRef>
+            <a:fillRef idx="1">
+              <a:schemeClr val="dk1"/>
+            </a:fillRef>
+            <a:effectRef idx="0">
+              <a:schemeClr val="dk1"/>
+            </a:effectRef>
+            <a:fontRef idx="minor">
+              <a:schemeClr val="lt1"/>
+            </a:fontRef>
+          </p:style>
+          <p:txBody>
+            <a:bodyPr rtlCol="0" anchor="ctr"/>
+            <a:lstStyle/>
+            <a:p>
+              <a:pPr algn="ctr"/>
+              <a:endParaRPr lang="en-US"/>
+            </a:p>
+          </p:txBody>
+        </p:sp>
+        <p:grpSp>
+          <p:nvGrpSpPr>
+            <p:cNvPr id="9" name="Group 8">
+              <a:extLst>
+                <a:ext uri="{FF2B5EF4-FFF2-40B4-BE49-F238E27FC236}">
+                  <a16:creationId xmlns:a16="http://schemas.microsoft.com/office/drawing/2014/main" id="{2D482957-79DD-BCAA-D3A1-FDDBE4B10CF7}"/>
+                </a:ext>
+              </a:extLst>
+            </p:cNvPr>
+            <p:cNvGrpSpPr/>
+            <p:nvPr/>
+          </p:nvGrpSpPr>
+          <p:grpSpPr>
+            <a:xfrm>
+              <a:off x="5240214" y="3072211"/>
+              <a:ext cx="862512" cy="587761"/>
+              <a:chOff x="5240214" y="3072211"/>
+              <a:chExt cx="862512" cy="587761"/>
+            </a:xfrm>
+          </p:grpSpPr>
+          <p:sp>
+            <p:nvSpPr>
+              <p:cNvPr id="7" name="Oval 6">
+                <a:extLst>
+                  <a:ext uri="{FF2B5EF4-FFF2-40B4-BE49-F238E27FC236}">
+                    <a16:creationId xmlns:a16="http://schemas.microsoft.com/office/drawing/2014/main" id="{2735767C-3AA8-47B6-D677-7D4BE75CD5D0}"/>
+                  </a:ext>
+                </a:extLst>
+              </p:cNvPr>
+              <p:cNvSpPr/>
+              <p:nvPr/>
+            </p:nvSpPr>
+            <p:spPr>
+              <a:xfrm>
+                <a:off x="5475402" y="3233279"/>
+                <a:ext cx="274320" cy="274320"/>
+              </a:xfrm>
+              <a:prstGeom prst="ellipse">
+                <a:avLst/>
+              </a:prstGeom>
+            </p:spPr>
+            <p:style>
+              <a:lnRef idx="2">
+                <a:schemeClr val="dk1"/>
+              </a:lnRef>
+              <a:fillRef idx="1">
+                <a:schemeClr val="lt1"/>
+              </a:fillRef>
+              <a:effectRef idx="0">
+                <a:schemeClr val="dk1"/>
+              </a:effectRef>
+              <a:fontRef idx="minor">
+                <a:schemeClr val="dk1"/>
+              </a:fontRef>
+            </p:style>
+            <p:txBody>
+              <a:bodyPr rtlCol="0" anchor="ctr"/>
+              <a:lstStyle/>
+              <a:p>
+                <a:pPr algn="ctr"/>
+                <a:endParaRPr lang="en-US"/>
+              </a:p>
+            </p:txBody>
+          </p:sp>
+          <p:sp>
+            <p:nvSpPr>
+              <p:cNvPr id="42" name="Oval 41">
+                <a:extLst>
+                  <a:ext uri="{FF2B5EF4-FFF2-40B4-BE49-F238E27FC236}">
+                    <a16:creationId xmlns:a16="http://schemas.microsoft.com/office/drawing/2014/main" id="{6F5C74B7-A58D-7D31-DEF0-18727C62BFB7}"/>
+                  </a:ext>
+                </a:extLst>
+              </p:cNvPr>
+              <p:cNvSpPr/>
+              <p:nvPr/>
+            </p:nvSpPr>
+            <p:spPr>
+              <a:xfrm>
+                <a:off x="5240214" y="3072211"/>
+                <a:ext cx="228600" cy="228600"/>
+              </a:xfrm>
+              <a:prstGeom prst="ellipse">
+                <a:avLst/>
+              </a:prstGeom>
+            </p:spPr>
+            <p:style>
+              <a:lnRef idx="2">
+                <a:schemeClr val="dk1"/>
+              </a:lnRef>
+              <a:fillRef idx="1">
+                <a:schemeClr val="lt1"/>
+              </a:fillRef>
+              <a:effectRef idx="0">
+                <a:schemeClr val="dk1"/>
+              </a:effectRef>
+              <a:fontRef idx="minor">
+                <a:schemeClr val="dk1"/>
+              </a:fontRef>
+            </p:style>
+            <p:txBody>
+              <a:bodyPr rtlCol="0" anchor="ctr"/>
+              <a:lstStyle/>
+              <a:p>
+                <a:pPr algn="ctr"/>
+                <a:endParaRPr lang="en-US"/>
+              </a:p>
+            </p:txBody>
+          </p:sp>
+          <p:sp>
+            <p:nvSpPr>
+              <p:cNvPr id="43" name="Oval 42">
+                <a:extLst>
+                  <a:ext uri="{FF2B5EF4-FFF2-40B4-BE49-F238E27FC236}">
+                    <a16:creationId xmlns:a16="http://schemas.microsoft.com/office/drawing/2014/main" id="{526E0C8A-89C5-3741-68F7-CCFFAC180B99}"/>
+                  </a:ext>
+                </a:extLst>
+              </p:cNvPr>
+              <p:cNvSpPr/>
+              <p:nvPr/>
+            </p:nvSpPr>
+            <p:spPr>
+              <a:xfrm>
+                <a:off x="5782686" y="3339932"/>
+                <a:ext cx="320040" cy="320040"/>
+              </a:xfrm>
+              <a:prstGeom prst="ellipse">
+                <a:avLst/>
+              </a:prstGeom>
+            </p:spPr>
+            <p:style>
+              <a:lnRef idx="2">
+                <a:schemeClr val="dk1"/>
+              </a:lnRef>
+              <a:fillRef idx="1">
+                <a:schemeClr val="lt1"/>
+              </a:fillRef>
+              <a:effectRef idx="0">
+                <a:schemeClr val="dk1"/>
+              </a:effectRef>
+              <a:fontRef idx="minor">
+                <a:schemeClr val="dk1"/>
+              </a:fontRef>
+            </p:style>
+            <p:txBody>
+              <a:bodyPr rtlCol="0" anchor="ctr"/>
+              <a:lstStyle/>
+              <a:p>
+                <a:pPr algn="ctr"/>
+                <a:endParaRPr lang="en-US"/>
+              </a:p>
+            </p:txBody>
+          </p:sp>
+        </p:grpSp>
+        <p:grpSp>
+          <p:nvGrpSpPr>
+            <p:cNvPr id="48" name="Group 47">
+              <a:extLst>
+                <a:ext uri="{FF2B5EF4-FFF2-40B4-BE49-F238E27FC236}">
+                  <a16:creationId xmlns:a16="http://schemas.microsoft.com/office/drawing/2014/main" id="{71A6133B-7C99-7283-AAC2-A0CA1651A05E}"/>
+                </a:ext>
+              </a:extLst>
+            </p:cNvPr>
+            <p:cNvGrpSpPr/>
+            <p:nvPr/>
+          </p:nvGrpSpPr>
+          <p:grpSpPr>
+            <a:xfrm flipH="1">
+              <a:off x="6400433" y="3085350"/>
+              <a:ext cx="862512" cy="587761"/>
+              <a:chOff x="5240214" y="3072211"/>
+              <a:chExt cx="862512" cy="587761"/>
+            </a:xfrm>
+          </p:grpSpPr>
+          <p:sp>
+            <p:nvSpPr>
+              <p:cNvPr id="49" name="Oval 48">
+                <a:extLst>
+                  <a:ext uri="{FF2B5EF4-FFF2-40B4-BE49-F238E27FC236}">
+                    <a16:creationId xmlns:a16="http://schemas.microsoft.com/office/drawing/2014/main" id="{AA5D0FA6-B69E-87AA-C31D-6B987901B4D2}"/>
+                  </a:ext>
+                </a:extLst>
+              </p:cNvPr>
+              <p:cNvSpPr/>
+              <p:nvPr/>
+            </p:nvSpPr>
+            <p:spPr>
+              <a:xfrm>
+                <a:off x="5475402" y="3233279"/>
+                <a:ext cx="274320" cy="274320"/>
+              </a:xfrm>
+              <a:prstGeom prst="ellipse">
+                <a:avLst/>
+              </a:prstGeom>
+            </p:spPr>
+            <p:style>
+              <a:lnRef idx="2">
+                <a:schemeClr val="dk1"/>
+              </a:lnRef>
+              <a:fillRef idx="1">
+                <a:schemeClr val="lt1"/>
+              </a:fillRef>
+              <a:effectRef idx="0">
+                <a:schemeClr val="dk1"/>
+              </a:effectRef>
+              <a:fontRef idx="minor">
+                <a:schemeClr val="dk1"/>
+              </a:fontRef>
+            </p:style>
+            <p:txBody>
+              <a:bodyPr rtlCol="0" anchor="ctr"/>
+              <a:lstStyle/>
+              <a:p>
+                <a:pPr algn="ctr"/>
+                <a:endParaRPr lang="en-US"/>
+              </a:p>
+            </p:txBody>
+          </p:sp>
+          <p:sp>
+            <p:nvSpPr>
+              <p:cNvPr id="50" name="Oval 49">
+                <a:extLst>
+                  <a:ext uri="{FF2B5EF4-FFF2-40B4-BE49-F238E27FC236}">
+                    <a16:creationId xmlns:a16="http://schemas.microsoft.com/office/drawing/2014/main" id="{94C1367F-6979-8909-D9D6-3487DAB2ACD3}"/>
+                  </a:ext>
+                </a:extLst>
+              </p:cNvPr>
+              <p:cNvSpPr/>
+              <p:nvPr/>
+            </p:nvSpPr>
+            <p:spPr>
+              <a:xfrm>
+                <a:off x="5240214" y="3072211"/>
+                <a:ext cx="228600" cy="228600"/>
+              </a:xfrm>
+              <a:prstGeom prst="ellipse">
+                <a:avLst/>
+              </a:prstGeom>
+            </p:spPr>
+            <p:style>
+              <a:lnRef idx="2">
+                <a:schemeClr val="dk1"/>
+              </a:lnRef>
+              <a:fillRef idx="1">
+                <a:schemeClr val="lt1"/>
+              </a:fillRef>
+              <a:effectRef idx="0">
+                <a:schemeClr val="dk1"/>
+              </a:effectRef>
+              <a:fontRef idx="minor">
+                <a:schemeClr val="dk1"/>
+              </a:fontRef>
+            </p:style>
+            <p:txBody>
+              <a:bodyPr rtlCol="0" anchor="ctr"/>
+              <a:lstStyle/>
+              <a:p>
+                <a:pPr algn="ctr"/>
+                <a:endParaRPr lang="en-US"/>
+              </a:p>
+            </p:txBody>
+          </p:sp>
+          <p:sp>
+            <p:nvSpPr>
+              <p:cNvPr id="51" name="Oval 50">
+                <a:extLst>
+                  <a:ext uri="{FF2B5EF4-FFF2-40B4-BE49-F238E27FC236}">
+                    <a16:creationId xmlns:a16="http://schemas.microsoft.com/office/drawing/2014/main" id="{0DBD12CD-E674-B369-7759-196E0F918CB0}"/>
+                  </a:ext>
+                </a:extLst>
+              </p:cNvPr>
+              <p:cNvSpPr/>
+              <p:nvPr/>
+            </p:nvSpPr>
+            <p:spPr>
+              <a:xfrm>
+                <a:off x="5782686" y="3339932"/>
+                <a:ext cx="320040" cy="320040"/>
+              </a:xfrm>
+              <a:prstGeom prst="ellipse">
+                <a:avLst/>
+              </a:prstGeom>
+            </p:spPr>
+            <p:style>
+              <a:lnRef idx="2">
+                <a:schemeClr val="dk1"/>
+              </a:lnRef>
+              <a:fillRef idx="1">
+                <a:schemeClr val="lt1"/>
+              </a:fillRef>
+              <a:effectRef idx="0">
+                <a:schemeClr val="dk1"/>
+              </a:effectRef>
+              <a:fontRef idx="minor">
+                <a:schemeClr val="dk1"/>
+              </a:fontRef>
+            </p:style>
+            <p:txBody>
+              <a:bodyPr rtlCol="0" anchor="ctr"/>
+              <a:lstStyle/>
+              <a:p>
+                <a:pPr algn="ctr"/>
+                <a:endParaRPr lang="en-US"/>
+              </a:p>
+            </p:txBody>
+          </p:sp>
+        </p:grpSp>
+      </p:grpSp>
+      <p:grpSp>
+        <p:nvGrpSpPr>
+          <p:cNvPr id="19" name="Group 18">
+            <a:extLst>
+              <a:ext uri="{FF2B5EF4-FFF2-40B4-BE49-F238E27FC236}">
+                <a16:creationId xmlns:a16="http://schemas.microsoft.com/office/drawing/2014/main" id="{F0C5DF98-2563-86F8-66B2-5F473BDD317C}"/>
+              </a:ext>
+            </a:extLst>
+          </p:cNvPr>
+          <p:cNvGrpSpPr/>
+          <p:nvPr/>
+        </p:nvGrpSpPr>
+        <p:grpSpPr>
+          <a:xfrm>
+            <a:off x="2507360" y="554317"/>
+            <a:ext cx="577458" cy="886118"/>
+            <a:chOff x="5275383" y="2444259"/>
+            <a:chExt cx="2101363" cy="3224576"/>
+          </a:xfrm>
+        </p:grpSpPr>
+        <p:sp>
+          <p:nvSpPr>
+            <p:cNvPr id="12" name="Isosceles Triangle 11">
+              <a:extLst>
+                <a:ext uri="{FF2B5EF4-FFF2-40B4-BE49-F238E27FC236}">
+                  <a16:creationId xmlns:a16="http://schemas.microsoft.com/office/drawing/2014/main" id="{2EADF2A1-A28A-D893-3F15-3F31AEB87ECF}"/>
+                </a:ext>
+              </a:extLst>
+            </p:cNvPr>
+            <p:cNvSpPr/>
+            <p:nvPr/>
+          </p:nvSpPr>
+          <p:spPr>
+            <a:xfrm rot="10800000">
+              <a:off x="5653455" y="3974123"/>
+              <a:ext cx="1345223" cy="474785"/>
+            </a:xfrm>
+            <a:prstGeom prst="triangle">
+              <a:avLst/>
+            </a:prstGeom>
+            <a:ln w="28575"/>
+          </p:spPr>
+          <p:style>
+            <a:lnRef idx="2">
+              <a:schemeClr val="dk1"/>
+            </a:lnRef>
+            <a:fillRef idx="1">
+              <a:schemeClr val="lt1"/>
+            </a:fillRef>
+            <a:effectRef idx="0">
+              <a:schemeClr val="dk1"/>
+            </a:effectRef>
+            <a:fontRef idx="minor">
+              <a:schemeClr val="dk1"/>
+            </a:fontRef>
+          </p:style>
+          <p:txBody>
+            <a:bodyPr rtlCol="0" anchor="ctr"/>
+            <a:lstStyle/>
+            <a:p>
+              <a:pPr algn="ctr"/>
+              <a:endParaRPr lang="en-US"/>
+            </a:p>
+          </p:txBody>
+        </p:sp>
+        <p:sp>
+          <p:nvSpPr>
+            <p:cNvPr id="14" name="Isosceles Triangle 13">
+              <a:extLst>
+                <a:ext uri="{FF2B5EF4-FFF2-40B4-BE49-F238E27FC236}">
+                  <a16:creationId xmlns:a16="http://schemas.microsoft.com/office/drawing/2014/main" id="{87195922-C896-82C4-7731-A567421AC31C}"/>
+                </a:ext>
+              </a:extLst>
+            </p:cNvPr>
+            <p:cNvSpPr/>
+            <p:nvPr/>
+          </p:nvSpPr>
+          <p:spPr>
+            <a:xfrm>
+              <a:off x="5675434" y="2699238"/>
+              <a:ext cx="219808" cy="1274885"/>
+            </a:xfrm>
+            <a:prstGeom prst="triangle">
+              <a:avLst/>
+            </a:prstGeom>
+          </p:spPr>
+          <p:style>
+            <a:lnRef idx="2">
+              <a:schemeClr val="dk1">
+                <a:shade val="50000"/>
+              </a:schemeClr>
+            </a:lnRef>
+            <a:fillRef idx="1">
+              <a:schemeClr val="dk1"/>
+            </a:fillRef>
+            <a:effectRef idx="0">
+              <a:schemeClr val="dk1"/>
+            </a:effectRef>
+            <a:fontRef idx="minor">
+              <a:schemeClr val="lt1"/>
+            </a:fontRef>
+          </p:style>
+          <p:txBody>
+            <a:bodyPr rtlCol="0" anchor="ctr"/>
+            <a:lstStyle/>
+            <a:p>
+              <a:pPr algn="ctr"/>
+              <a:endParaRPr lang="en-US"/>
+            </a:p>
+          </p:txBody>
+        </p:sp>
+        <p:sp>
+          <p:nvSpPr>
+            <p:cNvPr id="55" name="Isosceles Triangle 54">
+              <a:extLst>
+                <a:ext uri="{FF2B5EF4-FFF2-40B4-BE49-F238E27FC236}">
+                  <a16:creationId xmlns:a16="http://schemas.microsoft.com/office/drawing/2014/main" id="{73506609-2BD0-91A1-05EF-31098DDB94BC}"/>
+                </a:ext>
+              </a:extLst>
+            </p:cNvPr>
+            <p:cNvSpPr/>
+            <p:nvPr/>
+          </p:nvSpPr>
+          <p:spPr>
+            <a:xfrm>
+              <a:off x="6778870" y="2699237"/>
+              <a:ext cx="219808" cy="1274885"/>
+            </a:xfrm>
+            <a:prstGeom prst="triangle">
+              <a:avLst/>
+            </a:prstGeom>
+          </p:spPr>
+          <p:style>
+            <a:lnRef idx="2">
+              <a:schemeClr val="dk1">
+                <a:shade val="50000"/>
+              </a:schemeClr>
+            </a:lnRef>
+            <a:fillRef idx="1">
+              <a:schemeClr val="dk1"/>
+            </a:fillRef>
+            <a:effectRef idx="0">
+              <a:schemeClr val="dk1"/>
+            </a:effectRef>
+            <a:fontRef idx="minor">
+              <a:schemeClr val="lt1"/>
+            </a:fontRef>
+          </p:style>
+          <p:txBody>
+            <a:bodyPr rtlCol="0" anchor="ctr"/>
+            <a:lstStyle/>
+            <a:p>
+              <a:pPr algn="ctr"/>
+              <a:endParaRPr lang="en-US"/>
+            </a:p>
+          </p:txBody>
+        </p:sp>
+        <p:sp>
+          <p:nvSpPr>
+            <p:cNvPr id="56" name="Isosceles Triangle 55">
+              <a:extLst>
+                <a:ext uri="{FF2B5EF4-FFF2-40B4-BE49-F238E27FC236}">
+                  <a16:creationId xmlns:a16="http://schemas.microsoft.com/office/drawing/2014/main" id="{C30E4588-E89B-61F1-12DA-7A3ED2B4D301}"/>
+                </a:ext>
+              </a:extLst>
+            </p:cNvPr>
+            <p:cNvSpPr/>
+            <p:nvPr/>
+          </p:nvSpPr>
+          <p:spPr>
+            <a:xfrm>
+              <a:off x="6216162" y="2444259"/>
+              <a:ext cx="219808" cy="1529863"/>
+            </a:xfrm>
+            <a:prstGeom prst="triangle">
+              <a:avLst/>
+            </a:prstGeom>
+          </p:spPr>
+          <p:style>
+            <a:lnRef idx="2">
+              <a:schemeClr val="dk1"/>
+            </a:lnRef>
+            <a:fillRef idx="1">
+              <a:schemeClr val="lt1"/>
+            </a:fillRef>
+            <a:effectRef idx="0">
+              <a:schemeClr val="dk1"/>
+            </a:effectRef>
+            <a:fontRef idx="minor">
+              <a:schemeClr val="dk1"/>
+            </a:fontRef>
+          </p:style>
+          <p:txBody>
+            <a:bodyPr rtlCol="0" anchor="ctr"/>
+            <a:lstStyle/>
+            <a:p>
+              <a:pPr algn="ctr"/>
+              <a:endParaRPr lang="en-US"/>
+            </a:p>
+          </p:txBody>
+        </p:sp>
+        <p:sp>
+          <p:nvSpPr>
+            <p:cNvPr id="60" name="Moon 59">
+              <a:extLst>
+                <a:ext uri="{FF2B5EF4-FFF2-40B4-BE49-F238E27FC236}">
+                  <a16:creationId xmlns:a16="http://schemas.microsoft.com/office/drawing/2014/main" id="{87A7BA59-A2B6-709C-00C8-16832E3531D0}"/>
+                </a:ext>
+              </a:extLst>
+            </p:cNvPr>
+            <p:cNvSpPr/>
+            <p:nvPr/>
+          </p:nvSpPr>
+          <p:spPr>
+            <a:xfrm rot="5400000">
+              <a:off x="6060099" y="4769824"/>
+              <a:ext cx="531929" cy="1266094"/>
+            </a:xfrm>
+            <a:prstGeom prst="moon">
+              <a:avLst>
+                <a:gd name="adj" fmla="val 38235"/>
+              </a:avLst>
+            </a:prstGeom>
+          </p:spPr>
+          <p:style>
+            <a:lnRef idx="2">
+              <a:schemeClr val="dk1"/>
+            </a:lnRef>
+            <a:fillRef idx="1">
+              <a:schemeClr val="lt1"/>
+            </a:fillRef>
+            <a:effectRef idx="0">
+              <a:schemeClr val="dk1"/>
+            </a:effectRef>
+            <a:fontRef idx="minor">
+              <a:schemeClr val="dk1"/>
+            </a:fontRef>
+          </p:style>
+          <p:txBody>
+            <a:bodyPr rtlCol="0" anchor="ctr"/>
+            <a:lstStyle/>
+            <a:p>
+              <a:pPr algn="ctr"/>
+              <a:endParaRPr lang="en-US"/>
+            </a:p>
+          </p:txBody>
+        </p:sp>
+        <p:sp>
+          <p:nvSpPr>
+            <p:cNvPr id="17" name="Isosceles Triangle 16">
+              <a:extLst>
+                <a:ext uri="{FF2B5EF4-FFF2-40B4-BE49-F238E27FC236}">
+                  <a16:creationId xmlns:a16="http://schemas.microsoft.com/office/drawing/2014/main" id="{ECBE0F47-3EA0-620C-2D86-AF5078632349}"/>
+                </a:ext>
+              </a:extLst>
+            </p:cNvPr>
+            <p:cNvSpPr/>
+            <p:nvPr/>
+          </p:nvSpPr>
+          <p:spPr>
+            <a:xfrm rot="10800000">
+              <a:off x="6000749" y="4211516"/>
+              <a:ext cx="650633" cy="1424349"/>
+            </a:xfrm>
+            <a:prstGeom prst="triangle">
+              <a:avLst/>
+            </a:prstGeom>
+          </p:spPr>
+          <p:style>
+            <a:lnRef idx="2">
+              <a:schemeClr val="dk1">
+                <a:shade val="50000"/>
+              </a:schemeClr>
+            </a:lnRef>
+            <a:fillRef idx="1">
+              <a:schemeClr val="dk1"/>
+            </a:fillRef>
+            <a:effectRef idx="0">
+              <a:schemeClr val="dk1"/>
+            </a:effectRef>
+            <a:fontRef idx="minor">
+              <a:schemeClr val="lt1"/>
+            </a:fontRef>
+          </p:style>
+          <p:txBody>
+            <a:bodyPr rtlCol="0" anchor="ctr"/>
+            <a:lstStyle/>
+            <a:p>
+              <a:pPr algn="ctr"/>
+              <a:endParaRPr lang="en-US"/>
+            </a:p>
+          </p:txBody>
+        </p:sp>
+        <p:sp>
+          <p:nvSpPr>
+            <p:cNvPr id="18" name="Moon 17">
+              <a:extLst>
+                <a:ext uri="{FF2B5EF4-FFF2-40B4-BE49-F238E27FC236}">
+                  <a16:creationId xmlns:a16="http://schemas.microsoft.com/office/drawing/2014/main" id="{FD6EA14C-83A3-27CE-AD16-7D3EF805E5B4}"/>
+                </a:ext>
+              </a:extLst>
+            </p:cNvPr>
+            <p:cNvSpPr/>
+            <p:nvPr/>
+          </p:nvSpPr>
+          <p:spPr>
+            <a:xfrm rot="5400000">
+              <a:off x="6027126" y="3697166"/>
+              <a:ext cx="597877" cy="2101363"/>
+            </a:xfrm>
+            <a:prstGeom prst="moon">
+              <a:avLst/>
+            </a:prstGeom>
+          </p:spPr>
+          <p:style>
+            <a:lnRef idx="2">
+              <a:schemeClr val="dk1">
+                <a:shade val="50000"/>
+              </a:schemeClr>
+            </a:lnRef>
+            <a:fillRef idx="1">
+              <a:schemeClr val="dk1"/>
+            </a:fillRef>
+            <a:effectRef idx="0">
+              <a:schemeClr val="dk1"/>
+            </a:effectRef>
+            <a:fontRef idx="minor">
+              <a:schemeClr val="lt1"/>
+            </a:fontRef>
+          </p:style>
+          <p:txBody>
+            <a:bodyPr rtlCol="0" anchor="ctr"/>
+            <a:lstStyle/>
+            <a:p>
+              <a:pPr algn="ctr"/>
+              <a:endParaRPr lang="en-US"/>
+            </a:p>
+          </p:txBody>
+        </p:sp>
+      </p:grpSp>
+      <p:grpSp>
+        <p:nvGrpSpPr>
+          <p:cNvPr id="24" name="Group 23">
+            <a:extLst>
+              <a:ext uri="{FF2B5EF4-FFF2-40B4-BE49-F238E27FC236}">
+                <a16:creationId xmlns:a16="http://schemas.microsoft.com/office/drawing/2014/main" id="{28961DD9-2354-5B68-2F7D-5210C746B4E7}"/>
+              </a:ext>
+            </a:extLst>
+          </p:cNvPr>
+          <p:cNvGrpSpPr/>
+          <p:nvPr/>
+        </p:nvGrpSpPr>
+        <p:grpSpPr>
+          <a:xfrm>
+            <a:off x="3943868" y="615737"/>
+            <a:ext cx="1020292" cy="877614"/>
+            <a:chOff x="5664202" y="1634729"/>
+            <a:chExt cx="2809442" cy="2416570"/>
+          </a:xfrm>
+        </p:grpSpPr>
+        <p:sp>
+          <p:nvSpPr>
+            <p:cNvPr id="21" name="Moon 20">
+              <a:extLst>
+                <a:ext uri="{FF2B5EF4-FFF2-40B4-BE49-F238E27FC236}">
+                  <a16:creationId xmlns:a16="http://schemas.microsoft.com/office/drawing/2014/main" id="{E205A88C-A617-A10F-64E8-ACB267143627}"/>
+                </a:ext>
+              </a:extLst>
+            </p:cNvPr>
+            <p:cNvSpPr/>
+            <p:nvPr/>
+          </p:nvSpPr>
+          <p:spPr>
+            <a:xfrm rot="16200000" flipV="1">
+              <a:off x="6630773" y="1057275"/>
+              <a:ext cx="876300" cy="2809442"/>
+            </a:xfrm>
+            <a:prstGeom prst="moon">
+              <a:avLst/>
+            </a:prstGeom>
+          </p:spPr>
+          <p:style>
+            <a:lnRef idx="2">
+              <a:schemeClr val="dk1"/>
+            </a:lnRef>
+            <a:fillRef idx="1">
+              <a:schemeClr val="lt1"/>
+            </a:fillRef>
+            <a:effectRef idx="0">
+              <a:schemeClr val="dk1"/>
+            </a:effectRef>
+            <a:fontRef idx="minor">
+              <a:schemeClr val="dk1"/>
+            </a:fontRef>
+          </p:style>
+          <p:txBody>
+            <a:bodyPr rtlCol="0" anchor="ctr"/>
+            <a:lstStyle/>
+            <a:p>
+              <a:pPr algn="ctr"/>
+              <a:endParaRPr lang="en-US"/>
+            </a:p>
+          </p:txBody>
+        </p:sp>
+        <p:sp>
+          <p:nvSpPr>
+            <p:cNvPr id="67" name="Moon 66">
+              <a:extLst>
+                <a:ext uri="{FF2B5EF4-FFF2-40B4-BE49-F238E27FC236}">
+                  <a16:creationId xmlns:a16="http://schemas.microsoft.com/office/drawing/2014/main" id="{57F01248-854D-FF68-7C19-2D740C67AE52}"/>
+                </a:ext>
+              </a:extLst>
+            </p:cNvPr>
+            <p:cNvSpPr/>
+            <p:nvPr/>
+          </p:nvSpPr>
+          <p:spPr>
+            <a:xfrm rot="16200000" flipV="1">
+              <a:off x="6777590" y="2133133"/>
+              <a:ext cx="658596" cy="2101848"/>
+            </a:xfrm>
+            <a:prstGeom prst="moon">
+              <a:avLst/>
+            </a:prstGeom>
+          </p:spPr>
+          <p:style>
+            <a:lnRef idx="2">
+              <a:schemeClr val="dk1"/>
+            </a:lnRef>
+            <a:fillRef idx="1">
+              <a:schemeClr val="lt1"/>
+            </a:fillRef>
+            <a:effectRef idx="0">
+              <a:schemeClr val="dk1"/>
+            </a:effectRef>
+            <a:fontRef idx="minor">
+              <a:schemeClr val="dk1"/>
+            </a:fontRef>
+          </p:style>
+          <p:txBody>
+            <a:bodyPr rtlCol="0" anchor="ctr"/>
+            <a:lstStyle/>
+            <a:p>
+              <a:pPr algn="ctr"/>
+              <a:endParaRPr lang="en-US"/>
+            </a:p>
+          </p:txBody>
+        </p:sp>
+        <p:sp>
+          <p:nvSpPr>
+            <p:cNvPr id="68" name="Moon 67">
+              <a:extLst>
+                <a:ext uri="{FF2B5EF4-FFF2-40B4-BE49-F238E27FC236}">
+                  <a16:creationId xmlns:a16="http://schemas.microsoft.com/office/drawing/2014/main" id="{958D179A-FCB2-1FAD-E919-831449E3CB87}"/>
+                </a:ext>
+              </a:extLst>
+            </p:cNvPr>
+            <p:cNvSpPr/>
+            <p:nvPr/>
+          </p:nvSpPr>
+          <p:spPr>
+            <a:xfrm rot="16200000" flipV="1">
+              <a:off x="6839285" y="3112240"/>
+              <a:ext cx="535205" cy="1337436"/>
+            </a:xfrm>
+            <a:prstGeom prst="moon">
+              <a:avLst/>
+            </a:prstGeom>
+          </p:spPr>
+          <p:style>
+            <a:lnRef idx="2">
+              <a:schemeClr val="dk1"/>
+            </a:lnRef>
+            <a:fillRef idx="1">
+              <a:schemeClr val="lt1"/>
+            </a:fillRef>
+            <a:effectRef idx="0">
+              <a:schemeClr val="dk1"/>
+            </a:effectRef>
+            <a:fontRef idx="minor">
+              <a:schemeClr val="dk1"/>
+            </a:fontRef>
+          </p:style>
+          <p:txBody>
+            <a:bodyPr rtlCol="0" anchor="ctr"/>
+            <a:lstStyle/>
+            <a:p>
+              <a:pPr algn="ctr"/>
+              <a:endParaRPr lang="en-US"/>
+            </a:p>
+          </p:txBody>
+        </p:sp>
+        <p:sp>
+          <p:nvSpPr>
+            <p:cNvPr id="20" name="Trapezoid 19">
+              <a:extLst>
+                <a:ext uri="{FF2B5EF4-FFF2-40B4-BE49-F238E27FC236}">
+                  <a16:creationId xmlns:a16="http://schemas.microsoft.com/office/drawing/2014/main" id="{B4208B20-59E1-0795-4DAE-F3477F5F5F55}"/>
+                </a:ext>
+              </a:extLst>
+            </p:cNvPr>
+            <p:cNvSpPr/>
+            <p:nvPr/>
+          </p:nvSpPr>
+          <p:spPr>
+            <a:xfrm rot="10800000">
+              <a:off x="6527800" y="2060178"/>
+              <a:ext cx="1168400" cy="1991121"/>
+            </a:xfrm>
+            <a:prstGeom prst="trapezoid">
+              <a:avLst/>
+            </a:prstGeom>
+          </p:spPr>
+          <p:style>
+            <a:lnRef idx="2">
+              <a:schemeClr val="dk1">
+                <a:shade val="50000"/>
+              </a:schemeClr>
+            </a:lnRef>
+            <a:fillRef idx="1">
+              <a:schemeClr val="dk1"/>
+            </a:fillRef>
+            <a:effectRef idx="0">
+              <a:schemeClr val="dk1"/>
+            </a:effectRef>
+            <a:fontRef idx="minor">
+              <a:schemeClr val="lt1"/>
+            </a:fontRef>
+          </p:style>
+          <p:txBody>
+            <a:bodyPr rtlCol="0" anchor="ctr"/>
+            <a:lstStyle/>
+            <a:p>
+              <a:pPr algn="ctr"/>
+              <a:endParaRPr lang="en-US"/>
+            </a:p>
+          </p:txBody>
+        </p:sp>
+        <p:sp>
+          <p:nvSpPr>
+            <p:cNvPr id="66" name="Trapezoid 65">
+              <a:extLst>
+                <a:ext uri="{FF2B5EF4-FFF2-40B4-BE49-F238E27FC236}">
+                  <a16:creationId xmlns:a16="http://schemas.microsoft.com/office/drawing/2014/main" id="{354C1164-4902-CC73-0E27-43A861AB0199}"/>
+                </a:ext>
+              </a:extLst>
+            </p:cNvPr>
+            <p:cNvSpPr/>
+            <p:nvPr/>
+          </p:nvSpPr>
+          <p:spPr>
+            <a:xfrm>
+              <a:off x="6667977" y="1634729"/>
+              <a:ext cx="877823" cy="341783"/>
+            </a:xfrm>
+            <a:prstGeom prst="trapezoid">
+              <a:avLst/>
+            </a:prstGeom>
+          </p:spPr>
+          <p:style>
+            <a:lnRef idx="2">
+              <a:schemeClr val="dk1">
+                <a:shade val="50000"/>
+              </a:schemeClr>
+            </a:lnRef>
+            <a:fillRef idx="1">
+              <a:schemeClr val="dk1"/>
+            </a:fillRef>
+            <a:effectRef idx="0">
+              <a:schemeClr val="dk1"/>
+            </a:effectRef>
+            <a:fontRef idx="minor">
+              <a:schemeClr val="lt1"/>
+            </a:fontRef>
+          </p:style>
+          <p:txBody>
+            <a:bodyPr rtlCol="0" anchor="ctr"/>
+            <a:lstStyle/>
+            <a:p>
+              <a:pPr algn="ctr"/>
+              <a:endParaRPr lang="en-US"/>
+            </a:p>
+          </p:txBody>
+        </p:sp>
+        <p:sp>
+          <p:nvSpPr>
+            <p:cNvPr id="22" name="Oval 21">
+              <a:extLst>
+                <a:ext uri="{FF2B5EF4-FFF2-40B4-BE49-F238E27FC236}">
+                  <a16:creationId xmlns:a16="http://schemas.microsoft.com/office/drawing/2014/main" id="{187BCEC2-D005-ACA5-364B-F687BF13FC73}"/>
+                </a:ext>
+              </a:extLst>
+            </p:cNvPr>
+            <p:cNvSpPr/>
+            <p:nvPr/>
+          </p:nvSpPr>
+          <p:spPr>
+            <a:xfrm>
+              <a:off x="6832567" y="2092176"/>
+              <a:ext cx="548640" cy="548640"/>
+            </a:xfrm>
+            <a:prstGeom prst="ellipse">
+              <a:avLst/>
+            </a:prstGeom>
+          </p:spPr>
+          <p:style>
+            <a:lnRef idx="2">
+              <a:schemeClr val="dk1"/>
+            </a:lnRef>
+            <a:fillRef idx="1">
+              <a:schemeClr val="lt1"/>
+            </a:fillRef>
+            <a:effectRef idx="0">
+              <a:schemeClr val="dk1"/>
+            </a:effectRef>
+            <a:fontRef idx="minor">
+              <a:schemeClr val="dk1"/>
+            </a:fontRef>
+          </p:style>
+          <p:txBody>
+            <a:bodyPr rtlCol="0" anchor="ctr"/>
+            <a:lstStyle/>
+            <a:p>
+              <a:pPr algn="ctr"/>
+              <a:endParaRPr lang="en-US"/>
+            </a:p>
+          </p:txBody>
+        </p:sp>
+        <p:sp>
+          <p:nvSpPr>
+            <p:cNvPr id="69" name="Oval 68">
+              <a:extLst>
+                <a:ext uri="{FF2B5EF4-FFF2-40B4-BE49-F238E27FC236}">
+                  <a16:creationId xmlns:a16="http://schemas.microsoft.com/office/drawing/2014/main" id="{D3CCCD81-AEAF-1D91-1A8A-CA5702635CD6}"/>
+                </a:ext>
+              </a:extLst>
+            </p:cNvPr>
+            <p:cNvSpPr/>
+            <p:nvPr/>
+          </p:nvSpPr>
+          <p:spPr>
+            <a:xfrm>
+              <a:off x="6878287" y="2672814"/>
+              <a:ext cx="457200" cy="457200"/>
+            </a:xfrm>
+            <a:prstGeom prst="ellipse">
+              <a:avLst/>
+            </a:prstGeom>
+          </p:spPr>
+          <p:style>
+            <a:lnRef idx="2">
+              <a:schemeClr val="dk1"/>
+            </a:lnRef>
+            <a:fillRef idx="1">
+              <a:schemeClr val="lt1"/>
+            </a:fillRef>
+            <a:effectRef idx="0">
+              <a:schemeClr val="dk1"/>
+            </a:effectRef>
+            <a:fontRef idx="minor">
+              <a:schemeClr val="dk1"/>
+            </a:fontRef>
+          </p:style>
+          <p:txBody>
+            <a:bodyPr rtlCol="0" anchor="ctr"/>
+            <a:lstStyle/>
+            <a:p>
+              <a:pPr algn="ctr"/>
+              <a:endParaRPr lang="en-US"/>
+            </a:p>
+          </p:txBody>
+        </p:sp>
+        <p:sp>
+          <p:nvSpPr>
+            <p:cNvPr id="70" name="Oval 69">
+              <a:extLst>
+                <a:ext uri="{FF2B5EF4-FFF2-40B4-BE49-F238E27FC236}">
+                  <a16:creationId xmlns:a16="http://schemas.microsoft.com/office/drawing/2014/main" id="{16D2DBA2-511B-A238-4803-4A57DC71210F}"/>
+                </a:ext>
+              </a:extLst>
+            </p:cNvPr>
+            <p:cNvSpPr/>
+            <p:nvPr/>
+          </p:nvSpPr>
+          <p:spPr>
+            <a:xfrm>
+              <a:off x="6924007" y="3160831"/>
+              <a:ext cx="365760" cy="365760"/>
+            </a:xfrm>
+            <a:prstGeom prst="ellipse">
+              <a:avLst/>
+            </a:prstGeom>
+          </p:spPr>
+          <p:style>
+            <a:lnRef idx="2">
+              <a:schemeClr val="dk1"/>
+            </a:lnRef>
+            <a:fillRef idx="1">
+              <a:schemeClr val="lt1"/>
+            </a:fillRef>
+            <a:effectRef idx="0">
+              <a:schemeClr val="dk1"/>
+            </a:effectRef>
+            <a:fontRef idx="minor">
+              <a:schemeClr val="dk1"/>
+            </a:fontRef>
+          </p:style>
+          <p:txBody>
+            <a:bodyPr rtlCol="0" anchor="ctr"/>
+            <a:lstStyle/>
+            <a:p>
+              <a:pPr algn="ctr"/>
+              <a:endParaRPr lang="en-US"/>
+            </a:p>
+          </p:txBody>
+        </p:sp>
+        <p:sp>
+          <p:nvSpPr>
+            <p:cNvPr id="71" name="Oval 70">
+              <a:extLst>
+                <a:ext uri="{FF2B5EF4-FFF2-40B4-BE49-F238E27FC236}">
+                  <a16:creationId xmlns:a16="http://schemas.microsoft.com/office/drawing/2014/main" id="{4D1130D1-136D-1917-4080-6CCCED424C44}"/>
+                </a:ext>
+              </a:extLst>
+            </p:cNvPr>
+            <p:cNvSpPr/>
+            <p:nvPr/>
+          </p:nvSpPr>
+          <p:spPr>
+            <a:xfrm>
+              <a:off x="6969727" y="3583710"/>
+              <a:ext cx="274320" cy="274320"/>
+            </a:xfrm>
+            <a:prstGeom prst="ellipse">
+              <a:avLst/>
+            </a:prstGeom>
+          </p:spPr>
+          <p:style>
+            <a:lnRef idx="2">
+              <a:schemeClr val="dk1"/>
+            </a:lnRef>
+            <a:fillRef idx="1">
+              <a:schemeClr val="lt1"/>
+            </a:fillRef>
+            <a:effectRef idx="0">
+              <a:schemeClr val="dk1"/>
             </a:effectRef>
             <a:fontRef idx="minor">
               <a:schemeClr val="dk1"/>
@@ -23771,6 +24324,1617 @@
             </a:fillRef>
             <a:effectRef idx="0">
               <a:scrgbClr r="0" g="0" b="0"/>
+            </a:effectRef>
+            <a:fontRef idx="minor">
+              <a:schemeClr val="dk1"/>
+            </a:fontRef>
+          </p:style>
+          <p:txBody>
+            <a:bodyPr rtlCol="0" anchor="ctr"/>
+            <a:lstStyle/>
+            <a:p>
+              <a:pPr algn="ctr"/>
+              <a:endParaRPr lang="en-US"/>
+            </a:p>
+          </p:txBody>
+        </p:sp>
+      </p:grpSp>
+      <p:grpSp>
+        <p:nvGrpSpPr>
+          <p:cNvPr id="174" name="Group 173">
+            <a:extLst>
+              <a:ext uri="{FF2B5EF4-FFF2-40B4-BE49-F238E27FC236}">
+                <a16:creationId xmlns:a16="http://schemas.microsoft.com/office/drawing/2014/main" id="{4EE1B358-D077-55B3-E3EF-3502D89D3061}"/>
+              </a:ext>
+            </a:extLst>
+          </p:cNvPr>
+          <p:cNvGrpSpPr/>
+          <p:nvPr/>
+        </p:nvGrpSpPr>
+        <p:grpSpPr>
+          <a:xfrm>
+            <a:off x="3976821" y="3222214"/>
+            <a:ext cx="1371600" cy="1371600"/>
+            <a:chOff x="427081" y="263129"/>
+            <a:chExt cx="1371600" cy="1371600"/>
+          </a:xfrm>
+        </p:grpSpPr>
+        <p:sp>
+          <p:nvSpPr>
+            <p:cNvPr id="175" name="Rectangle 174">
+              <a:extLst>
+                <a:ext uri="{FF2B5EF4-FFF2-40B4-BE49-F238E27FC236}">
+                  <a16:creationId xmlns:a16="http://schemas.microsoft.com/office/drawing/2014/main" id="{2362BCC9-676B-D0EA-55D6-0543234DFEA0}"/>
+                </a:ext>
+              </a:extLst>
+            </p:cNvPr>
+            <p:cNvSpPr/>
+            <p:nvPr/>
+          </p:nvSpPr>
+          <p:spPr>
+            <a:xfrm>
+              <a:off x="427081" y="263129"/>
+              <a:ext cx="1371600" cy="1371600"/>
+            </a:xfrm>
+            <a:prstGeom prst="rect">
+              <a:avLst/>
+            </a:prstGeom>
+            <a:noFill/>
+            <a:ln w="76200">
+              <a:solidFill>
+                <a:schemeClr val="tx1"/>
+              </a:solidFill>
+            </a:ln>
+          </p:spPr>
+          <p:style>
+            <a:lnRef idx="2">
+              <a:schemeClr val="accent1">
+                <a:shade val="50000"/>
+              </a:schemeClr>
+            </a:lnRef>
+            <a:fillRef idx="1">
+              <a:schemeClr val="accent1"/>
+            </a:fillRef>
+            <a:effectRef idx="0">
+              <a:schemeClr val="accent1"/>
+            </a:effectRef>
+            <a:fontRef idx="minor">
+              <a:schemeClr val="lt1"/>
+            </a:fontRef>
+          </p:style>
+          <p:txBody>
+            <a:bodyPr rtlCol="0" anchor="ctr"/>
+            <a:lstStyle/>
+            <a:p>
+              <a:pPr algn="ctr"/>
+              <a:endParaRPr lang="en-US"/>
+            </a:p>
+          </p:txBody>
+        </p:sp>
+        <p:sp>
+          <p:nvSpPr>
+            <p:cNvPr id="176" name="Plaque 175">
+              <a:extLst>
+                <a:ext uri="{FF2B5EF4-FFF2-40B4-BE49-F238E27FC236}">
+                  <a16:creationId xmlns:a16="http://schemas.microsoft.com/office/drawing/2014/main" id="{ACD354BE-71B9-452A-BFA9-F6E184C854CE}"/>
+                </a:ext>
+              </a:extLst>
+            </p:cNvPr>
+            <p:cNvSpPr/>
+            <p:nvPr/>
+          </p:nvSpPr>
+          <p:spPr>
+            <a:xfrm>
+              <a:off x="573033" y="478473"/>
+              <a:ext cx="1097280" cy="1097280"/>
+            </a:xfrm>
+            <a:prstGeom prst="plaque">
+              <a:avLst/>
+            </a:prstGeom>
+            <a:noFill/>
+            <a:ln w="38100" cap="flat" cmpd="sng" algn="ctr">
+              <a:solidFill>
+                <a:schemeClr val="dk1"/>
+              </a:solidFill>
+              <a:prstDash val="solid"/>
+              <a:round/>
+              <a:headEnd type="none" w="med" len="med"/>
+              <a:tailEnd type="none" w="med" len="med"/>
+            </a:ln>
+          </p:spPr>
+          <p:style>
+            <a:lnRef idx="0">
+              <a:scrgbClr r="0" g="0" b="0"/>
+            </a:lnRef>
+            <a:fillRef idx="0">
+              <a:scrgbClr r="0" g="0" b="0"/>
+            </a:fillRef>
+            <a:effectRef idx="0">
+              <a:scrgbClr r="0" g="0" b="0"/>
+            </a:effectRef>
+            <a:fontRef idx="minor">
+              <a:schemeClr val="dk1"/>
+            </a:fontRef>
+          </p:style>
+          <p:txBody>
+            <a:bodyPr rtlCol="0" anchor="ctr"/>
+            <a:lstStyle/>
+            <a:p>
+              <a:pPr algn="ctr"/>
+              <a:endParaRPr lang="en-US"/>
+            </a:p>
+          </p:txBody>
+        </p:sp>
+      </p:grpSp>
+      <p:grpSp>
+        <p:nvGrpSpPr>
+          <p:cNvPr id="177" name="Group 176">
+            <a:extLst>
+              <a:ext uri="{FF2B5EF4-FFF2-40B4-BE49-F238E27FC236}">
+                <a16:creationId xmlns:a16="http://schemas.microsoft.com/office/drawing/2014/main" id="{5EB96501-FE37-49B8-190F-C508957B18C6}"/>
+              </a:ext>
+            </a:extLst>
+          </p:cNvPr>
+          <p:cNvGrpSpPr/>
+          <p:nvPr/>
+        </p:nvGrpSpPr>
+        <p:grpSpPr>
+          <a:xfrm>
+            <a:off x="7316725" y="3222214"/>
+            <a:ext cx="1371600" cy="1371600"/>
+            <a:chOff x="427081" y="263129"/>
+            <a:chExt cx="1371600" cy="1371600"/>
+          </a:xfrm>
+        </p:grpSpPr>
+        <p:sp>
+          <p:nvSpPr>
+            <p:cNvPr id="178" name="Rectangle 177">
+              <a:extLst>
+                <a:ext uri="{FF2B5EF4-FFF2-40B4-BE49-F238E27FC236}">
+                  <a16:creationId xmlns:a16="http://schemas.microsoft.com/office/drawing/2014/main" id="{5A657355-62FB-6E62-211D-DFCF6D8A255C}"/>
+                </a:ext>
+              </a:extLst>
+            </p:cNvPr>
+            <p:cNvSpPr/>
+            <p:nvPr/>
+          </p:nvSpPr>
+          <p:spPr>
+            <a:xfrm>
+              <a:off x="427081" y="263129"/>
+              <a:ext cx="1371600" cy="1371600"/>
+            </a:xfrm>
+            <a:prstGeom prst="rect">
+              <a:avLst/>
+            </a:prstGeom>
+            <a:noFill/>
+            <a:ln w="76200">
+              <a:solidFill>
+                <a:schemeClr val="tx1"/>
+              </a:solidFill>
+            </a:ln>
+          </p:spPr>
+          <p:style>
+            <a:lnRef idx="2">
+              <a:schemeClr val="accent1">
+                <a:shade val="50000"/>
+              </a:schemeClr>
+            </a:lnRef>
+            <a:fillRef idx="1">
+              <a:schemeClr val="accent1"/>
+            </a:fillRef>
+            <a:effectRef idx="0">
+              <a:schemeClr val="accent1"/>
+            </a:effectRef>
+            <a:fontRef idx="minor">
+              <a:schemeClr val="lt1"/>
+            </a:fontRef>
+          </p:style>
+          <p:txBody>
+            <a:bodyPr rtlCol="0" anchor="ctr"/>
+            <a:lstStyle/>
+            <a:p>
+              <a:pPr algn="ctr"/>
+              <a:endParaRPr lang="en-US"/>
+            </a:p>
+          </p:txBody>
+        </p:sp>
+        <p:sp>
+          <p:nvSpPr>
+            <p:cNvPr id="179" name="Plaque 178">
+              <a:extLst>
+                <a:ext uri="{FF2B5EF4-FFF2-40B4-BE49-F238E27FC236}">
+                  <a16:creationId xmlns:a16="http://schemas.microsoft.com/office/drawing/2014/main" id="{E73ED871-7605-3F46-5F0C-E5EBAE589AFC}"/>
+                </a:ext>
+              </a:extLst>
+            </p:cNvPr>
+            <p:cNvSpPr/>
+            <p:nvPr/>
+          </p:nvSpPr>
+          <p:spPr>
+            <a:xfrm>
+              <a:off x="573033" y="478473"/>
+              <a:ext cx="1097280" cy="1097280"/>
+            </a:xfrm>
+            <a:prstGeom prst="plaque">
+              <a:avLst/>
+            </a:prstGeom>
+            <a:noFill/>
+            <a:ln w="38100" cap="flat" cmpd="sng" algn="ctr">
+              <a:solidFill>
+                <a:schemeClr val="dk1"/>
+              </a:solidFill>
+              <a:prstDash val="solid"/>
+              <a:round/>
+              <a:headEnd type="none" w="med" len="med"/>
+              <a:tailEnd type="none" w="med" len="med"/>
+            </a:ln>
+          </p:spPr>
+          <p:style>
+            <a:lnRef idx="0">
+              <a:scrgbClr r="0" g="0" b="0"/>
+            </a:lnRef>
+            <a:fillRef idx="0">
+              <a:scrgbClr r="0" g="0" b="0"/>
+            </a:fillRef>
+            <a:effectRef idx="0">
+              <a:scrgbClr r="0" g="0" b="0"/>
+            </a:effectRef>
+            <a:fontRef idx="minor">
+              <a:schemeClr val="dk1"/>
+            </a:fontRef>
+          </p:style>
+          <p:txBody>
+            <a:bodyPr rtlCol="0" anchor="ctr"/>
+            <a:lstStyle/>
+            <a:p>
+              <a:pPr algn="ctr"/>
+              <a:endParaRPr lang="en-US"/>
+            </a:p>
+          </p:txBody>
+        </p:sp>
+      </p:grpSp>
+      <p:grpSp>
+        <p:nvGrpSpPr>
+          <p:cNvPr id="180" name="Group 179">
+            <a:extLst>
+              <a:ext uri="{FF2B5EF4-FFF2-40B4-BE49-F238E27FC236}">
+                <a16:creationId xmlns:a16="http://schemas.microsoft.com/office/drawing/2014/main" id="{44D65888-F453-86E6-D72E-3CF182B9E272}"/>
+              </a:ext>
+            </a:extLst>
+          </p:cNvPr>
+          <p:cNvGrpSpPr/>
+          <p:nvPr/>
+        </p:nvGrpSpPr>
+        <p:grpSpPr>
+          <a:xfrm>
+            <a:off x="5651237" y="3222399"/>
+            <a:ext cx="1371600" cy="1371600"/>
+            <a:chOff x="427081" y="263129"/>
+            <a:chExt cx="1371600" cy="1371600"/>
+          </a:xfrm>
+        </p:grpSpPr>
+        <p:sp>
+          <p:nvSpPr>
+            <p:cNvPr id="181" name="Rectangle 180">
+              <a:extLst>
+                <a:ext uri="{FF2B5EF4-FFF2-40B4-BE49-F238E27FC236}">
+                  <a16:creationId xmlns:a16="http://schemas.microsoft.com/office/drawing/2014/main" id="{15476A39-10C3-127D-952E-73AD493215BC}"/>
+                </a:ext>
+              </a:extLst>
+            </p:cNvPr>
+            <p:cNvSpPr/>
+            <p:nvPr/>
+          </p:nvSpPr>
+          <p:spPr>
+            <a:xfrm>
+              <a:off x="427081" y="263129"/>
+              <a:ext cx="1371600" cy="1371600"/>
+            </a:xfrm>
+            <a:prstGeom prst="rect">
+              <a:avLst/>
+            </a:prstGeom>
+            <a:noFill/>
+            <a:ln w="76200">
+              <a:solidFill>
+                <a:schemeClr val="tx1"/>
+              </a:solidFill>
+            </a:ln>
+          </p:spPr>
+          <p:style>
+            <a:lnRef idx="2">
+              <a:schemeClr val="accent1">
+                <a:shade val="50000"/>
+              </a:schemeClr>
+            </a:lnRef>
+            <a:fillRef idx="1">
+              <a:schemeClr val="accent1"/>
+            </a:fillRef>
+            <a:effectRef idx="0">
+              <a:schemeClr val="accent1"/>
+            </a:effectRef>
+            <a:fontRef idx="minor">
+              <a:schemeClr val="lt1"/>
+            </a:fontRef>
+          </p:style>
+          <p:txBody>
+            <a:bodyPr rtlCol="0" anchor="ctr"/>
+            <a:lstStyle/>
+            <a:p>
+              <a:pPr algn="ctr"/>
+              <a:endParaRPr lang="en-US"/>
+            </a:p>
+          </p:txBody>
+        </p:sp>
+        <p:sp>
+          <p:nvSpPr>
+            <p:cNvPr id="182" name="Plaque 181">
+              <a:extLst>
+                <a:ext uri="{FF2B5EF4-FFF2-40B4-BE49-F238E27FC236}">
+                  <a16:creationId xmlns:a16="http://schemas.microsoft.com/office/drawing/2014/main" id="{96446AB4-BE97-8FEE-6964-BA45D84A09CC}"/>
+                </a:ext>
+              </a:extLst>
+            </p:cNvPr>
+            <p:cNvSpPr/>
+            <p:nvPr/>
+          </p:nvSpPr>
+          <p:spPr>
+            <a:xfrm>
+              <a:off x="573033" y="478473"/>
+              <a:ext cx="1097280" cy="1097280"/>
+            </a:xfrm>
+            <a:prstGeom prst="plaque">
+              <a:avLst/>
+            </a:prstGeom>
+            <a:noFill/>
+            <a:ln w="38100" cap="flat" cmpd="sng" algn="ctr">
+              <a:solidFill>
+                <a:schemeClr val="dk1"/>
+              </a:solidFill>
+              <a:prstDash val="solid"/>
+              <a:round/>
+              <a:headEnd type="none" w="med" len="med"/>
+              <a:tailEnd type="none" w="med" len="med"/>
+            </a:ln>
+          </p:spPr>
+          <p:style>
+            <a:lnRef idx="0">
+              <a:scrgbClr r="0" g="0" b="0"/>
+            </a:lnRef>
+            <a:fillRef idx="0">
+              <a:scrgbClr r="0" g="0" b="0"/>
+            </a:fillRef>
+            <a:effectRef idx="0">
+              <a:scrgbClr r="0" g="0" b="0"/>
+            </a:effectRef>
+            <a:fontRef idx="minor">
+              <a:schemeClr val="dk1"/>
+            </a:fontRef>
+          </p:style>
+          <p:txBody>
+            <a:bodyPr rtlCol="0" anchor="ctr"/>
+            <a:lstStyle/>
+            <a:p>
+              <a:pPr algn="ctr"/>
+              <a:endParaRPr lang="en-US"/>
+            </a:p>
+          </p:txBody>
+        </p:sp>
+      </p:grpSp>
+      <p:grpSp>
+        <p:nvGrpSpPr>
+          <p:cNvPr id="183" name="Group 182">
+            <a:extLst>
+              <a:ext uri="{FF2B5EF4-FFF2-40B4-BE49-F238E27FC236}">
+                <a16:creationId xmlns:a16="http://schemas.microsoft.com/office/drawing/2014/main" id="{BD7074B7-5CE6-3B9B-8197-F3D1B145AE2B}"/>
+              </a:ext>
+            </a:extLst>
+          </p:cNvPr>
+          <p:cNvGrpSpPr/>
+          <p:nvPr/>
+        </p:nvGrpSpPr>
+        <p:grpSpPr>
+          <a:xfrm>
+            <a:off x="4347149" y="3740951"/>
+            <a:ext cx="631137" cy="505972"/>
+            <a:chOff x="5010218" y="2694841"/>
+            <a:chExt cx="2523392" cy="2022962"/>
+          </a:xfrm>
+        </p:grpSpPr>
+        <p:sp>
+          <p:nvSpPr>
+            <p:cNvPr id="184" name="Moon 183">
+              <a:extLst>
+                <a:ext uri="{FF2B5EF4-FFF2-40B4-BE49-F238E27FC236}">
+                  <a16:creationId xmlns:a16="http://schemas.microsoft.com/office/drawing/2014/main" id="{3D7EBBA5-9CF3-1F53-BE6A-A1F6D6E86D40}"/>
+                </a:ext>
+              </a:extLst>
+            </p:cNvPr>
+            <p:cNvSpPr/>
+            <p:nvPr/>
+          </p:nvSpPr>
+          <p:spPr>
+            <a:xfrm rot="16200000">
+              <a:off x="5683528" y="2021531"/>
+              <a:ext cx="1176771" cy="2523392"/>
+            </a:xfrm>
+            <a:prstGeom prst="moon">
+              <a:avLst>
+                <a:gd name="adj" fmla="val 55230"/>
+              </a:avLst>
+            </a:prstGeom>
+          </p:spPr>
+          <p:style>
+            <a:lnRef idx="2">
+              <a:schemeClr val="dk1">
+                <a:shade val="50000"/>
+              </a:schemeClr>
+            </a:lnRef>
+            <a:fillRef idx="1">
+              <a:schemeClr val="dk1"/>
+            </a:fillRef>
+            <a:effectRef idx="0">
+              <a:schemeClr val="dk1"/>
+            </a:effectRef>
+            <a:fontRef idx="minor">
+              <a:schemeClr val="lt1"/>
+            </a:fontRef>
+          </p:style>
+          <p:txBody>
+            <a:bodyPr rtlCol="0" anchor="ctr"/>
+            <a:lstStyle/>
+            <a:p>
+              <a:pPr algn="ctr"/>
+              <a:endParaRPr lang="en-US"/>
+            </a:p>
+          </p:txBody>
+        </p:sp>
+        <p:sp>
+          <p:nvSpPr>
+            <p:cNvPr id="185" name="Isosceles Triangle 184">
+              <a:extLst>
+                <a:ext uri="{FF2B5EF4-FFF2-40B4-BE49-F238E27FC236}">
+                  <a16:creationId xmlns:a16="http://schemas.microsoft.com/office/drawing/2014/main" id="{E887F0EA-0FFC-8F5C-AEEF-A8D613587A59}"/>
+                </a:ext>
+              </a:extLst>
+            </p:cNvPr>
+            <p:cNvSpPr/>
+            <p:nvPr/>
+          </p:nvSpPr>
+          <p:spPr>
+            <a:xfrm>
+              <a:off x="6132701" y="2694841"/>
+              <a:ext cx="278423" cy="1723292"/>
+            </a:xfrm>
+            <a:prstGeom prst="triangle">
+              <a:avLst/>
+            </a:prstGeom>
+          </p:spPr>
+          <p:style>
+            <a:lnRef idx="2">
+              <a:schemeClr val="dk1">
+                <a:shade val="50000"/>
+              </a:schemeClr>
+            </a:lnRef>
+            <a:fillRef idx="1">
+              <a:schemeClr val="dk1"/>
+            </a:fillRef>
+            <a:effectRef idx="0">
+              <a:schemeClr val="dk1"/>
+            </a:effectRef>
+            <a:fontRef idx="minor">
+              <a:schemeClr val="lt1"/>
+            </a:fontRef>
+          </p:style>
+          <p:txBody>
+            <a:bodyPr rtlCol="0" anchor="ctr"/>
+            <a:lstStyle/>
+            <a:p>
+              <a:pPr algn="ctr"/>
+              <a:endParaRPr lang="en-US"/>
+            </a:p>
+          </p:txBody>
+        </p:sp>
+        <p:sp>
+          <p:nvSpPr>
+            <p:cNvPr id="186" name="Moon 185">
+              <a:extLst>
+                <a:ext uri="{FF2B5EF4-FFF2-40B4-BE49-F238E27FC236}">
+                  <a16:creationId xmlns:a16="http://schemas.microsoft.com/office/drawing/2014/main" id="{5930625C-DAA3-8CD7-47AC-1E199E590909}"/>
+                </a:ext>
+              </a:extLst>
+            </p:cNvPr>
+            <p:cNvSpPr/>
+            <p:nvPr/>
+          </p:nvSpPr>
+          <p:spPr>
+            <a:xfrm rot="5400000">
+              <a:off x="5972241" y="3787285"/>
+              <a:ext cx="599341" cy="1261696"/>
+            </a:xfrm>
+            <a:prstGeom prst="moon">
+              <a:avLst>
+                <a:gd name="adj" fmla="val 37626"/>
+              </a:avLst>
+            </a:prstGeom>
+          </p:spPr>
+          <p:style>
+            <a:lnRef idx="2">
+              <a:schemeClr val="dk1">
+                <a:shade val="50000"/>
+              </a:schemeClr>
+            </a:lnRef>
+            <a:fillRef idx="1">
+              <a:schemeClr val="dk1"/>
+            </a:fillRef>
+            <a:effectRef idx="0">
+              <a:schemeClr val="dk1"/>
+            </a:effectRef>
+            <a:fontRef idx="minor">
+              <a:schemeClr val="lt1"/>
+            </a:fontRef>
+          </p:style>
+          <p:txBody>
+            <a:bodyPr rtlCol="0" anchor="ctr"/>
+            <a:lstStyle/>
+            <a:p>
+              <a:pPr algn="ctr"/>
+              <a:endParaRPr lang="en-US"/>
+            </a:p>
+          </p:txBody>
+        </p:sp>
+        <p:grpSp>
+          <p:nvGrpSpPr>
+            <p:cNvPr id="187" name="Group 186">
+              <a:extLst>
+                <a:ext uri="{FF2B5EF4-FFF2-40B4-BE49-F238E27FC236}">
+                  <a16:creationId xmlns:a16="http://schemas.microsoft.com/office/drawing/2014/main" id="{25396257-336E-7E85-B11C-1AE15822B1B2}"/>
+                </a:ext>
+              </a:extLst>
+            </p:cNvPr>
+            <p:cNvGrpSpPr/>
+            <p:nvPr/>
+          </p:nvGrpSpPr>
+          <p:grpSpPr>
+            <a:xfrm>
+              <a:off x="5240214" y="3072211"/>
+              <a:ext cx="862512" cy="587761"/>
+              <a:chOff x="5240214" y="3072211"/>
+              <a:chExt cx="862512" cy="587761"/>
+            </a:xfrm>
+          </p:grpSpPr>
+          <p:sp>
+            <p:nvSpPr>
+              <p:cNvPr id="192" name="Oval 191">
+                <a:extLst>
+                  <a:ext uri="{FF2B5EF4-FFF2-40B4-BE49-F238E27FC236}">
+                    <a16:creationId xmlns:a16="http://schemas.microsoft.com/office/drawing/2014/main" id="{0D78027D-2290-4C6B-F720-2C9B672D35E2}"/>
+                  </a:ext>
+                </a:extLst>
+              </p:cNvPr>
+              <p:cNvSpPr/>
+              <p:nvPr/>
+            </p:nvSpPr>
+            <p:spPr>
+              <a:xfrm>
+                <a:off x="5475402" y="3233279"/>
+                <a:ext cx="274320" cy="274320"/>
+              </a:xfrm>
+              <a:prstGeom prst="ellipse">
+                <a:avLst/>
+              </a:prstGeom>
+            </p:spPr>
+            <p:style>
+              <a:lnRef idx="2">
+                <a:schemeClr val="dk1"/>
+              </a:lnRef>
+              <a:fillRef idx="1">
+                <a:schemeClr val="lt1"/>
+              </a:fillRef>
+              <a:effectRef idx="0">
+                <a:schemeClr val="dk1"/>
+              </a:effectRef>
+              <a:fontRef idx="minor">
+                <a:schemeClr val="dk1"/>
+              </a:fontRef>
+            </p:style>
+            <p:txBody>
+              <a:bodyPr rtlCol="0" anchor="ctr"/>
+              <a:lstStyle/>
+              <a:p>
+                <a:pPr algn="ctr"/>
+                <a:endParaRPr lang="en-US"/>
+              </a:p>
+            </p:txBody>
+          </p:sp>
+          <p:sp>
+            <p:nvSpPr>
+              <p:cNvPr id="193" name="Oval 192">
+                <a:extLst>
+                  <a:ext uri="{FF2B5EF4-FFF2-40B4-BE49-F238E27FC236}">
+                    <a16:creationId xmlns:a16="http://schemas.microsoft.com/office/drawing/2014/main" id="{88DC8E7C-3845-A2B4-4868-F38A0F271863}"/>
+                  </a:ext>
+                </a:extLst>
+              </p:cNvPr>
+              <p:cNvSpPr/>
+              <p:nvPr/>
+            </p:nvSpPr>
+            <p:spPr>
+              <a:xfrm>
+                <a:off x="5240214" y="3072211"/>
+                <a:ext cx="228600" cy="228600"/>
+              </a:xfrm>
+              <a:prstGeom prst="ellipse">
+                <a:avLst/>
+              </a:prstGeom>
+            </p:spPr>
+            <p:style>
+              <a:lnRef idx="2">
+                <a:schemeClr val="dk1"/>
+              </a:lnRef>
+              <a:fillRef idx="1">
+                <a:schemeClr val="lt1"/>
+              </a:fillRef>
+              <a:effectRef idx="0">
+                <a:schemeClr val="dk1"/>
+              </a:effectRef>
+              <a:fontRef idx="minor">
+                <a:schemeClr val="dk1"/>
+              </a:fontRef>
+            </p:style>
+            <p:txBody>
+              <a:bodyPr rtlCol="0" anchor="ctr"/>
+              <a:lstStyle/>
+              <a:p>
+                <a:pPr algn="ctr"/>
+                <a:endParaRPr lang="en-US"/>
+              </a:p>
+            </p:txBody>
+          </p:sp>
+          <p:sp>
+            <p:nvSpPr>
+              <p:cNvPr id="194" name="Oval 193">
+                <a:extLst>
+                  <a:ext uri="{FF2B5EF4-FFF2-40B4-BE49-F238E27FC236}">
+                    <a16:creationId xmlns:a16="http://schemas.microsoft.com/office/drawing/2014/main" id="{5253FC48-0E0E-6FDD-036D-01053E164AEA}"/>
+                  </a:ext>
+                </a:extLst>
+              </p:cNvPr>
+              <p:cNvSpPr/>
+              <p:nvPr/>
+            </p:nvSpPr>
+            <p:spPr>
+              <a:xfrm>
+                <a:off x="5782686" y="3339932"/>
+                <a:ext cx="320040" cy="320040"/>
+              </a:xfrm>
+              <a:prstGeom prst="ellipse">
+                <a:avLst/>
+              </a:prstGeom>
+            </p:spPr>
+            <p:style>
+              <a:lnRef idx="2">
+                <a:schemeClr val="dk1"/>
+              </a:lnRef>
+              <a:fillRef idx="1">
+                <a:schemeClr val="lt1"/>
+              </a:fillRef>
+              <a:effectRef idx="0">
+                <a:schemeClr val="dk1"/>
+              </a:effectRef>
+              <a:fontRef idx="minor">
+                <a:schemeClr val="dk1"/>
+              </a:fontRef>
+            </p:style>
+            <p:txBody>
+              <a:bodyPr rtlCol="0" anchor="ctr"/>
+              <a:lstStyle/>
+              <a:p>
+                <a:pPr algn="ctr"/>
+                <a:endParaRPr lang="en-US"/>
+              </a:p>
+            </p:txBody>
+          </p:sp>
+        </p:grpSp>
+        <p:grpSp>
+          <p:nvGrpSpPr>
+            <p:cNvPr id="188" name="Group 187">
+              <a:extLst>
+                <a:ext uri="{FF2B5EF4-FFF2-40B4-BE49-F238E27FC236}">
+                  <a16:creationId xmlns:a16="http://schemas.microsoft.com/office/drawing/2014/main" id="{B3CB005E-B57E-B712-DCAF-C02AB5711356}"/>
+                </a:ext>
+              </a:extLst>
+            </p:cNvPr>
+            <p:cNvGrpSpPr/>
+            <p:nvPr/>
+          </p:nvGrpSpPr>
+          <p:grpSpPr>
+            <a:xfrm flipH="1">
+              <a:off x="6400433" y="3085350"/>
+              <a:ext cx="862512" cy="587761"/>
+              <a:chOff x="5240214" y="3072211"/>
+              <a:chExt cx="862512" cy="587761"/>
+            </a:xfrm>
+          </p:grpSpPr>
+          <p:sp>
+            <p:nvSpPr>
+              <p:cNvPr id="189" name="Oval 188">
+                <a:extLst>
+                  <a:ext uri="{FF2B5EF4-FFF2-40B4-BE49-F238E27FC236}">
+                    <a16:creationId xmlns:a16="http://schemas.microsoft.com/office/drawing/2014/main" id="{43BCE9CA-BB0A-081B-CDF5-89A580CEB1FF}"/>
+                  </a:ext>
+                </a:extLst>
+              </p:cNvPr>
+              <p:cNvSpPr/>
+              <p:nvPr/>
+            </p:nvSpPr>
+            <p:spPr>
+              <a:xfrm>
+                <a:off x="5475402" y="3233279"/>
+                <a:ext cx="274320" cy="274320"/>
+              </a:xfrm>
+              <a:prstGeom prst="ellipse">
+                <a:avLst/>
+              </a:prstGeom>
+            </p:spPr>
+            <p:style>
+              <a:lnRef idx="2">
+                <a:schemeClr val="dk1"/>
+              </a:lnRef>
+              <a:fillRef idx="1">
+                <a:schemeClr val="lt1"/>
+              </a:fillRef>
+              <a:effectRef idx="0">
+                <a:schemeClr val="dk1"/>
+              </a:effectRef>
+              <a:fontRef idx="minor">
+                <a:schemeClr val="dk1"/>
+              </a:fontRef>
+            </p:style>
+            <p:txBody>
+              <a:bodyPr rtlCol="0" anchor="ctr"/>
+              <a:lstStyle/>
+              <a:p>
+                <a:pPr algn="ctr"/>
+                <a:endParaRPr lang="en-US"/>
+              </a:p>
+            </p:txBody>
+          </p:sp>
+          <p:sp>
+            <p:nvSpPr>
+              <p:cNvPr id="190" name="Oval 189">
+                <a:extLst>
+                  <a:ext uri="{FF2B5EF4-FFF2-40B4-BE49-F238E27FC236}">
+                    <a16:creationId xmlns:a16="http://schemas.microsoft.com/office/drawing/2014/main" id="{16CA2659-0B0C-FF9B-6901-1573BEE82289}"/>
+                  </a:ext>
+                </a:extLst>
+              </p:cNvPr>
+              <p:cNvSpPr/>
+              <p:nvPr/>
+            </p:nvSpPr>
+            <p:spPr>
+              <a:xfrm>
+                <a:off x="5240214" y="3072211"/>
+                <a:ext cx="228600" cy="228600"/>
+              </a:xfrm>
+              <a:prstGeom prst="ellipse">
+                <a:avLst/>
+              </a:prstGeom>
+            </p:spPr>
+            <p:style>
+              <a:lnRef idx="2">
+                <a:schemeClr val="dk1"/>
+              </a:lnRef>
+              <a:fillRef idx="1">
+                <a:schemeClr val="lt1"/>
+              </a:fillRef>
+              <a:effectRef idx="0">
+                <a:schemeClr val="dk1"/>
+              </a:effectRef>
+              <a:fontRef idx="minor">
+                <a:schemeClr val="dk1"/>
+              </a:fontRef>
+            </p:style>
+            <p:txBody>
+              <a:bodyPr rtlCol="0" anchor="ctr"/>
+              <a:lstStyle/>
+              <a:p>
+                <a:pPr algn="ctr"/>
+                <a:endParaRPr lang="en-US"/>
+              </a:p>
+            </p:txBody>
+          </p:sp>
+          <p:sp>
+            <p:nvSpPr>
+              <p:cNvPr id="191" name="Oval 190">
+                <a:extLst>
+                  <a:ext uri="{FF2B5EF4-FFF2-40B4-BE49-F238E27FC236}">
+                    <a16:creationId xmlns:a16="http://schemas.microsoft.com/office/drawing/2014/main" id="{F543D99B-8F36-DB1C-105C-440D1CE77738}"/>
+                  </a:ext>
+                </a:extLst>
+              </p:cNvPr>
+              <p:cNvSpPr/>
+              <p:nvPr/>
+            </p:nvSpPr>
+            <p:spPr>
+              <a:xfrm>
+                <a:off x="5782686" y="3339932"/>
+                <a:ext cx="320040" cy="320040"/>
+              </a:xfrm>
+              <a:prstGeom prst="ellipse">
+                <a:avLst/>
+              </a:prstGeom>
+            </p:spPr>
+            <p:style>
+              <a:lnRef idx="2">
+                <a:schemeClr val="dk1"/>
+              </a:lnRef>
+              <a:fillRef idx="1">
+                <a:schemeClr val="lt1"/>
+              </a:fillRef>
+              <a:effectRef idx="0">
+                <a:schemeClr val="dk1"/>
+              </a:effectRef>
+              <a:fontRef idx="minor">
+                <a:schemeClr val="dk1"/>
+              </a:fontRef>
+            </p:style>
+            <p:txBody>
+              <a:bodyPr rtlCol="0" anchor="ctr"/>
+              <a:lstStyle/>
+              <a:p>
+                <a:pPr algn="ctr"/>
+                <a:endParaRPr lang="en-US"/>
+              </a:p>
+            </p:txBody>
+          </p:sp>
+        </p:grpSp>
+      </p:grpSp>
+      <p:grpSp>
+        <p:nvGrpSpPr>
+          <p:cNvPr id="195" name="Group 194">
+            <a:extLst>
+              <a:ext uri="{FF2B5EF4-FFF2-40B4-BE49-F238E27FC236}">
+                <a16:creationId xmlns:a16="http://schemas.microsoft.com/office/drawing/2014/main" id="{DB1EAEC0-BE94-7F50-9DEF-9BFBD170356A}"/>
+              </a:ext>
+            </a:extLst>
+          </p:cNvPr>
+          <p:cNvGrpSpPr/>
+          <p:nvPr/>
+        </p:nvGrpSpPr>
+        <p:grpSpPr>
+          <a:xfrm>
+            <a:off x="6057100" y="3513402"/>
+            <a:ext cx="577458" cy="886118"/>
+            <a:chOff x="5275383" y="2444259"/>
+            <a:chExt cx="2101363" cy="3224576"/>
+          </a:xfrm>
+        </p:grpSpPr>
+        <p:sp>
+          <p:nvSpPr>
+            <p:cNvPr id="196" name="Isosceles Triangle 195">
+              <a:extLst>
+                <a:ext uri="{FF2B5EF4-FFF2-40B4-BE49-F238E27FC236}">
+                  <a16:creationId xmlns:a16="http://schemas.microsoft.com/office/drawing/2014/main" id="{C9FAB2E9-76C6-BDD0-5AB3-3FA35378D211}"/>
+                </a:ext>
+              </a:extLst>
+            </p:cNvPr>
+            <p:cNvSpPr/>
+            <p:nvPr/>
+          </p:nvSpPr>
+          <p:spPr>
+            <a:xfrm rot="10800000">
+              <a:off x="5653455" y="3974123"/>
+              <a:ext cx="1345223" cy="474785"/>
+            </a:xfrm>
+            <a:prstGeom prst="triangle">
+              <a:avLst/>
+            </a:prstGeom>
+            <a:ln w="28575"/>
+          </p:spPr>
+          <p:style>
+            <a:lnRef idx="2">
+              <a:schemeClr val="dk1"/>
+            </a:lnRef>
+            <a:fillRef idx="1">
+              <a:schemeClr val="lt1"/>
+            </a:fillRef>
+            <a:effectRef idx="0">
+              <a:schemeClr val="dk1"/>
+            </a:effectRef>
+            <a:fontRef idx="minor">
+              <a:schemeClr val="dk1"/>
+            </a:fontRef>
+          </p:style>
+          <p:txBody>
+            <a:bodyPr rtlCol="0" anchor="ctr"/>
+            <a:lstStyle/>
+            <a:p>
+              <a:pPr algn="ctr"/>
+              <a:endParaRPr lang="en-US"/>
+            </a:p>
+          </p:txBody>
+        </p:sp>
+        <p:sp>
+          <p:nvSpPr>
+            <p:cNvPr id="197" name="Isosceles Triangle 196">
+              <a:extLst>
+                <a:ext uri="{FF2B5EF4-FFF2-40B4-BE49-F238E27FC236}">
+                  <a16:creationId xmlns:a16="http://schemas.microsoft.com/office/drawing/2014/main" id="{7E9CB0F5-9D08-D49C-E28F-02FABF76B268}"/>
+                </a:ext>
+              </a:extLst>
+            </p:cNvPr>
+            <p:cNvSpPr/>
+            <p:nvPr/>
+          </p:nvSpPr>
+          <p:spPr>
+            <a:xfrm>
+              <a:off x="5675434" y="2699238"/>
+              <a:ext cx="219808" cy="1274885"/>
+            </a:xfrm>
+            <a:prstGeom prst="triangle">
+              <a:avLst/>
+            </a:prstGeom>
+          </p:spPr>
+          <p:style>
+            <a:lnRef idx="2">
+              <a:schemeClr val="dk1">
+                <a:shade val="50000"/>
+              </a:schemeClr>
+            </a:lnRef>
+            <a:fillRef idx="1">
+              <a:schemeClr val="dk1"/>
+            </a:fillRef>
+            <a:effectRef idx="0">
+              <a:schemeClr val="dk1"/>
+            </a:effectRef>
+            <a:fontRef idx="minor">
+              <a:schemeClr val="lt1"/>
+            </a:fontRef>
+          </p:style>
+          <p:txBody>
+            <a:bodyPr rtlCol="0" anchor="ctr"/>
+            <a:lstStyle/>
+            <a:p>
+              <a:pPr algn="ctr"/>
+              <a:endParaRPr lang="en-US"/>
+            </a:p>
+          </p:txBody>
+        </p:sp>
+        <p:sp>
+          <p:nvSpPr>
+            <p:cNvPr id="198" name="Isosceles Triangle 197">
+              <a:extLst>
+                <a:ext uri="{FF2B5EF4-FFF2-40B4-BE49-F238E27FC236}">
+                  <a16:creationId xmlns:a16="http://schemas.microsoft.com/office/drawing/2014/main" id="{B6DC7B9D-D2B6-B3DE-A933-C87112D71B06}"/>
+                </a:ext>
+              </a:extLst>
+            </p:cNvPr>
+            <p:cNvSpPr/>
+            <p:nvPr/>
+          </p:nvSpPr>
+          <p:spPr>
+            <a:xfrm>
+              <a:off x="6778870" y="2699237"/>
+              <a:ext cx="219808" cy="1274885"/>
+            </a:xfrm>
+            <a:prstGeom prst="triangle">
+              <a:avLst/>
+            </a:prstGeom>
+          </p:spPr>
+          <p:style>
+            <a:lnRef idx="2">
+              <a:schemeClr val="dk1">
+                <a:shade val="50000"/>
+              </a:schemeClr>
+            </a:lnRef>
+            <a:fillRef idx="1">
+              <a:schemeClr val="dk1"/>
+            </a:fillRef>
+            <a:effectRef idx="0">
+              <a:schemeClr val="dk1"/>
+            </a:effectRef>
+            <a:fontRef idx="minor">
+              <a:schemeClr val="lt1"/>
+            </a:fontRef>
+          </p:style>
+          <p:txBody>
+            <a:bodyPr rtlCol="0" anchor="ctr"/>
+            <a:lstStyle/>
+            <a:p>
+              <a:pPr algn="ctr"/>
+              <a:endParaRPr lang="en-US"/>
+            </a:p>
+          </p:txBody>
+        </p:sp>
+        <p:sp>
+          <p:nvSpPr>
+            <p:cNvPr id="199" name="Isosceles Triangle 198">
+              <a:extLst>
+                <a:ext uri="{FF2B5EF4-FFF2-40B4-BE49-F238E27FC236}">
+                  <a16:creationId xmlns:a16="http://schemas.microsoft.com/office/drawing/2014/main" id="{86F2C79D-630B-FF3B-27B0-ADAFABEEFAA1}"/>
+                </a:ext>
+              </a:extLst>
+            </p:cNvPr>
+            <p:cNvSpPr/>
+            <p:nvPr/>
+          </p:nvSpPr>
+          <p:spPr>
+            <a:xfrm>
+              <a:off x="6216162" y="2444259"/>
+              <a:ext cx="219808" cy="1529863"/>
+            </a:xfrm>
+            <a:prstGeom prst="triangle">
+              <a:avLst/>
+            </a:prstGeom>
+          </p:spPr>
+          <p:style>
+            <a:lnRef idx="2">
+              <a:schemeClr val="dk1"/>
+            </a:lnRef>
+            <a:fillRef idx="1">
+              <a:schemeClr val="lt1"/>
+            </a:fillRef>
+            <a:effectRef idx="0">
+              <a:schemeClr val="dk1"/>
+            </a:effectRef>
+            <a:fontRef idx="minor">
+              <a:schemeClr val="dk1"/>
+            </a:fontRef>
+          </p:style>
+          <p:txBody>
+            <a:bodyPr rtlCol="0" anchor="ctr"/>
+            <a:lstStyle/>
+            <a:p>
+              <a:pPr algn="ctr"/>
+              <a:endParaRPr lang="en-US"/>
+            </a:p>
+          </p:txBody>
+        </p:sp>
+        <p:sp>
+          <p:nvSpPr>
+            <p:cNvPr id="200" name="Moon 199">
+              <a:extLst>
+                <a:ext uri="{FF2B5EF4-FFF2-40B4-BE49-F238E27FC236}">
+                  <a16:creationId xmlns:a16="http://schemas.microsoft.com/office/drawing/2014/main" id="{25622979-1FEC-8A3C-C168-D657104ADDC6}"/>
+                </a:ext>
+              </a:extLst>
+            </p:cNvPr>
+            <p:cNvSpPr/>
+            <p:nvPr/>
+          </p:nvSpPr>
+          <p:spPr>
+            <a:xfrm rot="5400000">
+              <a:off x="6060099" y="4769824"/>
+              <a:ext cx="531929" cy="1266094"/>
+            </a:xfrm>
+            <a:prstGeom prst="moon">
+              <a:avLst>
+                <a:gd name="adj" fmla="val 38235"/>
+              </a:avLst>
+            </a:prstGeom>
+          </p:spPr>
+          <p:style>
+            <a:lnRef idx="2">
+              <a:schemeClr val="dk1"/>
+            </a:lnRef>
+            <a:fillRef idx="1">
+              <a:schemeClr val="lt1"/>
+            </a:fillRef>
+            <a:effectRef idx="0">
+              <a:schemeClr val="dk1"/>
+            </a:effectRef>
+            <a:fontRef idx="minor">
+              <a:schemeClr val="dk1"/>
+            </a:fontRef>
+          </p:style>
+          <p:txBody>
+            <a:bodyPr rtlCol="0" anchor="ctr"/>
+            <a:lstStyle/>
+            <a:p>
+              <a:pPr algn="ctr"/>
+              <a:endParaRPr lang="en-US"/>
+            </a:p>
+          </p:txBody>
+        </p:sp>
+        <p:sp>
+          <p:nvSpPr>
+            <p:cNvPr id="201" name="Isosceles Triangle 200">
+              <a:extLst>
+                <a:ext uri="{FF2B5EF4-FFF2-40B4-BE49-F238E27FC236}">
+                  <a16:creationId xmlns:a16="http://schemas.microsoft.com/office/drawing/2014/main" id="{D5F703A3-E8F4-A41F-99BF-477F8C03022D}"/>
+                </a:ext>
+              </a:extLst>
+            </p:cNvPr>
+            <p:cNvSpPr/>
+            <p:nvPr/>
+          </p:nvSpPr>
+          <p:spPr>
+            <a:xfrm rot="10800000">
+              <a:off x="6000749" y="4211516"/>
+              <a:ext cx="650633" cy="1424349"/>
+            </a:xfrm>
+            <a:prstGeom prst="triangle">
+              <a:avLst/>
+            </a:prstGeom>
+          </p:spPr>
+          <p:style>
+            <a:lnRef idx="2">
+              <a:schemeClr val="dk1">
+                <a:shade val="50000"/>
+              </a:schemeClr>
+            </a:lnRef>
+            <a:fillRef idx="1">
+              <a:schemeClr val="dk1"/>
+            </a:fillRef>
+            <a:effectRef idx="0">
+              <a:schemeClr val="dk1"/>
+            </a:effectRef>
+            <a:fontRef idx="minor">
+              <a:schemeClr val="lt1"/>
+            </a:fontRef>
+          </p:style>
+          <p:txBody>
+            <a:bodyPr rtlCol="0" anchor="ctr"/>
+            <a:lstStyle/>
+            <a:p>
+              <a:pPr algn="ctr"/>
+              <a:endParaRPr lang="en-US"/>
+            </a:p>
+          </p:txBody>
+        </p:sp>
+        <p:sp>
+          <p:nvSpPr>
+            <p:cNvPr id="202" name="Moon 201">
+              <a:extLst>
+                <a:ext uri="{FF2B5EF4-FFF2-40B4-BE49-F238E27FC236}">
+                  <a16:creationId xmlns:a16="http://schemas.microsoft.com/office/drawing/2014/main" id="{8BC6147D-0044-3A8E-2BB9-06C87E4EBFEF}"/>
+                </a:ext>
+              </a:extLst>
+            </p:cNvPr>
+            <p:cNvSpPr/>
+            <p:nvPr/>
+          </p:nvSpPr>
+          <p:spPr>
+            <a:xfrm rot="5400000">
+              <a:off x="6027126" y="3697166"/>
+              <a:ext cx="597877" cy="2101363"/>
+            </a:xfrm>
+            <a:prstGeom prst="moon">
+              <a:avLst/>
+            </a:prstGeom>
+          </p:spPr>
+          <p:style>
+            <a:lnRef idx="2">
+              <a:schemeClr val="dk1">
+                <a:shade val="50000"/>
+              </a:schemeClr>
+            </a:lnRef>
+            <a:fillRef idx="1">
+              <a:schemeClr val="dk1"/>
+            </a:fillRef>
+            <a:effectRef idx="0">
+              <a:schemeClr val="dk1"/>
+            </a:effectRef>
+            <a:fontRef idx="minor">
+              <a:schemeClr val="lt1"/>
+            </a:fontRef>
+          </p:style>
+          <p:txBody>
+            <a:bodyPr rtlCol="0" anchor="ctr"/>
+            <a:lstStyle/>
+            <a:p>
+              <a:pPr algn="ctr"/>
+              <a:endParaRPr lang="en-US"/>
+            </a:p>
+          </p:txBody>
+        </p:sp>
+      </p:grpSp>
+      <p:grpSp>
+        <p:nvGrpSpPr>
+          <p:cNvPr id="203" name="Group 202">
+            <a:extLst>
+              <a:ext uri="{FF2B5EF4-FFF2-40B4-BE49-F238E27FC236}">
+                <a16:creationId xmlns:a16="http://schemas.microsoft.com/office/drawing/2014/main" id="{D8D3A3CE-09CD-16A4-4BBA-2886526A1FAB}"/>
+              </a:ext>
+            </a:extLst>
+          </p:cNvPr>
+          <p:cNvGrpSpPr/>
+          <p:nvPr/>
+        </p:nvGrpSpPr>
+        <p:grpSpPr>
+          <a:xfrm>
+            <a:off x="7493608" y="3574822"/>
+            <a:ext cx="1020292" cy="877614"/>
+            <a:chOff x="5664202" y="1634729"/>
+            <a:chExt cx="2809442" cy="2416570"/>
+          </a:xfrm>
+        </p:grpSpPr>
+        <p:sp>
+          <p:nvSpPr>
+            <p:cNvPr id="204" name="Moon 203">
+              <a:extLst>
+                <a:ext uri="{FF2B5EF4-FFF2-40B4-BE49-F238E27FC236}">
+                  <a16:creationId xmlns:a16="http://schemas.microsoft.com/office/drawing/2014/main" id="{6122CCDF-9E81-2BC5-C471-27D01E1E9E7B}"/>
+                </a:ext>
+              </a:extLst>
+            </p:cNvPr>
+            <p:cNvSpPr/>
+            <p:nvPr/>
+          </p:nvSpPr>
+          <p:spPr>
+            <a:xfrm rot="16200000" flipV="1">
+              <a:off x="6630773" y="1057275"/>
+              <a:ext cx="876300" cy="2809442"/>
+            </a:xfrm>
+            <a:prstGeom prst="moon">
+              <a:avLst/>
+            </a:prstGeom>
+          </p:spPr>
+          <p:style>
+            <a:lnRef idx="2">
+              <a:schemeClr val="dk1"/>
+            </a:lnRef>
+            <a:fillRef idx="1">
+              <a:schemeClr val="lt1"/>
+            </a:fillRef>
+            <a:effectRef idx="0">
+              <a:schemeClr val="dk1"/>
+            </a:effectRef>
+            <a:fontRef idx="minor">
+              <a:schemeClr val="dk1"/>
+            </a:fontRef>
+          </p:style>
+          <p:txBody>
+            <a:bodyPr rtlCol="0" anchor="ctr"/>
+            <a:lstStyle/>
+            <a:p>
+              <a:pPr algn="ctr"/>
+              <a:endParaRPr lang="en-US"/>
+            </a:p>
+          </p:txBody>
+        </p:sp>
+        <p:sp>
+          <p:nvSpPr>
+            <p:cNvPr id="205" name="Moon 204">
+              <a:extLst>
+                <a:ext uri="{FF2B5EF4-FFF2-40B4-BE49-F238E27FC236}">
+                  <a16:creationId xmlns:a16="http://schemas.microsoft.com/office/drawing/2014/main" id="{EAE94984-D4CF-7322-2069-A902D9757E96}"/>
+                </a:ext>
+              </a:extLst>
+            </p:cNvPr>
+            <p:cNvSpPr/>
+            <p:nvPr/>
+          </p:nvSpPr>
+          <p:spPr>
+            <a:xfrm rot="16200000" flipV="1">
+              <a:off x="6777590" y="2133133"/>
+              <a:ext cx="658596" cy="2101848"/>
+            </a:xfrm>
+            <a:prstGeom prst="moon">
+              <a:avLst/>
+            </a:prstGeom>
+          </p:spPr>
+          <p:style>
+            <a:lnRef idx="2">
+              <a:schemeClr val="dk1"/>
+            </a:lnRef>
+            <a:fillRef idx="1">
+              <a:schemeClr val="lt1"/>
+            </a:fillRef>
+            <a:effectRef idx="0">
+              <a:schemeClr val="dk1"/>
+            </a:effectRef>
+            <a:fontRef idx="minor">
+              <a:schemeClr val="dk1"/>
+            </a:fontRef>
+          </p:style>
+          <p:txBody>
+            <a:bodyPr rtlCol="0" anchor="ctr"/>
+            <a:lstStyle/>
+            <a:p>
+              <a:pPr algn="ctr"/>
+              <a:endParaRPr lang="en-US"/>
+            </a:p>
+          </p:txBody>
+        </p:sp>
+        <p:sp>
+          <p:nvSpPr>
+            <p:cNvPr id="206" name="Moon 205">
+              <a:extLst>
+                <a:ext uri="{FF2B5EF4-FFF2-40B4-BE49-F238E27FC236}">
+                  <a16:creationId xmlns:a16="http://schemas.microsoft.com/office/drawing/2014/main" id="{DEDA6087-F2B2-885C-14B1-00F19DCF4AA6}"/>
+                </a:ext>
+              </a:extLst>
+            </p:cNvPr>
+            <p:cNvSpPr/>
+            <p:nvPr/>
+          </p:nvSpPr>
+          <p:spPr>
+            <a:xfrm rot="16200000" flipV="1">
+              <a:off x="6839285" y="3112240"/>
+              <a:ext cx="535205" cy="1337436"/>
+            </a:xfrm>
+            <a:prstGeom prst="moon">
+              <a:avLst/>
+            </a:prstGeom>
+          </p:spPr>
+          <p:style>
+            <a:lnRef idx="2">
+              <a:schemeClr val="dk1"/>
+            </a:lnRef>
+            <a:fillRef idx="1">
+              <a:schemeClr val="lt1"/>
+            </a:fillRef>
+            <a:effectRef idx="0">
+              <a:schemeClr val="dk1"/>
+            </a:effectRef>
+            <a:fontRef idx="minor">
+              <a:schemeClr val="dk1"/>
+            </a:fontRef>
+          </p:style>
+          <p:txBody>
+            <a:bodyPr rtlCol="0" anchor="ctr"/>
+            <a:lstStyle/>
+            <a:p>
+              <a:pPr algn="ctr"/>
+              <a:endParaRPr lang="en-US"/>
+            </a:p>
+          </p:txBody>
+        </p:sp>
+        <p:sp>
+          <p:nvSpPr>
+            <p:cNvPr id="207" name="Trapezoid 206">
+              <a:extLst>
+                <a:ext uri="{FF2B5EF4-FFF2-40B4-BE49-F238E27FC236}">
+                  <a16:creationId xmlns:a16="http://schemas.microsoft.com/office/drawing/2014/main" id="{41F11F10-62C3-32A3-E023-268E5CE7AAD2}"/>
+                </a:ext>
+              </a:extLst>
+            </p:cNvPr>
+            <p:cNvSpPr/>
+            <p:nvPr/>
+          </p:nvSpPr>
+          <p:spPr>
+            <a:xfrm rot="10800000">
+              <a:off x="6527800" y="2060178"/>
+              <a:ext cx="1168400" cy="1991121"/>
+            </a:xfrm>
+            <a:prstGeom prst="trapezoid">
+              <a:avLst/>
+            </a:prstGeom>
+          </p:spPr>
+          <p:style>
+            <a:lnRef idx="2">
+              <a:schemeClr val="dk1">
+                <a:shade val="50000"/>
+              </a:schemeClr>
+            </a:lnRef>
+            <a:fillRef idx="1">
+              <a:schemeClr val="dk1"/>
+            </a:fillRef>
+            <a:effectRef idx="0">
+              <a:schemeClr val="dk1"/>
+            </a:effectRef>
+            <a:fontRef idx="minor">
+              <a:schemeClr val="lt1"/>
+            </a:fontRef>
+          </p:style>
+          <p:txBody>
+            <a:bodyPr rtlCol="0" anchor="ctr"/>
+            <a:lstStyle/>
+            <a:p>
+              <a:pPr algn="ctr"/>
+              <a:endParaRPr lang="en-US"/>
+            </a:p>
+          </p:txBody>
+        </p:sp>
+        <p:sp>
+          <p:nvSpPr>
+            <p:cNvPr id="208" name="Trapezoid 207">
+              <a:extLst>
+                <a:ext uri="{FF2B5EF4-FFF2-40B4-BE49-F238E27FC236}">
+                  <a16:creationId xmlns:a16="http://schemas.microsoft.com/office/drawing/2014/main" id="{9DCE2A57-0658-2E54-27AF-C71209FC1D79}"/>
+                </a:ext>
+              </a:extLst>
+            </p:cNvPr>
+            <p:cNvSpPr/>
+            <p:nvPr/>
+          </p:nvSpPr>
+          <p:spPr>
+            <a:xfrm>
+              <a:off x="6667977" y="1634729"/>
+              <a:ext cx="877823" cy="341783"/>
+            </a:xfrm>
+            <a:prstGeom prst="trapezoid">
+              <a:avLst/>
+            </a:prstGeom>
+          </p:spPr>
+          <p:style>
+            <a:lnRef idx="2">
+              <a:schemeClr val="dk1">
+                <a:shade val="50000"/>
+              </a:schemeClr>
+            </a:lnRef>
+            <a:fillRef idx="1">
+              <a:schemeClr val="dk1"/>
+            </a:fillRef>
+            <a:effectRef idx="0">
+              <a:schemeClr val="dk1"/>
+            </a:effectRef>
+            <a:fontRef idx="minor">
+              <a:schemeClr val="lt1"/>
+            </a:fontRef>
+          </p:style>
+          <p:txBody>
+            <a:bodyPr rtlCol="0" anchor="ctr"/>
+            <a:lstStyle/>
+            <a:p>
+              <a:pPr algn="ctr"/>
+              <a:endParaRPr lang="en-US"/>
+            </a:p>
+          </p:txBody>
+        </p:sp>
+        <p:sp>
+          <p:nvSpPr>
+            <p:cNvPr id="209" name="Oval 208">
+              <a:extLst>
+                <a:ext uri="{FF2B5EF4-FFF2-40B4-BE49-F238E27FC236}">
+                  <a16:creationId xmlns:a16="http://schemas.microsoft.com/office/drawing/2014/main" id="{5C51AE42-9D9A-6F33-2F46-6CF735BDCE15}"/>
+                </a:ext>
+              </a:extLst>
+            </p:cNvPr>
+            <p:cNvSpPr/>
+            <p:nvPr/>
+          </p:nvSpPr>
+          <p:spPr>
+            <a:xfrm>
+              <a:off x="6832567" y="2092176"/>
+              <a:ext cx="548640" cy="548640"/>
+            </a:xfrm>
+            <a:prstGeom prst="ellipse">
+              <a:avLst/>
+            </a:prstGeom>
+          </p:spPr>
+          <p:style>
+            <a:lnRef idx="2">
+              <a:schemeClr val="dk1"/>
+            </a:lnRef>
+            <a:fillRef idx="1">
+              <a:schemeClr val="lt1"/>
+            </a:fillRef>
+            <a:effectRef idx="0">
+              <a:schemeClr val="dk1"/>
+            </a:effectRef>
+            <a:fontRef idx="minor">
+              <a:schemeClr val="dk1"/>
+            </a:fontRef>
+          </p:style>
+          <p:txBody>
+            <a:bodyPr rtlCol="0" anchor="ctr"/>
+            <a:lstStyle/>
+            <a:p>
+              <a:pPr algn="ctr"/>
+              <a:endParaRPr lang="en-US"/>
+            </a:p>
+          </p:txBody>
+        </p:sp>
+        <p:sp>
+          <p:nvSpPr>
+            <p:cNvPr id="210" name="Oval 209">
+              <a:extLst>
+                <a:ext uri="{FF2B5EF4-FFF2-40B4-BE49-F238E27FC236}">
+                  <a16:creationId xmlns:a16="http://schemas.microsoft.com/office/drawing/2014/main" id="{DB76EDFE-A1FE-6ED0-644B-0E9251D57C0F}"/>
+                </a:ext>
+              </a:extLst>
+            </p:cNvPr>
+            <p:cNvSpPr/>
+            <p:nvPr/>
+          </p:nvSpPr>
+          <p:spPr>
+            <a:xfrm>
+              <a:off x="6878287" y="2672814"/>
+              <a:ext cx="457200" cy="457200"/>
+            </a:xfrm>
+            <a:prstGeom prst="ellipse">
+              <a:avLst/>
+            </a:prstGeom>
+          </p:spPr>
+          <p:style>
+            <a:lnRef idx="2">
+              <a:schemeClr val="dk1"/>
+            </a:lnRef>
+            <a:fillRef idx="1">
+              <a:schemeClr val="lt1"/>
+            </a:fillRef>
+            <a:effectRef idx="0">
+              <a:schemeClr val="dk1"/>
+            </a:effectRef>
+            <a:fontRef idx="minor">
+              <a:schemeClr val="dk1"/>
+            </a:fontRef>
+          </p:style>
+          <p:txBody>
+            <a:bodyPr rtlCol="0" anchor="ctr"/>
+            <a:lstStyle/>
+            <a:p>
+              <a:pPr algn="ctr"/>
+              <a:endParaRPr lang="en-US"/>
+            </a:p>
+          </p:txBody>
+        </p:sp>
+        <p:sp>
+          <p:nvSpPr>
+            <p:cNvPr id="211" name="Oval 210">
+              <a:extLst>
+                <a:ext uri="{FF2B5EF4-FFF2-40B4-BE49-F238E27FC236}">
+                  <a16:creationId xmlns:a16="http://schemas.microsoft.com/office/drawing/2014/main" id="{1122EE9D-1EC1-5A79-3DB8-DDF7563F0F0B}"/>
+                </a:ext>
+              </a:extLst>
+            </p:cNvPr>
+            <p:cNvSpPr/>
+            <p:nvPr/>
+          </p:nvSpPr>
+          <p:spPr>
+            <a:xfrm>
+              <a:off x="6924007" y="3160831"/>
+              <a:ext cx="365760" cy="365760"/>
+            </a:xfrm>
+            <a:prstGeom prst="ellipse">
+              <a:avLst/>
+            </a:prstGeom>
+          </p:spPr>
+          <p:style>
+            <a:lnRef idx="2">
+              <a:schemeClr val="dk1"/>
+            </a:lnRef>
+            <a:fillRef idx="1">
+              <a:schemeClr val="lt1"/>
+            </a:fillRef>
+            <a:effectRef idx="0">
+              <a:schemeClr val="dk1"/>
+            </a:effectRef>
+            <a:fontRef idx="minor">
+              <a:schemeClr val="dk1"/>
+            </a:fontRef>
+          </p:style>
+          <p:txBody>
+            <a:bodyPr rtlCol="0" anchor="ctr"/>
+            <a:lstStyle/>
+            <a:p>
+              <a:pPr algn="ctr"/>
+              <a:endParaRPr lang="en-US"/>
+            </a:p>
+          </p:txBody>
+        </p:sp>
+        <p:sp>
+          <p:nvSpPr>
+            <p:cNvPr id="212" name="Oval 211">
+              <a:extLst>
+                <a:ext uri="{FF2B5EF4-FFF2-40B4-BE49-F238E27FC236}">
+                  <a16:creationId xmlns:a16="http://schemas.microsoft.com/office/drawing/2014/main" id="{D7E31F2C-EC79-3E89-2900-0107B740EE4C}"/>
+                </a:ext>
+              </a:extLst>
+            </p:cNvPr>
+            <p:cNvSpPr/>
+            <p:nvPr/>
+          </p:nvSpPr>
+          <p:spPr>
+            <a:xfrm>
+              <a:off x="6969727" y="3583710"/>
+              <a:ext cx="274320" cy="274320"/>
+            </a:xfrm>
+            <a:prstGeom prst="ellipse">
+              <a:avLst/>
+            </a:prstGeom>
+          </p:spPr>
+          <p:style>
+            <a:lnRef idx="2">
+              <a:schemeClr val="dk1"/>
+            </a:lnRef>
+            <a:fillRef idx="1">
+              <a:schemeClr val="lt1"/>
+            </a:fillRef>
+            <a:effectRef idx="0">
+              <a:schemeClr val="dk1"/>
             </a:effectRef>
             <a:fontRef idx="minor">
               <a:schemeClr val="dk1"/>

--- a/image process/drawings sifi.pptx
+++ b/image process/drawings sifi.pptx
@@ -200,7 +200,7 @@
           <a:p>
             <a:fld id="{7700C406-2328-4788-AE79-437B6607AD22}" type="datetimeFigureOut">
               <a:rPr lang="en-US" smtClean="0"/>
-              <a:t>6/6/2022</a:t>
+              <a:t>6/7/2022</a:t>
             </a:fld>
             <a:endParaRPr lang="en-US"/>
           </a:p>
@@ -614,7 +614,7 @@
           <a:p>
             <a:fld id="{9EC8CD53-0620-48F2-A3BB-2B10BDA60E52}" type="datetimeFigureOut">
               <a:rPr lang="en-US" smtClean="0"/>
-              <a:t>6/6/2022</a:t>
+              <a:t>6/7/2022</a:t>
             </a:fld>
             <a:endParaRPr lang="en-US"/>
           </a:p>
@@ -812,7 +812,7 @@
           <a:p>
             <a:fld id="{9EC8CD53-0620-48F2-A3BB-2B10BDA60E52}" type="datetimeFigureOut">
               <a:rPr lang="en-US" smtClean="0"/>
-              <a:t>6/6/2022</a:t>
+              <a:t>6/7/2022</a:t>
             </a:fld>
             <a:endParaRPr lang="en-US"/>
           </a:p>
@@ -1020,7 +1020,7 @@
           <a:p>
             <a:fld id="{9EC8CD53-0620-48F2-A3BB-2B10BDA60E52}" type="datetimeFigureOut">
               <a:rPr lang="en-US" smtClean="0"/>
-              <a:t>6/6/2022</a:t>
+              <a:t>6/7/2022</a:t>
             </a:fld>
             <a:endParaRPr lang="en-US"/>
           </a:p>
@@ -1218,7 +1218,7 @@
           <a:p>
             <a:fld id="{9EC8CD53-0620-48F2-A3BB-2B10BDA60E52}" type="datetimeFigureOut">
               <a:rPr lang="en-US" smtClean="0"/>
-              <a:t>6/6/2022</a:t>
+              <a:t>6/7/2022</a:t>
             </a:fld>
             <a:endParaRPr lang="en-US"/>
           </a:p>
@@ -1493,7 +1493,7 @@
           <a:p>
             <a:fld id="{9EC8CD53-0620-48F2-A3BB-2B10BDA60E52}" type="datetimeFigureOut">
               <a:rPr lang="en-US" smtClean="0"/>
-              <a:t>6/6/2022</a:t>
+              <a:t>6/7/2022</a:t>
             </a:fld>
             <a:endParaRPr lang="en-US"/>
           </a:p>
@@ -1758,7 +1758,7 @@
           <a:p>
             <a:fld id="{9EC8CD53-0620-48F2-A3BB-2B10BDA60E52}" type="datetimeFigureOut">
               <a:rPr lang="en-US" smtClean="0"/>
-              <a:t>6/6/2022</a:t>
+              <a:t>6/7/2022</a:t>
             </a:fld>
             <a:endParaRPr lang="en-US"/>
           </a:p>
@@ -2170,7 +2170,7 @@
           <a:p>
             <a:fld id="{9EC8CD53-0620-48F2-A3BB-2B10BDA60E52}" type="datetimeFigureOut">
               <a:rPr lang="en-US" smtClean="0"/>
-              <a:t>6/6/2022</a:t>
+              <a:t>6/7/2022</a:t>
             </a:fld>
             <a:endParaRPr lang="en-US"/>
           </a:p>
@@ -2311,7 +2311,7 @@
           <a:p>
             <a:fld id="{9EC8CD53-0620-48F2-A3BB-2B10BDA60E52}" type="datetimeFigureOut">
               <a:rPr lang="en-US" smtClean="0"/>
-              <a:t>6/6/2022</a:t>
+              <a:t>6/7/2022</a:t>
             </a:fld>
             <a:endParaRPr lang="en-US"/>
           </a:p>
@@ -2424,7 +2424,7 @@
           <a:p>
             <a:fld id="{9EC8CD53-0620-48F2-A3BB-2B10BDA60E52}" type="datetimeFigureOut">
               <a:rPr lang="en-US" smtClean="0"/>
-              <a:t>6/6/2022</a:t>
+              <a:t>6/7/2022</a:t>
             </a:fld>
             <a:endParaRPr lang="en-US"/>
           </a:p>
@@ -2735,7 +2735,7 @@
           <a:p>
             <a:fld id="{9EC8CD53-0620-48F2-A3BB-2B10BDA60E52}" type="datetimeFigureOut">
               <a:rPr lang="en-US" smtClean="0"/>
-              <a:t>6/6/2022</a:t>
+              <a:t>6/7/2022</a:t>
             </a:fld>
             <a:endParaRPr lang="en-US"/>
           </a:p>
@@ -3023,7 +3023,7 @@
           <a:p>
             <a:fld id="{9EC8CD53-0620-48F2-A3BB-2B10BDA60E52}" type="datetimeFigureOut">
               <a:rPr lang="en-US" smtClean="0"/>
-              <a:t>6/6/2022</a:t>
+              <a:t>6/7/2022</a:t>
             </a:fld>
             <a:endParaRPr lang="en-US"/>
           </a:p>
@@ -3264,7 +3264,7 @@
           <a:p>
             <a:fld id="{9EC8CD53-0620-48F2-A3BB-2B10BDA60E52}" type="datetimeFigureOut">
               <a:rPr lang="en-US" smtClean="0"/>
-              <a:t>6/6/2022</a:t>
+              <a:t>6/7/2022</a:t>
             </a:fld>
             <a:endParaRPr lang="en-US"/>
           </a:p>
@@ -7692,133 +7692,6 @@
       </p:grpSp>
       <p:grpSp>
         <p:nvGrpSpPr>
-          <p:cNvPr id="140" name="Group 139">
-            <a:extLst>
-              <a:ext uri="{FF2B5EF4-FFF2-40B4-BE49-F238E27FC236}">
-                <a16:creationId xmlns:a16="http://schemas.microsoft.com/office/drawing/2014/main" id="{EEE75188-60A5-59C8-3F37-C14A27256FE0}"/>
-              </a:ext>
-            </a:extLst>
-          </p:cNvPr>
-          <p:cNvGrpSpPr/>
-          <p:nvPr/>
-        </p:nvGrpSpPr>
-        <p:grpSpPr>
-          <a:xfrm>
-            <a:off x="10582728" y="2266212"/>
-            <a:ext cx="1371600" cy="1371600"/>
-            <a:chOff x="1298501" y="962272"/>
-            <a:chExt cx="1371600" cy="1371600"/>
-          </a:xfrm>
-        </p:grpSpPr>
-        <p:sp>
-          <p:nvSpPr>
-            <p:cNvPr id="141" name="Rectangle 140">
-              <a:extLst>
-                <a:ext uri="{FF2B5EF4-FFF2-40B4-BE49-F238E27FC236}">
-                  <a16:creationId xmlns:a16="http://schemas.microsoft.com/office/drawing/2014/main" id="{65093C6E-42DB-F820-4D70-AC36960B1F39}"/>
-                </a:ext>
-              </a:extLst>
-            </p:cNvPr>
-            <p:cNvSpPr/>
-            <p:nvPr/>
-          </p:nvSpPr>
-          <p:spPr>
-            <a:xfrm>
-              <a:off x="1298501" y="962272"/>
-              <a:ext cx="1371600" cy="1371600"/>
-            </a:xfrm>
-            <a:prstGeom prst="rect">
-              <a:avLst/>
-            </a:prstGeom>
-            <a:noFill/>
-            <a:ln w="76200">
-              <a:solidFill>
-                <a:schemeClr val="tx1"/>
-              </a:solidFill>
-            </a:ln>
-          </p:spPr>
-          <p:style>
-            <a:lnRef idx="2">
-              <a:schemeClr val="accent1">
-                <a:shade val="50000"/>
-              </a:schemeClr>
-            </a:lnRef>
-            <a:fillRef idx="1">
-              <a:schemeClr val="accent1"/>
-            </a:fillRef>
-            <a:effectRef idx="0">
-              <a:schemeClr val="accent1"/>
-            </a:effectRef>
-            <a:fontRef idx="minor">
-              <a:schemeClr val="lt1"/>
-            </a:fontRef>
-          </p:style>
-          <p:txBody>
-            <a:bodyPr rtlCol="0" anchor="ctr"/>
-            <a:lstStyle/>
-            <a:p>
-              <a:pPr algn="ctr"/>
-              <a:endParaRPr lang="en-US"/>
-            </a:p>
-          </p:txBody>
-        </p:sp>
-        <p:sp>
-          <p:nvSpPr>
-            <p:cNvPr id="142" name="Arrow: Pentagon 141">
-              <a:extLst>
-                <a:ext uri="{FF2B5EF4-FFF2-40B4-BE49-F238E27FC236}">
-                  <a16:creationId xmlns:a16="http://schemas.microsoft.com/office/drawing/2014/main" id="{6C2DB26D-0C0A-BDB5-3207-531A6F583A5B}"/>
-                </a:ext>
-              </a:extLst>
-            </p:cNvPr>
-            <p:cNvSpPr/>
-            <p:nvPr/>
-          </p:nvSpPr>
-          <p:spPr>
-            <a:xfrm rot="5400000">
-              <a:off x="1435661" y="1173775"/>
-              <a:ext cx="1097280" cy="1097280"/>
-            </a:xfrm>
-            <a:prstGeom prst="homePlate">
-              <a:avLst/>
-            </a:prstGeom>
-            <a:noFill/>
-            <a:ln w="38100" cap="flat" cmpd="sng" algn="ctr">
-              <a:solidFill>
-                <a:schemeClr val="dk1"/>
-              </a:solidFill>
-              <a:prstDash val="solid"/>
-              <a:round/>
-              <a:headEnd type="none" w="med" len="med"/>
-              <a:tailEnd type="none" w="med" len="med"/>
-            </a:ln>
-          </p:spPr>
-          <p:style>
-            <a:lnRef idx="0">
-              <a:scrgbClr r="0" g="0" b="0"/>
-            </a:lnRef>
-            <a:fillRef idx="0">
-              <a:scrgbClr r="0" g="0" b="0"/>
-            </a:fillRef>
-            <a:effectRef idx="0">
-              <a:scrgbClr r="0" g="0" b="0"/>
-            </a:effectRef>
-            <a:fontRef idx="minor">
-              <a:schemeClr val="dk1"/>
-            </a:fontRef>
-          </p:style>
-          <p:txBody>
-            <a:bodyPr rtlCol="0" anchor="ctr"/>
-            <a:lstStyle/>
-            <a:p>
-              <a:pPr algn="ctr"/>
-              <a:endParaRPr lang="en-US"/>
-            </a:p>
-          </p:txBody>
-        </p:sp>
-      </p:grpSp>
-      <p:grpSp>
-        <p:nvGrpSpPr>
           <p:cNvPr id="78" name="Group 77">
             <a:extLst>
               <a:ext uri="{FF2B5EF4-FFF2-40B4-BE49-F238E27FC236}">
@@ -9184,1527 +9057,6 @@
       </p:grpSp>
       <p:grpSp>
         <p:nvGrpSpPr>
-          <p:cNvPr id="82" name="Group 81">
-            <a:extLst>
-              <a:ext uri="{FF2B5EF4-FFF2-40B4-BE49-F238E27FC236}">
-                <a16:creationId xmlns:a16="http://schemas.microsoft.com/office/drawing/2014/main" id="{0F72E5F3-1ECD-92E4-BA89-45EF20385377}"/>
-              </a:ext>
-            </a:extLst>
-          </p:cNvPr>
-          <p:cNvGrpSpPr/>
-          <p:nvPr/>
-        </p:nvGrpSpPr>
-        <p:grpSpPr>
-          <a:xfrm>
-            <a:off x="10990969" y="2514419"/>
-            <a:ext cx="545684" cy="748114"/>
-            <a:chOff x="6712366" y="4633331"/>
-            <a:chExt cx="545684" cy="748114"/>
-          </a:xfrm>
-        </p:grpSpPr>
-        <p:grpSp>
-          <p:nvGrpSpPr>
-            <p:cNvPr id="178" name="Group 177">
-              <a:extLst>
-                <a:ext uri="{FF2B5EF4-FFF2-40B4-BE49-F238E27FC236}">
-                  <a16:creationId xmlns:a16="http://schemas.microsoft.com/office/drawing/2014/main" id="{2BADC1B8-A9A2-F803-DBA0-DE982375543A}"/>
-                </a:ext>
-              </a:extLst>
-            </p:cNvPr>
-            <p:cNvGrpSpPr/>
-            <p:nvPr/>
-          </p:nvGrpSpPr>
-          <p:grpSpPr>
-            <a:xfrm>
-              <a:off x="6712366" y="4868535"/>
-              <a:ext cx="545684" cy="512910"/>
-              <a:chOff x="6203315" y="3923025"/>
-              <a:chExt cx="969301" cy="911086"/>
-            </a:xfrm>
-          </p:grpSpPr>
-          <p:sp>
-            <p:nvSpPr>
-              <p:cNvPr id="179" name="Flowchart: Manual Operation 178">
-                <a:extLst>
-                  <a:ext uri="{FF2B5EF4-FFF2-40B4-BE49-F238E27FC236}">
-                    <a16:creationId xmlns:a16="http://schemas.microsoft.com/office/drawing/2014/main" id="{1D226BC2-A0DE-C6B5-F608-0C62082B7622}"/>
-                  </a:ext>
-                </a:extLst>
-              </p:cNvPr>
-              <p:cNvSpPr/>
-              <p:nvPr/>
-            </p:nvSpPr>
-            <p:spPr>
-              <a:xfrm flipV="1">
-                <a:off x="6362626" y="4024689"/>
-                <a:ext cx="659305" cy="211637"/>
-              </a:xfrm>
-              <a:prstGeom prst="flowChartManualOperation">
-                <a:avLst/>
-              </a:prstGeom>
-            </p:spPr>
-            <p:style>
-              <a:lnRef idx="2">
-                <a:schemeClr val="dk1">
-                  <a:shade val="50000"/>
-                </a:schemeClr>
-              </a:lnRef>
-              <a:fillRef idx="1">
-                <a:schemeClr val="dk1"/>
-              </a:fillRef>
-              <a:effectRef idx="0">
-                <a:schemeClr val="dk1"/>
-              </a:effectRef>
-              <a:fontRef idx="minor">
-                <a:schemeClr val="lt1"/>
-              </a:fontRef>
-            </p:style>
-            <p:txBody>
-              <a:bodyPr rtlCol="0" anchor="ctr"/>
-              <a:lstStyle/>
-              <a:p>
-                <a:pPr algn="ctr"/>
-                <a:endParaRPr lang="en-US"/>
-              </a:p>
-            </p:txBody>
-          </p:sp>
-          <p:sp>
-            <p:nvSpPr>
-              <p:cNvPr id="180" name="Rectangle 179">
-                <a:extLst>
-                  <a:ext uri="{FF2B5EF4-FFF2-40B4-BE49-F238E27FC236}">
-                    <a16:creationId xmlns:a16="http://schemas.microsoft.com/office/drawing/2014/main" id="{94C314E8-2052-8B00-A7C9-6078E0065975}"/>
-                  </a:ext>
-                </a:extLst>
-              </p:cNvPr>
-              <p:cNvSpPr/>
-              <p:nvPr/>
-            </p:nvSpPr>
-            <p:spPr>
-              <a:xfrm>
-                <a:off x="6568843" y="4236326"/>
-                <a:ext cx="246871" cy="380209"/>
-              </a:xfrm>
-              <a:prstGeom prst="rect">
-                <a:avLst/>
-              </a:prstGeom>
-            </p:spPr>
-            <p:style>
-              <a:lnRef idx="2">
-                <a:schemeClr val="dk1">
-                  <a:shade val="50000"/>
-                </a:schemeClr>
-              </a:lnRef>
-              <a:fillRef idx="1">
-                <a:schemeClr val="dk1"/>
-              </a:fillRef>
-              <a:effectRef idx="0">
-                <a:schemeClr val="dk1"/>
-              </a:effectRef>
-              <a:fontRef idx="minor">
-                <a:schemeClr val="lt1"/>
-              </a:fontRef>
-            </p:style>
-            <p:txBody>
-              <a:bodyPr rtlCol="0" anchor="ctr"/>
-              <a:lstStyle/>
-              <a:p>
-                <a:pPr algn="ctr"/>
-                <a:endParaRPr lang="en-US"/>
-              </a:p>
-            </p:txBody>
-          </p:sp>
-          <p:sp>
-            <p:nvSpPr>
-              <p:cNvPr id="181" name="Rectangle 180">
-                <a:extLst>
-                  <a:ext uri="{FF2B5EF4-FFF2-40B4-BE49-F238E27FC236}">
-                    <a16:creationId xmlns:a16="http://schemas.microsoft.com/office/drawing/2014/main" id="{9246D572-005B-536B-87FC-C72D73291DA6}"/>
-                  </a:ext>
-                </a:extLst>
-              </p:cNvPr>
-              <p:cNvSpPr/>
-              <p:nvPr/>
-            </p:nvSpPr>
-            <p:spPr>
-              <a:xfrm>
-                <a:off x="6312622" y="4552470"/>
-                <a:ext cx="759312" cy="211637"/>
-              </a:xfrm>
-              <a:prstGeom prst="rect">
-                <a:avLst/>
-              </a:prstGeom>
-            </p:spPr>
-            <p:style>
-              <a:lnRef idx="2">
-                <a:schemeClr val="dk1">
-                  <a:shade val="50000"/>
-                </a:schemeClr>
-              </a:lnRef>
-              <a:fillRef idx="1">
-                <a:schemeClr val="dk1"/>
-              </a:fillRef>
-              <a:effectRef idx="0">
-                <a:schemeClr val="dk1"/>
-              </a:effectRef>
-              <a:fontRef idx="minor">
-                <a:schemeClr val="lt1"/>
-              </a:fontRef>
-            </p:style>
-            <p:txBody>
-              <a:bodyPr rtlCol="0" anchor="ctr"/>
-              <a:lstStyle/>
-              <a:p>
-                <a:pPr algn="ctr"/>
-                <a:endParaRPr lang="en-US"/>
-              </a:p>
-            </p:txBody>
-          </p:sp>
-          <p:sp>
-            <p:nvSpPr>
-              <p:cNvPr id="182" name="Arrow: Right 181">
-                <a:extLst>
-                  <a:ext uri="{FF2B5EF4-FFF2-40B4-BE49-F238E27FC236}">
-                    <a16:creationId xmlns:a16="http://schemas.microsoft.com/office/drawing/2014/main" id="{5708BA10-C33A-2F1B-296A-582BC4633CA2}"/>
-                  </a:ext>
-                </a:extLst>
-              </p:cNvPr>
-              <p:cNvSpPr/>
-              <p:nvPr/>
-            </p:nvSpPr>
-            <p:spPr>
-              <a:xfrm rot="16200000">
-                <a:off x="6070609" y="4570249"/>
-                <a:ext cx="396568" cy="131155"/>
-              </a:xfrm>
-              <a:prstGeom prst="rightArrow">
-                <a:avLst>
-                  <a:gd name="adj1" fmla="val 50000"/>
-                  <a:gd name="adj2" fmla="val 86364"/>
-                </a:avLst>
-              </a:prstGeom>
-              <a:ln w="28575"/>
-            </p:spPr>
-            <p:style>
-              <a:lnRef idx="2">
-                <a:schemeClr val="dk1"/>
-              </a:lnRef>
-              <a:fillRef idx="1">
-                <a:schemeClr val="lt1"/>
-              </a:fillRef>
-              <a:effectRef idx="0">
-                <a:schemeClr val="dk1"/>
-              </a:effectRef>
-              <a:fontRef idx="minor">
-                <a:schemeClr val="dk1"/>
-              </a:fontRef>
-            </p:style>
-            <p:txBody>
-              <a:bodyPr rtlCol="0" anchor="ctr"/>
-              <a:lstStyle/>
-              <a:p>
-                <a:pPr algn="ctr"/>
-                <a:endParaRPr lang="en-US"/>
-              </a:p>
-            </p:txBody>
-          </p:sp>
-          <p:sp>
-            <p:nvSpPr>
-              <p:cNvPr id="183" name="Arrow: Right 182">
-                <a:extLst>
-                  <a:ext uri="{FF2B5EF4-FFF2-40B4-BE49-F238E27FC236}">
-                    <a16:creationId xmlns:a16="http://schemas.microsoft.com/office/drawing/2014/main" id="{D299453C-17E5-B9C7-A455-47CA24EFC20D}"/>
-                  </a:ext>
-                </a:extLst>
-              </p:cNvPr>
-              <p:cNvSpPr/>
-              <p:nvPr/>
-            </p:nvSpPr>
-            <p:spPr>
-              <a:xfrm rot="16200000">
-                <a:off x="6908755" y="4570249"/>
-                <a:ext cx="396568" cy="131155"/>
-              </a:xfrm>
-              <a:prstGeom prst="rightArrow">
-                <a:avLst>
-                  <a:gd name="adj1" fmla="val 50000"/>
-                  <a:gd name="adj2" fmla="val 88636"/>
-                </a:avLst>
-              </a:prstGeom>
-              <a:ln w="28575"/>
-            </p:spPr>
-            <p:style>
-              <a:lnRef idx="2">
-                <a:schemeClr val="dk1"/>
-              </a:lnRef>
-              <a:fillRef idx="1">
-                <a:schemeClr val="lt1"/>
-              </a:fillRef>
-              <a:effectRef idx="0">
-                <a:schemeClr val="dk1"/>
-              </a:effectRef>
-              <a:fontRef idx="minor">
-                <a:schemeClr val="dk1"/>
-              </a:fontRef>
-            </p:style>
-            <p:txBody>
-              <a:bodyPr rtlCol="0" anchor="ctr"/>
-              <a:lstStyle/>
-              <a:p>
-                <a:pPr algn="ctr"/>
-                <a:endParaRPr lang="en-US"/>
-              </a:p>
-            </p:txBody>
-          </p:sp>
-          <p:sp>
-            <p:nvSpPr>
-              <p:cNvPr id="184" name="Rectangle 183">
-                <a:extLst>
-                  <a:ext uri="{FF2B5EF4-FFF2-40B4-BE49-F238E27FC236}">
-                    <a16:creationId xmlns:a16="http://schemas.microsoft.com/office/drawing/2014/main" id="{4C485F57-0E4F-E604-0423-42685F050D8E}"/>
-                  </a:ext>
-                </a:extLst>
-              </p:cNvPr>
-              <p:cNvSpPr/>
-              <p:nvPr/>
-            </p:nvSpPr>
-            <p:spPr>
-              <a:xfrm>
-                <a:off x="6519185" y="3923938"/>
-                <a:ext cx="49659" cy="92153"/>
-              </a:xfrm>
-              <a:prstGeom prst="rect">
-                <a:avLst/>
-              </a:prstGeom>
-              <a:ln w="9525"/>
-            </p:spPr>
-            <p:style>
-              <a:lnRef idx="2">
-                <a:schemeClr val="dk1"/>
-              </a:lnRef>
-              <a:fillRef idx="1">
-                <a:schemeClr val="lt1"/>
-              </a:fillRef>
-              <a:effectRef idx="0">
-                <a:schemeClr val="dk1"/>
-              </a:effectRef>
-              <a:fontRef idx="minor">
-                <a:schemeClr val="dk1"/>
-              </a:fontRef>
-            </p:style>
-            <p:txBody>
-              <a:bodyPr rtlCol="0" anchor="ctr"/>
-              <a:lstStyle/>
-              <a:p>
-                <a:pPr algn="ctr"/>
-                <a:endParaRPr lang="en-US"/>
-              </a:p>
-            </p:txBody>
-          </p:sp>
-          <p:sp>
-            <p:nvSpPr>
-              <p:cNvPr id="185" name="Rectangle 184">
-                <a:extLst>
-                  <a:ext uri="{FF2B5EF4-FFF2-40B4-BE49-F238E27FC236}">
-                    <a16:creationId xmlns:a16="http://schemas.microsoft.com/office/drawing/2014/main" id="{7EA63DA4-AB0D-3526-F0B9-8140892348B1}"/>
-                  </a:ext>
-                </a:extLst>
-              </p:cNvPr>
-              <p:cNvSpPr/>
-              <p:nvPr/>
-            </p:nvSpPr>
-            <p:spPr>
-              <a:xfrm>
-                <a:off x="6807792" y="3923574"/>
-                <a:ext cx="49659" cy="92153"/>
-              </a:xfrm>
-              <a:prstGeom prst="rect">
-                <a:avLst/>
-              </a:prstGeom>
-              <a:ln w="9525"/>
-            </p:spPr>
-            <p:style>
-              <a:lnRef idx="2">
-                <a:schemeClr val="dk1"/>
-              </a:lnRef>
-              <a:fillRef idx="1">
-                <a:schemeClr val="lt1"/>
-              </a:fillRef>
-              <a:effectRef idx="0">
-                <a:schemeClr val="dk1"/>
-              </a:effectRef>
-              <a:fontRef idx="minor">
-                <a:schemeClr val="dk1"/>
-              </a:fontRef>
-            </p:style>
-            <p:txBody>
-              <a:bodyPr rtlCol="0" anchor="ctr"/>
-              <a:lstStyle/>
-              <a:p>
-                <a:pPr algn="ctr"/>
-                <a:endParaRPr lang="en-US"/>
-              </a:p>
-            </p:txBody>
-          </p:sp>
-          <p:sp>
-            <p:nvSpPr>
-              <p:cNvPr id="186" name="Rectangle 185">
-                <a:extLst>
-                  <a:ext uri="{FF2B5EF4-FFF2-40B4-BE49-F238E27FC236}">
-                    <a16:creationId xmlns:a16="http://schemas.microsoft.com/office/drawing/2014/main" id="{07A2080F-99E9-04BA-A6C5-B692986B776F}"/>
-                  </a:ext>
-                </a:extLst>
-              </p:cNvPr>
-              <p:cNvSpPr/>
-              <p:nvPr/>
-            </p:nvSpPr>
-            <p:spPr>
-              <a:xfrm>
-                <a:off x="6609497" y="3923025"/>
-                <a:ext cx="49659" cy="92153"/>
-              </a:xfrm>
-              <a:prstGeom prst="rect">
-                <a:avLst/>
-              </a:prstGeom>
-              <a:ln w="9525"/>
-            </p:spPr>
-            <p:style>
-              <a:lnRef idx="2">
-                <a:schemeClr val="dk1"/>
-              </a:lnRef>
-              <a:fillRef idx="1">
-                <a:schemeClr val="lt1"/>
-              </a:fillRef>
-              <a:effectRef idx="0">
-                <a:schemeClr val="dk1"/>
-              </a:effectRef>
-              <a:fontRef idx="minor">
-                <a:schemeClr val="dk1"/>
-              </a:fontRef>
-            </p:style>
-            <p:txBody>
-              <a:bodyPr rtlCol="0" anchor="ctr"/>
-              <a:lstStyle/>
-              <a:p>
-                <a:pPr algn="ctr"/>
-                <a:endParaRPr lang="en-US"/>
-              </a:p>
-            </p:txBody>
-          </p:sp>
-          <p:sp>
-            <p:nvSpPr>
-              <p:cNvPr id="187" name="Rectangle 186">
-                <a:extLst>
-                  <a:ext uri="{FF2B5EF4-FFF2-40B4-BE49-F238E27FC236}">
-                    <a16:creationId xmlns:a16="http://schemas.microsoft.com/office/drawing/2014/main" id="{B48D2C8B-47B7-AE77-2790-411B85881597}"/>
-                  </a:ext>
-                </a:extLst>
-              </p:cNvPr>
-              <p:cNvSpPr/>
-              <p:nvPr/>
-            </p:nvSpPr>
-            <p:spPr>
-              <a:xfrm>
-                <a:off x="6717479" y="3923574"/>
-                <a:ext cx="49659" cy="92153"/>
-              </a:xfrm>
-              <a:prstGeom prst="rect">
-                <a:avLst/>
-              </a:prstGeom>
-              <a:ln w="9525"/>
-            </p:spPr>
-            <p:style>
-              <a:lnRef idx="2">
-                <a:schemeClr val="dk1"/>
-              </a:lnRef>
-              <a:fillRef idx="1">
-                <a:schemeClr val="lt1"/>
-              </a:fillRef>
-              <a:effectRef idx="0">
-                <a:schemeClr val="dk1"/>
-              </a:effectRef>
-              <a:fontRef idx="minor">
-                <a:schemeClr val="dk1"/>
-              </a:fontRef>
-            </p:style>
-            <p:txBody>
-              <a:bodyPr rtlCol="0" anchor="ctr"/>
-              <a:lstStyle/>
-              <a:p>
-                <a:pPr algn="ctr"/>
-                <a:endParaRPr lang="en-US"/>
-              </a:p>
-            </p:txBody>
-          </p:sp>
-          <p:grpSp>
-            <p:nvGrpSpPr>
-              <p:cNvPr id="188" name="Group 187">
-                <a:extLst>
-                  <a:ext uri="{FF2B5EF4-FFF2-40B4-BE49-F238E27FC236}">
-                    <a16:creationId xmlns:a16="http://schemas.microsoft.com/office/drawing/2014/main" id="{59A42A4B-4294-DC58-8721-78F4A400D82C}"/>
-                  </a:ext>
-                </a:extLst>
-              </p:cNvPr>
-              <p:cNvGrpSpPr/>
-              <p:nvPr/>
-            </p:nvGrpSpPr>
-            <p:grpSpPr>
-              <a:xfrm rot="19228888">
-                <a:off x="6412508" y="4086562"/>
-                <a:ext cx="63146" cy="127118"/>
-                <a:chOff x="3806073" y="5091415"/>
-                <a:chExt cx="134521" cy="270800"/>
-              </a:xfrm>
-            </p:grpSpPr>
-            <p:sp>
-              <p:nvSpPr>
-                <p:cNvPr id="212" name="Rectangle 211">
-                  <a:extLst>
-                    <a:ext uri="{FF2B5EF4-FFF2-40B4-BE49-F238E27FC236}">
-                      <a16:creationId xmlns:a16="http://schemas.microsoft.com/office/drawing/2014/main" id="{35895EFF-B567-0122-1340-B496266BB1FE}"/>
-                    </a:ext>
-                  </a:extLst>
-                </p:cNvPr>
-                <p:cNvSpPr/>
-                <p:nvPr/>
-              </p:nvSpPr>
-              <p:spPr>
-                <a:xfrm>
-                  <a:off x="3850816" y="5091415"/>
-                  <a:ext cx="49415" cy="174378"/>
-                </a:xfrm>
-                <a:prstGeom prst="rect">
-                  <a:avLst/>
-                </a:prstGeom>
-                <a:ln w="9525"/>
-              </p:spPr>
-              <p:style>
-                <a:lnRef idx="2">
-                  <a:schemeClr val="dk1"/>
-                </a:lnRef>
-                <a:fillRef idx="1">
-                  <a:schemeClr val="lt1"/>
-                </a:fillRef>
-                <a:effectRef idx="0">
-                  <a:schemeClr val="dk1"/>
-                </a:effectRef>
-                <a:fontRef idx="minor">
-                  <a:schemeClr val="dk1"/>
-                </a:fontRef>
-              </p:style>
-              <p:txBody>
-                <a:bodyPr rtlCol="0" anchor="ctr"/>
-                <a:lstStyle/>
-                <a:p>
-                  <a:pPr algn="ctr"/>
-                  <a:endParaRPr lang="en-US"/>
-                </a:p>
-              </p:txBody>
-            </p:sp>
-            <p:sp>
-              <p:nvSpPr>
-                <p:cNvPr id="213" name="Oval 212">
-                  <a:extLst>
-                    <a:ext uri="{FF2B5EF4-FFF2-40B4-BE49-F238E27FC236}">
-                      <a16:creationId xmlns:a16="http://schemas.microsoft.com/office/drawing/2014/main" id="{AD8B4816-1544-E660-39D7-F816AC56B7CF}"/>
-                    </a:ext>
-                  </a:extLst>
-                </p:cNvPr>
-                <p:cNvSpPr/>
-                <p:nvPr/>
-              </p:nvSpPr>
-              <p:spPr>
-                <a:xfrm>
-                  <a:off x="3806073" y="5227695"/>
-                  <a:ext cx="134521" cy="134520"/>
-                </a:xfrm>
-                <a:prstGeom prst="ellipse">
-                  <a:avLst/>
-                </a:prstGeom>
-                <a:ln w="9525"/>
-              </p:spPr>
-              <p:style>
-                <a:lnRef idx="2">
-                  <a:schemeClr val="dk1"/>
-                </a:lnRef>
-                <a:fillRef idx="1">
-                  <a:schemeClr val="lt1"/>
-                </a:fillRef>
-                <a:effectRef idx="0">
-                  <a:schemeClr val="dk1"/>
-                </a:effectRef>
-                <a:fontRef idx="minor">
-                  <a:schemeClr val="dk1"/>
-                </a:fontRef>
-              </p:style>
-              <p:txBody>
-                <a:bodyPr rtlCol="0" anchor="ctr"/>
-                <a:lstStyle/>
-                <a:p>
-                  <a:pPr algn="ctr"/>
-                  <a:endParaRPr lang="en-US"/>
-                </a:p>
-              </p:txBody>
-            </p:sp>
-          </p:grpSp>
-          <p:grpSp>
-            <p:nvGrpSpPr>
-              <p:cNvPr id="189" name="Group 188">
-                <a:extLst>
-                  <a:ext uri="{FF2B5EF4-FFF2-40B4-BE49-F238E27FC236}">
-                    <a16:creationId xmlns:a16="http://schemas.microsoft.com/office/drawing/2014/main" id="{C497452D-0247-0ABF-D73F-6274DA1CDA7E}"/>
-                  </a:ext>
-                </a:extLst>
-              </p:cNvPr>
-              <p:cNvGrpSpPr/>
-              <p:nvPr/>
-            </p:nvGrpSpPr>
-            <p:grpSpPr>
-              <a:xfrm rot="9885821">
-                <a:off x="6899501" y="4141179"/>
-                <a:ext cx="63146" cy="127118"/>
-                <a:chOff x="3806073" y="5091415"/>
-                <a:chExt cx="134521" cy="270800"/>
-              </a:xfrm>
-            </p:grpSpPr>
-            <p:sp>
-              <p:nvSpPr>
-                <p:cNvPr id="210" name="Rectangle 209">
-                  <a:extLst>
-                    <a:ext uri="{FF2B5EF4-FFF2-40B4-BE49-F238E27FC236}">
-                      <a16:creationId xmlns:a16="http://schemas.microsoft.com/office/drawing/2014/main" id="{3CE5AB49-53B2-F5C0-85F1-FF10D8A9E5E3}"/>
-                    </a:ext>
-                  </a:extLst>
-                </p:cNvPr>
-                <p:cNvSpPr/>
-                <p:nvPr/>
-              </p:nvSpPr>
-              <p:spPr>
-                <a:xfrm>
-                  <a:off x="3850816" y="5091415"/>
-                  <a:ext cx="49415" cy="174378"/>
-                </a:xfrm>
-                <a:prstGeom prst="rect">
-                  <a:avLst/>
-                </a:prstGeom>
-                <a:ln w="9525"/>
-              </p:spPr>
-              <p:style>
-                <a:lnRef idx="2">
-                  <a:schemeClr val="dk1"/>
-                </a:lnRef>
-                <a:fillRef idx="1">
-                  <a:schemeClr val="lt1"/>
-                </a:fillRef>
-                <a:effectRef idx="0">
-                  <a:schemeClr val="dk1"/>
-                </a:effectRef>
-                <a:fontRef idx="minor">
-                  <a:schemeClr val="dk1"/>
-                </a:fontRef>
-              </p:style>
-              <p:txBody>
-                <a:bodyPr rtlCol="0" anchor="ctr"/>
-                <a:lstStyle/>
-                <a:p>
-                  <a:pPr algn="ctr"/>
-                  <a:endParaRPr lang="en-US"/>
-                </a:p>
-              </p:txBody>
-            </p:sp>
-            <p:sp>
-              <p:nvSpPr>
-                <p:cNvPr id="211" name="Oval 210">
-                  <a:extLst>
-                    <a:ext uri="{FF2B5EF4-FFF2-40B4-BE49-F238E27FC236}">
-                      <a16:creationId xmlns:a16="http://schemas.microsoft.com/office/drawing/2014/main" id="{9D8291B2-39AC-EAF9-AFF0-1A56B12FAD7D}"/>
-                    </a:ext>
-                  </a:extLst>
-                </p:cNvPr>
-                <p:cNvSpPr/>
-                <p:nvPr/>
-              </p:nvSpPr>
-              <p:spPr>
-                <a:xfrm>
-                  <a:off x="3806073" y="5227695"/>
-                  <a:ext cx="134521" cy="134520"/>
-                </a:xfrm>
-                <a:prstGeom prst="ellipse">
-                  <a:avLst/>
-                </a:prstGeom>
-                <a:ln w="9525"/>
-              </p:spPr>
-              <p:style>
-                <a:lnRef idx="2">
-                  <a:schemeClr val="dk1"/>
-                </a:lnRef>
-                <a:fillRef idx="1">
-                  <a:schemeClr val="lt1"/>
-                </a:fillRef>
-                <a:effectRef idx="0">
-                  <a:schemeClr val="dk1"/>
-                </a:effectRef>
-                <a:fontRef idx="minor">
-                  <a:schemeClr val="dk1"/>
-                </a:fontRef>
-              </p:style>
-              <p:txBody>
-                <a:bodyPr rtlCol="0" anchor="ctr"/>
-                <a:lstStyle/>
-                <a:p>
-                  <a:pPr algn="ctr"/>
-                  <a:endParaRPr lang="en-US"/>
-                </a:p>
-              </p:txBody>
-            </p:sp>
-          </p:grpSp>
-          <p:grpSp>
-            <p:nvGrpSpPr>
-              <p:cNvPr id="190" name="Group 189">
-                <a:extLst>
-                  <a:ext uri="{FF2B5EF4-FFF2-40B4-BE49-F238E27FC236}">
-                    <a16:creationId xmlns:a16="http://schemas.microsoft.com/office/drawing/2014/main" id="{9A4087CF-6F6B-9E44-3151-B5D82EC9070E}"/>
-                  </a:ext>
-                </a:extLst>
-              </p:cNvPr>
-              <p:cNvGrpSpPr/>
-              <p:nvPr/>
-            </p:nvGrpSpPr>
-            <p:grpSpPr>
-              <a:xfrm>
-                <a:off x="6516621" y="4264787"/>
-                <a:ext cx="128268" cy="237544"/>
-                <a:chOff x="4478105" y="5493295"/>
-                <a:chExt cx="273251" cy="506041"/>
-              </a:xfrm>
-            </p:grpSpPr>
-            <p:grpSp>
-              <p:nvGrpSpPr>
-                <p:cNvPr id="201" name="Group 200">
-                  <a:extLst>
-                    <a:ext uri="{FF2B5EF4-FFF2-40B4-BE49-F238E27FC236}">
-                      <a16:creationId xmlns:a16="http://schemas.microsoft.com/office/drawing/2014/main" id="{C085FE73-3E72-7223-6E66-1B4474760FDD}"/>
-                    </a:ext>
-                  </a:extLst>
-                </p:cNvPr>
-                <p:cNvGrpSpPr/>
-                <p:nvPr/>
-              </p:nvGrpSpPr>
-              <p:grpSpPr>
-                <a:xfrm rot="16200000">
-                  <a:off x="4548695" y="5425156"/>
-                  <a:ext cx="134521" cy="270800"/>
-                  <a:chOff x="3806073" y="5091415"/>
-                  <a:chExt cx="134521" cy="270800"/>
-                </a:xfrm>
-              </p:grpSpPr>
-              <p:sp>
-                <p:nvSpPr>
-                  <p:cNvPr id="208" name="Rectangle 207">
-                    <a:extLst>
-                      <a:ext uri="{FF2B5EF4-FFF2-40B4-BE49-F238E27FC236}">
-                        <a16:creationId xmlns:a16="http://schemas.microsoft.com/office/drawing/2014/main" id="{F39F72CF-6E48-1DE8-37F0-76057E996684}"/>
-                      </a:ext>
-                    </a:extLst>
-                  </p:cNvPr>
-                  <p:cNvSpPr/>
-                  <p:nvPr/>
-                </p:nvSpPr>
-                <p:spPr>
-                  <a:xfrm>
-                    <a:off x="3850816" y="5091415"/>
-                    <a:ext cx="49415" cy="174378"/>
-                  </a:xfrm>
-                  <a:prstGeom prst="rect">
-                    <a:avLst/>
-                  </a:prstGeom>
-                  <a:ln w="9525"/>
-                </p:spPr>
-                <p:style>
-                  <a:lnRef idx="2">
-                    <a:schemeClr val="dk1"/>
-                  </a:lnRef>
-                  <a:fillRef idx="1">
-                    <a:schemeClr val="lt1"/>
-                  </a:fillRef>
-                  <a:effectRef idx="0">
-                    <a:schemeClr val="dk1"/>
-                  </a:effectRef>
-                  <a:fontRef idx="minor">
-                    <a:schemeClr val="dk1"/>
-                  </a:fontRef>
-                </p:style>
-                <p:txBody>
-                  <a:bodyPr rtlCol="0" anchor="ctr"/>
-                  <a:lstStyle/>
-                  <a:p>
-                    <a:pPr algn="ctr"/>
-                    <a:endParaRPr lang="en-US"/>
-                  </a:p>
-                </p:txBody>
-              </p:sp>
-              <p:sp>
-                <p:nvSpPr>
-                  <p:cNvPr id="209" name="Oval 208">
-                    <a:extLst>
-                      <a:ext uri="{FF2B5EF4-FFF2-40B4-BE49-F238E27FC236}">
-                        <a16:creationId xmlns:a16="http://schemas.microsoft.com/office/drawing/2014/main" id="{4A3BC783-4C6A-D165-C243-2EEF25685875}"/>
-                      </a:ext>
-                    </a:extLst>
-                  </p:cNvPr>
-                  <p:cNvSpPr/>
-                  <p:nvPr/>
-                </p:nvSpPr>
-                <p:spPr>
-                  <a:xfrm>
-                    <a:off x="3806073" y="5227695"/>
-                    <a:ext cx="134521" cy="134520"/>
-                  </a:xfrm>
-                  <a:prstGeom prst="ellipse">
-                    <a:avLst/>
-                  </a:prstGeom>
-                  <a:ln w="9525"/>
-                </p:spPr>
-                <p:style>
-                  <a:lnRef idx="2">
-                    <a:schemeClr val="dk1"/>
-                  </a:lnRef>
-                  <a:fillRef idx="1">
-                    <a:schemeClr val="lt1"/>
-                  </a:fillRef>
-                  <a:effectRef idx="0">
-                    <a:schemeClr val="dk1"/>
-                  </a:effectRef>
-                  <a:fontRef idx="minor">
-                    <a:schemeClr val="dk1"/>
-                  </a:fontRef>
-                </p:style>
-                <p:txBody>
-                  <a:bodyPr rtlCol="0" anchor="ctr"/>
-                  <a:lstStyle/>
-                  <a:p>
-                    <a:pPr algn="ctr"/>
-                    <a:endParaRPr lang="en-US"/>
-                  </a:p>
-                </p:txBody>
-              </p:sp>
-            </p:grpSp>
-            <p:grpSp>
-              <p:nvGrpSpPr>
-                <p:cNvPr id="202" name="Group 201">
-                  <a:extLst>
-                    <a:ext uri="{FF2B5EF4-FFF2-40B4-BE49-F238E27FC236}">
-                      <a16:creationId xmlns:a16="http://schemas.microsoft.com/office/drawing/2014/main" id="{0DA0FAC8-EDF7-5082-2AB1-252B9E9D83FE}"/>
-                    </a:ext>
-                  </a:extLst>
-                </p:cNvPr>
-                <p:cNvGrpSpPr/>
-                <p:nvPr/>
-              </p:nvGrpSpPr>
-              <p:grpSpPr>
-                <a:xfrm rot="16200000">
-                  <a:off x="4546244" y="5613978"/>
-                  <a:ext cx="134521" cy="270800"/>
-                  <a:chOff x="3806073" y="5091415"/>
-                  <a:chExt cx="134521" cy="270800"/>
-                </a:xfrm>
-              </p:grpSpPr>
-              <p:sp>
-                <p:nvSpPr>
-                  <p:cNvPr id="206" name="Rectangle 205">
-                    <a:extLst>
-                      <a:ext uri="{FF2B5EF4-FFF2-40B4-BE49-F238E27FC236}">
-                        <a16:creationId xmlns:a16="http://schemas.microsoft.com/office/drawing/2014/main" id="{47700E71-AE76-13B9-F9A2-BABA59C69D74}"/>
-                      </a:ext>
-                    </a:extLst>
-                  </p:cNvPr>
-                  <p:cNvSpPr/>
-                  <p:nvPr/>
-                </p:nvSpPr>
-                <p:spPr>
-                  <a:xfrm>
-                    <a:off x="3850816" y="5091415"/>
-                    <a:ext cx="49415" cy="174378"/>
-                  </a:xfrm>
-                  <a:prstGeom prst="rect">
-                    <a:avLst/>
-                  </a:prstGeom>
-                  <a:ln w="9525"/>
-                </p:spPr>
-                <p:style>
-                  <a:lnRef idx="2">
-                    <a:schemeClr val="dk1"/>
-                  </a:lnRef>
-                  <a:fillRef idx="1">
-                    <a:schemeClr val="lt1"/>
-                  </a:fillRef>
-                  <a:effectRef idx="0">
-                    <a:schemeClr val="dk1"/>
-                  </a:effectRef>
-                  <a:fontRef idx="minor">
-                    <a:schemeClr val="dk1"/>
-                  </a:fontRef>
-                </p:style>
-                <p:txBody>
-                  <a:bodyPr rtlCol="0" anchor="ctr"/>
-                  <a:lstStyle/>
-                  <a:p>
-                    <a:pPr algn="ctr"/>
-                    <a:endParaRPr lang="en-US"/>
-                  </a:p>
-                </p:txBody>
-              </p:sp>
-              <p:sp>
-                <p:nvSpPr>
-                  <p:cNvPr id="207" name="Oval 206">
-                    <a:extLst>
-                      <a:ext uri="{FF2B5EF4-FFF2-40B4-BE49-F238E27FC236}">
-                        <a16:creationId xmlns:a16="http://schemas.microsoft.com/office/drawing/2014/main" id="{7E2EA210-0C89-6C78-F2B7-E37B75190AAD}"/>
-                      </a:ext>
-                    </a:extLst>
-                  </p:cNvPr>
-                  <p:cNvSpPr/>
-                  <p:nvPr/>
-                </p:nvSpPr>
-                <p:spPr>
-                  <a:xfrm>
-                    <a:off x="3806073" y="5227695"/>
-                    <a:ext cx="134521" cy="134520"/>
-                  </a:xfrm>
-                  <a:prstGeom prst="ellipse">
-                    <a:avLst/>
-                  </a:prstGeom>
-                  <a:ln w="9525"/>
-                </p:spPr>
-                <p:style>
-                  <a:lnRef idx="2">
-                    <a:schemeClr val="dk1"/>
-                  </a:lnRef>
-                  <a:fillRef idx="1">
-                    <a:schemeClr val="lt1"/>
-                  </a:fillRef>
-                  <a:effectRef idx="0">
-                    <a:schemeClr val="dk1"/>
-                  </a:effectRef>
-                  <a:fontRef idx="minor">
-                    <a:schemeClr val="dk1"/>
-                  </a:fontRef>
-                </p:style>
-                <p:txBody>
-                  <a:bodyPr rtlCol="0" anchor="ctr"/>
-                  <a:lstStyle/>
-                  <a:p>
-                    <a:pPr algn="ctr"/>
-                    <a:endParaRPr lang="en-US"/>
-                  </a:p>
-                </p:txBody>
-              </p:sp>
-            </p:grpSp>
-            <p:grpSp>
-              <p:nvGrpSpPr>
-                <p:cNvPr id="203" name="Group 202">
-                  <a:extLst>
-                    <a:ext uri="{FF2B5EF4-FFF2-40B4-BE49-F238E27FC236}">
-                      <a16:creationId xmlns:a16="http://schemas.microsoft.com/office/drawing/2014/main" id="{2F24C10C-5FAB-0E98-D5D9-5C6E01940E06}"/>
-                    </a:ext>
-                  </a:extLst>
-                </p:cNvPr>
-                <p:cNvGrpSpPr/>
-                <p:nvPr/>
-              </p:nvGrpSpPr>
-              <p:grpSpPr>
-                <a:xfrm rot="16200000">
-                  <a:off x="4547465" y="5796676"/>
-                  <a:ext cx="134521" cy="270800"/>
-                  <a:chOff x="3806073" y="5091415"/>
-                  <a:chExt cx="134521" cy="270800"/>
-                </a:xfrm>
-              </p:grpSpPr>
-              <p:sp>
-                <p:nvSpPr>
-                  <p:cNvPr id="204" name="Rectangle 203">
-                    <a:extLst>
-                      <a:ext uri="{FF2B5EF4-FFF2-40B4-BE49-F238E27FC236}">
-                        <a16:creationId xmlns:a16="http://schemas.microsoft.com/office/drawing/2014/main" id="{1B944315-46AD-5DB0-1030-B9FBD34BFC51}"/>
-                      </a:ext>
-                    </a:extLst>
-                  </p:cNvPr>
-                  <p:cNvSpPr/>
-                  <p:nvPr/>
-                </p:nvSpPr>
-                <p:spPr>
-                  <a:xfrm>
-                    <a:off x="3850816" y="5091415"/>
-                    <a:ext cx="49415" cy="174378"/>
-                  </a:xfrm>
-                  <a:prstGeom prst="rect">
-                    <a:avLst/>
-                  </a:prstGeom>
-                  <a:ln w="9525"/>
-                </p:spPr>
-                <p:style>
-                  <a:lnRef idx="2">
-                    <a:schemeClr val="dk1"/>
-                  </a:lnRef>
-                  <a:fillRef idx="1">
-                    <a:schemeClr val="lt1"/>
-                  </a:fillRef>
-                  <a:effectRef idx="0">
-                    <a:schemeClr val="dk1"/>
-                  </a:effectRef>
-                  <a:fontRef idx="minor">
-                    <a:schemeClr val="dk1"/>
-                  </a:fontRef>
-                </p:style>
-                <p:txBody>
-                  <a:bodyPr rtlCol="0" anchor="ctr"/>
-                  <a:lstStyle/>
-                  <a:p>
-                    <a:pPr algn="ctr"/>
-                    <a:endParaRPr lang="en-US"/>
-                  </a:p>
-                </p:txBody>
-              </p:sp>
-              <p:sp>
-                <p:nvSpPr>
-                  <p:cNvPr id="205" name="Oval 204">
-                    <a:extLst>
-                      <a:ext uri="{FF2B5EF4-FFF2-40B4-BE49-F238E27FC236}">
-                        <a16:creationId xmlns:a16="http://schemas.microsoft.com/office/drawing/2014/main" id="{B344B3A7-3840-7E02-5398-2CCACD182DF2}"/>
-                      </a:ext>
-                    </a:extLst>
-                  </p:cNvPr>
-                  <p:cNvSpPr/>
-                  <p:nvPr/>
-                </p:nvSpPr>
-                <p:spPr>
-                  <a:xfrm>
-                    <a:off x="3806073" y="5227695"/>
-                    <a:ext cx="134521" cy="134520"/>
-                  </a:xfrm>
-                  <a:prstGeom prst="ellipse">
-                    <a:avLst/>
-                  </a:prstGeom>
-                  <a:ln w="9525"/>
-                </p:spPr>
-                <p:style>
-                  <a:lnRef idx="2">
-                    <a:schemeClr val="dk1"/>
-                  </a:lnRef>
-                  <a:fillRef idx="1">
-                    <a:schemeClr val="lt1"/>
-                  </a:fillRef>
-                  <a:effectRef idx="0">
-                    <a:schemeClr val="dk1"/>
-                  </a:effectRef>
-                  <a:fontRef idx="minor">
-                    <a:schemeClr val="dk1"/>
-                  </a:fontRef>
-                </p:style>
-                <p:txBody>
-                  <a:bodyPr rtlCol="0" anchor="ctr"/>
-                  <a:lstStyle/>
-                  <a:p>
-                    <a:pPr algn="ctr"/>
-                    <a:endParaRPr lang="en-US"/>
-                  </a:p>
-                </p:txBody>
-              </p:sp>
-            </p:grpSp>
-          </p:grpSp>
-          <p:grpSp>
-            <p:nvGrpSpPr>
-              <p:cNvPr id="191" name="Group 190">
-                <a:extLst>
-                  <a:ext uri="{FF2B5EF4-FFF2-40B4-BE49-F238E27FC236}">
-                    <a16:creationId xmlns:a16="http://schemas.microsoft.com/office/drawing/2014/main" id="{68AA5CF4-A07D-6FF1-279C-5FA5DB7E28C3}"/>
-                  </a:ext>
-                </a:extLst>
-              </p:cNvPr>
-              <p:cNvGrpSpPr/>
-              <p:nvPr/>
-            </p:nvGrpSpPr>
-            <p:grpSpPr>
-              <a:xfrm rot="10800000">
-                <a:off x="6737076" y="4264787"/>
-                <a:ext cx="128268" cy="237544"/>
-                <a:chOff x="4478105" y="5493295"/>
-                <a:chExt cx="273251" cy="506041"/>
-              </a:xfrm>
-            </p:grpSpPr>
-            <p:grpSp>
-              <p:nvGrpSpPr>
-                <p:cNvPr id="192" name="Group 191">
-                  <a:extLst>
-                    <a:ext uri="{FF2B5EF4-FFF2-40B4-BE49-F238E27FC236}">
-                      <a16:creationId xmlns:a16="http://schemas.microsoft.com/office/drawing/2014/main" id="{CAEBEDBE-7E58-4328-CFE5-7BD653D577A3}"/>
-                    </a:ext>
-                  </a:extLst>
-                </p:cNvPr>
-                <p:cNvGrpSpPr/>
-                <p:nvPr/>
-              </p:nvGrpSpPr>
-              <p:grpSpPr>
-                <a:xfrm rot="16200000">
-                  <a:off x="4548695" y="5425156"/>
-                  <a:ext cx="134521" cy="270800"/>
-                  <a:chOff x="3806073" y="5091415"/>
-                  <a:chExt cx="134521" cy="270800"/>
-                </a:xfrm>
-              </p:grpSpPr>
-              <p:sp>
-                <p:nvSpPr>
-                  <p:cNvPr id="199" name="Rectangle 198">
-                    <a:extLst>
-                      <a:ext uri="{FF2B5EF4-FFF2-40B4-BE49-F238E27FC236}">
-                        <a16:creationId xmlns:a16="http://schemas.microsoft.com/office/drawing/2014/main" id="{24B240A6-DAA6-6A18-32BF-F6C94F5AD21F}"/>
-                      </a:ext>
-                    </a:extLst>
-                  </p:cNvPr>
-                  <p:cNvSpPr/>
-                  <p:nvPr/>
-                </p:nvSpPr>
-                <p:spPr>
-                  <a:xfrm>
-                    <a:off x="3850816" y="5091415"/>
-                    <a:ext cx="49415" cy="174378"/>
-                  </a:xfrm>
-                  <a:prstGeom prst="rect">
-                    <a:avLst/>
-                  </a:prstGeom>
-                  <a:ln w="9525"/>
-                </p:spPr>
-                <p:style>
-                  <a:lnRef idx="2">
-                    <a:schemeClr val="dk1"/>
-                  </a:lnRef>
-                  <a:fillRef idx="1">
-                    <a:schemeClr val="lt1"/>
-                  </a:fillRef>
-                  <a:effectRef idx="0">
-                    <a:schemeClr val="dk1"/>
-                  </a:effectRef>
-                  <a:fontRef idx="minor">
-                    <a:schemeClr val="dk1"/>
-                  </a:fontRef>
-                </p:style>
-                <p:txBody>
-                  <a:bodyPr rtlCol="0" anchor="ctr"/>
-                  <a:lstStyle/>
-                  <a:p>
-                    <a:pPr algn="ctr"/>
-                    <a:endParaRPr lang="en-US"/>
-                  </a:p>
-                </p:txBody>
-              </p:sp>
-              <p:sp>
-                <p:nvSpPr>
-                  <p:cNvPr id="200" name="Oval 199">
-                    <a:extLst>
-                      <a:ext uri="{FF2B5EF4-FFF2-40B4-BE49-F238E27FC236}">
-                        <a16:creationId xmlns:a16="http://schemas.microsoft.com/office/drawing/2014/main" id="{F9152D01-FA9E-A017-C325-C59E42C7CC82}"/>
-                      </a:ext>
-                    </a:extLst>
-                  </p:cNvPr>
-                  <p:cNvSpPr/>
-                  <p:nvPr/>
-                </p:nvSpPr>
-                <p:spPr>
-                  <a:xfrm>
-                    <a:off x="3806073" y="5227695"/>
-                    <a:ext cx="134521" cy="134520"/>
-                  </a:xfrm>
-                  <a:prstGeom prst="ellipse">
-                    <a:avLst/>
-                  </a:prstGeom>
-                  <a:ln w="9525"/>
-                </p:spPr>
-                <p:style>
-                  <a:lnRef idx="2">
-                    <a:schemeClr val="dk1"/>
-                  </a:lnRef>
-                  <a:fillRef idx="1">
-                    <a:schemeClr val="lt1"/>
-                  </a:fillRef>
-                  <a:effectRef idx="0">
-                    <a:schemeClr val="dk1"/>
-                  </a:effectRef>
-                  <a:fontRef idx="minor">
-                    <a:schemeClr val="dk1"/>
-                  </a:fontRef>
-                </p:style>
-                <p:txBody>
-                  <a:bodyPr rtlCol="0" anchor="ctr"/>
-                  <a:lstStyle/>
-                  <a:p>
-                    <a:pPr algn="ctr"/>
-                    <a:endParaRPr lang="en-US"/>
-                  </a:p>
-                </p:txBody>
-              </p:sp>
-            </p:grpSp>
-            <p:grpSp>
-              <p:nvGrpSpPr>
-                <p:cNvPr id="193" name="Group 192">
-                  <a:extLst>
-                    <a:ext uri="{FF2B5EF4-FFF2-40B4-BE49-F238E27FC236}">
-                      <a16:creationId xmlns:a16="http://schemas.microsoft.com/office/drawing/2014/main" id="{596CB9C6-04BE-B329-5601-6D538ABA60DF}"/>
-                    </a:ext>
-                  </a:extLst>
-                </p:cNvPr>
-                <p:cNvGrpSpPr/>
-                <p:nvPr/>
-              </p:nvGrpSpPr>
-              <p:grpSpPr>
-                <a:xfrm rot="16200000">
-                  <a:off x="4546244" y="5613978"/>
-                  <a:ext cx="134521" cy="270800"/>
-                  <a:chOff x="3806073" y="5091415"/>
-                  <a:chExt cx="134521" cy="270800"/>
-                </a:xfrm>
-              </p:grpSpPr>
-              <p:sp>
-                <p:nvSpPr>
-                  <p:cNvPr id="197" name="Rectangle 196">
-                    <a:extLst>
-                      <a:ext uri="{FF2B5EF4-FFF2-40B4-BE49-F238E27FC236}">
-                        <a16:creationId xmlns:a16="http://schemas.microsoft.com/office/drawing/2014/main" id="{FBB3AC41-D555-AC51-3B25-F76AA79F57C2}"/>
-                      </a:ext>
-                    </a:extLst>
-                  </p:cNvPr>
-                  <p:cNvSpPr/>
-                  <p:nvPr/>
-                </p:nvSpPr>
-                <p:spPr>
-                  <a:xfrm>
-                    <a:off x="3850816" y="5091415"/>
-                    <a:ext cx="49415" cy="174378"/>
-                  </a:xfrm>
-                  <a:prstGeom prst="rect">
-                    <a:avLst/>
-                  </a:prstGeom>
-                  <a:ln w="9525"/>
-                </p:spPr>
-                <p:style>
-                  <a:lnRef idx="2">
-                    <a:schemeClr val="dk1"/>
-                  </a:lnRef>
-                  <a:fillRef idx="1">
-                    <a:schemeClr val="lt1"/>
-                  </a:fillRef>
-                  <a:effectRef idx="0">
-                    <a:schemeClr val="dk1"/>
-                  </a:effectRef>
-                  <a:fontRef idx="minor">
-                    <a:schemeClr val="dk1"/>
-                  </a:fontRef>
-                </p:style>
-                <p:txBody>
-                  <a:bodyPr rtlCol="0" anchor="ctr"/>
-                  <a:lstStyle/>
-                  <a:p>
-                    <a:pPr algn="ctr"/>
-                    <a:endParaRPr lang="en-US"/>
-                  </a:p>
-                </p:txBody>
-              </p:sp>
-              <p:sp>
-                <p:nvSpPr>
-                  <p:cNvPr id="198" name="Oval 197">
-                    <a:extLst>
-                      <a:ext uri="{FF2B5EF4-FFF2-40B4-BE49-F238E27FC236}">
-                        <a16:creationId xmlns:a16="http://schemas.microsoft.com/office/drawing/2014/main" id="{D839E029-79E5-A778-9E9C-EE43E4753871}"/>
-                      </a:ext>
-                    </a:extLst>
-                  </p:cNvPr>
-                  <p:cNvSpPr/>
-                  <p:nvPr/>
-                </p:nvSpPr>
-                <p:spPr>
-                  <a:xfrm>
-                    <a:off x="3806073" y="5227695"/>
-                    <a:ext cx="134521" cy="134520"/>
-                  </a:xfrm>
-                  <a:prstGeom prst="ellipse">
-                    <a:avLst/>
-                  </a:prstGeom>
-                  <a:ln w="9525"/>
-                </p:spPr>
-                <p:style>
-                  <a:lnRef idx="2">
-                    <a:schemeClr val="dk1"/>
-                  </a:lnRef>
-                  <a:fillRef idx="1">
-                    <a:schemeClr val="lt1"/>
-                  </a:fillRef>
-                  <a:effectRef idx="0">
-                    <a:schemeClr val="dk1"/>
-                  </a:effectRef>
-                  <a:fontRef idx="minor">
-                    <a:schemeClr val="dk1"/>
-                  </a:fontRef>
-                </p:style>
-                <p:txBody>
-                  <a:bodyPr rtlCol="0" anchor="ctr"/>
-                  <a:lstStyle/>
-                  <a:p>
-                    <a:pPr algn="ctr"/>
-                    <a:endParaRPr lang="en-US"/>
-                  </a:p>
-                </p:txBody>
-              </p:sp>
-            </p:grpSp>
-            <p:grpSp>
-              <p:nvGrpSpPr>
-                <p:cNvPr id="194" name="Group 193">
-                  <a:extLst>
-                    <a:ext uri="{FF2B5EF4-FFF2-40B4-BE49-F238E27FC236}">
-                      <a16:creationId xmlns:a16="http://schemas.microsoft.com/office/drawing/2014/main" id="{62F24E20-9F6D-3743-4DF5-CD6940680C96}"/>
-                    </a:ext>
-                  </a:extLst>
-                </p:cNvPr>
-                <p:cNvGrpSpPr/>
-                <p:nvPr/>
-              </p:nvGrpSpPr>
-              <p:grpSpPr>
-                <a:xfrm rot="16200000">
-                  <a:off x="4547465" y="5796676"/>
-                  <a:ext cx="134521" cy="270800"/>
-                  <a:chOff x="3806073" y="5091415"/>
-                  <a:chExt cx="134521" cy="270800"/>
-                </a:xfrm>
-              </p:grpSpPr>
-              <p:sp>
-                <p:nvSpPr>
-                  <p:cNvPr id="195" name="Rectangle 194">
-                    <a:extLst>
-                      <a:ext uri="{FF2B5EF4-FFF2-40B4-BE49-F238E27FC236}">
-                        <a16:creationId xmlns:a16="http://schemas.microsoft.com/office/drawing/2014/main" id="{7C4E32F6-F9CD-21ED-093A-44DD55C7374C}"/>
-                      </a:ext>
-                    </a:extLst>
-                  </p:cNvPr>
-                  <p:cNvSpPr/>
-                  <p:nvPr/>
-                </p:nvSpPr>
-                <p:spPr>
-                  <a:xfrm>
-                    <a:off x="3850816" y="5091415"/>
-                    <a:ext cx="49415" cy="174378"/>
-                  </a:xfrm>
-                  <a:prstGeom prst="rect">
-                    <a:avLst/>
-                  </a:prstGeom>
-                  <a:ln w="9525"/>
-                </p:spPr>
-                <p:style>
-                  <a:lnRef idx="2">
-                    <a:schemeClr val="dk1"/>
-                  </a:lnRef>
-                  <a:fillRef idx="1">
-                    <a:schemeClr val="lt1"/>
-                  </a:fillRef>
-                  <a:effectRef idx="0">
-                    <a:schemeClr val="dk1"/>
-                  </a:effectRef>
-                  <a:fontRef idx="minor">
-                    <a:schemeClr val="dk1"/>
-                  </a:fontRef>
-                </p:style>
-                <p:txBody>
-                  <a:bodyPr rtlCol="0" anchor="ctr"/>
-                  <a:lstStyle/>
-                  <a:p>
-                    <a:pPr algn="ctr"/>
-                    <a:endParaRPr lang="en-US"/>
-                  </a:p>
-                </p:txBody>
-              </p:sp>
-              <p:sp>
-                <p:nvSpPr>
-                  <p:cNvPr id="196" name="Oval 195">
-                    <a:extLst>
-                      <a:ext uri="{FF2B5EF4-FFF2-40B4-BE49-F238E27FC236}">
-                        <a16:creationId xmlns:a16="http://schemas.microsoft.com/office/drawing/2014/main" id="{9C40F1D9-7508-1051-4DB3-73095F0A763F}"/>
-                      </a:ext>
-                    </a:extLst>
-                  </p:cNvPr>
-                  <p:cNvSpPr/>
-                  <p:nvPr/>
-                </p:nvSpPr>
-                <p:spPr>
-                  <a:xfrm>
-                    <a:off x="3806073" y="5227695"/>
-                    <a:ext cx="134521" cy="134520"/>
-                  </a:xfrm>
-                  <a:prstGeom prst="ellipse">
-                    <a:avLst/>
-                  </a:prstGeom>
-                  <a:ln w="9525"/>
-                </p:spPr>
-                <p:style>
-                  <a:lnRef idx="2">
-                    <a:schemeClr val="dk1"/>
-                  </a:lnRef>
-                  <a:fillRef idx="1">
-                    <a:schemeClr val="lt1"/>
-                  </a:fillRef>
-                  <a:effectRef idx="0">
-                    <a:schemeClr val="dk1"/>
-                  </a:effectRef>
-                  <a:fontRef idx="minor">
-                    <a:schemeClr val="dk1"/>
-                  </a:fontRef>
-                </p:style>
-                <p:txBody>
-                  <a:bodyPr rtlCol="0" anchor="ctr"/>
-                  <a:lstStyle/>
-                  <a:p>
-                    <a:pPr algn="ctr"/>
-                    <a:endParaRPr lang="en-US"/>
-                  </a:p>
-                </p:txBody>
-              </p:sp>
-            </p:grpSp>
-          </p:grpSp>
-        </p:grpSp>
-        <p:pic>
-          <p:nvPicPr>
-            <p:cNvPr id="214" name="Picture 10" descr="✓ flamethrower free vector eps, cdr, ai, svg vector illustration graphic art">
-              <a:extLst>
-                <a:ext uri="{FF2B5EF4-FFF2-40B4-BE49-F238E27FC236}">
-                  <a16:creationId xmlns:a16="http://schemas.microsoft.com/office/drawing/2014/main" id="{FE09F289-A7EC-6C7C-4347-265F25E6A836}"/>
-                </a:ext>
-              </a:extLst>
-            </p:cNvPr>
-            <p:cNvPicPr>
-              <a:picLocks noChangeAspect="1" noChangeArrowheads="1"/>
-            </p:cNvPicPr>
-            <p:nvPr/>
-          </p:nvPicPr>
-          <p:blipFill rotWithShape="1">
-            <a:blip r:embed="rId5">
-              <a:extLst>
-                <a:ext uri="{28A0092B-C50C-407E-A947-70E740481C1C}">
-                  <a14:useLocalDpi xmlns:a14="http://schemas.microsoft.com/office/drawing/2010/main" val="0"/>
-                </a:ext>
-              </a:extLst>
-            </a:blip>
-            <a:srcRect l="29258" b="25887"/>
-            <a:stretch/>
-          </p:blipFill>
-          <p:spPr bwMode="auto">
-            <a:xfrm rot="16200000">
-              <a:off x="6777150" y="4688831"/>
-              <a:ext cx="227094" cy="116094"/>
-            </a:xfrm>
-            <a:prstGeom prst="rect">
-              <a:avLst/>
-            </a:prstGeom>
-            <a:noFill/>
-            <a:extLst>
-              <a:ext uri="{909E8E84-426E-40DD-AFC4-6F175D3DCCD1}">
-                <a14:hiddenFill xmlns:a14="http://schemas.microsoft.com/office/drawing/2010/main">
-                  <a:solidFill>
-                    <a:srgbClr val="FFFFFF"/>
-                  </a:solidFill>
-                </a14:hiddenFill>
-              </a:ext>
-            </a:extLst>
-          </p:spPr>
-        </p:pic>
-        <p:pic>
-          <p:nvPicPr>
-            <p:cNvPr id="215" name="Picture 10" descr="✓ flamethrower free vector eps, cdr, ai, svg vector illustration graphic art">
-              <a:extLst>
-                <a:ext uri="{FF2B5EF4-FFF2-40B4-BE49-F238E27FC236}">
-                  <a16:creationId xmlns:a16="http://schemas.microsoft.com/office/drawing/2014/main" id="{398F3904-BFBC-32CB-2F8C-C0FB0F3C9BD5}"/>
-                </a:ext>
-              </a:extLst>
-            </p:cNvPr>
-            <p:cNvPicPr>
-              <a:picLocks noChangeAspect="1" noChangeArrowheads="1"/>
-            </p:cNvPicPr>
-            <p:nvPr/>
-          </p:nvPicPr>
-          <p:blipFill rotWithShape="1">
-            <a:blip r:embed="rId5">
-              <a:extLst>
-                <a:ext uri="{28A0092B-C50C-407E-A947-70E740481C1C}">
-                  <a14:useLocalDpi xmlns:a14="http://schemas.microsoft.com/office/drawing/2010/main" val="0"/>
-                </a:ext>
-              </a:extLst>
-            </a:blip>
-            <a:srcRect l="29258" b="25887"/>
-            <a:stretch/>
-          </p:blipFill>
-          <p:spPr bwMode="auto">
-            <a:xfrm rot="16200000">
-              <a:off x="6866743" y="4689239"/>
-              <a:ext cx="227094" cy="116094"/>
-            </a:xfrm>
-            <a:prstGeom prst="rect">
-              <a:avLst/>
-            </a:prstGeom>
-            <a:noFill/>
-            <a:extLst>
-              <a:ext uri="{909E8E84-426E-40DD-AFC4-6F175D3DCCD1}">
-                <a14:hiddenFill xmlns:a14="http://schemas.microsoft.com/office/drawing/2010/main">
-                  <a:solidFill>
-                    <a:srgbClr val="FFFFFF"/>
-                  </a:solidFill>
-                </a14:hiddenFill>
-              </a:ext>
-            </a:extLst>
-          </p:spPr>
-        </p:pic>
-        <p:pic>
-          <p:nvPicPr>
-            <p:cNvPr id="216" name="Picture 10" descr="✓ flamethrower free vector eps, cdr, ai, svg vector illustration graphic art">
-              <a:extLst>
-                <a:ext uri="{FF2B5EF4-FFF2-40B4-BE49-F238E27FC236}">
-                  <a16:creationId xmlns:a16="http://schemas.microsoft.com/office/drawing/2014/main" id="{7A036B8B-4427-8F7D-5041-DA91FDE810DE}"/>
-                </a:ext>
-              </a:extLst>
-            </p:cNvPr>
-            <p:cNvPicPr>
-              <a:picLocks noChangeAspect="1" noChangeArrowheads="1"/>
-            </p:cNvPicPr>
-            <p:nvPr/>
-          </p:nvPicPr>
-          <p:blipFill rotWithShape="1">
-            <a:blip r:embed="rId5">
-              <a:extLst>
-                <a:ext uri="{28A0092B-C50C-407E-A947-70E740481C1C}">
-                  <a14:useLocalDpi xmlns:a14="http://schemas.microsoft.com/office/drawing/2010/main" val="0"/>
-                </a:ext>
-              </a:extLst>
-            </a:blip>
-            <a:srcRect l="29258" b="25887"/>
-            <a:stretch/>
-          </p:blipFill>
-          <p:spPr bwMode="auto">
-            <a:xfrm rot="16200000">
-              <a:off x="6953265" y="4689742"/>
-              <a:ext cx="227094" cy="116094"/>
-            </a:xfrm>
-            <a:prstGeom prst="rect">
-              <a:avLst/>
-            </a:prstGeom>
-            <a:noFill/>
-            <a:extLst>
-              <a:ext uri="{909E8E84-426E-40DD-AFC4-6F175D3DCCD1}">
-                <a14:hiddenFill xmlns:a14="http://schemas.microsoft.com/office/drawing/2010/main">
-                  <a:solidFill>
-                    <a:srgbClr val="FFFFFF"/>
-                  </a:solidFill>
-                </a14:hiddenFill>
-              </a:ext>
-            </a:extLst>
-          </p:spPr>
-        </p:pic>
-      </p:grpSp>
-      <p:grpSp>
-        <p:nvGrpSpPr>
           <p:cNvPr id="217" name="Group 216">
             <a:extLst>
               <a:ext uri="{FF2B5EF4-FFF2-40B4-BE49-F238E27FC236}">
@@ -17211,6 +15563,430 @@
           </p:sp>
         </p:grpSp>
       </p:grpSp>
+      <p:grpSp>
+        <p:nvGrpSpPr>
+          <p:cNvPr id="372" name="Group 371">
+            <a:extLst>
+              <a:ext uri="{FF2B5EF4-FFF2-40B4-BE49-F238E27FC236}">
+                <a16:creationId xmlns:a16="http://schemas.microsoft.com/office/drawing/2014/main" id="{A641A4BA-29DB-E568-D992-51241D03685F}"/>
+              </a:ext>
+            </a:extLst>
+          </p:cNvPr>
+          <p:cNvGrpSpPr/>
+          <p:nvPr/>
+        </p:nvGrpSpPr>
+        <p:grpSpPr>
+          <a:xfrm>
+            <a:off x="10540557" y="2256090"/>
+            <a:ext cx="1371600" cy="1371600"/>
+            <a:chOff x="1298501" y="962272"/>
+            <a:chExt cx="1371600" cy="1371600"/>
+          </a:xfrm>
+        </p:grpSpPr>
+        <p:sp>
+          <p:nvSpPr>
+            <p:cNvPr id="373" name="Rectangle 372">
+              <a:extLst>
+                <a:ext uri="{FF2B5EF4-FFF2-40B4-BE49-F238E27FC236}">
+                  <a16:creationId xmlns:a16="http://schemas.microsoft.com/office/drawing/2014/main" id="{816DD76D-131A-E776-EB14-61710176EEEA}"/>
+                </a:ext>
+              </a:extLst>
+            </p:cNvPr>
+            <p:cNvSpPr/>
+            <p:nvPr/>
+          </p:nvSpPr>
+          <p:spPr>
+            <a:xfrm>
+              <a:off x="1298501" y="962272"/>
+              <a:ext cx="1371600" cy="1371600"/>
+            </a:xfrm>
+            <a:prstGeom prst="rect">
+              <a:avLst/>
+            </a:prstGeom>
+            <a:noFill/>
+            <a:ln w="76200">
+              <a:solidFill>
+                <a:schemeClr val="tx1"/>
+              </a:solidFill>
+            </a:ln>
+          </p:spPr>
+          <p:style>
+            <a:lnRef idx="2">
+              <a:schemeClr val="accent1">
+                <a:shade val="50000"/>
+              </a:schemeClr>
+            </a:lnRef>
+            <a:fillRef idx="1">
+              <a:schemeClr val="accent1"/>
+            </a:fillRef>
+            <a:effectRef idx="0">
+              <a:schemeClr val="accent1"/>
+            </a:effectRef>
+            <a:fontRef idx="minor">
+              <a:schemeClr val="lt1"/>
+            </a:fontRef>
+          </p:style>
+          <p:txBody>
+            <a:bodyPr rtlCol="0" anchor="ctr"/>
+            <a:lstStyle/>
+            <a:p>
+              <a:pPr algn="ctr"/>
+              <a:endParaRPr lang="en-US"/>
+            </a:p>
+          </p:txBody>
+        </p:sp>
+        <p:sp>
+          <p:nvSpPr>
+            <p:cNvPr id="374" name="Arrow: Pentagon 373">
+              <a:extLst>
+                <a:ext uri="{FF2B5EF4-FFF2-40B4-BE49-F238E27FC236}">
+                  <a16:creationId xmlns:a16="http://schemas.microsoft.com/office/drawing/2014/main" id="{C9A65D5F-F9B0-7DD8-61C7-401F79310E47}"/>
+                </a:ext>
+              </a:extLst>
+            </p:cNvPr>
+            <p:cNvSpPr/>
+            <p:nvPr/>
+          </p:nvSpPr>
+          <p:spPr>
+            <a:xfrm rot="5400000">
+              <a:off x="1435661" y="1173775"/>
+              <a:ext cx="1097280" cy="1097280"/>
+            </a:xfrm>
+            <a:prstGeom prst="homePlate">
+              <a:avLst/>
+            </a:prstGeom>
+            <a:noFill/>
+            <a:ln w="38100" cap="flat" cmpd="sng" algn="ctr">
+              <a:solidFill>
+                <a:schemeClr val="dk1"/>
+              </a:solidFill>
+              <a:prstDash val="solid"/>
+              <a:round/>
+              <a:headEnd type="none" w="med" len="med"/>
+              <a:tailEnd type="none" w="med" len="med"/>
+            </a:ln>
+          </p:spPr>
+          <p:style>
+            <a:lnRef idx="0">
+              <a:scrgbClr r="0" g="0" b="0"/>
+            </a:lnRef>
+            <a:fillRef idx="0">
+              <a:scrgbClr r="0" g="0" b="0"/>
+            </a:fillRef>
+            <a:effectRef idx="0">
+              <a:scrgbClr r="0" g="0" b="0"/>
+            </a:effectRef>
+            <a:fontRef idx="minor">
+              <a:schemeClr val="dk1"/>
+            </a:fontRef>
+          </p:style>
+          <p:txBody>
+            <a:bodyPr rtlCol="0" anchor="ctr"/>
+            <a:lstStyle/>
+            <a:p>
+              <a:pPr algn="ctr"/>
+              <a:endParaRPr lang="en-US"/>
+            </a:p>
+          </p:txBody>
+        </p:sp>
+      </p:grpSp>
+      <p:grpSp>
+        <p:nvGrpSpPr>
+          <p:cNvPr id="375" name="Group 374">
+            <a:extLst>
+              <a:ext uri="{FF2B5EF4-FFF2-40B4-BE49-F238E27FC236}">
+                <a16:creationId xmlns:a16="http://schemas.microsoft.com/office/drawing/2014/main" id="{277359CA-723B-8744-8265-70309A4AEEE9}"/>
+              </a:ext>
+            </a:extLst>
+          </p:cNvPr>
+          <p:cNvGrpSpPr/>
+          <p:nvPr/>
+        </p:nvGrpSpPr>
+        <p:grpSpPr>
+          <a:xfrm>
+            <a:off x="10974175" y="2510613"/>
+            <a:ext cx="463815" cy="792386"/>
+            <a:chOff x="6364542" y="1494901"/>
+            <a:chExt cx="994146" cy="1698410"/>
+          </a:xfrm>
+        </p:grpSpPr>
+        <p:sp>
+          <p:nvSpPr>
+            <p:cNvPr id="376" name="Rectangle 375">
+              <a:extLst>
+                <a:ext uri="{FF2B5EF4-FFF2-40B4-BE49-F238E27FC236}">
+                  <a16:creationId xmlns:a16="http://schemas.microsoft.com/office/drawing/2014/main" id="{AA7AF902-8B86-B6F7-861F-B3B8C16115A7}"/>
+                </a:ext>
+              </a:extLst>
+            </p:cNvPr>
+            <p:cNvSpPr/>
+            <p:nvPr/>
+          </p:nvSpPr>
+          <p:spPr>
+            <a:xfrm>
+              <a:off x="6473824" y="2293089"/>
+              <a:ext cx="211738" cy="900222"/>
+            </a:xfrm>
+            <a:prstGeom prst="rect">
+              <a:avLst/>
+            </a:prstGeom>
+            <a:ln/>
+          </p:spPr>
+          <p:style>
+            <a:lnRef idx="2">
+              <a:schemeClr val="dk1">
+                <a:shade val="50000"/>
+              </a:schemeClr>
+            </a:lnRef>
+            <a:fillRef idx="1">
+              <a:schemeClr val="dk1"/>
+            </a:fillRef>
+            <a:effectRef idx="0">
+              <a:schemeClr val="dk1"/>
+            </a:effectRef>
+            <a:fontRef idx="minor">
+              <a:schemeClr val="lt1"/>
+            </a:fontRef>
+          </p:style>
+          <p:txBody>
+            <a:bodyPr rtlCol="0" anchor="ctr"/>
+            <a:lstStyle/>
+            <a:p>
+              <a:pPr algn="ctr"/>
+              <a:endParaRPr lang="en-US"/>
+            </a:p>
+          </p:txBody>
+        </p:sp>
+        <p:pic>
+          <p:nvPicPr>
+            <p:cNvPr id="377" name="Picture 10" descr="✓ flamethrower free vector eps, cdr, ai, svg vector illustration graphic art">
+              <a:extLst>
+                <a:ext uri="{FF2B5EF4-FFF2-40B4-BE49-F238E27FC236}">
+                  <a16:creationId xmlns:a16="http://schemas.microsoft.com/office/drawing/2014/main" id="{27B523CA-E920-0258-DF14-87F608A4824B}"/>
+                </a:ext>
+              </a:extLst>
+            </p:cNvPr>
+            <p:cNvPicPr>
+              <a:picLocks noChangeAspect="1" noChangeArrowheads="1"/>
+            </p:cNvPicPr>
+            <p:nvPr/>
+          </p:nvPicPr>
+          <p:blipFill rotWithShape="1">
+            <a:blip r:embed="rId5">
+              <a:extLst>
+                <a:ext uri="{28A0092B-C50C-407E-A947-70E740481C1C}">
+                  <a14:useLocalDpi xmlns:a14="http://schemas.microsoft.com/office/drawing/2010/main" val="0"/>
+                </a:ext>
+              </a:extLst>
+            </a:blip>
+            <a:srcRect l="29258" b="25887"/>
+            <a:stretch/>
+          </p:blipFill>
+          <p:spPr bwMode="auto">
+            <a:xfrm rot="16200000">
+              <a:off x="6175721" y="1683722"/>
+              <a:ext cx="772614" cy="394972"/>
+            </a:xfrm>
+            <a:prstGeom prst="rect">
+              <a:avLst/>
+            </a:prstGeom>
+            <a:noFill/>
+            <a:extLst>
+              <a:ext uri="{909E8E84-426E-40DD-AFC4-6F175D3DCCD1}">
+                <a14:hiddenFill xmlns:a14="http://schemas.microsoft.com/office/drawing/2010/main">
+                  <a:solidFill>
+                    <a:srgbClr val="FFFFFF"/>
+                  </a:solidFill>
+                </a14:hiddenFill>
+              </a:ext>
+            </a:extLst>
+          </p:spPr>
+        </p:pic>
+        <p:pic>
+          <p:nvPicPr>
+            <p:cNvPr id="378" name="Picture 10" descr="✓ flamethrower free vector eps, cdr, ai, svg vector illustration graphic art">
+              <a:extLst>
+                <a:ext uri="{FF2B5EF4-FFF2-40B4-BE49-F238E27FC236}">
+                  <a16:creationId xmlns:a16="http://schemas.microsoft.com/office/drawing/2014/main" id="{2AA02BC6-DC39-B18C-AF05-E3685D00EAB1}"/>
+                </a:ext>
+              </a:extLst>
+            </p:cNvPr>
+            <p:cNvPicPr>
+              <a:picLocks noChangeAspect="1" noChangeArrowheads="1"/>
+            </p:cNvPicPr>
+            <p:nvPr/>
+          </p:nvPicPr>
+          <p:blipFill rotWithShape="1">
+            <a:blip r:embed="rId5">
+              <a:extLst>
+                <a:ext uri="{28A0092B-C50C-407E-A947-70E740481C1C}">
+                  <a14:useLocalDpi xmlns:a14="http://schemas.microsoft.com/office/drawing/2010/main" val="0"/>
+                </a:ext>
+              </a:extLst>
+            </a:blip>
+            <a:srcRect l="29258" b="25887"/>
+            <a:stretch/>
+          </p:blipFill>
+          <p:spPr bwMode="auto">
+            <a:xfrm rot="16200000">
+              <a:off x="6480532" y="1685110"/>
+              <a:ext cx="772614" cy="394972"/>
+            </a:xfrm>
+            <a:prstGeom prst="rect">
+              <a:avLst/>
+            </a:prstGeom>
+            <a:noFill/>
+            <a:extLst>
+              <a:ext uri="{909E8E84-426E-40DD-AFC4-6F175D3DCCD1}">
+                <a14:hiddenFill xmlns:a14="http://schemas.microsoft.com/office/drawing/2010/main">
+                  <a:solidFill>
+                    <a:srgbClr val="FFFFFF"/>
+                  </a:solidFill>
+                </a14:hiddenFill>
+              </a:ext>
+            </a:extLst>
+          </p:spPr>
+        </p:pic>
+        <p:pic>
+          <p:nvPicPr>
+            <p:cNvPr id="379" name="Picture 10" descr="✓ flamethrower free vector eps, cdr, ai, svg vector illustration graphic art">
+              <a:extLst>
+                <a:ext uri="{FF2B5EF4-FFF2-40B4-BE49-F238E27FC236}">
+                  <a16:creationId xmlns:a16="http://schemas.microsoft.com/office/drawing/2014/main" id="{76A6B822-401C-D1BD-4EAC-EBDBFAC33A75}"/>
+                </a:ext>
+              </a:extLst>
+            </p:cNvPr>
+            <p:cNvPicPr>
+              <a:picLocks noChangeAspect="1" noChangeArrowheads="1"/>
+            </p:cNvPicPr>
+            <p:nvPr/>
+          </p:nvPicPr>
+          <p:blipFill rotWithShape="1">
+            <a:blip r:embed="rId5">
+              <a:extLst>
+                <a:ext uri="{28A0092B-C50C-407E-A947-70E740481C1C}">
+                  <a14:useLocalDpi xmlns:a14="http://schemas.microsoft.com/office/drawing/2010/main" val="0"/>
+                </a:ext>
+              </a:extLst>
+            </a:blip>
+            <a:srcRect l="29258" b="25887"/>
+            <a:stretch/>
+          </p:blipFill>
+          <p:spPr bwMode="auto">
+            <a:xfrm rot="16200000">
+              <a:off x="6774895" y="1686821"/>
+              <a:ext cx="772614" cy="394972"/>
+            </a:xfrm>
+            <a:prstGeom prst="rect">
+              <a:avLst/>
+            </a:prstGeom>
+            <a:noFill/>
+            <a:extLst>
+              <a:ext uri="{909E8E84-426E-40DD-AFC4-6F175D3DCCD1}">
+                <a14:hiddenFill xmlns:a14="http://schemas.microsoft.com/office/drawing/2010/main">
+                  <a:solidFill>
+                    <a:srgbClr val="FFFFFF"/>
+                  </a:solidFill>
+                </a14:hiddenFill>
+              </a:ext>
+            </a:extLst>
+          </p:spPr>
+        </p:pic>
+        <p:sp>
+          <p:nvSpPr>
+            <p:cNvPr id="380" name="Rectangle 379">
+              <a:extLst>
+                <a:ext uri="{FF2B5EF4-FFF2-40B4-BE49-F238E27FC236}">
+                  <a16:creationId xmlns:a16="http://schemas.microsoft.com/office/drawing/2014/main" id="{92D0A0EC-5325-0735-6DC2-E817F555C273}"/>
+                </a:ext>
+              </a:extLst>
+            </p:cNvPr>
+            <p:cNvSpPr/>
+            <p:nvPr/>
+          </p:nvSpPr>
+          <p:spPr>
+            <a:xfrm>
+              <a:off x="6777178" y="2293089"/>
+              <a:ext cx="211738" cy="900222"/>
+            </a:xfrm>
+            <a:prstGeom prst="rect">
+              <a:avLst/>
+            </a:prstGeom>
+            <a:ln/>
+          </p:spPr>
+          <p:style>
+            <a:lnRef idx="2">
+              <a:schemeClr val="dk1">
+                <a:shade val="50000"/>
+              </a:schemeClr>
+            </a:lnRef>
+            <a:fillRef idx="1">
+              <a:schemeClr val="dk1"/>
+            </a:fillRef>
+            <a:effectRef idx="0">
+              <a:schemeClr val="dk1"/>
+            </a:effectRef>
+            <a:fontRef idx="minor">
+              <a:schemeClr val="lt1"/>
+            </a:fontRef>
+          </p:style>
+          <p:txBody>
+            <a:bodyPr rtlCol="0" anchor="ctr"/>
+            <a:lstStyle/>
+            <a:p>
+              <a:pPr algn="ctr"/>
+              <a:endParaRPr lang="en-US"/>
+            </a:p>
+          </p:txBody>
+        </p:sp>
+        <p:sp>
+          <p:nvSpPr>
+            <p:cNvPr id="381" name="Rectangle 380">
+              <a:extLst>
+                <a:ext uri="{FF2B5EF4-FFF2-40B4-BE49-F238E27FC236}">
+                  <a16:creationId xmlns:a16="http://schemas.microsoft.com/office/drawing/2014/main" id="{7BD8F0D3-660D-625D-65ED-92273D35D98B}"/>
+                </a:ext>
+              </a:extLst>
+            </p:cNvPr>
+            <p:cNvSpPr/>
+            <p:nvPr/>
+          </p:nvSpPr>
+          <p:spPr>
+            <a:xfrm>
+              <a:off x="7077364" y="2293089"/>
+              <a:ext cx="211738" cy="900222"/>
+            </a:xfrm>
+            <a:prstGeom prst="rect">
+              <a:avLst/>
+            </a:prstGeom>
+            <a:ln/>
+          </p:spPr>
+          <p:style>
+            <a:lnRef idx="2">
+              <a:schemeClr val="dk1">
+                <a:shade val="50000"/>
+              </a:schemeClr>
+            </a:lnRef>
+            <a:fillRef idx="1">
+              <a:schemeClr val="dk1"/>
+            </a:fillRef>
+            <a:effectRef idx="0">
+              <a:schemeClr val="dk1"/>
+            </a:effectRef>
+            <a:fontRef idx="minor">
+              <a:schemeClr val="lt1"/>
+            </a:fontRef>
+          </p:style>
+          <p:txBody>
+            <a:bodyPr rtlCol="0" anchor="ctr"/>
+            <a:lstStyle/>
+            <a:p>
+              <a:pPr algn="ctr"/>
+              <a:endParaRPr lang="en-US"/>
+            </a:p>
+          </p:txBody>
+        </p:sp>
+      </p:grpSp>
     </p:spTree>
     <p:extLst>
       <p:ext uri="{BB962C8B-B14F-4D97-AF65-F5344CB8AC3E}">
@@ -17241,6 +16017,36 @@
           <a:chExt cx="0" cy="0"/>
         </a:xfrm>
       </p:grpSpPr>
+      <p:pic>
+        <p:nvPicPr>
+          <p:cNvPr id="109" name="Picture 108">
+            <a:extLst>
+              <a:ext uri="{FF2B5EF4-FFF2-40B4-BE49-F238E27FC236}">
+                <a16:creationId xmlns:a16="http://schemas.microsoft.com/office/drawing/2014/main" id="{C13799ED-04E1-8043-5CB9-07CF7B2E9D9C}"/>
+              </a:ext>
+            </a:extLst>
+          </p:cNvPr>
+          <p:cNvPicPr>
+            <a:picLocks noChangeAspect="1"/>
+          </p:cNvPicPr>
+          <p:nvPr/>
+        </p:nvPicPr>
+        <p:blipFill>
+          <a:blip r:embed="rId2"/>
+          <a:stretch>
+            <a:fillRect/>
+          </a:stretch>
+        </p:blipFill>
+        <p:spPr>
+          <a:xfrm>
+            <a:off x="681296" y="566272"/>
+            <a:ext cx="863170" cy="863170"/>
+          </a:xfrm>
+          <a:prstGeom prst="rect">
+            <a:avLst/>
+          </a:prstGeom>
+        </p:spPr>
+      </p:pic>
       <p:grpSp>
         <p:nvGrpSpPr>
           <p:cNvPr id="13" name="Group 12">
@@ -17624,10 +16430,10 @@
       </p:grpSp>
       <p:grpSp>
         <p:nvGrpSpPr>
-          <p:cNvPr id="11" name="Group 10">
+          <p:cNvPr id="19" name="Group 18">
             <a:extLst>
               <a:ext uri="{FF2B5EF4-FFF2-40B4-BE49-F238E27FC236}">
-                <a16:creationId xmlns:a16="http://schemas.microsoft.com/office/drawing/2014/main" id="{C3562DA8-7EC5-D62F-3CD0-47837ED87B1F}"/>
+                <a16:creationId xmlns:a16="http://schemas.microsoft.com/office/drawing/2014/main" id="{F0C5DF98-2563-86F8-66B2-5F473BDD317C}"/>
               </a:ext>
             </a:extLst>
           </p:cNvPr>
@@ -17635,19 +16441,19 @@
           <p:nvPr/>
         </p:nvGrpSpPr>
         <p:grpSpPr>
-          <a:xfrm>
-            <a:off x="797409" y="781866"/>
-            <a:ext cx="631137" cy="505972"/>
-            <a:chOff x="5010218" y="2694841"/>
-            <a:chExt cx="2523392" cy="2022962"/>
+          <a:xfrm rot="19097516">
+            <a:off x="2491495" y="580200"/>
+            <a:ext cx="577458" cy="886118"/>
+            <a:chOff x="5275383" y="2444259"/>
+            <a:chExt cx="2101363" cy="3224576"/>
           </a:xfrm>
         </p:grpSpPr>
         <p:sp>
           <p:nvSpPr>
-            <p:cNvPr id="5" name="Moon 4">
-              <a:extLst>
-                <a:ext uri="{FF2B5EF4-FFF2-40B4-BE49-F238E27FC236}">
-                  <a16:creationId xmlns:a16="http://schemas.microsoft.com/office/drawing/2014/main" id="{A9874143-2A82-2D3B-F797-BECFB101D068}"/>
+            <p:cNvPr id="12" name="Isosceles Triangle 11">
+              <a:extLst>
+                <a:ext uri="{FF2B5EF4-FFF2-40B4-BE49-F238E27FC236}">
+                  <a16:creationId xmlns:a16="http://schemas.microsoft.com/office/drawing/2014/main" id="{2EADF2A1-A28A-D893-3F15-3F31AEB87ECF}"/>
                 </a:ext>
               </a:extLst>
             </p:cNvPr>
@@ -17655,30 +16461,27 @@
             <p:nvPr/>
           </p:nvSpPr>
           <p:spPr>
-            <a:xfrm rot="16200000">
-              <a:off x="5683528" y="2021531"/>
-              <a:ext cx="1176771" cy="2523392"/>
-            </a:xfrm>
-            <a:prstGeom prst="moon">
-              <a:avLst>
-                <a:gd name="adj" fmla="val 55230"/>
-              </a:avLst>
-            </a:prstGeom>
+            <a:xfrm rot="10800000">
+              <a:off x="5653455" y="3974123"/>
+              <a:ext cx="1345223" cy="474785"/>
+            </a:xfrm>
+            <a:prstGeom prst="triangle">
+              <a:avLst/>
+            </a:prstGeom>
+            <a:ln w="28575"/>
           </p:spPr>
           <p:style>
             <a:lnRef idx="2">
-              <a:schemeClr val="dk1">
-                <a:shade val="50000"/>
-              </a:schemeClr>
+              <a:schemeClr val="dk1"/>
             </a:lnRef>
             <a:fillRef idx="1">
-              <a:schemeClr val="dk1"/>
-            </a:fillRef>
-            <a:effectRef idx="0">
-              <a:schemeClr val="dk1"/>
-            </a:effectRef>
-            <a:fontRef idx="minor">
               <a:schemeClr val="lt1"/>
+            </a:fillRef>
+            <a:effectRef idx="0">
+              <a:schemeClr val="dk1"/>
+            </a:effectRef>
+            <a:fontRef idx="minor">
+              <a:schemeClr val="dk1"/>
             </a:fontRef>
           </p:style>
           <p:txBody>
@@ -17692,10 +16495,10 @@
         </p:sp>
         <p:sp>
           <p:nvSpPr>
-            <p:cNvPr id="6" name="Isosceles Triangle 5">
-              <a:extLst>
-                <a:ext uri="{FF2B5EF4-FFF2-40B4-BE49-F238E27FC236}">
-                  <a16:creationId xmlns:a16="http://schemas.microsoft.com/office/drawing/2014/main" id="{B6AA356D-404B-7FFC-B885-3A63994A92C0}"/>
+            <p:cNvPr id="14" name="Isosceles Triangle 13">
+              <a:extLst>
+                <a:ext uri="{FF2B5EF4-FFF2-40B4-BE49-F238E27FC236}">
+                  <a16:creationId xmlns:a16="http://schemas.microsoft.com/office/drawing/2014/main" id="{87195922-C896-82C4-7731-A567421AC31C}"/>
                 </a:ext>
               </a:extLst>
             </p:cNvPr>
@@ -17704,8 +16507,8 @@
           </p:nvSpPr>
           <p:spPr>
             <a:xfrm>
-              <a:off x="6132701" y="2694841"/>
-              <a:ext cx="278423" cy="1723292"/>
+              <a:off x="5675434" y="2699238"/>
+              <a:ext cx="219808" cy="1274885"/>
             </a:xfrm>
             <a:prstGeom prst="triangle">
               <a:avLst/>
@@ -17738,10 +16541,10 @@
         </p:sp>
         <p:sp>
           <p:nvSpPr>
-            <p:cNvPr id="40" name="Moon 39">
-              <a:extLst>
-                <a:ext uri="{FF2B5EF4-FFF2-40B4-BE49-F238E27FC236}">
-                  <a16:creationId xmlns:a16="http://schemas.microsoft.com/office/drawing/2014/main" id="{E3293EBD-1F05-06C9-1DAF-114AB42DFCF7}"/>
+            <p:cNvPr id="55" name="Isosceles Triangle 54">
+              <a:extLst>
+                <a:ext uri="{FF2B5EF4-FFF2-40B4-BE49-F238E27FC236}">
+                  <a16:creationId xmlns:a16="http://schemas.microsoft.com/office/drawing/2014/main" id="{73506609-2BD0-91A1-05EF-31098DDB94BC}"/>
                 </a:ext>
               </a:extLst>
             </p:cNvPr>
@@ -17749,14 +16552,12 @@
             <p:nvPr/>
           </p:nvSpPr>
           <p:spPr>
-            <a:xfrm rot="5400000">
-              <a:off x="5972241" y="3787285"/>
-              <a:ext cx="599341" cy="1261696"/>
-            </a:xfrm>
-            <a:prstGeom prst="moon">
-              <a:avLst>
-                <a:gd name="adj" fmla="val 37626"/>
-              </a:avLst>
+            <a:xfrm>
+              <a:off x="6778870" y="2699237"/>
+              <a:ext cx="219808" cy="1274885"/>
+            </a:xfrm>
+            <a:prstGeom prst="triangle">
+              <a:avLst/>
             </a:prstGeom>
           </p:spPr>
           <p:style>
@@ -17784,12 +16585,215 @@
             </a:p>
           </p:txBody>
         </p:sp>
+        <p:sp>
+          <p:nvSpPr>
+            <p:cNvPr id="56" name="Isosceles Triangle 55">
+              <a:extLst>
+                <a:ext uri="{FF2B5EF4-FFF2-40B4-BE49-F238E27FC236}">
+                  <a16:creationId xmlns:a16="http://schemas.microsoft.com/office/drawing/2014/main" id="{C30E4588-E89B-61F1-12DA-7A3ED2B4D301}"/>
+                </a:ext>
+              </a:extLst>
+            </p:cNvPr>
+            <p:cNvSpPr/>
+            <p:nvPr/>
+          </p:nvSpPr>
+          <p:spPr>
+            <a:xfrm>
+              <a:off x="6216162" y="2444259"/>
+              <a:ext cx="219808" cy="1529863"/>
+            </a:xfrm>
+            <a:prstGeom prst="triangle">
+              <a:avLst/>
+            </a:prstGeom>
+          </p:spPr>
+          <p:style>
+            <a:lnRef idx="2">
+              <a:schemeClr val="dk1"/>
+            </a:lnRef>
+            <a:fillRef idx="1">
+              <a:schemeClr val="lt1"/>
+            </a:fillRef>
+            <a:effectRef idx="0">
+              <a:schemeClr val="dk1"/>
+            </a:effectRef>
+            <a:fontRef idx="minor">
+              <a:schemeClr val="dk1"/>
+            </a:fontRef>
+          </p:style>
+          <p:txBody>
+            <a:bodyPr rtlCol="0" anchor="ctr"/>
+            <a:lstStyle/>
+            <a:p>
+              <a:pPr algn="ctr"/>
+              <a:endParaRPr lang="en-US"/>
+            </a:p>
+          </p:txBody>
+        </p:sp>
+        <p:sp>
+          <p:nvSpPr>
+            <p:cNvPr id="60" name="Moon 59">
+              <a:extLst>
+                <a:ext uri="{FF2B5EF4-FFF2-40B4-BE49-F238E27FC236}">
+                  <a16:creationId xmlns:a16="http://schemas.microsoft.com/office/drawing/2014/main" id="{87A7BA59-A2B6-709C-00C8-16832E3531D0}"/>
+                </a:ext>
+              </a:extLst>
+            </p:cNvPr>
+            <p:cNvSpPr/>
+            <p:nvPr/>
+          </p:nvSpPr>
+          <p:spPr>
+            <a:xfrm rot="5400000">
+              <a:off x="6060099" y="4769824"/>
+              <a:ext cx="531929" cy="1266094"/>
+            </a:xfrm>
+            <a:prstGeom prst="moon">
+              <a:avLst>
+                <a:gd name="adj" fmla="val 38235"/>
+              </a:avLst>
+            </a:prstGeom>
+          </p:spPr>
+          <p:style>
+            <a:lnRef idx="2">
+              <a:schemeClr val="dk1"/>
+            </a:lnRef>
+            <a:fillRef idx="1">
+              <a:schemeClr val="lt1"/>
+            </a:fillRef>
+            <a:effectRef idx="0">
+              <a:schemeClr val="dk1"/>
+            </a:effectRef>
+            <a:fontRef idx="minor">
+              <a:schemeClr val="dk1"/>
+            </a:fontRef>
+          </p:style>
+          <p:txBody>
+            <a:bodyPr rtlCol="0" anchor="ctr"/>
+            <a:lstStyle/>
+            <a:p>
+              <a:pPr algn="ctr"/>
+              <a:endParaRPr lang="en-US"/>
+            </a:p>
+          </p:txBody>
+        </p:sp>
+        <p:sp>
+          <p:nvSpPr>
+            <p:cNvPr id="17" name="Isosceles Triangle 16">
+              <a:extLst>
+                <a:ext uri="{FF2B5EF4-FFF2-40B4-BE49-F238E27FC236}">
+                  <a16:creationId xmlns:a16="http://schemas.microsoft.com/office/drawing/2014/main" id="{ECBE0F47-3EA0-620C-2D86-AF5078632349}"/>
+                </a:ext>
+              </a:extLst>
+            </p:cNvPr>
+            <p:cNvSpPr/>
+            <p:nvPr/>
+          </p:nvSpPr>
+          <p:spPr>
+            <a:xfrm rot="10800000">
+              <a:off x="6000749" y="4211516"/>
+              <a:ext cx="650633" cy="1424349"/>
+            </a:xfrm>
+            <a:prstGeom prst="triangle">
+              <a:avLst/>
+            </a:prstGeom>
+          </p:spPr>
+          <p:style>
+            <a:lnRef idx="2">
+              <a:schemeClr val="dk1">
+                <a:shade val="50000"/>
+              </a:schemeClr>
+            </a:lnRef>
+            <a:fillRef idx="1">
+              <a:schemeClr val="dk1"/>
+            </a:fillRef>
+            <a:effectRef idx="0">
+              <a:schemeClr val="dk1"/>
+            </a:effectRef>
+            <a:fontRef idx="minor">
+              <a:schemeClr val="lt1"/>
+            </a:fontRef>
+          </p:style>
+          <p:txBody>
+            <a:bodyPr rtlCol="0" anchor="ctr"/>
+            <a:lstStyle/>
+            <a:p>
+              <a:pPr algn="ctr"/>
+              <a:endParaRPr lang="en-US"/>
+            </a:p>
+          </p:txBody>
+        </p:sp>
+        <p:sp>
+          <p:nvSpPr>
+            <p:cNvPr id="18" name="Moon 17">
+              <a:extLst>
+                <a:ext uri="{FF2B5EF4-FFF2-40B4-BE49-F238E27FC236}">
+                  <a16:creationId xmlns:a16="http://schemas.microsoft.com/office/drawing/2014/main" id="{FD6EA14C-83A3-27CE-AD16-7D3EF805E5B4}"/>
+                </a:ext>
+              </a:extLst>
+            </p:cNvPr>
+            <p:cNvSpPr/>
+            <p:nvPr/>
+          </p:nvSpPr>
+          <p:spPr>
+            <a:xfrm rot="5400000">
+              <a:off x="6027126" y="3697166"/>
+              <a:ext cx="597877" cy="2101363"/>
+            </a:xfrm>
+            <a:prstGeom prst="moon">
+              <a:avLst/>
+            </a:prstGeom>
+          </p:spPr>
+          <p:style>
+            <a:lnRef idx="2">
+              <a:schemeClr val="dk1">
+                <a:shade val="50000"/>
+              </a:schemeClr>
+            </a:lnRef>
+            <a:fillRef idx="1">
+              <a:schemeClr val="dk1"/>
+            </a:fillRef>
+            <a:effectRef idx="0">
+              <a:schemeClr val="dk1"/>
+            </a:effectRef>
+            <a:fontRef idx="minor">
+              <a:schemeClr val="lt1"/>
+            </a:fontRef>
+          </p:style>
+          <p:txBody>
+            <a:bodyPr rtlCol="0" anchor="ctr"/>
+            <a:lstStyle/>
+            <a:p>
+              <a:pPr algn="ctr"/>
+              <a:endParaRPr lang="en-US"/>
+            </a:p>
+          </p:txBody>
+        </p:sp>
+      </p:grpSp>
+      <p:grpSp>
+        <p:nvGrpSpPr>
+          <p:cNvPr id="16" name="Group 15">
+            <a:extLst>
+              <a:ext uri="{FF2B5EF4-FFF2-40B4-BE49-F238E27FC236}">
+                <a16:creationId xmlns:a16="http://schemas.microsoft.com/office/drawing/2014/main" id="{A1D3B18F-B55F-510A-D360-9835F96D4351}"/>
+              </a:ext>
+            </a:extLst>
+          </p:cNvPr>
+          <p:cNvGrpSpPr/>
+          <p:nvPr/>
+        </p:nvGrpSpPr>
+        <p:grpSpPr>
+          <a:xfrm rot="19005849">
+            <a:off x="3984197" y="812911"/>
+            <a:ext cx="1093057" cy="584571"/>
+            <a:chOff x="5276797" y="2347914"/>
+            <a:chExt cx="3125698" cy="1671636"/>
+          </a:xfrm>
+        </p:grpSpPr>
         <p:grpSp>
           <p:nvGrpSpPr>
-            <p:cNvPr id="9" name="Group 8">
-              <a:extLst>
-                <a:ext uri="{FF2B5EF4-FFF2-40B4-BE49-F238E27FC236}">
-                  <a16:creationId xmlns:a16="http://schemas.microsoft.com/office/drawing/2014/main" id="{2D482957-79DD-BCAA-D3A1-FDDBE4B10CF7}"/>
+            <p:cNvPr id="4" name="Group 3">
+              <a:extLst>
+                <a:ext uri="{FF2B5EF4-FFF2-40B4-BE49-F238E27FC236}">
+                  <a16:creationId xmlns:a16="http://schemas.microsoft.com/office/drawing/2014/main" id="{64A3D72A-C1FB-E845-CA4F-BC69C16F3127}"/>
                 </a:ext>
               </a:extLst>
             </p:cNvPr>
@@ -17798,18 +16802,18 @@
           </p:nvGrpSpPr>
           <p:grpSpPr>
             <a:xfrm>
-              <a:off x="5240214" y="3072211"/>
-              <a:ext cx="862512" cy="587761"/>
-              <a:chOff x="5240214" y="3072211"/>
-              <a:chExt cx="862512" cy="587761"/>
+              <a:off x="5276797" y="2537857"/>
+              <a:ext cx="3125698" cy="1481693"/>
+              <a:chOff x="5791718" y="2234167"/>
+              <a:chExt cx="2790776" cy="1322929"/>
             </a:xfrm>
           </p:grpSpPr>
           <p:sp>
             <p:nvSpPr>
-              <p:cNvPr id="7" name="Oval 6">
+              <p:cNvPr id="21" name="Moon 20">
                 <a:extLst>
                   <a:ext uri="{FF2B5EF4-FFF2-40B4-BE49-F238E27FC236}">
-                    <a16:creationId xmlns:a16="http://schemas.microsoft.com/office/drawing/2014/main" id="{2735767C-3AA8-47B6-D677-7D4BE75CD5D0}"/>
+                    <a16:creationId xmlns:a16="http://schemas.microsoft.com/office/drawing/2014/main" id="{E205A88C-A617-A10F-64E8-ACB267143627}"/>
                   </a:ext>
                 </a:extLst>
               </p:cNvPr>
@@ -17817,26 +16821,28 @@
               <p:nvPr/>
             </p:nvSpPr>
             <p:spPr>
-              <a:xfrm>
-                <a:off x="5475402" y="3233279"/>
-                <a:ext cx="274320" cy="274320"/>
+              <a:xfrm rot="16200000" flipV="1">
+                <a:off x="6751867" y="1274018"/>
+                <a:ext cx="870477" cy="2790776"/>
               </a:xfrm>
-              <a:prstGeom prst="ellipse">
+              <a:prstGeom prst="moon">
                 <a:avLst/>
               </a:prstGeom>
             </p:spPr>
             <p:style>
               <a:lnRef idx="2">
-                <a:schemeClr val="dk1"/>
+                <a:schemeClr val="dk1">
+                  <a:shade val="50000"/>
+                </a:schemeClr>
               </a:lnRef>
               <a:fillRef idx="1">
-                <a:schemeClr val="lt1"/>
+                <a:schemeClr val="dk1"/>
               </a:fillRef>
               <a:effectRef idx="0">
                 <a:schemeClr val="dk1"/>
               </a:effectRef>
               <a:fontRef idx="minor">
-                <a:schemeClr val="dk1"/>
+                <a:schemeClr val="lt1"/>
               </a:fontRef>
             </p:style>
             <p:txBody>
@@ -17850,10 +16856,10 @@
           </p:sp>
           <p:sp>
             <p:nvSpPr>
-              <p:cNvPr id="42" name="Oval 41">
+              <p:cNvPr id="68" name="Moon 67">
                 <a:extLst>
                   <a:ext uri="{FF2B5EF4-FFF2-40B4-BE49-F238E27FC236}">
-                    <a16:creationId xmlns:a16="http://schemas.microsoft.com/office/drawing/2014/main" id="{6F5C74B7-A58D-7D31-DEF0-18727C62BFB7}"/>
+                    <a16:creationId xmlns:a16="http://schemas.microsoft.com/office/drawing/2014/main" id="{958D179A-FCB2-1FAD-E919-831449E3CB87}"/>
                   </a:ext>
                 </a:extLst>
               </p:cNvPr>
@@ -17861,26 +16867,30 @@
               <p:nvPr/>
             </p:nvSpPr>
             <p:spPr>
-              <a:xfrm>
-                <a:off x="5240214" y="3072211"/>
-                <a:ext cx="228600" cy="228600"/>
+              <a:xfrm rot="16200000" flipV="1">
+                <a:off x="6921280" y="2626996"/>
+                <a:ext cx="531649" cy="1328550"/>
               </a:xfrm>
-              <a:prstGeom prst="ellipse">
-                <a:avLst/>
+              <a:prstGeom prst="moon">
+                <a:avLst>
+                  <a:gd name="adj" fmla="val 58361"/>
+                </a:avLst>
               </a:prstGeom>
             </p:spPr>
             <p:style>
               <a:lnRef idx="2">
-                <a:schemeClr val="dk1"/>
+                <a:schemeClr val="dk1">
+                  <a:shade val="50000"/>
+                </a:schemeClr>
               </a:lnRef>
               <a:fillRef idx="1">
-                <a:schemeClr val="lt1"/>
+                <a:schemeClr val="dk1"/>
               </a:fillRef>
               <a:effectRef idx="0">
                 <a:schemeClr val="dk1"/>
               </a:effectRef>
               <a:fontRef idx="minor">
-                <a:schemeClr val="dk1"/>
+                <a:schemeClr val="lt1"/>
               </a:fontRef>
             </p:style>
             <p:txBody>
@@ -17894,10 +16904,10 @@
           </p:sp>
           <p:sp>
             <p:nvSpPr>
-              <p:cNvPr id="43" name="Oval 42">
+              <p:cNvPr id="20" name="Trapezoid 19">
                 <a:extLst>
                   <a:ext uri="{FF2B5EF4-FFF2-40B4-BE49-F238E27FC236}">
-                    <a16:creationId xmlns:a16="http://schemas.microsoft.com/office/drawing/2014/main" id="{526E0C8A-89C5-3741-68F7-CCFFAC180B99}"/>
+                    <a16:creationId xmlns:a16="http://schemas.microsoft.com/office/drawing/2014/main" id="{B4208B20-59E1-0795-4DAE-F3477F5F5F55}"/>
                   </a:ext>
                 </a:extLst>
               </p:cNvPr>
@@ -17905,91 +16915,28 @@
               <p:nvPr/>
             </p:nvSpPr>
             <p:spPr>
-              <a:xfrm>
-                <a:off x="5782686" y="3339932"/>
-                <a:ext cx="320040" cy="320040"/>
+              <a:xfrm rot="10800000">
+                <a:off x="6813018" y="2514600"/>
+                <a:ext cx="748172" cy="1042496"/>
               </a:xfrm>
-              <a:prstGeom prst="ellipse">
+              <a:prstGeom prst="trapezoid">
                 <a:avLst/>
               </a:prstGeom>
             </p:spPr>
             <p:style>
               <a:lnRef idx="2">
-                <a:schemeClr val="dk1"/>
+                <a:schemeClr val="dk1">
+                  <a:shade val="50000"/>
+                </a:schemeClr>
               </a:lnRef>
               <a:fillRef idx="1">
-                <a:schemeClr val="lt1"/>
+                <a:schemeClr val="dk1"/>
               </a:fillRef>
               <a:effectRef idx="0">
                 <a:schemeClr val="dk1"/>
               </a:effectRef>
               <a:fontRef idx="minor">
-                <a:schemeClr val="dk1"/>
-              </a:fontRef>
-            </p:style>
-            <p:txBody>
-              <a:bodyPr rtlCol="0" anchor="ctr"/>
-              <a:lstStyle/>
-              <a:p>
-                <a:pPr algn="ctr"/>
-                <a:endParaRPr lang="en-US"/>
-              </a:p>
-            </p:txBody>
-          </p:sp>
-        </p:grpSp>
-        <p:grpSp>
-          <p:nvGrpSpPr>
-            <p:cNvPr id="48" name="Group 47">
-              <a:extLst>
-                <a:ext uri="{FF2B5EF4-FFF2-40B4-BE49-F238E27FC236}">
-                  <a16:creationId xmlns:a16="http://schemas.microsoft.com/office/drawing/2014/main" id="{71A6133B-7C99-7283-AAC2-A0CA1651A05E}"/>
-                </a:ext>
-              </a:extLst>
-            </p:cNvPr>
-            <p:cNvGrpSpPr/>
-            <p:nvPr/>
-          </p:nvGrpSpPr>
-          <p:grpSpPr>
-            <a:xfrm flipH="1">
-              <a:off x="6400433" y="3085350"/>
-              <a:ext cx="862512" cy="587761"/>
-              <a:chOff x="5240214" y="3072211"/>
-              <a:chExt cx="862512" cy="587761"/>
-            </a:xfrm>
-          </p:grpSpPr>
-          <p:sp>
-            <p:nvSpPr>
-              <p:cNvPr id="49" name="Oval 48">
-                <a:extLst>
-                  <a:ext uri="{FF2B5EF4-FFF2-40B4-BE49-F238E27FC236}">
-                    <a16:creationId xmlns:a16="http://schemas.microsoft.com/office/drawing/2014/main" id="{AA5D0FA6-B69E-87AA-C31D-6B987901B4D2}"/>
-                  </a:ext>
-                </a:extLst>
-              </p:cNvPr>
-              <p:cNvSpPr/>
-              <p:nvPr/>
-            </p:nvSpPr>
-            <p:spPr>
-              <a:xfrm>
-                <a:off x="5475402" y="3233279"/>
-                <a:ext cx="274320" cy="274320"/>
-              </a:xfrm>
-              <a:prstGeom prst="ellipse">
-                <a:avLst/>
-              </a:prstGeom>
-            </p:spPr>
-            <p:style>
-              <a:lnRef idx="2">
-                <a:schemeClr val="dk1"/>
-              </a:lnRef>
-              <a:fillRef idx="1">
                 <a:schemeClr val="lt1"/>
-              </a:fillRef>
-              <a:effectRef idx="0">
-                <a:schemeClr val="dk1"/>
-              </a:effectRef>
-              <a:fontRef idx="minor">
-                <a:schemeClr val="dk1"/>
               </a:fontRef>
             </p:style>
             <p:txBody>
@@ -18003,10 +16950,10 @@
           </p:sp>
           <p:sp>
             <p:nvSpPr>
-              <p:cNvPr id="50" name="Oval 49">
+              <p:cNvPr id="22" name="Oval 21">
                 <a:extLst>
                   <a:ext uri="{FF2B5EF4-FFF2-40B4-BE49-F238E27FC236}">
-                    <a16:creationId xmlns:a16="http://schemas.microsoft.com/office/drawing/2014/main" id="{94C1367F-6979-8909-D9D6-3487DAB2ACD3}"/>
+                    <a16:creationId xmlns:a16="http://schemas.microsoft.com/office/drawing/2014/main" id="{187BCEC2-D005-ACA5-364B-F687BF13FC73}"/>
                   </a:ext>
                 </a:extLst>
               </p:cNvPr>
@@ -18015,8 +16962,8 @@
             </p:nvSpPr>
             <p:spPr>
               <a:xfrm>
-                <a:off x="5240214" y="3072211"/>
-                <a:ext cx="228600" cy="228600"/>
+                <a:off x="6455154" y="2644988"/>
+                <a:ext cx="351316" cy="351316"/>
               </a:xfrm>
               <a:prstGeom prst="ellipse">
                 <a:avLst/>
@@ -18047,10 +16994,10 @@
           </p:sp>
           <p:sp>
             <p:nvSpPr>
-              <p:cNvPr id="51" name="Oval 50">
+              <p:cNvPr id="69" name="Oval 68">
                 <a:extLst>
                   <a:ext uri="{FF2B5EF4-FFF2-40B4-BE49-F238E27FC236}">
-                    <a16:creationId xmlns:a16="http://schemas.microsoft.com/office/drawing/2014/main" id="{0DBD12CD-E674-B369-7759-196E0F918CB0}"/>
+                    <a16:creationId xmlns:a16="http://schemas.microsoft.com/office/drawing/2014/main" id="{D3CCCD81-AEAF-1D91-1A8A-CA5702635CD6}"/>
                   </a:ext>
                 </a:extLst>
               </p:cNvPr>
@@ -18059,8 +17006,316 @@
             </p:nvSpPr>
             <p:spPr>
               <a:xfrm>
-                <a:off x="5782686" y="3339932"/>
-                <a:ext cx="320040" cy="320040"/>
+                <a:off x="7037449" y="2674398"/>
+                <a:ext cx="292763" cy="292763"/>
+              </a:xfrm>
+              <a:prstGeom prst="ellipse">
+                <a:avLst/>
+              </a:prstGeom>
+            </p:spPr>
+            <p:style>
+              <a:lnRef idx="2">
+                <a:schemeClr val="dk1"/>
+              </a:lnRef>
+              <a:fillRef idx="1">
+                <a:schemeClr val="lt1"/>
+              </a:fillRef>
+              <a:effectRef idx="0">
+                <a:schemeClr val="dk1"/>
+              </a:effectRef>
+              <a:fontRef idx="minor">
+                <a:schemeClr val="dk1"/>
+              </a:fontRef>
+            </p:style>
+            <p:txBody>
+              <a:bodyPr rtlCol="0" anchor="ctr"/>
+              <a:lstStyle/>
+              <a:p>
+                <a:pPr algn="ctr"/>
+                <a:endParaRPr lang="en-US"/>
+              </a:p>
+            </p:txBody>
+          </p:sp>
+          <p:sp>
+            <p:nvSpPr>
+              <p:cNvPr id="70" name="Oval 69">
+                <a:extLst>
+                  <a:ext uri="{FF2B5EF4-FFF2-40B4-BE49-F238E27FC236}">
+                    <a16:creationId xmlns:a16="http://schemas.microsoft.com/office/drawing/2014/main" id="{16D2DBA2-511B-A238-4803-4A57DC71210F}"/>
+                  </a:ext>
+                </a:extLst>
+              </p:cNvPr>
+              <p:cNvSpPr/>
+              <p:nvPr/>
+            </p:nvSpPr>
+            <p:spPr>
+              <a:xfrm>
+                <a:off x="7066725" y="2986895"/>
+                <a:ext cx="234210" cy="234211"/>
+              </a:xfrm>
+              <a:prstGeom prst="ellipse">
+                <a:avLst/>
+              </a:prstGeom>
+            </p:spPr>
+            <p:style>
+              <a:lnRef idx="2">
+                <a:schemeClr val="dk1"/>
+              </a:lnRef>
+              <a:fillRef idx="1">
+                <a:schemeClr val="lt1"/>
+              </a:fillRef>
+              <a:effectRef idx="0">
+                <a:schemeClr val="dk1"/>
+              </a:effectRef>
+              <a:fontRef idx="minor">
+                <a:schemeClr val="dk1"/>
+              </a:fontRef>
+            </p:style>
+            <p:txBody>
+              <a:bodyPr rtlCol="0" anchor="ctr"/>
+              <a:lstStyle/>
+              <a:p>
+                <a:pPr algn="ctr"/>
+                <a:endParaRPr lang="en-US"/>
+              </a:p>
+            </p:txBody>
+          </p:sp>
+          <p:sp>
+            <p:nvSpPr>
+              <p:cNvPr id="71" name="Oval 70">
+                <a:extLst>
+                  <a:ext uri="{FF2B5EF4-FFF2-40B4-BE49-F238E27FC236}">
+                    <a16:creationId xmlns:a16="http://schemas.microsoft.com/office/drawing/2014/main" id="{4D1130D1-136D-1917-4080-6CCCED424C44}"/>
+                  </a:ext>
+                </a:extLst>
+              </p:cNvPr>
+              <p:cNvSpPr/>
+              <p:nvPr/>
+            </p:nvSpPr>
+            <p:spPr>
+              <a:xfrm>
+                <a:off x="7096001" y="3257681"/>
+                <a:ext cx="175658" cy="175658"/>
+              </a:xfrm>
+              <a:prstGeom prst="ellipse">
+                <a:avLst/>
+              </a:prstGeom>
+            </p:spPr>
+            <p:style>
+              <a:lnRef idx="2">
+                <a:schemeClr val="dk1"/>
+              </a:lnRef>
+              <a:fillRef idx="1">
+                <a:schemeClr val="lt1"/>
+              </a:fillRef>
+              <a:effectRef idx="0">
+                <a:schemeClr val="dk1"/>
+              </a:effectRef>
+              <a:fontRef idx="minor">
+                <a:schemeClr val="dk1"/>
+              </a:fontRef>
+            </p:style>
+            <p:txBody>
+              <a:bodyPr rtlCol="0" anchor="ctr"/>
+              <a:lstStyle/>
+              <a:p>
+                <a:pPr algn="ctr"/>
+                <a:endParaRPr lang="en-US"/>
+              </a:p>
+            </p:txBody>
+          </p:sp>
+          <p:sp>
+            <p:nvSpPr>
+              <p:cNvPr id="104" name="Oval 103">
+                <a:extLst>
+                  <a:ext uri="{FF2B5EF4-FFF2-40B4-BE49-F238E27FC236}">
+                    <a16:creationId xmlns:a16="http://schemas.microsoft.com/office/drawing/2014/main" id="{225D134E-7EA4-43D6-73BF-7173F57A21FC}"/>
+                  </a:ext>
+                </a:extLst>
+              </p:cNvPr>
+              <p:cNvSpPr/>
+              <p:nvPr/>
+            </p:nvSpPr>
+            <p:spPr>
+              <a:xfrm>
+                <a:off x="7583919" y="2649938"/>
+                <a:ext cx="351316" cy="351316"/>
+              </a:xfrm>
+              <a:prstGeom prst="ellipse">
+                <a:avLst/>
+              </a:prstGeom>
+            </p:spPr>
+            <p:style>
+              <a:lnRef idx="2">
+                <a:schemeClr val="dk1"/>
+              </a:lnRef>
+              <a:fillRef idx="1">
+                <a:schemeClr val="lt1"/>
+              </a:fillRef>
+              <a:effectRef idx="0">
+                <a:schemeClr val="dk1"/>
+              </a:effectRef>
+              <a:fontRef idx="minor">
+                <a:schemeClr val="dk1"/>
+              </a:fontRef>
+            </p:style>
+            <p:txBody>
+              <a:bodyPr rtlCol="0" anchor="ctr"/>
+              <a:lstStyle/>
+              <a:p>
+                <a:pPr algn="ctr"/>
+                <a:endParaRPr lang="en-US"/>
+              </a:p>
+            </p:txBody>
+          </p:sp>
+          <p:sp>
+            <p:nvSpPr>
+              <p:cNvPr id="105" name="Oval 104">
+                <a:extLst>
+                  <a:ext uri="{FF2B5EF4-FFF2-40B4-BE49-F238E27FC236}">
+                    <a16:creationId xmlns:a16="http://schemas.microsoft.com/office/drawing/2014/main" id="{70353D4C-8A11-547C-8248-7DD7E846C955}"/>
+                  </a:ext>
+                </a:extLst>
+              </p:cNvPr>
+              <p:cNvSpPr/>
+              <p:nvPr/>
+            </p:nvSpPr>
+            <p:spPr>
+              <a:xfrm>
+                <a:off x="6163678" y="2575651"/>
+                <a:ext cx="292763" cy="292763"/>
+              </a:xfrm>
+              <a:prstGeom prst="ellipse">
+                <a:avLst/>
+              </a:prstGeom>
+            </p:spPr>
+            <p:style>
+              <a:lnRef idx="2">
+                <a:schemeClr val="dk1"/>
+              </a:lnRef>
+              <a:fillRef idx="1">
+                <a:schemeClr val="lt1"/>
+              </a:fillRef>
+              <a:effectRef idx="0">
+                <a:schemeClr val="dk1"/>
+              </a:effectRef>
+              <a:fontRef idx="minor">
+                <a:schemeClr val="dk1"/>
+              </a:fontRef>
+            </p:style>
+            <p:txBody>
+              <a:bodyPr rtlCol="0" anchor="ctr"/>
+              <a:lstStyle/>
+              <a:p>
+                <a:pPr algn="ctr"/>
+                <a:endParaRPr lang="en-US"/>
+              </a:p>
+            </p:txBody>
+          </p:sp>
+          <p:sp>
+            <p:nvSpPr>
+              <p:cNvPr id="106" name="Oval 105">
+                <a:extLst>
+                  <a:ext uri="{FF2B5EF4-FFF2-40B4-BE49-F238E27FC236}">
+                    <a16:creationId xmlns:a16="http://schemas.microsoft.com/office/drawing/2014/main" id="{155E048C-97ED-95D2-A25C-D7A0E19E69D4}"/>
+                  </a:ext>
+                </a:extLst>
+              </p:cNvPr>
+              <p:cNvSpPr/>
+              <p:nvPr/>
+            </p:nvSpPr>
+            <p:spPr>
+              <a:xfrm>
+                <a:off x="7935235" y="2563649"/>
+                <a:ext cx="292763" cy="292763"/>
+              </a:xfrm>
+              <a:prstGeom prst="ellipse">
+                <a:avLst/>
+              </a:prstGeom>
+            </p:spPr>
+            <p:style>
+              <a:lnRef idx="2">
+                <a:schemeClr val="dk1"/>
+              </a:lnRef>
+              <a:fillRef idx="1">
+                <a:schemeClr val="lt1"/>
+              </a:fillRef>
+              <a:effectRef idx="0">
+                <a:schemeClr val="dk1"/>
+              </a:effectRef>
+              <a:fontRef idx="minor">
+                <a:schemeClr val="dk1"/>
+              </a:fontRef>
+            </p:style>
+            <p:txBody>
+              <a:bodyPr rtlCol="0" anchor="ctr"/>
+              <a:lstStyle/>
+              <a:p>
+                <a:pPr algn="ctr"/>
+                <a:endParaRPr lang="en-US"/>
+              </a:p>
+            </p:txBody>
+          </p:sp>
+          <p:sp>
+            <p:nvSpPr>
+              <p:cNvPr id="107" name="Oval 106">
+                <a:extLst>
+                  <a:ext uri="{FF2B5EF4-FFF2-40B4-BE49-F238E27FC236}">
+                    <a16:creationId xmlns:a16="http://schemas.microsoft.com/office/drawing/2014/main" id="{D996B20C-E2A7-3659-5DE5-5232B5F70C69}"/>
+                  </a:ext>
+                </a:extLst>
+              </p:cNvPr>
+              <p:cNvSpPr/>
+              <p:nvPr/>
+            </p:nvSpPr>
+            <p:spPr>
+              <a:xfrm>
+                <a:off x="5993280" y="2489527"/>
+                <a:ext cx="175658" cy="175658"/>
+              </a:xfrm>
+              <a:prstGeom prst="ellipse">
+                <a:avLst/>
+              </a:prstGeom>
+            </p:spPr>
+            <p:style>
+              <a:lnRef idx="2">
+                <a:schemeClr val="dk1"/>
+              </a:lnRef>
+              <a:fillRef idx="1">
+                <a:schemeClr val="lt1"/>
+              </a:fillRef>
+              <a:effectRef idx="0">
+                <a:schemeClr val="dk1"/>
+              </a:effectRef>
+              <a:fontRef idx="minor">
+                <a:schemeClr val="dk1"/>
+              </a:fontRef>
+            </p:style>
+            <p:txBody>
+              <a:bodyPr rtlCol="0" anchor="ctr"/>
+              <a:lstStyle/>
+              <a:p>
+                <a:pPr algn="ctr"/>
+                <a:endParaRPr lang="en-US"/>
+              </a:p>
+            </p:txBody>
+          </p:sp>
+          <p:sp>
+            <p:nvSpPr>
+              <p:cNvPr id="108" name="Oval 107">
+                <a:extLst>
+                  <a:ext uri="{FF2B5EF4-FFF2-40B4-BE49-F238E27FC236}">
+                    <a16:creationId xmlns:a16="http://schemas.microsoft.com/office/drawing/2014/main" id="{706AE15F-F527-E84D-5B68-B8FE5032C602}"/>
+                  </a:ext>
+                </a:extLst>
+              </p:cNvPr>
+              <p:cNvSpPr/>
+              <p:nvPr/>
+            </p:nvSpPr>
+            <p:spPr>
+              <a:xfrm>
+                <a:off x="8203057" y="2470977"/>
+                <a:ext cx="175658" cy="175658"/>
               </a:xfrm>
               <a:prstGeom prst="ellipse">
                 <a:avLst/>
@@ -18090,33 +17345,12 @@
             </p:txBody>
           </p:sp>
         </p:grpSp>
-      </p:grpSp>
-      <p:grpSp>
-        <p:nvGrpSpPr>
-          <p:cNvPr id="19" name="Group 18">
-            <a:extLst>
-              <a:ext uri="{FF2B5EF4-FFF2-40B4-BE49-F238E27FC236}">
-                <a16:creationId xmlns:a16="http://schemas.microsoft.com/office/drawing/2014/main" id="{F0C5DF98-2563-86F8-66B2-5F473BDD317C}"/>
-              </a:ext>
-            </a:extLst>
-          </p:cNvPr>
-          <p:cNvGrpSpPr/>
-          <p:nvPr/>
-        </p:nvGrpSpPr>
-        <p:grpSpPr>
-          <a:xfrm>
-            <a:off x="2507360" y="554317"/>
-            <a:ext cx="577458" cy="886118"/>
-            <a:chOff x="5275383" y="2444259"/>
-            <a:chExt cx="2101363" cy="3224576"/>
-          </a:xfrm>
-        </p:grpSpPr>
         <p:sp>
           <p:nvSpPr>
-            <p:cNvPr id="12" name="Isosceles Triangle 11">
-              <a:extLst>
-                <a:ext uri="{FF2B5EF4-FFF2-40B4-BE49-F238E27FC236}">
-                  <a16:creationId xmlns:a16="http://schemas.microsoft.com/office/drawing/2014/main" id="{2EADF2A1-A28A-D893-3F15-3F31AEB87ECF}"/>
+            <p:cNvPr id="8" name="Moon 7">
+              <a:extLst>
+                <a:ext uri="{FF2B5EF4-FFF2-40B4-BE49-F238E27FC236}">
+                  <a16:creationId xmlns:a16="http://schemas.microsoft.com/office/drawing/2014/main" id="{7680059E-BFAA-99D8-6844-0827F9CE5DEB}"/>
                 </a:ext>
               </a:extLst>
             </p:cNvPr>
@@ -18124,57 +17358,14 @@
             <p:nvPr/>
           </p:nvSpPr>
           <p:spPr>
-            <a:xfrm rot="10800000">
-              <a:off x="5653455" y="3974123"/>
-              <a:ext cx="1345223" cy="474785"/>
-            </a:xfrm>
-            <a:prstGeom prst="triangle">
-              <a:avLst/>
-            </a:prstGeom>
-            <a:ln w="28575"/>
-          </p:spPr>
-          <p:style>
-            <a:lnRef idx="2">
-              <a:schemeClr val="dk1"/>
-            </a:lnRef>
-            <a:fillRef idx="1">
-              <a:schemeClr val="lt1"/>
-            </a:fillRef>
-            <a:effectRef idx="0">
-              <a:schemeClr val="dk1"/>
-            </a:effectRef>
-            <a:fontRef idx="minor">
-              <a:schemeClr val="dk1"/>
-            </a:fontRef>
-          </p:style>
-          <p:txBody>
-            <a:bodyPr rtlCol="0" anchor="ctr"/>
-            <a:lstStyle/>
-            <a:p>
-              <a:pPr algn="ctr"/>
-              <a:endParaRPr lang="en-US"/>
-            </a:p>
-          </p:txBody>
-        </p:sp>
-        <p:sp>
-          <p:nvSpPr>
-            <p:cNvPr id="14" name="Isosceles Triangle 13">
-              <a:extLst>
-                <a:ext uri="{FF2B5EF4-FFF2-40B4-BE49-F238E27FC236}">
-                  <a16:creationId xmlns:a16="http://schemas.microsoft.com/office/drawing/2014/main" id="{87195922-C896-82C4-7731-A567421AC31C}"/>
-                </a:ext>
-              </a:extLst>
-            </p:cNvPr>
-            <p:cNvSpPr/>
-            <p:nvPr/>
-          </p:nvSpPr>
-          <p:spPr>
-            <a:xfrm>
-              <a:off x="5675434" y="2699238"/>
-              <a:ext cx="219808" cy="1274885"/>
-            </a:xfrm>
-            <a:prstGeom prst="triangle">
-              <a:avLst/>
+            <a:xfrm rot="16200000">
+              <a:off x="6578719" y="2215251"/>
+              <a:ext cx="528871" cy="794198"/>
+            </a:xfrm>
+            <a:prstGeom prst="moon">
+              <a:avLst>
+                <a:gd name="adj" fmla="val 37993"/>
+              </a:avLst>
             </a:prstGeom>
           </p:spPr>
           <p:style>
@@ -18191,655 +17382,6 @@
             </a:effectRef>
             <a:fontRef idx="minor">
               <a:schemeClr val="lt1"/>
-            </a:fontRef>
-          </p:style>
-          <p:txBody>
-            <a:bodyPr rtlCol="0" anchor="ctr"/>
-            <a:lstStyle/>
-            <a:p>
-              <a:pPr algn="ctr"/>
-              <a:endParaRPr lang="en-US"/>
-            </a:p>
-          </p:txBody>
-        </p:sp>
-        <p:sp>
-          <p:nvSpPr>
-            <p:cNvPr id="55" name="Isosceles Triangle 54">
-              <a:extLst>
-                <a:ext uri="{FF2B5EF4-FFF2-40B4-BE49-F238E27FC236}">
-                  <a16:creationId xmlns:a16="http://schemas.microsoft.com/office/drawing/2014/main" id="{73506609-2BD0-91A1-05EF-31098DDB94BC}"/>
-                </a:ext>
-              </a:extLst>
-            </p:cNvPr>
-            <p:cNvSpPr/>
-            <p:nvPr/>
-          </p:nvSpPr>
-          <p:spPr>
-            <a:xfrm>
-              <a:off x="6778870" y="2699237"/>
-              <a:ext cx="219808" cy="1274885"/>
-            </a:xfrm>
-            <a:prstGeom prst="triangle">
-              <a:avLst/>
-            </a:prstGeom>
-          </p:spPr>
-          <p:style>
-            <a:lnRef idx="2">
-              <a:schemeClr val="dk1">
-                <a:shade val="50000"/>
-              </a:schemeClr>
-            </a:lnRef>
-            <a:fillRef idx="1">
-              <a:schemeClr val="dk1"/>
-            </a:fillRef>
-            <a:effectRef idx="0">
-              <a:schemeClr val="dk1"/>
-            </a:effectRef>
-            <a:fontRef idx="minor">
-              <a:schemeClr val="lt1"/>
-            </a:fontRef>
-          </p:style>
-          <p:txBody>
-            <a:bodyPr rtlCol="0" anchor="ctr"/>
-            <a:lstStyle/>
-            <a:p>
-              <a:pPr algn="ctr"/>
-              <a:endParaRPr lang="en-US"/>
-            </a:p>
-          </p:txBody>
-        </p:sp>
-        <p:sp>
-          <p:nvSpPr>
-            <p:cNvPr id="56" name="Isosceles Triangle 55">
-              <a:extLst>
-                <a:ext uri="{FF2B5EF4-FFF2-40B4-BE49-F238E27FC236}">
-                  <a16:creationId xmlns:a16="http://schemas.microsoft.com/office/drawing/2014/main" id="{C30E4588-E89B-61F1-12DA-7A3ED2B4D301}"/>
-                </a:ext>
-              </a:extLst>
-            </p:cNvPr>
-            <p:cNvSpPr/>
-            <p:nvPr/>
-          </p:nvSpPr>
-          <p:spPr>
-            <a:xfrm>
-              <a:off x="6216162" y="2444259"/>
-              <a:ext cx="219808" cy="1529863"/>
-            </a:xfrm>
-            <a:prstGeom prst="triangle">
-              <a:avLst/>
-            </a:prstGeom>
-          </p:spPr>
-          <p:style>
-            <a:lnRef idx="2">
-              <a:schemeClr val="dk1"/>
-            </a:lnRef>
-            <a:fillRef idx="1">
-              <a:schemeClr val="lt1"/>
-            </a:fillRef>
-            <a:effectRef idx="0">
-              <a:schemeClr val="dk1"/>
-            </a:effectRef>
-            <a:fontRef idx="minor">
-              <a:schemeClr val="dk1"/>
-            </a:fontRef>
-          </p:style>
-          <p:txBody>
-            <a:bodyPr rtlCol="0" anchor="ctr"/>
-            <a:lstStyle/>
-            <a:p>
-              <a:pPr algn="ctr"/>
-              <a:endParaRPr lang="en-US"/>
-            </a:p>
-          </p:txBody>
-        </p:sp>
-        <p:sp>
-          <p:nvSpPr>
-            <p:cNvPr id="60" name="Moon 59">
-              <a:extLst>
-                <a:ext uri="{FF2B5EF4-FFF2-40B4-BE49-F238E27FC236}">
-                  <a16:creationId xmlns:a16="http://schemas.microsoft.com/office/drawing/2014/main" id="{87A7BA59-A2B6-709C-00C8-16832E3531D0}"/>
-                </a:ext>
-              </a:extLst>
-            </p:cNvPr>
-            <p:cNvSpPr/>
-            <p:nvPr/>
-          </p:nvSpPr>
-          <p:spPr>
-            <a:xfrm rot="5400000">
-              <a:off x="6060099" y="4769824"/>
-              <a:ext cx="531929" cy="1266094"/>
-            </a:xfrm>
-            <a:prstGeom prst="moon">
-              <a:avLst>
-                <a:gd name="adj" fmla="val 38235"/>
-              </a:avLst>
-            </a:prstGeom>
-          </p:spPr>
-          <p:style>
-            <a:lnRef idx="2">
-              <a:schemeClr val="dk1"/>
-            </a:lnRef>
-            <a:fillRef idx="1">
-              <a:schemeClr val="lt1"/>
-            </a:fillRef>
-            <a:effectRef idx="0">
-              <a:schemeClr val="dk1"/>
-            </a:effectRef>
-            <a:fontRef idx="minor">
-              <a:schemeClr val="dk1"/>
-            </a:fontRef>
-          </p:style>
-          <p:txBody>
-            <a:bodyPr rtlCol="0" anchor="ctr"/>
-            <a:lstStyle/>
-            <a:p>
-              <a:pPr algn="ctr"/>
-              <a:endParaRPr lang="en-US"/>
-            </a:p>
-          </p:txBody>
-        </p:sp>
-        <p:sp>
-          <p:nvSpPr>
-            <p:cNvPr id="17" name="Isosceles Triangle 16">
-              <a:extLst>
-                <a:ext uri="{FF2B5EF4-FFF2-40B4-BE49-F238E27FC236}">
-                  <a16:creationId xmlns:a16="http://schemas.microsoft.com/office/drawing/2014/main" id="{ECBE0F47-3EA0-620C-2D86-AF5078632349}"/>
-                </a:ext>
-              </a:extLst>
-            </p:cNvPr>
-            <p:cNvSpPr/>
-            <p:nvPr/>
-          </p:nvSpPr>
-          <p:spPr>
-            <a:xfrm rot="10800000">
-              <a:off x="6000749" y="4211516"/>
-              <a:ext cx="650633" cy="1424349"/>
-            </a:xfrm>
-            <a:prstGeom prst="triangle">
-              <a:avLst/>
-            </a:prstGeom>
-          </p:spPr>
-          <p:style>
-            <a:lnRef idx="2">
-              <a:schemeClr val="dk1">
-                <a:shade val="50000"/>
-              </a:schemeClr>
-            </a:lnRef>
-            <a:fillRef idx="1">
-              <a:schemeClr val="dk1"/>
-            </a:fillRef>
-            <a:effectRef idx="0">
-              <a:schemeClr val="dk1"/>
-            </a:effectRef>
-            <a:fontRef idx="minor">
-              <a:schemeClr val="lt1"/>
-            </a:fontRef>
-          </p:style>
-          <p:txBody>
-            <a:bodyPr rtlCol="0" anchor="ctr"/>
-            <a:lstStyle/>
-            <a:p>
-              <a:pPr algn="ctr"/>
-              <a:endParaRPr lang="en-US"/>
-            </a:p>
-          </p:txBody>
-        </p:sp>
-        <p:sp>
-          <p:nvSpPr>
-            <p:cNvPr id="18" name="Moon 17">
-              <a:extLst>
-                <a:ext uri="{FF2B5EF4-FFF2-40B4-BE49-F238E27FC236}">
-                  <a16:creationId xmlns:a16="http://schemas.microsoft.com/office/drawing/2014/main" id="{FD6EA14C-83A3-27CE-AD16-7D3EF805E5B4}"/>
-                </a:ext>
-              </a:extLst>
-            </p:cNvPr>
-            <p:cNvSpPr/>
-            <p:nvPr/>
-          </p:nvSpPr>
-          <p:spPr>
-            <a:xfrm rot="5400000">
-              <a:off x="6027126" y="3697166"/>
-              <a:ext cx="597877" cy="2101363"/>
-            </a:xfrm>
-            <a:prstGeom prst="moon">
-              <a:avLst/>
-            </a:prstGeom>
-          </p:spPr>
-          <p:style>
-            <a:lnRef idx="2">
-              <a:schemeClr val="dk1">
-                <a:shade val="50000"/>
-              </a:schemeClr>
-            </a:lnRef>
-            <a:fillRef idx="1">
-              <a:schemeClr val="dk1"/>
-            </a:fillRef>
-            <a:effectRef idx="0">
-              <a:schemeClr val="dk1"/>
-            </a:effectRef>
-            <a:fontRef idx="minor">
-              <a:schemeClr val="lt1"/>
-            </a:fontRef>
-          </p:style>
-          <p:txBody>
-            <a:bodyPr rtlCol="0" anchor="ctr"/>
-            <a:lstStyle/>
-            <a:p>
-              <a:pPr algn="ctr"/>
-              <a:endParaRPr lang="en-US"/>
-            </a:p>
-          </p:txBody>
-        </p:sp>
-      </p:grpSp>
-      <p:grpSp>
-        <p:nvGrpSpPr>
-          <p:cNvPr id="24" name="Group 23">
-            <a:extLst>
-              <a:ext uri="{FF2B5EF4-FFF2-40B4-BE49-F238E27FC236}">
-                <a16:creationId xmlns:a16="http://schemas.microsoft.com/office/drawing/2014/main" id="{28961DD9-2354-5B68-2F7D-5210C746B4E7}"/>
-              </a:ext>
-            </a:extLst>
-          </p:cNvPr>
-          <p:cNvGrpSpPr/>
-          <p:nvPr/>
-        </p:nvGrpSpPr>
-        <p:grpSpPr>
-          <a:xfrm>
-            <a:off x="3943868" y="615737"/>
-            <a:ext cx="1020292" cy="877614"/>
-            <a:chOff x="5664202" y="1634729"/>
-            <a:chExt cx="2809442" cy="2416570"/>
-          </a:xfrm>
-        </p:grpSpPr>
-        <p:sp>
-          <p:nvSpPr>
-            <p:cNvPr id="21" name="Moon 20">
-              <a:extLst>
-                <a:ext uri="{FF2B5EF4-FFF2-40B4-BE49-F238E27FC236}">
-                  <a16:creationId xmlns:a16="http://schemas.microsoft.com/office/drawing/2014/main" id="{E205A88C-A617-A10F-64E8-ACB267143627}"/>
-                </a:ext>
-              </a:extLst>
-            </p:cNvPr>
-            <p:cNvSpPr/>
-            <p:nvPr/>
-          </p:nvSpPr>
-          <p:spPr>
-            <a:xfrm rot="16200000" flipV="1">
-              <a:off x="6630773" y="1057275"/>
-              <a:ext cx="876300" cy="2809442"/>
-            </a:xfrm>
-            <a:prstGeom prst="moon">
-              <a:avLst/>
-            </a:prstGeom>
-          </p:spPr>
-          <p:style>
-            <a:lnRef idx="2">
-              <a:schemeClr val="dk1"/>
-            </a:lnRef>
-            <a:fillRef idx="1">
-              <a:schemeClr val="lt1"/>
-            </a:fillRef>
-            <a:effectRef idx="0">
-              <a:schemeClr val="dk1"/>
-            </a:effectRef>
-            <a:fontRef idx="minor">
-              <a:schemeClr val="dk1"/>
-            </a:fontRef>
-          </p:style>
-          <p:txBody>
-            <a:bodyPr rtlCol="0" anchor="ctr"/>
-            <a:lstStyle/>
-            <a:p>
-              <a:pPr algn="ctr"/>
-              <a:endParaRPr lang="en-US"/>
-            </a:p>
-          </p:txBody>
-        </p:sp>
-        <p:sp>
-          <p:nvSpPr>
-            <p:cNvPr id="67" name="Moon 66">
-              <a:extLst>
-                <a:ext uri="{FF2B5EF4-FFF2-40B4-BE49-F238E27FC236}">
-                  <a16:creationId xmlns:a16="http://schemas.microsoft.com/office/drawing/2014/main" id="{57F01248-854D-FF68-7C19-2D740C67AE52}"/>
-                </a:ext>
-              </a:extLst>
-            </p:cNvPr>
-            <p:cNvSpPr/>
-            <p:nvPr/>
-          </p:nvSpPr>
-          <p:spPr>
-            <a:xfrm rot="16200000" flipV="1">
-              <a:off x="6777590" y="2133133"/>
-              <a:ext cx="658596" cy="2101848"/>
-            </a:xfrm>
-            <a:prstGeom prst="moon">
-              <a:avLst/>
-            </a:prstGeom>
-          </p:spPr>
-          <p:style>
-            <a:lnRef idx="2">
-              <a:schemeClr val="dk1"/>
-            </a:lnRef>
-            <a:fillRef idx="1">
-              <a:schemeClr val="lt1"/>
-            </a:fillRef>
-            <a:effectRef idx="0">
-              <a:schemeClr val="dk1"/>
-            </a:effectRef>
-            <a:fontRef idx="minor">
-              <a:schemeClr val="dk1"/>
-            </a:fontRef>
-          </p:style>
-          <p:txBody>
-            <a:bodyPr rtlCol="0" anchor="ctr"/>
-            <a:lstStyle/>
-            <a:p>
-              <a:pPr algn="ctr"/>
-              <a:endParaRPr lang="en-US"/>
-            </a:p>
-          </p:txBody>
-        </p:sp>
-        <p:sp>
-          <p:nvSpPr>
-            <p:cNvPr id="68" name="Moon 67">
-              <a:extLst>
-                <a:ext uri="{FF2B5EF4-FFF2-40B4-BE49-F238E27FC236}">
-                  <a16:creationId xmlns:a16="http://schemas.microsoft.com/office/drawing/2014/main" id="{958D179A-FCB2-1FAD-E919-831449E3CB87}"/>
-                </a:ext>
-              </a:extLst>
-            </p:cNvPr>
-            <p:cNvSpPr/>
-            <p:nvPr/>
-          </p:nvSpPr>
-          <p:spPr>
-            <a:xfrm rot="16200000" flipV="1">
-              <a:off x="6839285" y="3112240"/>
-              <a:ext cx="535205" cy="1337436"/>
-            </a:xfrm>
-            <a:prstGeom prst="moon">
-              <a:avLst/>
-            </a:prstGeom>
-          </p:spPr>
-          <p:style>
-            <a:lnRef idx="2">
-              <a:schemeClr val="dk1"/>
-            </a:lnRef>
-            <a:fillRef idx="1">
-              <a:schemeClr val="lt1"/>
-            </a:fillRef>
-            <a:effectRef idx="0">
-              <a:schemeClr val="dk1"/>
-            </a:effectRef>
-            <a:fontRef idx="minor">
-              <a:schemeClr val="dk1"/>
-            </a:fontRef>
-          </p:style>
-          <p:txBody>
-            <a:bodyPr rtlCol="0" anchor="ctr"/>
-            <a:lstStyle/>
-            <a:p>
-              <a:pPr algn="ctr"/>
-              <a:endParaRPr lang="en-US"/>
-            </a:p>
-          </p:txBody>
-        </p:sp>
-        <p:sp>
-          <p:nvSpPr>
-            <p:cNvPr id="20" name="Trapezoid 19">
-              <a:extLst>
-                <a:ext uri="{FF2B5EF4-FFF2-40B4-BE49-F238E27FC236}">
-                  <a16:creationId xmlns:a16="http://schemas.microsoft.com/office/drawing/2014/main" id="{B4208B20-59E1-0795-4DAE-F3477F5F5F55}"/>
-                </a:ext>
-              </a:extLst>
-            </p:cNvPr>
-            <p:cNvSpPr/>
-            <p:nvPr/>
-          </p:nvSpPr>
-          <p:spPr>
-            <a:xfrm rot="10800000">
-              <a:off x="6527800" y="2060178"/>
-              <a:ext cx="1168400" cy="1991121"/>
-            </a:xfrm>
-            <a:prstGeom prst="trapezoid">
-              <a:avLst/>
-            </a:prstGeom>
-          </p:spPr>
-          <p:style>
-            <a:lnRef idx="2">
-              <a:schemeClr val="dk1">
-                <a:shade val="50000"/>
-              </a:schemeClr>
-            </a:lnRef>
-            <a:fillRef idx="1">
-              <a:schemeClr val="dk1"/>
-            </a:fillRef>
-            <a:effectRef idx="0">
-              <a:schemeClr val="dk1"/>
-            </a:effectRef>
-            <a:fontRef idx="minor">
-              <a:schemeClr val="lt1"/>
-            </a:fontRef>
-          </p:style>
-          <p:txBody>
-            <a:bodyPr rtlCol="0" anchor="ctr"/>
-            <a:lstStyle/>
-            <a:p>
-              <a:pPr algn="ctr"/>
-              <a:endParaRPr lang="en-US"/>
-            </a:p>
-          </p:txBody>
-        </p:sp>
-        <p:sp>
-          <p:nvSpPr>
-            <p:cNvPr id="66" name="Trapezoid 65">
-              <a:extLst>
-                <a:ext uri="{FF2B5EF4-FFF2-40B4-BE49-F238E27FC236}">
-                  <a16:creationId xmlns:a16="http://schemas.microsoft.com/office/drawing/2014/main" id="{354C1164-4902-CC73-0E27-43A861AB0199}"/>
-                </a:ext>
-              </a:extLst>
-            </p:cNvPr>
-            <p:cNvSpPr/>
-            <p:nvPr/>
-          </p:nvSpPr>
-          <p:spPr>
-            <a:xfrm>
-              <a:off x="6667977" y="1634729"/>
-              <a:ext cx="877823" cy="341783"/>
-            </a:xfrm>
-            <a:prstGeom prst="trapezoid">
-              <a:avLst/>
-            </a:prstGeom>
-          </p:spPr>
-          <p:style>
-            <a:lnRef idx="2">
-              <a:schemeClr val="dk1">
-                <a:shade val="50000"/>
-              </a:schemeClr>
-            </a:lnRef>
-            <a:fillRef idx="1">
-              <a:schemeClr val="dk1"/>
-            </a:fillRef>
-            <a:effectRef idx="0">
-              <a:schemeClr val="dk1"/>
-            </a:effectRef>
-            <a:fontRef idx="minor">
-              <a:schemeClr val="lt1"/>
-            </a:fontRef>
-          </p:style>
-          <p:txBody>
-            <a:bodyPr rtlCol="0" anchor="ctr"/>
-            <a:lstStyle/>
-            <a:p>
-              <a:pPr algn="ctr"/>
-              <a:endParaRPr lang="en-US"/>
-            </a:p>
-          </p:txBody>
-        </p:sp>
-        <p:sp>
-          <p:nvSpPr>
-            <p:cNvPr id="22" name="Oval 21">
-              <a:extLst>
-                <a:ext uri="{FF2B5EF4-FFF2-40B4-BE49-F238E27FC236}">
-                  <a16:creationId xmlns:a16="http://schemas.microsoft.com/office/drawing/2014/main" id="{187BCEC2-D005-ACA5-364B-F687BF13FC73}"/>
-                </a:ext>
-              </a:extLst>
-            </p:cNvPr>
-            <p:cNvSpPr/>
-            <p:nvPr/>
-          </p:nvSpPr>
-          <p:spPr>
-            <a:xfrm>
-              <a:off x="6832567" y="2092176"/>
-              <a:ext cx="548640" cy="548640"/>
-            </a:xfrm>
-            <a:prstGeom prst="ellipse">
-              <a:avLst/>
-            </a:prstGeom>
-          </p:spPr>
-          <p:style>
-            <a:lnRef idx="2">
-              <a:schemeClr val="dk1"/>
-            </a:lnRef>
-            <a:fillRef idx="1">
-              <a:schemeClr val="lt1"/>
-            </a:fillRef>
-            <a:effectRef idx="0">
-              <a:schemeClr val="dk1"/>
-            </a:effectRef>
-            <a:fontRef idx="minor">
-              <a:schemeClr val="dk1"/>
-            </a:fontRef>
-          </p:style>
-          <p:txBody>
-            <a:bodyPr rtlCol="0" anchor="ctr"/>
-            <a:lstStyle/>
-            <a:p>
-              <a:pPr algn="ctr"/>
-              <a:endParaRPr lang="en-US"/>
-            </a:p>
-          </p:txBody>
-        </p:sp>
-        <p:sp>
-          <p:nvSpPr>
-            <p:cNvPr id="69" name="Oval 68">
-              <a:extLst>
-                <a:ext uri="{FF2B5EF4-FFF2-40B4-BE49-F238E27FC236}">
-                  <a16:creationId xmlns:a16="http://schemas.microsoft.com/office/drawing/2014/main" id="{D3CCCD81-AEAF-1D91-1A8A-CA5702635CD6}"/>
-                </a:ext>
-              </a:extLst>
-            </p:cNvPr>
-            <p:cNvSpPr/>
-            <p:nvPr/>
-          </p:nvSpPr>
-          <p:spPr>
-            <a:xfrm>
-              <a:off x="6878287" y="2672814"/>
-              <a:ext cx="457200" cy="457200"/>
-            </a:xfrm>
-            <a:prstGeom prst="ellipse">
-              <a:avLst/>
-            </a:prstGeom>
-          </p:spPr>
-          <p:style>
-            <a:lnRef idx="2">
-              <a:schemeClr val="dk1"/>
-            </a:lnRef>
-            <a:fillRef idx="1">
-              <a:schemeClr val="lt1"/>
-            </a:fillRef>
-            <a:effectRef idx="0">
-              <a:schemeClr val="dk1"/>
-            </a:effectRef>
-            <a:fontRef idx="minor">
-              <a:schemeClr val="dk1"/>
-            </a:fontRef>
-          </p:style>
-          <p:txBody>
-            <a:bodyPr rtlCol="0" anchor="ctr"/>
-            <a:lstStyle/>
-            <a:p>
-              <a:pPr algn="ctr"/>
-              <a:endParaRPr lang="en-US"/>
-            </a:p>
-          </p:txBody>
-        </p:sp>
-        <p:sp>
-          <p:nvSpPr>
-            <p:cNvPr id="70" name="Oval 69">
-              <a:extLst>
-                <a:ext uri="{FF2B5EF4-FFF2-40B4-BE49-F238E27FC236}">
-                  <a16:creationId xmlns:a16="http://schemas.microsoft.com/office/drawing/2014/main" id="{16D2DBA2-511B-A238-4803-4A57DC71210F}"/>
-                </a:ext>
-              </a:extLst>
-            </p:cNvPr>
-            <p:cNvSpPr/>
-            <p:nvPr/>
-          </p:nvSpPr>
-          <p:spPr>
-            <a:xfrm>
-              <a:off x="6924007" y="3160831"/>
-              <a:ext cx="365760" cy="365760"/>
-            </a:xfrm>
-            <a:prstGeom prst="ellipse">
-              <a:avLst/>
-            </a:prstGeom>
-          </p:spPr>
-          <p:style>
-            <a:lnRef idx="2">
-              <a:schemeClr val="dk1"/>
-            </a:lnRef>
-            <a:fillRef idx="1">
-              <a:schemeClr val="lt1"/>
-            </a:fillRef>
-            <a:effectRef idx="0">
-              <a:schemeClr val="dk1"/>
-            </a:effectRef>
-            <a:fontRef idx="minor">
-              <a:schemeClr val="dk1"/>
-            </a:fontRef>
-          </p:style>
-          <p:txBody>
-            <a:bodyPr rtlCol="0" anchor="ctr"/>
-            <a:lstStyle/>
-            <a:p>
-              <a:pPr algn="ctr"/>
-              <a:endParaRPr lang="en-US"/>
-            </a:p>
-          </p:txBody>
-        </p:sp>
-        <p:sp>
-          <p:nvSpPr>
-            <p:cNvPr id="71" name="Oval 70">
-              <a:extLst>
-                <a:ext uri="{FF2B5EF4-FFF2-40B4-BE49-F238E27FC236}">
-                  <a16:creationId xmlns:a16="http://schemas.microsoft.com/office/drawing/2014/main" id="{4D1130D1-136D-1917-4080-6CCCED424C44}"/>
-                </a:ext>
-              </a:extLst>
-            </p:cNvPr>
-            <p:cNvSpPr/>
-            <p:nvPr/>
-          </p:nvSpPr>
-          <p:spPr>
-            <a:xfrm>
-              <a:off x="6969727" y="3583710"/>
-              <a:ext cx="274320" cy="274320"/>
-            </a:xfrm>
-            <a:prstGeom prst="ellipse">
-              <a:avLst/>
-            </a:prstGeom>
-          </p:spPr>
-          <p:style>
-            <a:lnRef idx="2">
-              <a:schemeClr val="dk1"/>
-            </a:lnRef>
-            <a:fillRef idx="1">
-              <a:schemeClr val="lt1"/>
-            </a:fillRef>
-            <a:effectRef idx="0">
-              <a:schemeClr val="dk1"/>
-            </a:effectRef>
-            <a:fontRef idx="minor">
-              <a:schemeClr val="dk1"/>
             </a:fontRef>
           </p:style>
           <p:txBody>
@@ -19764,7 +18306,7 @@
             <a:lstStyle/>
             <a:p>
               <a:pPr algn="ctr"/>
-              <a:endParaRPr lang="en-US"/>
+              <a:endParaRPr lang="en-US" dirty="0"/>
             </a:p>
           </p:txBody>
         </p:sp>
@@ -24468,260 +23010,6 @@
       </p:grpSp>
       <p:grpSp>
         <p:nvGrpSpPr>
-          <p:cNvPr id="177" name="Group 176">
-            <a:extLst>
-              <a:ext uri="{FF2B5EF4-FFF2-40B4-BE49-F238E27FC236}">
-                <a16:creationId xmlns:a16="http://schemas.microsoft.com/office/drawing/2014/main" id="{5EB96501-FE37-49B8-190F-C508957B18C6}"/>
-              </a:ext>
-            </a:extLst>
-          </p:cNvPr>
-          <p:cNvGrpSpPr/>
-          <p:nvPr/>
-        </p:nvGrpSpPr>
-        <p:grpSpPr>
-          <a:xfrm>
-            <a:off x="7316725" y="3222214"/>
-            <a:ext cx="1371600" cy="1371600"/>
-            <a:chOff x="427081" y="263129"/>
-            <a:chExt cx="1371600" cy="1371600"/>
-          </a:xfrm>
-        </p:grpSpPr>
-        <p:sp>
-          <p:nvSpPr>
-            <p:cNvPr id="178" name="Rectangle 177">
-              <a:extLst>
-                <a:ext uri="{FF2B5EF4-FFF2-40B4-BE49-F238E27FC236}">
-                  <a16:creationId xmlns:a16="http://schemas.microsoft.com/office/drawing/2014/main" id="{5A657355-62FB-6E62-211D-DFCF6D8A255C}"/>
-                </a:ext>
-              </a:extLst>
-            </p:cNvPr>
-            <p:cNvSpPr/>
-            <p:nvPr/>
-          </p:nvSpPr>
-          <p:spPr>
-            <a:xfrm>
-              <a:off x="427081" y="263129"/>
-              <a:ext cx="1371600" cy="1371600"/>
-            </a:xfrm>
-            <a:prstGeom prst="rect">
-              <a:avLst/>
-            </a:prstGeom>
-            <a:noFill/>
-            <a:ln w="76200">
-              <a:solidFill>
-                <a:schemeClr val="tx1"/>
-              </a:solidFill>
-            </a:ln>
-          </p:spPr>
-          <p:style>
-            <a:lnRef idx="2">
-              <a:schemeClr val="accent1">
-                <a:shade val="50000"/>
-              </a:schemeClr>
-            </a:lnRef>
-            <a:fillRef idx="1">
-              <a:schemeClr val="accent1"/>
-            </a:fillRef>
-            <a:effectRef idx="0">
-              <a:schemeClr val="accent1"/>
-            </a:effectRef>
-            <a:fontRef idx="minor">
-              <a:schemeClr val="lt1"/>
-            </a:fontRef>
-          </p:style>
-          <p:txBody>
-            <a:bodyPr rtlCol="0" anchor="ctr"/>
-            <a:lstStyle/>
-            <a:p>
-              <a:pPr algn="ctr"/>
-              <a:endParaRPr lang="en-US"/>
-            </a:p>
-          </p:txBody>
-        </p:sp>
-        <p:sp>
-          <p:nvSpPr>
-            <p:cNvPr id="179" name="Plaque 178">
-              <a:extLst>
-                <a:ext uri="{FF2B5EF4-FFF2-40B4-BE49-F238E27FC236}">
-                  <a16:creationId xmlns:a16="http://schemas.microsoft.com/office/drawing/2014/main" id="{E73ED871-7605-3F46-5F0C-E5EBAE589AFC}"/>
-                </a:ext>
-              </a:extLst>
-            </p:cNvPr>
-            <p:cNvSpPr/>
-            <p:nvPr/>
-          </p:nvSpPr>
-          <p:spPr>
-            <a:xfrm>
-              <a:off x="573033" y="478473"/>
-              <a:ext cx="1097280" cy="1097280"/>
-            </a:xfrm>
-            <a:prstGeom prst="plaque">
-              <a:avLst/>
-            </a:prstGeom>
-            <a:noFill/>
-            <a:ln w="38100" cap="flat" cmpd="sng" algn="ctr">
-              <a:solidFill>
-                <a:schemeClr val="dk1"/>
-              </a:solidFill>
-              <a:prstDash val="solid"/>
-              <a:round/>
-              <a:headEnd type="none" w="med" len="med"/>
-              <a:tailEnd type="none" w="med" len="med"/>
-            </a:ln>
-          </p:spPr>
-          <p:style>
-            <a:lnRef idx="0">
-              <a:scrgbClr r="0" g="0" b="0"/>
-            </a:lnRef>
-            <a:fillRef idx="0">
-              <a:scrgbClr r="0" g="0" b="0"/>
-            </a:fillRef>
-            <a:effectRef idx="0">
-              <a:scrgbClr r="0" g="0" b="0"/>
-            </a:effectRef>
-            <a:fontRef idx="minor">
-              <a:schemeClr val="dk1"/>
-            </a:fontRef>
-          </p:style>
-          <p:txBody>
-            <a:bodyPr rtlCol="0" anchor="ctr"/>
-            <a:lstStyle/>
-            <a:p>
-              <a:pPr algn="ctr"/>
-              <a:endParaRPr lang="en-US"/>
-            </a:p>
-          </p:txBody>
-        </p:sp>
-      </p:grpSp>
-      <p:grpSp>
-        <p:nvGrpSpPr>
-          <p:cNvPr id="180" name="Group 179">
-            <a:extLst>
-              <a:ext uri="{FF2B5EF4-FFF2-40B4-BE49-F238E27FC236}">
-                <a16:creationId xmlns:a16="http://schemas.microsoft.com/office/drawing/2014/main" id="{44D65888-F453-86E6-D72E-3CF182B9E272}"/>
-              </a:ext>
-            </a:extLst>
-          </p:cNvPr>
-          <p:cNvGrpSpPr/>
-          <p:nvPr/>
-        </p:nvGrpSpPr>
-        <p:grpSpPr>
-          <a:xfrm>
-            <a:off x="5651237" y="3222399"/>
-            <a:ext cx="1371600" cy="1371600"/>
-            <a:chOff x="427081" y="263129"/>
-            <a:chExt cx="1371600" cy="1371600"/>
-          </a:xfrm>
-        </p:grpSpPr>
-        <p:sp>
-          <p:nvSpPr>
-            <p:cNvPr id="181" name="Rectangle 180">
-              <a:extLst>
-                <a:ext uri="{FF2B5EF4-FFF2-40B4-BE49-F238E27FC236}">
-                  <a16:creationId xmlns:a16="http://schemas.microsoft.com/office/drawing/2014/main" id="{15476A39-10C3-127D-952E-73AD493215BC}"/>
-                </a:ext>
-              </a:extLst>
-            </p:cNvPr>
-            <p:cNvSpPr/>
-            <p:nvPr/>
-          </p:nvSpPr>
-          <p:spPr>
-            <a:xfrm>
-              <a:off x="427081" y="263129"/>
-              <a:ext cx="1371600" cy="1371600"/>
-            </a:xfrm>
-            <a:prstGeom prst="rect">
-              <a:avLst/>
-            </a:prstGeom>
-            <a:noFill/>
-            <a:ln w="76200">
-              <a:solidFill>
-                <a:schemeClr val="tx1"/>
-              </a:solidFill>
-            </a:ln>
-          </p:spPr>
-          <p:style>
-            <a:lnRef idx="2">
-              <a:schemeClr val="accent1">
-                <a:shade val="50000"/>
-              </a:schemeClr>
-            </a:lnRef>
-            <a:fillRef idx="1">
-              <a:schemeClr val="accent1"/>
-            </a:fillRef>
-            <a:effectRef idx="0">
-              <a:schemeClr val="accent1"/>
-            </a:effectRef>
-            <a:fontRef idx="minor">
-              <a:schemeClr val="lt1"/>
-            </a:fontRef>
-          </p:style>
-          <p:txBody>
-            <a:bodyPr rtlCol="0" anchor="ctr"/>
-            <a:lstStyle/>
-            <a:p>
-              <a:pPr algn="ctr"/>
-              <a:endParaRPr lang="en-US"/>
-            </a:p>
-          </p:txBody>
-        </p:sp>
-        <p:sp>
-          <p:nvSpPr>
-            <p:cNvPr id="182" name="Plaque 181">
-              <a:extLst>
-                <a:ext uri="{FF2B5EF4-FFF2-40B4-BE49-F238E27FC236}">
-                  <a16:creationId xmlns:a16="http://schemas.microsoft.com/office/drawing/2014/main" id="{96446AB4-BE97-8FEE-6964-BA45D84A09CC}"/>
-                </a:ext>
-              </a:extLst>
-            </p:cNvPr>
-            <p:cNvSpPr/>
-            <p:nvPr/>
-          </p:nvSpPr>
-          <p:spPr>
-            <a:xfrm>
-              <a:off x="573033" y="478473"/>
-              <a:ext cx="1097280" cy="1097280"/>
-            </a:xfrm>
-            <a:prstGeom prst="plaque">
-              <a:avLst/>
-            </a:prstGeom>
-            <a:noFill/>
-            <a:ln w="38100" cap="flat" cmpd="sng" algn="ctr">
-              <a:solidFill>
-                <a:schemeClr val="dk1"/>
-              </a:solidFill>
-              <a:prstDash val="solid"/>
-              <a:round/>
-              <a:headEnd type="none" w="med" len="med"/>
-              <a:tailEnd type="none" w="med" len="med"/>
-            </a:ln>
-          </p:spPr>
-          <p:style>
-            <a:lnRef idx="0">
-              <a:scrgbClr r="0" g="0" b="0"/>
-            </a:lnRef>
-            <a:fillRef idx="0">
-              <a:scrgbClr r="0" g="0" b="0"/>
-            </a:fillRef>
-            <a:effectRef idx="0">
-              <a:scrgbClr r="0" g="0" b="0"/>
-            </a:effectRef>
-            <a:fontRef idx="minor">
-              <a:schemeClr val="dk1"/>
-            </a:fontRef>
-          </p:style>
-          <p:txBody>
-            <a:bodyPr rtlCol="0" anchor="ctr"/>
-            <a:lstStyle/>
-            <a:p>
-              <a:pPr algn="ctr"/>
-              <a:endParaRPr lang="en-US"/>
-            </a:p>
-          </p:txBody>
-        </p:sp>
-      </p:grpSp>
-      <p:grpSp>
-        <p:nvGrpSpPr>
           <p:cNvPr id="183" name="Group 182">
             <a:extLst>
               <a:ext uri="{FF2B5EF4-FFF2-40B4-BE49-F238E27FC236}">
@@ -25189,12 +23477,42 @@
           </p:sp>
         </p:grpSp>
       </p:grpSp>
+      <p:pic>
+        <p:nvPicPr>
+          <p:cNvPr id="213" name="Picture 212">
+            <a:extLst>
+              <a:ext uri="{FF2B5EF4-FFF2-40B4-BE49-F238E27FC236}">
+                <a16:creationId xmlns:a16="http://schemas.microsoft.com/office/drawing/2014/main" id="{EE5FF571-89E7-5E6B-2D2E-D1CD39088842}"/>
+              </a:ext>
+            </a:extLst>
+          </p:cNvPr>
+          <p:cNvPicPr>
+            <a:picLocks noChangeAspect="1"/>
+          </p:cNvPicPr>
+          <p:nvPr/>
+        </p:nvPicPr>
+        <p:blipFill>
+          <a:blip r:embed="rId6"/>
+          <a:stretch>
+            <a:fillRect/>
+          </a:stretch>
+        </p:blipFill>
+        <p:spPr>
+          <a:xfrm>
+            <a:off x="534930" y="2356416"/>
+            <a:ext cx="863170" cy="863170"/>
+          </a:xfrm>
+          <a:prstGeom prst="rect">
+            <a:avLst/>
+          </a:prstGeom>
+        </p:spPr>
+      </p:pic>
       <p:grpSp>
         <p:nvGrpSpPr>
-          <p:cNvPr id="195" name="Group 194">
+          <p:cNvPr id="214" name="Group 213">
             <a:extLst>
               <a:ext uri="{FF2B5EF4-FFF2-40B4-BE49-F238E27FC236}">
-                <a16:creationId xmlns:a16="http://schemas.microsoft.com/office/drawing/2014/main" id="{DB1EAEC0-BE94-7F50-9DEF-9BFBD170356A}"/>
+                <a16:creationId xmlns:a16="http://schemas.microsoft.com/office/drawing/2014/main" id="{E6F21B7C-5DF0-4DC1-A831-2C41078F1C72}"/>
               </a:ext>
             </a:extLst>
           </p:cNvPr>
@@ -25203,18 +23521,18 @@
         </p:nvGrpSpPr>
         <p:grpSpPr>
           <a:xfrm>
-            <a:off x="6057100" y="3513402"/>
-            <a:ext cx="577458" cy="886118"/>
-            <a:chOff x="5275383" y="2444259"/>
-            <a:chExt cx="2101363" cy="3224576"/>
+            <a:off x="280715" y="2053273"/>
+            <a:ext cx="1371600" cy="1371600"/>
+            <a:chOff x="427081" y="263129"/>
+            <a:chExt cx="1371600" cy="1371600"/>
           </a:xfrm>
         </p:grpSpPr>
         <p:sp>
           <p:nvSpPr>
-            <p:cNvPr id="196" name="Isosceles Triangle 195">
-              <a:extLst>
-                <a:ext uri="{FF2B5EF4-FFF2-40B4-BE49-F238E27FC236}">
-                  <a16:creationId xmlns:a16="http://schemas.microsoft.com/office/drawing/2014/main" id="{C9FAB2E9-76C6-BDD0-5AB3-3FA35378D211}"/>
+            <p:cNvPr id="215" name="Rectangle 214">
+              <a:extLst>
+                <a:ext uri="{FF2B5EF4-FFF2-40B4-BE49-F238E27FC236}">
+                  <a16:creationId xmlns:a16="http://schemas.microsoft.com/office/drawing/2014/main" id="{2BE41859-02A8-315F-B94C-CCF4DC40AFF0}"/>
                 </a:ext>
               </a:extLst>
             </p:cNvPr>
@@ -25222,27 +23540,34 @@
             <p:nvPr/>
           </p:nvSpPr>
           <p:spPr>
-            <a:xfrm rot="10800000">
-              <a:off x="5653455" y="3974123"/>
-              <a:ext cx="1345223" cy="474785"/>
-            </a:xfrm>
-            <a:prstGeom prst="triangle">
+            <a:xfrm>
+              <a:off x="427081" y="263129"/>
+              <a:ext cx="1371600" cy="1371600"/>
+            </a:xfrm>
+            <a:prstGeom prst="rect">
               <a:avLst/>
             </a:prstGeom>
-            <a:ln w="28575"/>
+            <a:noFill/>
+            <a:ln w="76200">
+              <a:solidFill>
+                <a:schemeClr val="tx1"/>
+              </a:solidFill>
+            </a:ln>
           </p:spPr>
           <p:style>
             <a:lnRef idx="2">
-              <a:schemeClr val="dk1"/>
+              <a:schemeClr val="accent1">
+                <a:shade val="50000"/>
+              </a:schemeClr>
             </a:lnRef>
             <a:fillRef idx="1">
+              <a:schemeClr val="accent1"/>
+            </a:fillRef>
+            <a:effectRef idx="0">
+              <a:schemeClr val="accent1"/>
+            </a:effectRef>
+            <a:fontRef idx="minor">
               <a:schemeClr val="lt1"/>
-            </a:fillRef>
-            <a:effectRef idx="0">
-              <a:schemeClr val="dk1"/>
-            </a:effectRef>
-            <a:fontRef idx="minor">
-              <a:schemeClr val="dk1"/>
             </a:fontRef>
           </p:style>
           <p:txBody>
@@ -25256,10 +23581,10 @@
         </p:sp>
         <p:sp>
           <p:nvSpPr>
-            <p:cNvPr id="197" name="Isosceles Triangle 196">
-              <a:extLst>
-                <a:ext uri="{FF2B5EF4-FFF2-40B4-BE49-F238E27FC236}">
-                  <a16:creationId xmlns:a16="http://schemas.microsoft.com/office/drawing/2014/main" id="{7E9CB0F5-9D08-D49C-E28F-02FABF76B268}"/>
+            <p:cNvPr id="216" name="Plaque 215">
+              <a:extLst>
+                <a:ext uri="{FF2B5EF4-FFF2-40B4-BE49-F238E27FC236}">
+                  <a16:creationId xmlns:a16="http://schemas.microsoft.com/office/drawing/2014/main" id="{BA192189-34F7-322C-2F68-0F71A48F7FF1}"/>
                 </a:ext>
               </a:extLst>
             </p:cNvPr>
@@ -25268,255 +23593,35 @@
           </p:nvSpPr>
           <p:spPr>
             <a:xfrm>
-              <a:off x="5675434" y="2699238"/>
-              <a:ext cx="219808" cy="1274885"/>
-            </a:xfrm>
-            <a:prstGeom prst="triangle">
+              <a:off x="573033" y="478473"/>
+              <a:ext cx="1097280" cy="1097280"/>
+            </a:xfrm>
+            <a:prstGeom prst="plaque">
               <a:avLst/>
             </a:prstGeom>
-          </p:spPr>
-          <p:style>
-            <a:lnRef idx="2">
-              <a:schemeClr val="dk1">
-                <a:shade val="50000"/>
-              </a:schemeClr>
-            </a:lnRef>
-            <a:fillRef idx="1">
-              <a:schemeClr val="dk1"/>
-            </a:fillRef>
-            <a:effectRef idx="0">
-              <a:schemeClr val="dk1"/>
-            </a:effectRef>
-            <a:fontRef idx="minor">
-              <a:schemeClr val="lt1"/>
-            </a:fontRef>
-          </p:style>
-          <p:txBody>
-            <a:bodyPr rtlCol="0" anchor="ctr"/>
-            <a:lstStyle/>
-            <a:p>
-              <a:pPr algn="ctr"/>
-              <a:endParaRPr lang="en-US"/>
-            </a:p>
-          </p:txBody>
-        </p:sp>
-        <p:sp>
-          <p:nvSpPr>
-            <p:cNvPr id="198" name="Isosceles Triangle 197">
-              <a:extLst>
-                <a:ext uri="{FF2B5EF4-FFF2-40B4-BE49-F238E27FC236}">
-                  <a16:creationId xmlns:a16="http://schemas.microsoft.com/office/drawing/2014/main" id="{B6DC7B9D-D2B6-B3DE-A933-C87112D71B06}"/>
-                </a:ext>
-              </a:extLst>
-            </p:cNvPr>
-            <p:cNvSpPr/>
-            <p:nvPr/>
-          </p:nvSpPr>
-          <p:spPr>
-            <a:xfrm>
-              <a:off x="6778870" y="2699237"/>
-              <a:ext cx="219808" cy="1274885"/>
-            </a:xfrm>
-            <a:prstGeom prst="triangle">
-              <a:avLst/>
-            </a:prstGeom>
-          </p:spPr>
-          <p:style>
-            <a:lnRef idx="2">
-              <a:schemeClr val="dk1">
-                <a:shade val="50000"/>
-              </a:schemeClr>
-            </a:lnRef>
-            <a:fillRef idx="1">
-              <a:schemeClr val="dk1"/>
-            </a:fillRef>
-            <a:effectRef idx="0">
-              <a:schemeClr val="dk1"/>
-            </a:effectRef>
-            <a:fontRef idx="minor">
-              <a:schemeClr val="lt1"/>
-            </a:fontRef>
-          </p:style>
-          <p:txBody>
-            <a:bodyPr rtlCol="0" anchor="ctr"/>
-            <a:lstStyle/>
-            <a:p>
-              <a:pPr algn="ctr"/>
-              <a:endParaRPr lang="en-US"/>
-            </a:p>
-          </p:txBody>
-        </p:sp>
-        <p:sp>
-          <p:nvSpPr>
-            <p:cNvPr id="199" name="Isosceles Triangle 198">
-              <a:extLst>
-                <a:ext uri="{FF2B5EF4-FFF2-40B4-BE49-F238E27FC236}">
-                  <a16:creationId xmlns:a16="http://schemas.microsoft.com/office/drawing/2014/main" id="{86F2C79D-630B-FF3B-27B0-ADAFABEEFAA1}"/>
-                </a:ext>
-              </a:extLst>
-            </p:cNvPr>
-            <p:cNvSpPr/>
-            <p:nvPr/>
-          </p:nvSpPr>
-          <p:spPr>
-            <a:xfrm>
-              <a:off x="6216162" y="2444259"/>
-              <a:ext cx="219808" cy="1529863"/>
-            </a:xfrm>
-            <a:prstGeom prst="triangle">
-              <a:avLst/>
-            </a:prstGeom>
-          </p:spPr>
-          <p:style>
-            <a:lnRef idx="2">
-              <a:schemeClr val="dk1"/>
-            </a:lnRef>
-            <a:fillRef idx="1">
-              <a:schemeClr val="lt1"/>
-            </a:fillRef>
-            <a:effectRef idx="0">
-              <a:schemeClr val="dk1"/>
-            </a:effectRef>
-            <a:fontRef idx="minor">
-              <a:schemeClr val="dk1"/>
-            </a:fontRef>
-          </p:style>
-          <p:txBody>
-            <a:bodyPr rtlCol="0" anchor="ctr"/>
-            <a:lstStyle/>
-            <a:p>
-              <a:pPr algn="ctr"/>
-              <a:endParaRPr lang="en-US"/>
-            </a:p>
-          </p:txBody>
-        </p:sp>
-        <p:sp>
-          <p:nvSpPr>
-            <p:cNvPr id="200" name="Moon 199">
-              <a:extLst>
-                <a:ext uri="{FF2B5EF4-FFF2-40B4-BE49-F238E27FC236}">
-                  <a16:creationId xmlns:a16="http://schemas.microsoft.com/office/drawing/2014/main" id="{25622979-1FEC-8A3C-C168-D657104ADDC6}"/>
-                </a:ext>
-              </a:extLst>
-            </p:cNvPr>
-            <p:cNvSpPr/>
-            <p:nvPr/>
-          </p:nvSpPr>
-          <p:spPr>
-            <a:xfrm rot="5400000">
-              <a:off x="6060099" y="4769824"/>
-              <a:ext cx="531929" cy="1266094"/>
-            </a:xfrm>
-            <a:prstGeom prst="moon">
-              <a:avLst>
-                <a:gd name="adj" fmla="val 38235"/>
-              </a:avLst>
-            </a:prstGeom>
-          </p:spPr>
-          <p:style>
-            <a:lnRef idx="2">
-              <a:schemeClr val="dk1"/>
-            </a:lnRef>
-            <a:fillRef idx="1">
-              <a:schemeClr val="lt1"/>
-            </a:fillRef>
-            <a:effectRef idx="0">
-              <a:schemeClr val="dk1"/>
-            </a:effectRef>
-            <a:fontRef idx="minor">
-              <a:schemeClr val="dk1"/>
-            </a:fontRef>
-          </p:style>
-          <p:txBody>
-            <a:bodyPr rtlCol="0" anchor="ctr"/>
-            <a:lstStyle/>
-            <a:p>
-              <a:pPr algn="ctr"/>
-              <a:endParaRPr lang="en-US"/>
-            </a:p>
-          </p:txBody>
-        </p:sp>
-        <p:sp>
-          <p:nvSpPr>
-            <p:cNvPr id="201" name="Isosceles Triangle 200">
-              <a:extLst>
-                <a:ext uri="{FF2B5EF4-FFF2-40B4-BE49-F238E27FC236}">
-                  <a16:creationId xmlns:a16="http://schemas.microsoft.com/office/drawing/2014/main" id="{D5F703A3-E8F4-A41F-99BF-477F8C03022D}"/>
-                </a:ext>
-              </a:extLst>
-            </p:cNvPr>
-            <p:cNvSpPr/>
-            <p:nvPr/>
-          </p:nvSpPr>
-          <p:spPr>
-            <a:xfrm rot="10800000">
-              <a:off x="6000749" y="4211516"/>
-              <a:ext cx="650633" cy="1424349"/>
-            </a:xfrm>
-            <a:prstGeom prst="triangle">
-              <a:avLst/>
-            </a:prstGeom>
-          </p:spPr>
-          <p:style>
-            <a:lnRef idx="2">
-              <a:schemeClr val="dk1">
-                <a:shade val="50000"/>
-              </a:schemeClr>
-            </a:lnRef>
-            <a:fillRef idx="1">
-              <a:schemeClr val="dk1"/>
-            </a:fillRef>
-            <a:effectRef idx="0">
-              <a:schemeClr val="dk1"/>
-            </a:effectRef>
-            <a:fontRef idx="minor">
-              <a:schemeClr val="lt1"/>
-            </a:fontRef>
-          </p:style>
-          <p:txBody>
-            <a:bodyPr rtlCol="0" anchor="ctr"/>
-            <a:lstStyle/>
-            <a:p>
-              <a:pPr algn="ctr"/>
-              <a:endParaRPr lang="en-US"/>
-            </a:p>
-          </p:txBody>
-        </p:sp>
-        <p:sp>
-          <p:nvSpPr>
-            <p:cNvPr id="202" name="Moon 201">
-              <a:extLst>
-                <a:ext uri="{FF2B5EF4-FFF2-40B4-BE49-F238E27FC236}">
-                  <a16:creationId xmlns:a16="http://schemas.microsoft.com/office/drawing/2014/main" id="{8BC6147D-0044-3A8E-2BB9-06C87E4EBFEF}"/>
-                </a:ext>
-              </a:extLst>
-            </p:cNvPr>
-            <p:cNvSpPr/>
-            <p:nvPr/>
-          </p:nvSpPr>
-          <p:spPr>
-            <a:xfrm rot="5400000">
-              <a:off x="6027126" y="3697166"/>
-              <a:ext cx="597877" cy="2101363"/>
-            </a:xfrm>
-            <a:prstGeom prst="moon">
-              <a:avLst/>
-            </a:prstGeom>
-          </p:spPr>
-          <p:style>
-            <a:lnRef idx="2">
-              <a:schemeClr val="dk1">
-                <a:shade val="50000"/>
-              </a:schemeClr>
-            </a:lnRef>
-            <a:fillRef idx="1">
-              <a:schemeClr val="dk1"/>
-            </a:fillRef>
-            <a:effectRef idx="0">
-              <a:schemeClr val="dk1"/>
-            </a:effectRef>
-            <a:fontRef idx="minor">
-              <a:schemeClr val="lt1"/>
+            <a:noFill/>
+            <a:ln w="38100" cap="flat" cmpd="sng" algn="ctr">
+              <a:solidFill>
+                <a:schemeClr val="dk1"/>
+              </a:solidFill>
+              <a:prstDash val="solid"/>
+              <a:round/>
+              <a:headEnd type="none" w="med" len="med"/>
+              <a:tailEnd type="none" w="med" len="med"/>
+            </a:ln>
+          </p:spPr>
+          <p:style>
+            <a:lnRef idx="0">
+              <a:scrgbClr r="0" g="0" b="0"/>
+            </a:lnRef>
+            <a:fillRef idx="0">
+              <a:scrgbClr r="0" g="0" b="0"/>
+            </a:fillRef>
+            <a:effectRef idx="0">
+              <a:scrgbClr r="0" g="0" b="0"/>
+            </a:effectRef>
+            <a:fontRef idx="minor">
+              <a:schemeClr val="dk1"/>
             </a:fontRef>
           </p:style>
           <p:txBody>
@@ -25531,10 +23636,10 @@
       </p:grpSp>
       <p:grpSp>
         <p:nvGrpSpPr>
-          <p:cNvPr id="203" name="Group 202">
+          <p:cNvPr id="217" name="Group 216">
             <a:extLst>
               <a:ext uri="{FF2B5EF4-FFF2-40B4-BE49-F238E27FC236}">
-                <a16:creationId xmlns:a16="http://schemas.microsoft.com/office/drawing/2014/main" id="{D8D3A3CE-09CD-16A4-4BBA-2886526A1FAB}"/>
+                <a16:creationId xmlns:a16="http://schemas.microsoft.com/office/drawing/2014/main" id="{95686D8E-383C-D9ED-BAC0-42EED20288FD}"/>
               </a:ext>
             </a:extLst>
           </p:cNvPr>
@@ -25543,18 +23648,18 @@
         </p:nvGrpSpPr>
         <p:grpSpPr>
           <a:xfrm>
-            <a:off x="7493608" y="3574822"/>
-            <a:ext cx="1020292" cy="877614"/>
-            <a:chOff x="5664202" y="1634729"/>
-            <a:chExt cx="2809442" cy="2416570"/>
+            <a:off x="6943369" y="3239284"/>
+            <a:ext cx="1371600" cy="1371600"/>
+            <a:chOff x="427081" y="263129"/>
+            <a:chExt cx="1371600" cy="1371600"/>
           </a:xfrm>
         </p:grpSpPr>
         <p:sp>
           <p:nvSpPr>
-            <p:cNvPr id="204" name="Moon 203">
-              <a:extLst>
-                <a:ext uri="{FF2B5EF4-FFF2-40B4-BE49-F238E27FC236}">
-                  <a16:creationId xmlns:a16="http://schemas.microsoft.com/office/drawing/2014/main" id="{6122CCDF-9E81-2BC5-C471-27D01E1E9E7B}"/>
+            <p:cNvPr id="218" name="Rectangle 217">
+              <a:extLst>
+                <a:ext uri="{FF2B5EF4-FFF2-40B4-BE49-F238E27FC236}">
+                  <a16:creationId xmlns:a16="http://schemas.microsoft.com/office/drawing/2014/main" id="{6ED7D03B-F455-FE56-E7C7-020A6BCF893B}"/>
                 </a:ext>
               </a:extLst>
             </p:cNvPr>
@@ -25562,26 +23667,34 @@
             <p:nvPr/>
           </p:nvSpPr>
           <p:spPr>
-            <a:xfrm rot="16200000" flipV="1">
-              <a:off x="6630773" y="1057275"/>
-              <a:ext cx="876300" cy="2809442"/>
-            </a:xfrm>
-            <a:prstGeom prst="moon">
+            <a:xfrm>
+              <a:off x="427081" y="263129"/>
+              <a:ext cx="1371600" cy="1371600"/>
+            </a:xfrm>
+            <a:prstGeom prst="rect">
               <a:avLst/>
             </a:prstGeom>
+            <a:noFill/>
+            <a:ln w="76200">
+              <a:solidFill>
+                <a:schemeClr val="tx1"/>
+              </a:solidFill>
+            </a:ln>
           </p:spPr>
           <p:style>
             <a:lnRef idx="2">
-              <a:schemeClr val="dk1"/>
+              <a:schemeClr val="accent1">
+                <a:shade val="50000"/>
+              </a:schemeClr>
             </a:lnRef>
             <a:fillRef idx="1">
+              <a:schemeClr val="accent1"/>
+            </a:fillRef>
+            <a:effectRef idx="0">
+              <a:schemeClr val="accent1"/>
+            </a:effectRef>
+            <a:fontRef idx="minor">
               <a:schemeClr val="lt1"/>
-            </a:fillRef>
-            <a:effectRef idx="0">
-              <a:schemeClr val="dk1"/>
-            </a:effectRef>
-            <a:fontRef idx="minor">
-              <a:schemeClr val="dk1"/>
             </a:fontRef>
           </p:style>
           <p:txBody>
@@ -25595,10 +23708,10 @@
         </p:sp>
         <p:sp>
           <p:nvSpPr>
-            <p:cNvPr id="205" name="Moon 204">
-              <a:extLst>
-                <a:ext uri="{FF2B5EF4-FFF2-40B4-BE49-F238E27FC236}">
-                  <a16:creationId xmlns:a16="http://schemas.microsoft.com/office/drawing/2014/main" id="{EAE94984-D4CF-7322-2069-A902D9757E96}"/>
+            <p:cNvPr id="219" name="Plaque 218">
+              <a:extLst>
+                <a:ext uri="{FF2B5EF4-FFF2-40B4-BE49-F238E27FC236}">
+                  <a16:creationId xmlns:a16="http://schemas.microsoft.com/office/drawing/2014/main" id="{00C194FF-0169-F91C-E8E8-DFD5D4D95A60}"/>
                 </a:ext>
               </a:extLst>
             </p:cNvPr>
@@ -25606,26 +23719,109 @@
             <p:nvPr/>
           </p:nvSpPr>
           <p:spPr>
-            <a:xfrm rot="16200000" flipV="1">
-              <a:off x="6777590" y="2133133"/>
-              <a:ext cx="658596" cy="2101848"/>
-            </a:xfrm>
-            <a:prstGeom prst="moon">
+            <a:xfrm>
+              <a:off x="573033" y="478473"/>
+              <a:ext cx="1097280" cy="1097280"/>
+            </a:xfrm>
+            <a:prstGeom prst="plaque">
               <a:avLst/>
             </a:prstGeom>
+            <a:noFill/>
+            <a:ln w="38100" cap="flat" cmpd="sng" algn="ctr">
+              <a:solidFill>
+                <a:schemeClr val="dk1"/>
+              </a:solidFill>
+              <a:prstDash val="solid"/>
+              <a:round/>
+              <a:headEnd type="none" w="med" len="med"/>
+              <a:tailEnd type="none" w="med" len="med"/>
+            </a:ln>
+          </p:spPr>
+          <p:style>
+            <a:lnRef idx="0">
+              <a:scrgbClr r="0" g="0" b="0"/>
+            </a:lnRef>
+            <a:fillRef idx="0">
+              <a:scrgbClr r="0" g="0" b="0"/>
+            </a:fillRef>
+            <a:effectRef idx="0">
+              <a:scrgbClr r="0" g="0" b="0"/>
+            </a:effectRef>
+            <a:fontRef idx="minor">
+              <a:schemeClr val="dk1"/>
+            </a:fontRef>
+          </p:style>
+          <p:txBody>
+            <a:bodyPr rtlCol="0" anchor="ctr"/>
+            <a:lstStyle/>
+            <a:p>
+              <a:pPr algn="ctr"/>
+              <a:endParaRPr lang="en-US"/>
+            </a:p>
+          </p:txBody>
+        </p:sp>
+      </p:grpSp>
+      <p:grpSp>
+        <p:nvGrpSpPr>
+          <p:cNvPr id="220" name="Group 219">
+            <a:extLst>
+              <a:ext uri="{FF2B5EF4-FFF2-40B4-BE49-F238E27FC236}">
+                <a16:creationId xmlns:a16="http://schemas.microsoft.com/office/drawing/2014/main" id="{568F0D71-4E5D-1C31-4520-DF408D27054B}"/>
+              </a:ext>
+            </a:extLst>
+          </p:cNvPr>
+          <p:cNvGrpSpPr/>
+          <p:nvPr/>
+        </p:nvGrpSpPr>
+        <p:grpSpPr>
+          <a:xfrm>
+            <a:off x="5460586" y="3226447"/>
+            <a:ext cx="1371600" cy="1371600"/>
+            <a:chOff x="427081" y="263129"/>
+            <a:chExt cx="1371600" cy="1371600"/>
+          </a:xfrm>
+        </p:grpSpPr>
+        <p:sp>
+          <p:nvSpPr>
+            <p:cNvPr id="221" name="Rectangle 220">
+              <a:extLst>
+                <a:ext uri="{FF2B5EF4-FFF2-40B4-BE49-F238E27FC236}">
+                  <a16:creationId xmlns:a16="http://schemas.microsoft.com/office/drawing/2014/main" id="{E9292DD4-3ECA-D21A-C931-02ADAA433F4A}"/>
+                </a:ext>
+              </a:extLst>
+            </p:cNvPr>
+            <p:cNvSpPr/>
+            <p:nvPr/>
+          </p:nvSpPr>
+          <p:spPr>
+            <a:xfrm>
+              <a:off x="427081" y="263129"/>
+              <a:ext cx="1371600" cy="1371600"/>
+            </a:xfrm>
+            <a:prstGeom prst="rect">
+              <a:avLst/>
+            </a:prstGeom>
+            <a:noFill/>
+            <a:ln w="76200">
+              <a:solidFill>
+                <a:schemeClr val="tx1"/>
+              </a:solidFill>
+            </a:ln>
           </p:spPr>
           <p:style>
             <a:lnRef idx="2">
-              <a:schemeClr val="dk1"/>
+              <a:schemeClr val="accent1">
+                <a:shade val="50000"/>
+              </a:schemeClr>
             </a:lnRef>
             <a:fillRef idx="1">
+              <a:schemeClr val="accent1"/>
+            </a:fillRef>
+            <a:effectRef idx="0">
+              <a:schemeClr val="accent1"/>
+            </a:effectRef>
+            <a:fontRef idx="minor">
               <a:schemeClr val="lt1"/>
-            </a:fillRef>
-            <a:effectRef idx="0">
-              <a:schemeClr val="dk1"/>
-            </a:effectRef>
-            <a:fontRef idx="minor">
-              <a:schemeClr val="dk1"/>
             </a:fontRef>
           </p:style>
           <p:txBody>
@@ -25639,10 +23835,10 @@
         </p:sp>
         <p:sp>
           <p:nvSpPr>
-            <p:cNvPr id="206" name="Moon 205">
-              <a:extLst>
-                <a:ext uri="{FF2B5EF4-FFF2-40B4-BE49-F238E27FC236}">
-                  <a16:creationId xmlns:a16="http://schemas.microsoft.com/office/drawing/2014/main" id="{DEDA6087-F2B2-885C-14B1-00F19DCF4AA6}"/>
+            <p:cNvPr id="222" name="Plaque 221">
+              <a:extLst>
+                <a:ext uri="{FF2B5EF4-FFF2-40B4-BE49-F238E27FC236}">
+                  <a16:creationId xmlns:a16="http://schemas.microsoft.com/office/drawing/2014/main" id="{766062E0-76E1-9898-0C30-77C098FDD9E0}"/>
                 </a:ext>
               </a:extLst>
             </p:cNvPr>
@@ -25650,13 +23846,89 @@
             <p:nvPr/>
           </p:nvSpPr>
           <p:spPr>
-            <a:xfrm rot="16200000" flipV="1">
-              <a:off x="6839285" y="3112240"/>
-              <a:ext cx="535205" cy="1337436"/>
-            </a:xfrm>
-            <a:prstGeom prst="moon">
+            <a:xfrm>
+              <a:off x="573033" y="478473"/>
+              <a:ext cx="1097280" cy="1097280"/>
+            </a:xfrm>
+            <a:prstGeom prst="plaque">
               <a:avLst/>
             </a:prstGeom>
+            <a:noFill/>
+            <a:ln w="38100" cap="flat" cmpd="sng" algn="ctr">
+              <a:solidFill>
+                <a:schemeClr val="dk1"/>
+              </a:solidFill>
+              <a:prstDash val="solid"/>
+              <a:round/>
+              <a:headEnd type="none" w="med" len="med"/>
+              <a:tailEnd type="none" w="med" len="med"/>
+            </a:ln>
+          </p:spPr>
+          <p:style>
+            <a:lnRef idx="0">
+              <a:scrgbClr r="0" g="0" b="0"/>
+            </a:lnRef>
+            <a:fillRef idx="0">
+              <a:scrgbClr r="0" g="0" b="0"/>
+            </a:fillRef>
+            <a:effectRef idx="0">
+              <a:scrgbClr r="0" g="0" b="0"/>
+            </a:effectRef>
+            <a:fontRef idx="minor">
+              <a:schemeClr val="dk1"/>
+            </a:fontRef>
+          </p:style>
+          <p:txBody>
+            <a:bodyPr rtlCol="0" anchor="ctr"/>
+            <a:lstStyle/>
+            <a:p>
+              <a:pPr algn="ctr"/>
+              <a:endParaRPr lang="en-US"/>
+            </a:p>
+          </p:txBody>
+        </p:sp>
+      </p:grpSp>
+      <p:grpSp>
+        <p:nvGrpSpPr>
+          <p:cNvPr id="223" name="Group 222">
+            <a:extLst>
+              <a:ext uri="{FF2B5EF4-FFF2-40B4-BE49-F238E27FC236}">
+                <a16:creationId xmlns:a16="http://schemas.microsoft.com/office/drawing/2014/main" id="{39F7A655-268B-A4BE-6755-6866181E13E0}"/>
+              </a:ext>
+            </a:extLst>
+          </p:cNvPr>
+          <p:cNvGrpSpPr/>
+          <p:nvPr/>
+        </p:nvGrpSpPr>
+        <p:grpSpPr>
+          <a:xfrm rot="19097516">
+            <a:off x="5850584" y="3543333"/>
+            <a:ext cx="577458" cy="886118"/>
+            <a:chOff x="5275383" y="2444259"/>
+            <a:chExt cx="2101363" cy="3224576"/>
+          </a:xfrm>
+        </p:grpSpPr>
+        <p:sp>
+          <p:nvSpPr>
+            <p:cNvPr id="224" name="Isosceles Triangle 223">
+              <a:extLst>
+                <a:ext uri="{FF2B5EF4-FFF2-40B4-BE49-F238E27FC236}">
+                  <a16:creationId xmlns:a16="http://schemas.microsoft.com/office/drawing/2014/main" id="{E03E3617-0EC4-838F-9982-637DE7DB5ACB}"/>
+                </a:ext>
+              </a:extLst>
+            </p:cNvPr>
+            <p:cNvSpPr/>
+            <p:nvPr/>
+          </p:nvSpPr>
+          <p:spPr>
+            <a:xfrm rot="10800000">
+              <a:off x="5653455" y="3974123"/>
+              <a:ext cx="1345223" cy="474785"/>
+            </a:xfrm>
+            <a:prstGeom prst="triangle">
+              <a:avLst/>
+            </a:prstGeom>
+            <a:ln w="28575"/>
           </p:spPr>
           <p:style>
             <a:lnRef idx="2">
@@ -25683,10 +23955,10 @@
         </p:sp>
         <p:sp>
           <p:nvSpPr>
-            <p:cNvPr id="207" name="Trapezoid 206">
-              <a:extLst>
-                <a:ext uri="{FF2B5EF4-FFF2-40B4-BE49-F238E27FC236}">
-                  <a16:creationId xmlns:a16="http://schemas.microsoft.com/office/drawing/2014/main" id="{41F11F10-62C3-32A3-E023-268E5CE7AAD2}"/>
+            <p:cNvPr id="225" name="Isosceles Triangle 224">
+              <a:extLst>
+                <a:ext uri="{FF2B5EF4-FFF2-40B4-BE49-F238E27FC236}">
+                  <a16:creationId xmlns:a16="http://schemas.microsoft.com/office/drawing/2014/main" id="{53182409-4F6F-5AA0-31A2-BAD7672A42AA}"/>
                 </a:ext>
               </a:extLst>
             </p:cNvPr>
@@ -25694,11 +23966,11 @@
             <p:nvPr/>
           </p:nvSpPr>
           <p:spPr>
-            <a:xfrm rot="10800000">
-              <a:off x="6527800" y="2060178"/>
-              <a:ext cx="1168400" cy="1991121"/>
-            </a:xfrm>
-            <a:prstGeom prst="trapezoid">
+            <a:xfrm>
+              <a:off x="5675434" y="2699238"/>
+              <a:ext cx="219808" cy="1274885"/>
+            </a:xfrm>
+            <a:prstGeom prst="triangle">
               <a:avLst/>
             </a:prstGeom>
           </p:spPr>
@@ -25729,10 +24001,10 @@
         </p:sp>
         <p:sp>
           <p:nvSpPr>
-            <p:cNvPr id="208" name="Trapezoid 207">
-              <a:extLst>
-                <a:ext uri="{FF2B5EF4-FFF2-40B4-BE49-F238E27FC236}">
-                  <a16:creationId xmlns:a16="http://schemas.microsoft.com/office/drawing/2014/main" id="{9DCE2A57-0658-2E54-27AF-C71209FC1D79}"/>
+            <p:cNvPr id="226" name="Isosceles Triangle 225">
+              <a:extLst>
+                <a:ext uri="{FF2B5EF4-FFF2-40B4-BE49-F238E27FC236}">
+                  <a16:creationId xmlns:a16="http://schemas.microsoft.com/office/drawing/2014/main" id="{1AD9A557-5385-8141-1EBC-070FE0DD70D9}"/>
                 </a:ext>
               </a:extLst>
             </p:cNvPr>
@@ -25741,10 +24013,10 @@
           </p:nvSpPr>
           <p:spPr>
             <a:xfrm>
-              <a:off x="6667977" y="1634729"/>
-              <a:ext cx="877823" cy="341783"/>
-            </a:xfrm>
-            <a:prstGeom prst="trapezoid">
+              <a:off x="6778870" y="2699237"/>
+              <a:ext cx="219808" cy="1274885"/>
+            </a:xfrm>
+            <a:prstGeom prst="triangle">
               <a:avLst/>
             </a:prstGeom>
           </p:spPr>
@@ -25775,10 +24047,10 @@
         </p:sp>
         <p:sp>
           <p:nvSpPr>
-            <p:cNvPr id="209" name="Oval 208">
-              <a:extLst>
-                <a:ext uri="{FF2B5EF4-FFF2-40B4-BE49-F238E27FC236}">
-                  <a16:creationId xmlns:a16="http://schemas.microsoft.com/office/drawing/2014/main" id="{5C51AE42-9D9A-6F33-2F46-6CF735BDCE15}"/>
+            <p:cNvPr id="227" name="Isosceles Triangle 226">
+              <a:extLst>
+                <a:ext uri="{FF2B5EF4-FFF2-40B4-BE49-F238E27FC236}">
+                  <a16:creationId xmlns:a16="http://schemas.microsoft.com/office/drawing/2014/main" id="{E4312685-F54F-DAF7-4795-00D2F756BA15}"/>
                 </a:ext>
               </a:extLst>
             </p:cNvPr>
@@ -25787,10 +24059,10 @@
           </p:nvSpPr>
           <p:spPr>
             <a:xfrm>
-              <a:off x="6832567" y="2092176"/>
-              <a:ext cx="548640" cy="548640"/>
-            </a:xfrm>
-            <a:prstGeom prst="ellipse">
+              <a:off x="6216162" y="2444259"/>
+              <a:ext cx="219808" cy="1529863"/>
+            </a:xfrm>
+            <a:prstGeom prst="triangle">
               <a:avLst/>
             </a:prstGeom>
           </p:spPr>
@@ -25819,10 +24091,10 @@
         </p:sp>
         <p:sp>
           <p:nvSpPr>
-            <p:cNvPr id="210" name="Oval 209">
-              <a:extLst>
-                <a:ext uri="{FF2B5EF4-FFF2-40B4-BE49-F238E27FC236}">
-                  <a16:creationId xmlns:a16="http://schemas.microsoft.com/office/drawing/2014/main" id="{DB76EDFE-A1FE-6ED0-644B-0E9251D57C0F}"/>
+            <p:cNvPr id="228" name="Moon 227">
+              <a:extLst>
+                <a:ext uri="{FF2B5EF4-FFF2-40B4-BE49-F238E27FC236}">
+                  <a16:creationId xmlns:a16="http://schemas.microsoft.com/office/drawing/2014/main" id="{5C3720B2-CD3B-F33B-4466-4F393F81067E}"/>
                 </a:ext>
               </a:extLst>
             </p:cNvPr>
@@ -25830,12 +24102,14 @@
             <p:nvPr/>
           </p:nvSpPr>
           <p:spPr>
-            <a:xfrm>
-              <a:off x="6878287" y="2672814"/>
-              <a:ext cx="457200" cy="457200"/>
-            </a:xfrm>
-            <a:prstGeom prst="ellipse">
-              <a:avLst/>
+            <a:xfrm rot="5400000">
+              <a:off x="6060099" y="4769824"/>
+              <a:ext cx="531929" cy="1266094"/>
+            </a:xfrm>
+            <a:prstGeom prst="moon">
+              <a:avLst>
+                <a:gd name="adj" fmla="val 38235"/>
+              </a:avLst>
             </a:prstGeom>
           </p:spPr>
           <p:style>
@@ -25863,10 +24137,10 @@
         </p:sp>
         <p:sp>
           <p:nvSpPr>
-            <p:cNvPr id="211" name="Oval 210">
-              <a:extLst>
-                <a:ext uri="{FF2B5EF4-FFF2-40B4-BE49-F238E27FC236}">
-                  <a16:creationId xmlns:a16="http://schemas.microsoft.com/office/drawing/2014/main" id="{1122EE9D-1EC1-5A79-3DB8-DDF7563F0F0B}"/>
+            <p:cNvPr id="229" name="Isosceles Triangle 228">
+              <a:extLst>
+                <a:ext uri="{FF2B5EF4-FFF2-40B4-BE49-F238E27FC236}">
+                  <a16:creationId xmlns:a16="http://schemas.microsoft.com/office/drawing/2014/main" id="{5664061B-71E2-0B43-3677-D5396B908D1D}"/>
                 </a:ext>
               </a:extLst>
             </p:cNvPr>
@@ -25874,26 +24148,28 @@
             <p:nvPr/>
           </p:nvSpPr>
           <p:spPr>
-            <a:xfrm>
-              <a:off x="6924007" y="3160831"/>
-              <a:ext cx="365760" cy="365760"/>
-            </a:xfrm>
-            <a:prstGeom prst="ellipse">
+            <a:xfrm rot="10800000">
+              <a:off x="6000749" y="4211516"/>
+              <a:ext cx="650633" cy="1424349"/>
+            </a:xfrm>
+            <a:prstGeom prst="triangle">
               <a:avLst/>
             </a:prstGeom>
           </p:spPr>
           <p:style>
             <a:lnRef idx="2">
-              <a:schemeClr val="dk1"/>
+              <a:schemeClr val="dk1">
+                <a:shade val="50000"/>
+              </a:schemeClr>
             </a:lnRef>
             <a:fillRef idx="1">
+              <a:schemeClr val="dk1"/>
+            </a:fillRef>
+            <a:effectRef idx="0">
+              <a:schemeClr val="dk1"/>
+            </a:effectRef>
+            <a:fontRef idx="minor">
               <a:schemeClr val="lt1"/>
-            </a:fillRef>
-            <a:effectRef idx="0">
-              <a:schemeClr val="dk1"/>
-            </a:effectRef>
-            <a:fontRef idx="minor">
-              <a:schemeClr val="dk1"/>
             </a:fontRef>
           </p:style>
           <p:txBody>
@@ -25907,10 +24183,10 @@
         </p:sp>
         <p:sp>
           <p:nvSpPr>
-            <p:cNvPr id="212" name="Oval 211">
-              <a:extLst>
-                <a:ext uri="{FF2B5EF4-FFF2-40B4-BE49-F238E27FC236}">
-                  <a16:creationId xmlns:a16="http://schemas.microsoft.com/office/drawing/2014/main" id="{D7E31F2C-EC79-3E89-2900-0107B740EE4C}"/>
+            <p:cNvPr id="230" name="Moon 229">
+              <a:extLst>
+                <a:ext uri="{FF2B5EF4-FFF2-40B4-BE49-F238E27FC236}">
+                  <a16:creationId xmlns:a16="http://schemas.microsoft.com/office/drawing/2014/main" id="{A29BC6D3-6478-3744-E979-2AA74E5D1894}"/>
                 </a:ext>
               </a:extLst>
             </p:cNvPr>
@@ -25918,26 +24194,654 @@
             <p:nvPr/>
           </p:nvSpPr>
           <p:spPr>
+            <a:xfrm rot="5400000">
+              <a:off x="6027126" y="3697166"/>
+              <a:ext cx="597877" cy="2101363"/>
+            </a:xfrm>
+            <a:prstGeom prst="moon">
+              <a:avLst/>
+            </a:prstGeom>
+          </p:spPr>
+          <p:style>
+            <a:lnRef idx="2">
+              <a:schemeClr val="dk1">
+                <a:shade val="50000"/>
+              </a:schemeClr>
+            </a:lnRef>
+            <a:fillRef idx="1">
+              <a:schemeClr val="dk1"/>
+            </a:fillRef>
+            <a:effectRef idx="0">
+              <a:schemeClr val="dk1"/>
+            </a:effectRef>
+            <a:fontRef idx="minor">
+              <a:schemeClr val="lt1"/>
+            </a:fontRef>
+          </p:style>
+          <p:txBody>
+            <a:bodyPr rtlCol="0" anchor="ctr"/>
+            <a:lstStyle/>
+            <a:p>
+              <a:pPr algn="ctr"/>
+              <a:endParaRPr lang="en-US"/>
+            </a:p>
+          </p:txBody>
+        </p:sp>
+      </p:grpSp>
+      <p:grpSp>
+        <p:nvGrpSpPr>
+          <p:cNvPr id="231" name="Group 230">
+            <a:extLst>
+              <a:ext uri="{FF2B5EF4-FFF2-40B4-BE49-F238E27FC236}">
+                <a16:creationId xmlns:a16="http://schemas.microsoft.com/office/drawing/2014/main" id="{9184543B-6D50-1B12-EE1B-7D21F16B95B9}"/>
+              </a:ext>
+            </a:extLst>
+          </p:cNvPr>
+          <p:cNvGrpSpPr/>
+          <p:nvPr/>
+        </p:nvGrpSpPr>
+        <p:grpSpPr>
+          <a:xfrm rot="19005849">
+            <a:off x="7160581" y="3789066"/>
+            <a:ext cx="1093057" cy="584571"/>
+            <a:chOff x="5276797" y="2347914"/>
+            <a:chExt cx="3125698" cy="1671636"/>
+          </a:xfrm>
+        </p:grpSpPr>
+        <p:grpSp>
+          <p:nvGrpSpPr>
+            <p:cNvPr id="232" name="Group 231">
+              <a:extLst>
+                <a:ext uri="{FF2B5EF4-FFF2-40B4-BE49-F238E27FC236}">
+                  <a16:creationId xmlns:a16="http://schemas.microsoft.com/office/drawing/2014/main" id="{168680D1-F4E5-737A-B3B9-DA9905341BCE}"/>
+                </a:ext>
+              </a:extLst>
+            </p:cNvPr>
+            <p:cNvGrpSpPr/>
+            <p:nvPr/>
+          </p:nvGrpSpPr>
+          <p:grpSpPr>
             <a:xfrm>
-              <a:off x="6969727" y="3583710"/>
-              <a:ext cx="274320" cy="274320"/>
-            </a:xfrm>
-            <a:prstGeom prst="ellipse">
-              <a:avLst/>
+              <a:off x="5276797" y="2537857"/>
+              <a:ext cx="3125698" cy="1481693"/>
+              <a:chOff x="5791718" y="2234167"/>
+              <a:chExt cx="2790776" cy="1322929"/>
+            </a:xfrm>
+          </p:grpSpPr>
+          <p:sp>
+            <p:nvSpPr>
+              <p:cNvPr id="234" name="Moon 233">
+                <a:extLst>
+                  <a:ext uri="{FF2B5EF4-FFF2-40B4-BE49-F238E27FC236}">
+                    <a16:creationId xmlns:a16="http://schemas.microsoft.com/office/drawing/2014/main" id="{C6269848-7015-B304-9906-B1EF9BC09ED6}"/>
+                  </a:ext>
+                </a:extLst>
+              </p:cNvPr>
+              <p:cNvSpPr/>
+              <p:nvPr/>
+            </p:nvSpPr>
+            <p:spPr>
+              <a:xfrm rot="16200000" flipV="1">
+                <a:off x="6751867" y="1274018"/>
+                <a:ext cx="870477" cy="2790776"/>
+              </a:xfrm>
+              <a:prstGeom prst="moon">
+                <a:avLst/>
+              </a:prstGeom>
+            </p:spPr>
+            <p:style>
+              <a:lnRef idx="2">
+                <a:schemeClr val="dk1">
+                  <a:shade val="50000"/>
+                </a:schemeClr>
+              </a:lnRef>
+              <a:fillRef idx="1">
+                <a:schemeClr val="dk1"/>
+              </a:fillRef>
+              <a:effectRef idx="0">
+                <a:schemeClr val="dk1"/>
+              </a:effectRef>
+              <a:fontRef idx="minor">
+                <a:schemeClr val="lt1"/>
+              </a:fontRef>
+            </p:style>
+            <p:txBody>
+              <a:bodyPr rtlCol="0" anchor="ctr"/>
+              <a:lstStyle/>
+              <a:p>
+                <a:pPr algn="ctr"/>
+                <a:endParaRPr lang="en-US"/>
+              </a:p>
+            </p:txBody>
+          </p:sp>
+          <p:sp>
+            <p:nvSpPr>
+              <p:cNvPr id="235" name="Moon 234">
+                <a:extLst>
+                  <a:ext uri="{FF2B5EF4-FFF2-40B4-BE49-F238E27FC236}">
+                    <a16:creationId xmlns:a16="http://schemas.microsoft.com/office/drawing/2014/main" id="{8B95B3A9-A65E-870A-DC7F-C2D5BF8876BC}"/>
+                  </a:ext>
+                </a:extLst>
+              </p:cNvPr>
+              <p:cNvSpPr/>
+              <p:nvPr/>
+            </p:nvSpPr>
+            <p:spPr>
+              <a:xfrm rot="16200000" flipV="1">
+                <a:off x="6921280" y="2626996"/>
+                <a:ext cx="531649" cy="1328550"/>
+              </a:xfrm>
+              <a:prstGeom prst="moon">
+                <a:avLst>
+                  <a:gd name="adj" fmla="val 58361"/>
+                </a:avLst>
+              </a:prstGeom>
+            </p:spPr>
+            <p:style>
+              <a:lnRef idx="2">
+                <a:schemeClr val="dk1">
+                  <a:shade val="50000"/>
+                </a:schemeClr>
+              </a:lnRef>
+              <a:fillRef idx="1">
+                <a:schemeClr val="dk1"/>
+              </a:fillRef>
+              <a:effectRef idx="0">
+                <a:schemeClr val="dk1"/>
+              </a:effectRef>
+              <a:fontRef idx="minor">
+                <a:schemeClr val="lt1"/>
+              </a:fontRef>
+            </p:style>
+            <p:txBody>
+              <a:bodyPr rtlCol="0" anchor="ctr"/>
+              <a:lstStyle/>
+              <a:p>
+                <a:pPr algn="ctr"/>
+                <a:endParaRPr lang="en-US"/>
+              </a:p>
+            </p:txBody>
+          </p:sp>
+          <p:sp>
+            <p:nvSpPr>
+              <p:cNvPr id="236" name="Trapezoid 235">
+                <a:extLst>
+                  <a:ext uri="{FF2B5EF4-FFF2-40B4-BE49-F238E27FC236}">
+                    <a16:creationId xmlns:a16="http://schemas.microsoft.com/office/drawing/2014/main" id="{D3022ED0-9576-FF99-B453-725722F60C7C}"/>
+                  </a:ext>
+                </a:extLst>
+              </p:cNvPr>
+              <p:cNvSpPr/>
+              <p:nvPr/>
+            </p:nvSpPr>
+            <p:spPr>
+              <a:xfrm rot="10800000">
+                <a:off x="6813018" y="2514600"/>
+                <a:ext cx="748172" cy="1042496"/>
+              </a:xfrm>
+              <a:prstGeom prst="trapezoid">
+                <a:avLst/>
+              </a:prstGeom>
+            </p:spPr>
+            <p:style>
+              <a:lnRef idx="2">
+                <a:schemeClr val="dk1">
+                  <a:shade val="50000"/>
+                </a:schemeClr>
+              </a:lnRef>
+              <a:fillRef idx="1">
+                <a:schemeClr val="dk1"/>
+              </a:fillRef>
+              <a:effectRef idx="0">
+                <a:schemeClr val="dk1"/>
+              </a:effectRef>
+              <a:fontRef idx="minor">
+                <a:schemeClr val="lt1"/>
+              </a:fontRef>
+            </p:style>
+            <p:txBody>
+              <a:bodyPr rtlCol="0" anchor="ctr"/>
+              <a:lstStyle/>
+              <a:p>
+                <a:pPr algn="ctr"/>
+                <a:endParaRPr lang="en-US"/>
+              </a:p>
+            </p:txBody>
+          </p:sp>
+          <p:sp>
+            <p:nvSpPr>
+              <p:cNvPr id="237" name="Oval 236">
+                <a:extLst>
+                  <a:ext uri="{FF2B5EF4-FFF2-40B4-BE49-F238E27FC236}">
+                    <a16:creationId xmlns:a16="http://schemas.microsoft.com/office/drawing/2014/main" id="{111A998C-5D03-8566-A53E-9E32EBF19B58}"/>
+                  </a:ext>
+                </a:extLst>
+              </p:cNvPr>
+              <p:cNvSpPr/>
+              <p:nvPr/>
+            </p:nvSpPr>
+            <p:spPr>
+              <a:xfrm>
+                <a:off x="6455154" y="2644988"/>
+                <a:ext cx="351316" cy="351316"/>
+              </a:xfrm>
+              <a:prstGeom prst="ellipse">
+                <a:avLst/>
+              </a:prstGeom>
+            </p:spPr>
+            <p:style>
+              <a:lnRef idx="2">
+                <a:schemeClr val="dk1"/>
+              </a:lnRef>
+              <a:fillRef idx="1">
+                <a:schemeClr val="lt1"/>
+              </a:fillRef>
+              <a:effectRef idx="0">
+                <a:schemeClr val="dk1"/>
+              </a:effectRef>
+              <a:fontRef idx="minor">
+                <a:schemeClr val="dk1"/>
+              </a:fontRef>
+            </p:style>
+            <p:txBody>
+              <a:bodyPr rtlCol="0" anchor="ctr"/>
+              <a:lstStyle/>
+              <a:p>
+                <a:pPr algn="ctr"/>
+                <a:endParaRPr lang="en-US"/>
+              </a:p>
+            </p:txBody>
+          </p:sp>
+          <p:sp>
+            <p:nvSpPr>
+              <p:cNvPr id="238" name="Oval 237">
+                <a:extLst>
+                  <a:ext uri="{FF2B5EF4-FFF2-40B4-BE49-F238E27FC236}">
+                    <a16:creationId xmlns:a16="http://schemas.microsoft.com/office/drawing/2014/main" id="{D50DD21B-218F-A884-9A59-C16BBC9AC1C2}"/>
+                  </a:ext>
+                </a:extLst>
+              </p:cNvPr>
+              <p:cNvSpPr/>
+              <p:nvPr/>
+            </p:nvSpPr>
+            <p:spPr>
+              <a:xfrm>
+                <a:off x="7037449" y="2674398"/>
+                <a:ext cx="292763" cy="292763"/>
+              </a:xfrm>
+              <a:prstGeom prst="ellipse">
+                <a:avLst/>
+              </a:prstGeom>
+            </p:spPr>
+            <p:style>
+              <a:lnRef idx="2">
+                <a:schemeClr val="dk1"/>
+              </a:lnRef>
+              <a:fillRef idx="1">
+                <a:schemeClr val="lt1"/>
+              </a:fillRef>
+              <a:effectRef idx="0">
+                <a:schemeClr val="dk1"/>
+              </a:effectRef>
+              <a:fontRef idx="minor">
+                <a:schemeClr val="dk1"/>
+              </a:fontRef>
+            </p:style>
+            <p:txBody>
+              <a:bodyPr rtlCol="0" anchor="ctr"/>
+              <a:lstStyle/>
+              <a:p>
+                <a:pPr algn="ctr"/>
+                <a:endParaRPr lang="en-US"/>
+              </a:p>
+            </p:txBody>
+          </p:sp>
+          <p:sp>
+            <p:nvSpPr>
+              <p:cNvPr id="239" name="Oval 238">
+                <a:extLst>
+                  <a:ext uri="{FF2B5EF4-FFF2-40B4-BE49-F238E27FC236}">
+                    <a16:creationId xmlns:a16="http://schemas.microsoft.com/office/drawing/2014/main" id="{C2F8FB8E-3BF1-C420-71DA-DB75F1C0BB6E}"/>
+                  </a:ext>
+                </a:extLst>
+              </p:cNvPr>
+              <p:cNvSpPr/>
+              <p:nvPr/>
+            </p:nvSpPr>
+            <p:spPr>
+              <a:xfrm>
+                <a:off x="7066725" y="2986895"/>
+                <a:ext cx="234210" cy="234211"/>
+              </a:xfrm>
+              <a:prstGeom prst="ellipse">
+                <a:avLst/>
+              </a:prstGeom>
+            </p:spPr>
+            <p:style>
+              <a:lnRef idx="2">
+                <a:schemeClr val="dk1"/>
+              </a:lnRef>
+              <a:fillRef idx="1">
+                <a:schemeClr val="lt1"/>
+              </a:fillRef>
+              <a:effectRef idx="0">
+                <a:schemeClr val="dk1"/>
+              </a:effectRef>
+              <a:fontRef idx="minor">
+                <a:schemeClr val="dk1"/>
+              </a:fontRef>
+            </p:style>
+            <p:txBody>
+              <a:bodyPr rtlCol="0" anchor="ctr"/>
+              <a:lstStyle/>
+              <a:p>
+                <a:pPr algn="ctr"/>
+                <a:endParaRPr lang="en-US"/>
+              </a:p>
+            </p:txBody>
+          </p:sp>
+          <p:sp>
+            <p:nvSpPr>
+              <p:cNvPr id="240" name="Oval 239">
+                <a:extLst>
+                  <a:ext uri="{FF2B5EF4-FFF2-40B4-BE49-F238E27FC236}">
+                    <a16:creationId xmlns:a16="http://schemas.microsoft.com/office/drawing/2014/main" id="{E06EF195-44D3-0504-C5B6-C78B3783AB07}"/>
+                  </a:ext>
+                </a:extLst>
+              </p:cNvPr>
+              <p:cNvSpPr/>
+              <p:nvPr/>
+            </p:nvSpPr>
+            <p:spPr>
+              <a:xfrm>
+                <a:off x="7096001" y="3257681"/>
+                <a:ext cx="175658" cy="175658"/>
+              </a:xfrm>
+              <a:prstGeom prst="ellipse">
+                <a:avLst/>
+              </a:prstGeom>
+            </p:spPr>
+            <p:style>
+              <a:lnRef idx="2">
+                <a:schemeClr val="dk1"/>
+              </a:lnRef>
+              <a:fillRef idx="1">
+                <a:schemeClr val="lt1"/>
+              </a:fillRef>
+              <a:effectRef idx="0">
+                <a:schemeClr val="dk1"/>
+              </a:effectRef>
+              <a:fontRef idx="minor">
+                <a:schemeClr val="dk1"/>
+              </a:fontRef>
+            </p:style>
+            <p:txBody>
+              <a:bodyPr rtlCol="0" anchor="ctr"/>
+              <a:lstStyle/>
+              <a:p>
+                <a:pPr algn="ctr"/>
+                <a:endParaRPr lang="en-US"/>
+              </a:p>
+            </p:txBody>
+          </p:sp>
+          <p:sp>
+            <p:nvSpPr>
+              <p:cNvPr id="241" name="Oval 240">
+                <a:extLst>
+                  <a:ext uri="{FF2B5EF4-FFF2-40B4-BE49-F238E27FC236}">
+                    <a16:creationId xmlns:a16="http://schemas.microsoft.com/office/drawing/2014/main" id="{8694ADEF-2566-D99E-5C3F-DD1C07011A3C}"/>
+                  </a:ext>
+                </a:extLst>
+              </p:cNvPr>
+              <p:cNvSpPr/>
+              <p:nvPr/>
+            </p:nvSpPr>
+            <p:spPr>
+              <a:xfrm>
+                <a:off x="7583919" y="2649938"/>
+                <a:ext cx="351316" cy="351316"/>
+              </a:xfrm>
+              <a:prstGeom prst="ellipse">
+                <a:avLst/>
+              </a:prstGeom>
+            </p:spPr>
+            <p:style>
+              <a:lnRef idx="2">
+                <a:schemeClr val="dk1"/>
+              </a:lnRef>
+              <a:fillRef idx="1">
+                <a:schemeClr val="lt1"/>
+              </a:fillRef>
+              <a:effectRef idx="0">
+                <a:schemeClr val="dk1"/>
+              </a:effectRef>
+              <a:fontRef idx="minor">
+                <a:schemeClr val="dk1"/>
+              </a:fontRef>
+            </p:style>
+            <p:txBody>
+              <a:bodyPr rtlCol="0" anchor="ctr"/>
+              <a:lstStyle/>
+              <a:p>
+                <a:pPr algn="ctr"/>
+                <a:endParaRPr lang="en-US"/>
+              </a:p>
+            </p:txBody>
+          </p:sp>
+          <p:sp>
+            <p:nvSpPr>
+              <p:cNvPr id="242" name="Oval 241">
+                <a:extLst>
+                  <a:ext uri="{FF2B5EF4-FFF2-40B4-BE49-F238E27FC236}">
+                    <a16:creationId xmlns:a16="http://schemas.microsoft.com/office/drawing/2014/main" id="{C097A8D6-522F-6080-5BFC-EB9FF69A66EC}"/>
+                  </a:ext>
+                </a:extLst>
+              </p:cNvPr>
+              <p:cNvSpPr/>
+              <p:nvPr/>
+            </p:nvSpPr>
+            <p:spPr>
+              <a:xfrm>
+                <a:off x="6163678" y="2575651"/>
+                <a:ext cx="292763" cy="292763"/>
+              </a:xfrm>
+              <a:prstGeom prst="ellipse">
+                <a:avLst/>
+              </a:prstGeom>
+            </p:spPr>
+            <p:style>
+              <a:lnRef idx="2">
+                <a:schemeClr val="dk1"/>
+              </a:lnRef>
+              <a:fillRef idx="1">
+                <a:schemeClr val="lt1"/>
+              </a:fillRef>
+              <a:effectRef idx="0">
+                <a:schemeClr val="dk1"/>
+              </a:effectRef>
+              <a:fontRef idx="minor">
+                <a:schemeClr val="dk1"/>
+              </a:fontRef>
+            </p:style>
+            <p:txBody>
+              <a:bodyPr rtlCol="0" anchor="ctr"/>
+              <a:lstStyle/>
+              <a:p>
+                <a:pPr algn="ctr"/>
+                <a:endParaRPr lang="en-US"/>
+              </a:p>
+            </p:txBody>
+          </p:sp>
+          <p:sp>
+            <p:nvSpPr>
+              <p:cNvPr id="243" name="Oval 242">
+                <a:extLst>
+                  <a:ext uri="{FF2B5EF4-FFF2-40B4-BE49-F238E27FC236}">
+                    <a16:creationId xmlns:a16="http://schemas.microsoft.com/office/drawing/2014/main" id="{AAC22230-26C7-62A6-99A8-7D56C3DDB048}"/>
+                  </a:ext>
+                </a:extLst>
+              </p:cNvPr>
+              <p:cNvSpPr/>
+              <p:nvPr/>
+            </p:nvSpPr>
+            <p:spPr>
+              <a:xfrm>
+                <a:off x="7935235" y="2563649"/>
+                <a:ext cx="292763" cy="292763"/>
+              </a:xfrm>
+              <a:prstGeom prst="ellipse">
+                <a:avLst/>
+              </a:prstGeom>
+            </p:spPr>
+            <p:style>
+              <a:lnRef idx="2">
+                <a:schemeClr val="dk1"/>
+              </a:lnRef>
+              <a:fillRef idx="1">
+                <a:schemeClr val="lt1"/>
+              </a:fillRef>
+              <a:effectRef idx="0">
+                <a:schemeClr val="dk1"/>
+              </a:effectRef>
+              <a:fontRef idx="minor">
+                <a:schemeClr val="dk1"/>
+              </a:fontRef>
+            </p:style>
+            <p:txBody>
+              <a:bodyPr rtlCol="0" anchor="ctr"/>
+              <a:lstStyle/>
+              <a:p>
+                <a:pPr algn="ctr"/>
+                <a:endParaRPr lang="en-US"/>
+              </a:p>
+            </p:txBody>
+          </p:sp>
+          <p:sp>
+            <p:nvSpPr>
+              <p:cNvPr id="244" name="Oval 243">
+                <a:extLst>
+                  <a:ext uri="{FF2B5EF4-FFF2-40B4-BE49-F238E27FC236}">
+                    <a16:creationId xmlns:a16="http://schemas.microsoft.com/office/drawing/2014/main" id="{62E31A46-7FA6-E591-37F3-8E199F5801E8}"/>
+                  </a:ext>
+                </a:extLst>
+              </p:cNvPr>
+              <p:cNvSpPr/>
+              <p:nvPr/>
+            </p:nvSpPr>
+            <p:spPr>
+              <a:xfrm>
+                <a:off x="5993280" y="2489527"/>
+                <a:ext cx="175658" cy="175658"/>
+              </a:xfrm>
+              <a:prstGeom prst="ellipse">
+                <a:avLst/>
+              </a:prstGeom>
+            </p:spPr>
+            <p:style>
+              <a:lnRef idx="2">
+                <a:schemeClr val="dk1"/>
+              </a:lnRef>
+              <a:fillRef idx="1">
+                <a:schemeClr val="lt1"/>
+              </a:fillRef>
+              <a:effectRef idx="0">
+                <a:schemeClr val="dk1"/>
+              </a:effectRef>
+              <a:fontRef idx="minor">
+                <a:schemeClr val="dk1"/>
+              </a:fontRef>
+            </p:style>
+            <p:txBody>
+              <a:bodyPr rtlCol="0" anchor="ctr"/>
+              <a:lstStyle/>
+              <a:p>
+                <a:pPr algn="ctr"/>
+                <a:endParaRPr lang="en-US"/>
+              </a:p>
+            </p:txBody>
+          </p:sp>
+          <p:sp>
+            <p:nvSpPr>
+              <p:cNvPr id="245" name="Oval 244">
+                <a:extLst>
+                  <a:ext uri="{FF2B5EF4-FFF2-40B4-BE49-F238E27FC236}">
+                    <a16:creationId xmlns:a16="http://schemas.microsoft.com/office/drawing/2014/main" id="{AD7324C7-6528-16C0-4248-9582116B0D57}"/>
+                  </a:ext>
+                </a:extLst>
+              </p:cNvPr>
+              <p:cNvSpPr/>
+              <p:nvPr/>
+            </p:nvSpPr>
+            <p:spPr>
+              <a:xfrm>
+                <a:off x="8203057" y="2470977"/>
+                <a:ext cx="175658" cy="175658"/>
+              </a:xfrm>
+              <a:prstGeom prst="ellipse">
+                <a:avLst/>
+              </a:prstGeom>
+            </p:spPr>
+            <p:style>
+              <a:lnRef idx="2">
+                <a:schemeClr val="dk1"/>
+              </a:lnRef>
+              <a:fillRef idx="1">
+                <a:schemeClr val="lt1"/>
+              </a:fillRef>
+              <a:effectRef idx="0">
+                <a:schemeClr val="dk1"/>
+              </a:effectRef>
+              <a:fontRef idx="minor">
+                <a:schemeClr val="dk1"/>
+              </a:fontRef>
+            </p:style>
+            <p:txBody>
+              <a:bodyPr rtlCol="0" anchor="ctr"/>
+              <a:lstStyle/>
+              <a:p>
+                <a:pPr algn="ctr"/>
+                <a:endParaRPr lang="en-US"/>
+              </a:p>
+            </p:txBody>
+          </p:sp>
+        </p:grpSp>
+        <p:sp>
+          <p:nvSpPr>
+            <p:cNvPr id="233" name="Moon 232">
+              <a:extLst>
+                <a:ext uri="{FF2B5EF4-FFF2-40B4-BE49-F238E27FC236}">
+                  <a16:creationId xmlns:a16="http://schemas.microsoft.com/office/drawing/2014/main" id="{4F331029-01BA-3E8B-4C6A-9419D97A6662}"/>
+                </a:ext>
+              </a:extLst>
+            </p:cNvPr>
+            <p:cNvSpPr/>
+            <p:nvPr/>
+          </p:nvSpPr>
+          <p:spPr>
+            <a:xfrm rot="16200000">
+              <a:off x="6578719" y="2215251"/>
+              <a:ext cx="528871" cy="794198"/>
+            </a:xfrm>
+            <a:prstGeom prst="moon">
+              <a:avLst>
+                <a:gd name="adj" fmla="val 37993"/>
+              </a:avLst>
             </a:prstGeom>
           </p:spPr>
           <p:style>
             <a:lnRef idx="2">
-              <a:schemeClr val="dk1"/>
+              <a:schemeClr val="dk1">
+                <a:shade val="50000"/>
+              </a:schemeClr>
             </a:lnRef>
             <a:fillRef idx="1">
+              <a:schemeClr val="dk1"/>
+            </a:fillRef>
+            <a:effectRef idx="0">
+              <a:schemeClr val="dk1"/>
+            </a:effectRef>
+            <a:fontRef idx="minor">
               <a:schemeClr val="lt1"/>
-            </a:fillRef>
-            <a:effectRef idx="0">
-              <a:schemeClr val="dk1"/>
-            </a:effectRef>
-            <a:fontRef idx="minor">
-              <a:schemeClr val="dk1"/>
             </a:fontRef>
           </p:style>
           <p:txBody>

--- a/image process/drawings sifi.pptx
+++ b/image process/drawings sifi.pptx
@@ -9,9 +9,9 @@
   </p:notesMasterIdLst>
   <p:sldIdLst>
     <p:sldId id="270" r:id="rId2"/>
-    <p:sldId id="269" r:id="rId3"/>
-    <p:sldId id="271" r:id="rId4"/>
-    <p:sldId id="272" r:id="rId5"/>
+    <p:sldId id="271" r:id="rId3"/>
+    <p:sldId id="272" r:id="rId4"/>
+    <p:sldId id="269" r:id="rId5"/>
   </p:sldIdLst>
   <p:sldSz cx="12192000" cy="6858000"/>
   <p:notesSz cx="6858000" cy="9144000"/>
@@ -200,7 +200,7 @@
           <a:p>
             <a:fld id="{7700C406-2328-4788-AE79-437B6607AD22}" type="datetimeFigureOut">
               <a:rPr lang="en-US" smtClean="0"/>
-              <a:t>6/7/2022</a:t>
+              <a:t>6/13/2022</a:t>
             </a:fld>
             <a:endParaRPr lang="en-US"/>
           </a:p>
@@ -614,7 +614,7 @@
           <a:p>
             <a:fld id="{9EC8CD53-0620-48F2-A3BB-2B10BDA60E52}" type="datetimeFigureOut">
               <a:rPr lang="en-US" smtClean="0"/>
-              <a:t>6/7/2022</a:t>
+              <a:t>6/13/2022</a:t>
             </a:fld>
             <a:endParaRPr lang="en-US"/>
           </a:p>
@@ -812,7 +812,7 @@
           <a:p>
             <a:fld id="{9EC8CD53-0620-48F2-A3BB-2B10BDA60E52}" type="datetimeFigureOut">
               <a:rPr lang="en-US" smtClean="0"/>
-              <a:t>6/7/2022</a:t>
+              <a:t>6/13/2022</a:t>
             </a:fld>
             <a:endParaRPr lang="en-US"/>
           </a:p>
@@ -1020,7 +1020,7 @@
           <a:p>
             <a:fld id="{9EC8CD53-0620-48F2-A3BB-2B10BDA60E52}" type="datetimeFigureOut">
               <a:rPr lang="en-US" smtClean="0"/>
-              <a:t>6/7/2022</a:t>
+              <a:t>6/13/2022</a:t>
             </a:fld>
             <a:endParaRPr lang="en-US"/>
           </a:p>
@@ -1218,7 +1218,7 @@
           <a:p>
             <a:fld id="{9EC8CD53-0620-48F2-A3BB-2B10BDA60E52}" type="datetimeFigureOut">
               <a:rPr lang="en-US" smtClean="0"/>
-              <a:t>6/7/2022</a:t>
+              <a:t>6/13/2022</a:t>
             </a:fld>
             <a:endParaRPr lang="en-US"/>
           </a:p>
@@ -1493,7 +1493,7 @@
           <a:p>
             <a:fld id="{9EC8CD53-0620-48F2-A3BB-2B10BDA60E52}" type="datetimeFigureOut">
               <a:rPr lang="en-US" smtClean="0"/>
-              <a:t>6/7/2022</a:t>
+              <a:t>6/13/2022</a:t>
             </a:fld>
             <a:endParaRPr lang="en-US"/>
           </a:p>
@@ -1758,7 +1758,7 @@
           <a:p>
             <a:fld id="{9EC8CD53-0620-48F2-A3BB-2B10BDA60E52}" type="datetimeFigureOut">
               <a:rPr lang="en-US" smtClean="0"/>
-              <a:t>6/7/2022</a:t>
+              <a:t>6/13/2022</a:t>
             </a:fld>
             <a:endParaRPr lang="en-US"/>
           </a:p>
@@ -2170,7 +2170,7 @@
           <a:p>
             <a:fld id="{9EC8CD53-0620-48F2-A3BB-2B10BDA60E52}" type="datetimeFigureOut">
               <a:rPr lang="en-US" smtClean="0"/>
-              <a:t>6/7/2022</a:t>
+              <a:t>6/13/2022</a:t>
             </a:fld>
             <a:endParaRPr lang="en-US"/>
           </a:p>
@@ -2311,7 +2311,7 @@
           <a:p>
             <a:fld id="{9EC8CD53-0620-48F2-A3BB-2B10BDA60E52}" type="datetimeFigureOut">
               <a:rPr lang="en-US" smtClean="0"/>
-              <a:t>6/7/2022</a:t>
+              <a:t>6/13/2022</a:t>
             </a:fld>
             <a:endParaRPr lang="en-US"/>
           </a:p>
@@ -2424,7 +2424,7 @@
           <a:p>
             <a:fld id="{9EC8CD53-0620-48F2-A3BB-2B10BDA60E52}" type="datetimeFigureOut">
               <a:rPr lang="en-US" smtClean="0"/>
-              <a:t>6/7/2022</a:t>
+              <a:t>6/13/2022</a:t>
             </a:fld>
             <a:endParaRPr lang="en-US"/>
           </a:p>
@@ -2735,7 +2735,7 @@
           <a:p>
             <a:fld id="{9EC8CD53-0620-48F2-A3BB-2B10BDA60E52}" type="datetimeFigureOut">
               <a:rPr lang="en-US" smtClean="0"/>
-              <a:t>6/7/2022</a:t>
+              <a:t>6/13/2022</a:t>
             </a:fld>
             <a:endParaRPr lang="en-US"/>
           </a:p>
@@ -3023,7 +3023,7 @@
           <a:p>
             <a:fld id="{9EC8CD53-0620-48F2-A3BB-2B10BDA60E52}" type="datetimeFigureOut">
               <a:rPr lang="en-US" smtClean="0"/>
-              <a:t>6/7/2022</a:t>
+              <a:t>6/13/2022</a:t>
             </a:fld>
             <a:endParaRPr lang="en-US"/>
           </a:p>
@@ -3264,7 +3264,7 @@
           <a:p>
             <a:fld id="{9EC8CD53-0620-48F2-A3BB-2B10BDA60E52}" type="datetimeFigureOut">
               <a:rPr lang="en-US" smtClean="0"/>
-              <a:t>6/7/2022</a:t>
+              <a:t>6/13/2022</a:t>
             </a:fld>
             <a:endParaRPr lang="en-US"/>
           </a:p>
@@ -16001,1413 +16001,6 @@
 </file>
 
 <file path=ppt/slides/slide2.xml><?xml version="1.0" encoding="utf-8"?>
-<p:sld xmlns:a="http://schemas.openxmlformats.org/drawingml/2006/main" xmlns:r="http://schemas.openxmlformats.org/officeDocument/2006/relationships" xmlns:p="http://schemas.openxmlformats.org/presentationml/2006/main">
-  <p:cSld>
-    <p:spTree>
-      <p:nvGrpSpPr>
-        <p:cNvPr id="1" name=""/>
-        <p:cNvGrpSpPr/>
-        <p:nvPr/>
-      </p:nvGrpSpPr>
-      <p:grpSpPr>
-        <a:xfrm>
-          <a:off x="0" y="0"/>
-          <a:ext cx="0" cy="0"/>
-          <a:chOff x="0" y="0"/>
-          <a:chExt cx="0" cy="0"/>
-        </a:xfrm>
-      </p:grpSpPr>
-      <p:pic>
-        <p:nvPicPr>
-          <p:cNvPr id="109" name="Picture 108">
-            <a:extLst>
-              <a:ext uri="{FF2B5EF4-FFF2-40B4-BE49-F238E27FC236}">
-                <a16:creationId xmlns:a16="http://schemas.microsoft.com/office/drawing/2014/main" id="{C13799ED-04E1-8043-5CB9-07CF7B2E9D9C}"/>
-              </a:ext>
-            </a:extLst>
-          </p:cNvPr>
-          <p:cNvPicPr>
-            <a:picLocks noChangeAspect="1"/>
-          </p:cNvPicPr>
-          <p:nvPr/>
-        </p:nvPicPr>
-        <p:blipFill>
-          <a:blip r:embed="rId2"/>
-          <a:stretch>
-            <a:fillRect/>
-          </a:stretch>
-        </p:blipFill>
-        <p:spPr>
-          <a:xfrm>
-            <a:off x="681296" y="566272"/>
-            <a:ext cx="863170" cy="863170"/>
-          </a:xfrm>
-          <a:prstGeom prst="rect">
-            <a:avLst/>
-          </a:prstGeom>
-        </p:spPr>
-      </p:pic>
-      <p:grpSp>
-        <p:nvGrpSpPr>
-          <p:cNvPr id="13" name="Group 12">
-            <a:extLst>
-              <a:ext uri="{FF2B5EF4-FFF2-40B4-BE49-F238E27FC236}">
-                <a16:creationId xmlns:a16="http://schemas.microsoft.com/office/drawing/2014/main" id="{7246E687-0EF4-4F45-FA5D-C56722D7831E}"/>
-              </a:ext>
-            </a:extLst>
-          </p:cNvPr>
-          <p:cNvGrpSpPr/>
-          <p:nvPr/>
-        </p:nvGrpSpPr>
-        <p:grpSpPr>
-          <a:xfrm>
-            <a:off x="427081" y="263129"/>
-            <a:ext cx="1371600" cy="1371600"/>
-            <a:chOff x="427081" y="263129"/>
-            <a:chExt cx="1371600" cy="1371600"/>
-          </a:xfrm>
-        </p:grpSpPr>
-        <p:sp>
-          <p:nvSpPr>
-            <p:cNvPr id="15" name="Rectangle 14">
-              <a:extLst>
-                <a:ext uri="{FF2B5EF4-FFF2-40B4-BE49-F238E27FC236}">
-                  <a16:creationId xmlns:a16="http://schemas.microsoft.com/office/drawing/2014/main" id="{DE0FFCD0-5558-89A0-77DB-F44B92440DBF}"/>
-                </a:ext>
-              </a:extLst>
-            </p:cNvPr>
-            <p:cNvSpPr/>
-            <p:nvPr/>
-          </p:nvSpPr>
-          <p:spPr>
-            <a:xfrm>
-              <a:off x="427081" y="263129"/>
-              <a:ext cx="1371600" cy="1371600"/>
-            </a:xfrm>
-            <a:prstGeom prst="rect">
-              <a:avLst/>
-            </a:prstGeom>
-            <a:noFill/>
-            <a:ln w="76200">
-              <a:solidFill>
-                <a:schemeClr val="tx1"/>
-              </a:solidFill>
-            </a:ln>
-          </p:spPr>
-          <p:style>
-            <a:lnRef idx="2">
-              <a:schemeClr val="accent1">
-                <a:shade val="50000"/>
-              </a:schemeClr>
-            </a:lnRef>
-            <a:fillRef idx="1">
-              <a:schemeClr val="accent1"/>
-            </a:fillRef>
-            <a:effectRef idx="0">
-              <a:schemeClr val="accent1"/>
-            </a:effectRef>
-            <a:fontRef idx="minor">
-              <a:schemeClr val="lt1"/>
-            </a:fontRef>
-          </p:style>
-          <p:txBody>
-            <a:bodyPr rtlCol="0" anchor="ctr"/>
-            <a:lstStyle/>
-            <a:p>
-              <a:pPr algn="ctr"/>
-              <a:endParaRPr lang="en-US"/>
-            </a:p>
-          </p:txBody>
-        </p:sp>
-        <p:sp>
-          <p:nvSpPr>
-            <p:cNvPr id="10" name="Plaque 9">
-              <a:extLst>
-                <a:ext uri="{FF2B5EF4-FFF2-40B4-BE49-F238E27FC236}">
-                  <a16:creationId xmlns:a16="http://schemas.microsoft.com/office/drawing/2014/main" id="{547A9B6C-82B4-6187-4C4A-2C056096AE99}"/>
-                </a:ext>
-              </a:extLst>
-            </p:cNvPr>
-            <p:cNvSpPr/>
-            <p:nvPr/>
-          </p:nvSpPr>
-          <p:spPr>
-            <a:xfrm>
-              <a:off x="573033" y="478473"/>
-              <a:ext cx="1097280" cy="1097280"/>
-            </a:xfrm>
-            <a:prstGeom prst="plaque">
-              <a:avLst/>
-            </a:prstGeom>
-            <a:noFill/>
-            <a:ln w="38100" cap="flat" cmpd="sng" algn="ctr">
-              <a:solidFill>
-                <a:schemeClr val="dk1"/>
-              </a:solidFill>
-              <a:prstDash val="solid"/>
-              <a:round/>
-              <a:headEnd type="none" w="med" len="med"/>
-              <a:tailEnd type="none" w="med" len="med"/>
-            </a:ln>
-          </p:spPr>
-          <p:style>
-            <a:lnRef idx="0">
-              <a:scrgbClr r="0" g="0" b="0"/>
-            </a:lnRef>
-            <a:fillRef idx="0">
-              <a:scrgbClr r="0" g="0" b="0"/>
-            </a:fillRef>
-            <a:effectRef idx="0">
-              <a:scrgbClr r="0" g="0" b="0"/>
-            </a:effectRef>
-            <a:fontRef idx="minor">
-              <a:schemeClr val="dk1"/>
-            </a:fontRef>
-          </p:style>
-          <p:txBody>
-            <a:bodyPr rtlCol="0" anchor="ctr"/>
-            <a:lstStyle/>
-            <a:p>
-              <a:pPr algn="ctr"/>
-              <a:endParaRPr lang="en-US"/>
-            </a:p>
-          </p:txBody>
-        </p:sp>
-      </p:grpSp>
-      <p:grpSp>
-        <p:nvGrpSpPr>
-          <p:cNvPr id="63" name="Group 62">
-            <a:extLst>
-              <a:ext uri="{FF2B5EF4-FFF2-40B4-BE49-F238E27FC236}">
-                <a16:creationId xmlns:a16="http://schemas.microsoft.com/office/drawing/2014/main" id="{EDA4668C-A6C9-9F29-1BEE-74169349C720}"/>
-              </a:ext>
-            </a:extLst>
-          </p:cNvPr>
-          <p:cNvGrpSpPr/>
-          <p:nvPr/>
-        </p:nvGrpSpPr>
-        <p:grpSpPr>
-          <a:xfrm>
-            <a:off x="3766985" y="263129"/>
-            <a:ext cx="1371600" cy="1371600"/>
-            <a:chOff x="427081" y="263129"/>
-            <a:chExt cx="1371600" cy="1371600"/>
-          </a:xfrm>
-        </p:grpSpPr>
-        <p:sp>
-          <p:nvSpPr>
-            <p:cNvPr id="64" name="Rectangle 63">
-              <a:extLst>
-                <a:ext uri="{FF2B5EF4-FFF2-40B4-BE49-F238E27FC236}">
-                  <a16:creationId xmlns:a16="http://schemas.microsoft.com/office/drawing/2014/main" id="{60E49F26-BC07-08BD-7B2E-1FB683E489ED}"/>
-                </a:ext>
-              </a:extLst>
-            </p:cNvPr>
-            <p:cNvSpPr/>
-            <p:nvPr/>
-          </p:nvSpPr>
-          <p:spPr>
-            <a:xfrm>
-              <a:off x="427081" y="263129"/>
-              <a:ext cx="1371600" cy="1371600"/>
-            </a:xfrm>
-            <a:prstGeom prst="rect">
-              <a:avLst/>
-            </a:prstGeom>
-            <a:noFill/>
-            <a:ln w="76200">
-              <a:solidFill>
-                <a:schemeClr val="tx1"/>
-              </a:solidFill>
-            </a:ln>
-          </p:spPr>
-          <p:style>
-            <a:lnRef idx="2">
-              <a:schemeClr val="accent1">
-                <a:shade val="50000"/>
-              </a:schemeClr>
-            </a:lnRef>
-            <a:fillRef idx="1">
-              <a:schemeClr val="accent1"/>
-            </a:fillRef>
-            <a:effectRef idx="0">
-              <a:schemeClr val="accent1"/>
-            </a:effectRef>
-            <a:fontRef idx="minor">
-              <a:schemeClr val="lt1"/>
-            </a:fontRef>
-          </p:style>
-          <p:txBody>
-            <a:bodyPr rtlCol="0" anchor="ctr"/>
-            <a:lstStyle/>
-            <a:p>
-              <a:pPr algn="ctr"/>
-              <a:endParaRPr lang="en-US"/>
-            </a:p>
-          </p:txBody>
-        </p:sp>
-        <p:sp>
-          <p:nvSpPr>
-            <p:cNvPr id="65" name="Plaque 64">
-              <a:extLst>
-                <a:ext uri="{FF2B5EF4-FFF2-40B4-BE49-F238E27FC236}">
-                  <a16:creationId xmlns:a16="http://schemas.microsoft.com/office/drawing/2014/main" id="{15C63D43-8589-2F16-9341-F86DC4EE75BF}"/>
-                </a:ext>
-              </a:extLst>
-            </p:cNvPr>
-            <p:cNvSpPr/>
-            <p:nvPr/>
-          </p:nvSpPr>
-          <p:spPr>
-            <a:xfrm>
-              <a:off x="573033" y="478473"/>
-              <a:ext cx="1097280" cy="1097280"/>
-            </a:xfrm>
-            <a:prstGeom prst="plaque">
-              <a:avLst/>
-            </a:prstGeom>
-            <a:noFill/>
-            <a:ln w="38100" cap="flat" cmpd="sng" algn="ctr">
-              <a:solidFill>
-                <a:schemeClr val="dk1"/>
-              </a:solidFill>
-              <a:prstDash val="solid"/>
-              <a:round/>
-              <a:headEnd type="none" w="med" len="med"/>
-              <a:tailEnd type="none" w="med" len="med"/>
-            </a:ln>
-          </p:spPr>
-          <p:style>
-            <a:lnRef idx="0">
-              <a:scrgbClr r="0" g="0" b="0"/>
-            </a:lnRef>
-            <a:fillRef idx="0">
-              <a:scrgbClr r="0" g="0" b="0"/>
-            </a:fillRef>
-            <a:effectRef idx="0">
-              <a:scrgbClr r="0" g="0" b="0"/>
-            </a:effectRef>
-            <a:fontRef idx="minor">
-              <a:schemeClr val="dk1"/>
-            </a:fontRef>
-          </p:style>
-          <p:txBody>
-            <a:bodyPr rtlCol="0" anchor="ctr"/>
-            <a:lstStyle/>
-            <a:p>
-              <a:pPr algn="ctr"/>
-              <a:endParaRPr lang="en-US"/>
-            </a:p>
-          </p:txBody>
-        </p:sp>
-      </p:grpSp>
-      <p:grpSp>
-        <p:nvGrpSpPr>
-          <p:cNvPr id="35" name="Group 34">
-            <a:extLst>
-              <a:ext uri="{FF2B5EF4-FFF2-40B4-BE49-F238E27FC236}">
-                <a16:creationId xmlns:a16="http://schemas.microsoft.com/office/drawing/2014/main" id="{F985A505-5ACA-9E14-43B5-58A564CE814A}"/>
-              </a:ext>
-            </a:extLst>
-          </p:cNvPr>
-          <p:cNvGrpSpPr/>
-          <p:nvPr/>
-        </p:nvGrpSpPr>
-        <p:grpSpPr>
-          <a:xfrm>
-            <a:off x="2101497" y="263314"/>
-            <a:ext cx="1371600" cy="1371600"/>
-            <a:chOff x="427081" y="263129"/>
-            <a:chExt cx="1371600" cy="1371600"/>
-          </a:xfrm>
-        </p:grpSpPr>
-        <p:sp>
-          <p:nvSpPr>
-            <p:cNvPr id="36" name="Rectangle 35">
-              <a:extLst>
-                <a:ext uri="{FF2B5EF4-FFF2-40B4-BE49-F238E27FC236}">
-                  <a16:creationId xmlns:a16="http://schemas.microsoft.com/office/drawing/2014/main" id="{09D05DF3-DD40-1AEB-7D57-D5E4C724C096}"/>
-                </a:ext>
-              </a:extLst>
-            </p:cNvPr>
-            <p:cNvSpPr/>
-            <p:nvPr/>
-          </p:nvSpPr>
-          <p:spPr>
-            <a:xfrm>
-              <a:off x="427081" y="263129"/>
-              <a:ext cx="1371600" cy="1371600"/>
-            </a:xfrm>
-            <a:prstGeom prst="rect">
-              <a:avLst/>
-            </a:prstGeom>
-            <a:noFill/>
-            <a:ln w="76200">
-              <a:solidFill>
-                <a:schemeClr val="tx1"/>
-              </a:solidFill>
-            </a:ln>
-          </p:spPr>
-          <p:style>
-            <a:lnRef idx="2">
-              <a:schemeClr val="accent1">
-                <a:shade val="50000"/>
-              </a:schemeClr>
-            </a:lnRef>
-            <a:fillRef idx="1">
-              <a:schemeClr val="accent1"/>
-            </a:fillRef>
-            <a:effectRef idx="0">
-              <a:schemeClr val="accent1"/>
-            </a:effectRef>
-            <a:fontRef idx="minor">
-              <a:schemeClr val="lt1"/>
-            </a:fontRef>
-          </p:style>
-          <p:txBody>
-            <a:bodyPr rtlCol="0" anchor="ctr"/>
-            <a:lstStyle/>
-            <a:p>
-              <a:pPr algn="ctr"/>
-              <a:endParaRPr lang="en-US"/>
-            </a:p>
-          </p:txBody>
-        </p:sp>
-        <p:sp>
-          <p:nvSpPr>
-            <p:cNvPr id="37" name="Plaque 36">
-              <a:extLst>
-                <a:ext uri="{FF2B5EF4-FFF2-40B4-BE49-F238E27FC236}">
-                  <a16:creationId xmlns:a16="http://schemas.microsoft.com/office/drawing/2014/main" id="{7D3FD1FF-3D3C-99F2-F927-A664EB88A6A5}"/>
-                </a:ext>
-              </a:extLst>
-            </p:cNvPr>
-            <p:cNvSpPr/>
-            <p:nvPr/>
-          </p:nvSpPr>
-          <p:spPr>
-            <a:xfrm>
-              <a:off x="573033" y="478473"/>
-              <a:ext cx="1097280" cy="1097280"/>
-            </a:xfrm>
-            <a:prstGeom prst="plaque">
-              <a:avLst/>
-            </a:prstGeom>
-            <a:noFill/>
-            <a:ln w="38100" cap="flat" cmpd="sng" algn="ctr">
-              <a:solidFill>
-                <a:schemeClr val="dk1"/>
-              </a:solidFill>
-              <a:prstDash val="solid"/>
-              <a:round/>
-              <a:headEnd type="none" w="med" len="med"/>
-              <a:tailEnd type="none" w="med" len="med"/>
-            </a:ln>
-          </p:spPr>
-          <p:style>
-            <a:lnRef idx="0">
-              <a:scrgbClr r="0" g="0" b="0"/>
-            </a:lnRef>
-            <a:fillRef idx="0">
-              <a:scrgbClr r="0" g="0" b="0"/>
-            </a:fillRef>
-            <a:effectRef idx="0">
-              <a:scrgbClr r="0" g="0" b="0"/>
-            </a:effectRef>
-            <a:fontRef idx="minor">
-              <a:schemeClr val="dk1"/>
-            </a:fontRef>
-          </p:style>
-          <p:txBody>
-            <a:bodyPr rtlCol="0" anchor="ctr"/>
-            <a:lstStyle/>
-            <a:p>
-              <a:pPr algn="ctr"/>
-              <a:endParaRPr lang="en-US"/>
-            </a:p>
-          </p:txBody>
-        </p:sp>
-      </p:grpSp>
-      <p:grpSp>
-        <p:nvGrpSpPr>
-          <p:cNvPr id="19" name="Group 18">
-            <a:extLst>
-              <a:ext uri="{FF2B5EF4-FFF2-40B4-BE49-F238E27FC236}">
-                <a16:creationId xmlns:a16="http://schemas.microsoft.com/office/drawing/2014/main" id="{F0C5DF98-2563-86F8-66B2-5F473BDD317C}"/>
-              </a:ext>
-            </a:extLst>
-          </p:cNvPr>
-          <p:cNvGrpSpPr/>
-          <p:nvPr/>
-        </p:nvGrpSpPr>
-        <p:grpSpPr>
-          <a:xfrm rot="19097516">
-            <a:off x="2491495" y="580200"/>
-            <a:ext cx="577458" cy="886118"/>
-            <a:chOff x="5275383" y="2444259"/>
-            <a:chExt cx="2101363" cy="3224576"/>
-          </a:xfrm>
-        </p:grpSpPr>
-        <p:sp>
-          <p:nvSpPr>
-            <p:cNvPr id="12" name="Isosceles Triangle 11">
-              <a:extLst>
-                <a:ext uri="{FF2B5EF4-FFF2-40B4-BE49-F238E27FC236}">
-                  <a16:creationId xmlns:a16="http://schemas.microsoft.com/office/drawing/2014/main" id="{2EADF2A1-A28A-D893-3F15-3F31AEB87ECF}"/>
-                </a:ext>
-              </a:extLst>
-            </p:cNvPr>
-            <p:cNvSpPr/>
-            <p:nvPr/>
-          </p:nvSpPr>
-          <p:spPr>
-            <a:xfrm rot="10800000">
-              <a:off x="5653455" y="3974123"/>
-              <a:ext cx="1345223" cy="474785"/>
-            </a:xfrm>
-            <a:prstGeom prst="triangle">
-              <a:avLst/>
-            </a:prstGeom>
-            <a:ln w="28575"/>
-          </p:spPr>
-          <p:style>
-            <a:lnRef idx="2">
-              <a:schemeClr val="dk1"/>
-            </a:lnRef>
-            <a:fillRef idx="1">
-              <a:schemeClr val="lt1"/>
-            </a:fillRef>
-            <a:effectRef idx="0">
-              <a:schemeClr val="dk1"/>
-            </a:effectRef>
-            <a:fontRef idx="minor">
-              <a:schemeClr val="dk1"/>
-            </a:fontRef>
-          </p:style>
-          <p:txBody>
-            <a:bodyPr rtlCol="0" anchor="ctr"/>
-            <a:lstStyle/>
-            <a:p>
-              <a:pPr algn="ctr"/>
-              <a:endParaRPr lang="en-US"/>
-            </a:p>
-          </p:txBody>
-        </p:sp>
-        <p:sp>
-          <p:nvSpPr>
-            <p:cNvPr id="14" name="Isosceles Triangle 13">
-              <a:extLst>
-                <a:ext uri="{FF2B5EF4-FFF2-40B4-BE49-F238E27FC236}">
-                  <a16:creationId xmlns:a16="http://schemas.microsoft.com/office/drawing/2014/main" id="{87195922-C896-82C4-7731-A567421AC31C}"/>
-                </a:ext>
-              </a:extLst>
-            </p:cNvPr>
-            <p:cNvSpPr/>
-            <p:nvPr/>
-          </p:nvSpPr>
-          <p:spPr>
-            <a:xfrm>
-              <a:off x="5675434" y="2699238"/>
-              <a:ext cx="219808" cy="1274885"/>
-            </a:xfrm>
-            <a:prstGeom prst="triangle">
-              <a:avLst/>
-            </a:prstGeom>
-          </p:spPr>
-          <p:style>
-            <a:lnRef idx="2">
-              <a:schemeClr val="dk1">
-                <a:shade val="50000"/>
-              </a:schemeClr>
-            </a:lnRef>
-            <a:fillRef idx="1">
-              <a:schemeClr val="dk1"/>
-            </a:fillRef>
-            <a:effectRef idx="0">
-              <a:schemeClr val="dk1"/>
-            </a:effectRef>
-            <a:fontRef idx="minor">
-              <a:schemeClr val="lt1"/>
-            </a:fontRef>
-          </p:style>
-          <p:txBody>
-            <a:bodyPr rtlCol="0" anchor="ctr"/>
-            <a:lstStyle/>
-            <a:p>
-              <a:pPr algn="ctr"/>
-              <a:endParaRPr lang="en-US"/>
-            </a:p>
-          </p:txBody>
-        </p:sp>
-        <p:sp>
-          <p:nvSpPr>
-            <p:cNvPr id="55" name="Isosceles Triangle 54">
-              <a:extLst>
-                <a:ext uri="{FF2B5EF4-FFF2-40B4-BE49-F238E27FC236}">
-                  <a16:creationId xmlns:a16="http://schemas.microsoft.com/office/drawing/2014/main" id="{73506609-2BD0-91A1-05EF-31098DDB94BC}"/>
-                </a:ext>
-              </a:extLst>
-            </p:cNvPr>
-            <p:cNvSpPr/>
-            <p:nvPr/>
-          </p:nvSpPr>
-          <p:spPr>
-            <a:xfrm>
-              <a:off x="6778870" y="2699237"/>
-              <a:ext cx="219808" cy="1274885"/>
-            </a:xfrm>
-            <a:prstGeom prst="triangle">
-              <a:avLst/>
-            </a:prstGeom>
-          </p:spPr>
-          <p:style>
-            <a:lnRef idx="2">
-              <a:schemeClr val="dk1">
-                <a:shade val="50000"/>
-              </a:schemeClr>
-            </a:lnRef>
-            <a:fillRef idx="1">
-              <a:schemeClr val="dk1"/>
-            </a:fillRef>
-            <a:effectRef idx="0">
-              <a:schemeClr val="dk1"/>
-            </a:effectRef>
-            <a:fontRef idx="minor">
-              <a:schemeClr val="lt1"/>
-            </a:fontRef>
-          </p:style>
-          <p:txBody>
-            <a:bodyPr rtlCol="0" anchor="ctr"/>
-            <a:lstStyle/>
-            <a:p>
-              <a:pPr algn="ctr"/>
-              <a:endParaRPr lang="en-US"/>
-            </a:p>
-          </p:txBody>
-        </p:sp>
-        <p:sp>
-          <p:nvSpPr>
-            <p:cNvPr id="56" name="Isosceles Triangle 55">
-              <a:extLst>
-                <a:ext uri="{FF2B5EF4-FFF2-40B4-BE49-F238E27FC236}">
-                  <a16:creationId xmlns:a16="http://schemas.microsoft.com/office/drawing/2014/main" id="{C30E4588-E89B-61F1-12DA-7A3ED2B4D301}"/>
-                </a:ext>
-              </a:extLst>
-            </p:cNvPr>
-            <p:cNvSpPr/>
-            <p:nvPr/>
-          </p:nvSpPr>
-          <p:spPr>
-            <a:xfrm>
-              <a:off x="6216162" y="2444259"/>
-              <a:ext cx="219808" cy="1529863"/>
-            </a:xfrm>
-            <a:prstGeom prst="triangle">
-              <a:avLst/>
-            </a:prstGeom>
-          </p:spPr>
-          <p:style>
-            <a:lnRef idx="2">
-              <a:schemeClr val="dk1"/>
-            </a:lnRef>
-            <a:fillRef idx="1">
-              <a:schemeClr val="lt1"/>
-            </a:fillRef>
-            <a:effectRef idx="0">
-              <a:schemeClr val="dk1"/>
-            </a:effectRef>
-            <a:fontRef idx="minor">
-              <a:schemeClr val="dk1"/>
-            </a:fontRef>
-          </p:style>
-          <p:txBody>
-            <a:bodyPr rtlCol="0" anchor="ctr"/>
-            <a:lstStyle/>
-            <a:p>
-              <a:pPr algn="ctr"/>
-              <a:endParaRPr lang="en-US"/>
-            </a:p>
-          </p:txBody>
-        </p:sp>
-        <p:sp>
-          <p:nvSpPr>
-            <p:cNvPr id="60" name="Moon 59">
-              <a:extLst>
-                <a:ext uri="{FF2B5EF4-FFF2-40B4-BE49-F238E27FC236}">
-                  <a16:creationId xmlns:a16="http://schemas.microsoft.com/office/drawing/2014/main" id="{87A7BA59-A2B6-709C-00C8-16832E3531D0}"/>
-                </a:ext>
-              </a:extLst>
-            </p:cNvPr>
-            <p:cNvSpPr/>
-            <p:nvPr/>
-          </p:nvSpPr>
-          <p:spPr>
-            <a:xfrm rot="5400000">
-              <a:off x="6060099" y="4769824"/>
-              <a:ext cx="531929" cy="1266094"/>
-            </a:xfrm>
-            <a:prstGeom prst="moon">
-              <a:avLst>
-                <a:gd name="adj" fmla="val 38235"/>
-              </a:avLst>
-            </a:prstGeom>
-          </p:spPr>
-          <p:style>
-            <a:lnRef idx="2">
-              <a:schemeClr val="dk1"/>
-            </a:lnRef>
-            <a:fillRef idx="1">
-              <a:schemeClr val="lt1"/>
-            </a:fillRef>
-            <a:effectRef idx="0">
-              <a:schemeClr val="dk1"/>
-            </a:effectRef>
-            <a:fontRef idx="minor">
-              <a:schemeClr val="dk1"/>
-            </a:fontRef>
-          </p:style>
-          <p:txBody>
-            <a:bodyPr rtlCol="0" anchor="ctr"/>
-            <a:lstStyle/>
-            <a:p>
-              <a:pPr algn="ctr"/>
-              <a:endParaRPr lang="en-US"/>
-            </a:p>
-          </p:txBody>
-        </p:sp>
-        <p:sp>
-          <p:nvSpPr>
-            <p:cNvPr id="17" name="Isosceles Triangle 16">
-              <a:extLst>
-                <a:ext uri="{FF2B5EF4-FFF2-40B4-BE49-F238E27FC236}">
-                  <a16:creationId xmlns:a16="http://schemas.microsoft.com/office/drawing/2014/main" id="{ECBE0F47-3EA0-620C-2D86-AF5078632349}"/>
-                </a:ext>
-              </a:extLst>
-            </p:cNvPr>
-            <p:cNvSpPr/>
-            <p:nvPr/>
-          </p:nvSpPr>
-          <p:spPr>
-            <a:xfrm rot="10800000">
-              <a:off x="6000749" y="4211516"/>
-              <a:ext cx="650633" cy="1424349"/>
-            </a:xfrm>
-            <a:prstGeom prst="triangle">
-              <a:avLst/>
-            </a:prstGeom>
-          </p:spPr>
-          <p:style>
-            <a:lnRef idx="2">
-              <a:schemeClr val="dk1">
-                <a:shade val="50000"/>
-              </a:schemeClr>
-            </a:lnRef>
-            <a:fillRef idx="1">
-              <a:schemeClr val="dk1"/>
-            </a:fillRef>
-            <a:effectRef idx="0">
-              <a:schemeClr val="dk1"/>
-            </a:effectRef>
-            <a:fontRef idx="minor">
-              <a:schemeClr val="lt1"/>
-            </a:fontRef>
-          </p:style>
-          <p:txBody>
-            <a:bodyPr rtlCol="0" anchor="ctr"/>
-            <a:lstStyle/>
-            <a:p>
-              <a:pPr algn="ctr"/>
-              <a:endParaRPr lang="en-US"/>
-            </a:p>
-          </p:txBody>
-        </p:sp>
-        <p:sp>
-          <p:nvSpPr>
-            <p:cNvPr id="18" name="Moon 17">
-              <a:extLst>
-                <a:ext uri="{FF2B5EF4-FFF2-40B4-BE49-F238E27FC236}">
-                  <a16:creationId xmlns:a16="http://schemas.microsoft.com/office/drawing/2014/main" id="{FD6EA14C-83A3-27CE-AD16-7D3EF805E5B4}"/>
-                </a:ext>
-              </a:extLst>
-            </p:cNvPr>
-            <p:cNvSpPr/>
-            <p:nvPr/>
-          </p:nvSpPr>
-          <p:spPr>
-            <a:xfrm rot="5400000">
-              <a:off x="6027126" y="3697166"/>
-              <a:ext cx="597877" cy="2101363"/>
-            </a:xfrm>
-            <a:prstGeom prst="moon">
-              <a:avLst/>
-            </a:prstGeom>
-          </p:spPr>
-          <p:style>
-            <a:lnRef idx="2">
-              <a:schemeClr val="dk1">
-                <a:shade val="50000"/>
-              </a:schemeClr>
-            </a:lnRef>
-            <a:fillRef idx="1">
-              <a:schemeClr val="dk1"/>
-            </a:fillRef>
-            <a:effectRef idx="0">
-              <a:schemeClr val="dk1"/>
-            </a:effectRef>
-            <a:fontRef idx="minor">
-              <a:schemeClr val="lt1"/>
-            </a:fontRef>
-          </p:style>
-          <p:txBody>
-            <a:bodyPr rtlCol="0" anchor="ctr"/>
-            <a:lstStyle/>
-            <a:p>
-              <a:pPr algn="ctr"/>
-              <a:endParaRPr lang="en-US"/>
-            </a:p>
-          </p:txBody>
-        </p:sp>
-      </p:grpSp>
-      <p:grpSp>
-        <p:nvGrpSpPr>
-          <p:cNvPr id="16" name="Group 15">
-            <a:extLst>
-              <a:ext uri="{FF2B5EF4-FFF2-40B4-BE49-F238E27FC236}">
-                <a16:creationId xmlns:a16="http://schemas.microsoft.com/office/drawing/2014/main" id="{A1D3B18F-B55F-510A-D360-9835F96D4351}"/>
-              </a:ext>
-            </a:extLst>
-          </p:cNvPr>
-          <p:cNvGrpSpPr/>
-          <p:nvPr/>
-        </p:nvGrpSpPr>
-        <p:grpSpPr>
-          <a:xfrm rot="19005849">
-            <a:off x="3984197" y="812911"/>
-            <a:ext cx="1093057" cy="584571"/>
-            <a:chOff x="5276797" y="2347914"/>
-            <a:chExt cx="3125698" cy="1671636"/>
-          </a:xfrm>
-        </p:grpSpPr>
-        <p:grpSp>
-          <p:nvGrpSpPr>
-            <p:cNvPr id="4" name="Group 3">
-              <a:extLst>
-                <a:ext uri="{FF2B5EF4-FFF2-40B4-BE49-F238E27FC236}">
-                  <a16:creationId xmlns:a16="http://schemas.microsoft.com/office/drawing/2014/main" id="{64A3D72A-C1FB-E845-CA4F-BC69C16F3127}"/>
-                </a:ext>
-              </a:extLst>
-            </p:cNvPr>
-            <p:cNvGrpSpPr/>
-            <p:nvPr/>
-          </p:nvGrpSpPr>
-          <p:grpSpPr>
-            <a:xfrm>
-              <a:off x="5276797" y="2537857"/>
-              <a:ext cx="3125698" cy="1481693"/>
-              <a:chOff x="5791718" y="2234167"/>
-              <a:chExt cx="2790776" cy="1322929"/>
-            </a:xfrm>
-          </p:grpSpPr>
-          <p:sp>
-            <p:nvSpPr>
-              <p:cNvPr id="21" name="Moon 20">
-                <a:extLst>
-                  <a:ext uri="{FF2B5EF4-FFF2-40B4-BE49-F238E27FC236}">
-                    <a16:creationId xmlns:a16="http://schemas.microsoft.com/office/drawing/2014/main" id="{E205A88C-A617-A10F-64E8-ACB267143627}"/>
-                  </a:ext>
-                </a:extLst>
-              </p:cNvPr>
-              <p:cNvSpPr/>
-              <p:nvPr/>
-            </p:nvSpPr>
-            <p:spPr>
-              <a:xfrm rot="16200000" flipV="1">
-                <a:off x="6751867" y="1274018"/>
-                <a:ext cx="870477" cy="2790776"/>
-              </a:xfrm>
-              <a:prstGeom prst="moon">
-                <a:avLst/>
-              </a:prstGeom>
-            </p:spPr>
-            <p:style>
-              <a:lnRef idx="2">
-                <a:schemeClr val="dk1">
-                  <a:shade val="50000"/>
-                </a:schemeClr>
-              </a:lnRef>
-              <a:fillRef idx="1">
-                <a:schemeClr val="dk1"/>
-              </a:fillRef>
-              <a:effectRef idx="0">
-                <a:schemeClr val="dk1"/>
-              </a:effectRef>
-              <a:fontRef idx="minor">
-                <a:schemeClr val="lt1"/>
-              </a:fontRef>
-            </p:style>
-            <p:txBody>
-              <a:bodyPr rtlCol="0" anchor="ctr"/>
-              <a:lstStyle/>
-              <a:p>
-                <a:pPr algn="ctr"/>
-                <a:endParaRPr lang="en-US"/>
-              </a:p>
-            </p:txBody>
-          </p:sp>
-          <p:sp>
-            <p:nvSpPr>
-              <p:cNvPr id="68" name="Moon 67">
-                <a:extLst>
-                  <a:ext uri="{FF2B5EF4-FFF2-40B4-BE49-F238E27FC236}">
-                    <a16:creationId xmlns:a16="http://schemas.microsoft.com/office/drawing/2014/main" id="{958D179A-FCB2-1FAD-E919-831449E3CB87}"/>
-                  </a:ext>
-                </a:extLst>
-              </p:cNvPr>
-              <p:cNvSpPr/>
-              <p:nvPr/>
-            </p:nvSpPr>
-            <p:spPr>
-              <a:xfrm rot="16200000" flipV="1">
-                <a:off x="6921280" y="2626996"/>
-                <a:ext cx="531649" cy="1328550"/>
-              </a:xfrm>
-              <a:prstGeom prst="moon">
-                <a:avLst>
-                  <a:gd name="adj" fmla="val 58361"/>
-                </a:avLst>
-              </a:prstGeom>
-            </p:spPr>
-            <p:style>
-              <a:lnRef idx="2">
-                <a:schemeClr val="dk1">
-                  <a:shade val="50000"/>
-                </a:schemeClr>
-              </a:lnRef>
-              <a:fillRef idx="1">
-                <a:schemeClr val="dk1"/>
-              </a:fillRef>
-              <a:effectRef idx="0">
-                <a:schemeClr val="dk1"/>
-              </a:effectRef>
-              <a:fontRef idx="minor">
-                <a:schemeClr val="lt1"/>
-              </a:fontRef>
-            </p:style>
-            <p:txBody>
-              <a:bodyPr rtlCol="0" anchor="ctr"/>
-              <a:lstStyle/>
-              <a:p>
-                <a:pPr algn="ctr"/>
-                <a:endParaRPr lang="en-US"/>
-              </a:p>
-            </p:txBody>
-          </p:sp>
-          <p:sp>
-            <p:nvSpPr>
-              <p:cNvPr id="20" name="Trapezoid 19">
-                <a:extLst>
-                  <a:ext uri="{FF2B5EF4-FFF2-40B4-BE49-F238E27FC236}">
-                    <a16:creationId xmlns:a16="http://schemas.microsoft.com/office/drawing/2014/main" id="{B4208B20-59E1-0795-4DAE-F3477F5F5F55}"/>
-                  </a:ext>
-                </a:extLst>
-              </p:cNvPr>
-              <p:cNvSpPr/>
-              <p:nvPr/>
-            </p:nvSpPr>
-            <p:spPr>
-              <a:xfrm rot="10800000">
-                <a:off x="6813018" y="2514600"/>
-                <a:ext cx="748172" cy="1042496"/>
-              </a:xfrm>
-              <a:prstGeom prst="trapezoid">
-                <a:avLst/>
-              </a:prstGeom>
-            </p:spPr>
-            <p:style>
-              <a:lnRef idx="2">
-                <a:schemeClr val="dk1">
-                  <a:shade val="50000"/>
-                </a:schemeClr>
-              </a:lnRef>
-              <a:fillRef idx="1">
-                <a:schemeClr val="dk1"/>
-              </a:fillRef>
-              <a:effectRef idx="0">
-                <a:schemeClr val="dk1"/>
-              </a:effectRef>
-              <a:fontRef idx="minor">
-                <a:schemeClr val="lt1"/>
-              </a:fontRef>
-            </p:style>
-            <p:txBody>
-              <a:bodyPr rtlCol="0" anchor="ctr"/>
-              <a:lstStyle/>
-              <a:p>
-                <a:pPr algn="ctr"/>
-                <a:endParaRPr lang="en-US"/>
-              </a:p>
-            </p:txBody>
-          </p:sp>
-          <p:sp>
-            <p:nvSpPr>
-              <p:cNvPr id="22" name="Oval 21">
-                <a:extLst>
-                  <a:ext uri="{FF2B5EF4-FFF2-40B4-BE49-F238E27FC236}">
-                    <a16:creationId xmlns:a16="http://schemas.microsoft.com/office/drawing/2014/main" id="{187BCEC2-D005-ACA5-364B-F687BF13FC73}"/>
-                  </a:ext>
-                </a:extLst>
-              </p:cNvPr>
-              <p:cNvSpPr/>
-              <p:nvPr/>
-            </p:nvSpPr>
-            <p:spPr>
-              <a:xfrm>
-                <a:off x="6455154" y="2644988"/>
-                <a:ext cx="351316" cy="351316"/>
-              </a:xfrm>
-              <a:prstGeom prst="ellipse">
-                <a:avLst/>
-              </a:prstGeom>
-            </p:spPr>
-            <p:style>
-              <a:lnRef idx="2">
-                <a:schemeClr val="dk1"/>
-              </a:lnRef>
-              <a:fillRef idx="1">
-                <a:schemeClr val="lt1"/>
-              </a:fillRef>
-              <a:effectRef idx="0">
-                <a:schemeClr val="dk1"/>
-              </a:effectRef>
-              <a:fontRef idx="minor">
-                <a:schemeClr val="dk1"/>
-              </a:fontRef>
-            </p:style>
-            <p:txBody>
-              <a:bodyPr rtlCol="0" anchor="ctr"/>
-              <a:lstStyle/>
-              <a:p>
-                <a:pPr algn="ctr"/>
-                <a:endParaRPr lang="en-US"/>
-              </a:p>
-            </p:txBody>
-          </p:sp>
-          <p:sp>
-            <p:nvSpPr>
-              <p:cNvPr id="69" name="Oval 68">
-                <a:extLst>
-                  <a:ext uri="{FF2B5EF4-FFF2-40B4-BE49-F238E27FC236}">
-                    <a16:creationId xmlns:a16="http://schemas.microsoft.com/office/drawing/2014/main" id="{D3CCCD81-AEAF-1D91-1A8A-CA5702635CD6}"/>
-                  </a:ext>
-                </a:extLst>
-              </p:cNvPr>
-              <p:cNvSpPr/>
-              <p:nvPr/>
-            </p:nvSpPr>
-            <p:spPr>
-              <a:xfrm>
-                <a:off x="7037449" y="2674398"/>
-                <a:ext cx="292763" cy="292763"/>
-              </a:xfrm>
-              <a:prstGeom prst="ellipse">
-                <a:avLst/>
-              </a:prstGeom>
-            </p:spPr>
-            <p:style>
-              <a:lnRef idx="2">
-                <a:schemeClr val="dk1"/>
-              </a:lnRef>
-              <a:fillRef idx="1">
-                <a:schemeClr val="lt1"/>
-              </a:fillRef>
-              <a:effectRef idx="0">
-                <a:schemeClr val="dk1"/>
-              </a:effectRef>
-              <a:fontRef idx="minor">
-                <a:schemeClr val="dk1"/>
-              </a:fontRef>
-            </p:style>
-            <p:txBody>
-              <a:bodyPr rtlCol="0" anchor="ctr"/>
-              <a:lstStyle/>
-              <a:p>
-                <a:pPr algn="ctr"/>
-                <a:endParaRPr lang="en-US"/>
-              </a:p>
-            </p:txBody>
-          </p:sp>
-          <p:sp>
-            <p:nvSpPr>
-              <p:cNvPr id="70" name="Oval 69">
-                <a:extLst>
-                  <a:ext uri="{FF2B5EF4-FFF2-40B4-BE49-F238E27FC236}">
-                    <a16:creationId xmlns:a16="http://schemas.microsoft.com/office/drawing/2014/main" id="{16D2DBA2-511B-A238-4803-4A57DC71210F}"/>
-                  </a:ext>
-                </a:extLst>
-              </p:cNvPr>
-              <p:cNvSpPr/>
-              <p:nvPr/>
-            </p:nvSpPr>
-            <p:spPr>
-              <a:xfrm>
-                <a:off x="7066725" y="2986895"/>
-                <a:ext cx="234210" cy="234211"/>
-              </a:xfrm>
-              <a:prstGeom prst="ellipse">
-                <a:avLst/>
-              </a:prstGeom>
-            </p:spPr>
-            <p:style>
-              <a:lnRef idx="2">
-                <a:schemeClr val="dk1"/>
-              </a:lnRef>
-              <a:fillRef idx="1">
-                <a:schemeClr val="lt1"/>
-              </a:fillRef>
-              <a:effectRef idx="0">
-                <a:schemeClr val="dk1"/>
-              </a:effectRef>
-              <a:fontRef idx="minor">
-                <a:schemeClr val="dk1"/>
-              </a:fontRef>
-            </p:style>
-            <p:txBody>
-              <a:bodyPr rtlCol="0" anchor="ctr"/>
-              <a:lstStyle/>
-              <a:p>
-                <a:pPr algn="ctr"/>
-                <a:endParaRPr lang="en-US"/>
-              </a:p>
-            </p:txBody>
-          </p:sp>
-          <p:sp>
-            <p:nvSpPr>
-              <p:cNvPr id="71" name="Oval 70">
-                <a:extLst>
-                  <a:ext uri="{FF2B5EF4-FFF2-40B4-BE49-F238E27FC236}">
-                    <a16:creationId xmlns:a16="http://schemas.microsoft.com/office/drawing/2014/main" id="{4D1130D1-136D-1917-4080-6CCCED424C44}"/>
-                  </a:ext>
-                </a:extLst>
-              </p:cNvPr>
-              <p:cNvSpPr/>
-              <p:nvPr/>
-            </p:nvSpPr>
-            <p:spPr>
-              <a:xfrm>
-                <a:off x="7096001" y="3257681"/>
-                <a:ext cx="175658" cy="175658"/>
-              </a:xfrm>
-              <a:prstGeom prst="ellipse">
-                <a:avLst/>
-              </a:prstGeom>
-            </p:spPr>
-            <p:style>
-              <a:lnRef idx="2">
-                <a:schemeClr val="dk1"/>
-              </a:lnRef>
-              <a:fillRef idx="1">
-                <a:schemeClr val="lt1"/>
-              </a:fillRef>
-              <a:effectRef idx="0">
-                <a:schemeClr val="dk1"/>
-              </a:effectRef>
-              <a:fontRef idx="minor">
-                <a:schemeClr val="dk1"/>
-              </a:fontRef>
-            </p:style>
-            <p:txBody>
-              <a:bodyPr rtlCol="0" anchor="ctr"/>
-              <a:lstStyle/>
-              <a:p>
-                <a:pPr algn="ctr"/>
-                <a:endParaRPr lang="en-US"/>
-              </a:p>
-            </p:txBody>
-          </p:sp>
-          <p:sp>
-            <p:nvSpPr>
-              <p:cNvPr id="104" name="Oval 103">
-                <a:extLst>
-                  <a:ext uri="{FF2B5EF4-FFF2-40B4-BE49-F238E27FC236}">
-                    <a16:creationId xmlns:a16="http://schemas.microsoft.com/office/drawing/2014/main" id="{225D134E-7EA4-43D6-73BF-7173F57A21FC}"/>
-                  </a:ext>
-                </a:extLst>
-              </p:cNvPr>
-              <p:cNvSpPr/>
-              <p:nvPr/>
-            </p:nvSpPr>
-            <p:spPr>
-              <a:xfrm>
-                <a:off x="7583919" y="2649938"/>
-                <a:ext cx="351316" cy="351316"/>
-              </a:xfrm>
-              <a:prstGeom prst="ellipse">
-                <a:avLst/>
-              </a:prstGeom>
-            </p:spPr>
-            <p:style>
-              <a:lnRef idx="2">
-                <a:schemeClr val="dk1"/>
-              </a:lnRef>
-              <a:fillRef idx="1">
-                <a:schemeClr val="lt1"/>
-              </a:fillRef>
-              <a:effectRef idx="0">
-                <a:schemeClr val="dk1"/>
-              </a:effectRef>
-              <a:fontRef idx="minor">
-                <a:schemeClr val="dk1"/>
-              </a:fontRef>
-            </p:style>
-            <p:txBody>
-              <a:bodyPr rtlCol="0" anchor="ctr"/>
-              <a:lstStyle/>
-              <a:p>
-                <a:pPr algn="ctr"/>
-                <a:endParaRPr lang="en-US"/>
-              </a:p>
-            </p:txBody>
-          </p:sp>
-          <p:sp>
-            <p:nvSpPr>
-              <p:cNvPr id="105" name="Oval 104">
-                <a:extLst>
-                  <a:ext uri="{FF2B5EF4-FFF2-40B4-BE49-F238E27FC236}">
-                    <a16:creationId xmlns:a16="http://schemas.microsoft.com/office/drawing/2014/main" id="{70353D4C-8A11-547C-8248-7DD7E846C955}"/>
-                  </a:ext>
-                </a:extLst>
-              </p:cNvPr>
-              <p:cNvSpPr/>
-              <p:nvPr/>
-            </p:nvSpPr>
-            <p:spPr>
-              <a:xfrm>
-                <a:off x="6163678" y="2575651"/>
-                <a:ext cx="292763" cy="292763"/>
-              </a:xfrm>
-              <a:prstGeom prst="ellipse">
-                <a:avLst/>
-              </a:prstGeom>
-            </p:spPr>
-            <p:style>
-              <a:lnRef idx="2">
-                <a:schemeClr val="dk1"/>
-              </a:lnRef>
-              <a:fillRef idx="1">
-                <a:schemeClr val="lt1"/>
-              </a:fillRef>
-              <a:effectRef idx="0">
-                <a:schemeClr val="dk1"/>
-              </a:effectRef>
-              <a:fontRef idx="minor">
-                <a:schemeClr val="dk1"/>
-              </a:fontRef>
-            </p:style>
-            <p:txBody>
-              <a:bodyPr rtlCol="0" anchor="ctr"/>
-              <a:lstStyle/>
-              <a:p>
-                <a:pPr algn="ctr"/>
-                <a:endParaRPr lang="en-US"/>
-              </a:p>
-            </p:txBody>
-          </p:sp>
-          <p:sp>
-            <p:nvSpPr>
-              <p:cNvPr id="106" name="Oval 105">
-                <a:extLst>
-                  <a:ext uri="{FF2B5EF4-FFF2-40B4-BE49-F238E27FC236}">
-                    <a16:creationId xmlns:a16="http://schemas.microsoft.com/office/drawing/2014/main" id="{155E048C-97ED-95D2-A25C-D7A0E19E69D4}"/>
-                  </a:ext>
-                </a:extLst>
-              </p:cNvPr>
-              <p:cNvSpPr/>
-              <p:nvPr/>
-            </p:nvSpPr>
-            <p:spPr>
-              <a:xfrm>
-                <a:off x="7935235" y="2563649"/>
-                <a:ext cx="292763" cy="292763"/>
-              </a:xfrm>
-              <a:prstGeom prst="ellipse">
-                <a:avLst/>
-              </a:prstGeom>
-            </p:spPr>
-            <p:style>
-              <a:lnRef idx="2">
-                <a:schemeClr val="dk1"/>
-              </a:lnRef>
-              <a:fillRef idx="1">
-                <a:schemeClr val="lt1"/>
-              </a:fillRef>
-              <a:effectRef idx="0">
-                <a:schemeClr val="dk1"/>
-              </a:effectRef>
-              <a:fontRef idx="minor">
-                <a:schemeClr val="dk1"/>
-              </a:fontRef>
-            </p:style>
-            <p:txBody>
-              <a:bodyPr rtlCol="0" anchor="ctr"/>
-              <a:lstStyle/>
-              <a:p>
-                <a:pPr algn="ctr"/>
-                <a:endParaRPr lang="en-US"/>
-              </a:p>
-            </p:txBody>
-          </p:sp>
-          <p:sp>
-            <p:nvSpPr>
-              <p:cNvPr id="107" name="Oval 106">
-                <a:extLst>
-                  <a:ext uri="{FF2B5EF4-FFF2-40B4-BE49-F238E27FC236}">
-                    <a16:creationId xmlns:a16="http://schemas.microsoft.com/office/drawing/2014/main" id="{D996B20C-E2A7-3659-5DE5-5232B5F70C69}"/>
-                  </a:ext>
-                </a:extLst>
-              </p:cNvPr>
-              <p:cNvSpPr/>
-              <p:nvPr/>
-            </p:nvSpPr>
-            <p:spPr>
-              <a:xfrm>
-                <a:off x="5993280" y="2489527"/>
-                <a:ext cx="175658" cy="175658"/>
-              </a:xfrm>
-              <a:prstGeom prst="ellipse">
-                <a:avLst/>
-              </a:prstGeom>
-            </p:spPr>
-            <p:style>
-              <a:lnRef idx="2">
-                <a:schemeClr val="dk1"/>
-              </a:lnRef>
-              <a:fillRef idx="1">
-                <a:schemeClr val="lt1"/>
-              </a:fillRef>
-              <a:effectRef idx="0">
-                <a:schemeClr val="dk1"/>
-              </a:effectRef>
-              <a:fontRef idx="minor">
-                <a:schemeClr val="dk1"/>
-              </a:fontRef>
-            </p:style>
-            <p:txBody>
-              <a:bodyPr rtlCol="0" anchor="ctr"/>
-              <a:lstStyle/>
-              <a:p>
-                <a:pPr algn="ctr"/>
-                <a:endParaRPr lang="en-US"/>
-              </a:p>
-            </p:txBody>
-          </p:sp>
-          <p:sp>
-            <p:nvSpPr>
-              <p:cNvPr id="108" name="Oval 107">
-                <a:extLst>
-                  <a:ext uri="{FF2B5EF4-FFF2-40B4-BE49-F238E27FC236}">
-                    <a16:creationId xmlns:a16="http://schemas.microsoft.com/office/drawing/2014/main" id="{706AE15F-F527-E84D-5B68-B8FE5032C602}"/>
-                  </a:ext>
-                </a:extLst>
-              </p:cNvPr>
-              <p:cNvSpPr/>
-              <p:nvPr/>
-            </p:nvSpPr>
-            <p:spPr>
-              <a:xfrm>
-                <a:off x="8203057" y="2470977"/>
-                <a:ext cx="175658" cy="175658"/>
-              </a:xfrm>
-              <a:prstGeom prst="ellipse">
-                <a:avLst/>
-              </a:prstGeom>
-            </p:spPr>
-            <p:style>
-              <a:lnRef idx="2">
-                <a:schemeClr val="dk1"/>
-              </a:lnRef>
-              <a:fillRef idx="1">
-                <a:schemeClr val="lt1"/>
-              </a:fillRef>
-              <a:effectRef idx="0">
-                <a:schemeClr val="dk1"/>
-              </a:effectRef>
-              <a:fontRef idx="minor">
-                <a:schemeClr val="dk1"/>
-              </a:fontRef>
-            </p:style>
-            <p:txBody>
-              <a:bodyPr rtlCol="0" anchor="ctr"/>
-              <a:lstStyle/>
-              <a:p>
-                <a:pPr algn="ctr"/>
-                <a:endParaRPr lang="en-US"/>
-              </a:p>
-            </p:txBody>
-          </p:sp>
-        </p:grpSp>
-        <p:sp>
-          <p:nvSpPr>
-            <p:cNvPr id="8" name="Moon 7">
-              <a:extLst>
-                <a:ext uri="{FF2B5EF4-FFF2-40B4-BE49-F238E27FC236}">
-                  <a16:creationId xmlns:a16="http://schemas.microsoft.com/office/drawing/2014/main" id="{7680059E-BFAA-99D8-6844-0827F9CE5DEB}"/>
-                </a:ext>
-              </a:extLst>
-            </p:cNvPr>
-            <p:cNvSpPr/>
-            <p:nvPr/>
-          </p:nvSpPr>
-          <p:spPr>
-            <a:xfrm rot="16200000">
-              <a:off x="6578719" y="2215251"/>
-              <a:ext cx="528871" cy="794198"/>
-            </a:xfrm>
-            <a:prstGeom prst="moon">
-              <a:avLst>
-                <a:gd name="adj" fmla="val 37993"/>
-              </a:avLst>
-            </a:prstGeom>
-          </p:spPr>
-          <p:style>
-            <a:lnRef idx="2">
-              <a:schemeClr val="dk1">
-                <a:shade val="50000"/>
-              </a:schemeClr>
-            </a:lnRef>
-            <a:fillRef idx="1">
-              <a:schemeClr val="dk1"/>
-            </a:fillRef>
-            <a:effectRef idx="0">
-              <a:schemeClr val="dk1"/>
-            </a:effectRef>
-            <a:fontRef idx="minor">
-              <a:schemeClr val="lt1"/>
-            </a:fontRef>
-          </p:style>
-          <p:txBody>
-            <a:bodyPr rtlCol="0" anchor="ctr"/>
-            <a:lstStyle/>
-            <a:p>
-              <a:pPr algn="ctr"/>
-              <a:endParaRPr lang="en-US"/>
-            </a:p>
-          </p:txBody>
-        </p:sp>
-      </p:grpSp>
-    </p:spTree>
-    <p:extLst>
-      <p:ext uri="{BB962C8B-B14F-4D97-AF65-F5344CB8AC3E}">
-        <p14:creationId xmlns:p14="http://schemas.microsoft.com/office/powerpoint/2010/main" val="444076323"/>
-      </p:ext>
-    </p:extLst>
-  </p:cSld>
-  <p:clrMapOvr>
-    <a:masterClrMapping/>
-  </p:clrMapOvr>
-</p:sld>
-</file>
-
-<file path=ppt/slides/slide3.xml><?xml version="1.0" encoding="utf-8"?>
 <p:sld xmlns:a="http://schemas.openxmlformats.org/drawingml/2006/main" xmlns:r="http://schemas.openxmlformats.org/officeDocument/2006/relationships" xmlns:p="http://schemas.openxmlformats.org/presentationml/2006/main">
   <p:cSld>
     <p:spTree>
@@ -24867,6 +23460,4528 @@
 </p:sld>
 </file>
 
+<file path=ppt/slides/slide3.xml><?xml version="1.0" encoding="utf-8"?>
+<p:sld xmlns:a="http://schemas.openxmlformats.org/drawingml/2006/main" xmlns:r="http://schemas.openxmlformats.org/officeDocument/2006/relationships" xmlns:p="http://schemas.openxmlformats.org/presentationml/2006/main">
+  <p:cSld>
+    <p:spTree>
+      <p:nvGrpSpPr>
+        <p:cNvPr id="1" name=""/>
+        <p:cNvGrpSpPr/>
+        <p:nvPr/>
+      </p:nvGrpSpPr>
+      <p:grpSpPr>
+        <a:xfrm>
+          <a:off x="0" y="0"/>
+          <a:ext cx="0" cy="0"/>
+          <a:chOff x="0" y="0"/>
+          <a:chExt cx="0" cy="0"/>
+        </a:xfrm>
+      </p:grpSpPr>
+      <p:pic>
+        <p:nvPicPr>
+          <p:cNvPr id="1032" name="Picture 8" descr="Beetle Silhouette&quot; Images – Browse 9 Stock Photos, Vectors, and Video |  Adobe Stock">
+            <a:extLst>
+              <a:ext uri="{FF2B5EF4-FFF2-40B4-BE49-F238E27FC236}">
+                <a16:creationId xmlns:a16="http://schemas.microsoft.com/office/drawing/2014/main" id="{7E11DBBF-E115-B3A8-B714-1CC45749C75C}"/>
+              </a:ext>
+            </a:extLst>
+          </p:cNvPr>
+          <p:cNvPicPr>
+            <a:picLocks noChangeAspect="1" noChangeArrowheads="1"/>
+          </p:cNvPicPr>
+          <p:nvPr/>
+        </p:nvPicPr>
+        <p:blipFill rotWithShape="1">
+          <a:blip r:embed="rId2">
+            <a:extLst>
+              <a:ext uri="{28A0092B-C50C-407E-A947-70E740481C1C}">
+                <a14:useLocalDpi xmlns:a14="http://schemas.microsoft.com/office/drawing/2010/main" val="0"/>
+              </a:ext>
+            </a:extLst>
+          </a:blip>
+          <a:srcRect l="3575" t="25279" r="3187" b="21918"/>
+          <a:stretch/>
+        </p:blipFill>
+        <p:spPr bwMode="auto">
+          <a:xfrm flipH="1">
+            <a:off x="9594835" y="1059141"/>
+            <a:ext cx="966593" cy="547404"/>
+          </a:xfrm>
+          <a:prstGeom prst="rect">
+            <a:avLst/>
+          </a:prstGeom>
+          <a:noFill/>
+          <a:extLst>
+            <a:ext uri="{909E8E84-426E-40DD-AFC4-6F175D3DCCD1}">
+              <a14:hiddenFill xmlns:a14="http://schemas.microsoft.com/office/drawing/2010/main">
+                <a:solidFill>
+                  <a:srgbClr val="FFFFFF"/>
+                </a:solidFill>
+              </a14:hiddenFill>
+            </a:ext>
+          </a:extLst>
+        </p:spPr>
+      </p:pic>
+      <p:grpSp>
+        <p:nvGrpSpPr>
+          <p:cNvPr id="63" name="Group 62">
+            <a:extLst>
+              <a:ext uri="{FF2B5EF4-FFF2-40B4-BE49-F238E27FC236}">
+                <a16:creationId xmlns:a16="http://schemas.microsoft.com/office/drawing/2014/main" id="{A8F5BCCA-1321-17B2-8D48-E5ADA812E19F}"/>
+              </a:ext>
+            </a:extLst>
+          </p:cNvPr>
+          <p:cNvGrpSpPr/>
+          <p:nvPr/>
+        </p:nvGrpSpPr>
+        <p:grpSpPr>
+          <a:xfrm>
+            <a:off x="6632482" y="814349"/>
+            <a:ext cx="746410" cy="865944"/>
+            <a:chOff x="5532169" y="2563056"/>
+            <a:chExt cx="746410" cy="865944"/>
+          </a:xfrm>
+        </p:grpSpPr>
+        <p:pic>
+          <p:nvPicPr>
+            <p:cNvPr id="60" name="Picture 59">
+              <a:extLst>
+                <a:ext uri="{FF2B5EF4-FFF2-40B4-BE49-F238E27FC236}">
+                  <a16:creationId xmlns:a16="http://schemas.microsoft.com/office/drawing/2014/main" id="{6D893962-239E-894F-4760-5B911B5DCD1A}"/>
+                </a:ext>
+              </a:extLst>
+            </p:cNvPr>
+            <p:cNvPicPr>
+              <a:picLocks noChangeAspect="1"/>
+            </p:cNvPicPr>
+            <p:nvPr/>
+          </p:nvPicPr>
+          <p:blipFill>
+            <a:blip r:embed="rId3"/>
+            <a:stretch>
+              <a:fillRect/>
+            </a:stretch>
+          </p:blipFill>
+          <p:spPr>
+            <a:xfrm>
+              <a:off x="5830784" y="2697473"/>
+              <a:ext cx="447795" cy="731527"/>
+            </a:xfrm>
+            <a:prstGeom prst="rect">
+              <a:avLst/>
+            </a:prstGeom>
+          </p:spPr>
+        </p:pic>
+        <p:pic>
+          <p:nvPicPr>
+            <p:cNvPr id="68" name="Picture 67">
+              <a:extLst>
+                <a:ext uri="{FF2B5EF4-FFF2-40B4-BE49-F238E27FC236}">
+                  <a16:creationId xmlns:a16="http://schemas.microsoft.com/office/drawing/2014/main" id="{9EEEC0E0-3D61-A22E-D4C5-AEB777DF4829}"/>
+                </a:ext>
+              </a:extLst>
+            </p:cNvPr>
+            <p:cNvPicPr>
+              <a:picLocks noChangeAspect="1"/>
+            </p:cNvPicPr>
+            <p:nvPr/>
+          </p:nvPicPr>
+          <p:blipFill>
+            <a:blip r:embed="rId4"/>
+            <a:stretch>
+              <a:fillRect/>
+            </a:stretch>
+          </p:blipFill>
+          <p:spPr>
+            <a:xfrm>
+              <a:off x="5532169" y="2563056"/>
+              <a:ext cx="277209" cy="415814"/>
+            </a:xfrm>
+            <a:prstGeom prst="rect">
+              <a:avLst/>
+            </a:prstGeom>
+          </p:spPr>
+        </p:pic>
+      </p:grpSp>
+      <p:grpSp>
+        <p:nvGrpSpPr>
+          <p:cNvPr id="62" name="Group 61">
+            <a:extLst>
+              <a:ext uri="{FF2B5EF4-FFF2-40B4-BE49-F238E27FC236}">
+                <a16:creationId xmlns:a16="http://schemas.microsoft.com/office/drawing/2014/main" id="{4055C052-6031-AF7B-FAB5-77365C0D352B}"/>
+              </a:ext>
+            </a:extLst>
+          </p:cNvPr>
+          <p:cNvGrpSpPr/>
+          <p:nvPr/>
+        </p:nvGrpSpPr>
+        <p:grpSpPr>
+          <a:xfrm>
+            <a:off x="5074748" y="804586"/>
+            <a:ext cx="815556" cy="897213"/>
+            <a:chOff x="3387960" y="2733126"/>
+            <a:chExt cx="1981651" cy="2180061"/>
+          </a:xfrm>
+        </p:grpSpPr>
+        <p:pic>
+          <p:nvPicPr>
+            <p:cNvPr id="58" name="Picture 57">
+              <a:extLst>
+                <a:ext uri="{FF2B5EF4-FFF2-40B4-BE49-F238E27FC236}">
+                  <a16:creationId xmlns:a16="http://schemas.microsoft.com/office/drawing/2014/main" id="{83E25006-2554-056F-D304-41AC0C470692}"/>
+                </a:ext>
+              </a:extLst>
+            </p:cNvPr>
+            <p:cNvPicPr>
+              <a:picLocks noChangeAspect="1"/>
+            </p:cNvPicPr>
+            <p:nvPr/>
+          </p:nvPicPr>
+          <p:blipFill>
+            <a:blip r:embed="rId5"/>
+            <a:stretch>
+              <a:fillRect/>
+            </a:stretch>
+          </p:blipFill>
+          <p:spPr>
+            <a:xfrm>
+              <a:off x="3387960" y="3287236"/>
+              <a:ext cx="1507907" cy="1625951"/>
+            </a:xfrm>
+            <a:prstGeom prst="rect">
+              <a:avLst/>
+            </a:prstGeom>
+          </p:spPr>
+        </p:pic>
+        <p:sp>
+          <p:nvSpPr>
+            <p:cNvPr id="61" name="Oval 60">
+              <a:extLst>
+                <a:ext uri="{FF2B5EF4-FFF2-40B4-BE49-F238E27FC236}">
+                  <a16:creationId xmlns:a16="http://schemas.microsoft.com/office/drawing/2014/main" id="{6B874961-EEBA-58BD-A038-5A7794DCD4C4}"/>
+                </a:ext>
+              </a:extLst>
+            </p:cNvPr>
+            <p:cNvSpPr/>
+            <p:nvPr/>
+          </p:nvSpPr>
+          <p:spPr>
+            <a:xfrm>
+              <a:off x="4836194" y="2733126"/>
+              <a:ext cx="342900" cy="342900"/>
+            </a:xfrm>
+            <a:prstGeom prst="ellipse">
+              <a:avLst/>
+            </a:prstGeom>
+          </p:spPr>
+          <p:style>
+            <a:lnRef idx="2">
+              <a:schemeClr val="dk1">
+                <a:shade val="50000"/>
+              </a:schemeClr>
+            </a:lnRef>
+            <a:fillRef idx="1">
+              <a:schemeClr val="dk1"/>
+            </a:fillRef>
+            <a:effectRef idx="0">
+              <a:schemeClr val="dk1"/>
+            </a:effectRef>
+            <a:fontRef idx="minor">
+              <a:schemeClr val="lt1"/>
+            </a:fontRef>
+          </p:style>
+          <p:txBody>
+            <a:bodyPr rtlCol="0" anchor="ctr"/>
+            <a:lstStyle/>
+            <a:p>
+              <a:pPr algn="ctr"/>
+              <a:endParaRPr lang="en-US"/>
+            </a:p>
+          </p:txBody>
+        </p:sp>
+        <p:sp>
+          <p:nvSpPr>
+            <p:cNvPr id="65" name="Oval 64">
+              <a:extLst>
+                <a:ext uri="{FF2B5EF4-FFF2-40B4-BE49-F238E27FC236}">
+                  <a16:creationId xmlns:a16="http://schemas.microsoft.com/office/drawing/2014/main" id="{A67FB4D4-6D4F-1934-C84D-AF37AFD52781}"/>
+                </a:ext>
+              </a:extLst>
+            </p:cNvPr>
+            <p:cNvSpPr/>
+            <p:nvPr/>
+          </p:nvSpPr>
+          <p:spPr>
+            <a:xfrm>
+              <a:off x="4645677" y="3057366"/>
+              <a:ext cx="342900" cy="342900"/>
+            </a:xfrm>
+            <a:prstGeom prst="ellipse">
+              <a:avLst/>
+            </a:prstGeom>
+          </p:spPr>
+          <p:style>
+            <a:lnRef idx="2">
+              <a:schemeClr val="dk1">
+                <a:shade val="50000"/>
+              </a:schemeClr>
+            </a:lnRef>
+            <a:fillRef idx="1">
+              <a:schemeClr val="dk1"/>
+            </a:fillRef>
+            <a:effectRef idx="0">
+              <a:schemeClr val="dk1"/>
+            </a:effectRef>
+            <a:fontRef idx="minor">
+              <a:schemeClr val="lt1"/>
+            </a:fontRef>
+          </p:style>
+          <p:txBody>
+            <a:bodyPr rtlCol="0" anchor="ctr"/>
+            <a:lstStyle/>
+            <a:p>
+              <a:pPr algn="ctr"/>
+              <a:endParaRPr lang="en-US"/>
+            </a:p>
+          </p:txBody>
+        </p:sp>
+        <p:sp>
+          <p:nvSpPr>
+            <p:cNvPr id="66" name="Oval 65">
+              <a:extLst>
+                <a:ext uri="{FF2B5EF4-FFF2-40B4-BE49-F238E27FC236}">
+                  <a16:creationId xmlns:a16="http://schemas.microsoft.com/office/drawing/2014/main" id="{70DC49B5-30B1-CBD7-66FA-33E959D57698}"/>
+                </a:ext>
+              </a:extLst>
+            </p:cNvPr>
+            <p:cNvSpPr/>
+            <p:nvPr/>
+          </p:nvSpPr>
+          <p:spPr>
+            <a:xfrm>
+              <a:off x="5026711" y="3066696"/>
+              <a:ext cx="342900" cy="342900"/>
+            </a:xfrm>
+            <a:prstGeom prst="ellipse">
+              <a:avLst/>
+            </a:prstGeom>
+          </p:spPr>
+          <p:style>
+            <a:lnRef idx="2">
+              <a:schemeClr val="dk1">
+                <a:shade val="50000"/>
+              </a:schemeClr>
+            </a:lnRef>
+            <a:fillRef idx="1">
+              <a:schemeClr val="dk1"/>
+            </a:fillRef>
+            <a:effectRef idx="0">
+              <a:schemeClr val="dk1"/>
+            </a:effectRef>
+            <a:fontRef idx="minor">
+              <a:schemeClr val="lt1"/>
+            </a:fontRef>
+          </p:style>
+          <p:txBody>
+            <a:bodyPr rtlCol="0" anchor="ctr"/>
+            <a:lstStyle/>
+            <a:p>
+              <a:pPr algn="ctr"/>
+              <a:endParaRPr lang="en-US"/>
+            </a:p>
+          </p:txBody>
+        </p:sp>
+      </p:grpSp>
+      <p:sp>
+        <p:nvSpPr>
+          <p:cNvPr id="2" name="TextBox 1">
+            <a:extLst>
+              <a:ext uri="{FF2B5EF4-FFF2-40B4-BE49-F238E27FC236}">
+                <a16:creationId xmlns:a16="http://schemas.microsoft.com/office/drawing/2014/main" id="{883CF1D5-9B6E-59A8-3970-F2618E7433B2}"/>
+              </a:ext>
+            </a:extLst>
+          </p:cNvPr>
+          <p:cNvSpPr txBox="1"/>
+          <p:nvPr/>
+        </p:nvSpPr>
+        <p:spPr>
+          <a:xfrm>
+            <a:off x="188462" y="114301"/>
+            <a:ext cx="1142300" cy="369332"/>
+          </a:xfrm>
+          <a:prstGeom prst="rect">
+            <a:avLst/>
+          </a:prstGeom>
+          <a:noFill/>
+        </p:spPr>
+        <p:txBody>
+          <a:bodyPr wrap="none" rtlCol="0">
+            <a:spAutoFit/>
+          </a:bodyPr>
+          <a:lstStyle/>
+          <a:p>
+            <a:r>
+              <a:rPr lang="en-US" altLang="zh-CN" dirty="0" err="1"/>
+              <a:t>Mutaterra</a:t>
+            </a:r>
+            <a:endParaRPr lang="en-US" dirty="0"/>
+          </a:p>
+        </p:txBody>
+      </p:sp>
+      <p:grpSp>
+        <p:nvGrpSpPr>
+          <p:cNvPr id="9" name="Group 8">
+            <a:extLst>
+              <a:ext uri="{FF2B5EF4-FFF2-40B4-BE49-F238E27FC236}">
+                <a16:creationId xmlns:a16="http://schemas.microsoft.com/office/drawing/2014/main" id="{F19B0BF4-19E8-C879-4D6D-A416F5751D15}"/>
+              </a:ext>
+            </a:extLst>
+          </p:cNvPr>
+          <p:cNvGrpSpPr/>
+          <p:nvPr/>
+        </p:nvGrpSpPr>
+        <p:grpSpPr>
+          <a:xfrm>
+            <a:off x="213377" y="483633"/>
+            <a:ext cx="1371600" cy="1371600"/>
+            <a:chOff x="213377" y="483633"/>
+            <a:chExt cx="1371600" cy="1371600"/>
+          </a:xfrm>
+        </p:grpSpPr>
+        <p:sp>
+          <p:nvSpPr>
+            <p:cNvPr id="5" name="Rectangle 4">
+              <a:extLst>
+                <a:ext uri="{FF2B5EF4-FFF2-40B4-BE49-F238E27FC236}">
+                  <a16:creationId xmlns:a16="http://schemas.microsoft.com/office/drawing/2014/main" id="{A2BE1DAE-2A68-120A-49AB-87612D1C00D1}"/>
+                </a:ext>
+              </a:extLst>
+            </p:cNvPr>
+            <p:cNvSpPr/>
+            <p:nvPr/>
+          </p:nvSpPr>
+          <p:spPr>
+            <a:xfrm>
+              <a:off x="213377" y="483633"/>
+              <a:ext cx="1371600" cy="1371600"/>
+            </a:xfrm>
+            <a:prstGeom prst="rect">
+              <a:avLst/>
+            </a:prstGeom>
+            <a:noFill/>
+            <a:ln w="76200">
+              <a:solidFill>
+                <a:schemeClr val="tx1"/>
+              </a:solidFill>
+            </a:ln>
+          </p:spPr>
+          <p:style>
+            <a:lnRef idx="2">
+              <a:schemeClr val="accent1">
+                <a:shade val="50000"/>
+              </a:schemeClr>
+            </a:lnRef>
+            <a:fillRef idx="1">
+              <a:schemeClr val="accent1"/>
+            </a:fillRef>
+            <a:effectRef idx="0">
+              <a:schemeClr val="accent1"/>
+            </a:effectRef>
+            <a:fontRef idx="minor">
+              <a:schemeClr val="lt1"/>
+            </a:fontRef>
+          </p:style>
+          <p:txBody>
+            <a:bodyPr rtlCol="0" anchor="ctr"/>
+            <a:lstStyle/>
+            <a:p>
+              <a:pPr algn="ctr"/>
+              <a:endParaRPr lang="en-US"/>
+            </a:p>
+          </p:txBody>
+        </p:sp>
+        <p:sp>
+          <p:nvSpPr>
+            <p:cNvPr id="8" name="Hexagon 7">
+              <a:extLst>
+                <a:ext uri="{FF2B5EF4-FFF2-40B4-BE49-F238E27FC236}">
+                  <a16:creationId xmlns:a16="http://schemas.microsoft.com/office/drawing/2014/main" id="{DC0EB717-9046-65D9-CEA9-DB3069A0EFEE}"/>
+                </a:ext>
+              </a:extLst>
+            </p:cNvPr>
+            <p:cNvSpPr/>
+            <p:nvPr/>
+          </p:nvSpPr>
+          <p:spPr>
+            <a:xfrm>
+              <a:off x="304817" y="699533"/>
+              <a:ext cx="1188720" cy="1097280"/>
+            </a:xfrm>
+            <a:prstGeom prst="hexagon">
+              <a:avLst/>
+            </a:prstGeom>
+            <a:noFill/>
+            <a:ln w="38100" cap="flat" cmpd="sng" algn="ctr">
+              <a:solidFill>
+                <a:schemeClr val="dk1"/>
+              </a:solidFill>
+              <a:prstDash val="solid"/>
+              <a:round/>
+              <a:headEnd type="none" w="med" len="med"/>
+              <a:tailEnd type="none" w="med" len="med"/>
+            </a:ln>
+          </p:spPr>
+          <p:style>
+            <a:lnRef idx="0">
+              <a:scrgbClr r="0" g="0" b="0"/>
+            </a:lnRef>
+            <a:fillRef idx="0">
+              <a:scrgbClr r="0" g="0" b="0"/>
+            </a:fillRef>
+            <a:effectRef idx="0">
+              <a:scrgbClr r="0" g="0" b="0"/>
+            </a:effectRef>
+            <a:fontRef idx="minor">
+              <a:schemeClr val="dk1"/>
+            </a:fontRef>
+          </p:style>
+          <p:txBody>
+            <a:bodyPr rtlCol="0" anchor="ctr"/>
+            <a:lstStyle/>
+            <a:p>
+              <a:pPr algn="ctr"/>
+              <a:endParaRPr lang="en-US"/>
+            </a:p>
+          </p:txBody>
+        </p:sp>
+      </p:grpSp>
+      <p:grpSp>
+        <p:nvGrpSpPr>
+          <p:cNvPr id="10" name="Group 9">
+            <a:extLst>
+              <a:ext uri="{FF2B5EF4-FFF2-40B4-BE49-F238E27FC236}">
+                <a16:creationId xmlns:a16="http://schemas.microsoft.com/office/drawing/2014/main" id="{42596BC6-BB1C-3C2C-91B2-9292B8E22E13}"/>
+              </a:ext>
+            </a:extLst>
+          </p:cNvPr>
+          <p:cNvGrpSpPr/>
+          <p:nvPr/>
+        </p:nvGrpSpPr>
+        <p:grpSpPr>
+          <a:xfrm>
+            <a:off x="1743727" y="483633"/>
+            <a:ext cx="1371600" cy="1371600"/>
+            <a:chOff x="213377" y="483633"/>
+            <a:chExt cx="1371600" cy="1371600"/>
+          </a:xfrm>
+        </p:grpSpPr>
+        <p:sp>
+          <p:nvSpPr>
+            <p:cNvPr id="11" name="Rectangle 10">
+              <a:extLst>
+                <a:ext uri="{FF2B5EF4-FFF2-40B4-BE49-F238E27FC236}">
+                  <a16:creationId xmlns:a16="http://schemas.microsoft.com/office/drawing/2014/main" id="{27311E1B-1EBF-F137-4B07-6EF0E3D0CDD3}"/>
+                </a:ext>
+              </a:extLst>
+            </p:cNvPr>
+            <p:cNvSpPr/>
+            <p:nvPr/>
+          </p:nvSpPr>
+          <p:spPr>
+            <a:xfrm>
+              <a:off x="213377" y="483633"/>
+              <a:ext cx="1371600" cy="1371600"/>
+            </a:xfrm>
+            <a:prstGeom prst="rect">
+              <a:avLst/>
+            </a:prstGeom>
+            <a:noFill/>
+            <a:ln w="76200">
+              <a:solidFill>
+                <a:schemeClr val="tx1"/>
+              </a:solidFill>
+            </a:ln>
+          </p:spPr>
+          <p:style>
+            <a:lnRef idx="2">
+              <a:schemeClr val="accent1">
+                <a:shade val="50000"/>
+              </a:schemeClr>
+            </a:lnRef>
+            <a:fillRef idx="1">
+              <a:schemeClr val="accent1"/>
+            </a:fillRef>
+            <a:effectRef idx="0">
+              <a:schemeClr val="accent1"/>
+            </a:effectRef>
+            <a:fontRef idx="minor">
+              <a:schemeClr val="lt1"/>
+            </a:fontRef>
+          </p:style>
+          <p:txBody>
+            <a:bodyPr rtlCol="0" anchor="ctr"/>
+            <a:lstStyle/>
+            <a:p>
+              <a:pPr algn="ctr"/>
+              <a:endParaRPr lang="en-US"/>
+            </a:p>
+          </p:txBody>
+        </p:sp>
+        <p:sp>
+          <p:nvSpPr>
+            <p:cNvPr id="12" name="Hexagon 11">
+              <a:extLst>
+                <a:ext uri="{FF2B5EF4-FFF2-40B4-BE49-F238E27FC236}">
+                  <a16:creationId xmlns:a16="http://schemas.microsoft.com/office/drawing/2014/main" id="{CA49C3D3-9A14-61F1-4CC4-96315282D076}"/>
+                </a:ext>
+              </a:extLst>
+            </p:cNvPr>
+            <p:cNvSpPr/>
+            <p:nvPr/>
+          </p:nvSpPr>
+          <p:spPr>
+            <a:xfrm>
+              <a:off x="304817" y="699533"/>
+              <a:ext cx="1188720" cy="1097280"/>
+            </a:xfrm>
+            <a:prstGeom prst="hexagon">
+              <a:avLst/>
+            </a:prstGeom>
+            <a:noFill/>
+            <a:ln w="38100" cap="flat" cmpd="sng" algn="ctr">
+              <a:solidFill>
+                <a:schemeClr val="dk1"/>
+              </a:solidFill>
+              <a:prstDash val="solid"/>
+              <a:round/>
+              <a:headEnd type="none" w="med" len="med"/>
+              <a:tailEnd type="none" w="med" len="med"/>
+            </a:ln>
+          </p:spPr>
+          <p:style>
+            <a:lnRef idx="0">
+              <a:scrgbClr r="0" g="0" b="0"/>
+            </a:lnRef>
+            <a:fillRef idx="0">
+              <a:scrgbClr r="0" g="0" b="0"/>
+            </a:fillRef>
+            <a:effectRef idx="0">
+              <a:scrgbClr r="0" g="0" b="0"/>
+            </a:effectRef>
+            <a:fontRef idx="minor">
+              <a:schemeClr val="dk1"/>
+            </a:fontRef>
+          </p:style>
+          <p:txBody>
+            <a:bodyPr rtlCol="0" anchor="ctr"/>
+            <a:lstStyle/>
+            <a:p>
+              <a:pPr algn="ctr"/>
+              <a:endParaRPr lang="en-US"/>
+            </a:p>
+          </p:txBody>
+        </p:sp>
+      </p:grpSp>
+      <p:grpSp>
+        <p:nvGrpSpPr>
+          <p:cNvPr id="13" name="Group 12">
+            <a:extLst>
+              <a:ext uri="{FF2B5EF4-FFF2-40B4-BE49-F238E27FC236}">
+                <a16:creationId xmlns:a16="http://schemas.microsoft.com/office/drawing/2014/main" id="{87F9B4B5-3A46-CA8B-FF04-4158FE223532}"/>
+              </a:ext>
+            </a:extLst>
+          </p:cNvPr>
+          <p:cNvGrpSpPr/>
+          <p:nvPr/>
+        </p:nvGrpSpPr>
+        <p:grpSpPr>
+          <a:xfrm>
+            <a:off x="3274077" y="483633"/>
+            <a:ext cx="1371600" cy="1371600"/>
+            <a:chOff x="213377" y="483633"/>
+            <a:chExt cx="1371600" cy="1371600"/>
+          </a:xfrm>
+        </p:grpSpPr>
+        <p:sp>
+          <p:nvSpPr>
+            <p:cNvPr id="14" name="Rectangle 13">
+              <a:extLst>
+                <a:ext uri="{FF2B5EF4-FFF2-40B4-BE49-F238E27FC236}">
+                  <a16:creationId xmlns:a16="http://schemas.microsoft.com/office/drawing/2014/main" id="{D4098545-29A7-1D98-A1B0-F1B6FD0C6904}"/>
+                </a:ext>
+              </a:extLst>
+            </p:cNvPr>
+            <p:cNvSpPr/>
+            <p:nvPr/>
+          </p:nvSpPr>
+          <p:spPr>
+            <a:xfrm>
+              <a:off x="213377" y="483633"/>
+              <a:ext cx="1371600" cy="1371600"/>
+            </a:xfrm>
+            <a:prstGeom prst="rect">
+              <a:avLst/>
+            </a:prstGeom>
+            <a:noFill/>
+            <a:ln w="76200">
+              <a:solidFill>
+                <a:schemeClr val="tx1"/>
+              </a:solidFill>
+            </a:ln>
+          </p:spPr>
+          <p:style>
+            <a:lnRef idx="2">
+              <a:schemeClr val="accent1">
+                <a:shade val="50000"/>
+              </a:schemeClr>
+            </a:lnRef>
+            <a:fillRef idx="1">
+              <a:schemeClr val="accent1"/>
+            </a:fillRef>
+            <a:effectRef idx="0">
+              <a:schemeClr val="accent1"/>
+            </a:effectRef>
+            <a:fontRef idx="minor">
+              <a:schemeClr val="lt1"/>
+            </a:fontRef>
+          </p:style>
+          <p:txBody>
+            <a:bodyPr rtlCol="0" anchor="ctr"/>
+            <a:lstStyle/>
+            <a:p>
+              <a:pPr algn="ctr"/>
+              <a:endParaRPr lang="en-US"/>
+            </a:p>
+          </p:txBody>
+        </p:sp>
+        <p:sp>
+          <p:nvSpPr>
+            <p:cNvPr id="15" name="Hexagon 14">
+              <a:extLst>
+                <a:ext uri="{FF2B5EF4-FFF2-40B4-BE49-F238E27FC236}">
+                  <a16:creationId xmlns:a16="http://schemas.microsoft.com/office/drawing/2014/main" id="{8929EF91-32AB-B15F-AADA-D16710F49F1B}"/>
+                </a:ext>
+              </a:extLst>
+            </p:cNvPr>
+            <p:cNvSpPr/>
+            <p:nvPr/>
+          </p:nvSpPr>
+          <p:spPr>
+            <a:xfrm>
+              <a:off x="304817" y="699533"/>
+              <a:ext cx="1188720" cy="1097280"/>
+            </a:xfrm>
+            <a:prstGeom prst="hexagon">
+              <a:avLst/>
+            </a:prstGeom>
+            <a:noFill/>
+            <a:ln w="38100" cap="flat" cmpd="sng" algn="ctr">
+              <a:solidFill>
+                <a:schemeClr val="dk1"/>
+              </a:solidFill>
+              <a:prstDash val="solid"/>
+              <a:round/>
+              <a:headEnd type="none" w="med" len="med"/>
+              <a:tailEnd type="none" w="med" len="med"/>
+            </a:ln>
+          </p:spPr>
+          <p:style>
+            <a:lnRef idx="0">
+              <a:scrgbClr r="0" g="0" b="0"/>
+            </a:lnRef>
+            <a:fillRef idx="0">
+              <a:scrgbClr r="0" g="0" b="0"/>
+            </a:fillRef>
+            <a:effectRef idx="0">
+              <a:scrgbClr r="0" g="0" b="0"/>
+            </a:effectRef>
+            <a:fontRef idx="minor">
+              <a:schemeClr val="dk1"/>
+            </a:fontRef>
+          </p:style>
+          <p:txBody>
+            <a:bodyPr rtlCol="0" anchor="ctr"/>
+            <a:lstStyle/>
+            <a:p>
+              <a:pPr algn="ctr"/>
+              <a:endParaRPr lang="en-US"/>
+            </a:p>
+          </p:txBody>
+        </p:sp>
+      </p:grpSp>
+      <p:grpSp>
+        <p:nvGrpSpPr>
+          <p:cNvPr id="16" name="Group 15">
+            <a:extLst>
+              <a:ext uri="{FF2B5EF4-FFF2-40B4-BE49-F238E27FC236}">
+                <a16:creationId xmlns:a16="http://schemas.microsoft.com/office/drawing/2014/main" id="{F532885F-6F12-8135-4578-95EBA79C07C4}"/>
+              </a:ext>
+            </a:extLst>
+          </p:cNvPr>
+          <p:cNvGrpSpPr/>
+          <p:nvPr/>
+        </p:nvGrpSpPr>
+        <p:grpSpPr>
+          <a:xfrm>
+            <a:off x="4804427" y="483633"/>
+            <a:ext cx="1371600" cy="1371600"/>
+            <a:chOff x="213377" y="483633"/>
+            <a:chExt cx="1371600" cy="1371600"/>
+          </a:xfrm>
+        </p:grpSpPr>
+        <p:sp>
+          <p:nvSpPr>
+            <p:cNvPr id="17" name="Rectangle 16">
+              <a:extLst>
+                <a:ext uri="{FF2B5EF4-FFF2-40B4-BE49-F238E27FC236}">
+                  <a16:creationId xmlns:a16="http://schemas.microsoft.com/office/drawing/2014/main" id="{7D8A759F-3329-564A-1529-5C6458F3A20D}"/>
+                </a:ext>
+              </a:extLst>
+            </p:cNvPr>
+            <p:cNvSpPr/>
+            <p:nvPr/>
+          </p:nvSpPr>
+          <p:spPr>
+            <a:xfrm>
+              <a:off x="213377" y="483633"/>
+              <a:ext cx="1371600" cy="1371600"/>
+            </a:xfrm>
+            <a:prstGeom prst="rect">
+              <a:avLst/>
+            </a:prstGeom>
+            <a:noFill/>
+            <a:ln w="76200">
+              <a:solidFill>
+                <a:schemeClr val="tx1"/>
+              </a:solidFill>
+            </a:ln>
+          </p:spPr>
+          <p:style>
+            <a:lnRef idx="2">
+              <a:schemeClr val="accent1">
+                <a:shade val="50000"/>
+              </a:schemeClr>
+            </a:lnRef>
+            <a:fillRef idx="1">
+              <a:schemeClr val="accent1"/>
+            </a:fillRef>
+            <a:effectRef idx="0">
+              <a:schemeClr val="accent1"/>
+            </a:effectRef>
+            <a:fontRef idx="minor">
+              <a:schemeClr val="lt1"/>
+            </a:fontRef>
+          </p:style>
+          <p:txBody>
+            <a:bodyPr rtlCol="0" anchor="ctr"/>
+            <a:lstStyle/>
+            <a:p>
+              <a:pPr algn="ctr"/>
+              <a:endParaRPr lang="en-US"/>
+            </a:p>
+          </p:txBody>
+        </p:sp>
+        <p:sp>
+          <p:nvSpPr>
+            <p:cNvPr id="18" name="Hexagon 17">
+              <a:extLst>
+                <a:ext uri="{FF2B5EF4-FFF2-40B4-BE49-F238E27FC236}">
+                  <a16:creationId xmlns:a16="http://schemas.microsoft.com/office/drawing/2014/main" id="{B55E2159-7EE7-1155-4C5D-13DA2B3679FA}"/>
+                </a:ext>
+              </a:extLst>
+            </p:cNvPr>
+            <p:cNvSpPr/>
+            <p:nvPr/>
+          </p:nvSpPr>
+          <p:spPr>
+            <a:xfrm>
+              <a:off x="304817" y="699533"/>
+              <a:ext cx="1188720" cy="1097280"/>
+            </a:xfrm>
+            <a:prstGeom prst="hexagon">
+              <a:avLst/>
+            </a:prstGeom>
+            <a:noFill/>
+            <a:ln w="38100" cap="flat" cmpd="sng" algn="ctr">
+              <a:solidFill>
+                <a:schemeClr val="dk1"/>
+              </a:solidFill>
+              <a:prstDash val="solid"/>
+              <a:round/>
+              <a:headEnd type="none" w="med" len="med"/>
+              <a:tailEnd type="none" w="med" len="med"/>
+            </a:ln>
+          </p:spPr>
+          <p:style>
+            <a:lnRef idx="0">
+              <a:scrgbClr r="0" g="0" b="0"/>
+            </a:lnRef>
+            <a:fillRef idx="0">
+              <a:scrgbClr r="0" g="0" b="0"/>
+            </a:fillRef>
+            <a:effectRef idx="0">
+              <a:scrgbClr r="0" g="0" b="0"/>
+            </a:effectRef>
+            <a:fontRef idx="minor">
+              <a:schemeClr val="dk1"/>
+            </a:fontRef>
+          </p:style>
+          <p:txBody>
+            <a:bodyPr rtlCol="0" anchor="ctr"/>
+            <a:lstStyle/>
+            <a:p>
+              <a:pPr algn="ctr"/>
+              <a:endParaRPr lang="en-US"/>
+            </a:p>
+          </p:txBody>
+        </p:sp>
+      </p:grpSp>
+      <p:grpSp>
+        <p:nvGrpSpPr>
+          <p:cNvPr id="19" name="Group 18">
+            <a:extLst>
+              <a:ext uri="{FF2B5EF4-FFF2-40B4-BE49-F238E27FC236}">
+                <a16:creationId xmlns:a16="http://schemas.microsoft.com/office/drawing/2014/main" id="{8A7E3F6C-1164-6DFD-FED0-B249B3D9FA2A}"/>
+              </a:ext>
+            </a:extLst>
+          </p:cNvPr>
+          <p:cNvGrpSpPr/>
+          <p:nvPr/>
+        </p:nvGrpSpPr>
+        <p:grpSpPr>
+          <a:xfrm>
+            <a:off x="6334777" y="483633"/>
+            <a:ext cx="1371600" cy="1371600"/>
+            <a:chOff x="213377" y="483633"/>
+            <a:chExt cx="1371600" cy="1371600"/>
+          </a:xfrm>
+        </p:grpSpPr>
+        <p:sp>
+          <p:nvSpPr>
+            <p:cNvPr id="20" name="Rectangle 19">
+              <a:extLst>
+                <a:ext uri="{FF2B5EF4-FFF2-40B4-BE49-F238E27FC236}">
+                  <a16:creationId xmlns:a16="http://schemas.microsoft.com/office/drawing/2014/main" id="{72A14417-5DBD-176E-63C9-EEEA4B00B922}"/>
+                </a:ext>
+              </a:extLst>
+            </p:cNvPr>
+            <p:cNvSpPr/>
+            <p:nvPr/>
+          </p:nvSpPr>
+          <p:spPr>
+            <a:xfrm>
+              <a:off x="213377" y="483633"/>
+              <a:ext cx="1371600" cy="1371600"/>
+            </a:xfrm>
+            <a:prstGeom prst="rect">
+              <a:avLst/>
+            </a:prstGeom>
+            <a:noFill/>
+            <a:ln w="76200">
+              <a:solidFill>
+                <a:schemeClr val="tx1"/>
+              </a:solidFill>
+            </a:ln>
+          </p:spPr>
+          <p:style>
+            <a:lnRef idx="2">
+              <a:schemeClr val="accent1">
+                <a:shade val="50000"/>
+              </a:schemeClr>
+            </a:lnRef>
+            <a:fillRef idx="1">
+              <a:schemeClr val="accent1"/>
+            </a:fillRef>
+            <a:effectRef idx="0">
+              <a:schemeClr val="accent1"/>
+            </a:effectRef>
+            <a:fontRef idx="minor">
+              <a:schemeClr val="lt1"/>
+            </a:fontRef>
+          </p:style>
+          <p:txBody>
+            <a:bodyPr rtlCol="0" anchor="ctr"/>
+            <a:lstStyle/>
+            <a:p>
+              <a:pPr algn="ctr"/>
+              <a:endParaRPr lang="en-US"/>
+            </a:p>
+          </p:txBody>
+        </p:sp>
+        <p:sp>
+          <p:nvSpPr>
+            <p:cNvPr id="21" name="Hexagon 20">
+              <a:extLst>
+                <a:ext uri="{FF2B5EF4-FFF2-40B4-BE49-F238E27FC236}">
+                  <a16:creationId xmlns:a16="http://schemas.microsoft.com/office/drawing/2014/main" id="{B9288784-049B-2390-0241-5B6A0080F33F}"/>
+                </a:ext>
+              </a:extLst>
+            </p:cNvPr>
+            <p:cNvSpPr/>
+            <p:nvPr/>
+          </p:nvSpPr>
+          <p:spPr>
+            <a:xfrm>
+              <a:off x="304817" y="699533"/>
+              <a:ext cx="1188720" cy="1097280"/>
+            </a:xfrm>
+            <a:prstGeom prst="hexagon">
+              <a:avLst/>
+            </a:prstGeom>
+            <a:noFill/>
+            <a:ln w="38100" cap="flat" cmpd="sng" algn="ctr">
+              <a:solidFill>
+                <a:schemeClr val="dk1"/>
+              </a:solidFill>
+              <a:prstDash val="solid"/>
+              <a:round/>
+              <a:headEnd type="none" w="med" len="med"/>
+              <a:tailEnd type="none" w="med" len="med"/>
+            </a:ln>
+          </p:spPr>
+          <p:style>
+            <a:lnRef idx="0">
+              <a:scrgbClr r="0" g="0" b="0"/>
+            </a:lnRef>
+            <a:fillRef idx="0">
+              <a:scrgbClr r="0" g="0" b="0"/>
+            </a:fillRef>
+            <a:effectRef idx="0">
+              <a:scrgbClr r="0" g="0" b="0"/>
+            </a:effectRef>
+            <a:fontRef idx="minor">
+              <a:schemeClr val="dk1"/>
+            </a:fontRef>
+          </p:style>
+          <p:txBody>
+            <a:bodyPr rtlCol="0" anchor="ctr"/>
+            <a:lstStyle/>
+            <a:p>
+              <a:pPr algn="ctr"/>
+              <a:endParaRPr lang="en-US"/>
+            </a:p>
+          </p:txBody>
+        </p:sp>
+      </p:grpSp>
+      <p:grpSp>
+        <p:nvGrpSpPr>
+          <p:cNvPr id="22" name="Group 21">
+            <a:extLst>
+              <a:ext uri="{FF2B5EF4-FFF2-40B4-BE49-F238E27FC236}">
+                <a16:creationId xmlns:a16="http://schemas.microsoft.com/office/drawing/2014/main" id="{4F6E6F18-611A-8FF4-F8E2-D018A9EE5E71}"/>
+              </a:ext>
+            </a:extLst>
+          </p:cNvPr>
+          <p:cNvGrpSpPr/>
+          <p:nvPr/>
+        </p:nvGrpSpPr>
+        <p:grpSpPr>
+          <a:xfrm>
+            <a:off x="7865127" y="483633"/>
+            <a:ext cx="1371600" cy="1371600"/>
+            <a:chOff x="213377" y="483633"/>
+            <a:chExt cx="1371600" cy="1371600"/>
+          </a:xfrm>
+        </p:grpSpPr>
+        <p:sp>
+          <p:nvSpPr>
+            <p:cNvPr id="23" name="Rectangle 22">
+              <a:extLst>
+                <a:ext uri="{FF2B5EF4-FFF2-40B4-BE49-F238E27FC236}">
+                  <a16:creationId xmlns:a16="http://schemas.microsoft.com/office/drawing/2014/main" id="{6FD26E32-5C78-0F39-81DF-639669EDE935}"/>
+                </a:ext>
+              </a:extLst>
+            </p:cNvPr>
+            <p:cNvSpPr/>
+            <p:nvPr/>
+          </p:nvSpPr>
+          <p:spPr>
+            <a:xfrm>
+              <a:off x="213377" y="483633"/>
+              <a:ext cx="1371600" cy="1371600"/>
+            </a:xfrm>
+            <a:prstGeom prst="rect">
+              <a:avLst/>
+            </a:prstGeom>
+            <a:noFill/>
+            <a:ln w="76200">
+              <a:solidFill>
+                <a:schemeClr val="tx1"/>
+              </a:solidFill>
+            </a:ln>
+          </p:spPr>
+          <p:style>
+            <a:lnRef idx="2">
+              <a:schemeClr val="accent1">
+                <a:shade val="50000"/>
+              </a:schemeClr>
+            </a:lnRef>
+            <a:fillRef idx="1">
+              <a:schemeClr val="accent1"/>
+            </a:fillRef>
+            <a:effectRef idx="0">
+              <a:schemeClr val="accent1"/>
+            </a:effectRef>
+            <a:fontRef idx="minor">
+              <a:schemeClr val="lt1"/>
+            </a:fontRef>
+          </p:style>
+          <p:txBody>
+            <a:bodyPr rtlCol="0" anchor="ctr"/>
+            <a:lstStyle/>
+            <a:p>
+              <a:pPr algn="ctr"/>
+              <a:endParaRPr lang="en-US"/>
+            </a:p>
+          </p:txBody>
+        </p:sp>
+        <p:sp>
+          <p:nvSpPr>
+            <p:cNvPr id="24" name="Hexagon 23">
+              <a:extLst>
+                <a:ext uri="{FF2B5EF4-FFF2-40B4-BE49-F238E27FC236}">
+                  <a16:creationId xmlns:a16="http://schemas.microsoft.com/office/drawing/2014/main" id="{60A7C5B4-D3E2-CD9B-882D-65CEEBB146E4}"/>
+                </a:ext>
+              </a:extLst>
+            </p:cNvPr>
+            <p:cNvSpPr/>
+            <p:nvPr/>
+          </p:nvSpPr>
+          <p:spPr>
+            <a:xfrm>
+              <a:off x="304817" y="699533"/>
+              <a:ext cx="1188720" cy="1097280"/>
+            </a:xfrm>
+            <a:prstGeom prst="hexagon">
+              <a:avLst/>
+            </a:prstGeom>
+            <a:noFill/>
+            <a:ln w="38100" cap="flat" cmpd="sng" algn="ctr">
+              <a:solidFill>
+                <a:schemeClr val="dk1"/>
+              </a:solidFill>
+              <a:prstDash val="solid"/>
+              <a:round/>
+              <a:headEnd type="none" w="med" len="med"/>
+              <a:tailEnd type="none" w="med" len="med"/>
+            </a:ln>
+          </p:spPr>
+          <p:style>
+            <a:lnRef idx="0">
+              <a:scrgbClr r="0" g="0" b="0"/>
+            </a:lnRef>
+            <a:fillRef idx="0">
+              <a:scrgbClr r="0" g="0" b="0"/>
+            </a:fillRef>
+            <a:effectRef idx="0">
+              <a:scrgbClr r="0" g="0" b="0"/>
+            </a:effectRef>
+            <a:fontRef idx="minor">
+              <a:schemeClr val="dk1"/>
+            </a:fontRef>
+          </p:style>
+          <p:txBody>
+            <a:bodyPr rtlCol="0" anchor="ctr"/>
+            <a:lstStyle/>
+            <a:p>
+              <a:pPr algn="ctr"/>
+              <a:endParaRPr lang="en-US"/>
+            </a:p>
+          </p:txBody>
+        </p:sp>
+      </p:grpSp>
+      <p:grpSp>
+        <p:nvGrpSpPr>
+          <p:cNvPr id="30" name="Group 29">
+            <a:extLst>
+              <a:ext uri="{FF2B5EF4-FFF2-40B4-BE49-F238E27FC236}">
+                <a16:creationId xmlns:a16="http://schemas.microsoft.com/office/drawing/2014/main" id="{7F3B74B4-4720-FB4D-FA80-052B0C6589C6}"/>
+              </a:ext>
+            </a:extLst>
+          </p:cNvPr>
+          <p:cNvGrpSpPr/>
+          <p:nvPr/>
+        </p:nvGrpSpPr>
+        <p:grpSpPr>
+          <a:xfrm>
+            <a:off x="391173" y="1003985"/>
+            <a:ext cx="932183" cy="488375"/>
+            <a:chOff x="3486187" y="2794899"/>
+            <a:chExt cx="2243797" cy="940162"/>
+          </a:xfrm>
+        </p:grpSpPr>
+        <p:sp>
+          <p:nvSpPr>
+            <p:cNvPr id="25" name="Isosceles Triangle 24">
+              <a:extLst>
+                <a:ext uri="{FF2B5EF4-FFF2-40B4-BE49-F238E27FC236}">
+                  <a16:creationId xmlns:a16="http://schemas.microsoft.com/office/drawing/2014/main" id="{9D8DF379-0F34-6DC6-0445-C52427CEA471}"/>
+                </a:ext>
+              </a:extLst>
+            </p:cNvPr>
+            <p:cNvSpPr/>
+            <p:nvPr/>
+          </p:nvSpPr>
+          <p:spPr>
+            <a:xfrm rot="15424345">
+              <a:off x="4343425" y="3060700"/>
+              <a:ext cx="421623" cy="927100"/>
+            </a:xfrm>
+            <a:prstGeom prst="triangle">
+              <a:avLst/>
+            </a:prstGeom>
+          </p:spPr>
+          <p:style>
+            <a:lnRef idx="2">
+              <a:schemeClr val="dk1">
+                <a:shade val="50000"/>
+              </a:schemeClr>
+            </a:lnRef>
+            <a:fillRef idx="1">
+              <a:schemeClr val="dk1"/>
+            </a:fillRef>
+            <a:effectRef idx="0">
+              <a:schemeClr val="dk1"/>
+            </a:effectRef>
+            <a:fontRef idx="minor">
+              <a:schemeClr val="lt1"/>
+            </a:fontRef>
+          </p:style>
+          <p:txBody>
+            <a:bodyPr rtlCol="0" anchor="ctr"/>
+            <a:lstStyle/>
+            <a:p>
+              <a:pPr algn="ctr"/>
+              <a:endParaRPr lang="en-US"/>
+            </a:p>
+          </p:txBody>
+        </p:sp>
+        <p:sp>
+          <p:nvSpPr>
+            <p:cNvPr id="26" name="Rectangle 25">
+              <a:extLst>
+                <a:ext uri="{FF2B5EF4-FFF2-40B4-BE49-F238E27FC236}">
+                  <a16:creationId xmlns:a16="http://schemas.microsoft.com/office/drawing/2014/main" id="{99EB09C2-0004-EF0A-311D-10C0954AC48B}"/>
+                </a:ext>
+              </a:extLst>
+            </p:cNvPr>
+            <p:cNvSpPr/>
+            <p:nvPr/>
+          </p:nvSpPr>
+          <p:spPr>
+            <a:xfrm rot="19070274">
+              <a:off x="4403822" y="2794899"/>
+              <a:ext cx="110327" cy="685800"/>
+            </a:xfrm>
+            <a:prstGeom prst="rect">
+              <a:avLst/>
+            </a:prstGeom>
+          </p:spPr>
+          <p:style>
+            <a:lnRef idx="2">
+              <a:schemeClr val="dk1">
+                <a:shade val="50000"/>
+              </a:schemeClr>
+            </a:lnRef>
+            <a:fillRef idx="1">
+              <a:schemeClr val="dk1"/>
+            </a:fillRef>
+            <a:effectRef idx="0">
+              <a:schemeClr val="dk1"/>
+            </a:effectRef>
+            <a:fontRef idx="minor">
+              <a:schemeClr val="lt1"/>
+            </a:fontRef>
+          </p:style>
+          <p:txBody>
+            <a:bodyPr rtlCol="0" anchor="ctr"/>
+            <a:lstStyle/>
+            <a:p>
+              <a:pPr algn="ctr"/>
+              <a:endParaRPr lang="en-US"/>
+            </a:p>
+          </p:txBody>
+        </p:sp>
+        <p:sp>
+          <p:nvSpPr>
+            <p:cNvPr id="27" name="Rectangle 26">
+              <a:extLst>
+                <a:ext uri="{FF2B5EF4-FFF2-40B4-BE49-F238E27FC236}">
+                  <a16:creationId xmlns:a16="http://schemas.microsoft.com/office/drawing/2014/main" id="{C52C181C-39A6-074A-7CEE-B04D50179457}"/>
+                </a:ext>
+              </a:extLst>
+            </p:cNvPr>
+            <p:cNvSpPr/>
+            <p:nvPr/>
+          </p:nvSpPr>
+          <p:spPr>
+            <a:xfrm rot="3561525">
+              <a:off x="5159615" y="2991775"/>
+              <a:ext cx="110327" cy="685800"/>
+            </a:xfrm>
+            <a:prstGeom prst="rect">
+              <a:avLst/>
+            </a:prstGeom>
+          </p:spPr>
+          <p:style>
+            <a:lnRef idx="2">
+              <a:schemeClr val="dk1">
+                <a:shade val="50000"/>
+              </a:schemeClr>
+            </a:lnRef>
+            <a:fillRef idx="1">
+              <a:schemeClr val="dk1"/>
+            </a:fillRef>
+            <a:effectRef idx="0">
+              <a:schemeClr val="dk1"/>
+            </a:effectRef>
+            <a:fontRef idx="minor">
+              <a:schemeClr val="lt1"/>
+            </a:fontRef>
+          </p:style>
+          <p:txBody>
+            <a:bodyPr rtlCol="0" anchor="ctr"/>
+            <a:lstStyle/>
+            <a:p>
+              <a:pPr algn="ctr"/>
+              <a:endParaRPr lang="en-US"/>
+            </a:p>
+          </p:txBody>
+        </p:sp>
+        <p:sp>
+          <p:nvSpPr>
+            <p:cNvPr id="28" name="Moon 27">
+              <a:extLst>
+                <a:ext uri="{FF2B5EF4-FFF2-40B4-BE49-F238E27FC236}">
+                  <a16:creationId xmlns:a16="http://schemas.microsoft.com/office/drawing/2014/main" id="{62E2704E-7612-34D2-C026-FF2E34319A9C}"/>
+                </a:ext>
+              </a:extLst>
+            </p:cNvPr>
+            <p:cNvSpPr/>
+            <p:nvPr/>
+          </p:nvSpPr>
+          <p:spPr>
+            <a:xfrm rot="19499624" flipH="1">
+              <a:off x="5426491" y="2997261"/>
+              <a:ext cx="303493" cy="618348"/>
+            </a:xfrm>
+            <a:prstGeom prst="moon">
+              <a:avLst/>
+            </a:prstGeom>
+          </p:spPr>
+          <p:style>
+            <a:lnRef idx="2">
+              <a:schemeClr val="dk1">
+                <a:shade val="50000"/>
+              </a:schemeClr>
+            </a:lnRef>
+            <a:fillRef idx="1">
+              <a:schemeClr val="dk1"/>
+            </a:fillRef>
+            <a:effectRef idx="0">
+              <a:schemeClr val="dk1"/>
+            </a:effectRef>
+            <a:fontRef idx="minor">
+              <a:schemeClr val="lt1"/>
+            </a:fontRef>
+          </p:style>
+          <p:txBody>
+            <a:bodyPr rtlCol="0" anchor="ctr"/>
+            <a:lstStyle/>
+            <a:p>
+              <a:pPr algn="ctr"/>
+              <a:endParaRPr lang="en-US"/>
+            </a:p>
+          </p:txBody>
+        </p:sp>
+        <p:sp>
+          <p:nvSpPr>
+            <p:cNvPr id="29" name="Moon 28">
+              <a:extLst>
+                <a:ext uri="{FF2B5EF4-FFF2-40B4-BE49-F238E27FC236}">
+                  <a16:creationId xmlns:a16="http://schemas.microsoft.com/office/drawing/2014/main" id="{045DD0C2-A0DE-22F4-2B5B-BAB8B21E7AC7}"/>
+                </a:ext>
+              </a:extLst>
+            </p:cNvPr>
+            <p:cNvSpPr/>
+            <p:nvPr/>
+          </p:nvSpPr>
+          <p:spPr>
+            <a:xfrm rot="14859337" flipH="1">
+              <a:off x="3798186" y="2609338"/>
+              <a:ext cx="303493" cy="927492"/>
+            </a:xfrm>
+            <a:prstGeom prst="moon">
+              <a:avLst>
+                <a:gd name="adj" fmla="val 30886"/>
+              </a:avLst>
+            </a:prstGeom>
+          </p:spPr>
+          <p:style>
+            <a:lnRef idx="2">
+              <a:schemeClr val="dk1">
+                <a:shade val="50000"/>
+              </a:schemeClr>
+            </a:lnRef>
+            <a:fillRef idx="1">
+              <a:schemeClr val="dk1"/>
+            </a:fillRef>
+            <a:effectRef idx="0">
+              <a:schemeClr val="dk1"/>
+            </a:effectRef>
+            <a:fontRef idx="minor">
+              <a:schemeClr val="lt1"/>
+            </a:fontRef>
+          </p:style>
+          <p:txBody>
+            <a:bodyPr rtlCol="0" anchor="ctr"/>
+            <a:lstStyle/>
+            <a:p>
+              <a:pPr algn="ctr"/>
+              <a:endParaRPr lang="en-US"/>
+            </a:p>
+          </p:txBody>
+        </p:sp>
+      </p:grpSp>
+      <p:grpSp>
+        <p:nvGrpSpPr>
+          <p:cNvPr id="31" name="Group 30">
+            <a:extLst>
+              <a:ext uri="{FF2B5EF4-FFF2-40B4-BE49-F238E27FC236}">
+                <a16:creationId xmlns:a16="http://schemas.microsoft.com/office/drawing/2014/main" id="{48A6794A-C8F0-4518-6746-135B2D74E0BD}"/>
+              </a:ext>
+            </a:extLst>
+          </p:cNvPr>
+          <p:cNvGrpSpPr/>
+          <p:nvPr/>
+        </p:nvGrpSpPr>
+        <p:grpSpPr>
+          <a:xfrm>
+            <a:off x="2024352" y="1186456"/>
+            <a:ext cx="745097" cy="390360"/>
+            <a:chOff x="3486187" y="2794899"/>
+            <a:chExt cx="2243797" cy="940162"/>
+          </a:xfrm>
+        </p:grpSpPr>
+        <p:sp>
+          <p:nvSpPr>
+            <p:cNvPr id="32" name="Isosceles Triangle 31">
+              <a:extLst>
+                <a:ext uri="{FF2B5EF4-FFF2-40B4-BE49-F238E27FC236}">
+                  <a16:creationId xmlns:a16="http://schemas.microsoft.com/office/drawing/2014/main" id="{A02500EA-71B5-6B42-AEFA-9B5032B88D53}"/>
+                </a:ext>
+              </a:extLst>
+            </p:cNvPr>
+            <p:cNvSpPr/>
+            <p:nvPr/>
+          </p:nvSpPr>
+          <p:spPr>
+            <a:xfrm rot="15424345">
+              <a:off x="4343425" y="3060700"/>
+              <a:ext cx="421623" cy="927100"/>
+            </a:xfrm>
+            <a:prstGeom prst="triangle">
+              <a:avLst/>
+            </a:prstGeom>
+          </p:spPr>
+          <p:style>
+            <a:lnRef idx="2">
+              <a:schemeClr val="dk1">
+                <a:shade val="50000"/>
+              </a:schemeClr>
+            </a:lnRef>
+            <a:fillRef idx="1">
+              <a:schemeClr val="dk1"/>
+            </a:fillRef>
+            <a:effectRef idx="0">
+              <a:schemeClr val="dk1"/>
+            </a:effectRef>
+            <a:fontRef idx="minor">
+              <a:schemeClr val="lt1"/>
+            </a:fontRef>
+          </p:style>
+          <p:txBody>
+            <a:bodyPr rtlCol="0" anchor="ctr"/>
+            <a:lstStyle/>
+            <a:p>
+              <a:pPr algn="ctr"/>
+              <a:endParaRPr lang="en-US"/>
+            </a:p>
+          </p:txBody>
+        </p:sp>
+        <p:sp>
+          <p:nvSpPr>
+            <p:cNvPr id="33" name="Rectangle 32">
+              <a:extLst>
+                <a:ext uri="{FF2B5EF4-FFF2-40B4-BE49-F238E27FC236}">
+                  <a16:creationId xmlns:a16="http://schemas.microsoft.com/office/drawing/2014/main" id="{DC37D9B8-148B-F659-3B90-FCF4C909AB87}"/>
+                </a:ext>
+              </a:extLst>
+            </p:cNvPr>
+            <p:cNvSpPr/>
+            <p:nvPr/>
+          </p:nvSpPr>
+          <p:spPr>
+            <a:xfrm rot="19070274">
+              <a:off x="4403822" y="2794899"/>
+              <a:ext cx="110327" cy="685800"/>
+            </a:xfrm>
+            <a:prstGeom prst="rect">
+              <a:avLst/>
+            </a:prstGeom>
+          </p:spPr>
+          <p:style>
+            <a:lnRef idx="2">
+              <a:schemeClr val="dk1">
+                <a:shade val="50000"/>
+              </a:schemeClr>
+            </a:lnRef>
+            <a:fillRef idx="1">
+              <a:schemeClr val="dk1"/>
+            </a:fillRef>
+            <a:effectRef idx="0">
+              <a:schemeClr val="dk1"/>
+            </a:effectRef>
+            <a:fontRef idx="minor">
+              <a:schemeClr val="lt1"/>
+            </a:fontRef>
+          </p:style>
+          <p:txBody>
+            <a:bodyPr rtlCol="0" anchor="ctr"/>
+            <a:lstStyle/>
+            <a:p>
+              <a:pPr algn="ctr"/>
+              <a:endParaRPr lang="en-US"/>
+            </a:p>
+          </p:txBody>
+        </p:sp>
+        <p:sp>
+          <p:nvSpPr>
+            <p:cNvPr id="34" name="Rectangle 33">
+              <a:extLst>
+                <a:ext uri="{FF2B5EF4-FFF2-40B4-BE49-F238E27FC236}">
+                  <a16:creationId xmlns:a16="http://schemas.microsoft.com/office/drawing/2014/main" id="{7545B01B-A436-1165-9353-A6D1CD74E98D}"/>
+                </a:ext>
+              </a:extLst>
+            </p:cNvPr>
+            <p:cNvSpPr/>
+            <p:nvPr/>
+          </p:nvSpPr>
+          <p:spPr>
+            <a:xfrm rot="3561525">
+              <a:off x="5159615" y="2991775"/>
+              <a:ext cx="110327" cy="685800"/>
+            </a:xfrm>
+            <a:prstGeom prst="rect">
+              <a:avLst/>
+            </a:prstGeom>
+          </p:spPr>
+          <p:style>
+            <a:lnRef idx="2">
+              <a:schemeClr val="dk1">
+                <a:shade val="50000"/>
+              </a:schemeClr>
+            </a:lnRef>
+            <a:fillRef idx="1">
+              <a:schemeClr val="dk1"/>
+            </a:fillRef>
+            <a:effectRef idx="0">
+              <a:schemeClr val="dk1"/>
+            </a:effectRef>
+            <a:fontRef idx="minor">
+              <a:schemeClr val="lt1"/>
+            </a:fontRef>
+          </p:style>
+          <p:txBody>
+            <a:bodyPr rtlCol="0" anchor="ctr"/>
+            <a:lstStyle/>
+            <a:p>
+              <a:pPr algn="ctr"/>
+              <a:endParaRPr lang="en-US"/>
+            </a:p>
+          </p:txBody>
+        </p:sp>
+        <p:sp>
+          <p:nvSpPr>
+            <p:cNvPr id="35" name="Moon 34">
+              <a:extLst>
+                <a:ext uri="{FF2B5EF4-FFF2-40B4-BE49-F238E27FC236}">
+                  <a16:creationId xmlns:a16="http://schemas.microsoft.com/office/drawing/2014/main" id="{2D457D10-3DB9-410B-DA44-A61A4FC053A6}"/>
+                </a:ext>
+              </a:extLst>
+            </p:cNvPr>
+            <p:cNvSpPr/>
+            <p:nvPr/>
+          </p:nvSpPr>
+          <p:spPr>
+            <a:xfrm rot="19499624" flipH="1">
+              <a:off x="5426491" y="2997261"/>
+              <a:ext cx="303493" cy="618348"/>
+            </a:xfrm>
+            <a:prstGeom prst="moon">
+              <a:avLst/>
+            </a:prstGeom>
+          </p:spPr>
+          <p:style>
+            <a:lnRef idx="2">
+              <a:schemeClr val="dk1">
+                <a:shade val="50000"/>
+              </a:schemeClr>
+            </a:lnRef>
+            <a:fillRef idx="1">
+              <a:schemeClr val="dk1"/>
+            </a:fillRef>
+            <a:effectRef idx="0">
+              <a:schemeClr val="dk1"/>
+            </a:effectRef>
+            <a:fontRef idx="minor">
+              <a:schemeClr val="lt1"/>
+            </a:fontRef>
+          </p:style>
+          <p:txBody>
+            <a:bodyPr rtlCol="0" anchor="ctr"/>
+            <a:lstStyle/>
+            <a:p>
+              <a:pPr algn="ctr"/>
+              <a:endParaRPr lang="en-US"/>
+            </a:p>
+          </p:txBody>
+        </p:sp>
+        <p:sp>
+          <p:nvSpPr>
+            <p:cNvPr id="36" name="Moon 35">
+              <a:extLst>
+                <a:ext uri="{FF2B5EF4-FFF2-40B4-BE49-F238E27FC236}">
+                  <a16:creationId xmlns:a16="http://schemas.microsoft.com/office/drawing/2014/main" id="{72220385-95F3-7FC9-C196-D29815DE8A60}"/>
+                </a:ext>
+              </a:extLst>
+            </p:cNvPr>
+            <p:cNvSpPr/>
+            <p:nvPr/>
+          </p:nvSpPr>
+          <p:spPr>
+            <a:xfrm rot="14859337" flipH="1">
+              <a:off x="3798186" y="2609338"/>
+              <a:ext cx="303493" cy="927492"/>
+            </a:xfrm>
+            <a:prstGeom prst="moon">
+              <a:avLst>
+                <a:gd name="adj" fmla="val 30886"/>
+              </a:avLst>
+            </a:prstGeom>
+          </p:spPr>
+          <p:style>
+            <a:lnRef idx="2">
+              <a:schemeClr val="dk1">
+                <a:shade val="50000"/>
+              </a:schemeClr>
+            </a:lnRef>
+            <a:fillRef idx="1">
+              <a:schemeClr val="dk1"/>
+            </a:fillRef>
+            <a:effectRef idx="0">
+              <a:schemeClr val="dk1"/>
+            </a:effectRef>
+            <a:fontRef idx="minor">
+              <a:schemeClr val="lt1"/>
+            </a:fontRef>
+          </p:style>
+          <p:txBody>
+            <a:bodyPr rtlCol="0" anchor="ctr"/>
+            <a:lstStyle/>
+            <a:p>
+              <a:pPr algn="ctr"/>
+              <a:endParaRPr lang="en-US"/>
+            </a:p>
+          </p:txBody>
+        </p:sp>
+      </p:grpSp>
+      <p:sp>
+        <p:nvSpPr>
+          <p:cNvPr id="37" name="Oval 36">
+            <a:extLst>
+              <a:ext uri="{FF2B5EF4-FFF2-40B4-BE49-F238E27FC236}">
+                <a16:creationId xmlns:a16="http://schemas.microsoft.com/office/drawing/2014/main" id="{69A283FC-5D73-8568-4F11-D2DC8052E9AD}"/>
+              </a:ext>
+            </a:extLst>
+          </p:cNvPr>
+          <p:cNvSpPr/>
+          <p:nvPr/>
+        </p:nvSpPr>
+        <p:spPr>
+          <a:xfrm>
+            <a:off x="2482373" y="775315"/>
+            <a:ext cx="274320" cy="274320"/>
+          </a:xfrm>
+          <a:prstGeom prst="ellipse">
+            <a:avLst/>
+          </a:prstGeom>
+          <a:noFill/>
+          <a:ln w="57150" cap="flat" cmpd="sng" algn="ctr">
+            <a:solidFill>
+              <a:schemeClr val="dk1"/>
+            </a:solidFill>
+            <a:prstDash val="solid"/>
+            <a:round/>
+            <a:headEnd type="none" w="med" len="med"/>
+            <a:tailEnd type="none" w="med" len="med"/>
+          </a:ln>
+        </p:spPr>
+        <p:style>
+          <a:lnRef idx="0">
+            <a:scrgbClr r="0" g="0" b="0"/>
+          </a:lnRef>
+          <a:fillRef idx="0">
+            <a:scrgbClr r="0" g="0" b="0"/>
+          </a:fillRef>
+          <a:effectRef idx="0">
+            <a:scrgbClr r="0" g="0" b="0"/>
+          </a:effectRef>
+          <a:fontRef idx="minor">
+            <a:schemeClr val="dk1"/>
+          </a:fontRef>
+        </p:style>
+        <p:txBody>
+          <a:bodyPr rtlCol="0" anchor="ctr"/>
+          <a:lstStyle/>
+          <a:p>
+            <a:pPr algn="ctr"/>
+            <a:endParaRPr lang="en-US"/>
+          </a:p>
+        </p:txBody>
+      </p:sp>
+      <p:grpSp>
+        <p:nvGrpSpPr>
+          <p:cNvPr id="54" name="Group 53">
+            <a:extLst>
+              <a:ext uri="{FF2B5EF4-FFF2-40B4-BE49-F238E27FC236}">
+                <a16:creationId xmlns:a16="http://schemas.microsoft.com/office/drawing/2014/main" id="{D89DC9B5-DCE9-A974-1734-4CC3DEA29F84}"/>
+              </a:ext>
+            </a:extLst>
+          </p:cNvPr>
+          <p:cNvGrpSpPr/>
+          <p:nvPr/>
+        </p:nvGrpSpPr>
+        <p:grpSpPr>
+          <a:xfrm>
+            <a:off x="9395477" y="483633"/>
+            <a:ext cx="1371600" cy="1371600"/>
+            <a:chOff x="213377" y="483633"/>
+            <a:chExt cx="1371600" cy="1371600"/>
+          </a:xfrm>
+        </p:grpSpPr>
+        <p:sp>
+          <p:nvSpPr>
+            <p:cNvPr id="55" name="Rectangle 54">
+              <a:extLst>
+                <a:ext uri="{FF2B5EF4-FFF2-40B4-BE49-F238E27FC236}">
+                  <a16:creationId xmlns:a16="http://schemas.microsoft.com/office/drawing/2014/main" id="{01F4E082-7B12-0743-A9A3-59ABDF0F9213}"/>
+                </a:ext>
+              </a:extLst>
+            </p:cNvPr>
+            <p:cNvSpPr/>
+            <p:nvPr/>
+          </p:nvSpPr>
+          <p:spPr>
+            <a:xfrm>
+              <a:off x="213377" y="483633"/>
+              <a:ext cx="1371600" cy="1371600"/>
+            </a:xfrm>
+            <a:prstGeom prst="rect">
+              <a:avLst/>
+            </a:prstGeom>
+            <a:noFill/>
+            <a:ln w="76200">
+              <a:solidFill>
+                <a:schemeClr val="tx1"/>
+              </a:solidFill>
+            </a:ln>
+          </p:spPr>
+          <p:style>
+            <a:lnRef idx="2">
+              <a:schemeClr val="accent1">
+                <a:shade val="50000"/>
+              </a:schemeClr>
+            </a:lnRef>
+            <a:fillRef idx="1">
+              <a:schemeClr val="accent1"/>
+            </a:fillRef>
+            <a:effectRef idx="0">
+              <a:schemeClr val="accent1"/>
+            </a:effectRef>
+            <a:fontRef idx="minor">
+              <a:schemeClr val="lt1"/>
+            </a:fontRef>
+          </p:style>
+          <p:txBody>
+            <a:bodyPr rtlCol="0" anchor="ctr"/>
+            <a:lstStyle/>
+            <a:p>
+              <a:pPr algn="ctr"/>
+              <a:endParaRPr lang="en-US"/>
+            </a:p>
+          </p:txBody>
+        </p:sp>
+        <p:sp>
+          <p:nvSpPr>
+            <p:cNvPr id="56" name="Hexagon 55">
+              <a:extLst>
+                <a:ext uri="{FF2B5EF4-FFF2-40B4-BE49-F238E27FC236}">
+                  <a16:creationId xmlns:a16="http://schemas.microsoft.com/office/drawing/2014/main" id="{4F1F5C53-78A3-14AC-675D-12B0EBAA5639}"/>
+                </a:ext>
+              </a:extLst>
+            </p:cNvPr>
+            <p:cNvSpPr/>
+            <p:nvPr/>
+          </p:nvSpPr>
+          <p:spPr>
+            <a:xfrm>
+              <a:off x="304817" y="699533"/>
+              <a:ext cx="1188720" cy="1097280"/>
+            </a:xfrm>
+            <a:prstGeom prst="hexagon">
+              <a:avLst/>
+            </a:prstGeom>
+            <a:noFill/>
+            <a:ln w="38100" cap="flat" cmpd="sng" algn="ctr">
+              <a:solidFill>
+                <a:schemeClr val="dk1"/>
+              </a:solidFill>
+              <a:prstDash val="solid"/>
+              <a:round/>
+              <a:headEnd type="none" w="med" len="med"/>
+              <a:tailEnd type="none" w="med" len="med"/>
+            </a:ln>
+          </p:spPr>
+          <p:style>
+            <a:lnRef idx="0">
+              <a:scrgbClr r="0" g="0" b="0"/>
+            </a:lnRef>
+            <a:fillRef idx="0">
+              <a:scrgbClr r="0" g="0" b="0"/>
+            </a:fillRef>
+            <a:effectRef idx="0">
+              <a:scrgbClr r="0" g="0" b="0"/>
+            </a:effectRef>
+            <a:fontRef idx="minor">
+              <a:schemeClr val="dk1"/>
+            </a:fontRef>
+          </p:style>
+          <p:txBody>
+            <a:bodyPr rtlCol="0" anchor="ctr"/>
+            <a:lstStyle/>
+            <a:p>
+              <a:pPr algn="ctr"/>
+              <a:endParaRPr lang="en-US"/>
+            </a:p>
+          </p:txBody>
+        </p:sp>
+      </p:grpSp>
+      <p:grpSp>
+        <p:nvGrpSpPr>
+          <p:cNvPr id="64" name="Group 63">
+            <a:extLst>
+              <a:ext uri="{FF2B5EF4-FFF2-40B4-BE49-F238E27FC236}">
+                <a16:creationId xmlns:a16="http://schemas.microsoft.com/office/drawing/2014/main" id="{3E91B4FB-A15F-4D9E-73C8-1D93521A20F1}"/>
+              </a:ext>
+            </a:extLst>
+          </p:cNvPr>
+          <p:cNvGrpSpPr/>
+          <p:nvPr/>
+        </p:nvGrpSpPr>
+        <p:grpSpPr>
+          <a:xfrm>
+            <a:off x="8314675" y="760535"/>
+            <a:ext cx="472503" cy="1008518"/>
+            <a:chOff x="5490227" y="2483982"/>
+            <a:chExt cx="987188" cy="2107068"/>
+          </a:xfrm>
+        </p:grpSpPr>
+        <p:pic>
+          <p:nvPicPr>
+            <p:cNvPr id="72" name="Picture 10" descr="✓ flamethrower free vector eps, cdr, ai, svg vector illustration graphic art">
+              <a:extLst>
+                <a:ext uri="{FF2B5EF4-FFF2-40B4-BE49-F238E27FC236}">
+                  <a16:creationId xmlns:a16="http://schemas.microsoft.com/office/drawing/2014/main" id="{1CB0CDD0-26B0-5B34-4DA2-E1F7C5AD8D20}"/>
+                </a:ext>
+              </a:extLst>
+            </p:cNvPr>
+            <p:cNvPicPr>
+              <a:picLocks noChangeAspect="1" noChangeArrowheads="1"/>
+            </p:cNvPicPr>
+            <p:nvPr/>
+          </p:nvPicPr>
+          <p:blipFill rotWithShape="1">
+            <a:blip r:embed="rId6">
+              <a:extLst>
+                <a:ext uri="{28A0092B-C50C-407E-A947-70E740481C1C}">
+                  <a14:useLocalDpi xmlns:a14="http://schemas.microsoft.com/office/drawing/2010/main" val="0"/>
+                </a:ext>
+              </a:extLst>
+            </a:blip>
+            <a:srcRect l="29258" b="25887"/>
+            <a:stretch/>
+          </p:blipFill>
+          <p:spPr bwMode="auto">
+            <a:xfrm rot="16200000">
+              <a:off x="5260391" y="2815957"/>
+              <a:ext cx="1358372" cy="694421"/>
+            </a:xfrm>
+            <a:prstGeom prst="rect">
+              <a:avLst/>
+            </a:prstGeom>
+            <a:noFill/>
+            <a:extLst>
+              <a:ext uri="{909E8E84-426E-40DD-AFC4-6F175D3DCCD1}">
+                <a14:hiddenFill xmlns:a14="http://schemas.microsoft.com/office/drawing/2010/main">
+                  <a:solidFill>
+                    <a:srgbClr val="FFFFFF"/>
+                  </a:solidFill>
+                </a14:hiddenFill>
+              </a:ext>
+            </a:extLst>
+          </p:spPr>
+        </p:pic>
+        <p:pic>
+          <p:nvPicPr>
+            <p:cNvPr id="71" name="Picture 70">
+              <a:extLst>
+                <a:ext uri="{FF2B5EF4-FFF2-40B4-BE49-F238E27FC236}">
+                  <a16:creationId xmlns:a16="http://schemas.microsoft.com/office/drawing/2014/main" id="{A3901D76-CAB3-6866-C37C-16077D58B3EE}"/>
+                </a:ext>
+              </a:extLst>
+            </p:cNvPr>
+            <p:cNvPicPr>
+              <a:picLocks noChangeAspect="1"/>
+            </p:cNvPicPr>
+            <p:nvPr/>
+          </p:nvPicPr>
+          <p:blipFill rotWithShape="1">
+            <a:blip r:embed="rId3"/>
+            <a:srcRect b="41100"/>
+            <a:stretch/>
+          </p:blipFill>
+          <p:spPr>
+            <a:xfrm>
+              <a:off x="5490227" y="3641166"/>
+              <a:ext cx="987188" cy="949884"/>
+            </a:xfrm>
+            <a:prstGeom prst="rect">
+              <a:avLst/>
+            </a:prstGeom>
+          </p:spPr>
+        </p:pic>
+      </p:grpSp>
+      <p:grpSp>
+        <p:nvGrpSpPr>
+          <p:cNvPr id="67" name="Group 66">
+            <a:extLst>
+              <a:ext uri="{FF2B5EF4-FFF2-40B4-BE49-F238E27FC236}">
+                <a16:creationId xmlns:a16="http://schemas.microsoft.com/office/drawing/2014/main" id="{DADA5C28-21A4-9381-5B42-40F3AE703601}"/>
+              </a:ext>
+            </a:extLst>
+          </p:cNvPr>
+          <p:cNvGrpSpPr/>
+          <p:nvPr/>
+        </p:nvGrpSpPr>
+        <p:grpSpPr>
+          <a:xfrm>
+            <a:off x="3682455" y="775315"/>
+            <a:ext cx="554843" cy="953576"/>
+            <a:chOff x="2557150" y="2405574"/>
+            <a:chExt cx="836387" cy="1437449"/>
+          </a:xfrm>
+        </p:grpSpPr>
+        <p:sp>
+          <p:nvSpPr>
+            <p:cNvPr id="38" name="Oval 37">
+              <a:extLst>
+                <a:ext uri="{FF2B5EF4-FFF2-40B4-BE49-F238E27FC236}">
+                  <a16:creationId xmlns:a16="http://schemas.microsoft.com/office/drawing/2014/main" id="{BDABB5A0-5AF1-656E-7819-5ECC4D5CFEA2}"/>
+                </a:ext>
+              </a:extLst>
+            </p:cNvPr>
+            <p:cNvSpPr/>
+            <p:nvPr/>
+          </p:nvSpPr>
+          <p:spPr>
+            <a:xfrm>
+              <a:off x="2753136" y="3211659"/>
+              <a:ext cx="509948" cy="418886"/>
+            </a:xfrm>
+            <a:prstGeom prst="ellipse">
+              <a:avLst/>
+            </a:prstGeom>
+          </p:spPr>
+          <p:style>
+            <a:lnRef idx="2">
+              <a:schemeClr val="dk1">
+                <a:shade val="50000"/>
+              </a:schemeClr>
+            </a:lnRef>
+            <a:fillRef idx="1">
+              <a:schemeClr val="dk1"/>
+            </a:fillRef>
+            <a:effectRef idx="0">
+              <a:schemeClr val="dk1"/>
+            </a:effectRef>
+            <a:fontRef idx="minor">
+              <a:schemeClr val="lt1"/>
+            </a:fontRef>
+          </p:style>
+          <p:txBody>
+            <a:bodyPr rtlCol="0" anchor="ctr"/>
+            <a:lstStyle/>
+            <a:p>
+              <a:pPr algn="ctr"/>
+              <a:endParaRPr lang="en-US"/>
+            </a:p>
+          </p:txBody>
+        </p:sp>
+        <p:sp>
+          <p:nvSpPr>
+            <p:cNvPr id="40" name="Oval 39">
+              <a:extLst>
+                <a:ext uri="{FF2B5EF4-FFF2-40B4-BE49-F238E27FC236}">
+                  <a16:creationId xmlns:a16="http://schemas.microsoft.com/office/drawing/2014/main" id="{2CFFEFEC-F9DC-FC6D-6FCC-B897A805C302}"/>
+                </a:ext>
+              </a:extLst>
+            </p:cNvPr>
+            <p:cNvSpPr/>
+            <p:nvPr/>
+          </p:nvSpPr>
+          <p:spPr>
+            <a:xfrm rot="20359977">
+              <a:off x="2599198" y="3386703"/>
+              <a:ext cx="270343" cy="287566"/>
+            </a:xfrm>
+            <a:prstGeom prst="ellipse">
+              <a:avLst/>
+            </a:prstGeom>
+          </p:spPr>
+          <p:style>
+            <a:lnRef idx="2">
+              <a:schemeClr val="dk1">
+                <a:shade val="50000"/>
+              </a:schemeClr>
+            </a:lnRef>
+            <a:fillRef idx="1">
+              <a:schemeClr val="dk1"/>
+            </a:fillRef>
+            <a:effectRef idx="0">
+              <a:schemeClr val="dk1"/>
+            </a:effectRef>
+            <a:fontRef idx="minor">
+              <a:schemeClr val="lt1"/>
+            </a:fontRef>
+          </p:style>
+          <p:txBody>
+            <a:bodyPr rtlCol="0" anchor="ctr"/>
+            <a:lstStyle/>
+            <a:p>
+              <a:pPr algn="ctr"/>
+              <a:endParaRPr lang="en-US"/>
+            </a:p>
+          </p:txBody>
+        </p:sp>
+        <p:cxnSp>
+          <p:nvCxnSpPr>
+            <p:cNvPr id="42" name="Straight Connector 41">
+              <a:extLst>
+                <a:ext uri="{FF2B5EF4-FFF2-40B4-BE49-F238E27FC236}">
+                  <a16:creationId xmlns:a16="http://schemas.microsoft.com/office/drawing/2014/main" id="{B3E5F8C9-9D93-DEB5-1C7E-3A56E0CC656D}"/>
+                </a:ext>
+              </a:extLst>
+            </p:cNvPr>
+            <p:cNvCxnSpPr>
+              <a:cxnSpLocks/>
+            </p:cNvCxnSpPr>
+            <p:nvPr/>
+          </p:nvCxnSpPr>
+          <p:spPr>
+            <a:xfrm flipH="1">
+              <a:off x="2841785" y="3530486"/>
+              <a:ext cx="69805" cy="312537"/>
+            </a:xfrm>
+            <a:prstGeom prst="line">
+              <a:avLst/>
+            </a:prstGeom>
+          </p:spPr>
+          <p:style>
+            <a:lnRef idx="2">
+              <a:schemeClr val="dk1">
+                <a:shade val="50000"/>
+              </a:schemeClr>
+            </a:lnRef>
+            <a:fillRef idx="1">
+              <a:schemeClr val="dk1"/>
+            </a:fillRef>
+            <a:effectRef idx="0">
+              <a:schemeClr val="dk1"/>
+            </a:effectRef>
+            <a:fontRef idx="minor">
+              <a:schemeClr val="lt1"/>
+            </a:fontRef>
+          </p:style>
+        </p:cxnSp>
+        <p:cxnSp>
+          <p:nvCxnSpPr>
+            <p:cNvPr id="44" name="Straight Connector 43">
+              <a:extLst>
+                <a:ext uri="{FF2B5EF4-FFF2-40B4-BE49-F238E27FC236}">
+                  <a16:creationId xmlns:a16="http://schemas.microsoft.com/office/drawing/2014/main" id="{D943A9DB-F17A-520D-B51A-5EFD3A95500D}"/>
+                </a:ext>
+              </a:extLst>
+            </p:cNvPr>
+            <p:cNvCxnSpPr>
+              <a:cxnSpLocks/>
+            </p:cNvCxnSpPr>
+            <p:nvPr/>
+          </p:nvCxnSpPr>
+          <p:spPr>
+            <a:xfrm flipH="1">
+              <a:off x="3040024" y="3484845"/>
+              <a:ext cx="20625" cy="358178"/>
+            </a:xfrm>
+            <a:prstGeom prst="line">
+              <a:avLst/>
+            </a:prstGeom>
+          </p:spPr>
+          <p:style>
+            <a:lnRef idx="2">
+              <a:schemeClr val="dk1">
+                <a:shade val="50000"/>
+              </a:schemeClr>
+            </a:lnRef>
+            <a:fillRef idx="1">
+              <a:schemeClr val="dk1"/>
+            </a:fillRef>
+            <a:effectRef idx="0">
+              <a:schemeClr val="dk1"/>
+            </a:effectRef>
+            <a:fontRef idx="minor">
+              <a:schemeClr val="lt1"/>
+            </a:fontRef>
+          </p:style>
+        </p:cxnSp>
+        <p:cxnSp>
+          <p:nvCxnSpPr>
+            <p:cNvPr id="46" name="Straight Connector 45">
+              <a:extLst>
+                <a:ext uri="{FF2B5EF4-FFF2-40B4-BE49-F238E27FC236}">
+                  <a16:creationId xmlns:a16="http://schemas.microsoft.com/office/drawing/2014/main" id="{D98DA933-22A4-A7D9-B1AA-5C9329296AD2}"/>
+                </a:ext>
+              </a:extLst>
+            </p:cNvPr>
+            <p:cNvCxnSpPr>
+              <a:cxnSpLocks/>
+            </p:cNvCxnSpPr>
+            <p:nvPr/>
+          </p:nvCxnSpPr>
+          <p:spPr>
+            <a:xfrm>
+              <a:off x="3165496" y="3512950"/>
+              <a:ext cx="46580" cy="301968"/>
+            </a:xfrm>
+            <a:prstGeom prst="line">
+              <a:avLst/>
+            </a:prstGeom>
+          </p:spPr>
+          <p:style>
+            <a:lnRef idx="2">
+              <a:schemeClr val="dk1">
+                <a:shade val="50000"/>
+              </a:schemeClr>
+            </a:lnRef>
+            <a:fillRef idx="1">
+              <a:schemeClr val="dk1"/>
+            </a:fillRef>
+            <a:effectRef idx="0">
+              <a:schemeClr val="dk1"/>
+            </a:effectRef>
+            <a:fontRef idx="minor">
+              <a:schemeClr val="lt1"/>
+            </a:fontRef>
+          </p:style>
+        </p:cxnSp>
+        <p:pic>
+          <p:nvPicPr>
+            <p:cNvPr id="75" name="Picture 74">
+              <a:extLst>
+                <a:ext uri="{FF2B5EF4-FFF2-40B4-BE49-F238E27FC236}">
+                  <a16:creationId xmlns:a16="http://schemas.microsoft.com/office/drawing/2014/main" id="{77B0840E-A960-D140-FA3D-9888F6DCB474}"/>
+                </a:ext>
+              </a:extLst>
+            </p:cNvPr>
+            <p:cNvPicPr>
+              <a:picLocks noChangeAspect="1"/>
+            </p:cNvPicPr>
+            <p:nvPr/>
+          </p:nvPicPr>
+          <p:blipFill>
+            <a:blip r:embed="rId7"/>
+            <a:stretch>
+              <a:fillRect/>
+            </a:stretch>
+          </p:blipFill>
+          <p:spPr>
+            <a:xfrm>
+              <a:off x="2557150" y="2405574"/>
+              <a:ext cx="836387" cy="765806"/>
+            </a:xfrm>
+            <a:prstGeom prst="rect">
+              <a:avLst/>
+            </a:prstGeom>
+          </p:spPr>
+        </p:pic>
+      </p:grpSp>
+      <p:grpSp>
+        <p:nvGrpSpPr>
+          <p:cNvPr id="77" name="Group 76">
+            <a:extLst>
+              <a:ext uri="{FF2B5EF4-FFF2-40B4-BE49-F238E27FC236}">
+                <a16:creationId xmlns:a16="http://schemas.microsoft.com/office/drawing/2014/main" id="{C0A54A58-76B8-23EC-D3C1-97943419623D}"/>
+              </a:ext>
+            </a:extLst>
+          </p:cNvPr>
+          <p:cNvGrpSpPr/>
+          <p:nvPr/>
+        </p:nvGrpSpPr>
+        <p:grpSpPr>
+          <a:xfrm>
+            <a:off x="467714" y="3872456"/>
+            <a:ext cx="821134" cy="939833"/>
+            <a:chOff x="4087416" y="1161299"/>
+            <a:chExt cx="1198370" cy="1371600"/>
+          </a:xfrm>
+        </p:grpSpPr>
+        <p:pic>
+          <p:nvPicPr>
+            <p:cNvPr id="78" name="Picture 10" descr="49 Ring Of Fire Silhouette Stock Photos, Pictures &amp;amp; Royalty-Free Images -  iStock">
+              <a:extLst>
+                <a:ext uri="{FF2B5EF4-FFF2-40B4-BE49-F238E27FC236}">
+                  <a16:creationId xmlns:a16="http://schemas.microsoft.com/office/drawing/2014/main" id="{D92EFD00-FC6F-12DB-EE02-EC34C2E3D70C}"/>
+                </a:ext>
+              </a:extLst>
+            </p:cNvPr>
+            <p:cNvPicPr>
+              <a:picLocks noChangeAspect="1" noChangeArrowheads="1"/>
+            </p:cNvPicPr>
+            <p:nvPr/>
+          </p:nvPicPr>
+          <p:blipFill rotWithShape="1">
+            <a:blip r:embed="rId8">
+              <a:extLst>
+                <a:ext uri="{28A0092B-C50C-407E-A947-70E740481C1C}">
+                  <a14:useLocalDpi xmlns:a14="http://schemas.microsoft.com/office/drawing/2010/main" val="0"/>
+                </a:ext>
+              </a:extLst>
+            </a:blip>
+            <a:srcRect l="8601" t="3260" r="8629" b="5100"/>
+            <a:stretch/>
+          </p:blipFill>
+          <p:spPr bwMode="auto">
+            <a:xfrm>
+              <a:off x="4087416" y="1161299"/>
+              <a:ext cx="1198370" cy="1371600"/>
+            </a:xfrm>
+            <a:prstGeom prst="rect">
+              <a:avLst/>
+            </a:prstGeom>
+            <a:noFill/>
+            <a:extLst>
+              <a:ext uri="{909E8E84-426E-40DD-AFC4-6F175D3DCCD1}">
+                <a14:hiddenFill xmlns:a14="http://schemas.microsoft.com/office/drawing/2010/main">
+                  <a:solidFill>
+                    <a:srgbClr val="FFFFFF"/>
+                  </a:solidFill>
+                </a14:hiddenFill>
+              </a:ext>
+            </a:extLst>
+          </p:spPr>
+        </p:pic>
+        <p:pic>
+          <p:nvPicPr>
+            <p:cNvPr id="79" name="Picture 2" descr="Hydra vector Clipart Vector PNG , SVG, EPS, PSD, AI">
+              <a:extLst>
+                <a:ext uri="{FF2B5EF4-FFF2-40B4-BE49-F238E27FC236}">
+                  <a16:creationId xmlns:a16="http://schemas.microsoft.com/office/drawing/2014/main" id="{646E4184-8657-49FD-EACD-1C06CF24088D}"/>
+                </a:ext>
+              </a:extLst>
+            </p:cNvPr>
+            <p:cNvPicPr>
+              <a:picLocks noChangeAspect="1" noChangeArrowheads="1"/>
+            </p:cNvPicPr>
+            <p:nvPr/>
+          </p:nvPicPr>
+          <p:blipFill rotWithShape="1">
+            <a:blip r:embed="rId9">
+              <a:extLst>
+                <a:ext uri="{28A0092B-C50C-407E-A947-70E740481C1C}">
+                  <a14:useLocalDpi xmlns:a14="http://schemas.microsoft.com/office/drawing/2010/main" val="0"/>
+                </a:ext>
+              </a:extLst>
+            </a:blip>
+            <a:srcRect l="32212" t="21635" r="26923" b="31570"/>
+            <a:stretch/>
+          </p:blipFill>
+          <p:spPr bwMode="auto">
+            <a:xfrm>
+              <a:off x="4425643" y="1661595"/>
+              <a:ext cx="521915" cy="597643"/>
+            </a:xfrm>
+            <a:prstGeom prst="rect">
+              <a:avLst/>
+            </a:prstGeom>
+            <a:noFill/>
+            <a:extLst>
+              <a:ext uri="{909E8E84-426E-40DD-AFC4-6F175D3DCCD1}">
+                <a14:hiddenFill xmlns:a14="http://schemas.microsoft.com/office/drawing/2010/main">
+                  <a:solidFill>
+                    <a:srgbClr val="FFFFFF"/>
+                  </a:solidFill>
+                </a14:hiddenFill>
+              </a:ext>
+            </a:extLst>
+          </p:spPr>
+        </p:pic>
+      </p:grpSp>
+      <p:grpSp>
+        <p:nvGrpSpPr>
+          <p:cNvPr id="80" name="Group 79">
+            <a:extLst>
+              <a:ext uri="{FF2B5EF4-FFF2-40B4-BE49-F238E27FC236}">
+                <a16:creationId xmlns:a16="http://schemas.microsoft.com/office/drawing/2014/main" id="{AA3B4486-ADEA-E3BC-5DE4-EB84D7F25EFB}"/>
+              </a:ext>
+            </a:extLst>
+          </p:cNvPr>
+          <p:cNvGrpSpPr/>
+          <p:nvPr/>
+        </p:nvGrpSpPr>
+        <p:grpSpPr>
+          <a:xfrm>
+            <a:off x="376374" y="2335682"/>
+            <a:ext cx="934493" cy="875077"/>
+            <a:chOff x="4722300" y="1944558"/>
+            <a:chExt cx="934493" cy="875077"/>
+          </a:xfrm>
+        </p:grpSpPr>
+        <p:pic>
+          <p:nvPicPr>
+            <p:cNvPr id="81" name="Picture 2" descr="Hydra vector Clipart Vector PNG , SVG, EPS, PSD, AI">
+              <a:extLst>
+                <a:ext uri="{FF2B5EF4-FFF2-40B4-BE49-F238E27FC236}">
+                  <a16:creationId xmlns:a16="http://schemas.microsoft.com/office/drawing/2014/main" id="{50D29484-F547-063E-C4B9-167F6AD8A0B0}"/>
+                </a:ext>
+              </a:extLst>
+            </p:cNvPr>
+            <p:cNvPicPr>
+              <a:picLocks noChangeAspect="1" noChangeArrowheads="1"/>
+            </p:cNvPicPr>
+            <p:nvPr/>
+          </p:nvPicPr>
+          <p:blipFill rotWithShape="1">
+            <a:blip r:embed="rId9">
+              <a:extLst>
+                <a:ext uri="{28A0092B-C50C-407E-A947-70E740481C1C}">
+                  <a14:useLocalDpi xmlns:a14="http://schemas.microsoft.com/office/drawing/2010/main" val="0"/>
+                </a:ext>
+              </a:extLst>
+            </a:blip>
+            <a:srcRect l="32212" t="21635" r="26923" b="31570"/>
+            <a:stretch/>
+          </p:blipFill>
+          <p:spPr bwMode="auto">
+            <a:xfrm>
+              <a:off x="5037119" y="2110048"/>
+              <a:ext cx="619674" cy="709587"/>
+            </a:xfrm>
+            <a:prstGeom prst="rect">
+              <a:avLst/>
+            </a:prstGeom>
+            <a:noFill/>
+            <a:extLst>
+              <a:ext uri="{909E8E84-426E-40DD-AFC4-6F175D3DCCD1}">
+                <a14:hiddenFill xmlns:a14="http://schemas.microsoft.com/office/drawing/2010/main">
+                  <a:solidFill>
+                    <a:srgbClr val="FFFFFF"/>
+                  </a:solidFill>
+                </a14:hiddenFill>
+              </a:ext>
+            </a:extLst>
+          </p:spPr>
+        </p:pic>
+        <p:grpSp>
+          <p:nvGrpSpPr>
+            <p:cNvPr id="82" name="Group 81">
+              <a:extLst>
+                <a:ext uri="{FF2B5EF4-FFF2-40B4-BE49-F238E27FC236}">
+                  <a16:creationId xmlns:a16="http://schemas.microsoft.com/office/drawing/2014/main" id="{ABF7A7D7-DF24-A861-5F55-8238CEE07B49}"/>
+                </a:ext>
+              </a:extLst>
+            </p:cNvPr>
+            <p:cNvGrpSpPr/>
+            <p:nvPr/>
+          </p:nvGrpSpPr>
+          <p:grpSpPr>
+            <a:xfrm rot="1941197">
+              <a:off x="4722300" y="1944558"/>
+              <a:ext cx="531164" cy="503494"/>
+              <a:chOff x="6409710" y="756261"/>
+              <a:chExt cx="2695643" cy="2555218"/>
+            </a:xfrm>
+          </p:grpSpPr>
+          <p:pic>
+            <p:nvPicPr>
+              <p:cNvPr id="83" name="Picture 2" descr="Lance Icon #332107 - Free Icons Library">
+                <a:extLst>
+                  <a:ext uri="{FF2B5EF4-FFF2-40B4-BE49-F238E27FC236}">
+                    <a16:creationId xmlns:a16="http://schemas.microsoft.com/office/drawing/2014/main" id="{D2FB5C2E-10CA-8282-052D-1FFAD1C9EA60}"/>
+                  </a:ext>
+                </a:extLst>
+              </p:cNvPr>
+              <p:cNvPicPr>
+                <a:picLocks noChangeAspect="1" noChangeArrowheads="1"/>
+              </p:cNvPicPr>
+              <p:nvPr/>
+            </p:nvPicPr>
+            <p:blipFill>
+              <a:blip r:embed="rId10">
+                <a:extLst>
+                  <a:ext uri="{28A0092B-C50C-407E-A947-70E740481C1C}">
+                    <a14:useLocalDpi xmlns:a14="http://schemas.microsoft.com/office/drawing/2010/main" val="0"/>
+                  </a:ext>
+                </a:extLst>
+              </a:blip>
+              <a:srcRect/>
+              <a:stretch>
+                <a:fillRect/>
+              </a:stretch>
+            </p:blipFill>
+            <p:spPr bwMode="auto">
+              <a:xfrm rot="18882740">
+                <a:off x="6774550" y="756261"/>
+                <a:ext cx="1899003" cy="1899003"/>
+              </a:xfrm>
+              <a:prstGeom prst="rect">
+                <a:avLst/>
+              </a:prstGeom>
+              <a:noFill/>
+              <a:extLst>
+                <a:ext uri="{909E8E84-426E-40DD-AFC4-6F175D3DCCD1}">
+                  <a14:hiddenFill xmlns:a14="http://schemas.microsoft.com/office/drawing/2010/main">
+                    <a:solidFill>
+                      <a:srgbClr val="FFFFFF"/>
+                    </a:solidFill>
+                  </a14:hiddenFill>
+                </a:ext>
+              </a:extLst>
+            </p:spPr>
+          </p:pic>
+          <p:pic>
+            <p:nvPicPr>
+              <p:cNvPr id="84" name="Picture 2" descr="Lance Icon #332107 - Free Icons Library">
+                <a:extLst>
+                  <a:ext uri="{FF2B5EF4-FFF2-40B4-BE49-F238E27FC236}">
+                    <a16:creationId xmlns:a16="http://schemas.microsoft.com/office/drawing/2014/main" id="{24E119AB-AE0E-E227-01AB-9B8E1F56F9B4}"/>
+                  </a:ext>
+                </a:extLst>
+              </p:cNvPr>
+              <p:cNvPicPr>
+                <a:picLocks noChangeAspect="1" noChangeArrowheads="1"/>
+              </p:cNvPicPr>
+              <p:nvPr/>
+            </p:nvPicPr>
+            <p:blipFill>
+              <a:blip r:embed="rId10">
+                <a:extLst>
+                  <a:ext uri="{28A0092B-C50C-407E-A947-70E740481C1C}">
+                    <a14:useLocalDpi xmlns:a14="http://schemas.microsoft.com/office/drawing/2010/main" val="0"/>
+                  </a:ext>
+                </a:extLst>
+              </a:blip>
+              <a:srcRect/>
+              <a:stretch>
+                <a:fillRect/>
+              </a:stretch>
+            </p:blipFill>
+            <p:spPr bwMode="auto">
+              <a:xfrm rot="18882740">
+                <a:off x="7206350" y="1027415"/>
+                <a:ext cx="1899003" cy="1899003"/>
+              </a:xfrm>
+              <a:prstGeom prst="rect">
+                <a:avLst/>
+              </a:prstGeom>
+              <a:noFill/>
+              <a:extLst>
+                <a:ext uri="{909E8E84-426E-40DD-AFC4-6F175D3DCCD1}">
+                  <a14:hiddenFill xmlns:a14="http://schemas.microsoft.com/office/drawing/2010/main">
+                    <a:solidFill>
+                      <a:srgbClr val="FFFFFF"/>
+                    </a:solidFill>
+                  </a14:hiddenFill>
+                </a:ext>
+              </a:extLst>
+            </p:spPr>
+          </p:pic>
+          <p:pic>
+            <p:nvPicPr>
+              <p:cNvPr id="85" name="Picture 2" descr="Lance Icon #332107 - Free Icons Library">
+                <a:extLst>
+                  <a:ext uri="{FF2B5EF4-FFF2-40B4-BE49-F238E27FC236}">
+                    <a16:creationId xmlns:a16="http://schemas.microsoft.com/office/drawing/2014/main" id="{1E24ECBA-9834-C397-CF12-3A5C788E8EB6}"/>
+                  </a:ext>
+                </a:extLst>
+              </p:cNvPr>
+              <p:cNvPicPr>
+                <a:picLocks noChangeAspect="1" noChangeArrowheads="1"/>
+              </p:cNvPicPr>
+              <p:nvPr/>
+            </p:nvPicPr>
+            <p:blipFill>
+              <a:blip r:embed="rId10">
+                <a:extLst>
+                  <a:ext uri="{28A0092B-C50C-407E-A947-70E740481C1C}">
+                    <a14:useLocalDpi xmlns:a14="http://schemas.microsoft.com/office/drawing/2010/main" val="0"/>
+                  </a:ext>
+                </a:extLst>
+              </a:blip>
+              <a:srcRect/>
+              <a:stretch>
+                <a:fillRect/>
+              </a:stretch>
+            </p:blipFill>
+            <p:spPr bwMode="auto">
+              <a:xfrm rot="18882740">
+                <a:off x="6409710" y="1412476"/>
+                <a:ext cx="1899003" cy="1899003"/>
+              </a:xfrm>
+              <a:prstGeom prst="rect">
+                <a:avLst/>
+              </a:prstGeom>
+              <a:noFill/>
+              <a:extLst>
+                <a:ext uri="{909E8E84-426E-40DD-AFC4-6F175D3DCCD1}">
+                  <a14:hiddenFill xmlns:a14="http://schemas.microsoft.com/office/drawing/2010/main">
+                    <a:solidFill>
+                      <a:srgbClr val="FFFFFF"/>
+                    </a:solidFill>
+                  </a14:hiddenFill>
+                </a:ext>
+              </a:extLst>
+            </p:spPr>
+          </p:pic>
+        </p:grpSp>
+      </p:grpSp>
+      <p:grpSp>
+        <p:nvGrpSpPr>
+          <p:cNvPr id="86" name="Group 85">
+            <a:extLst>
+              <a:ext uri="{FF2B5EF4-FFF2-40B4-BE49-F238E27FC236}">
+                <a16:creationId xmlns:a16="http://schemas.microsoft.com/office/drawing/2014/main" id="{947DD18D-2EFC-CC2B-EA4B-9116EC096B0E}"/>
+              </a:ext>
+            </a:extLst>
+          </p:cNvPr>
+          <p:cNvGrpSpPr/>
+          <p:nvPr/>
+        </p:nvGrpSpPr>
+        <p:grpSpPr>
+          <a:xfrm>
+            <a:off x="191761" y="1992864"/>
+            <a:ext cx="1371600" cy="1371600"/>
+            <a:chOff x="213377" y="483633"/>
+            <a:chExt cx="1371600" cy="1371600"/>
+          </a:xfrm>
+        </p:grpSpPr>
+        <p:sp>
+          <p:nvSpPr>
+            <p:cNvPr id="87" name="Rectangle 86">
+              <a:extLst>
+                <a:ext uri="{FF2B5EF4-FFF2-40B4-BE49-F238E27FC236}">
+                  <a16:creationId xmlns:a16="http://schemas.microsoft.com/office/drawing/2014/main" id="{E397341A-5D88-BB72-6B24-0F0C2589CCA0}"/>
+                </a:ext>
+              </a:extLst>
+            </p:cNvPr>
+            <p:cNvSpPr/>
+            <p:nvPr/>
+          </p:nvSpPr>
+          <p:spPr>
+            <a:xfrm>
+              <a:off x="213377" y="483633"/>
+              <a:ext cx="1371600" cy="1371600"/>
+            </a:xfrm>
+            <a:prstGeom prst="rect">
+              <a:avLst/>
+            </a:prstGeom>
+            <a:noFill/>
+            <a:ln w="76200">
+              <a:solidFill>
+                <a:schemeClr val="tx1"/>
+              </a:solidFill>
+            </a:ln>
+          </p:spPr>
+          <p:style>
+            <a:lnRef idx="2">
+              <a:schemeClr val="accent1">
+                <a:shade val="50000"/>
+              </a:schemeClr>
+            </a:lnRef>
+            <a:fillRef idx="1">
+              <a:schemeClr val="accent1"/>
+            </a:fillRef>
+            <a:effectRef idx="0">
+              <a:schemeClr val="accent1"/>
+            </a:effectRef>
+            <a:fontRef idx="minor">
+              <a:schemeClr val="lt1"/>
+            </a:fontRef>
+          </p:style>
+          <p:txBody>
+            <a:bodyPr rtlCol="0" anchor="ctr"/>
+            <a:lstStyle/>
+            <a:p>
+              <a:pPr algn="ctr"/>
+              <a:endParaRPr lang="en-US"/>
+            </a:p>
+          </p:txBody>
+        </p:sp>
+        <p:sp>
+          <p:nvSpPr>
+            <p:cNvPr id="88" name="Hexagon 87">
+              <a:extLst>
+                <a:ext uri="{FF2B5EF4-FFF2-40B4-BE49-F238E27FC236}">
+                  <a16:creationId xmlns:a16="http://schemas.microsoft.com/office/drawing/2014/main" id="{33919CD6-C75E-69D7-6572-A892E563477E}"/>
+                </a:ext>
+              </a:extLst>
+            </p:cNvPr>
+            <p:cNvSpPr/>
+            <p:nvPr/>
+          </p:nvSpPr>
+          <p:spPr>
+            <a:xfrm>
+              <a:off x="304817" y="699533"/>
+              <a:ext cx="1188720" cy="1097280"/>
+            </a:xfrm>
+            <a:prstGeom prst="hexagon">
+              <a:avLst/>
+            </a:prstGeom>
+            <a:noFill/>
+            <a:ln w="38100" cap="flat" cmpd="sng" algn="ctr">
+              <a:solidFill>
+                <a:schemeClr val="dk1"/>
+              </a:solidFill>
+              <a:prstDash val="solid"/>
+              <a:round/>
+              <a:headEnd type="none" w="med" len="med"/>
+              <a:tailEnd type="none" w="med" len="med"/>
+            </a:ln>
+          </p:spPr>
+          <p:style>
+            <a:lnRef idx="0">
+              <a:scrgbClr r="0" g="0" b="0"/>
+            </a:lnRef>
+            <a:fillRef idx="0">
+              <a:scrgbClr r="0" g="0" b="0"/>
+            </a:fillRef>
+            <a:effectRef idx="0">
+              <a:scrgbClr r="0" g="0" b="0"/>
+            </a:effectRef>
+            <a:fontRef idx="minor">
+              <a:schemeClr val="dk1"/>
+            </a:fontRef>
+          </p:style>
+          <p:txBody>
+            <a:bodyPr rtlCol="0" anchor="ctr"/>
+            <a:lstStyle/>
+            <a:p>
+              <a:pPr algn="ctr"/>
+              <a:endParaRPr lang="en-US"/>
+            </a:p>
+          </p:txBody>
+        </p:sp>
+      </p:grpSp>
+      <p:grpSp>
+        <p:nvGrpSpPr>
+          <p:cNvPr id="89" name="Group 88">
+            <a:extLst>
+              <a:ext uri="{FF2B5EF4-FFF2-40B4-BE49-F238E27FC236}">
+                <a16:creationId xmlns:a16="http://schemas.microsoft.com/office/drawing/2014/main" id="{06CF1EAE-C868-8E9F-764F-5DE114A460EC}"/>
+              </a:ext>
+            </a:extLst>
+          </p:cNvPr>
+          <p:cNvGrpSpPr/>
+          <p:nvPr/>
+        </p:nvGrpSpPr>
+        <p:grpSpPr>
+          <a:xfrm>
+            <a:off x="1760211" y="1992864"/>
+            <a:ext cx="1371600" cy="1371600"/>
+            <a:chOff x="213377" y="483633"/>
+            <a:chExt cx="1371600" cy="1371600"/>
+          </a:xfrm>
+        </p:grpSpPr>
+        <p:sp>
+          <p:nvSpPr>
+            <p:cNvPr id="90" name="Rectangle 89">
+              <a:extLst>
+                <a:ext uri="{FF2B5EF4-FFF2-40B4-BE49-F238E27FC236}">
+                  <a16:creationId xmlns:a16="http://schemas.microsoft.com/office/drawing/2014/main" id="{80C943E6-D0AE-C99E-289A-31E9B46F6A72}"/>
+                </a:ext>
+              </a:extLst>
+            </p:cNvPr>
+            <p:cNvSpPr/>
+            <p:nvPr/>
+          </p:nvSpPr>
+          <p:spPr>
+            <a:xfrm>
+              <a:off x="213377" y="483633"/>
+              <a:ext cx="1371600" cy="1371600"/>
+            </a:xfrm>
+            <a:prstGeom prst="rect">
+              <a:avLst/>
+            </a:prstGeom>
+            <a:noFill/>
+            <a:ln w="76200">
+              <a:solidFill>
+                <a:schemeClr val="tx1"/>
+              </a:solidFill>
+            </a:ln>
+          </p:spPr>
+          <p:style>
+            <a:lnRef idx="2">
+              <a:schemeClr val="accent1">
+                <a:shade val="50000"/>
+              </a:schemeClr>
+            </a:lnRef>
+            <a:fillRef idx="1">
+              <a:schemeClr val="accent1"/>
+            </a:fillRef>
+            <a:effectRef idx="0">
+              <a:schemeClr val="accent1"/>
+            </a:effectRef>
+            <a:fontRef idx="minor">
+              <a:schemeClr val="lt1"/>
+            </a:fontRef>
+          </p:style>
+          <p:txBody>
+            <a:bodyPr rtlCol="0" anchor="ctr"/>
+            <a:lstStyle/>
+            <a:p>
+              <a:pPr algn="ctr"/>
+              <a:endParaRPr lang="en-US"/>
+            </a:p>
+          </p:txBody>
+        </p:sp>
+        <p:sp>
+          <p:nvSpPr>
+            <p:cNvPr id="91" name="Hexagon 90">
+              <a:extLst>
+                <a:ext uri="{FF2B5EF4-FFF2-40B4-BE49-F238E27FC236}">
+                  <a16:creationId xmlns:a16="http://schemas.microsoft.com/office/drawing/2014/main" id="{A2C23FCF-AF71-59D9-F6E6-65D8F507C248}"/>
+                </a:ext>
+              </a:extLst>
+            </p:cNvPr>
+            <p:cNvSpPr/>
+            <p:nvPr/>
+          </p:nvSpPr>
+          <p:spPr>
+            <a:xfrm>
+              <a:off x="304817" y="699533"/>
+              <a:ext cx="1188720" cy="1097280"/>
+            </a:xfrm>
+            <a:prstGeom prst="hexagon">
+              <a:avLst/>
+            </a:prstGeom>
+            <a:noFill/>
+            <a:ln w="38100" cap="flat" cmpd="sng" algn="ctr">
+              <a:solidFill>
+                <a:schemeClr val="dk1"/>
+              </a:solidFill>
+              <a:prstDash val="solid"/>
+              <a:round/>
+              <a:headEnd type="none" w="med" len="med"/>
+              <a:tailEnd type="none" w="med" len="med"/>
+            </a:ln>
+          </p:spPr>
+          <p:style>
+            <a:lnRef idx="0">
+              <a:scrgbClr r="0" g="0" b="0"/>
+            </a:lnRef>
+            <a:fillRef idx="0">
+              <a:scrgbClr r="0" g="0" b="0"/>
+            </a:fillRef>
+            <a:effectRef idx="0">
+              <a:scrgbClr r="0" g="0" b="0"/>
+            </a:effectRef>
+            <a:fontRef idx="minor">
+              <a:schemeClr val="dk1"/>
+            </a:fontRef>
+          </p:style>
+          <p:txBody>
+            <a:bodyPr rtlCol="0" anchor="ctr"/>
+            <a:lstStyle/>
+            <a:p>
+              <a:pPr algn="ctr"/>
+              <a:endParaRPr lang="en-US"/>
+            </a:p>
+          </p:txBody>
+        </p:sp>
+      </p:grpSp>
+      <p:grpSp>
+        <p:nvGrpSpPr>
+          <p:cNvPr id="92" name="Group 91">
+            <a:extLst>
+              <a:ext uri="{FF2B5EF4-FFF2-40B4-BE49-F238E27FC236}">
+                <a16:creationId xmlns:a16="http://schemas.microsoft.com/office/drawing/2014/main" id="{08171E85-1461-9A3E-E6CB-A8CDC6B1604B}"/>
+              </a:ext>
+            </a:extLst>
+          </p:cNvPr>
+          <p:cNvGrpSpPr/>
+          <p:nvPr/>
+        </p:nvGrpSpPr>
+        <p:grpSpPr>
+          <a:xfrm>
+            <a:off x="188770" y="3606797"/>
+            <a:ext cx="1371600" cy="1371600"/>
+            <a:chOff x="213377" y="483633"/>
+            <a:chExt cx="1371600" cy="1371600"/>
+          </a:xfrm>
+        </p:grpSpPr>
+        <p:sp>
+          <p:nvSpPr>
+            <p:cNvPr id="93" name="Rectangle 92">
+              <a:extLst>
+                <a:ext uri="{FF2B5EF4-FFF2-40B4-BE49-F238E27FC236}">
+                  <a16:creationId xmlns:a16="http://schemas.microsoft.com/office/drawing/2014/main" id="{04D35FB7-70DF-C8D8-57CF-0113C8C75B2D}"/>
+                </a:ext>
+              </a:extLst>
+            </p:cNvPr>
+            <p:cNvSpPr/>
+            <p:nvPr/>
+          </p:nvSpPr>
+          <p:spPr>
+            <a:xfrm>
+              <a:off x="213377" y="483633"/>
+              <a:ext cx="1371600" cy="1371600"/>
+            </a:xfrm>
+            <a:prstGeom prst="rect">
+              <a:avLst/>
+            </a:prstGeom>
+            <a:noFill/>
+            <a:ln w="76200">
+              <a:solidFill>
+                <a:schemeClr val="tx1"/>
+              </a:solidFill>
+            </a:ln>
+          </p:spPr>
+          <p:style>
+            <a:lnRef idx="2">
+              <a:schemeClr val="accent1">
+                <a:shade val="50000"/>
+              </a:schemeClr>
+            </a:lnRef>
+            <a:fillRef idx="1">
+              <a:schemeClr val="accent1"/>
+            </a:fillRef>
+            <a:effectRef idx="0">
+              <a:schemeClr val="accent1"/>
+            </a:effectRef>
+            <a:fontRef idx="minor">
+              <a:schemeClr val="lt1"/>
+            </a:fontRef>
+          </p:style>
+          <p:txBody>
+            <a:bodyPr rtlCol="0" anchor="ctr"/>
+            <a:lstStyle/>
+            <a:p>
+              <a:pPr algn="ctr"/>
+              <a:endParaRPr lang="en-US"/>
+            </a:p>
+          </p:txBody>
+        </p:sp>
+        <p:sp>
+          <p:nvSpPr>
+            <p:cNvPr id="94" name="Hexagon 93">
+              <a:extLst>
+                <a:ext uri="{FF2B5EF4-FFF2-40B4-BE49-F238E27FC236}">
+                  <a16:creationId xmlns:a16="http://schemas.microsoft.com/office/drawing/2014/main" id="{6665F7D2-46C1-9521-F5E0-E59ECF23146C}"/>
+                </a:ext>
+              </a:extLst>
+            </p:cNvPr>
+            <p:cNvSpPr/>
+            <p:nvPr/>
+          </p:nvSpPr>
+          <p:spPr>
+            <a:xfrm>
+              <a:off x="304817" y="699533"/>
+              <a:ext cx="1188720" cy="1097280"/>
+            </a:xfrm>
+            <a:prstGeom prst="hexagon">
+              <a:avLst/>
+            </a:prstGeom>
+            <a:noFill/>
+            <a:ln w="38100" cap="flat" cmpd="sng" algn="ctr">
+              <a:solidFill>
+                <a:schemeClr val="dk1"/>
+              </a:solidFill>
+              <a:prstDash val="solid"/>
+              <a:round/>
+              <a:headEnd type="none" w="med" len="med"/>
+              <a:tailEnd type="none" w="med" len="med"/>
+            </a:ln>
+          </p:spPr>
+          <p:style>
+            <a:lnRef idx="0">
+              <a:scrgbClr r="0" g="0" b="0"/>
+            </a:lnRef>
+            <a:fillRef idx="0">
+              <a:scrgbClr r="0" g="0" b="0"/>
+            </a:fillRef>
+            <a:effectRef idx="0">
+              <a:scrgbClr r="0" g="0" b="0"/>
+            </a:effectRef>
+            <a:fontRef idx="minor">
+              <a:schemeClr val="dk1"/>
+            </a:fontRef>
+          </p:style>
+          <p:txBody>
+            <a:bodyPr rtlCol="0" anchor="ctr"/>
+            <a:lstStyle/>
+            <a:p>
+              <a:pPr algn="ctr"/>
+              <a:endParaRPr lang="en-US"/>
+            </a:p>
+          </p:txBody>
+        </p:sp>
+      </p:grpSp>
+      <p:grpSp>
+        <p:nvGrpSpPr>
+          <p:cNvPr id="95" name="Group 94">
+            <a:extLst>
+              <a:ext uri="{FF2B5EF4-FFF2-40B4-BE49-F238E27FC236}">
+                <a16:creationId xmlns:a16="http://schemas.microsoft.com/office/drawing/2014/main" id="{3ACFF0E3-EE75-33F0-BC05-D150F24B88AA}"/>
+              </a:ext>
+            </a:extLst>
+          </p:cNvPr>
+          <p:cNvGrpSpPr/>
+          <p:nvPr/>
+        </p:nvGrpSpPr>
+        <p:grpSpPr>
+          <a:xfrm>
+            <a:off x="1760211" y="3606797"/>
+            <a:ext cx="1371600" cy="1371600"/>
+            <a:chOff x="213377" y="483633"/>
+            <a:chExt cx="1371600" cy="1371600"/>
+          </a:xfrm>
+        </p:grpSpPr>
+        <p:sp>
+          <p:nvSpPr>
+            <p:cNvPr id="96" name="Rectangle 95">
+              <a:extLst>
+                <a:ext uri="{FF2B5EF4-FFF2-40B4-BE49-F238E27FC236}">
+                  <a16:creationId xmlns:a16="http://schemas.microsoft.com/office/drawing/2014/main" id="{53745321-0C83-CCAF-E6C1-D5AFCE566BE4}"/>
+                </a:ext>
+              </a:extLst>
+            </p:cNvPr>
+            <p:cNvSpPr/>
+            <p:nvPr/>
+          </p:nvSpPr>
+          <p:spPr>
+            <a:xfrm>
+              <a:off x="213377" y="483633"/>
+              <a:ext cx="1371600" cy="1371600"/>
+            </a:xfrm>
+            <a:prstGeom prst="rect">
+              <a:avLst/>
+            </a:prstGeom>
+            <a:noFill/>
+            <a:ln w="76200">
+              <a:solidFill>
+                <a:schemeClr val="tx1"/>
+              </a:solidFill>
+            </a:ln>
+          </p:spPr>
+          <p:style>
+            <a:lnRef idx="2">
+              <a:schemeClr val="accent1">
+                <a:shade val="50000"/>
+              </a:schemeClr>
+            </a:lnRef>
+            <a:fillRef idx="1">
+              <a:schemeClr val="accent1"/>
+            </a:fillRef>
+            <a:effectRef idx="0">
+              <a:schemeClr val="accent1"/>
+            </a:effectRef>
+            <a:fontRef idx="minor">
+              <a:schemeClr val="lt1"/>
+            </a:fontRef>
+          </p:style>
+          <p:txBody>
+            <a:bodyPr rtlCol="0" anchor="ctr"/>
+            <a:lstStyle/>
+            <a:p>
+              <a:pPr algn="ctr"/>
+              <a:endParaRPr lang="en-US"/>
+            </a:p>
+          </p:txBody>
+        </p:sp>
+        <p:sp>
+          <p:nvSpPr>
+            <p:cNvPr id="97" name="Hexagon 96">
+              <a:extLst>
+                <a:ext uri="{FF2B5EF4-FFF2-40B4-BE49-F238E27FC236}">
+                  <a16:creationId xmlns:a16="http://schemas.microsoft.com/office/drawing/2014/main" id="{A9232A6D-CA56-BEB8-2BAF-0A81D270D487}"/>
+                </a:ext>
+              </a:extLst>
+            </p:cNvPr>
+            <p:cNvSpPr/>
+            <p:nvPr/>
+          </p:nvSpPr>
+          <p:spPr>
+            <a:xfrm>
+              <a:off x="304817" y="699533"/>
+              <a:ext cx="1188720" cy="1097280"/>
+            </a:xfrm>
+            <a:prstGeom prst="hexagon">
+              <a:avLst/>
+            </a:prstGeom>
+            <a:noFill/>
+            <a:ln w="38100" cap="flat" cmpd="sng" algn="ctr">
+              <a:solidFill>
+                <a:schemeClr val="dk1"/>
+              </a:solidFill>
+              <a:prstDash val="solid"/>
+              <a:round/>
+              <a:headEnd type="none" w="med" len="med"/>
+              <a:tailEnd type="none" w="med" len="med"/>
+            </a:ln>
+          </p:spPr>
+          <p:style>
+            <a:lnRef idx="0">
+              <a:scrgbClr r="0" g="0" b="0"/>
+            </a:lnRef>
+            <a:fillRef idx="0">
+              <a:scrgbClr r="0" g="0" b="0"/>
+            </a:fillRef>
+            <a:effectRef idx="0">
+              <a:scrgbClr r="0" g="0" b="0"/>
+            </a:effectRef>
+            <a:fontRef idx="minor">
+              <a:schemeClr val="dk1"/>
+            </a:fontRef>
+          </p:style>
+          <p:txBody>
+            <a:bodyPr rtlCol="0" anchor="ctr"/>
+            <a:lstStyle/>
+            <a:p>
+              <a:pPr algn="ctr"/>
+              <a:endParaRPr lang="en-US"/>
+            </a:p>
+          </p:txBody>
+        </p:sp>
+      </p:grpSp>
+      <p:grpSp>
+        <p:nvGrpSpPr>
+          <p:cNvPr id="98" name="Group 97">
+            <a:extLst>
+              <a:ext uri="{FF2B5EF4-FFF2-40B4-BE49-F238E27FC236}">
+                <a16:creationId xmlns:a16="http://schemas.microsoft.com/office/drawing/2014/main" id="{FDBF5770-7B45-F385-3742-28E304929C10}"/>
+              </a:ext>
+            </a:extLst>
+          </p:cNvPr>
+          <p:cNvGrpSpPr/>
+          <p:nvPr/>
+        </p:nvGrpSpPr>
+        <p:grpSpPr>
+          <a:xfrm>
+            <a:off x="2060921" y="2519939"/>
+            <a:ext cx="770179" cy="474929"/>
+            <a:chOff x="4366971" y="1518683"/>
+            <a:chExt cx="1632818" cy="1006873"/>
+          </a:xfrm>
+        </p:grpSpPr>
+        <p:sp>
+          <p:nvSpPr>
+            <p:cNvPr id="99" name="Moon 98">
+              <a:extLst>
+                <a:ext uri="{FF2B5EF4-FFF2-40B4-BE49-F238E27FC236}">
+                  <a16:creationId xmlns:a16="http://schemas.microsoft.com/office/drawing/2014/main" id="{133502E2-A9F6-F9CF-C975-588533B801B2}"/>
+                </a:ext>
+              </a:extLst>
+            </p:cNvPr>
+            <p:cNvSpPr/>
+            <p:nvPr/>
+          </p:nvSpPr>
+          <p:spPr>
+            <a:xfrm rot="5400000">
+              <a:off x="4929704" y="1543410"/>
+              <a:ext cx="469900" cy="1494392"/>
+            </a:xfrm>
+            <a:prstGeom prst="moon">
+              <a:avLst>
+                <a:gd name="adj" fmla="val 87500"/>
+              </a:avLst>
+            </a:prstGeom>
+          </p:spPr>
+          <p:style>
+            <a:lnRef idx="2">
+              <a:schemeClr val="dk1">
+                <a:shade val="50000"/>
+              </a:schemeClr>
+            </a:lnRef>
+            <a:fillRef idx="1">
+              <a:schemeClr val="dk1"/>
+            </a:fillRef>
+            <a:effectRef idx="0">
+              <a:schemeClr val="dk1"/>
+            </a:effectRef>
+            <a:fontRef idx="minor">
+              <a:schemeClr val="lt1"/>
+            </a:fontRef>
+          </p:style>
+          <p:txBody>
+            <a:bodyPr rtlCol="0" anchor="ctr"/>
+            <a:lstStyle/>
+            <a:p>
+              <a:pPr algn="ctr"/>
+              <a:endParaRPr lang="en-US"/>
+            </a:p>
+          </p:txBody>
+        </p:sp>
+        <p:grpSp>
+          <p:nvGrpSpPr>
+            <p:cNvPr id="100" name="Group 99">
+              <a:extLst>
+                <a:ext uri="{FF2B5EF4-FFF2-40B4-BE49-F238E27FC236}">
+                  <a16:creationId xmlns:a16="http://schemas.microsoft.com/office/drawing/2014/main" id="{424BF354-937B-4069-BBD5-08BAB2003875}"/>
+                </a:ext>
+              </a:extLst>
+            </p:cNvPr>
+            <p:cNvGrpSpPr/>
+            <p:nvPr/>
+          </p:nvGrpSpPr>
+          <p:grpSpPr>
+            <a:xfrm>
+              <a:off x="4366971" y="1555986"/>
+              <a:ext cx="574646" cy="861619"/>
+              <a:chOff x="4398721" y="1536936"/>
+              <a:chExt cx="574646" cy="861619"/>
+            </a:xfrm>
+          </p:grpSpPr>
+          <p:sp>
+            <p:nvSpPr>
+              <p:cNvPr id="105" name="Isosceles Triangle 104">
+                <a:extLst>
+                  <a:ext uri="{FF2B5EF4-FFF2-40B4-BE49-F238E27FC236}">
+                    <a16:creationId xmlns:a16="http://schemas.microsoft.com/office/drawing/2014/main" id="{09B474AA-63E0-2D2A-91BD-341F613184DA}"/>
+                  </a:ext>
+                </a:extLst>
+              </p:cNvPr>
+              <p:cNvSpPr/>
+              <p:nvPr/>
+            </p:nvSpPr>
+            <p:spPr>
+              <a:xfrm rot="19469091">
+                <a:off x="4398721" y="1712755"/>
+                <a:ext cx="230742" cy="685800"/>
+              </a:xfrm>
+              <a:prstGeom prst="triangle">
+                <a:avLst/>
+              </a:prstGeom>
+            </p:spPr>
+            <p:style>
+              <a:lnRef idx="2">
+                <a:schemeClr val="dk1">
+                  <a:shade val="50000"/>
+                </a:schemeClr>
+              </a:lnRef>
+              <a:fillRef idx="1">
+                <a:schemeClr val="dk1"/>
+              </a:fillRef>
+              <a:effectRef idx="0">
+                <a:schemeClr val="dk1"/>
+              </a:effectRef>
+              <a:fontRef idx="minor">
+                <a:schemeClr val="lt1"/>
+              </a:fontRef>
+            </p:style>
+            <p:txBody>
+              <a:bodyPr rtlCol="0" anchor="ctr"/>
+              <a:lstStyle/>
+              <a:p>
+                <a:pPr algn="ctr"/>
+                <a:endParaRPr lang="en-US"/>
+              </a:p>
+            </p:txBody>
+          </p:sp>
+          <p:sp>
+            <p:nvSpPr>
+              <p:cNvPr id="106" name="Isosceles Triangle 105">
+                <a:extLst>
+                  <a:ext uri="{FF2B5EF4-FFF2-40B4-BE49-F238E27FC236}">
+                    <a16:creationId xmlns:a16="http://schemas.microsoft.com/office/drawing/2014/main" id="{E44ABF4E-C5E5-D6EB-8789-FFE30F717BF4}"/>
+                  </a:ext>
+                </a:extLst>
+              </p:cNvPr>
+              <p:cNvSpPr/>
+              <p:nvPr/>
+            </p:nvSpPr>
+            <p:spPr>
+              <a:xfrm rot="20688119">
+                <a:off x="4742625" y="1536936"/>
+                <a:ext cx="230742" cy="685800"/>
+              </a:xfrm>
+              <a:prstGeom prst="triangle">
+                <a:avLst/>
+              </a:prstGeom>
+            </p:spPr>
+            <p:style>
+              <a:lnRef idx="2">
+                <a:schemeClr val="dk1">
+                  <a:shade val="50000"/>
+                </a:schemeClr>
+              </a:lnRef>
+              <a:fillRef idx="1">
+                <a:schemeClr val="dk1"/>
+              </a:fillRef>
+              <a:effectRef idx="0">
+                <a:schemeClr val="dk1"/>
+              </a:effectRef>
+              <a:fontRef idx="minor">
+                <a:schemeClr val="lt1"/>
+              </a:fontRef>
+            </p:style>
+            <p:txBody>
+              <a:bodyPr rtlCol="0" anchor="ctr"/>
+              <a:lstStyle/>
+              <a:p>
+                <a:pPr algn="ctr"/>
+                <a:endParaRPr lang="en-US"/>
+              </a:p>
+            </p:txBody>
+          </p:sp>
+        </p:grpSp>
+        <p:grpSp>
+          <p:nvGrpSpPr>
+            <p:cNvPr id="101" name="Group 100">
+              <a:extLst>
+                <a:ext uri="{FF2B5EF4-FFF2-40B4-BE49-F238E27FC236}">
+                  <a16:creationId xmlns:a16="http://schemas.microsoft.com/office/drawing/2014/main" id="{B963DCF6-71B5-927F-9F04-F3242378767F}"/>
+                </a:ext>
+              </a:extLst>
+            </p:cNvPr>
+            <p:cNvGrpSpPr/>
+            <p:nvPr/>
+          </p:nvGrpSpPr>
+          <p:grpSpPr>
+            <a:xfrm flipH="1">
+              <a:off x="5425143" y="1565156"/>
+              <a:ext cx="574646" cy="861619"/>
+              <a:chOff x="4551121" y="1689336"/>
+              <a:chExt cx="574646" cy="861619"/>
+            </a:xfrm>
+          </p:grpSpPr>
+          <p:sp>
+            <p:nvSpPr>
+              <p:cNvPr id="103" name="Isosceles Triangle 102">
+                <a:extLst>
+                  <a:ext uri="{FF2B5EF4-FFF2-40B4-BE49-F238E27FC236}">
+                    <a16:creationId xmlns:a16="http://schemas.microsoft.com/office/drawing/2014/main" id="{205F67CA-7163-56E8-DBDF-47981FEB31C4}"/>
+                  </a:ext>
+                </a:extLst>
+              </p:cNvPr>
+              <p:cNvSpPr/>
+              <p:nvPr/>
+            </p:nvSpPr>
+            <p:spPr>
+              <a:xfrm rot="19469091">
+                <a:off x="4551121" y="1865155"/>
+                <a:ext cx="230742" cy="685800"/>
+              </a:xfrm>
+              <a:prstGeom prst="triangle">
+                <a:avLst/>
+              </a:prstGeom>
+            </p:spPr>
+            <p:style>
+              <a:lnRef idx="2">
+                <a:schemeClr val="dk1">
+                  <a:shade val="50000"/>
+                </a:schemeClr>
+              </a:lnRef>
+              <a:fillRef idx="1">
+                <a:schemeClr val="dk1"/>
+              </a:fillRef>
+              <a:effectRef idx="0">
+                <a:schemeClr val="dk1"/>
+              </a:effectRef>
+              <a:fontRef idx="minor">
+                <a:schemeClr val="lt1"/>
+              </a:fontRef>
+            </p:style>
+            <p:txBody>
+              <a:bodyPr rtlCol="0" anchor="ctr"/>
+              <a:lstStyle/>
+              <a:p>
+                <a:pPr algn="ctr"/>
+                <a:endParaRPr lang="en-US"/>
+              </a:p>
+            </p:txBody>
+          </p:sp>
+          <p:sp>
+            <p:nvSpPr>
+              <p:cNvPr id="104" name="Isosceles Triangle 103">
+                <a:extLst>
+                  <a:ext uri="{FF2B5EF4-FFF2-40B4-BE49-F238E27FC236}">
+                    <a16:creationId xmlns:a16="http://schemas.microsoft.com/office/drawing/2014/main" id="{0D075012-34C9-667B-2E5D-79B64A304100}"/>
+                  </a:ext>
+                </a:extLst>
+              </p:cNvPr>
+              <p:cNvSpPr/>
+              <p:nvPr/>
+            </p:nvSpPr>
+            <p:spPr>
+              <a:xfrm rot="20688119">
+                <a:off x="4895025" y="1689336"/>
+                <a:ext cx="230742" cy="685800"/>
+              </a:xfrm>
+              <a:prstGeom prst="triangle">
+                <a:avLst/>
+              </a:prstGeom>
+            </p:spPr>
+            <p:style>
+              <a:lnRef idx="2">
+                <a:schemeClr val="dk1">
+                  <a:shade val="50000"/>
+                </a:schemeClr>
+              </a:lnRef>
+              <a:fillRef idx="1">
+                <a:schemeClr val="dk1"/>
+              </a:fillRef>
+              <a:effectRef idx="0">
+                <a:schemeClr val="dk1"/>
+              </a:effectRef>
+              <a:fontRef idx="minor">
+                <a:schemeClr val="lt1"/>
+              </a:fontRef>
+            </p:style>
+            <p:txBody>
+              <a:bodyPr rtlCol="0" anchor="ctr"/>
+              <a:lstStyle/>
+              <a:p>
+                <a:pPr algn="ctr"/>
+                <a:endParaRPr lang="en-US"/>
+              </a:p>
+            </p:txBody>
+          </p:sp>
+        </p:grpSp>
+        <p:sp>
+          <p:nvSpPr>
+            <p:cNvPr id="102" name="Isosceles Triangle 101">
+              <a:extLst>
+                <a:ext uri="{FF2B5EF4-FFF2-40B4-BE49-F238E27FC236}">
+                  <a16:creationId xmlns:a16="http://schemas.microsoft.com/office/drawing/2014/main" id="{F1DB5FBD-742E-2BD8-2E9C-D3C18EACECF6}"/>
+                </a:ext>
+              </a:extLst>
+            </p:cNvPr>
+            <p:cNvSpPr/>
+            <p:nvPr/>
+          </p:nvSpPr>
+          <p:spPr>
+            <a:xfrm flipH="1">
+              <a:off x="5070860" y="1518683"/>
+              <a:ext cx="230742" cy="685800"/>
+            </a:xfrm>
+            <a:prstGeom prst="triangle">
+              <a:avLst/>
+            </a:prstGeom>
+          </p:spPr>
+          <p:style>
+            <a:lnRef idx="2">
+              <a:schemeClr val="dk1">
+                <a:shade val="50000"/>
+              </a:schemeClr>
+            </a:lnRef>
+            <a:fillRef idx="1">
+              <a:schemeClr val="dk1"/>
+            </a:fillRef>
+            <a:effectRef idx="0">
+              <a:schemeClr val="dk1"/>
+            </a:effectRef>
+            <a:fontRef idx="minor">
+              <a:schemeClr val="lt1"/>
+            </a:fontRef>
+          </p:style>
+          <p:txBody>
+            <a:bodyPr rtlCol="0" anchor="ctr"/>
+            <a:lstStyle/>
+            <a:p>
+              <a:pPr algn="ctr"/>
+              <a:endParaRPr lang="en-US"/>
+            </a:p>
+          </p:txBody>
+        </p:sp>
+      </p:grpSp>
+      <p:grpSp>
+        <p:nvGrpSpPr>
+          <p:cNvPr id="107" name="Group 106">
+            <a:extLst>
+              <a:ext uri="{FF2B5EF4-FFF2-40B4-BE49-F238E27FC236}">
+                <a16:creationId xmlns:a16="http://schemas.microsoft.com/office/drawing/2014/main" id="{8FD23CA3-C491-B1C3-F8B7-53B901341FD5}"/>
+              </a:ext>
+            </a:extLst>
+          </p:cNvPr>
+          <p:cNvGrpSpPr/>
+          <p:nvPr/>
+        </p:nvGrpSpPr>
+        <p:grpSpPr>
+          <a:xfrm>
+            <a:off x="2094826" y="3931428"/>
+            <a:ext cx="702370" cy="722337"/>
+            <a:chOff x="6950179" y="209368"/>
+            <a:chExt cx="2475607" cy="2545983"/>
+          </a:xfrm>
+        </p:grpSpPr>
+        <p:sp>
+          <p:nvSpPr>
+            <p:cNvPr id="108" name="Moon 107">
+              <a:extLst>
+                <a:ext uri="{FF2B5EF4-FFF2-40B4-BE49-F238E27FC236}">
+                  <a16:creationId xmlns:a16="http://schemas.microsoft.com/office/drawing/2014/main" id="{E8CD6C4D-DD7C-313C-26D8-E5ED7CCD9F63}"/>
+                </a:ext>
+              </a:extLst>
+            </p:cNvPr>
+            <p:cNvSpPr/>
+            <p:nvPr/>
+          </p:nvSpPr>
+          <p:spPr>
+            <a:xfrm rot="5400000">
+              <a:off x="7798765" y="1128330"/>
+              <a:ext cx="778435" cy="2475607"/>
+            </a:xfrm>
+            <a:prstGeom prst="moon">
+              <a:avLst>
+                <a:gd name="adj" fmla="val 87500"/>
+              </a:avLst>
+            </a:prstGeom>
+          </p:spPr>
+          <p:style>
+            <a:lnRef idx="2">
+              <a:schemeClr val="dk1">
+                <a:shade val="50000"/>
+              </a:schemeClr>
+            </a:lnRef>
+            <a:fillRef idx="1">
+              <a:schemeClr val="dk1"/>
+            </a:fillRef>
+            <a:effectRef idx="0">
+              <a:schemeClr val="dk1"/>
+            </a:effectRef>
+            <a:fontRef idx="minor">
+              <a:schemeClr val="lt1"/>
+            </a:fontRef>
+          </p:style>
+          <p:txBody>
+            <a:bodyPr rtlCol="0" anchor="ctr"/>
+            <a:lstStyle/>
+            <a:p>
+              <a:pPr algn="ctr"/>
+              <a:endParaRPr lang="en-US"/>
+            </a:p>
+          </p:txBody>
+        </p:sp>
+        <p:grpSp>
+          <p:nvGrpSpPr>
+            <p:cNvPr id="109" name="Group 108">
+              <a:extLst>
+                <a:ext uri="{FF2B5EF4-FFF2-40B4-BE49-F238E27FC236}">
+                  <a16:creationId xmlns:a16="http://schemas.microsoft.com/office/drawing/2014/main" id="{5ACB9EB3-D072-A731-F2A6-21FC005F6E11}"/>
+                </a:ext>
+              </a:extLst>
+            </p:cNvPr>
+            <p:cNvGrpSpPr/>
+            <p:nvPr/>
+          </p:nvGrpSpPr>
+          <p:grpSpPr>
+            <a:xfrm>
+              <a:off x="7048732" y="209368"/>
+              <a:ext cx="2278499" cy="2002129"/>
+              <a:chOff x="3753737" y="1365068"/>
+              <a:chExt cx="2278499" cy="2002129"/>
+            </a:xfrm>
+          </p:grpSpPr>
+          <p:sp>
+            <p:nvSpPr>
+              <p:cNvPr id="110" name="Isosceles Triangle 109">
+                <a:extLst>
+                  <a:ext uri="{FF2B5EF4-FFF2-40B4-BE49-F238E27FC236}">
+                    <a16:creationId xmlns:a16="http://schemas.microsoft.com/office/drawing/2014/main" id="{8998A6A4-D158-BE60-C0D2-4FE90D0EEB54}"/>
+                  </a:ext>
+                </a:extLst>
+              </p:cNvPr>
+              <p:cNvSpPr/>
+              <p:nvPr/>
+            </p:nvSpPr>
+            <p:spPr>
+              <a:xfrm flipH="1">
+                <a:off x="4555226" y="1365068"/>
+                <a:ext cx="673630" cy="2002129"/>
+              </a:xfrm>
+              <a:prstGeom prst="triangle">
+                <a:avLst/>
+              </a:prstGeom>
+            </p:spPr>
+            <p:style>
+              <a:lnRef idx="2">
+                <a:schemeClr val="dk1">
+                  <a:shade val="50000"/>
+                </a:schemeClr>
+              </a:lnRef>
+              <a:fillRef idx="1">
+                <a:schemeClr val="dk1"/>
+              </a:fillRef>
+              <a:effectRef idx="0">
+                <a:schemeClr val="dk1"/>
+              </a:effectRef>
+              <a:fontRef idx="minor">
+                <a:schemeClr val="lt1"/>
+              </a:fontRef>
+            </p:style>
+            <p:txBody>
+              <a:bodyPr rtlCol="0" anchor="ctr"/>
+              <a:lstStyle/>
+              <a:p>
+                <a:pPr algn="ctr"/>
+                <a:endParaRPr lang="en-US"/>
+              </a:p>
+            </p:txBody>
+          </p:sp>
+          <p:grpSp>
+            <p:nvGrpSpPr>
+              <p:cNvPr id="111" name="Group 110">
+                <a:extLst>
+                  <a:ext uri="{FF2B5EF4-FFF2-40B4-BE49-F238E27FC236}">
+                    <a16:creationId xmlns:a16="http://schemas.microsoft.com/office/drawing/2014/main" id="{31184E7C-818D-1038-12DB-BF16B792250E}"/>
+                  </a:ext>
+                </a:extLst>
+              </p:cNvPr>
+              <p:cNvGrpSpPr/>
+              <p:nvPr/>
+            </p:nvGrpSpPr>
+            <p:grpSpPr>
+              <a:xfrm>
+                <a:off x="3753737" y="2018274"/>
+                <a:ext cx="940920" cy="1047698"/>
+                <a:chOff x="3753737" y="2018274"/>
+                <a:chExt cx="940920" cy="1047698"/>
+              </a:xfrm>
+            </p:grpSpPr>
+            <p:sp>
+              <p:nvSpPr>
+                <p:cNvPr id="116" name="Isosceles Triangle 115">
+                  <a:extLst>
+                    <a:ext uri="{FF2B5EF4-FFF2-40B4-BE49-F238E27FC236}">
+                      <a16:creationId xmlns:a16="http://schemas.microsoft.com/office/drawing/2014/main" id="{BE254664-46DB-15BA-55A6-633CBC8DF6E2}"/>
+                    </a:ext>
+                  </a:extLst>
+                </p:cNvPr>
+                <p:cNvSpPr/>
+                <p:nvPr/>
+              </p:nvSpPr>
+              <p:spPr>
+                <a:xfrm rot="16779459">
+                  <a:off x="4296631" y="1899647"/>
+                  <a:ext cx="279400" cy="516653"/>
+                </a:xfrm>
+                <a:prstGeom prst="triangle">
+                  <a:avLst/>
+                </a:prstGeom>
+              </p:spPr>
+              <p:style>
+                <a:lnRef idx="2">
+                  <a:schemeClr val="dk1">
+                    <a:shade val="50000"/>
+                  </a:schemeClr>
+                </a:lnRef>
+                <a:fillRef idx="1">
+                  <a:schemeClr val="dk1"/>
+                </a:fillRef>
+                <a:effectRef idx="0">
+                  <a:schemeClr val="dk1"/>
+                </a:effectRef>
+                <a:fontRef idx="minor">
+                  <a:schemeClr val="lt1"/>
+                </a:fontRef>
+              </p:style>
+              <p:txBody>
+                <a:bodyPr rtlCol="0" anchor="ctr"/>
+                <a:lstStyle/>
+                <a:p>
+                  <a:pPr algn="ctr"/>
+                  <a:endParaRPr lang="en-US"/>
+                </a:p>
+              </p:txBody>
+            </p:sp>
+            <p:sp>
+              <p:nvSpPr>
+                <p:cNvPr id="117" name="Isosceles Triangle 116">
+                  <a:extLst>
+                    <a:ext uri="{FF2B5EF4-FFF2-40B4-BE49-F238E27FC236}">
+                      <a16:creationId xmlns:a16="http://schemas.microsoft.com/office/drawing/2014/main" id="{EB359D96-FAD5-DFC4-7C29-D80EB9D02AF1}"/>
+                    </a:ext>
+                  </a:extLst>
+                </p:cNvPr>
+                <p:cNvSpPr/>
+                <p:nvPr/>
+              </p:nvSpPr>
+              <p:spPr>
+                <a:xfrm rot="16779459">
+                  <a:off x="4023093" y="2517216"/>
+                  <a:ext cx="279400" cy="818112"/>
+                </a:xfrm>
+                <a:prstGeom prst="triangle">
+                  <a:avLst/>
+                </a:prstGeom>
+              </p:spPr>
+              <p:style>
+                <a:lnRef idx="2">
+                  <a:schemeClr val="dk1">
+                    <a:shade val="50000"/>
+                  </a:schemeClr>
+                </a:lnRef>
+                <a:fillRef idx="1">
+                  <a:schemeClr val="dk1"/>
+                </a:fillRef>
+                <a:effectRef idx="0">
+                  <a:schemeClr val="dk1"/>
+                </a:effectRef>
+                <a:fontRef idx="minor">
+                  <a:schemeClr val="lt1"/>
+                </a:fontRef>
+              </p:style>
+              <p:txBody>
+                <a:bodyPr rtlCol="0" anchor="ctr"/>
+                <a:lstStyle/>
+                <a:p>
+                  <a:pPr algn="ctr"/>
+                  <a:endParaRPr lang="en-US"/>
+                </a:p>
+              </p:txBody>
+            </p:sp>
+            <p:sp>
+              <p:nvSpPr>
+                <p:cNvPr id="118" name="Isosceles Triangle 117">
+                  <a:extLst>
+                    <a:ext uri="{FF2B5EF4-FFF2-40B4-BE49-F238E27FC236}">
+                      <a16:creationId xmlns:a16="http://schemas.microsoft.com/office/drawing/2014/main" id="{2555B9CA-BF14-96BC-5287-09CB362E1702}"/>
+                    </a:ext>
+                  </a:extLst>
+                </p:cNvPr>
+                <p:cNvSpPr/>
+                <p:nvPr/>
+              </p:nvSpPr>
+              <p:spPr>
+                <a:xfrm rot="16779459">
+                  <a:off x="4169431" y="2180356"/>
+                  <a:ext cx="279400" cy="656846"/>
+                </a:xfrm>
+                <a:prstGeom prst="triangle">
+                  <a:avLst/>
+                </a:prstGeom>
+              </p:spPr>
+              <p:style>
+                <a:lnRef idx="2">
+                  <a:schemeClr val="dk1">
+                    <a:shade val="50000"/>
+                  </a:schemeClr>
+                </a:lnRef>
+                <a:fillRef idx="1">
+                  <a:schemeClr val="dk1"/>
+                </a:fillRef>
+                <a:effectRef idx="0">
+                  <a:schemeClr val="dk1"/>
+                </a:effectRef>
+                <a:fontRef idx="minor">
+                  <a:schemeClr val="lt1"/>
+                </a:fontRef>
+              </p:style>
+              <p:txBody>
+                <a:bodyPr rtlCol="0" anchor="ctr"/>
+                <a:lstStyle/>
+                <a:p>
+                  <a:pPr algn="ctr"/>
+                  <a:endParaRPr lang="en-US"/>
+                </a:p>
+              </p:txBody>
+            </p:sp>
+          </p:grpSp>
+          <p:grpSp>
+            <p:nvGrpSpPr>
+              <p:cNvPr id="112" name="Group 111">
+                <a:extLst>
+                  <a:ext uri="{FF2B5EF4-FFF2-40B4-BE49-F238E27FC236}">
+                    <a16:creationId xmlns:a16="http://schemas.microsoft.com/office/drawing/2014/main" id="{975210B1-C581-916B-464E-7CB4EC58A7D6}"/>
+                  </a:ext>
+                </a:extLst>
+              </p:cNvPr>
+              <p:cNvGrpSpPr/>
+              <p:nvPr/>
+            </p:nvGrpSpPr>
+            <p:grpSpPr>
+              <a:xfrm flipH="1">
+                <a:off x="5091316" y="2020148"/>
+                <a:ext cx="940920" cy="1047698"/>
+                <a:chOff x="3753737" y="2018274"/>
+                <a:chExt cx="940920" cy="1047698"/>
+              </a:xfrm>
+            </p:grpSpPr>
+            <p:sp>
+              <p:nvSpPr>
+                <p:cNvPr id="113" name="Isosceles Triangle 112">
+                  <a:extLst>
+                    <a:ext uri="{FF2B5EF4-FFF2-40B4-BE49-F238E27FC236}">
+                      <a16:creationId xmlns:a16="http://schemas.microsoft.com/office/drawing/2014/main" id="{9689A571-4995-CC2B-997E-8FD391C20D27}"/>
+                    </a:ext>
+                  </a:extLst>
+                </p:cNvPr>
+                <p:cNvSpPr/>
+                <p:nvPr/>
+              </p:nvSpPr>
+              <p:spPr>
+                <a:xfrm rot="16779459">
+                  <a:off x="4296631" y="1899647"/>
+                  <a:ext cx="279400" cy="516653"/>
+                </a:xfrm>
+                <a:prstGeom prst="triangle">
+                  <a:avLst/>
+                </a:prstGeom>
+              </p:spPr>
+              <p:style>
+                <a:lnRef idx="2">
+                  <a:schemeClr val="dk1">
+                    <a:shade val="50000"/>
+                  </a:schemeClr>
+                </a:lnRef>
+                <a:fillRef idx="1">
+                  <a:schemeClr val="dk1"/>
+                </a:fillRef>
+                <a:effectRef idx="0">
+                  <a:schemeClr val="dk1"/>
+                </a:effectRef>
+                <a:fontRef idx="minor">
+                  <a:schemeClr val="lt1"/>
+                </a:fontRef>
+              </p:style>
+              <p:txBody>
+                <a:bodyPr rtlCol="0" anchor="ctr"/>
+                <a:lstStyle/>
+                <a:p>
+                  <a:pPr algn="ctr"/>
+                  <a:endParaRPr lang="en-US"/>
+                </a:p>
+              </p:txBody>
+            </p:sp>
+            <p:sp>
+              <p:nvSpPr>
+                <p:cNvPr id="114" name="Isosceles Triangle 113">
+                  <a:extLst>
+                    <a:ext uri="{FF2B5EF4-FFF2-40B4-BE49-F238E27FC236}">
+                      <a16:creationId xmlns:a16="http://schemas.microsoft.com/office/drawing/2014/main" id="{CDB90B00-58A9-8743-4722-6BD00B4A489D}"/>
+                    </a:ext>
+                  </a:extLst>
+                </p:cNvPr>
+                <p:cNvSpPr/>
+                <p:nvPr/>
+              </p:nvSpPr>
+              <p:spPr>
+                <a:xfrm rot="16779459">
+                  <a:off x="4023093" y="2517216"/>
+                  <a:ext cx="279400" cy="818112"/>
+                </a:xfrm>
+                <a:prstGeom prst="triangle">
+                  <a:avLst/>
+                </a:prstGeom>
+              </p:spPr>
+              <p:style>
+                <a:lnRef idx="2">
+                  <a:schemeClr val="dk1">
+                    <a:shade val="50000"/>
+                  </a:schemeClr>
+                </a:lnRef>
+                <a:fillRef idx="1">
+                  <a:schemeClr val="dk1"/>
+                </a:fillRef>
+                <a:effectRef idx="0">
+                  <a:schemeClr val="dk1"/>
+                </a:effectRef>
+                <a:fontRef idx="minor">
+                  <a:schemeClr val="lt1"/>
+                </a:fontRef>
+              </p:style>
+              <p:txBody>
+                <a:bodyPr rtlCol="0" anchor="ctr"/>
+                <a:lstStyle/>
+                <a:p>
+                  <a:pPr algn="ctr"/>
+                  <a:endParaRPr lang="en-US"/>
+                </a:p>
+              </p:txBody>
+            </p:sp>
+            <p:sp>
+              <p:nvSpPr>
+                <p:cNvPr id="115" name="Isosceles Triangle 114">
+                  <a:extLst>
+                    <a:ext uri="{FF2B5EF4-FFF2-40B4-BE49-F238E27FC236}">
+                      <a16:creationId xmlns:a16="http://schemas.microsoft.com/office/drawing/2014/main" id="{537522A5-45B2-AF42-ABE9-886D16420C79}"/>
+                    </a:ext>
+                  </a:extLst>
+                </p:cNvPr>
+                <p:cNvSpPr/>
+                <p:nvPr/>
+              </p:nvSpPr>
+              <p:spPr>
+                <a:xfrm rot="16779459">
+                  <a:off x="4169431" y="2180356"/>
+                  <a:ext cx="279400" cy="656846"/>
+                </a:xfrm>
+                <a:prstGeom prst="triangle">
+                  <a:avLst/>
+                </a:prstGeom>
+              </p:spPr>
+              <p:style>
+                <a:lnRef idx="2">
+                  <a:schemeClr val="dk1">
+                    <a:shade val="50000"/>
+                  </a:schemeClr>
+                </a:lnRef>
+                <a:fillRef idx="1">
+                  <a:schemeClr val="dk1"/>
+                </a:fillRef>
+                <a:effectRef idx="0">
+                  <a:schemeClr val="dk1"/>
+                </a:effectRef>
+                <a:fontRef idx="minor">
+                  <a:schemeClr val="lt1"/>
+                </a:fontRef>
+              </p:style>
+              <p:txBody>
+                <a:bodyPr rtlCol="0" anchor="ctr"/>
+                <a:lstStyle/>
+                <a:p>
+                  <a:pPr algn="ctr"/>
+                  <a:endParaRPr lang="en-US"/>
+                </a:p>
+              </p:txBody>
+            </p:sp>
+          </p:grpSp>
+        </p:grpSp>
+      </p:grpSp>
+      <p:grpSp>
+        <p:nvGrpSpPr>
+          <p:cNvPr id="76" name="Group 75">
+            <a:extLst>
+              <a:ext uri="{FF2B5EF4-FFF2-40B4-BE49-F238E27FC236}">
+                <a16:creationId xmlns:a16="http://schemas.microsoft.com/office/drawing/2014/main" id="{F44AC8A3-2066-D0D9-C90A-CF2EF0422C49}"/>
+              </a:ext>
+            </a:extLst>
+          </p:cNvPr>
+          <p:cNvGrpSpPr/>
+          <p:nvPr/>
+        </p:nvGrpSpPr>
+        <p:grpSpPr>
+          <a:xfrm>
+            <a:off x="3462797" y="2482289"/>
+            <a:ext cx="978554" cy="542441"/>
+            <a:chOff x="3843947" y="2567111"/>
+            <a:chExt cx="3176630" cy="1760897"/>
+          </a:xfrm>
+        </p:grpSpPr>
+        <p:sp>
+          <p:nvSpPr>
+            <p:cNvPr id="121" name="Rectangle 120">
+              <a:extLst>
+                <a:ext uri="{FF2B5EF4-FFF2-40B4-BE49-F238E27FC236}">
+                  <a16:creationId xmlns:a16="http://schemas.microsoft.com/office/drawing/2014/main" id="{2D670DB4-77B1-1903-1919-8B748E038185}"/>
+                </a:ext>
+              </a:extLst>
+            </p:cNvPr>
+            <p:cNvSpPr/>
+            <p:nvPr/>
+          </p:nvSpPr>
+          <p:spPr>
+            <a:xfrm rot="19070274">
+              <a:off x="4957620" y="2708833"/>
+              <a:ext cx="133896" cy="1040682"/>
+            </a:xfrm>
+            <a:prstGeom prst="rect">
+              <a:avLst/>
+            </a:prstGeom>
+          </p:spPr>
+          <p:style>
+            <a:lnRef idx="2">
+              <a:schemeClr val="dk1">
+                <a:shade val="50000"/>
+              </a:schemeClr>
+            </a:lnRef>
+            <a:fillRef idx="1">
+              <a:schemeClr val="dk1"/>
+            </a:fillRef>
+            <a:effectRef idx="0">
+              <a:schemeClr val="dk1"/>
+            </a:effectRef>
+            <a:fontRef idx="minor">
+              <a:schemeClr val="lt1"/>
+            </a:fontRef>
+          </p:style>
+          <p:txBody>
+            <a:bodyPr rtlCol="0" anchor="ctr"/>
+            <a:lstStyle/>
+            <a:p>
+              <a:pPr algn="ctr"/>
+              <a:endParaRPr lang="en-US"/>
+            </a:p>
+          </p:txBody>
+        </p:sp>
+        <p:sp>
+          <p:nvSpPr>
+            <p:cNvPr id="124" name="Moon 123">
+              <a:extLst>
+                <a:ext uri="{FF2B5EF4-FFF2-40B4-BE49-F238E27FC236}">
+                  <a16:creationId xmlns:a16="http://schemas.microsoft.com/office/drawing/2014/main" id="{0E261B77-C996-4E2D-58C5-133013D718F9}"/>
+                </a:ext>
+              </a:extLst>
+            </p:cNvPr>
+            <p:cNvSpPr/>
+            <p:nvPr/>
+          </p:nvSpPr>
+          <p:spPr>
+            <a:xfrm rot="14859337" flipH="1">
+              <a:off x="4176494" y="2568153"/>
+              <a:ext cx="460542" cy="1125635"/>
+            </a:xfrm>
+            <a:prstGeom prst="moon">
+              <a:avLst>
+                <a:gd name="adj" fmla="val 30886"/>
+              </a:avLst>
+            </a:prstGeom>
+          </p:spPr>
+          <p:style>
+            <a:lnRef idx="2">
+              <a:schemeClr val="dk1">
+                <a:shade val="50000"/>
+              </a:schemeClr>
+            </a:lnRef>
+            <a:fillRef idx="1">
+              <a:schemeClr val="dk1"/>
+            </a:fillRef>
+            <a:effectRef idx="0">
+              <a:schemeClr val="dk1"/>
+            </a:effectRef>
+            <a:fontRef idx="minor">
+              <a:schemeClr val="lt1"/>
+            </a:fontRef>
+          </p:style>
+          <p:txBody>
+            <a:bodyPr rtlCol="0" anchor="ctr"/>
+            <a:lstStyle/>
+            <a:p>
+              <a:pPr algn="ctr"/>
+              <a:endParaRPr lang="en-US"/>
+            </a:p>
+          </p:txBody>
+        </p:sp>
+        <p:sp>
+          <p:nvSpPr>
+            <p:cNvPr id="73" name="Oval 72">
+              <a:extLst>
+                <a:ext uri="{FF2B5EF4-FFF2-40B4-BE49-F238E27FC236}">
+                  <a16:creationId xmlns:a16="http://schemas.microsoft.com/office/drawing/2014/main" id="{7089BF40-5AF6-350F-50B9-102126547B44}"/>
+                </a:ext>
+              </a:extLst>
+            </p:cNvPr>
+            <p:cNvSpPr/>
+            <p:nvPr/>
+          </p:nvSpPr>
+          <p:spPr>
+            <a:xfrm>
+              <a:off x="5014867" y="3364464"/>
+              <a:ext cx="949737" cy="676019"/>
+            </a:xfrm>
+            <a:prstGeom prst="ellipse">
+              <a:avLst/>
+            </a:prstGeom>
+          </p:spPr>
+          <p:style>
+            <a:lnRef idx="2">
+              <a:schemeClr val="dk1">
+                <a:shade val="50000"/>
+              </a:schemeClr>
+            </a:lnRef>
+            <a:fillRef idx="1">
+              <a:schemeClr val="dk1"/>
+            </a:fillRef>
+            <a:effectRef idx="0">
+              <a:schemeClr val="dk1"/>
+            </a:effectRef>
+            <a:fontRef idx="minor">
+              <a:schemeClr val="lt1"/>
+            </a:fontRef>
+          </p:style>
+          <p:txBody>
+            <a:bodyPr rtlCol="0" anchor="ctr"/>
+            <a:lstStyle/>
+            <a:p>
+              <a:pPr algn="ctr"/>
+              <a:endParaRPr lang="en-US"/>
+            </a:p>
+          </p:txBody>
+        </p:sp>
+        <p:sp>
+          <p:nvSpPr>
+            <p:cNvPr id="128" name="Rectangle 127">
+              <a:extLst>
+                <a:ext uri="{FF2B5EF4-FFF2-40B4-BE49-F238E27FC236}">
+                  <a16:creationId xmlns:a16="http://schemas.microsoft.com/office/drawing/2014/main" id="{13E2888A-EB23-7DE0-568C-4C1A187F68F7}"/>
+                </a:ext>
+              </a:extLst>
+            </p:cNvPr>
+            <p:cNvSpPr/>
+            <p:nvPr/>
+          </p:nvSpPr>
+          <p:spPr>
+            <a:xfrm rot="17187329">
+              <a:off x="4926950" y="3006968"/>
+              <a:ext cx="133896" cy="1040682"/>
+            </a:xfrm>
+            <a:prstGeom prst="rect">
+              <a:avLst/>
+            </a:prstGeom>
+          </p:spPr>
+          <p:style>
+            <a:lnRef idx="2">
+              <a:schemeClr val="dk1">
+                <a:shade val="50000"/>
+              </a:schemeClr>
+            </a:lnRef>
+            <a:fillRef idx="1">
+              <a:schemeClr val="dk1"/>
+            </a:fillRef>
+            <a:effectRef idx="0">
+              <a:schemeClr val="dk1"/>
+            </a:effectRef>
+            <a:fontRef idx="minor">
+              <a:schemeClr val="lt1"/>
+            </a:fontRef>
+          </p:style>
+          <p:txBody>
+            <a:bodyPr rtlCol="0" anchor="ctr"/>
+            <a:lstStyle/>
+            <a:p>
+              <a:pPr algn="ctr"/>
+              <a:endParaRPr lang="en-US"/>
+            </a:p>
+          </p:txBody>
+        </p:sp>
+        <p:sp>
+          <p:nvSpPr>
+            <p:cNvPr id="129" name="Moon 128">
+              <a:extLst>
+                <a:ext uri="{FF2B5EF4-FFF2-40B4-BE49-F238E27FC236}">
+                  <a16:creationId xmlns:a16="http://schemas.microsoft.com/office/drawing/2014/main" id="{9215818D-C6E8-8007-00C5-4A371D632298}"/>
+                </a:ext>
+              </a:extLst>
+            </p:cNvPr>
+            <p:cNvSpPr/>
+            <p:nvPr/>
+          </p:nvSpPr>
+          <p:spPr>
+            <a:xfrm rot="12976392" flipH="1">
+              <a:off x="4185063" y="3202373"/>
+              <a:ext cx="460542" cy="1125635"/>
+            </a:xfrm>
+            <a:prstGeom prst="moon">
+              <a:avLst>
+                <a:gd name="adj" fmla="val 30886"/>
+              </a:avLst>
+            </a:prstGeom>
+          </p:spPr>
+          <p:style>
+            <a:lnRef idx="2">
+              <a:schemeClr val="dk1">
+                <a:shade val="50000"/>
+              </a:schemeClr>
+            </a:lnRef>
+            <a:fillRef idx="1">
+              <a:schemeClr val="dk1"/>
+            </a:fillRef>
+            <a:effectRef idx="0">
+              <a:schemeClr val="dk1"/>
+            </a:effectRef>
+            <a:fontRef idx="minor">
+              <a:schemeClr val="lt1"/>
+            </a:fontRef>
+          </p:style>
+          <p:txBody>
+            <a:bodyPr rtlCol="0" anchor="ctr"/>
+            <a:lstStyle/>
+            <a:p>
+              <a:pPr algn="ctr"/>
+              <a:endParaRPr lang="en-US"/>
+            </a:p>
+          </p:txBody>
+        </p:sp>
+        <p:sp>
+          <p:nvSpPr>
+            <p:cNvPr id="74" name="Oval 73">
+              <a:extLst>
+                <a:ext uri="{FF2B5EF4-FFF2-40B4-BE49-F238E27FC236}">
+                  <a16:creationId xmlns:a16="http://schemas.microsoft.com/office/drawing/2014/main" id="{2C28F46A-1A47-F154-9CB5-39584A6A7A68}"/>
+                </a:ext>
+              </a:extLst>
+            </p:cNvPr>
+            <p:cNvSpPr/>
+            <p:nvPr/>
+          </p:nvSpPr>
+          <p:spPr>
+            <a:xfrm>
+              <a:off x="5514216" y="2567111"/>
+              <a:ext cx="1506361" cy="1497190"/>
+            </a:xfrm>
+            <a:prstGeom prst="ellipse">
+              <a:avLst/>
+            </a:prstGeom>
+          </p:spPr>
+          <p:style>
+            <a:lnRef idx="2">
+              <a:schemeClr val="dk1">
+                <a:shade val="50000"/>
+              </a:schemeClr>
+            </a:lnRef>
+            <a:fillRef idx="1">
+              <a:schemeClr val="dk1"/>
+            </a:fillRef>
+            <a:effectRef idx="0">
+              <a:schemeClr val="dk1"/>
+            </a:effectRef>
+            <a:fontRef idx="minor">
+              <a:schemeClr val="lt1"/>
+            </a:fontRef>
+          </p:style>
+          <p:txBody>
+            <a:bodyPr rtlCol="0" anchor="ctr"/>
+            <a:lstStyle/>
+            <a:p>
+              <a:pPr algn="ctr"/>
+              <a:endParaRPr lang="en-US"/>
+            </a:p>
+          </p:txBody>
+        </p:sp>
+        <p:sp>
+          <p:nvSpPr>
+            <p:cNvPr id="131" name="Oval 130">
+              <a:extLst>
+                <a:ext uri="{FF2B5EF4-FFF2-40B4-BE49-F238E27FC236}">
+                  <a16:creationId xmlns:a16="http://schemas.microsoft.com/office/drawing/2014/main" id="{9F7AE301-236B-C342-A907-B76DC7788780}"/>
+                </a:ext>
+              </a:extLst>
+            </p:cNvPr>
+            <p:cNvSpPr/>
+            <p:nvPr/>
+          </p:nvSpPr>
+          <p:spPr>
+            <a:xfrm>
+              <a:off x="5729248" y="2754475"/>
+              <a:ext cx="470712" cy="470712"/>
+            </a:xfrm>
+            <a:prstGeom prst="ellipse">
+              <a:avLst/>
+            </a:prstGeom>
+          </p:spPr>
+          <p:style>
+            <a:lnRef idx="2">
+              <a:schemeClr val="dk1"/>
+            </a:lnRef>
+            <a:fillRef idx="1">
+              <a:schemeClr val="lt1"/>
+            </a:fillRef>
+            <a:effectRef idx="0">
+              <a:schemeClr val="dk1"/>
+            </a:effectRef>
+            <a:fontRef idx="minor">
+              <a:schemeClr val="dk1"/>
+            </a:fontRef>
+          </p:style>
+          <p:txBody>
+            <a:bodyPr rtlCol="0" anchor="ctr"/>
+            <a:lstStyle/>
+            <a:p>
+              <a:pPr algn="ctr"/>
+              <a:endParaRPr lang="en-US"/>
+            </a:p>
+          </p:txBody>
+        </p:sp>
+        <p:sp>
+          <p:nvSpPr>
+            <p:cNvPr id="132" name="Oval 131">
+              <a:extLst>
+                <a:ext uri="{FF2B5EF4-FFF2-40B4-BE49-F238E27FC236}">
+                  <a16:creationId xmlns:a16="http://schemas.microsoft.com/office/drawing/2014/main" id="{41DB8E87-32E3-8531-4B68-0A4C294D3C9F}"/>
+                </a:ext>
+              </a:extLst>
+            </p:cNvPr>
+            <p:cNvSpPr/>
+            <p:nvPr/>
+          </p:nvSpPr>
+          <p:spPr>
+            <a:xfrm>
+              <a:off x="6250473" y="2648688"/>
+              <a:ext cx="470712" cy="470712"/>
+            </a:xfrm>
+            <a:prstGeom prst="ellipse">
+              <a:avLst/>
+            </a:prstGeom>
+          </p:spPr>
+          <p:style>
+            <a:lnRef idx="2">
+              <a:schemeClr val="dk1"/>
+            </a:lnRef>
+            <a:fillRef idx="1">
+              <a:schemeClr val="lt1"/>
+            </a:fillRef>
+            <a:effectRef idx="0">
+              <a:schemeClr val="dk1"/>
+            </a:effectRef>
+            <a:fontRef idx="minor">
+              <a:schemeClr val="dk1"/>
+            </a:fontRef>
+          </p:style>
+          <p:txBody>
+            <a:bodyPr rtlCol="0" anchor="ctr"/>
+            <a:lstStyle/>
+            <a:p>
+              <a:pPr algn="ctr"/>
+              <a:endParaRPr lang="en-US"/>
+            </a:p>
+          </p:txBody>
+        </p:sp>
+        <p:sp>
+          <p:nvSpPr>
+            <p:cNvPr id="133" name="Oval 132">
+              <a:extLst>
+                <a:ext uri="{FF2B5EF4-FFF2-40B4-BE49-F238E27FC236}">
+                  <a16:creationId xmlns:a16="http://schemas.microsoft.com/office/drawing/2014/main" id="{62D49306-297B-7613-D778-B56F3CB42952}"/>
+                </a:ext>
+              </a:extLst>
+            </p:cNvPr>
+            <p:cNvSpPr/>
+            <p:nvPr/>
+          </p:nvSpPr>
+          <p:spPr>
+            <a:xfrm>
+              <a:off x="5602645" y="3268200"/>
+              <a:ext cx="470712" cy="470712"/>
+            </a:xfrm>
+            <a:prstGeom prst="ellipse">
+              <a:avLst/>
+            </a:prstGeom>
+          </p:spPr>
+          <p:style>
+            <a:lnRef idx="2">
+              <a:schemeClr val="dk1"/>
+            </a:lnRef>
+            <a:fillRef idx="1">
+              <a:schemeClr val="lt1"/>
+            </a:fillRef>
+            <a:effectRef idx="0">
+              <a:schemeClr val="dk1"/>
+            </a:effectRef>
+            <a:fontRef idx="minor">
+              <a:schemeClr val="dk1"/>
+            </a:fontRef>
+          </p:style>
+          <p:txBody>
+            <a:bodyPr rtlCol="0" anchor="ctr"/>
+            <a:lstStyle/>
+            <a:p>
+              <a:pPr algn="ctr"/>
+              <a:endParaRPr lang="en-US"/>
+            </a:p>
+          </p:txBody>
+        </p:sp>
+        <p:sp>
+          <p:nvSpPr>
+            <p:cNvPr id="134" name="Oval 133">
+              <a:extLst>
+                <a:ext uri="{FF2B5EF4-FFF2-40B4-BE49-F238E27FC236}">
+                  <a16:creationId xmlns:a16="http://schemas.microsoft.com/office/drawing/2014/main" id="{0A36FA44-4448-3EF9-8C2A-BCFCBD1D92C0}"/>
+                </a:ext>
+              </a:extLst>
+            </p:cNvPr>
+            <p:cNvSpPr/>
+            <p:nvPr/>
+          </p:nvSpPr>
+          <p:spPr>
+            <a:xfrm>
+              <a:off x="6068898" y="3119400"/>
+              <a:ext cx="470712" cy="470712"/>
+            </a:xfrm>
+            <a:prstGeom prst="ellipse">
+              <a:avLst/>
+            </a:prstGeom>
+          </p:spPr>
+          <p:style>
+            <a:lnRef idx="2">
+              <a:schemeClr val="dk1"/>
+            </a:lnRef>
+            <a:fillRef idx="1">
+              <a:schemeClr val="lt1"/>
+            </a:fillRef>
+            <a:effectRef idx="0">
+              <a:schemeClr val="dk1"/>
+            </a:effectRef>
+            <a:fontRef idx="minor">
+              <a:schemeClr val="dk1"/>
+            </a:fontRef>
+          </p:style>
+          <p:txBody>
+            <a:bodyPr rtlCol="0" anchor="ctr"/>
+            <a:lstStyle/>
+            <a:p>
+              <a:pPr algn="ctr"/>
+              <a:endParaRPr lang="en-US"/>
+            </a:p>
+          </p:txBody>
+        </p:sp>
+        <p:sp>
+          <p:nvSpPr>
+            <p:cNvPr id="135" name="Oval 134">
+              <a:extLst>
+                <a:ext uri="{FF2B5EF4-FFF2-40B4-BE49-F238E27FC236}">
+                  <a16:creationId xmlns:a16="http://schemas.microsoft.com/office/drawing/2014/main" id="{B7909E33-1320-4CC8-3249-F1A10292484B}"/>
+                </a:ext>
+              </a:extLst>
+            </p:cNvPr>
+            <p:cNvSpPr/>
+            <p:nvPr/>
+          </p:nvSpPr>
+          <p:spPr>
+            <a:xfrm>
+              <a:off x="6000900" y="3601371"/>
+              <a:ext cx="470712" cy="470712"/>
+            </a:xfrm>
+            <a:prstGeom prst="ellipse">
+              <a:avLst/>
+            </a:prstGeom>
+          </p:spPr>
+          <p:style>
+            <a:lnRef idx="2">
+              <a:schemeClr val="dk1"/>
+            </a:lnRef>
+            <a:fillRef idx="1">
+              <a:schemeClr val="lt1"/>
+            </a:fillRef>
+            <a:effectRef idx="0">
+              <a:schemeClr val="dk1"/>
+            </a:effectRef>
+            <a:fontRef idx="minor">
+              <a:schemeClr val="dk1"/>
+            </a:fontRef>
+          </p:style>
+          <p:txBody>
+            <a:bodyPr rtlCol="0" anchor="ctr"/>
+            <a:lstStyle/>
+            <a:p>
+              <a:pPr algn="ctr"/>
+              <a:endParaRPr lang="en-US"/>
+            </a:p>
+          </p:txBody>
+        </p:sp>
+        <p:sp>
+          <p:nvSpPr>
+            <p:cNvPr id="136" name="Oval 135">
+              <a:extLst>
+                <a:ext uri="{FF2B5EF4-FFF2-40B4-BE49-F238E27FC236}">
+                  <a16:creationId xmlns:a16="http://schemas.microsoft.com/office/drawing/2014/main" id="{7F467C8E-8AC3-A582-F8DA-CBF672BC441E}"/>
+                </a:ext>
+              </a:extLst>
+            </p:cNvPr>
+            <p:cNvSpPr/>
+            <p:nvPr/>
+          </p:nvSpPr>
+          <p:spPr>
+            <a:xfrm>
+              <a:off x="6513637" y="3270973"/>
+              <a:ext cx="470712" cy="470712"/>
+            </a:xfrm>
+            <a:prstGeom prst="ellipse">
+              <a:avLst/>
+            </a:prstGeom>
+          </p:spPr>
+          <p:style>
+            <a:lnRef idx="2">
+              <a:schemeClr val="dk1"/>
+            </a:lnRef>
+            <a:fillRef idx="1">
+              <a:schemeClr val="lt1"/>
+            </a:fillRef>
+            <a:effectRef idx="0">
+              <a:schemeClr val="dk1"/>
+            </a:effectRef>
+            <a:fontRef idx="minor">
+              <a:schemeClr val="dk1"/>
+            </a:fontRef>
+          </p:style>
+          <p:txBody>
+            <a:bodyPr rtlCol="0" anchor="ctr"/>
+            <a:lstStyle/>
+            <a:p>
+              <a:pPr algn="ctr"/>
+              <a:endParaRPr lang="en-US"/>
+            </a:p>
+          </p:txBody>
+        </p:sp>
+      </p:grpSp>
+      <p:grpSp>
+        <p:nvGrpSpPr>
+          <p:cNvPr id="138" name="Group 137">
+            <a:extLst>
+              <a:ext uri="{FF2B5EF4-FFF2-40B4-BE49-F238E27FC236}">
+                <a16:creationId xmlns:a16="http://schemas.microsoft.com/office/drawing/2014/main" id="{1ADD6E77-8691-B123-63D2-E4DFEFD08CC9}"/>
+              </a:ext>
+            </a:extLst>
+          </p:cNvPr>
+          <p:cNvGrpSpPr/>
+          <p:nvPr/>
+        </p:nvGrpSpPr>
+        <p:grpSpPr>
+          <a:xfrm>
+            <a:off x="3290221" y="1988287"/>
+            <a:ext cx="1371600" cy="1371600"/>
+            <a:chOff x="213377" y="483633"/>
+            <a:chExt cx="1371600" cy="1371600"/>
+          </a:xfrm>
+        </p:grpSpPr>
+        <p:sp>
+          <p:nvSpPr>
+            <p:cNvPr id="139" name="Rectangle 138">
+              <a:extLst>
+                <a:ext uri="{FF2B5EF4-FFF2-40B4-BE49-F238E27FC236}">
+                  <a16:creationId xmlns:a16="http://schemas.microsoft.com/office/drawing/2014/main" id="{AB1A7D76-148B-D499-E32C-F48B00CAF76E}"/>
+                </a:ext>
+              </a:extLst>
+            </p:cNvPr>
+            <p:cNvSpPr/>
+            <p:nvPr/>
+          </p:nvSpPr>
+          <p:spPr>
+            <a:xfrm>
+              <a:off x="213377" y="483633"/>
+              <a:ext cx="1371600" cy="1371600"/>
+            </a:xfrm>
+            <a:prstGeom prst="rect">
+              <a:avLst/>
+            </a:prstGeom>
+            <a:noFill/>
+            <a:ln w="76200">
+              <a:solidFill>
+                <a:schemeClr val="tx1"/>
+              </a:solidFill>
+            </a:ln>
+          </p:spPr>
+          <p:style>
+            <a:lnRef idx="2">
+              <a:schemeClr val="accent1">
+                <a:shade val="50000"/>
+              </a:schemeClr>
+            </a:lnRef>
+            <a:fillRef idx="1">
+              <a:schemeClr val="accent1"/>
+            </a:fillRef>
+            <a:effectRef idx="0">
+              <a:schemeClr val="accent1"/>
+            </a:effectRef>
+            <a:fontRef idx="minor">
+              <a:schemeClr val="lt1"/>
+            </a:fontRef>
+          </p:style>
+          <p:txBody>
+            <a:bodyPr rtlCol="0" anchor="ctr"/>
+            <a:lstStyle/>
+            <a:p>
+              <a:pPr algn="ctr"/>
+              <a:endParaRPr lang="en-US"/>
+            </a:p>
+          </p:txBody>
+        </p:sp>
+        <p:sp>
+          <p:nvSpPr>
+            <p:cNvPr id="140" name="Hexagon 139">
+              <a:extLst>
+                <a:ext uri="{FF2B5EF4-FFF2-40B4-BE49-F238E27FC236}">
+                  <a16:creationId xmlns:a16="http://schemas.microsoft.com/office/drawing/2014/main" id="{CC5F603C-E71C-3E01-9781-5C82D89058F3}"/>
+                </a:ext>
+              </a:extLst>
+            </p:cNvPr>
+            <p:cNvSpPr/>
+            <p:nvPr/>
+          </p:nvSpPr>
+          <p:spPr>
+            <a:xfrm>
+              <a:off x="304817" y="699533"/>
+              <a:ext cx="1188720" cy="1097280"/>
+            </a:xfrm>
+            <a:prstGeom prst="hexagon">
+              <a:avLst/>
+            </a:prstGeom>
+            <a:noFill/>
+            <a:ln w="38100" cap="flat" cmpd="sng" algn="ctr">
+              <a:solidFill>
+                <a:schemeClr val="dk1"/>
+              </a:solidFill>
+              <a:prstDash val="solid"/>
+              <a:round/>
+              <a:headEnd type="none" w="med" len="med"/>
+              <a:tailEnd type="none" w="med" len="med"/>
+            </a:ln>
+          </p:spPr>
+          <p:style>
+            <a:lnRef idx="0">
+              <a:scrgbClr r="0" g="0" b="0"/>
+            </a:lnRef>
+            <a:fillRef idx="0">
+              <a:scrgbClr r="0" g="0" b="0"/>
+            </a:fillRef>
+            <a:effectRef idx="0">
+              <a:scrgbClr r="0" g="0" b="0"/>
+            </a:effectRef>
+            <a:fontRef idx="minor">
+              <a:schemeClr val="dk1"/>
+            </a:fontRef>
+          </p:style>
+          <p:txBody>
+            <a:bodyPr rtlCol="0" anchor="ctr"/>
+            <a:lstStyle/>
+            <a:p>
+              <a:pPr algn="ctr"/>
+              <a:endParaRPr lang="en-US"/>
+            </a:p>
+          </p:txBody>
+        </p:sp>
+      </p:grpSp>
+    </p:spTree>
+    <p:extLst>
+      <p:ext uri="{BB962C8B-B14F-4D97-AF65-F5344CB8AC3E}">
+        <p14:creationId xmlns:p14="http://schemas.microsoft.com/office/powerpoint/2010/main" val="942906460"/>
+      </p:ext>
+    </p:extLst>
+  </p:cSld>
+  <p:clrMapOvr>
+    <a:masterClrMapping/>
+  </p:clrMapOvr>
+</p:sld>
+</file>
+
 <file path=ppt/slides/slide4.xml><?xml version="1.0" encoding="utf-8"?>
 <p:sld xmlns:a="http://schemas.openxmlformats.org/drawingml/2006/main" xmlns:r="http://schemas.openxmlformats.org/officeDocument/2006/relationships" xmlns:p="http://schemas.openxmlformats.org/presentationml/2006/main">
   <p:cSld>
@@ -24884,10 +27999,1652 @@
           <a:chExt cx="0" cy="0"/>
         </a:xfrm>
       </p:grpSpPr>
+      <p:grpSp>
+        <p:nvGrpSpPr>
+          <p:cNvPr id="27" name="Group 26">
+            <a:extLst>
+              <a:ext uri="{FF2B5EF4-FFF2-40B4-BE49-F238E27FC236}">
+                <a16:creationId xmlns:a16="http://schemas.microsoft.com/office/drawing/2014/main" id="{7ADD8C86-1EC0-0486-9367-2651AF2409E1}"/>
+              </a:ext>
+            </a:extLst>
+          </p:cNvPr>
+          <p:cNvGrpSpPr/>
+          <p:nvPr/>
+        </p:nvGrpSpPr>
+        <p:grpSpPr>
+          <a:xfrm>
+            <a:off x="434252" y="2026675"/>
+            <a:ext cx="821134" cy="939833"/>
+            <a:chOff x="4087416" y="1161299"/>
+            <a:chExt cx="1198370" cy="1371600"/>
+          </a:xfrm>
+        </p:grpSpPr>
+        <p:pic>
+          <p:nvPicPr>
+            <p:cNvPr id="87" name="Picture 10" descr="49 Ring Of Fire Silhouette Stock Photos, Pictures &amp;amp; Royalty-Free Images -  iStock">
+              <a:extLst>
+                <a:ext uri="{FF2B5EF4-FFF2-40B4-BE49-F238E27FC236}">
+                  <a16:creationId xmlns:a16="http://schemas.microsoft.com/office/drawing/2014/main" id="{4E319C77-C9A7-5C3F-DEDC-E94BCE8A4C3A}"/>
+                </a:ext>
+              </a:extLst>
+            </p:cNvPr>
+            <p:cNvPicPr>
+              <a:picLocks noChangeAspect="1" noChangeArrowheads="1"/>
+            </p:cNvPicPr>
+            <p:nvPr/>
+          </p:nvPicPr>
+          <p:blipFill rotWithShape="1">
+            <a:blip r:embed="rId2">
+              <a:extLst>
+                <a:ext uri="{28A0092B-C50C-407E-A947-70E740481C1C}">
+                  <a14:useLocalDpi xmlns:a14="http://schemas.microsoft.com/office/drawing/2010/main" val="0"/>
+                </a:ext>
+              </a:extLst>
+            </a:blip>
+            <a:srcRect l="8601" t="3260" r="8629" b="5100"/>
+            <a:stretch/>
+          </p:blipFill>
+          <p:spPr bwMode="auto">
+            <a:xfrm>
+              <a:off x="4087416" y="1161299"/>
+              <a:ext cx="1198370" cy="1371600"/>
+            </a:xfrm>
+            <a:prstGeom prst="rect">
+              <a:avLst/>
+            </a:prstGeom>
+            <a:noFill/>
+            <a:extLst>
+              <a:ext uri="{909E8E84-426E-40DD-AFC4-6F175D3DCCD1}">
+                <a14:hiddenFill xmlns:a14="http://schemas.microsoft.com/office/drawing/2010/main">
+                  <a:solidFill>
+                    <a:srgbClr val="FFFFFF"/>
+                  </a:solidFill>
+                </a14:hiddenFill>
+              </a:ext>
+            </a:extLst>
+          </p:spPr>
+        </p:pic>
+        <p:pic>
+          <p:nvPicPr>
+            <p:cNvPr id="86" name="Picture 2" descr="Hydra vector Clipart Vector PNG , SVG, EPS, PSD, AI">
+              <a:extLst>
+                <a:ext uri="{FF2B5EF4-FFF2-40B4-BE49-F238E27FC236}">
+                  <a16:creationId xmlns:a16="http://schemas.microsoft.com/office/drawing/2014/main" id="{2B3DA827-9DA2-CD0F-A7DC-2342ACDC96A1}"/>
+                </a:ext>
+              </a:extLst>
+            </p:cNvPr>
+            <p:cNvPicPr>
+              <a:picLocks noChangeAspect="1" noChangeArrowheads="1"/>
+            </p:cNvPicPr>
+            <p:nvPr/>
+          </p:nvPicPr>
+          <p:blipFill rotWithShape="1">
+            <a:blip r:embed="rId3">
+              <a:extLst>
+                <a:ext uri="{28A0092B-C50C-407E-A947-70E740481C1C}">
+                  <a14:useLocalDpi xmlns:a14="http://schemas.microsoft.com/office/drawing/2010/main" val="0"/>
+                </a:ext>
+              </a:extLst>
+            </a:blip>
+            <a:srcRect l="32212" t="21635" r="26923" b="31570"/>
+            <a:stretch/>
+          </p:blipFill>
+          <p:spPr bwMode="auto">
+            <a:xfrm>
+              <a:off x="4425643" y="1661595"/>
+              <a:ext cx="521915" cy="597643"/>
+            </a:xfrm>
+            <a:prstGeom prst="rect">
+              <a:avLst/>
+            </a:prstGeom>
+            <a:noFill/>
+            <a:extLst>
+              <a:ext uri="{909E8E84-426E-40DD-AFC4-6F175D3DCCD1}">
+                <a14:hiddenFill xmlns:a14="http://schemas.microsoft.com/office/drawing/2010/main">
+                  <a:solidFill>
+                    <a:srgbClr val="FFFFFF"/>
+                  </a:solidFill>
+                </a14:hiddenFill>
+              </a:ext>
+            </a:extLst>
+          </p:spPr>
+        </p:pic>
+      </p:grpSp>
+      <p:grpSp>
+        <p:nvGrpSpPr>
+          <p:cNvPr id="26" name="Group 25">
+            <a:extLst>
+              <a:ext uri="{FF2B5EF4-FFF2-40B4-BE49-F238E27FC236}">
+                <a16:creationId xmlns:a16="http://schemas.microsoft.com/office/drawing/2014/main" id="{A958C3B7-012A-96A5-CECE-99AD8138FDBC}"/>
+              </a:ext>
+            </a:extLst>
+          </p:cNvPr>
+          <p:cNvGrpSpPr/>
+          <p:nvPr/>
+        </p:nvGrpSpPr>
+        <p:grpSpPr>
+          <a:xfrm>
+            <a:off x="342912" y="489901"/>
+            <a:ext cx="934493" cy="875077"/>
+            <a:chOff x="4722300" y="1944558"/>
+            <a:chExt cx="934493" cy="875077"/>
+          </a:xfrm>
+        </p:grpSpPr>
+        <p:pic>
+          <p:nvPicPr>
+            <p:cNvPr id="2050" name="Picture 2" descr="Hydra vector Clipart Vector PNG , SVG, EPS, PSD, AI">
+              <a:extLst>
+                <a:ext uri="{FF2B5EF4-FFF2-40B4-BE49-F238E27FC236}">
+                  <a16:creationId xmlns:a16="http://schemas.microsoft.com/office/drawing/2014/main" id="{94EFF81E-1DA7-DFFF-9BBF-4FE77C4C8FAD}"/>
+                </a:ext>
+              </a:extLst>
+            </p:cNvPr>
+            <p:cNvPicPr>
+              <a:picLocks noChangeAspect="1" noChangeArrowheads="1"/>
+            </p:cNvPicPr>
+            <p:nvPr/>
+          </p:nvPicPr>
+          <p:blipFill rotWithShape="1">
+            <a:blip r:embed="rId3">
+              <a:extLst>
+                <a:ext uri="{28A0092B-C50C-407E-A947-70E740481C1C}">
+                  <a14:useLocalDpi xmlns:a14="http://schemas.microsoft.com/office/drawing/2010/main" val="0"/>
+                </a:ext>
+              </a:extLst>
+            </a:blip>
+            <a:srcRect l="32212" t="21635" r="26923" b="31570"/>
+            <a:stretch/>
+          </p:blipFill>
+          <p:spPr bwMode="auto">
+            <a:xfrm>
+              <a:off x="5037119" y="2110048"/>
+              <a:ext cx="619674" cy="709587"/>
+            </a:xfrm>
+            <a:prstGeom prst="rect">
+              <a:avLst/>
+            </a:prstGeom>
+            <a:noFill/>
+            <a:extLst>
+              <a:ext uri="{909E8E84-426E-40DD-AFC4-6F175D3DCCD1}">
+                <a14:hiddenFill xmlns:a14="http://schemas.microsoft.com/office/drawing/2010/main">
+                  <a:solidFill>
+                    <a:srgbClr val="FFFFFF"/>
+                  </a:solidFill>
+                </a14:hiddenFill>
+              </a:ext>
+            </a:extLst>
+          </p:spPr>
+        </p:pic>
+        <p:grpSp>
+          <p:nvGrpSpPr>
+            <p:cNvPr id="25" name="Group 24">
+              <a:extLst>
+                <a:ext uri="{FF2B5EF4-FFF2-40B4-BE49-F238E27FC236}">
+                  <a16:creationId xmlns:a16="http://schemas.microsoft.com/office/drawing/2014/main" id="{92ECD3EA-9FFA-E034-C57C-04105FF54E9D}"/>
+                </a:ext>
+              </a:extLst>
+            </p:cNvPr>
+            <p:cNvGrpSpPr/>
+            <p:nvPr/>
+          </p:nvGrpSpPr>
+          <p:grpSpPr>
+            <a:xfrm rot="1941197">
+              <a:off x="4722300" y="1944558"/>
+              <a:ext cx="531164" cy="503494"/>
+              <a:chOff x="6409710" y="756261"/>
+              <a:chExt cx="2695643" cy="2555218"/>
+            </a:xfrm>
+          </p:grpSpPr>
+          <p:pic>
+            <p:nvPicPr>
+              <p:cNvPr id="83" name="Picture 2" descr="Lance Icon #332107 - Free Icons Library">
+                <a:extLst>
+                  <a:ext uri="{FF2B5EF4-FFF2-40B4-BE49-F238E27FC236}">
+                    <a16:creationId xmlns:a16="http://schemas.microsoft.com/office/drawing/2014/main" id="{EB754034-34D5-5025-F26C-D5F4A3F9332C}"/>
+                  </a:ext>
+                </a:extLst>
+              </p:cNvPr>
+              <p:cNvPicPr>
+                <a:picLocks noChangeAspect="1" noChangeArrowheads="1"/>
+              </p:cNvPicPr>
+              <p:nvPr/>
+            </p:nvPicPr>
+            <p:blipFill>
+              <a:blip r:embed="rId4">
+                <a:extLst>
+                  <a:ext uri="{28A0092B-C50C-407E-A947-70E740481C1C}">
+                    <a14:useLocalDpi xmlns:a14="http://schemas.microsoft.com/office/drawing/2010/main" val="0"/>
+                  </a:ext>
+                </a:extLst>
+              </a:blip>
+              <a:srcRect/>
+              <a:stretch>
+                <a:fillRect/>
+              </a:stretch>
+            </p:blipFill>
+            <p:spPr bwMode="auto">
+              <a:xfrm rot="18882740">
+                <a:off x="6774550" y="756261"/>
+                <a:ext cx="1899003" cy="1899003"/>
+              </a:xfrm>
+              <a:prstGeom prst="rect">
+                <a:avLst/>
+              </a:prstGeom>
+              <a:noFill/>
+              <a:extLst>
+                <a:ext uri="{909E8E84-426E-40DD-AFC4-6F175D3DCCD1}">
+                  <a14:hiddenFill xmlns:a14="http://schemas.microsoft.com/office/drawing/2010/main">
+                    <a:solidFill>
+                      <a:srgbClr val="FFFFFF"/>
+                    </a:solidFill>
+                  </a14:hiddenFill>
+                </a:ext>
+              </a:extLst>
+            </p:spPr>
+          </p:pic>
+          <p:pic>
+            <p:nvPicPr>
+              <p:cNvPr id="84" name="Picture 2" descr="Lance Icon #332107 - Free Icons Library">
+                <a:extLst>
+                  <a:ext uri="{FF2B5EF4-FFF2-40B4-BE49-F238E27FC236}">
+                    <a16:creationId xmlns:a16="http://schemas.microsoft.com/office/drawing/2014/main" id="{FBB82173-4388-1FB7-FF51-179D2A2FB033}"/>
+                  </a:ext>
+                </a:extLst>
+              </p:cNvPr>
+              <p:cNvPicPr>
+                <a:picLocks noChangeAspect="1" noChangeArrowheads="1"/>
+              </p:cNvPicPr>
+              <p:nvPr/>
+            </p:nvPicPr>
+            <p:blipFill>
+              <a:blip r:embed="rId4">
+                <a:extLst>
+                  <a:ext uri="{28A0092B-C50C-407E-A947-70E740481C1C}">
+                    <a14:useLocalDpi xmlns:a14="http://schemas.microsoft.com/office/drawing/2010/main" val="0"/>
+                  </a:ext>
+                </a:extLst>
+              </a:blip>
+              <a:srcRect/>
+              <a:stretch>
+                <a:fillRect/>
+              </a:stretch>
+            </p:blipFill>
+            <p:spPr bwMode="auto">
+              <a:xfrm rot="18882740">
+                <a:off x="7206350" y="1027415"/>
+                <a:ext cx="1899003" cy="1899003"/>
+              </a:xfrm>
+              <a:prstGeom prst="rect">
+                <a:avLst/>
+              </a:prstGeom>
+              <a:noFill/>
+              <a:extLst>
+                <a:ext uri="{909E8E84-426E-40DD-AFC4-6F175D3DCCD1}">
+                  <a14:hiddenFill xmlns:a14="http://schemas.microsoft.com/office/drawing/2010/main">
+                    <a:solidFill>
+                      <a:srgbClr val="FFFFFF"/>
+                    </a:solidFill>
+                  </a14:hiddenFill>
+                </a:ext>
+              </a:extLst>
+            </p:spPr>
+          </p:pic>
+          <p:pic>
+            <p:nvPicPr>
+              <p:cNvPr id="85" name="Picture 2" descr="Lance Icon #332107 - Free Icons Library">
+                <a:extLst>
+                  <a:ext uri="{FF2B5EF4-FFF2-40B4-BE49-F238E27FC236}">
+                    <a16:creationId xmlns:a16="http://schemas.microsoft.com/office/drawing/2014/main" id="{AB4D53AC-A50B-1211-239B-2BF7EE458328}"/>
+                  </a:ext>
+                </a:extLst>
+              </p:cNvPr>
+              <p:cNvPicPr>
+                <a:picLocks noChangeAspect="1" noChangeArrowheads="1"/>
+              </p:cNvPicPr>
+              <p:nvPr/>
+            </p:nvPicPr>
+            <p:blipFill>
+              <a:blip r:embed="rId4">
+                <a:extLst>
+                  <a:ext uri="{28A0092B-C50C-407E-A947-70E740481C1C}">
+                    <a14:useLocalDpi xmlns:a14="http://schemas.microsoft.com/office/drawing/2010/main" val="0"/>
+                  </a:ext>
+                </a:extLst>
+              </a:blip>
+              <a:srcRect/>
+              <a:stretch>
+                <a:fillRect/>
+              </a:stretch>
+            </p:blipFill>
+            <p:spPr bwMode="auto">
+              <a:xfrm rot="18882740">
+                <a:off x="6409710" y="1412476"/>
+                <a:ext cx="1899003" cy="1899003"/>
+              </a:xfrm>
+              <a:prstGeom prst="rect">
+                <a:avLst/>
+              </a:prstGeom>
+              <a:noFill/>
+              <a:extLst>
+                <a:ext uri="{909E8E84-426E-40DD-AFC4-6F175D3DCCD1}">
+                  <a14:hiddenFill xmlns:a14="http://schemas.microsoft.com/office/drawing/2010/main">
+                    <a:solidFill>
+                      <a:srgbClr val="FFFFFF"/>
+                    </a:solidFill>
+                  </a14:hiddenFill>
+                </a:ext>
+              </a:extLst>
+            </p:spPr>
+          </p:pic>
+        </p:grpSp>
+      </p:grpSp>
+      <p:grpSp>
+        <p:nvGrpSpPr>
+          <p:cNvPr id="41" name="Group 40">
+            <a:extLst>
+              <a:ext uri="{FF2B5EF4-FFF2-40B4-BE49-F238E27FC236}">
+                <a16:creationId xmlns:a16="http://schemas.microsoft.com/office/drawing/2014/main" id="{BD5A39ED-286D-3F33-BF59-7EB8458F8A92}"/>
+              </a:ext>
+            </a:extLst>
+          </p:cNvPr>
+          <p:cNvGrpSpPr/>
+          <p:nvPr/>
+        </p:nvGrpSpPr>
+        <p:grpSpPr>
+          <a:xfrm>
+            <a:off x="158299" y="147083"/>
+            <a:ext cx="1371600" cy="1371600"/>
+            <a:chOff x="213377" y="483633"/>
+            <a:chExt cx="1371600" cy="1371600"/>
+          </a:xfrm>
+        </p:grpSpPr>
+        <p:sp>
+          <p:nvSpPr>
+            <p:cNvPr id="42" name="Rectangle 41">
+              <a:extLst>
+                <a:ext uri="{FF2B5EF4-FFF2-40B4-BE49-F238E27FC236}">
+                  <a16:creationId xmlns:a16="http://schemas.microsoft.com/office/drawing/2014/main" id="{F55E4EFD-A40A-C2EC-924D-ED00A08530B8}"/>
+                </a:ext>
+              </a:extLst>
+            </p:cNvPr>
+            <p:cNvSpPr/>
+            <p:nvPr/>
+          </p:nvSpPr>
+          <p:spPr>
+            <a:xfrm>
+              <a:off x="213377" y="483633"/>
+              <a:ext cx="1371600" cy="1371600"/>
+            </a:xfrm>
+            <a:prstGeom prst="rect">
+              <a:avLst/>
+            </a:prstGeom>
+            <a:noFill/>
+            <a:ln w="76200">
+              <a:solidFill>
+                <a:schemeClr val="tx1"/>
+              </a:solidFill>
+            </a:ln>
+          </p:spPr>
+          <p:style>
+            <a:lnRef idx="2">
+              <a:schemeClr val="accent1">
+                <a:shade val="50000"/>
+              </a:schemeClr>
+            </a:lnRef>
+            <a:fillRef idx="1">
+              <a:schemeClr val="accent1"/>
+            </a:fillRef>
+            <a:effectRef idx="0">
+              <a:schemeClr val="accent1"/>
+            </a:effectRef>
+            <a:fontRef idx="minor">
+              <a:schemeClr val="lt1"/>
+            </a:fontRef>
+          </p:style>
+          <p:txBody>
+            <a:bodyPr rtlCol="0" anchor="ctr"/>
+            <a:lstStyle/>
+            <a:p>
+              <a:pPr algn="ctr"/>
+              <a:endParaRPr lang="en-US"/>
+            </a:p>
+          </p:txBody>
+        </p:sp>
+        <p:sp>
+          <p:nvSpPr>
+            <p:cNvPr id="43" name="Hexagon 42">
+              <a:extLst>
+                <a:ext uri="{FF2B5EF4-FFF2-40B4-BE49-F238E27FC236}">
+                  <a16:creationId xmlns:a16="http://schemas.microsoft.com/office/drawing/2014/main" id="{A0E811B9-07C5-32B6-2099-B4B31077252E}"/>
+                </a:ext>
+              </a:extLst>
+            </p:cNvPr>
+            <p:cNvSpPr/>
+            <p:nvPr/>
+          </p:nvSpPr>
+          <p:spPr>
+            <a:xfrm>
+              <a:off x="304817" y="699533"/>
+              <a:ext cx="1188720" cy="1097280"/>
+            </a:xfrm>
+            <a:prstGeom prst="hexagon">
+              <a:avLst/>
+            </a:prstGeom>
+            <a:noFill/>
+            <a:ln w="38100" cap="flat" cmpd="sng" algn="ctr">
+              <a:solidFill>
+                <a:schemeClr val="dk1"/>
+              </a:solidFill>
+              <a:prstDash val="solid"/>
+              <a:round/>
+              <a:headEnd type="none" w="med" len="med"/>
+              <a:tailEnd type="none" w="med" len="med"/>
+            </a:ln>
+          </p:spPr>
+          <p:style>
+            <a:lnRef idx="0">
+              <a:scrgbClr r="0" g="0" b="0"/>
+            </a:lnRef>
+            <a:fillRef idx="0">
+              <a:scrgbClr r="0" g="0" b="0"/>
+            </a:fillRef>
+            <a:effectRef idx="0">
+              <a:scrgbClr r="0" g="0" b="0"/>
+            </a:effectRef>
+            <a:fontRef idx="minor">
+              <a:schemeClr val="dk1"/>
+            </a:fontRef>
+          </p:style>
+          <p:txBody>
+            <a:bodyPr rtlCol="0" anchor="ctr"/>
+            <a:lstStyle/>
+            <a:p>
+              <a:pPr algn="ctr"/>
+              <a:endParaRPr lang="en-US"/>
+            </a:p>
+          </p:txBody>
+        </p:sp>
+      </p:grpSp>
+      <p:grpSp>
+        <p:nvGrpSpPr>
+          <p:cNvPr id="44" name="Group 43">
+            <a:extLst>
+              <a:ext uri="{FF2B5EF4-FFF2-40B4-BE49-F238E27FC236}">
+                <a16:creationId xmlns:a16="http://schemas.microsoft.com/office/drawing/2014/main" id="{E752F04A-6491-0A7F-EE9C-62724EA95B0A}"/>
+              </a:ext>
+            </a:extLst>
+          </p:cNvPr>
+          <p:cNvGrpSpPr/>
+          <p:nvPr/>
+        </p:nvGrpSpPr>
+        <p:grpSpPr>
+          <a:xfrm>
+            <a:off x="1726749" y="147083"/>
+            <a:ext cx="1371600" cy="1371600"/>
+            <a:chOff x="213377" y="483633"/>
+            <a:chExt cx="1371600" cy="1371600"/>
+          </a:xfrm>
+        </p:grpSpPr>
+        <p:sp>
+          <p:nvSpPr>
+            <p:cNvPr id="45" name="Rectangle 44">
+              <a:extLst>
+                <a:ext uri="{FF2B5EF4-FFF2-40B4-BE49-F238E27FC236}">
+                  <a16:creationId xmlns:a16="http://schemas.microsoft.com/office/drawing/2014/main" id="{B58F6939-C302-91EC-F03E-95A2D7F1356B}"/>
+                </a:ext>
+              </a:extLst>
+            </p:cNvPr>
+            <p:cNvSpPr/>
+            <p:nvPr/>
+          </p:nvSpPr>
+          <p:spPr>
+            <a:xfrm>
+              <a:off x="213377" y="483633"/>
+              <a:ext cx="1371600" cy="1371600"/>
+            </a:xfrm>
+            <a:prstGeom prst="rect">
+              <a:avLst/>
+            </a:prstGeom>
+            <a:noFill/>
+            <a:ln w="76200">
+              <a:solidFill>
+                <a:schemeClr val="tx1"/>
+              </a:solidFill>
+            </a:ln>
+          </p:spPr>
+          <p:style>
+            <a:lnRef idx="2">
+              <a:schemeClr val="accent1">
+                <a:shade val="50000"/>
+              </a:schemeClr>
+            </a:lnRef>
+            <a:fillRef idx="1">
+              <a:schemeClr val="accent1"/>
+            </a:fillRef>
+            <a:effectRef idx="0">
+              <a:schemeClr val="accent1"/>
+            </a:effectRef>
+            <a:fontRef idx="minor">
+              <a:schemeClr val="lt1"/>
+            </a:fontRef>
+          </p:style>
+          <p:txBody>
+            <a:bodyPr rtlCol="0" anchor="ctr"/>
+            <a:lstStyle/>
+            <a:p>
+              <a:pPr algn="ctr"/>
+              <a:endParaRPr lang="en-US"/>
+            </a:p>
+          </p:txBody>
+        </p:sp>
+        <p:sp>
+          <p:nvSpPr>
+            <p:cNvPr id="46" name="Hexagon 45">
+              <a:extLst>
+                <a:ext uri="{FF2B5EF4-FFF2-40B4-BE49-F238E27FC236}">
+                  <a16:creationId xmlns:a16="http://schemas.microsoft.com/office/drawing/2014/main" id="{1C8B4954-50D7-11C0-E16F-8D286D1F98EC}"/>
+                </a:ext>
+              </a:extLst>
+            </p:cNvPr>
+            <p:cNvSpPr/>
+            <p:nvPr/>
+          </p:nvSpPr>
+          <p:spPr>
+            <a:xfrm>
+              <a:off x="304817" y="699533"/>
+              <a:ext cx="1188720" cy="1097280"/>
+            </a:xfrm>
+            <a:prstGeom prst="hexagon">
+              <a:avLst/>
+            </a:prstGeom>
+            <a:noFill/>
+            <a:ln w="38100" cap="flat" cmpd="sng" algn="ctr">
+              <a:solidFill>
+                <a:schemeClr val="dk1"/>
+              </a:solidFill>
+              <a:prstDash val="solid"/>
+              <a:round/>
+              <a:headEnd type="none" w="med" len="med"/>
+              <a:tailEnd type="none" w="med" len="med"/>
+            </a:ln>
+          </p:spPr>
+          <p:style>
+            <a:lnRef idx="0">
+              <a:scrgbClr r="0" g="0" b="0"/>
+            </a:lnRef>
+            <a:fillRef idx="0">
+              <a:scrgbClr r="0" g="0" b="0"/>
+            </a:fillRef>
+            <a:effectRef idx="0">
+              <a:scrgbClr r="0" g="0" b="0"/>
+            </a:effectRef>
+            <a:fontRef idx="minor">
+              <a:schemeClr val="dk1"/>
+            </a:fontRef>
+          </p:style>
+          <p:txBody>
+            <a:bodyPr rtlCol="0" anchor="ctr"/>
+            <a:lstStyle/>
+            <a:p>
+              <a:pPr algn="ctr"/>
+              <a:endParaRPr lang="en-US"/>
+            </a:p>
+          </p:txBody>
+        </p:sp>
+      </p:grpSp>
+      <p:grpSp>
+        <p:nvGrpSpPr>
+          <p:cNvPr id="47" name="Group 46">
+            <a:extLst>
+              <a:ext uri="{FF2B5EF4-FFF2-40B4-BE49-F238E27FC236}">
+                <a16:creationId xmlns:a16="http://schemas.microsoft.com/office/drawing/2014/main" id="{7EB71830-93DF-CF53-DB55-593B830D22FE}"/>
+              </a:ext>
+            </a:extLst>
+          </p:cNvPr>
+          <p:cNvGrpSpPr/>
+          <p:nvPr/>
+        </p:nvGrpSpPr>
+        <p:grpSpPr>
+          <a:xfrm>
+            <a:off x="155308" y="1761016"/>
+            <a:ext cx="1371600" cy="1371600"/>
+            <a:chOff x="213377" y="483633"/>
+            <a:chExt cx="1371600" cy="1371600"/>
+          </a:xfrm>
+        </p:grpSpPr>
+        <p:sp>
+          <p:nvSpPr>
+            <p:cNvPr id="48" name="Rectangle 47">
+              <a:extLst>
+                <a:ext uri="{FF2B5EF4-FFF2-40B4-BE49-F238E27FC236}">
+                  <a16:creationId xmlns:a16="http://schemas.microsoft.com/office/drawing/2014/main" id="{37DF4839-20A5-417F-9D2D-6BF2A2967771}"/>
+                </a:ext>
+              </a:extLst>
+            </p:cNvPr>
+            <p:cNvSpPr/>
+            <p:nvPr/>
+          </p:nvSpPr>
+          <p:spPr>
+            <a:xfrm>
+              <a:off x="213377" y="483633"/>
+              <a:ext cx="1371600" cy="1371600"/>
+            </a:xfrm>
+            <a:prstGeom prst="rect">
+              <a:avLst/>
+            </a:prstGeom>
+            <a:noFill/>
+            <a:ln w="76200">
+              <a:solidFill>
+                <a:schemeClr val="tx1"/>
+              </a:solidFill>
+            </a:ln>
+          </p:spPr>
+          <p:style>
+            <a:lnRef idx="2">
+              <a:schemeClr val="accent1">
+                <a:shade val="50000"/>
+              </a:schemeClr>
+            </a:lnRef>
+            <a:fillRef idx="1">
+              <a:schemeClr val="accent1"/>
+            </a:fillRef>
+            <a:effectRef idx="0">
+              <a:schemeClr val="accent1"/>
+            </a:effectRef>
+            <a:fontRef idx="minor">
+              <a:schemeClr val="lt1"/>
+            </a:fontRef>
+          </p:style>
+          <p:txBody>
+            <a:bodyPr rtlCol="0" anchor="ctr"/>
+            <a:lstStyle/>
+            <a:p>
+              <a:pPr algn="ctr"/>
+              <a:endParaRPr lang="en-US"/>
+            </a:p>
+          </p:txBody>
+        </p:sp>
+        <p:sp>
+          <p:nvSpPr>
+            <p:cNvPr id="49" name="Hexagon 48">
+              <a:extLst>
+                <a:ext uri="{FF2B5EF4-FFF2-40B4-BE49-F238E27FC236}">
+                  <a16:creationId xmlns:a16="http://schemas.microsoft.com/office/drawing/2014/main" id="{9B82B2E6-6D23-A605-72D7-A979E64A4B25}"/>
+                </a:ext>
+              </a:extLst>
+            </p:cNvPr>
+            <p:cNvSpPr/>
+            <p:nvPr/>
+          </p:nvSpPr>
+          <p:spPr>
+            <a:xfrm>
+              <a:off x="304817" y="699533"/>
+              <a:ext cx="1188720" cy="1097280"/>
+            </a:xfrm>
+            <a:prstGeom prst="hexagon">
+              <a:avLst/>
+            </a:prstGeom>
+            <a:noFill/>
+            <a:ln w="38100" cap="flat" cmpd="sng" algn="ctr">
+              <a:solidFill>
+                <a:schemeClr val="dk1"/>
+              </a:solidFill>
+              <a:prstDash val="solid"/>
+              <a:round/>
+              <a:headEnd type="none" w="med" len="med"/>
+              <a:tailEnd type="none" w="med" len="med"/>
+            </a:ln>
+          </p:spPr>
+          <p:style>
+            <a:lnRef idx="0">
+              <a:scrgbClr r="0" g="0" b="0"/>
+            </a:lnRef>
+            <a:fillRef idx="0">
+              <a:scrgbClr r="0" g="0" b="0"/>
+            </a:fillRef>
+            <a:effectRef idx="0">
+              <a:scrgbClr r="0" g="0" b="0"/>
+            </a:effectRef>
+            <a:fontRef idx="minor">
+              <a:schemeClr val="dk1"/>
+            </a:fontRef>
+          </p:style>
+          <p:txBody>
+            <a:bodyPr rtlCol="0" anchor="ctr"/>
+            <a:lstStyle/>
+            <a:p>
+              <a:pPr algn="ctr"/>
+              <a:endParaRPr lang="en-US"/>
+            </a:p>
+          </p:txBody>
+        </p:sp>
+      </p:grpSp>
+      <p:grpSp>
+        <p:nvGrpSpPr>
+          <p:cNvPr id="50" name="Group 49">
+            <a:extLst>
+              <a:ext uri="{FF2B5EF4-FFF2-40B4-BE49-F238E27FC236}">
+                <a16:creationId xmlns:a16="http://schemas.microsoft.com/office/drawing/2014/main" id="{956DC93E-73FE-B018-8ACB-47F2B8FE8713}"/>
+              </a:ext>
+            </a:extLst>
+          </p:cNvPr>
+          <p:cNvGrpSpPr/>
+          <p:nvPr/>
+        </p:nvGrpSpPr>
+        <p:grpSpPr>
+          <a:xfrm>
+            <a:off x="1726749" y="1761016"/>
+            <a:ext cx="1371600" cy="1371600"/>
+            <a:chOff x="213377" y="483633"/>
+            <a:chExt cx="1371600" cy="1371600"/>
+          </a:xfrm>
+        </p:grpSpPr>
+        <p:sp>
+          <p:nvSpPr>
+            <p:cNvPr id="51" name="Rectangle 50">
+              <a:extLst>
+                <a:ext uri="{FF2B5EF4-FFF2-40B4-BE49-F238E27FC236}">
+                  <a16:creationId xmlns:a16="http://schemas.microsoft.com/office/drawing/2014/main" id="{6004BD89-ADEB-7630-DCB6-B4E7E4CB9277}"/>
+                </a:ext>
+              </a:extLst>
+            </p:cNvPr>
+            <p:cNvSpPr/>
+            <p:nvPr/>
+          </p:nvSpPr>
+          <p:spPr>
+            <a:xfrm>
+              <a:off x="213377" y="483633"/>
+              <a:ext cx="1371600" cy="1371600"/>
+            </a:xfrm>
+            <a:prstGeom prst="rect">
+              <a:avLst/>
+            </a:prstGeom>
+            <a:noFill/>
+            <a:ln w="76200">
+              <a:solidFill>
+                <a:schemeClr val="tx1"/>
+              </a:solidFill>
+            </a:ln>
+          </p:spPr>
+          <p:style>
+            <a:lnRef idx="2">
+              <a:schemeClr val="accent1">
+                <a:shade val="50000"/>
+              </a:schemeClr>
+            </a:lnRef>
+            <a:fillRef idx="1">
+              <a:schemeClr val="accent1"/>
+            </a:fillRef>
+            <a:effectRef idx="0">
+              <a:schemeClr val="accent1"/>
+            </a:effectRef>
+            <a:fontRef idx="minor">
+              <a:schemeClr val="lt1"/>
+            </a:fontRef>
+          </p:style>
+          <p:txBody>
+            <a:bodyPr rtlCol="0" anchor="ctr"/>
+            <a:lstStyle/>
+            <a:p>
+              <a:pPr algn="ctr"/>
+              <a:endParaRPr lang="en-US"/>
+            </a:p>
+          </p:txBody>
+        </p:sp>
+        <p:sp>
+          <p:nvSpPr>
+            <p:cNvPr id="52" name="Hexagon 51">
+              <a:extLst>
+                <a:ext uri="{FF2B5EF4-FFF2-40B4-BE49-F238E27FC236}">
+                  <a16:creationId xmlns:a16="http://schemas.microsoft.com/office/drawing/2014/main" id="{5B14BEC1-982F-A175-A401-ECF83DE15DA6}"/>
+                </a:ext>
+              </a:extLst>
+            </p:cNvPr>
+            <p:cNvSpPr/>
+            <p:nvPr/>
+          </p:nvSpPr>
+          <p:spPr>
+            <a:xfrm>
+              <a:off x="304817" y="699533"/>
+              <a:ext cx="1188720" cy="1097280"/>
+            </a:xfrm>
+            <a:prstGeom prst="hexagon">
+              <a:avLst/>
+            </a:prstGeom>
+            <a:noFill/>
+            <a:ln w="38100" cap="flat" cmpd="sng" algn="ctr">
+              <a:solidFill>
+                <a:schemeClr val="dk1"/>
+              </a:solidFill>
+              <a:prstDash val="solid"/>
+              <a:round/>
+              <a:headEnd type="none" w="med" len="med"/>
+              <a:tailEnd type="none" w="med" len="med"/>
+            </a:ln>
+          </p:spPr>
+          <p:style>
+            <a:lnRef idx="0">
+              <a:scrgbClr r="0" g="0" b="0"/>
+            </a:lnRef>
+            <a:fillRef idx="0">
+              <a:scrgbClr r="0" g="0" b="0"/>
+            </a:fillRef>
+            <a:effectRef idx="0">
+              <a:scrgbClr r="0" g="0" b="0"/>
+            </a:effectRef>
+            <a:fontRef idx="minor">
+              <a:schemeClr val="dk1"/>
+            </a:fontRef>
+          </p:style>
+          <p:txBody>
+            <a:bodyPr rtlCol="0" anchor="ctr"/>
+            <a:lstStyle/>
+            <a:p>
+              <a:pPr algn="ctr"/>
+              <a:endParaRPr lang="en-US"/>
+            </a:p>
+          </p:txBody>
+        </p:sp>
+      </p:grpSp>
+      <p:grpSp>
+        <p:nvGrpSpPr>
+          <p:cNvPr id="7" name="Group 6">
+            <a:extLst>
+              <a:ext uri="{FF2B5EF4-FFF2-40B4-BE49-F238E27FC236}">
+                <a16:creationId xmlns:a16="http://schemas.microsoft.com/office/drawing/2014/main" id="{02C5273B-50B4-FC83-555C-1B3528B39270}"/>
+              </a:ext>
+            </a:extLst>
+          </p:cNvPr>
+          <p:cNvGrpSpPr/>
+          <p:nvPr/>
+        </p:nvGrpSpPr>
+        <p:grpSpPr>
+          <a:xfrm>
+            <a:off x="2027459" y="674158"/>
+            <a:ext cx="770179" cy="474929"/>
+            <a:chOff x="4366971" y="1518683"/>
+            <a:chExt cx="1632818" cy="1006873"/>
+          </a:xfrm>
+        </p:grpSpPr>
+        <p:sp>
+          <p:nvSpPr>
+            <p:cNvPr id="2" name="Moon 1">
+              <a:extLst>
+                <a:ext uri="{FF2B5EF4-FFF2-40B4-BE49-F238E27FC236}">
+                  <a16:creationId xmlns:a16="http://schemas.microsoft.com/office/drawing/2014/main" id="{08ECC53F-5E6E-8B69-CDF4-912B085C321D}"/>
+                </a:ext>
+              </a:extLst>
+            </p:cNvPr>
+            <p:cNvSpPr/>
+            <p:nvPr/>
+          </p:nvSpPr>
+          <p:spPr>
+            <a:xfrm rot="5400000">
+              <a:off x="4929704" y="1543410"/>
+              <a:ext cx="469900" cy="1494392"/>
+            </a:xfrm>
+            <a:prstGeom prst="moon">
+              <a:avLst>
+                <a:gd name="adj" fmla="val 87500"/>
+              </a:avLst>
+            </a:prstGeom>
+          </p:spPr>
+          <p:style>
+            <a:lnRef idx="2">
+              <a:schemeClr val="dk1">
+                <a:shade val="50000"/>
+              </a:schemeClr>
+            </a:lnRef>
+            <a:fillRef idx="1">
+              <a:schemeClr val="dk1"/>
+            </a:fillRef>
+            <a:effectRef idx="0">
+              <a:schemeClr val="dk1"/>
+            </a:effectRef>
+            <a:fontRef idx="minor">
+              <a:schemeClr val="lt1"/>
+            </a:fontRef>
+          </p:style>
+          <p:txBody>
+            <a:bodyPr rtlCol="0" anchor="ctr"/>
+            <a:lstStyle/>
+            <a:p>
+              <a:pPr algn="ctr"/>
+              <a:endParaRPr lang="en-US"/>
+            </a:p>
+          </p:txBody>
+        </p:sp>
+        <p:grpSp>
+          <p:nvGrpSpPr>
+            <p:cNvPr id="6" name="Group 5">
+              <a:extLst>
+                <a:ext uri="{FF2B5EF4-FFF2-40B4-BE49-F238E27FC236}">
+                  <a16:creationId xmlns:a16="http://schemas.microsoft.com/office/drawing/2014/main" id="{D02A0808-8BD5-7741-531C-AA1473A5E492}"/>
+                </a:ext>
+              </a:extLst>
+            </p:cNvPr>
+            <p:cNvGrpSpPr/>
+            <p:nvPr/>
+          </p:nvGrpSpPr>
+          <p:grpSpPr>
+            <a:xfrm>
+              <a:off x="4366971" y="1555986"/>
+              <a:ext cx="574646" cy="861619"/>
+              <a:chOff x="4398721" y="1536936"/>
+              <a:chExt cx="574646" cy="861619"/>
+            </a:xfrm>
+          </p:grpSpPr>
+          <p:sp>
+            <p:nvSpPr>
+              <p:cNvPr id="3" name="Isosceles Triangle 2">
+                <a:extLst>
+                  <a:ext uri="{FF2B5EF4-FFF2-40B4-BE49-F238E27FC236}">
+                    <a16:creationId xmlns:a16="http://schemas.microsoft.com/office/drawing/2014/main" id="{00C67651-4505-D6D3-2680-A84D04E20557}"/>
+                  </a:ext>
+                </a:extLst>
+              </p:cNvPr>
+              <p:cNvSpPr/>
+              <p:nvPr/>
+            </p:nvSpPr>
+            <p:spPr>
+              <a:xfrm rot="19469091">
+                <a:off x="4398721" y="1712755"/>
+                <a:ext cx="230742" cy="685800"/>
+              </a:xfrm>
+              <a:prstGeom prst="triangle">
+                <a:avLst/>
+              </a:prstGeom>
+            </p:spPr>
+            <p:style>
+              <a:lnRef idx="2">
+                <a:schemeClr val="dk1">
+                  <a:shade val="50000"/>
+                </a:schemeClr>
+              </a:lnRef>
+              <a:fillRef idx="1">
+                <a:schemeClr val="dk1"/>
+              </a:fillRef>
+              <a:effectRef idx="0">
+                <a:schemeClr val="dk1"/>
+              </a:effectRef>
+              <a:fontRef idx="minor">
+                <a:schemeClr val="lt1"/>
+              </a:fontRef>
+            </p:style>
+            <p:txBody>
+              <a:bodyPr rtlCol="0" anchor="ctr"/>
+              <a:lstStyle/>
+              <a:p>
+                <a:pPr algn="ctr"/>
+                <a:endParaRPr lang="en-US"/>
+              </a:p>
+            </p:txBody>
+          </p:sp>
+          <p:sp>
+            <p:nvSpPr>
+              <p:cNvPr id="53" name="Isosceles Triangle 52">
+                <a:extLst>
+                  <a:ext uri="{FF2B5EF4-FFF2-40B4-BE49-F238E27FC236}">
+                    <a16:creationId xmlns:a16="http://schemas.microsoft.com/office/drawing/2014/main" id="{6F8DC6CF-8AB5-1FBC-E0B8-2F278F920794}"/>
+                  </a:ext>
+                </a:extLst>
+              </p:cNvPr>
+              <p:cNvSpPr/>
+              <p:nvPr/>
+            </p:nvSpPr>
+            <p:spPr>
+              <a:xfrm rot="20688119">
+                <a:off x="4742625" y="1536936"/>
+                <a:ext cx="230742" cy="685800"/>
+              </a:xfrm>
+              <a:prstGeom prst="triangle">
+                <a:avLst/>
+              </a:prstGeom>
+            </p:spPr>
+            <p:style>
+              <a:lnRef idx="2">
+                <a:schemeClr val="dk1">
+                  <a:shade val="50000"/>
+                </a:schemeClr>
+              </a:lnRef>
+              <a:fillRef idx="1">
+                <a:schemeClr val="dk1"/>
+              </a:fillRef>
+              <a:effectRef idx="0">
+                <a:schemeClr val="dk1"/>
+              </a:effectRef>
+              <a:fontRef idx="minor">
+                <a:schemeClr val="lt1"/>
+              </a:fontRef>
+            </p:style>
+            <p:txBody>
+              <a:bodyPr rtlCol="0" anchor="ctr"/>
+              <a:lstStyle/>
+              <a:p>
+                <a:pPr algn="ctr"/>
+                <a:endParaRPr lang="en-US"/>
+              </a:p>
+            </p:txBody>
+          </p:sp>
+        </p:grpSp>
+        <p:grpSp>
+          <p:nvGrpSpPr>
+            <p:cNvPr id="5" name="Group 4">
+              <a:extLst>
+                <a:ext uri="{FF2B5EF4-FFF2-40B4-BE49-F238E27FC236}">
+                  <a16:creationId xmlns:a16="http://schemas.microsoft.com/office/drawing/2014/main" id="{5635E474-09FB-9B18-BD4C-C98699FB2699}"/>
+                </a:ext>
+              </a:extLst>
+            </p:cNvPr>
+            <p:cNvGrpSpPr/>
+            <p:nvPr/>
+          </p:nvGrpSpPr>
+          <p:grpSpPr>
+            <a:xfrm flipH="1">
+              <a:off x="5425143" y="1565156"/>
+              <a:ext cx="574646" cy="861619"/>
+              <a:chOff x="4551121" y="1689336"/>
+              <a:chExt cx="574646" cy="861619"/>
+            </a:xfrm>
+          </p:grpSpPr>
+          <p:sp>
+            <p:nvSpPr>
+              <p:cNvPr id="54" name="Isosceles Triangle 53">
+                <a:extLst>
+                  <a:ext uri="{FF2B5EF4-FFF2-40B4-BE49-F238E27FC236}">
+                    <a16:creationId xmlns:a16="http://schemas.microsoft.com/office/drawing/2014/main" id="{5CB0FEAA-F819-2A9A-855A-ED481D102344}"/>
+                  </a:ext>
+                </a:extLst>
+              </p:cNvPr>
+              <p:cNvSpPr/>
+              <p:nvPr/>
+            </p:nvSpPr>
+            <p:spPr>
+              <a:xfrm rot="19469091">
+                <a:off x="4551121" y="1865155"/>
+                <a:ext cx="230742" cy="685800"/>
+              </a:xfrm>
+              <a:prstGeom prst="triangle">
+                <a:avLst/>
+              </a:prstGeom>
+            </p:spPr>
+            <p:style>
+              <a:lnRef idx="2">
+                <a:schemeClr val="dk1">
+                  <a:shade val="50000"/>
+                </a:schemeClr>
+              </a:lnRef>
+              <a:fillRef idx="1">
+                <a:schemeClr val="dk1"/>
+              </a:fillRef>
+              <a:effectRef idx="0">
+                <a:schemeClr val="dk1"/>
+              </a:effectRef>
+              <a:fontRef idx="minor">
+                <a:schemeClr val="lt1"/>
+              </a:fontRef>
+            </p:style>
+            <p:txBody>
+              <a:bodyPr rtlCol="0" anchor="ctr"/>
+              <a:lstStyle/>
+              <a:p>
+                <a:pPr algn="ctr"/>
+                <a:endParaRPr lang="en-US"/>
+              </a:p>
+            </p:txBody>
+          </p:sp>
+          <p:sp>
+            <p:nvSpPr>
+              <p:cNvPr id="57" name="Isosceles Triangle 56">
+                <a:extLst>
+                  <a:ext uri="{FF2B5EF4-FFF2-40B4-BE49-F238E27FC236}">
+                    <a16:creationId xmlns:a16="http://schemas.microsoft.com/office/drawing/2014/main" id="{3A57F9DB-377F-E6CA-F2A8-D0651786CC7E}"/>
+                  </a:ext>
+                </a:extLst>
+              </p:cNvPr>
+              <p:cNvSpPr/>
+              <p:nvPr/>
+            </p:nvSpPr>
+            <p:spPr>
+              <a:xfrm rot="20688119">
+                <a:off x="4895025" y="1689336"/>
+                <a:ext cx="230742" cy="685800"/>
+              </a:xfrm>
+              <a:prstGeom prst="triangle">
+                <a:avLst/>
+              </a:prstGeom>
+            </p:spPr>
+            <p:style>
+              <a:lnRef idx="2">
+                <a:schemeClr val="dk1">
+                  <a:shade val="50000"/>
+                </a:schemeClr>
+              </a:lnRef>
+              <a:fillRef idx="1">
+                <a:schemeClr val="dk1"/>
+              </a:fillRef>
+              <a:effectRef idx="0">
+                <a:schemeClr val="dk1"/>
+              </a:effectRef>
+              <a:fontRef idx="minor">
+                <a:schemeClr val="lt1"/>
+              </a:fontRef>
+            </p:style>
+            <p:txBody>
+              <a:bodyPr rtlCol="0" anchor="ctr"/>
+              <a:lstStyle/>
+              <a:p>
+                <a:pPr algn="ctr"/>
+                <a:endParaRPr lang="en-US"/>
+              </a:p>
+            </p:txBody>
+          </p:sp>
+        </p:grpSp>
+        <p:sp>
+          <p:nvSpPr>
+            <p:cNvPr id="58" name="Isosceles Triangle 57">
+              <a:extLst>
+                <a:ext uri="{FF2B5EF4-FFF2-40B4-BE49-F238E27FC236}">
+                  <a16:creationId xmlns:a16="http://schemas.microsoft.com/office/drawing/2014/main" id="{EBB9CF00-E48C-0C71-6A17-6F28FC063EC3}"/>
+                </a:ext>
+              </a:extLst>
+            </p:cNvPr>
+            <p:cNvSpPr/>
+            <p:nvPr/>
+          </p:nvSpPr>
+          <p:spPr>
+            <a:xfrm flipH="1">
+              <a:off x="5070860" y="1518683"/>
+              <a:ext cx="230742" cy="685800"/>
+            </a:xfrm>
+            <a:prstGeom prst="triangle">
+              <a:avLst/>
+            </a:prstGeom>
+          </p:spPr>
+          <p:style>
+            <a:lnRef idx="2">
+              <a:schemeClr val="dk1">
+                <a:shade val="50000"/>
+              </a:schemeClr>
+            </a:lnRef>
+            <a:fillRef idx="1">
+              <a:schemeClr val="dk1"/>
+            </a:fillRef>
+            <a:effectRef idx="0">
+              <a:schemeClr val="dk1"/>
+            </a:effectRef>
+            <a:fontRef idx="minor">
+              <a:schemeClr val="lt1"/>
+            </a:fontRef>
+          </p:style>
+          <p:txBody>
+            <a:bodyPr rtlCol="0" anchor="ctr"/>
+            <a:lstStyle/>
+            <a:p>
+              <a:pPr algn="ctr"/>
+              <a:endParaRPr lang="en-US"/>
+            </a:p>
+          </p:txBody>
+        </p:sp>
+      </p:grpSp>
+      <p:grpSp>
+        <p:nvGrpSpPr>
+          <p:cNvPr id="24" name="Group 23">
+            <a:extLst>
+              <a:ext uri="{FF2B5EF4-FFF2-40B4-BE49-F238E27FC236}">
+                <a16:creationId xmlns:a16="http://schemas.microsoft.com/office/drawing/2014/main" id="{4EE2ECEA-A29F-CFB1-C1E5-D247BC7384E3}"/>
+              </a:ext>
+            </a:extLst>
+          </p:cNvPr>
+          <p:cNvGrpSpPr/>
+          <p:nvPr/>
+        </p:nvGrpSpPr>
+        <p:grpSpPr>
+          <a:xfrm>
+            <a:off x="2061364" y="2085647"/>
+            <a:ext cx="702370" cy="722337"/>
+            <a:chOff x="6950179" y="209368"/>
+            <a:chExt cx="2475607" cy="2545983"/>
+          </a:xfrm>
+        </p:grpSpPr>
+        <p:sp>
+          <p:nvSpPr>
+            <p:cNvPr id="62" name="Moon 61">
+              <a:extLst>
+                <a:ext uri="{FF2B5EF4-FFF2-40B4-BE49-F238E27FC236}">
+                  <a16:creationId xmlns:a16="http://schemas.microsoft.com/office/drawing/2014/main" id="{64E6FE43-93A5-7BAF-08EC-AA55FA77B202}"/>
+                </a:ext>
+              </a:extLst>
+            </p:cNvPr>
+            <p:cNvSpPr/>
+            <p:nvPr/>
+          </p:nvSpPr>
+          <p:spPr>
+            <a:xfrm rot="5400000">
+              <a:off x="7798765" y="1128330"/>
+              <a:ext cx="778435" cy="2475607"/>
+            </a:xfrm>
+            <a:prstGeom prst="moon">
+              <a:avLst>
+                <a:gd name="adj" fmla="val 87500"/>
+              </a:avLst>
+            </a:prstGeom>
+          </p:spPr>
+          <p:style>
+            <a:lnRef idx="2">
+              <a:schemeClr val="dk1">
+                <a:shade val="50000"/>
+              </a:schemeClr>
+            </a:lnRef>
+            <a:fillRef idx="1">
+              <a:schemeClr val="dk1"/>
+            </a:fillRef>
+            <a:effectRef idx="0">
+              <a:schemeClr val="dk1"/>
+            </a:effectRef>
+            <a:fontRef idx="minor">
+              <a:schemeClr val="lt1"/>
+            </a:fontRef>
+          </p:style>
+          <p:txBody>
+            <a:bodyPr rtlCol="0" anchor="ctr"/>
+            <a:lstStyle/>
+            <a:p>
+              <a:pPr algn="ctr"/>
+              <a:endParaRPr lang="en-US"/>
+            </a:p>
+          </p:txBody>
+        </p:sp>
+        <p:grpSp>
+          <p:nvGrpSpPr>
+            <p:cNvPr id="23" name="Group 22">
+              <a:extLst>
+                <a:ext uri="{FF2B5EF4-FFF2-40B4-BE49-F238E27FC236}">
+                  <a16:creationId xmlns:a16="http://schemas.microsoft.com/office/drawing/2014/main" id="{ECD90FE6-F4D1-4A2B-A7E0-A5FDF114AD87}"/>
+                </a:ext>
+              </a:extLst>
+            </p:cNvPr>
+            <p:cNvGrpSpPr/>
+            <p:nvPr/>
+          </p:nvGrpSpPr>
+          <p:grpSpPr>
+            <a:xfrm>
+              <a:off x="7048732" y="209368"/>
+              <a:ext cx="2278499" cy="2002129"/>
+              <a:chOff x="3753737" y="1365068"/>
+              <a:chExt cx="2278499" cy="2002129"/>
+            </a:xfrm>
+          </p:grpSpPr>
+          <p:sp>
+            <p:nvSpPr>
+              <p:cNvPr id="72" name="Isosceles Triangle 71">
+                <a:extLst>
+                  <a:ext uri="{FF2B5EF4-FFF2-40B4-BE49-F238E27FC236}">
+                    <a16:creationId xmlns:a16="http://schemas.microsoft.com/office/drawing/2014/main" id="{63B3A113-D7DE-91F2-E0D5-EF8E4378C029}"/>
+                  </a:ext>
+                </a:extLst>
+              </p:cNvPr>
+              <p:cNvSpPr/>
+              <p:nvPr/>
+            </p:nvSpPr>
+            <p:spPr>
+              <a:xfrm flipH="1">
+                <a:off x="4555226" y="1365068"/>
+                <a:ext cx="673630" cy="2002129"/>
+              </a:xfrm>
+              <a:prstGeom prst="triangle">
+                <a:avLst/>
+              </a:prstGeom>
+            </p:spPr>
+            <p:style>
+              <a:lnRef idx="2">
+                <a:schemeClr val="dk1">
+                  <a:shade val="50000"/>
+                </a:schemeClr>
+              </a:lnRef>
+              <a:fillRef idx="1">
+                <a:schemeClr val="dk1"/>
+              </a:fillRef>
+              <a:effectRef idx="0">
+                <a:schemeClr val="dk1"/>
+              </a:effectRef>
+              <a:fontRef idx="minor">
+                <a:schemeClr val="lt1"/>
+              </a:fontRef>
+            </p:style>
+            <p:txBody>
+              <a:bodyPr rtlCol="0" anchor="ctr"/>
+              <a:lstStyle/>
+              <a:p>
+                <a:pPr algn="ctr"/>
+                <a:endParaRPr lang="en-US"/>
+              </a:p>
+            </p:txBody>
+          </p:sp>
+          <p:grpSp>
+            <p:nvGrpSpPr>
+              <p:cNvPr id="11" name="Group 10">
+                <a:extLst>
+                  <a:ext uri="{FF2B5EF4-FFF2-40B4-BE49-F238E27FC236}">
+                    <a16:creationId xmlns:a16="http://schemas.microsoft.com/office/drawing/2014/main" id="{D8FE397E-EC7B-3858-294C-5EFA291A7BCC}"/>
+                  </a:ext>
+                </a:extLst>
+              </p:cNvPr>
+              <p:cNvGrpSpPr/>
+              <p:nvPr/>
+            </p:nvGrpSpPr>
+            <p:grpSpPr>
+              <a:xfrm>
+                <a:off x="3753737" y="2018274"/>
+                <a:ext cx="940920" cy="1047698"/>
+                <a:chOff x="3753737" y="2018274"/>
+                <a:chExt cx="940920" cy="1047698"/>
+              </a:xfrm>
+            </p:grpSpPr>
+            <p:sp>
+              <p:nvSpPr>
+                <p:cNvPr id="9" name="Isosceles Triangle 8">
+                  <a:extLst>
+                    <a:ext uri="{FF2B5EF4-FFF2-40B4-BE49-F238E27FC236}">
+                      <a16:creationId xmlns:a16="http://schemas.microsoft.com/office/drawing/2014/main" id="{23F555E3-07C8-F3DC-7DD5-1D0B0F067C25}"/>
+                    </a:ext>
+                  </a:extLst>
+                </p:cNvPr>
+                <p:cNvSpPr/>
+                <p:nvPr/>
+              </p:nvSpPr>
+              <p:spPr>
+                <a:xfrm rot="16779459">
+                  <a:off x="4296631" y="1899647"/>
+                  <a:ext cx="279400" cy="516653"/>
+                </a:xfrm>
+                <a:prstGeom prst="triangle">
+                  <a:avLst/>
+                </a:prstGeom>
+              </p:spPr>
+              <p:style>
+                <a:lnRef idx="2">
+                  <a:schemeClr val="dk1">
+                    <a:shade val="50000"/>
+                  </a:schemeClr>
+                </a:lnRef>
+                <a:fillRef idx="1">
+                  <a:schemeClr val="dk1"/>
+                </a:fillRef>
+                <a:effectRef idx="0">
+                  <a:schemeClr val="dk1"/>
+                </a:effectRef>
+                <a:fontRef idx="minor">
+                  <a:schemeClr val="lt1"/>
+                </a:fontRef>
+              </p:style>
+              <p:txBody>
+                <a:bodyPr rtlCol="0" anchor="ctr"/>
+                <a:lstStyle/>
+                <a:p>
+                  <a:pPr algn="ctr"/>
+                  <a:endParaRPr lang="en-US"/>
+                </a:p>
+              </p:txBody>
+            </p:sp>
+            <p:sp>
+              <p:nvSpPr>
+                <p:cNvPr id="77" name="Isosceles Triangle 76">
+                  <a:extLst>
+                    <a:ext uri="{FF2B5EF4-FFF2-40B4-BE49-F238E27FC236}">
+                      <a16:creationId xmlns:a16="http://schemas.microsoft.com/office/drawing/2014/main" id="{E242016F-BDD3-A029-6029-E1A43842079B}"/>
+                    </a:ext>
+                  </a:extLst>
+                </p:cNvPr>
+                <p:cNvSpPr/>
+                <p:nvPr/>
+              </p:nvSpPr>
+              <p:spPr>
+                <a:xfrm rot="16779459">
+                  <a:off x="4023093" y="2517216"/>
+                  <a:ext cx="279400" cy="818112"/>
+                </a:xfrm>
+                <a:prstGeom prst="triangle">
+                  <a:avLst/>
+                </a:prstGeom>
+              </p:spPr>
+              <p:style>
+                <a:lnRef idx="2">
+                  <a:schemeClr val="dk1">
+                    <a:shade val="50000"/>
+                  </a:schemeClr>
+                </a:lnRef>
+                <a:fillRef idx="1">
+                  <a:schemeClr val="dk1"/>
+                </a:fillRef>
+                <a:effectRef idx="0">
+                  <a:schemeClr val="dk1"/>
+                </a:effectRef>
+                <a:fontRef idx="minor">
+                  <a:schemeClr val="lt1"/>
+                </a:fontRef>
+              </p:style>
+              <p:txBody>
+                <a:bodyPr rtlCol="0" anchor="ctr"/>
+                <a:lstStyle/>
+                <a:p>
+                  <a:pPr algn="ctr"/>
+                  <a:endParaRPr lang="en-US"/>
+                </a:p>
+              </p:txBody>
+            </p:sp>
+            <p:sp>
+              <p:nvSpPr>
+                <p:cNvPr id="78" name="Isosceles Triangle 77">
+                  <a:extLst>
+                    <a:ext uri="{FF2B5EF4-FFF2-40B4-BE49-F238E27FC236}">
+                      <a16:creationId xmlns:a16="http://schemas.microsoft.com/office/drawing/2014/main" id="{03DF0BD2-01C8-A8C6-B268-3A3E989E56EA}"/>
+                    </a:ext>
+                  </a:extLst>
+                </p:cNvPr>
+                <p:cNvSpPr/>
+                <p:nvPr/>
+              </p:nvSpPr>
+              <p:spPr>
+                <a:xfrm rot="16779459">
+                  <a:off x="4169431" y="2180356"/>
+                  <a:ext cx="279400" cy="656846"/>
+                </a:xfrm>
+                <a:prstGeom prst="triangle">
+                  <a:avLst/>
+                </a:prstGeom>
+              </p:spPr>
+              <p:style>
+                <a:lnRef idx="2">
+                  <a:schemeClr val="dk1">
+                    <a:shade val="50000"/>
+                  </a:schemeClr>
+                </a:lnRef>
+                <a:fillRef idx="1">
+                  <a:schemeClr val="dk1"/>
+                </a:fillRef>
+                <a:effectRef idx="0">
+                  <a:schemeClr val="dk1"/>
+                </a:effectRef>
+                <a:fontRef idx="minor">
+                  <a:schemeClr val="lt1"/>
+                </a:fontRef>
+              </p:style>
+              <p:txBody>
+                <a:bodyPr rtlCol="0" anchor="ctr"/>
+                <a:lstStyle/>
+                <a:p>
+                  <a:pPr algn="ctr"/>
+                  <a:endParaRPr lang="en-US"/>
+                </a:p>
+              </p:txBody>
+            </p:sp>
+          </p:grpSp>
+          <p:grpSp>
+            <p:nvGrpSpPr>
+              <p:cNvPr id="79" name="Group 78">
+                <a:extLst>
+                  <a:ext uri="{FF2B5EF4-FFF2-40B4-BE49-F238E27FC236}">
+                    <a16:creationId xmlns:a16="http://schemas.microsoft.com/office/drawing/2014/main" id="{C47F9B93-DF24-BFD1-7735-D49A3DD6027E}"/>
+                  </a:ext>
+                </a:extLst>
+              </p:cNvPr>
+              <p:cNvGrpSpPr/>
+              <p:nvPr/>
+            </p:nvGrpSpPr>
+            <p:grpSpPr>
+              <a:xfrm flipH="1">
+                <a:off x="5091316" y="2020148"/>
+                <a:ext cx="940920" cy="1047698"/>
+                <a:chOff x="3753737" y="2018274"/>
+                <a:chExt cx="940920" cy="1047698"/>
+              </a:xfrm>
+            </p:grpSpPr>
+            <p:sp>
+              <p:nvSpPr>
+                <p:cNvPr id="80" name="Isosceles Triangle 79">
+                  <a:extLst>
+                    <a:ext uri="{FF2B5EF4-FFF2-40B4-BE49-F238E27FC236}">
+                      <a16:creationId xmlns:a16="http://schemas.microsoft.com/office/drawing/2014/main" id="{F2A09009-AB80-5CB8-A07E-DA0730F93C99}"/>
+                    </a:ext>
+                  </a:extLst>
+                </p:cNvPr>
+                <p:cNvSpPr/>
+                <p:nvPr/>
+              </p:nvSpPr>
+              <p:spPr>
+                <a:xfrm rot="16779459">
+                  <a:off x="4296631" y="1899647"/>
+                  <a:ext cx="279400" cy="516653"/>
+                </a:xfrm>
+                <a:prstGeom prst="triangle">
+                  <a:avLst/>
+                </a:prstGeom>
+              </p:spPr>
+              <p:style>
+                <a:lnRef idx="2">
+                  <a:schemeClr val="dk1">
+                    <a:shade val="50000"/>
+                  </a:schemeClr>
+                </a:lnRef>
+                <a:fillRef idx="1">
+                  <a:schemeClr val="dk1"/>
+                </a:fillRef>
+                <a:effectRef idx="0">
+                  <a:schemeClr val="dk1"/>
+                </a:effectRef>
+                <a:fontRef idx="minor">
+                  <a:schemeClr val="lt1"/>
+                </a:fontRef>
+              </p:style>
+              <p:txBody>
+                <a:bodyPr rtlCol="0" anchor="ctr"/>
+                <a:lstStyle/>
+                <a:p>
+                  <a:pPr algn="ctr"/>
+                  <a:endParaRPr lang="en-US"/>
+                </a:p>
+              </p:txBody>
+            </p:sp>
+            <p:sp>
+              <p:nvSpPr>
+                <p:cNvPr id="81" name="Isosceles Triangle 80">
+                  <a:extLst>
+                    <a:ext uri="{FF2B5EF4-FFF2-40B4-BE49-F238E27FC236}">
+                      <a16:creationId xmlns:a16="http://schemas.microsoft.com/office/drawing/2014/main" id="{7B9A6244-DE16-017A-0905-737888810438}"/>
+                    </a:ext>
+                  </a:extLst>
+                </p:cNvPr>
+                <p:cNvSpPr/>
+                <p:nvPr/>
+              </p:nvSpPr>
+              <p:spPr>
+                <a:xfrm rot="16779459">
+                  <a:off x="4023093" y="2517216"/>
+                  <a:ext cx="279400" cy="818112"/>
+                </a:xfrm>
+                <a:prstGeom prst="triangle">
+                  <a:avLst/>
+                </a:prstGeom>
+              </p:spPr>
+              <p:style>
+                <a:lnRef idx="2">
+                  <a:schemeClr val="dk1">
+                    <a:shade val="50000"/>
+                  </a:schemeClr>
+                </a:lnRef>
+                <a:fillRef idx="1">
+                  <a:schemeClr val="dk1"/>
+                </a:fillRef>
+                <a:effectRef idx="0">
+                  <a:schemeClr val="dk1"/>
+                </a:effectRef>
+                <a:fontRef idx="minor">
+                  <a:schemeClr val="lt1"/>
+                </a:fontRef>
+              </p:style>
+              <p:txBody>
+                <a:bodyPr rtlCol="0" anchor="ctr"/>
+                <a:lstStyle/>
+                <a:p>
+                  <a:pPr algn="ctr"/>
+                  <a:endParaRPr lang="en-US"/>
+                </a:p>
+              </p:txBody>
+            </p:sp>
+            <p:sp>
+              <p:nvSpPr>
+                <p:cNvPr id="82" name="Isosceles Triangle 81">
+                  <a:extLst>
+                    <a:ext uri="{FF2B5EF4-FFF2-40B4-BE49-F238E27FC236}">
+                      <a16:creationId xmlns:a16="http://schemas.microsoft.com/office/drawing/2014/main" id="{2E9244AD-F24C-77C5-7E3C-A2F56161DAE9}"/>
+                    </a:ext>
+                  </a:extLst>
+                </p:cNvPr>
+                <p:cNvSpPr/>
+                <p:nvPr/>
+              </p:nvSpPr>
+              <p:spPr>
+                <a:xfrm rot="16779459">
+                  <a:off x="4169431" y="2180356"/>
+                  <a:ext cx="279400" cy="656846"/>
+                </a:xfrm>
+                <a:prstGeom prst="triangle">
+                  <a:avLst/>
+                </a:prstGeom>
+              </p:spPr>
+              <p:style>
+                <a:lnRef idx="2">
+                  <a:schemeClr val="dk1">
+                    <a:shade val="50000"/>
+                  </a:schemeClr>
+                </a:lnRef>
+                <a:fillRef idx="1">
+                  <a:schemeClr val="dk1"/>
+                </a:fillRef>
+                <a:effectRef idx="0">
+                  <a:schemeClr val="dk1"/>
+                </a:effectRef>
+                <a:fontRef idx="minor">
+                  <a:schemeClr val="lt1"/>
+                </a:fontRef>
+              </p:style>
+              <p:txBody>
+                <a:bodyPr rtlCol="0" anchor="ctr"/>
+                <a:lstStyle/>
+                <a:p>
+                  <a:pPr algn="ctr"/>
+                  <a:endParaRPr lang="en-US"/>
+                </a:p>
+              </p:txBody>
+            </p:sp>
+          </p:grpSp>
+        </p:grpSp>
+      </p:grpSp>
     </p:spTree>
     <p:extLst>
       <p:ext uri="{BB962C8B-B14F-4D97-AF65-F5344CB8AC3E}">
-        <p14:creationId xmlns:p14="http://schemas.microsoft.com/office/powerpoint/2010/main" val="942906460"/>
+        <p14:creationId xmlns:p14="http://schemas.microsoft.com/office/powerpoint/2010/main" val="444076323"/>
       </p:ext>
     </p:extLst>
   </p:cSld>

--- a/image process/drawings sifi.pptx
+++ b/image process/drawings sifi.pptx
@@ -200,7 +200,7 @@
           <a:p>
             <a:fld id="{7700C406-2328-4788-AE79-437B6607AD22}" type="datetimeFigureOut">
               <a:rPr lang="en-US" smtClean="0"/>
-              <a:t>6/13/2022</a:t>
+              <a:t>6/14/2022</a:t>
             </a:fld>
             <a:endParaRPr lang="en-US"/>
           </a:p>
@@ -614,7 +614,7 @@
           <a:p>
             <a:fld id="{9EC8CD53-0620-48F2-A3BB-2B10BDA60E52}" type="datetimeFigureOut">
               <a:rPr lang="en-US" smtClean="0"/>
-              <a:t>6/13/2022</a:t>
+              <a:t>6/14/2022</a:t>
             </a:fld>
             <a:endParaRPr lang="en-US"/>
           </a:p>
@@ -812,7 +812,7 @@
           <a:p>
             <a:fld id="{9EC8CD53-0620-48F2-A3BB-2B10BDA60E52}" type="datetimeFigureOut">
               <a:rPr lang="en-US" smtClean="0"/>
-              <a:t>6/13/2022</a:t>
+              <a:t>6/14/2022</a:t>
             </a:fld>
             <a:endParaRPr lang="en-US"/>
           </a:p>
@@ -1020,7 +1020,7 @@
           <a:p>
             <a:fld id="{9EC8CD53-0620-48F2-A3BB-2B10BDA60E52}" type="datetimeFigureOut">
               <a:rPr lang="en-US" smtClean="0"/>
-              <a:t>6/13/2022</a:t>
+              <a:t>6/14/2022</a:t>
             </a:fld>
             <a:endParaRPr lang="en-US"/>
           </a:p>
@@ -1218,7 +1218,7 @@
           <a:p>
             <a:fld id="{9EC8CD53-0620-48F2-A3BB-2B10BDA60E52}" type="datetimeFigureOut">
               <a:rPr lang="en-US" smtClean="0"/>
-              <a:t>6/13/2022</a:t>
+              <a:t>6/14/2022</a:t>
             </a:fld>
             <a:endParaRPr lang="en-US"/>
           </a:p>
@@ -1493,7 +1493,7 @@
           <a:p>
             <a:fld id="{9EC8CD53-0620-48F2-A3BB-2B10BDA60E52}" type="datetimeFigureOut">
               <a:rPr lang="en-US" smtClean="0"/>
-              <a:t>6/13/2022</a:t>
+              <a:t>6/14/2022</a:t>
             </a:fld>
             <a:endParaRPr lang="en-US"/>
           </a:p>
@@ -1758,7 +1758,7 @@
           <a:p>
             <a:fld id="{9EC8CD53-0620-48F2-A3BB-2B10BDA60E52}" type="datetimeFigureOut">
               <a:rPr lang="en-US" smtClean="0"/>
-              <a:t>6/13/2022</a:t>
+              <a:t>6/14/2022</a:t>
             </a:fld>
             <a:endParaRPr lang="en-US"/>
           </a:p>
@@ -2170,7 +2170,7 @@
           <a:p>
             <a:fld id="{9EC8CD53-0620-48F2-A3BB-2B10BDA60E52}" type="datetimeFigureOut">
               <a:rPr lang="en-US" smtClean="0"/>
-              <a:t>6/13/2022</a:t>
+              <a:t>6/14/2022</a:t>
             </a:fld>
             <a:endParaRPr lang="en-US"/>
           </a:p>
@@ -2311,7 +2311,7 @@
           <a:p>
             <a:fld id="{9EC8CD53-0620-48F2-A3BB-2B10BDA60E52}" type="datetimeFigureOut">
               <a:rPr lang="en-US" smtClean="0"/>
-              <a:t>6/13/2022</a:t>
+              <a:t>6/14/2022</a:t>
             </a:fld>
             <a:endParaRPr lang="en-US"/>
           </a:p>
@@ -2424,7 +2424,7 @@
           <a:p>
             <a:fld id="{9EC8CD53-0620-48F2-A3BB-2B10BDA60E52}" type="datetimeFigureOut">
               <a:rPr lang="en-US" smtClean="0"/>
-              <a:t>6/13/2022</a:t>
+              <a:t>6/14/2022</a:t>
             </a:fld>
             <a:endParaRPr lang="en-US"/>
           </a:p>
@@ -2735,7 +2735,7 @@
           <a:p>
             <a:fld id="{9EC8CD53-0620-48F2-A3BB-2B10BDA60E52}" type="datetimeFigureOut">
               <a:rPr lang="en-US" smtClean="0"/>
-              <a:t>6/13/2022</a:t>
+              <a:t>6/14/2022</a:t>
             </a:fld>
             <a:endParaRPr lang="en-US"/>
           </a:p>
@@ -3023,7 +3023,7 @@
           <a:p>
             <a:fld id="{9EC8CD53-0620-48F2-A3BB-2B10BDA60E52}" type="datetimeFigureOut">
               <a:rPr lang="en-US" smtClean="0"/>
-              <a:t>6/13/2022</a:t>
+              <a:t>6/14/2022</a:t>
             </a:fld>
             <a:endParaRPr lang="en-US"/>
           </a:p>
@@ -3264,7 +3264,7 @@
           <a:p>
             <a:fld id="{9EC8CD53-0620-48F2-A3BB-2B10BDA60E52}" type="datetimeFigureOut">
               <a:rPr lang="en-US" smtClean="0"/>
-              <a:t>6/13/2022</a:t>
+              <a:t>6/14/2022</a:t>
             </a:fld>
             <a:endParaRPr lang="en-US"/>
           </a:p>
@@ -23477,6 +23477,102 @@
           <a:chExt cx="0" cy="0"/>
         </a:xfrm>
       </p:grpSpPr>
+      <p:grpSp>
+        <p:nvGrpSpPr>
+          <p:cNvPr id="45" name="Group 44">
+            <a:extLst>
+              <a:ext uri="{FF2B5EF4-FFF2-40B4-BE49-F238E27FC236}">
+                <a16:creationId xmlns:a16="http://schemas.microsoft.com/office/drawing/2014/main" id="{7EFDFC9C-2C95-8A34-51ED-B845628AE7B0}"/>
+              </a:ext>
+            </a:extLst>
+          </p:cNvPr>
+          <p:cNvGrpSpPr/>
+          <p:nvPr/>
+        </p:nvGrpSpPr>
+        <p:grpSpPr>
+          <a:xfrm>
+            <a:off x="430339" y="3970469"/>
+            <a:ext cx="925451" cy="792020"/>
+            <a:chOff x="3880388" y="4062238"/>
+            <a:chExt cx="925451" cy="792020"/>
+          </a:xfrm>
+        </p:grpSpPr>
+        <p:pic>
+          <p:nvPicPr>
+            <p:cNvPr id="43" name="Picture 42">
+              <a:extLst>
+                <a:ext uri="{FF2B5EF4-FFF2-40B4-BE49-F238E27FC236}">
+                  <a16:creationId xmlns:a16="http://schemas.microsoft.com/office/drawing/2014/main" id="{CF220C7D-E4C1-410F-3F5F-7D27DECFBF78}"/>
+                </a:ext>
+              </a:extLst>
+            </p:cNvPr>
+            <p:cNvPicPr>
+              <a:picLocks noChangeAspect="1"/>
+            </p:cNvPicPr>
+            <p:nvPr/>
+          </p:nvPicPr>
+          <p:blipFill>
+            <a:blip r:embed="rId2"/>
+            <a:stretch>
+              <a:fillRect/>
+            </a:stretch>
+          </p:blipFill>
+          <p:spPr>
+            <a:xfrm>
+              <a:off x="3880388" y="4062238"/>
+              <a:ext cx="286308" cy="618198"/>
+            </a:xfrm>
+            <a:prstGeom prst="rect">
+              <a:avLst/>
+            </a:prstGeom>
+          </p:spPr>
+        </p:pic>
+        <p:pic>
+          <p:nvPicPr>
+            <p:cNvPr id="154" name="Picture 2" descr="Hydra vector Clipart Vector PNG , SVG, EPS, PSD, AI">
+              <a:extLst>
+                <a:ext uri="{FF2B5EF4-FFF2-40B4-BE49-F238E27FC236}">
+                  <a16:creationId xmlns:a16="http://schemas.microsoft.com/office/drawing/2014/main" id="{069D64E5-F6FA-A5DA-D9A4-087706770B3D}"/>
+                </a:ext>
+              </a:extLst>
+            </p:cNvPr>
+            <p:cNvPicPr>
+              <a:picLocks noChangeAspect="1" noChangeArrowheads="1"/>
+            </p:cNvPicPr>
+            <p:nvPr/>
+          </p:nvPicPr>
+          <p:blipFill rotWithShape="1">
+            <a:blip r:embed="rId3">
+              <a:extLst>
+                <a:ext uri="{28A0092B-C50C-407E-A947-70E740481C1C}">
+                  <a14:useLocalDpi xmlns:a14="http://schemas.microsoft.com/office/drawing/2010/main" val="0"/>
+                </a:ext>
+              </a:extLst>
+            </a:blip>
+            <a:srcRect l="32212" t="21635" r="26923" b="31570"/>
+            <a:stretch/>
+          </p:blipFill>
+          <p:spPr bwMode="auto">
+            <a:xfrm>
+              <a:off x="4186165" y="4144671"/>
+              <a:ext cx="619674" cy="709587"/>
+            </a:xfrm>
+            <a:prstGeom prst="rect">
+              <a:avLst/>
+            </a:prstGeom>
+            <a:noFill/>
+            <a:extLst>
+              <a:ext uri="{909E8E84-426E-40DD-AFC4-6F175D3DCCD1}">
+                <a14:hiddenFill xmlns:a14="http://schemas.microsoft.com/office/drawing/2010/main">
+                  <a:solidFill>
+                    <a:srgbClr val="FFFFFF"/>
+                  </a:solidFill>
+                </a14:hiddenFill>
+              </a:ext>
+            </a:extLst>
+          </p:spPr>
+        </p:pic>
+      </p:grpSp>
       <p:pic>
         <p:nvPicPr>
           <p:cNvPr id="1032" name="Picture 8" descr="Beetle Silhouette&quot; Images – Browse 9 Stock Photos, Vectors, and Video |  Adobe Stock">
@@ -23492,7 +23588,7 @@
           <p:nvPr/>
         </p:nvPicPr>
         <p:blipFill rotWithShape="1">
-          <a:blip r:embed="rId2">
+          <a:blip r:embed="rId4">
             <a:extLst>
               <a:ext uri="{28A0092B-C50C-407E-A947-70E740481C1C}">
                 <a14:useLocalDpi xmlns:a14="http://schemas.microsoft.com/office/drawing/2010/main" val="0"/>
@@ -23557,7 +23653,7 @@
             <p:nvPr/>
           </p:nvPicPr>
           <p:blipFill>
-            <a:blip r:embed="rId3"/>
+            <a:blip r:embed="rId5"/>
             <a:stretch>
               <a:fillRect/>
             </a:stretch>
@@ -23587,7 +23683,7 @@
             <p:nvPr/>
           </p:nvPicPr>
           <p:blipFill>
-            <a:blip r:embed="rId4"/>
+            <a:blip r:embed="rId6"/>
             <a:stretch>
               <a:fillRect/>
             </a:stretch>
@@ -23638,7 +23734,7 @@
             <p:nvPr/>
           </p:nvPicPr>
           <p:blipFill>
-            <a:blip r:embed="rId5"/>
+            <a:blip r:embed="rId7"/>
             <a:stretch>
               <a:fillRect/>
             </a:stretch>
@@ -25312,7 +25408,7 @@
             <p:nvPr/>
           </p:nvPicPr>
           <p:blipFill rotWithShape="1">
-            <a:blip r:embed="rId6">
+            <a:blip r:embed="rId8">
               <a:extLst>
                 <a:ext uri="{28A0092B-C50C-407E-A947-70E740481C1C}">
                   <a14:useLocalDpi xmlns:a14="http://schemas.microsoft.com/office/drawing/2010/main" val="0"/>
@@ -25357,7 +25453,7 @@
             <p:nvPr/>
           </p:nvPicPr>
           <p:blipFill rotWithShape="1">
-            <a:blip r:embed="rId3"/>
+            <a:blip r:embed="rId5"/>
             <a:srcRect b="41100"/>
             <a:stretch/>
           </p:blipFill>
@@ -25619,7 +25715,7 @@
             <p:nvPr/>
           </p:nvPicPr>
           <p:blipFill>
-            <a:blip r:embed="rId7"/>
+            <a:blip r:embed="rId9"/>
             <a:stretch>
               <a:fillRect/>
             </a:stretch>
@@ -25632,117 +25728,6 @@
             <a:prstGeom prst="rect">
               <a:avLst/>
             </a:prstGeom>
-          </p:spPr>
-        </p:pic>
-      </p:grpSp>
-      <p:grpSp>
-        <p:nvGrpSpPr>
-          <p:cNvPr id="77" name="Group 76">
-            <a:extLst>
-              <a:ext uri="{FF2B5EF4-FFF2-40B4-BE49-F238E27FC236}">
-                <a16:creationId xmlns:a16="http://schemas.microsoft.com/office/drawing/2014/main" id="{C0A54A58-76B8-23EC-D3C1-97943419623D}"/>
-              </a:ext>
-            </a:extLst>
-          </p:cNvPr>
-          <p:cNvGrpSpPr/>
-          <p:nvPr/>
-        </p:nvGrpSpPr>
-        <p:grpSpPr>
-          <a:xfrm>
-            <a:off x="467714" y="3872456"/>
-            <a:ext cx="821134" cy="939833"/>
-            <a:chOff x="4087416" y="1161299"/>
-            <a:chExt cx="1198370" cy="1371600"/>
-          </a:xfrm>
-        </p:grpSpPr>
-        <p:pic>
-          <p:nvPicPr>
-            <p:cNvPr id="78" name="Picture 10" descr="49 Ring Of Fire Silhouette Stock Photos, Pictures &amp;amp; Royalty-Free Images -  iStock">
-              <a:extLst>
-                <a:ext uri="{FF2B5EF4-FFF2-40B4-BE49-F238E27FC236}">
-                  <a16:creationId xmlns:a16="http://schemas.microsoft.com/office/drawing/2014/main" id="{D92EFD00-FC6F-12DB-EE02-EC34C2E3D70C}"/>
-                </a:ext>
-              </a:extLst>
-            </p:cNvPr>
-            <p:cNvPicPr>
-              <a:picLocks noChangeAspect="1" noChangeArrowheads="1"/>
-            </p:cNvPicPr>
-            <p:nvPr/>
-          </p:nvPicPr>
-          <p:blipFill rotWithShape="1">
-            <a:blip r:embed="rId8">
-              <a:extLst>
-                <a:ext uri="{28A0092B-C50C-407E-A947-70E740481C1C}">
-                  <a14:useLocalDpi xmlns:a14="http://schemas.microsoft.com/office/drawing/2010/main" val="0"/>
-                </a:ext>
-              </a:extLst>
-            </a:blip>
-            <a:srcRect l="8601" t="3260" r="8629" b="5100"/>
-            <a:stretch/>
-          </p:blipFill>
-          <p:spPr bwMode="auto">
-            <a:xfrm>
-              <a:off x="4087416" y="1161299"/>
-              <a:ext cx="1198370" cy="1371600"/>
-            </a:xfrm>
-            <a:prstGeom prst="rect">
-              <a:avLst/>
-            </a:prstGeom>
-            <a:noFill/>
-            <a:extLst>
-              <a:ext uri="{909E8E84-426E-40DD-AFC4-6F175D3DCCD1}">
-                <a14:hiddenFill xmlns:a14="http://schemas.microsoft.com/office/drawing/2010/main">
-                  <a:solidFill>
-                    <a:srgbClr val="FFFFFF"/>
-                  </a:solidFill>
-                </a14:hiddenFill>
-              </a:ext>
-            </a:extLst>
-          </p:spPr>
-        </p:pic>
-        <p:pic>
-          <p:nvPicPr>
-            <p:cNvPr id="79" name="Picture 2" descr="Hydra vector Clipart Vector PNG , SVG, EPS, PSD, AI">
-              <a:extLst>
-                <a:ext uri="{FF2B5EF4-FFF2-40B4-BE49-F238E27FC236}">
-                  <a16:creationId xmlns:a16="http://schemas.microsoft.com/office/drawing/2014/main" id="{646E4184-8657-49FD-EACD-1C06CF24088D}"/>
-                </a:ext>
-              </a:extLst>
-            </p:cNvPr>
-            <p:cNvPicPr>
-              <a:picLocks noChangeAspect="1" noChangeArrowheads="1"/>
-            </p:cNvPicPr>
-            <p:nvPr/>
-          </p:nvPicPr>
-          <p:blipFill rotWithShape="1">
-            <a:blip r:embed="rId9">
-              <a:extLst>
-                <a:ext uri="{28A0092B-C50C-407E-A947-70E740481C1C}">
-                  <a14:useLocalDpi xmlns:a14="http://schemas.microsoft.com/office/drawing/2010/main" val="0"/>
-                </a:ext>
-              </a:extLst>
-            </a:blip>
-            <a:srcRect l="32212" t="21635" r="26923" b="31570"/>
-            <a:stretch/>
-          </p:blipFill>
-          <p:spPr bwMode="auto">
-            <a:xfrm>
-              <a:off x="4425643" y="1661595"/>
-              <a:ext cx="521915" cy="597643"/>
-            </a:xfrm>
-            <a:prstGeom prst="rect">
-              <a:avLst/>
-            </a:prstGeom>
-            <a:noFill/>
-            <a:extLst>
-              <a:ext uri="{909E8E84-426E-40DD-AFC4-6F175D3DCCD1}">
-                <a14:hiddenFill xmlns:a14="http://schemas.microsoft.com/office/drawing/2010/main">
-                  <a:solidFill>
-                    <a:srgbClr val="FFFFFF"/>
-                  </a:solidFill>
-                </a14:hiddenFill>
-              </a:ext>
-            </a:extLst>
           </p:spPr>
         </p:pic>
       </p:grpSp>
@@ -25781,7 +25766,7 @@
             <p:nvPr/>
           </p:nvPicPr>
           <p:blipFill rotWithShape="1">
-            <a:blip r:embed="rId9">
+            <a:blip r:embed="rId3">
               <a:extLst>
                 <a:ext uri="{28A0092B-C50C-407E-A947-70E740481C1C}">
                   <a14:useLocalDpi xmlns:a14="http://schemas.microsoft.com/office/drawing/2010/main" val="0"/>
@@ -27920,6 +27905,1237 @@
               <a:extLst>
                 <a:ext uri="{FF2B5EF4-FFF2-40B4-BE49-F238E27FC236}">
                   <a16:creationId xmlns:a16="http://schemas.microsoft.com/office/drawing/2014/main" id="{CC5F603C-E71C-3E01-9781-5C82D89058F3}"/>
+                </a:ext>
+              </a:extLst>
+            </p:cNvPr>
+            <p:cNvSpPr/>
+            <p:nvPr/>
+          </p:nvSpPr>
+          <p:spPr>
+            <a:xfrm>
+              <a:off x="304817" y="699533"/>
+              <a:ext cx="1188720" cy="1097280"/>
+            </a:xfrm>
+            <a:prstGeom prst="hexagon">
+              <a:avLst/>
+            </a:prstGeom>
+            <a:noFill/>
+            <a:ln w="38100" cap="flat" cmpd="sng" algn="ctr">
+              <a:solidFill>
+                <a:schemeClr val="dk1"/>
+              </a:solidFill>
+              <a:prstDash val="solid"/>
+              <a:round/>
+              <a:headEnd type="none" w="med" len="med"/>
+              <a:tailEnd type="none" w="med" len="med"/>
+            </a:ln>
+          </p:spPr>
+          <p:style>
+            <a:lnRef idx="0">
+              <a:scrgbClr r="0" g="0" b="0"/>
+            </a:lnRef>
+            <a:fillRef idx="0">
+              <a:scrgbClr r="0" g="0" b="0"/>
+            </a:fillRef>
+            <a:effectRef idx="0">
+              <a:scrgbClr r="0" g="0" b="0"/>
+            </a:effectRef>
+            <a:fontRef idx="minor">
+              <a:schemeClr val="dk1"/>
+            </a:fontRef>
+          </p:style>
+          <p:txBody>
+            <a:bodyPr rtlCol="0" anchor="ctr"/>
+            <a:lstStyle/>
+            <a:p>
+              <a:pPr algn="ctr"/>
+              <a:endParaRPr lang="en-US"/>
+            </a:p>
+          </p:txBody>
+        </p:sp>
+      </p:grpSp>
+      <p:grpSp>
+        <p:nvGrpSpPr>
+          <p:cNvPr id="3" name="Group 2">
+            <a:extLst>
+              <a:ext uri="{FF2B5EF4-FFF2-40B4-BE49-F238E27FC236}">
+                <a16:creationId xmlns:a16="http://schemas.microsoft.com/office/drawing/2014/main" id="{EA1E0983-5EE2-C063-8CD5-37CE4C389D89}"/>
+              </a:ext>
+            </a:extLst>
+          </p:cNvPr>
+          <p:cNvGrpSpPr/>
+          <p:nvPr/>
+        </p:nvGrpSpPr>
+        <p:grpSpPr>
+          <a:xfrm>
+            <a:off x="6632482" y="2364783"/>
+            <a:ext cx="839398" cy="777453"/>
+            <a:chOff x="4849013" y="3586270"/>
+            <a:chExt cx="2288278" cy="2119411"/>
+          </a:xfrm>
+        </p:grpSpPr>
+        <p:pic>
+          <p:nvPicPr>
+            <p:cNvPr id="130" name="Picture 4" descr="2,174 Hornet Vector Illustrations &amp; Clip Art - iStock">
+              <a:extLst>
+                <a:ext uri="{FF2B5EF4-FFF2-40B4-BE49-F238E27FC236}">
+                  <a16:creationId xmlns:a16="http://schemas.microsoft.com/office/drawing/2014/main" id="{59FBF1C1-2654-16A1-7CAE-53DFE9294084}"/>
+                </a:ext>
+              </a:extLst>
+            </p:cNvPr>
+            <p:cNvPicPr>
+              <a:picLocks noChangeAspect="1" noChangeArrowheads="1"/>
+            </p:cNvPicPr>
+            <p:nvPr/>
+          </p:nvPicPr>
+          <p:blipFill rotWithShape="1">
+            <a:blip r:embed="rId11">
+              <a:extLst>
+                <a:ext uri="{28A0092B-C50C-407E-A947-70E740481C1C}">
+                  <a14:useLocalDpi xmlns:a14="http://schemas.microsoft.com/office/drawing/2010/main" val="0"/>
+                </a:ext>
+              </a:extLst>
+            </a:blip>
+            <a:srcRect l="20806" t="14492" r="21220" b="15205"/>
+            <a:stretch/>
+          </p:blipFill>
+          <p:spPr bwMode="auto">
+            <a:xfrm>
+              <a:off x="5890304" y="4193477"/>
+              <a:ext cx="1246987" cy="1512204"/>
+            </a:xfrm>
+            <a:prstGeom prst="rect">
+              <a:avLst/>
+            </a:prstGeom>
+            <a:noFill/>
+            <a:extLst>
+              <a:ext uri="{909E8E84-426E-40DD-AFC4-6F175D3DCCD1}">
+                <a14:hiddenFill xmlns:a14="http://schemas.microsoft.com/office/drawing/2010/main">
+                  <a:solidFill>
+                    <a:srgbClr val="FFFFFF"/>
+                  </a:solidFill>
+                </a14:hiddenFill>
+              </a:ext>
+            </a:extLst>
+          </p:spPr>
+        </p:pic>
+        <p:pic>
+          <p:nvPicPr>
+            <p:cNvPr id="1028" name="Picture 4" descr="2,174 Hornet Vector Illustrations &amp; Clip Art - iStock">
+              <a:extLst>
+                <a:ext uri="{FF2B5EF4-FFF2-40B4-BE49-F238E27FC236}">
+                  <a16:creationId xmlns:a16="http://schemas.microsoft.com/office/drawing/2014/main" id="{82AD6A72-157F-98D8-9F8A-103845F4848F}"/>
+                </a:ext>
+              </a:extLst>
+            </p:cNvPr>
+            <p:cNvPicPr>
+              <a:picLocks noChangeAspect="1" noChangeArrowheads="1"/>
+            </p:cNvPicPr>
+            <p:nvPr/>
+          </p:nvPicPr>
+          <p:blipFill rotWithShape="1">
+            <a:blip r:embed="rId11">
+              <a:extLst>
+                <a:ext uri="{28A0092B-C50C-407E-A947-70E740481C1C}">
+                  <a14:useLocalDpi xmlns:a14="http://schemas.microsoft.com/office/drawing/2010/main" val="0"/>
+                </a:ext>
+              </a:extLst>
+            </a:blip>
+            <a:srcRect l="20806" t="14492" r="21220" b="15205"/>
+            <a:stretch/>
+          </p:blipFill>
+          <p:spPr bwMode="auto">
+            <a:xfrm>
+              <a:off x="4849013" y="3586270"/>
+              <a:ext cx="1246987" cy="1512204"/>
+            </a:xfrm>
+            <a:prstGeom prst="rect">
+              <a:avLst/>
+            </a:prstGeom>
+            <a:noFill/>
+            <a:extLst>
+              <a:ext uri="{909E8E84-426E-40DD-AFC4-6F175D3DCCD1}">
+                <a14:hiddenFill xmlns:a14="http://schemas.microsoft.com/office/drawing/2010/main">
+                  <a:solidFill>
+                    <a:srgbClr val="FFFFFF"/>
+                  </a:solidFill>
+                </a14:hiddenFill>
+              </a:ext>
+            </a:extLst>
+          </p:spPr>
+        </p:pic>
+      </p:grpSp>
+      <p:grpSp>
+        <p:nvGrpSpPr>
+          <p:cNvPr id="119" name="Group 118">
+            <a:extLst>
+              <a:ext uri="{FF2B5EF4-FFF2-40B4-BE49-F238E27FC236}">
+                <a16:creationId xmlns:a16="http://schemas.microsoft.com/office/drawing/2014/main" id="{3124E93C-F26E-4555-A78C-34C494535F98}"/>
+              </a:ext>
+            </a:extLst>
+          </p:cNvPr>
+          <p:cNvGrpSpPr/>
+          <p:nvPr/>
+        </p:nvGrpSpPr>
+        <p:grpSpPr>
+          <a:xfrm>
+            <a:off x="7882604" y="1981700"/>
+            <a:ext cx="1371600" cy="1371600"/>
+            <a:chOff x="213377" y="483633"/>
+            <a:chExt cx="1371600" cy="1371600"/>
+          </a:xfrm>
+        </p:grpSpPr>
+        <p:sp>
+          <p:nvSpPr>
+            <p:cNvPr id="120" name="Rectangle 119">
+              <a:extLst>
+                <a:ext uri="{FF2B5EF4-FFF2-40B4-BE49-F238E27FC236}">
+                  <a16:creationId xmlns:a16="http://schemas.microsoft.com/office/drawing/2014/main" id="{9B02FBA8-AF22-BFFF-F279-50C288BBB3B5}"/>
+                </a:ext>
+              </a:extLst>
+            </p:cNvPr>
+            <p:cNvSpPr/>
+            <p:nvPr/>
+          </p:nvSpPr>
+          <p:spPr>
+            <a:xfrm>
+              <a:off x="213377" y="483633"/>
+              <a:ext cx="1371600" cy="1371600"/>
+            </a:xfrm>
+            <a:prstGeom prst="rect">
+              <a:avLst/>
+            </a:prstGeom>
+            <a:noFill/>
+            <a:ln w="76200">
+              <a:solidFill>
+                <a:schemeClr val="tx1"/>
+              </a:solidFill>
+            </a:ln>
+          </p:spPr>
+          <p:style>
+            <a:lnRef idx="2">
+              <a:schemeClr val="accent1">
+                <a:shade val="50000"/>
+              </a:schemeClr>
+            </a:lnRef>
+            <a:fillRef idx="1">
+              <a:schemeClr val="accent1"/>
+            </a:fillRef>
+            <a:effectRef idx="0">
+              <a:schemeClr val="accent1"/>
+            </a:effectRef>
+            <a:fontRef idx="minor">
+              <a:schemeClr val="lt1"/>
+            </a:fontRef>
+          </p:style>
+          <p:txBody>
+            <a:bodyPr rtlCol="0" anchor="ctr"/>
+            <a:lstStyle/>
+            <a:p>
+              <a:pPr algn="ctr"/>
+              <a:endParaRPr lang="en-US"/>
+            </a:p>
+          </p:txBody>
+        </p:sp>
+        <p:sp>
+          <p:nvSpPr>
+            <p:cNvPr id="122" name="Hexagon 121">
+              <a:extLst>
+                <a:ext uri="{FF2B5EF4-FFF2-40B4-BE49-F238E27FC236}">
+                  <a16:creationId xmlns:a16="http://schemas.microsoft.com/office/drawing/2014/main" id="{A0FD01F4-1CFF-7B63-C020-991B37E77A47}"/>
+                </a:ext>
+              </a:extLst>
+            </p:cNvPr>
+            <p:cNvSpPr/>
+            <p:nvPr/>
+          </p:nvSpPr>
+          <p:spPr>
+            <a:xfrm>
+              <a:off x="304817" y="699533"/>
+              <a:ext cx="1188720" cy="1097280"/>
+            </a:xfrm>
+            <a:prstGeom prst="hexagon">
+              <a:avLst/>
+            </a:prstGeom>
+            <a:noFill/>
+            <a:ln w="38100" cap="flat" cmpd="sng" algn="ctr">
+              <a:solidFill>
+                <a:schemeClr val="dk1"/>
+              </a:solidFill>
+              <a:prstDash val="solid"/>
+              <a:round/>
+              <a:headEnd type="none" w="med" len="med"/>
+              <a:tailEnd type="none" w="med" len="med"/>
+            </a:ln>
+          </p:spPr>
+          <p:style>
+            <a:lnRef idx="0">
+              <a:scrgbClr r="0" g="0" b="0"/>
+            </a:lnRef>
+            <a:fillRef idx="0">
+              <a:scrgbClr r="0" g="0" b="0"/>
+            </a:fillRef>
+            <a:effectRef idx="0">
+              <a:scrgbClr r="0" g="0" b="0"/>
+            </a:effectRef>
+            <a:fontRef idx="minor">
+              <a:schemeClr val="dk1"/>
+            </a:fontRef>
+          </p:style>
+          <p:txBody>
+            <a:bodyPr rtlCol="0" anchor="ctr"/>
+            <a:lstStyle/>
+            <a:p>
+              <a:pPr algn="ctr"/>
+              <a:endParaRPr lang="en-US"/>
+            </a:p>
+          </p:txBody>
+        </p:sp>
+      </p:grpSp>
+      <p:grpSp>
+        <p:nvGrpSpPr>
+          <p:cNvPr id="123" name="Group 122">
+            <a:extLst>
+              <a:ext uri="{FF2B5EF4-FFF2-40B4-BE49-F238E27FC236}">
+                <a16:creationId xmlns:a16="http://schemas.microsoft.com/office/drawing/2014/main" id="{C4800E0D-229C-E4AF-A64D-34B087E1A0D7}"/>
+              </a:ext>
+            </a:extLst>
+          </p:cNvPr>
+          <p:cNvGrpSpPr/>
+          <p:nvPr/>
+        </p:nvGrpSpPr>
+        <p:grpSpPr>
+          <a:xfrm>
+            <a:off x="6350920" y="1988287"/>
+            <a:ext cx="1371600" cy="1371600"/>
+            <a:chOff x="213377" y="483633"/>
+            <a:chExt cx="1371600" cy="1371600"/>
+          </a:xfrm>
+        </p:grpSpPr>
+        <p:sp>
+          <p:nvSpPr>
+            <p:cNvPr id="125" name="Rectangle 124">
+              <a:extLst>
+                <a:ext uri="{FF2B5EF4-FFF2-40B4-BE49-F238E27FC236}">
+                  <a16:creationId xmlns:a16="http://schemas.microsoft.com/office/drawing/2014/main" id="{5DE99ECC-3F22-AFEB-4A58-2A964365DBB6}"/>
+                </a:ext>
+              </a:extLst>
+            </p:cNvPr>
+            <p:cNvSpPr/>
+            <p:nvPr/>
+          </p:nvSpPr>
+          <p:spPr>
+            <a:xfrm>
+              <a:off x="213377" y="483633"/>
+              <a:ext cx="1371600" cy="1371600"/>
+            </a:xfrm>
+            <a:prstGeom prst="rect">
+              <a:avLst/>
+            </a:prstGeom>
+            <a:noFill/>
+            <a:ln w="76200">
+              <a:solidFill>
+                <a:schemeClr val="tx1"/>
+              </a:solidFill>
+            </a:ln>
+          </p:spPr>
+          <p:style>
+            <a:lnRef idx="2">
+              <a:schemeClr val="accent1">
+                <a:shade val="50000"/>
+              </a:schemeClr>
+            </a:lnRef>
+            <a:fillRef idx="1">
+              <a:schemeClr val="accent1"/>
+            </a:fillRef>
+            <a:effectRef idx="0">
+              <a:schemeClr val="accent1"/>
+            </a:effectRef>
+            <a:fontRef idx="minor">
+              <a:schemeClr val="lt1"/>
+            </a:fontRef>
+          </p:style>
+          <p:txBody>
+            <a:bodyPr rtlCol="0" anchor="ctr"/>
+            <a:lstStyle/>
+            <a:p>
+              <a:pPr algn="ctr"/>
+              <a:endParaRPr lang="en-US"/>
+            </a:p>
+          </p:txBody>
+        </p:sp>
+        <p:sp>
+          <p:nvSpPr>
+            <p:cNvPr id="126" name="Hexagon 125">
+              <a:extLst>
+                <a:ext uri="{FF2B5EF4-FFF2-40B4-BE49-F238E27FC236}">
+                  <a16:creationId xmlns:a16="http://schemas.microsoft.com/office/drawing/2014/main" id="{D4E6D0C4-5C03-FFE5-DE93-4F4F9D40BE02}"/>
+                </a:ext>
+              </a:extLst>
+            </p:cNvPr>
+            <p:cNvSpPr/>
+            <p:nvPr/>
+          </p:nvSpPr>
+          <p:spPr>
+            <a:xfrm>
+              <a:off x="304817" y="699533"/>
+              <a:ext cx="1188720" cy="1097280"/>
+            </a:xfrm>
+            <a:prstGeom prst="hexagon">
+              <a:avLst/>
+            </a:prstGeom>
+            <a:noFill/>
+            <a:ln w="38100" cap="flat" cmpd="sng" algn="ctr">
+              <a:solidFill>
+                <a:schemeClr val="dk1"/>
+              </a:solidFill>
+              <a:prstDash val="solid"/>
+              <a:round/>
+              <a:headEnd type="none" w="med" len="med"/>
+              <a:tailEnd type="none" w="med" len="med"/>
+            </a:ln>
+          </p:spPr>
+          <p:style>
+            <a:lnRef idx="0">
+              <a:scrgbClr r="0" g="0" b="0"/>
+            </a:lnRef>
+            <a:fillRef idx="0">
+              <a:scrgbClr r="0" g="0" b="0"/>
+            </a:fillRef>
+            <a:effectRef idx="0">
+              <a:scrgbClr r="0" g="0" b="0"/>
+            </a:effectRef>
+            <a:fontRef idx="minor">
+              <a:schemeClr val="dk1"/>
+            </a:fontRef>
+          </p:style>
+          <p:txBody>
+            <a:bodyPr rtlCol="0" anchor="ctr"/>
+            <a:lstStyle/>
+            <a:p>
+              <a:pPr algn="ctr"/>
+              <a:endParaRPr lang="en-US"/>
+            </a:p>
+          </p:txBody>
+        </p:sp>
+      </p:grpSp>
+      <p:sp>
+        <p:nvSpPr>
+          <p:cNvPr id="127" name="Oval 126">
+            <a:extLst>
+              <a:ext uri="{FF2B5EF4-FFF2-40B4-BE49-F238E27FC236}">
+                <a16:creationId xmlns:a16="http://schemas.microsoft.com/office/drawing/2014/main" id="{349F0244-FD5B-B107-B2B8-4525635F5B05}"/>
+              </a:ext>
+            </a:extLst>
+          </p:cNvPr>
+          <p:cNvSpPr/>
+          <p:nvPr/>
+        </p:nvSpPr>
+        <p:spPr>
+          <a:xfrm>
+            <a:off x="8602343" y="2258563"/>
+            <a:ext cx="274320" cy="274320"/>
+          </a:xfrm>
+          <a:prstGeom prst="ellipse">
+            <a:avLst/>
+          </a:prstGeom>
+          <a:noFill/>
+          <a:ln w="57150" cap="flat" cmpd="sng" algn="ctr">
+            <a:solidFill>
+              <a:schemeClr val="dk1"/>
+            </a:solidFill>
+            <a:prstDash val="solid"/>
+            <a:round/>
+            <a:headEnd type="none" w="med" len="med"/>
+            <a:tailEnd type="none" w="med" len="med"/>
+          </a:ln>
+        </p:spPr>
+        <p:style>
+          <a:lnRef idx="0">
+            <a:scrgbClr r="0" g="0" b="0"/>
+          </a:lnRef>
+          <a:fillRef idx="0">
+            <a:scrgbClr r="0" g="0" b="0"/>
+          </a:fillRef>
+          <a:effectRef idx="0">
+            <a:scrgbClr r="0" g="0" b="0"/>
+          </a:effectRef>
+          <a:fontRef idx="minor">
+            <a:schemeClr val="dk1"/>
+          </a:fontRef>
+        </p:style>
+        <p:txBody>
+          <a:bodyPr rtlCol="0" anchor="ctr"/>
+          <a:lstStyle/>
+          <a:p>
+            <a:pPr algn="ctr"/>
+            <a:endParaRPr lang="en-US"/>
+          </a:p>
+        </p:txBody>
+      </p:sp>
+      <p:grpSp>
+        <p:nvGrpSpPr>
+          <p:cNvPr id="141" name="Group 140">
+            <a:extLst>
+              <a:ext uri="{FF2B5EF4-FFF2-40B4-BE49-F238E27FC236}">
+                <a16:creationId xmlns:a16="http://schemas.microsoft.com/office/drawing/2014/main" id="{FBE574DC-248A-FFB9-96C9-EF53C3DF0F0F}"/>
+              </a:ext>
+            </a:extLst>
+          </p:cNvPr>
+          <p:cNvGrpSpPr/>
+          <p:nvPr/>
+        </p:nvGrpSpPr>
+        <p:grpSpPr>
+          <a:xfrm>
+            <a:off x="8190294" y="2540816"/>
+            <a:ext cx="718148" cy="665151"/>
+            <a:chOff x="4849013" y="3586270"/>
+            <a:chExt cx="2288278" cy="2119411"/>
+          </a:xfrm>
+        </p:grpSpPr>
+        <p:pic>
+          <p:nvPicPr>
+            <p:cNvPr id="142" name="Picture 4" descr="2,174 Hornet Vector Illustrations &amp; Clip Art - iStock">
+              <a:extLst>
+                <a:ext uri="{FF2B5EF4-FFF2-40B4-BE49-F238E27FC236}">
+                  <a16:creationId xmlns:a16="http://schemas.microsoft.com/office/drawing/2014/main" id="{2D89EE44-A28A-E325-1E9C-BF02E7139026}"/>
+                </a:ext>
+              </a:extLst>
+            </p:cNvPr>
+            <p:cNvPicPr>
+              <a:picLocks noChangeAspect="1" noChangeArrowheads="1"/>
+            </p:cNvPicPr>
+            <p:nvPr/>
+          </p:nvPicPr>
+          <p:blipFill rotWithShape="1">
+            <a:blip r:embed="rId11">
+              <a:extLst>
+                <a:ext uri="{28A0092B-C50C-407E-A947-70E740481C1C}">
+                  <a14:useLocalDpi xmlns:a14="http://schemas.microsoft.com/office/drawing/2010/main" val="0"/>
+                </a:ext>
+              </a:extLst>
+            </a:blip>
+            <a:srcRect l="20806" t="14492" r="21220" b="15205"/>
+            <a:stretch/>
+          </p:blipFill>
+          <p:spPr bwMode="auto">
+            <a:xfrm>
+              <a:off x="5890304" y="4193477"/>
+              <a:ext cx="1246987" cy="1512204"/>
+            </a:xfrm>
+            <a:prstGeom prst="rect">
+              <a:avLst/>
+            </a:prstGeom>
+            <a:noFill/>
+            <a:extLst>
+              <a:ext uri="{909E8E84-426E-40DD-AFC4-6F175D3DCCD1}">
+                <a14:hiddenFill xmlns:a14="http://schemas.microsoft.com/office/drawing/2010/main">
+                  <a:solidFill>
+                    <a:srgbClr val="FFFFFF"/>
+                  </a:solidFill>
+                </a14:hiddenFill>
+              </a:ext>
+            </a:extLst>
+          </p:spPr>
+        </p:pic>
+        <p:pic>
+          <p:nvPicPr>
+            <p:cNvPr id="143" name="Picture 4" descr="2,174 Hornet Vector Illustrations &amp; Clip Art - iStock">
+              <a:extLst>
+                <a:ext uri="{FF2B5EF4-FFF2-40B4-BE49-F238E27FC236}">
+                  <a16:creationId xmlns:a16="http://schemas.microsoft.com/office/drawing/2014/main" id="{7FE556DE-49D4-F0F1-313F-2E056864D4FC}"/>
+                </a:ext>
+              </a:extLst>
+            </p:cNvPr>
+            <p:cNvPicPr>
+              <a:picLocks noChangeAspect="1" noChangeArrowheads="1"/>
+            </p:cNvPicPr>
+            <p:nvPr/>
+          </p:nvPicPr>
+          <p:blipFill rotWithShape="1">
+            <a:blip r:embed="rId11">
+              <a:extLst>
+                <a:ext uri="{28A0092B-C50C-407E-A947-70E740481C1C}">
+                  <a14:useLocalDpi xmlns:a14="http://schemas.microsoft.com/office/drawing/2010/main" val="0"/>
+                </a:ext>
+              </a:extLst>
+            </a:blip>
+            <a:srcRect l="20806" t="14492" r="21220" b="15205"/>
+            <a:stretch/>
+          </p:blipFill>
+          <p:spPr bwMode="auto">
+            <a:xfrm>
+              <a:off x="4849013" y="3586270"/>
+              <a:ext cx="1246987" cy="1512204"/>
+            </a:xfrm>
+            <a:prstGeom prst="rect">
+              <a:avLst/>
+            </a:prstGeom>
+            <a:noFill/>
+            <a:extLst>
+              <a:ext uri="{909E8E84-426E-40DD-AFC4-6F175D3DCCD1}">
+                <a14:hiddenFill xmlns:a14="http://schemas.microsoft.com/office/drawing/2010/main">
+                  <a:solidFill>
+                    <a:srgbClr val="FFFFFF"/>
+                  </a:solidFill>
+                </a14:hiddenFill>
+              </a:ext>
+            </a:extLst>
+          </p:spPr>
+        </p:pic>
+      </p:grpSp>
+      <p:grpSp>
+        <p:nvGrpSpPr>
+          <p:cNvPr id="7" name="Group 6">
+            <a:extLst>
+              <a:ext uri="{FF2B5EF4-FFF2-40B4-BE49-F238E27FC236}">
+                <a16:creationId xmlns:a16="http://schemas.microsoft.com/office/drawing/2014/main" id="{634F40FF-8DC8-BCAC-C8B9-7D6F7BC317E5}"/>
+              </a:ext>
+            </a:extLst>
+          </p:cNvPr>
+          <p:cNvGrpSpPr/>
+          <p:nvPr/>
+        </p:nvGrpSpPr>
+        <p:grpSpPr>
+          <a:xfrm rot="19460443">
+            <a:off x="8065135" y="3950340"/>
+            <a:ext cx="1161846" cy="686203"/>
+            <a:chOff x="6232129" y="4376606"/>
+            <a:chExt cx="1958165" cy="1156521"/>
+          </a:xfrm>
+        </p:grpSpPr>
+        <p:pic>
+          <p:nvPicPr>
+            <p:cNvPr id="4" name="Picture 8" descr="31 Great Fire Wings Tattoo ideas | wings tattoo, wings, tattoos">
+              <a:extLst>
+                <a:ext uri="{FF2B5EF4-FFF2-40B4-BE49-F238E27FC236}">
+                  <a16:creationId xmlns:a16="http://schemas.microsoft.com/office/drawing/2014/main" id="{E49F86F5-B747-89CF-2D9D-CACB45517B84}"/>
+                </a:ext>
+              </a:extLst>
+            </p:cNvPr>
+            <p:cNvPicPr>
+              <a:picLocks noChangeAspect="1" noChangeArrowheads="1"/>
+            </p:cNvPicPr>
+            <p:nvPr/>
+          </p:nvPicPr>
+          <p:blipFill>
+            <a:blip r:embed="rId12">
+              <a:extLst>
+                <a:ext uri="{28A0092B-C50C-407E-A947-70E740481C1C}">
+                  <a14:useLocalDpi xmlns:a14="http://schemas.microsoft.com/office/drawing/2010/main" val="0"/>
+                </a:ext>
+              </a:extLst>
+            </a:blip>
+            <a:srcRect/>
+            <a:stretch>
+              <a:fillRect/>
+            </a:stretch>
+          </p:blipFill>
+          <p:spPr bwMode="auto">
+            <a:xfrm>
+              <a:off x="6232129" y="4376606"/>
+              <a:ext cx="1958165" cy="890353"/>
+            </a:xfrm>
+            <a:prstGeom prst="rect">
+              <a:avLst/>
+            </a:prstGeom>
+            <a:noFill/>
+            <a:extLst>
+              <a:ext uri="{909E8E84-426E-40DD-AFC4-6F175D3DCCD1}">
+                <a14:hiddenFill xmlns:a14="http://schemas.microsoft.com/office/drawing/2010/main">
+                  <a:solidFill>
+                    <a:srgbClr val="FFFFFF"/>
+                  </a:solidFill>
+                </a14:hiddenFill>
+              </a:ext>
+            </a:extLst>
+          </p:spPr>
+        </p:pic>
+        <p:pic>
+          <p:nvPicPr>
+            <p:cNvPr id="1034" name="Picture 10" descr="Hornet Icon #367850 - Free Icons Library">
+              <a:extLst>
+                <a:ext uri="{FF2B5EF4-FFF2-40B4-BE49-F238E27FC236}">
+                  <a16:creationId xmlns:a16="http://schemas.microsoft.com/office/drawing/2014/main" id="{00F93EA0-C297-4F7D-7A53-6CA85B9A5997}"/>
+                </a:ext>
+              </a:extLst>
+            </p:cNvPr>
+            <p:cNvPicPr>
+              <a:picLocks noChangeAspect="1" noChangeArrowheads="1"/>
+            </p:cNvPicPr>
+            <p:nvPr/>
+          </p:nvPicPr>
+          <p:blipFill>
+            <a:blip r:embed="rId13">
+              <a:extLst>
+                <a:ext uri="{28A0092B-C50C-407E-A947-70E740481C1C}">
+                  <a14:useLocalDpi xmlns:a14="http://schemas.microsoft.com/office/drawing/2010/main" val="0"/>
+                </a:ext>
+              </a:extLst>
+            </a:blip>
+            <a:srcRect/>
+            <a:stretch>
+              <a:fillRect/>
+            </a:stretch>
+          </p:blipFill>
+          <p:spPr bwMode="auto">
+            <a:xfrm>
+              <a:off x="6661102" y="4432910"/>
+              <a:ext cx="1100217" cy="1100217"/>
+            </a:xfrm>
+            <a:prstGeom prst="rect">
+              <a:avLst/>
+            </a:prstGeom>
+            <a:noFill/>
+            <a:extLst>
+              <a:ext uri="{909E8E84-426E-40DD-AFC4-6F175D3DCCD1}">
+                <a14:hiddenFill xmlns:a14="http://schemas.microsoft.com/office/drawing/2010/main">
+                  <a:solidFill>
+                    <a:srgbClr val="FFFFFF"/>
+                  </a:solidFill>
+                </a14:hiddenFill>
+              </a:ext>
+            </a:extLst>
+          </p:spPr>
+        </p:pic>
+      </p:grpSp>
+      <p:grpSp>
+        <p:nvGrpSpPr>
+          <p:cNvPr id="6" name="Group 5">
+            <a:extLst>
+              <a:ext uri="{FF2B5EF4-FFF2-40B4-BE49-F238E27FC236}">
+                <a16:creationId xmlns:a16="http://schemas.microsoft.com/office/drawing/2014/main" id="{1D845641-42F5-D497-DD80-FBE72BE9A4F2}"/>
+              </a:ext>
+            </a:extLst>
+          </p:cNvPr>
+          <p:cNvGrpSpPr/>
+          <p:nvPr/>
+        </p:nvGrpSpPr>
+        <p:grpSpPr>
+          <a:xfrm>
+            <a:off x="6675565" y="3730406"/>
+            <a:ext cx="882536" cy="976400"/>
+            <a:chOff x="4441351" y="3925688"/>
+            <a:chExt cx="1326399" cy="1467471"/>
+          </a:xfrm>
+        </p:grpSpPr>
+        <p:pic>
+          <p:nvPicPr>
+            <p:cNvPr id="1030" name="Picture 6" descr="Wasp Vector Illustration Royalty Free SVG, Cliparts, Vectors, And Stock  Illustration. Image 71871205.">
+              <a:extLst>
+                <a:ext uri="{FF2B5EF4-FFF2-40B4-BE49-F238E27FC236}">
+                  <a16:creationId xmlns:a16="http://schemas.microsoft.com/office/drawing/2014/main" id="{B2E2DC90-4C2F-8C03-E789-24BA71A611BA}"/>
+                </a:ext>
+              </a:extLst>
+            </p:cNvPr>
+            <p:cNvPicPr>
+              <a:picLocks noChangeAspect="1" noChangeArrowheads="1"/>
+            </p:cNvPicPr>
+            <p:nvPr/>
+          </p:nvPicPr>
+          <p:blipFill>
+            <a:blip r:embed="rId14">
+              <a:extLst>
+                <a:ext uri="{28A0092B-C50C-407E-A947-70E740481C1C}">
+                  <a14:useLocalDpi xmlns:a14="http://schemas.microsoft.com/office/drawing/2010/main" val="0"/>
+                </a:ext>
+              </a:extLst>
+            </a:blip>
+            <a:srcRect/>
+            <a:stretch>
+              <a:fillRect/>
+            </a:stretch>
+          </p:blipFill>
+          <p:spPr bwMode="auto">
+            <a:xfrm>
+              <a:off x="4441351" y="4105019"/>
+              <a:ext cx="1238641" cy="1288140"/>
+            </a:xfrm>
+            <a:prstGeom prst="rect">
+              <a:avLst/>
+            </a:prstGeom>
+            <a:noFill/>
+            <a:extLst>
+              <a:ext uri="{909E8E84-426E-40DD-AFC4-6F175D3DCCD1}">
+                <a14:hiddenFill xmlns:a14="http://schemas.microsoft.com/office/drawing/2010/main">
+                  <a:solidFill>
+                    <a:srgbClr val="FFFFFF"/>
+                  </a:solidFill>
+                </a14:hiddenFill>
+              </a:ext>
+            </a:extLst>
+          </p:spPr>
+        </p:pic>
+        <p:pic>
+          <p:nvPicPr>
+            <p:cNvPr id="1036" name="Picture 12" descr="Ninja dart Images, Stock Photos &amp; Vectors | Shutterstock">
+              <a:extLst>
+                <a:ext uri="{FF2B5EF4-FFF2-40B4-BE49-F238E27FC236}">
+                  <a16:creationId xmlns:a16="http://schemas.microsoft.com/office/drawing/2014/main" id="{6CB2D1BA-B89E-F421-969F-56A0AC897A14}"/>
+                </a:ext>
+              </a:extLst>
+            </p:cNvPr>
+            <p:cNvPicPr>
+              <a:picLocks noChangeAspect="1" noChangeArrowheads="1"/>
+            </p:cNvPicPr>
+            <p:nvPr/>
+          </p:nvPicPr>
+          <p:blipFill rotWithShape="1">
+            <a:blip r:embed="rId15">
+              <a:extLst>
+                <a:ext uri="{28A0092B-C50C-407E-A947-70E740481C1C}">
+                  <a14:useLocalDpi xmlns:a14="http://schemas.microsoft.com/office/drawing/2010/main" val="0"/>
+                </a:ext>
+              </a:extLst>
+            </a:blip>
+            <a:srcRect l="21795" t="20882" r="20930" b="27689"/>
+            <a:stretch/>
+          </p:blipFill>
+          <p:spPr bwMode="auto">
+            <a:xfrm>
+              <a:off x="5052457" y="3925688"/>
+              <a:ext cx="447751" cy="432973"/>
+            </a:xfrm>
+            <a:prstGeom prst="rect">
+              <a:avLst/>
+            </a:prstGeom>
+            <a:noFill/>
+            <a:extLst>
+              <a:ext uri="{909E8E84-426E-40DD-AFC4-6F175D3DCCD1}">
+                <a14:hiddenFill xmlns:a14="http://schemas.microsoft.com/office/drawing/2010/main">
+                  <a:solidFill>
+                    <a:srgbClr val="FFFFFF"/>
+                  </a:solidFill>
+                </a14:hiddenFill>
+              </a:ext>
+            </a:extLst>
+          </p:spPr>
+        </p:pic>
+        <p:pic>
+          <p:nvPicPr>
+            <p:cNvPr id="144" name="Picture 12" descr="Ninja dart Images, Stock Photos &amp; Vectors | Shutterstock">
+              <a:extLst>
+                <a:ext uri="{FF2B5EF4-FFF2-40B4-BE49-F238E27FC236}">
+                  <a16:creationId xmlns:a16="http://schemas.microsoft.com/office/drawing/2014/main" id="{B3F339B1-4624-084E-5B5C-262A1C9A9AA2}"/>
+                </a:ext>
+              </a:extLst>
+            </p:cNvPr>
+            <p:cNvPicPr>
+              <a:picLocks noChangeAspect="1" noChangeArrowheads="1"/>
+            </p:cNvPicPr>
+            <p:nvPr/>
+          </p:nvPicPr>
+          <p:blipFill rotWithShape="1">
+            <a:blip r:embed="rId15">
+              <a:extLst>
+                <a:ext uri="{28A0092B-C50C-407E-A947-70E740481C1C}">
+                  <a14:useLocalDpi xmlns:a14="http://schemas.microsoft.com/office/drawing/2010/main" val="0"/>
+                </a:ext>
+              </a:extLst>
+            </a:blip>
+            <a:srcRect l="21795" t="20882" r="20930" b="27689"/>
+            <a:stretch/>
+          </p:blipFill>
+          <p:spPr bwMode="auto">
+            <a:xfrm>
+              <a:off x="5319999" y="4255917"/>
+              <a:ext cx="447751" cy="432973"/>
+            </a:xfrm>
+            <a:prstGeom prst="rect">
+              <a:avLst/>
+            </a:prstGeom>
+            <a:noFill/>
+            <a:extLst>
+              <a:ext uri="{909E8E84-426E-40DD-AFC4-6F175D3DCCD1}">
+                <a14:hiddenFill xmlns:a14="http://schemas.microsoft.com/office/drawing/2010/main">
+                  <a:solidFill>
+                    <a:srgbClr val="FFFFFF"/>
+                  </a:solidFill>
+                </a14:hiddenFill>
+              </a:ext>
+            </a:extLst>
+          </p:spPr>
+        </p:pic>
+      </p:grpSp>
+      <p:grpSp>
+        <p:nvGrpSpPr>
+          <p:cNvPr id="145" name="Group 144">
+            <a:extLst>
+              <a:ext uri="{FF2B5EF4-FFF2-40B4-BE49-F238E27FC236}">
+                <a16:creationId xmlns:a16="http://schemas.microsoft.com/office/drawing/2014/main" id="{205449D7-389E-375A-4E81-92E4C0A1E6EE}"/>
+              </a:ext>
+            </a:extLst>
+          </p:cNvPr>
+          <p:cNvGrpSpPr/>
+          <p:nvPr/>
+        </p:nvGrpSpPr>
+        <p:grpSpPr>
+          <a:xfrm>
+            <a:off x="6392197" y="3464634"/>
+            <a:ext cx="1371600" cy="1371600"/>
+            <a:chOff x="213377" y="483633"/>
+            <a:chExt cx="1371600" cy="1371600"/>
+          </a:xfrm>
+        </p:grpSpPr>
+        <p:sp>
+          <p:nvSpPr>
+            <p:cNvPr id="146" name="Rectangle 145">
+              <a:extLst>
+                <a:ext uri="{FF2B5EF4-FFF2-40B4-BE49-F238E27FC236}">
+                  <a16:creationId xmlns:a16="http://schemas.microsoft.com/office/drawing/2014/main" id="{973001D4-7971-A689-5A6C-68ABC482D6CF}"/>
+                </a:ext>
+              </a:extLst>
+            </p:cNvPr>
+            <p:cNvSpPr/>
+            <p:nvPr/>
+          </p:nvSpPr>
+          <p:spPr>
+            <a:xfrm>
+              <a:off x="213377" y="483633"/>
+              <a:ext cx="1371600" cy="1371600"/>
+            </a:xfrm>
+            <a:prstGeom prst="rect">
+              <a:avLst/>
+            </a:prstGeom>
+            <a:noFill/>
+            <a:ln w="76200">
+              <a:solidFill>
+                <a:schemeClr val="tx1"/>
+              </a:solidFill>
+            </a:ln>
+          </p:spPr>
+          <p:style>
+            <a:lnRef idx="2">
+              <a:schemeClr val="accent1">
+                <a:shade val="50000"/>
+              </a:schemeClr>
+            </a:lnRef>
+            <a:fillRef idx="1">
+              <a:schemeClr val="accent1"/>
+            </a:fillRef>
+            <a:effectRef idx="0">
+              <a:schemeClr val="accent1"/>
+            </a:effectRef>
+            <a:fontRef idx="minor">
+              <a:schemeClr val="lt1"/>
+            </a:fontRef>
+          </p:style>
+          <p:txBody>
+            <a:bodyPr rtlCol="0" anchor="ctr"/>
+            <a:lstStyle/>
+            <a:p>
+              <a:pPr algn="ctr"/>
+              <a:endParaRPr lang="en-US"/>
+            </a:p>
+          </p:txBody>
+        </p:sp>
+        <p:sp>
+          <p:nvSpPr>
+            <p:cNvPr id="147" name="Hexagon 146">
+              <a:extLst>
+                <a:ext uri="{FF2B5EF4-FFF2-40B4-BE49-F238E27FC236}">
+                  <a16:creationId xmlns:a16="http://schemas.microsoft.com/office/drawing/2014/main" id="{E69CE70E-346C-9067-4883-6082AFE35EE3}"/>
+                </a:ext>
+              </a:extLst>
+            </p:cNvPr>
+            <p:cNvSpPr/>
+            <p:nvPr/>
+          </p:nvSpPr>
+          <p:spPr>
+            <a:xfrm>
+              <a:off x="304817" y="699533"/>
+              <a:ext cx="1188720" cy="1097280"/>
+            </a:xfrm>
+            <a:prstGeom prst="hexagon">
+              <a:avLst/>
+            </a:prstGeom>
+            <a:noFill/>
+            <a:ln w="38100" cap="flat" cmpd="sng" algn="ctr">
+              <a:solidFill>
+                <a:schemeClr val="dk1"/>
+              </a:solidFill>
+              <a:prstDash val="solid"/>
+              <a:round/>
+              <a:headEnd type="none" w="med" len="med"/>
+              <a:tailEnd type="none" w="med" len="med"/>
+            </a:ln>
+          </p:spPr>
+          <p:style>
+            <a:lnRef idx="0">
+              <a:scrgbClr r="0" g="0" b="0"/>
+            </a:lnRef>
+            <a:fillRef idx="0">
+              <a:scrgbClr r="0" g="0" b="0"/>
+            </a:fillRef>
+            <a:effectRef idx="0">
+              <a:scrgbClr r="0" g="0" b="0"/>
+            </a:effectRef>
+            <a:fontRef idx="minor">
+              <a:schemeClr val="dk1"/>
+            </a:fontRef>
+          </p:style>
+          <p:txBody>
+            <a:bodyPr rtlCol="0" anchor="ctr"/>
+            <a:lstStyle/>
+            <a:p>
+              <a:pPr algn="ctr"/>
+              <a:endParaRPr lang="en-US"/>
+            </a:p>
+          </p:txBody>
+        </p:sp>
+      </p:grpSp>
+      <p:grpSp>
+        <p:nvGrpSpPr>
+          <p:cNvPr id="148" name="Group 147">
+            <a:extLst>
+              <a:ext uri="{FF2B5EF4-FFF2-40B4-BE49-F238E27FC236}">
+                <a16:creationId xmlns:a16="http://schemas.microsoft.com/office/drawing/2014/main" id="{7053A8E6-5A0B-D0B0-DACF-7ADD520558A9}"/>
+              </a:ext>
+            </a:extLst>
+          </p:cNvPr>
+          <p:cNvGrpSpPr/>
+          <p:nvPr/>
+        </p:nvGrpSpPr>
+        <p:grpSpPr>
+          <a:xfrm>
+            <a:off x="7895166" y="3464634"/>
+            <a:ext cx="1371600" cy="1371600"/>
+            <a:chOff x="213377" y="483633"/>
+            <a:chExt cx="1371600" cy="1371600"/>
+          </a:xfrm>
+        </p:grpSpPr>
+        <p:sp>
+          <p:nvSpPr>
+            <p:cNvPr id="149" name="Rectangle 148">
+              <a:extLst>
+                <a:ext uri="{FF2B5EF4-FFF2-40B4-BE49-F238E27FC236}">
+                  <a16:creationId xmlns:a16="http://schemas.microsoft.com/office/drawing/2014/main" id="{5E1A682F-AF5A-A55D-D64E-B749A5546E6B}"/>
+                </a:ext>
+              </a:extLst>
+            </p:cNvPr>
+            <p:cNvSpPr/>
+            <p:nvPr/>
+          </p:nvSpPr>
+          <p:spPr>
+            <a:xfrm>
+              <a:off x="213377" y="483633"/>
+              <a:ext cx="1371600" cy="1371600"/>
+            </a:xfrm>
+            <a:prstGeom prst="rect">
+              <a:avLst/>
+            </a:prstGeom>
+            <a:noFill/>
+            <a:ln w="76200">
+              <a:solidFill>
+                <a:schemeClr val="tx1"/>
+              </a:solidFill>
+            </a:ln>
+          </p:spPr>
+          <p:style>
+            <a:lnRef idx="2">
+              <a:schemeClr val="accent1">
+                <a:shade val="50000"/>
+              </a:schemeClr>
+            </a:lnRef>
+            <a:fillRef idx="1">
+              <a:schemeClr val="accent1"/>
+            </a:fillRef>
+            <a:effectRef idx="0">
+              <a:schemeClr val="accent1"/>
+            </a:effectRef>
+            <a:fontRef idx="minor">
+              <a:schemeClr val="lt1"/>
+            </a:fontRef>
+          </p:style>
+          <p:txBody>
+            <a:bodyPr rtlCol="0" anchor="ctr"/>
+            <a:lstStyle/>
+            <a:p>
+              <a:pPr algn="ctr"/>
+              <a:endParaRPr lang="en-US"/>
+            </a:p>
+          </p:txBody>
+        </p:sp>
+        <p:sp>
+          <p:nvSpPr>
+            <p:cNvPr id="150" name="Hexagon 149">
+              <a:extLst>
+                <a:ext uri="{FF2B5EF4-FFF2-40B4-BE49-F238E27FC236}">
+                  <a16:creationId xmlns:a16="http://schemas.microsoft.com/office/drawing/2014/main" id="{546C48F3-B069-4BF0-85D7-144EB2E0DDB9}"/>
+                </a:ext>
+              </a:extLst>
+            </p:cNvPr>
+            <p:cNvSpPr/>
+            <p:nvPr/>
+          </p:nvSpPr>
+          <p:spPr>
+            <a:xfrm>
+              <a:off x="304817" y="699533"/>
+              <a:ext cx="1188720" cy="1097280"/>
+            </a:xfrm>
+            <a:prstGeom prst="hexagon">
+              <a:avLst/>
+            </a:prstGeom>
+            <a:noFill/>
+            <a:ln w="38100" cap="flat" cmpd="sng" algn="ctr">
+              <a:solidFill>
+                <a:schemeClr val="dk1"/>
+              </a:solidFill>
+              <a:prstDash val="solid"/>
+              <a:round/>
+              <a:headEnd type="none" w="med" len="med"/>
+              <a:tailEnd type="none" w="med" len="med"/>
+            </a:ln>
+          </p:spPr>
+          <p:style>
+            <a:lnRef idx="0">
+              <a:scrgbClr r="0" g="0" b="0"/>
+            </a:lnRef>
+            <a:fillRef idx="0">
+              <a:scrgbClr r="0" g="0" b="0"/>
+            </a:fillRef>
+            <a:effectRef idx="0">
+              <a:scrgbClr r="0" g="0" b="0"/>
+            </a:effectRef>
+            <a:fontRef idx="minor">
+              <a:schemeClr val="dk1"/>
+            </a:fontRef>
+          </p:style>
+          <p:txBody>
+            <a:bodyPr rtlCol="0" anchor="ctr"/>
+            <a:lstStyle/>
+            <a:p>
+              <a:pPr algn="ctr"/>
+              <a:endParaRPr lang="en-US"/>
+            </a:p>
+          </p:txBody>
+        </p:sp>
+      </p:grpSp>
+      <p:pic>
+        <p:nvPicPr>
+          <p:cNvPr id="1038" name="Picture 14" descr="2,970 Queen Bee Stock Vector Illustration and Royalty Free Queen Bee Clipart">
+            <a:extLst>
+              <a:ext uri="{FF2B5EF4-FFF2-40B4-BE49-F238E27FC236}">
+                <a16:creationId xmlns:a16="http://schemas.microsoft.com/office/drawing/2014/main" id="{A7144532-894F-75DF-AFA3-E51876921772}"/>
+              </a:ext>
+            </a:extLst>
+          </p:cNvPr>
+          <p:cNvPicPr>
+            <a:picLocks noChangeAspect="1" noChangeArrowheads="1"/>
+          </p:cNvPicPr>
+          <p:nvPr/>
+        </p:nvPicPr>
+        <p:blipFill>
+          <a:blip r:embed="rId16">
+            <a:extLst>
+              <a:ext uri="{28A0092B-C50C-407E-A947-70E740481C1C}">
+                <a14:useLocalDpi xmlns:a14="http://schemas.microsoft.com/office/drawing/2010/main" val="0"/>
+              </a:ext>
+            </a:extLst>
+          </a:blip>
+          <a:srcRect/>
+          <a:stretch>
+            <a:fillRect/>
+          </a:stretch>
+        </p:blipFill>
+        <p:spPr bwMode="auto">
+          <a:xfrm>
+            <a:off x="9615933" y="3698170"/>
+            <a:ext cx="1019175" cy="1019175"/>
+          </a:xfrm>
+          <a:prstGeom prst="rect">
+            <a:avLst/>
+          </a:prstGeom>
+          <a:noFill/>
+          <a:extLst>
+            <a:ext uri="{909E8E84-426E-40DD-AFC4-6F175D3DCCD1}">
+              <a14:hiddenFill xmlns:a14="http://schemas.microsoft.com/office/drawing/2010/main">
+                <a:solidFill>
+                  <a:srgbClr val="FFFFFF"/>
+                </a:solidFill>
+              </a14:hiddenFill>
+            </a:ext>
+          </a:extLst>
+        </p:spPr>
+      </p:pic>
+      <p:grpSp>
+        <p:nvGrpSpPr>
+          <p:cNvPr id="151" name="Group 150">
+            <a:extLst>
+              <a:ext uri="{FF2B5EF4-FFF2-40B4-BE49-F238E27FC236}">
+                <a16:creationId xmlns:a16="http://schemas.microsoft.com/office/drawing/2014/main" id="{19347FAB-B11A-AE6A-BF87-3029D3EF3A39}"/>
+              </a:ext>
+            </a:extLst>
+          </p:cNvPr>
+          <p:cNvGrpSpPr/>
+          <p:nvPr/>
+        </p:nvGrpSpPr>
+        <p:grpSpPr>
+          <a:xfrm>
+            <a:off x="9439721" y="3471120"/>
+            <a:ext cx="1371600" cy="1371600"/>
+            <a:chOff x="213377" y="483633"/>
+            <a:chExt cx="1371600" cy="1371600"/>
+          </a:xfrm>
+        </p:grpSpPr>
+        <p:sp>
+          <p:nvSpPr>
+            <p:cNvPr id="152" name="Rectangle 151">
+              <a:extLst>
+                <a:ext uri="{FF2B5EF4-FFF2-40B4-BE49-F238E27FC236}">
+                  <a16:creationId xmlns:a16="http://schemas.microsoft.com/office/drawing/2014/main" id="{C342BE94-F4F1-C83B-BBC8-9650F33FC874}"/>
+                </a:ext>
+              </a:extLst>
+            </p:cNvPr>
+            <p:cNvSpPr/>
+            <p:nvPr/>
+          </p:nvSpPr>
+          <p:spPr>
+            <a:xfrm>
+              <a:off x="213377" y="483633"/>
+              <a:ext cx="1371600" cy="1371600"/>
+            </a:xfrm>
+            <a:prstGeom prst="rect">
+              <a:avLst/>
+            </a:prstGeom>
+            <a:noFill/>
+            <a:ln w="76200">
+              <a:solidFill>
+                <a:schemeClr val="tx1"/>
+              </a:solidFill>
+            </a:ln>
+          </p:spPr>
+          <p:style>
+            <a:lnRef idx="2">
+              <a:schemeClr val="accent1">
+                <a:shade val="50000"/>
+              </a:schemeClr>
+            </a:lnRef>
+            <a:fillRef idx="1">
+              <a:schemeClr val="accent1"/>
+            </a:fillRef>
+            <a:effectRef idx="0">
+              <a:schemeClr val="accent1"/>
+            </a:effectRef>
+            <a:fontRef idx="minor">
+              <a:schemeClr val="lt1"/>
+            </a:fontRef>
+          </p:style>
+          <p:txBody>
+            <a:bodyPr rtlCol="0" anchor="ctr"/>
+            <a:lstStyle/>
+            <a:p>
+              <a:pPr algn="ctr"/>
+              <a:endParaRPr lang="en-US"/>
+            </a:p>
+          </p:txBody>
+        </p:sp>
+        <p:sp>
+          <p:nvSpPr>
+            <p:cNvPr id="153" name="Hexagon 152">
+              <a:extLst>
+                <a:ext uri="{FF2B5EF4-FFF2-40B4-BE49-F238E27FC236}">
+                  <a16:creationId xmlns:a16="http://schemas.microsoft.com/office/drawing/2014/main" id="{235D4654-7B07-733D-D5C5-1C6D92B2A3FF}"/>
                 </a:ext>
               </a:extLst>
             </p:cNvPr>

--- a/image process/drawings sifi.pptx
+++ b/image process/drawings sifi.pptx
@@ -23479,6 +23479,104 @@
       </p:grpSpPr>
       <p:grpSp>
         <p:nvGrpSpPr>
+          <p:cNvPr id="52" name="Group 51">
+            <a:extLst>
+              <a:ext uri="{FF2B5EF4-FFF2-40B4-BE49-F238E27FC236}">
+                <a16:creationId xmlns:a16="http://schemas.microsoft.com/office/drawing/2014/main" id="{D933A3CF-6B78-A803-B848-269E55B096F9}"/>
+              </a:ext>
+            </a:extLst>
+          </p:cNvPr>
+          <p:cNvGrpSpPr/>
+          <p:nvPr/>
+        </p:nvGrpSpPr>
+        <p:grpSpPr>
+          <a:xfrm rot="19612112">
+            <a:off x="8012950" y="3974742"/>
+            <a:ext cx="1147676" cy="521834"/>
+            <a:chOff x="3722644" y="3927567"/>
+            <a:chExt cx="2346446" cy="1066900"/>
+          </a:xfrm>
+        </p:grpSpPr>
+        <p:pic>
+          <p:nvPicPr>
+            <p:cNvPr id="155" name="Picture 8" descr="31 Great Fire Wings Tattoo ideas | wings tattoo, wings, tattoos">
+              <a:extLst>
+                <a:ext uri="{FF2B5EF4-FFF2-40B4-BE49-F238E27FC236}">
+                  <a16:creationId xmlns:a16="http://schemas.microsoft.com/office/drawing/2014/main" id="{F102135B-722C-D9A8-7A5B-C1F76A7140FF}"/>
+                </a:ext>
+              </a:extLst>
+            </p:cNvPr>
+            <p:cNvPicPr>
+              <a:picLocks noChangeAspect="1" noChangeArrowheads="1"/>
+            </p:cNvPicPr>
+            <p:nvPr/>
+          </p:nvPicPr>
+          <p:blipFill>
+            <a:blip r:embed="rId2">
+              <a:extLst>
+                <a:ext uri="{28A0092B-C50C-407E-A947-70E740481C1C}">
+                  <a14:useLocalDpi xmlns:a14="http://schemas.microsoft.com/office/drawing/2010/main" val="0"/>
+                </a:ext>
+              </a:extLst>
+            </a:blip>
+            <a:srcRect/>
+            <a:stretch>
+              <a:fillRect/>
+            </a:stretch>
+          </p:blipFill>
+          <p:spPr bwMode="auto">
+            <a:xfrm>
+              <a:off x="3722644" y="3927567"/>
+              <a:ext cx="2346446" cy="1066900"/>
+            </a:xfrm>
+            <a:prstGeom prst="rect">
+              <a:avLst/>
+            </a:prstGeom>
+            <a:noFill/>
+            <a:extLst>
+              <a:ext uri="{909E8E84-426E-40DD-AFC4-6F175D3DCCD1}">
+                <a14:hiddenFill xmlns:a14="http://schemas.microsoft.com/office/drawing/2010/main">
+                  <a:solidFill>
+                    <a:srgbClr val="FFFFFF"/>
+                  </a:solidFill>
+                </a14:hiddenFill>
+              </a:ext>
+            </a:extLst>
+          </p:spPr>
+        </p:pic>
+        <p:pic>
+          <p:nvPicPr>
+            <p:cNvPr id="51" name="Picture 50">
+              <a:extLst>
+                <a:ext uri="{FF2B5EF4-FFF2-40B4-BE49-F238E27FC236}">
+                  <a16:creationId xmlns:a16="http://schemas.microsoft.com/office/drawing/2014/main" id="{2C192A3F-BE70-0352-F945-B0D0A3948BD9}"/>
+                </a:ext>
+              </a:extLst>
+            </p:cNvPr>
+            <p:cNvPicPr>
+              <a:picLocks noChangeAspect="1"/>
+            </p:cNvPicPr>
+            <p:nvPr/>
+          </p:nvPicPr>
+          <p:blipFill>
+            <a:blip r:embed="rId3"/>
+            <a:stretch>
+              <a:fillRect/>
+            </a:stretch>
+          </p:blipFill>
+          <p:spPr>
+            <a:xfrm>
+              <a:off x="4657437" y="4197944"/>
+              <a:ext cx="476859" cy="702740"/>
+            </a:xfrm>
+            <a:prstGeom prst="rect">
+              <a:avLst/>
+            </a:prstGeom>
+          </p:spPr>
+        </p:pic>
+      </p:grpSp>
+      <p:grpSp>
+        <p:nvGrpSpPr>
           <p:cNvPr id="45" name="Group 44">
             <a:extLst>
               <a:ext uri="{FF2B5EF4-FFF2-40B4-BE49-F238E27FC236}">
@@ -23512,7 +23610,7 @@
             <p:nvPr/>
           </p:nvPicPr>
           <p:blipFill>
-            <a:blip r:embed="rId2"/>
+            <a:blip r:embed="rId4"/>
             <a:stretch>
               <a:fillRect/>
             </a:stretch>
@@ -23542,7 +23640,7 @@
             <p:nvPr/>
           </p:nvPicPr>
           <p:blipFill rotWithShape="1">
-            <a:blip r:embed="rId3">
+            <a:blip r:embed="rId5">
               <a:extLst>
                 <a:ext uri="{28A0092B-C50C-407E-A947-70E740481C1C}">
                   <a14:useLocalDpi xmlns:a14="http://schemas.microsoft.com/office/drawing/2010/main" val="0"/>
@@ -23588,7 +23686,7 @@
           <p:nvPr/>
         </p:nvPicPr>
         <p:blipFill rotWithShape="1">
-          <a:blip r:embed="rId4">
+          <a:blip r:embed="rId6">
             <a:extLst>
               <a:ext uri="{28A0092B-C50C-407E-A947-70E740481C1C}">
                 <a14:useLocalDpi xmlns:a14="http://schemas.microsoft.com/office/drawing/2010/main" val="0"/>
@@ -23653,7 +23751,7 @@
             <p:nvPr/>
           </p:nvPicPr>
           <p:blipFill>
-            <a:blip r:embed="rId5"/>
+            <a:blip r:embed="rId7"/>
             <a:stretch>
               <a:fillRect/>
             </a:stretch>
@@ -23683,7 +23781,7 @@
             <p:nvPr/>
           </p:nvPicPr>
           <p:blipFill>
-            <a:blip r:embed="rId6"/>
+            <a:blip r:embed="rId8"/>
             <a:stretch>
               <a:fillRect/>
             </a:stretch>
@@ -23734,7 +23832,7 @@
             <p:nvPr/>
           </p:nvPicPr>
           <p:blipFill>
-            <a:blip r:embed="rId7"/>
+            <a:blip r:embed="rId9"/>
             <a:stretch>
               <a:fillRect/>
             </a:stretch>
@@ -25408,7 +25506,7 @@
             <p:nvPr/>
           </p:nvPicPr>
           <p:blipFill rotWithShape="1">
-            <a:blip r:embed="rId8">
+            <a:blip r:embed="rId10">
               <a:extLst>
                 <a:ext uri="{28A0092B-C50C-407E-A947-70E740481C1C}">
                   <a14:useLocalDpi xmlns:a14="http://schemas.microsoft.com/office/drawing/2010/main" val="0"/>
@@ -25453,7 +25551,7 @@
             <p:nvPr/>
           </p:nvPicPr>
           <p:blipFill rotWithShape="1">
-            <a:blip r:embed="rId5"/>
+            <a:blip r:embed="rId7"/>
             <a:srcRect b="41100"/>
             <a:stretch/>
           </p:blipFill>
@@ -25715,7 +25813,7 @@
             <p:nvPr/>
           </p:nvPicPr>
           <p:blipFill>
-            <a:blip r:embed="rId9"/>
+            <a:blip r:embed="rId11"/>
             <a:stretch>
               <a:fillRect/>
             </a:stretch>
@@ -25766,7 +25864,7 @@
             <p:nvPr/>
           </p:nvPicPr>
           <p:blipFill rotWithShape="1">
-            <a:blip r:embed="rId3">
+            <a:blip r:embed="rId5">
               <a:extLst>
                 <a:ext uri="{28A0092B-C50C-407E-A947-70E740481C1C}">
                   <a14:useLocalDpi xmlns:a14="http://schemas.microsoft.com/office/drawing/2010/main" val="0"/>
@@ -25831,7 +25929,7 @@
               <p:nvPr/>
             </p:nvPicPr>
             <p:blipFill>
-              <a:blip r:embed="rId10">
+              <a:blip r:embed="rId12">
                 <a:extLst>
                   <a:ext uri="{28A0092B-C50C-407E-A947-70E740481C1C}">
                     <a14:useLocalDpi xmlns:a14="http://schemas.microsoft.com/office/drawing/2010/main" val="0"/>
@@ -25878,7 +25976,7 @@
               <p:nvPr/>
             </p:nvPicPr>
             <p:blipFill>
-              <a:blip r:embed="rId10">
+              <a:blip r:embed="rId12">
                 <a:extLst>
                   <a:ext uri="{28A0092B-C50C-407E-A947-70E740481C1C}">
                     <a14:useLocalDpi xmlns:a14="http://schemas.microsoft.com/office/drawing/2010/main" val="0"/>
@@ -25925,7 +26023,7 @@
               <p:nvPr/>
             </p:nvPicPr>
             <p:blipFill>
-              <a:blip r:embed="rId10">
+              <a:blip r:embed="rId12">
                 <a:extLst>
                   <a:ext uri="{28A0092B-C50C-407E-A947-70E740481C1C}">
                     <a14:useLocalDpi xmlns:a14="http://schemas.microsoft.com/office/drawing/2010/main" val="0"/>
@@ -27989,7 +28087,7 @@
             <p:nvPr/>
           </p:nvPicPr>
           <p:blipFill rotWithShape="1">
-            <a:blip r:embed="rId11">
+            <a:blip r:embed="rId13">
               <a:extLst>
                 <a:ext uri="{28A0092B-C50C-407E-A947-70E740481C1C}">
                   <a14:useLocalDpi xmlns:a14="http://schemas.microsoft.com/office/drawing/2010/main" val="0"/>
@@ -28034,7 +28132,7 @@
             <p:nvPr/>
           </p:nvPicPr>
           <p:blipFill rotWithShape="1">
-            <a:blip r:embed="rId11">
+            <a:blip r:embed="rId13">
               <a:extLst>
                 <a:ext uri="{28A0092B-C50C-407E-A947-70E740481C1C}">
                   <a14:useLocalDpi xmlns:a14="http://schemas.microsoft.com/office/drawing/2010/main" val="0"/>
@@ -28408,7 +28506,7 @@
             <p:nvPr/>
           </p:nvPicPr>
           <p:blipFill rotWithShape="1">
-            <a:blip r:embed="rId11">
+            <a:blip r:embed="rId13">
               <a:extLst>
                 <a:ext uri="{28A0092B-C50C-407E-A947-70E740481C1C}">
                   <a14:useLocalDpi xmlns:a14="http://schemas.microsoft.com/office/drawing/2010/main" val="0"/>
@@ -28453,7 +28551,7 @@
             <p:nvPr/>
           </p:nvPicPr>
           <p:blipFill rotWithShape="1">
-            <a:blip r:embed="rId11">
+            <a:blip r:embed="rId13">
               <a:extLst>
                 <a:ext uri="{28A0092B-C50C-407E-A947-70E740481C1C}">
                   <a14:useLocalDpi xmlns:a14="http://schemas.microsoft.com/office/drawing/2010/main" val="0"/>
@@ -28467,121 +28565,6 @@
             <a:xfrm>
               <a:off x="4849013" y="3586270"/>
               <a:ext cx="1246987" cy="1512204"/>
-            </a:xfrm>
-            <a:prstGeom prst="rect">
-              <a:avLst/>
-            </a:prstGeom>
-            <a:noFill/>
-            <a:extLst>
-              <a:ext uri="{909E8E84-426E-40DD-AFC4-6F175D3DCCD1}">
-                <a14:hiddenFill xmlns:a14="http://schemas.microsoft.com/office/drawing/2010/main">
-                  <a:solidFill>
-                    <a:srgbClr val="FFFFFF"/>
-                  </a:solidFill>
-                </a14:hiddenFill>
-              </a:ext>
-            </a:extLst>
-          </p:spPr>
-        </p:pic>
-      </p:grpSp>
-      <p:grpSp>
-        <p:nvGrpSpPr>
-          <p:cNvPr id="7" name="Group 6">
-            <a:extLst>
-              <a:ext uri="{FF2B5EF4-FFF2-40B4-BE49-F238E27FC236}">
-                <a16:creationId xmlns:a16="http://schemas.microsoft.com/office/drawing/2014/main" id="{634F40FF-8DC8-BCAC-C8B9-7D6F7BC317E5}"/>
-              </a:ext>
-            </a:extLst>
-          </p:cNvPr>
-          <p:cNvGrpSpPr/>
-          <p:nvPr/>
-        </p:nvGrpSpPr>
-        <p:grpSpPr>
-          <a:xfrm rot="19460443">
-            <a:off x="8065135" y="3950340"/>
-            <a:ext cx="1161846" cy="686203"/>
-            <a:chOff x="6232129" y="4376606"/>
-            <a:chExt cx="1958165" cy="1156521"/>
-          </a:xfrm>
-        </p:grpSpPr>
-        <p:pic>
-          <p:nvPicPr>
-            <p:cNvPr id="4" name="Picture 8" descr="31 Great Fire Wings Tattoo ideas | wings tattoo, wings, tattoos">
-              <a:extLst>
-                <a:ext uri="{FF2B5EF4-FFF2-40B4-BE49-F238E27FC236}">
-                  <a16:creationId xmlns:a16="http://schemas.microsoft.com/office/drawing/2014/main" id="{E49F86F5-B747-89CF-2D9D-CACB45517B84}"/>
-                </a:ext>
-              </a:extLst>
-            </p:cNvPr>
-            <p:cNvPicPr>
-              <a:picLocks noChangeAspect="1" noChangeArrowheads="1"/>
-            </p:cNvPicPr>
-            <p:nvPr/>
-          </p:nvPicPr>
-          <p:blipFill>
-            <a:blip r:embed="rId12">
-              <a:extLst>
-                <a:ext uri="{28A0092B-C50C-407E-A947-70E740481C1C}">
-                  <a14:useLocalDpi xmlns:a14="http://schemas.microsoft.com/office/drawing/2010/main" val="0"/>
-                </a:ext>
-              </a:extLst>
-            </a:blip>
-            <a:srcRect/>
-            <a:stretch>
-              <a:fillRect/>
-            </a:stretch>
-          </p:blipFill>
-          <p:spPr bwMode="auto">
-            <a:xfrm>
-              <a:off x="6232129" y="4376606"/>
-              <a:ext cx="1958165" cy="890353"/>
-            </a:xfrm>
-            <a:prstGeom prst="rect">
-              <a:avLst/>
-            </a:prstGeom>
-            <a:noFill/>
-            <a:extLst>
-              <a:ext uri="{909E8E84-426E-40DD-AFC4-6F175D3DCCD1}">
-                <a14:hiddenFill xmlns:a14="http://schemas.microsoft.com/office/drawing/2010/main">
-                  <a:solidFill>
-                    <a:srgbClr val="FFFFFF"/>
-                  </a:solidFill>
-                </a14:hiddenFill>
-              </a:ext>
-            </a:extLst>
-          </p:spPr>
-        </p:pic>
-        <p:pic>
-          <p:nvPicPr>
-            <p:cNvPr id="1034" name="Picture 10" descr="Hornet Icon #367850 - Free Icons Library">
-              <a:extLst>
-                <a:ext uri="{FF2B5EF4-FFF2-40B4-BE49-F238E27FC236}">
-                  <a16:creationId xmlns:a16="http://schemas.microsoft.com/office/drawing/2014/main" id="{00F93EA0-C297-4F7D-7A53-6CA85B9A5997}"/>
-                </a:ext>
-              </a:extLst>
-            </p:cNvPr>
-            <p:cNvPicPr>
-              <a:picLocks noChangeAspect="1" noChangeArrowheads="1"/>
-            </p:cNvPicPr>
-            <p:nvPr/>
-          </p:nvPicPr>
-          <p:blipFill>
-            <a:blip r:embed="rId13">
-              <a:extLst>
-                <a:ext uri="{28A0092B-C50C-407E-A947-70E740481C1C}">
-                  <a14:useLocalDpi xmlns:a14="http://schemas.microsoft.com/office/drawing/2010/main" val="0"/>
-                </a:ext>
-              </a:extLst>
-            </a:blip>
-            <a:srcRect/>
-            <a:stretch>
-              <a:fillRect/>
-            </a:stretch>
-          </p:blipFill>
-          <p:spPr bwMode="auto">
-            <a:xfrm>
-              <a:off x="6661102" y="4432910"/>
-              <a:ext cx="1100217" cy="1100217"/>
             </a:xfrm>
             <a:prstGeom prst="rect">
               <a:avLst/>

--- a/image process/drawings sifi.pptx
+++ b/image process/drawings sifi.pptx
@@ -200,7 +200,7 @@
           <a:p>
             <a:fld id="{7700C406-2328-4788-AE79-437B6607AD22}" type="datetimeFigureOut">
               <a:rPr lang="en-US" smtClean="0"/>
-              <a:t>6/14/2022</a:t>
+              <a:t>6/16/2022</a:t>
             </a:fld>
             <a:endParaRPr lang="en-US"/>
           </a:p>
@@ -614,7 +614,7 @@
           <a:p>
             <a:fld id="{9EC8CD53-0620-48F2-A3BB-2B10BDA60E52}" type="datetimeFigureOut">
               <a:rPr lang="en-US" smtClean="0"/>
-              <a:t>6/14/2022</a:t>
+              <a:t>6/16/2022</a:t>
             </a:fld>
             <a:endParaRPr lang="en-US"/>
           </a:p>
@@ -812,7 +812,7 @@
           <a:p>
             <a:fld id="{9EC8CD53-0620-48F2-A3BB-2B10BDA60E52}" type="datetimeFigureOut">
               <a:rPr lang="en-US" smtClean="0"/>
-              <a:t>6/14/2022</a:t>
+              <a:t>6/16/2022</a:t>
             </a:fld>
             <a:endParaRPr lang="en-US"/>
           </a:p>
@@ -1020,7 +1020,7 @@
           <a:p>
             <a:fld id="{9EC8CD53-0620-48F2-A3BB-2B10BDA60E52}" type="datetimeFigureOut">
               <a:rPr lang="en-US" smtClean="0"/>
-              <a:t>6/14/2022</a:t>
+              <a:t>6/16/2022</a:t>
             </a:fld>
             <a:endParaRPr lang="en-US"/>
           </a:p>
@@ -1218,7 +1218,7 @@
           <a:p>
             <a:fld id="{9EC8CD53-0620-48F2-A3BB-2B10BDA60E52}" type="datetimeFigureOut">
               <a:rPr lang="en-US" smtClean="0"/>
-              <a:t>6/14/2022</a:t>
+              <a:t>6/16/2022</a:t>
             </a:fld>
             <a:endParaRPr lang="en-US"/>
           </a:p>
@@ -1493,7 +1493,7 @@
           <a:p>
             <a:fld id="{9EC8CD53-0620-48F2-A3BB-2B10BDA60E52}" type="datetimeFigureOut">
               <a:rPr lang="en-US" smtClean="0"/>
-              <a:t>6/14/2022</a:t>
+              <a:t>6/16/2022</a:t>
             </a:fld>
             <a:endParaRPr lang="en-US"/>
           </a:p>
@@ -1758,7 +1758,7 @@
           <a:p>
             <a:fld id="{9EC8CD53-0620-48F2-A3BB-2B10BDA60E52}" type="datetimeFigureOut">
               <a:rPr lang="en-US" smtClean="0"/>
-              <a:t>6/14/2022</a:t>
+              <a:t>6/16/2022</a:t>
             </a:fld>
             <a:endParaRPr lang="en-US"/>
           </a:p>
@@ -2170,7 +2170,7 @@
           <a:p>
             <a:fld id="{9EC8CD53-0620-48F2-A3BB-2B10BDA60E52}" type="datetimeFigureOut">
               <a:rPr lang="en-US" smtClean="0"/>
-              <a:t>6/14/2022</a:t>
+              <a:t>6/16/2022</a:t>
             </a:fld>
             <a:endParaRPr lang="en-US"/>
           </a:p>
@@ -2311,7 +2311,7 @@
           <a:p>
             <a:fld id="{9EC8CD53-0620-48F2-A3BB-2B10BDA60E52}" type="datetimeFigureOut">
               <a:rPr lang="en-US" smtClean="0"/>
-              <a:t>6/14/2022</a:t>
+              <a:t>6/16/2022</a:t>
             </a:fld>
             <a:endParaRPr lang="en-US"/>
           </a:p>
@@ -2424,7 +2424,7 @@
           <a:p>
             <a:fld id="{9EC8CD53-0620-48F2-A3BB-2B10BDA60E52}" type="datetimeFigureOut">
               <a:rPr lang="en-US" smtClean="0"/>
-              <a:t>6/14/2022</a:t>
+              <a:t>6/16/2022</a:t>
             </a:fld>
             <a:endParaRPr lang="en-US"/>
           </a:p>
@@ -2735,7 +2735,7 @@
           <a:p>
             <a:fld id="{9EC8CD53-0620-48F2-A3BB-2B10BDA60E52}" type="datetimeFigureOut">
               <a:rPr lang="en-US" smtClean="0"/>
-              <a:t>6/14/2022</a:t>
+              <a:t>6/16/2022</a:t>
             </a:fld>
             <a:endParaRPr lang="en-US"/>
           </a:p>
@@ -3023,7 +3023,7 @@
           <a:p>
             <a:fld id="{9EC8CD53-0620-48F2-A3BB-2B10BDA60E52}" type="datetimeFigureOut">
               <a:rPr lang="en-US" smtClean="0"/>
-              <a:t>6/14/2022</a:t>
+              <a:t>6/16/2022</a:t>
             </a:fld>
             <a:endParaRPr lang="en-US"/>
           </a:p>
@@ -3264,7 +3264,7 @@
           <a:p>
             <a:fld id="{9EC8CD53-0620-48F2-A3BB-2B10BDA60E52}" type="datetimeFigureOut">
               <a:rPr lang="en-US" smtClean="0"/>
-              <a:t>6/14/2022</a:t>
+              <a:t>6/16/2022</a:t>
             </a:fld>
             <a:endParaRPr lang="en-US"/>
           </a:p>
@@ -23479,6 +23479,183 @@
       </p:grpSpPr>
       <p:grpSp>
         <p:nvGrpSpPr>
+          <p:cNvPr id="4" name="Group 3">
+            <a:extLst>
+              <a:ext uri="{FF2B5EF4-FFF2-40B4-BE49-F238E27FC236}">
+                <a16:creationId xmlns:a16="http://schemas.microsoft.com/office/drawing/2014/main" id="{A83527CF-3368-3F21-540D-F496B300AFF0}"/>
+              </a:ext>
+            </a:extLst>
+          </p:cNvPr>
+          <p:cNvGrpSpPr/>
+          <p:nvPr/>
+        </p:nvGrpSpPr>
+        <p:grpSpPr>
+          <a:xfrm>
+            <a:off x="6874801" y="3761784"/>
+            <a:ext cx="685905" cy="1061625"/>
+            <a:chOff x="4780300" y="4186533"/>
+            <a:chExt cx="685905" cy="1061625"/>
+          </a:xfrm>
+        </p:grpSpPr>
+        <p:grpSp>
+          <p:nvGrpSpPr>
+            <p:cNvPr id="6" name="Group 5">
+              <a:extLst>
+                <a:ext uri="{FF2B5EF4-FFF2-40B4-BE49-F238E27FC236}">
+                  <a16:creationId xmlns:a16="http://schemas.microsoft.com/office/drawing/2014/main" id="{1D845641-42F5-D497-DD80-FBE72BE9A4F2}"/>
+                </a:ext>
+              </a:extLst>
+            </p:cNvPr>
+            <p:cNvGrpSpPr/>
+            <p:nvPr/>
+          </p:nvGrpSpPr>
+          <p:grpSpPr>
+            <a:xfrm>
+              <a:off x="4990276" y="4238288"/>
+              <a:ext cx="475929" cy="507806"/>
+              <a:chOff x="5052457" y="3925688"/>
+              <a:chExt cx="715293" cy="763202"/>
+            </a:xfrm>
+          </p:grpSpPr>
+          <p:pic>
+            <p:nvPicPr>
+              <p:cNvPr id="1036" name="Picture 12" descr="Ninja dart Images, Stock Photos &amp; Vectors | Shutterstock">
+                <a:extLst>
+                  <a:ext uri="{FF2B5EF4-FFF2-40B4-BE49-F238E27FC236}">
+                    <a16:creationId xmlns:a16="http://schemas.microsoft.com/office/drawing/2014/main" id="{6CB2D1BA-B89E-F421-969F-56A0AC897A14}"/>
+                  </a:ext>
+                </a:extLst>
+              </p:cNvPr>
+              <p:cNvPicPr>
+                <a:picLocks noChangeAspect="1" noChangeArrowheads="1"/>
+              </p:cNvPicPr>
+              <p:nvPr/>
+            </p:nvPicPr>
+            <p:blipFill rotWithShape="1">
+              <a:blip r:embed="rId2">
+                <a:extLst>
+                  <a:ext uri="{28A0092B-C50C-407E-A947-70E740481C1C}">
+                    <a14:useLocalDpi xmlns:a14="http://schemas.microsoft.com/office/drawing/2010/main" val="0"/>
+                  </a:ext>
+                </a:extLst>
+              </a:blip>
+              <a:srcRect l="21795" t="20882" r="20930" b="27689"/>
+              <a:stretch/>
+            </p:blipFill>
+            <p:spPr bwMode="auto">
+              <a:xfrm>
+                <a:off x="5052457" y="3925688"/>
+                <a:ext cx="447751" cy="432973"/>
+              </a:xfrm>
+              <a:prstGeom prst="rect">
+                <a:avLst/>
+              </a:prstGeom>
+              <a:noFill/>
+              <a:extLst>
+                <a:ext uri="{909E8E84-426E-40DD-AFC4-6F175D3DCCD1}">
+                  <a14:hiddenFill xmlns:a14="http://schemas.microsoft.com/office/drawing/2010/main">
+                    <a:solidFill>
+                      <a:srgbClr val="FFFFFF"/>
+                    </a:solidFill>
+                  </a14:hiddenFill>
+                </a:ext>
+              </a:extLst>
+            </p:spPr>
+          </p:pic>
+          <p:pic>
+            <p:nvPicPr>
+              <p:cNvPr id="144" name="Picture 12" descr="Ninja dart Images, Stock Photos &amp; Vectors | Shutterstock">
+                <a:extLst>
+                  <a:ext uri="{FF2B5EF4-FFF2-40B4-BE49-F238E27FC236}">
+                    <a16:creationId xmlns:a16="http://schemas.microsoft.com/office/drawing/2014/main" id="{B3F339B1-4624-084E-5B5C-262A1C9A9AA2}"/>
+                  </a:ext>
+                </a:extLst>
+              </p:cNvPr>
+              <p:cNvPicPr>
+                <a:picLocks noChangeAspect="1" noChangeArrowheads="1"/>
+              </p:cNvPicPr>
+              <p:nvPr/>
+            </p:nvPicPr>
+            <p:blipFill rotWithShape="1">
+              <a:blip r:embed="rId2">
+                <a:extLst>
+                  <a:ext uri="{28A0092B-C50C-407E-A947-70E740481C1C}">
+                    <a14:useLocalDpi xmlns:a14="http://schemas.microsoft.com/office/drawing/2010/main" val="0"/>
+                  </a:ext>
+                </a:extLst>
+              </a:blip>
+              <a:srcRect l="21795" t="20882" r="20930" b="27689"/>
+              <a:stretch/>
+            </p:blipFill>
+            <p:spPr bwMode="auto">
+              <a:xfrm>
+                <a:off x="5319999" y="4255917"/>
+                <a:ext cx="447751" cy="432973"/>
+              </a:xfrm>
+              <a:prstGeom prst="rect">
+                <a:avLst/>
+              </a:prstGeom>
+              <a:noFill/>
+              <a:extLst>
+                <a:ext uri="{909E8E84-426E-40DD-AFC4-6F175D3DCCD1}">
+                  <a14:hiddenFill xmlns:a14="http://schemas.microsoft.com/office/drawing/2010/main">
+                    <a:solidFill>
+                      <a:srgbClr val="FFFFFF"/>
+                    </a:solidFill>
+                  </a14:hiddenFill>
+                </a:ext>
+              </a:extLst>
+            </p:spPr>
+          </p:pic>
+        </p:grpSp>
+        <p:pic>
+          <p:nvPicPr>
+            <p:cNvPr id="1026" name="Picture 2" descr="Bat Vector Icon Logo Halloween Character Stock Vector (Royalty Free)  1154282770 | Shutterstock">
+              <a:extLst>
+                <a:ext uri="{FF2B5EF4-FFF2-40B4-BE49-F238E27FC236}">
+                  <a16:creationId xmlns:a16="http://schemas.microsoft.com/office/drawing/2014/main" id="{EFDA77C4-70F9-1F2C-A9F8-81A43B84856A}"/>
+                </a:ext>
+              </a:extLst>
+            </p:cNvPr>
+            <p:cNvPicPr>
+              <a:picLocks noChangeAspect="1" noChangeArrowheads="1"/>
+            </p:cNvPicPr>
+            <p:nvPr/>
+          </p:nvPicPr>
+          <p:blipFill rotWithShape="1">
+            <a:blip r:embed="rId3">
+              <a:extLst>
+                <a:ext uri="{28A0092B-C50C-407E-A947-70E740481C1C}">
+                  <a14:useLocalDpi xmlns:a14="http://schemas.microsoft.com/office/drawing/2010/main" val="0"/>
+                </a:ext>
+              </a:extLst>
+            </a:blip>
+            <a:srcRect l="7315" t="14728" r="6948" b="22285"/>
+            <a:stretch/>
+          </p:blipFill>
+          <p:spPr bwMode="auto">
+            <a:xfrm rot="2797739">
+              <a:off x="4459463" y="4507370"/>
+              <a:ext cx="1061625" cy="419951"/>
+            </a:xfrm>
+            <a:prstGeom prst="rect">
+              <a:avLst/>
+            </a:prstGeom>
+            <a:noFill/>
+            <a:extLst>
+              <a:ext uri="{909E8E84-426E-40DD-AFC4-6F175D3DCCD1}">
+                <a14:hiddenFill xmlns:a14="http://schemas.microsoft.com/office/drawing/2010/main">
+                  <a:solidFill>
+                    <a:srgbClr val="FFFFFF"/>
+                  </a:solidFill>
+                </a14:hiddenFill>
+              </a:ext>
+            </a:extLst>
+          </p:spPr>
+        </p:pic>
+      </p:grpSp>
+      <p:grpSp>
+        <p:nvGrpSpPr>
           <p:cNvPr id="52" name="Group 51">
             <a:extLst>
               <a:ext uri="{FF2B5EF4-FFF2-40B4-BE49-F238E27FC236}">
@@ -23512,7 +23689,7 @@
             <p:nvPr/>
           </p:nvPicPr>
           <p:blipFill>
-            <a:blip r:embed="rId2">
+            <a:blip r:embed="rId4">
               <a:extLst>
                 <a:ext uri="{28A0092B-C50C-407E-A947-70E740481C1C}">
                   <a14:useLocalDpi xmlns:a14="http://schemas.microsoft.com/office/drawing/2010/main" val="0"/>
@@ -23559,7 +23736,7 @@
             <p:nvPr/>
           </p:nvPicPr>
           <p:blipFill>
-            <a:blip r:embed="rId3"/>
+            <a:blip r:embed="rId5"/>
             <a:stretch>
               <a:fillRect/>
             </a:stretch>
@@ -23610,7 +23787,7 @@
             <p:nvPr/>
           </p:nvPicPr>
           <p:blipFill>
-            <a:blip r:embed="rId4"/>
+            <a:blip r:embed="rId6"/>
             <a:stretch>
               <a:fillRect/>
             </a:stretch>
@@ -23640,7 +23817,7 @@
             <p:nvPr/>
           </p:nvPicPr>
           <p:blipFill rotWithShape="1">
-            <a:blip r:embed="rId5">
+            <a:blip r:embed="rId7">
               <a:extLst>
                 <a:ext uri="{28A0092B-C50C-407E-A947-70E740481C1C}">
                   <a14:useLocalDpi xmlns:a14="http://schemas.microsoft.com/office/drawing/2010/main" val="0"/>
@@ -23686,7 +23863,7 @@
           <p:nvPr/>
         </p:nvPicPr>
         <p:blipFill rotWithShape="1">
-          <a:blip r:embed="rId6">
+          <a:blip r:embed="rId8">
             <a:extLst>
               <a:ext uri="{28A0092B-C50C-407E-A947-70E740481C1C}">
                 <a14:useLocalDpi xmlns:a14="http://schemas.microsoft.com/office/drawing/2010/main" val="0"/>
@@ -23751,7 +23928,7 @@
             <p:nvPr/>
           </p:nvPicPr>
           <p:blipFill>
-            <a:blip r:embed="rId7"/>
+            <a:blip r:embed="rId9"/>
             <a:stretch>
               <a:fillRect/>
             </a:stretch>
@@ -23781,7 +23958,7 @@
             <p:nvPr/>
           </p:nvPicPr>
           <p:blipFill>
-            <a:blip r:embed="rId8"/>
+            <a:blip r:embed="rId10"/>
             <a:stretch>
               <a:fillRect/>
             </a:stretch>
@@ -23832,7 +24009,7 @@
             <p:nvPr/>
           </p:nvPicPr>
           <p:blipFill>
-            <a:blip r:embed="rId9"/>
+            <a:blip r:embed="rId11"/>
             <a:stretch>
               <a:fillRect/>
             </a:stretch>
@@ -25506,7 +25683,7 @@
             <p:nvPr/>
           </p:nvPicPr>
           <p:blipFill rotWithShape="1">
-            <a:blip r:embed="rId10">
+            <a:blip r:embed="rId12">
               <a:extLst>
                 <a:ext uri="{28A0092B-C50C-407E-A947-70E740481C1C}">
                   <a14:useLocalDpi xmlns:a14="http://schemas.microsoft.com/office/drawing/2010/main" val="0"/>
@@ -25551,7 +25728,7 @@
             <p:nvPr/>
           </p:nvPicPr>
           <p:blipFill rotWithShape="1">
-            <a:blip r:embed="rId7"/>
+            <a:blip r:embed="rId9"/>
             <a:srcRect b="41100"/>
             <a:stretch/>
           </p:blipFill>
@@ -25813,7 +25990,7 @@
             <p:nvPr/>
           </p:nvPicPr>
           <p:blipFill>
-            <a:blip r:embed="rId11"/>
+            <a:blip r:embed="rId13"/>
             <a:stretch>
               <a:fillRect/>
             </a:stretch>
@@ -25864,7 +26041,7 @@
             <p:nvPr/>
           </p:nvPicPr>
           <p:blipFill rotWithShape="1">
-            <a:blip r:embed="rId5">
+            <a:blip r:embed="rId7">
               <a:extLst>
                 <a:ext uri="{28A0092B-C50C-407E-A947-70E740481C1C}">
                   <a14:useLocalDpi xmlns:a14="http://schemas.microsoft.com/office/drawing/2010/main" val="0"/>
@@ -25929,7 +26106,7 @@
               <p:nvPr/>
             </p:nvPicPr>
             <p:blipFill>
-              <a:blip r:embed="rId12">
+              <a:blip r:embed="rId14">
                 <a:extLst>
                   <a:ext uri="{28A0092B-C50C-407E-A947-70E740481C1C}">
                     <a14:useLocalDpi xmlns:a14="http://schemas.microsoft.com/office/drawing/2010/main" val="0"/>
@@ -25976,7 +26153,7 @@
               <p:nvPr/>
             </p:nvPicPr>
             <p:blipFill>
-              <a:blip r:embed="rId12">
+              <a:blip r:embed="rId14">
                 <a:extLst>
                   <a:ext uri="{28A0092B-C50C-407E-A947-70E740481C1C}">
                     <a14:useLocalDpi xmlns:a14="http://schemas.microsoft.com/office/drawing/2010/main" val="0"/>
@@ -26023,7 +26200,7 @@
               <p:nvPr/>
             </p:nvPicPr>
             <p:blipFill>
-              <a:blip r:embed="rId12">
+              <a:blip r:embed="rId14">
                 <a:extLst>
                   <a:ext uri="{28A0092B-C50C-407E-A947-70E740481C1C}">
                     <a14:useLocalDpi xmlns:a14="http://schemas.microsoft.com/office/drawing/2010/main" val="0"/>
@@ -28087,7 +28264,7 @@
             <p:nvPr/>
           </p:nvPicPr>
           <p:blipFill rotWithShape="1">
-            <a:blip r:embed="rId13">
+            <a:blip r:embed="rId15">
               <a:extLst>
                 <a:ext uri="{28A0092B-C50C-407E-A947-70E740481C1C}">
                   <a14:useLocalDpi xmlns:a14="http://schemas.microsoft.com/office/drawing/2010/main" val="0"/>
@@ -28132,7 +28309,7 @@
             <p:nvPr/>
           </p:nvPicPr>
           <p:blipFill rotWithShape="1">
-            <a:blip r:embed="rId13">
+            <a:blip r:embed="rId15">
               <a:extLst>
                 <a:ext uri="{28A0092B-C50C-407E-A947-70E740481C1C}">
                   <a14:useLocalDpi xmlns:a14="http://schemas.microsoft.com/office/drawing/2010/main" val="0"/>
@@ -28506,7 +28683,7 @@
             <p:nvPr/>
           </p:nvPicPr>
           <p:blipFill rotWithShape="1">
-            <a:blip r:embed="rId13">
+            <a:blip r:embed="rId15">
               <a:extLst>
                 <a:ext uri="{28A0092B-C50C-407E-A947-70E740481C1C}">
                   <a14:useLocalDpi xmlns:a14="http://schemas.microsoft.com/office/drawing/2010/main" val="0"/>
@@ -28551,7 +28728,7 @@
             <p:nvPr/>
           </p:nvPicPr>
           <p:blipFill rotWithShape="1">
-            <a:blip r:embed="rId13">
+            <a:blip r:embed="rId15">
               <a:extLst>
                 <a:ext uri="{28A0092B-C50C-407E-A947-70E740481C1C}">
                   <a14:useLocalDpi xmlns:a14="http://schemas.microsoft.com/office/drawing/2010/main" val="0"/>
@@ -28565,164 +28742,6 @@
             <a:xfrm>
               <a:off x="4849013" y="3586270"/>
               <a:ext cx="1246987" cy="1512204"/>
-            </a:xfrm>
-            <a:prstGeom prst="rect">
-              <a:avLst/>
-            </a:prstGeom>
-            <a:noFill/>
-            <a:extLst>
-              <a:ext uri="{909E8E84-426E-40DD-AFC4-6F175D3DCCD1}">
-                <a14:hiddenFill xmlns:a14="http://schemas.microsoft.com/office/drawing/2010/main">
-                  <a:solidFill>
-                    <a:srgbClr val="FFFFFF"/>
-                  </a:solidFill>
-                </a14:hiddenFill>
-              </a:ext>
-            </a:extLst>
-          </p:spPr>
-        </p:pic>
-      </p:grpSp>
-      <p:grpSp>
-        <p:nvGrpSpPr>
-          <p:cNvPr id="6" name="Group 5">
-            <a:extLst>
-              <a:ext uri="{FF2B5EF4-FFF2-40B4-BE49-F238E27FC236}">
-                <a16:creationId xmlns:a16="http://schemas.microsoft.com/office/drawing/2014/main" id="{1D845641-42F5-D497-DD80-FBE72BE9A4F2}"/>
-              </a:ext>
-            </a:extLst>
-          </p:cNvPr>
-          <p:cNvGrpSpPr/>
-          <p:nvPr/>
-        </p:nvGrpSpPr>
-        <p:grpSpPr>
-          <a:xfrm>
-            <a:off x="6675565" y="3730406"/>
-            <a:ext cx="882536" cy="976400"/>
-            <a:chOff x="4441351" y="3925688"/>
-            <a:chExt cx="1326399" cy="1467471"/>
-          </a:xfrm>
-        </p:grpSpPr>
-        <p:pic>
-          <p:nvPicPr>
-            <p:cNvPr id="1030" name="Picture 6" descr="Wasp Vector Illustration Royalty Free SVG, Cliparts, Vectors, And Stock  Illustration. Image 71871205.">
-              <a:extLst>
-                <a:ext uri="{FF2B5EF4-FFF2-40B4-BE49-F238E27FC236}">
-                  <a16:creationId xmlns:a16="http://schemas.microsoft.com/office/drawing/2014/main" id="{B2E2DC90-4C2F-8C03-E789-24BA71A611BA}"/>
-                </a:ext>
-              </a:extLst>
-            </p:cNvPr>
-            <p:cNvPicPr>
-              <a:picLocks noChangeAspect="1" noChangeArrowheads="1"/>
-            </p:cNvPicPr>
-            <p:nvPr/>
-          </p:nvPicPr>
-          <p:blipFill>
-            <a:blip r:embed="rId14">
-              <a:extLst>
-                <a:ext uri="{28A0092B-C50C-407E-A947-70E740481C1C}">
-                  <a14:useLocalDpi xmlns:a14="http://schemas.microsoft.com/office/drawing/2010/main" val="0"/>
-                </a:ext>
-              </a:extLst>
-            </a:blip>
-            <a:srcRect/>
-            <a:stretch>
-              <a:fillRect/>
-            </a:stretch>
-          </p:blipFill>
-          <p:spPr bwMode="auto">
-            <a:xfrm>
-              <a:off x="4441351" y="4105019"/>
-              <a:ext cx="1238641" cy="1288140"/>
-            </a:xfrm>
-            <a:prstGeom prst="rect">
-              <a:avLst/>
-            </a:prstGeom>
-            <a:noFill/>
-            <a:extLst>
-              <a:ext uri="{909E8E84-426E-40DD-AFC4-6F175D3DCCD1}">
-                <a14:hiddenFill xmlns:a14="http://schemas.microsoft.com/office/drawing/2010/main">
-                  <a:solidFill>
-                    <a:srgbClr val="FFFFFF"/>
-                  </a:solidFill>
-                </a14:hiddenFill>
-              </a:ext>
-            </a:extLst>
-          </p:spPr>
-        </p:pic>
-        <p:pic>
-          <p:nvPicPr>
-            <p:cNvPr id="1036" name="Picture 12" descr="Ninja dart Images, Stock Photos &amp; Vectors | Shutterstock">
-              <a:extLst>
-                <a:ext uri="{FF2B5EF4-FFF2-40B4-BE49-F238E27FC236}">
-                  <a16:creationId xmlns:a16="http://schemas.microsoft.com/office/drawing/2014/main" id="{6CB2D1BA-B89E-F421-969F-56A0AC897A14}"/>
-                </a:ext>
-              </a:extLst>
-            </p:cNvPr>
-            <p:cNvPicPr>
-              <a:picLocks noChangeAspect="1" noChangeArrowheads="1"/>
-            </p:cNvPicPr>
-            <p:nvPr/>
-          </p:nvPicPr>
-          <p:blipFill rotWithShape="1">
-            <a:blip r:embed="rId15">
-              <a:extLst>
-                <a:ext uri="{28A0092B-C50C-407E-A947-70E740481C1C}">
-                  <a14:useLocalDpi xmlns:a14="http://schemas.microsoft.com/office/drawing/2010/main" val="0"/>
-                </a:ext>
-              </a:extLst>
-            </a:blip>
-            <a:srcRect l="21795" t="20882" r="20930" b="27689"/>
-            <a:stretch/>
-          </p:blipFill>
-          <p:spPr bwMode="auto">
-            <a:xfrm>
-              <a:off x="5052457" y="3925688"/>
-              <a:ext cx="447751" cy="432973"/>
-            </a:xfrm>
-            <a:prstGeom prst="rect">
-              <a:avLst/>
-            </a:prstGeom>
-            <a:noFill/>
-            <a:extLst>
-              <a:ext uri="{909E8E84-426E-40DD-AFC4-6F175D3DCCD1}">
-                <a14:hiddenFill xmlns:a14="http://schemas.microsoft.com/office/drawing/2010/main">
-                  <a:solidFill>
-                    <a:srgbClr val="FFFFFF"/>
-                  </a:solidFill>
-                </a14:hiddenFill>
-              </a:ext>
-            </a:extLst>
-          </p:spPr>
-        </p:pic>
-        <p:pic>
-          <p:nvPicPr>
-            <p:cNvPr id="144" name="Picture 12" descr="Ninja dart Images, Stock Photos &amp; Vectors | Shutterstock">
-              <a:extLst>
-                <a:ext uri="{FF2B5EF4-FFF2-40B4-BE49-F238E27FC236}">
-                  <a16:creationId xmlns:a16="http://schemas.microsoft.com/office/drawing/2014/main" id="{B3F339B1-4624-084E-5B5C-262A1C9A9AA2}"/>
-                </a:ext>
-              </a:extLst>
-            </p:cNvPr>
-            <p:cNvPicPr>
-              <a:picLocks noChangeAspect="1" noChangeArrowheads="1"/>
-            </p:cNvPicPr>
-            <p:nvPr/>
-          </p:nvPicPr>
-          <p:blipFill rotWithShape="1">
-            <a:blip r:embed="rId15">
-              <a:extLst>
-                <a:ext uri="{28A0092B-C50C-407E-A947-70E740481C1C}">
-                  <a14:useLocalDpi xmlns:a14="http://schemas.microsoft.com/office/drawing/2010/main" val="0"/>
-                </a:ext>
-              </a:extLst>
-            </a:blip>
-            <a:srcRect l="21795" t="20882" r="20930" b="27689"/>
-            <a:stretch/>
-          </p:blipFill>
-          <p:spPr bwMode="auto">
-            <a:xfrm>
-              <a:off x="5319999" y="4255917"/>
-              <a:ext cx="447751" cy="432973"/>
             </a:xfrm>
             <a:prstGeom prst="rect">
               <a:avLst/>
@@ -29156,6 +29175,1095 @@
             </a:effectRef>
             <a:fontRef idx="minor">
               <a:schemeClr val="dk1"/>
+            </a:fontRef>
+          </p:style>
+          <p:txBody>
+            <a:bodyPr rtlCol="0" anchor="ctr"/>
+            <a:lstStyle/>
+            <a:p>
+              <a:pPr algn="ctr"/>
+              <a:endParaRPr lang="en-US"/>
+            </a:p>
+          </p:txBody>
+        </p:sp>
+      </p:grpSp>
+      <p:grpSp>
+        <p:nvGrpSpPr>
+          <p:cNvPr id="7" name="Group 6">
+            <a:extLst>
+              <a:ext uri="{FF2B5EF4-FFF2-40B4-BE49-F238E27FC236}">
+                <a16:creationId xmlns:a16="http://schemas.microsoft.com/office/drawing/2014/main" id="{EAAA08AF-49E9-532D-06DD-E0AC18A30215}"/>
+              </a:ext>
+            </a:extLst>
+          </p:cNvPr>
+          <p:cNvGrpSpPr/>
+          <p:nvPr/>
+        </p:nvGrpSpPr>
+        <p:grpSpPr>
+          <a:xfrm>
+            <a:off x="9773710" y="2248932"/>
+            <a:ext cx="718107" cy="1009156"/>
+            <a:chOff x="4749318" y="4046015"/>
+            <a:chExt cx="718107" cy="1009156"/>
+          </a:xfrm>
+        </p:grpSpPr>
+        <p:pic>
+          <p:nvPicPr>
+            <p:cNvPr id="163" name="Picture 162">
+              <a:extLst>
+                <a:ext uri="{FF2B5EF4-FFF2-40B4-BE49-F238E27FC236}">
+                  <a16:creationId xmlns:a16="http://schemas.microsoft.com/office/drawing/2014/main" id="{F2E6589B-FD4F-D20F-4ED7-6CD011F3AEED}"/>
+                </a:ext>
+              </a:extLst>
+            </p:cNvPr>
+            <p:cNvPicPr>
+              <a:picLocks noChangeAspect="1"/>
+            </p:cNvPicPr>
+            <p:nvPr/>
+          </p:nvPicPr>
+          <p:blipFill>
+            <a:blip r:embed="rId13"/>
+            <a:stretch>
+              <a:fillRect/>
+            </a:stretch>
+          </p:blipFill>
+          <p:spPr>
+            <a:xfrm>
+              <a:off x="4912582" y="4046015"/>
+              <a:ext cx="554843" cy="508021"/>
+            </a:xfrm>
+            <a:prstGeom prst="rect">
+              <a:avLst/>
+            </a:prstGeom>
+          </p:spPr>
+        </p:pic>
+        <p:pic>
+          <p:nvPicPr>
+            <p:cNvPr id="158" name="Picture 4" descr="2,174 Hornet Vector Illustrations &amp; Clip Art - iStock">
+              <a:extLst>
+                <a:ext uri="{FF2B5EF4-FFF2-40B4-BE49-F238E27FC236}">
+                  <a16:creationId xmlns:a16="http://schemas.microsoft.com/office/drawing/2014/main" id="{CC8B72D1-F6D9-0D6A-160F-6747604DA249}"/>
+                </a:ext>
+              </a:extLst>
+            </p:cNvPr>
+            <p:cNvPicPr>
+              <a:picLocks noChangeAspect="1" noChangeArrowheads="1"/>
+            </p:cNvPicPr>
+            <p:nvPr/>
+          </p:nvPicPr>
+          <p:blipFill rotWithShape="1">
+            <a:blip r:embed="rId15">
+              <a:extLst>
+                <a:ext uri="{28A0092B-C50C-407E-A947-70E740481C1C}">
+                  <a14:useLocalDpi xmlns:a14="http://schemas.microsoft.com/office/drawing/2010/main" val="0"/>
+                </a:ext>
+              </a:extLst>
+            </a:blip>
+            <a:srcRect l="20806" t="14492" r="21220" b="15205"/>
+            <a:stretch/>
+          </p:blipFill>
+          <p:spPr bwMode="auto">
+            <a:xfrm>
+              <a:off x="4749318" y="4500457"/>
+              <a:ext cx="457426" cy="554714"/>
+            </a:xfrm>
+            <a:prstGeom prst="rect">
+              <a:avLst/>
+            </a:prstGeom>
+            <a:noFill/>
+            <a:extLst>
+              <a:ext uri="{909E8E84-426E-40DD-AFC4-6F175D3DCCD1}">
+                <a14:hiddenFill xmlns:a14="http://schemas.microsoft.com/office/drawing/2010/main">
+                  <a:solidFill>
+                    <a:srgbClr val="FFFFFF"/>
+                  </a:solidFill>
+                </a14:hiddenFill>
+              </a:ext>
+            </a:extLst>
+          </p:spPr>
+        </p:pic>
+      </p:grpSp>
+      <p:grpSp>
+        <p:nvGrpSpPr>
+          <p:cNvPr id="160" name="Group 159">
+            <a:extLst>
+              <a:ext uri="{FF2B5EF4-FFF2-40B4-BE49-F238E27FC236}">
+                <a16:creationId xmlns:a16="http://schemas.microsoft.com/office/drawing/2014/main" id="{B43878E5-98CF-4B37-B8F2-CDF8BD9D1855}"/>
+              </a:ext>
+            </a:extLst>
+          </p:cNvPr>
+          <p:cNvGrpSpPr/>
+          <p:nvPr/>
+        </p:nvGrpSpPr>
+        <p:grpSpPr>
+          <a:xfrm>
+            <a:off x="9400072" y="1989758"/>
+            <a:ext cx="1371600" cy="1371600"/>
+            <a:chOff x="213377" y="483633"/>
+            <a:chExt cx="1371600" cy="1371600"/>
+          </a:xfrm>
+        </p:grpSpPr>
+        <p:sp>
+          <p:nvSpPr>
+            <p:cNvPr id="161" name="Rectangle 160">
+              <a:extLst>
+                <a:ext uri="{FF2B5EF4-FFF2-40B4-BE49-F238E27FC236}">
+                  <a16:creationId xmlns:a16="http://schemas.microsoft.com/office/drawing/2014/main" id="{E0D51FF4-706D-F88A-6972-348AAEF50E36}"/>
+                </a:ext>
+              </a:extLst>
+            </p:cNvPr>
+            <p:cNvSpPr/>
+            <p:nvPr/>
+          </p:nvSpPr>
+          <p:spPr>
+            <a:xfrm>
+              <a:off x="213377" y="483633"/>
+              <a:ext cx="1371600" cy="1371600"/>
+            </a:xfrm>
+            <a:prstGeom prst="rect">
+              <a:avLst/>
+            </a:prstGeom>
+            <a:noFill/>
+            <a:ln w="76200">
+              <a:solidFill>
+                <a:schemeClr val="tx1"/>
+              </a:solidFill>
+            </a:ln>
+          </p:spPr>
+          <p:style>
+            <a:lnRef idx="2">
+              <a:schemeClr val="accent1">
+                <a:shade val="50000"/>
+              </a:schemeClr>
+            </a:lnRef>
+            <a:fillRef idx="1">
+              <a:schemeClr val="accent1"/>
+            </a:fillRef>
+            <a:effectRef idx="0">
+              <a:schemeClr val="accent1"/>
+            </a:effectRef>
+            <a:fontRef idx="minor">
+              <a:schemeClr val="lt1"/>
+            </a:fontRef>
+          </p:style>
+          <p:txBody>
+            <a:bodyPr rtlCol="0" anchor="ctr"/>
+            <a:lstStyle/>
+            <a:p>
+              <a:pPr algn="ctr"/>
+              <a:endParaRPr lang="en-US"/>
+            </a:p>
+          </p:txBody>
+        </p:sp>
+        <p:sp>
+          <p:nvSpPr>
+            <p:cNvPr id="162" name="Hexagon 161">
+              <a:extLst>
+                <a:ext uri="{FF2B5EF4-FFF2-40B4-BE49-F238E27FC236}">
+                  <a16:creationId xmlns:a16="http://schemas.microsoft.com/office/drawing/2014/main" id="{4CFE4FAE-EEF3-BC9D-0EC4-488B22A1B829}"/>
+                </a:ext>
+              </a:extLst>
+            </p:cNvPr>
+            <p:cNvSpPr/>
+            <p:nvPr/>
+          </p:nvSpPr>
+          <p:spPr>
+            <a:xfrm>
+              <a:off x="304817" y="699533"/>
+              <a:ext cx="1188720" cy="1097280"/>
+            </a:xfrm>
+            <a:prstGeom prst="hexagon">
+              <a:avLst/>
+            </a:prstGeom>
+            <a:noFill/>
+            <a:ln w="38100" cap="flat" cmpd="sng" algn="ctr">
+              <a:solidFill>
+                <a:schemeClr val="dk1"/>
+              </a:solidFill>
+              <a:prstDash val="solid"/>
+              <a:round/>
+              <a:headEnd type="none" w="med" len="med"/>
+              <a:tailEnd type="none" w="med" len="med"/>
+            </a:ln>
+          </p:spPr>
+          <p:style>
+            <a:lnRef idx="0">
+              <a:scrgbClr r="0" g="0" b="0"/>
+            </a:lnRef>
+            <a:fillRef idx="0">
+              <a:scrgbClr r="0" g="0" b="0"/>
+            </a:fillRef>
+            <a:effectRef idx="0">
+              <a:scrgbClr r="0" g="0" b="0"/>
+            </a:effectRef>
+            <a:fontRef idx="minor">
+              <a:schemeClr val="dk1"/>
+            </a:fontRef>
+          </p:style>
+          <p:txBody>
+            <a:bodyPr rtlCol="0" anchor="ctr"/>
+            <a:lstStyle/>
+            <a:p>
+              <a:pPr algn="ctr"/>
+              <a:endParaRPr lang="en-US"/>
+            </a:p>
+          </p:txBody>
+        </p:sp>
+      </p:grpSp>
+      <p:grpSp>
+        <p:nvGrpSpPr>
+          <p:cNvPr id="169" name="Group 168">
+            <a:extLst>
+              <a:ext uri="{FF2B5EF4-FFF2-40B4-BE49-F238E27FC236}">
+                <a16:creationId xmlns:a16="http://schemas.microsoft.com/office/drawing/2014/main" id="{8C792F6F-2794-BC9E-E550-6B4CFAD5CAE2}"/>
+              </a:ext>
+            </a:extLst>
+          </p:cNvPr>
+          <p:cNvGrpSpPr/>
+          <p:nvPr/>
+        </p:nvGrpSpPr>
+        <p:grpSpPr>
+          <a:xfrm>
+            <a:off x="4815085" y="1981700"/>
+            <a:ext cx="1371600" cy="1371600"/>
+            <a:chOff x="213377" y="483633"/>
+            <a:chExt cx="1371600" cy="1371600"/>
+          </a:xfrm>
+        </p:grpSpPr>
+        <p:sp>
+          <p:nvSpPr>
+            <p:cNvPr id="170" name="Rectangle 169">
+              <a:extLst>
+                <a:ext uri="{FF2B5EF4-FFF2-40B4-BE49-F238E27FC236}">
+                  <a16:creationId xmlns:a16="http://schemas.microsoft.com/office/drawing/2014/main" id="{0BB65367-9733-0F8A-66A3-02C8A0992CF3}"/>
+                </a:ext>
+              </a:extLst>
+            </p:cNvPr>
+            <p:cNvSpPr/>
+            <p:nvPr/>
+          </p:nvSpPr>
+          <p:spPr>
+            <a:xfrm>
+              <a:off x="213377" y="483633"/>
+              <a:ext cx="1371600" cy="1371600"/>
+            </a:xfrm>
+            <a:prstGeom prst="rect">
+              <a:avLst/>
+            </a:prstGeom>
+            <a:noFill/>
+            <a:ln w="76200">
+              <a:solidFill>
+                <a:schemeClr val="tx1"/>
+              </a:solidFill>
+            </a:ln>
+          </p:spPr>
+          <p:style>
+            <a:lnRef idx="2">
+              <a:schemeClr val="accent1">
+                <a:shade val="50000"/>
+              </a:schemeClr>
+            </a:lnRef>
+            <a:fillRef idx="1">
+              <a:schemeClr val="accent1"/>
+            </a:fillRef>
+            <a:effectRef idx="0">
+              <a:schemeClr val="accent1"/>
+            </a:effectRef>
+            <a:fontRef idx="minor">
+              <a:schemeClr val="lt1"/>
+            </a:fontRef>
+          </p:style>
+          <p:txBody>
+            <a:bodyPr rtlCol="0" anchor="ctr"/>
+            <a:lstStyle/>
+            <a:p>
+              <a:pPr algn="ctr"/>
+              <a:endParaRPr lang="en-US"/>
+            </a:p>
+          </p:txBody>
+        </p:sp>
+        <p:sp>
+          <p:nvSpPr>
+            <p:cNvPr id="171" name="Hexagon 170">
+              <a:extLst>
+                <a:ext uri="{FF2B5EF4-FFF2-40B4-BE49-F238E27FC236}">
+                  <a16:creationId xmlns:a16="http://schemas.microsoft.com/office/drawing/2014/main" id="{276D7142-C4FF-0C0B-DF5A-A289805CC05A}"/>
+                </a:ext>
+              </a:extLst>
+            </p:cNvPr>
+            <p:cNvSpPr/>
+            <p:nvPr/>
+          </p:nvSpPr>
+          <p:spPr>
+            <a:xfrm>
+              <a:off x="304817" y="699533"/>
+              <a:ext cx="1188720" cy="1097280"/>
+            </a:xfrm>
+            <a:prstGeom prst="hexagon">
+              <a:avLst/>
+            </a:prstGeom>
+            <a:noFill/>
+            <a:ln w="38100" cap="flat" cmpd="sng" algn="ctr">
+              <a:solidFill>
+                <a:schemeClr val="dk1"/>
+              </a:solidFill>
+              <a:prstDash val="solid"/>
+              <a:round/>
+              <a:headEnd type="none" w="med" len="med"/>
+              <a:tailEnd type="none" w="med" len="med"/>
+            </a:ln>
+          </p:spPr>
+          <p:style>
+            <a:lnRef idx="0">
+              <a:scrgbClr r="0" g="0" b="0"/>
+            </a:lnRef>
+            <a:fillRef idx="0">
+              <a:scrgbClr r="0" g="0" b="0"/>
+            </a:fillRef>
+            <a:effectRef idx="0">
+              <a:scrgbClr r="0" g="0" b="0"/>
+            </a:effectRef>
+            <a:fontRef idx="minor">
+              <a:schemeClr val="dk1"/>
+            </a:fontRef>
+          </p:style>
+          <p:txBody>
+            <a:bodyPr rtlCol="0" anchor="ctr"/>
+            <a:lstStyle/>
+            <a:p>
+              <a:pPr algn="ctr"/>
+              <a:endParaRPr lang="en-US"/>
+            </a:p>
+          </p:txBody>
+        </p:sp>
+      </p:grpSp>
+      <p:grpSp>
+        <p:nvGrpSpPr>
+          <p:cNvPr id="48" name="Group 47">
+            <a:extLst>
+              <a:ext uri="{FF2B5EF4-FFF2-40B4-BE49-F238E27FC236}">
+                <a16:creationId xmlns:a16="http://schemas.microsoft.com/office/drawing/2014/main" id="{2554C6E6-CCBB-5FC2-E67D-1BB567678D8A}"/>
+              </a:ext>
+            </a:extLst>
+          </p:cNvPr>
+          <p:cNvGrpSpPr/>
+          <p:nvPr/>
+        </p:nvGrpSpPr>
+        <p:grpSpPr>
+          <a:xfrm>
+            <a:off x="5217087" y="2364783"/>
+            <a:ext cx="620585" cy="764796"/>
+            <a:chOff x="4499391" y="4049383"/>
+            <a:chExt cx="620585" cy="764796"/>
+          </a:xfrm>
+        </p:grpSpPr>
+        <p:pic>
+          <p:nvPicPr>
+            <p:cNvPr id="165" name="Picture 164">
+              <a:extLst>
+                <a:ext uri="{FF2B5EF4-FFF2-40B4-BE49-F238E27FC236}">
+                  <a16:creationId xmlns:a16="http://schemas.microsoft.com/office/drawing/2014/main" id="{830EEBDB-A77D-90B4-6B8D-BE102247A273}"/>
+                </a:ext>
+              </a:extLst>
+            </p:cNvPr>
+            <p:cNvPicPr>
+              <a:picLocks noChangeAspect="1"/>
+            </p:cNvPicPr>
+            <p:nvPr/>
+          </p:nvPicPr>
+          <p:blipFill rotWithShape="1">
+            <a:blip r:embed="rId11"/>
+            <a:srcRect b="61242"/>
+            <a:stretch/>
+          </p:blipFill>
+          <p:spPr>
+            <a:xfrm>
+              <a:off x="4499391" y="4554822"/>
+              <a:ext cx="620585" cy="259357"/>
+            </a:xfrm>
+            <a:prstGeom prst="rect">
+              <a:avLst/>
+            </a:prstGeom>
+          </p:spPr>
+        </p:pic>
+        <p:cxnSp>
+          <p:nvCxnSpPr>
+            <p:cNvPr id="41" name="Straight Connector 40">
+              <a:extLst>
+                <a:ext uri="{FF2B5EF4-FFF2-40B4-BE49-F238E27FC236}">
+                  <a16:creationId xmlns:a16="http://schemas.microsoft.com/office/drawing/2014/main" id="{0085D065-2E80-77ED-5A99-8C01BA06CF01}"/>
+                </a:ext>
+              </a:extLst>
+            </p:cNvPr>
+            <p:cNvCxnSpPr/>
+            <p:nvPr/>
+          </p:nvCxnSpPr>
+          <p:spPr>
+            <a:xfrm>
+              <a:off x="4515303" y="4499465"/>
+              <a:ext cx="559445" cy="0"/>
+            </a:xfrm>
+            <a:prstGeom prst="line">
+              <a:avLst/>
+            </a:prstGeom>
+            <a:ln w="57150"/>
+          </p:spPr>
+          <p:style>
+            <a:lnRef idx="1">
+              <a:schemeClr val="dk1"/>
+            </a:lnRef>
+            <a:fillRef idx="0">
+              <a:schemeClr val="dk1"/>
+            </a:fillRef>
+            <a:effectRef idx="0">
+              <a:schemeClr val="dk1"/>
+            </a:effectRef>
+            <a:fontRef idx="minor">
+              <a:schemeClr val="tx1"/>
+            </a:fontRef>
+          </p:style>
+        </p:cxnSp>
+        <p:grpSp>
+          <p:nvGrpSpPr>
+            <p:cNvPr id="47" name="Group 46">
+              <a:extLst>
+                <a:ext uri="{FF2B5EF4-FFF2-40B4-BE49-F238E27FC236}">
+                  <a16:creationId xmlns:a16="http://schemas.microsoft.com/office/drawing/2014/main" id="{60527379-96D2-CE28-4F86-0340B8C35EB3}"/>
+                </a:ext>
+              </a:extLst>
+            </p:cNvPr>
+            <p:cNvGrpSpPr/>
+            <p:nvPr/>
+          </p:nvGrpSpPr>
+          <p:grpSpPr>
+            <a:xfrm>
+              <a:off x="4570381" y="4049383"/>
+              <a:ext cx="470893" cy="413068"/>
+              <a:chOff x="4444742" y="3810843"/>
+              <a:chExt cx="470893" cy="413068"/>
+            </a:xfrm>
+          </p:grpSpPr>
+          <p:sp>
+            <p:nvSpPr>
+              <p:cNvPr id="166" name="Oval 165">
+                <a:extLst>
+                  <a:ext uri="{FF2B5EF4-FFF2-40B4-BE49-F238E27FC236}">
+                    <a16:creationId xmlns:a16="http://schemas.microsoft.com/office/drawing/2014/main" id="{76A9F0CE-ECE4-F39B-CB99-0B9E8F459E86}"/>
+                  </a:ext>
+                </a:extLst>
+              </p:cNvPr>
+              <p:cNvSpPr/>
+              <p:nvPr/>
+            </p:nvSpPr>
+            <p:spPr>
+              <a:xfrm>
+                <a:off x="4523150" y="3945507"/>
+                <a:ext cx="141122" cy="141122"/>
+              </a:xfrm>
+              <a:prstGeom prst="ellipse">
+                <a:avLst/>
+              </a:prstGeom>
+            </p:spPr>
+            <p:style>
+              <a:lnRef idx="2">
+                <a:schemeClr val="dk1">
+                  <a:shade val="50000"/>
+                </a:schemeClr>
+              </a:lnRef>
+              <a:fillRef idx="1">
+                <a:schemeClr val="dk1"/>
+              </a:fillRef>
+              <a:effectRef idx="0">
+                <a:schemeClr val="dk1"/>
+              </a:effectRef>
+              <a:fontRef idx="minor">
+                <a:schemeClr val="lt1"/>
+              </a:fontRef>
+            </p:style>
+            <p:txBody>
+              <a:bodyPr rtlCol="0" anchor="ctr"/>
+              <a:lstStyle/>
+              <a:p>
+                <a:pPr algn="ctr"/>
+                <a:endParaRPr lang="en-US"/>
+              </a:p>
+            </p:txBody>
+          </p:sp>
+          <p:sp>
+            <p:nvSpPr>
+              <p:cNvPr id="167" name="Oval 166">
+                <a:extLst>
+                  <a:ext uri="{FF2B5EF4-FFF2-40B4-BE49-F238E27FC236}">
+                    <a16:creationId xmlns:a16="http://schemas.microsoft.com/office/drawing/2014/main" id="{673F00E2-71D1-FE6F-6D45-A0AD4B85C29D}"/>
+                  </a:ext>
+                </a:extLst>
+              </p:cNvPr>
+              <p:cNvSpPr/>
+              <p:nvPr/>
+            </p:nvSpPr>
+            <p:spPr>
+              <a:xfrm>
+                <a:off x="4444742" y="4078949"/>
+                <a:ext cx="141122" cy="141122"/>
+              </a:xfrm>
+              <a:prstGeom prst="ellipse">
+                <a:avLst/>
+              </a:prstGeom>
+            </p:spPr>
+            <p:style>
+              <a:lnRef idx="2">
+                <a:schemeClr val="dk1">
+                  <a:shade val="50000"/>
+                </a:schemeClr>
+              </a:lnRef>
+              <a:fillRef idx="1">
+                <a:schemeClr val="dk1"/>
+              </a:fillRef>
+              <a:effectRef idx="0">
+                <a:schemeClr val="dk1"/>
+              </a:effectRef>
+              <a:fontRef idx="minor">
+                <a:schemeClr val="lt1"/>
+              </a:fontRef>
+            </p:style>
+            <p:txBody>
+              <a:bodyPr rtlCol="0" anchor="ctr"/>
+              <a:lstStyle/>
+              <a:p>
+                <a:pPr algn="ctr"/>
+                <a:endParaRPr lang="en-US"/>
+              </a:p>
+            </p:txBody>
+          </p:sp>
+          <p:sp>
+            <p:nvSpPr>
+              <p:cNvPr id="168" name="Oval 167">
+                <a:extLst>
+                  <a:ext uri="{FF2B5EF4-FFF2-40B4-BE49-F238E27FC236}">
+                    <a16:creationId xmlns:a16="http://schemas.microsoft.com/office/drawing/2014/main" id="{D78CAD1E-7669-F911-158A-AF8FE32C59D6}"/>
+                  </a:ext>
+                </a:extLst>
+              </p:cNvPr>
+              <p:cNvSpPr/>
+              <p:nvPr/>
+            </p:nvSpPr>
+            <p:spPr>
+              <a:xfrm>
+                <a:off x="4601558" y="4082789"/>
+                <a:ext cx="141122" cy="141122"/>
+              </a:xfrm>
+              <a:prstGeom prst="ellipse">
+                <a:avLst/>
+              </a:prstGeom>
+            </p:spPr>
+            <p:style>
+              <a:lnRef idx="2">
+                <a:schemeClr val="dk1">
+                  <a:shade val="50000"/>
+                </a:schemeClr>
+              </a:lnRef>
+              <a:fillRef idx="1">
+                <a:schemeClr val="dk1"/>
+              </a:fillRef>
+              <a:effectRef idx="0">
+                <a:schemeClr val="dk1"/>
+              </a:effectRef>
+              <a:fontRef idx="minor">
+                <a:schemeClr val="lt1"/>
+              </a:fontRef>
+            </p:style>
+            <p:txBody>
+              <a:bodyPr rtlCol="0" anchor="ctr"/>
+              <a:lstStyle/>
+              <a:p>
+                <a:pPr algn="ctr"/>
+                <a:endParaRPr lang="en-US"/>
+              </a:p>
+            </p:txBody>
+          </p:sp>
+          <p:sp>
+            <p:nvSpPr>
+              <p:cNvPr id="172" name="Oval 171">
+                <a:extLst>
+                  <a:ext uri="{FF2B5EF4-FFF2-40B4-BE49-F238E27FC236}">
+                    <a16:creationId xmlns:a16="http://schemas.microsoft.com/office/drawing/2014/main" id="{5EE8A70B-81C2-2328-84D2-2919FC209D49}"/>
+                  </a:ext>
+                </a:extLst>
+              </p:cNvPr>
+              <p:cNvSpPr/>
+              <p:nvPr/>
+            </p:nvSpPr>
+            <p:spPr>
+              <a:xfrm>
+                <a:off x="4606756" y="3810843"/>
+                <a:ext cx="141122" cy="141122"/>
+              </a:xfrm>
+              <a:prstGeom prst="ellipse">
+                <a:avLst/>
+              </a:prstGeom>
+            </p:spPr>
+            <p:style>
+              <a:lnRef idx="2">
+                <a:schemeClr val="dk1">
+                  <a:shade val="50000"/>
+                </a:schemeClr>
+              </a:lnRef>
+              <a:fillRef idx="1">
+                <a:schemeClr val="dk1"/>
+              </a:fillRef>
+              <a:effectRef idx="0">
+                <a:schemeClr val="dk1"/>
+              </a:effectRef>
+              <a:fontRef idx="minor">
+                <a:schemeClr val="lt1"/>
+              </a:fontRef>
+            </p:style>
+            <p:txBody>
+              <a:bodyPr rtlCol="0" anchor="ctr"/>
+              <a:lstStyle/>
+              <a:p>
+                <a:pPr algn="ctr"/>
+                <a:endParaRPr lang="en-US"/>
+              </a:p>
+            </p:txBody>
+          </p:sp>
+          <p:sp>
+            <p:nvSpPr>
+              <p:cNvPr id="173" name="Oval 172">
+                <a:extLst>
+                  <a:ext uri="{FF2B5EF4-FFF2-40B4-BE49-F238E27FC236}">
+                    <a16:creationId xmlns:a16="http://schemas.microsoft.com/office/drawing/2014/main" id="{99B8CE09-2B9B-140C-F8D6-B863359BA236}"/>
+                  </a:ext>
+                </a:extLst>
+              </p:cNvPr>
+              <p:cNvSpPr/>
+              <p:nvPr/>
+            </p:nvSpPr>
+            <p:spPr>
+              <a:xfrm>
+                <a:off x="4774513" y="4078949"/>
+                <a:ext cx="141122" cy="141122"/>
+              </a:xfrm>
+              <a:prstGeom prst="ellipse">
+                <a:avLst/>
+              </a:prstGeom>
+            </p:spPr>
+            <p:style>
+              <a:lnRef idx="2">
+                <a:schemeClr val="dk1">
+                  <a:shade val="50000"/>
+                </a:schemeClr>
+              </a:lnRef>
+              <a:fillRef idx="1">
+                <a:schemeClr val="dk1"/>
+              </a:fillRef>
+              <a:effectRef idx="0">
+                <a:schemeClr val="dk1"/>
+              </a:effectRef>
+              <a:fontRef idx="minor">
+                <a:schemeClr val="lt1"/>
+              </a:fontRef>
+            </p:style>
+            <p:txBody>
+              <a:bodyPr rtlCol="0" anchor="ctr"/>
+              <a:lstStyle/>
+              <a:p>
+                <a:pPr algn="ctr"/>
+                <a:endParaRPr lang="en-US"/>
+              </a:p>
+            </p:txBody>
+          </p:sp>
+          <p:sp>
+            <p:nvSpPr>
+              <p:cNvPr id="174" name="Oval 173">
+                <a:extLst>
+                  <a:ext uri="{FF2B5EF4-FFF2-40B4-BE49-F238E27FC236}">
+                    <a16:creationId xmlns:a16="http://schemas.microsoft.com/office/drawing/2014/main" id="{880454FD-5D8A-665B-296E-11CF9BA7C82B}"/>
+                  </a:ext>
+                </a:extLst>
+              </p:cNvPr>
+              <p:cNvSpPr/>
+              <p:nvPr/>
+            </p:nvSpPr>
+            <p:spPr>
+              <a:xfrm>
+                <a:off x="4691529" y="3936760"/>
+                <a:ext cx="141122" cy="141122"/>
+              </a:xfrm>
+              <a:prstGeom prst="ellipse">
+                <a:avLst/>
+              </a:prstGeom>
+            </p:spPr>
+            <p:style>
+              <a:lnRef idx="2">
+                <a:schemeClr val="dk1">
+                  <a:shade val="50000"/>
+                </a:schemeClr>
+              </a:lnRef>
+              <a:fillRef idx="1">
+                <a:schemeClr val="dk1"/>
+              </a:fillRef>
+              <a:effectRef idx="0">
+                <a:schemeClr val="dk1"/>
+              </a:effectRef>
+              <a:fontRef idx="minor">
+                <a:schemeClr val="lt1"/>
+              </a:fontRef>
+            </p:style>
+            <p:txBody>
+              <a:bodyPr rtlCol="0" anchor="ctr"/>
+              <a:lstStyle/>
+              <a:p>
+                <a:pPr algn="ctr"/>
+                <a:endParaRPr lang="en-US"/>
+              </a:p>
+            </p:txBody>
+          </p:sp>
+        </p:grpSp>
+      </p:grpSp>
+      <p:grpSp>
+        <p:nvGrpSpPr>
+          <p:cNvPr id="175" name="Group 174">
+            <a:extLst>
+              <a:ext uri="{FF2B5EF4-FFF2-40B4-BE49-F238E27FC236}">
+                <a16:creationId xmlns:a16="http://schemas.microsoft.com/office/drawing/2014/main" id="{8FAF9396-85AE-3734-56E8-B32BC8C2727D}"/>
+              </a:ext>
+            </a:extLst>
+          </p:cNvPr>
+          <p:cNvGrpSpPr/>
+          <p:nvPr/>
+        </p:nvGrpSpPr>
+        <p:grpSpPr>
+          <a:xfrm>
+            <a:off x="5110830" y="3967502"/>
+            <a:ext cx="839398" cy="777453"/>
+            <a:chOff x="4849013" y="3586270"/>
+            <a:chExt cx="2288278" cy="2119411"/>
+          </a:xfrm>
+        </p:grpSpPr>
+        <p:pic>
+          <p:nvPicPr>
+            <p:cNvPr id="176" name="Picture 4" descr="2,174 Hornet Vector Illustrations &amp; Clip Art - iStock">
+              <a:extLst>
+                <a:ext uri="{FF2B5EF4-FFF2-40B4-BE49-F238E27FC236}">
+                  <a16:creationId xmlns:a16="http://schemas.microsoft.com/office/drawing/2014/main" id="{0D55E502-6B3E-16A2-CDB5-58735A9EFF86}"/>
+                </a:ext>
+              </a:extLst>
+            </p:cNvPr>
+            <p:cNvPicPr>
+              <a:picLocks noChangeAspect="1" noChangeArrowheads="1"/>
+            </p:cNvPicPr>
+            <p:nvPr/>
+          </p:nvPicPr>
+          <p:blipFill rotWithShape="1">
+            <a:blip r:embed="rId15">
+              <a:extLst>
+                <a:ext uri="{28A0092B-C50C-407E-A947-70E740481C1C}">
+                  <a14:useLocalDpi xmlns:a14="http://schemas.microsoft.com/office/drawing/2010/main" val="0"/>
+                </a:ext>
+              </a:extLst>
+            </a:blip>
+            <a:srcRect l="20806" t="14492" r="21220" b="15205"/>
+            <a:stretch/>
+          </p:blipFill>
+          <p:spPr bwMode="auto">
+            <a:xfrm>
+              <a:off x="5890304" y="4193477"/>
+              <a:ext cx="1246987" cy="1512204"/>
+            </a:xfrm>
+            <a:prstGeom prst="rect">
+              <a:avLst/>
+            </a:prstGeom>
+            <a:noFill/>
+            <a:extLst>
+              <a:ext uri="{909E8E84-426E-40DD-AFC4-6F175D3DCCD1}">
+                <a14:hiddenFill xmlns:a14="http://schemas.microsoft.com/office/drawing/2010/main">
+                  <a:solidFill>
+                    <a:srgbClr val="FFFFFF"/>
+                  </a:solidFill>
+                </a14:hiddenFill>
+              </a:ext>
+            </a:extLst>
+          </p:spPr>
+        </p:pic>
+        <p:pic>
+          <p:nvPicPr>
+            <p:cNvPr id="177" name="Picture 4" descr="2,174 Hornet Vector Illustrations &amp; Clip Art - iStock">
+              <a:extLst>
+                <a:ext uri="{FF2B5EF4-FFF2-40B4-BE49-F238E27FC236}">
+                  <a16:creationId xmlns:a16="http://schemas.microsoft.com/office/drawing/2014/main" id="{1F39564A-F17A-4B9B-C007-4BC1A72F69E0}"/>
+                </a:ext>
+              </a:extLst>
+            </p:cNvPr>
+            <p:cNvPicPr>
+              <a:picLocks noChangeAspect="1" noChangeArrowheads="1"/>
+            </p:cNvPicPr>
+            <p:nvPr/>
+          </p:nvPicPr>
+          <p:blipFill rotWithShape="1">
+            <a:blip r:embed="rId15">
+              <a:extLst>
+                <a:ext uri="{28A0092B-C50C-407E-A947-70E740481C1C}">
+                  <a14:useLocalDpi xmlns:a14="http://schemas.microsoft.com/office/drawing/2010/main" val="0"/>
+                </a:ext>
+              </a:extLst>
+            </a:blip>
+            <a:srcRect l="20806" t="14492" r="21220" b="15205"/>
+            <a:stretch/>
+          </p:blipFill>
+          <p:spPr bwMode="auto">
+            <a:xfrm>
+              <a:off x="4849013" y="3586270"/>
+              <a:ext cx="1246987" cy="1512204"/>
+            </a:xfrm>
+            <a:prstGeom prst="rect">
+              <a:avLst/>
+            </a:prstGeom>
+            <a:noFill/>
+            <a:extLst>
+              <a:ext uri="{909E8E84-426E-40DD-AFC4-6F175D3DCCD1}">
+                <a14:hiddenFill xmlns:a14="http://schemas.microsoft.com/office/drawing/2010/main">
+                  <a:solidFill>
+                    <a:srgbClr val="FFFFFF"/>
+                  </a:solidFill>
+                </a14:hiddenFill>
+              </a:ext>
+            </a:extLst>
+          </p:spPr>
+        </p:pic>
+      </p:grpSp>
+      <p:grpSp>
+        <p:nvGrpSpPr>
+          <p:cNvPr id="178" name="Group 177">
+            <a:extLst>
+              <a:ext uri="{FF2B5EF4-FFF2-40B4-BE49-F238E27FC236}">
+                <a16:creationId xmlns:a16="http://schemas.microsoft.com/office/drawing/2014/main" id="{8928B253-53AD-5D9F-7735-3F8C87B3587B}"/>
+              </a:ext>
+            </a:extLst>
+          </p:cNvPr>
+          <p:cNvGrpSpPr/>
+          <p:nvPr/>
+        </p:nvGrpSpPr>
+        <p:grpSpPr>
+          <a:xfrm>
+            <a:off x="4849594" y="3484353"/>
+            <a:ext cx="1371600" cy="1371600"/>
+            <a:chOff x="213377" y="483633"/>
+            <a:chExt cx="1371600" cy="1371600"/>
+          </a:xfrm>
+        </p:grpSpPr>
+        <p:sp>
+          <p:nvSpPr>
+            <p:cNvPr id="179" name="Rectangle 178">
+              <a:extLst>
+                <a:ext uri="{FF2B5EF4-FFF2-40B4-BE49-F238E27FC236}">
+                  <a16:creationId xmlns:a16="http://schemas.microsoft.com/office/drawing/2014/main" id="{A34DDA84-63BE-0D8E-69B4-71642FD92D2E}"/>
+                </a:ext>
+              </a:extLst>
+            </p:cNvPr>
+            <p:cNvSpPr/>
+            <p:nvPr/>
+          </p:nvSpPr>
+          <p:spPr>
+            <a:xfrm>
+              <a:off x="213377" y="483633"/>
+              <a:ext cx="1371600" cy="1371600"/>
+            </a:xfrm>
+            <a:prstGeom prst="rect">
+              <a:avLst/>
+            </a:prstGeom>
+            <a:noFill/>
+            <a:ln w="76200">
+              <a:solidFill>
+                <a:schemeClr val="tx1"/>
+              </a:solidFill>
+            </a:ln>
+          </p:spPr>
+          <p:style>
+            <a:lnRef idx="2">
+              <a:schemeClr val="accent1">
+                <a:shade val="50000"/>
+              </a:schemeClr>
+            </a:lnRef>
+            <a:fillRef idx="1">
+              <a:schemeClr val="accent1"/>
+            </a:fillRef>
+            <a:effectRef idx="0">
+              <a:schemeClr val="accent1"/>
+            </a:effectRef>
+            <a:fontRef idx="minor">
+              <a:schemeClr val="lt1"/>
+            </a:fontRef>
+          </p:style>
+          <p:txBody>
+            <a:bodyPr rtlCol="0" anchor="ctr"/>
+            <a:lstStyle/>
+            <a:p>
+              <a:pPr algn="ctr"/>
+              <a:endParaRPr lang="en-US"/>
+            </a:p>
+          </p:txBody>
+        </p:sp>
+        <p:sp>
+          <p:nvSpPr>
+            <p:cNvPr id="180" name="Hexagon 179">
+              <a:extLst>
+                <a:ext uri="{FF2B5EF4-FFF2-40B4-BE49-F238E27FC236}">
+                  <a16:creationId xmlns:a16="http://schemas.microsoft.com/office/drawing/2014/main" id="{62557BC6-AF99-6B88-0163-8ECE0B286E19}"/>
+                </a:ext>
+              </a:extLst>
+            </p:cNvPr>
+            <p:cNvSpPr/>
+            <p:nvPr/>
+          </p:nvSpPr>
+          <p:spPr>
+            <a:xfrm>
+              <a:off x="304817" y="699533"/>
+              <a:ext cx="1188720" cy="1097280"/>
+            </a:xfrm>
+            <a:prstGeom prst="hexagon">
+              <a:avLst/>
+            </a:prstGeom>
+            <a:noFill/>
+            <a:ln w="38100" cap="flat" cmpd="sng" algn="ctr">
+              <a:solidFill>
+                <a:schemeClr val="dk1"/>
+              </a:solidFill>
+              <a:prstDash val="solid"/>
+              <a:round/>
+              <a:headEnd type="none" w="med" len="med"/>
+              <a:tailEnd type="none" w="med" len="med"/>
+            </a:ln>
+          </p:spPr>
+          <p:style>
+            <a:lnRef idx="0">
+              <a:scrgbClr r="0" g="0" b="0"/>
+            </a:lnRef>
+            <a:fillRef idx="0">
+              <a:scrgbClr r="0" g="0" b="0"/>
+            </a:fillRef>
+            <a:effectRef idx="0">
+              <a:scrgbClr r="0" g="0" b="0"/>
+            </a:effectRef>
+            <a:fontRef idx="minor">
+              <a:schemeClr val="dk1"/>
+            </a:fontRef>
+          </p:style>
+          <p:txBody>
+            <a:bodyPr rtlCol="0" anchor="ctr"/>
+            <a:lstStyle/>
+            <a:p>
+              <a:pPr algn="ctr"/>
+              <a:endParaRPr lang="en-US"/>
+            </a:p>
+          </p:txBody>
+        </p:sp>
+      </p:grpSp>
+      <p:grpSp>
+        <p:nvGrpSpPr>
+          <p:cNvPr id="50" name="Group 49">
+            <a:extLst>
+              <a:ext uri="{FF2B5EF4-FFF2-40B4-BE49-F238E27FC236}">
+                <a16:creationId xmlns:a16="http://schemas.microsoft.com/office/drawing/2014/main" id="{7EEB4497-93D6-00CC-5D21-783C7500EAA7}"/>
+              </a:ext>
+            </a:extLst>
+          </p:cNvPr>
+          <p:cNvGrpSpPr/>
+          <p:nvPr/>
+        </p:nvGrpSpPr>
+        <p:grpSpPr>
+          <a:xfrm>
+            <a:off x="5530253" y="3739395"/>
+            <a:ext cx="342792" cy="439439"/>
+            <a:chOff x="3657470" y="3702031"/>
+            <a:chExt cx="342792" cy="439439"/>
+          </a:xfrm>
+        </p:grpSpPr>
+        <p:sp>
+          <p:nvSpPr>
+            <p:cNvPr id="49" name="Cross 48">
+              <a:extLst>
+                <a:ext uri="{FF2B5EF4-FFF2-40B4-BE49-F238E27FC236}">
+                  <a16:creationId xmlns:a16="http://schemas.microsoft.com/office/drawing/2014/main" id="{4F947AA7-FE15-CA7E-6678-7EE237843B8E}"/>
+                </a:ext>
+              </a:extLst>
+            </p:cNvPr>
+            <p:cNvSpPr/>
+            <p:nvPr/>
+          </p:nvSpPr>
+          <p:spPr>
+            <a:xfrm>
+              <a:off x="3657470" y="3867150"/>
+              <a:ext cx="274320" cy="274320"/>
+            </a:xfrm>
+            <a:prstGeom prst="plus">
+              <a:avLst>
+                <a:gd name="adj" fmla="val 38889"/>
+              </a:avLst>
+            </a:prstGeom>
+          </p:spPr>
+          <p:style>
+            <a:lnRef idx="2">
+              <a:schemeClr val="dk1">
+                <a:shade val="50000"/>
+              </a:schemeClr>
+            </a:lnRef>
+            <a:fillRef idx="1">
+              <a:schemeClr val="dk1"/>
+            </a:fillRef>
+            <a:effectRef idx="0">
+              <a:schemeClr val="dk1"/>
+            </a:effectRef>
+            <a:fontRef idx="minor">
+              <a:schemeClr val="lt1"/>
+            </a:fontRef>
+          </p:style>
+          <p:txBody>
+            <a:bodyPr rtlCol="0" anchor="ctr"/>
+            <a:lstStyle/>
+            <a:p>
+              <a:pPr algn="ctr"/>
+              <a:endParaRPr lang="en-US"/>
+            </a:p>
+          </p:txBody>
+        </p:sp>
+        <p:sp>
+          <p:nvSpPr>
+            <p:cNvPr id="181" name="Cross 180">
+              <a:extLst>
+                <a:ext uri="{FF2B5EF4-FFF2-40B4-BE49-F238E27FC236}">
+                  <a16:creationId xmlns:a16="http://schemas.microsoft.com/office/drawing/2014/main" id="{105937BB-CFA8-0C83-431B-AF9FAA8B4A9C}"/>
+                </a:ext>
+              </a:extLst>
+            </p:cNvPr>
+            <p:cNvSpPr/>
+            <p:nvPr/>
+          </p:nvSpPr>
+          <p:spPr>
+            <a:xfrm>
+              <a:off x="3808015" y="3702031"/>
+              <a:ext cx="192247" cy="192247"/>
+            </a:xfrm>
+            <a:prstGeom prst="plus">
+              <a:avLst>
+                <a:gd name="adj" fmla="val 38889"/>
+              </a:avLst>
+            </a:prstGeom>
+          </p:spPr>
+          <p:style>
+            <a:lnRef idx="2">
+              <a:schemeClr val="dk1">
+                <a:shade val="50000"/>
+              </a:schemeClr>
+            </a:lnRef>
+            <a:fillRef idx="1">
+              <a:schemeClr val="dk1"/>
+            </a:fillRef>
+            <a:effectRef idx="0">
+              <a:schemeClr val="dk1"/>
+            </a:effectRef>
+            <a:fontRef idx="minor">
+              <a:schemeClr val="lt1"/>
             </a:fontRef>
           </p:style>
           <p:txBody>

--- a/image process/drawings sifi.pptx
+++ b/image process/drawings sifi.pptx
@@ -24201,260 +24201,6 @@
       </p:sp>
       <p:grpSp>
         <p:nvGrpSpPr>
-          <p:cNvPr id="9" name="Group 8">
-            <a:extLst>
-              <a:ext uri="{FF2B5EF4-FFF2-40B4-BE49-F238E27FC236}">
-                <a16:creationId xmlns:a16="http://schemas.microsoft.com/office/drawing/2014/main" id="{F19B0BF4-19E8-C879-4D6D-A416F5751D15}"/>
-              </a:ext>
-            </a:extLst>
-          </p:cNvPr>
-          <p:cNvGrpSpPr/>
-          <p:nvPr/>
-        </p:nvGrpSpPr>
-        <p:grpSpPr>
-          <a:xfrm>
-            <a:off x="213377" y="483633"/>
-            <a:ext cx="1371600" cy="1371600"/>
-            <a:chOff x="213377" y="483633"/>
-            <a:chExt cx="1371600" cy="1371600"/>
-          </a:xfrm>
-        </p:grpSpPr>
-        <p:sp>
-          <p:nvSpPr>
-            <p:cNvPr id="5" name="Rectangle 4">
-              <a:extLst>
-                <a:ext uri="{FF2B5EF4-FFF2-40B4-BE49-F238E27FC236}">
-                  <a16:creationId xmlns:a16="http://schemas.microsoft.com/office/drawing/2014/main" id="{A2BE1DAE-2A68-120A-49AB-87612D1C00D1}"/>
-                </a:ext>
-              </a:extLst>
-            </p:cNvPr>
-            <p:cNvSpPr/>
-            <p:nvPr/>
-          </p:nvSpPr>
-          <p:spPr>
-            <a:xfrm>
-              <a:off x="213377" y="483633"/>
-              <a:ext cx="1371600" cy="1371600"/>
-            </a:xfrm>
-            <a:prstGeom prst="rect">
-              <a:avLst/>
-            </a:prstGeom>
-            <a:noFill/>
-            <a:ln w="76200">
-              <a:solidFill>
-                <a:schemeClr val="tx1"/>
-              </a:solidFill>
-            </a:ln>
-          </p:spPr>
-          <p:style>
-            <a:lnRef idx="2">
-              <a:schemeClr val="accent1">
-                <a:shade val="50000"/>
-              </a:schemeClr>
-            </a:lnRef>
-            <a:fillRef idx="1">
-              <a:schemeClr val="accent1"/>
-            </a:fillRef>
-            <a:effectRef idx="0">
-              <a:schemeClr val="accent1"/>
-            </a:effectRef>
-            <a:fontRef idx="minor">
-              <a:schemeClr val="lt1"/>
-            </a:fontRef>
-          </p:style>
-          <p:txBody>
-            <a:bodyPr rtlCol="0" anchor="ctr"/>
-            <a:lstStyle/>
-            <a:p>
-              <a:pPr algn="ctr"/>
-              <a:endParaRPr lang="en-US"/>
-            </a:p>
-          </p:txBody>
-        </p:sp>
-        <p:sp>
-          <p:nvSpPr>
-            <p:cNvPr id="8" name="Hexagon 7">
-              <a:extLst>
-                <a:ext uri="{FF2B5EF4-FFF2-40B4-BE49-F238E27FC236}">
-                  <a16:creationId xmlns:a16="http://schemas.microsoft.com/office/drawing/2014/main" id="{DC0EB717-9046-65D9-CEA9-DB3069A0EFEE}"/>
-                </a:ext>
-              </a:extLst>
-            </p:cNvPr>
-            <p:cNvSpPr/>
-            <p:nvPr/>
-          </p:nvSpPr>
-          <p:spPr>
-            <a:xfrm>
-              <a:off x="304817" y="699533"/>
-              <a:ext cx="1188720" cy="1097280"/>
-            </a:xfrm>
-            <a:prstGeom prst="hexagon">
-              <a:avLst/>
-            </a:prstGeom>
-            <a:noFill/>
-            <a:ln w="38100" cap="flat" cmpd="sng" algn="ctr">
-              <a:solidFill>
-                <a:schemeClr val="dk1"/>
-              </a:solidFill>
-              <a:prstDash val="solid"/>
-              <a:round/>
-              <a:headEnd type="none" w="med" len="med"/>
-              <a:tailEnd type="none" w="med" len="med"/>
-            </a:ln>
-          </p:spPr>
-          <p:style>
-            <a:lnRef idx="0">
-              <a:scrgbClr r="0" g="0" b="0"/>
-            </a:lnRef>
-            <a:fillRef idx="0">
-              <a:scrgbClr r="0" g="0" b="0"/>
-            </a:fillRef>
-            <a:effectRef idx="0">
-              <a:scrgbClr r="0" g="0" b="0"/>
-            </a:effectRef>
-            <a:fontRef idx="minor">
-              <a:schemeClr val="dk1"/>
-            </a:fontRef>
-          </p:style>
-          <p:txBody>
-            <a:bodyPr rtlCol="0" anchor="ctr"/>
-            <a:lstStyle/>
-            <a:p>
-              <a:pPr algn="ctr"/>
-              <a:endParaRPr lang="en-US"/>
-            </a:p>
-          </p:txBody>
-        </p:sp>
-      </p:grpSp>
-      <p:grpSp>
-        <p:nvGrpSpPr>
-          <p:cNvPr id="10" name="Group 9">
-            <a:extLst>
-              <a:ext uri="{FF2B5EF4-FFF2-40B4-BE49-F238E27FC236}">
-                <a16:creationId xmlns:a16="http://schemas.microsoft.com/office/drawing/2014/main" id="{42596BC6-BB1C-3C2C-91B2-9292B8E22E13}"/>
-              </a:ext>
-            </a:extLst>
-          </p:cNvPr>
-          <p:cNvGrpSpPr/>
-          <p:nvPr/>
-        </p:nvGrpSpPr>
-        <p:grpSpPr>
-          <a:xfrm>
-            <a:off x="1743727" y="483633"/>
-            <a:ext cx="1371600" cy="1371600"/>
-            <a:chOff x="213377" y="483633"/>
-            <a:chExt cx="1371600" cy="1371600"/>
-          </a:xfrm>
-        </p:grpSpPr>
-        <p:sp>
-          <p:nvSpPr>
-            <p:cNvPr id="11" name="Rectangle 10">
-              <a:extLst>
-                <a:ext uri="{FF2B5EF4-FFF2-40B4-BE49-F238E27FC236}">
-                  <a16:creationId xmlns:a16="http://schemas.microsoft.com/office/drawing/2014/main" id="{27311E1B-1EBF-F137-4B07-6EF0E3D0CDD3}"/>
-                </a:ext>
-              </a:extLst>
-            </p:cNvPr>
-            <p:cNvSpPr/>
-            <p:nvPr/>
-          </p:nvSpPr>
-          <p:spPr>
-            <a:xfrm>
-              <a:off x="213377" y="483633"/>
-              <a:ext cx="1371600" cy="1371600"/>
-            </a:xfrm>
-            <a:prstGeom prst="rect">
-              <a:avLst/>
-            </a:prstGeom>
-            <a:noFill/>
-            <a:ln w="76200">
-              <a:solidFill>
-                <a:schemeClr val="tx1"/>
-              </a:solidFill>
-            </a:ln>
-          </p:spPr>
-          <p:style>
-            <a:lnRef idx="2">
-              <a:schemeClr val="accent1">
-                <a:shade val="50000"/>
-              </a:schemeClr>
-            </a:lnRef>
-            <a:fillRef idx="1">
-              <a:schemeClr val="accent1"/>
-            </a:fillRef>
-            <a:effectRef idx="0">
-              <a:schemeClr val="accent1"/>
-            </a:effectRef>
-            <a:fontRef idx="minor">
-              <a:schemeClr val="lt1"/>
-            </a:fontRef>
-          </p:style>
-          <p:txBody>
-            <a:bodyPr rtlCol="0" anchor="ctr"/>
-            <a:lstStyle/>
-            <a:p>
-              <a:pPr algn="ctr"/>
-              <a:endParaRPr lang="en-US"/>
-            </a:p>
-          </p:txBody>
-        </p:sp>
-        <p:sp>
-          <p:nvSpPr>
-            <p:cNvPr id="12" name="Hexagon 11">
-              <a:extLst>
-                <a:ext uri="{FF2B5EF4-FFF2-40B4-BE49-F238E27FC236}">
-                  <a16:creationId xmlns:a16="http://schemas.microsoft.com/office/drawing/2014/main" id="{CA49C3D3-9A14-61F1-4CC4-96315282D076}"/>
-                </a:ext>
-              </a:extLst>
-            </p:cNvPr>
-            <p:cNvSpPr/>
-            <p:nvPr/>
-          </p:nvSpPr>
-          <p:spPr>
-            <a:xfrm>
-              <a:off x="304817" y="699533"/>
-              <a:ext cx="1188720" cy="1097280"/>
-            </a:xfrm>
-            <a:prstGeom prst="hexagon">
-              <a:avLst/>
-            </a:prstGeom>
-            <a:noFill/>
-            <a:ln w="38100" cap="flat" cmpd="sng" algn="ctr">
-              <a:solidFill>
-                <a:schemeClr val="dk1"/>
-              </a:solidFill>
-              <a:prstDash val="solid"/>
-              <a:round/>
-              <a:headEnd type="none" w="med" len="med"/>
-              <a:tailEnd type="none" w="med" len="med"/>
-            </a:ln>
-          </p:spPr>
-          <p:style>
-            <a:lnRef idx="0">
-              <a:scrgbClr r="0" g="0" b="0"/>
-            </a:lnRef>
-            <a:fillRef idx="0">
-              <a:scrgbClr r="0" g="0" b="0"/>
-            </a:fillRef>
-            <a:effectRef idx="0">
-              <a:scrgbClr r="0" g="0" b="0"/>
-            </a:effectRef>
-            <a:fontRef idx="minor">
-              <a:schemeClr val="dk1"/>
-            </a:fontRef>
-          </p:style>
-          <p:txBody>
-            <a:bodyPr rtlCol="0" anchor="ctr"/>
-            <a:lstStyle/>
-            <a:p>
-              <a:pPr algn="ctr"/>
-              <a:endParaRPr lang="en-US"/>
-            </a:p>
-          </p:txBody>
-        </p:sp>
-      </p:grpSp>
-      <p:grpSp>
-        <p:nvGrpSpPr>
           <p:cNvPr id="13" name="Group 12">
             <a:extLst>
               <a:ext uri="{FF2B5EF4-FFF2-40B4-BE49-F238E27FC236}">
@@ -24961,566 +24707,6 @@
           </p:txBody>
         </p:sp>
       </p:grpSp>
-      <p:grpSp>
-        <p:nvGrpSpPr>
-          <p:cNvPr id="30" name="Group 29">
-            <a:extLst>
-              <a:ext uri="{FF2B5EF4-FFF2-40B4-BE49-F238E27FC236}">
-                <a16:creationId xmlns:a16="http://schemas.microsoft.com/office/drawing/2014/main" id="{7F3B74B4-4720-FB4D-FA80-052B0C6589C6}"/>
-              </a:ext>
-            </a:extLst>
-          </p:cNvPr>
-          <p:cNvGrpSpPr/>
-          <p:nvPr/>
-        </p:nvGrpSpPr>
-        <p:grpSpPr>
-          <a:xfrm>
-            <a:off x="391173" y="1003985"/>
-            <a:ext cx="932183" cy="488375"/>
-            <a:chOff x="3486187" y="2794899"/>
-            <a:chExt cx="2243797" cy="940162"/>
-          </a:xfrm>
-        </p:grpSpPr>
-        <p:sp>
-          <p:nvSpPr>
-            <p:cNvPr id="25" name="Isosceles Triangle 24">
-              <a:extLst>
-                <a:ext uri="{FF2B5EF4-FFF2-40B4-BE49-F238E27FC236}">
-                  <a16:creationId xmlns:a16="http://schemas.microsoft.com/office/drawing/2014/main" id="{9D8DF379-0F34-6DC6-0445-C52427CEA471}"/>
-                </a:ext>
-              </a:extLst>
-            </p:cNvPr>
-            <p:cNvSpPr/>
-            <p:nvPr/>
-          </p:nvSpPr>
-          <p:spPr>
-            <a:xfrm rot="15424345">
-              <a:off x="4343425" y="3060700"/>
-              <a:ext cx="421623" cy="927100"/>
-            </a:xfrm>
-            <a:prstGeom prst="triangle">
-              <a:avLst/>
-            </a:prstGeom>
-          </p:spPr>
-          <p:style>
-            <a:lnRef idx="2">
-              <a:schemeClr val="dk1">
-                <a:shade val="50000"/>
-              </a:schemeClr>
-            </a:lnRef>
-            <a:fillRef idx="1">
-              <a:schemeClr val="dk1"/>
-            </a:fillRef>
-            <a:effectRef idx="0">
-              <a:schemeClr val="dk1"/>
-            </a:effectRef>
-            <a:fontRef idx="minor">
-              <a:schemeClr val="lt1"/>
-            </a:fontRef>
-          </p:style>
-          <p:txBody>
-            <a:bodyPr rtlCol="0" anchor="ctr"/>
-            <a:lstStyle/>
-            <a:p>
-              <a:pPr algn="ctr"/>
-              <a:endParaRPr lang="en-US"/>
-            </a:p>
-          </p:txBody>
-        </p:sp>
-        <p:sp>
-          <p:nvSpPr>
-            <p:cNvPr id="26" name="Rectangle 25">
-              <a:extLst>
-                <a:ext uri="{FF2B5EF4-FFF2-40B4-BE49-F238E27FC236}">
-                  <a16:creationId xmlns:a16="http://schemas.microsoft.com/office/drawing/2014/main" id="{99EB09C2-0004-EF0A-311D-10C0954AC48B}"/>
-                </a:ext>
-              </a:extLst>
-            </p:cNvPr>
-            <p:cNvSpPr/>
-            <p:nvPr/>
-          </p:nvSpPr>
-          <p:spPr>
-            <a:xfrm rot="19070274">
-              <a:off x="4403822" y="2794899"/>
-              <a:ext cx="110327" cy="685800"/>
-            </a:xfrm>
-            <a:prstGeom prst="rect">
-              <a:avLst/>
-            </a:prstGeom>
-          </p:spPr>
-          <p:style>
-            <a:lnRef idx="2">
-              <a:schemeClr val="dk1">
-                <a:shade val="50000"/>
-              </a:schemeClr>
-            </a:lnRef>
-            <a:fillRef idx="1">
-              <a:schemeClr val="dk1"/>
-            </a:fillRef>
-            <a:effectRef idx="0">
-              <a:schemeClr val="dk1"/>
-            </a:effectRef>
-            <a:fontRef idx="minor">
-              <a:schemeClr val="lt1"/>
-            </a:fontRef>
-          </p:style>
-          <p:txBody>
-            <a:bodyPr rtlCol="0" anchor="ctr"/>
-            <a:lstStyle/>
-            <a:p>
-              <a:pPr algn="ctr"/>
-              <a:endParaRPr lang="en-US"/>
-            </a:p>
-          </p:txBody>
-        </p:sp>
-        <p:sp>
-          <p:nvSpPr>
-            <p:cNvPr id="27" name="Rectangle 26">
-              <a:extLst>
-                <a:ext uri="{FF2B5EF4-FFF2-40B4-BE49-F238E27FC236}">
-                  <a16:creationId xmlns:a16="http://schemas.microsoft.com/office/drawing/2014/main" id="{C52C181C-39A6-074A-7CEE-B04D50179457}"/>
-                </a:ext>
-              </a:extLst>
-            </p:cNvPr>
-            <p:cNvSpPr/>
-            <p:nvPr/>
-          </p:nvSpPr>
-          <p:spPr>
-            <a:xfrm rot="3561525">
-              <a:off x="5159615" y="2991775"/>
-              <a:ext cx="110327" cy="685800"/>
-            </a:xfrm>
-            <a:prstGeom prst="rect">
-              <a:avLst/>
-            </a:prstGeom>
-          </p:spPr>
-          <p:style>
-            <a:lnRef idx="2">
-              <a:schemeClr val="dk1">
-                <a:shade val="50000"/>
-              </a:schemeClr>
-            </a:lnRef>
-            <a:fillRef idx="1">
-              <a:schemeClr val="dk1"/>
-            </a:fillRef>
-            <a:effectRef idx="0">
-              <a:schemeClr val="dk1"/>
-            </a:effectRef>
-            <a:fontRef idx="minor">
-              <a:schemeClr val="lt1"/>
-            </a:fontRef>
-          </p:style>
-          <p:txBody>
-            <a:bodyPr rtlCol="0" anchor="ctr"/>
-            <a:lstStyle/>
-            <a:p>
-              <a:pPr algn="ctr"/>
-              <a:endParaRPr lang="en-US"/>
-            </a:p>
-          </p:txBody>
-        </p:sp>
-        <p:sp>
-          <p:nvSpPr>
-            <p:cNvPr id="28" name="Moon 27">
-              <a:extLst>
-                <a:ext uri="{FF2B5EF4-FFF2-40B4-BE49-F238E27FC236}">
-                  <a16:creationId xmlns:a16="http://schemas.microsoft.com/office/drawing/2014/main" id="{62E2704E-7612-34D2-C026-FF2E34319A9C}"/>
-                </a:ext>
-              </a:extLst>
-            </p:cNvPr>
-            <p:cNvSpPr/>
-            <p:nvPr/>
-          </p:nvSpPr>
-          <p:spPr>
-            <a:xfrm rot="19499624" flipH="1">
-              <a:off x="5426491" y="2997261"/>
-              <a:ext cx="303493" cy="618348"/>
-            </a:xfrm>
-            <a:prstGeom prst="moon">
-              <a:avLst/>
-            </a:prstGeom>
-          </p:spPr>
-          <p:style>
-            <a:lnRef idx="2">
-              <a:schemeClr val="dk1">
-                <a:shade val="50000"/>
-              </a:schemeClr>
-            </a:lnRef>
-            <a:fillRef idx="1">
-              <a:schemeClr val="dk1"/>
-            </a:fillRef>
-            <a:effectRef idx="0">
-              <a:schemeClr val="dk1"/>
-            </a:effectRef>
-            <a:fontRef idx="minor">
-              <a:schemeClr val="lt1"/>
-            </a:fontRef>
-          </p:style>
-          <p:txBody>
-            <a:bodyPr rtlCol="0" anchor="ctr"/>
-            <a:lstStyle/>
-            <a:p>
-              <a:pPr algn="ctr"/>
-              <a:endParaRPr lang="en-US"/>
-            </a:p>
-          </p:txBody>
-        </p:sp>
-        <p:sp>
-          <p:nvSpPr>
-            <p:cNvPr id="29" name="Moon 28">
-              <a:extLst>
-                <a:ext uri="{FF2B5EF4-FFF2-40B4-BE49-F238E27FC236}">
-                  <a16:creationId xmlns:a16="http://schemas.microsoft.com/office/drawing/2014/main" id="{045DD0C2-A0DE-22F4-2B5B-BAB8B21E7AC7}"/>
-                </a:ext>
-              </a:extLst>
-            </p:cNvPr>
-            <p:cNvSpPr/>
-            <p:nvPr/>
-          </p:nvSpPr>
-          <p:spPr>
-            <a:xfrm rot="14859337" flipH="1">
-              <a:off x="3798186" y="2609338"/>
-              <a:ext cx="303493" cy="927492"/>
-            </a:xfrm>
-            <a:prstGeom prst="moon">
-              <a:avLst>
-                <a:gd name="adj" fmla="val 30886"/>
-              </a:avLst>
-            </a:prstGeom>
-          </p:spPr>
-          <p:style>
-            <a:lnRef idx="2">
-              <a:schemeClr val="dk1">
-                <a:shade val="50000"/>
-              </a:schemeClr>
-            </a:lnRef>
-            <a:fillRef idx="1">
-              <a:schemeClr val="dk1"/>
-            </a:fillRef>
-            <a:effectRef idx="0">
-              <a:schemeClr val="dk1"/>
-            </a:effectRef>
-            <a:fontRef idx="minor">
-              <a:schemeClr val="lt1"/>
-            </a:fontRef>
-          </p:style>
-          <p:txBody>
-            <a:bodyPr rtlCol="0" anchor="ctr"/>
-            <a:lstStyle/>
-            <a:p>
-              <a:pPr algn="ctr"/>
-              <a:endParaRPr lang="en-US"/>
-            </a:p>
-          </p:txBody>
-        </p:sp>
-      </p:grpSp>
-      <p:grpSp>
-        <p:nvGrpSpPr>
-          <p:cNvPr id="31" name="Group 30">
-            <a:extLst>
-              <a:ext uri="{FF2B5EF4-FFF2-40B4-BE49-F238E27FC236}">
-                <a16:creationId xmlns:a16="http://schemas.microsoft.com/office/drawing/2014/main" id="{48A6794A-C8F0-4518-6746-135B2D74E0BD}"/>
-              </a:ext>
-            </a:extLst>
-          </p:cNvPr>
-          <p:cNvGrpSpPr/>
-          <p:nvPr/>
-        </p:nvGrpSpPr>
-        <p:grpSpPr>
-          <a:xfrm>
-            <a:off x="2024352" y="1186456"/>
-            <a:ext cx="745097" cy="390360"/>
-            <a:chOff x="3486187" y="2794899"/>
-            <a:chExt cx="2243797" cy="940162"/>
-          </a:xfrm>
-        </p:grpSpPr>
-        <p:sp>
-          <p:nvSpPr>
-            <p:cNvPr id="32" name="Isosceles Triangle 31">
-              <a:extLst>
-                <a:ext uri="{FF2B5EF4-FFF2-40B4-BE49-F238E27FC236}">
-                  <a16:creationId xmlns:a16="http://schemas.microsoft.com/office/drawing/2014/main" id="{A02500EA-71B5-6B42-AEFA-9B5032B88D53}"/>
-                </a:ext>
-              </a:extLst>
-            </p:cNvPr>
-            <p:cNvSpPr/>
-            <p:nvPr/>
-          </p:nvSpPr>
-          <p:spPr>
-            <a:xfrm rot="15424345">
-              <a:off x="4343425" y="3060700"/>
-              <a:ext cx="421623" cy="927100"/>
-            </a:xfrm>
-            <a:prstGeom prst="triangle">
-              <a:avLst/>
-            </a:prstGeom>
-          </p:spPr>
-          <p:style>
-            <a:lnRef idx="2">
-              <a:schemeClr val="dk1">
-                <a:shade val="50000"/>
-              </a:schemeClr>
-            </a:lnRef>
-            <a:fillRef idx="1">
-              <a:schemeClr val="dk1"/>
-            </a:fillRef>
-            <a:effectRef idx="0">
-              <a:schemeClr val="dk1"/>
-            </a:effectRef>
-            <a:fontRef idx="minor">
-              <a:schemeClr val="lt1"/>
-            </a:fontRef>
-          </p:style>
-          <p:txBody>
-            <a:bodyPr rtlCol="0" anchor="ctr"/>
-            <a:lstStyle/>
-            <a:p>
-              <a:pPr algn="ctr"/>
-              <a:endParaRPr lang="en-US"/>
-            </a:p>
-          </p:txBody>
-        </p:sp>
-        <p:sp>
-          <p:nvSpPr>
-            <p:cNvPr id="33" name="Rectangle 32">
-              <a:extLst>
-                <a:ext uri="{FF2B5EF4-FFF2-40B4-BE49-F238E27FC236}">
-                  <a16:creationId xmlns:a16="http://schemas.microsoft.com/office/drawing/2014/main" id="{DC37D9B8-148B-F659-3B90-FCF4C909AB87}"/>
-                </a:ext>
-              </a:extLst>
-            </p:cNvPr>
-            <p:cNvSpPr/>
-            <p:nvPr/>
-          </p:nvSpPr>
-          <p:spPr>
-            <a:xfrm rot="19070274">
-              <a:off x="4403822" y="2794899"/>
-              <a:ext cx="110327" cy="685800"/>
-            </a:xfrm>
-            <a:prstGeom prst="rect">
-              <a:avLst/>
-            </a:prstGeom>
-          </p:spPr>
-          <p:style>
-            <a:lnRef idx="2">
-              <a:schemeClr val="dk1">
-                <a:shade val="50000"/>
-              </a:schemeClr>
-            </a:lnRef>
-            <a:fillRef idx="1">
-              <a:schemeClr val="dk1"/>
-            </a:fillRef>
-            <a:effectRef idx="0">
-              <a:schemeClr val="dk1"/>
-            </a:effectRef>
-            <a:fontRef idx="minor">
-              <a:schemeClr val="lt1"/>
-            </a:fontRef>
-          </p:style>
-          <p:txBody>
-            <a:bodyPr rtlCol="0" anchor="ctr"/>
-            <a:lstStyle/>
-            <a:p>
-              <a:pPr algn="ctr"/>
-              <a:endParaRPr lang="en-US"/>
-            </a:p>
-          </p:txBody>
-        </p:sp>
-        <p:sp>
-          <p:nvSpPr>
-            <p:cNvPr id="34" name="Rectangle 33">
-              <a:extLst>
-                <a:ext uri="{FF2B5EF4-FFF2-40B4-BE49-F238E27FC236}">
-                  <a16:creationId xmlns:a16="http://schemas.microsoft.com/office/drawing/2014/main" id="{7545B01B-A436-1165-9353-A6D1CD74E98D}"/>
-                </a:ext>
-              </a:extLst>
-            </p:cNvPr>
-            <p:cNvSpPr/>
-            <p:nvPr/>
-          </p:nvSpPr>
-          <p:spPr>
-            <a:xfrm rot="3561525">
-              <a:off x="5159615" y="2991775"/>
-              <a:ext cx="110327" cy="685800"/>
-            </a:xfrm>
-            <a:prstGeom prst="rect">
-              <a:avLst/>
-            </a:prstGeom>
-          </p:spPr>
-          <p:style>
-            <a:lnRef idx="2">
-              <a:schemeClr val="dk1">
-                <a:shade val="50000"/>
-              </a:schemeClr>
-            </a:lnRef>
-            <a:fillRef idx="1">
-              <a:schemeClr val="dk1"/>
-            </a:fillRef>
-            <a:effectRef idx="0">
-              <a:schemeClr val="dk1"/>
-            </a:effectRef>
-            <a:fontRef idx="minor">
-              <a:schemeClr val="lt1"/>
-            </a:fontRef>
-          </p:style>
-          <p:txBody>
-            <a:bodyPr rtlCol="0" anchor="ctr"/>
-            <a:lstStyle/>
-            <a:p>
-              <a:pPr algn="ctr"/>
-              <a:endParaRPr lang="en-US"/>
-            </a:p>
-          </p:txBody>
-        </p:sp>
-        <p:sp>
-          <p:nvSpPr>
-            <p:cNvPr id="35" name="Moon 34">
-              <a:extLst>
-                <a:ext uri="{FF2B5EF4-FFF2-40B4-BE49-F238E27FC236}">
-                  <a16:creationId xmlns:a16="http://schemas.microsoft.com/office/drawing/2014/main" id="{2D457D10-3DB9-410B-DA44-A61A4FC053A6}"/>
-                </a:ext>
-              </a:extLst>
-            </p:cNvPr>
-            <p:cNvSpPr/>
-            <p:nvPr/>
-          </p:nvSpPr>
-          <p:spPr>
-            <a:xfrm rot="19499624" flipH="1">
-              <a:off x="5426491" y="2997261"/>
-              <a:ext cx="303493" cy="618348"/>
-            </a:xfrm>
-            <a:prstGeom prst="moon">
-              <a:avLst/>
-            </a:prstGeom>
-          </p:spPr>
-          <p:style>
-            <a:lnRef idx="2">
-              <a:schemeClr val="dk1">
-                <a:shade val="50000"/>
-              </a:schemeClr>
-            </a:lnRef>
-            <a:fillRef idx="1">
-              <a:schemeClr val="dk1"/>
-            </a:fillRef>
-            <a:effectRef idx="0">
-              <a:schemeClr val="dk1"/>
-            </a:effectRef>
-            <a:fontRef idx="minor">
-              <a:schemeClr val="lt1"/>
-            </a:fontRef>
-          </p:style>
-          <p:txBody>
-            <a:bodyPr rtlCol="0" anchor="ctr"/>
-            <a:lstStyle/>
-            <a:p>
-              <a:pPr algn="ctr"/>
-              <a:endParaRPr lang="en-US"/>
-            </a:p>
-          </p:txBody>
-        </p:sp>
-        <p:sp>
-          <p:nvSpPr>
-            <p:cNvPr id="36" name="Moon 35">
-              <a:extLst>
-                <a:ext uri="{FF2B5EF4-FFF2-40B4-BE49-F238E27FC236}">
-                  <a16:creationId xmlns:a16="http://schemas.microsoft.com/office/drawing/2014/main" id="{72220385-95F3-7FC9-C196-D29815DE8A60}"/>
-                </a:ext>
-              </a:extLst>
-            </p:cNvPr>
-            <p:cNvSpPr/>
-            <p:nvPr/>
-          </p:nvSpPr>
-          <p:spPr>
-            <a:xfrm rot="14859337" flipH="1">
-              <a:off x="3798186" y="2609338"/>
-              <a:ext cx="303493" cy="927492"/>
-            </a:xfrm>
-            <a:prstGeom prst="moon">
-              <a:avLst>
-                <a:gd name="adj" fmla="val 30886"/>
-              </a:avLst>
-            </a:prstGeom>
-          </p:spPr>
-          <p:style>
-            <a:lnRef idx="2">
-              <a:schemeClr val="dk1">
-                <a:shade val="50000"/>
-              </a:schemeClr>
-            </a:lnRef>
-            <a:fillRef idx="1">
-              <a:schemeClr val="dk1"/>
-            </a:fillRef>
-            <a:effectRef idx="0">
-              <a:schemeClr val="dk1"/>
-            </a:effectRef>
-            <a:fontRef idx="minor">
-              <a:schemeClr val="lt1"/>
-            </a:fontRef>
-          </p:style>
-          <p:txBody>
-            <a:bodyPr rtlCol="0" anchor="ctr"/>
-            <a:lstStyle/>
-            <a:p>
-              <a:pPr algn="ctr"/>
-              <a:endParaRPr lang="en-US"/>
-            </a:p>
-          </p:txBody>
-        </p:sp>
-      </p:grpSp>
-      <p:sp>
-        <p:nvSpPr>
-          <p:cNvPr id="37" name="Oval 36">
-            <a:extLst>
-              <a:ext uri="{FF2B5EF4-FFF2-40B4-BE49-F238E27FC236}">
-                <a16:creationId xmlns:a16="http://schemas.microsoft.com/office/drawing/2014/main" id="{69A283FC-5D73-8568-4F11-D2DC8052E9AD}"/>
-              </a:ext>
-            </a:extLst>
-          </p:cNvPr>
-          <p:cNvSpPr/>
-          <p:nvPr/>
-        </p:nvSpPr>
-        <p:spPr>
-          <a:xfrm>
-            <a:off x="2482373" y="775315"/>
-            <a:ext cx="274320" cy="274320"/>
-          </a:xfrm>
-          <a:prstGeom prst="ellipse">
-            <a:avLst/>
-          </a:prstGeom>
-          <a:noFill/>
-          <a:ln w="57150" cap="flat" cmpd="sng" algn="ctr">
-            <a:solidFill>
-              <a:schemeClr val="dk1"/>
-            </a:solidFill>
-            <a:prstDash val="solid"/>
-            <a:round/>
-            <a:headEnd type="none" w="med" len="med"/>
-            <a:tailEnd type="none" w="med" len="med"/>
-          </a:ln>
-        </p:spPr>
-        <p:style>
-          <a:lnRef idx="0">
-            <a:scrgbClr r="0" g="0" b="0"/>
-          </a:lnRef>
-          <a:fillRef idx="0">
-            <a:scrgbClr r="0" g="0" b="0"/>
-          </a:fillRef>
-          <a:effectRef idx="0">
-            <a:scrgbClr r="0" g="0" b="0"/>
-          </a:effectRef>
-          <a:fontRef idx="minor">
-            <a:schemeClr val="dk1"/>
-          </a:fontRef>
-        </p:style>
-        <p:txBody>
-          <a:bodyPr rtlCol="0" anchor="ctr"/>
-          <a:lstStyle/>
-          <a:p>
-            <a:pPr algn="ctr"/>
-            <a:endParaRPr lang="en-US"/>
-          </a:p>
-        </p:txBody>
-      </p:sp>
       <p:grpSp>
         <p:nvGrpSpPr>
           <p:cNvPr id="54" name="Group 53">
@@ -27539,698 +26725,6 @@
       </p:grpSp>
       <p:grpSp>
         <p:nvGrpSpPr>
-          <p:cNvPr id="76" name="Group 75">
-            <a:extLst>
-              <a:ext uri="{FF2B5EF4-FFF2-40B4-BE49-F238E27FC236}">
-                <a16:creationId xmlns:a16="http://schemas.microsoft.com/office/drawing/2014/main" id="{F44AC8A3-2066-D0D9-C90A-CF2EF0422C49}"/>
-              </a:ext>
-            </a:extLst>
-          </p:cNvPr>
-          <p:cNvGrpSpPr/>
-          <p:nvPr/>
-        </p:nvGrpSpPr>
-        <p:grpSpPr>
-          <a:xfrm>
-            <a:off x="3462797" y="2482289"/>
-            <a:ext cx="978554" cy="542441"/>
-            <a:chOff x="3843947" y="2567111"/>
-            <a:chExt cx="3176630" cy="1760897"/>
-          </a:xfrm>
-        </p:grpSpPr>
-        <p:sp>
-          <p:nvSpPr>
-            <p:cNvPr id="121" name="Rectangle 120">
-              <a:extLst>
-                <a:ext uri="{FF2B5EF4-FFF2-40B4-BE49-F238E27FC236}">
-                  <a16:creationId xmlns:a16="http://schemas.microsoft.com/office/drawing/2014/main" id="{2D670DB4-77B1-1903-1919-8B748E038185}"/>
-                </a:ext>
-              </a:extLst>
-            </p:cNvPr>
-            <p:cNvSpPr/>
-            <p:nvPr/>
-          </p:nvSpPr>
-          <p:spPr>
-            <a:xfrm rot="19070274">
-              <a:off x="4957620" y="2708833"/>
-              <a:ext cx="133896" cy="1040682"/>
-            </a:xfrm>
-            <a:prstGeom prst="rect">
-              <a:avLst/>
-            </a:prstGeom>
-          </p:spPr>
-          <p:style>
-            <a:lnRef idx="2">
-              <a:schemeClr val="dk1">
-                <a:shade val="50000"/>
-              </a:schemeClr>
-            </a:lnRef>
-            <a:fillRef idx="1">
-              <a:schemeClr val="dk1"/>
-            </a:fillRef>
-            <a:effectRef idx="0">
-              <a:schemeClr val="dk1"/>
-            </a:effectRef>
-            <a:fontRef idx="minor">
-              <a:schemeClr val="lt1"/>
-            </a:fontRef>
-          </p:style>
-          <p:txBody>
-            <a:bodyPr rtlCol="0" anchor="ctr"/>
-            <a:lstStyle/>
-            <a:p>
-              <a:pPr algn="ctr"/>
-              <a:endParaRPr lang="en-US"/>
-            </a:p>
-          </p:txBody>
-        </p:sp>
-        <p:sp>
-          <p:nvSpPr>
-            <p:cNvPr id="124" name="Moon 123">
-              <a:extLst>
-                <a:ext uri="{FF2B5EF4-FFF2-40B4-BE49-F238E27FC236}">
-                  <a16:creationId xmlns:a16="http://schemas.microsoft.com/office/drawing/2014/main" id="{0E261B77-C996-4E2D-58C5-133013D718F9}"/>
-                </a:ext>
-              </a:extLst>
-            </p:cNvPr>
-            <p:cNvSpPr/>
-            <p:nvPr/>
-          </p:nvSpPr>
-          <p:spPr>
-            <a:xfrm rot="14859337" flipH="1">
-              <a:off x="4176494" y="2568153"/>
-              <a:ext cx="460542" cy="1125635"/>
-            </a:xfrm>
-            <a:prstGeom prst="moon">
-              <a:avLst>
-                <a:gd name="adj" fmla="val 30886"/>
-              </a:avLst>
-            </a:prstGeom>
-          </p:spPr>
-          <p:style>
-            <a:lnRef idx="2">
-              <a:schemeClr val="dk1">
-                <a:shade val="50000"/>
-              </a:schemeClr>
-            </a:lnRef>
-            <a:fillRef idx="1">
-              <a:schemeClr val="dk1"/>
-            </a:fillRef>
-            <a:effectRef idx="0">
-              <a:schemeClr val="dk1"/>
-            </a:effectRef>
-            <a:fontRef idx="minor">
-              <a:schemeClr val="lt1"/>
-            </a:fontRef>
-          </p:style>
-          <p:txBody>
-            <a:bodyPr rtlCol="0" anchor="ctr"/>
-            <a:lstStyle/>
-            <a:p>
-              <a:pPr algn="ctr"/>
-              <a:endParaRPr lang="en-US"/>
-            </a:p>
-          </p:txBody>
-        </p:sp>
-        <p:sp>
-          <p:nvSpPr>
-            <p:cNvPr id="73" name="Oval 72">
-              <a:extLst>
-                <a:ext uri="{FF2B5EF4-FFF2-40B4-BE49-F238E27FC236}">
-                  <a16:creationId xmlns:a16="http://schemas.microsoft.com/office/drawing/2014/main" id="{7089BF40-5AF6-350F-50B9-102126547B44}"/>
-                </a:ext>
-              </a:extLst>
-            </p:cNvPr>
-            <p:cNvSpPr/>
-            <p:nvPr/>
-          </p:nvSpPr>
-          <p:spPr>
-            <a:xfrm>
-              <a:off x="5014867" y="3364464"/>
-              <a:ext cx="949737" cy="676019"/>
-            </a:xfrm>
-            <a:prstGeom prst="ellipse">
-              <a:avLst/>
-            </a:prstGeom>
-          </p:spPr>
-          <p:style>
-            <a:lnRef idx="2">
-              <a:schemeClr val="dk1">
-                <a:shade val="50000"/>
-              </a:schemeClr>
-            </a:lnRef>
-            <a:fillRef idx="1">
-              <a:schemeClr val="dk1"/>
-            </a:fillRef>
-            <a:effectRef idx="0">
-              <a:schemeClr val="dk1"/>
-            </a:effectRef>
-            <a:fontRef idx="minor">
-              <a:schemeClr val="lt1"/>
-            </a:fontRef>
-          </p:style>
-          <p:txBody>
-            <a:bodyPr rtlCol="0" anchor="ctr"/>
-            <a:lstStyle/>
-            <a:p>
-              <a:pPr algn="ctr"/>
-              <a:endParaRPr lang="en-US"/>
-            </a:p>
-          </p:txBody>
-        </p:sp>
-        <p:sp>
-          <p:nvSpPr>
-            <p:cNvPr id="128" name="Rectangle 127">
-              <a:extLst>
-                <a:ext uri="{FF2B5EF4-FFF2-40B4-BE49-F238E27FC236}">
-                  <a16:creationId xmlns:a16="http://schemas.microsoft.com/office/drawing/2014/main" id="{13E2888A-EB23-7DE0-568C-4C1A187F68F7}"/>
-                </a:ext>
-              </a:extLst>
-            </p:cNvPr>
-            <p:cNvSpPr/>
-            <p:nvPr/>
-          </p:nvSpPr>
-          <p:spPr>
-            <a:xfrm rot="17187329">
-              <a:off x="4926950" y="3006968"/>
-              <a:ext cx="133896" cy="1040682"/>
-            </a:xfrm>
-            <a:prstGeom prst="rect">
-              <a:avLst/>
-            </a:prstGeom>
-          </p:spPr>
-          <p:style>
-            <a:lnRef idx="2">
-              <a:schemeClr val="dk1">
-                <a:shade val="50000"/>
-              </a:schemeClr>
-            </a:lnRef>
-            <a:fillRef idx="1">
-              <a:schemeClr val="dk1"/>
-            </a:fillRef>
-            <a:effectRef idx="0">
-              <a:schemeClr val="dk1"/>
-            </a:effectRef>
-            <a:fontRef idx="minor">
-              <a:schemeClr val="lt1"/>
-            </a:fontRef>
-          </p:style>
-          <p:txBody>
-            <a:bodyPr rtlCol="0" anchor="ctr"/>
-            <a:lstStyle/>
-            <a:p>
-              <a:pPr algn="ctr"/>
-              <a:endParaRPr lang="en-US"/>
-            </a:p>
-          </p:txBody>
-        </p:sp>
-        <p:sp>
-          <p:nvSpPr>
-            <p:cNvPr id="129" name="Moon 128">
-              <a:extLst>
-                <a:ext uri="{FF2B5EF4-FFF2-40B4-BE49-F238E27FC236}">
-                  <a16:creationId xmlns:a16="http://schemas.microsoft.com/office/drawing/2014/main" id="{9215818D-C6E8-8007-00C5-4A371D632298}"/>
-                </a:ext>
-              </a:extLst>
-            </p:cNvPr>
-            <p:cNvSpPr/>
-            <p:nvPr/>
-          </p:nvSpPr>
-          <p:spPr>
-            <a:xfrm rot="12976392" flipH="1">
-              <a:off x="4185063" y="3202373"/>
-              <a:ext cx="460542" cy="1125635"/>
-            </a:xfrm>
-            <a:prstGeom prst="moon">
-              <a:avLst>
-                <a:gd name="adj" fmla="val 30886"/>
-              </a:avLst>
-            </a:prstGeom>
-          </p:spPr>
-          <p:style>
-            <a:lnRef idx="2">
-              <a:schemeClr val="dk1">
-                <a:shade val="50000"/>
-              </a:schemeClr>
-            </a:lnRef>
-            <a:fillRef idx="1">
-              <a:schemeClr val="dk1"/>
-            </a:fillRef>
-            <a:effectRef idx="0">
-              <a:schemeClr val="dk1"/>
-            </a:effectRef>
-            <a:fontRef idx="minor">
-              <a:schemeClr val="lt1"/>
-            </a:fontRef>
-          </p:style>
-          <p:txBody>
-            <a:bodyPr rtlCol="0" anchor="ctr"/>
-            <a:lstStyle/>
-            <a:p>
-              <a:pPr algn="ctr"/>
-              <a:endParaRPr lang="en-US"/>
-            </a:p>
-          </p:txBody>
-        </p:sp>
-        <p:sp>
-          <p:nvSpPr>
-            <p:cNvPr id="74" name="Oval 73">
-              <a:extLst>
-                <a:ext uri="{FF2B5EF4-FFF2-40B4-BE49-F238E27FC236}">
-                  <a16:creationId xmlns:a16="http://schemas.microsoft.com/office/drawing/2014/main" id="{2C28F46A-1A47-F154-9CB5-39584A6A7A68}"/>
-                </a:ext>
-              </a:extLst>
-            </p:cNvPr>
-            <p:cNvSpPr/>
-            <p:nvPr/>
-          </p:nvSpPr>
-          <p:spPr>
-            <a:xfrm>
-              <a:off x="5514216" y="2567111"/>
-              <a:ext cx="1506361" cy="1497190"/>
-            </a:xfrm>
-            <a:prstGeom prst="ellipse">
-              <a:avLst/>
-            </a:prstGeom>
-          </p:spPr>
-          <p:style>
-            <a:lnRef idx="2">
-              <a:schemeClr val="dk1">
-                <a:shade val="50000"/>
-              </a:schemeClr>
-            </a:lnRef>
-            <a:fillRef idx="1">
-              <a:schemeClr val="dk1"/>
-            </a:fillRef>
-            <a:effectRef idx="0">
-              <a:schemeClr val="dk1"/>
-            </a:effectRef>
-            <a:fontRef idx="minor">
-              <a:schemeClr val="lt1"/>
-            </a:fontRef>
-          </p:style>
-          <p:txBody>
-            <a:bodyPr rtlCol="0" anchor="ctr"/>
-            <a:lstStyle/>
-            <a:p>
-              <a:pPr algn="ctr"/>
-              <a:endParaRPr lang="en-US"/>
-            </a:p>
-          </p:txBody>
-        </p:sp>
-        <p:sp>
-          <p:nvSpPr>
-            <p:cNvPr id="131" name="Oval 130">
-              <a:extLst>
-                <a:ext uri="{FF2B5EF4-FFF2-40B4-BE49-F238E27FC236}">
-                  <a16:creationId xmlns:a16="http://schemas.microsoft.com/office/drawing/2014/main" id="{9F7AE301-236B-C342-A907-B76DC7788780}"/>
-                </a:ext>
-              </a:extLst>
-            </p:cNvPr>
-            <p:cNvSpPr/>
-            <p:nvPr/>
-          </p:nvSpPr>
-          <p:spPr>
-            <a:xfrm>
-              <a:off x="5729248" y="2754475"/>
-              <a:ext cx="470712" cy="470712"/>
-            </a:xfrm>
-            <a:prstGeom prst="ellipse">
-              <a:avLst/>
-            </a:prstGeom>
-          </p:spPr>
-          <p:style>
-            <a:lnRef idx="2">
-              <a:schemeClr val="dk1"/>
-            </a:lnRef>
-            <a:fillRef idx="1">
-              <a:schemeClr val="lt1"/>
-            </a:fillRef>
-            <a:effectRef idx="0">
-              <a:schemeClr val="dk1"/>
-            </a:effectRef>
-            <a:fontRef idx="minor">
-              <a:schemeClr val="dk1"/>
-            </a:fontRef>
-          </p:style>
-          <p:txBody>
-            <a:bodyPr rtlCol="0" anchor="ctr"/>
-            <a:lstStyle/>
-            <a:p>
-              <a:pPr algn="ctr"/>
-              <a:endParaRPr lang="en-US"/>
-            </a:p>
-          </p:txBody>
-        </p:sp>
-        <p:sp>
-          <p:nvSpPr>
-            <p:cNvPr id="132" name="Oval 131">
-              <a:extLst>
-                <a:ext uri="{FF2B5EF4-FFF2-40B4-BE49-F238E27FC236}">
-                  <a16:creationId xmlns:a16="http://schemas.microsoft.com/office/drawing/2014/main" id="{41DB8E87-32E3-8531-4B68-0A4C294D3C9F}"/>
-                </a:ext>
-              </a:extLst>
-            </p:cNvPr>
-            <p:cNvSpPr/>
-            <p:nvPr/>
-          </p:nvSpPr>
-          <p:spPr>
-            <a:xfrm>
-              <a:off x="6250473" y="2648688"/>
-              <a:ext cx="470712" cy="470712"/>
-            </a:xfrm>
-            <a:prstGeom prst="ellipse">
-              <a:avLst/>
-            </a:prstGeom>
-          </p:spPr>
-          <p:style>
-            <a:lnRef idx="2">
-              <a:schemeClr val="dk1"/>
-            </a:lnRef>
-            <a:fillRef idx="1">
-              <a:schemeClr val="lt1"/>
-            </a:fillRef>
-            <a:effectRef idx="0">
-              <a:schemeClr val="dk1"/>
-            </a:effectRef>
-            <a:fontRef idx="minor">
-              <a:schemeClr val="dk1"/>
-            </a:fontRef>
-          </p:style>
-          <p:txBody>
-            <a:bodyPr rtlCol="0" anchor="ctr"/>
-            <a:lstStyle/>
-            <a:p>
-              <a:pPr algn="ctr"/>
-              <a:endParaRPr lang="en-US"/>
-            </a:p>
-          </p:txBody>
-        </p:sp>
-        <p:sp>
-          <p:nvSpPr>
-            <p:cNvPr id="133" name="Oval 132">
-              <a:extLst>
-                <a:ext uri="{FF2B5EF4-FFF2-40B4-BE49-F238E27FC236}">
-                  <a16:creationId xmlns:a16="http://schemas.microsoft.com/office/drawing/2014/main" id="{62D49306-297B-7613-D778-B56F3CB42952}"/>
-                </a:ext>
-              </a:extLst>
-            </p:cNvPr>
-            <p:cNvSpPr/>
-            <p:nvPr/>
-          </p:nvSpPr>
-          <p:spPr>
-            <a:xfrm>
-              <a:off x="5602645" y="3268200"/>
-              <a:ext cx="470712" cy="470712"/>
-            </a:xfrm>
-            <a:prstGeom prst="ellipse">
-              <a:avLst/>
-            </a:prstGeom>
-          </p:spPr>
-          <p:style>
-            <a:lnRef idx="2">
-              <a:schemeClr val="dk1"/>
-            </a:lnRef>
-            <a:fillRef idx="1">
-              <a:schemeClr val="lt1"/>
-            </a:fillRef>
-            <a:effectRef idx="0">
-              <a:schemeClr val="dk1"/>
-            </a:effectRef>
-            <a:fontRef idx="minor">
-              <a:schemeClr val="dk1"/>
-            </a:fontRef>
-          </p:style>
-          <p:txBody>
-            <a:bodyPr rtlCol="0" anchor="ctr"/>
-            <a:lstStyle/>
-            <a:p>
-              <a:pPr algn="ctr"/>
-              <a:endParaRPr lang="en-US"/>
-            </a:p>
-          </p:txBody>
-        </p:sp>
-        <p:sp>
-          <p:nvSpPr>
-            <p:cNvPr id="134" name="Oval 133">
-              <a:extLst>
-                <a:ext uri="{FF2B5EF4-FFF2-40B4-BE49-F238E27FC236}">
-                  <a16:creationId xmlns:a16="http://schemas.microsoft.com/office/drawing/2014/main" id="{0A36FA44-4448-3EF9-8C2A-BCFCBD1D92C0}"/>
-                </a:ext>
-              </a:extLst>
-            </p:cNvPr>
-            <p:cNvSpPr/>
-            <p:nvPr/>
-          </p:nvSpPr>
-          <p:spPr>
-            <a:xfrm>
-              <a:off x="6068898" y="3119400"/>
-              <a:ext cx="470712" cy="470712"/>
-            </a:xfrm>
-            <a:prstGeom prst="ellipse">
-              <a:avLst/>
-            </a:prstGeom>
-          </p:spPr>
-          <p:style>
-            <a:lnRef idx="2">
-              <a:schemeClr val="dk1"/>
-            </a:lnRef>
-            <a:fillRef idx="1">
-              <a:schemeClr val="lt1"/>
-            </a:fillRef>
-            <a:effectRef idx="0">
-              <a:schemeClr val="dk1"/>
-            </a:effectRef>
-            <a:fontRef idx="minor">
-              <a:schemeClr val="dk1"/>
-            </a:fontRef>
-          </p:style>
-          <p:txBody>
-            <a:bodyPr rtlCol="0" anchor="ctr"/>
-            <a:lstStyle/>
-            <a:p>
-              <a:pPr algn="ctr"/>
-              <a:endParaRPr lang="en-US"/>
-            </a:p>
-          </p:txBody>
-        </p:sp>
-        <p:sp>
-          <p:nvSpPr>
-            <p:cNvPr id="135" name="Oval 134">
-              <a:extLst>
-                <a:ext uri="{FF2B5EF4-FFF2-40B4-BE49-F238E27FC236}">
-                  <a16:creationId xmlns:a16="http://schemas.microsoft.com/office/drawing/2014/main" id="{B7909E33-1320-4CC8-3249-F1A10292484B}"/>
-                </a:ext>
-              </a:extLst>
-            </p:cNvPr>
-            <p:cNvSpPr/>
-            <p:nvPr/>
-          </p:nvSpPr>
-          <p:spPr>
-            <a:xfrm>
-              <a:off x="6000900" y="3601371"/>
-              <a:ext cx="470712" cy="470712"/>
-            </a:xfrm>
-            <a:prstGeom prst="ellipse">
-              <a:avLst/>
-            </a:prstGeom>
-          </p:spPr>
-          <p:style>
-            <a:lnRef idx="2">
-              <a:schemeClr val="dk1"/>
-            </a:lnRef>
-            <a:fillRef idx="1">
-              <a:schemeClr val="lt1"/>
-            </a:fillRef>
-            <a:effectRef idx="0">
-              <a:schemeClr val="dk1"/>
-            </a:effectRef>
-            <a:fontRef idx="minor">
-              <a:schemeClr val="dk1"/>
-            </a:fontRef>
-          </p:style>
-          <p:txBody>
-            <a:bodyPr rtlCol="0" anchor="ctr"/>
-            <a:lstStyle/>
-            <a:p>
-              <a:pPr algn="ctr"/>
-              <a:endParaRPr lang="en-US"/>
-            </a:p>
-          </p:txBody>
-        </p:sp>
-        <p:sp>
-          <p:nvSpPr>
-            <p:cNvPr id="136" name="Oval 135">
-              <a:extLst>
-                <a:ext uri="{FF2B5EF4-FFF2-40B4-BE49-F238E27FC236}">
-                  <a16:creationId xmlns:a16="http://schemas.microsoft.com/office/drawing/2014/main" id="{7F467C8E-8AC3-A582-F8DA-CBF672BC441E}"/>
-                </a:ext>
-              </a:extLst>
-            </p:cNvPr>
-            <p:cNvSpPr/>
-            <p:nvPr/>
-          </p:nvSpPr>
-          <p:spPr>
-            <a:xfrm>
-              <a:off x="6513637" y="3270973"/>
-              <a:ext cx="470712" cy="470712"/>
-            </a:xfrm>
-            <a:prstGeom prst="ellipse">
-              <a:avLst/>
-            </a:prstGeom>
-          </p:spPr>
-          <p:style>
-            <a:lnRef idx="2">
-              <a:schemeClr val="dk1"/>
-            </a:lnRef>
-            <a:fillRef idx="1">
-              <a:schemeClr val="lt1"/>
-            </a:fillRef>
-            <a:effectRef idx="0">
-              <a:schemeClr val="dk1"/>
-            </a:effectRef>
-            <a:fontRef idx="minor">
-              <a:schemeClr val="dk1"/>
-            </a:fontRef>
-          </p:style>
-          <p:txBody>
-            <a:bodyPr rtlCol="0" anchor="ctr"/>
-            <a:lstStyle/>
-            <a:p>
-              <a:pPr algn="ctr"/>
-              <a:endParaRPr lang="en-US"/>
-            </a:p>
-          </p:txBody>
-        </p:sp>
-      </p:grpSp>
-      <p:grpSp>
-        <p:nvGrpSpPr>
-          <p:cNvPr id="138" name="Group 137">
-            <a:extLst>
-              <a:ext uri="{FF2B5EF4-FFF2-40B4-BE49-F238E27FC236}">
-                <a16:creationId xmlns:a16="http://schemas.microsoft.com/office/drawing/2014/main" id="{1ADD6E77-8691-B123-63D2-E4DFEFD08CC9}"/>
-              </a:ext>
-            </a:extLst>
-          </p:cNvPr>
-          <p:cNvGrpSpPr/>
-          <p:nvPr/>
-        </p:nvGrpSpPr>
-        <p:grpSpPr>
-          <a:xfrm>
-            <a:off x="3290221" y="1988287"/>
-            <a:ext cx="1371600" cy="1371600"/>
-            <a:chOff x="213377" y="483633"/>
-            <a:chExt cx="1371600" cy="1371600"/>
-          </a:xfrm>
-        </p:grpSpPr>
-        <p:sp>
-          <p:nvSpPr>
-            <p:cNvPr id="139" name="Rectangle 138">
-              <a:extLst>
-                <a:ext uri="{FF2B5EF4-FFF2-40B4-BE49-F238E27FC236}">
-                  <a16:creationId xmlns:a16="http://schemas.microsoft.com/office/drawing/2014/main" id="{AB1A7D76-148B-D499-E32C-F48B00CAF76E}"/>
-                </a:ext>
-              </a:extLst>
-            </p:cNvPr>
-            <p:cNvSpPr/>
-            <p:nvPr/>
-          </p:nvSpPr>
-          <p:spPr>
-            <a:xfrm>
-              <a:off x="213377" y="483633"/>
-              <a:ext cx="1371600" cy="1371600"/>
-            </a:xfrm>
-            <a:prstGeom prst="rect">
-              <a:avLst/>
-            </a:prstGeom>
-            <a:noFill/>
-            <a:ln w="76200">
-              <a:solidFill>
-                <a:schemeClr val="tx1"/>
-              </a:solidFill>
-            </a:ln>
-          </p:spPr>
-          <p:style>
-            <a:lnRef idx="2">
-              <a:schemeClr val="accent1">
-                <a:shade val="50000"/>
-              </a:schemeClr>
-            </a:lnRef>
-            <a:fillRef idx="1">
-              <a:schemeClr val="accent1"/>
-            </a:fillRef>
-            <a:effectRef idx="0">
-              <a:schemeClr val="accent1"/>
-            </a:effectRef>
-            <a:fontRef idx="minor">
-              <a:schemeClr val="lt1"/>
-            </a:fontRef>
-          </p:style>
-          <p:txBody>
-            <a:bodyPr rtlCol="0" anchor="ctr"/>
-            <a:lstStyle/>
-            <a:p>
-              <a:pPr algn="ctr"/>
-              <a:endParaRPr lang="en-US"/>
-            </a:p>
-          </p:txBody>
-        </p:sp>
-        <p:sp>
-          <p:nvSpPr>
-            <p:cNvPr id="140" name="Hexagon 139">
-              <a:extLst>
-                <a:ext uri="{FF2B5EF4-FFF2-40B4-BE49-F238E27FC236}">
-                  <a16:creationId xmlns:a16="http://schemas.microsoft.com/office/drawing/2014/main" id="{CC5F603C-E71C-3E01-9781-5C82D89058F3}"/>
-                </a:ext>
-              </a:extLst>
-            </p:cNvPr>
-            <p:cNvSpPr/>
-            <p:nvPr/>
-          </p:nvSpPr>
-          <p:spPr>
-            <a:xfrm>
-              <a:off x="304817" y="699533"/>
-              <a:ext cx="1188720" cy="1097280"/>
-            </a:xfrm>
-            <a:prstGeom prst="hexagon">
-              <a:avLst/>
-            </a:prstGeom>
-            <a:noFill/>
-            <a:ln w="38100" cap="flat" cmpd="sng" algn="ctr">
-              <a:solidFill>
-                <a:schemeClr val="dk1"/>
-              </a:solidFill>
-              <a:prstDash val="solid"/>
-              <a:round/>
-              <a:headEnd type="none" w="med" len="med"/>
-              <a:tailEnd type="none" w="med" len="med"/>
-            </a:ln>
-          </p:spPr>
-          <p:style>
-            <a:lnRef idx="0">
-              <a:scrgbClr r="0" g="0" b="0"/>
-            </a:lnRef>
-            <a:fillRef idx="0">
-              <a:scrgbClr r="0" g="0" b="0"/>
-            </a:fillRef>
-            <a:effectRef idx="0">
-              <a:scrgbClr r="0" g="0" b="0"/>
-            </a:effectRef>
-            <a:fontRef idx="minor">
-              <a:schemeClr val="dk1"/>
-            </a:fontRef>
-          </p:style>
-          <p:txBody>
-            <a:bodyPr rtlCol="0" anchor="ctr"/>
-            <a:lstStyle/>
-            <a:p>
-              <a:pPr algn="ctr"/>
-              <a:endParaRPr lang="en-US"/>
-            </a:p>
-          </p:txBody>
-        </p:sp>
-      </p:grpSp>
-      <p:grpSp>
-        <p:nvGrpSpPr>
           <p:cNvPr id="3" name="Group 2">
             <a:extLst>
               <a:ext uri="{FF2B5EF4-FFF2-40B4-BE49-F238E27FC236}">
@@ -28845,7 +27339,7 @@
           </p:nvSpPr>
           <p:spPr>
             <a:xfrm>
-              <a:off x="304817" y="699533"/>
+              <a:off x="304817" y="705883"/>
               <a:ext cx="1188720" cy="1097280"/>
             </a:xfrm>
             <a:prstGeom prst="hexagon">
@@ -28972,7 +27466,7 @@
           </p:nvSpPr>
           <p:spPr>
             <a:xfrm>
-              <a:off x="304817" y="699533"/>
+              <a:off x="304817" y="705883"/>
               <a:ext cx="1188720" cy="1097280"/>
             </a:xfrm>
             <a:prstGeom prst="hexagon">
@@ -29146,7 +27640,7 @@
           </p:nvSpPr>
           <p:spPr>
             <a:xfrm>
-              <a:off x="304817" y="699533"/>
+              <a:off x="304817" y="705883"/>
               <a:ext cx="1188720" cy="1097280"/>
             </a:xfrm>
             <a:prstGeom prst="hexagon">
@@ -30276,6 +28770,928 @@
           </p:txBody>
         </p:sp>
       </p:grpSp>
+      <p:pic>
+        <p:nvPicPr>
+          <p:cNvPr id="182" name="Picture 2" descr="Mantis Silhouette Design Stock Vector (Royalty Free) 696869110 |  Shutterstock">
+            <a:extLst>
+              <a:ext uri="{FF2B5EF4-FFF2-40B4-BE49-F238E27FC236}">
+                <a16:creationId xmlns:a16="http://schemas.microsoft.com/office/drawing/2014/main" id="{370FBE31-2C2B-072C-17C4-98A57B6C621B}"/>
+              </a:ext>
+            </a:extLst>
+          </p:cNvPr>
+          <p:cNvPicPr>
+            <a:picLocks noChangeAspect="1" noChangeArrowheads="1"/>
+          </p:cNvPicPr>
+          <p:nvPr/>
+        </p:nvPicPr>
+        <p:blipFill rotWithShape="1">
+          <a:blip r:embed="rId17">
+            <a:extLst>
+              <a:ext uri="{28A0092B-C50C-407E-A947-70E740481C1C}">
+                <a14:useLocalDpi xmlns:a14="http://schemas.microsoft.com/office/drawing/2010/main" val="0"/>
+              </a:ext>
+            </a:extLst>
+          </a:blip>
+          <a:srcRect l="10735" t="16411" r="13266" b="22473"/>
+          <a:stretch/>
+        </p:blipFill>
+        <p:spPr bwMode="auto">
+          <a:xfrm flipH="1">
+            <a:off x="2021789" y="1071799"/>
+            <a:ext cx="798847" cy="589755"/>
+          </a:xfrm>
+          <a:prstGeom prst="rect">
+            <a:avLst/>
+          </a:prstGeom>
+          <a:noFill/>
+          <a:extLst>
+            <a:ext uri="{909E8E84-426E-40DD-AFC4-6F175D3DCCD1}">
+              <a14:hiddenFill xmlns:a14="http://schemas.microsoft.com/office/drawing/2010/main">
+                <a:solidFill>
+                  <a:srgbClr val="FFFFFF"/>
+                </a:solidFill>
+              </a14:hiddenFill>
+            </a:ext>
+          </a:extLst>
+        </p:spPr>
+      </p:pic>
+      <p:pic>
+        <p:nvPicPr>
+          <p:cNvPr id="183" name="Picture 2" descr="Mantis Silhouette Design Stock Vector (Royalty Free) 696869110 |  Shutterstock">
+            <a:extLst>
+              <a:ext uri="{FF2B5EF4-FFF2-40B4-BE49-F238E27FC236}">
+                <a16:creationId xmlns:a16="http://schemas.microsoft.com/office/drawing/2014/main" id="{63B319A1-CB94-4D78-6F32-4C992119D423}"/>
+              </a:ext>
+            </a:extLst>
+          </p:cNvPr>
+          <p:cNvPicPr>
+            <a:picLocks noChangeAspect="1" noChangeArrowheads="1"/>
+          </p:cNvPicPr>
+          <p:nvPr/>
+        </p:nvPicPr>
+        <p:blipFill rotWithShape="1">
+          <a:blip r:embed="rId17">
+            <a:extLst>
+              <a:ext uri="{28A0092B-C50C-407E-A947-70E740481C1C}">
+                <a14:useLocalDpi xmlns:a14="http://schemas.microsoft.com/office/drawing/2010/main" val="0"/>
+              </a:ext>
+            </a:extLst>
+          </a:blip>
+          <a:srcRect l="10735" t="16411" r="13266" b="22473"/>
+          <a:stretch/>
+        </p:blipFill>
+        <p:spPr bwMode="auto">
+          <a:xfrm flipH="1">
+            <a:off x="486648" y="953587"/>
+            <a:ext cx="798847" cy="589755"/>
+          </a:xfrm>
+          <a:prstGeom prst="rect">
+            <a:avLst/>
+          </a:prstGeom>
+          <a:noFill/>
+          <a:extLst>
+            <a:ext uri="{909E8E84-426E-40DD-AFC4-6F175D3DCCD1}">
+              <a14:hiddenFill xmlns:a14="http://schemas.microsoft.com/office/drawing/2010/main">
+                <a:solidFill>
+                  <a:srgbClr val="FFFFFF"/>
+                </a:solidFill>
+              </a14:hiddenFill>
+            </a:ext>
+          </a:extLst>
+        </p:spPr>
+      </p:pic>
+      <p:grpSp>
+        <p:nvGrpSpPr>
+          <p:cNvPr id="184" name="Group 183">
+            <a:extLst>
+              <a:ext uri="{FF2B5EF4-FFF2-40B4-BE49-F238E27FC236}">
+                <a16:creationId xmlns:a16="http://schemas.microsoft.com/office/drawing/2014/main" id="{D08785AA-049A-E35D-7677-0DE280185D26}"/>
+              </a:ext>
+            </a:extLst>
+          </p:cNvPr>
+          <p:cNvGrpSpPr/>
+          <p:nvPr/>
+        </p:nvGrpSpPr>
+        <p:grpSpPr>
+          <a:xfrm>
+            <a:off x="190521" y="483925"/>
+            <a:ext cx="1371600" cy="1371600"/>
+            <a:chOff x="213377" y="483633"/>
+            <a:chExt cx="1371600" cy="1371600"/>
+          </a:xfrm>
+        </p:grpSpPr>
+        <p:sp>
+          <p:nvSpPr>
+            <p:cNvPr id="185" name="Rectangle 184">
+              <a:extLst>
+                <a:ext uri="{FF2B5EF4-FFF2-40B4-BE49-F238E27FC236}">
+                  <a16:creationId xmlns:a16="http://schemas.microsoft.com/office/drawing/2014/main" id="{99EB7BD1-F331-67CB-EE86-C8D17FA7283F}"/>
+                </a:ext>
+              </a:extLst>
+            </p:cNvPr>
+            <p:cNvSpPr/>
+            <p:nvPr/>
+          </p:nvSpPr>
+          <p:spPr>
+            <a:xfrm>
+              <a:off x="213377" y="483633"/>
+              <a:ext cx="1371600" cy="1371600"/>
+            </a:xfrm>
+            <a:prstGeom prst="rect">
+              <a:avLst/>
+            </a:prstGeom>
+            <a:noFill/>
+            <a:ln w="76200">
+              <a:solidFill>
+                <a:schemeClr val="tx1"/>
+              </a:solidFill>
+            </a:ln>
+          </p:spPr>
+          <p:style>
+            <a:lnRef idx="2">
+              <a:schemeClr val="accent1">
+                <a:shade val="50000"/>
+              </a:schemeClr>
+            </a:lnRef>
+            <a:fillRef idx="1">
+              <a:schemeClr val="accent1"/>
+            </a:fillRef>
+            <a:effectRef idx="0">
+              <a:schemeClr val="accent1"/>
+            </a:effectRef>
+            <a:fontRef idx="minor">
+              <a:schemeClr val="lt1"/>
+            </a:fontRef>
+          </p:style>
+          <p:txBody>
+            <a:bodyPr rtlCol="0" anchor="ctr"/>
+            <a:lstStyle/>
+            <a:p>
+              <a:pPr algn="ctr"/>
+              <a:endParaRPr lang="en-US"/>
+            </a:p>
+          </p:txBody>
+        </p:sp>
+        <p:sp>
+          <p:nvSpPr>
+            <p:cNvPr id="186" name="Hexagon 185">
+              <a:extLst>
+                <a:ext uri="{FF2B5EF4-FFF2-40B4-BE49-F238E27FC236}">
+                  <a16:creationId xmlns:a16="http://schemas.microsoft.com/office/drawing/2014/main" id="{399D832C-29ED-5787-9267-E2C4B335EAE4}"/>
+                </a:ext>
+              </a:extLst>
+            </p:cNvPr>
+            <p:cNvSpPr/>
+            <p:nvPr/>
+          </p:nvSpPr>
+          <p:spPr>
+            <a:xfrm>
+              <a:off x="304817" y="699533"/>
+              <a:ext cx="1188720" cy="1097280"/>
+            </a:xfrm>
+            <a:prstGeom prst="hexagon">
+              <a:avLst/>
+            </a:prstGeom>
+            <a:noFill/>
+            <a:ln w="38100" cap="flat" cmpd="sng" algn="ctr">
+              <a:solidFill>
+                <a:schemeClr val="dk1"/>
+              </a:solidFill>
+              <a:prstDash val="solid"/>
+              <a:round/>
+              <a:headEnd type="none" w="med" len="med"/>
+              <a:tailEnd type="none" w="med" len="med"/>
+            </a:ln>
+          </p:spPr>
+          <p:style>
+            <a:lnRef idx="0">
+              <a:scrgbClr r="0" g="0" b="0"/>
+            </a:lnRef>
+            <a:fillRef idx="0">
+              <a:scrgbClr r="0" g="0" b="0"/>
+            </a:fillRef>
+            <a:effectRef idx="0">
+              <a:scrgbClr r="0" g="0" b="0"/>
+            </a:effectRef>
+            <a:fontRef idx="minor">
+              <a:schemeClr val="dk1"/>
+            </a:fontRef>
+          </p:style>
+          <p:txBody>
+            <a:bodyPr rtlCol="0" anchor="ctr"/>
+            <a:lstStyle/>
+            <a:p>
+              <a:pPr algn="ctr"/>
+              <a:endParaRPr lang="en-US"/>
+            </a:p>
+          </p:txBody>
+        </p:sp>
+      </p:grpSp>
+      <p:grpSp>
+        <p:nvGrpSpPr>
+          <p:cNvPr id="187" name="Group 186">
+            <a:extLst>
+              <a:ext uri="{FF2B5EF4-FFF2-40B4-BE49-F238E27FC236}">
+                <a16:creationId xmlns:a16="http://schemas.microsoft.com/office/drawing/2014/main" id="{AB884438-1724-1F3E-9439-729088AE6E7F}"/>
+              </a:ext>
+            </a:extLst>
+          </p:cNvPr>
+          <p:cNvGrpSpPr/>
+          <p:nvPr/>
+        </p:nvGrpSpPr>
+        <p:grpSpPr>
+          <a:xfrm>
+            <a:off x="1758971" y="483925"/>
+            <a:ext cx="1371600" cy="1371600"/>
+            <a:chOff x="213377" y="483633"/>
+            <a:chExt cx="1371600" cy="1371600"/>
+          </a:xfrm>
+        </p:grpSpPr>
+        <p:sp>
+          <p:nvSpPr>
+            <p:cNvPr id="188" name="Rectangle 187">
+              <a:extLst>
+                <a:ext uri="{FF2B5EF4-FFF2-40B4-BE49-F238E27FC236}">
+                  <a16:creationId xmlns:a16="http://schemas.microsoft.com/office/drawing/2014/main" id="{9C64075E-44EB-F541-BFE3-486E724D8B25}"/>
+                </a:ext>
+              </a:extLst>
+            </p:cNvPr>
+            <p:cNvSpPr/>
+            <p:nvPr/>
+          </p:nvSpPr>
+          <p:spPr>
+            <a:xfrm>
+              <a:off x="213377" y="483633"/>
+              <a:ext cx="1371600" cy="1371600"/>
+            </a:xfrm>
+            <a:prstGeom prst="rect">
+              <a:avLst/>
+            </a:prstGeom>
+            <a:noFill/>
+            <a:ln w="76200">
+              <a:solidFill>
+                <a:schemeClr val="tx1"/>
+              </a:solidFill>
+            </a:ln>
+          </p:spPr>
+          <p:style>
+            <a:lnRef idx="2">
+              <a:schemeClr val="accent1">
+                <a:shade val="50000"/>
+              </a:schemeClr>
+            </a:lnRef>
+            <a:fillRef idx="1">
+              <a:schemeClr val="accent1"/>
+            </a:fillRef>
+            <a:effectRef idx="0">
+              <a:schemeClr val="accent1"/>
+            </a:effectRef>
+            <a:fontRef idx="minor">
+              <a:schemeClr val="lt1"/>
+            </a:fontRef>
+          </p:style>
+          <p:txBody>
+            <a:bodyPr rtlCol="0" anchor="ctr"/>
+            <a:lstStyle/>
+            <a:p>
+              <a:pPr algn="ctr"/>
+              <a:endParaRPr lang="en-US"/>
+            </a:p>
+          </p:txBody>
+        </p:sp>
+        <p:sp>
+          <p:nvSpPr>
+            <p:cNvPr id="189" name="Hexagon 188">
+              <a:extLst>
+                <a:ext uri="{FF2B5EF4-FFF2-40B4-BE49-F238E27FC236}">
+                  <a16:creationId xmlns:a16="http://schemas.microsoft.com/office/drawing/2014/main" id="{A136FF86-0EDD-AA35-1569-6E2E238405DB}"/>
+                </a:ext>
+              </a:extLst>
+            </p:cNvPr>
+            <p:cNvSpPr/>
+            <p:nvPr/>
+          </p:nvSpPr>
+          <p:spPr>
+            <a:xfrm>
+              <a:off x="304817" y="699533"/>
+              <a:ext cx="1188720" cy="1097280"/>
+            </a:xfrm>
+            <a:prstGeom prst="hexagon">
+              <a:avLst/>
+            </a:prstGeom>
+            <a:noFill/>
+            <a:ln w="38100" cap="flat" cmpd="sng" algn="ctr">
+              <a:solidFill>
+                <a:schemeClr val="dk1"/>
+              </a:solidFill>
+              <a:prstDash val="solid"/>
+              <a:round/>
+              <a:headEnd type="none" w="med" len="med"/>
+              <a:tailEnd type="none" w="med" len="med"/>
+            </a:ln>
+          </p:spPr>
+          <p:style>
+            <a:lnRef idx="0">
+              <a:scrgbClr r="0" g="0" b="0"/>
+            </a:lnRef>
+            <a:fillRef idx="0">
+              <a:scrgbClr r="0" g="0" b="0"/>
+            </a:fillRef>
+            <a:effectRef idx="0">
+              <a:scrgbClr r="0" g="0" b="0"/>
+            </a:effectRef>
+            <a:fontRef idx="minor">
+              <a:schemeClr val="dk1"/>
+            </a:fontRef>
+          </p:style>
+          <p:txBody>
+            <a:bodyPr rtlCol="0" anchor="ctr"/>
+            <a:lstStyle/>
+            <a:p>
+              <a:pPr algn="ctr"/>
+              <a:endParaRPr lang="en-US"/>
+            </a:p>
+          </p:txBody>
+        </p:sp>
+      </p:grpSp>
+      <p:grpSp>
+        <p:nvGrpSpPr>
+          <p:cNvPr id="190" name="Group 189">
+            <a:extLst>
+              <a:ext uri="{FF2B5EF4-FFF2-40B4-BE49-F238E27FC236}">
+                <a16:creationId xmlns:a16="http://schemas.microsoft.com/office/drawing/2014/main" id="{D5B744C1-3F97-3361-5767-E8B23A924C93}"/>
+              </a:ext>
+            </a:extLst>
+          </p:cNvPr>
+          <p:cNvGrpSpPr/>
+          <p:nvPr/>
+        </p:nvGrpSpPr>
+        <p:grpSpPr>
+          <a:xfrm>
+            <a:off x="3256350" y="1996684"/>
+            <a:ext cx="1371600" cy="1371600"/>
+            <a:chOff x="213377" y="483633"/>
+            <a:chExt cx="1371600" cy="1371600"/>
+          </a:xfrm>
+        </p:grpSpPr>
+        <p:sp>
+          <p:nvSpPr>
+            <p:cNvPr id="191" name="Rectangle 190">
+              <a:extLst>
+                <a:ext uri="{FF2B5EF4-FFF2-40B4-BE49-F238E27FC236}">
+                  <a16:creationId xmlns:a16="http://schemas.microsoft.com/office/drawing/2014/main" id="{11ED8573-461F-2C74-88FF-123D089B6809}"/>
+                </a:ext>
+              </a:extLst>
+            </p:cNvPr>
+            <p:cNvSpPr/>
+            <p:nvPr/>
+          </p:nvSpPr>
+          <p:spPr>
+            <a:xfrm>
+              <a:off x="213377" y="483633"/>
+              <a:ext cx="1371600" cy="1371600"/>
+            </a:xfrm>
+            <a:prstGeom prst="rect">
+              <a:avLst/>
+            </a:prstGeom>
+            <a:noFill/>
+            <a:ln w="76200">
+              <a:solidFill>
+                <a:schemeClr val="tx1"/>
+              </a:solidFill>
+            </a:ln>
+          </p:spPr>
+          <p:style>
+            <a:lnRef idx="2">
+              <a:schemeClr val="accent1">
+                <a:shade val="50000"/>
+              </a:schemeClr>
+            </a:lnRef>
+            <a:fillRef idx="1">
+              <a:schemeClr val="accent1"/>
+            </a:fillRef>
+            <a:effectRef idx="0">
+              <a:schemeClr val="accent1"/>
+            </a:effectRef>
+            <a:fontRef idx="minor">
+              <a:schemeClr val="lt1"/>
+            </a:fontRef>
+          </p:style>
+          <p:txBody>
+            <a:bodyPr rtlCol="0" anchor="ctr"/>
+            <a:lstStyle/>
+            <a:p>
+              <a:pPr algn="ctr"/>
+              <a:endParaRPr lang="en-US"/>
+            </a:p>
+          </p:txBody>
+        </p:sp>
+        <p:sp>
+          <p:nvSpPr>
+            <p:cNvPr id="192" name="Hexagon 191">
+              <a:extLst>
+                <a:ext uri="{FF2B5EF4-FFF2-40B4-BE49-F238E27FC236}">
+                  <a16:creationId xmlns:a16="http://schemas.microsoft.com/office/drawing/2014/main" id="{F05056AB-2BC1-C48A-B9BA-CB74B99F36D8}"/>
+                </a:ext>
+              </a:extLst>
+            </p:cNvPr>
+            <p:cNvSpPr/>
+            <p:nvPr/>
+          </p:nvSpPr>
+          <p:spPr>
+            <a:xfrm>
+              <a:off x="304817" y="699533"/>
+              <a:ext cx="1188720" cy="1097280"/>
+            </a:xfrm>
+            <a:prstGeom prst="hexagon">
+              <a:avLst/>
+            </a:prstGeom>
+            <a:noFill/>
+            <a:ln w="38100" cap="flat" cmpd="sng" algn="ctr">
+              <a:solidFill>
+                <a:schemeClr val="dk1"/>
+              </a:solidFill>
+              <a:prstDash val="solid"/>
+              <a:round/>
+              <a:headEnd type="none" w="med" len="med"/>
+              <a:tailEnd type="none" w="med" len="med"/>
+            </a:ln>
+          </p:spPr>
+          <p:style>
+            <a:lnRef idx="0">
+              <a:scrgbClr r="0" g="0" b="0"/>
+            </a:lnRef>
+            <a:fillRef idx="0">
+              <a:scrgbClr r="0" g="0" b="0"/>
+            </a:fillRef>
+            <a:effectRef idx="0">
+              <a:scrgbClr r="0" g="0" b="0"/>
+            </a:effectRef>
+            <a:fontRef idx="minor">
+              <a:schemeClr val="dk1"/>
+            </a:fontRef>
+          </p:style>
+          <p:txBody>
+            <a:bodyPr rtlCol="0" anchor="ctr"/>
+            <a:lstStyle/>
+            <a:p>
+              <a:pPr algn="ctr"/>
+              <a:endParaRPr lang="en-US"/>
+            </a:p>
+          </p:txBody>
+        </p:sp>
+      </p:grpSp>
+      <p:sp>
+        <p:nvSpPr>
+          <p:cNvPr id="193" name="Oval 192">
+            <a:extLst>
+              <a:ext uri="{FF2B5EF4-FFF2-40B4-BE49-F238E27FC236}">
+                <a16:creationId xmlns:a16="http://schemas.microsoft.com/office/drawing/2014/main" id="{CB81F4B8-19B1-508B-3D93-7E60DD0952EE}"/>
+              </a:ext>
+            </a:extLst>
+          </p:cNvPr>
+          <p:cNvSpPr/>
+          <p:nvPr/>
+        </p:nvSpPr>
+        <p:spPr>
+          <a:xfrm>
+            <a:off x="2495429" y="762907"/>
+            <a:ext cx="274320" cy="274320"/>
+          </a:xfrm>
+          <a:prstGeom prst="ellipse">
+            <a:avLst/>
+          </a:prstGeom>
+          <a:noFill/>
+          <a:ln w="57150" cap="flat" cmpd="sng" algn="ctr">
+            <a:solidFill>
+              <a:schemeClr val="dk1"/>
+            </a:solidFill>
+            <a:prstDash val="solid"/>
+            <a:round/>
+            <a:headEnd type="none" w="med" len="med"/>
+            <a:tailEnd type="none" w="med" len="med"/>
+          </a:ln>
+        </p:spPr>
+        <p:style>
+          <a:lnRef idx="0">
+            <a:scrgbClr r="0" g="0" b="0"/>
+          </a:lnRef>
+          <a:fillRef idx="0">
+            <a:scrgbClr r="0" g="0" b="0"/>
+          </a:fillRef>
+          <a:effectRef idx="0">
+            <a:scrgbClr r="0" g="0" b="0"/>
+          </a:effectRef>
+          <a:fontRef idx="minor">
+            <a:schemeClr val="dk1"/>
+          </a:fontRef>
+        </p:style>
+        <p:txBody>
+          <a:bodyPr rtlCol="0" anchor="ctr"/>
+          <a:lstStyle/>
+          <a:p>
+            <a:pPr algn="ctr"/>
+            <a:endParaRPr lang="en-US"/>
+          </a:p>
+        </p:txBody>
+      </p:sp>
+      <p:grpSp>
+        <p:nvGrpSpPr>
+          <p:cNvPr id="194" name="Group 193">
+            <a:extLst>
+              <a:ext uri="{FF2B5EF4-FFF2-40B4-BE49-F238E27FC236}">
+                <a16:creationId xmlns:a16="http://schemas.microsoft.com/office/drawing/2014/main" id="{3FB9D6BC-10E5-1B0F-A869-5DA13FF53D2C}"/>
+              </a:ext>
+            </a:extLst>
+          </p:cNvPr>
+          <p:cNvGrpSpPr/>
+          <p:nvPr/>
+        </p:nvGrpSpPr>
+        <p:grpSpPr>
+          <a:xfrm>
+            <a:off x="3487571" y="2513919"/>
+            <a:ext cx="937313" cy="494610"/>
+            <a:chOff x="5859312" y="3132616"/>
+            <a:chExt cx="2744937" cy="1448473"/>
+          </a:xfrm>
+        </p:grpSpPr>
+        <p:pic>
+          <p:nvPicPr>
+            <p:cNvPr id="195" name="Picture 2" descr="Mantis Silhouette Design Stock Vector (Royalty Free) 696869110 |  Shutterstock">
+              <a:extLst>
+                <a:ext uri="{FF2B5EF4-FFF2-40B4-BE49-F238E27FC236}">
+                  <a16:creationId xmlns:a16="http://schemas.microsoft.com/office/drawing/2014/main" id="{E25AB92B-9C5F-0ED0-D17C-71DE59BB03C0}"/>
+                </a:ext>
+              </a:extLst>
+            </p:cNvPr>
+            <p:cNvPicPr>
+              <a:picLocks noChangeAspect="1" noChangeArrowheads="1"/>
+            </p:cNvPicPr>
+            <p:nvPr/>
+          </p:nvPicPr>
+          <p:blipFill rotWithShape="1">
+            <a:blip r:embed="rId17">
+              <a:extLst>
+                <a:ext uri="{28A0092B-C50C-407E-A947-70E740481C1C}">
+                  <a14:useLocalDpi xmlns:a14="http://schemas.microsoft.com/office/drawing/2010/main" val="0"/>
+                </a:ext>
+              </a:extLst>
+            </a:blip>
+            <a:srcRect l="10735" t="16411" r="13266" b="22473"/>
+            <a:stretch/>
+          </p:blipFill>
+          <p:spPr bwMode="auto">
+            <a:xfrm flipH="1">
+              <a:off x="5859312" y="3268607"/>
+              <a:ext cx="1722492" cy="1271643"/>
+            </a:xfrm>
+            <a:prstGeom prst="rect">
+              <a:avLst/>
+            </a:prstGeom>
+            <a:noFill/>
+            <a:extLst>
+              <a:ext uri="{909E8E84-426E-40DD-AFC4-6F175D3DCCD1}">
+                <a14:hiddenFill xmlns:a14="http://schemas.microsoft.com/office/drawing/2010/main">
+                  <a:solidFill>
+                    <a:srgbClr val="FFFFFF"/>
+                  </a:solidFill>
+                </a14:hiddenFill>
+              </a:ext>
+            </a:extLst>
+          </p:spPr>
+        </p:pic>
+        <p:grpSp>
+          <p:nvGrpSpPr>
+            <p:cNvPr id="196" name="Group 195">
+              <a:extLst>
+                <a:ext uri="{FF2B5EF4-FFF2-40B4-BE49-F238E27FC236}">
+                  <a16:creationId xmlns:a16="http://schemas.microsoft.com/office/drawing/2014/main" id="{F88D65D9-26E5-EFDD-2CAF-02783F1EE94D}"/>
+                </a:ext>
+              </a:extLst>
+            </p:cNvPr>
+            <p:cNvGrpSpPr/>
+            <p:nvPr/>
+          </p:nvGrpSpPr>
+          <p:grpSpPr>
+            <a:xfrm>
+              <a:off x="6588008" y="3132616"/>
+              <a:ext cx="2016241" cy="1448473"/>
+              <a:chOff x="5946659" y="1194460"/>
+              <a:chExt cx="1449808" cy="1448473"/>
+            </a:xfrm>
+          </p:grpSpPr>
+          <p:sp>
+            <p:nvSpPr>
+              <p:cNvPr id="197" name="Oval 196">
+                <a:extLst>
+                  <a:ext uri="{FF2B5EF4-FFF2-40B4-BE49-F238E27FC236}">
+                    <a16:creationId xmlns:a16="http://schemas.microsoft.com/office/drawing/2014/main" id="{279ACDB3-F2A9-CB49-27A7-3062B4523659}"/>
+                  </a:ext>
+                </a:extLst>
+              </p:cNvPr>
+              <p:cNvSpPr/>
+              <p:nvPr/>
+            </p:nvSpPr>
+            <p:spPr>
+              <a:xfrm>
+                <a:off x="5946659" y="1194460"/>
+                <a:ext cx="1449808" cy="1440983"/>
+              </a:xfrm>
+              <a:prstGeom prst="ellipse">
+                <a:avLst/>
+              </a:prstGeom>
+            </p:spPr>
+            <p:style>
+              <a:lnRef idx="2">
+                <a:schemeClr val="dk1">
+                  <a:shade val="50000"/>
+                </a:schemeClr>
+              </a:lnRef>
+              <a:fillRef idx="1">
+                <a:schemeClr val="dk1"/>
+              </a:fillRef>
+              <a:effectRef idx="0">
+                <a:schemeClr val="dk1"/>
+              </a:effectRef>
+              <a:fontRef idx="minor">
+                <a:schemeClr val="lt1"/>
+              </a:fontRef>
+            </p:style>
+            <p:txBody>
+              <a:bodyPr rtlCol="0" anchor="ctr"/>
+              <a:lstStyle/>
+              <a:p>
+                <a:pPr algn="ctr"/>
+                <a:endParaRPr lang="en-US"/>
+              </a:p>
+            </p:txBody>
+          </p:sp>
+          <p:sp>
+            <p:nvSpPr>
+              <p:cNvPr id="198" name="Oval 197">
+                <a:extLst>
+                  <a:ext uri="{FF2B5EF4-FFF2-40B4-BE49-F238E27FC236}">
+                    <a16:creationId xmlns:a16="http://schemas.microsoft.com/office/drawing/2014/main" id="{69ACC9E1-1CFF-E907-7313-39FAA9B49A5C}"/>
+                  </a:ext>
+                </a:extLst>
+              </p:cNvPr>
+              <p:cNvSpPr/>
+              <p:nvPr/>
+            </p:nvSpPr>
+            <p:spPr>
+              <a:xfrm>
+                <a:off x="6153618" y="1374790"/>
+                <a:ext cx="453040" cy="453041"/>
+              </a:xfrm>
+              <a:prstGeom prst="ellipse">
+                <a:avLst/>
+              </a:prstGeom>
+            </p:spPr>
+            <p:style>
+              <a:lnRef idx="2">
+                <a:schemeClr val="dk1"/>
+              </a:lnRef>
+              <a:fillRef idx="1">
+                <a:schemeClr val="lt1"/>
+              </a:fillRef>
+              <a:effectRef idx="0">
+                <a:schemeClr val="dk1"/>
+              </a:effectRef>
+              <a:fontRef idx="minor">
+                <a:schemeClr val="dk1"/>
+              </a:fontRef>
+            </p:style>
+            <p:txBody>
+              <a:bodyPr rtlCol="0" anchor="ctr"/>
+              <a:lstStyle/>
+              <a:p>
+                <a:pPr algn="ctr"/>
+                <a:endParaRPr lang="en-US"/>
+              </a:p>
+            </p:txBody>
+          </p:sp>
+          <p:sp>
+            <p:nvSpPr>
+              <p:cNvPr id="199" name="Oval 198">
+                <a:extLst>
+                  <a:ext uri="{FF2B5EF4-FFF2-40B4-BE49-F238E27FC236}">
+                    <a16:creationId xmlns:a16="http://schemas.microsoft.com/office/drawing/2014/main" id="{E0E054E9-6FAD-CB71-9836-5FA6BCD1ECE1}"/>
+                  </a:ext>
+                </a:extLst>
+              </p:cNvPr>
+              <p:cNvSpPr/>
+              <p:nvPr/>
+            </p:nvSpPr>
+            <p:spPr>
+              <a:xfrm>
+                <a:off x="6655275" y="1272974"/>
+                <a:ext cx="453040" cy="453041"/>
+              </a:xfrm>
+              <a:prstGeom prst="ellipse">
+                <a:avLst/>
+              </a:prstGeom>
+            </p:spPr>
+            <p:style>
+              <a:lnRef idx="2">
+                <a:schemeClr val="dk1"/>
+              </a:lnRef>
+              <a:fillRef idx="1">
+                <a:schemeClr val="lt1"/>
+              </a:fillRef>
+              <a:effectRef idx="0">
+                <a:schemeClr val="dk1"/>
+              </a:effectRef>
+              <a:fontRef idx="minor">
+                <a:schemeClr val="dk1"/>
+              </a:fontRef>
+            </p:style>
+            <p:txBody>
+              <a:bodyPr rtlCol="0" anchor="ctr"/>
+              <a:lstStyle/>
+              <a:p>
+                <a:pPr algn="ctr"/>
+                <a:endParaRPr lang="en-US"/>
+              </a:p>
+            </p:txBody>
+          </p:sp>
+          <p:sp>
+            <p:nvSpPr>
+              <p:cNvPr id="200" name="Oval 199">
+                <a:extLst>
+                  <a:ext uri="{FF2B5EF4-FFF2-40B4-BE49-F238E27FC236}">
+                    <a16:creationId xmlns:a16="http://schemas.microsoft.com/office/drawing/2014/main" id="{D119F509-070D-E953-4877-C69D28AC2098}"/>
+                  </a:ext>
+                </a:extLst>
+              </p:cNvPr>
+              <p:cNvSpPr/>
+              <p:nvPr/>
+            </p:nvSpPr>
+            <p:spPr>
+              <a:xfrm>
+                <a:off x="6031768" y="1869229"/>
+                <a:ext cx="453040" cy="453041"/>
+              </a:xfrm>
+              <a:prstGeom prst="ellipse">
+                <a:avLst/>
+              </a:prstGeom>
+            </p:spPr>
+            <p:style>
+              <a:lnRef idx="2">
+                <a:schemeClr val="dk1"/>
+              </a:lnRef>
+              <a:fillRef idx="1">
+                <a:schemeClr val="lt1"/>
+              </a:fillRef>
+              <a:effectRef idx="0">
+                <a:schemeClr val="dk1"/>
+              </a:effectRef>
+              <a:fontRef idx="minor">
+                <a:schemeClr val="dk1"/>
+              </a:fontRef>
+            </p:style>
+            <p:txBody>
+              <a:bodyPr rtlCol="0" anchor="ctr"/>
+              <a:lstStyle/>
+              <a:p>
+                <a:pPr algn="ctr"/>
+                <a:endParaRPr lang="en-US"/>
+              </a:p>
+            </p:txBody>
+          </p:sp>
+          <p:sp>
+            <p:nvSpPr>
+              <p:cNvPr id="201" name="Oval 200">
+                <a:extLst>
+                  <a:ext uri="{FF2B5EF4-FFF2-40B4-BE49-F238E27FC236}">
+                    <a16:creationId xmlns:a16="http://schemas.microsoft.com/office/drawing/2014/main" id="{0EFFF907-F551-5B60-FEAB-18AAE92B6DE0}"/>
+                  </a:ext>
+                </a:extLst>
+              </p:cNvPr>
+              <p:cNvSpPr/>
+              <p:nvPr/>
+            </p:nvSpPr>
+            <p:spPr>
+              <a:xfrm>
+                <a:off x="6480517" y="1726015"/>
+                <a:ext cx="453040" cy="453041"/>
+              </a:xfrm>
+              <a:prstGeom prst="ellipse">
+                <a:avLst/>
+              </a:prstGeom>
+            </p:spPr>
+            <p:style>
+              <a:lnRef idx="2">
+                <a:schemeClr val="dk1"/>
+              </a:lnRef>
+              <a:fillRef idx="1">
+                <a:schemeClr val="lt1"/>
+              </a:fillRef>
+              <a:effectRef idx="0">
+                <a:schemeClr val="dk1"/>
+              </a:effectRef>
+              <a:fontRef idx="minor">
+                <a:schemeClr val="dk1"/>
+              </a:fontRef>
+            </p:style>
+            <p:txBody>
+              <a:bodyPr rtlCol="0" anchor="ctr"/>
+              <a:lstStyle/>
+              <a:p>
+                <a:pPr algn="ctr"/>
+                <a:endParaRPr lang="en-US"/>
+              </a:p>
+            </p:txBody>
+          </p:sp>
+          <p:sp>
+            <p:nvSpPr>
+              <p:cNvPr id="202" name="Oval 201">
+                <a:extLst>
+                  <a:ext uri="{FF2B5EF4-FFF2-40B4-BE49-F238E27FC236}">
+                    <a16:creationId xmlns:a16="http://schemas.microsoft.com/office/drawing/2014/main" id="{7FC05068-E64F-4C6F-2428-E9B8836A78EE}"/>
+                  </a:ext>
+                </a:extLst>
+              </p:cNvPr>
+              <p:cNvSpPr/>
+              <p:nvPr/>
+            </p:nvSpPr>
+            <p:spPr>
+              <a:xfrm>
+                <a:off x="6415071" y="2189892"/>
+                <a:ext cx="453040" cy="453041"/>
+              </a:xfrm>
+              <a:prstGeom prst="ellipse">
+                <a:avLst/>
+              </a:prstGeom>
+            </p:spPr>
+            <p:style>
+              <a:lnRef idx="2">
+                <a:schemeClr val="dk1"/>
+              </a:lnRef>
+              <a:fillRef idx="1">
+                <a:schemeClr val="lt1"/>
+              </a:fillRef>
+              <a:effectRef idx="0">
+                <a:schemeClr val="dk1"/>
+              </a:effectRef>
+              <a:fontRef idx="minor">
+                <a:schemeClr val="dk1"/>
+              </a:fontRef>
+            </p:style>
+            <p:txBody>
+              <a:bodyPr rtlCol="0" anchor="ctr"/>
+              <a:lstStyle/>
+              <a:p>
+                <a:pPr algn="ctr"/>
+                <a:endParaRPr lang="en-US"/>
+              </a:p>
+            </p:txBody>
+          </p:sp>
+          <p:sp>
+            <p:nvSpPr>
+              <p:cNvPr id="203" name="Oval 202">
+                <a:extLst>
+                  <a:ext uri="{FF2B5EF4-FFF2-40B4-BE49-F238E27FC236}">
+                    <a16:creationId xmlns:a16="http://schemas.microsoft.com/office/drawing/2014/main" id="{FEB7BE71-F5CD-3B23-E300-BF119543D23D}"/>
+                  </a:ext>
+                </a:extLst>
+              </p:cNvPr>
+              <p:cNvSpPr/>
+              <p:nvPr/>
+            </p:nvSpPr>
+            <p:spPr>
+              <a:xfrm>
+                <a:off x="6908559" y="1871898"/>
+                <a:ext cx="453040" cy="453041"/>
+              </a:xfrm>
+              <a:prstGeom prst="ellipse">
+                <a:avLst/>
+              </a:prstGeom>
+            </p:spPr>
+            <p:style>
+              <a:lnRef idx="2">
+                <a:schemeClr val="dk1"/>
+              </a:lnRef>
+              <a:fillRef idx="1">
+                <a:schemeClr val="lt1"/>
+              </a:fillRef>
+              <a:effectRef idx="0">
+                <a:schemeClr val="dk1"/>
+              </a:effectRef>
+              <a:fontRef idx="minor">
+                <a:schemeClr val="dk1"/>
+              </a:fontRef>
+            </p:style>
+            <p:txBody>
+              <a:bodyPr rtlCol="0" anchor="ctr"/>
+              <a:lstStyle/>
+              <a:p>
+                <a:pPr algn="ctr"/>
+                <a:endParaRPr lang="en-US"/>
+              </a:p>
+            </p:txBody>
+          </p:sp>
+        </p:grpSp>
+      </p:grpSp>
     </p:spTree>
     <p:extLst>
       <p:ext uri="{BB962C8B-B14F-4D97-AF65-F5344CB8AC3E}">
@@ -30306,345 +29722,96 @@
           <a:chExt cx="0" cy="0"/>
         </a:xfrm>
       </p:grpSpPr>
-      <p:grpSp>
-        <p:nvGrpSpPr>
-          <p:cNvPr id="27" name="Group 26">
+      <p:pic>
+        <p:nvPicPr>
+          <p:cNvPr id="60" name="Picture 2" descr="Mantis Silhouette Design Stock Vector (Royalty Free) 696869110 |  Shutterstock">
             <a:extLst>
               <a:ext uri="{FF2B5EF4-FFF2-40B4-BE49-F238E27FC236}">
-                <a16:creationId xmlns:a16="http://schemas.microsoft.com/office/drawing/2014/main" id="{7ADD8C86-1EC0-0486-9367-2651AF2409E1}"/>
+                <a16:creationId xmlns:a16="http://schemas.microsoft.com/office/drawing/2014/main" id="{C595E614-21C8-AF74-3CA3-2615FCDE53BE}"/>
               </a:ext>
             </a:extLst>
           </p:cNvPr>
-          <p:cNvGrpSpPr/>
+          <p:cNvPicPr>
+            <a:picLocks noChangeAspect="1" noChangeArrowheads="1"/>
+          </p:cNvPicPr>
           <p:nvPr/>
-        </p:nvGrpSpPr>
-        <p:grpSpPr>
-          <a:xfrm>
-            <a:off x="434252" y="2026675"/>
-            <a:ext cx="821134" cy="939833"/>
-            <a:chOff x="4087416" y="1161299"/>
-            <a:chExt cx="1198370" cy="1371600"/>
-          </a:xfrm>
-        </p:grpSpPr>
-        <p:pic>
-          <p:nvPicPr>
-            <p:cNvPr id="87" name="Picture 10" descr="49 Ring Of Fire Silhouette Stock Photos, Pictures &amp;amp; Royalty-Free Images -  iStock">
-              <a:extLst>
-                <a:ext uri="{FF2B5EF4-FFF2-40B4-BE49-F238E27FC236}">
-                  <a16:creationId xmlns:a16="http://schemas.microsoft.com/office/drawing/2014/main" id="{4E319C77-C9A7-5C3F-DEDC-E94BCE8A4C3A}"/>
-                </a:ext>
-              </a:extLst>
-            </p:cNvPr>
-            <p:cNvPicPr>
-              <a:picLocks noChangeAspect="1" noChangeArrowheads="1"/>
-            </p:cNvPicPr>
-            <p:nvPr/>
-          </p:nvPicPr>
-          <p:blipFill rotWithShape="1">
-            <a:blip r:embed="rId2">
-              <a:extLst>
-                <a:ext uri="{28A0092B-C50C-407E-A947-70E740481C1C}">
-                  <a14:useLocalDpi xmlns:a14="http://schemas.microsoft.com/office/drawing/2010/main" val="0"/>
-                </a:ext>
-              </a:extLst>
-            </a:blip>
-            <a:srcRect l="8601" t="3260" r="8629" b="5100"/>
-            <a:stretch/>
-          </p:blipFill>
-          <p:spPr bwMode="auto">
-            <a:xfrm>
-              <a:off x="4087416" y="1161299"/>
-              <a:ext cx="1198370" cy="1371600"/>
-            </a:xfrm>
-            <a:prstGeom prst="rect">
-              <a:avLst/>
-            </a:prstGeom>
-            <a:noFill/>
+        </p:nvPicPr>
+        <p:blipFill rotWithShape="1">
+          <a:blip r:embed="rId2">
             <a:extLst>
-              <a:ext uri="{909E8E84-426E-40DD-AFC4-6F175D3DCCD1}">
-                <a14:hiddenFill xmlns:a14="http://schemas.microsoft.com/office/drawing/2010/main">
-                  <a:solidFill>
-                    <a:srgbClr val="FFFFFF"/>
-                  </a:solidFill>
-                </a14:hiddenFill>
+              <a:ext uri="{28A0092B-C50C-407E-A947-70E740481C1C}">
+                <a14:useLocalDpi xmlns:a14="http://schemas.microsoft.com/office/drawing/2010/main" val="0"/>
               </a:ext>
             </a:extLst>
-          </p:spPr>
-        </p:pic>
-        <p:pic>
-          <p:nvPicPr>
-            <p:cNvPr id="86" name="Picture 2" descr="Hydra vector Clipart Vector PNG , SVG, EPS, PSD, AI">
-              <a:extLst>
-                <a:ext uri="{FF2B5EF4-FFF2-40B4-BE49-F238E27FC236}">
-                  <a16:creationId xmlns:a16="http://schemas.microsoft.com/office/drawing/2014/main" id="{2B3DA827-9DA2-CD0F-A7DC-2342ACDC96A1}"/>
-                </a:ext>
-              </a:extLst>
-            </p:cNvPr>
-            <p:cNvPicPr>
-              <a:picLocks noChangeAspect="1" noChangeArrowheads="1"/>
-            </p:cNvPicPr>
-            <p:nvPr/>
-          </p:nvPicPr>
-          <p:blipFill rotWithShape="1">
-            <a:blip r:embed="rId3">
-              <a:extLst>
-                <a:ext uri="{28A0092B-C50C-407E-A947-70E740481C1C}">
-                  <a14:useLocalDpi xmlns:a14="http://schemas.microsoft.com/office/drawing/2010/main" val="0"/>
-                </a:ext>
-              </a:extLst>
-            </a:blip>
-            <a:srcRect l="32212" t="21635" r="26923" b="31570"/>
-            <a:stretch/>
-          </p:blipFill>
-          <p:spPr bwMode="auto">
-            <a:xfrm>
-              <a:off x="4425643" y="1661595"/>
-              <a:ext cx="521915" cy="597643"/>
-            </a:xfrm>
-            <a:prstGeom prst="rect">
-              <a:avLst/>
-            </a:prstGeom>
-            <a:noFill/>
-            <a:extLst>
-              <a:ext uri="{909E8E84-426E-40DD-AFC4-6F175D3DCCD1}">
-                <a14:hiddenFill xmlns:a14="http://schemas.microsoft.com/office/drawing/2010/main">
-                  <a:solidFill>
-                    <a:srgbClr val="FFFFFF"/>
-                  </a:solidFill>
-                </a14:hiddenFill>
-              </a:ext>
-            </a:extLst>
-          </p:spPr>
-        </p:pic>
-      </p:grpSp>
-      <p:grpSp>
-        <p:nvGrpSpPr>
-          <p:cNvPr id="26" name="Group 25">
+          </a:blip>
+          <a:srcRect l="10735" t="16411" r="13266" b="22473"/>
+          <a:stretch/>
+        </p:blipFill>
+        <p:spPr bwMode="auto">
+          <a:xfrm flipH="1">
+            <a:off x="1989567" y="734957"/>
+            <a:ext cx="798847" cy="589755"/>
+          </a:xfrm>
+          <a:prstGeom prst="rect">
+            <a:avLst/>
+          </a:prstGeom>
+          <a:noFill/>
+          <a:extLst>
+            <a:ext uri="{909E8E84-426E-40DD-AFC4-6F175D3DCCD1}">
+              <a14:hiddenFill xmlns:a14="http://schemas.microsoft.com/office/drawing/2010/main">
+                <a:solidFill>
+                  <a:srgbClr val="FFFFFF"/>
+                </a:solidFill>
+              </a14:hiddenFill>
+            </a:ext>
+          </a:extLst>
+        </p:spPr>
+      </p:pic>
+      <p:pic>
+        <p:nvPicPr>
+          <p:cNvPr id="55" name="Picture 2" descr="Mantis Silhouette Design Stock Vector (Royalty Free) 696869110 |  Shutterstock">
             <a:extLst>
               <a:ext uri="{FF2B5EF4-FFF2-40B4-BE49-F238E27FC236}">
-                <a16:creationId xmlns:a16="http://schemas.microsoft.com/office/drawing/2014/main" id="{A958C3B7-012A-96A5-CECE-99AD8138FDBC}"/>
+                <a16:creationId xmlns:a16="http://schemas.microsoft.com/office/drawing/2014/main" id="{87471417-172C-894A-4863-F4044117D8E9}"/>
               </a:ext>
             </a:extLst>
           </p:cNvPr>
-          <p:cNvGrpSpPr/>
+          <p:cNvPicPr>
+            <a:picLocks noChangeAspect="1" noChangeArrowheads="1"/>
+          </p:cNvPicPr>
           <p:nvPr/>
-        </p:nvGrpSpPr>
-        <p:grpSpPr>
-          <a:xfrm>
-            <a:off x="342912" y="489901"/>
-            <a:ext cx="934493" cy="875077"/>
-            <a:chOff x="4722300" y="1944558"/>
-            <a:chExt cx="934493" cy="875077"/>
-          </a:xfrm>
-        </p:grpSpPr>
-        <p:pic>
-          <p:nvPicPr>
-            <p:cNvPr id="2050" name="Picture 2" descr="Hydra vector Clipart Vector PNG , SVG, EPS, PSD, AI">
-              <a:extLst>
-                <a:ext uri="{FF2B5EF4-FFF2-40B4-BE49-F238E27FC236}">
-                  <a16:creationId xmlns:a16="http://schemas.microsoft.com/office/drawing/2014/main" id="{94EFF81E-1DA7-DFFF-9BBF-4FE77C4C8FAD}"/>
-                </a:ext>
-              </a:extLst>
-            </p:cNvPr>
-            <p:cNvPicPr>
-              <a:picLocks noChangeAspect="1" noChangeArrowheads="1"/>
-            </p:cNvPicPr>
-            <p:nvPr/>
-          </p:nvPicPr>
-          <p:blipFill rotWithShape="1">
-            <a:blip r:embed="rId3">
-              <a:extLst>
-                <a:ext uri="{28A0092B-C50C-407E-A947-70E740481C1C}">
-                  <a14:useLocalDpi xmlns:a14="http://schemas.microsoft.com/office/drawing/2010/main" val="0"/>
-                </a:ext>
-              </a:extLst>
-            </a:blip>
-            <a:srcRect l="32212" t="21635" r="26923" b="31570"/>
-            <a:stretch/>
-          </p:blipFill>
-          <p:spPr bwMode="auto">
-            <a:xfrm>
-              <a:off x="5037119" y="2110048"/>
-              <a:ext cx="619674" cy="709587"/>
-            </a:xfrm>
-            <a:prstGeom prst="rect">
-              <a:avLst/>
-            </a:prstGeom>
-            <a:noFill/>
+        </p:nvPicPr>
+        <p:blipFill rotWithShape="1">
+          <a:blip r:embed="rId2">
             <a:extLst>
-              <a:ext uri="{909E8E84-426E-40DD-AFC4-6F175D3DCCD1}">
-                <a14:hiddenFill xmlns:a14="http://schemas.microsoft.com/office/drawing/2010/main">
-                  <a:solidFill>
-                    <a:srgbClr val="FFFFFF"/>
-                  </a:solidFill>
-                </a14:hiddenFill>
+              <a:ext uri="{28A0092B-C50C-407E-A947-70E740481C1C}">
+                <a14:useLocalDpi xmlns:a14="http://schemas.microsoft.com/office/drawing/2010/main" val="0"/>
               </a:ext>
             </a:extLst>
-          </p:spPr>
-        </p:pic>
-        <p:grpSp>
-          <p:nvGrpSpPr>
-            <p:cNvPr id="25" name="Group 24">
-              <a:extLst>
-                <a:ext uri="{FF2B5EF4-FFF2-40B4-BE49-F238E27FC236}">
-                  <a16:creationId xmlns:a16="http://schemas.microsoft.com/office/drawing/2014/main" id="{92ECD3EA-9FFA-E034-C57C-04105FF54E9D}"/>
-                </a:ext>
-              </a:extLst>
-            </p:cNvPr>
-            <p:cNvGrpSpPr/>
-            <p:nvPr/>
-          </p:nvGrpSpPr>
-          <p:grpSpPr>
-            <a:xfrm rot="1941197">
-              <a:off x="4722300" y="1944558"/>
-              <a:ext cx="531164" cy="503494"/>
-              <a:chOff x="6409710" y="756261"/>
-              <a:chExt cx="2695643" cy="2555218"/>
-            </a:xfrm>
-          </p:grpSpPr>
-          <p:pic>
-            <p:nvPicPr>
-              <p:cNvPr id="83" name="Picture 2" descr="Lance Icon #332107 - Free Icons Library">
-                <a:extLst>
-                  <a:ext uri="{FF2B5EF4-FFF2-40B4-BE49-F238E27FC236}">
-                    <a16:creationId xmlns:a16="http://schemas.microsoft.com/office/drawing/2014/main" id="{EB754034-34D5-5025-F26C-D5F4A3F9332C}"/>
-                  </a:ext>
-                </a:extLst>
-              </p:cNvPr>
-              <p:cNvPicPr>
-                <a:picLocks noChangeAspect="1" noChangeArrowheads="1"/>
-              </p:cNvPicPr>
-              <p:nvPr/>
-            </p:nvPicPr>
-            <p:blipFill>
-              <a:blip r:embed="rId4">
-                <a:extLst>
-                  <a:ext uri="{28A0092B-C50C-407E-A947-70E740481C1C}">
-                    <a14:useLocalDpi xmlns:a14="http://schemas.microsoft.com/office/drawing/2010/main" val="0"/>
-                  </a:ext>
-                </a:extLst>
-              </a:blip>
-              <a:srcRect/>
-              <a:stretch>
-                <a:fillRect/>
-              </a:stretch>
-            </p:blipFill>
-            <p:spPr bwMode="auto">
-              <a:xfrm rot="18882740">
-                <a:off x="6774550" y="756261"/>
-                <a:ext cx="1899003" cy="1899003"/>
-              </a:xfrm>
-              <a:prstGeom prst="rect">
-                <a:avLst/>
-              </a:prstGeom>
-              <a:noFill/>
-              <a:extLst>
-                <a:ext uri="{909E8E84-426E-40DD-AFC4-6F175D3DCCD1}">
-                  <a14:hiddenFill xmlns:a14="http://schemas.microsoft.com/office/drawing/2010/main">
-                    <a:solidFill>
-                      <a:srgbClr val="FFFFFF"/>
-                    </a:solidFill>
-                  </a14:hiddenFill>
-                </a:ext>
-              </a:extLst>
-            </p:spPr>
-          </p:pic>
-          <p:pic>
-            <p:nvPicPr>
-              <p:cNvPr id="84" name="Picture 2" descr="Lance Icon #332107 - Free Icons Library">
-                <a:extLst>
-                  <a:ext uri="{FF2B5EF4-FFF2-40B4-BE49-F238E27FC236}">
-                    <a16:creationId xmlns:a16="http://schemas.microsoft.com/office/drawing/2014/main" id="{FBB82173-4388-1FB7-FF51-179D2A2FB033}"/>
-                  </a:ext>
-                </a:extLst>
-              </p:cNvPr>
-              <p:cNvPicPr>
-                <a:picLocks noChangeAspect="1" noChangeArrowheads="1"/>
-              </p:cNvPicPr>
-              <p:nvPr/>
-            </p:nvPicPr>
-            <p:blipFill>
-              <a:blip r:embed="rId4">
-                <a:extLst>
-                  <a:ext uri="{28A0092B-C50C-407E-A947-70E740481C1C}">
-                    <a14:useLocalDpi xmlns:a14="http://schemas.microsoft.com/office/drawing/2010/main" val="0"/>
-                  </a:ext>
-                </a:extLst>
-              </a:blip>
-              <a:srcRect/>
-              <a:stretch>
-                <a:fillRect/>
-              </a:stretch>
-            </p:blipFill>
-            <p:spPr bwMode="auto">
-              <a:xfrm rot="18882740">
-                <a:off x="7206350" y="1027415"/>
-                <a:ext cx="1899003" cy="1899003"/>
-              </a:xfrm>
-              <a:prstGeom prst="rect">
-                <a:avLst/>
-              </a:prstGeom>
-              <a:noFill/>
-              <a:extLst>
-                <a:ext uri="{909E8E84-426E-40DD-AFC4-6F175D3DCCD1}">
-                  <a14:hiddenFill xmlns:a14="http://schemas.microsoft.com/office/drawing/2010/main">
-                    <a:solidFill>
-                      <a:srgbClr val="FFFFFF"/>
-                    </a:solidFill>
-                  </a14:hiddenFill>
-                </a:ext>
-              </a:extLst>
-            </p:spPr>
-          </p:pic>
-          <p:pic>
-            <p:nvPicPr>
-              <p:cNvPr id="85" name="Picture 2" descr="Lance Icon #332107 - Free Icons Library">
-                <a:extLst>
-                  <a:ext uri="{FF2B5EF4-FFF2-40B4-BE49-F238E27FC236}">
-                    <a16:creationId xmlns:a16="http://schemas.microsoft.com/office/drawing/2014/main" id="{AB4D53AC-A50B-1211-239B-2BF7EE458328}"/>
-                  </a:ext>
-                </a:extLst>
-              </p:cNvPr>
-              <p:cNvPicPr>
-                <a:picLocks noChangeAspect="1" noChangeArrowheads="1"/>
-              </p:cNvPicPr>
-              <p:nvPr/>
-            </p:nvPicPr>
-            <p:blipFill>
-              <a:blip r:embed="rId4">
-                <a:extLst>
-                  <a:ext uri="{28A0092B-C50C-407E-A947-70E740481C1C}">
-                    <a14:useLocalDpi xmlns:a14="http://schemas.microsoft.com/office/drawing/2010/main" val="0"/>
-                  </a:ext>
-                </a:extLst>
-              </a:blip>
-              <a:srcRect/>
-              <a:stretch>
-                <a:fillRect/>
-              </a:stretch>
-            </p:blipFill>
-            <p:spPr bwMode="auto">
-              <a:xfrm rot="18882740">
-                <a:off x="6409710" y="1412476"/>
-                <a:ext cx="1899003" cy="1899003"/>
-              </a:xfrm>
-              <a:prstGeom prst="rect">
-                <a:avLst/>
-              </a:prstGeom>
-              <a:noFill/>
-              <a:extLst>
-                <a:ext uri="{909E8E84-426E-40DD-AFC4-6F175D3DCCD1}">
-                  <a14:hiddenFill xmlns:a14="http://schemas.microsoft.com/office/drawing/2010/main">
-                    <a:solidFill>
-                      <a:srgbClr val="FFFFFF"/>
-                    </a:solidFill>
-                  </a14:hiddenFill>
-                </a:ext>
-              </a:extLst>
-            </p:spPr>
-          </p:pic>
-        </p:grpSp>
-      </p:grpSp>
+          </a:blip>
+          <a:srcRect l="10735" t="16411" r="13266" b="22473"/>
+          <a:stretch/>
+        </p:blipFill>
+        <p:spPr bwMode="auto">
+          <a:xfrm flipH="1">
+            <a:off x="454426" y="616745"/>
+            <a:ext cx="798847" cy="589755"/>
+          </a:xfrm>
+          <a:prstGeom prst="rect">
+            <a:avLst/>
+          </a:prstGeom>
+          <a:noFill/>
+          <a:extLst>
+            <a:ext uri="{909E8E84-426E-40DD-AFC4-6F175D3DCCD1}">
+              <a14:hiddenFill xmlns:a14="http://schemas.microsoft.com/office/drawing/2010/main">
+                <a:solidFill>
+                  <a:srgbClr val="FFFFFF"/>
+                </a:solidFill>
+              </a14:hiddenFill>
+            </a:ext>
+          </a:extLst>
+        </p:spPr>
+      </p:pic>
       <p:grpSp>
         <p:nvGrpSpPr>
           <p:cNvPr id="41" name="Group 40">
@@ -31026,12 +30193,66 @@
           </p:txBody>
         </p:sp>
       </p:grpSp>
+      <p:sp>
+        <p:nvSpPr>
+          <p:cNvPr id="59" name="Oval 58">
+            <a:extLst>
+              <a:ext uri="{FF2B5EF4-FFF2-40B4-BE49-F238E27FC236}">
+                <a16:creationId xmlns:a16="http://schemas.microsoft.com/office/drawing/2014/main" id="{CE0C1045-95B9-B34D-F506-8E4C2423EACB}"/>
+              </a:ext>
+            </a:extLst>
+          </p:cNvPr>
+          <p:cNvSpPr/>
+          <p:nvPr/>
+        </p:nvSpPr>
+        <p:spPr>
+          <a:xfrm>
+            <a:off x="2463207" y="426065"/>
+            <a:ext cx="274320" cy="274320"/>
+          </a:xfrm>
+          <a:prstGeom prst="ellipse">
+            <a:avLst/>
+          </a:prstGeom>
+          <a:noFill/>
+          <a:ln w="57150" cap="flat" cmpd="sng" algn="ctr">
+            <a:solidFill>
+              <a:schemeClr val="dk1"/>
+            </a:solidFill>
+            <a:prstDash val="solid"/>
+            <a:round/>
+            <a:headEnd type="none" w="med" len="med"/>
+            <a:tailEnd type="none" w="med" len="med"/>
+          </a:ln>
+        </p:spPr>
+        <p:style>
+          <a:lnRef idx="0">
+            <a:scrgbClr r="0" g="0" b="0"/>
+          </a:lnRef>
+          <a:fillRef idx="0">
+            <a:scrgbClr r="0" g="0" b="0"/>
+          </a:fillRef>
+          <a:effectRef idx="0">
+            <a:scrgbClr r="0" g="0" b="0"/>
+          </a:effectRef>
+          <a:fontRef idx="minor">
+            <a:schemeClr val="dk1"/>
+          </a:fontRef>
+        </p:style>
+        <p:txBody>
+          <a:bodyPr rtlCol="0" anchor="ctr"/>
+          <a:lstStyle/>
+          <a:p>
+            <a:pPr algn="ctr"/>
+            <a:endParaRPr lang="en-US"/>
+          </a:p>
+        </p:txBody>
+      </p:sp>
       <p:grpSp>
         <p:nvGrpSpPr>
-          <p:cNvPr id="50" name="Group 49">
+          <p:cNvPr id="8" name="Group 7">
             <a:extLst>
               <a:ext uri="{FF2B5EF4-FFF2-40B4-BE49-F238E27FC236}">
-                <a16:creationId xmlns:a16="http://schemas.microsoft.com/office/drawing/2014/main" id="{956DC93E-73FE-B018-8ACB-47F2B8FE8713}"/>
+                <a16:creationId xmlns:a16="http://schemas.microsoft.com/office/drawing/2014/main" id="{FB761432-0775-79F4-A904-E9331B8B82C8}"/>
               </a:ext>
             </a:extLst>
           </p:cNvPr>
@@ -31040,193 +30261,63 @@
         </p:nvGrpSpPr>
         <p:grpSpPr>
           <a:xfrm>
-            <a:off x="1726749" y="1761016"/>
-            <a:ext cx="1371600" cy="1371600"/>
-            <a:chOff x="213377" y="483633"/>
-            <a:chExt cx="1371600" cy="1371600"/>
+            <a:off x="386529" y="2278251"/>
+            <a:ext cx="937313" cy="494610"/>
+            <a:chOff x="5859312" y="3132616"/>
+            <a:chExt cx="2744937" cy="1448473"/>
           </a:xfrm>
         </p:grpSpPr>
-        <p:sp>
-          <p:nvSpPr>
-            <p:cNvPr id="51" name="Rectangle 50">
-              <a:extLst>
-                <a:ext uri="{FF2B5EF4-FFF2-40B4-BE49-F238E27FC236}">
-                  <a16:creationId xmlns:a16="http://schemas.microsoft.com/office/drawing/2014/main" id="{6004BD89-ADEB-7630-DCB6-B4E7E4CB9277}"/>
-                </a:ext>
-              </a:extLst>
-            </p:cNvPr>
-            <p:cNvSpPr/>
-            <p:nvPr/>
-          </p:nvSpPr>
-          <p:spPr>
-            <a:xfrm>
-              <a:off x="213377" y="483633"/>
-              <a:ext cx="1371600" cy="1371600"/>
+        <p:pic>
+          <p:nvPicPr>
+            <p:cNvPr id="76" name="Picture 2" descr="Mantis Silhouette Design Stock Vector (Royalty Free) 696869110 |  Shutterstock">
+              <a:extLst>
+                <a:ext uri="{FF2B5EF4-FFF2-40B4-BE49-F238E27FC236}">
+                  <a16:creationId xmlns:a16="http://schemas.microsoft.com/office/drawing/2014/main" id="{76560993-1BD9-E9B5-08D9-D356C6EFF53E}"/>
+                </a:ext>
+              </a:extLst>
+            </p:cNvPr>
+            <p:cNvPicPr>
+              <a:picLocks noChangeAspect="1" noChangeArrowheads="1"/>
+            </p:cNvPicPr>
+            <p:nvPr/>
+          </p:nvPicPr>
+          <p:blipFill rotWithShape="1">
+            <a:blip r:embed="rId2">
+              <a:extLst>
+                <a:ext uri="{28A0092B-C50C-407E-A947-70E740481C1C}">
+                  <a14:useLocalDpi xmlns:a14="http://schemas.microsoft.com/office/drawing/2010/main" val="0"/>
+                </a:ext>
+              </a:extLst>
+            </a:blip>
+            <a:srcRect l="10735" t="16411" r="13266" b="22473"/>
+            <a:stretch/>
+          </p:blipFill>
+          <p:spPr bwMode="auto">
+            <a:xfrm flipH="1">
+              <a:off x="5859312" y="3268607"/>
+              <a:ext cx="1722492" cy="1271643"/>
             </a:xfrm>
             <a:prstGeom prst="rect">
               <a:avLst/>
             </a:prstGeom>
             <a:noFill/>
-            <a:ln w="76200">
-              <a:solidFill>
-                <a:schemeClr val="tx1"/>
-              </a:solidFill>
-            </a:ln>
-          </p:spPr>
-          <p:style>
-            <a:lnRef idx="2">
-              <a:schemeClr val="accent1">
-                <a:shade val="50000"/>
-              </a:schemeClr>
-            </a:lnRef>
-            <a:fillRef idx="1">
-              <a:schemeClr val="accent1"/>
-            </a:fillRef>
-            <a:effectRef idx="0">
-              <a:schemeClr val="accent1"/>
-            </a:effectRef>
-            <a:fontRef idx="minor">
-              <a:schemeClr val="lt1"/>
-            </a:fontRef>
-          </p:style>
-          <p:txBody>
-            <a:bodyPr rtlCol="0" anchor="ctr"/>
-            <a:lstStyle/>
-            <a:p>
-              <a:pPr algn="ctr"/>
-              <a:endParaRPr lang="en-US"/>
-            </a:p>
-          </p:txBody>
-        </p:sp>
-        <p:sp>
-          <p:nvSpPr>
-            <p:cNvPr id="52" name="Hexagon 51">
-              <a:extLst>
-                <a:ext uri="{FF2B5EF4-FFF2-40B4-BE49-F238E27FC236}">
-                  <a16:creationId xmlns:a16="http://schemas.microsoft.com/office/drawing/2014/main" id="{5B14BEC1-982F-A175-A401-ECF83DE15DA6}"/>
-                </a:ext>
-              </a:extLst>
-            </p:cNvPr>
-            <p:cNvSpPr/>
-            <p:nvPr/>
-          </p:nvSpPr>
-          <p:spPr>
-            <a:xfrm>
-              <a:off x="304817" y="699533"/>
-              <a:ext cx="1188720" cy="1097280"/>
-            </a:xfrm>
-            <a:prstGeom prst="hexagon">
-              <a:avLst/>
-            </a:prstGeom>
-            <a:noFill/>
-            <a:ln w="38100" cap="flat" cmpd="sng" algn="ctr">
-              <a:solidFill>
-                <a:schemeClr val="dk1"/>
-              </a:solidFill>
-              <a:prstDash val="solid"/>
-              <a:round/>
-              <a:headEnd type="none" w="med" len="med"/>
-              <a:tailEnd type="none" w="med" len="med"/>
-            </a:ln>
-          </p:spPr>
-          <p:style>
-            <a:lnRef idx="0">
-              <a:scrgbClr r="0" g="0" b="0"/>
-            </a:lnRef>
-            <a:fillRef idx="0">
-              <a:scrgbClr r="0" g="0" b="0"/>
-            </a:fillRef>
-            <a:effectRef idx="0">
-              <a:scrgbClr r="0" g="0" b="0"/>
-            </a:effectRef>
-            <a:fontRef idx="minor">
-              <a:schemeClr val="dk1"/>
-            </a:fontRef>
-          </p:style>
-          <p:txBody>
-            <a:bodyPr rtlCol="0" anchor="ctr"/>
-            <a:lstStyle/>
-            <a:p>
-              <a:pPr algn="ctr"/>
-              <a:endParaRPr lang="en-US"/>
-            </a:p>
-          </p:txBody>
-        </p:sp>
-      </p:grpSp>
-      <p:grpSp>
-        <p:nvGrpSpPr>
-          <p:cNvPr id="7" name="Group 6">
             <a:extLst>
-              <a:ext uri="{FF2B5EF4-FFF2-40B4-BE49-F238E27FC236}">
-                <a16:creationId xmlns:a16="http://schemas.microsoft.com/office/drawing/2014/main" id="{02C5273B-50B4-FC83-555C-1B3528B39270}"/>
+              <a:ext uri="{909E8E84-426E-40DD-AFC4-6F175D3DCCD1}">
+                <a14:hiddenFill xmlns:a14="http://schemas.microsoft.com/office/drawing/2010/main">
+                  <a:solidFill>
+                    <a:srgbClr val="FFFFFF"/>
+                  </a:solidFill>
+                </a14:hiddenFill>
               </a:ext>
             </a:extLst>
-          </p:cNvPr>
-          <p:cNvGrpSpPr/>
-          <p:nvPr/>
-        </p:nvGrpSpPr>
-        <p:grpSpPr>
-          <a:xfrm>
-            <a:off x="2027459" y="674158"/>
-            <a:ext cx="770179" cy="474929"/>
-            <a:chOff x="4366971" y="1518683"/>
-            <a:chExt cx="1632818" cy="1006873"/>
-          </a:xfrm>
-        </p:grpSpPr>
-        <p:sp>
-          <p:nvSpPr>
-            <p:cNvPr id="2" name="Moon 1">
-              <a:extLst>
-                <a:ext uri="{FF2B5EF4-FFF2-40B4-BE49-F238E27FC236}">
-                  <a16:creationId xmlns:a16="http://schemas.microsoft.com/office/drawing/2014/main" id="{08ECC53F-5E6E-8B69-CDF4-912B085C321D}"/>
-                </a:ext>
-              </a:extLst>
-            </p:cNvPr>
-            <p:cNvSpPr/>
-            <p:nvPr/>
-          </p:nvSpPr>
-          <p:spPr>
-            <a:xfrm rot="5400000">
-              <a:off x="4929704" y="1543410"/>
-              <a:ext cx="469900" cy="1494392"/>
-            </a:xfrm>
-            <a:prstGeom prst="moon">
-              <a:avLst>
-                <a:gd name="adj" fmla="val 87500"/>
-              </a:avLst>
-            </a:prstGeom>
-          </p:spPr>
-          <p:style>
-            <a:lnRef idx="2">
-              <a:schemeClr val="dk1">
-                <a:shade val="50000"/>
-              </a:schemeClr>
-            </a:lnRef>
-            <a:fillRef idx="1">
-              <a:schemeClr val="dk1"/>
-            </a:fillRef>
-            <a:effectRef idx="0">
-              <a:schemeClr val="dk1"/>
-            </a:effectRef>
-            <a:fontRef idx="minor">
-              <a:schemeClr val="lt1"/>
-            </a:fontRef>
-          </p:style>
-          <p:txBody>
-            <a:bodyPr rtlCol="0" anchor="ctr"/>
-            <a:lstStyle/>
-            <a:p>
-              <a:pPr algn="ctr"/>
-              <a:endParaRPr lang="en-US"/>
-            </a:p>
-          </p:txBody>
-        </p:sp>
+          </p:spPr>
+        </p:pic>
         <p:grpSp>
           <p:nvGrpSpPr>
-            <p:cNvPr id="6" name="Group 5">
-              <a:extLst>
-                <a:ext uri="{FF2B5EF4-FFF2-40B4-BE49-F238E27FC236}">
-                  <a16:creationId xmlns:a16="http://schemas.microsoft.com/office/drawing/2014/main" id="{D02A0808-8BD5-7741-531C-AA1473A5E492}"/>
+            <p:cNvPr id="4" name="Group 3">
+              <a:extLst>
+                <a:ext uri="{FF2B5EF4-FFF2-40B4-BE49-F238E27FC236}">
+                  <a16:creationId xmlns:a16="http://schemas.microsoft.com/office/drawing/2014/main" id="{AE7FC87A-A61B-F304-4BD1-ADB0637EEDDF}"/>
                 </a:ext>
               </a:extLst>
             </p:cNvPr>
@@ -31235,18 +30326,18 @@
           </p:nvGrpSpPr>
           <p:grpSpPr>
             <a:xfrm>
-              <a:off x="4366971" y="1555986"/>
-              <a:ext cx="574646" cy="861619"/>
-              <a:chOff x="4398721" y="1536936"/>
-              <a:chExt cx="574646" cy="861619"/>
+              <a:off x="6588008" y="3132616"/>
+              <a:ext cx="2016241" cy="1448473"/>
+              <a:chOff x="5946659" y="1194460"/>
+              <a:chExt cx="1449808" cy="1448473"/>
             </a:xfrm>
           </p:grpSpPr>
           <p:sp>
             <p:nvSpPr>
-              <p:cNvPr id="3" name="Isosceles Triangle 2">
+              <p:cNvPr id="68" name="Oval 67">
                 <a:extLst>
                   <a:ext uri="{FF2B5EF4-FFF2-40B4-BE49-F238E27FC236}">
-                    <a16:creationId xmlns:a16="http://schemas.microsoft.com/office/drawing/2014/main" id="{00C67651-4505-D6D3-2680-A84D04E20557}"/>
+                    <a16:creationId xmlns:a16="http://schemas.microsoft.com/office/drawing/2014/main" id="{33FD0B9D-5801-6787-FA23-237D7A58FBAB}"/>
                   </a:ext>
                 </a:extLst>
               </p:cNvPr>
@@ -31254,11 +30345,11 @@
               <p:nvPr/>
             </p:nvSpPr>
             <p:spPr>
-              <a:xfrm rot="19469091">
-                <a:off x="4398721" y="1712755"/>
-                <a:ext cx="230742" cy="685800"/>
+              <a:xfrm>
+                <a:off x="5946659" y="1194460"/>
+                <a:ext cx="1449808" cy="1440983"/>
               </a:xfrm>
-              <a:prstGeom prst="triangle">
+              <a:prstGeom prst="ellipse">
                 <a:avLst/>
               </a:prstGeom>
             </p:spPr>
@@ -31289,10 +30380,10 @@
           </p:sp>
           <p:sp>
             <p:nvSpPr>
-              <p:cNvPr id="53" name="Isosceles Triangle 52">
+              <p:cNvPr id="69" name="Oval 68">
                 <a:extLst>
                   <a:ext uri="{FF2B5EF4-FFF2-40B4-BE49-F238E27FC236}">
-                    <a16:creationId xmlns:a16="http://schemas.microsoft.com/office/drawing/2014/main" id="{6F8DC6CF-8AB5-1FBC-E0B8-2F278F920794}"/>
+                    <a16:creationId xmlns:a16="http://schemas.microsoft.com/office/drawing/2014/main" id="{D27A0E8A-CAB5-EE07-E027-3E55F30036BD}"/>
                   </a:ext>
                 </a:extLst>
               </p:cNvPr>
@@ -31300,95 +30391,26 @@
               <p:nvPr/>
             </p:nvSpPr>
             <p:spPr>
-              <a:xfrm rot="20688119">
-                <a:off x="4742625" y="1536936"/>
-                <a:ext cx="230742" cy="685800"/>
+              <a:xfrm>
+                <a:off x="6153618" y="1374790"/>
+                <a:ext cx="453040" cy="453041"/>
               </a:xfrm>
-              <a:prstGeom prst="triangle">
+              <a:prstGeom prst="ellipse">
                 <a:avLst/>
               </a:prstGeom>
             </p:spPr>
             <p:style>
               <a:lnRef idx="2">
-                <a:schemeClr val="dk1">
-                  <a:shade val="50000"/>
-                </a:schemeClr>
+                <a:schemeClr val="dk1"/>
               </a:lnRef>
               <a:fillRef idx="1">
-                <a:schemeClr val="dk1"/>
+                <a:schemeClr val="lt1"/>
               </a:fillRef>
               <a:effectRef idx="0">
                 <a:schemeClr val="dk1"/>
               </a:effectRef>
               <a:fontRef idx="minor">
-                <a:schemeClr val="lt1"/>
-              </a:fontRef>
-            </p:style>
-            <p:txBody>
-              <a:bodyPr rtlCol="0" anchor="ctr"/>
-              <a:lstStyle/>
-              <a:p>
-                <a:pPr algn="ctr"/>
-                <a:endParaRPr lang="en-US"/>
-              </a:p>
-            </p:txBody>
-          </p:sp>
-        </p:grpSp>
-        <p:grpSp>
-          <p:nvGrpSpPr>
-            <p:cNvPr id="5" name="Group 4">
-              <a:extLst>
-                <a:ext uri="{FF2B5EF4-FFF2-40B4-BE49-F238E27FC236}">
-                  <a16:creationId xmlns:a16="http://schemas.microsoft.com/office/drawing/2014/main" id="{5635E474-09FB-9B18-BD4C-C98699FB2699}"/>
-                </a:ext>
-              </a:extLst>
-            </p:cNvPr>
-            <p:cNvGrpSpPr/>
-            <p:nvPr/>
-          </p:nvGrpSpPr>
-          <p:grpSpPr>
-            <a:xfrm flipH="1">
-              <a:off x="5425143" y="1565156"/>
-              <a:ext cx="574646" cy="861619"/>
-              <a:chOff x="4551121" y="1689336"/>
-              <a:chExt cx="574646" cy="861619"/>
-            </a:xfrm>
-          </p:grpSpPr>
-          <p:sp>
-            <p:nvSpPr>
-              <p:cNvPr id="54" name="Isosceles Triangle 53">
-                <a:extLst>
-                  <a:ext uri="{FF2B5EF4-FFF2-40B4-BE49-F238E27FC236}">
-                    <a16:creationId xmlns:a16="http://schemas.microsoft.com/office/drawing/2014/main" id="{5CB0FEAA-F819-2A9A-855A-ED481D102344}"/>
-                  </a:ext>
-                </a:extLst>
-              </p:cNvPr>
-              <p:cNvSpPr/>
-              <p:nvPr/>
-            </p:nvSpPr>
-            <p:spPr>
-              <a:xfrm rot="19469091">
-                <a:off x="4551121" y="1865155"/>
-                <a:ext cx="230742" cy="685800"/>
-              </a:xfrm>
-              <a:prstGeom prst="triangle">
-                <a:avLst/>
-              </a:prstGeom>
-            </p:spPr>
-            <p:style>
-              <a:lnRef idx="2">
-                <a:schemeClr val="dk1">
-                  <a:shade val="50000"/>
-                </a:schemeClr>
-              </a:lnRef>
-              <a:fillRef idx="1">
                 <a:schemeClr val="dk1"/>
-              </a:fillRef>
-              <a:effectRef idx="0">
-                <a:schemeClr val="dk1"/>
-              </a:effectRef>
-              <a:fontRef idx="minor">
-                <a:schemeClr val="lt1"/>
               </a:fontRef>
             </p:style>
             <p:txBody>
@@ -31402,10 +30424,10 @@
           </p:sp>
           <p:sp>
             <p:nvSpPr>
-              <p:cNvPr id="57" name="Isosceles Triangle 56">
+              <p:cNvPr id="70" name="Oval 69">
                 <a:extLst>
                   <a:ext uri="{FF2B5EF4-FFF2-40B4-BE49-F238E27FC236}">
-                    <a16:creationId xmlns:a16="http://schemas.microsoft.com/office/drawing/2014/main" id="{3A57F9DB-377F-E6CA-F2A8-D0651786CC7E}"/>
+                    <a16:creationId xmlns:a16="http://schemas.microsoft.com/office/drawing/2014/main" id="{1521476B-94ED-432D-EDD4-966B65548717}"/>
                   </a:ext>
                 </a:extLst>
               </p:cNvPr>
@@ -31413,28 +30435,26 @@
               <p:nvPr/>
             </p:nvSpPr>
             <p:spPr>
-              <a:xfrm rot="20688119">
-                <a:off x="4895025" y="1689336"/>
-                <a:ext cx="230742" cy="685800"/>
+              <a:xfrm>
+                <a:off x="6655275" y="1272974"/>
+                <a:ext cx="453040" cy="453041"/>
               </a:xfrm>
-              <a:prstGeom prst="triangle">
+              <a:prstGeom prst="ellipse">
                 <a:avLst/>
               </a:prstGeom>
             </p:spPr>
             <p:style>
               <a:lnRef idx="2">
-                <a:schemeClr val="dk1">
-                  <a:shade val="50000"/>
-                </a:schemeClr>
+                <a:schemeClr val="dk1"/>
               </a:lnRef>
               <a:fillRef idx="1">
-                <a:schemeClr val="dk1"/>
+                <a:schemeClr val="lt1"/>
               </a:fillRef>
               <a:effectRef idx="0">
                 <a:schemeClr val="dk1"/>
               </a:effectRef>
               <a:fontRef idx="minor">
-                <a:schemeClr val="lt1"/>
+                <a:schemeClr val="dk1"/>
               </a:fontRef>
             </p:style>
             <p:txBody>
@@ -31446,148 +30466,12 @@
               </a:p>
             </p:txBody>
           </p:sp>
-        </p:grpSp>
-        <p:sp>
-          <p:nvSpPr>
-            <p:cNvPr id="58" name="Isosceles Triangle 57">
-              <a:extLst>
-                <a:ext uri="{FF2B5EF4-FFF2-40B4-BE49-F238E27FC236}">
-                  <a16:creationId xmlns:a16="http://schemas.microsoft.com/office/drawing/2014/main" id="{EBB9CF00-E48C-0C71-6A17-6F28FC063EC3}"/>
-                </a:ext>
-              </a:extLst>
-            </p:cNvPr>
-            <p:cNvSpPr/>
-            <p:nvPr/>
-          </p:nvSpPr>
-          <p:spPr>
-            <a:xfrm flipH="1">
-              <a:off x="5070860" y="1518683"/>
-              <a:ext cx="230742" cy="685800"/>
-            </a:xfrm>
-            <a:prstGeom prst="triangle">
-              <a:avLst/>
-            </a:prstGeom>
-          </p:spPr>
-          <p:style>
-            <a:lnRef idx="2">
-              <a:schemeClr val="dk1">
-                <a:shade val="50000"/>
-              </a:schemeClr>
-            </a:lnRef>
-            <a:fillRef idx="1">
-              <a:schemeClr val="dk1"/>
-            </a:fillRef>
-            <a:effectRef idx="0">
-              <a:schemeClr val="dk1"/>
-            </a:effectRef>
-            <a:fontRef idx="minor">
-              <a:schemeClr val="lt1"/>
-            </a:fontRef>
-          </p:style>
-          <p:txBody>
-            <a:bodyPr rtlCol="0" anchor="ctr"/>
-            <a:lstStyle/>
-            <a:p>
-              <a:pPr algn="ctr"/>
-              <a:endParaRPr lang="en-US"/>
-            </a:p>
-          </p:txBody>
-        </p:sp>
-      </p:grpSp>
-      <p:grpSp>
-        <p:nvGrpSpPr>
-          <p:cNvPr id="24" name="Group 23">
-            <a:extLst>
-              <a:ext uri="{FF2B5EF4-FFF2-40B4-BE49-F238E27FC236}">
-                <a16:creationId xmlns:a16="http://schemas.microsoft.com/office/drawing/2014/main" id="{4EE2ECEA-A29F-CFB1-C1E5-D247BC7384E3}"/>
-              </a:ext>
-            </a:extLst>
-          </p:cNvPr>
-          <p:cNvGrpSpPr/>
-          <p:nvPr/>
-        </p:nvGrpSpPr>
-        <p:grpSpPr>
-          <a:xfrm>
-            <a:off x="2061364" y="2085647"/>
-            <a:ext cx="702370" cy="722337"/>
-            <a:chOff x="6950179" y="209368"/>
-            <a:chExt cx="2475607" cy="2545983"/>
-          </a:xfrm>
-        </p:grpSpPr>
-        <p:sp>
-          <p:nvSpPr>
-            <p:cNvPr id="62" name="Moon 61">
-              <a:extLst>
-                <a:ext uri="{FF2B5EF4-FFF2-40B4-BE49-F238E27FC236}">
-                  <a16:creationId xmlns:a16="http://schemas.microsoft.com/office/drawing/2014/main" id="{64E6FE43-93A5-7BAF-08EC-AA55FA77B202}"/>
-                </a:ext>
-              </a:extLst>
-            </p:cNvPr>
-            <p:cNvSpPr/>
-            <p:nvPr/>
-          </p:nvSpPr>
-          <p:spPr>
-            <a:xfrm rot="5400000">
-              <a:off x="7798765" y="1128330"/>
-              <a:ext cx="778435" cy="2475607"/>
-            </a:xfrm>
-            <a:prstGeom prst="moon">
-              <a:avLst>
-                <a:gd name="adj" fmla="val 87500"/>
-              </a:avLst>
-            </a:prstGeom>
-          </p:spPr>
-          <p:style>
-            <a:lnRef idx="2">
-              <a:schemeClr val="dk1">
-                <a:shade val="50000"/>
-              </a:schemeClr>
-            </a:lnRef>
-            <a:fillRef idx="1">
-              <a:schemeClr val="dk1"/>
-            </a:fillRef>
-            <a:effectRef idx="0">
-              <a:schemeClr val="dk1"/>
-            </a:effectRef>
-            <a:fontRef idx="minor">
-              <a:schemeClr val="lt1"/>
-            </a:fontRef>
-          </p:style>
-          <p:txBody>
-            <a:bodyPr rtlCol="0" anchor="ctr"/>
-            <a:lstStyle/>
-            <a:p>
-              <a:pPr algn="ctr"/>
-              <a:endParaRPr lang="en-US"/>
-            </a:p>
-          </p:txBody>
-        </p:sp>
-        <p:grpSp>
-          <p:nvGrpSpPr>
-            <p:cNvPr id="23" name="Group 22">
-              <a:extLst>
-                <a:ext uri="{FF2B5EF4-FFF2-40B4-BE49-F238E27FC236}">
-                  <a16:creationId xmlns:a16="http://schemas.microsoft.com/office/drawing/2014/main" id="{ECD90FE6-F4D1-4A2B-A7E0-A5FDF114AD87}"/>
-                </a:ext>
-              </a:extLst>
-            </p:cNvPr>
-            <p:cNvGrpSpPr/>
-            <p:nvPr/>
-          </p:nvGrpSpPr>
-          <p:grpSpPr>
-            <a:xfrm>
-              <a:off x="7048732" y="209368"/>
-              <a:ext cx="2278499" cy="2002129"/>
-              <a:chOff x="3753737" y="1365068"/>
-              <a:chExt cx="2278499" cy="2002129"/>
-            </a:xfrm>
-          </p:grpSpPr>
           <p:sp>
             <p:nvSpPr>
-              <p:cNvPr id="72" name="Isosceles Triangle 71">
+              <p:cNvPr id="71" name="Oval 70">
                 <a:extLst>
                   <a:ext uri="{FF2B5EF4-FFF2-40B4-BE49-F238E27FC236}">
-                    <a16:creationId xmlns:a16="http://schemas.microsoft.com/office/drawing/2014/main" id="{63B3A113-D7DE-91F2-E0D5-EF8E4378C029}"/>
+                    <a16:creationId xmlns:a16="http://schemas.microsoft.com/office/drawing/2014/main" id="{D8B25A08-CF58-68C0-8248-B18772D9DEDD}"/>
                   </a:ext>
                 </a:extLst>
               </p:cNvPr>
@@ -31595,28 +30479,26 @@
               <p:nvPr/>
             </p:nvSpPr>
             <p:spPr>
-              <a:xfrm flipH="1">
-                <a:off x="4555226" y="1365068"/>
-                <a:ext cx="673630" cy="2002129"/>
+              <a:xfrm>
+                <a:off x="6031768" y="1869229"/>
+                <a:ext cx="453040" cy="453041"/>
               </a:xfrm>
-              <a:prstGeom prst="triangle">
+              <a:prstGeom prst="ellipse">
                 <a:avLst/>
               </a:prstGeom>
             </p:spPr>
             <p:style>
               <a:lnRef idx="2">
-                <a:schemeClr val="dk1">
-                  <a:shade val="50000"/>
-                </a:schemeClr>
+                <a:schemeClr val="dk1"/>
               </a:lnRef>
               <a:fillRef idx="1">
-                <a:schemeClr val="dk1"/>
+                <a:schemeClr val="lt1"/>
               </a:fillRef>
               <a:effectRef idx="0">
                 <a:schemeClr val="dk1"/>
               </a:effectRef>
               <a:fontRef idx="minor">
-                <a:schemeClr val="lt1"/>
+                <a:schemeClr val="dk1"/>
               </a:fontRef>
             </p:style>
             <p:txBody>
@@ -31628,324 +30510,138 @@
               </a:p>
             </p:txBody>
           </p:sp>
-          <p:grpSp>
-            <p:nvGrpSpPr>
-              <p:cNvPr id="11" name="Group 10">
+          <p:sp>
+            <p:nvSpPr>
+              <p:cNvPr id="73" name="Oval 72">
                 <a:extLst>
                   <a:ext uri="{FF2B5EF4-FFF2-40B4-BE49-F238E27FC236}">
-                    <a16:creationId xmlns:a16="http://schemas.microsoft.com/office/drawing/2014/main" id="{D8FE397E-EC7B-3858-294C-5EFA291A7BCC}"/>
+                    <a16:creationId xmlns:a16="http://schemas.microsoft.com/office/drawing/2014/main" id="{01CE04FA-F909-696F-6A2C-1BA46445C662}"/>
                   </a:ext>
                 </a:extLst>
               </p:cNvPr>
-              <p:cNvGrpSpPr/>
+              <p:cNvSpPr/>
               <p:nvPr/>
-            </p:nvGrpSpPr>
-            <p:grpSpPr>
+            </p:nvSpPr>
+            <p:spPr>
               <a:xfrm>
-                <a:off x="3753737" y="2018274"/>
-                <a:ext cx="940920" cy="1047698"/>
-                <a:chOff x="3753737" y="2018274"/>
-                <a:chExt cx="940920" cy="1047698"/>
+                <a:off x="6480517" y="1726015"/>
+                <a:ext cx="453040" cy="453041"/>
               </a:xfrm>
-            </p:grpSpPr>
-            <p:sp>
-              <p:nvSpPr>
-                <p:cNvPr id="9" name="Isosceles Triangle 8">
-                  <a:extLst>
-                    <a:ext uri="{FF2B5EF4-FFF2-40B4-BE49-F238E27FC236}">
-                      <a16:creationId xmlns:a16="http://schemas.microsoft.com/office/drawing/2014/main" id="{23F555E3-07C8-F3DC-7DD5-1D0B0F067C25}"/>
-                    </a:ext>
-                  </a:extLst>
-                </p:cNvPr>
-                <p:cNvSpPr/>
-                <p:nvPr/>
-              </p:nvSpPr>
-              <p:spPr>
-                <a:xfrm rot="16779459">
-                  <a:off x="4296631" y="1899647"/>
-                  <a:ext cx="279400" cy="516653"/>
-                </a:xfrm>
-                <a:prstGeom prst="triangle">
-                  <a:avLst/>
-                </a:prstGeom>
-              </p:spPr>
-              <p:style>
-                <a:lnRef idx="2">
-                  <a:schemeClr val="dk1">
-                    <a:shade val="50000"/>
-                  </a:schemeClr>
-                </a:lnRef>
-                <a:fillRef idx="1">
-                  <a:schemeClr val="dk1"/>
-                </a:fillRef>
-                <a:effectRef idx="0">
-                  <a:schemeClr val="dk1"/>
-                </a:effectRef>
-                <a:fontRef idx="minor">
-                  <a:schemeClr val="lt1"/>
-                </a:fontRef>
-              </p:style>
-              <p:txBody>
-                <a:bodyPr rtlCol="0" anchor="ctr"/>
-                <a:lstStyle/>
-                <a:p>
-                  <a:pPr algn="ctr"/>
-                  <a:endParaRPr lang="en-US"/>
-                </a:p>
-              </p:txBody>
-            </p:sp>
-            <p:sp>
-              <p:nvSpPr>
-                <p:cNvPr id="77" name="Isosceles Triangle 76">
-                  <a:extLst>
-                    <a:ext uri="{FF2B5EF4-FFF2-40B4-BE49-F238E27FC236}">
-                      <a16:creationId xmlns:a16="http://schemas.microsoft.com/office/drawing/2014/main" id="{E242016F-BDD3-A029-6029-E1A43842079B}"/>
-                    </a:ext>
-                  </a:extLst>
-                </p:cNvPr>
-                <p:cNvSpPr/>
-                <p:nvPr/>
-              </p:nvSpPr>
-              <p:spPr>
-                <a:xfrm rot="16779459">
-                  <a:off x="4023093" y="2517216"/>
-                  <a:ext cx="279400" cy="818112"/>
-                </a:xfrm>
-                <a:prstGeom prst="triangle">
-                  <a:avLst/>
-                </a:prstGeom>
-              </p:spPr>
-              <p:style>
-                <a:lnRef idx="2">
-                  <a:schemeClr val="dk1">
-                    <a:shade val="50000"/>
-                  </a:schemeClr>
-                </a:lnRef>
-                <a:fillRef idx="1">
-                  <a:schemeClr val="dk1"/>
-                </a:fillRef>
-                <a:effectRef idx="0">
-                  <a:schemeClr val="dk1"/>
-                </a:effectRef>
-                <a:fontRef idx="minor">
-                  <a:schemeClr val="lt1"/>
-                </a:fontRef>
-              </p:style>
-              <p:txBody>
-                <a:bodyPr rtlCol="0" anchor="ctr"/>
-                <a:lstStyle/>
-                <a:p>
-                  <a:pPr algn="ctr"/>
-                  <a:endParaRPr lang="en-US"/>
-                </a:p>
-              </p:txBody>
-            </p:sp>
-            <p:sp>
-              <p:nvSpPr>
-                <p:cNvPr id="78" name="Isosceles Triangle 77">
-                  <a:extLst>
-                    <a:ext uri="{FF2B5EF4-FFF2-40B4-BE49-F238E27FC236}">
-                      <a16:creationId xmlns:a16="http://schemas.microsoft.com/office/drawing/2014/main" id="{03DF0BD2-01C8-A8C6-B268-3A3E989E56EA}"/>
-                    </a:ext>
-                  </a:extLst>
-                </p:cNvPr>
-                <p:cNvSpPr/>
-                <p:nvPr/>
-              </p:nvSpPr>
-              <p:spPr>
-                <a:xfrm rot="16779459">
-                  <a:off x="4169431" y="2180356"/>
-                  <a:ext cx="279400" cy="656846"/>
-                </a:xfrm>
-                <a:prstGeom prst="triangle">
-                  <a:avLst/>
-                </a:prstGeom>
-              </p:spPr>
-              <p:style>
-                <a:lnRef idx="2">
-                  <a:schemeClr val="dk1">
-                    <a:shade val="50000"/>
-                  </a:schemeClr>
-                </a:lnRef>
-                <a:fillRef idx="1">
-                  <a:schemeClr val="dk1"/>
-                </a:fillRef>
-                <a:effectRef idx="0">
-                  <a:schemeClr val="dk1"/>
-                </a:effectRef>
-                <a:fontRef idx="minor">
-                  <a:schemeClr val="lt1"/>
-                </a:fontRef>
-              </p:style>
-              <p:txBody>
-                <a:bodyPr rtlCol="0" anchor="ctr"/>
-                <a:lstStyle/>
-                <a:p>
-                  <a:pPr algn="ctr"/>
-                  <a:endParaRPr lang="en-US"/>
-                </a:p>
-              </p:txBody>
-            </p:sp>
-          </p:grpSp>
-          <p:grpSp>
-            <p:nvGrpSpPr>
-              <p:cNvPr id="79" name="Group 78">
+              <a:prstGeom prst="ellipse">
+                <a:avLst/>
+              </a:prstGeom>
+            </p:spPr>
+            <p:style>
+              <a:lnRef idx="2">
+                <a:schemeClr val="dk1"/>
+              </a:lnRef>
+              <a:fillRef idx="1">
+                <a:schemeClr val="lt1"/>
+              </a:fillRef>
+              <a:effectRef idx="0">
+                <a:schemeClr val="dk1"/>
+              </a:effectRef>
+              <a:fontRef idx="minor">
+                <a:schemeClr val="dk1"/>
+              </a:fontRef>
+            </p:style>
+            <p:txBody>
+              <a:bodyPr rtlCol="0" anchor="ctr"/>
+              <a:lstStyle/>
+              <a:p>
+                <a:pPr algn="ctr"/>
+                <a:endParaRPr lang="en-US"/>
+              </a:p>
+            </p:txBody>
+          </p:sp>
+          <p:sp>
+            <p:nvSpPr>
+              <p:cNvPr id="74" name="Oval 73">
                 <a:extLst>
                   <a:ext uri="{FF2B5EF4-FFF2-40B4-BE49-F238E27FC236}">
-                    <a16:creationId xmlns:a16="http://schemas.microsoft.com/office/drawing/2014/main" id="{C47F9B93-DF24-BFD1-7735-D49A3DD6027E}"/>
+                    <a16:creationId xmlns:a16="http://schemas.microsoft.com/office/drawing/2014/main" id="{2E316E24-A7B9-0A9E-E561-44BC8C4539E7}"/>
                   </a:ext>
                 </a:extLst>
               </p:cNvPr>
-              <p:cNvGrpSpPr/>
+              <p:cNvSpPr/>
               <p:nvPr/>
-            </p:nvGrpSpPr>
-            <p:grpSpPr>
-              <a:xfrm flipH="1">
-                <a:off x="5091316" y="2020148"/>
-                <a:ext cx="940920" cy="1047698"/>
-                <a:chOff x="3753737" y="2018274"/>
-                <a:chExt cx="940920" cy="1047698"/>
+            </p:nvSpPr>
+            <p:spPr>
+              <a:xfrm>
+                <a:off x="6415071" y="2189892"/>
+                <a:ext cx="453040" cy="453041"/>
               </a:xfrm>
-            </p:grpSpPr>
-            <p:sp>
-              <p:nvSpPr>
-                <p:cNvPr id="80" name="Isosceles Triangle 79">
-                  <a:extLst>
-                    <a:ext uri="{FF2B5EF4-FFF2-40B4-BE49-F238E27FC236}">
-                      <a16:creationId xmlns:a16="http://schemas.microsoft.com/office/drawing/2014/main" id="{F2A09009-AB80-5CB8-A07E-DA0730F93C99}"/>
-                    </a:ext>
-                  </a:extLst>
-                </p:cNvPr>
-                <p:cNvSpPr/>
-                <p:nvPr/>
-              </p:nvSpPr>
-              <p:spPr>
-                <a:xfrm rot="16779459">
-                  <a:off x="4296631" y="1899647"/>
-                  <a:ext cx="279400" cy="516653"/>
-                </a:xfrm>
-                <a:prstGeom prst="triangle">
-                  <a:avLst/>
-                </a:prstGeom>
-              </p:spPr>
-              <p:style>
-                <a:lnRef idx="2">
-                  <a:schemeClr val="dk1">
-                    <a:shade val="50000"/>
-                  </a:schemeClr>
-                </a:lnRef>
-                <a:fillRef idx="1">
-                  <a:schemeClr val="dk1"/>
-                </a:fillRef>
-                <a:effectRef idx="0">
-                  <a:schemeClr val="dk1"/>
-                </a:effectRef>
-                <a:fontRef idx="minor">
-                  <a:schemeClr val="lt1"/>
-                </a:fontRef>
-              </p:style>
-              <p:txBody>
-                <a:bodyPr rtlCol="0" anchor="ctr"/>
-                <a:lstStyle/>
-                <a:p>
-                  <a:pPr algn="ctr"/>
-                  <a:endParaRPr lang="en-US"/>
-                </a:p>
-              </p:txBody>
-            </p:sp>
-            <p:sp>
-              <p:nvSpPr>
-                <p:cNvPr id="81" name="Isosceles Triangle 80">
-                  <a:extLst>
-                    <a:ext uri="{FF2B5EF4-FFF2-40B4-BE49-F238E27FC236}">
-                      <a16:creationId xmlns:a16="http://schemas.microsoft.com/office/drawing/2014/main" id="{7B9A6244-DE16-017A-0905-737888810438}"/>
-                    </a:ext>
-                  </a:extLst>
-                </p:cNvPr>
-                <p:cNvSpPr/>
-                <p:nvPr/>
-              </p:nvSpPr>
-              <p:spPr>
-                <a:xfrm rot="16779459">
-                  <a:off x="4023093" y="2517216"/>
-                  <a:ext cx="279400" cy="818112"/>
-                </a:xfrm>
-                <a:prstGeom prst="triangle">
-                  <a:avLst/>
-                </a:prstGeom>
-              </p:spPr>
-              <p:style>
-                <a:lnRef idx="2">
-                  <a:schemeClr val="dk1">
-                    <a:shade val="50000"/>
-                  </a:schemeClr>
-                </a:lnRef>
-                <a:fillRef idx="1">
-                  <a:schemeClr val="dk1"/>
-                </a:fillRef>
-                <a:effectRef idx="0">
-                  <a:schemeClr val="dk1"/>
-                </a:effectRef>
-                <a:fontRef idx="minor">
-                  <a:schemeClr val="lt1"/>
-                </a:fontRef>
-              </p:style>
-              <p:txBody>
-                <a:bodyPr rtlCol="0" anchor="ctr"/>
-                <a:lstStyle/>
-                <a:p>
-                  <a:pPr algn="ctr"/>
-                  <a:endParaRPr lang="en-US"/>
-                </a:p>
-              </p:txBody>
-            </p:sp>
-            <p:sp>
-              <p:nvSpPr>
-                <p:cNvPr id="82" name="Isosceles Triangle 81">
-                  <a:extLst>
-                    <a:ext uri="{FF2B5EF4-FFF2-40B4-BE49-F238E27FC236}">
-                      <a16:creationId xmlns:a16="http://schemas.microsoft.com/office/drawing/2014/main" id="{2E9244AD-F24C-77C5-7E3C-A2F56161DAE9}"/>
-                    </a:ext>
-                  </a:extLst>
-                </p:cNvPr>
-                <p:cNvSpPr/>
-                <p:nvPr/>
-              </p:nvSpPr>
-              <p:spPr>
-                <a:xfrm rot="16779459">
-                  <a:off x="4169431" y="2180356"/>
-                  <a:ext cx="279400" cy="656846"/>
-                </a:xfrm>
-                <a:prstGeom prst="triangle">
-                  <a:avLst/>
-                </a:prstGeom>
-              </p:spPr>
-              <p:style>
-                <a:lnRef idx="2">
-                  <a:schemeClr val="dk1">
-                    <a:shade val="50000"/>
-                  </a:schemeClr>
-                </a:lnRef>
-                <a:fillRef idx="1">
-                  <a:schemeClr val="dk1"/>
-                </a:fillRef>
-                <a:effectRef idx="0">
-                  <a:schemeClr val="dk1"/>
-                </a:effectRef>
-                <a:fontRef idx="minor">
-                  <a:schemeClr val="lt1"/>
-                </a:fontRef>
-              </p:style>
-              <p:txBody>
-                <a:bodyPr rtlCol="0" anchor="ctr"/>
-                <a:lstStyle/>
-                <a:p>
-                  <a:pPr algn="ctr"/>
-                  <a:endParaRPr lang="en-US"/>
-                </a:p>
-              </p:txBody>
-            </p:sp>
-          </p:grpSp>
+              <a:prstGeom prst="ellipse">
+                <a:avLst/>
+              </a:prstGeom>
+            </p:spPr>
+            <p:style>
+              <a:lnRef idx="2">
+                <a:schemeClr val="dk1"/>
+              </a:lnRef>
+              <a:fillRef idx="1">
+                <a:schemeClr val="lt1"/>
+              </a:fillRef>
+              <a:effectRef idx="0">
+                <a:schemeClr val="dk1"/>
+              </a:effectRef>
+              <a:fontRef idx="minor">
+                <a:schemeClr val="dk1"/>
+              </a:fontRef>
+            </p:style>
+            <p:txBody>
+              <a:bodyPr rtlCol="0" anchor="ctr"/>
+              <a:lstStyle/>
+              <a:p>
+                <a:pPr algn="ctr"/>
+                <a:endParaRPr lang="en-US"/>
+              </a:p>
+            </p:txBody>
+          </p:sp>
+          <p:sp>
+            <p:nvSpPr>
+              <p:cNvPr id="75" name="Oval 74">
+                <a:extLst>
+                  <a:ext uri="{FF2B5EF4-FFF2-40B4-BE49-F238E27FC236}">
+                    <a16:creationId xmlns:a16="http://schemas.microsoft.com/office/drawing/2014/main" id="{04F7C8DA-D6CE-34C1-6ADA-8411D50F206B}"/>
+                  </a:ext>
+                </a:extLst>
+              </p:cNvPr>
+              <p:cNvSpPr/>
+              <p:nvPr/>
+            </p:nvSpPr>
+            <p:spPr>
+              <a:xfrm>
+                <a:off x="6908559" y="1871898"/>
+                <a:ext cx="453040" cy="453041"/>
+              </a:xfrm>
+              <a:prstGeom prst="ellipse">
+                <a:avLst/>
+              </a:prstGeom>
+            </p:spPr>
+            <p:style>
+              <a:lnRef idx="2">
+                <a:schemeClr val="dk1"/>
+              </a:lnRef>
+              <a:fillRef idx="1">
+                <a:schemeClr val="lt1"/>
+              </a:fillRef>
+              <a:effectRef idx="0">
+                <a:schemeClr val="dk1"/>
+              </a:effectRef>
+              <a:fontRef idx="minor">
+                <a:schemeClr val="dk1"/>
+              </a:fontRef>
+            </p:style>
+            <p:txBody>
+              <a:bodyPr rtlCol="0" anchor="ctr"/>
+              <a:lstStyle/>
+              <a:p>
+                <a:pPr algn="ctr"/>
+                <a:endParaRPr lang="en-US"/>
+              </a:p>
+            </p:txBody>
+          </p:sp>
         </p:grpSp>
       </p:grpSp>
     </p:spTree>

--- a/image process/drawings sifi.pptx
+++ b/image process/drawings sifi.pptx
@@ -200,7 +200,7 @@
           <a:p>
             <a:fld id="{7700C406-2328-4788-AE79-437B6607AD22}" type="datetimeFigureOut">
               <a:rPr lang="en-US" smtClean="0"/>
-              <a:t>6/16/2022</a:t>
+              <a:t>6/19/2022</a:t>
             </a:fld>
             <a:endParaRPr lang="en-US"/>
           </a:p>
@@ -614,7 +614,7 @@
           <a:p>
             <a:fld id="{9EC8CD53-0620-48F2-A3BB-2B10BDA60E52}" type="datetimeFigureOut">
               <a:rPr lang="en-US" smtClean="0"/>
-              <a:t>6/16/2022</a:t>
+              <a:t>6/19/2022</a:t>
             </a:fld>
             <a:endParaRPr lang="en-US"/>
           </a:p>
@@ -812,7 +812,7 @@
           <a:p>
             <a:fld id="{9EC8CD53-0620-48F2-A3BB-2B10BDA60E52}" type="datetimeFigureOut">
               <a:rPr lang="en-US" smtClean="0"/>
-              <a:t>6/16/2022</a:t>
+              <a:t>6/19/2022</a:t>
             </a:fld>
             <a:endParaRPr lang="en-US"/>
           </a:p>
@@ -1020,7 +1020,7 @@
           <a:p>
             <a:fld id="{9EC8CD53-0620-48F2-A3BB-2B10BDA60E52}" type="datetimeFigureOut">
               <a:rPr lang="en-US" smtClean="0"/>
-              <a:t>6/16/2022</a:t>
+              <a:t>6/19/2022</a:t>
             </a:fld>
             <a:endParaRPr lang="en-US"/>
           </a:p>
@@ -1218,7 +1218,7 @@
           <a:p>
             <a:fld id="{9EC8CD53-0620-48F2-A3BB-2B10BDA60E52}" type="datetimeFigureOut">
               <a:rPr lang="en-US" smtClean="0"/>
-              <a:t>6/16/2022</a:t>
+              <a:t>6/19/2022</a:t>
             </a:fld>
             <a:endParaRPr lang="en-US"/>
           </a:p>
@@ -1493,7 +1493,7 @@
           <a:p>
             <a:fld id="{9EC8CD53-0620-48F2-A3BB-2B10BDA60E52}" type="datetimeFigureOut">
               <a:rPr lang="en-US" smtClean="0"/>
-              <a:t>6/16/2022</a:t>
+              <a:t>6/19/2022</a:t>
             </a:fld>
             <a:endParaRPr lang="en-US"/>
           </a:p>
@@ -1758,7 +1758,7 @@
           <a:p>
             <a:fld id="{9EC8CD53-0620-48F2-A3BB-2B10BDA60E52}" type="datetimeFigureOut">
               <a:rPr lang="en-US" smtClean="0"/>
-              <a:t>6/16/2022</a:t>
+              <a:t>6/19/2022</a:t>
             </a:fld>
             <a:endParaRPr lang="en-US"/>
           </a:p>
@@ -2170,7 +2170,7 @@
           <a:p>
             <a:fld id="{9EC8CD53-0620-48F2-A3BB-2B10BDA60E52}" type="datetimeFigureOut">
               <a:rPr lang="en-US" smtClean="0"/>
-              <a:t>6/16/2022</a:t>
+              <a:t>6/19/2022</a:t>
             </a:fld>
             <a:endParaRPr lang="en-US"/>
           </a:p>
@@ -2311,7 +2311,7 @@
           <a:p>
             <a:fld id="{9EC8CD53-0620-48F2-A3BB-2B10BDA60E52}" type="datetimeFigureOut">
               <a:rPr lang="en-US" smtClean="0"/>
-              <a:t>6/16/2022</a:t>
+              <a:t>6/19/2022</a:t>
             </a:fld>
             <a:endParaRPr lang="en-US"/>
           </a:p>
@@ -2424,7 +2424,7 @@
           <a:p>
             <a:fld id="{9EC8CD53-0620-48F2-A3BB-2B10BDA60E52}" type="datetimeFigureOut">
               <a:rPr lang="en-US" smtClean="0"/>
-              <a:t>6/16/2022</a:t>
+              <a:t>6/19/2022</a:t>
             </a:fld>
             <a:endParaRPr lang="en-US"/>
           </a:p>
@@ -2735,7 +2735,7 @@
           <a:p>
             <a:fld id="{9EC8CD53-0620-48F2-A3BB-2B10BDA60E52}" type="datetimeFigureOut">
               <a:rPr lang="en-US" smtClean="0"/>
-              <a:t>6/16/2022</a:t>
+              <a:t>6/19/2022</a:t>
             </a:fld>
             <a:endParaRPr lang="en-US"/>
           </a:p>
@@ -3023,7 +3023,7 @@
           <a:p>
             <a:fld id="{9EC8CD53-0620-48F2-A3BB-2B10BDA60E52}" type="datetimeFigureOut">
               <a:rPr lang="en-US" smtClean="0"/>
-              <a:t>6/16/2022</a:t>
+              <a:t>6/19/2022</a:t>
             </a:fld>
             <a:endParaRPr lang="en-US"/>
           </a:p>
@@ -3264,7 +3264,7 @@
           <a:p>
             <a:fld id="{9EC8CD53-0620-48F2-A3BB-2B10BDA60E52}" type="datetimeFigureOut">
               <a:rPr lang="en-US" smtClean="0"/>
-              <a:t>6/16/2022</a:t>
+              <a:t>6/19/2022</a:t>
             </a:fld>
             <a:endParaRPr lang="en-US"/>
           </a:p>
@@ -16017,6 +16017,36 @@
           <a:chExt cx="0" cy="0"/>
         </a:xfrm>
       </p:grpSpPr>
+      <p:pic>
+        <p:nvPicPr>
+          <p:cNvPr id="144" name="Picture 143">
+            <a:extLst>
+              <a:ext uri="{FF2B5EF4-FFF2-40B4-BE49-F238E27FC236}">
+                <a16:creationId xmlns:a16="http://schemas.microsoft.com/office/drawing/2014/main" id="{C7E93A14-ECA2-44CE-2A0A-26C4B3781477}"/>
+              </a:ext>
+            </a:extLst>
+          </p:cNvPr>
+          <p:cNvPicPr>
+            <a:picLocks noChangeAspect="1"/>
+          </p:cNvPicPr>
+          <p:nvPr/>
+        </p:nvPicPr>
+        <p:blipFill>
+          <a:blip r:embed="rId2"/>
+          <a:stretch>
+            <a:fillRect/>
+          </a:stretch>
+        </p:blipFill>
+        <p:spPr>
+          <a:xfrm>
+            <a:off x="6556612" y="934681"/>
+            <a:ext cx="277209" cy="415814"/>
+          </a:xfrm>
+          <a:prstGeom prst="rect">
+            <a:avLst/>
+          </a:prstGeom>
+        </p:spPr>
+      </p:pic>
       <p:sp>
         <p:nvSpPr>
           <p:cNvPr id="2" name="TextBox 1">
@@ -16067,10 +16097,10 @@
         </p:nvGrpSpPr>
         <p:grpSpPr>
           <a:xfrm>
-            <a:off x="9122738" y="3515455"/>
-            <a:ext cx="735385" cy="928816"/>
-            <a:chOff x="2752725" y="1271400"/>
-            <a:chExt cx="1871663" cy="2363975"/>
+            <a:off x="9116388" y="3515455"/>
+            <a:ext cx="741738" cy="928816"/>
+            <a:chOff x="2736559" y="1271400"/>
+            <a:chExt cx="1887829" cy="2363975"/>
           </a:xfrm>
         </p:grpSpPr>
         <p:sp>
@@ -16087,8 +16117,8 @@
           </p:nvSpPr>
           <p:spPr>
             <a:xfrm rot="16200000">
-              <a:off x="2319338" y="2703909"/>
-              <a:ext cx="1174750" cy="307975"/>
+              <a:off x="2303172" y="2703909"/>
+              <a:ext cx="1174749" cy="307975"/>
             </a:xfrm>
             <a:prstGeom prst="trapezoid">
               <a:avLst/>
@@ -16115,7 +16145,7 @@
             <a:lstStyle/>
             <a:p>
               <a:pPr algn="ctr"/>
-              <a:endParaRPr lang="en-US"/>
+              <a:endParaRPr lang="en-US" dirty="0"/>
             </a:p>
           </p:txBody>
         </p:sp>
@@ -16225,8 +16255,8 @@
           </p:nvSpPr>
           <p:spPr>
             <a:xfrm>
-              <a:off x="3214687" y="1634729"/>
-              <a:ext cx="469900" cy="317896"/>
+              <a:off x="3214688" y="1537760"/>
+              <a:ext cx="469900" cy="317897"/>
             </a:xfrm>
             <a:prstGeom prst="trapezoid">
               <a:avLst/>
@@ -16503,7 +16533,7 @@
           </p:nvSpPr>
           <p:spPr>
             <a:xfrm>
-              <a:off x="573033" y="478473"/>
+              <a:off x="566683" y="478473"/>
               <a:ext cx="1097280" cy="1097280"/>
             </a:xfrm>
             <a:prstGeom prst="plaque">
@@ -16532,209 +16562,6 @@
             </a:effectRef>
             <a:fontRef idx="minor">
               <a:schemeClr val="dk1"/>
-            </a:fontRef>
-          </p:style>
-          <p:txBody>
-            <a:bodyPr rtlCol="0" anchor="ctr"/>
-            <a:lstStyle/>
-            <a:p>
-              <a:pPr algn="ctr"/>
-              <a:endParaRPr lang="en-US"/>
-            </a:p>
-          </p:txBody>
-        </p:sp>
-      </p:grpSp>
-      <p:grpSp>
-        <p:nvGrpSpPr>
-          <p:cNvPr id="27" name="Group 26">
-            <a:extLst>
-              <a:ext uri="{FF2B5EF4-FFF2-40B4-BE49-F238E27FC236}">
-                <a16:creationId xmlns:a16="http://schemas.microsoft.com/office/drawing/2014/main" id="{2CD3CB12-E2D0-5C30-4A6F-506F54B07124}"/>
-              </a:ext>
-            </a:extLst>
-          </p:cNvPr>
-          <p:cNvGrpSpPr/>
-          <p:nvPr/>
-        </p:nvGrpSpPr>
-        <p:grpSpPr>
-          <a:xfrm>
-            <a:off x="10250825" y="3427092"/>
-            <a:ext cx="961844" cy="961844"/>
-            <a:chOff x="3282950" y="1689100"/>
-            <a:chExt cx="1371600" cy="1371600"/>
-          </a:xfrm>
-        </p:grpSpPr>
-        <p:sp>
-          <p:nvSpPr>
-            <p:cNvPr id="28" name="Oval 27">
-              <a:extLst>
-                <a:ext uri="{FF2B5EF4-FFF2-40B4-BE49-F238E27FC236}">
-                  <a16:creationId xmlns:a16="http://schemas.microsoft.com/office/drawing/2014/main" id="{A32074B7-5055-399D-A4AE-A1104E3499F6}"/>
-                </a:ext>
-              </a:extLst>
-            </p:cNvPr>
-            <p:cNvSpPr/>
-            <p:nvPr/>
-          </p:nvSpPr>
-          <p:spPr>
-            <a:xfrm>
-              <a:off x="3282950" y="1689100"/>
-              <a:ext cx="1371600" cy="1371600"/>
-            </a:xfrm>
-            <a:prstGeom prst="ellipse">
-              <a:avLst/>
-            </a:prstGeom>
-          </p:spPr>
-          <p:style>
-            <a:lnRef idx="2">
-              <a:schemeClr val="dk1"/>
-            </a:lnRef>
-            <a:fillRef idx="1">
-              <a:schemeClr val="lt1"/>
-            </a:fillRef>
-            <a:effectRef idx="0">
-              <a:schemeClr val="dk1"/>
-            </a:effectRef>
-            <a:fontRef idx="minor">
-              <a:schemeClr val="dk1"/>
-            </a:fontRef>
-          </p:style>
-          <p:txBody>
-            <a:bodyPr rtlCol="0" anchor="ctr"/>
-            <a:lstStyle/>
-            <a:p>
-              <a:pPr algn="ctr"/>
-              <a:endParaRPr lang="en-US"/>
-            </a:p>
-          </p:txBody>
-        </p:sp>
-        <p:sp>
-          <p:nvSpPr>
-            <p:cNvPr id="29" name="Isosceles Triangle 28">
-              <a:extLst>
-                <a:ext uri="{FF2B5EF4-FFF2-40B4-BE49-F238E27FC236}">
-                  <a16:creationId xmlns:a16="http://schemas.microsoft.com/office/drawing/2014/main" id="{C2DD6A86-C952-C453-D0D6-ECA34B6DCED7}"/>
-                </a:ext>
-              </a:extLst>
-            </p:cNvPr>
-            <p:cNvSpPr/>
-            <p:nvPr/>
-          </p:nvSpPr>
-          <p:spPr>
-            <a:xfrm>
-              <a:off x="3706811" y="1689100"/>
-              <a:ext cx="547689" cy="501650"/>
-            </a:xfrm>
-            <a:prstGeom prst="triangle">
-              <a:avLst/>
-            </a:prstGeom>
-          </p:spPr>
-          <p:style>
-            <a:lnRef idx="2">
-              <a:schemeClr val="dk1">
-                <a:shade val="50000"/>
-              </a:schemeClr>
-            </a:lnRef>
-            <a:fillRef idx="1">
-              <a:schemeClr val="dk1"/>
-            </a:fillRef>
-            <a:effectRef idx="0">
-              <a:schemeClr val="dk1"/>
-            </a:effectRef>
-            <a:fontRef idx="minor">
-              <a:schemeClr val="lt1"/>
-            </a:fontRef>
-          </p:style>
-          <p:txBody>
-            <a:bodyPr rtlCol="0" anchor="ctr"/>
-            <a:lstStyle/>
-            <a:p>
-              <a:pPr algn="ctr"/>
-              <a:endParaRPr lang="en-US"/>
-            </a:p>
-          </p:txBody>
-        </p:sp>
-        <p:sp>
-          <p:nvSpPr>
-            <p:cNvPr id="30" name="Isosceles Triangle 29">
-              <a:extLst>
-                <a:ext uri="{FF2B5EF4-FFF2-40B4-BE49-F238E27FC236}">
-                  <a16:creationId xmlns:a16="http://schemas.microsoft.com/office/drawing/2014/main" id="{C7BEC5FE-DAD5-FA0F-88AD-8A0014D1261F}"/>
-                </a:ext>
-              </a:extLst>
-            </p:cNvPr>
-            <p:cNvSpPr/>
-            <p:nvPr/>
-          </p:nvSpPr>
-          <p:spPr>
-            <a:xfrm>
-              <a:off x="3409950" y="2266950"/>
-              <a:ext cx="547689" cy="501650"/>
-            </a:xfrm>
-            <a:prstGeom prst="triangle">
-              <a:avLst/>
-            </a:prstGeom>
-          </p:spPr>
-          <p:style>
-            <a:lnRef idx="2">
-              <a:schemeClr val="dk1">
-                <a:shade val="50000"/>
-              </a:schemeClr>
-            </a:lnRef>
-            <a:fillRef idx="1">
-              <a:schemeClr val="dk1"/>
-            </a:fillRef>
-            <a:effectRef idx="0">
-              <a:schemeClr val="dk1"/>
-            </a:effectRef>
-            <a:fontRef idx="minor">
-              <a:schemeClr val="lt1"/>
-            </a:fontRef>
-          </p:style>
-          <p:txBody>
-            <a:bodyPr rtlCol="0" anchor="ctr"/>
-            <a:lstStyle/>
-            <a:p>
-              <a:pPr algn="ctr"/>
-              <a:endParaRPr lang="en-US"/>
-            </a:p>
-          </p:txBody>
-        </p:sp>
-        <p:sp>
-          <p:nvSpPr>
-            <p:cNvPr id="31" name="Isosceles Triangle 30">
-              <a:extLst>
-                <a:ext uri="{FF2B5EF4-FFF2-40B4-BE49-F238E27FC236}">
-                  <a16:creationId xmlns:a16="http://schemas.microsoft.com/office/drawing/2014/main" id="{0D04A301-12DC-CAA7-64D2-E7C43DF7446F}"/>
-                </a:ext>
-              </a:extLst>
-            </p:cNvPr>
-            <p:cNvSpPr/>
-            <p:nvPr/>
-          </p:nvSpPr>
-          <p:spPr>
-            <a:xfrm>
-              <a:off x="3998910" y="2260600"/>
-              <a:ext cx="547689" cy="501650"/>
-            </a:xfrm>
-            <a:prstGeom prst="triangle">
-              <a:avLst/>
-            </a:prstGeom>
-          </p:spPr>
-          <p:style>
-            <a:lnRef idx="2">
-              <a:schemeClr val="dk1">
-                <a:shade val="50000"/>
-              </a:schemeClr>
-            </a:lnRef>
-            <a:fillRef idx="1">
-              <a:schemeClr val="dk1"/>
-            </a:fillRef>
-            <a:effectRef idx="0">
-              <a:schemeClr val="dk1"/>
-            </a:effectRef>
-            <a:fontRef idx="minor">
-              <a:schemeClr val="lt1"/>
             </a:fontRef>
           </p:style>
           <p:txBody>
@@ -16762,7 +16589,7 @@
           <p:nvPr/>
         </p:nvPicPr>
         <p:blipFill>
-          <a:blip r:embed="rId2"/>
+          <a:blip r:embed="rId3"/>
           <a:stretch>
             <a:fillRect/>
           </a:stretch>
@@ -16863,7 +16690,7 @@
           </p:nvSpPr>
           <p:spPr>
             <a:xfrm>
-              <a:off x="573033" y="478473"/>
+              <a:off x="566683" y="478473"/>
               <a:ext cx="1097280" cy="1097280"/>
             </a:xfrm>
             <a:prstGeom prst="plaque">
@@ -16990,7 +16817,7 @@
           </p:nvSpPr>
           <p:spPr>
             <a:xfrm>
-              <a:off x="573033" y="478473"/>
+              <a:off x="566683" y="478473"/>
               <a:ext cx="1097280" cy="1097280"/>
             </a:xfrm>
             <a:prstGeom prst="plaque">
@@ -17828,7 +17655,7 @@
           </p:nvSpPr>
           <p:spPr>
             <a:xfrm>
-              <a:off x="573033" y="478473"/>
+              <a:off x="566683" y="478473"/>
               <a:ext cx="1097280" cy="1097280"/>
             </a:xfrm>
             <a:prstGeom prst="plaque">
@@ -18593,7 +18420,7 @@
           </p:nvSpPr>
           <p:spPr>
             <a:xfrm>
-              <a:off x="573033" y="478473"/>
+              <a:off x="566683" y="478473"/>
               <a:ext cx="1097280" cy="1097280"/>
             </a:xfrm>
             <a:prstGeom prst="plaque">
@@ -18885,7 +18712,7 @@
           </p:nvSpPr>
           <p:spPr>
             <a:xfrm>
-              <a:off x="573033" y="478473"/>
+              <a:off x="566683" y="478473"/>
               <a:ext cx="1097280" cy="1097280"/>
             </a:xfrm>
             <a:prstGeom prst="plaque">
@@ -19236,14 +19063,14 @@
           <p:nvPr/>
         </p:nvPicPr>
         <p:blipFill>
-          <a:blip r:embed="rId3"/>
+          <a:blip r:embed="rId4"/>
           <a:stretch>
             <a:fillRect/>
           </a:stretch>
         </p:blipFill>
         <p:spPr>
           <a:xfrm>
-            <a:off x="6483418" y="1143969"/>
+            <a:off x="8602121" y="953412"/>
             <a:ext cx="433388" cy="444277"/>
           </a:xfrm>
           <a:prstGeom prst="rect">
@@ -19337,7 +19164,7 @@
           </p:nvSpPr>
           <p:spPr>
             <a:xfrm>
-              <a:off x="573033" y="478473"/>
+              <a:off x="566683" y="478473"/>
               <a:ext cx="1097280" cy="1097280"/>
             </a:xfrm>
             <a:prstGeom prst="plaque">
@@ -19911,7 +19738,7 @@
         </p:nvGrpSpPr>
         <p:grpSpPr>
           <a:xfrm>
-            <a:off x="8185405" y="850161"/>
+            <a:off x="8108359" y="845004"/>
             <a:ext cx="502920" cy="1014984"/>
             <a:chOff x="5380031" y="966102"/>
             <a:chExt cx="1727200" cy="3248141"/>
@@ -20430,7 +20257,7 @@
         </p:nvGrpSpPr>
         <p:grpSpPr>
           <a:xfrm>
-            <a:off x="7833615" y="580700"/>
+            <a:off x="7794856" y="567502"/>
             <a:ext cx="1371600" cy="1371600"/>
             <a:chOff x="427081" y="263129"/>
             <a:chExt cx="1371600" cy="1371600"/>
@@ -20502,7 +20329,7 @@
           </p:nvSpPr>
           <p:spPr>
             <a:xfrm>
-              <a:off x="573033" y="478473"/>
+              <a:off x="566683" y="478473"/>
               <a:ext cx="1097280" cy="1097280"/>
             </a:xfrm>
             <a:prstGeom prst="plaque">
@@ -20543,36 +20370,6 @@
           </p:txBody>
         </p:sp>
       </p:grpSp>
-      <p:pic>
-        <p:nvPicPr>
-          <p:cNvPr id="144" name="Picture 143">
-            <a:extLst>
-              <a:ext uri="{FF2B5EF4-FFF2-40B4-BE49-F238E27FC236}">
-                <a16:creationId xmlns:a16="http://schemas.microsoft.com/office/drawing/2014/main" id="{C7E93A14-ECA2-44CE-2A0A-26C4B3781477}"/>
-              </a:ext>
-            </a:extLst>
-          </p:cNvPr>
-          <p:cNvPicPr>
-            <a:picLocks noChangeAspect="1"/>
-          </p:cNvPicPr>
-          <p:nvPr/>
-        </p:nvPicPr>
-        <p:blipFill>
-          <a:blip r:embed="rId4"/>
-          <a:stretch>
-            <a:fillRect/>
-          </a:stretch>
-        </p:blipFill>
-        <p:spPr>
-          <a:xfrm>
-            <a:off x="8725218" y="1115210"/>
-            <a:ext cx="277209" cy="415814"/>
-          </a:xfrm>
-          <a:prstGeom prst="rect">
-            <a:avLst/>
-          </a:prstGeom>
-        </p:spPr>
-      </p:pic>
       <p:grpSp>
         <p:nvGrpSpPr>
           <p:cNvPr id="145" name="Group 144">
@@ -21433,7 +21230,7 @@
           </p:nvSpPr>
           <p:spPr>
             <a:xfrm>
-              <a:off x="573033" y="478473"/>
+              <a:off x="566683" y="478473"/>
               <a:ext cx="1097280" cy="1097280"/>
             </a:xfrm>
             <a:prstGeom prst="plaque">
@@ -21560,7 +21357,7 @@
           </p:nvSpPr>
           <p:spPr>
             <a:xfrm>
-              <a:off x="573033" y="478473"/>
+              <a:off x="566683" y="478473"/>
               <a:ext cx="1097280" cy="1097280"/>
             </a:xfrm>
             <a:prstGeom prst="plaque">
@@ -22186,7 +21983,7 @@
           </p:nvSpPr>
           <p:spPr>
             <a:xfrm>
-              <a:off x="573033" y="478473"/>
+              <a:off x="566683" y="478473"/>
               <a:ext cx="1097280" cy="1097280"/>
             </a:xfrm>
             <a:prstGeom prst="plaque">
@@ -22313,7 +22110,7 @@
           </p:nvSpPr>
           <p:spPr>
             <a:xfrm>
-              <a:off x="573033" y="478473"/>
+              <a:off x="566683" y="478473"/>
               <a:ext cx="1097280" cy="1097280"/>
             </a:xfrm>
             <a:prstGeom prst="plaque">
@@ -22349,7 +22146,7 @@
             <a:lstStyle/>
             <a:p>
               <a:pPr algn="ctr"/>
-              <a:endParaRPr lang="en-US"/>
+              <a:endParaRPr lang="en-US" dirty="0"/>
             </a:p>
           </p:txBody>
         </p:sp>
@@ -22440,7 +22237,7 @@
           </p:nvSpPr>
           <p:spPr>
             <a:xfrm>
-              <a:off x="573033" y="478473"/>
+              <a:off x="566683" y="478473"/>
               <a:ext cx="1097280" cy="1097280"/>
             </a:xfrm>
             <a:prstGeom prst="plaque">
@@ -23419,6 +23216,292 @@
               <a:avLst>
                 <a:gd name="adj" fmla="val 37993"/>
               </a:avLst>
+            </a:prstGeom>
+          </p:spPr>
+          <p:style>
+            <a:lnRef idx="2">
+              <a:schemeClr val="dk1">
+                <a:shade val="50000"/>
+              </a:schemeClr>
+            </a:lnRef>
+            <a:fillRef idx="1">
+              <a:schemeClr val="dk1"/>
+            </a:fillRef>
+            <a:effectRef idx="0">
+              <a:schemeClr val="dk1"/>
+            </a:effectRef>
+            <a:fontRef idx="minor">
+              <a:schemeClr val="lt1"/>
+            </a:fontRef>
+          </p:style>
+          <p:txBody>
+            <a:bodyPr rtlCol="0" anchor="ctr"/>
+            <a:lstStyle/>
+            <a:p>
+              <a:pPr algn="ctr"/>
+              <a:endParaRPr lang="en-US"/>
+            </a:p>
+          </p:txBody>
+        </p:sp>
+      </p:grpSp>
+      <p:grpSp>
+        <p:nvGrpSpPr>
+          <p:cNvPr id="195" name="Group 194">
+            <a:extLst>
+              <a:ext uri="{FF2B5EF4-FFF2-40B4-BE49-F238E27FC236}">
+                <a16:creationId xmlns:a16="http://schemas.microsoft.com/office/drawing/2014/main" id="{6F5B4EC1-259E-F326-8537-AEA962D1D33A}"/>
+              </a:ext>
+            </a:extLst>
+          </p:cNvPr>
+          <p:cNvGrpSpPr/>
+          <p:nvPr/>
+        </p:nvGrpSpPr>
+        <p:grpSpPr>
+          <a:xfrm>
+            <a:off x="10276129" y="3200894"/>
+            <a:ext cx="1371600" cy="1371600"/>
+            <a:chOff x="427081" y="263129"/>
+            <a:chExt cx="1371600" cy="1371600"/>
+          </a:xfrm>
+        </p:grpSpPr>
+        <p:sp>
+          <p:nvSpPr>
+            <p:cNvPr id="196" name="Rectangle 195">
+              <a:extLst>
+                <a:ext uri="{FF2B5EF4-FFF2-40B4-BE49-F238E27FC236}">
+                  <a16:creationId xmlns:a16="http://schemas.microsoft.com/office/drawing/2014/main" id="{E8CEDA50-61F0-CF72-1260-59ADC2A93262}"/>
+                </a:ext>
+              </a:extLst>
+            </p:cNvPr>
+            <p:cNvSpPr/>
+            <p:nvPr/>
+          </p:nvSpPr>
+          <p:spPr>
+            <a:xfrm>
+              <a:off x="427081" y="263129"/>
+              <a:ext cx="1371600" cy="1371600"/>
+            </a:xfrm>
+            <a:prstGeom prst="rect">
+              <a:avLst/>
+            </a:prstGeom>
+            <a:noFill/>
+            <a:ln w="76200">
+              <a:solidFill>
+                <a:schemeClr val="tx1"/>
+              </a:solidFill>
+            </a:ln>
+          </p:spPr>
+          <p:style>
+            <a:lnRef idx="2">
+              <a:schemeClr val="accent1">
+                <a:shade val="50000"/>
+              </a:schemeClr>
+            </a:lnRef>
+            <a:fillRef idx="1">
+              <a:schemeClr val="accent1"/>
+            </a:fillRef>
+            <a:effectRef idx="0">
+              <a:schemeClr val="accent1"/>
+            </a:effectRef>
+            <a:fontRef idx="minor">
+              <a:schemeClr val="lt1"/>
+            </a:fontRef>
+          </p:style>
+          <p:txBody>
+            <a:bodyPr rtlCol="0" anchor="ctr"/>
+            <a:lstStyle/>
+            <a:p>
+              <a:pPr algn="ctr"/>
+              <a:endParaRPr lang="en-US"/>
+            </a:p>
+          </p:txBody>
+        </p:sp>
+        <p:sp>
+          <p:nvSpPr>
+            <p:cNvPr id="197" name="Plaque 196">
+              <a:extLst>
+                <a:ext uri="{FF2B5EF4-FFF2-40B4-BE49-F238E27FC236}">
+                  <a16:creationId xmlns:a16="http://schemas.microsoft.com/office/drawing/2014/main" id="{82C70602-E460-393B-9878-38430C24AD16}"/>
+                </a:ext>
+              </a:extLst>
+            </p:cNvPr>
+            <p:cNvSpPr/>
+            <p:nvPr/>
+          </p:nvSpPr>
+          <p:spPr>
+            <a:xfrm>
+              <a:off x="566683" y="478473"/>
+              <a:ext cx="1097280" cy="1097280"/>
+            </a:xfrm>
+            <a:prstGeom prst="plaque">
+              <a:avLst/>
+            </a:prstGeom>
+            <a:noFill/>
+            <a:ln w="38100" cap="flat" cmpd="sng" algn="ctr">
+              <a:solidFill>
+                <a:schemeClr val="dk1"/>
+              </a:solidFill>
+              <a:prstDash val="solid"/>
+              <a:round/>
+              <a:headEnd type="none" w="med" len="med"/>
+              <a:tailEnd type="none" w="med" len="med"/>
+            </a:ln>
+          </p:spPr>
+          <p:style>
+            <a:lnRef idx="0">
+              <a:scrgbClr r="0" g="0" b="0"/>
+            </a:lnRef>
+            <a:fillRef idx="0">
+              <a:scrgbClr r="0" g="0" b="0"/>
+            </a:fillRef>
+            <a:effectRef idx="0">
+              <a:scrgbClr r="0" g="0" b="0"/>
+            </a:effectRef>
+            <a:fontRef idx="minor">
+              <a:schemeClr val="dk1"/>
+            </a:fontRef>
+          </p:style>
+          <p:txBody>
+            <a:bodyPr rtlCol="0" anchor="ctr"/>
+            <a:lstStyle/>
+            <a:p>
+              <a:pPr algn="ctr"/>
+              <a:endParaRPr lang="en-US"/>
+            </a:p>
+          </p:txBody>
+        </p:sp>
+      </p:grpSp>
+      <p:grpSp>
+        <p:nvGrpSpPr>
+          <p:cNvPr id="203" name="Group 202">
+            <a:extLst>
+              <a:ext uri="{FF2B5EF4-FFF2-40B4-BE49-F238E27FC236}">
+                <a16:creationId xmlns:a16="http://schemas.microsoft.com/office/drawing/2014/main" id="{193A70C2-9665-D76B-1AE2-B41DB7F9141F}"/>
+              </a:ext>
+            </a:extLst>
+          </p:cNvPr>
+          <p:cNvGrpSpPr/>
+          <p:nvPr/>
+        </p:nvGrpSpPr>
+        <p:grpSpPr>
+          <a:xfrm>
+            <a:off x="10648352" y="3515455"/>
+            <a:ext cx="625640" cy="825748"/>
+            <a:chOff x="5200606" y="948929"/>
+            <a:chExt cx="895394" cy="1181783"/>
+          </a:xfrm>
+        </p:grpSpPr>
+        <p:sp>
+          <p:nvSpPr>
+            <p:cNvPr id="204" name="Isosceles Triangle 203">
+              <a:extLst>
+                <a:ext uri="{FF2B5EF4-FFF2-40B4-BE49-F238E27FC236}">
+                  <a16:creationId xmlns:a16="http://schemas.microsoft.com/office/drawing/2014/main" id="{89427A9A-54E6-F795-237A-D115541B06D0}"/>
+                </a:ext>
+              </a:extLst>
+            </p:cNvPr>
+            <p:cNvSpPr/>
+            <p:nvPr/>
+          </p:nvSpPr>
+          <p:spPr>
+            <a:xfrm>
+              <a:off x="5448300" y="948929"/>
+              <a:ext cx="406400" cy="558800"/>
+            </a:xfrm>
+            <a:prstGeom prst="triangle">
+              <a:avLst/>
+            </a:prstGeom>
+          </p:spPr>
+          <p:style>
+            <a:lnRef idx="2">
+              <a:schemeClr val="dk1">
+                <a:shade val="50000"/>
+              </a:schemeClr>
+            </a:lnRef>
+            <a:fillRef idx="1">
+              <a:schemeClr val="dk1"/>
+            </a:fillRef>
+            <a:effectRef idx="0">
+              <a:schemeClr val="dk1"/>
+            </a:effectRef>
+            <a:fontRef idx="minor">
+              <a:schemeClr val="lt1"/>
+            </a:fontRef>
+          </p:style>
+          <p:txBody>
+            <a:bodyPr rtlCol="0" anchor="ctr"/>
+            <a:lstStyle/>
+            <a:p>
+              <a:pPr algn="ctr"/>
+              <a:endParaRPr lang="en-US"/>
+            </a:p>
+          </p:txBody>
+        </p:sp>
+        <p:sp>
+          <p:nvSpPr>
+            <p:cNvPr id="205" name="Isosceles Triangle 204">
+              <a:extLst>
+                <a:ext uri="{FF2B5EF4-FFF2-40B4-BE49-F238E27FC236}">
+                  <a16:creationId xmlns:a16="http://schemas.microsoft.com/office/drawing/2014/main" id="{B48E1623-CE3A-F72D-7B9F-0C07FF4B307A}"/>
+                </a:ext>
+              </a:extLst>
+            </p:cNvPr>
+            <p:cNvSpPr/>
+            <p:nvPr/>
+          </p:nvSpPr>
+          <p:spPr>
+            <a:xfrm>
+              <a:off x="5200606" y="1571912"/>
+              <a:ext cx="406400" cy="558800"/>
+            </a:xfrm>
+            <a:prstGeom prst="triangle">
+              <a:avLst/>
+            </a:prstGeom>
+          </p:spPr>
+          <p:style>
+            <a:lnRef idx="2">
+              <a:schemeClr val="dk1">
+                <a:shade val="50000"/>
+              </a:schemeClr>
+            </a:lnRef>
+            <a:fillRef idx="1">
+              <a:schemeClr val="dk1"/>
+            </a:fillRef>
+            <a:effectRef idx="0">
+              <a:schemeClr val="dk1"/>
+            </a:effectRef>
+            <a:fontRef idx="minor">
+              <a:schemeClr val="lt1"/>
+            </a:fontRef>
+          </p:style>
+          <p:txBody>
+            <a:bodyPr rtlCol="0" anchor="ctr"/>
+            <a:lstStyle/>
+            <a:p>
+              <a:pPr algn="ctr"/>
+              <a:endParaRPr lang="en-US"/>
+            </a:p>
+          </p:txBody>
+        </p:sp>
+        <p:sp>
+          <p:nvSpPr>
+            <p:cNvPr id="206" name="Isosceles Triangle 205">
+              <a:extLst>
+                <a:ext uri="{FF2B5EF4-FFF2-40B4-BE49-F238E27FC236}">
+                  <a16:creationId xmlns:a16="http://schemas.microsoft.com/office/drawing/2014/main" id="{F4F6E9D9-F70F-4815-9849-71406CAADFFE}"/>
+                </a:ext>
+              </a:extLst>
+            </p:cNvPr>
+            <p:cNvSpPr/>
+            <p:nvPr/>
+          </p:nvSpPr>
+          <p:spPr>
+            <a:xfrm>
+              <a:off x="5689600" y="1571912"/>
+              <a:ext cx="406400" cy="558800"/>
+            </a:xfrm>
+            <a:prstGeom prst="triangle">
+              <a:avLst/>
             </a:prstGeom>
           </p:spPr>
           <p:style>

--- a/image process/drawings sifi.pptx
+++ b/image process/drawings sifi.pptx
@@ -16019,6 +16019,51 @@
       </p:grpSpPr>
       <p:pic>
         <p:nvPicPr>
+          <p:cNvPr id="1028" name="Picture 4" descr="Two Scythes Crossed Stock Vector (Royalty Free) 440071630 | Shutterstock">
+            <a:extLst>
+              <a:ext uri="{FF2B5EF4-FFF2-40B4-BE49-F238E27FC236}">
+                <a16:creationId xmlns:a16="http://schemas.microsoft.com/office/drawing/2014/main" id="{5EEB49C1-DB24-82B0-4A24-0F9B78C551C9}"/>
+              </a:ext>
+            </a:extLst>
+          </p:cNvPr>
+          <p:cNvPicPr>
+            <a:picLocks noChangeAspect="1" noChangeArrowheads="1"/>
+          </p:cNvPicPr>
+          <p:nvPr/>
+        </p:nvPicPr>
+        <p:blipFill rotWithShape="1">
+          <a:blip r:embed="rId2">
+            <a:extLst>
+              <a:ext uri="{28A0092B-C50C-407E-A947-70E740481C1C}">
+                <a14:useLocalDpi xmlns:a14="http://schemas.microsoft.com/office/drawing/2010/main" val="0"/>
+              </a:ext>
+            </a:extLst>
+          </a:blip>
+          <a:srcRect b="6675"/>
+          <a:stretch/>
+        </p:blipFill>
+        <p:spPr bwMode="auto">
+          <a:xfrm>
+            <a:off x="3438352" y="994846"/>
+            <a:ext cx="808502" cy="634444"/>
+          </a:xfrm>
+          <a:prstGeom prst="rect">
+            <a:avLst/>
+          </a:prstGeom>
+          <a:noFill/>
+          <a:extLst>
+            <a:ext uri="{909E8E84-426E-40DD-AFC4-6F175D3DCCD1}">
+              <a14:hiddenFill xmlns:a14="http://schemas.microsoft.com/office/drawing/2010/main">
+                <a:solidFill>
+                  <a:srgbClr val="FFFFFF"/>
+                </a:solidFill>
+              </a14:hiddenFill>
+            </a:ext>
+          </a:extLst>
+        </p:spPr>
+      </p:pic>
+      <p:pic>
+        <p:nvPicPr>
           <p:cNvPr id="144" name="Picture 143">
             <a:extLst>
               <a:ext uri="{FF2B5EF4-FFF2-40B4-BE49-F238E27FC236}">
@@ -16032,14 +16077,14 @@
           <p:nvPr/>
         </p:nvPicPr>
         <p:blipFill>
-          <a:blip r:embed="rId2"/>
+          <a:blip r:embed="rId3"/>
           <a:stretch>
             <a:fillRect/>
           </a:stretch>
         </p:blipFill>
         <p:spPr>
           <a:xfrm>
-            <a:off x="6556612" y="934681"/>
+            <a:off x="8010605" y="923977"/>
             <a:ext cx="277209" cy="415814"/>
           </a:xfrm>
           <a:prstGeom prst="rect">
@@ -16097,7 +16142,7 @@
         </p:nvGrpSpPr>
         <p:grpSpPr>
           <a:xfrm>
-            <a:off x="9116388" y="3515455"/>
+            <a:off x="5059933" y="4256831"/>
             <a:ext cx="741738" cy="928816"/>
             <a:chOff x="2736559" y="1271400"/>
             <a:chExt cx="1887829" cy="2363975"/>
@@ -16461,7 +16506,7 @@
         </p:nvGrpSpPr>
         <p:grpSpPr>
           <a:xfrm>
-            <a:off x="8790031" y="3209529"/>
+            <a:off x="4733576" y="3950905"/>
             <a:ext cx="1371600" cy="1371600"/>
             <a:chOff x="427081" y="263129"/>
             <a:chExt cx="1371600" cy="1371600"/>
@@ -16589,14 +16634,14 @@
           <p:nvPr/>
         </p:nvPicPr>
         <p:blipFill>
-          <a:blip r:embed="rId3"/>
+          <a:blip r:embed="rId4"/>
           <a:stretch>
             <a:fillRect/>
           </a:stretch>
         </p:blipFill>
         <p:spPr>
           <a:xfrm>
-            <a:off x="609314" y="896969"/>
+            <a:off x="445327" y="890153"/>
             <a:ext cx="703687" cy="887381"/>
           </a:xfrm>
           <a:prstGeom prst="rect">
@@ -16618,7 +16663,7 @@
         </p:nvGrpSpPr>
         <p:grpSpPr>
           <a:xfrm>
-            <a:off x="265805" y="561579"/>
+            <a:off x="101818" y="554763"/>
             <a:ext cx="1371600" cy="1371600"/>
             <a:chOff x="427081" y="263129"/>
             <a:chExt cx="1371600" cy="1371600"/>
@@ -16745,7 +16790,7 @@
         </p:nvGrpSpPr>
         <p:grpSpPr>
           <a:xfrm>
-            <a:off x="1774744" y="561579"/>
+            <a:off x="1610757" y="554763"/>
             <a:ext cx="1371600" cy="1371600"/>
             <a:chOff x="427081" y="263129"/>
             <a:chExt cx="1371600" cy="1371600"/>
@@ -16860,10 +16905,10 @@
       </p:grpSp>
       <p:grpSp>
         <p:nvGrpSpPr>
-          <p:cNvPr id="62" name="Group 61">
+          <p:cNvPr id="3" name="Group 2">
             <a:extLst>
               <a:ext uri="{FF2B5EF4-FFF2-40B4-BE49-F238E27FC236}">
-                <a16:creationId xmlns:a16="http://schemas.microsoft.com/office/drawing/2014/main" id="{2E75E3D7-A70B-C907-CC6D-29D73D63C577}"/>
+                <a16:creationId xmlns:a16="http://schemas.microsoft.com/office/drawing/2014/main" id="{D843969C-84CC-84E8-55E9-C5613CA3ED92}"/>
               </a:ext>
             </a:extLst>
           </p:cNvPr>
@@ -16872,10 +16917,10 @@
         </p:nvGrpSpPr>
         <p:grpSpPr>
           <a:xfrm>
-            <a:off x="1996314" y="1042516"/>
-            <a:ext cx="963261" cy="626255"/>
-            <a:chOff x="648651" y="744066"/>
-            <a:chExt cx="963261" cy="626255"/>
+            <a:off x="1868231" y="996975"/>
+            <a:ext cx="887099" cy="758582"/>
+            <a:chOff x="3633466" y="2399571"/>
+            <a:chExt cx="1377143" cy="1177631"/>
           </a:xfrm>
         </p:grpSpPr>
         <p:sp>
@@ -16892,8 +16937,8 @@
           </p:nvSpPr>
           <p:spPr>
             <a:xfrm rot="209926">
-              <a:off x="666143" y="770809"/>
-              <a:ext cx="239261" cy="52309"/>
+              <a:off x="3683689" y="2448215"/>
+              <a:ext cx="435206" cy="95148"/>
             </a:xfrm>
             <a:prstGeom prst="rect">
               <a:avLst/>
@@ -16936,8 +16981,8 @@
           </p:nvSpPr>
           <p:spPr>
             <a:xfrm rot="2298692">
-              <a:off x="937159" y="1175450"/>
-              <a:ext cx="80573" cy="181646"/>
+              <a:off x="4158251" y="3222739"/>
+              <a:ext cx="146559" cy="330407"/>
             </a:xfrm>
             <a:prstGeom prst="rect">
               <a:avLst/>
@@ -16982,8 +17027,8 @@
           </p:nvSpPr>
           <p:spPr>
             <a:xfrm rot="19125484">
-              <a:off x="895519" y="1010551"/>
-              <a:ext cx="124644" cy="181646"/>
+              <a:off x="4082509" y="2922795"/>
+              <a:ext cx="226723" cy="330407"/>
             </a:xfrm>
             <a:prstGeom prst="rect">
               <a:avLst/>
@@ -17028,8 +17073,8 @@
           </p:nvSpPr>
           <p:spPr>
             <a:xfrm rot="16340403">
-              <a:off x="960709" y="1110544"/>
-              <a:ext cx="127799" cy="127799"/>
+              <a:off x="4201087" y="3104678"/>
+              <a:ext cx="232461" cy="232461"/>
             </a:xfrm>
             <a:prstGeom prst="ellipse">
               <a:avLst/>
@@ -17073,8 +17118,8 @@
           </p:nvSpPr>
           <p:spPr>
             <a:xfrm rot="21559864">
-              <a:off x="827784" y="1308483"/>
-              <a:ext cx="176985" cy="61838"/>
+              <a:off x="3959302" y="3464721"/>
+              <a:ext cx="321929" cy="112481"/>
             </a:xfrm>
             <a:prstGeom prst="rect">
               <a:avLst/>
@@ -17119,8 +17164,8 @@
           </p:nvSpPr>
           <p:spPr>
             <a:xfrm>
-              <a:off x="730780" y="884797"/>
-              <a:ext cx="385680" cy="182447"/>
+              <a:off x="3782855" y="2694053"/>
+              <a:ext cx="701537" cy="331864"/>
             </a:xfrm>
             <a:prstGeom prst="rect">
               <a:avLst/>
@@ -17165,8 +17210,8 @@
           </p:nvSpPr>
           <p:spPr>
             <a:xfrm rot="1347909">
-              <a:off x="1129217" y="948909"/>
-              <a:ext cx="127799" cy="101971"/>
+              <a:off x="4526706" y="2794535"/>
+              <a:ext cx="132102" cy="105404"/>
             </a:xfrm>
             <a:prstGeom prst="rect">
               <a:avLst/>
@@ -17211,8 +17256,8 @@
           </p:nvSpPr>
           <p:spPr>
             <a:xfrm rot="16200000">
-              <a:off x="1050684" y="904153"/>
-              <a:ext cx="127799" cy="127799"/>
+              <a:off x="4364748" y="2729261"/>
+              <a:ext cx="232461" cy="232461"/>
             </a:xfrm>
             <a:prstGeom prst="ellipse">
               <a:avLst/>
@@ -17256,8 +17301,8 @@
           </p:nvSpPr>
           <p:spPr>
             <a:xfrm rot="470651">
-              <a:off x="1233938" y="976327"/>
-              <a:ext cx="127799" cy="95167"/>
+              <a:off x="4703650" y="2854045"/>
+              <a:ext cx="132102" cy="98371"/>
             </a:xfrm>
             <a:prstGeom prst="rect">
               <a:avLst/>
@@ -17302,100 +17347,8 @@
           </p:nvSpPr>
           <p:spPr>
             <a:xfrm rot="21265202">
-              <a:off x="1317139" y="974084"/>
-              <a:ext cx="127799" cy="75981"/>
-            </a:xfrm>
-            <a:prstGeom prst="rect">
-              <a:avLst/>
-            </a:prstGeom>
-          </p:spPr>
-          <p:style>
-            <a:lnRef idx="2">
-              <a:schemeClr val="dk1">
-                <a:shade val="50000"/>
-              </a:schemeClr>
-            </a:lnRef>
-            <a:fillRef idx="1">
-              <a:schemeClr val="dk1"/>
-            </a:fillRef>
-            <a:effectRef idx="0">
-              <a:schemeClr val="dk1"/>
-            </a:effectRef>
-            <a:fontRef idx="minor">
-              <a:schemeClr val="lt1"/>
-            </a:fontRef>
-          </p:style>
-          <p:txBody>
-            <a:bodyPr rtlCol="0" anchor="ctr"/>
-            <a:lstStyle/>
-            <a:p>
-              <a:pPr algn="ctr"/>
-              <a:endParaRPr lang="en-US"/>
-            </a:p>
-          </p:txBody>
-        </p:sp>
-        <p:sp>
-          <p:nvSpPr>
-            <p:cNvPr id="73" name="Rectangle 72">
-              <a:extLst>
-                <a:ext uri="{FF2B5EF4-FFF2-40B4-BE49-F238E27FC236}">
-                  <a16:creationId xmlns:a16="http://schemas.microsoft.com/office/drawing/2014/main" id="{59936618-E9A8-6B09-A705-098026B1641B}"/>
-                </a:ext>
-              </a:extLst>
-            </p:cNvPr>
-            <p:cNvSpPr/>
-            <p:nvPr/>
-          </p:nvSpPr>
-          <p:spPr>
-            <a:xfrm rot="20266641">
-              <a:off x="1391056" y="950213"/>
-              <a:ext cx="127799" cy="71395"/>
-            </a:xfrm>
-            <a:prstGeom prst="rect">
-              <a:avLst/>
-            </a:prstGeom>
-          </p:spPr>
-          <p:style>
-            <a:lnRef idx="2">
-              <a:schemeClr val="dk1">
-                <a:shade val="50000"/>
-              </a:schemeClr>
-            </a:lnRef>
-            <a:fillRef idx="1">
-              <a:schemeClr val="dk1"/>
-            </a:fillRef>
-            <a:effectRef idx="0">
-              <a:schemeClr val="dk1"/>
-            </a:effectRef>
-            <a:fontRef idx="minor">
-              <a:schemeClr val="lt1"/>
-            </a:fontRef>
-          </p:style>
-          <p:txBody>
-            <a:bodyPr rtlCol="0" anchor="ctr"/>
-            <a:lstStyle/>
-            <a:p>
-              <a:pPr algn="ctr"/>
-              <a:endParaRPr lang="en-US"/>
-            </a:p>
-          </p:txBody>
-        </p:sp>
-        <p:sp>
-          <p:nvSpPr>
-            <p:cNvPr id="74" name="Rectangle 73">
-              <a:extLst>
-                <a:ext uri="{FF2B5EF4-FFF2-40B4-BE49-F238E27FC236}">
-                  <a16:creationId xmlns:a16="http://schemas.microsoft.com/office/drawing/2014/main" id="{E1BC772E-B803-B031-69E2-01013AA023EA}"/>
-                </a:ext>
-              </a:extLst>
-            </p:cNvPr>
-            <p:cNvSpPr/>
-            <p:nvPr/>
-          </p:nvSpPr>
-          <p:spPr>
-            <a:xfrm rot="21118181">
-              <a:off x="1466604" y="928247"/>
-              <a:ext cx="145308" cy="61838"/>
+              <a:off x="4878507" y="2861483"/>
+              <a:ext cx="132102" cy="78539"/>
             </a:xfrm>
             <a:prstGeom prst="rect">
               <a:avLst/>
@@ -17440,8 +17393,8 @@
           </p:nvSpPr>
           <p:spPr>
             <a:xfrm rot="20943061">
-              <a:off x="648651" y="892255"/>
-              <a:ext cx="176184" cy="173439"/>
+              <a:off x="3633466" y="2707619"/>
+              <a:ext cx="320472" cy="315479"/>
             </a:xfrm>
             <a:prstGeom prst="plaque">
               <a:avLst>
@@ -17488,8 +17441,8 @@
           </p:nvSpPr>
           <p:spPr>
             <a:xfrm rot="16200000">
-              <a:off x="806291" y="940142"/>
-              <a:ext cx="157066" cy="157066"/>
+              <a:off x="3938769" y="2808131"/>
+              <a:ext cx="285697" cy="285697"/>
             </a:xfrm>
             <a:prstGeom prst="ellipse">
               <a:avLst/>
@@ -17533,8 +17486,8 @@
           </p:nvSpPr>
           <p:spPr>
             <a:xfrm flipH="1">
-              <a:off x="820699" y="744066"/>
-              <a:ext cx="229986" cy="123357"/>
+              <a:off x="3964821" y="2399571"/>
+              <a:ext cx="418336" cy="224381"/>
             </a:xfrm>
             <a:prstGeom prst="snip2DiagRect">
               <a:avLst>
@@ -17583,7 +17536,7 @@
         </p:nvGrpSpPr>
         <p:grpSpPr>
           <a:xfrm>
-            <a:off x="3283683" y="561579"/>
+            <a:off x="4737676" y="550875"/>
             <a:ext cx="1371600" cy="1371600"/>
             <a:chOff x="427081" y="263129"/>
             <a:chExt cx="1371600" cy="1371600"/>
@@ -17655,7 +17608,7 @@
           </p:nvSpPr>
           <p:spPr>
             <a:xfrm>
-              <a:off x="566683" y="478473"/>
+              <a:off x="566683" y="484823"/>
               <a:ext cx="1097280" cy="1097280"/>
             </a:xfrm>
             <a:prstGeom prst="plaque">
@@ -17710,7 +17663,7 @@
         </p:nvGrpSpPr>
         <p:grpSpPr>
           <a:xfrm>
-            <a:off x="3521060" y="981522"/>
+            <a:off x="4975053" y="970818"/>
             <a:ext cx="907668" cy="622697"/>
             <a:chOff x="2768462" y="1630604"/>
             <a:chExt cx="3099528" cy="2126402"/>
@@ -18348,7 +18301,7 @@
         </p:nvGrpSpPr>
         <p:grpSpPr>
           <a:xfrm>
-            <a:off x="1782882" y="2084445"/>
+            <a:off x="1618895" y="2077629"/>
             <a:ext cx="1371600" cy="1371600"/>
             <a:chOff x="427081" y="263129"/>
             <a:chExt cx="1371600" cy="1371600"/>
@@ -18475,7 +18428,7 @@
         </p:nvGrpSpPr>
         <p:grpSpPr>
           <a:xfrm>
-            <a:off x="1953043" y="2348722"/>
+            <a:off x="1789056" y="2341906"/>
             <a:ext cx="1034201" cy="950766"/>
             <a:chOff x="1086869" y="3336948"/>
             <a:chExt cx="1034201" cy="950766"/>
@@ -18640,7 +18593,7 @@
         </p:nvGrpSpPr>
         <p:grpSpPr>
           <a:xfrm>
-            <a:off x="4812983" y="561579"/>
+            <a:off x="6266976" y="550875"/>
             <a:ext cx="1371600" cy="1371600"/>
             <a:chOff x="427081" y="263129"/>
             <a:chExt cx="1371600" cy="1371600"/>
@@ -18712,7 +18665,7 @@
           </p:nvSpPr>
           <p:spPr>
             <a:xfrm>
-              <a:off x="566683" y="478473"/>
+              <a:off x="566683" y="484823"/>
               <a:ext cx="1097280" cy="1097280"/>
             </a:xfrm>
             <a:prstGeom prst="plaque">
@@ -18767,7 +18720,7 @@
         </p:nvGrpSpPr>
         <p:grpSpPr>
           <a:xfrm>
-            <a:off x="5028480" y="893686"/>
+            <a:off x="6482473" y="882982"/>
             <a:ext cx="932742" cy="801763"/>
             <a:chOff x="3387725" y="1634730"/>
             <a:chExt cx="1466850" cy="1260870"/>
@@ -19063,14 +19016,14 @@
           <p:nvPr/>
         </p:nvPicPr>
         <p:blipFill>
-          <a:blip r:embed="rId4"/>
+          <a:blip r:embed="rId5"/>
           <a:stretch>
             <a:fillRect/>
           </a:stretch>
         </p:blipFill>
         <p:spPr>
           <a:xfrm>
-            <a:off x="8602121" y="953412"/>
+            <a:off x="10056114" y="942708"/>
             <a:ext cx="433388" cy="444277"/>
           </a:xfrm>
           <a:prstGeom prst="rect">
@@ -19092,7 +19045,7 @@
         </p:nvGrpSpPr>
         <p:grpSpPr>
           <a:xfrm>
-            <a:off x="6316063" y="565221"/>
+            <a:off x="7770056" y="554517"/>
             <a:ext cx="1371600" cy="1371600"/>
             <a:chOff x="427081" y="263129"/>
             <a:chExt cx="1371600" cy="1371600"/>
@@ -19219,7 +19172,7 @@
         </p:nvGrpSpPr>
         <p:grpSpPr>
           <a:xfrm>
-            <a:off x="6908156" y="838411"/>
+            <a:off x="8362149" y="827707"/>
             <a:ext cx="441325" cy="1012069"/>
             <a:chOff x="3248025" y="1009650"/>
             <a:chExt cx="1390650" cy="3189114"/>
@@ -19738,7 +19691,7 @@
         </p:nvGrpSpPr>
         <p:grpSpPr>
           <a:xfrm>
-            <a:off x="8108359" y="845004"/>
+            <a:off x="9562352" y="834300"/>
             <a:ext cx="502920" cy="1014984"/>
             <a:chOff x="5380031" y="966102"/>
             <a:chExt cx="1727200" cy="3248141"/>
@@ -20257,7 +20210,7 @@
         </p:nvGrpSpPr>
         <p:grpSpPr>
           <a:xfrm>
-            <a:off x="7794856" y="567502"/>
+            <a:off x="9248849" y="556798"/>
             <a:ext cx="1371600" cy="1371600"/>
             <a:chOff x="427081" y="263129"/>
             <a:chExt cx="1371600" cy="1371600"/>
@@ -20329,7 +20282,7 @@
           </p:nvSpPr>
           <p:spPr>
             <a:xfrm>
-              <a:off x="566683" y="478473"/>
+              <a:off x="566683" y="484823"/>
               <a:ext cx="1097280" cy="1097280"/>
             </a:xfrm>
             <a:prstGeom prst="plaque">
@@ -20384,7 +20337,7 @@
         </p:nvGrpSpPr>
         <p:grpSpPr>
           <a:xfrm>
-            <a:off x="9539183" y="811523"/>
+            <a:off x="10913644" y="795917"/>
             <a:ext cx="1027167" cy="1035721"/>
             <a:chOff x="4165279" y="376316"/>
             <a:chExt cx="4372510" cy="4408922"/>
@@ -20630,7 +20583,7 @@
               <p:nvPr/>
             </p:nvPicPr>
             <p:blipFill rotWithShape="1">
-              <a:blip r:embed="rId5"/>
+              <a:blip r:embed="rId6"/>
               <a:srcRect l="7265" t="2149" r="2137"/>
               <a:stretch/>
             </p:blipFill>
@@ -20659,7 +20612,7 @@
               <p:nvPr/>
             </p:nvPicPr>
             <p:blipFill rotWithShape="1">
-              <a:blip r:embed="rId5"/>
+              <a:blip r:embed="rId6"/>
               <a:srcRect l="7265" t="2149" r="2137"/>
               <a:stretch/>
             </p:blipFill>
@@ -20688,7 +20641,7 @@
               <p:nvPr/>
             </p:nvPicPr>
             <p:blipFill rotWithShape="1">
-              <a:blip r:embed="rId5"/>
+              <a:blip r:embed="rId6"/>
               <a:srcRect l="7265" t="2149" r="2137"/>
               <a:stretch/>
             </p:blipFill>
@@ -20717,7 +20670,7 @@
               <p:nvPr/>
             </p:nvPicPr>
             <p:blipFill rotWithShape="1">
-              <a:blip r:embed="rId5"/>
+              <a:blip r:embed="rId6"/>
               <a:srcRect l="7265" t="2149" r="2137"/>
               <a:stretch/>
             </p:blipFill>
@@ -20767,7 +20720,7 @@
               <p:nvPr/>
             </p:nvPicPr>
             <p:blipFill rotWithShape="1">
-              <a:blip r:embed="rId5"/>
+              <a:blip r:embed="rId6"/>
               <a:srcRect l="7265" t="2149" r="2137"/>
               <a:stretch/>
             </p:blipFill>
@@ -20796,7 +20749,7 @@
               <p:nvPr/>
             </p:nvPicPr>
             <p:blipFill rotWithShape="1">
-              <a:blip r:embed="rId5"/>
+              <a:blip r:embed="rId6"/>
               <a:srcRect l="7265" t="2149" r="2137"/>
               <a:stretch/>
             </p:blipFill>
@@ -20825,7 +20778,7 @@
               <p:nvPr/>
             </p:nvPicPr>
             <p:blipFill rotWithShape="1">
-              <a:blip r:embed="rId5"/>
+              <a:blip r:embed="rId6"/>
               <a:srcRect l="7265" t="2149" r="2137"/>
               <a:stretch/>
             </p:blipFill>
@@ -20854,7 +20807,7 @@
               <p:nvPr/>
             </p:nvPicPr>
             <p:blipFill rotWithShape="1">
-              <a:blip r:embed="rId5"/>
+              <a:blip r:embed="rId6"/>
               <a:srcRect l="7265" t="2149" r="2137"/>
               <a:stretch/>
             </p:blipFill>
@@ -20904,7 +20857,7 @@
               <p:nvPr/>
             </p:nvPicPr>
             <p:blipFill rotWithShape="1">
-              <a:blip r:embed="rId5"/>
+              <a:blip r:embed="rId6"/>
               <a:srcRect l="7265" t="2149" r="2137"/>
               <a:stretch/>
             </p:blipFill>
@@ -20933,7 +20886,7 @@
               <p:nvPr/>
             </p:nvPicPr>
             <p:blipFill rotWithShape="1">
-              <a:blip r:embed="rId5"/>
+              <a:blip r:embed="rId6"/>
               <a:srcRect l="7265" t="2149" r="2137"/>
               <a:stretch/>
             </p:blipFill>
@@ -20962,7 +20915,7 @@
               <p:nvPr/>
             </p:nvPicPr>
             <p:blipFill rotWithShape="1">
-              <a:blip r:embed="rId5"/>
+              <a:blip r:embed="rId6"/>
               <a:srcRect l="7265" t="2149" r="2137"/>
               <a:stretch/>
             </p:blipFill>
@@ -20991,7 +20944,7 @@
               <p:nvPr/>
             </p:nvPicPr>
             <p:blipFill rotWithShape="1">
-              <a:blip r:embed="rId5"/>
+              <a:blip r:embed="rId6"/>
               <a:srcRect l="7265" t="2149" r="2137"/>
               <a:stretch/>
             </p:blipFill>
@@ -21041,7 +20994,7 @@
               <p:nvPr/>
             </p:nvPicPr>
             <p:blipFill rotWithShape="1">
-              <a:blip r:embed="rId5"/>
+              <a:blip r:embed="rId6"/>
               <a:srcRect l="7265" t="2149" r="2137"/>
               <a:stretch/>
             </p:blipFill>
@@ -21070,7 +21023,7 @@
               <p:nvPr/>
             </p:nvPicPr>
             <p:blipFill rotWithShape="1">
-              <a:blip r:embed="rId5"/>
+              <a:blip r:embed="rId6"/>
               <a:srcRect l="7265" t="2149" r="2137"/>
               <a:stretch/>
             </p:blipFill>
@@ -21099,7 +21052,7 @@
               <p:nvPr/>
             </p:nvPicPr>
             <p:blipFill rotWithShape="1">
-              <a:blip r:embed="rId5"/>
+              <a:blip r:embed="rId6"/>
               <a:srcRect l="7265" t="2149" r="2137"/>
               <a:stretch/>
             </p:blipFill>
@@ -21128,7 +21081,7 @@
               <p:nvPr/>
             </p:nvPicPr>
             <p:blipFill rotWithShape="1">
-              <a:blip r:embed="rId5"/>
+              <a:blip r:embed="rId6"/>
               <a:srcRect l="7265" t="2149" r="2137"/>
               <a:stretch/>
             </p:blipFill>
@@ -21158,7 +21111,7 @@
         </p:nvGrpSpPr>
         <p:grpSpPr>
           <a:xfrm>
-            <a:off x="9358175" y="580700"/>
+            <a:off x="10732636" y="565094"/>
             <a:ext cx="1371600" cy="1371600"/>
             <a:chOff x="427081" y="263129"/>
             <a:chExt cx="1371600" cy="1371600"/>
@@ -21285,7 +21238,7 @@
         </p:nvGrpSpPr>
         <p:grpSpPr>
           <a:xfrm>
-            <a:off x="3976821" y="3222214"/>
+            <a:off x="280715" y="3936618"/>
             <a:ext cx="1371600" cy="1371600"/>
             <a:chOff x="427081" y="263129"/>
             <a:chExt cx="1371600" cy="1371600"/>
@@ -21412,7 +21365,7 @@
         </p:nvGrpSpPr>
         <p:grpSpPr>
           <a:xfrm>
-            <a:off x="4347149" y="3740951"/>
+            <a:off x="651043" y="4455355"/>
             <a:ext cx="631137" cy="505972"/>
             <a:chOff x="5010218" y="2694841"/>
             <a:chExt cx="2523392" cy="2022962"/>
@@ -21882,14 +21835,14 @@
           <p:nvPr/>
         </p:nvPicPr>
         <p:blipFill>
-          <a:blip r:embed="rId6"/>
+          <a:blip r:embed="rId7"/>
           <a:stretch>
             <a:fillRect/>
           </a:stretch>
         </p:blipFill>
         <p:spPr>
           <a:xfrm>
-            <a:off x="534930" y="2356416"/>
+            <a:off x="370943" y="2349600"/>
             <a:ext cx="863170" cy="863170"/>
           </a:xfrm>
           <a:prstGeom prst="rect">
@@ -21911,7 +21864,7 @@
         </p:nvGrpSpPr>
         <p:grpSpPr>
           <a:xfrm>
-            <a:off x="280715" y="2053273"/>
+            <a:off x="116728" y="2046457"/>
             <a:ext cx="1371600" cy="1371600"/>
             <a:chOff x="427081" y="263129"/>
             <a:chExt cx="1371600" cy="1371600"/>
@@ -22038,7 +21991,7 @@
         </p:nvGrpSpPr>
         <p:grpSpPr>
           <a:xfrm>
-            <a:off x="6943369" y="3239284"/>
+            <a:off x="3247263" y="3953688"/>
             <a:ext cx="1371600" cy="1371600"/>
             <a:chOff x="427081" y="263129"/>
             <a:chExt cx="1371600" cy="1371600"/>
@@ -22110,7 +22063,7 @@
           </p:nvSpPr>
           <p:spPr>
             <a:xfrm>
-              <a:off x="566683" y="478473"/>
+              <a:off x="566683" y="484823"/>
               <a:ext cx="1097280" cy="1097280"/>
             </a:xfrm>
             <a:prstGeom prst="plaque">
@@ -22165,7 +22118,7 @@
         </p:nvGrpSpPr>
         <p:grpSpPr>
           <a:xfrm>
-            <a:off x="5460586" y="3226447"/>
+            <a:off x="1764480" y="3940851"/>
             <a:ext cx="1371600" cy="1371600"/>
             <a:chOff x="427081" y="263129"/>
             <a:chExt cx="1371600" cy="1371600"/>
@@ -22237,7 +22190,7 @@
           </p:nvSpPr>
           <p:spPr>
             <a:xfrm>
-              <a:off x="566683" y="478473"/>
+              <a:off x="566683" y="484823"/>
               <a:ext cx="1097280" cy="1097280"/>
             </a:xfrm>
             <a:prstGeom prst="plaque">
@@ -22273,7 +22226,7 @@
             <a:lstStyle/>
             <a:p>
               <a:pPr algn="ctr"/>
-              <a:endParaRPr lang="en-US"/>
+              <a:endParaRPr lang="en-US" dirty="0"/>
             </a:p>
           </p:txBody>
         </p:sp>
@@ -22292,7 +22245,7 @@
         </p:nvGrpSpPr>
         <p:grpSpPr>
           <a:xfrm rot="19097516">
-            <a:off x="5850584" y="3543333"/>
+            <a:off x="2154478" y="4257737"/>
             <a:ext cx="577458" cy="886118"/>
             <a:chOff x="5275383" y="2444259"/>
             <a:chExt cx="2101363" cy="3224576"/>
@@ -22632,7 +22585,7 @@
         </p:nvGrpSpPr>
         <p:grpSpPr>
           <a:xfrm rot="19005849">
-            <a:off x="7160581" y="3789066"/>
+            <a:off x="3464475" y="4503470"/>
             <a:ext cx="1093057" cy="584571"/>
             <a:chOff x="5276797" y="2347914"/>
             <a:chExt cx="3125698" cy="1671636"/>
@@ -23258,7 +23211,7 @@
         </p:nvGrpSpPr>
         <p:grpSpPr>
           <a:xfrm>
-            <a:off x="10276129" y="3200894"/>
+            <a:off x="6219674" y="3942270"/>
             <a:ext cx="1371600" cy="1371600"/>
             <a:chOff x="427081" y="263129"/>
             <a:chExt cx="1371600" cy="1371600"/>
@@ -23385,7 +23338,7 @@
         </p:nvGrpSpPr>
         <p:grpSpPr>
           <a:xfrm>
-            <a:off x="10648352" y="3515455"/>
+            <a:off x="6591897" y="4256831"/>
             <a:ext cx="625640" cy="825748"/>
             <a:chOff x="5200606" y="948929"/>
             <a:chExt cx="895394" cy="1181783"/>
@@ -23530,6 +23483,1142 @@
           </p:txBody>
         </p:sp>
       </p:grpSp>
+      <p:grpSp>
+        <p:nvGrpSpPr>
+          <p:cNvPr id="198" name="Group 197">
+            <a:extLst>
+              <a:ext uri="{FF2B5EF4-FFF2-40B4-BE49-F238E27FC236}">
+                <a16:creationId xmlns:a16="http://schemas.microsoft.com/office/drawing/2014/main" id="{C27C3161-EE2B-E926-40F5-6CEF2B1CCD25}"/>
+              </a:ext>
+            </a:extLst>
+          </p:cNvPr>
+          <p:cNvGrpSpPr/>
+          <p:nvPr/>
+        </p:nvGrpSpPr>
+        <p:grpSpPr>
+          <a:xfrm>
+            <a:off x="3151872" y="554517"/>
+            <a:ext cx="1371600" cy="1371600"/>
+            <a:chOff x="427081" y="263129"/>
+            <a:chExt cx="1371600" cy="1371600"/>
+          </a:xfrm>
+        </p:grpSpPr>
+        <p:sp>
+          <p:nvSpPr>
+            <p:cNvPr id="199" name="Rectangle 198">
+              <a:extLst>
+                <a:ext uri="{FF2B5EF4-FFF2-40B4-BE49-F238E27FC236}">
+                  <a16:creationId xmlns:a16="http://schemas.microsoft.com/office/drawing/2014/main" id="{B0352E4F-3937-F367-BE78-1961355DDB88}"/>
+                </a:ext>
+              </a:extLst>
+            </p:cNvPr>
+            <p:cNvSpPr/>
+            <p:nvPr/>
+          </p:nvSpPr>
+          <p:spPr>
+            <a:xfrm>
+              <a:off x="427081" y="263129"/>
+              <a:ext cx="1371600" cy="1371600"/>
+            </a:xfrm>
+            <a:prstGeom prst="rect">
+              <a:avLst/>
+            </a:prstGeom>
+            <a:noFill/>
+            <a:ln w="76200">
+              <a:solidFill>
+                <a:schemeClr val="tx1"/>
+              </a:solidFill>
+            </a:ln>
+          </p:spPr>
+          <p:style>
+            <a:lnRef idx="2">
+              <a:schemeClr val="accent1">
+                <a:shade val="50000"/>
+              </a:schemeClr>
+            </a:lnRef>
+            <a:fillRef idx="1">
+              <a:schemeClr val="accent1"/>
+            </a:fillRef>
+            <a:effectRef idx="0">
+              <a:schemeClr val="accent1"/>
+            </a:effectRef>
+            <a:fontRef idx="minor">
+              <a:schemeClr val="lt1"/>
+            </a:fontRef>
+          </p:style>
+          <p:txBody>
+            <a:bodyPr rtlCol="0" anchor="ctr"/>
+            <a:lstStyle/>
+            <a:p>
+              <a:pPr algn="ctr"/>
+              <a:endParaRPr lang="en-US"/>
+            </a:p>
+          </p:txBody>
+        </p:sp>
+        <p:sp>
+          <p:nvSpPr>
+            <p:cNvPr id="200" name="Plaque 199">
+              <a:extLst>
+                <a:ext uri="{FF2B5EF4-FFF2-40B4-BE49-F238E27FC236}">
+                  <a16:creationId xmlns:a16="http://schemas.microsoft.com/office/drawing/2014/main" id="{A6992163-211E-24E4-C4E9-CC0F5CDA2E2C}"/>
+                </a:ext>
+              </a:extLst>
+            </p:cNvPr>
+            <p:cNvSpPr/>
+            <p:nvPr/>
+          </p:nvSpPr>
+          <p:spPr>
+            <a:xfrm>
+              <a:off x="566683" y="478473"/>
+              <a:ext cx="1097280" cy="1097280"/>
+            </a:xfrm>
+            <a:prstGeom prst="plaque">
+              <a:avLst/>
+            </a:prstGeom>
+            <a:noFill/>
+            <a:ln w="38100" cap="flat" cmpd="sng" algn="ctr">
+              <a:solidFill>
+                <a:schemeClr val="dk1"/>
+              </a:solidFill>
+              <a:prstDash val="solid"/>
+              <a:round/>
+              <a:headEnd type="none" w="med" len="med"/>
+              <a:tailEnd type="none" w="med" len="med"/>
+            </a:ln>
+          </p:spPr>
+          <p:style>
+            <a:lnRef idx="0">
+              <a:scrgbClr r="0" g="0" b="0"/>
+            </a:lnRef>
+            <a:fillRef idx="0">
+              <a:scrgbClr r="0" g="0" b="0"/>
+            </a:fillRef>
+            <a:effectRef idx="0">
+              <a:scrgbClr r="0" g="0" b="0"/>
+            </a:effectRef>
+            <a:fontRef idx="minor">
+              <a:schemeClr val="dk1"/>
+            </a:fontRef>
+          </p:style>
+          <p:txBody>
+            <a:bodyPr rtlCol="0" anchor="ctr"/>
+            <a:lstStyle/>
+            <a:p>
+              <a:pPr algn="ctr"/>
+              <a:endParaRPr lang="en-US"/>
+            </a:p>
+          </p:txBody>
+        </p:sp>
+      </p:grpSp>
+      <p:pic>
+        <p:nvPicPr>
+          <p:cNvPr id="1030" name="Picture 6" descr="Hurricane Whirlwind Icon, Simple Style Stock Vector - Illustration of  round, rotate: 138334440">
+            <a:extLst>
+              <a:ext uri="{FF2B5EF4-FFF2-40B4-BE49-F238E27FC236}">
+                <a16:creationId xmlns:a16="http://schemas.microsoft.com/office/drawing/2014/main" id="{D433DD36-30FD-E560-1C31-E0CB247B2E18}"/>
+              </a:ext>
+            </a:extLst>
+          </p:cNvPr>
+          <p:cNvPicPr>
+            <a:picLocks noChangeAspect="1" noChangeArrowheads="1"/>
+          </p:cNvPicPr>
+          <p:nvPr/>
+        </p:nvPicPr>
+        <p:blipFill>
+          <a:blip r:embed="rId8">
+            <a:extLst>
+              <a:ext uri="{28A0092B-C50C-407E-A947-70E740481C1C}">
+                <a14:useLocalDpi xmlns:a14="http://schemas.microsoft.com/office/drawing/2010/main" val="0"/>
+              </a:ext>
+            </a:extLst>
+          </a:blip>
+          <a:srcRect/>
+          <a:stretch>
+            <a:fillRect/>
+          </a:stretch>
+        </p:blipFill>
+        <p:spPr bwMode="auto">
+          <a:xfrm>
+            <a:off x="3389116" y="2385205"/>
+            <a:ext cx="867112" cy="867112"/>
+          </a:xfrm>
+          <a:prstGeom prst="rect">
+            <a:avLst/>
+          </a:prstGeom>
+          <a:noFill/>
+          <a:extLst>
+            <a:ext uri="{909E8E84-426E-40DD-AFC4-6F175D3DCCD1}">
+              <a14:hiddenFill xmlns:a14="http://schemas.microsoft.com/office/drawing/2010/main">
+                <a:solidFill>
+                  <a:srgbClr val="FFFFFF"/>
+                </a:solidFill>
+              </a14:hiddenFill>
+            </a:ext>
+          </a:extLst>
+        </p:spPr>
+      </p:pic>
+      <p:grpSp>
+        <p:nvGrpSpPr>
+          <p:cNvPr id="201" name="Group 200">
+            <a:extLst>
+              <a:ext uri="{FF2B5EF4-FFF2-40B4-BE49-F238E27FC236}">
+                <a16:creationId xmlns:a16="http://schemas.microsoft.com/office/drawing/2014/main" id="{94A88068-98B9-EBAB-8365-2C8641F9AD34}"/>
+              </a:ext>
+            </a:extLst>
+          </p:cNvPr>
+          <p:cNvGrpSpPr/>
+          <p:nvPr/>
+        </p:nvGrpSpPr>
+        <p:grpSpPr>
+          <a:xfrm>
+            <a:off x="3138981" y="2046457"/>
+            <a:ext cx="1371600" cy="1371600"/>
+            <a:chOff x="427081" y="263129"/>
+            <a:chExt cx="1371600" cy="1371600"/>
+          </a:xfrm>
+        </p:grpSpPr>
+        <p:sp>
+          <p:nvSpPr>
+            <p:cNvPr id="202" name="Rectangle 201">
+              <a:extLst>
+                <a:ext uri="{FF2B5EF4-FFF2-40B4-BE49-F238E27FC236}">
+                  <a16:creationId xmlns:a16="http://schemas.microsoft.com/office/drawing/2014/main" id="{8ED69E74-C7C4-C81A-9280-23B788A3D57B}"/>
+                </a:ext>
+              </a:extLst>
+            </p:cNvPr>
+            <p:cNvSpPr/>
+            <p:nvPr/>
+          </p:nvSpPr>
+          <p:spPr>
+            <a:xfrm>
+              <a:off x="427081" y="263129"/>
+              <a:ext cx="1371600" cy="1371600"/>
+            </a:xfrm>
+            <a:prstGeom prst="rect">
+              <a:avLst/>
+            </a:prstGeom>
+            <a:noFill/>
+            <a:ln w="76200">
+              <a:solidFill>
+                <a:schemeClr val="tx1"/>
+              </a:solidFill>
+            </a:ln>
+          </p:spPr>
+          <p:style>
+            <a:lnRef idx="2">
+              <a:schemeClr val="accent1">
+                <a:shade val="50000"/>
+              </a:schemeClr>
+            </a:lnRef>
+            <a:fillRef idx="1">
+              <a:schemeClr val="accent1"/>
+            </a:fillRef>
+            <a:effectRef idx="0">
+              <a:schemeClr val="accent1"/>
+            </a:effectRef>
+            <a:fontRef idx="minor">
+              <a:schemeClr val="lt1"/>
+            </a:fontRef>
+          </p:style>
+          <p:txBody>
+            <a:bodyPr rtlCol="0" anchor="ctr"/>
+            <a:lstStyle/>
+            <a:p>
+              <a:pPr algn="ctr"/>
+              <a:endParaRPr lang="en-US"/>
+            </a:p>
+          </p:txBody>
+        </p:sp>
+        <p:sp>
+          <p:nvSpPr>
+            <p:cNvPr id="207" name="Plaque 206">
+              <a:extLst>
+                <a:ext uri="{FF2B5EF4-FFF2-40B4-BE49-F238E27FC236}">
+                  <a16:creationId xmlns:a16="http://schemas.microsoft.com/office/drawing/2014/main" id="{08D5817D-30EF-C8D3-C0AF-69D48CE68E7D}"/>
+                </a:ext>
+              </a:extLst>
+            </p:cNvPr>
+            <p:cNvSpPr/>
+            <p:nvPr/>
+          </p:nvSpPr>
+          <p:spPr>
+            <a:xfrm>
+              <a:off x="566683" y="478473"/>
+              <a:ext cx="1097280" cy="1097280"/>
+            </a:xfrm>
+            <a:prstGeom prst="plaque">
+              <a:avLst/>
+            </a:prstGeom>
+            <a:noFill/>
+            <a:ln w="38100" cap="flat" cmpd="sng" algn="ctr">
+              <a:solidFill>
+                <a:schemeClr val="dk1"/>
+              </a:solidFill>
+              <a:prstDash val="solid"/>
+              <a:round/>
+              <a:headEnd type="none" w="med" len="med"/>
+              <a:tailEnd type="none" w="med" len="med"/>
+            </a:ln>
+          </p:spPr>
+          <p:style>
+            <a:lnRef idx="0">
+              <a:scrgbClr r="0" g="0" b="0"/>
+            </a:lnRef>
+            <a:fillRef idx="0">
+              <a:scrgbClr r="0" g="0" b="0"/>
+            </a:fillRef>
+            <a:effectRef idx="0">
+              <a:scrgbClr r="0" g="0" b="0"/>
+            </a:effectRef>
+            <a:fontRef idx="minor">
+              <a:schemeClr val="dk1"/>
+            </a:fontRef>
+          </p:style>
+          <p:txBody>
+            <a:bodyPr rtlCol="0" anchor="ctr"/>
+            <a:lstStyle/>
+            <a:p>
+              <a:pPr algn="ctr"/>
+              <a:endParaRPr lang="en-US"/>
+            </a:p>
+          </p:txBody>
+        </p:sp>
+      </p:grpSp>
+      <p:grpSp>
+        <p:nvGrpSpPr>
+          <p:cNvPr id="208" name="Group 207">
+            <a:extLst>
+              <a:ext uri="{FF2B5EF4-FFF2-40B4-BE49-F238E27FC236}">
+                <a16:creationId xmlns:a16="http://schemas.microsoft.com/office/drawing/2014/main" id="{6686D48F-2AD2-DB72-EBBA-41CDE87CFC6F}"/>
+              </a:ext>
+            </a:extLst>
+          </p:cNvPr>
+          <p:cNvGrpSpPr/>
+          <p:nvPr/>
+        </p:nvGrpSpPr>
+        <p:grpSpPr>
+          <a:xfrm>
+            <a:off x="4724400" y="2057400"/>
+            <a:ext cx="1371600" cy="1371600"/>
+            <a:chOff x="427081" y="263129"/>
+            <a:chExt cx="1371600" cy="1371600"/>
+          </a:xfrm>
+        </p:grpSpPr>
+        <p:sp>
+          <p:nvSpPr>
+            <p:cNvPr id="209" name="Rectangle 208">
+              <a:extLst>
+                <a:ext uri="{FF2B5EF4-FFF2-40B4-BE49-F238E27FC236}">
+                  <a16:creationId xmlns:a16="http://schemas.microsoft.com/office/drawing/2014/main" id="{15C43CB9-C8D4-3758-E755-C9C0750F4CB7}"/>
+                </a:ext>
+              </a:extLst>
+            </p:cNvPr>
+            <p:cNvSpPr/>
+            <p:nvPr/>
+          </p:nvSpPr>
+          <p:spPr>
+            <a:xfrm>
+              <a:off x="427081" y="263129"/>
+              <a:ext cx="1371600" cy="1371600"/>
+            </a:xfrm>
+            <a:prstGeom prst="rect">
+              <a:avLst/>
+            </a:prstGeom>
+            <a:noFill/>
+            <a:ln w="76200">
+              <a:solidFill>
+                <a:schemeClr val="tx1"/>
+              </a:solidFill>
+            </a:ln>
+          </p:spPr>
+          <p:style>
+            <a:lnRef idx="2">
+              <a:schemeClr val="accent1">
+                <a:shade val="50000"/>
+              </a:schemeClr>
+            </a:lnRef>
+            <a:fillRef idx="1">
+              <a:schemeClr val="accent1"/>
+            </a:fillRef>
+            <a:effectRef idx="0">
+              <a:schemeClr val="accent1"/>
+            </a:effectRef>
+            <a:fontRef idx="minor">
+              <a:schemeClr val="lt1"/>
+            </a:fontRef>
+          </p:style>
+          <p:txBody>
+            <a:bodyPr rtlCol="0" anchor="ctr"/>
+            <a:lstStyle/>
+            <a:p>
+              <a:pPr algn="ctr"/>
+              <a:endParaRPr lang="en-US"/>
+            </a:p>
+          </p:txBody>
+        </p:sp>
+        <p:sp>
+          <p:nvSpPr>
+            <p:cNvPr id="210" name="Plaque 209">
+              <a:extLst>
+                <a:ext uri="{FF2B5EF4-FFF2-40B4-BE49-F238E27FC236}">
+                  <a16:creationId xmlns:a16="http://schemas.microsoft.com/office/drawing/2014/main" id="{7A31BDB1-E228-231A-CA61-A0EB8F69D81E}"/>
+                </a:ext>
+              </a:extLst>
+            </p:cNvPr>
+            <p:cNvSpPr/>
+            <p:nvPr/>
+          </p:nvSpPr>
+          <p:spPr>
+            <a:xfrm>
+              <a:off x="566683" y="484823"/>
+              <a:ext cx="1097280" cy="1097280"/>
+            </a:xfrm>
+            <a:prstGeom prst="plaque">
+              <a:avLst/>
+            </a:prstGeom>
+            <a:noFill/>
+            <a:ln w="38100" cap="flat" cmpd="sng" algn="ctr">
+              <a:solidFill>
+                <a:schemeClr val="dk1"/>
+              </a:solidFill>
+              <a:prstDash val="solid"/>
+              <a:round/>
+              <a:headEnd type="none" w="med" len="med"/>
+              <a:tailEnd type="none" w="med" len="med"/>
+            </a:ln>
+          </p:spPr>
+          <p:style>
+            <a:lnRef idx="0">
+              <a:scrgbClr r="0" g="0" b="0"/>
+            </a:lnRef>
+            <a:fillRef idx="0">
+              <a:scrgbClr r="0" g="0" b="0"/>
+            </a:fillRef>
+            <a:effectRef idx="0">
+              <a:scrgbClr r="0" g="0" b="0"/>
+            </a:effectRef>
+            <a:fontRef idx="minor">
+              <a:schemeClr val="dk1"/>
+            </a:fontRef>
+          </p:style>
+          <p:txBody>
+            <a:bodyPr rtlCol="0" anchor="ctr"/>
+            <a:lstStyle/>
+            <a:p>
+              <a:pPr algn="ctr"/>
+              <a:endParaRPr lang="en-US"/>
+            </a:p>
+          </p:txBody>
+        </p:sp>
+      </p:grpSp>
+      <p:sp>
+        <p:nvSpPr>
+          <p:cNvPr id="246" name="Rectangle 245">
+            <a:extLst>
+              <a:ext uri="{FF2B5EF4-FFF2-40B4-BE49-F238E27FC236}">
+                <a16:creationId xmlns:a16="http://schemas.microsoft.com/office/drawing/2014/main" id="{A9D2B4D2-1DC6-DCFF-F114-915D22B087C6}"/>
+              </a:ext>
+            </a:extLst>
+          </p:cNvPr>
+          <p:cNvSpPr/>
+          <p:nvPr/>
+        </p:nvSpPr>
+        <p:spPr>
+          <a:xfrm>
+            <a:off x="5247828" y="2750063"/>
+            <a:ext cx="382295" cy="180846"/>
+          </a:xfrm>
+          <a:prstGeom prst="rect">
+            <a:avLst/>
+          </a:prstGeom>
+        </p:spPr>
+        <p:style>
+          <a:lnRef idx="2">
+            <a:schemeClr val="dk1">
+              <a:shade val="50000"/>
+            </a:schemeClr>
+          </a:lnRef>
+          <a:fillRef idx="1">
+            <a:schemeClr val="dk1"/>
+          </a:fillRef>
+          <a:effectRef idx="0">
+            <a:schemeClr val="dk1"/>
+          </a:effectRef>
+          <a:fontRef idx="minor">
+            <a:schemeClr val="lt1"/>
+          </a:fontRef>
+        </p:style>
+        <p:txBody>
+          <a:bodyPr rtlCol="0" anchor="ctr"/>
+          <a:lstStyle/>
+          <a:p>
+            <a:pPr algn="ctr"/>
+            <a:endParaRPr lang="en-US"/>
+          </a:p>
+        </p:txBody>
+      </p:sp>
+      <p:sp>
+        <p:nvSpPr>
+          <p:cNvPr id="5" name="Moon 4">
+            <a:extLst>
+              <a:ext uri="{FF2B5EF4-FFF2-40B4-BE49-F238E27FC236}">
+                <a16:creationId xmlns:a16="http://schemas.microsoft.com/office/drawing/2014/main" id="{E81F8F6B-0795-4223-CD26-5B0D29C304D9}"/>
+              </a:ext>
+            </a:extLst>
+          </p:cNvPr>
+          <p:cNvSpPr/>
+          <p:nvPr/>
+        </p:nvSpPr>
+        <p:spPr>
+          <a:xfrm rot="16200000">
+            <a:off x="5322507" y="2410561"/>
+            <a:ext cx="225518" cy="639153"/>
+          </a:xfrm>
+          <a:prstGeom prst="moon">
+            <a:avLst/>
+          </a:prstGeom>
+        </p:spPr>
+        <p:style>
+          <a:lnRef idx="2">
+            <a:schemeClr val="dk1">
+              <a:shade val="50000"/>
+            </a:schemeClr>
+          </a:lnRef>
+          <a:fillRef idx="1">
+            <a:schemeClr val="dk1"/>
+          </a:fillRef>
+          <a:effectRef idx="0">
+            <a:schemeClr val="dk1"/>
+          </a:effectRef>
+          <a:fontRef idx="minor">
+            <a:schemeClr val="lt1"/>
+          </a:fontRef>
+        </p:style>
+        <p:txBody>
+          <a:bodyPr rtlCol="0" anchor="ctr"/>
+          <a:lstStyle/>
+          <a:p>
+            <a:pPr algn="ctr"/>
+            <a:endParaRPr lang="en-US"/>
+          </a:p>
+        </p:txBody>
+      </p:sp>
+      <p:sp>
+        <p:nvSpPr>
+          <p:cNvPr id="248" name="Plaque 247">
+            <a:extLst>
+              <a:ext uri="{FF2B5EF4-FFF2-40B4-BE49-F238E27FC236}">
+                <a16:creationId xmlns:a16="http://schemas.microsoft.com/office/drawing/2014/main" id="{32F6EA85-059A-D914-93FF-6E504195ACCC}"/>
+              </a:ext>
+            </a:extLst>
+          </p:cNvPr>
+          <p:cNvSpPr/>
+          <p:nvPr/>
+        </p:nvSpPr>
+        <p:spPr>
+          <a:xfrm>
+            <a:off x="5303581" y="2445247"/>
+            <a:ext cx="249842" cy="245950"/>
+          </a:xfrm>
+          <a:prstGeom prst="plaque">
+            <a:avLst>
+              <a:gd name="adj" fmla="val 25032"/>
+            </a:avLst>
+          </a:prstGeom>
+        </p:spPr>
+        <p:style>
+          <a:lnRef idx="2">
+            <a:schemeClr val="dk1">
+              <a:shade val="50000"/>
+            </a:schemeClr>
+          </a:lnRef>
+          <a:fillRef idx="1">
+            <a:schemeClr val="dk1"/>
+          </a:fillRef>
+          <a:effectRef idx="0">
+            <a:schemeClr val="dk1"/>
+          </a:effectRef>
+          <a:fontRef idx="minor">
+            <a:schemeClr val="lt1"/>
+          </a:fontRef>
+        </p:style>
+        <p:txBody>
+          <a:bodyPr rtlCol="0" anchor="ctr"/>
+          <a:lstStyle/>
+          <a:p>
+            <a:pPr algn="ctr"/>
+            <a:endParaRPr lang="en-US"/>
+          </a:p>
+        </p:txBody>
+      </p:sp>
+      <p:sp>
+        <p:nvSpPr>
+          <p:cNvPr id="249" name="Rectangle 248">
+            <a:extLst>
+              <a:ext uri="{FF2B5EF4-FFF2-40B4-BE49-F238E27FC236}">
+                <a16:creationId xmlns:a16="http://schemas.microsoft.com/office/drawing/2014/main" id="{8E6517F9-8BB8-1DB3-1695-7C8DC74B8579}"/>
+              </a:ext>
+            </a:extLst>
+          </p:cNvPr>
+          <p:cNvSpPr/>
+          <p:nvPr/>
+        </p:nvSpPr>
+        <p:spPr>
+          <a:xfrm rot="20548458">
+            <a:off x="5789579" y="2919988"/>
+            <a:ext cx="79866" cy="180052"/>
+          </a:xfrm>
+          <a:prstGeom prst="rect">
+            <a:avLst/>
+          </a:prstGeom>
+        </p:spPr>
+        <p:style>
+          <a:lnRef idx="2">
+            <a:schemeClr val="dk1">
+              <a:shade val="50000"/>
+            </a:schemeClr>
+          </a:lnRef>
+          <a:fillRef idx="1">
+            <a:schemeClr val="dk1"/>
+          </a:fillRef>
+          <a:effectRef idx="0">
+            <a:schemeClr val="dk1"/>
+          </a:effectRef>
+          <a:fontRef idx="minor">
+            <a:schemeClr val="lt1"/>
+          </a:fontRef>
+        </p:style>
+        <p:txBody>
+          <a:bodyPr rtlCol="0" anchor="ctr"/>
+          <a:lstStyle/>
+          <a:p>
+            <a:pPr algn="ctr"/>
+            <a:endParaRPr lang="en-US"/>
+          </a:p>
+        </p:txBody>
+      </p:sp>
+      <p:sp>
+        <p:nvSpPr>
+          <p:cNvPr id="250" name="Rectangle 249">
+            <a:extLst>
+              <a:ext uri="{FF2B5EF4-FFF2-40B4-BE49-F238E27FC236}">
+                <a16:creationId xmlns:a16="http://schemas.microsoft.com/office/drawing/2014/main" id="{CF164FDA-E130-0486-85A1-1652AF9DAE52}"/>
+              </a:ext>
+            </a:extLst>
+          </p:cNvPr>
+          <p:cNvSpPr/>
+          <p:nvPr/>
+        </p:nvSpPr>
+        <p:spPr>
+          <a:xfrm rot="18038434">
+            <a:off x="5640141" y="2790054"/>
+            <a:ext cx="123550" cy="180052"/>
+          </a:xfrm>
+          <a:prstGeom prst="rect">
+            <a:avLst/>
+          </a:prstGeom>
+        </p:spPr>
+        <p:style>
+          <a:lnRef idx="2">
+            <a:schemeClr val="dk1">
+              <a:shade val="50000"/>
+            </a:schemeClr>
+          </a:lnRef>
+          <a:fillRef idx="1">
+            <a:schemeClr val="dk1"/>
+          </a:fillRef>
+          <a:effectRef idx="0">
+            <a:schemeClr val="dk1"/>
+          </a:effectRef>
+          <a:fontRef idx="minor">
+            <a:schemeClr val="lt1"/>
+          </a:fontRef>
+        </p:style>
+        <p:txBody>
+          <a:bodyPr rtlCol="0" anchor="ctr"/>
+          <a:lstStyle/>
+          <a:p>
+            <a:pPr algn="ctr"/>
+            <a:endParaRPr lang="en-US"/>
+          </a:p>
+        </p:txBody>
+      </p:sp>
+      <p:sp>
+        <p:nvSpPr>
+          <p:cNvPr id="251" name="Oval 250">
+            <a:extLst>
+              <a:ext uri="{FF2B5EF4-FFF2-40B4-BE49-F238E27FC236}">
+                <a16:creationId xmlns:a16="http://schemas.microsoft.com/office/drawing/2014/main" id="{EC96BB1F-5A6B-394B-EE2C-43699EC756CB}"/>
+              </a:ext>
+            </a:extLst>
+          </p:cNvPr>
+          <p:cNvSpPr/>
+          <p:nvPr/>
+        </p:nvSpPr>
+        <p:spPr>
+          <a:xfrm rot="15253353">
+            <a:off x="5724000" y="2864998"/>
+            <a:ext cx="126677" cy="126677"/>
+          </a:xfrm>
+          <a:prstGeom prst="ellipse">
+            <a:avLst/>
+          </a:prstGeom>
+          <a:ln w="38100"/>
+        </p:spPr>
+        <p:style>
+          <a:lnRef idx="2">
+            <a:schemeClr val="dk1"/>
+          </a:lnRef>
+          <a:fillRef idx="1">
+            <a:schemeClr val="lt1"/>
+          </a:fillRef>
+          <a:effectRef idx="0">
+            <a:schemeClr val="dk1"/>
+          </a:effectRef>
+          <a:fontRef idx="minor">
+            <a:schemeClr val="dk1"/>
+          </a:fontRef>
+        </p:style>
+        <p:txBody>
+          <a:bodyPr rtlCol="0" anchor="ctr"/>
+          <a:lstStyle/>
+          <a:p>
+            <a:pPr algn="ctr"/>
+            <a:endParaRPr lang="en-US"/>
+          </a:p>
+        </p:txBody>
+      </p:sp>
+      <p:sp>
+        <p:nvSpPr>
+          <p:cNvPr id="252" name="Oval 251">
+            <a:extLst>
+              <a:ext uri="{FF2B5EF4-FFF2-40B4-BE49-F238E27FC236}">
+                <a16:creationId xmlns:a16="http://schemas.microsoft.com/office/drawing/2014/main" id="{D2D99199-AB48-DC40-6E5E-1BB6888D76D6}"/>
+              </a:ext>
+            </a:extLst>
+          </p:cNvPr>
+          <p:cNvSpPr/>
+          <p:nvPr/>
+        </p:nvSpPr>
+        <p:spPr>
+          <a:xfrm rot="15710661">
+            <a:off x="5522717" y="2759462"/>
+            <a:ext cx="155688" cy="155688"/>
+          </a:xfrm>
+          <a:prstGeom prst="ellipse">
+            <a:avLst/>
+          </a:prstGeom>
+          <a:ln w="38100"/>
+        </p:spPr>
+        <p:style>
+          <a:lnRef idx="2">
+            <a:schemeClr val="dk1"/>
+          </a:lnRef>
+          <a:fillRef idx="1">
+            <a:schemeClr val="lt1"/>
+          </a:fillRef>
+          <a:effectRef idx="0">
+            <a:schemeClr val="dk1"/>
+          </a:effectRef>
+          <a:fontRef idx="minor">
+            <a:schemeClr val="dk1"/>
+          </a:fontRef>
+        </p:style>
+        <p:txBody>
+          <a:bodyPr rtlCol="0" anchor="ctr"/>
+          <a:lstStyle/>
+          <a:p>
+            <a:pPr algn="ctr"/>
+            <a:endParaRPr lang="en-US"/>
+          </a:p>
+        </p:txBody>
+      </p:sp>
+      <p:sp>
+        <p:nvSpPr>
+          <p:cNvPr id="7" name="Isosceles Triangle 6">
+            <a:extLst>
+              <a:ext uri="{FF2B5EF4-FFF2-40B4-BE49-F238E27FC236}">
+                <a16:creationId xmlns:a16="http://schemas.microsoft.com/office/drawing/2014/main" id="{6C288316-C804-4D62-85D5-810DD4B7397A}"/>
+              </a:ext>
+            </a:extLst>
+          </p:cNvPr>
+          <p:cNvSpPr/>
+          <p:nvPr/>
+        </p:nvSpPr>
+        <p:spPr>
+          <a:xfrm rot="9902273">
+            <a:off x="5339720" y="2882521"/>
+            <a:ext cx="79567" cy="190603"/>
+          </a:xfrm>
+          <a:prstGeom prst="triangle">
+            <a:avLst/>
+          </a:prstGeom>
+        </p:spPr>
+        <p:style>
+          <a:lnRef idx="2">
+            <a:schemeClr val="dk1">
+              <a:shade val="50000"/>
+            </a:schemeClr>
+          </a:lnRef>
+          <a:fillRef idx="1">
+            <a:schemeClr val="dk1"/>
+          </a:fillRef>
+          <a:effectRef idx="0">
+            <a:schemeClr val="dk1"/>
+          </a:effectRef>
+          <a:fontRef idx="minor">
+            <a:schemeClr val="lt1"/>
+          </a:fontRef>
+        </p:style>
+        <p:txBody>
+          <a:bodyPr rtlCol="0" anchor="ctr"/>
+          <a:lstStyle/>
+          <a:p>
+            <a:pPr algn="ctr"/>
+            <a:endParaRPr lang="en-US"/>
+          </a:p>
+        </p:txBody>
+      </p:sp>
+      <p:sp>
+        <p:nvSpPr>
+          <p:cNvPr id="261" name="Isosceles Triangle 260">
+            <a:extLst>
+              <a:ext uri="{FF2B5EF4-FFF2-40B4-BE49-F238E27FC236}">
+                <a16:creationId xmlns:a16="http://schemas.microsoft.com/office/drawing/2014/main" id="{139D0D0D-7BE6-7AD9-D260-9F7CB2BF1305}"/>
+              </a:ext>
+            </a:extLst>
+          </p:cNvPr>
+          <p:cNvSpPr/>
+          <p:nvPr/>
+        </p:nvSpPr>
+        <p:spPr>
+          <a:xfrm rot="11728105">
+            <a:off x="5441944" y="2857321"/>
+            <a:ext cx="79567" cy="190603"/>
+          </a:xfrm>
+          <a:prstGeom prst="triangle">
+            <a:avLst/>
+          </a:prstGeom>
+        </p:spPr>
+        <p:style>
+          <a:lnRef idx="2">
+            <a:schemeClr val="dk1">
+              <a:shade val="50000"/>
+            </a:schemeClr>
+          </a:lnRef>
+          <a:fillRef idx="1">
+            <a:schemeClr val="dk1"/>
+          </a:fillRef>
+          <a:effectRef idx="0">
+            <a:schemeClr val="dk1"/>
+          </a:effectRef>
+          <a:fontRef idx="minor">
+            <a:schemeClr val="lt1"/>
+          </a:fontRef>
+        </p:style>
+        <p:txBody>
+          <a:bodyPr rtlCol="0" anchor="ctr"/>
+          <a:lstStyle/>
+          <a:p>
+            <a:pPr algn="ctr"/>
+            <a:endParaRPr lang="en-US"/>
+          </a:p>
+        </p:txBody>
+      </p:sp>
+      <p:sp>
+        <p:nvSpPr>
+          <p:cNvPr id="260" name="Moon 259">
+            <a:extLst>
+              <a:ext uri="{FF2B5EF4-FFF2-40B4-BE49-F238E27FC236}">
+                <a16:creationId xmlns:a16="http://schemas.microsoft.com/office/drawing/2014/main" id="{9AAE7158-0340-2224-DB77-8ED00EC30F03}"/>
+              </a:ext>
+            </a:extLst>
+          </p:cNvPr>
+          <p:cNvSpPr/>
+          <p:nvPr/>
+        </p:nvSpPr>
+        <p:spPr>
+          <a:xfrm rot="16200000">
+            <a:off x="5371726" y="2320444"/>
+            <a:ext cx="107415" cy="438067"/>
+          </a:xfrm>
+          <a:prstGeom prst="moon">
+            <a:avLst/>
+          </a:prstGeom>
+        </p:spPr>
+        <p:style>
+          <a:lnRef idx="2">
+            <a:schemeClr val="dk1">
+              <a:shade val="50000"/>
+            </a:schemeClr>
+          </a:lnRef>
+          <a:fillRef idx="1">
+            <a:schemeClr val="dk1"/>
+          </a:fillRef>
+          <a:effectRef idx="0">
+            <a:schemeClr val="dk1"/>
+          </a:effectRef>
+          <a:fontRef idx="minor">
+            <a:schemeClr val="lt1"/>
+          </a:fontRef>
+        </p:style>
+        <p:txBody>
+          <a:bodyPr rtlCol="0" anchor="ctr"/>
+          <a:lstStyle/>
+          <a:p>
+            <a:pPr algn="ctr"/>
+            <a:endParaRPr lang="en-US"/>
+          </a:p>
+        </p:txBody>
+      </p:sp>
+      <p:grpSp>
+        <p:nvGrpSpPr>
+          <p:cNvPr id="253" name="Group 252">
+            <a:extLst>
+              <a:ext uri="{FF2B5EF4-FFF2-40B4-BE49-F238E27FC236}">
+                <a16:creationId xmlns:a16="http://schemas.microsoft.com/office/drawing/2014/main" id="{B90CCC7F-3213-6A7C-D277-70F8AA7B943F}"/>
+              </a:ext>
+            </a:extLst>
+          </p:cNvPr>
+          <p:cNvGrpSpPr/>
+          <p:nvPr/>
+        </p:nvGrpSpPr>
+        <p:grpSpPr>
+          <a:xfrm flipH="1">
+            <a:off x="4961777" y="2766749"/>
+            <a:ext cx="351364" cy="328320"/>
+            <a:chOff x="4817477" y="2615266"/>
+            <a:chExt cx="1199848" cy="1121157"/>
+          </a:xfrm>
+        </p:grpSpPr>
+        <p:sp>
+          <p:nvSpPr>
+            <p:cNvPr id="255" name="Rectangle 254">
+              <a:extLst>
+                <a:ext uri="{FF2B5EF4-FFF2-40B4-BE49-F238E27FC236}">
+                  <a16:creationId xmlns:a16="http://schemas.microsoft.com/office/drawing/2014/main" id="{FDDE2963-226B-F41F-C20E-0E0E92F559CE}"/>
+                </a:ext>
+              </a:extLst>
+            </p:cNvPr>
+            <p:cNvSpPr/>
+            <p:nvPr/>
+          </p:nvSpPr>
+          <p:spPr>
+            <a:xfrm rot="20354995">
+              <a:off x="5744597" y="3121577"/>
+              <a:ext cx="272728" cy="614846"/>
+            </a:xfrm>
+            <a:prstGeom prst="rect">
+              <a:avLst/>
+            </a:prstGeom>
+          </p:spPr>
+          <p:style>
+            <a:lnRef idx="2">
+              <a:schemeClr val="dk1">
+                <a:shade val="50000"/>
+              </a:schemeClr>
+            </a:lnRef>
+            <a:fillRef idx="1">
+              <a:schemeClr val="dk1"/>
+            </a:fillRef>
+            <a:effectRef idx="0">
+              <a:schemeClr val="dk1"/>
+            </a:effectRef>
+            <a:fontRef idx="minor">
+              <a:schemeClr val="lt1"/>
+            </a:fontRef>
+          </p:style>
+          <p:txBody>
+            <a:bodyPr rtlCol="0" anchor="ctr"/>
+            <a:lstStyle/>
+            <a:p>
+              <a:pPr algn="ctr"/>
+              <a:endParaRPr lang="en-US"/>
+            </a:p>
+          </p:txBody>
+        </p:sp>
+        <p:sp>
+          <p:nvSpPr>
+            <p:cNvPr id="256" name="Rectangle 255">
+              <a:extLst>
+                <a:ext uri="{FF2B5EF4-FFF2-40B4-BE49-F238E27FC236}">
+                  <a16:creationId xmlns:a16="http://schemas.microsoft.com/office/drawing/2014/main" id="{B07B224B-3A0C-0305-56E1-4C4D1BF102C4}"/>
+                </a:ext>
+              </a:extLst>
+            </p:cNvPr>
+            <p:cNvSpPr/>
+            <p:nvPr/>
+          </p:nvSpPr>
+          <p:spPr>
+            <a:xfrm rot="17844971">
+              <a:off x="5210024" y="2703085"/>
+              <a:ext cx="421902" cy="614846"/>
+            </a:xfrm>
+            <a:prstGeom prst="rect">
+              <a:avLst/>
+            </a:prstGeom>
+          </p:spPr>
+          <p:style>
+            <a:lnRef idx="2">
+              <a:schemeClr val="dk1">
+                <a:shade val="50000"/>
+              </a:schemeClr>
+            </a:lnRef>
+            <a:fillRef idx="1">
+              <a:schemeClr val="dk1"/>
+            </a:fillRef>
+            <a:effectRef idx="0">
+              <a:schemeClr val="dk1"/>
+            </a:effectRef>
+            <a:fontRef idx="minor">
+              <a:schemeClr val="lt1"/>
+            </a:fontRef>
+          </p:style>
+          <p:txBody>
+            <a:bodyPr rtlCol="0" anchor="ctr"/>
+            <a:lstStyle/>
+            <a:p>
+              <a:pPr algn="ctr"/>
+              <a:endParaRPr lang="en-US"/>
+            </a:p>
+          </p:txBody>
+        </p:sp>
+        <p:sp>
+          <p:nvSpPr>
+            <p:cNvPr id="257" name="Oval 256">
+              <a:extLst>
+                <a:ext uri="{FF2B5EF4-FFF2-40B4-BE49-F238E27FC236}">
+                  <a16:creationId xmlns:a16="http://schemas.microsoft.com/office/drawing/2014/main" id="{D8D2FF83-BA8F-EF41-F763-382B76E4A507}"/>
+                </a:ext>
+              </a:extLst>
+            </p:cNvPr>
+            <p:cNvSpPr/>
+            <p:nvPr/>
+          </p:nvSpPr>
+          <p:spPr>
+            <a:xfrm rot="15059890">
+              <a:off x="5505196" y="2942338"/>
+              <a:ext cx="432581" cy="432581"/>
+            </a:xfrm>
+            <a:prstGeom prst="ellipse">
+              <a:avLst/>
+            </a:prstGeom>
+            <a:ln w="38100"/>
+          </p:spPr>
+          <p:style>
+            <a:lnRef idx="2">
+              <a:schemeClr val="dk1"/>
+            </a:lnRef>
+            <a:fillRef idx="1">
+              <a:schemeClr val="lt1"/>
+            </a:fillRef>
+            <a:effectRef idx="0">
+              <a:schemeClr val="dk1"/>
+            </a:effectRef>
+            <a:fontRef idx="minor">
+              <a:schemeClr val="dk1"/>
+            </a:fontRef>
+          </p:style>
+          <p:txBody>
+            <a:bodyPr rtlCol="0" anchor="ctr"/>
+            <a:lstStyle/>
+            <a:p>
+              <a:pPr algn="ctr"/>
+              <a:endParaRPr lang="en-US"/>
+            </a:p>
+          </p:txBody>
+        </p:sp>
+        <p:sp>
+          <p:nvSpPr>
+            <p:cNvPr id="258" name="Oval 257">
+              <a:extLst>
+                <a:ext uri="{FF2B5EF4-FFF2-40B4-BE49-F238E27FC236}">
+                  <a16:creationId xmlns:a16="http://schemas.microsoft.com/office/drawing/2014/main" id="{86246630-4CC5-8630-BA3C-B81661563106}"/>
+                </a:ext>
+              </a:extLst>
+            </p:cNvPr>
+            <p:cNvSpPr/>
+            <p:nvPr/>
+          </p:nvSpPr>
+          <p:spPr>
+            <a:xfrm rot="14919487">
+              <a:off x="4817477" y="2615266"/>
+              <a:ext cx="531646" cy="531646"/>
+            </a:xfrm>
+            <a:prstGeom prst="ellipse">
+              <a:avLst/>
+            </a:prstGeom>
+            <a:ln w="38100"/>
+          </p:spPr>
+          <p:style>
+            <a:lnRef idx="2">
+              <a:schemeClr val="dk1"/>
+            </a:lnRef>
+            <a:fillRef idx="1">
+              <a:schemeClr val="lt1"/>
+            </a:fillRef>
+            <a:effectRef idx="0">
+              <a:schemeClr val="dk1"/>
+            </a:effectRef>
+            <a:fontRef idx="minor">
+              <a:schemeClr val="dk1"/>
+            </a:fontRef>
+          </p:style>
+          <p:txBody>
+            <a:bodyPr rtlCol="0" anchor="ctr"/>
+            <a:lstStyle/>
+            <a:p>
+              <a:pPr algn="ctr"/>
+              <a:endParaRPr lang="en-US"/>
+            </a:p>
+          </p:txBody>
+        </p:sp>
+      </p:grpSp>
+      <p:sp>
+        <p:nvSpPr>
+          <p:cNvPr id="259" name="Oval 258">
+            <a:extLst>
+              <a:ext uri="{FF2B5EF4-FFF2-40B4-BE49-F238E27FC236}">
+                <a16:creationId xmlns:a16="http://schemas.microsoft.com/office/drawing/2014/main" id="{821C0924-FD7E-8DB6-E7F3-4647126BE52B}"/>
+              </a:ext>
+            </a:extLst>
+          </p:cNvPr>
+          <p:cNvSpPr/>
+          <p:nvPr/>
+        </p:nvSpPr>
+        <p:spPr>
+          <a:xfrm rot="15710661">
+            <a:off x="5353888" y="2486908"/>
+            <a:ext cx="155688" cy="155688"/>
+          </a:xfrm>
+          <a:prstGeom prst="ellipse">
+            <a:avLst/>
+          </a:prstGeom>
+          <a:ln w="38100"/>
+        </p:spPr>
+        <p:style>
+          <a:lnRef idx="2">
+            <a:schemeClr val="dk1"/>
+          </a:lnRef>
+          <a:fillRef idx="1">
+            <a:schemeClr val="lt1"/>
+          </a:fillRef>
+          <a:effectRef idx="0">
+            <a:schemeClr val="dk1"/>
+          </a:effectRef>
+          <a:fontRef idx="minor">
+            <a:schemeClr val="dk1"/>
+          </a:fontRef>
+        </p:style>
+        <p:txBody>
+          <a:bodyPr rtlCol="0" anchor="ctr"/>
+          <a:lstStyle/>
+          <a:p>
+            <a:pPr algn="ctr"/>
+            <a:endParaRPr lang="en-US"/>
+          </a:p>
+        </p:txBody>
+      </p:sp>
     </p:spTree>
     <p:extLst>
       <p:ext uri="{BB962C8B-B14F-4D97-AF65-F5344CB8AC3E}">

--- a/image process/drawings sifi.pptx
+++ b/image process/drawings sifi.pptx
@@ -16142,7 +16142,7 @@
         </p:nvGrpSpPr>
         <p:grpSpPr>
           <a:xfrm>
-            <a:off x="5059933" y="4256831"/>
+            <a:off x="7019056" y="4251971"/>
             <a:ext cx="741738" cy="928816"/>
             <a:chOff x="2736559" y="1271400"/>
             <a:chExt cx="1887829" cy="2363975"/>
@@ -16506,7 +16506,7 @@
         </p:nvGrpSpPr>
         <p:grpSpPr>
           <a:xfrm>
-            <a:off x="4733576" y="3950905"/>
+            <a:off x="6692699" y="3946045"/>
             <a:ext cx="1371600" cy="1371600"/>
             <a:chOff x="427081" y="263129"/>
             <a:chExt cx="1371600" cy="1371600"/>
@@ -21991,7 +21991,7 @@
         </p:nvGrpSpPr>
         <p:grpSpPr>
           <a:xfrm>
-            <a:off x="3247263" y="3953688"/>
+            <a:off x="5206386" y="3948828"/>
             <a:ext cx="1371600" cy="1371600"/>
             <a:chOff x="427081" y="263129"/>
             <a:chExt cx="1371600" cy="1371600"/>
@@ -22585,7 +22585,7 @@
         </p:nvGrpSpPr>
         <p:grpSpPr>
           <a:xfrm rot="19005849">
-            <a:off x="3464475" y="4503470"/>
+            <a:off x="5423598" y="4498610"/>
             <a:ext cx="1093057" cy="584571"/>
             <a:chOff x="5276797" y="2347914"/>
             <a:chExt cx="3125698" cy="1671636"/>
@@ -23211,7 +23211,7 @@
         </p:nvGrpSpPr>
         <p:grpSpPr>
           <a:xfrm>
-            <a:off x="6219674" y="3942270"/>
+            <a:off x="8178797" y="3937410"/>
             <a:ext cx="1371600" cy="1371600"/>
             <a:chOff x="427081" y="263129"/>
             <a:chExt cx="1371600" cy="1371600"/>
@@ -23338,7 +23338,7 @@
         </p:nvGrpSpPr>
         <p:grpSpPr>
           <a:xfrm>
-            <a:off x="6591897" y="4256831"/>
+            <a:off x="8551020" y="4251971"/>
             <a:ext cx="625640" cy="825748"/>
             <a:chOff x="5200606" y="948929"/>
             <a:chExt cx="895394" cy="1181783"/>
@@ -24619,6 +24619,661 @@
           </a:p>
         </p:txBody>
       </p:sp>
+      <p:grpSp>
+        <p:nvGrpSpPr>
+          <p:cNvPr id="247" name="Group 246">
+            <a:extLst>
+              <a:ext uri="{FF2B5EF4-FFF2-40B4-BE49-F238E27FC236}">
+                <a16:creationId xmlns:a16="http://schemas.microsoft.com/office/drawing/2014/main" id="{953CDACB-134E-3C1E-0880-5716AD066371}"/>
+              </a:ext>
+            </a:extLst>
+          </p:cNvPr>
+          <p:cNvGrpSpPr/>
+          <p:nvPr/>
+        </p:nvGrpSpPr>
+        <p:grpSpPr>
+          <a:xfrm>
+            <a:off x="3281749" y="3930902"/>
+            <a:ext cx="1371600" cy="1371600"/>
+            <a:chOff x="427081" y="263129"/>
+            <a:chExt cx="1371600" cy="1371600"/>
+          </a:xfrm>
+        </p:grpSpPr>
+        <p:sp>
+          <p:nvSpPr>
+            <p:cNvPr id="254" name="Rectangle 253">
+              <a:extLst>
+                <a:ext uri="{FF2B5EF4-FFF2-40B4-BE49-F238E27FC236}">
+                  <a16:creationId xmlns:a16="http://schemas.microsoft.com/office/drawing/2014/main" id="{CCC1C368-B806-5BCF-BD52-EC36336B8CC2}"/>
+                </a:ext>
+              </a:extLst>
+            </p:cNvPr>
+            <p:cNvSpPr/>
+            <p:nvPr/>
+          </p:nvSpPr>
+          <p:spPr>
+            <a:xfrm>
+              <a:off x="427081" y="263129"/>
+              <a:ext cx="1371600" cy="1371600"/>
+            </a:xfrm>
+            <a:prstGeom prst="rect">
+              <a:avLst/>
+            </a:prstGeom>
+            <a:noFill/>
+            <a:ln w="76200">
+              <a:solidFill>
+                <a:schemeClr val="tx1"/>
+              </a:solidFill>
+            </a:ln>
+          </p:spPr>
+          <p:style>
+            <a:lnRef idx="2">
+              <a:schemeClr val="accent1">
+                <a:shade val="50000"/>
+              </a:schemeClr>
+            </a:lnRef>
+            <a:fillRef idx="1">
+              <a:schemeClr val="accent1"/>
+            </a:fillRef>
+            <a:effectRef idx="0">
+              <a:schemeClr val="accent1"/>
+            </a:effectRef>
+            <a:fontRef idx="minor">
+              <a:schemeClr val="lt1"/>
+            </a:fontRef>
+          </p:style>
+          <p:txBody>
+            <a:bodyPr rtlCol="0" anchor="ctr"/>
+            <a:lstStyle/>
+            <a:p>
+              <a:pPr algn="ctr"/>
+              <a:endParaRPr lang="en-US"/>
+            </a:p>
+          </p:txBody>
+        </p:sp>
+        <p:sp>
+          <p:nvSpPr>
+            <p:cNvPr id="262" name="Plaque 261">
+              <a:extLst>
+                <a:ext uri="{FF2B5EF4-FFF2-40B4-BE49-F238E27FC236}">
+                  <a16:creationId xmlns:a16="http://schemas.microsoft.com/office/drawing/2014/main" id="{2CFF0DC0-9461-90F0-9713-652C7A05E41E}"/>
+                </a:ext>
+              </a:extLst>
+            </p:cNvPr>
+            <p:cNvSpPr/>
+            <p:nvPr/>
+          </p:nvSpPr>
+          <p:spPr>
+            <a:xfrm>
+              <a:off x="566683" y="484823"/>
+              <a:ext cx="1097280" cy="1097280"/>
+            </a:xfrm>
+            <a:prstGeom prst="plaque">
+              <a:avLst/>
+            </a:prstGeom>
+            <a:noFill/>
+            <a:ln w="38100" cap="flat" cmpd="sng" algn="ctr">
+              <a:solidFill>
+                <a:schemeClr val="dk1"/>
+              </a:solidFill>
+              <a:prstDash val="solid"/>
+              <a:round/>
+              <a:headEnd type="none" w="med" len="med"/>
+              <a:tailEnd type="none" w="med" len="med"/>
+            </a:ln>
+          </p:spPr>
+          <p:style>
+            <a:lnRef idx="0">
+              <a:scrgbClr r="0" g="0" b="0"/>
+            </a:lnRef>
+            <a:fillRef idx="0">
+              <a:scrgbClr r="0" g="0" b="0"/>
+            </a:fillRef>
+            <a:effectRef idx="0">
+              <a:scrgbClr r="0" g="0" b="0"/>
+            </a:effectRef>
+            <a:fontRef idx="minor">
+              <a:schemeClr val="dk1"/>
+            </a:fontRef>
+          </p:style>
+          <p:txBody>
+            <a:bodyPr rtlCol="0" anchor="ctr"/>
+            <a:lstStyle/>
+            <a:p>
+              <a:pPr algn="ctr"/>
+              <a:endParaRPr lang="en-US" dirty="0"/>
+            </a:p>
+          </p:txBody>
+        </p:sp>
+      </p:grpSp>
+      <p:sp>
+        <p:nvSpPr>
+          <p:cNvPr id="264" name="Isosceles Triangle 263">
+            <a:extLst>
+              <a:ext uri="{FF2B5EF4-FFF2-40B4-BE49-F238E27FC236}">
+                <a16:creationId xmlns:a16="http://schemas.microsoft.com/office/drawing/2014/main" id="{9D8847C5-09C0-792F-2B80-CE06471366BE}"/>
+              </a:ext>
+            </a:extLst>
+          </p:cNvPr>
+          <p:cNvSpPr/>
+          <p:nvPr/>
+        </p:nvSpPr>
+        <p:spPr>
+          <a:xfrm rot="8297516">
+            <a:off x="3803975" y="4657403"/>
+            <a:ext cx="369669" cy="130472"/>
+          </a:xfrm>
+          <a:prstGeom prst="triangle">
+            <a:avLst/>
+          </a:prstGeom>
+          <a:ln w="28575"/>
+        </p:spPr>
+        <p:style>
+          <a:lnRef idx="2">
+            <a:schemeClr val="dk1"/>
+          </a:lnRef>
+          <a:fillRef idx="1">
+            <a:schemeClr val="lt1"/>
+          </a:fillRef>
+          <a:effectRef idx="0">
+            <a:schemeClr val="dk1"/>
+          </a:effectRef>
+          <a:fontRef idx="minor">
+            <a:schemeClr val="dk1"/>
+          </a:fontRef>
+        </p:style>
+        <p:txBody>
+          <a:bodyPr rtlCol="0" anchor="ctr"/>
+          <a:lstStyle/>
+          <a:p>
+            <a:pPr algn="ctr"/>
+            <a:endParaRPr lang="en-US"/>
+          </a:p>
+        </p:txBody>
+      </p:sp>
+      <p:sp>
+        <p:nvSpPr>
+          <p:cNvPr id="268" name="Moon 267">
+            <a:extLst>
+              <a:ext uri="{FF2B5EF4-FFF2-40B4-BE49-F238E27FC236}">
+                <a16:creationId xmlns:a16="http://schemas.microsoft.com/office/drawing/2014/main" id="{0FAC873F-DA71-7F33-2186-48ACF959FBA9}"/>
+              </a:ext>
+            </a:extLst>
+          </p:cNvPr>
+          <p:cNvSpPr/>
+          <p:nvPr/>
+        </p:nvSpPr>
+        <p:spPr>
+          <a:xfrm rot="2897516">
+            <a:off x="4133544" y="4793085"/>
+            <a:ext cx="146175" cy="347925"/>
+          </a:xfrm>
+          <a:prstGeom prst="moon">
+            <a:avLst>
+              <a:gd name="adj" fmla="val 38235"/>
+            </a:avLst>
+          </a:prstGeom>
+        </p:spPr>
+        <p:style>
+          <a:lnRef idx="2">
+            <a:schemeClr val="dk1"/>
+          </a:lnRef>
+          <a:fillRef idx="1">
+            <a:schemeClr val="lt1"/>
+          </a:fillRef>
+          <a:effectRef idx="0">
+            <a:schemeClr val="dk1"/>
+          </a:effectRef>
+          <a:fontRef idx="minor">
+            <a:schemeClr val="dk1"/>
+          </a:fontRef>
+        </p:style>
+        <p:txBody>
+          <a:bodyPr rtlCol="0" anchor="ctr"/>
+          <a:lstStyle/>
+          <a:p>
+            <a:pPr algn="ctr"/>
+            <a:endParaRPr lang="en-US"/>
+          </a:p>
+        </p:txBody>
+      </p:sp>
+      <p:sp>
+        <p:nvSpPr>
+          <p:cNvPr id="269" name="Isosceles Triangle 268">
+            <a:extLst>
+              <a:ext uri="{FF2B5EF4-FFF2-40B4-BE49-F238E27FC236}">
+                <a16:creationId xmlns:a16="http://schemas.microsoft.com/office/drawing/2014/main" id="{603ACF85-7424-8575-844C-806BE1688B8C}"/>
+              </a:ext>
+            </a:extLst>
+          </p:cNvPr>
+          <p:cNvSpPr/>
+          <p:nvPr/>
+        </p:nvSpPr>
+        <p:spPr>
+          <a:xfrm rot="8297516">
+            <a:off x="4029623" y="4673036"/>
+            <a:ext cx="178795" cy="391413"/>
+          </a:xfrm>
+          <a:prstGeom prst="triangle">
+            <a:avLst/>
+          </a:prstGeom>
+        </p:spPr>
+        <p:style>
+          <a:lnRef idx="2">
+            <a:schemeClr val="dk1">
+              <a:shade val="50000"/>
+            </a:schemeClr>
+          </a:lnRef>
+          <a:fillRef idx="1">
+            <a:schemeClr val="dk1"/>
+          </a:fillRef>
+          <a:effectRef idx="0">
+            <a:schemeClr val="dk1"/>
+          </a:effectRef>
+          <a:fontRef idx="minor">
+            <a:schemeClr val="lt1"/>
+          </a:fontRef>
+        </p:style>
+        <p:txBody>
+          <a:bodyPr rtlCol="0" anchor="ctr"/>
+          <a:lstStyle/>
+          <a:p>
+            <a:pPr algn="ctr"/>
+            <a:endParaRPr lang="en-US"/>
+          </a:p>
+        </p:txBody>
+      </p:sp>
+      <p:sp>
+        <p:nvSpPr>
+          <p:cNvPr id="270" name="Moon 269">
+            <a:extLst>
+              <a:ext uri="{FF2B5EF4-FFF2-40B4-BE49-F238E27FC236}">
+                <a16:creationId xmlns:a16="http://schemas.microsoft.com/office/drawing/2014/main" id="{65069A6A-8E05-8F7F-A320-FD4A15253A4F}"/>
+              </a:ext>
+            </a:extLst>
+          </p:cNvPr>
+          <p:cNvSpPr/>
+          <p:nvPr/>
+        </p:nvSpPr>
+        <p:spPr>
+          <a:xfrm rot="2897516">
+            <a:off x="4004721" y="4543939"/>
+            <a:ext cx="164297" cy="577458"/>
+          </a:xfrm>
+          <a:prstGeom prst="moon">
+            <a:avLst/>
+          </a:prstGeom>
+        </p:spPr>
+        <p:style>
+          <a:lnRef idx="2">
+            <a:schemeClr val="dk1">
+              <a:shade val="50000"/>
+            </a:schemeClr>
+          </a:lnRef>
+          <a:fillRef idx="1">
+            <a:schemeClr val="dk1"/>
+          </a:fillRef>
+          <a:effectRef idx="0">
+            <a:schemeClr val="dk1"/>
+          </a:effectRef>
+          <a:fontRef idx="minor">
+            <a:schemeClr val="lt1"/>
+          </a:fontRef>
+        </p:style>
+        <p:txBody>
+          <a:bodyPr rtlCol="0" anchor="ctr"/>
+          <a:lstStyle/>
+          <a:p>
+            <a:pPr algn="ctr"/>
+            <a:endParaRPr lang="en-US"/>
+          </a:p>
+        </p:txBody>
+      </p:sp>
+      <p:grpSp>
+        <p:nvGrpSpPr>
+          <p:cNvPr id="10" name="Group 9">
+            <a:extLst>
+              <a:ext uri="{FF2B5EF4-FFF2-40B4-BE49-F238E27FC236}">
+                <a16:creationId xmlns:a16="http://schemas.microsoft.com/office/drawing/2014/main" id="{3C1E4148-D86C-92E0-9BBF-C677587D5461}"/>
+              </a:ext>
+            </a:extLst>
+          </p:cNvPr>
+          <p:cNvGrpSpPr/>
+          <p:nvPr/>
+        </p:nvGrpSpPr>
+        <p:grpSpPr>
+          <a:xfrm rot="13765039">
+            <a:off x="3562641" y="4298678"/>
+            <a:ext cx="289303" cy="284833"/>
+            <a:chOff x="4736891" y="4170522"/>
+            <a:chExt cx="289303" cy="284833"/>
+          </a:xfrm>
+        </p:grpSpPr>
+        <p:sp>
+          <p:nvSpPr>
+            <p:cNvPr id="8" name="Moon 7">
+              <a:extLst>
+                <a:ext uri="{FF2B5EF4-FFF2-40B4-BE49-F238E27FC236}">
+                  <a16:creationId xmlns:a16="http://schemas.microsoft.com/office/drawing/2014/main" id="{4E7BDCCB-6FBF-842B-FF73-E555B0866166}"/>
+                </a:ext>
+              </a:extLst>
+            </p:cNvPr>
+            <p:cNvSpPr/>
+            <p:nvPr/>
+          </p:nvSpPr>
+          <p:spPr>
+            <a:xfrm>
+              <a:off x="4736891" y="4170522"/>
+              <a:ext cx="140387" cy="284833"/>
+            </a:xfrm>
+            <a:prstGeom prst="moon">
+              <a:avLst/>
+            </a:prstGeom>
+          </p:spPr>
+          <p:style>
+            <a:lnRef idx="2">
+              <a:schemeClr val="dk1">
+                <a:shade val="50000"/>
+              </a:schemeClr>
+            </a:lnRef>
+            <a:fillRef idx="1">
+              <a:schemeClr val="dk1"/>
+            </a:fillRef>
+            <a:effectRef idx="0">
+              <a:schemeClr val="dk1"/>
+            </a:effectRef>
+            <a:fontRef idx="minor">
+              <a:schemeClr val="lt1"/>
+            </a:fontRef>
+          </p:style>
+          <p:txBody>
+            <a:bodyPr rtlCol="0" anchor="ctr"/>
+            <a:lstStyle/>
+            <a:p>
+              <a:pPr algn="ctr"/>
+              <a:endParaRPr lang="en-US"/>
+            </a:p>
+          </p:txBody>
+        </p:sp>
+        <p:sp>
+          <p:nvSpPr>
+            <p:cNvPr id="9" name="Sun 8">
+              <a:extLst>
+                <a:ext uri="{FF2B5EF4-FFF2-40B4-BE49-F238E27FC236}">
+                  <a16:creationId xmlns:a16="http://schemas.microsoft.com/office/drawing/2014/main" id="{3D490005-0727-5FAC-2B82-A10FC34A8C83}"/>
+                </a:ext>
+              </a:extLst>
+            </p:cNvPr>
+            <p:cNvSpPr/>
+            <p:nvPr/>
+          </p:nvSpPr>
+          <p:spPr>
+            <a:xfrm>
+              <a:off x="4836101" y="4213861"/>
+              <a:ext cx="190093" cy="193037"/>
+            </a:xfrm>
+            <a:prstGeom prst="sun">
+              <a:avLst>
+                <a:gd name="adj" fmla="val 20460"/>
+              </a:avLst>
+            </a:prstGeom>
+          </p:spPr>
+          <p:style>
+            <a:lnRef idx="2">
+              <a:schemeClr val="dk1">
+                <a:shade val="50000"/>
+              </a:schemeClr>
+            </a:lnRef>
+            <a:fillRef idx="1">
+              <a:schemeClr val="dk1"/>
+            </a:fillRef>
+            <a:effectRef idx="0">
+              <a:schemeClr val="dk1"/>
+            </a:effectRef>
+            <a:fontRef idx="minor">
+              <a:schemeClr val="lt1"/>
+            </a:fontRef>
+          </p:style>
+          <p:txBody>
+            <a:bodyPr rtlCol="0" anchor="ctr"/>
+            <a:lstStyle/>
+            <a:p>
+              <a:pPr algn="ctr"/>
+              <a:endParaRPr lang="en-US"/>
+            </a:p>
+          </p:txBody>
+        </p:sp>
+      </p:grpSp>
+      <p:grpSp>
+        <p:nvGrpSpPr>
+          <p:cNvPr id="282" name="Group 281">
+            <a:extLst>
+              <a:ext uri="{FF2B5EF4-FFF2-40B4-BE49-F238E27FC236}">
+                <a16:creationId xmlns:a16="http://schemas.microsoft.com/office/drawing/2014/main" id="{8F23EC0E-A67E-4965-45D4-965FB47BC5F4}"/>
+              </a:ext>
+            </a:extLst>
+          </p:cNvPr>
+          <p:cNvGrpSpPr/>
+          <p:nvPr/>
+        </p:nvGrpSpPr>
+        <p:grpSpPr>
+          <a:xfrm rot="13765039">
+            <a:off x="3649709" y="4607337"/>
+            <a:ext cx="163982" cy="161448"/>
+            <a:chOff x="4736891" y="4170522"/>
+            <a:chExt cx="289303" cy="284833"/>
+          </a:xfrm>
+        </p:grpSpPr>
+        <p:sp>
+          <p:nvSpPr>
+            <p:cNvPr id="283" name="Moon 282">
+              <a:extLst>
+                <a:ext uri="{FF2B5EF4-FFF2-40B4-BE49-F238E27FC236}">
+                  <a16:creationId xmlns:a16="http://schemas.microsoft.com/office/drawing/2014/main" id="{993458AF-FF89-826E-FF1C-0B68AFDD29AF}"/>
+                </a:ext>
+              </a:extLst>
+            </p:cNvPr>
+            <p:cNvSpPr/>
+            <p:nvPr/>
+          </p:nvSpPr>
+          <p:spPr>
+            <a:xfrm>
+              <a:off x="4736891" y="4170522"/>
+              <a:ext cx="140387" cy="284833"/>
+            </a:xfrm>
+            <a:prstGeom prst="moon">
+              <a:avLst/>
+            </a:prstGeom>
+          </p:spPr>
+          <p:style>
+            <a:lnRef idx="2">
+              <a:schemeClr val="dk1">
+                <a:shade val="50000"/>
+              </a:schemeClr>
+            </a:lnRef>
+            <a:fillRef idx="1">
+              <a:schemeClr val="dk1"/>
+            </a:fillRef>
+            <a:effectRef idx="0">
+              <a:schemeClr val="dk1"/>
+            </a:effectRef>
+            <a:fontRef idx="minor">
+              <a:schemeClr val="lt1"/>
+            </a:fontRef>
+          </p:style>
+          <p:txBody>
+            <a:bodyPr rtlCol="0" anchor="ctr"/>
+            <a:lstStyle/>
+            <a:p>
+              <a:pPr algn="ctr"/>
+              <a:endParaRPr lang="en-US"/>
+            </a:p>
+          </p:txBody>
+        </p:sp>
+        <p:sp>
+          <p:nvSpPr>
+            <p:cNvPr id="284" name="Sun 283">
+              <a:extLst>
+                <a:ext uri="{FF2B5EF4-FFF2-40B4-BE49-F238E27FC236}">
+                  <a16:creationId xmlns:a16="http://schemas.microsoft.com/office/drawing/2014/main" id="{8D4E6FC3-656E-1844-02A2-E13B72B2FDB7}"/>
+                </a:ext>
+              </a:extLst>
+            </p:cNvPr>
+            <p:cNvSpPr/>
+            <p:nvPr/>
+          </p:nvSpPr>
+          <p:spPr>
+            <a:xfrm>
+              <a:off x="4836101" y="4213861"/>
+              <a:ext cx="190093" cy="193037"/>
+            </a:xfrm>
+            <a:prstGeom prst="sun">
+              <a:avLst>
+                <a:gd name="adj" fmla="val 20460"/>
+              </a:avLst>
+            </a:prstGeom>
+          </p:spPr>
+          <p:style>
+            <a:lnRef idx="2">
+              <a:schemeClr val="dk1">
+                <a:shade val="50000"/>
+              </a:schemeClr>
+            </a:lnRef>
+            <a:fillRef idx="1">
+              <a:schemeClr val="dk1"/>
+            </a:fillRef>
+            <a:effectRef idx="0">
+              <a:schemeClr val="dk1"/>
+            </a:effectRef>
+            <a:fontRef idx="minor">
+              <a:schemeClr val="lt1"/>
+            </a:fontRef>
+          </p:style>
+          <p:txBody>
+            <a:bodyPr rtlCol="0" anchor="ctr"/>
+            <a:lstStyle/>
+            <a:p>
+              <a:pPr algn="ctr"/>
+              <a:endParaRPr lang="en-US"/>
+            </a:p>
+          </p:txBody>
+        </p:sp>
+      </p:grpSp>
+      <p:grpSp>
+        <p:nvGrpSpPr>
+          <p:cNvPr id="285" name="Group 284">
+            <a:extLst>
+              <a:ext uri="{FF2B5EF4-FFF2-40B4-BE49-F238E27FC236}">
+                <a16:creationId xmlns:a16="http://schemas.microsoft.com/office/drawing/2014/main" id="{A9440B89-2CBC-ECAF-6672-3DEDEE6D2FBB}"/>
+              </a:ext>
+            </a:extLst>
+          </p:cNvPr>
+          <p:cNvGrpSpPr/>
+          <p:nvPr/>
+        </p:nvGrpSpPr>
+        <p:grpSpPr>
+          <a:xfrm rot="13765039">
+            <a:off x="3872945" y="4412802"/>
+            <a:ext cx="163982" cy="161448"/>
+            <a:chOff x="4736891" y="4170522"/>
+            <a:chExt cx="289303" cy="284833"/>
+          </a:xfrm>
+        </p:grpSpPr>
+        <p:sp>
+          <p:nvSpPr>
+            <p:cNvPr id="286" name="Moon 285">
+              <a:extLst>
+                <a:ext uri="{FF2B5EF4-FFF2-40B4-BE49-F238E27FC236}">
+                  <a16:creationId xmlns:a16="http://schemas.microsoft.com/office/drawing/2014/main" id="{561EFF2D-3E54-0097-03AB-086997B71018}"/>
+                </a:ext>
+              </a:extLst>
+            </p:cNvPr>
+            <p:cNvSpPr/>
+            <p:nvPr/>
+          </p:nvSpPr>
+          <p:spPr>
+            <a:xfrm>
+              <a:off x="4736891" y="4170522"/>
+              <a:ext cx="140387" cy="284833"/>
+            </a:xfrm>
+            <a:prstGeom prst="moon">
+              <a:avLst/>
+            </a:prstGeom>
+          </p:spPr>
+          <p:style>
+            <a:lnRef idx="2">
+              <a:schemeClr val="dk1">
+                <a:shade val="50000"/>
+              </a:schemeClr>
+            </a:lnRef>
+            <a:fillRef idx="1">
+              <a:schemeClr val="dk1"/>
+            </a:fillRef>
+            <a:effectRef idx="0">
+              <a:schemeClr val="dk1"/>
+            </a:effectRef>
+            <a:fontRef idx="minor">
+              <a:schemeClr val="lt1"/>
+            </a:fontRef>
+          </p:style>
+          <p:txBody>
+            <a:bodyPr rtlCol="0" anchor="ctr"/>
+            <a:lstStyle/>
+            <a:p>
+              <a:pPr algn="ctr"/>
+              <a:endParaRPr lang="en-US"/>
+            </a:p>
+          </p:txBody>
+        </p:sp>
+        <p:sp>
+          <p:nvSpPr>
+            <p:cNvPr id="287" name="Sun 286">
+              <a:extLst>
+                <a:ext uri="{FF2B5EF4-FFF2-40B4-BE49-F238E27FC236}">
+                  <a16:creationId xmlns:a16="http://schemas.microsoft.com/office/drawing/2014/main" id="{09850323-6E76-EDF4-70B7-B161EF76E64A}"/>
+                </a:ext>
+              </a:extLst>
+            </p:cNvPr>
+            <p:cNvSpPr/>
+            <p:nvPr/>
+          </p:nvSpPr>
+          <p:spPr>
+            <a:xfrm>
+              <a:off x="4836101" y="4213861"/>
+              <a:ext cx="190093" cy="193037"/>
+            </a:xfrm>
+            <a:prstGeom prst="sun">
+              <a:avLst>
+                <a:gd name="adj" fmla="val 20460"/>
+              </a:avLst>
+            </a:prstGeom>
+          </p:spPr>
+          <p:style>
+            <a:lnRef idx="2">
+              <a:schemeClr val="dk1">
+                <a:shade val="50000"/>
+              </a:schemeClr>
+            </a:lnRef>
+            <a:fillRef idx="1">
+              <a:schemeClr val="dk1"/>
+            </a:fillRef>
+            <a:effectRef idx="0">
+              <a:schemeClr val="dk1"/>
+            </a:effectRef>
+            <a:fontRef idx="minor">
+              <a:schemeClr val="lt1"/>
+            </a:fontRef>
+          </p:style>
+          <p:txBody>
+            <a:bodyPr rtlCol="0" anchor="ctr"/>
+            <a:lstStyle/>
+            <a:p>
+              <a:pPr algn="ctr"/>
+              <a:endParaRPr lang="en-US"/>
+            </a:p>
+          </p:txBody>
+        </p:sp>
+      </p:grpSp>
     </p:spTree>
     <p:extLst>
       <p:ext uri="{BB962C8B-B14F-4D97-AF65-F5344CB8AC3E}">

--- a/image process/drawings sifi.pptx
+++ b/image process/drawings sifi.pptx
@@ -200,7 +200,7 @@
           <a:p>
             <a:fld id="{7700C406-2328-4788-AE79-437B6607AD22}" type="datetimeFigureOut">
               <a:rPr lang="en-US" smtClean="0"/>
-              <a:t>6/19/2022</a:t>
+              <a:t>6/20/2022</a:t>
             </a:fld>
             <a:endParaRPr lang="en-US"/>
           </a:p>
@@ -614,7 +614,7 @@
           <a:p>
             <a:fld id="{9EC8CD53-0620-48F2-A3BB-2B10BDA60E52}" type="datetimeFigureOut">
               <a:rPr lang="en-US" smtClean="0"/>
-              <a:t>6/19/2022</a:t>
+              <a:t>6/20/2022</a:t>
             </a:fld>
             <a:endParaRPr lang="en-US"/>
           </a:p>
@@ -812,7 +812,7 @@
           <a:p>
             <a:fld id="{9EC8CD53-0620-48F2-A3BB-2B10BDA60E52}" type="datetimeFigureOut">
               <a:rPr lang="en-US" smtClean="0"/>
-              <a:t>6/19/2022</a:t>
+              <a:t>6/20/2022</a:t>
             </a:fld>
             <a:endParaRPr lang="en-US"/>
           </a:p>
@@ -1020,7 +1020,7 @@
           <a:p>
             <a:fld id="{9EC8CD53-0620-48F2-A3BB-2B10BDA60E52}" type="datetimeFigureOut">
               <a:rPr lang="en-US" smtClean="0"/>
-              <a:t>6/19/2022</a:t>
+              <a:t>6/20/2022</a:t>
             </a:fld>
             <a:endParaRPr lang="en-US"/>
           </a:p>
@@ -1218,7 +1218,7 @@
           <a:p>
             <a:fld id="{9EC8CD53-0620-48F2-A3BB-2B10BDA60E52}" type="datetimeFigureOut">
               <a:rPr lang="en-US" smtClean="0"/>
-              <a:t>6/19/2022</a:t>
+              <a:t>6/20/2022</a:t>
             </a:fld>
             <a:endParaRPr lang="en-US"/>
           </a:p>
@@ -1493,7 +1493,7 @@
           <a:p>
             <a:fld id="{9EC8CD53-0620-48F2-A3BB-2B10BDA60E52}" type="datetimeFigureOut">
               <a:rPr lang="en-US" smtClean="0"/>
-              <a:t>6/19/2022</a:t>
+              <a:t>6/20/2022</a:t>
             </a:fld>
             <a:endParaRPr lang="en-US"/>
           </a:p>
@@ -1758,7 +1758,7 @@
           <a:p>
             <a:fld id="{9EC8CD53-0620-48F2-A3BB-2B10BDA60E52}" type="datetimeFigureOut">
               <a:rPr lang="en-US" smtClean="0"/>
-              <a:t>6/19/2022</a:t>
+              <a:t>6/20/2022</a:t>
             </a:fld>
             <a:endParaRPr lang="en-US"/>
           </a:p>
@@ -2170,7 +2170,7 @@
           <a:p>
             <a:fld id="{9EC8CD53-0620-48F2-A3BB-2B10BDA60E52}" type="datetimeFigureOut">
               <a:rPr lang="en-US" smtClean="0"/>
-              <a:t>6/19/2022</a:t>
+              <a:t>6/20/2022</a:t>
             </a:fld>
             <a:endParaRPr lang="en-US"/>
           </a:p>
@@ -2311,7 +2311,7 @@
           <a:p>
             <a:fld id="{9EC8CD53-0620-48F2-A3BB-2B10BDA60E52}" type="datetimeFigureOut">
               <a:rPr lang="en-US" smtClean="0"/>
-              <a:t>6/19/2022</a:t>
+              <a:t>6/20/2022</a:t>
             </a:fld>
             <a:endParaRPr lang="en-US"/>
           </a:p>
@@ -2424,7 +2424,7 @@
           <a:p>
             <a:fld id="{9EC8CD53-0620-48F2-A3BB-2B10BDA60E52}" type="datetimeFigureOut">
               <a:rPr lang="en-US" smtClean="0"/>
-              <a:t>6/19/2022</a:t>
+              <a:t>6/20/2022</a:t>
             </a:fld>
             <a:endParaRPr lang="en-US"/>
           </a:p>
@@ -2735,7 +2735,7 @@
           <a:p>
             <a:fld id="{9EC8CD53-0620-48F2-A3BB-2B10BDA60E52}" type="datetimeFigureOut">
               <a:rPr lang="en-US" smtClean="0"/>
-              <a:t>6/19/2022</a:t>
+              <a:t>6/20/2022</a:t>
             </a:fld>
             <a:endParaRPr lang="en-US"/>
           </a:p>
@@ -3023,7 +3023,7 @@
           <a:p>
             <a:fld id="{9EC8CD53-0620-48F2-A3BB-2B10BDA60E52}" type="datetimeFigureOut">
               <a:rPr lang="en-US" smtClean="0"/>
-              <a:t>6/19/2022</a:t>
+              <a:t>6/20/2022</a:t>
             </a:fld>
             <a:endParaRPr lang="en-US"/>
           </a:p>
@@ -3264,7 +3264,7 @@
           <a:p>
             <a:fld id="{9EC8CD53-0620-48F2-A3BB-2B10BDA60E52}" type="datetimeFigureOut">
               <a:rPr lang="en-US" smtClean="0"/>
-              <a:t>6/19/2022</a:t>
+              <a:t>6/20/2022</a:t>
             </a:fld>
             <a:endParaRPr lang="en-US"/>
           </a:p>
@@ -25274,6 +25274,831 @@
           </p:txBody>
         </p:sp>
       </p:grpSp>
+      <p:grpSp>
+        <p:nvGrpSpPr>
+          <p:cNvPr id="299" name="Group 298">
+            <a:extLst>
+              <a:ext uri="{FF2B5EF4-FFF2-40B4-BE49-F238E27FC236}">
+                <a16:creationId xmlns:a16="http://schemas.microsoft.com/office/drawing/2014/main" id="{C60FE284-F1C0-1CDB-C33C-43164B5699C5}"/>
+              </a:ext>
+            </a:extLst>
+          </p:cNvPr>
+          <p:cNvGrpSpPr/>
+          <p:nvPr/>
+        </p:nvGrpSpPr>
+        <p:grpSpPr>
+          <a:xfrm>
+            <a:off x="6260352" y="2036373"/>
+            <a:ext cx="1371600" cy="1371600"/>
+            <a:chOff x="427081" y="263129"/>
+            <a:chExt cx="1371600" cy="1371600"/>
+          </a:xfrm>
+        </p:grpSpPr>
+        <p:sp>
+          <p:nvSpPr>
+            <p:cNvPr id="300" name="Rectangle 299">
+              <a:extLst>
+                <a:ext uri="{FF2B5EF4-FFF2-40B4-BE49-F238E27FC236}">
+                  <a16:creationId xmlns:a16="http://schemas.microsoft.com/office/drawing/2014/main" id="{3FC8C816-A6BC-3D00-DA30-405A1BF0E014}"/>
+                </a:ext>
+              </a:extLst>
+            </p:cNvPr>
+            <p:cNvSpPr/>
+            <p:nvPr/>
+          </p:nvSpPr>
+          <p:spPr>
+            <a:xfrm>
+              <a:off x="427081" y="263129"/>
+              <a:ext cx="1371600" cy="1371600"/>
+            </a:xfrm>
+            <a:prstGeom prst="rect">
+              <a:avLst/>
+            </a:prstGeom>
+            <a:noFill/>
+            <a:ln w="76200">
+              <a:solidFill>
+                <a:schemeClr val="tx1"/>
+              </a:solidFill>
+            </a:ln>
+          </p:spPr>
+          <p:style>
+            <a:lnRef idx="2">
+              <a:schemeClr val="accent1">
+                <a:shade val="50000"/>
+              </a:schemeClr>
+            </a:lnRef>
+            <a:fillRef idx="1">
+              <a:schemeClr val="accent1"/>
+            </a:fillRef>
+            <a:effectRef idx="0">
+              <a:schemeClr val="accent1"/>
+            </a:effectRef>
+            <a:fontRef idx="minor">
+              <a:schemeClr val="lt1"/>
+            </a:fontRef>
+          </p:style>
+          <p:txBody>
+            <a:bodyPr rtlCol="0" anchor="ctr"/>
+            <a:lstStyle/>
+            <a:p>
+              <a:pPr algn="ctr"/>
+              <a:endParaRPr lang="en-US"/>
+            </a:p>
+          </p:txBody>
+        </p:sp>
+        <p:sp>
+          <p:nvSpPr>
+            <p:cNvPr id="301" name="Plaque 300">
+              <a:extLst>
+                <a:ext uri="{FF2B5EF4-FFF2-40B4-BE49-F238E27FC236}">
+                  <a16:creationId xmlns:a16="http://schemas.microsoft.com/office/drawing/2014/main" id="{2015751D-05C2-9B73-C6AC-788A50F839A2}"/>
+                </a:ext>
+              </a:extLst>
+            </p:cNvPr>
+            <p:cNvSpPr/>
+            <p:nvPr/>
+          </p:nvSpPr>
+          <p:spPr>
+            <a:xfrm>
+              <a:off x="566683" y="484823"/>
+              <a:ext cx="1097280" cy="1097280"/>
+            </a:xfrm>
+            <a:prstGeom prst="plaque">
+              <a:avLst/>
+            </a:prstGeom>
+            <a:noFill/>
+            <a:ln w="38100" cap="flat" cmpd="sng" algn="ctr">
+              <a:solidFill>
+                <a:schemeClr val="dk1"/>
+              </a:solidFill>
+              <a:prstDash val="solid"/>
+              <a:round/>
+              <a:headEnd type="none" w="med" len="med"/>
+              <a:tailEnd type="none" w="med" len="med"/>
+            </a:ln>
+          </p:spPr>
+          <p:style>
+            <a:lnRef idx="0">
+              <a:scrgbClr r="0" g="0" b="0"/>
+            </a:lnRef>
+            <a:fillRef idx="0">
+              <a:scrgbClr r="0" g="0" b="0"/>
+            </a:fillRef>
+            <a:effectRef idx="0">
+              <a:scrgbClr r="0" g="0" b="0"/>
+            </a:effectRef>
+            <a:fontRef idx="minor">
+              <a:schemeClr val="dk1"/>
+            </a:fontRef>
+          </p:style>
+          <p:txBody>
+            <a:bodyPr rtlCol="0" anchor="ctr"/>
+            <a:lstStyle/>
+            <a:p>
+              <a:pPr algn="ctr"/>
+              <a:endParaRPr lang="en-US"/>
+            </a:p>
+          </p:txBody>
+        </p:sp>
+      </p:grpSp>
+      <p:grpSp>
+        <p:nvGrpSpPr>
+          <p:cNvPr id="13" name="Group 12">
+            <a:extLst>
+              <a:ext uri="{FF2B5EF4-FFF2-40B4-BE49-F238E27FC236}">
+                <a16:creationId xmlns:a16="http://schemas.microsoft.com/office/drawing/2014/main" id="{2186E3FE-5366-51CB-060E-C2ABB173D381}"/>
+              </a:ext>
+            </a:extLst>
+          </p:cNvPr>
+          <p:cNvGrpSpPr/>
+          <p:nvPr/>
+        </p:nvGrpSpPr>
+        <p:grpSpPr>
+          <a:xfrm>
+            <a:off x="6504253" y="2349600"/>
+            <a:ext cx="929256" cy="820402"/>
+            <a:chOff x="6504253" y="2349600"/>
+            <a:chExt cx="929256" cy="820402"/>
+          </a:xfrm>
+        </p:grpSpPr>
+        <p:grpSp>
+          <p:nvGrpSpPr>
+            <p:cNvPr id="265" name="Group 264">
+              <a:extLst>
+                <a:ext uri="{FF2B5EF4-FFF2-40B4-BE49-F238E27FC236}">
+                  <a16:creationId xmlns:a16="http://schemas.microsoft.com/office/drawing/2014/main" id="{9E7F797B-B69B-F829-E5C9-C9D995E29ED9}"/>
+                </a:ext>
+              </a:extLst>
+            </p:cNvPr>
+            <p:cNvGrpSpPr/>
+            <p:nvPr/>
+          </p:nvGrpSpPr>
+          <p:grpSpPr>
+            <a:xfrm>
+              <a:off x="6782844" y="2541997"/>
+              <a:ext cx="361797" cy="507909"/>
+              <a:chOff x="5452330" y="1708793"/>
+              <a:chExt cx="1186621" cy="1665837"/>
+            </a:xfrm>
+          </p:grpSpPr>
+          <p:sp>
+            <p:nvSpPr>
+              <p:cNvPr id="295" name="Isosceles Triangle 294">
+                <a:extLst>
+                  <a:ext uri="{FF2B5EF4-FFF2-40B4-BE49-F238E27FC236}">
+                    <a16:creationId xmlns:a16="http://schemas.microsoft.com/office/drawing/2014/main" id="{E5DF7286-FD07-1449-3AA4-747B840C76E2}"/>
+                  </a:ext>
+                </a:extLst>
+              </p:cNvPr>
+              <p:cNvSpPr/>
+              <p:nvPr/>
+            </p:nvSpPr>
+            <p:spPr>
+              <a:xfrm>
+                <a:off x="5794991" y="1708793"/>
+                <a:ext cx="501300" cy="440002"/>
+              </a:xfrm>
+              <a:prstGeom prst="triangle">
+                <a:avLst/>
+              </a:prstGeom>
+            </p:spPr>
+            <p:style>
+              <a:lnRef idx="2">
+                <a:schemeClr val="dk1">
+                  <a:shade val="50000"/>
+                </a:schemeClr>
+              </a:lnRef>
+              <a:fillRef idx="1">
+                <a:schemeClr val="dk1"/>
+              </a:fillRef>
+              <a:effectRef idx="0">
+                <a:schemeClr val="dk1"/>
+              </a:effectRef>
+              <a:fontRef idx="minor">
+                <a:schemeClr val="lt1"/>
+              </a:fontRef>
+            </p:style>
+            <p:txBody>
+              <a:bodyPr rtlCol="0" anchor="ctr"/>
+              <a:lstStyle/>
+              <a:p>
+                <a:pPr algn="ctr"/>
+                <a:endParaRPr lang="en-US"/>
+              </a:p>
+            </p:txBody>
+          </p:sp>
+          <p:sp>
+            <p:nvSpPr>
+              <p:cNvPr id="296" name="Isosceles Triangle 295">
+                <a:extLst>
+                  <a:ext uri="{FF2B5EF4-FFF2-40B4-BE49-F238E27FC236}">
+                    <a16:creationId xmlns:a16="http://schemas.microsoft.com/office/drawing/2014/main" id="{3B8B06F2-04DB-86A2-B5D4-94AC63BF270A}"/>
+                  </a:ext>
+                </a:extLst>
+              </p:cNvPr>
+              <p:cNvSpPr/>
+              <p:nvPr/>
+            </p:nvSpPr>
+            <p:spPr>
+              <a:xfrm rot="10800000">
+                <a:off x="5794991" y="2236075"/>
+                <a:ext cx="501300" cy="1138555"/>
+              </a:xfrm>
+              <a:prstGeom prst="triangle">
+                <a:avLst/>
+              </a:prstGeom>
+            </p:spPr>
+            <p:style>
+              <a:lnRef idx="2">
+                <a:schemeClr val="dk1">
+                  <a:shade val="50000"/>
+                </a:schemeClr>
+              </a:lnRef>
+              <a:fillRef idx="1">
+                <a:schemeClr val="dk1"/>
+              </a:fillRef>
+              <a:effectRef idx="0">
+                <a:schemeClr val="dk1"/>
+              </a:effectRef>
+              <a:fontRef idx="minor">
+                <a:schemeClr val="lt1"/>
+              </a:fontRef>
+            </p:style>
+            <p:txBody>
+              <a:bodyPr rtlCol="0" anchor="ctr"/>
+              <a:lstStyle/>
+              <a:p>
+                <a:pPr algn="ctr"/>
+                <a:endParaRPr lang="en-US"/>
+              </a:p>
+            </p:txBody>
+          </p:sp>
+          <p:sp>
+            <p:nvSpPr>
+              <p:cNvPr id="297" name="Rectangle 296">
+                <a:extLst>
+                  <a:ext uri="{FF2B5EF4-FFF2-40B4-BE49-F238E27FC236}">
+                    <a16:creationId xmlns:a16="http://schemas.microsoft.com/office/drawing/2014/main" id="{645E3137-EE06-0DDD-4CC0-E5FB5916E611}"/>
+                  </a:ext>
+                </a:extLst>
+              </p:cNvPr>
+              <p:cNvSpPr/>
+              <p:nvPr/>
+            </p:nvSpPr>
+            <p:spPr>
+              <a:xfrm rot="1172583">
+                <a:off x="5452330" y="2155246"/>
+                <a:ext cx="161133" cy="711668"/>
+              </a:xfrm>
+              <a:prstGeom prst="rect">
+                <a:avLst/>
+              </a:prstGeom>
+            </p:spPr>
+            <p:style>
+              <a:lnRef idx="2">
+                <a:schemeClr val="dk1">
+                  <a:shade val="50000"/>
+                </a:schemeClr>
+              </a:lnRef>
+              <a:fillRef idx="1">
+                <a:schemeClr val="dk1"/>
+              </a:fillRef>
+              <a:effectRef idx="0">
+                <a:schemeClr val="dk1"/>
+              </a:effectRef>
+              <a:fontRef idx="minor">
+                <a:schemeClr val="lt1"/>
+              </a:fontRef>
+            </p:style>
+            <p:txBody>
+              <a:bodyPr rtlCol="0" anchor="ctr"/>
+              <a:lstStyle/>
+              <a:p>
+                <a:pPr algn="ctr"/>
+                <a:endParaRPr lang="en-US"/>
+              </a:p>
+            </p:txBody>
+          </p:sp>
+          <p:sp>
+            <p:nvSpPr>
+              <p:cNvPr id="298" name="Rectangle 297">
+                <a:extLst>
+                  <a:ext uri="{FF2B5EF4-FFF2-40B4-BE49-F238E27FC236}">
+                    <a16:creationId xmlns:a16="http://schemas.microsoft.com/office/drawing/2014/main" id="{FD16C3EA-352B-A043-0089-A62054441DE1}"/>
+                  </a:ext>
+                </a:extLst>
+              </p:cNvPr>
+              <p:cNvSpPr/>
+              <p:nvPr/>
+            </p:nvSpPr>
+            <p:spPr>
+              <a:xfrm rot="20427417" flipH="1">
+                <a:off x="6477818" y="2155248"/>
+                <a:ext cx="161133" cy="711668"/>
+              </a:xfrm>
+              <a:prstGeom prst="rect">
+                <a:avLst/>
+              </a:prstGeom>
+            </p:spPr>
+            <p:style>
+              <a:lnRef idx="2">
+                <a:schemeClr val="dk1">
+                  <a:shade val="50000"/>
+                </a:schemeClr>
+              </a:lnRef>
+              <a:fillRef idx="1">
+                <a:schemeClr val="dk1"/>
+              </a:fillRef>
+              <a:effectRef idx="0">
+                <a:schemeClr val="dk1"/>
+              </a:effectRef>
+              <a:fontRef idx="minor">
+                <a:schemeClr val="lt1"/>
+              </a:fontRef>
+            </p:style>
+            <p:txBody>
+              <a:bodyPr rtlCol="0" anchor="ctr"/>
+              <a:lstStyle/>
+              <a:p>
+                <a:pPr algn="ctr"/>
+                <a:endParaRPr lang="en-US"/>
+              </a:p>
+            </p:txBody>
+          </p:sp>
+        </p:grpSp>
+        <p:pic>
+          <p:nvPicPr>
+            <p:cNvPr id="302" name="Picture 301">
+              <a:extLst>
+                <a:ext uri="{FF2B5EF4-FFF2-40B4-BE49-F238E27FC236}">
+                  <a16:creationId xmlns:a16="http://schemas.microsoft.com/office/drawing/2014/main" id="{B5106705-F9F6-705C-08B8-7FE5C192A74F}"/>
+                </a:ext>
+              </a:extLst>
+            </p:cNvPr>
+            <p:cNvPicPr>
+              <a:picLocks noChangeAspect="1"/>
+            </p:cNvPicPr>
+            <p:nvPr/>
+          </p:nvPicPr>
+          <p:blipFill>
+            <a:blip r:embed="rId9"/>
+            <a:stretch>
+              <a:fillRect/>
+            </a:stretch>
+          </p:blipFill>
+          <p:spPr>
+            <a:xfrm>
+              <a:off x="6897724" y="2349600"/>
+              <a:ext cx="132035" cy="166320"/>
+            </a:xfrm>
+            <a:prstGeom prst="rect">
+              <a:avLst/>
+            </a:prstGeom>
+          </p:spPr>
+        </p:pic>
+        <p:pic>
+          <p:nvPicPr>
+            <p:cNvPr id="305" name="Picture 304">
+              <a:extLst>
+                <a:ext uri="{FF2B5EF4-FFF2-40B4-BE49-F238E27FC236}">
+                  <a16:creationId xmlns:a16="http://schemas.microsoft.com/office/drawing/2014/main" id="{50BC5007-18AE-146C-585E-086BB3183B06}"/>
+                </a:ext>
+              </a:extLst>
+            </p:cNvPr>
+            <p:cNvPicPr>
+              <a:picLocks noChangeAspect="1"/>
+            </p:cNvPicPr>
+            <p:nvPr/>
+          </p:nvPicPr>
+          <p:blipFill>
+            <a:blip r:embed="rId9"/>
+            <a:stretch>
+              <a:fillRect/>
+            </a:stretch>
+          </p:blipFill>
+          <p:spPr>
+            <a:xfrm>
+              <a:off x="6719436" y="2470941"/>
+              <a:ext cx="132035" cy="166320"/>
+            </a:xfrm>
+            <a:prstGeom prst="rect">
+              <a:avLst/>
+            </a:prstGeom>
+          </p:spPr>
+        </p:pic>
+        <p:pic>
+          <p:nvPicPr>
+            <p:cNvPr id="306" name="Picture 305">
+              <a:extLst>
+                <a:ext uri="{FF2B5EF4-FFF2-40B4-BE49-F238E27FC236}">
+                  <a16:creationId xmlns:a16="http://schemas.microsoft.com/office/drawing/2014/main" id="{CCFEC807-D372-6DB2-8EFE-8DBCFBFF762E}"/>
+                </a:ext>
+              </a:extLst>
+            </p:cNvPr>
+            <p:cNvPicPr>
+              <a:picLocks noChangeAspect="1"/>
+            </p:cNvPicPr>
+            <p:nvPr/>
+          </p:nvPicPr>
+          <p:blipFill>
+            <a:blip r:embed="rId9"/>
+            <a:stretch>
+              <a:fillRect/>
+            </a:stretch>
+          </p:blipFill>
+          <p:spPr>
+            <a:xfrm>
+              <a:off x="7077553" y="2466608"/>
+              <a:ext cx="132035" cy="166320"/>
+            </a:xfrm>
+            <a:prstGeom prst="rect">
+              <a:avLst/>
+            </a:prstGeom>
+          </p:spPr>
+        </p:pic>
+        <p:pic>
+          <p:nvPicPr>
+            <p:cNvPr id="303" name="Picture 4" descr="demon Icon - Download demon Icon 247538 | Noun Project">
+              <a:extLst>
+                <a:ext uri="{FF2B5EF4-FFF2-40B4-BE49-F238E27FC236}">
+                  <a16:creationId xmlns:a16="http://schemas.microsoft.com/office/drawing/2014/main" id="{3D30BA95-610F-6EF5-FCE5-39384BEE3C22}"/>
+                </a:ext>
+              </a:extLst>
+            </p:cNvPr>
+            <p:cNvPicPr>
+              <a:picLocks noChangeAspect="1" noChangeArrowheads="1"/>
+            </p:cNvPicPr>
+            <p:nvPr/>
+          </p:nvPicPr>
+          <p:blipFill rotWithShape="1">
+            <a:blip r:embed="rId10">
+              <a:extLst>
+                <a:ext uri="{28A0092B-C50C-407E-A947-70E740481C1C}">
+                  <a14:useLocalDpi xmlns:a14="http://schemas.microsoft.com/office/drawing/2010/main" val="0"/>
+                </a:ext>
+              </a:extLst>
+            </a:blip>
+            <a:srcRect l="11239" r="14392"/>
+            <a:stretch/>
+          </p:blipFill>
+          <p:spPr bwMode="auto">
+            <a:xfrm>
+              <a:off x="6753777" y="2945428"/>
+              <a:ext cx="167013" cy="224574"/>
+            </a:xfrm>
+            <a:prstGeom prst="rect">
+              <a:avLst/>
+            </a:prstGeom>
+            <a:noFill/>
+            <a:extLst>
+              <a:ext uri="{909E8E84-426E-40DD-AFC4-6F175D3DCCD1}">
+                <a14:hiddenFill xmlns:a14="http://schemas.microsoft.com/office/drawing/2010/main">
+                  <a:solidFill>
+                    <a:srgbClr val="FFFFFF"/>
+                  </a:solidFill>
+                </a14:hiddenFill>
+              </a:ext>
+            </a:extLst>
+          </p:spPr>
+        </p:pic>
+        <p:pic>
+          <p:nvPicPr>
+            <p:cNvPr id="307" name="Picture 4" descr="demon Icon - Download demon Icon 247538 | Noun Project">
+              <a:extLst>
+                <a:ext uri="{FF2B5EF4-FFF2-40B4-BE49-F238E27FC236}">
+                  <a16:creationId xmlns:a16="http://schemas.microsoft.com/office/drawing/2014/main" id="{18691ECE-C973-8DDD-853F-400F771D422F}"/>
+                </a:ext>
+              </a:extLst>
+            </p:cNvPr>
+            <p:cNvPicPr>
+              <a:picLocks noChangeAspect="1" noChangeArrowheads="1"/>
+            </p:cNvPicPr>
+            <p:nvPr/>
+          </p:nvPicPr>
+          <p:blipFill rotWithShape="1">
+            <a:blip r:embed="rId10">
+              <a:extLst>
+                <a:ext uri="{28A0092B-C50C-407E-A947-70E740481C1C}">
+                  <a14:useLocalDpi xmlns:a14="http://schemas.microsoft.com/office/drawing/2010/main" val="0"/>
+                </a:ext>
+              </a:extLst>
+            </a:blip>
+            <a:srcRect l="11239" r="14392"/>
+            <a:stretch/>
+          </p:blipFill>
+          <p:spPr bwMode="auto">
+            <a:xfrm>
+              <a:off x="6504253" y="2615527"/>
+              <a:ext cx="245024" cy="329471"/>
+            </a:xfrm>
+            <a:prstGeom prst="rect">
+              <a:avLst/>
+            </a:prstGeom>
+            <a:noFill/>
+            <a:extLst>
+              <a:ext uri="{909E8E84-426E-40DD-AFC4-6F175D3DCCD1}">
+                <a14:hiddenFill xmlns:a14="http://schemas.microsoft.com/office/drawing/2010/main">
+                  <a:solidFill>
+                    <a:srgbClr val="FFFFFF"/>
+                  </a:solidFill>
+                </a14:hiddenFill>
+              </a:ext>
+            </a:extLst>
+          </p:spPr>
+        </p:pic>
+        <p:pic>
+          <p:nvPicPr>
+            <p:cNvPr id="309" name="Picture 4" descr="demon Icon - Download demon Icon 247538 | Noun Project">
+              <a:extLst>
+                <a:ext uri="{FF2B5EF4-FFF2-40B4-BE49-F238E27FC236}">
+                  <a16:creationId xmlns:a16="http://schemas.microsoft.com/office/drawing/2014/main" id="{9B84E838-7E59-5859-8CEA-4537295970C9}"/>
+                </a:ext>
+              </a:extLst>
+            </p:cNvPr>
+            <p:cNvPicPr>
+              <a:picLocks noChangeAspect="1" noChangeArrowheads="1"/>
+            </p:cNvPicPr>
+            <p:nvPr/>
+          </p:nvPicPr>
+          <p:blipFill rotWithShape="1">
+            <a:blip r:embed="rId10">
+              <a:extLst>
+                <a:ext uri="{28A0092B-C50C-407E-A947-70E740481C1C}">
+                  <a14:useLocalDpi xmlns:a14="http://schemas.microsoft.com/office/drawing/2010/main" val="0"/>
+                </a:ext>
+              </a:extLst>
+            </a:blip>
+            <a:srcRect l="11239" r="14392"/>
+            <a:stretch/>
+          </p:blipFill>
+          <p:spPr bwMode="auto">
+            <a:xfrm flipH="1">
+              <a:off x="7006695" y="2944551"/>
+              <a:ext cx="167013" cy="224574"/>
+            </a:xfrm>
+            <a:prstGeom prst="rect">
+              <a:avLst/>
+            </a:prstGeom>
+            <a:noFill/>
+            <a:extLst>
+              <a:ext uri="{909E8E84-426E-40DD-AFC4-6F175D3DCCD1}">
+                <a14:hiddenFill xmlns:a14="http://schemas.microsoft.com/office/drawing/2010/main">
+                  <a:solidFill>
+                    <a:srgbClr val="FFFFFF"/>
+                  </a:solidFill>
+                </a14:hiddenFill>
+              </a:ext>
+            </a:extLst>
+          </p:spPr>
+        </p:pic>
+        <p:pic>
+          <p:nvPicPr>
+            <p:cNvPr id="310" name="Picture 4" descr="demon Icon - Download demon Icon 247538 | Noun Project">
+              <a:extLst>
+                <a:ext uri="{FF2B5EF4-FFF2-40B4-BE49-F238E27FC236}">
+                  <a16:creationId xmlns:a16="http://schemas.microsoft.com/office/drawing/2014/main" id="{E7F4A014-220F-CF0E-3BE8-B6BA08DA1089}"/>
+                </a:ext>
+              </a:extLst>
+            </p:cNvPr>
+            <p:cNvPicPr>
+              <a:picLocks noChangeAspect="1" noChangeArrowheads="1"/>
+            </p:cNvPicPr>
+            <p:nvPr/>
+          </p:nvPicPr>
+          <p:blipFill rotWithShape="1">
+            <a:blip r:embed="rId10">
+              <a:extLst>
+                <a:ext uri="{28A0092B-C50C-407E-A947-70E740481C1C}">
+                  <a14:useLocalDpi xmlns:a14="http://schemas.microsoft.com/office/drawing/2010/main" val="0"/>
+                </a:ext>
+              </a:extLst>
+            </a:blip>
+            <a:srcRect l="11239" r="14392"/>
+            <a:stretch/>
+          </p:blipFill>
+          <p:spPr bwMode="auto">
+            <a:xfrm flipH="1">
+              <a:off x="7188485" y="2615527"/>
+              <a:ext cx="245024" cy="329471"/>
+            </a:xfrm>
+            <a:prstGeom prst="rect">
+              <a:avLst/>
+            </a:prstGeom>
+            <a:noFill/>
+            <a:extLst>
+              <a:ext uri="{909E8E84-426E-40DD-AFC4-6F175D3DCCD1}">
+                <a14:hiddenFill xmlns:a14="http://schemas.microsoft.com/office/drawing/2010/main">
+                  <a:solidFill>
+                    <a:srgbClr val="FFFFFF"/>
+                  </a:solidFill>
+                </a14:hiddenFill>
+              </a:ext>
+            </a:extLst>
+          </p:spPr>
+        </p:pic>
+      </p:grpSp>
+      <p:grpSp>
+        <p:nvGrpSpPr>
+          <p:cNvPr id="311" name="Group 310">
+            <a:extLst>
+              <a:ext uri="{FF2B5EF4-FFF2-40B4-BE49-F238E27FC236}">
+                <a16:creationId xmlns:a16="http://schemas.microsoft.com/office/drawing/2014/main" id="{93943293-D37E-ACF8-9671-EA65F25ADD9D}"/>
+              </a:ext>
+            </a:extLst>
+          </p:cNvPr>
+          <p:cNvGrpSpPr/>
+          <p:nvPr/>
+        </p:nvGrpSpPr>
+        <p:grpSpPr>
+          <a:xfrm>
+            <a:off x="7780272" y="2036373"/>
+            <a:ext cx="1371600" cy="1371600"/>
+            <a:chOff x="427081" y="263129"/>
+            <a:chExt cx="1371600" cy="1371600"/>
+          </a:xfrm>
+        </p:grpSpPr>
+        <p:sp>
+          <p:nvSpPr>
+            <p:cNvPr id="312" name="Rectangle 311">
+              <a:extLst>
+                <a:ext uri="{FF2B5EF4-FFF2-40B4-BE49-F238E27FC236}">
+                  <a16:creationId xmlns:a16="http://schemas.microsoft.com/office/drawing/2014/main" id="{421574D8-FD86-0FC2-ED16-87097C396CAF}"/>
+                </a:ext>
+              </a:extLst>
+            </p:cNvPr>
+            <p:cNvSpPr/>
+            <p:nvPr/>
+          </p:nvSpPr>
+          <p:spPr>
+            <a:xfrm>
+              <a:off x="427081" y="263129"/>
+              <a:ext cx="1371600" cy="1371600"/>
+            </a:xfrm>
+            <a:prstGeom prst="rect">
+              <a:avLst/>
+            </a:prstGeom>
+            <a:noFill/>
+            <a:ln w="76200">
+              <a:solidFill>
+                <a:schemeClr val="tx1"/>
+              </a:solidFill>
+            </a:ln>
+          </p:spPr>
+          <p:style>
+            <a:lnRef idx="2">
+              <a:schemeClr val="accent1">
+                <a:shade val="50000"/>
+              </a:schemeClr>
+            </a:lnRef>
+            <a:fillRef idx="1">
+              <a:schemeClr val="accent1"/>
+            </a:fillRef>
+            <a:effectRef idx="0">
+              <a:schemeClr val="accent1"/>
+            </a:effectRef>
+            <a:fontRef idx="minor">
+              <a:schemeClr val="lt1"/>
+            </a:fontRef>
+          </p:style>
+          <p:txBody>
+            <a:bodyPr rtlCol="0" anchor="ctr"/>
+            <a:lstStyle/>
+            <a:p>
+              <a:pPr algn="ctr"/>
+              <a:endParaRPr lang="en-US"/>
+            </a:p>
+          </p:txBody>
+        </p:sp>
+        <p:sp>
+          <p:nvSpPr>
+            <p:cNvPr id="313" name="Plaque 312">
+              <a:extLst>
+                <a:ext uri="{FF2B5EF4-FFF2-40B4-BE49-F238E27FC236}">
+                  <a16:creationId xmlns:a16="http://schemas.microsoft.com/office/drawing/2014/main" id="{68F69B1D-637C-2D76-F770-6A2B6A3880F5}"/>
+                </a:ext>
+              </a:extLst>
+            </p:cNvPr>
+            <p:cNvSpPr/>
+            <p:nvPr/>
+          </p:nvSpPr>
+          <p:spPr>
+            <a:xfrm>
+              <a:off x="566683" y="484823"/>
+              <a:ext cx="1097280" cy="1097280"/>
+            </a:xfrm>
+            <a:prstGeom prst="plaque">
+              <a:avLst/>
+            </a:prstGeom>
+            <a:noFill/>
+            <a:ln w="38100" cap="flat" cmpd="sng" algn="ctr">
+              <a:solidFill>
+                <a:schemeClr val="dk1"/>
+              </a:solidFill>
+              <a:prstDash val="solid"/>
+              <a:round/>
+              <a:headEnd type="none" w="med" len="med"/>
+              <a:tailEnd type="none" w="med" len="med"/>
+            </a:ln>
+          </p:spPr>
+          <p:style>
+            <a:lnRef idx="0">
+              <a:scrgbClr r="0" g="0" b="0"/>
+            </a:lnRef>
+            <a:fillRef idx="0">
+              <a:scrgbClr r="0" g="0" b="0"/>
+            </a:fillRef>
+            <a:effectRef idx="0">
+              <a:scrgbClr r="0" g="0" b="0"/>
+            </a:effectRef>
+            <a:fontRef idx="minor">
+              <a:schemeClr val="dk1"/>
+            </a:fontRef>
+          </p:style>
+          <p:txBody>
+            <a:bodyPr rtlCol="0" anchor="ctr"/>
+            <a:lstStyle/>
+            <a:p>
+              <a:pPr algn="ctr"/>
+              <a:endParaRPr lang="en-US"/>
+            </a:p>
+          </p:txBody>
+        </p:sp>
+      </p:grpSp>
+      <p:pic>
+        <p:nvPicPr>
+          <p:cNvPr id="314" name="Picture 4" descr="demon Icon - Download demon Icon 247538 | Noun Project">
+            <a:extLst>
+              <a:ext uri="{FF2B5EF4-FFF2-40B4-BE49-F238E27FC236}">
+                <a16:creationId xmlns:a16="http://schemas.microsoft.com/office/drawing/2014/main" id="{54C716CD-47BE-3540-9E49-C5E9EA741C86}"/>
+              </a:ext>
+            </a:extLst>
+          </p:cNvPr>
+          <p:cNvPicPr>
+            <a:picLocks noChangeAspect="1" noChangeArrowheads="1"/>
+          </p:cNvPicPr>
+          <p:nvPr/>
+        </p:nvPicPr>
+        <p:blipFill rotWithShape="1">
+          <a:blip r:embed="rId10">
+            <a:extLst>
+              <a:ext uri="{28A0092B-C50C-407E-A947-70E740481C1C}">
+                <a14:useLocalDpi xmlns:a14="http://schemas.microsoft.com/office/drawing/2010/main" val="0"/>
+              </a:ext>
+            </a:extLst>
+          </a:blip>
+          <a:srcRect l="11239" r="14392"/>
+          <a:stretch/>
+        </p:blipFill>
+        <p:spPr bwMode="auto">
+          <a:xfrm flipH="1">
+            <a:off x="8108370" y="2549768"/>
+            <a:ext cx="492847" cy="662706"/>
+          </a:xfrm>
+          <a:prstGeom prst="rect">
+            <a:avLst/>
+          </a:prstGeom>
+          <a:noFill/>
+          <a:extLst>
+            <a:ext uri="{909E8E84-426E-40DD-AFC4-6F175D3DCCD1}">
+              <a14:hiddenFill xmlns:a14="http://schemas.microsoft.com/office/drawing/2010/main">
+                <a:solidFill>
+                  <a:srgbClr val="FFFFFF"/>
+                </a:solidFill>
+              </a14:hiddenFill>
+            </a:ext>
+          </a:extLst>
+        </p:spPr>
+      </p:pic>
+      <p:pic>
+        <p:nvPicPr>
+          <p:cNvPr id="315" name="Picture 314">
+            <a:extLst>
+              <a:ext uri="{FF2B5EF4-FFF2-40B4-BE49-F238E27FC236}">
+                <a16:creationId xmlns:a16="http://schemas.microsoft.com/office/drawing/2014/main" id="{A37EB90D-5A1D-C1AA-174F-3E0D4FBCF331}"/>
+              </a:ext>
+            </a:extLst>
+          </p:cNvPr>
+          <p:cNvPicPr>
+            <a:picLocks noChangeAspect="1"/>
+          </p:cNvPicPr>
+          <p:nvPr/>
+        </p:nvPicPr>
+        <p:blipFill>
+          <a:blip r:embed="rId9"/>
+          <a:stretch>
+            <a:fillRect/>
+          </a:stretch>
+        </p:blipFill>
+        <p:spPr>
+          <a:xfrm>
+            <a:off x="8515162" y="2383365"/>
+            <a:ext cx="301718" cy="380064"/>
+          </a:xfrm>
+          <a:prstGeom prst="rect">
+            <a:avLst/>
+          </a:prstGeom>
+        </p:spPr>
+      </p:pic>
     </p:spTree>
     <p:extLst>
       <p:ext uri="{BB962C8B-B14F-4D97-AF65-F5344CB8AC3E}">

--- a/image process/drawings sifi.pptx
+++ b/image process/drawings sifi.pptx
@@ -200,7 +200,7 @@
           <a:p>
             <a:fld id="{7700C406-2328-4788-AE79-437B6607AD22}" type="datetimeFigureOut">
               <a:rPr lang="en-US" smtClean="0"/>
-              <a:t>6/20/2022</a:t>
+              <a:t>6/23/2022</a:t>
             </a:fld>
             <a:endParaRPr lang="en-US"/>
           </a:p>
@@ -614,7 +614,7 @@
           <a:p>
             <a:fld id="{9EC8CD53-0620-48F2-A3BB-2B10BDA60E52}" type="datetimeFigureOut">
               <a:rPr lang="en-US" smtClean="0"/>
-              <a:t>6/20/2022</a:t>
+              <a:t>6/23/2022</a:t>
             </a:fld>
             <a:endParaRPr lang="en-US"/>
           </a:p>
@@ -812,7 +812,7 @@
           <a:p>
             <a:fld id="{9EC8CD53-0620-48F2-A3BB-2B10BDA60E52}" type="datetimeFigureOut">
               <a:rPr lang="en-US" smtClean="0"/>
-              <a:t>6/20/2022</a:t>
+              <a:t>6/23/2022</a:t>
             </a:fld>
             <a:endParaRPr lang="en-US"/>
           </a:p>
@@ -1020,7 +1020,7 @@
           <a:p>
             <a:fld id="{9EC8CD53-0620-48F2-A3BB-2B10BDA60E52}" type="datetimeFigureOut">
               <a:rPr lang="en-US" smtClean="0"/>
-              <a:t>6/20/2022</a:t>
+              <a:t>6/23/2022</a:t>
             </a:fld>
             <a:endParaRPr lang="en-US"/>
           </a:p>
@@ -1218,7 +1218,7 @@
           <a:p>
             <a:fld id="{9EC8CD53-0620-48F2-A3BB-2B10BDA60E52}" type="datetimeFigureOut">
               <a:rPr lang="en-US" smtClean="0"/>
-              <a:t>6/20/2022</a:t>
+              <a:t>6/23/2022</a:t>
             </a:fld>
             <a:endParaRPr lang="en-US"/>
           </a:p>
@@ -1493,7 +1493,7 @@
           <a:p>
             <a:fld id="{9EC8CD53-0620-48F2-A3BB-2B10BDA60E52}" type="datetimeFigureOut">
               <a:rPr lang="en-US" smtClean="0"/>
-              <a:t>6/20/2022</a:t>
+              <a:t>6/23/2022</a:t>
             </a:fld>
             <a:endParaRPr lang="en-US"/>
           </a:p>
@@ -1758,7 +1758,7 @@
           <a:p>
             <a:fld id="{9EC8CD53-0620-48F2-A3BB-2B10BDA60E52}" type="datetimeFigureOut">
               <a:rPr lang="en-US" smtClean="0"/>
-              <a:t>6/20/2022</a:t>
+              <a:t>6/23/2022</a:t>
             </a:fld>
             <a:endParaRPr lang="en-US"/>
           </a:p>
@@ -2170,7 +2170,7 @@
           <a:p>
             <a:fld id="{9EC8CD53-0620-48F2-A3BB-2B10BDA60E52}" type="datetimeFigureOut">
               <a:rPr lang="en-US" smtClean="0"/>
-              <a:t>6/20/2022</a:t>
+              <a:t>6/23/2022</a:t>
             </a:fld>
             <a:endParaRPr lang="en-US"/>
           </a:p>
@@ -2311,7 +2311,7 @@
           <a:p>
             <a:fld id="{9EC8CD53-0620-48F2-A3BB-2B10BDA60E52}" type="datetimeFigureOut">
               <a:rPr lang="en-US" smtClean="0"/>
-              <a:t>6/20/2022</a:t>
+              <a:t>6/23/2022</a:t>
             </a:fld>
             <a:endParaRPr lang="en-US"/>
           </a:p>
@@ -2424,7 +2424,7 @@
           <a:p>
             <a:fld id="{9EC8CD53-0620-48F2-A3BB-2B10BDA60E52}" type="datetimeFigureOut">
               <a:rPr lang="en-US" smtClean="0"/>
-              <a:t>6/20/2022</a:t>
+              <a:t>6/23/2022</a:t>
             </a:fld>
             <a:endParaRPr lang="en-US"/>
           </a:p>
@@ -2735,7 +2735,7 @@
           <a:p>
             <a:fld id="{9EC8CD53-0620-48F2-A3BB-2B10BDA60E52}" type="datetimeFigureOut">
               <a:rPr lang="en-US" smtClean="0"/>
-              <a:t>6/20/2022</a:t>
+              <a:t>6/23/2022</a:t>
             </a:fld>
             <a:endParaRPr lang="en-US"/>
           </a:p>
@@ -3023,7 +3023,7 @@
           <a:p>
             <a:fld id="{9EC8CD53-0620-48F2-A3BB-2B10BDA60E52}" type="datetimeFigureOut">
               <a:rPr lang="en-US" smtClean="0"/>
-              <a:t>6/20/2022</a:t>
+              <a:t>6/23/2022</a:t>
             </a:fld>
             <a:endParaRPr lang="en-US"/>
           </a:p>
@@ -3264,7 +3264,7 @@
           <a:p>
             <a:fld id="{9EC8CD53-0620-48F2-A3BB-2B10BDA60E52}" type="datetimeFigureOut">
               <a:rPr lang="en-US" smtClean="0"/>
-              <a:t>6/20/2022</a:t>
+              <a:t>6/23/2022</a:t>
             </a:fld>
             <a:endParaRPr lang="en-US"/>
           </a:p>
@@ -13145,833 +13145,6 @@
       </p:grpSp>
       <p:grpSp>
         <p:nvGrpSpPr>
-          <p:cNvPr id="316" name="Group 315">
-            <a:extLst>
-              <a:ext uri="{FF2B5EF4-FFF2-40B4-BE49-F238E27FC236}">
-                <a16:creationId xmlns:a16="http://schemas.microsoft.com/office/drawing/2014/main" id="{F60BF70D-4541-E619-77CA-869A5DFBFD6F}"/>
-              </a:ext>
-            </a:extLst>
-          </p:cNvPr>
-          <p:cNvGrpSpPr/>
-          <p:nvPr/>
-        </p:nvGrpSpPr>
-        <p:grpSpPr>
-          <a:xfrm>
-            <a:off x="3586655" y="3952065"/>
-            <a:ext cx="1371600" cy="1371600"/>
-            <a:chOff x="1298501" y="962272"/>
-            <a:chExt cx="1371600" cy="1371600"/>
-          </a:xfrm>
-        </p:grpSpPr>
-        <p:sp>
-          <p:nvSpPr>
-            <p:cNvPr id="317" name="Rectangle 316">
-              <a:extLst>
-                <a:ext uri="{FF2B5EF4-FFF2-40B4-BE49-F238E27FC236}">
-                  <a16:creationId xmlns:a16="http://schemas.microsoft.com/office/drawing/2014/main" id="{5BB1C7F4-DD07-87C7-8EEC-ECA813D66FDA}"/>
-                </a:ext>
-              </a:extLst>
-            </p:cNvPr>
-            <p:cNvSpPr/>
-            <p:nvPr/>
-          </p:nvSpPr>
-          <p:spPr>
-            <a:xfrm>
-              <a:off x="1298501" y="962272"/>
-              <a:ext cx="1371600" cy="1371600"/>
-            </a:xfrm>
-            <a:prstGeom prst="rect">
-              <a:avLst/>
-            </a:prstGeom>
-            <a:noFill/>
-            <a:ln w="76200">
-              <a:solidFill>
-                <a:schemeClr val="tx1"/>
-              </a:solidFill>
-            </a:ln>
-          </p:spPr>
-          <p:style>
-            <a:lnRef idx="2">
-              <a:schemeClr val="accent1">
-                <a:shade val="50000"/>
-              </a:schemeClr>
-            </a:lnRef>
-            <a:fillRef idx="1">
-              <a:schemeClr val="accent1"/>
-            </a:fillRef>
-            <a:effectRef idx="0">
-              <a:schemeClr val="accent1"/>
-            </a:effectRef>
-            <a:fontRef idx="minor">
-              <a:schemeClr val="lt1"/>
-            </a:fontRef>
-          </p:style>
-          <p:txBody>
-            <a:bodyPr rtlCol="0" anchor="ctr"/>
-            <a:lstStyle/>
-            <a:p>
-              <a:pPr algn="ctr"/>
-              <a:endParaRPr lang="en-US"/>
-            </a:p>
-          </p:txBody>
-        </p:sp>
-        <p:sp>
-          <p:nvSpPr>
-            <p:cNvPr id="318" name="Arrow: Pentagon 317">
-              <a:extLst>
-                <a:ext uri="{FF2B5EF4-FFF2-40B4-BE49-F238E27FC236}">
-                  <a16:creationId xmlns:a16="http://schemas.microsoft.com/office/drawing/2014/main" id="{D77226D2-7D91-71A7-FFE2-CF1918DC1710}"/>
-                </a:ext>
-              </a:extLst>
-            </p:cNvPr>
-            <p:cNvSpPr/>
-            <p:nvPr/>
-          </p:nvSpPr>
-          <p:spPr>
-            <a:xfrm rot="5400000">
-              <a:off x="1435661" y="1173775"/>
-              <a:ext cx="1097280" cy="1097280"/>
-            </a:xfrm>
-            <a:prstGeom prst="homePlate">
-              <a:avLst/>
-            </a:prstGeom>
-            <a:noFill/>
-            <a:ln w="38100" cap="flat" cmpd="sng" algn="ctr">
-              <a:solidFill>
-                <a:schemeClr val="dk1"/>
-              </a:solidFill>
-              <a:prstDash val="solid"/>
-              <a:round/>
-              <a:headEnd type="none" w="med" len="med"/>
-              <a:tailEnd type="none" w="med" len="med"/>
-            </a:ln>
-          </p:spPr>
-          <p:style>
-            <a:lnRef idx="0">
-              <a:scrgbClr r="0" g="0" b="0"/>
-            </a:lnRef>
-            <a:fillRef idx="0">
-              <a:scrgbClr r="0" g="0" b="0"/>
-            </a:fillRef>
-            <a:effectRef idx="0">
-              <a:scrgbClr r="0" g="0" b="0"/>
-            </a:effectRef>
-            <a:fontRef idx="minor">
-              <a:schemeClr val="dk1"/>
-            </a:fontRef>
-          </p:style>
-          <p:txBody>
-            <a:bodyPr rtlCol="0" anchor="ctr"/>
-            <a:lstStyle/>
-            <a:p>
-              <a:pPr algn="ctr"/>
-              <a:endParaRPr lang="en-US"/>
-            </a:p>
-          </p:txBody>
-        </p:sp>
-      </p:grpSp>
-      <p:grpSp>
-        <p:nvGrpSpPr>
-          <p:cNvPr id="319" name="Group 318">
-            <a:extLst>
-              <a:ext uri="{FF2B5EF4-FFF2-40B4-BE49-F238E27FC236}">
-                <a16:creationId xmlns:a16="http://schemas.microsoft.com/office/drawing/2014/main" id="{E25D332D-EB93-80E6-B702-019112BF178E}"/>
-              </a:ext>
-            </a:extLst>
-          </p:cNvPr>
-          <p:cNvGrpSpPr/>
-          <p:nvPr/>
-        </p:nvGrpSpPr>
-        <p:grpSpPr>
-          <a:xfrm>
-            <a:off x="3843598" y="4223525"/>
-            <a:ext cx="870414" cy="803280"/>
-            <a:chOff x="2841994" y="930562"/>
-            <a:chExt cx="3529486" cy="3257264"/>
-          </a:xfrm>
-        </p:grpSpPr>
-        <p:sp>
-          <p:nvSpPr>
-            <p:cNvPr id="320" name="Oval 319">
-              <a:extLst>
-                <a:ext uri="{FF2B5EF4-FFF2-40B4-BE49-F238E27FC236}">
-                  <a16:creationId xmlns:a16="http://schemas.microsoft.com/office/drawing/2014/main" id="{85B12C62-ADBA-DDB9-AC76-430E72EAD4F8}"/>
-                </a:ext>
-              </a:extLst>
-            </p:cNvPr>
-            <p:cNvSpPr/>
-            <p:nvPr/>
-          </p:nvSpPr>
-          <p:spPr>
-            <a:xfrm>
-              <a:off x="4305300" y="930562"/>
-              <a:ext cx="590550" cy="3181350"/>
-            </a:xfrm>
-            <a:prstGeom prst="ellipse">
-              <a:avLst/>
-            </a:prstGeom>
-            <a:ln/>
-          </p:spPr>
-          <p:style>
-            <a:lnRef idx="2">
-              <a:schemeClr val="dk1">
-                <a:shade val="50000"/>
-              </a:schemeClr>
-            </a:lnRef>
-            <a:fillRef idx="1">
-              <a:schemeClr val="dk1"/>
-            </a:fillRef>
-            <a:effectRef idx="0">
-              <a:schemeClr val="dk1"/>
-            </a:effectRef>
-            <a:fontRef idx="minor">
-              <a:schemeClr val="lt1"/>
-            </a:fontRef>
-          </p:style>
-          <p:txBody>
-            <a:bodyPr rtlCol="0" anchor="ctr"/>
-            <a:lstStyle/>
-            <a:p>
-              <a:pPr algn="ctr"/>
-              <a:endParaRPr lang="en-US"/>
-            </a:p>
-          </p:txBody>
-        </p:sp>
-        <p:sp>
-          <p:nvSpPr>
-            <p:cNvPr id="321" name="Isosceles Triangle 320">
-              <a:extLst>
-                <a:ext uri="{FF2B5EF4-FFF2-40B4-BE49-F238E27FC236}">
-                  <a16:creationId xmlns:a16="http://schemas.microsoft.com/office/drawing/2014/main" id="{5F17EBD1-A0DE-D2AA-1F38-E7D0DE10B186}"/>
-                </a:ext>
-              </a:extLst>
-            </p:cNvPr>
-            <p:cNvSpPr/>
-            <p:nvPr/>
-          </p:nvSpPr>
-          <p:spPr>
-            <a:xfrm rot="15097803">
-              <a:off x="3816522" y="3530601"/>
-              <a:ext cx="590550" cy="723900"/>
-            </a:xfrm>
-            <a:prstGeom prst="triangle">
-              <a:avLst/>
-            </a:prstGeom>
-          </p:spPr>
-          <p:style>
-            <a:lnRef idx="2">
-              <a:schemeClr val="dk1">
-                <a:shade val="50000"/>
-              </a:schemeClr>
-            </a:lnRef>
-            <a:fillRef idx="1">
-              <a:schemeClr val="dk1"/>
-            </a:fillRef>
-            <a:effectRef idx="0">
-              <a:schemeClr val="dk1"/>
-            </a:effectRef>
-            <a:fontRef idx="minor">
-              <a:schemeClr val="lt1"/>
-            </a:fontRef>
-          </p:style>
-          <p:txBody>
-            <a:bodyPr rtlCol="0" anchor="ctr"/>
-            <a:lstStyle/>
-            <a:p>
-              <a:pPr algn="ctr"/>
-              <a:endParaRPr lang="en-US"/>
-            </a:p>
-          </p:txBody>
-        </p:sp>
-        <p:sp>
-          <p:nvSpPr>
-            <p:cNvPr id="322" name="Isosceles Triangle 321">
-              <a:extLst>
-                <a:ext uri="{FF2B5EF4-FFF2-40B4-BE49-F238E27FC236}">
-                  <a16:creationId xmlns:a16="http://schemas.microsoft.com/office/drawing/2014/main" id="{8C714315-EE69-66F0-541A-EF5DD3EBD261}"/>
-                </a:ext>
-              </a:extLst>
-            </p:cNvPr>
-            <p:cNvSpPr/>
-            <p:nvPr/>
-          </p:nvSpPr>
-          <p:spPr>
-            <a:xfrm rot="6456753">
-              <a:off x="4789963" y="3527597"/>
-              <a:ext cx="590550" cy="723900"/>
-            </a:xfrm>
-            <a:prstGeom prst="triangle">
-              <a:avLst/>
-            </a:prstGeom>
-          </p:spPr>
-          <p:style>
-            <a:lnRef idx="2">
-              <a:schemeClr val="dk1">
-                <a:shade val="50000"/>
-              </a:schemeClr>
-            </a:lnRef>
-            <a:fillRef idx="1">
-              <a:schemeClr val="dk1"/>
-            </a:fillRef>
-            <a:effectRef idx="0">
-              <a:schemeClr val="dk1"/>
-            </a:effectRef>
-            <a:fontRef idx="minor">
-              <a:schemeClr val="lt1"/>
-            </a:fontRef>
-          </p:style>
-          <p:txBody>
-            <a:bodyPr rtlCol="0" anchor="ctr"/>
-            <a:lstStyle/>
-            <a:p>
-              <a:pPr algn="ctr"/>
-              <a:endParaRPr lang="en-US"/>
-            </a:p>
-          </p:txBody>
-        </p:sp>
-        <p:grpSp>
-          <p:nvGrpSpPr>
-            <p:cNvPr id="323" name="Group 322">
-              <a:extLst>
-                <a:ext uri="{FF2B5EF4-FFF2-40B4-BE49-F238E27FC236}">
-                  <a16:creationId xmlns:a16="http://schemas.microsoft.com/office/drawing/2014/main" id="{489FCEB9-6581-0E22-6109-EEBBABAA705A}"/>
-                </a:ext>
-              </a:extLst>
-            </p:cNvPr>
-            <p:cNvGrpSpPr/>
-            <p:nvPr/>
-          </p:nvGrpSpPr>
-          <p:grpSpPr>
-            <a:xfrm>
-              <a:off x="2841994" y="1514299"/>
-              <a:ext cx="1562063" cy="1372483"/>
-              <a:chOff x="2841994" y="1514299"/>
-              <a:chExt cx="1562063" cy="1372483"/>
-            </a:xfrm>
-          </p:grpSpPr>
-          <p:sp>
-            <p:nvSpPr>
-              <p:cNvPr id="331" name="Rectangle 330">
-                <a:extLst>
-                  <a:ext uri="{FF2B5EF4-FFF2-40B4-BE49-F238E27FC236}">
-                    <a16:creationId xmlns:a16="http://schemas.microsoft.com/office/drawing/2014/main" id="{977D2C1C-FF87-596D-3AB2-64083F8571DD}"/>
-                  </a:ext>
-                </a:extLst>
-              </p:cNvPr>
-              <p:cNvSpPr/>
-              <p:nvPr/>
-            </p:nvSpPr>
-            <p:spPr>
-              <a:xfrm>
-                <a:off x="3453258" y="1667895"/>
-                <a:ext cx="241300" cy="1016415"/>
-              </a:xfrm>
-              <a:prstGeom prst="rect">
-                <a:avLst/>
-              </a:prstGeom>
-            </p:spPr>
-            <p:style>
-              <a:lnRef idx="2">
-                <a:schemeClr val="dk1"/>
-              </a:lnRef>
-              <a:fillRef idx="1">
-                <a:schemeClr val="lt1"/>
-              </a:fillRef>
-              <a:effectRef idx="0">
-                <a:schemeClr val="dk1"/>
-              </a:effectRef>
-              <a:fontRef idx="minor">
-                <a:schemeClr val="dk1"/>
-              </a:fontRef>
-            </p:style>
-            <p:txBody>
-              <a:bodyPr rtlCol="0" anchor="ctr"/>
-              <a:lstStyle/>
-              <a:p>
-                <a:pPr algn="ctr"/>
-                <a:endParaRPr lang="en-US"/>
-              </a:p>
-            </p:txBody>
-          </p:sp>
-          <p:sp>
-            <p:nvSpPr>
-              <p:cNvPr id="332" name="Rectangle 331">
-                <a:extLst>
-                  <a:ext uri="{FF2B5EF4-FFF2-40B4-BE49-F238E27FC236}">
-                    <a16:creationId xmlns:a16="http://schemas.microsoft.com/office/drawing/2014/main" id="{62137CB9-7201-79C3-3084-6CB5C9587369}"/>
-                  </a:ext>
-                </a:extLst>
-              </p:cNvPr>
-              <p:cNvSpPr/>
-              <p:nvPr/>
-            </p:nvSpPr>
-            <p:spPr>
-              <a:xfrm>
-                <a:off x="3879279" y="1514299"/>
-                <a:ext cx="241300" cy="1016415"/>
-              </a:xfrm>
-              <a:prstGeom prst="rect">
-                <a:avLst/>
-              </a:prstGeom>
-            </p:spPr>
-            <p:style>
-              <a:lnRef idx="2">
-                <a:schemeClr val="dk1"/>
-              </a:lnRef>
-              <a:fillRef idx="1">
-                <a:schemeClr val="lt1"/>
-              </a:fillRef>
-              <a:effectRef idx="0">
-                <a:schemeClr val="dk1"/>
-              </a:effectRef>
-              <a:fontRef idx="minor">
-                <a:schemeClr val="dk1"/>
-              </a:fontRef>
-            </p:style>
-            <p:txBody>
-              <a:bodyPr rtlCol="0" anchor="ctr"/>
-              <a:lstStyle/>
-              <a:p>
-                <a:pPr algn="ctr"/>
-                <a:endParaRPr lang="en-US"/>
-              </a:p>
-            </p:txBody>
-          </p:sp>
-          <p:sp>
-            <p:nvSpPr>
-              <p:cNvPr id="333" name="Trapezoid 332">
-                <a:extLst>
-                  <a:ext uri="{FF2B5EF4-FFF2-40B4-BE49-F238E27FC236}">
-                    <a16:creationId xmlns:a16="http://schemas.microsoft.com/office/drawing/2014/main" id="{6FA67849-F3A4-D169-FBD0-2987BE6B9DA3}"/>
-                  </a:ext>
-                </a:extLst>
-              </p:cNvPr>
-              <p:cNvSpPr/>
-              <p:nvPr/>
-            </p:nvSpPr>
-            <p:spPr>
-              <a:xfrm rot="15639411">
-                <a:off x="3588611" y="1898339"/>
-                <a:ext cx="806450" cy="824442"/>
-              </a:xfrm>
-              <a:prstGeom prst="trapezoid">
-                <a:avLst>
-                  <a:gd name="adj" fmla="val 15303"/>
-                </a:avLst>
-              </a:prstGeom>
-            </p:spPr>
-            <p:style>
-              <a:lnRef idx="2">
-                <a:schemeClr val="dk1">
-                  <a:shade val="50000"/>
-                </a:schemeClr>
-              </a:lnRef>
-              <a:fillRef idx="1">
-                <a:schemeClr val="dk1"/>
-              </a:fillRef>
-              <a:effectRef idx="0">
-                <a:schemeClr val="dk1"/>
-              </a:effectRef>
-              <a:fontRef idx="minor">
-                <a:schemeClr val="lt1"/>
-              </a:fontRef>
-            </p:style>
-            <p:txBody>
-              <a:bodyPr rtlCol="0" anchor="ctr"/>
-              <a:lstStyle/>
-              <a:p>
-                <a:pPr algn="ctr"/>
-                <a:endParaRPr lang="en-US"/>
-              </a:p>
-            </p:txBody>
-          </p:sp>
-          <p:sp>
-            <p:nvSpPr>
-              <p:cNvPr id="334" name="Isosceles Triangle 333">
-                <a:extLst>
-                  <a:ext uri="{FF2B5EF4-FFF2-40B4-BE49-F238E27FC236}">
-                    <a16:creationId xmlns:a16="http://schemas.microsoft.com/office/drawing/2014/main" id="{F875D4DC-7385-1E3A-92DE-9B40A84E4BD9}"/>
-                  </a:ext>
-                </a:extLst>
-              </p:cNvPr>
-              <p:cNvSpPr/>
-              <p:nvPr/>
-            </p:nvSpPr>
-            <p:spPr>
-              <a:xfrm rot="14248003">
-                <a:off x="2851235" y="2409712"/>
-                <a:ext cx="388815" cy="407297"/>
-              </a:xfrm>
-              <a:prstGeom prst="triangle">
-                <a:avLst/>
-              </a:prstGeom>
-            </p:spPr>
-            <p:style>
-              <a:lnRef idx="2">
-                <a:schemeClr val="dk1">
-                  <a:shade val="50000"/>
-                </a:schemeClr>
-              </a:lnRef>
-              <a:fillRef idx="1">
-                <a:schemeClr val="dk1"/>
-              </a:fillRef>
-              <a:effectRef idx="0">
-                <a:schemeClr val="dk1"/>
-              </a:effectRef>
-              <a:fontRef idx="minor">
-                <a:schemeClr val="lt1"/>
-              </a:fontRef>
-            </p:style>
-            <p:txBody>
-              <a:bodyPr rtlCol="0" anchor="ctr"/>
-              <a:lstStyle/>
-              <a:p>
-                <a:pPr algn="ctr"/>
-                <a:endParaRPr lang="en-US"/>
-              </a:p>
-            </p:txBody>
-          </p:sp>
-          <p:sp>
-            <p:nvSpPr>
-              <p:cNvPr id="335" name="Oval 334">
-                <a:extLst>
-                  <a:ext uri="{FF2B5EF4-FFF2-40B4-BE49-F238E27FC236}">
-                    <a16:creationId xmlns:a16="http://schemas.microsoft.com/office/drawing/2014/main" id="{C7DDC445-B33C-8CB5-68CE-C55C65096E7A}"/>
-                  </a:ext>
-                </a:extLst>
-              </p:cNvPr>
-              <p:cNvSpPr/>
-              <p:nvPr/>
-            </p:nvSpPr>
-            <p:spPr>
-              <a:xfrm>
-                <a:off x="3087822" y="1907372"/>
-                <a:ext cx="979410" cy="979410"/>
-              </a:xfrm>
-              <a:prstGeom prst="ellipse">
-                <a:avLst/>
-              </a:prstGeom>
-              <a:ln w="19050"/>
-            </p:spPr>
-            <p:style>
-              <a:lnRef idx="2">
-                <a:schemeClr val="dk1"/>
-              </a:lnRef>
-              <a:fillRef idx="1">
-                <a:schemeClr val="lt1"/>
-              </a:fillRef>
-              <a:effectRef idx="0">
-                <a:schemeClr val="dk1"/>
-              </a:effectRef>
-              <a:fontRef idx="minor">
-                <a:schemeClr val="dk1"/>
-              </a:fontRef>
-            </p:style>
-            <p:txBody>
-              <a:bodyPr rtlCol="0" anchor="ctr"/>
-              <a:lstStyle/>
-              <a:p>
-                <a:pPr algn="ctr"/>
-                <a:endParaRPr lang="en-US"/>
-              </a:p>
-            </p:txBody>
-          </p:sp>
-        </p:grpSp>
-        <p:sp>
-          <p:nvSpPr>
-            <p:cNvPr id="324" name="Trapezoid 323">
-              <a:extLst>
-                <a:ext uri="{FF2B5EF4-FFF2-40B4-BE49-F238E27FC236}">
-                  <a16:creationId xmlns:a16="http://schemas.microsoft.com/office/drawing/2014/main" id="{D4781322-EF42-0A95-0672-83C3F93E7A17}"/>
-                </a:ext>
-              </a:extLst>
-            </p:cNvPr>
-            <p:cNvSpPr/>
-            <p:nvPr/>
-          </p:nvSpPr>
-          <p:spPr>
-            <a:xfrm>
-              <a:off x="4391733" y="1120756"/>
-              <a:ext cx="417684" cy="428229"/>
-            </a:xfrm>
-            <a:prstGeom prst="trapezoid">
-              <a:avLst/>
-            </a:prstGeom>
-          </p:spPr>
-          <p:style>
-            <a:lnRef idx="2">
-              <a:schemeClr val="dk1"/>
-            </a:lnRef>
-            <a:fillRef idx="1">
-              <a:schemeClr val="lt1"/>
-            </a:fillRef>
-            <a:effectRef idx="0">
-              <a:schemeClr val="dk1"/>
-            </a:effectRef>
-            <a:fontRef idx="minor">
-              <a:schemeClr val="dk1"/>
-            </a:fontRef>
-          </p:style>
-          <p:txBody>
-            <a:bodyPr rtlCol="0" anchor="ctr"/>
-            <a:lstStyle/>
-            <a:p>
-              <a:pPr algn="ctr"/>
-              <a:endParaRPr lang="en-US"/>
-            </a:p>
-          </p:txBody>
-        </p:sp>
-        <p:grpSp>
-          <p:nvGrpSpPr>
-            <p:cNvPr id="325" name="Group 324">
-              <a:extLst>
-                <a:ext uri="{FF2B5EF4-FFF2-40B4-BE49-F238E27FC236}">
-                  <a16:creationId xmlns:a16="http://schemas.microsoft.com/office/drawing/2014/main" id="{5DF009FB-EF3B-77E6-2E7E-99F4B2FD04F4}"/>
-                </a:ext>
-              </a:extLst>
-            </p:cNvPr>
-            <p:cNvGrpSpPr/>
-            <p:nvPr/>
-          </p:nvGrpSpPr>
-          <p:grpSpPr>
-            <a:xfrm flipH="1">
-              <a:off x="4809417" y="1514012"/>
-              <a:ext cx="1562063" cy="1372483"/>
-              <a:chOff x="2841994" y="1514299"/>
-              <a:chExt cx="1562063" cy="1372483"/>
-            </a:xfrm>
-          </p:grpSpPr>
-          <p:sp>
-            <p:nvSpPr>
-              <p:cNvPr id="326" name="Rectangle 325">
-                <a:extLst>
-                  <a:ext uri="{FF2B5EF4-FFF2-40B4-BE49-F238E27FC236}">
-                    <a16:creationId xmlns:a16="http://schemas.microsoft.com/office/drawing/2014/main" id="{CE9A6C7A-7F94-4551-0B54-77AE8C822945}"/>
-                  </a:ext>
-                </a:extLst>
-              </p:cNvPr>
-              <p:cNvSpPr/>
-              <p:nvPr/>
-            </p:nvSpPr>
-            <p:spPr>
-              <a:xfrm>
-                <a:off x="3453258" y="1667895"/>
-                <a:ext cx="241300" cy="1016415"/>
-              </a:xfrm>
-              <a:prstGeom prst="rect">
-                <a:avLst/>
-              </a:prstGeom>
-            </p:spPr>
-            <p:style>
-              <a:lnRef idx="2">
-                <a:schemeClr val="dk1"/>
-              </a:lnRef>
-              <a:fillRef idx="1">
-                <a:schemeClr val="lt1"/>
-              </a:fillRef>
-              <a:effectRef idx="0">
-                <a:schemeClr val="dk1"/>
-              </a:effectRef>
-              <a:fontRef idx="minor">
-                <a:schemeClr val="dk1"/>
-              </a:fontRef>
-            </p:style>
-            <p:txBody>
-              <a:bodyPr rtlCol="0" anchor="ctr"/>
-              <a:lstStyle/>
-              <a:p>
-                <a:pPr algn="ctr"/>
-                <a:endParaRPr lang="en-US"/>
-              </a:p>
-            </p:txBody>
-          </p:sp>
-          <p:sp>
-            <p:nvSpPr>
-              <p:cNvPr id="327" name="Rectangle 326">
-                <a:extLst>
-                  <a:ext uri="{FF2B5EF4-FFF2-40B4-BE49-F238E27FC236}">
-                    <a16:creationId xmlns:a16="http://schemas.microsoft.com/office/drawing/2014/main" id="{7461F050-8672-4098-9A68-50D6750708BB}"/>
-                  </a:ext>
-                </a:extLst>
-              </p:cNvPr>
-              <p:cNvSpPr/>
-              <p:nvPr/>
-            </p:nvSpPr>
-            <p:spPr>
-              <a:xfrm>
-                <a:off x="3879279" y="1514299"/>
-                <a:ext cx="241300" cy="1016415"/>
-              </a:xfrm>
-              <a:prstGeom prst="rect">
-                <a:avLst/>
-              </a:prstGeom>
-            </p:spPr>
-            <p:style>
-              <a:lnRef idx="2">
-                <a:schemeClr val="dk1"/>
-              </a:lnRef>
-              <a:fillRef idx="1">
-                <a:schemeClr val="lt1"/>
-              </a:fillRef>
-              <a:effectRef idx="0">
-                <a:schemeClr val="dk1"/>
-              </a:effectRef>
-              <a:fontRef idx="minor">
-                <a:schemeClr val="dk1"/>
-              </a:fontRef>
-            </p:style>
-            <p:txBody>
-              <a:bodyPr rtlCol="0" anchor="ctr"/>
-              <a:lstStyle/>
-              <a:p>
-                <a:pPr algn="ctr"/>
-                <a:endParaRPr lang="en-US"/>
-              </a:p>
-            </p:txBody>
-          </p:sp>
-          <p:sp>
-            <p:nvSpPr>
-              <p:cNvPr id="328" name="Trapezoid 327">
-                <a:extLst>
-                  <a:ext uri="{FF2B5EF4-FFF2-40B4-BE49-F238E27FC236}">
-                    <a16:creationId xmlns:a16="http://schemas.microsoft.com/office/drawing/2014/main" id="{BB5AB281-6ACA-E753-6DB4-32918352C272}"/>
-                  </a:ext>
-                </a:extLst>
-              </p:cNvPr>
-              <p:cNvSpPr/>
-              <p:nvPr/>
-            </p:nvSpPr>
-            <p:spPr>
-              <a:xfrm rot="15639411">
-                <a:off x="3588611" y="1898339"/>
-                <a:ext cx="806450" cy="824442"/>
-              </a:xfrm>
-              <a:prstGeom prst="trapezoid">
-                <a:avLst>
-                  <a:gd name="adj" fmla="val 15303"/>
-                </a:avLst>
-              </a:prstGeom>
-            </p:spPr>
-            <p:style>
-              <a:lnRef idx="2">
-                <a:schemeClr val="dk1">
-                  <a:shade val="50000"/>
-                </a:schemeClr>
-              </a:lnRef>
-              <a:fillRef idx="1">
-                <a:schemeClr val="dk1"/>
-              </a:fillRef>
-              <a:effectRef idx="0">
-                <a:schemeClr val="dk1"/>
-              </a:effectRef>
-              <a:fontRef idx="minor">
-                <a:schemeClr val="lt1"/>
-              </a:fontRef>
-            </p:style>
-            <p:txBody>
-              <a:bodyPr rtlCol="0" anchor="ctr"/>
-              <a:lstStyle/>
-              <a:p>
-                <a:pPr algn="ctr"/>
-                <a:endParaRPr lang="en-US"/>
-              </a:p>
-            </p:txBody>
-          </p:sp>
-          <p:sp>
-            <p:nvSpPr>
-              <p:cNvPr id="329" name="Isosceles Triangle 328">
-                <a:extLst>
-                  <a:ext uri="{FF2B5EF4-FFF2-40B4-BE49-F238E27FC236}">
-                    <a16:creationId xmlns:a16="http://schemas.microsoft.com/office/drawing/2014/main" id="{7D7AC445-6078-CB06-53BE-27E528AABA29}"/>
-                  </a:ext>
-                </a:extLst>
-              </p:cNvPr>
-              <p:cNvSpPr/>
-              <p:nvPr/>
-            </p:nvSpPr>
-            <p:spPr>
-              <a:xfrm rot="14248003">
-                <a:off x="2851235" y="2409712"/>
-                <a:ext cx="388815" cy="407297"/>
-              </a:xfrm>
-              <a:prstGeom prst="triangle">
-                <a:avLst/>
-              </a:prstGeom>
-            </p:spPr>
-            <p:style>
-              <a:lnRef idx="2">
-                <a:schemeClr val="dk1">
-                  <a:shade val="50000"/>
-                </a:schemeClr>
-              </a:lnRef>
-              <a:fillRef idx="1">
-                <a:schemeClr val="dk1"/>
-              </a:fillRef>
-              <a:effectRef idx="0">
-                <a:schemeClr val="dk1"/>
-              </a:effectRef>
-              <a:fontRef idx="minor">
-                <a:schemeClr val="lt1"/>
-              </a:fontRef>
-            </p:style>
-            <p:txBody>
-              <a:bodyPr rtlCol="0" anchor="ctr"/>
-              <a:lstStyle/>
-              <a:p>
-                <a:pPr algn="ctr"/>
-                <a:endParaRPr lang="en-US"/>
-              </a:p>
-            </p:txBody>
-          </p:sp>
-          <p:sp>
-            <p:nvSpPr>
-              <p:cNvPr id="330" name="Oval 329">
-                <a:extLst>
-                  <a:ext uri="{FF2B5EF4-FFF2-40B4-BE49-F238E27FC236}">
-                    <a16:creationId xmlns:a16="http://schemas.microsoft.com/office/drawing/2014/main" id="{9C876087-7DB7-C733-8899-D07F6D9A07C1}"/>
-                  </a:ext>
-                </a:extLst>
-              </p:cNvPr>
-              <p:cNvSpPr/>
-              <p:nvPr/>
-            </p:nvSpPr>
-            <p:spPr>
-              <a:xfrm>
-                <a:off x="3087822" y="1907372"/>
-                <a:ext cx="979410" cy="979410"/>
-              </a:xfrm>
-              <a:prstGeom prst="ellipse">
-                <a:avLst/>
-              </a:prstGeom>
-              <a:ln w="19050"/>
-            </p:spPr>
-            <p:style>
-              <a:lnRef idx="2">
-                <a:schemeClr val="dk1"/>
-              </a:lnRef>
-              <a:fillRef idx="1">
-                <a:schemeClr val="lt1"/>
-              </a:fillRef>
-              <a:effectRef idx="0">
-                <a:schemeClr val="dk1"/>
-              </a:effectRef>
-              <a:fontRef idx="minor">
-                <a:schemeClr val="dk1"/>
-              </a:fontRef>
-            </p:style>
-            <p:txBody>
-              <a:bodyPr rtlCol="0" anchor="ctr"/>
-              <a:lstStyle/>
-              <a:p>
-                <a:pPr algn="ctr"/>
-                <a:endParaRPr lang="en-US"/>
-              </a:p>
-            </p:txBody>
-          </p:sp>
-        </p:grpSp>
-      </p:grpSp>
-      <p:grpSp>
-        <p:nvGrpSpPr>
           <p:cNvPr id="313" name="Group 312">
             <a:extLst>
               <a:ext uri="{FF2B5EF4-FFF2-40B4-BE49-F238E27FC236}">
@@ -15975,6 +15148,180 @@
             </a:effectRef>
             <a:fontRef idx="minor">
               <a:schemeClr val="lt1"/>
+            </a:fontRef>
+          </p:style>
+          <p:txBody>
+            <a:bodyPr rtlCol="0" anchor="ctr"/>
+            <a:lstStyle/>
+            <a:p>
+              <a:pPr algn="ctr"/>
+              <a:endParaRPr lang="en-US"/>
+            </a:p>
+          </p:txBody>
+        </p:sp>
+      </p:grpSp>
+      <p:pic>
+        <p:nvPicPr>
+          <p:cNvPr id="382" name="Picture 2" descr="Apache helicopter | Stock vector | Colourbox">
+            <a:extLst>
+              <a:ext uri="{FF2B5EF4-FFF2-40B4-BE49-F238E27FC236}">
+                <a16:creationId xmlns:a16="http://schemas.microsoft.com/office/drawing/2014/main" id="{C2DF8D61-4337-5458-818A-2158BC02D8EA}"/>
+              </a:ext>
+            </a:extLst>
+          </p:cNvPr>
+          <p:cNvPicPr>
+            <a:picLocks noChangeAspect="1" noChangeArrowheads="1"/>
+          </p:cNvPicPr>
+          <p:nvPr/>
+        </p:nvPicPr>
+        <p:blipFill>
+          <a:blip r:embed="rId7">
+            <a:extLst>
+              <a:ext uri="{28A0092B-C50C-407E-A947-70E740481C1C}">
+                <a14:useLocalDpi xmlns:a14="http://schemas.microsoft.com/office/drawing/2010/main" val="0"/>
+              </a:ext>
+            </a:extLst>
+          </a:blip>
+          <a:srcRect/>
+          <a:stretch>
+            <a:fillRect/>
+          </a:stretch>
+        </p:blipFill>
+        <p:spPr bwMode="auto">
+          <a:xfrm rot="858473">
+            <a:off x="3845270" y="4089744"/>
+            <a:ext cx="841728" cy="655496"/>
+          </a:xfrm>
+          <a:prstGeom prst="rect">
+            <a:avLst/>
+          </a:prstGeom>
+          <a:noFill/>
+          <a:extLst>
+            <a:ext uri="{909E8E84-426E-40DD-AFC4-6F175D3DCCD1}">
+              <a14:hiddenFill xmlns:a14="http://schemas.microsoft.com/office/drawing/2010/main">
+                <a:solidFill>
+                  <a:srgbClr val="FFFFFF"/>
+                </a:solidFill>
+              </a14:hiddenFill>
+            </a:ext>
+          </a:extLst>
+        </p:spPr>
+      </p:pic>
+      <p:grpSp>
+        <p:nvGrpSpPr>
+          <p:cNvPr id="383" name="Group 382">
+            <a:extLst>
+              <a:ext uri="{FF2B5EF4-FFF2-40B4-BE49-F238E27FC236}">
+                <a16:creationId xmlns:a16="http://schemas.microsoft.com/office/drawing/2014/main" id="{D44689B5-EC73-57FD-5184-0121E6688C9F}"/>
+              </a:ext>
+            </a:extLst>
+          </p:cNvPr>
+          <p:cNvGrpSpPr/>
+          <p:nvPr/>
+        </p:nvGrpSpPr>
+        <p:grpSpPr>
+          <a:xfrm>
+            <a:off x="3580335" y="3896688"/>
+            <a:ext cx="1371600" cy="1371600"/>
+            <a:chOff x="1298501" y="962272"/>
+            <a:chExt cx="1371600" cy="1371600"/>
+          </a:xfrm>
+        </p:grpSpPr>
+        <p:sp>
+          <p:nvSpPr>
+            <p:cNvPr id="384" name="Rectangle 383">
+              <a:extLst>
+                <a:ext uri="{FF2B5EF4-FFF2-40B4-BE49-F238E27FC236}">
+                  <a16:creationId xmlns:a16="http://schemas.microsoft.com/office/drawing/2014/main" id="{FE3BBA60-C1E2-A7A2-757B-CE332EF2F26D}"/>
+                </a:ext>
+              </a:extLst>
+            </p:cNvPr>
+            <p:cNvSpPr/>
+            <p:nvPr/>
+          </p:nvSpPr>
+          <p:spPr>
+            <a:xfrm>
+              <a:off x="1298501" y="962272"/>
+              <a:ext cx="1371600" cy="1371600"/>
+            </a:xfrm>
+            <a:prstGeom prst="rect">
+              <a:avLst/>
+            </a:prstGeom>
+            <a:noFill/>
+            <a:ln w="76200">
+              <a:solidFill>
+                <a:schemeClr val="tx1"/>
+              </a:solidFill>
+            </a:ln>
+          </p:spPr>
+          <p:style>
+            <a:lnRef idx="2">
+              <a:schemeClr val="accent1">
+                <a:shade val="50000"/>
+              </a:schemeClr>
+            </a:lnRef>
+            <a:fillRef idx="1">
+              <a:schemeClr val="accent1"/>
+            </a:fillRef>
+            <a:effectRef idx="0">
+              <a:schemeClr val="accent1"/>
+            </a:effectRef>
+            <a:fontRef idx="minor">
+              <a:schemeClr val="lt1"/>
+            </a:fontRef>
+          </p:style>
+          <p:txBody>
+            <a:bodyPr rtlCol="0" anchor="ctr"/>
+            <a:lstStyle/>
+            <a:p>
+              <a:pPr algn="ctr"/>
+              <a:endParaRPr lang="en-US"/>
+            </a:p>
+          </p:txBody>
+        </p:sp>
+        <p:sp>
+          <p:nvSpPr>
+            <p:cNvPr id="385" name="Arrow: Pentagon 384">
+              <a:extLst>
+                <a:ext uri="{FF2B5EF4-FFF2-40B4-BE49-F238E27FC236}">
+                  <a16:creationId xmlns:a16="http://schemas.microsoft.com/office/drawing/2014/main" id="{404C6780-37D4-CE10-0EFA-6FB3A3A5D7EE}"/>
+                </a:ext>
+              </a:extLst>
+            </p:cNvPr>
+            <p:cNvSpPr/>
+            <p:nvPr/>
+          </p:nvSpPr>
+          <p:spPr>
+            <a:xfrm rot="5400000">
+              <a:off x="1435661" y="1173775"/>
+              <a:ext cx="1097280" cy="1097280"/>
+            </a:xfrm>
+            <a:prstGeom prst="homePlate">
+              <a:avLst/>
+            </a:prstGeom>
+            <a:noFill/>
+            <a:ln w="38100" cap="flat" cmpd="sng" algn="ctr">
+              <a:solidFill>
+                <a:schemeClr val="dk1"/>
+              </a:solidFill>
+              <a:prstDash val="solid"/>
+              <a:round/>
+              <a:headEnd type="none" w="med" len="med"/>
+              <a:tailEnd type="none" w="med" len="med"/>
+            </a:ln>
+          </p:spPr>
+          <p:style>
+            <a:lnRef idx="0">
+              <a:scrgbClr r="0" g="0" b="0"/>
+            </a:lnRef>
+            <a:fillRef idx="0">
+              <a:scrgbClr r="0" g="0" b="0"/>
+            </a:fillRef>
+            <a:effectRef idx="0">
+              <a:scrgbClr r="0" g="0" b="0"/>
+            </a:effectRef>
+            <a:fontRef idx="minor">
+              <a:schemeClr val="dk1"/>
             </a:fontRef>
           </p:style>
           <p:txBody>
@@ -32376,6 +31723,53 @@
       </p:grpSpPr>
       <p:pic>
         <p:nvPicPr>
+          <p:cNvPr id="1026" name="Picture 2" descr="Apache helicopter | Stock vector | Colourbox">
+            <a:extLst>
+              <a:ext uri="{FF2B5EF4-FFF2-40B4-BE49-F238E27FC236}">
+                <a16:creationId xmlns:a16="http://schemas.microsoft.com/office/drawing/2014/main" id="{BD2C1E31-2083-6A06-13B2-5C29A223DB60}"/>
+              </a:ext>
+            </a:extLst>
+          </p:cNvPr>
+          <p:cNvPicPr>
+            <a:picLocks noChangeAspect="1" noChangeArrowheads="1"/>
+          </p:cNvPicPr>
+          <p:nvPr/>
+        </p:nvPicPr>
+        <p:blipFill>
+          <a:blip r:embed="rId2">
+            <a:extLst>
+              <a:ext uri="{28A0092B-C50C-407E-A947-70E740481C1C}">
+                <a14:useLocalDpi xmlns:a14="http://schemas.microsoft.com/office/drawing/2010/main" val="0"/>
+              </a:ext>
+            </a:extLst>
+          </a:blip>
+          <a:srcRect/>
+          <a:stretch>
+            <a:fillRect/>
+          </a:stretch>
+        </p:blipFill>
+        <p:spPr bwMode="auto">
+          <a:xfrm rot="858473">
+            <a:off x="4765990" y="756281"/>
+            <a:ext cx="841728" cy="655496"/>
+          </a:xfrm>
+          <a:prstGeom prst="rect">
+            <a:avLst/>
+          </a:prstGeom>
+          <a:noFill/>
+          <a:extLst>
+            <a:ext uri="{909E8E84-426E-40DD-AFC4-6F175D3DCCD1}">
+              <a14:hiddenFill xmlns:a14="http://schemas.microsoft.com/office/drawing/2010/main">
+                <a:solidFill>
+                  <a:srgbClr val="FFFFFF"/>
+                </a:solidFill>
+              </a14:hiddenFill>
+            </a:ext>
+          </a:extLst>
+        </p:spPr>
+      </p:pic>
+      <p:pic>
+        <p:nvPicPr>
           <p:cNvPr id="60" name="Picture 2" descr="Mantis Silhouette Design Stock Vector (Royalty Free) 696869110 |  Shutterstock">
             <a:extLst>
               <a:ext uri="{FF2B5EF4-FFF2-40B4-BE49-F238E27FC236}">
@@ -32389,7 +31783,7 @@
           <p:nvPr/>
         </p:nvPicPr>
         <p:blipFill rotWithShape="1">
-          <a:blip r:embed="rId2">
+          <a:blip r:embed="rId3">
             <a:extLst>
               <a:ext uri="{28A0092B-C50C-407E-A947-70E740481C1C}">
                 <a14:useLocalDpi xmlns:a14="http://schemas.microsoft.com/office/drawing/2010/main" val="0"/>
@@ -32434,7 +31828,7 @@
           <p:nvPr/>
         </p:nvPicPr>
         <p:blipFill rotWithShape="1">
-          <a:blip r:embed="rId2">
+          <a:blip r:embed="rId3">
             <a:extLst>
               <a:ext uri="{28A0092B-C50C-407E-A947-70E740481C1C}">
                 <a14:useLocalDpi xmlns:a14="http://schemas.microsoft.com/office/drawing/2010/main" val="0"/>
@@ -32934,7 +32328,7 @@
             <p:nvPr/>
           </p:nvPicPr>
           <p:blipFill rotWithShape="1">
-            <a:blip r:embed="rId2">
+            <a:blip r:embed="rId3">
               <a:extLst>
                 <a:ext uri="{28A0092B-C50C-407E-A947-70E740481C1C}">
                   <a14:useLocalDpi xmlns:a14="http://schemas.microsoft.com/office/drawing/2010/main" val="0"/>
@@ -33295,6 +32689,133 @@
             </p:txBody>
           </p:sp>
         </p:grpSp>
+      </p:grpSp>
+      <p:grpSp>
+        <p:nvGrpSpPr>
+          <p:cNvPr id="24" name="Group 23">
+            <a:extLst>
+              <a:ext uri="{FF2B5EF4-FFF2-40B4-BE49-F238E27FC236}">
+                <a16:creationId xmlns:a16="http://schemas.microsoft.com/office/drawing/2014/main" id="{C6535718-ED7C-8F2D-D975-8C3231CCBB84}"/>
+              </a:ext>
+            </a:extLst>
+          </p:cNvPr>
+          <p:cNvGrpSpPr/>
+          <p:nvPr/>
+        </p:nvGrpSpPr>
+        <p:grpSpPr>
+          <a:xfrm>
+            <a:off x="4501055" y="563225"/>
+            <a:ext cx="1371600" cy="1371600"/>
+            <a:chOff x="1298501" y="962272"/>
+            <a:chExt cx="1371600" cy="1371600"/>
+          </a:xfrm>
+        </p:grpSpPr>
+        <p:sp>
+          <p:nvSpPr>
+            <p:cNvPr id="25" name="Rectangle 24">
+              <a:extLst>
+                <a:ext uri="{FF2B5EF4-FFF2-40B4-BE49-F238E27FC236}">
+                  <a16:creationId xmlns:a16="http://schemas.microsoft.com/office/drawing/2014/main" id="{81B6D15A-D3E6-2C30-C75B-9FDA374FEA83}"/>
+                </a:ext>
+              </a:extLst>
+            </p:cNvPr>
+            <p:cNvSpPr/>
+            <p:nvPr/>
+          </p:nvSpPr>
+          <p:spPr>
+            <a:xfrm>
+              <a:off x="1298501" y="962272"/>
+              <a:ext cx="1371600" cy="1371600"/>
+            </a:xfrm>
+            <a:prstGeom prst="rect">
+              <a:avLst/>
+            </a:prstGeom>
+            <a:noFill/>
+            <a:ln w="76200">
+              <a:solidFill>
+                <a:schemeClr val="tx1"/>
+              </a:solidFill>
+            </a:ln>
+          </p:spPr>
+          <p:style>
+            <a:lnRef idx="2">
+              <a:schemeClr val="accent1">
+                <a:shade val="50000"/>
+              </a:schemeClr>
+            </a:lnRef>
+            <a:fillRef idx="1">
+              <a:schemeClr val="accent1"/>
+            </a:fillRef>
+            <a:effectRef idx="0">
+              <a:schemeClr val="accent1"/>
+            </a:effectRef>
+            <a:fontRef idx="minor">
+              <a:schemeClr val="lt1"/>
+            </a:fontRef>
+          </p:style>
+          <p:txBody>
+            <a:bodyPr rtlCol="0" anchor="ctr"/>
+            <a:lstStyle/>
+            <a:p>
+              <a:pPr algn="ctr"/>
+              <a:endParaRPr lang="en-US"/>
+            </a:p>
+          </p:txBody>
+        </p:sp>
+        <p:sp>
+          <p:nvSpPr>
+            <p:cNvPr id="26" name="Arrow: Pentagon 25">
+              <a:extLst>
+                <a:ext uri="{FF2B5EF4-FFF2-40B4-BE49-F238E27FC236}">
+                  <a16:creationId xmlns:a16="http://schemas.microsoft.com/office/drawing/2014/main" id="{62B76B23-3C28-9CE4-3EA8-5EB675CD4D76}"/>
+                </a:ext>
+              </a:extLst>
+            </p:cNvPr>
+            <p:cNvSpPr/>
+            <p:nvPr/>
+          </p:nvSpPr>
+          <p:spPr>
+            <a:xfrm rot="5400000">
+              <a:off x="1435661" y="1173775"/>
+              <a:ext cx="1097280" cy="1097280"/>
+            </a:xfrm>
+            <a:prstGeom prst="homePlate">
+              <a:avLst/>
+            </a:prstGeom>
+            <a:noFill/>
+            <a:ln w="38100" cap="flat" cmpd="sng" algn="ctr">
+              <a:solidFill>
+                <a:schemeClr val="dk1"/>
+              </a:solidFill>
+              <a:prstDash val="solid"/>
+              <a:round/>
+              <a:headEnd type="none" w="med" len="med"/>
+              <a:tailEnd type="none" w="med" len="med"/>
+            </a:ln>
+          </p:spPr>
+          <p:style>
+            <a:lnRef idx="0">
+              <a:scrgbClr r="0" g="0" b="0"/>
+            </a:lnRef>
+            <a:fillRef idx="0">
+              <a:scrgbClr r="0" g="0" b="0"/>
+            </a:fillRef>
+            <a:effectRef idx="0">
+              <a:scrgbClr r="0" g="0" b="0"/>
+            </a:effectRef>
+            <a:fontRef idx="minor">
+              <a:schemeClr val="dk1"/>
+            </a:fontRef>
+          </p:style>
+          <p:txBody>
+            <a:bodyPr rtlCol="0" anchor="ctr"/>
+            <a:lstStyle/>
+            <a:p>
+              <a:pPr algn="ctr"/>
+              <a:endParaRPr lang="en-US"/>
+            </a:p>
+          </p:txBody>
+        </p:sp>
       </p:grpSp>
     </p:spTree>
     <p:extLst>

--- a/image process/drawings sifi.pptx
+++ b/image process/drawings sifi.pptx
@@ -200,7 +200,7 @@
           <a:p>
             <a:fld id="{7700C406-2328-4788-AE79-437B6607AD22}" type="datetimeFigureOut">
               <a:rPr lang="en-US" smtClean="0"/>
-              <a:t>6/23/2022</a:t>
+              <a:t>6/24/2022</a:t>
             </a:fld>
             <a:endParaRPr lang="en-US"/>
           </a:p>
@@ -614,7 +614,7 @@
           <a:p>
             <a:fld id="{9EC8CD53-0620-48F2-A3BB-2B10BDA60E52}" type="datetimeFigureOut">
               <a:rPr lang="en-US" smtClean="0"/>
-              <a:t>6/23/2022</a:t>
+              <a:t>6/24/2022</a:t>
             </a:fld>
             <a:endParaRPr lang="en-US"/>
           </a:p>
@@ -812,7 +812,7 @@
           <a:p>
             <a:fld id="{9EC8CD53-0620-48F2-A3BB-2B10BDA60E52}" type="datetimeFigureOut">
               <a:rPr lang="en-US" smtClean="0"/>
-              <a:t>6/23/2022</a:t>
+              <a:t>6/24/2022</a:t>
             </a:fld>
             <a:endParaRPr lang="en-US"/>
           </a:p>
@@ -1020,7 +1020,7 @@
           <a:p>
             <a:fld id="{9EC8CD53-0620-48F2-A3BB-2B10BDA60E52}" type="datetimeFigureOut">
               <a:rPr lang="en-US" smtClean="0"/>
-              <a:t>6/23/2022</a:t>
+              <a:t>6/24/2022</a:t>
             </a:fld>
             <a:endParaRPr lang="en-US"/>
           </a:p>
@@ -1218,7 +1218,7 @@
           <a:p>
             <a:fld id="{9EC8CD53-0620-48F2-A3BB-2B10BDA60E52}" type="datetimeFigureOut">
               <a:rPr lang="en-US" smtClean="0"/>
-              <a:t>6/23/2022</a:t>
+              <a:t>6/24/2022</a:t>
             </a:fld>
             <a:endParaRPr lang="en-US"/>
           </a:p>
@@ -1493,7 +1493,7 @@
           <a:p>
             <a:fld id="{9EC8CD53-0620-48F2-A3BB-2B10BDA60E52}" type="datetimeFigureOut">
               <a:rPr lang="en-US" smtClean="0"/>
-              <a:t>6/23/2022</a:t>
+              <a:t>6/24/2022</a:t>
             </a:fld>
             <a:endParaRPr lang="en-US"/>
           </a:p>
@@ -1758,7 +1758,7 @@
           <a:p>
             <a:fld id="{9EC8CD53-0620-48F2-A3BB-2B10BDA60E52}" type="datetimeFigureOut">
               <a:rPr lang="en-US" smtClean="0"/>
-              <a:t>6/23/2022</a:t>
+              <a:t>6/24/2022</a:t>
             </a:fld>
             <a:endParaRPr lang="en-US"/>
           </a:p>
@@ -2170,7 +2170,7 @@
           <a:p>
             <a:fld id="{9EC8CD53-0620-48F2-A3BB-2B10BDA60E52}" type="datetimeFigureOut">
               <a:rPr lang="en-US" smtClean="0"/>
-              <a:t>6/23/2022</a:t>
+              <a:t>6/24/2022</a:t>
             </a:fld>
             <a:endParaRPr lang="en-US"/>
           </a:p>
@@ -2311,7 +2311,7 @@
           <a:p>
             <a:fld id="{9EC8CD53-0620-48F2-A3BB-2B10BDA60E52}" type="datetimeFigureOut">
               <a:rPr lang="en-US" smtClean="0"/>
-              <a:t>6/23/2022</a:t>
+              <a:t>6/24/2022</a:t>
             </a:fld>
             <a:endParaRPr lang="en-US"/>
           </a:p>
@@ -2424,7 +2424,7 @@
           <a:p>
             <a:fld id="{9EC8CD53-0620-48F2-A3BB-2B10BDA60E52}" type="datetimeFigureOut">
               <a:rPr lang="en-US" smtClean="0"/>
-              <a:t>6/23/2022</a:t>
+              <a:t>6/24/2022</a:t>
             </a:fld>
             <a:endParaRPr lang="en-US"/>
           </a:p>
@@ -2735,7 +2735,7 @@
           <a:p>
             <a:fld id="{9EC8CD53-0620-48F2-A3BB-2B10BDA60E52}" type="datetimeFigureOut">
               <a:rPr lang="en-US" smtClean="0"/>
-              <a:t>6/23/2022</a:t>
+              <a:t>6/24/2022</a:t>
             </a:fld>
             <a:endParaRPr lang="en-US"/>
           </a:p>
@@ -3023,7 +3023,7 @@
           <a:p>
             <a:fld id="{9EC8CD53-0620-48F2-A3BB-2B10BDA60E52}" type="datetimeFigureOut">
               <a:rPr lang="en-US" smtClean="0"/>
-              <a:t>6/23/2022</a:t>
+              <a:t>6/24/2022</a:t>
             </a:fld>
             <a:endParaRPr lang="en-US"/>
           </a:p>
@@ -3264,7 +3264,7 @@
           <a:p>
             <a:fld id="{9EC8CD53-0620-48F2-A3BB-2B10BDA60E52}" type="datetimeFigureOut">
               <a:rPr lang="en-US" smtClean="0"/>
-              <a:t>6/23/2022</a:t>
+              <a:t>6/24/2022</a:t>
             </a:fld>
             <a:endParaRPr lang="en-US"/>
           </a:p>
@@ -15322,6 +15322,898 @@
             </a:effectRef>
             <a:fontRef idx="minor">
               <a:schemeClr val="dk1"/>
+            </a:fontRef>
+          </p:style>
+          <p:txBody>
+            <a:bodyPr rtlCol="0" anchor="ctr"/>
+            <a:lstStyle/>
+            <a:p>
+              <a:pPr algn="ctr"/>
+              <a:endParaRPr lang="en-US"/>
+            </a:p>
+          </p:txBody>
+        </p:sp>
+      </p:grpSp>
+      <p:grpSp>
+        <p:nvGrpSpPr>
+          <p:cNvPr id="316" name="Group 315">
+            <a:extLst>
+              <a:ext uri="{FF2B5EF4-FFF2-40B4-BE49-F238E27FC236}">
+                <a16:creationId xmlns:a16="http://schemas.microsoft.com/office/drawing/2014/main" id="{491F2577-AD47-4569-1CB0-0750C1ED753C}"/>
+              </a:ext>
+            </a:extLst>
+          </p:cNvPr>
+          <p:cNvGrpSpPr/>
+          <p:nvPr/>
+        </p:nvGrpSpPr>
+        <p:grpSpPr>
+          <a:xfrm>
+            <a:off x="9848672" y="3920973"/>
+            <a:ext cx="1371600" cy="1371600"/>
+            <a:chOff x="1298501" y="962272"/>
+            <a:chExt cx="1371600" cy="1371600"/>
+          </a:xfrm>
+        </p:grpSpPr>
+        <p:sp>
+          <p:nvSpPr>
+            <p:cNvPr id="317" name="Rectangle 316">
+              <a:extLst>
+                <a:ext uri="{FF2B5EF4-FFF2-40B4-BE49-F238E27FC236}">
+                  <a16:creationId xmlns:a16="http://schemas.microsoft.com/office/drawing/2014/main" id="{89313972-B372-D0B0-3898-236C39B634DB}"/>
+                </a:ext>
+              </a:extLst>
+            </p:cNvPr>
+            <p:cNvSpPr/>
+            <p:nvPr/>
+          </p:nvSpPr>
+          <p:spPr>
+            <a:xfrm>
+              <a:off x="1298501" y="962272"/>
+              <a:ext cx="1371600" cy="1371600"/>
+            </a:xfrm>
+            <a:prstGeom prst="rect">
+              <a:avLst/>
+            </a:prstGeom>
+            <a:noFill/>
+            <a:ln w="76200">
+              <a:solidFill>
+                <a:schemeClr val="tx1"/>
+              </a:solidFill>
+            </a:ln>
+          </p:spPr>
+          <p:style>
+            <a:lnRef idx="2">
+              <a:schemeClr val="accent1">
+                <a:shade val="50000"/>
+              </a:schemeClr>
+            </a:lnRef>
+            <a:fillRef idx="1">
+              <a:schemeClr val="accent1"/>
+            </a:fillRef>
+            <a:effectRef idx="0">
+              <a:schemeClr val="accent1"/>
+            </a:effectRef>
+            <a:fontRef idx="minor">
+              <a:schemeClr val="lt1"/>
+            </a:fontRef>
+          </p:style>
+          <p:txBody>
+            <a:bodyPr rtlCol="0" anchor="ctr"/>
+            <a:lstStyle/>
+            <a:p>
+              <a:pPr algn="ctr"/>
+              <a:endParaRPr lang="en-US"/>
+            </a:p>
+          </p:txBody>
+        </p:sp>
+        <p:sp>
+          <p:nvSpPr>
+            <p:cNvPr id="318" name="Arrow: Pentagon 317">
+              <a:extLst>
+                <a:ext uri="{FF2B5EF4-FFF2-40B4-BE49-F238E27FC236}">
+                  <a16:creationId xmlns:a16="http://schemas.microsoft.com/office/drawing/2014/main" id="{49C357D9-C51C-0920-B521-F89F36CC0B75}"/>
+                </a:ext>
+              </a:extLst>
+            </p:cNvPr>
+            <p:cNvSpPr/>
+            <p:nvPr/>
+          </p:nvSpPr>
+          <p:spPr>
+            <a:xfrm rot="5400000">
+              <a:off x="1435661" y="1173775"/>
+              <a:ext cx="1097280" cy="1097280"/>
+            </a:xfrm>
+            <a:prstGeom prst="homePlate">
+              <a:avLst/>
+            </a:prstGeom>
+            <a:noFill/>
+            <a:ln w="38100" cap="flat" cmpd="sng" algn="ctr">
+              <a:solidFill>
+                <a:schemeClr val="dk1"/>
+              </a:solidFill>
+              <a:prstDash val="solid"/>
+              <a:round/>
+              <a:headEnd type="none" w="med" len="med"/>
+              <a:tailEnd type="none" w="med" len="med"/>
+            </a:ln>
+          </p:spPr>
+          <p:style>
+            <a:lnRef idx="0">
+              <a:scrgbClr r="0" g="0" b="0"/>
+            </a:lnRef>
+            <a:fillRef idx="0">
+              <a:scrgbClr r="0" g="0" b="0"/>
+            </a:fillRef>
+            <a:effectRef idx="0">
+              <a:scrgbClr r="0" g="0" b="0"/>
+            </a:effectRef>
+            <a:fontRef idx="minor">
+              <a:schemeClr val="dk1"/>
+            </a:fontRef>
+          </p:style>
+          <p:txBody>
+            <a:bodyPr rtlCol="0" anchor="ctr"/>
+            <a:lstStyle/>
+            <a:p>
+              <a:pPr algn="ctr"/>
+              <a:endParaRPr lang="en-US"/>
+            </a:p>
+          </p:txBody>
+        </p:sp>
+      </p:grpSp>
+      <p:grpSp>
+        <p:nvGrpSpPr>
+          <p:cNvPr id="319" name="Group 318">
+            <a:extLst>
+              <a:ext uri="{FF2B5EF4-FFF2-40B4-BE49-F238E27FC236}">
+                <a16:creationId xmlns:a16="http://schemas.microsoft.com/office/drawing/2014/main" id="{583C3484-BDC8-9917-0B23-A6F096E2A2D3}"/>
+              </a:ext>
+            </a:extLst>
+          </p:cNvPr>
+          <p:cNvGrpSpPr/>
+          <p:nvPr/>
+        </p:nvGrpSpPr>
+        <p:grpSpPr>
+          <a:xfrm>
+            <a:off x="10264276" y="4190631"/>
+            <a:ext cx="540391" cy="669728"/>
+            <a:chOff x="6777984" y="514985"/>
+            <a:chExt cx="1202128" cy="1489844"/>
+          </a:xfrm>
+        </p:grpSpPr>
+        <p:grpSp>
+          <p:nvGrpSpPr>
+            <p:cNvPr id="320" name="Group 319">
+              <a:extLst>
+                <a:ext uri="{FF2B5EF4-FFF2-40B4-BE49-F238E27FC236}">
+                  <a16:creationId xmlns:a16="http://schemas.microsoft.com/office/drawing/2014/main" id="{E55AA671-DF88-A5BC-BB87-905168C23527}"/>
+                </a:ext>
+              </a:extLst>
+            </p:cNvPr>
+            <p:cNvGrpSpPr/>
+            <p:nvPr/>
+          </p:nvGrpSpPr>
+          <p:grpSpPr>
+            <a:xfrm>
+              <a:off x="6777984" y="854588"/>
+              <a:ext cx="549917" cy="1150241"/>
+              <a:chOff x="6777984" y="854588"/>
+              <a:chExt cx="549917" cy="1150241"/>
+            </a:xfrm>
+          </p:grpSpPr>
+          <p:sp>
+            <p:nvSpPr>
+              <p:cNvPr id="328" name="Rectangle 327">
+                <a:extLst>
+                  <a:ext uri="{FF2B5EF4-FFF2-40B4-BE49-F238E27FC236}">
+                    <a16:creationId xmlns:a16="http://schemas.microsoft.com/office/drawing/2014/main" id="{3A21DD62-C45C-AA49-6F41-77F243AA6AFB}"/>
+                  </a:ext>
+                </a:extLst>
+              </p:cNvPr>
+              <p:cNvSpPr/>
+              <p:nvPr/>
+            </p:nvSpPr>
+            <p:spPr>
+              <a:xfrm>
+                <a:off x="7016751" y="854588"/>
+                <a:ext cx="311150" cy="397612"/>
+              </a:xfrm>
+              <a:prstGeom prst="rect">
+                <a:avLst/>
+              </a:prstGeom>
+            </p:spPr>
+            <p:style>
+              <a:lnRef idx="2">
+                <a:schemeClr val="dk1">
+                  <a:shade val="50000"/>
+                </a:schemeClr>
+              </a:lnRef>
+              <a:fillRef idx="1">
+                <a:schemeClr val="dk1"/>
+              </a:fillRef>
+              <a:effectRef idx="0">
+                <a:schemeClr val="dk1"/>
+              </a:effectRef>
+              <a:fontRef idx="minor">
+                <a:schemeClr val="lt1"/>
+              </a:fontRef>
+            </p:style>
+            <p:txBody>
+              <a:bodyPr rtlCol="0" anchor="ctr"/>
+              <a:lstStyle/>
+              <a:p>
+                <a:pPr algn="ctr"/>
+                <a:endParaRPr lang="en-US"/>
+              </a:p>
+            </p:txBody>
+          </p:sp>
+          <p:sp>
+            <p:nvSpPr>
+              <p:cNvPr id="329" name="Rectangle 328">
+                <a:extLst>
+                  <a:ext uri="{FF2B5EF4-FFF2-40B4-BE49-F238E27FC236}">
+                    <a16:creationId xmlns:a16="http://schemas.microsoft.com/office/drawing/2014/main" id="{8EF70432-B038-194D-6BDE-6742C077D16C}"/>
+                  </a:ext>
+                </a:extLst>
+              </p:cNvPr>
+              <p:cNvSpPr/>
+              <p:nvPr/>
+            </p:nvSpPr>
+            <p:spPr>
+              <a:xfrm rot="17844562">
+                <a:off x="6420802" y="1380936"/>
+                <a:ext cx="981075" cy="266711"/>
+              </a:xfrm>
+              <a:prstGeom prst="rect">
+                <a:avLst/>
+              </a:prstGeom>
+            </p:spPr>
+            <p:style>
+              <a:lnRef idx="2">
+                <a:schemeClr val="dk1">
+                  <a:shade val="50000"/>
+                </a:schemeClr>
+              </a:lnRef>
+              <a:fillRef idx="1">
+                <a:schemeClr val="dk1"/>
+              </a:fillRef>
+              <a:effectRef idx="0">
+                <a:schemeClr val="dk1"/>
+              </a:effectRef>
+              <a:fontRef idx="minor">
+                <a:schemeClr val="lt1"/>
+              </a:fontRef>
+            </p:style>
+            <p:txBody>
+              <a:bodyPr rtlCol="0" anchor="ctr"/>
+              <a:lstStyle/>
+              <a:p>
+                <a:pPr algn="ctr"/>
+                <a:endParaRPr lang="en-US"/>
+              </a:p>
+            </p:txBody>
+          </p:sp>
+        </p:grpSp>
+        <p:grpSp>
+          <p:nvGrpSpPr>
+            <p:cNvPr id="321" name="Group 320">
+              <a:extLst>
+                <a:ext uri="{FF2B5EF4-FFF2-40B4-BE49-F238E27FC236}">
+                  <a16:creationId xmlns:a16="http://schemas.microsoft.com/office/drawing/2014/main" id="{8381F0D4-5258-B90A-A14A-022CF127EB72}"/>
+                </a:ext>
+              </a:extLst>
+            </p:cNvPr>
+            <p:cNvGrpSpPr/>
+            <p:nvPr/>
+          </p:nvGrpSpPr>
+          <p:grpSpPr>
+            <a:xfrm flipH="1">
+              <a:off x="7430195" y="854560"/>
+              <a:ext cx="549917" cy="1150241"/>
+              <a:chOff x="6777984" y="854588"/>
+              <a:chExt cx="549917" cy="1150241"/>
+            </a:xfrm>
+          </p:grpSpPr>
+          <p:sp>
+            <p:nvSpPr>
+              <p:cNvPr id="326" name="Rectangle 325">
+                <a:extLst>
+                  <a:ext uri="{FF2B5EF4-FFF2-40B4-BE49-F238E27FC236}">
+                    <a16:creationId xmlns:a16="http://schemas.microsoft.com/office/drawing/2014/main" id="{1C07E380-B710-7A3E-F041-A9DE49CBB2D6}"/>
+                  </a:ext>
+                </a:extLst>
+              </p:cNvPr>
+              <p:cNvSpPr/>
+              <p:nvPr/>
+            </p:nvSpPr>
+            <p:spPr>
+              <a:xfrm>
+                <a:off x="7016751" y="854588"/>
+                <a:ext cx="311150" cy="397612"/>
+              </a:xfrm>
+              <a:prstGeom prst="rect">
+                <a:avLst/>
+              </a:prstGeom>
+            </p:spPr>
+            <p:style>
+              <a:lnRef idx="2">
+                <a:schemeClr val="dk1">
+                  <a:shade val="50000"/>
+                </a:schemeClr>
+              </a:lnRef>
+              <a:fillRef idx="1">
+                <a:schemeClr val="dk1"/>
+              </a:fillRef>
+              <a:effectRef idx="0">
+                <a:schemeClr val="dk1"/>
+              </a:effectRef>
+              <a:fontRef idx="minor">
+                <a:schemeClr val="lt1"/>
+              </a:fontRef>
+            </p:style>
+            <p:txBody>
+              <a:bodyPr rtlCol="0" anchor="ctr"/>
+              <a:lstStyle/>
+              <a:p>
+                <a:pPr algn="ctr"/>
+                <a:endParaRPr lang="en-US"/>
+              </a:p>
+            </p:txBody>
+          </p:sp>
+          <p:sp>
+            <p:nvSpPr>
+              <p:cNvPr id="327" name="Rectangle 326">
+                <a:extLst>
+                  <a:ext uri="{FF2B5EF4-FFF2-40B4-BE49-F238E27FC236}">
+                    <a16:creationId xmlns:a16="http://schemas.microsoft.com/office/drawing/2014/main" id="{CFE6250E-2C1C-AB14-1442-E4149E55D309}"/>
+                  </a:ext>
+                </a:extLst>
+              </p:cNvPr>
+              <p:cNvSpPr/>
+              <p:nvPr/>
+            </p:nvSpPr>
+            <p:spPr>
+              <a:xfrm rot="17844562">
+                <a:off x="6420802" y="1380936"/>
+                <a:ext cx="981075" cy="266711"/>
+              </a:xfrm>
+              <a:prstGeom prst="rect">
+                <a:avLst/>
+              </a:prstGeom>
+            </p:spPr>
+            <p:style>
+              <a:lnRef idx="2">
+                <a:schemeClr val="dk1">
+                  <a:shade val="50000"/>
+                </a:schemeClr>
+              </a:lnRef>
+              <a:fillRef idx="1">
+                <a:schemeClr val="dk1"/>
+              </a:fillRef>
+              <a:effectRef idx="0">
+                <a:schemeClr val="dk1"/>
+              </a:effectRef>
+              <a:fontRef idx="minor">
+                <a:schemeClr val="lt1"/>
+              </a:fontRef>
+            </p:style>
+            <p:txBody>
+              <a:bodyPr rtlCol="0" anchor="ctr"/>
+              <a:lstStyle/>
+              <a:p>
+                <a:pPr algn="ctr"/>
+                <a:endParaRPr lang="en-US"/>
+              </a:p>
+            </p:txBody>
+          </p:sp>
+        </p:grpSp>
+        <p:sp>
+          <p:nvSpPr>
+            <p:cNvPr id="322" name="Isosceles Triangle 321">
+              <a:extLst>
+                <a:ext uri="{FF2B5EF4-FFF2-40B4-BE49-F238E27FC236}">
+                  <a16:creationId xmlns:a16="http://schemas.microsoft.com/office/drawing/2014/main" id="{64FE6637-2A38-9D56-3207-52AF919D4379}"/>
+                </a:ext>
+              </a:extLst>
+            </p:cNvPr>
+            <p:cNvSpPr/>
+            <p:nvPr/>
+          </p:nvSpPr>
+          <p:spPr>
+            <a:xfrm rot="10800000">
+              <a:off x="7230836" y="1323368"/>
+              <a:ext cx="311150" cy="475008"/>
+            </a:xfrm>
+            <a:prstGeom prst="triangle">
+              <a:avLst/>
+            </a:prstGeom>
+          </p:spPr>
+          <p:style>
+            <a:lnRef idx="2">
+              <a:schemeClr val="dk1">
+                <a:shade val="50000"/>
+              </a:schemeClr>
+            </a:lnRef>
+            <a:fillRef idx="1">
+              <a:schemeClr val="dk1"/>
+            </a:fillRef>
+            <a:effectRef idx="0">
+              <a:schemeClr val="dk1"/>
+            </a:effectRef>
+            <a:fontRef idx="minor">
+              <a:schemeClr val="lt1"/>
+            </a:fontRef>
+          </p:style>
+          <p:txBody>
+            <a:bodyPr rtlCol="0" anchor="ctr"/>
+            <a:lstStyle/>
+            <a:p>
+              <a:pPr algn="ctr"/>
+              <a:endParaRPr lang="en-US"/>
+            </a:p>
+          </p:txBody>
+        </p:sp>
+        <p:sp>
+          <p:nvSpPr>
+            <p:cNvPr id="323" name="Isosceles Triangle 322">
+              <a:extLst>
+                <a:ext uri="{FF2B5EF4-FFF2-40B4-BE49-F238E27FC236}">
+                  <a16:creationId xmlns:a16="http://schemas.microsoft.com/office/drawing/2014/main" id="{B29885BB-A514-6FF4-BA8D-BDA060EF79F7}"/>
+                </a:ext>
+              </a:extLst>
+            </p:cNvPr>
+            <p:cNvSpPr/>
+            <p:nvPr/>
+          </p:nvSpPr>
+          <p:spPr>
+            <a:xfrm rot="10800000" flipV="1">
+              <a:off x="7230836" y="519223"/>
+              <a:ext cx="311150" cy="308389"/>
+            </a:xfrm>
+            <a:prstGeom prst="triangle">
+              <a:avLst/>
+            </a:prstGeom>
+          </p:spPr>
+          <p:style>
+            <a:lnRef idx="2">
+              <a:schemeClr val="dk1">
+                <a:shade val="50000"/>
+              </a:schemeClr>
+            </a:lnRef>
+            <a:fillRef idx="1">
+              <a:schemeClr val="dk1"/>
+            </a:fillRef>
+            <a:effectRef idx="0">
+              <a:schemeClr val="dk1"/>
+            </a:effectRef>
+            <a:fontRef idx="minor">
+              <a:schemeClr val="lt1"/>
+            </a:fontRef>
+          </p:style>
+          <p:txBody>
+            <a:bodyPr rtlCol="0" anchor="ctr"/>
+            <a:lstStyle/>
+            <a:p>
+              <a:pPr algn="ctr"/>
+              <a:endParaRPr lang="en-US"/>
+            </a:p>
+          </p:txBody>
+        </p:sp>
+        <p:sp>
+          <p:nvSpPr>
+            <p:cNvPr id="324" name="Rectangle 323">
+              <a:extLst>
+                <a:ext uri="{FF2B5EF4-FFF2-40B4-BE49-F238E27FC236}">
+                  <a16:creationId xmlns:a16="http://schemas.microsoft.com/office/drawing/2014/main" id="{1A781208-3106-8061-DB9D-734C09C93372}"/>
+                </a:ext>
+              </a:extLst>
+            </p:cNvPr>
+            <p:cNvSpPr/>
+            <p:nvPr/>
+          </p:nvSpPr>
+          <p:spPr>
+            <a:xfrm>
+              <a:off x="7132638" y="521980"/>
+              <a:ext cx="79375" cy="332580"/>
+            </a:xfrm>
+            <a:prstGeom prst="rect">
+              <a:avLst/>
+            </a:prstGeom>
+          </p:spPr>
+          <p:style>
+            <a:lnRef idx="2">
+              <a:schemeClr val="dk1">
+                <a:shade val="50000"/>
+              </a:schemeClr>
+            </a:lnRef>
+            <a:fillRef idx="1">
+              <a:schemeClr val="dk1"/>
+            </a:fillRef>
+            <a:effectRef idx="0">
+              <a:schemeClr val="dk1"/>
+            </a:effectRef>
+            <a:fontRef idx="minor">
+              <a:schemeClr val="lt1"/>
+            </a:fontRef>
+          </p:style>
+          <p:txBody>
+            <a:bodyPr rtlCol="0" anchor="ctr"/>
+            <a:lstStyle/>
+            <a:p>
+              <a:pPr algn="ctr"/>
+              <a:endParaRPr lang="en-US"/>
+            </a:p>
+          </p:txBody>
+        </p:sp>
+        <p:sp>
+          <p:nvSpPr>
+            <p:cNvPr id="325" name="Rectangle 324">
+              <a:extLst>
+                <a:ext uri="{FF2B5EF4-FFF2-40B4-BE49-F238E27FC236}">
+                  <a16:creationId xmlns:a16="http://schemas.microsoft.com/office/drawing/2014/main" id="{355E6BD9-47ED-3481-70BD-017EA912891D}"/>
+                </a:ext>
+              </a:extLst>
+            </p:cNvPr>
+            <p:cNvSpPr/>
+            <p:nvPr/>
+          </p:nvSpPr>
+          <p:spPr>
+            <a:xfrm>
+              <a:off x="7557634" y="514985"/>
+              <a:ext cx="79375" cy="332580"/>
+            </a:xfrm>
+            <a:prstGeom prst="rect">
+              <a:avLst/>
+            </a:prstGeom>
+          </p:spPr>
+          <p:style>
+            <a:lnRef idx="2">
+              <a:schemeClr val="dk1">
+                <a:shade val="50000"/>
+              </a:schemeClr>
+            </a:lnRef>
+            <a:fillRef idx="1">
+              <a:schemeClr val="dk1"/>
+            </a:fillRef>
+            <a:effectRef idx="0">
+              <a:schemeClr val="dk1"/>
+            </a:effectRef>
+            <a:fontRef idx="minor">
+              <a:schemeClr val="lt1"/>
+            </a:fontRef>
+          </p:style>
+          <p:txBody>
+            <a:bodyPr rtlCol="0" anchor="ctr"/>
+            <a:lstStyle/>
+            <a:p>
+              <a:pPr algn="ctr"/>
+              <a:endParaRPr lang="en-US"/>
+            </a:p>
+          </p:txBody>
+        </p:sp>
+      </p:grpSp>
+      <p:grpSp>
+        <p:nvGrpSpPr>
+          <p:cNvPr id="330" name="Group 329">
+            <a:extLst>
+              <a:ext uri="{FF2B5EF4-FFF2-40B4-BE49-F238E27FC236}">
+                <a16:creationId xmlns:a16="http://schemas.microsoft.com/office/drawing/2014/main" id="{0F1B9379-C470-53AA-916A-9CF2E4E820C3}"/>
+              </a:ext>
+            </a:extLst>
+          </p:cNvPr>
+          <p:cNvGrpSpPr/>
+          <p:nvPr/>
+        </p:nvGrpSpPr>
+        <p:grpSpPr>
+          <a:xfrm>
+            <a:off x="9859211" y="5410391"/>
+            <a:ext cx="1371600" cy="1371600"/>
+            <a:chOff x="1298501" y="962272"/>
+            <a:chExt cx="1371600" cy="1371600"/>
+          </a:xfrm>
+        </p:grpSpPr>
+        <p:sp>
+          <p:nvSpPr>
+            <p:cNvPr id="331" name="Rectangle 330">
+              <a:extLst>
+                <a:ext uri="{FF2B5EF4-FFF2-40B4-BE49-F238E27FC236}">
+                  <a16:creationId xmlns:a16="http://schemas.microsoft.com/office/drawing/2014/main" id="{E99587E4-2291-7716-1F1D-0E340DF32E39}"/>
+                </a:ext>
+              </a:extLst>
+            </p:cNvPr>
+            <p:cNvSpPr/>
+            <p:nvPr/>
+          </p:nvSpPr>
+          <p:spPr>
+            <a:xfrm>
+              <a:off x="1298501" y="962272"/>
+              <a:ext cx="1371600" cy="1371600"/>
+            </a:xfrm>
+            <a:prstGeom prst="rect">
+              <a:avLst/>
+            </a:prstGeom>
+            <a:noFill/>
+            <a:ln w="76200">
+              <a:solidFill>
+                <a:schemeClr val="tx1"/>
+              </a:solidFill>
+            </a:ln>
+          </p:spPr>
+          <p:style>
+            <a:lnRef idx="2">
+              <a:schemeClr val="accent1">
+                <a:shade val="50000"/>
+              </a:schemeClr>
+            </a:lnRef>
+            <a:fillRef idx="1">
+              <a:schemeClr val="accent1"/>
+            </a:fillRef>
+            <a:effectRef idx="0">
+              <a:schemeClr val="accent1"/>
+            </a:effectRef>
+            <a:fontRef idx="minor">
+              <a:schemeClr val="lt1"/>
+            </a:fontRef>
+          </p:style>
+          <p:txBody>
+            <a:bodyPr rtlCol="0" anchor="ctr"/>
+            <a:lstStyle/>
+            <a:p>
+              <a:pPr algn="ctr"/>
+              <a:endParaRPr lang="en-US"/>
+            </a:p>
+          </p:txBody>
+        </p:sp>
+        <p:sp>
+          <p:nvSpPr>
+            <p:cNvPr id="332" name="Arrow: Pentagon 331">
+              <a:extLst>
+                <a:ext uri="{FF2B5EF4-FFF2-40B4-BE49-F238E27FC236}">
+                  <a16:creationId xmlns:a16="http://schemas.microsoft.com/office/drawing/2014/main" id="{45CE9206-4D70-8428-74F5-EC8DE8884C41}"/>
+                </a:ext>
+              </a:extLst>
+            </p:cNvPr>
+            <p:cNvSpPr/>
+            <p:nvPr/>
+          </p:nvSpPr>
+          <p:spPr>
+            <a:xfrm rot="5400000">
+              <a:off x="1435661" y="1173775"/>
+              <a:ext cx="1097280" cy="1097280"/>
+            </a:xfrm>
+            <a:prstGeom prst="homePlate">
+              <a:avLst/>
+            </a:prstGeom>
+            <a:noFill/>
+            <a:ln w="38100" cap="flat" cmpd="sng" algn="ctr">
+              <a:solidFill>
+                <a:schemeClr val="dk1"/>
+              </a:solidFill>
+              <a:prstDash val="solid"/>
+              <a:round/>
+              <a:headEnd type="none" w="med" len="med"/>
+              <a:tailEnd type="none" w="med" len="med"/>
+            </a:ln>
+          </p:spPr>
+          <p:style>
+            <a:lnRef idx="0">
+              <a:scrgbClr r="0" g="0" b="0"/>
+            </a:lnRef>
+            <a:fillRef idx="0">
+              <a:scrgbClr r="0" g="0" b="0"/>
+            </a:fillRef>
+            <a:effectRef idx="0">
+              <a:scrgbClr r="0" g="0" b="0"/>
+            </a:effectRef>
+            <a:fontRef idx="minor">
+              <a:schemeClr val="dk1"/>
+            </a:fontRef>
+          </p:style>
+          <p:txBody>
+            <a:bodyPr rtlCol="0" anchor="ctr"/>
+            <a:lstStyle/>
+            <a:p>
+              <a:pPr algn="ctr"/>
+              <a:endParaRPr lang="en-US"/>
+            </a:p>
+          </p:txBody>
+        </p:sp>
+      </p:grpSp>
+      <p:grpSp>
+        <p:nvGrpSpPr>
+          <p:cNvPr id="333" name="Group 332">
+            <a:extLst>
+              <a:ext uri="{FF2B5EF4-FFF2-40B4-BE49-F238E27FC236}">
+                <a16:creationId xmlns:a16="http://schemas.microsoft.com/office/drawing/2014/main" id="{71E26074-9E13-611A-4F41-0C13E6DE8538}"/>
+              </a:ext>
+            </a:extLst>
+          </p:cNvPr>
+          <p:cNvGrpSpPr/>
+          <p:nvPr/>
+        </p:nvGrpSpPr>
+        <p:grpSpPr>
+          <a:xfrm>
+            <a:off x="10156523" y="5902400"/>
+            <a:ext cx="655875" cy="365799"/>
+            <a:chOff x="5515272" y="2726651"/>
+            <a:chExt cx="1361777" cy="759499"/>
+          </a:xfrm>
+        </p:grpSpPr>
+        <p:sp>
+          <p:nvSpPr>
+            <p:cNvPr id="334" name="Moon 333">
+              <a:extLst>
+                <a:ext uri="{FF2B5EF4-FFF2-40B4-BE49-F238E27FC236}">
+                  <a16:creationId xmlns:a16="http://schemas.microsoft.com/office/drawing/2014/main" id="{9784E0C5-2F05-2321-5B48-8B9F9CAD394A}"/>
+                </a:ext>
+              </a:extLst>
+            </p:cNvPr>
+            <p:cNvSpPr/>
+            <p:nvPr/>
+          </p:nvSpPr>
+          <p:spPr>
+            <a:xfrm rot="5400000">
+              <a:off x="6082581" y="2457830"/>
+              <a:ext cx="525648" cy="1063289"/>
+            </a:xfrm>
+            <a:prstGeom prst="moon">
+              <a:avLst>
+                <a:gd name="adj" fmla="val 87500"/>
+              </a:avLst>
+            </a:prstGeom>
+          </p:spPr>
+          <p:style>
+            <a:lnRef idx="2">
+              <a:schemeClr val="dk1">
+                <a:shade val="50000"/>
+              </a:schemeClr>
+            </a:lnRef>
+            <a:fillRef idx="1">
+              <a:schemeClr val="dk1"/>
+            </a:fillRef>
+            <a:effectRef idx="0">
+              <a:schemeClr val="dk1"/>
+            </a:effectRef>
+            <a:fontRef idx="minor">
+              <a:schemeClr val="lt1"/>
+            </a:fontRef>
+          </p:style>
+          <p:txBody>
+            <a:bodyPr rtlCol="0" anchor="ctr"/>
+            <a:lstStyle/>
+            <a:p>
+              <a:pPr algn="ctr"/>
+              <a:endParaRPr lang="en-US"/>
+            </a:p>
+          </p:txBody>
+        </p:sp>
+        <p:sp>
+          <p:nvSpPr>
+            <p:cNvPr id="335" name="Rectangle 334">
+              <a:extLst>
+                <a:ext uri="{FF2B5EF4-FFF2-40B4-BE49-F238E27FC236}">
+                  <a16:creationId xmlns:a16="http://schemas.microsoft.com/office/drawing/2014/main" id="{8F95E97F-D2DE-87A6-150A-290E3F364446}"/>
+                </a:ext>
+              </a:extLst>
+            </p:cNvPr>
+            <p:cNvSpPr/>
+            <p:nvPr/>
+          </p:nvSpPr>
+          <p:spPr>
+            <a:xfrm>
+              <a:off x="5930900" y="3321050"/>
+              <a:ext cx="831850" cy="165100"/>
+            </a:xfrm>
+            <a:prstGeom prst="rect">
+              <a:avLst/>
+            </a:prstGeom>
+          </p:spPr>
+          <p:style>
+            <a:lnRef idx="2">
+              <a:schemeClr val="dk1">
+                <a:shade val="50000"/>
+              </a:schemeClr>
+            </a:lnRef>
+            <a:fillRef idx="1">
+              <a:schemeClr val="dk1"/>
+            </a:fillRef>
+            <a:effectRef idx="0">
+              <a:schemeClr val="dk1"/>
+            </a:effectRef>
+            <a:fontRef idx="minor">
+              <a:schemeClr val="lt1"/>
+            </a:fontRef>
+          </p:style>
+          <p:txBody>
+            <a:bodyPr rtlCol="0" anchor="ctr"/>
+            <a:lstStyle/>
+            <a:p>
+              <a:pPr algn="ctr"/>
+              <a:endParaRPr lang="en-US"/>
+            </a:p>
+          </p:txBody>
+        </p:sp>
+        <p:sp>
+          <p:nvSpPr>
+            <p:cNvPr id="386" name="Rectangle 385">
+              <a:extLst>
+                <a:ext uri="{FF2B5EF4-FFF2-40B4-BE49-F238E27FC236}">
+                  <a16:creationId xmlns:a16="http://schemas.microsoft.com/office/drawing/2014/main" id="{70E12D10-F389-431A-EC98-75CE3D6B3907}"/>
+                </a:ext>
+              </a:extLst>
+            </p:cNvPr>
+            <p:cNvSpPr/>
+            <p:nvPr/>
+          </p:nvSpPr>
+          <p:spPr>
+            <a:xfrm>
+              <a:off x="6266030" y="3155950"/>
+              <a:ext cx="158750" cy="165100"/>
+            </a:xfrm>
+            <a:prstGeom prst="rect">
+              <a:avLst/>
+            </a:prstGeom>
+          </p:spPr>
+          <p:style>
+            <a:lnRef idx="2">
+              <a:schemeClr val="dk1">
+                <a:shade val="50000"/>
+              </a:schemeClr>
+            </a:lnRef>
+            <a:fillRef idx="1">
+              <a:schemeClr val="dk1"/>
+            </a:fillRef>
+            <a:effectRef idx="0">
+              <a:schemeClr val="dk1"/>
+            </a:effectRef>
+            <a:fontRef idx="minor">
+              <a:schemeClr val="lt1"/>
+            </a:fontRef>
+          </p:style>
+          <p:txBody>
+            <a:bodyPr rtlCol="0" anchor="ctr"/>
+            <a:lstStyle/>
+            <a:p>
+              <a:pPr algn="ctr"/>
+              <a:endParaRPr lang="en-US"/>
+            </a:p>
+          </p:txBody>
+        </p:sp>
+        <p:sp>
+          <p:nvSpPr>
+            <p:cNvPr id="387" name="Rectangle 386">
+              <a:extLst>
+                <a:ext uri="{FF2B5EF4-FFF2-40B4-BE49-F238E27FC236}">
+                  <a16:creationId xmlns:a16="http://schemas.microsoft.com/office/drawing/2014/main" id="{B956C7E4-AF6F-112F-F26E-870E4ECC0D67}"/>
+                </a:ext>
+              </a:extLst>
+            </p:cNvPr>
+            <p:cNvSpPr/>
+            <p:nvPr/>
+          </p:nvSpPr>
+          <p:spPr>
+            <a:xfrm rot="569356">
+              <a:off x="5515272" y="2809088"/>
+              <a:ext cx="622353" cy="165100"/>
+            </a:xfrm>
+            <a:prstGeom prst="rect">
+              <a:avLst/>
+            </a:prstGeom>
+          </p:spPr>
+          <p:style>
+            <a:lnRef idx="2">
+              <a:schemeClr val="dk1">
+                <a:shade val="50000"/>
+              </a:schemeClr>
+            </a:lnRef>
+            <a:fillRef idx="1">
+              <a:schemeClr val="dk1"/>
+            </a:fillRef>
+            <a:effectRef idx="0">
+              <a:schemeClr val="dk1"/>
+            </a:effectRef>
+            <a:fontRef idx="minor">
+              <a:schemeClr val="lt1"/>
             </a:fontRef>
           </p:style>
           <p:txBody>
@@ -31723,53 +32615,6 @@
       </p:grpSpPr>
       <p:pic>
         <p:nvPicPr>
-          <p:cNvPr id="1026" name="Picture 2" descr="Apache helicopter | Stock vector | Colourbox">
-            <a:extLst>
-              <a:ext uri="{FF2B5EF4-FFF2-40B4-BE49-F238E27FC236}">
-                <a16:creationId xmlns:a16="http://schemas.microsoft.com/office/drawing/2014/main" id="{BD2C1E31-2083-6A06-13B2-5C29A223DB60}"/>
-              </a:ext>
-            </a:extLst>
-          </p:cNvPr>
-          <p:cNvPicPr>
-            <a:picLocks noChangeAspect="1" noChangeArrowheads="1"/>
-          </p:cNvPicPr>
-          <p:nvPr/>
-        </p:nvPicPr>
-        <p:blipFill>
-          <a:blip r:embed="rId2">
-            <a:extLst>
-              <a:ext uri="{28A0092B-C50C-407E-A947-70E740481C1C}">
-                <a14:useLocalDpi xmlns:a14="http://schemas.microsoft.com/office/drawing/2010/main" val="0"/>
-              </a:ext>
-            </a:extLst>
-          </a:blip>
-          <a:srcRect/>
-          <a:stretch>
-            <a:fillRect/>
-          </a:stretch>
-        </p:blipFill>
-        <p:spPr bwMode="auto">
-          <a:xfrm rot="858473">
-            <a:off x="4765990" y="756281"/>
-            <a:ext cx="841728" cy="655496"/>
-          </a:xfrm>
-          <a:prstGeom prst="rect">
-            <a:avLst/>
-          </a:prstGeom>
-          <a:noFill/>
-          <a:extLst>
-            <a:ext uri="{909E8E84-426E-40DD-AFC4-6F175D3DCCD1}">
-              <a14:hiddenFill xmlns:a14="http://schemas.microsoft.com/office/drawing/2010/main">
-                <a:solidFill>
-                  <a:srgbClr val="FFFFFF"/>
-                </a:solidFill>
-              </a14:hiddenFill>
-            </a:ext>
-          </a:extLst>
-        </p:spPr>
-      </p:pic>
-      <p:pic>
-        <p:nvPicPr>
           <p:cNvPr id="60" name="Picture 2" descr="Mantis Silhouette Design Stock Vector (Royalty Free) 696869110 |  Shutterstock">
             <a:extLst>
               <a:ext uri="{FF2B5EF4-FFF2-40B4-BE49-F238E27FC236}">
@@ -31783,7 +32628,7 @@
           <p:nvPr/>
         </p:nvPicPr>
         <p:blipFill rotWithShape="1">
-          <a:blip r:embed="rId3">
+          <a:blip r:embed="rId2">
             <a:extLst>
               <a:ext uri="{28A0092B-C50C-407E-A947-70E740481C1C}">
                 <a14:useLocalDpi xmlns:a14="http://schemas.microsoft.com/office/drawing/2010/main" val="0"/>
@@ -31828,7 +32673,7 @@
           <p:nvPr/>
         </p:nvPicPr>
         <p:blipFill rotWithShape="1">
-          <a:blip r:embed="rId3">
+          <a:blip r:embed="rId2">
             <a:extLst>
               <a:ext uri="{28A0092B-C50C-407E-A947-70E740481C1C}">
                 <a14:useLocalDpi xmlns:a14="http://schemas.microsoft.com/office/drawing/2010/main" val="0"/>
@@ -32328,7 +33173,7 @@
             <p:nvPr/>
           </p:nvPicPr>
           <p:blipFill rotWithShape="1">
-            <a:blip r:embed="rId3">
+            <a:blip r:embed="rId2">
               <a:extLst>
                 <a:ext uri="{28A0092B-C50C-407E-A947-70E740481C1C}">
                   <a14:useLocalDpi xmlns:a14="http://schemas.microsoft.com/office/drawing/2010/main" val="0"/>
@@ -32805,6 +33650,771 @@
             </a:effectRef>
             <a:fontRef idx="minor">
               <a:schemeClr val="dk1"/>
+            </a:fontRef>
+          </p:style>
+          <p:txBody>
+            <a:bodyPr rtlCol="0" anchor="ctr"/>
+            <a:lstStyle/>
+            <a:p>
+              <a:pPr algn="ctr"/>
+              <a:endParaRPr lang="en-US"/>
+            </a:p>
+          </p:txBody>
+        </p:sp>
+      </p:grpSp>
+      <p:grpSp>
+        <p:nvGrpSpPr>
+          <p:cNvPr id="7" name="Group 6">
+            <a:extLst>
+              <a:ext uri="{FF2B5EF4-FFF2-40B4-BE49-F238E27FC236}">
+                <a16:creationId xmlns:a16="http://schemas.microsoft.com/office/drawing/2014/main" id="{8EEF1C40-1B7D-94FA-B3E3-94B28D44E455}"/>
+              </a:ext>
+            </a:extLst>
+          </p:cNvPr>
+          <p:cNvGrpSpPr/>
+          <p:nvPr/>
+        </p:nvGrpSpPr>
+        <p:grpSpPr>
+          <a:xfrm>
+            <a:off x="4916659" y="832883"/>
+            <a:ext cx="540391" cy="669728"/>
+            <a:chOff x="6777984" y="514985"/>
+            <a:chExt cx="1202128" cy="1489844"/>
+          </a:xfrm>
+        </p:grpSpPr>
+        <p:grpSp>
+          <p:nvGrpSpPr>
+            <p:cNvPr id="3" name="Group 2">
+              <a:extLst>
+                <a:ext uri="{FF2B5EF4-FFF2-40B4-BE49-F238E27FC236}">
+                  <a16:creationId xmlns:a16="http://schemas.microsoft.com/office/drawing/2014/main" id="{C12D53AB-A653-57D1-449A-6E7A0666BA83}"/>
+                </a:ext>
+              </a:extLst>
+            </p:cNvPr>
+            <p:cNvGrpSpPr/>
+            <p:nvPr/>
+          </p:nvGrpSpPr>
+          <p:grpSpPr>
+            <a:xfrm>
+              <a:off x="6777984" y="854588"/>
+              <a:ext cx="549917" cy="1150241"/>
+              <a:chOff x="6777984" y="854588"/>
+              <a:chExt cx="549917" cy="1150241"/>
+            </a:xfrm>
+          </p:grpSpPr>
+          <p:sp>
+            <p:nvSpPr>
+              <p:cNvPr id="2" name="Rectangle 1">
+                <a:extLst>
+                  <a:ext uri="{FF2B5EF4-FFF2-40B4-BE49-F238E27FC236}">
+                    <a16:creationId xmlns:a16="http://schemas.microsoft.com/office/drawing/2014/main" id="{5747A2AE-F9EF-EB2F-D027-6480E63A760A}"/>
+                  </a:ext>
+                </a:extLst>
+              </p:cNvPr>
+              <p:cNvSpPr/>
+              <p:nvPr/>
+            </p:nvSpPr>
+            <p:spPr>
+              <a:xfrm>
+                <a:off x="7016751" y="854588"/>
+                <a:ext cx="311150" cy="397612"/>
+              </a:xfrm>
+              <a:prstGeom prst="rect">
+                <a:avLst/>
+              </a:prstGeom>
+            </p:spPr>
+            <p:style>
+              <a:lnRef idx="2">
+                <a:schemeClr val="dk1">
+                  <a:shade val="50000"/>
+                </a:schemeClr>
+              </a:lnRef>
+              <a:fillRef idx="1">
+                <a:schemeClr val="dk1"/>
+              </a:fillRef>
+              <a:effectRef idx="0">
+                <a:schemeClr val="dk1"/>
+              </a:effectRef>
+              <a:fontRef idx="minor">
+                <a:schemeClr val="lt1"/>
+              </a:fontRef>
+            </p:style>
+            <p:txBody>
+              <a:bodyPr rtlCol="0" anchor="ctr"/>
+              <a:lstStyle/>
+              <a:p>
+                <a:pPr algn="ctr"/>
+                <a:endParaRPr lang="en-US"/>
+              </a:p>
+            </p:txBody>
+          </p:sp>
+          <p:sp>
+            <p:nvSpPr>
+              <p:cNvPr id="29" name="Rectangle 28">
+                <a:extLst>
+                  <a:ext uri="{FF2B5EF4-FFF2-40B4-BE49-F238E27FC236}">
+                    <a16:creationId xmlns:a16="http://schemas.microsoft.com/office/drawing/2014/main" id="{DA8DE4B8-D9A8-CEB2-5B44-B724728DDE73}"/>
+                  </a:ext>
+                </a:extLst>
+              </p:cNvPr>
+              <p:cNvSpPr/>
+              <p:nvPr/>
+            </p:nvSpPr>
+            <p:spPr>
+              <a:xfrm rot="17844562">
+                <a:off x="6420802" y="1380936"/>
+                <a:ext cx="981075" cy="266711"/>
+              </a:xfrm>
+              <a:prstGeom prst="rect">
+                <a:avLst/>
+              </a:prstGeom>
+            </p:spPr>
+            <p:style>
+              <a:lnRef idx="2">
+                <a:schemeClr val="dk1">
+                  <a:shade val="50000"/>
+                </a:schemeClr>
+              </a:lnRef>
+              <a:fillRef idx="1">
+                <a:schemeClr val="dk1"/>
+              </a:fillRef>
+              <a:effectRef idx="0">
+                <a:schemeClr val="dk1"/>
+              </a:effectRef>
+              <a:fontRef idx="minor">
+                <a:schemeClr val="lt1"/>
+              </a:fontRef>
+            </p:style>
+            <p:txBody>
+              <a:bodyPr rtlCol="0" anchor="ctr"/>
+              <a:lstStyle/>
+              <a:p>
+                <a:pPr algn="ctr"/>
+                <a:endParaRPr lang="en-US"/>
+              </a:p>
+            </p:txBody>
+          </p:sp>
+        </p:grpSp>
+        <p:grpSp>
+          <p:nvGrpSpPr>
+            <p:cNvPr id="31" name="Group 30">
+              <a:extLst>
+                <a:ext uri="{FF2B5EF4-FFF2-40B4-BE49-F238E27FC236}">
+                  <a16:creationId xmlns:a16="http://schemas.microsoft.com/office/drawing/2014/main" id="{020519C3-F503-9607-A082-FA73E8C5EA9D}"/>
+                </a:ext>
+              </a:extLst>
+            </p:cNvPr>
+            <p:cNvGrpSpPr/>
+            <p:nvPr/>
+          </p:nvGrpSpPr>
+          <p:grpSpPr>
+            <a:xfrm flipH="1">
+              <a:off x="7430195" y="854560"/>
+              <a:ext cx="549917" cy="1150241"/>
+              <a:chOff x="6777984" y="854588"/>
+              <a:chExt cx="549917" cy="1150241"/>
+            </a:xfrm>
+          </p:grpSpPr>
+          <p:sp>
+            <p:nvSpPr>
+              <p:cNvPr id="32" name="Rectangle 31">
+                <a:extLst>
+                  <a:ext uri="{FF2B5EF4-FFF2-40B4-BE49-F238E27FC236}">
+                    <a16:creationId xmlns:a16="http://schemas.microsoft.com/office/drawing/2014/main" id="{322D5FF9-4220-5722-C319-403405B75EAC}"/>
+                  </a:ext>
+                </a:extLst>
+              </p:cNvPr>
+              <p:cNvSpPr/>
+              <p:nvPr/>
+            </p:nvSpPr>
+            <p:spPr>
+              <a:xfrm>
+                <a:off x="7016751" y="854588"/>
+                <a:ext cx="311150" cy="397612"/>
+              </a:xfrm>
+              <a:prstGeom prst="rect">
+                <a:avLst/>
+              </a:prstGeom>
+            </p:spPr>
+            <p:style>
+              <a:lnRef idx="2">
+                <a:schemeClr val="dk1">
+                  <a:shade val="50000"/>
+                </a:schemeClr>
+              </a:lnRef>
+              <a:fillRef idx="1">
+                <a:schemeClr val="dk1"/>
+              </a:fillRef>
+              <a:effectRef idx="0">
+                <a:schemeClr val="dk1"/>
+              </a:effectRef>
+              <a:fontRef idx="minor">
+                <a:schemeClr val="lt1"/>
+              </a:fontRef>
+            </p:style>
+            <p:txBody>
+              <a:bodyPr rtlCol="0" anchor="ctr"/>
+              <a:lstStyle/>
+              <a:p>
+                <a:pPr algn="ctr"/>
+                <a:endParaRPr lang="en-US"/>
+              </a:p>
+            </p:txBody>
+          </p:sp>
+          <p:sp>
+            <p:nvSpPr>
+              <p:cNvPr id="33" name="Rectangle 32">
+                <a:extLst>
+                  <a:ext uri="{FF2B5EF4-FFF2-40B4-BE49-F238E27FC236}">
+                    <a16:creationId xmlns:a16="http://schemas.microsoft.com/office/drawing/2014/main" id="{35AE754A-0E3D-0155-62F4-F8C1163984E8}"/>
+                  </a:ext>
+                </a:extLst>
+              </p:cNvPr>
+              <p:cNvSpPr/>
+              <p:nvPr/>
+            </p:nvSpPr>
+            <p:spPr>
+              <a:xfrm rot="17844562">
+                <a:off x="6420802" y="1380936"/>
+                <a:ext cx="981075" cy="266711"/>
+              </a:xfrm>
+              <a:prstGeom prst="rect">
+                <a:avLst/>
+              </a:prstGeom>
+            </p:spPr>
+            <p:style>
+              <a:lnRef idx="2">
+                <a:schemeClr val="dk1">
+                  <a:shade val="50000"/>
+                </a:schemeClr>
+              </a:lnRef>
+              <a:fillRef idx="1">
+                <a:schemeClr val="dk1"/>
+              </a:fillRef>
+              <a:effectRef idx="0">
+                <a:schemeClr val="dk1"/>
+              </a:effectRef>
+              <a:fontRef idx="minor">
+                <a:schemeClr val="lt1"/>
+              </a:fontRef>
+            </p:style>
+            <p:txBody>
+              <a:bodyPr rtlCol="0" anchor="ctr"/>
+              <a:lstStyle/>
+              <a:p>
+                <a:pPr algn="ctr"/>
+                <a:endParaRPr lang="en-US"/>
+              </a:p>
+            </p:txBody>
+          </p:sp>
+        </p:grpSp>
+        <p:sp>
+          <p:nvSpPr>
+            <p:cNvPr id="5" name="Isosceles Triangle 4">
+              <a:extLst>
+                <a:ext uri="{FF2B5EF4-FFF2-40B4-BE49-F238E27FC236}">
+                  <a16:creationId xmlns:a16="http://schemas.microsoft.com/office/drawing/2014/main" id="{3AA77E2D-05F1-FE7E-0F56-E00AE36B04FD}"/>
+                </a:ext>
+              </a:extLst>
+            </p:cNvPr>
+            <p:cNvSpPr/>
+            <p:nvPr/>
+          </p:nvSpPr>
+          <p:spPr>
+            <a:xfrm rot="10800000">
+              <a:off x="7230836" y="1323368"/>
+              <a:ext cx="311150" cy="475008"/>
+            </a:xfrm>
+            <a:prstGeom prst="triangle">
+              <a:avLst/>
+            </a:prstGeom>
+          </p:spPr>
+          <p:style>
+            <a:lnRef idx="2">
+              <a:schemeClr val="dk1">
+                <a:shade val="50000"/>
+              </a:schemeClr>
+            </a:lnRef>
+            <a:fillRef idx="1">
+              <a:schemeClr val="dk1"/>
+            </a:fillRef>
+            <a:effectRef idx="0">
+              <a:schemeClr val="dk1"/>
+            </a:effectRef>
+            <a:fontRef idx="minor">
+              <a:schemeClr val="lt1"/>
+            </a:fontRef>
+          </p:style>
+          <p:txBody>
+            <a:bodyPr rtlCol="0" anchor="ctr"/>
+            <a:lstStyle/>
+            <a:p>
+              <a:pPr algn="ctr"/>
+              <a:endParaRPr lang="en-US"/>
+            </a:p>
+          </p:txBody>
+        </p:sp>
+        <p:sp>
+          <p:nvSpPr>
+            <p:cNvPr id="35" name="Isosceles Triangle 34">
+              <a:extLst>
+                <a:ext uri="{FF2B5EF4-FFF2-40B4-BE49-F238E27FC236}">
+                  <a16:creationId xmlns:a16="http://schemas.microsoft.com/office/drawing/2014/main" id="{7D977B9A-EBF1-24EB-9776-B84F4D27CB3B}"/>
+                </a:ext>
+              </a:extLst>
+            </p:cNvPr>
+            <p:cNvSpPr/>
+            <p:nvPr/>
+          </p:nvSpPr>
+          <p:spPr>
+            <a:xfrm rot="10800000" flipV="1">
+              <a:off x="7230836" y="519223"/>
+              <a:ext cx="311150" cy="308389"/>
+            </a:xfrm>
+            <a:prstGeom prst="triangle">
+              <a:avLst/>
+            </a:prstGeom>
+          </p:spPr>
+          <p:style>
+            <a:lnRef idx="2">
+              <a:schemeClr val="dk1">
+                <a:shade val="50000"/>
+              </a:schemeClr>
+            </a:lnRef>
+            <a:fillRef idx="1">
+              <a:schemeClr val="dk1"/>
+            </a:fillRef>
+            <a:effectRef idx="0">
+              <a:schemeClr val="dk1"/>
+            </a:effectRef>
+            <a:fontRef idx="minor">
+              <a:schemeClr val="lt1"/>
+            </a:fontRef>
+          </p:style>
+          <p:txBody>
+            <a:bodyPr rtlCol="0" anchor="ctr"/>
+            <a:lstStyle/>
+            <a:p>
+              <a:pPr algn="ctr"/>
+              <a:endParaRPr lang="en-US"/>
+            </a:p>
+          </p:txBody>
+        </p:sp>
+        <p:sp>
+          <p:nvSpPr>
+            <p:cNvPr id="6" name="Rectangle 5">
+              <a:extLst>
+                <a:ext uri="{FF2B5EF4-FFF2-40B4-BE49-F238E27FC236}">
+                  <a16:creationId xmlns:a16="http://schemas.microsoft.com/office/drawing/2014/main" id="{ABA0F577-B5A6-3C49-C66D-27D734897534}"/>
+                </a:ext>
+              </a:extLst>
+            </p:cNvPr>
+            <p:cNvSpPr/>
+            <p:nvPr/>
+          </p:nvSpPr>
+          <p:spPr>
+            <a:xfrm>
+              <a:off x="7132638" y="521980"/>
+              <a:ext cx="79375" cy="332580"/>
+            </a:xfrm>
+            <a:prstGeom prst="rect">
+              <a:avLst/>
+            </a:prstGeom>
+          </p:spPr>
+          <p:style>
+            <a:lnRef idx="2">
+              <a:schemeClr val="dk1">
+                <a:shade val="50000"/>
+              </a:schemeClr>
+            </a:lnRef>
+            <a:fillRef idx="1">
+              <a:schemeClr val="dk1"/>
+            </a:fillRef>
+            <a:effectRef idx="0">
+              <a:schemeClr val="dk1"/>
+            </a:effectRef>
+            <a:fontRef idx="minor">
+              <a:schemeClr val="lt1"/>
+            </a:fontRef>
+          </p:style>
+          <p:txBody>
+            <a:bodyPr rtlCol="0" anchor="ctr"/>
+            <a:lstStyle/>
+            <a:p>
+              <a:pPr algn="ctr"/>
+              <a:endParaRPr lang="en-US"/>
+            </a:p>
+          </p:txBody>
+        </p:sp>
+        <p:sp>
+          <p:nvSpPr>
+            <p:cNvPr id="37" name="Rectangle 36">
+              <a:extLst>
+                <a:ext uri="{FF2B5EF4-FFF2-40B4-BE49-F238E27FC236}">
+                  <a16:creationId xmlns:a16="http://schemas.microsoft.com/office/drawing/2014/main" id="{11618E09-041C-A851-0FEC-2E5A540507B0}"/>
+                </a:ext>
+              </a:extLst>
+            </p:cNvPr>
+            <p:cNvSpPr/>
+            <p:nvPr/>
+          </p:nvSpPr>
+          <p:spPr>
+            <a:xfrm>
+              <a:off x="7557634" y="514985"/>
+              <a:ext cx="79375" cy="332580"/>
+            </a:xfrm>
+            <a:prstGeom prst="rect">
+              <a:avLst/>
+            </a:prstGeom>
+          </p:spPr>
+          <p:style>
+            <a:lnRef idx="2">
+              <a:schemeClr val="dk1">
+                <a:shade val="50000"/>
+              </a:schemeClr>
+            </a:lnRef>
+            <a:fillRef idx="1">
+              <a:schemeClr val="dk1"/>
+            </a:fillRef>
+            <a:effectRef idx="0">
+              <a:schemeClr val="dk1"/>
+            </a:effectRef>
+            <a:fontRef idx="minor">
+              <a:schemeClr val="lt1"/>
+            </a:fontRef>
+          </p:style>
+          <p:txBody>
+            <a:bodyPr rtlCol="0" anchor="ctr"/>
+            <a:lstStyle/>
+            <a:p>
+              <a:pPr algn="ctr"/>
+              <a:endParaRPr lang="en-US"/>
+            </a:p>
+          </p:txBody>
+        </p:sp>
+      </p:grpSp>
+      <p:grpSp>
+        <p:nvGrpSpPr>
+          <p:cNvPr id="39" name="Group 38">
+            <a:extLst>
+              <a:ext uri="{FF2B5EF4-FFF2-40B4-BE49-F238E27FC236}">
+                <a16:creationId xmlns:a16="http://schemas.microsoft.com/office/drawing/2014/main" id="{B87FFA6A-0FF0-433D-8457-076DBA37C326}"/>
+              </a:ext>
+            </a:extLst>
+          </p:cNvPr>
+          <p:cNvGrpSpPr/>
+          <p:nvPr/>
+        </p:nvGrpSpPr>
+        <p:grpSpPr>
+          <a:xfrm>
+            <a:off x="6009815" y="563225"/>
+            <a:ext cx="1371600" cy="1371600"/>
+            <a:chOff x="1298501" y="962272"/>
+            <a:chExt cx="1371600" cy="1371600"/>
+          </a:xfrm>
+        </p:grpSpPr>
+        <p:sp>
+          <p:nvSpPr>
+            <p:cNvPr id="40" name="Rectangle 39">
+              <a:extLst>
+                <a:ext uri="{FF2B5EF4-FFF2-40B4-BE49-F238E27FC236}">
+                  <a16:creationId xmlns:a16="http://schemas.microsoft.com/office/drawing/2014/main" id="{A07EE464-6DCB-3660-FE02-6E1D25FDF631}"/>
+                </a:ext>
+              </a:extLst>
+            </p:cNvPr>
+            <p:cNvSpPr/>
+            <p:nvPr/>
+          </p:nvSpPr>
+          <p:spPr>
+            <a:xfrm>
+              <a:off x="1298501" y="962272"/>
+              <a:ext cx="1371600" cy="1371600"/>
+            </a:xfrm>
+            <a:prstGeom prst="rect">
+              <a:avLst/>
+            </a:prstGeom>
+            <a:noFill/>
+            <a:ln w="76200">
+              <a:solidFill>
+                <a:schemeClr val="tx1"/>
+              </a:solidFill>
+            </a:ln>
+          </p:spPr>
+          <p:style>
+            <a:lnRef idx="2">
+              <a:schemeClr val="accent1">
+                <a:shade val="50000"/>
+              </a:schemeClr>
+            </a:lnRef>
+            <a:fillRef idx="1">
+              <a:schemeClr val="accent1"/>
+            </a:fillRef>
+            <a:effectRef idx="0">
+              <a:schemeClr val="accent1"/>
+            </a:effectRef>
+            <a:fontRef idx="minor">
+              <a:schemeClr val="lt1"/>
+            </a:fontRef>
+          </p:style>
+          <p:txBody>
+            <a:bodyPr rtlCol="0" anchor="ctr"/>
+            <a:lstStyle/>
+            <a:p>
+              <a:pPr algn="ctr"/>
+              <a:endParaRPr lang="en-US"/>
+            </a:p>
+          </p:txBody>
+        </p:sp>
+        <p:sp>
+          <p:nvSpPr>
+            <p:cNvPr id="50" name="Arrow: Pentagon 49">
+              <a:extLst>
+                <a:ext uri="{FF2B5EF4-FFF2-40B4-BE49-F238E27FC236}">
+                  <a16:creationId xmlns:a16="http://schemas.microsoft.com/office/drawing/2014/main" id="{426854CE-1909-3006-1555-F45D22AB82A1}"/>
+                </a:ext>
+              </a:extLst>
+            </p:cNvPr>
+            <p:cNvSpPr/>
+            <p:nvPr/>
+          </p:nvSpPr>
+          <p:spPr>
+            <a:xfrm rot="5400000">
+              <a:off x="1435661" y="1173775"/>
+              <a:ext cx="1097280" cy="1097280"/>
+            </a:xfrm>
+            <a:prstGeom prst="homePlate">
+              <a:avLst/>
+            </a:prstGeom>
+            <a:noFill/>
+            <a:ln w="38100" cap="flat" cmpd="sng" algn="ctr">
+              <a:solidFill>
+                <a:schemeClr val="dk1"/>
+              </a:solidFill>
+              <a:prstDash val="solid"/>
+              <a:round/>
+              <a:headEnd type="none" w="med" len="med"/>
+              <a:tailEnd type="none" w="med" len="med"/>
+            </a:ln>
+          </p:spPr>
+          <p:style>
+            <a:lnRef idx="0">
+              <a:scrgbClr r="0" g="0" b="0"/>
+            </a:lnRef>
+            <a:fillRef idx="0">
+              <a:scrgbClr r="0" g="0" b="0"/>
+            </a:fillRef>
+            <a:effectRef idx="0">
+              <a:scrgbClr r="0" g="0" b="0"/>
+            </a:effectRef>
+            <a:fontRef idx="minor">
+              <a:schemeClr val="dk1"/>
+            </a:fontRef>
+          </p:style>
+          <p:txBody>
+            <a:bodyPr rtlCol="0" anchor="ctr"/>
+            <a:lstStyle/>
+            <a:p>
+              <a:pPr algn="ctr"/>
+              <a:endParaRPr lang="en-US"/>
+            </a:p>
+          </p:txBody>
+        </p:sp>
+      </p:grpSp>
+      <p:grpSp>
+        <p:nvGrpSpPr>
+          <p:cNvPr id="11" name="Group 10">
+            <a:extLst>
+              <a:ext uri="{FF2B5EF4-FFF2-40B4-BE49-F238E27FC236}">
+                <a16:creationId xmlns:a16="http://schemas.microsoft.com/office/drawing/2014/main" id="{BA4A187E-51B8-2D47-B12B-620834B1810D}"/>
+              </a:ext>
+            </a:extLst>
+          </p:cNvPr>
+          <p:cNvGrpSpPr/>
+          <p:nvPr/>
+        </p:nvGrpSpPr>
+        <p:grpSpPr>
+          <a:xfrm>
+            <a:off x="6307127" y="1055234"/>
+            <a:ext cx="655875" cy="365799"/>
+            <a:chOff x="5515272" y="2726651"/>
+            <a:chExt cx="1361777" cy="759499"/>
+          </a:xfrm>
+        </p:grpSpPr>
+        <p:sp>
+          <p:nvSpPr>
+            <p:cNvPr id="9" name="Moon 8">
+              <a:extLst>
+                <a:ext uri="{FF2B5EF4-FFF2-40B4-BE49-F238E27FC236}">
+                  <a16:creationId xmlns:a16="http://schemas.microsoft.com/office/drawing/2014/main" id="{A072D82F-C39E-1E97-87FE-2315F3FF696C}"/>
+                </a:ext>
+              </a:extLst>
+            </p:cNvPr>
+            <p:cNvSpPr/>
+            <p:nvPr/>
+          </p:nvSpPr>
+          <p:spPr>
+            <a:xfrm rot="5400000">
+              <a:off x="6082581" y="2457830"/>
+              <a:ext cx="525648" cy="1063289"/>
+            </a:xfrm>
+            <a:prstGeom prst="moon">
+              <a:avLst>
+                <a:gd name="adj" fmla="val 87500"/>
+              </a:avLst>
+            </a:prstGeom>
+          </p:spPr>
+          <p:style>
+            <a:lnRef idx="2">
+              <a:schemeClr val="dk1">
+                <a:shade val="50000"/>
+              </a:schemeClr>
+            </a:lnRef>
+            <a:fillRef idx="1">
+              <a:schemeClr val="dk1"/>
+            </a:fillRef>
+            <a:effectRef idx="0">
+              <a:schemeClr val="dk1"/>
+            </a:effectRef>
+            <a:fontRef idx="minor">
+              <a:schemeClr val="lt1"/>
+            </a:fontRef>
+          </p:style>
+          <p:txBody>
+            <a:bodyPr rtlCol="0" anchor="ctr"/>
+            <a:lstStyle/>
+            <a:p>
+              <a:pPr algn="ctr"/>
+              <a:endParaRPr lang="en-US"/>
+            </a:p>
+          </p:txBody>
+        </p:sp>
+        <p:sp>
+          <p:nvSpPr>
+            <p:cNvPr id="10" name="Rectangle 9">
+              <a:extLst>
+                <a:ext uri="{FF2B5EF4-FFF2-40B4-BE49-F238E27FC236}">
+                  <a16:creationId xmlns:a16="http://schemas.microsoft.com/office/drawing/2014/main" id="{78FF8826-A2C7-9ED9-10EE-191C9DF4A89E}"/>
+                </a:ext>
+              </a:extLst>
+            </p:cNvPr>
+            <p:cNvSpPr/>
+            <p:nvPr/>
+          </p:nvSpPr>
+          <p:spPr>
+            <a:xfrm>
+              <a:off x="5930900" y="3321050"/>
+              <a:ext cx="831850" cy="165100"/>
+            </a:xfrm>
+            <a:prstGeom prst="rect">
+              <a:avLst/>
+            </a:prstGeom>
+          </p:spPr>
+          <p:style>
+            <a:lnRef idx="2">
+              <a:schemeClr val="dk1">
+                <a:shade val="50000"/>
+              </a:schemeClr>
+            </a:lnRef>
+            <a:fillRef idx="1">
+              <a:schemeClr val="dk1"/>
+            </a:fillRef>
+            <a:effectRef idx="0">
+              <a:schemeClr val="dk1"/>
+            </a:effectRef>
+            <a:fontRef idx="minor">
+              <a:schemeClr val="lt1"/>
+            </a:fontRef>
+          </p:style>
+          <p:txBody>
+            <a:bodyPr rtlCol="0" anchor="ctr"/>
+            <a:lstStyle/>
+            <a:p>
+              <a:pPr algn="ctr"/>
+              <a:endParaRPr lang="en-US"/>
+            </a:p>
+          </p:txBody>
+        </p:sp>
+        <p:sp>
+          <p:nvSpPr>
+            <p:cNvPr id="51" name="Rectangle 50">
+              <a:extLst>
+                <a:ext uri="{FF2B5EF4-FFF2-40B4-BE49-F238E27FC236}">
+                  <a16:creationId xmlns:a16="http://schemas.microsoft.com/office/drawing/2014/main" id="{22609DF1-DACA-E36E-9C51-768967DFA931}"/>
+                </a:ext>
+              </a:extLst>
+            </p:cNvPr>
+            <p:cNvSpPr/>
+            <p:nvPr/>
+          </p:nvSpPr>
+          <p:spPr>
+            <a:xfrm>
+              <a:off x="6266030" y="3155950"/>
+              <a:ext cx="158750" cy="165100"/>
+            </a:xfrm>
+            <a:prstGeom prst="rect">
+              <a:avLst/>
+            </a:prstGeom>
+          </p:spPr>
+          <p:style>
+            <a:lnRef idx="2">
+              <a:schemeClr val="dk1">
+                <a:shade val="50000"/>
+              </a:schemeClr>
+            </a:lnRef>
+            <a:fillRef idx="1">
+              <a:schemeClr val="dk1"/>
+            </a:fillRef>
+            <a:effectRef idx="0">
+              <a:schemeClr val="dk1"/>
+            </a:effectRef>
+            <a:fontRef idx="minor">
+              <a:schemeClr val="lt1"/>
+            </a:fontRef>
+          </p:style>
+          <p:txBody>
+            <a:bodyPr rtlCol="0" anchor="ctr"/>
+            <a:lstStyle/>
+            <a:p>
+              <a:pPr algn="ctr"/>
+              <a:endParaRPr lang="en-US"/>
+            </a:p>
+          </p:txBody>
+        </p:sp>
+        <p:sp>
+          <p:nvSpPr>
+            <p:cNvPr id="52" name="Rectangle 51">
+              <a:extLst>
+                <a:ext uri="{FF2B5EF4-FFF2-40B4-BE49-F238E27FC236}">
+                  <a16:creationId xmlns:a16="http://schemas.microsoft.com/office/drawing/2014/main" id="{6EC5FC43-10CE-425C-2B05-B0FDAA948E37}"/>
+                </a:ext>
+              </a:extLst>
+            </p:cNvPr>
+            <p:cNvSpPr/>
+            <p:nvPr/>
+          </p:nvSpPr>
+          <p:spPr>
+            <a:xfrm rot="569356">
+              <a:off x="5515272" y="2809088"/>
+              <a:ext cx="622353" cy="165100"/>
+            </a:xfrm>
+            <a:prstGeom prst="rect">
+              <a:avLst/>
+            </a:prstGeom>
+          </p:spPr>
+          <p:style>
+            <a:lnRef idx="2">
+              <a:schemeClr val="dk1">
+                <a:shade val="50000"/>
+              </a:schemeClr>
+            </a:lnRef>
+            <a:fillRef idx="1">
+              <a:schemeClr val="dk1"/>
+            </a:fillRef>
+            <a:effectRef idx="0">
+              <a:schemeClr val="dk1"/>
+            </a:effectRef>
+            <a:fontRef idx="minor">
+              <a:schemeClr val="lt1"/>
             </a:fontRef>
           </p:style>
           <p:txBody>

--- a/image process/drawings sifi.pptx
+++ b/image process/drawings sifi.pptx
@@ -200,7 +200,7 @@
           <a:p>
             <a:fld id="{7700C406-2328-4788-AE79-437B6607AD22}" type="datetimeFigureOut">
               <a:rPr lang="en-US" smtClean="0"/>
-              <a:t>6/24/2022</a:t>
+              <a:t>12/10/2022</a:t>
             </a:fld>
             <a:endParaRPr lang="en-US"/>
           </a:p>
@@ -614,7 +614,7 @@
           <a:p>
             <a:fld id="{9EC8CD53-0620-48F2-A3BB-2B10BDA60E52}" type="datetimeFigureOut">
               <a:rPr lang="en-US" smtClean="0"/>
-              <a:t>6/24/2022</a:t>
+              <a:t>12/10/2022</a:t>
             </a:fld>
             <a:endParaRPr lang="en-US"/>
           </a:p>
@@ -812,7 +812,7 @@
           <a:p>
             <a:fld id="{9EC8CD53-0620-48F2-A3BB-2B10BDA60E52}" type="datetimeFigureOut">
               <a:rPr lang="en-US" smtClean="0"/>
-              <a:t>6/24/2022</a:t>
+              <a:t>12/10/2022</a:t>
             </a:fld>
             <a:endParaRPr lang="en-US"/>
           </a:p>
@@ -1020,7 +1020,7 @@
           <a:p>
             <a:fld id="{9EC8CD53-0620-48F2-A3BB-2B10BDA60E52}" type="datetimeFigureOut">
               <a:rPr lang="en-US" smtClean="0"/>
-              <a:t>6/24/2022</a:t>
+              <a:t>12/10/2022</a:t>
             </a:fld>
             <a:endParaRPr lang="en-US"/>
           </a:p>
@@ -1218,7 +1218,7 @@
           <a:p>
             <a:fld id="{9EC8CD53-0620-48F2-A3BB-2B10BDA60E52}" type="datetimeFigureOut">
               <a:rPr lang="en-US" smtClean="0"/>
-              <a:t>6/24/2022</a:t>
+              <a:t>12/10/2022</a:t>
             </a:fld>
             <a:endParaRPr lang="en-US"/>
           </a:p>
@@ -1493,7 +1493,7 @@
           <a:p>
             <a:fld id="{9EC8CD53-0620-48F2-A3BB-2B10BDA60E52}" type="datetimeFigureOut">
               <a:rPr lang="en-US" smtClean="0"/>
-              <a:t>6/24/2022</a:t>
+              <a:t>12/10/2022</a:t>
             </a:fld>
             <a:endParaRPr lang="en-US"/>
           </a:p>
@@ -1758,7 +1758,7 @@
           <a:p>
             <a:fld id="{9EC8CD53-0620-48F2-A3BB-2B10BDA60E52}" type="datetimeFigureOut">
               <a:rPr lang="en-US" smtClean="0"/>
-              <a:t>6/24/2022</a:t>
+              <a:t>12/10/2022</a:t>
             </a:fld>
             <a:endParaRPr lang="en-US"/>
           </a:p>
@@ -2170,7 +2170,7 @@
           <a:p>
             <a:fld id="{9EC8CD53-0620-48F2-A3BB-2B10BDA60E52}" type="datetimeFigureOut">
               <a:rPr lang="en-US" smtClean="0"/>
-              <a:t>6/24/2022</a:t>
+              <a:t>12/10/2022</a:t>
             </a:fld>
             <a:endParaRPr lang="en-US"/>
           </a:p>
@@ -2311,7 +2311,7 @@
           <a:p>
             <a:fld id="{9EC8CD53-0620-48F2-A3BB-2B10BDA60E52}" type="datetimeFigureOut">
               <a:rPr lang="en-US" smtClean="0"/>
-              <a:t>6/24/2022</a:t>
+              <a:t>12/10/2022</a:t>
             </a:fld>
             <a:endParaRPr lang="en-US"/>
           </a:p>
@@ -2424,7 +2424,7 @@
           <a:p>
             <a:fld id="{9EC8CD53-0620-48F2-A3BB-2B10BDA60E52}" type="datetimeFigureOut">
               <a:rPr lang="en-US" smtClean="0"/>
-              <a:t>6/24/2022</a:t>
+              <a:t>12/10/2022</a:t>
             </a:fld>
             <a:endParaRPr lang="en-US"/>
           </a:p>
@@ -2735,7 +2735,7 @@
           <a:p>
             <a:fld id="{9EC8CD53-0620-48F2-A3BB-2B10BDA60E52}" type="datetimeFigureOut">
               <a:rPr lang="en-US" smtClean="0"/>
-              <a:t>6/24/2022</a:t>
+              <a:t>12/10/2022</a:t>
             </a:fld>
             <a:endParaRPr lang="en-US"/>
           </a:p>
@@ -3023,7 +3023,7 @@
           <a:p>
             <a:fld id="{9EC8CD53-0620-48F2-A3BB-2B10BDA60E52}" type="datetimeFigureOut">
               <a:rPr lang="en-US" smtClean="0"/>
-              <a:t>6/24/2022</a:t>
+              <a:t>12/10/2022</a:t>
             </a:fld>
             <a:endParaRPr lang="en-US"/>
           </a:p>
@@ -3264,7 +3264,7 @@
           <a:p>
             <a:fld id="{9EC8CD53-0620-48F2-A3BB-2B10BDA60E52}" type="datetimeFigureOut">
               <a:rPr lang="en-US" smtClean="0"/>
-              <a:t>6/24/2022</a:t>
+              <a:t>12/10/2022</a:t>
             </a:fld>
             <a:endParaRPr lang="en-US"/>
           </a:p>
@@ -33537,10 +33537,10 @@
       </p:grpSp>
       <p:grpSp>
         <p:nvGrpSpPr>
-          <p:cNvPr id="24" name="Group 23">
+          <p:cNvPr id="12" name="Group 11">
             <a:extLst>
               <a:ext uri="{FF2B5EF4-FFF2-40B4-BE49-F238E27FC236}">
-                <a16:creationId xmlns:a16="http://schemas.microsoft.com/office/drawing/2014/main" id="{C6535718-ED7C-8F2D-D975-8C3231CCBB84}"/>
+                <a16:creationId xmlns:a16="http://schemas.microsoft.com/office/drawing/2014/main" id="{796D8854-1F94-BB0C-5BE2-18A7FF77AF4C}"/>
               </a:ext>
             </a:extLst>
           </p:cNvPr>
@@ -33549,145 +33549,18 @@
         </p:nvGrpSpPr>
         <p:grpSpPr>
           <a:xfrm>
-            <a:off x="4501055" y="563225"/>
+            <a:off x="3295199" y="147083"/>
             <a:ext cx="1371600" cy="1371600"/>
-            <a:chOff x="1298501" y="962272"/>
+            <a:chOff x="4501055" y="563225"/>
             <a:chExt cx="1371600" cy="1371600"/>
-          </a:xfrm>
-        </p:grpSpPr>
-        <p:sp>
-          <p:nvSpPr>
-            <p:cNvPr id="25" name="Rectangle 24">
-              <a:extLst>
-                <a:ext uri="{FF2B5EF4-FFF2-40B4-BE49-F238E27FC236}">
-                  <a16:creationId xmlns:a16="http://schemas.microsoft.com/office/drawing/2014/main" id="{81B6D15A-D3E6-2C30-C75B-9FDA374FEA83}"/>
-                </a:ext>
-              </a:extLst>
-            </p:cNvPr>
-            <p:cNvSpPr/>
-            <p:nvPr/>
-          </p:nvSpPr>
-          <p:spPr>
-            <a:xfrm>
-              <a:off x="1298501" y="962272"/>
-              <a:ext cx="1371600" cy="1371600"/>
-            </a:xfrm>
-            <a:prstGeom prst="rect">
-              <a:avLst/>
-            </a:prstGeom>
-            <a:noFill/>
-            <a:ln w="76200">
-              <a:solidFill>
-                <a:schemeClr val="tx1"/>
-              </a:solidFill>
-            </a:ln>
-          </p:spPr>
-          <p:style>
-            <a:lnRef idx="2">
-              <a:schemeClr val="accent1">
-                <a:shade val="50000"/>
-              </a:schemeClr>
-            </a:lnRef>
-            <a:fillRef idx="1">
-              <a:schemeClr val="accent1"/>
-            </a:fillRef>
-            <a:effectRef idx="0">
-              <a:schemeClr val="accent1"/>
-            </a:effectRef>
-            <a:fontRef idx="minor">
-              <a:schemeClr val="lt1"/>
-            </a:fontRef>
-          </p:style>
-          <p:txBody>
-            <a:bodyPr rtlCol="0" anchor="ctr"/>
-            <a:lstStyle/>
-            <a:p>
-              <a:pPr algn="ctr"/>
-              <a:endParaRPr lang="en-US"/>
-            </a:p>
-          </p:txBody>
-        </p:sp>
-        <p:sp>
-          <p:nvSpPr>
-            <p:cNvPr id="26" name="Arrow: Pentagon 25">
-              <a:extLst>
-                <a:ext uri="{FF2B5EF4-FFF2-40B4-BE49-F238E27FC236}">
-                  <a16:creationId xmlns:a16="http://schemas.microsoft.com/office/drawing/2014/main" id="{62B76B23-3C28-9CE4-3EA8-5EB675CD4D76}"/>
-                </a:ext>
-              </a:extLst>
-            </p:cNvPr>
-            <p:cNvSpPr/>
-            <p:nvPr/>
-          </p:nvSpPr>
-          <p:spPr>
-            <a:xfrm rot="5400000">
-              <a:off x="1435661" y="1173775"/>
-              <a:ext cx="1097280" cy="1097280"/>
-            </a:xfrm>
-            <a:prstGeom prst="homePlate">
-              <a:avLst/>
-            </a:prstGeom>
-            <a:noFill/>
-            <a:ln w="38100" cap="flat" cmpd="sng" algn="ctr">
-              <a:solidFill>
-                <a:schemeClr val="dk1"/>
-              </a:solidFill>
-              <a:prstDash val="solid"/>
-              <a:round/>
-              <a:headEnd type="none" w="med" len="med"/>
-              <a:tailEnd type="none" w="med" len="med"/>
-            </a:ln>
-          </p:spPr>
-          <p:style>
-            <a:lnRef idx="0">
-              <a:scrgbClr r="0" g="0" b="0"/>
-            </a:lnRef>
-            <a:fillRef idx="0">
-              <a:scrgbClr r="0" g="0" b="0"/>
-            </a:fillRef>
-            <a:effectRef idx="0">
-              <a:scrgbClr r="0" g="0" b="0"/>
-            </a:effectRef>
-            <a:fontRef idx="minor">
-              <a:schemeClr val="dk1"/>
-            </a:fontRef>
-          </p:style>
-          <p:txBody>
-            <a:bodyPr rtlCol="0" anchor="ctr"/>
-            <a:lstStyle/>
-            <a:p>
-              <a:pPr algn="ctr"/>
-              <a:endParaRPr lang="en-US"/>
-            </a:p>
-          </p:txBody>
-        </p:sp>
-      </p:grpSp>
-      <p:grpSp>
-        <p:nvGrpSpPr>
-          <p:cNvPr id="7" name="Group 6">
-            <a:extLst>
-              <a:ext uri="{FF2B5EF4-FFF2-40B4-BE49-F238E27FC236}">
-                <a16:creationId xmlns:a16="http://schemas.microsoft.com/office/drawing/2014/main" id="{8EEF1C40-1B7D-94FA-B3E3-94B28D44E455}"/>
-              </a:ext>
-            </a:extLst>
-          </p:cNvPr>
-          <p:cNvGrpSpPr/>
-          <p:nvPr/>
-        </p:nvGrpSpPr>
-        <p:grpSpPr>
-          <a:xfrm>
-            <a:off x="4916659" y="832883"/>
-            <a:ext cx="540391" cy="669728"/>
-            <a:chOff x="6777984" y="514985"/>
-            <a:chExt cx="1202128" cy="1489844"/>
           </a:xfrm>
         </p:grpSpPr>
         <p:grpSp>
           <p:nvGrpSpPr>
-            <p:cNvPr id="3" name="Group 2">
-              <a:extLst>
-                <a:ext uri="{FF2B5EF4-FFF2-40B4-BE49-F238E27FC236}">
-                  <a16:creationId xmlns:a16="http://schemas.microsoft.com/office/drawing/2014/main" id="{C12D53AB-A653-57D1-449A-6E7A0666BA83}"/>
+            <p:cNvPr id="24" name="Group 23">
+              <a:extLst>
+                <a:ext uri="{FF2B5EF4-FFF2-40B4-BE49-F238E27FC236}">
+                  <a16:creationId xmlns:a16="http://schemas.microsoft.com/office/drawing/2014/main" id="{C6535718-ED7C-8F2D-D975-8C3231CCBB84}"/>
                 </a:ext>
               </a:extLst>
             </p:cNvPr>
@@ -33696,18 +33569,18 @@
           </p:nvGrpSpPr>
           <p:grpSpPr>
             <a:xfrm>
-              <a:off x="6777984" y="854588"/>
-              <a:ext cx="549917" cy="1150241"/>
-              <a:chOff x="6777984" y="854588"/>
-              <a:chExt cx="549917" cy="1150241"/>
+              <a:off x="4501055" y="563225"/>
+              <a:ext cx="1371600" cy="1371600"/>
+              <a:chOff x="1298501" y="962272"/>
+              <a:chExt cx="1371600" cy="1371600"/>
             </a:xfrm>
           </p:grpSpPr>
           <p:sp>
             <p:nvSpPr>
-              <p:cNvPr id="2" name="Rectangle 1">
+              <p:cNvPr id="25" name="Rectangle 24">
                 <a:extLst>
                   <a:ext uri="{FF2B5EF4-FFF2-40B4-BE49-F238E27FC236}">
-                    <a16:creationId xmlns:a16="http://schemas.microsoft.com/office/drawing/2014/main" id="{5747A2AE-F9EF-EB2F-D027-6480E63A760A}"/>
+                    <a16:creationId xmlns:a16="http://schemas.microsoft.com/office/drawing/2014/main" id="{81B6D15A-D3E6-2C30-C75B-9FDA374FEA83}"/>
                   </a:ext>
                 </a:extLst>
               </p:cNvPr>
@@ -33716,8 +33589,453 @@
             </p:nvSpPr>
             <p:spPr>
               <a:xfrm>
-                <a:off x="7016751" y="854588"/>
-                <a:ext cx="311150" cy="397612"/>
+                <a:off x="1298501" y="962272"/>
+                <a:ext cx="1371600" cy="1371600"/>
+              </a:xfrm>
+              <a:prstGeom prst="rect">
+                <a:avLst/>
+              </a:prstGeom>
+              <a:noFill/>
+              <a:ln w="76200">
+                <a:solidFill>
+                  <a:schemeClr val="tx1"/>
+                </a:solidFill>
+              </a:ln>
+            </p:spPr>
+            <p:style>
+              <a:lnRef idx="2">
+                <a:schemeClr val="accent1">
+                  <a:shade val="50000"/>
+                </a:schemeClr>
+              </a:lnRef>
+              <a:fillRef idx="1">
+                <a:schemeClr val="accent1"/>
+              </a:fillRef>
+              <a:effectRef idx="0">
+                <a:schemeClr val="accent1"/>
+              </a:effectRef>
+              <a:fontRef idx="minor">
+                <a:schemeClr val="lt1"/>
+              </a:fontRef>
+            </p:style>
+            <p:txBody>
+              <a:bodyPr rtlCol="0" anchor="ctr"/>
+              <a:lstStyle/>
+              <a:p>
+                <a:pPr algn="ctr"/>
+                <a:endParaRPr lang="en-US"/>
+              </a:p>
+            </p:txBody>
+          </p:sp>
+          <p:sp>
+            <p:nvSpPr>
+              <p:cNvPr id="26" name="Arrow: Pentagon 25">
+                <a:extLst>
+                  <a:ext uri="{FF2B5EF4-FFF2-40B4-BE49-F238E27FC236}">
+                    <a16:creationId xmlns:a16="http://schemas.microsoft.com/office/drawing/2014/main" id="{62B76B23-3C28-9CE4-3EA8-5EB675CD4D76}"/>
+                  </a:ext>
+                </a:extLst>
+              </p:cNvPr>
+              <p:cNvSpPr/>
+              <p:nvPr/>
+            </p:nvSpPr>
+            <p:spPr>
+              <a:xfrm rot="5400000">
+                <a:off x="1435661" y="1173775"/>
+                <a:ext cx="1097280" cy="1097280"/>
+              </a:xfrm>
+              <a:prstGeom prst="homePlate">
+                <a:avLst/>
+              </a:prstGeom>
+              <a:noFill/>
+              <a:ln w="38100" cap="flat" cmpd="sng" algn="ctr">
+                <a:solidFill>
+                  <a:schemeClr val="dk1"/>
+                </a:solidFill>
+                <a:prstDash val="solid"/>
+                <a:round/>
+                <a:headEnd type="none" w="med" len="med"/>
+                <a:tailEnd type="none" w="med" len="med"/>
+              </a:ln>
+            </p:spPr>
+            <p:style>
+              <a:lnRef idx="0">
+                <a:scrgbClr r="0" g="0" b="0"/>
+              </a:lnRef>
+              <a:fillRef idx="0">
+                <a:scrgbClr r="0" g="0" b="0"/>
+              </a:fillRef>
+              <a:effectRef idx="0">
+                <a:scrgbClr r="0" g="0" b="0"/>
+              </a:effectRef>
+              <a:fontRef idx="minor">
+                <a:schemeClr val="dk1"/>
+              </a:fontRef>
+            </p:style>
+            <p:txBody>
+              <a:bodyPr rtlCol="0" anchor="ctr"/>
+              <a:lstStyle/>
+              <a:p>
+                <a:pPr algn="ctr"/>
+                <a:endParaRPr lang="en-US"/>
+              </a:p>
+            </p:txBody>
+          </p:sp>
+        </p:grpSp>
+        <p:grpSp>
+          <p:nvGrpSpPr>
+            <p:cNvPr id="7" name="Group 6">
+              <a:extLst>
+                <a:ext uri="{FF2B5EF4-FFF2-40B4-BE49-F238E27FC236}">
+                  <a16:creationId xmlns:a16="http://schemas.microsoft.com/office/drawing/2014/main" id="{8EEF1C40-1B7D-94FA-B3E3-94B28D44E455}"/>
+                </a:ext>
+              </a:extLst>
+            </p:cNvPr>
+            <p:cNvGrpSpPr/>
+            <p:nvPr/>
+          </p:nvGrpSpPr>
+          <p:grpSpPr>
+            <a:xfrm>
+              <a:off x="4916659" y="832883"/>
+              <a:ext cx="540391" cy="669728"/>
+              <a:chOff x="6777984" y="514985"/>
+              <a:chExt cx="1202128" cy="1489844"/>
+            </a:xfrm>
+          </p:grpSpPr>
+          <p:grpSp>
+            <p:nvGrpSpPr>
+              <p:cNvPr id="3" name="Group 2">
+                <a:extLst>
+                  <a:ext uri="{FF2B5EF4-FFF2-40B4-BE49-F238E27FC236}">
+                    <a16:creationId xmlns:a16="http://schemas.microsoft.com/office/drawing/2014/main" id="{C12D53AB-A653-57D1-449A-6E7A0666BA83}"/>
+                  </a:ext>
+                </a:extLst>
+              </p:cNvPr>
+              <p:cNvGrpSpPr/>
+              <p:nvPr/>
+            </p:nvGrpSpPr>
+            <p:grpSpPr>
+              <a:xfrm>
+                <a:off x="6777984" y="854588"/>
+                <a:ext cx="549917" cy="1150241"/>
+                <a:chOff x="6777984" y="854588"/>
+                <a:chExt cx="549917" cy="1150241"/>
+              </a:xfrm>
+            </p:grpSpPr>
+            <p:sp>
+              <p:nvSpPr>
+                <p:cNvPr id="2" name="Rectangle 1">
+                  <a:extLst>
+                    <a:ext uri="{FF2B5EF4-FFF2-40B4-BE49-F238E27FC236}">
+                      <a16:creationId xmlns:a16="http://schemas.microsoft.com/office/drawing/2014/main" id="{5747A2AE-F9EF-EB2F-D027-6480E63A760A}"/>
+                    </a:ext>
+                  </a:extLst>
+                </p:cNvPr>
+                <p:cNvSpPr/>
+                <p:nvPr/>
+              </p:nvSpPr>
+              <p:spPr>
+                <a:xfrm>
+                  <a:off x="7016751" y="854588"/>
+                  <a:ext cx="311150" cy="397612"/>
+                </a:xfrm>
+                <a:prstGeom prst="rect">
+                  <a:avLst/>
+                </a:prstGeom>
+              </p:spPr>
+              <p:style>
+                <a:lnRef idx="2">
+                  <a:schemeClr val="dk1">
+                    <a:shade val="50000"/>
+                  </a:schemeClr>
+                </a:lnRef>
+                <a:fillRef idx="1">
+                  <a:schemeClr val="dk1"/>
+                </a:fillRef>
+                <a:effectRef idx="0">
+                  <a:schemeClr val="dk1"/>
+                </a:effectRef>
+                <a:fontRef idx="minor">
+                  <a:schemeClr val="lt1"/>
+                </a:fontRef>
+              </p:style>
+              <p:txBody>
+                <a:bodyPr rtlCol="0" anchor="ctr"/>
+                <a:lstStyle/>
+                <a:p>
+                  <a:pPr algn="ctr"/>
+                  <a:endParaRPr lang="en-US"/>
+                </a:p>
+              </p:txBody>
+            </p:sp>
+            <p:sp>
+              <p:nvSpPr>
+                <p:cNvPr id="29" name="Rectangle 28">
+                  <a:extLst>
+                    <a:ext uri="{FF2B5EF4-FFF2-40B4-BE49-F238E27FC236}">
+                      <a16:creationId xmlns:a16="http://schemas.microsoft.com/office/drawing/2014/main" id="{DA8DE4B8-D9A8-CEB2-5B44-B724728DDE73}"/>
+                    </a:ext>
+                  </a:extLst>
+                </p:cNvPr>
+                <p:cNvSpPr/>
+                <p:nvPr/>
+              </p:nvSpPr>
+              <p:spPr>
+                <a:xfrm rot="17844562">
+                  <a:off x="6420802" y="1380936"/>
+                  <a:ext cx="981075" cy="266711"/>
+                </a:xfrm>
+                <a:prstGeom prst="rect">
+                  <a:avLst/>
+                </a:prstGeom>
+              </p:spPr>
+              <p:style>
+                <a:lnRef idx="2">
+                  <a:schemeClr val="dk1">
+                    <a:shade val="50000"/>
+                  </a:schemeClr>
+                </a:lnRef>
+                <a:fillRef idx="1">
+                  <a:schemeClr val="dk1"/>
+                </a:fillRef>
+                <a:effectRef idx="0">
+                  <a:schemeClr val="dk1"/>
+                </a:effectRef>
+                <a:fontRef idx="minor">
+                  <a:schemeClr val="lt1"/>
+                </a:fontRef>
+              </p:style>
+              <p:txBody>
+                <a:bodyPr rtlCol="0" anchor="ctr"/>
+                <a:lstStyle/>
+                <a:p>
+                  <a:pPr algn="ctr"/>
+                  <a:endParaRPr lang="en-US"/>
+                </a:p>
+              </p:txBody>
+            </p:sp>
+          </p:grpSp>
+          <p:grpSp>
+            <p:nvGrpSpPr>
+              <p:cNvPr id="31" name="Group 30">
+                <a:extLst>
+                  <a:ext uri="{FF2B5EF4-FFF2-40B4-BE49-F238E27FC236}">
+                    <a16:creationId xmlns:a16="http://schemas.microsoft.com/office/drawing/2014/main" id="{020519C3-F503-9607-A082-FA73E8C5EA9D}"/>
+                  </a:ext>
+                </a:extLst>
+              </p:cNvPr>
+              <p:cNvGrpSpPr/>
+              <p:nvPr/>
+            </p:nvGrpSpPr>
+            <p:grpSpPr>
+              <a:xfrm flipH="1">
+                <a:off x="7430195" y="854560"/>
+                <a:ext cx="549917" cy="1150241"/>
+                <a:chOff x="6777984" y="854588"/>
+                <a:chExt cx="549917" cy="1150241"/>
+              </a:xfrm>
+            </p:grpSpPr>
+            <p:sp>
+              <p:nvSpPr>
+                <p:cNvPr id="32" name="Rectangle 31">
+                  <a:extLst>
+                    <a:ext uri="{FF2B5EF4-FFF2-40B4-BE49-F238E27FC236}">
+                      <a16:creationId xmlns:a16="http://schemas.microsoft.com/office/drawing/2014/main" id="{322D5FF9-4220-5722-C319-403405B75EAC}"/>
+                    </a:ext>
+                  </a:extLst>
+                </p:cNvPr>
+                <p:cNvSpPr/>
+                <p:nvPr/>
+              </p:nvSpPr>
+              <p:spPr>
+                <a:xfrm>
+                  <a:off x="7016751" y="854588"/>
+                  <a:ext cx="311150" cy="397612"/>
+                </a:xfrm>
+                <a:prstGeom prst="rect">
+                  <a:avLst/>
+                </a:prstGeom>
+              </p:spPr>
+              <p:style>
+                <a:lnRef idx="2">
+                  <a:schemeClr val="dk1">
+                    <a:shade val="50000"/>
+                  </a:schemeClr>
+                </a:lnRef>
+                <a:fillRef idx="1">
+                  <a:schemeClr val="dk1"/>
+                </a:fillRef>
+                <a:effectRef idx="0">
+                  <a:schemeClr val="dk1"/>
+                </a:effectRef>
+                <a:fontRef idx="minor">
+                  <a:schemeClr val="lt1"/>
+                </a:fontRef>
+              </p:style>
+              <p:txBody>
+                <a:bodyPr rtlCol="0" anchor="ctr"/>
+                <a:lstStyle/>
+                <a:p>
+                  <a:pPr algn="ctr"/>
+                  <a:endParaRPr lang="en-US"/>
+                </a:p>
+              </p:txBody>
+            </p:sp>
+            <p:sp>
+              <p:nvSpPr>
+                <p:cNvPr id="33" name="Rectangle 32">
+                  <a:extLst>
+                    <a:ext uri="{FF2B5EF4-FFF2-40B4-BE49-F238E27FC236}">
+                      <a16:creationId xmlns:a16="http://schemas.microsoft.com/office/drawing/2014/main" id="{35AE754A-0E3D-0155-62F4-F8C1163984E8}"/>
+                    </a:ext>
+                  </a:extLst>
+                </p:cNvPr>
+                <p:cNvSpPr/>
+                <p:nvPr/>
+              </p:nvSpPr>
+              <p:spPr>
+                <a:xfrm rot="17844562">
+                  <a:off x="6420802" y="1380936"/>
+                  <a:ext cx="981075" cy="266711"/>
+                </a:xfrm>
+                <a:prstGeom prst="rect">
+                  <a:avLst/>
+                </a:prstGeom>
+              </p:spPr>
+              <p:style>
+                <a:lnRef idx="2">
+                  <a:schemeClr val="dk1">
+                    <a:shade val="50000"/>
+                  </a:schemeClr>
+                </a:lnRef>
+                <a:fillRef idx="1">
+                  <a:schemeClr val="dk1"/>
+                </a:fillRef>
+                <a:effectRef idx="0">
+                  <a:schemeClr val="dk1"/>
+                </a:effectRef>
+                <a:fontRef idx="minor">
+                  <a:schemeClr val="lt1"/>
+                </a:fontRef>
+              </p:style>
+              <p:txBody>
+                <a:bodyPr rtlCol="0" anchor="ctr"/>
+                <a:lstStyle/>
+                <a:p>
+                  <a:pPr algn="ctr"/>
+                  <a:endParaRPr lang="en-US"/>
+                </a:p>
+              </p:txBody>
+            </p:sp>
+          </p:grpSp>
+          <p:sp>
+            <p:nvSpPr>
+              <p:cNvPr id="5" name="Isosceles Triangle 4">
+                <a:extLst>
+                  <a:ext uri="{FF2B5EF4-FFF2-40B4-BE49-F238E27FC236}">
+                    <a16:creationId xmlns:a16="http://schemas.microsoft.com/office/drawing/2014/main" id="{3AA77E2D-05F1-FE7E-0F56-E00AE36B04FD}"/>
+                  </a:ext>
+                </a:extLst>
+              </p:cNvPr>
+              <p:cNvSpPr/>
+              <p:nvPr/>
+            </p:nvSpPr>
+            <p:spPr>
+              <a:xfrm rot="10800000">
+                <a:off x="7230836" y="1323368"/>
+                <a:ext cx="311150" cy="475008"/>
+              </a:xfrm>
+              <a:prstGeom prst="triangle">
+                <a:avLst/>
+              </a:prstGeom>
+            </p:spPr>
+            <p:style>
+              <a:lnRef idx="2">
+                <a:schemeClr val="dk1">
+                  <a:shade val="50000"/>
+                </a:schemeClr>
+              </a:lnRef>
+              <a:fillRef idx="1">
+                <a:schemeClr val="dk1"/>
+              </a:fillRef>
+              <a:effectRef idx="0">
+                <a:schemeClr val="dk1"/>
+              </a:effectRef>
+              <a:fontRef idx="minor">
+                <a:schemeClr val="lt1"/>
+              </a:fontRef>
+            </p:style>
+            <p:txBody>
+              <a:bodyPr rtlCol="0" anchor="ctr"/>
+              <a:lstStyle/>
+              <a:p>
+                <a:pPr algn="ctr"/>
+                <a:endParaRPr lang="en-US"/>
+              </a:p>
+            </p:txBody>
+          </p:sp>
+          <p:sp>
+            <p:nvSpPr>
+              <p:cNvPr id="35" name="Isosceles Triangle 34">
+                <a:extLst>
+                  <a:ext uri="{FF2B5EF4-FFF2-40B4-BE49-F238E27FC236}">
+                    <a16:creationId xmlns:a16="http://schemas.microsoft.com/office/drawing/2014/main" id="{7D977B9A-EBF1-24EB-9776-B84F4D27CB3B}"/>
+                  </a:ext>
+                </a:extLst>
+              </p:cNvPr>
+              <p:cNvSpPr/>
+              <p:nvPr/>
+            </p:nvSpPr>
+            <p:spPr>
+              <a:xfrm rot="10800000" flipV="1">
+                <a:off x="7230836" y="519223"/>
+                <a:ext cx="311150" cy="308389"/>
+              </a:xfrm>
+              <a:prstGeom prst="triangle">
+                <a:avLst/>
+              </a:prstGeom>
+            </p:spPr>
+            <p:style>
+              <a:lnRef idx="2">
+                <a:schemeClr val="dk1">
+                  <a:shade val="50000"/>
+                </a:schemeClr>
+              </a:lnRef>
+              <a:fillRef idx="1">
+                <a:schemeClr val="dk1"/>
+              </a:fillRef>
+              <a:effectRef idx="0">
+                <a:schemeClr val="dk1"/>
+              </a:effectRef>
+              <a:fontRef idx="minor">
+                <a:schemeClr val="lt1"/>
+              </a:fontRef>
+            </p:style>
+            <p:txBody>
+              <a:bodyPr rtlCol="0" anchor="ctr"/>
+              <a:lstStyle/>
+              <a:p>
+                <a:pPr algn="ctr"/>
+                <a:endParaRPr lang="en-US"/>
+              </a:p>
+            </p:txBody>
+          </p:sp>
+          <p:sp>
+            <p:nvSpPr>
+              <p:cNvPr id="6" name="Rectangle 5">
+                <a:extLst>
+                  <a:ext uri="{FF2B5EF4-FFF2-40B4-BE49-F238E27FC236}">
+                    <a16:creationId xmlns:a16="http://schemas.microsoft.com/office/drawing/2014/main" id="{ABA0F577-B5A6-3C49-C66D-27D734897534}"/>
+                  </a:ext>
+                </a:extLst>
+              </p:cNvPr>
+              <p:cNvSpPr/>
+              <p:nvPr/>
+            </p:nvSpPr>
+            <p:spPr>
+              <a:xfrm>
+                <a:off x="7132638" y="521980"/>
+                <a:ext cx="79375" cy="332580"/>
               </a:xfrm>
               <a:prstGeom prst="rect">
                 <a:avLst/>
@@ -33750,10 +34068,10 @@
           </p:sp>
           <p:sp>
             <p:nvSpPr>
-              <p:cNvPr id="29" name="Rectangle 28">
+              <p:cNvPr id="37" name="Rectangle 36">
                 <a:extLst>
                   <a:ext uri="{FF2B5EF4-FFF2-40B4-BE49-F238E27FC236}">
-                    <a16:creationId xmlns:a16="http://schemas.microsoft.com/office/drawing/2014/main" id="{DA8DE4B8-D9A8-CEB2-5B44-B724728DDE73}"/>
+                    <a16:creationId xmlns:a16="http://schemas.microsoft.com/office/drawing/2014/main" id="{11618E09-041C-A851-0FEC-2E5A540507B0}"/>
                   </a:ext>
                 </a:extLst>
               </p:cNvPr>
@@ -33761,9 +34079,9 @@
               <p:nvPr/>
             </p:nvSpPr>
             <p:spPr>
-              <a:xfrm rot="17844562">
-                <a:off x="6420802" y="1380936"/>
-                <a:ext cx="981075" cy="266711"/>
+              <a:xfrm>
+                <a:off x="7557634" y="514985"/>
+                <a:ext cx="79375" cy="332580"/>
               </a:xfrm>
               <a:prstGeom prst="rect">
                 <a:avLst/>
@@ -33795,310 +34113,13 @@
             </p:txBody>
           </p:sp>
         </p:grpSp>
-        <p:grpSp>
-          <p:nvGrpSpPr>
-            <p:cNvPr id="31" name="Group 30">
-              <a:extLst>
-                <a:ext uri="{FF2B5EF4-FFF2-40B4-BE49-F238E27FC236}">
-                  <a16:creationId xmlns:a16="http://schemas.microsoft.com/office/drawing/2014/main" id="{020519C3-F503-9607-A082-FA73E8C5EA9D}"/>
-                </a:ext>
-              </a:extLst>
-            </p:cNvPr>
-            <p:cNvGrpSpPr/>
-            <p:nvPr/>
-          </p:nvGrpSpPr>
-          <p:grpSpPr>
-            <a:xfrm flipH="1">
-              <a:off x="7430195" y="854560"/>
-              <a:ext cx="549917" cy="1150241"/>
-              <a:chOff x="6777984" y="854588"/>
-              <a:chExt cx="549917" cy="1150241"/>
-            </a:xfrm>
-          </p:grpSpPr>
-          <p:sp>
-            <p:nvSpPr>
-              <p:cNvPr id="32" name="Rectangle 31">
-                <a:extLst>
-                  <a:ext uri="{FF2B5EF4-FFF2-40B4-BE49-F238E27FC236}">
-                    <a16:creationId xmlns:a16="http://schemas.microsoft.com/office/drawing/2014/main" id="{322D5FF9-4220-5722-C319-403405B75EAC}"/>
-                  </a:ext>
-                </a:extLst>
-              </p:cNvPr>
-              <p:cNvSpPr/>
-              <p:nvPr/>
-            </p:nvSpPr>
-            <p:spPr>
-              <a:xfrm>
-                <a:off x="7016751" y="854588"/>
-                <a:ext cx="311150" cy="397612"/>
-              </a:xfrm>
-              <a:prstGeom prst="rect">
-                <a:avLst/>
-              </a:prstGeom>
-            </p:spPr>
-            <p:style>
-              <a:lnRef idx="2">
-                <a:schemeClr val="dk1">
-                  <a:shade val="50000"/>
-                </a:schemeClr>
-              </a:lnRef>
-              <a:fillRef idx="1">
-                <a:schemeClr val="dk1"/>
-              </a:fillRef>
-              <a:effectRef idx="0">
-                <a:schemeClr val="dk1"/>
-              </a:effectRef>
-              <a:fontRef idx="minor">
-                <a:schemeClr val="lt1"/>
-              </a:fontRef>
-            </p:style>
-            <p:txBody>
-              <a:bodyPr rtlCol="0" anchor="ctr"/>
-              <a:lstStyle/>
-              <a:p>
-                <a:pPr algn="ctr"/>
-                <a:endParaRPr lang="en-US"/>
-              </a:p>
-            </p:txBody>
-          </p:sp>
-          <p:sp>
-            <p:nvSpPr>
-              <p:cNvPr id="33" name="Rectangle 32">
-                <a:extLst>
-                  <a:ext uri="{FF2B5EF4-FFF2-40B4-BE49-F238E27FC236}">
-                    <a16:creationId xmlns:a16="http://schemas.microsoft.com/office/drawing/2014/main" id="{35AE754A-0E3D-0155-62F4-F8C1163984E8}"/>
-                  </a:ext>
-                </a:extLst>
-              </p:cNvPr>
-              <p:cNvSpPr/>
-              <p:nvPr/>
-            </p:nvSpPr>
-            <p:spPr>
-              <a:xfrm rot="17844562">
-                <a:off x="6420802" y="1380936"/>
-                <a:ext cx="981075" cy="266711"/>
-              </a:xfrm>
-              <a:prstGeom prst="rect">
-                <a:avLst/>
-              </a:prstGeom>
-            </p:spPr>
-            <p:style>
-              <a:lnRef idx="2">
-                <a:schemeClr val="dk1">
-                  <a:shade val="50000"/>
-                </a:schemeClr>
-              </a:lnRef>
-              <a:fillRef idx="1">
-                <a:schemeClr val="dk1"/>
-              </a:fillRef>
-              <a:effectRef idx="0">
-                <a:schemeClr val="dk1"/>
-              </a:effectRef>
-              <a:fontRef idx="minor">
-                <a:schemeClr val="lt1"/>
-              </a:fontRef>
-            </p:style>
-            <p:txBody>
-              <a:bodyPr rtlCol="0" anchor="ctr"/>
-              <a:lstStyle/>
-              <a:p>
-                <a:pPr algn="ctr"/>
-                <a:endParaRPr lang="en-US"/>
-              </a:p>
-            </p:txBody>
-          </p:sp>
-        </p:grpSp>
-        <p:sp>
-          <p:nvSpPr>
-            <p:cNvPr id="5" name="Isosceles Triangle 4">
-              <a:extLst>
-                <a:ext uri="{FF2B5EF4-FFF2-40B4-BE49-F238E27FC236}">
-                  <a16:creationId xmlns:a16="http://schemas.microsoft.com/office/drawing/2014/main" id="{3AA77E2D-05F1-FE7E-0F56-E00AE36B04FD}"/>
-                </a:ext>
-              </a:extLst>
-            </p:cNvPr>
-            <p:cNvSpPr/>
-            <p:nvPr/>
-          </p:nvSpPr>
-          <p:spPr>
-            <a:xfrm rot="10800000">
-              <a:off x="7230836" y="1323368"/>
-              <a:ext cx="311150" cy="475008"/>
-            </a:xfrm>
-            <a:prstGeom prst="triangle">
-              <a:avLst/>
-            </a:prstGeom>
-          </p:spPr>
-          <p:style>
-            <a:lnRef idx="2">
-              <a:schemeClr val="dk1">
-                <a:shade val="50000"/>
-              </a:schemeClr>
-            </a:lnRef>
-            <a:fillRef idx="1">
-              <a:schemeClr val="dk1"/>
-            </a:fillRef>
-            <a:effectRef idx="0">
-              <a:schemeClr val="dk1"/>
-            </a:effectRef>
-            <a:fontRef idx="minor">
-              <a:schemeClr val="lt1"/>
-            </a:fontRef>
-          </p:style>
-          <p:txBody>
-            <a:bodyPr rtlCol="0" anchor="ctr"/>
-            <a:lstStyle/>
-            <a:p>
-              <a:pPr algn="ctr"/>
-              <a:endParaRPr lang="en-US"/>
-            </a:p>
-          </p:txBody>
-        </p:sp>
-        <p:sp>
-          <p:nvSpPr>
-            <p:cNvPr id="35" name="Isosceles Triangle 34">
-              <a:extLst>
-                <a:ext uri="{FF2B5EF4-FFF2-40B4-BE49-F238E27FC236}">
-                  <a16:creationId xmlns:a16="http://schemas.microsoft.com/office/drawing/2014/main" id="{7D977B9A-EBF1-24EB-9776-B84F4D27CB3B}"/>
-                </a:ext>
-              </a:extLst>
-            </p:cNvPr>
-            <p:cNvSpPr/>
-            <p:nvPr/>
-          </p:nvSpPr>
-          <p:spPr>
-            <a:xfrm rot="10800000" flipV="1">
-              <a:off x="7230836" y="519223"/>
-              <a:ext cx="311150" cy="308389"/>
-            </a:xfrm>
-            <a:prstGeom prst="triangle">
-              <a:avLst/>
-            </a:prstGeom>
-          </p:spPr>
-          <p:style>
-            <a:lnRef idx="2">
-              <a:schemeClr val="dk1">
-                <a:shade val="50000"/>
-              </a:schemeClr>
-            </a:lnRef>
-            <a:fillRef idx="1">
-              <a:schemeClr val="dk1"/>
-            </a:fillRef>
-            <a:effectRef idx="0">
-              <a:schemeClr val="dk1"/>
-            </a:effectRef>
-            <a:fontRef idx="minor">
-              <a:schemeClr val="lt1"/>
-            </a:fontRef>
-          </p:style>
-          <p:txBody>
-            <a:bodyPr rtlCol="0" anchor="ctr"/>
-            <a:lstStyle/>
-            <a:p>
-              <a:pPr algn="ctr"/>
-              <a:endParaRPr lang="en-US"/>
-            </a:p>
-          </p:txBody>
-        </p:sp>
-        <p:sp>
-          <p:nvSpPr>
-            <p:cNvPr id="6" name="Rectangle 5">
-              <a:extLst>
-                <a:ext uri="{FF2B5EF4-FFF2-40B4-BE49-F238E27FC236}">
-                  <a16:creationId xmlns:a16="http://schemas.microsoft.com/office/drawing/2014/main" id="{ABA0F577-B5A6-3C49-C66D-27D734897534}"/>
-                </a:ext>
-              </a:extLst>
-            </p:cNvPr>
-            <p:cNvSpPr/>
-            <p:nvPr/>
-          </p:nvSpPr>
-          <p:spPr>
-            <a:xfrm>
-              <a:off x="7132638" y="521980"/>
-              <a:ext cx="79375" cy="332580"/>
-            </a:xfrm>
-            <a:prstGeom prst="rect">
-              <a:avLst/>
-            </a:prstGeom>
-          </p:spPr>
-          <p:style>
-            <a:lnRef idx="2">
-              <a:schemeClr val="dk1">
-                <a:shade val="50000"/>
-              </a:schemeClr>
-            </a:lnRef>
-            <a:fillRef idx="1">
-              <a:schemeClr val="dk1"/>
-            </a:fillRef>
-            <a:effectRef idx="0">
-              <a:schemeClr val="dk1"/>
-            </a:effectRef>
-            <a:fontRef idx="minor">
-              <a:schemeClr val="lt1"/>
-            </a:fontRef>
-          </p:style>
-          <p:txBody>
-            <a:bodyPr rtlCol="0" anchor="ctr"/>
-            <a:lstStyle/>
-            <a:p>
-              <a:pPr algn="ctr"/>
-              <a:endParaRPr lang="en-US"/>
-            </a:p>
-          </p:txBody>
-        </p:sp>
-        <p:sp>
-          <p:nvSpPr>
-            <p:cNvPr id="37" name="Rectangle 36">
-              <a:extLst>
-                <a:ext uri="{FF2B5EF4-FFF2-40B4-BE49-F238E27FC236}">
-                  <a16:creationId xmlns:a16="http://schemas.microsoft.com/office/drawing/2014/main" id="{11618E09-041C-A851-0FEC-2E5A540507B0}"/>
-                </a:ext>
-              </a:extLst>
-            </p:cNvPr>
-            <p:cNvSpPr/>
-            <p:nvPr/>
-          </p:nvSpPr>
-          <p:spPr>
-            <a:xfrm>
-              <a:off x="7557634" y="514985"/>
-              <a:ext cx="79375" cy="332580"/>
-            </a:xfrm>
-            <a:prstGeom prst="rect">
-              <a:avLst/>
-            </a:prstGeom>
-          </p:spPr>
-          <p:style>
-            <a:lnRef idx="2">
-              <a:schemeClr val="dk1">
-                <a:shade val="50000"/>
-              </a:schemeClr>
-            </a:lnRef>
-            <a:fillRef idx="1">
-              <a:schemeClr val="dk1"/>
-            </a:fillRef>
-            <a:effectRef idx="0">
-              <a:schemeClr val="dk1"/>
-            </a:effectRef>
-            <a:fontRef idx="minor">
-              <a:schemeClr val="lt1"/>
-            </a:fontRef>
-          </p:style>
-          <p:txBody>
-            <a:bodyPr rtlCol="0" anchor="ctr"/>
-            <a:lstStyle/>
-            <a:p>
-              <a:pPr algn="ctr"/>
-              <a:endParaRPr lang="en-US"/>
-            </a:p>
-          </p:txBody>
-        </p:sp>
       </p:grpSp>
       <p:grpSp>
         <p:nvGrpSpPr>
-          <p:cNvPr id="39" name="Group 38">
+          <p:cNvPr id="14" name="Group 13">
             <a:extLst>
               <a:ext uri="{FF2B5EF4-FFF2-40B4-BE49-F238E27FC236}">
-                <a16:creationId xmlns:a16="http://schemas.microsoft.com/office/drawing/2014/main" id="{B87FFA6A-0FF0-433D-8457-076DBA37C326}"/>
+                <a16:creationId xmlns:a16="http://schemas.microsoft.com/office/drawing/2014/main" id="{A565361B-D1B3-E892-B8A5-A85F03C76292}"/>
               </a:ext>
             </a:extLst>
           </p:cNvPr>
@@ -34107,7 +34128,7 @@
         </p:nvGrpSpPr>
         <p:grpSpPr>
           <a:xfrm>
-            <a:off x="6009815" y="563225"/>
+            <a:off x="5410200" y="221426"/>
             <a:ext cx="1371600" cy="1371600"/>
             <a:chOff x="1298501" y="962272"/>
             <a:chExt cx="1371600" cy="1371600"/>
@@ -34115,10 +34136,10 @@
         </p:grpSpPr>
         <p:sp>
           <p:nvSpPr>
-            <p:cNvPr id="40" name="Rectangle 39">
-              <a:extLst>
-                <a:ext uri="{FF2B5EF4-FFF2-40B4-BE49-F238E27FC236}">
-                  <a16:creationId xmlns:a16="http://schemas.microsoft.com/office/drawing/2014/main" id="{A07EE464-6DCB-3660-FE02-6E1D25FDF631}"/>
+            <p:cNvPr id="30" name="Rectangle 29">
+              <a:extLst>
+                <a:ext uri="{FF2B5EF4-FFF2-40B4-BE49-F238E27FC236}">
+                  <a16:creationId xmlns:a16="http://schemas.microsoft.com/office/drawing/2014/main" id="{85DC672F-078E-86F7-6992-3E3835492468}"/>
                 </a:ext>
               </a:extLst>
             </p:cNvPr>
@@ -34167,10 +34188,10 @@
         </p:sp>
         <p:sp>
           <p:nvSpPr>
-            <p:cNvPr id="50" name="Arrow: Pentagon 49">
-              <a:extLst>
-                <a:ext uri="{FF2B5EF4-FFF2-40B4-BE49-F238E27FC236}">
-                  <a16:creationId xmlns:a16="http://schemas.microsoft.com/office/drawing/2014/main" id="{426854CE-1909-3006-1555-F45D22AB82A1}"/>
+            <p:cNvPr id="34" name="Arrow: Pentagon 33">
+              <a:extLst>
+                <a:ext uri="{FF2B5EF4-FFF2-40B4-BE49-F238E27FC236}">
+                  <a16:creationId xmlns:a16="http://schemas.microsoft.com/office/drawing/2014/main" id="{922F7BD9-14B2-69A7-7E42-82ADB159EC59}"/>
                 </a:ext>
               </a:extLst>
             </p:cNvPr>
@@ -34222,10 +34243,10 @@
       </p:grpSp>
       <p:grpSp>
         <p:nvGrpSpPr>
-          <p:cNvPr id="11" name="Group 10">
+          <p:cNvPr id="66" name="Group 65">
             <a:extLst>
               <a:ext uri="{FF2B5EF4-FFF2-40B4-BE49-F238E27FC236}">
-                <a16:creationId xmlns:a16="http://schemas.microsoft.com/office/drawing/2014/main" id="{BA4A187E-51B8-2D47-B12B-620834B1810D}"/>
+                <a16:creationId xmlns:a16="http://schemas.microsoft.com/office/drawing/2014/main" id="{190F21FA-0FD6-7EA8-A718-ADDF7B488C35}"/>
               </a:ext>
             </a:extLst>
           </p:cNvPr>
@@ -34234,18 +34255,18 @@
         </p:nvGrpSpPr>
         <p:grpSpPr>
           <a:xfrm>
-            <a:off x="6307127" y="1055234"/>
-            <a:ext cx="655875" cy="365799"/>
-            <a:chOff x="5515272" y="2726651"/>
-            <a:chExt cx="1361777" cy="759499"/>
+            <a:off x="5683529" y="473007"/>
+            <a:ext cx="824942" cy="550241"/>
+            <a:chOff x="2788414" y="3003550"/>
+            <a:chExt cx="2665648" cy="1778000"/>
           </a:xfrm>
         </p:grpSpPr>
         <p:sp>
           <p:nvSpPr>
-            <p:cNvPr id="9" name="Moon 8">
-              <a:extLst>
-                <a:ext uri="{FF2B5EF4-FFF2-40B4-BE49-F238E27FC236}">
-                  <a16:creationId xmlns:a16="http://schemas.microsoft.com/office/drawing/2014/main" id="{A072D82F-C39E-1E97-87FE-2315F3FF696C}"/>
+            <p:cNvPr id="36" name="Oval 35">
+              <a:extLst>
+                <a:ext uri="{FF2B5EF4-FFF2-40B4-BE49-F238E27FC236}">
+                  <a16:creationId xmlns:a16="http://schemas.microsoft.com/office/drawing/2014/main" id="{AC2BCBBD-A6B2-5611-903A-3FB0AE560434}"/>
                 </a:ext>
               </a:extLst>
             </p:cNvPr>
@@ -34253,14 +34274,12 @@
             <p:nvPr/>
           </p:nvSpPr>
           <p:spPr>
-            <a:xfrm rot="5400000">
-              <a:off x="6082581" y="2457830"/>
-              <a:ext cx="525648" cy="1063289"/>
-            </a:xfrm>
-            <a:prstGeom prst="moon">
-              <a:avLst>
-                <a:gd name="adj" fmla="val 87500"/>
-              </a:avLst>
+            <a:xfrm>
+              <a:off x="3903803" y="3003550"/>
+              <a:ext cx="439245" cy="1778000"/>
+            </a:xfrm>
+            <a:prstGeom prst="ellipse">
+              <a:avLst/>
             </a:prstGeom>
           </p:spPr>
           <p:style>
@@ -34290,10 +34309,10 @@
         </p:sp>
         <p:sp>
           <p:nvSpPr>
-            <p:cNvPr id="10" name="Rectangle 9">
-              <a:extLst>
-                <a:ext uri="{FF2B5EF4-FFF2-40B4-BE49-F238E27FC236}">
-                  <a16:creationId xmlns:a16="http://schemas.microsoft.com/office/drawing/2014/main" id="{78FF8826-A2C7-9ED9-10EE-191C9DF4A89E}"/>
+            <p:cNvPr id="38" name="Isosceles Triangle 37">
+              <a:extLst>
+                <a:ext uri="{FF2B5EF4-FFF2-40B4-BE49-F238E27FC236}">
+                  <a16:creationId xmlns:a16="http://schemas.microsoft.com/office/drawing/2014/main" id="{185CD5BD-54AA-2E6E-5A64-BE9D833FEF31}"/>
                 </a:ext>
               </a:extLst>
             </p:cNvPr>
@@ -34302,10 +34321,10 @@
           </p:nvSpPr>
           <p:spPr>
             <a:xfrm>
-              <a:off x="5930900" y="3321050"/>
-              <a:ext cx="831850" cy="165100"/>
-            </a:xfrm>
-            <a:prstGeom prst="rect">
+              <a:off x="2788414" y="3612890"/>
+              <a:ext cx="2665648" cy="1168660"/>
+            </a:xfrm>
+            <a:prstGeom prst="triangle">
               <a:avLst/>
             </a:prstGeom>
           </p:spPr>
@@ -34336,10 +34355,10 @@
         </p:sp>
         <p:sp>
           <p:nvSpPr>
-            <p:cNvPr id="51" name="Rectangle 50">
-              <a:extLst>
-                <a:ext uri="{FF2B5EF4-FFF2-40B4-BE49-F238E27FC236}">
-                  <a16:creationId xmlns:a16="http://schemas.microsoft.com/office/drawing/2014/main" id="{22609DF1-DACA-E36E-9C51-768967DFA931}"/>
+            <p:cNvPr id="53" name="Oval 52">
+              <a:extLst>
+                <a:ext uri="{FF2B5EF4-FFF2-40B4-BE49-F238E27FC236}">
+                  <a16:creationId xmlns:a16="http://schemas.microsoft.com/office/drawing/2014/main" id="{9DF49ED0-E56C-2F63-DA42-7D534C286B42}"/>
                 </a:ext>
               </a:extLst>
             </p:cNvPr>
@@ -34348,8 +34367,117 @@
           </p:nvSpPr>
           <p:spPr>
             <a:xfrm>
-              <a:off x="6266030" y="3155950"/>
-              <a:ext cx="158750" cy="165100"/>
+              <a:off x="3346707" y="4263156"/>
+              <a:ext cx="458369" cy="458369"/>
+            </a:xfrm>
+            <a:prstGeom prst="ellipse">
+              <a:avLst/>
+            </a:prstGeom>
+          </p:spPr>
+          <p:style>
+            <a:lnRef idx="2">
+              <a:schemeClr val="dk1"/>
+            </a:lnRef>
+            <a:fillRef idx="1">
+              <a:schemeClr val="lt1"/>
+            </a:fillRef>
+            <a:effectRef idx="0">
+              <a:schemeClr val="dk1"/>
+            </a:effectRef>
+            <a:fontRef idx="minor">
+              <a:schemeClr val="dk1"/>
+            </a:fontRef>
+          </p:style>
+          <p:txBody>
+            <a:bodyPr rtlCol="0" anchor="ctr"/>
+            <a:lstStyle/>
+            <a:p>
+              <a:pPr algn="ctr"/>
+              <a:endParaRPr lang="en-US"/>
+            </a:p>
+          </p:txBody>
+        </p:sp>
+        <p:sp>
+          <p:nvSpPr>
+            <p:cNvPr id="54" name="Oval 53">
+              <a:extLst>
+                <a:ext uri="{FF2B5EF4-FFF2-40B4-BE49-F238E27FC236}">
+                  <a16:creationId xmlns:a16="http://schemas.microsoft.com/office/drawing/2014/main" id="{46F060C6-AD38-DA21-F39D-93FB72E0EE81}"/>
+                </a:ext>
+              </a:extLst>
+            </p:cNvPr>
+            <p:cNvSpPr/>
+            <p:nvPr/>
+          </p:nvSpPr>
+          <p:spPr>
+            <a:xfrm>
+              <a:off x="4436723" y="4263156"/>
+              <a:ext cx="458369" cy="458369"/>
+            </a:xfrm>
+            <a:prstGeom prst="ellipse">
+              <a:avLst/>
+            </a:prstGeom>
+          </p:spPr>
+          <p:style>
+            <a:lnRef idx="2">
+              <a:schemeClr val="dk1"/>
+            </a:lnRef>
+            <a:fillRef idx="1">
+              <a:schemeClr val="lt1"/>
+            </a:fillRef>
+            <a:effectRef idx="0">
+              <a:schemeClr val="dk1"/>
+            </a:effectRef>
+            <a:fontRef idx="minor">
+              <a:schemeClr val="dk1"/>
+            </a:fontRef>
+          </p:style>
+          <p:txBody>
+            <a:bodyPr rtlCol="0" anchor="ctr"/>
+            <a:lstStyle/>
+            <a:p>
+              <a:pPr algn="ctr"/>
+              <a:endParaRPr lang="en-US"/>
+            </a:p>
+          </p:txBody>
+        </p:sp>
+      </p:grpSp>
+      <p:grpSp>
+        <p:nvGrpSpPr>
+          <p:cNvPr id="65" name="Group 64">
+            <a:extLst>
+              <a:ext uri="{FF2B5EF4-FFF2-40B4-BE49-F238E27FC236}">
+                <a16:creationId xmlns:a16="http://schemas.microsoft.com/office/drawing/2014/main" id="{1D60BB50-A86F-6A8C-9E06-CC7CAD599DA7}"/>
+              </a:ext>
+            </a:extLst>
+          </p:cNvPr>
+          <p:cNvGrpSpPr/>
+          <p:nvPr/>
+        </p:nvGrpSpPr>
+        <p:grpSpPr>
+          <a:xfrm>
+            <a:off x="7253835" y="514121"/>
+            <a:ext cx="770328" cy="575178"/>
+            <a:chOff x="7066650" y="3003550"/>
+            <a:chExt cx="2381250" cy="1778000"/>
+          </a:xfrm>
+        </p:grpSpPr>
+        <p:sp>
+          <p:nvSpPr>
+            <p:cNvPr id="62" name="Rectangle 61">
+              <a:extLst>
+                <a:ext uri="{FF2B5EF4-FFF2-40B4-BE49-F238E27FC236}">
+                  <a16:creationId xmlns:a16="http://schemas.microsoft.com/office/drawing/2014/main" id="{57B154D4-ED69-F1D3-9B28-42BE1780598C}"/>
+                </a:ext>
+              </a:extLst>
+            </p:cNvPr>
+            <p:cNvSpPr/>
+            <p:nvPr/>
+          </p:nvSpPr>
+          <p:spPr>
+            <a:xfrm>
+              <a:off x="7066650" y="3429000"/>
+              <a:ext cx="2381250" cy="1352550"/>
             </a:xfrm>
             <a:prstGeom prst="rect">
               <a:avLst/>
@@ -34382,10 +34510,10 @@
         </p:sp>
         <p:sp>
           <p:nvSpPr>
-            <p:cNvPr id="52" name="Rectangle 51">
-              <a:extLst>
-                <a:ext uri="{FF2B5EF4-FFF2-40B4-BE49-F238E27FC236}">
-                  <a16:creationId xmlns:a16="http://schemas.microsoft.com/office/drawing/2014/main" id="{6EC5FC43-10CE-425C-2B05-B0FDAA948E37}"/>
+            <p:cNvPr id="57" name="Oval 56">
+              <a:extLst>
+                <a:ext uri="{FF2B5EF4-FFF2-40B4-BE49-F238E27FC236}">
+                  <a16:creationId xmlns:a16="http://schemas.microsoft.com/office/drawing/2014/main" id="{60E26D81-2B4E-3E99-6951-414CC2576DFE}"/>
                 </a:ext>
               </a:extLst>
             </p:cNvPr>
@@ -34393,11 +34521,11 @@
             <p:nvPr/>
           </p:nvSpPr>
           <p:spPr>
-            <a:xfrm rot="569356">
-              <a:off x="5515272" y="2809088"/>
-              <a:ext cx="622353" cy="165100"/>
-            </a:xfrm>
-            <a:prstGeom prst="rect">
+            <a:xfrm>
+              <a:off x="8037653" y="3003550"/>
+              <a:ext cx="439245" cy="1778000"/>
+            </a:xfrm>
+            <a:prstGeom prst="ellipse">
               <a:avLst/>
             </a:prstGeom>
           </p:spPr>
@@ -34415,6 +34543,309 @@
             </a:effectRef>
             <a:fontRef idx="minor">
               <a:schemeClr val="lt1"/>
+            </a:fontRef>
+          </p:style>
+          <p:txBody>
+            <a:bodyPr rtlCol="0" anchor="ctr"/>
+            <a:lstStyle/>
+            <a:p>
+              <a:pPr algn="ctr"/>
+              <a:endParaRPr lang="en-US"/>
+            </a:p>
+          </p:txBody>
+        </p:sp>
+        <p:sp>
+          <p:nvSpPr>
+            <p:cNvPr id="58" name="Oval 57">
+              <a:extLst>
+                <a:ext uri="{FF2B5EF4-FFF2-40B4-BE49-F238E27FC236}">
+                  <a16:creationId xmlns:a16="http://schemas.microsoft.com/office/drawing/2014/main" id="{1EAAD573-AE7F-038C-AA6A-C4FC18589CFC}"/>
+                </a:ext>
+              </a:extLst>
+            </p:cNvPr>
+            <p:cNvSpPr/>
+            <p:nvPr/>
+          </p:nvSpPr>
+          <p:spPr>
+            <a:xfrm>
+              <a:off x="7480557" y="3512687"/>
+              <a:ext cx="458369" cy="458369"/>
+            </a:xfrm>
+            <a:prstGeom prst="ellipse">
+              <a:avLst/>
+            </a:prstGeom>
+          </p:spPr>
+          <p:style>
+            <a:lnRef idx="2">
+              <a:schemeClr val="dk1"/>
+            </a:lnRef>
+            <a:fillRef idx="1">
+              <a:schemeClr val="lt1"/>
+            </a:fillRef>
+            <a:effectRef idx="0">
+              <a:schemeClr val="dk1"/>
+            </a:effectRef>
+            <a:fontRef idx="minor">
+              <a:schemeClr val="dk1"/>
+            </a:fontRef>
+          </p:style>
+          <p:txBody>
+            <a:bodyPr rtlCol="0" anchor="ctr"/>
+            <a:lstStyle/>
+            <a:p>
+              <a:pPr algn="ctr"/>
+              <a:endParaRPr lang="en-US"/>
+            </a:p>
+          </p:txBody>
+        </p:sp>
+        <p:sp>
+          <p:nvSpPr>
+            <p:cNvPr id="61" name="Oval 60">
+              <a:extLst>
+                <a:ext uri="{FF2B5EF4-FFF2-40B4-BE49-F238E27FC236}">
+                  <a16:creationId xmlns:a16="http://schemas.microsoft.com/office/drawing/2014/main" id="{19E40176-D9B8-40ED-2980-6BE673F2ADB0}"/>
+                </a:ext>
+              </a:extLst>
+            </p:cNvPr>
+            <p:cNvSpPr/>
+            <p:nvPr/>
+          </p:nvSpPr>
+          <p:spPr>
+            <a:xfrm>
+              <a:off x="8570573" y="3512687"/>
+              <a:ext cx="458369" cy="458369"/>
+            </a:xfrm>
+            <a:prstGeom prst="ellipse">
+              <a:avLst/>
+            </a:prstGeom>
+          </p:spPr>
+          <p:style>
+            <a:lnRef idx="2">
+              <a:schemeClr val="dk1"/>
+            </a:lnRef>
+            <a:fillRef idx="1">
+              <a:schemeClr val="lt1"/>
+            </a:fillRef>
+            <a:effectRef idx="0">
+              <a:schemeClr val="dk1"/>
+            </a:effectRef>
+            <a:fontRef idx="minor">
+              <a:schemeClr val="dk1"/>
+            </a:fontRef>
+          </p:style>
+          <p:txBody>
+            <a:bodyPr rtlCol="0" anchor="ctr"/>
+            <a:lstStyle/>
+            <a:p>
+              <a:pPr algn="ctr"/>
+              <a:endParaRPr lang="en-US"/>
+            </a:p>
+          </p:txBody>
+        </p:sp>
+        <p:sp>
+          <p:nvSpPr>
+            <p:cNvPr id="63" name="Oval 62">
+              <a:extLst>
+                <a:ext uri="{FF2B5EF4-FFF2-40B4-BE49-F238E27FC236}">
+                  <a16:creationId xmlns:a16="http://schemas.microsoft.com/office/drawing/2014/main" id="{5CE3E423-54A6-774B-CF2F-AEFB806F52F3}"/>
+                </a:ext>
+              </a:extLst>
+            </p:cNvPr>
+            <p:cNvSpPr/>
+            <p:nvPr/>
+          </p:nvSpPr>
+          <p:spPr>
+            <a:xfrm>
+              <a:off x="7480557" y="4167321"/>
+              <a:ext cx="458369" cy="458369"/>
+            </a:xfrm>
+            <a:prstGeom prst="ellipse">
+              <a:avLst/>
+            </a:prstGeom>
+          </p:spPr>
+          <p:style>
+            <a:lnRef idx="2">
+              <a:schemeClr val="dk1"/>
+            </a:lnRef>
+            <a:fillRef idx="1">
+              <a:schemeClr val="lt1"/>
+            </a:fillRef>
+            <a:effectRef idx="0">
+              <a:schemeClr val="dk1"/>
+            </a:effectRef>
+            <a:fontRef idx="minor">
+              <a:schemeClr val="dk1"/>
+            </a:fontRef>
+          </p:style>
+          <p:txBody>
+            <a:bodyPr rtlCol="0" anchor="ctr"/>
+            <a:lstStyle/>
+            <a:p>
+              <a:pPr algn="ctr"/>
+              <a:endParaRPr lang="en-US"/>
+            </a:p>
+          </p:txBody>
+        </p:sp>
+        <p:sp>
+          <p:nvSpPr>
+            <p:cNvPr id="64" name="Oval 63">
+              <a:extLst>
+                <a:ext uri="{FF2B5EF4-FFF2-40B4-BE49-F238E27FC236}">
+                  <a16:creationId xmlns:a16="http://schemas.microsoft.com/office/drawing/2014/main" id="{6D30A8C5-61B7-B967-A1E5-AD845CD0AAC8}"/>
+                </a:ext>
+              </a:extLst>
+            </p:cNvPr>
+            <p:cNvSpPr/>
+            <p:nvPr/>
+          </p:nvSpPr>
+          <p:spPr>
+            <a:xfrm>
+              <a:off x="8570573" y="4167321"/>
+              <a:ext cx="458369" cy="458369"/>
+            </a:xfrm>
+            <a:prstGeom prst="ellipse">
+              <a:avLst/>
+            </a:prstGeom>
+          </p:spPr>
+          <p:style>
+            <a:lnRef idx="2">
+              <a:schemeClr val="dk1"/>
+            </a:lnRef>
+            <a:fillRef idx="1">
+              <a:schemeClr val="lt1"/>
+            </a:fillRef>
+            <a:effectRef idx="0">
+              <a:schemeClr val="dk1"/>
+            </a:effectRef>
+            <a:fontRef idx="minor">
+              <a:schemeClr val="dk1"/>
+            </a:fontRef>
+          </p:style>
+          <p:txBody>
+            <a:bodyPr rtlCol="0" anchor="ctr"/>
+            <a:lstStyle/>
+            <a:p>
+              <a:pPr algn="ctr"/>
+              <a:endParaRPr lang="en-US"/>
+            </a:p>
+          </p:txBody>
+        </p:sp>
+      </p:grpSp>
+      <p:grpSp>
+        <p:nvGrpSpPr>
+          <p:cNvPr id="67" name="Group 66">
+            <a:extLst>
+              <a:ext uri="{FF2B5EF4-FFF2-40B4-BE49-F238E27FC236}">
+                <a16:creationId xmlns:a16="http://schemas.microsoft.com/office/drawing/2014/main" id="{482DF19A-4B0D-8758-DC4E-573890DEF054}"/>
+              </a:ext>
+            </a:extLst>
+          </p:cNvPr>
+          <p:cNvGrpSpPr/>
+          <p:nvPr/>
+        </p:nvGrpSpPr>
+        <p:grpSpPr>
+          <a:xfrm>
+            <a:off x="6954576" y="230762"/>
+            <a:ext cx="1371600" cy="1371600"/>
+            <a:chOff x="1298501" y="962272"/>
+            <a:chExt cx="1371600" cy="1371600"/>
+          </a:xfrm>
+        </p:grpSpPr>
+        <p:sp>
+          <p:nvSpPr>
+            <p:cNvPr id="72" name="Rectangle 71">
+              <a:extLst>
+                <a:ext uri="{FF2B5EF4-FFF2-40B4-BE49-F238E27FC236}">
+                  <a16:creationId xmlns:a16="http://schemas.microsoft.com/office/drawing/2014/main" id="{75391A79-2257-A007-CDA1-3BD2DAA828FE}"/>
+                </a:ext>
+              </a:extLst>
+            </p:cNvPr>
+            <p:cNvSpPr/>
+            <p:nvPr/>
+          </p:nvSpPr>
+          <p:spPr>
+            <a:xfrm>
+              <a:off x="1298501" y="962272"/>
+              <a:ext cx="1371600" cy="1371600"/>
+            </a:xfrm>
+            <a:prstGeom prst="rect">
+              <a:avLst/>
+            </a:prstGeom>
+            <a:noFill/>
+            <a:ln w="76200">
+              <a:solidFill>
+                <a:schemeClr val="tx1"/>
+              </a:solidFill>
+            </a:ln>
+          </p:spPr>
+          <p:style>
+            <a:lnRef idx="2">
+              <a:schemeClr val="accent1">
+                <a:shade val="50000"/>
+              </a:schemeClr>
+            </a:lnRef>
+            <a:fillRef idx="1">
+              <a:schemeClr val="accent1"/>
+            </a:fillRef>
+            <a:effectRef idx="0">
+              <a:schemeClr val="accent1"/>
+            </a:effectRef>
+            <a:fontRef idx="minor">
+              <a:schemeClr val="lt1"/>
+            </a:fontRef>
+          </p:style>
+          <p:txBody>
+            <a:bodyPr rtlCol="0" anchor="ctr"/>
+            <a:lstStyle/>
+            <a:p>
+              <a:pPr algn="ctr"/>
+              <a:endParaRPr lang="en-US"/>
+            </a:p>
+          </p:txBody>
+        </p:sp>
+        <p:sp>
+          <p:nvSpPr>
+            <p:cNvPr id="77" name="Arrow: Pentagon 76">
+              <a:extLst>
+                <a:ext uri="{FF2B5EF4-FFF2-40B4-BE49-F238E27FC236}">
+                  <a16:creationId xmlns:a16="http://schemas.microsoft.com/office/drawing/2014/main" id="{46094833-5784-28D6-A952-8CD6B5F92095}"/>
+                </a:ext>
+              </a:extLst>
+            </p:cNvPr>
+            <p:cNvSpPr/>
+            <p:nvPr/>
+          </p:nvSpPr>
+          <p:spPr>
+            <a:xfrm rot="5400000">
+              <a:off x="1435661" y="1173775"/>
+              <a:ext cx="1097280" cy="1097280"/>
+            </a:xfrm>
+            <a:prstGeom prst="homePlate">
+              <a:avLst/>
+            </a:prstGeom>
+            <a:noFill/>
+            <a:ln w="38100" cap="flat" cmpd="sng" algn="ctr">
+              <a:solidFill>
+                <a:schemeClr val="dk1"/>
+              </a:solidFill>
+              <a:prstDash val="solid"/>
+              <a:round/>
+              <a:headEnd type="none" w="med" len="med"/>
+              <a:tailEnd type="none" w="med" len="med"/>
+            </a:ln>
+          </p:spPr>
+          <p:style>
+            <a:lnRef idx="0">
+              <a:scrgbClr r="0" g="0" b="0"/>
+            </a:lnRef>
+            <a:fillRef idx="0">
+              <a:scrgbClr r="0" g="0" b="0"/>
+            </a:fillRef>
+            <a:effectRef idx="0">
+              <a:scrgbClr r="0" g="0" b="0"/>
+            </a:effectRef>
+            <a:fontRef idx="minor">
+              <a:schemeClr val="dk1"/>
             </a:fontRef>
           </p:style>
           <p:txBody>

--- a/image process/drawings sifi.pptx
+++ b/image process/drawings sifi.pptx
@@ -200,7 +200,7 @@
           <a:p>
             <a:fld id="{7700C406-2328-4788-AE79-437B6607AD22}" type="datetimeFigureOut">
               <a:rPr lang="en-US" smtClean="0"/>
-              <a:t>12/10/2022</a:t>
+              <a:t>1/7/2023</a:t>
             </a:fld>
             <a:endParaRPr lang="en-US"/>
           </a:p>
@@ -614,7 +614,7 @@
           <a:p>
             <a:fld id="{9EC8CD53-0620-48F2-A3BB-2B10BDA60E52}" type="datetimeFigureOut">
               <a:rPr lang="en-US" smtClean="0"/>
-              <a:t>12/10/2022</a:t>
+              <a:t>1/7/2023</a:t>
             </a:fld>
             <a:endParaRPr lang="en-US"/>
           </a:p>
@@ -812,7 +812,7 @@
           <a:p>
             <a:fld id="{9EC8CD53-0620-48F2-A3BB-2B10BDA60E52}" type="datetimeFigureOut">
               <a:rPr lang="en-US" smtClean="0"/>
-              <a:t>12/10/2022</a:t>
+              <a:t>1/7/2023</a:t>
             </a:fld>
             <a:endParaRPr lang="en-US"/>
           </a:p>
@@ -1020,7 +1020,7 @@
           <a:p>
             <a:fld id="{9EC8CD53-0620-48F2-A3BB-2B10BDA60E52}" type="datetimeFigureOut">
               <a:rPr lang="en-US" smtClean="0"/>
-              <a:t>12/10/2022</a:t>
+              <a:t>1/7/2023</a:t>
             </a:fld>
             <a:endParaRPr lang="en-US"/>
           </a:p>
@@ -1218,7 +1218,7 @@
           <a:p>
             <a:fld id="{9EC8CD53-0620-48F2-A3BB-2B10BDA60E52}" type="datetimeFigureOut">
               <a:rPr lang="en-US" smtClean="0"/>
-              <a:t>12/10/2022</a:t>
+              <a:t>1/7/2023</a:t>
             </a:fld>
             <a:endParaRPr lang="en-US"/>
           </a:p>
@@ -1493,7 +1493,7 @@
           <a:p>
             <a:fld id="{9EC8CD53-0620-48F2-A3BB-2B10BDA60E52}" type="datetimeFigureOut">
               <a:rPr lang="en-US" smtClean="0"/>
-              <a:t>12/10/2022</a:t>
+              <a:t>1/7/2023</a:t>
             </a:fld>
             <a:endParaRPr lang="en-US"/>
           </a:p>
@@ -1758,7 +1758,7 @@
           <a:p>
             <a:fld id="{9EC8CD53-0620-48F2-A3BB-2B10BDA60E52}" type="datetimeFigureOut">
               <a:rPr lang="en-US" smtClean="0"/>
-              <a:t>12/10/2022</a:t>
+              <a:t>1/7/2023</a:t>
             </a:fld>
             <a:endParaRPr lang="en-US"/>
           </a:p>
@@ -2170,7 +2170,7 @@
           <a:p>
             <a:fld id="{9EC8CD53-0620-48F2-A3BB-2B10BDA60E52}" type="datetimeFigureOut">
               <a:rPr lang="en-US" smtClean="0"/>
-              <a:t>12/10/2022</a:t>
+              <a:t>1/7/2023</a:t>
             </a:fld>
             <a:endParaRPr lang="en-US"/>
           </a:p>
@@ -2311,7 +2311,7 @@
           <a:p>
             <a:fld id="{9EC8CD53-0620-48F2-A3BB-2B10BDA60E52}" type="datetimeFigureOut">
               <a:rPr lang="en-US" smtClean="0"/>
-              <a:t>12/10/2022</a:t>
+              <a:t>1/7/2023</a:t>
             </a:fld>
             <a:endParaRPr lang="en-US"/>
           </a:p>
@@ -2424,7 +2424,7 @@
           <a:p>
             <a:fld id="{9EC8CD53-0620-48F2-A3BB-2B10BDA60E52}" type="datetimeFigureOut">
               <a:rPr lang="en-US" smtClean="0"/>
-              <a:t>12/10/2022</a:t>
+              <a:t>1/7/2023</a:t>
             </a:fld>
             <a:endParaRPr lang="en-US"/>
           </a:p>
@@ -2735,7 +2735,7 @@
           <a:p>
             <a:fld id="{9EC8CD53-0620-48F2-A3BB-2B10BDA60E52}" type="datetimeFigureOut">
               <a:rPr lang="en-US" smtClean="0"/>
-              <a:t>12/10/2022</a:t>
+              <a:t>1/7/2023</a:t>
             </a:fld>
             <a:endParaRPr lang="en-US"/>
           </a:p>
@@ -3023,7 +3023,7 @@
           <a:p>
             <a:fld id="{9EC8CD53-0620-48F2-A3BB-2B10BDA60E52}" type="datetimeFigureOut">
               <a:rPr lang="en-US" smtClean="0"/>
-              <a:t>12/10/2022</a:t>
+              <a:t>1/7/2023</a:t>
             </a:fld>
             <a:endParaRPr lang="en-US"/>
           </a:p>
@@ -3264,7 +3264,7 @@
           <a:p>
             <a:fld id="{9EC8CD53-0620-48F2-A3BB-2B10BDA60E52}" type="datetimeFigureOut">
               <a:rPr lang="en-US" smtClean="0"/>
-              <a:t>12/10/2022</a:t>
+              <a:t>1/7/2023</a:t>
             </a:fld>
             <a:endParaRPr lang="en-US"/>
           </a:p>
@@ -15160,180 +15160,6 @@
           </p:txBody>
         </p:sp>
       </p:grpSp>
-      <p:pic>
-        <p:nvPicPr>
-          <p:cNvPr id="382" name="Picture 2" descr="Apache helicopter | Stock vector | Colourbox">
-            <a:extLst>
-              <a:ext uri="{FF2B5EF4-FFF2-40B4-BE49-F238E27FC236}">
-                <a16:creationId xmlns:a16="http://schemas.microsoft.com/office/drawing/2014/main" id="{C2DF8D61-4337-5458-818A-2158BC02D8EA}"/>
-              </a:ext>
-            </a:extLst>
-          </p:cNvPr>
-          <p:cNvPicPr>
-            <a:picLocks noChangeAspect="1" noChangeArrowheads="1"/>
-          </p:cNvPicPr>
-          <p:nvPr/>
-        </p:nvPicPr>
-        <p:blipFill>
-          <a:blip r:embed="rId7">
-            <a:extLst>
-              <a:ext uri="{28A0092B-C50C-407E-A947-70E740481C1C}">
-                <a14:useLocalDpi xmlns:a14="http://schemas.microsoft.com/office/drawing/2010/main" val="0"/>
-              </a:ext>
-            </a:extLst>
-          </a:blip>
-          <a:srcRect/>
-          <a:stretch>
-            <a:fillRect/>
-          </a:stretch>
-        </p:blipFill>
-        <p:spPr bwMode="auto">
-          <a:xfrm rot="858473">
-            <a:off x="3845270" y="4089744"/>
-            <a:ext cx="841728" cy="655496"/>
-          </a:xfrm>
-          <a:prstGeom prst="rect">
-            <a:avLst/>
-          </a:prstGeom>
-          <a:noFill/>
-          <a:extLst>
-            <a:ext uri="{909E8E84-426E-40DD-AFC4-6F175D3DCCD1}">
-              <a14:hiddenFill xmlns:a14="http://schemas.microsoft.com/office/drawing/2010/main">
-                <a:solidFill>
-                  <a:srgbClr val="FFFFFF"/>
-                </a:solidFill>
-              </a14:hiddenFill>
-            </a:ext>
-          </a:extLst>
-        </p:spPr>
-      </p:pic>
-      <p:grpSp>
-        <p:nvGrpSpPr>
-          <p:cNvPr id="383" name="Group 382">
-            <a:extLst>
-              <a:ext uri="{FF2B5EF4-FFF2-40B4-BE49-F238E27FC236}">
-                <a16:creationId xmlns:a16="http://schemas.microsoft.com/office/drawing/2014/main" id="{D44689B5-EC73-57FD-5184-0121E6688C9F}"/>
-              </a:ext>
-            </a:extLst>
-          </p:cNvPr>
-          <p:cNvGrpSpPr/>
-          <p:nvPr/>
-        </p:nvGrpSpPr>
-        <p:grpSpPr>
-          <a:xfrm>
-            <a:off x="3580335" y="3896688"/>
-            <a:ext cx="1371600" cy="1371600"/>
-            <a:chOff x="1298501" y="962272"/>
-            <a:chExt cx="1371600" cy="1371600"/>
-          </a:xfrm>
-        </p:grpSpPr>
-        <p:sp>
-          <p:nvSpPr>
-            <p:cNvPr id="384" name="Rectangle 383">
-              <a:extLst>
-                <a:ext uri="{FF2B5EF4-FFF2-40B4-BE49-F238E27FC236}">
-                  <a16:creationId xmlns:a16="http://schemas.microsoft.com/office/drawing/2014/main" id="{FE3BBA60-C1E2-A7A2-757B-CE332EF2F26D}"/>
-                </a:ext>
-              </a:extLst>
-            </p:cNvPr>
-            <p:cNvSpPr/>
-            <p:nvPr/>
-          </p:nvSpPr>
-          <p:spPr>
-            <a:xfrm>
-              <a:off x="1298501" y="962272"/>
-              <a:ext cx="1371600" cy="1371600"/>
-            </a:xfrm>
-            <a:prstGeom prst="rect">
-              <a:avLst/>
-            </a:prstGeom>
-            <a:noFill/>
-            <a:ln w="76200">
-              <a:solidFill>
-                <a:schemeClr val="tx1"/>
-              </a:solidFill>
-            </a:ln>
-          </p:spPr>
-          <p:style>
-            <a:lnRef idx="2">
-              <a:schemeClr val="accent1">
-                <a:shade val="50000"/>
-              </a:schemeClr>
-            </a:lnRef>
-            <a:fillRef idx="1">
-              <a:schemeClr val="accent1"/>
-            </a:fillRef>
-            <a:effectRef idx="0">
-              <a:schemeClr val="accent1"/>
-            </a:effectRef>
-            <a:fontRef idx="minor">
-              <a:schemeClr val="lt1"/>
-            </a:fontRef>
-          </p:style>
-          <p:txBody>
-            <a:bodyPr rtlCol="0" anchor="ctr"/>
-            <a:lstStyle/>
-            <a:p>
-              <a:pPr algn="ctr"/>
-              <a:endParaRPr lang="en-US"/>
-            </a:p>
-          </p:txBody>
-        </p:sp>
-        <p:sp>
-          <p:nvSpPr>
-            <p:cNvPr id="385" name="Arrow: Pentagon 384">
-              <a:extLst>
-                <a:ext uri="{FF2B5EF4-FFF2-40B4-BE49-F238E27FC236}">
-                  <a16:creationId xmlns:a16="http://schemas.microsoft.com/office/drawing/2014/main" id="{404C6780-37D4-CE10-0EFA-6FB3A3A5D7EE}"/>
-                </a:ext>
-              </a:extLst>
-            </p:cNvPr>
-            <p:cNvSpPr/>
-            <p:nvPr/>
-          </p:nvSpPr>
-          <p:spPr>
-            <a:xfrm rot="5400000">
-              <a:off x="1435661" y="1173775"/>
-              <a:ext cx="1097280" cy="1097280"/>
-            </a:xfrm>
-            <a:prstGeom prst="homePlate">
-              <a:avLst/>
-            </a:prstGeom>
-            <a:noFill/>
-            <a:ln w="38100" cap="flat" cmpd="sng" algn="ctr">
-              <a:solidFill>
-                <a:schemeClr val="dk1"/>
-              </a:solidFill>
-              <a:prstDash val="solid"/>
-              <a:round/>
-              <a:headEnd type="none" w="med" len="med"/>
-              <a:tailEnd type="none" w="med" len="med"/>
-            </a:ln>
-          </p:spPr>
-          <p:style>
-            <a:lnRef idx="0">
-              <a:scrgbClr r="0" g="0" b="0"/>
-            </a:lnRef>
-            <a:fillRef idx="0">
-              <a:scrgbClr r="0" g="0" b="0"/>
-            </a:fillRef>
-            <a:effectRef idx="0">
-              <a:scrgbClr r="0" g="0" b="0"/>
-            </a:effectRef>
-            <a:fontRef idx="minor">
-              <a:schemeClr val="dk1"/>
-            </a:fontRef>
-          </p:style>
-          <p:txBody>
-            <a:bodyPr rtlCol="0" anchor="ctr"/>
-            <a:lstStyle/>
-            <a:p>
-              <a:pPr algn="ctr"/>
-              <a:endParaRPr lang="en-US"/>
-            </a:p>
-          </p:txBody>
-        </p:sp>
-      </p:grpSp>
       <p:grpSp>
         <p:nvGrpSpPr>
           <p:cNvPr id="316" name="Group 315">
@@ -16225,6 +16051,2979 @@
             </a:p>
           </p:txBody>
         </p:sp>
+      </p:grpSp>
+      <p:grpSp>
+        <p:nvGrpSpPr>
+          <p:cNvPr id="128" name="Group 127">
+            <a:extLst>
+              <a:ext uri="{FF2B5EF4-FFF2-40B4-BE49-F238E27FC236}">
+                <a16:creationId xmlns:a16="http://schemas.microsoft.com/office/drawing/2014/main" id="{0B84C4B5-AF52-5E8A-40AA-C9ECA2E1A76A}"/>
+              </a:ext>
+            </a:extLst>
+          </p:cNvPr>
+          <p:cNvGrpSpPr/>
+          <p:nvPr/>
+        </p:nvGrpSpPr>
+        <p:grpSpPr>
+          <a:xfrm>
+            <a:off x="3616187" y="3920973"/>
+            <a:ext cx="1371600" cy="1371600"/>
+            <a:chOff x="715109" y="5486400"/>
+            <a:chExt cx="1371600" cy="1371600"/>
+          </a:xfrm>
+        </p:grpSpPr>
+        <p:grpSp>
+          <p:nvGrpSpPr>
+            <p:cNvPr id="6" name="Group 5">
+              <a:extLst>
+                <a:ext uri="{FF2B5EF4-FFF2-40B4-BE49-F238E27FC236}">
+                  <a16:creationId xmlns:a16="http://schemas.microsoft.com/office/drawing/2014/main" id="{E1FB66F4-F153-7662-72E3-19A36A599D5A}"/>
+                </a:ext>
+              </a:extLst>
+            </p:cNvPr>
+            <p:cNvGrpSpPr/>
+            <p:nvPr/>
+          </p:nvGrpSpPr>
+          <p:grpSpPr>
+            <a:xfrm>
+              <a:off x="715109" y="5486400"/>
+              <a:ext cx="1371600" cy="1371600"/>
+              <a:chOff x="1298501" y="962272"/>
+              <a:chExt cx="1371600" cy="1371600"/>
+            </a:xfrm>
+          </p:grpSpPr>
+          <p:sp>
+            <p:nvSpPr>
+              <p:cNvPr id="25" name="Rectangle 24">
+                <a:extLst>
+                  <a:ext uri="{FF2B5EF4-FFF2-40B4-BE49-F238E27FC236}">
+                    <a16:creationId xmlns:a16="http://schemas.microsoft.com/office/drawing/2014/main" id="{32B74246-1CFA-F53C-D040-BB935974204F}"/>
+                  </a:ext>
+                </a:extLst>
+              </p:cNvPr>
+              <p:cNvSpPr/>
+              <p:nvPr/>
+            </p:nvSpPr>
+            <p:spPr>
+              <a:xfrm>
+                <a:off x="1298501" y="962272"/>
+                <a:ext cx="1371600" cy="1371600"/>
+              </a:xfrm>
+              <a:prstGeom prst="rect">
+                <a:avLst/>
+              </a:prstGeom>
+              <a:noFill/>
+              <a:ln w="76200">
+                <a:solidFill>
+                  <a:schemeClr val="tx1"/>
+                </a:solidFill>
+              </a:ln>
+            </p:spPr>
+            <p:style>
+              <a:lnRef idx="2">
+                <a:schemeClr val="accent1">
+                  <a:shade val="50000"/>
+                </a:schemeClr>
+              </a:lnRef>
+              <a:fillRef idx="1">
+                <a:schemeClr val="accent1"/>
+              </a:fillRef>
+              <a:effectRef idx="0">
+                <a:schemeClr val="accent1"/>
+              </a:effectRef>
+              <a:fontRef idx="minor">
+                <a:schemeClr val="lt1"/>
+              </a:fontRef>
+            </p:style>
+            <p:txBody>
+              <a:bodyPr rtlCol="0" anchor="ctr"/>
+              <a:lstStyle/>
+              <a:p>
+                <a:pPr algn="ctr"/>
+                <a:endParaRPr lang="en-US"/>
+              </a:p>
+            </p:txBody>
+          </p:sp>
+          <p:sp>
+            <p:nvSpPr>
+              <p:cNvPr id="27" name="Arrow: Pentagon 26">
+                <a:extLst>
+                  <a:ext uri="{FF2B5EF4-FFF2-40B4-BE49-F238E27FC236}">
+                    <a16:creationId xmlns:a16="http://schemas.microsoft.com/office/drawing/2014/main" id="{6206E87F-D348-92D4-BC1F-8C927C03E2E9}"/>
+                  </a:ext>
+                </a:extLst>
+              </p:cNvPr>
+              <p:cNvSpPr/>
+              <p:nvPr/>
+            </p:nvSpPr>
+            <p:spPr>
+              <a:xfrm rot="5400000">
+                <a:off x="1435661" y="1173775"/>
+                <a:ext cx="1097280" cy="1097280"/>
+              </a:xfrm>
+              <a:prstGeom prst="homePlate">
+                <a:avLst/>
+              </a:prstGeom>
+              <a:noFill/>
+              <a:ln w="38100" cap="flat" cmpd="sng" algn="ctr">
+                <a:solidFill>
+                  <a:schemeClr val="dk1"/>
+                </a:solidFill>
+                <a:prstDash val="solid"/>
+                <a:round/>
+                <a:headEnd type="none" w="med" len="med"/>
+                <a:tailEnd type="none" w="med" len="med"/>
+              </a:ln>
+            </p:spPr>
+            <p:style>
+              <a:lnRef idx="0">
+                <a:scrgbClr r="0" g="0" b="0"/>
+              </a:lnRef>
+              <a:fillRef idx="0">
+                <a:scrgbClr r="0" g="0" b="0"/>
+              </a:fillRef>
+              <a:effectRef idx="0">
+                <a:scrgbClr r="0" g="0" b="0"/>
+              </a:effectRef>
+              <a:fontRef idx="minor">
+                <a:schemeClr val="dk1"/>
+              </a:fontRef>
+            </p:style>
+            <p:txBody>
+              <a:bodyPr rtlCol="0" anchor="ctr"/>
+              <a:lstStyle/>
+              <a:p>
+                <a:pPr algn="ctr"/>
+                <a:endParaRPr lang="en-US"/>
+              </a:p>
+            </p:txBody>
+          </p:sp>
+        </p:grpSp>
+        <p:grpSp>
+          <p:nvGrpSpPr>
+            <p:cNvPr id="63" name="Group 62">
+              <a:extLst>
+                <a:ext uri="{FF2B5EF4-FFF2-40B4-BE49-F238E27FC236}">
+                  <a16:creationId xmlns:a16="http://schemas.microsoft.com/office/drawing/2014/main" id="{F374823A-B688-61AC-7732-4F4F2C4E9469}"/>
+                </a:ext>
+              </a:extLst>
+            </p:cNvPr>
+            <p:cNvGrpSpPr/>
+            <p:nvPr/>
+          </p:nvGrpSpPr>
+          <p:grpSpPr>
+            <a:xfrm>
+              <a:off x="988438" y="5737981"/>
+              <a:ext cx="824942" cy="550241"/>
+              <a:chOff x="2788414" y="3003550"/>
+              <a:chExt cx="2665648" cy="1778000"/>
+            </a:xfrm>
+          </p:grpSpPr>
+          <p:sp>
+            <p:nvSpPr>
+              <p:cNvPr id="79" name="Oval 78">
+                <a:extLst>
+                  <a:ext uri="{FF2B5EF4-FFF2-40B4-BE49-F238E27FC236}">
+                    <a16:creationId xmlns:a16="http://schemas.microsoft.com/office/drawing/2014/main" id="{87AB890A-D8AD-D493-115B-FD92AAC5DDBD}"/>
+                  </a:ext>
+                </a:extLst>
+              </p:cNvPr>
+              <p:cNvSpPr/>
+              <p:nvPr/>
+            </p:nvSpPr>
+            <p:spPr>
+              <a:xfrm>
+                <a:off x="3903803" y="3003550"/>
+                <a:ext cx="439245" cy="1778000"/>
+              </a:xfrm>
+              <a:prstGeom prst="ellipse">
+                <a:avLst/>
+              </a:prstGeom>
+            </p:spPr>
+            <p:style>
+              <a:lnRef idx="2">
+                <a:schemeClr val="dk1">
+                  <a:shade val="50000"/>
+                </a:schemeClr>
+              </a:lnRef>
+              <a:fillRef idx="1">
+                <a:schemeClr val="dk1"/>
+              </a:fillRef>
+              <a:effectRef idx="0">
+                <a:schemeClr val="dk1"/>
+              </a:effectRef>
+              <a:fontRef idx="minor">
+                <a:schemeClr val="lt1"/>
+              </a:fontRef>
+            </p:style>
+            <p:txBody>
+              <a:bodyPr rtlCol="0" anchor="ctr"/>
+              <a:lstStyle/>
+              <a:p>
+                <a:pPr algn="ctr"/>
+                <a:endParaRPr lang="en-US"/>
+              </a:p>
+            </p:txBody>
+          </p:sp>
+          <p:sp>
+            <p:nvSpPr>
+              <p:cNvPr id="80" name="Isosceles Triangle 79">
+                <a:extLst>
+                  <a:ext uri="{FF2B5EF4-FFF2-40B4-BE49-F238E27FC236}">
+                    <a16:creationId xmlns:a16="http://schemas.microsoft.com/office/drawing/2014/main" id="{A1ED84D3-550F-7D93-ED9C-E1865F7114CD}"/>
+                  </a:ext>
+                </a:extLst>
+              </p:cNvPr>
+              <p:cNvSpPr/>
+              <p:nvPr/>
+            </p:nvSpPr>
+            <p:spPr>
+              <a:xfrm>
+                <a:off x="2788414" y="3612890"/>
+                <a:ext cx="2665648" cy="1168660"/>
+              </a:xfrm>
+              <a:prstGeom prst="triangle">
+                <a:avLst/>
+              </a:prstGeom>
+            </p:spPr>
+            <p:style>
+              <a:lnRef idx="2">
+                <a:schemeClr val="dk1">
+                  <a:shade val="50000"/>
+                </a:schemeClr>
+              </a:lnRef>
+              <a:fillRef idx="1">
+                <a:schemeClr val="dk1"/>
+              </a:fillRef>
+              <a:effectRef idx="0">
+                <a:schemeClr val="dk1"/>
+              </a:effectRef>
+              <a:fontRef idx="minor">
+                <a:schemeClr val="lt1"/>
+              </a:fontRef>
+            </p:style>
+            <p:txBody>
+              <a:bodyPr rtlCol="0" anchor="ctr"/>
+              <a:lstStyle/>
+              <a:p>
+                <a:pPr algn="ctr"/>
+                <a:endParaRPr lang="en-US"/>
+              </a:p>
+            </p:txBody>
+          </p:sp>
+          <p:sp>
+            <p:nvSpPr>
+              <p:cNvPr id="81" name="Oval 80">
+                <a:extLst>
+                  <a:ext uri="{FF2B5EF4-FFF2-40B4-BE49-F238E27FC236}">
+                    <a16:creationId xmlns:a16="http://schemas.microsoft.com/office/drawing/2014/main" id="{804E6619-72FA-7F8A-BE5D-23C3A6397219}"/>
+                  </a:ext>
+                </a:extLst>
+              </p:cNvPr>
+              <p:cNvSpPr/>
+              <p:nvPr/>
+            </p:nvSpPr>
+            <p:spPr>
+              <a:xfrm>
+                <a:off x="3346707" y="4263156"/>
+                <a:ext cx="458369" cy="458369"/>
+              </a:xfrm>
+              <a:prstGeom prst="ellipse">
+                <a:avLst/>
+              </a:prstGeom>
+            </p:spPr>
+            <p:style>
+              <a:lnRef idx="2">
+                <a:schemeClr val="dk1"/>
+              </a:lnRef>
+              <a:fillRef idx="1">
+                <a:schemeClr val="lt1"/>
+              </a:fillRef>
+              <a:effectRef idx="0">
+                <a:schemeClr val="dk1"/>
+              </a:effectRef>
+              <a:fontRef idx="minor">
+                <a:schemeClr val="dk1"/>
+              </a:fontRef>
+            </p:style>
+            <p:txBody>
+              <a:bodyPr rtlCol="0" anchor="ctr"/>
+              <a:lstStyle/>
+              <a:p>
+                <a:pPr algn="ctr"/>
+                <a:endParaRPr lang="en-US"/>
+              </a:p>
+            </p:txBody>
+          </p:sp>
+          <p:sp>
+            <p:nvSpPr>
+              <p:cNvPr id="82" name="Oval 81">
+                <a:extLst>
+                  <a:ext uri="{FF2B5EF4-FFF2-40B4-BE49-F238E27FC236}">
+                    <a16:creationId xmlns:a16="http://schemas.microsoft.com/office/drawing/2014/main" id="{77F153C3-9CC3-C59F-BF76-4EEE46B37266}"/>
+                  </a:ext>
+                </a:extLst>
+              </p:cNvPr>
+              <p:cNvSpPr/>
+              <p:nvPr/>
+            </p:nvSpPr>
+            <p:spPr>
+              <a:xfrm>
+                <a:off x="4436723" y="4263156"/>
+                <a:ext cx="458369" cy="458369"/>
+              </a:xfrm>
+              <a:prstGeom prst="ellipse">
+                <a:avLst/>
+              </a:prstGeom>
+            </p:spPr>
+            <p:style>
+              <a:lnRef idx="2">
+                <a:schemeClr val="dk1"/>
+              </a:lnRef>
+              <a:fillRef idx="1">
+                <a:schemeClr val="lt1"/>
+              </a:fillRef>
+              <a:effectRef idx="0">
+                <a:schemeClr val="dk1"/>
+              </a:effectRef>
+              <a:fontRef idx="minor">
+                <a:schemeClr val="dk1"/>
+              </a:fontRef>
+            </p:style>
+            <p:txBody>
+              <a:bodyPr rtlCol="0" anchor="ctr"/>
+              <a:lstStyle/>
+              <a:p>
+                <a:pPr algn="ctr"/>
+                <a:endParaRPr lang="en-US"/>
+              </a:p>
+            </p:txBody>
+          </p:sp>
+        </p:grpSp>
+      </p:grpSp>
+      <p:grpSp>
+        <p:nvGrpSpPr>
+          <p:cNvPr id="129" name="Group 128">
+            <a:extLst>
+              <a:ext uri="{FF2B5EF4-FFF2-40B4-BE49-F238E27FC236}">
+                <a16:creationId xmlns:a16="http://schemas.microsoft.com/office/drawing/2014/main" id="{637DA29B-6C95-5204-DD7C-A5F435AB5129}"/>
+              </a:ext>
+            </a:extLst>
+          </p:cNvPr>
+          <p:cNvGrpSpPr/>
+          <p:nvPr/>
+        </p:nvGrpSpPr>
+        <p:grpSpPr>
+          <a:xfrm>
+            <a:off x="3624438" y="5458408"/>
+            <a:ext cx="1371600" cy="1371600"/>
+            <a:chOff x="2259485" y="5495736"/>
+            <a:chExt cx="1371600" cy="1371600"/>
+          </a:xfrm>
+        </p:grpSpPr>
+        <p:grpSp>
+          <p:nvGrpSpPr>
+            <p:cNvPr id="83" name="Group 82">
+              <a:extLst>
+                <a:ext uri="{FF2B5EF4-FFF2-40B4-BE49-F238E27FC236}">
+                  <a16:creationId xmlns:a16="http://schemas.microsoft.com/office/drawing/2014/main" id="{694F0217-E941-0DD7-CCAD-F7C4D35DF73E}"/>
+                </a:ext>
+              </a:extLst>
+            </p:cNvPr>
+            <p:cNvGrpSpPr/>
+            <p:nvPr/>
+          </p:nvGrpSpPr>
+          <p:grpSpPr>
+            <a:xfrm>
+              <a:off x="2558744" y="5779095"/>
+              <a:ext cx="770328" cy="575178"/>
+              <a:chOff x="7066650" y="3003550"/>
+              <a:chExt cx="2381250" cy="1778000"/>
+            </a:xfrm>
+          </p:grpSpPr>
+          <p:sp>
+            <p:nvSpPr>
+              <p:cNvPr id="84" name="Rectangle 83">
+                <a:extLst>
+                  <a:ext uri="{FF2B5EF4-FFF2-40B4-BE49-F238E27FC236}">
+                    <a16:creationId xmlns:a16="http://schemas.microsoft.com/office/drawing/2014/main" id="{E0044D38-0555-0DDA-2AEE-D1FA5C9DC32F}"/>
+                  </a:ext>
+                </a:extLst>
+              </p:cNvPr>
+              <p:cNvSpPr/>
+              <p:nvPr/>
+            </p:nvSpPr>
+            <p:spPr>
+              <a:xfrm>
+                <a:off x="7066650" y="3429000"/>
+                <a:ext cx="2381250" cy="1352550"/>
+              </a:xfrm>
+              <a:prstGeom prst="rect">
+                <a:avLst/>
+              </a:prstGeom>
+            </p:spPr>
+            <p:style>
+              <a:lnRef idx="2">
+                <a:schemeClr val="dk1">
+                  <a:shade val="50000"/>
+                </a:schemeClr>
+              </a:lnRef>
+              <a:fillRef idx="1">
+                <a:schemeClr val="dk1"/>
+              </a:fillRef>
+              <a:effectRef idx="0">
+                <a:schemeClr val="dk1"/>
+              </a:effectRef>
+              <a:fontRef idx="minor">
+                <a:schemeClr val="lt1"/>
+              </a:fontRef>
+            </p:style>
+            <p:txBody>
+              <a:bodyPr rtlCol="0" anchor="ctr"/>
+              <a:lstStyle/>
+              <a:p>
+                <a:pPr algn="ctr"/>
+                <a:endParaRPr lang="en-US"/>
+              </a:p>
+            </p:txBody>
+          </p:sp>
+          <p:sp>
+            <p:nvSpPr>
+              <p:cNvPr id="87" name="Oval 86">
+                <a:extLst>
+                  <a:ext uri="{FF2B5EF4-FFF2-40B4-BE49-F238E27FC236}">
+                    <a16:creationId xmlns:a16="http://schemas.microsoft.com/office/drawing/2014/main" id="{9231ED0F-0E39-4F4B-FBB7-3F216B8E8A81}"/>
+                  </a:ext>
+                </a:extLst>
+              </p:cNvPr>
+              <p:cNvSpPr/>
+              <p:nvPr/>
+            </p:nvSpPr>
+            <p:spPr>
+              <a:xfrm>
+                <a:off x="8037653" y="3003550"/>
+                <a:ext cx="439245" cy="1778000"/>
+              </a:xfrm>
+              <a:prstGeom prst="ellipse">
+                <a:avLst/>
+              </a:prstGeom>
+            </p:spPr>
+            <p:style>
+              <a:lnRef idx="2">
+                <a:schemeClr val="dk1">
+                  <a:shade val="50000"/>
+                </a:schemeClr>
+              </a:lnRef>
+              <a:fillRef idx="1">
+                <a:schemeClr val="dk1"/>
+              </a:fillRef>
+              <a:effectRef idx="0">
+                <a:schemeClr val="dk1"/>
+              </a:effectRef>
+              <a:fontRef idx="minor">
+                <a:schemeClr val="lt1"/>
+              </a:fontRef>
+            </p:style>
+            <p:txBody>
+              <a:bodyPr rtlCol="0" anchor="ctr"/>
+              <a:lstStyle/>
+              <a:p>
+                <a:pPr algn="ctr"/>
+                <a:endParaRPr lang="en-US"/>
+              </a:p>
+            </p:txBody>
+          </p:sp>
+          <p:sp>
+            <p:nvSpPr>
+              <p:cNvPr id="89" name="Oval 88">
+                <a:extLst>
+                  <a:ext uri="{FF2B5EF4-FFF2-40B4-BE49-F238E27FC236}">
+                    <a16:creationId xmlns:a16="http://schemas.microsoft.com/office/drawing/2014/main" id="{E0155EBA-A744-104B-95EE-3120731F0709}"/>
+                  </a:ext>
+                </a:extLst>
+              </p:cNvPr>
+              <p:cNvSpPr/>
+              <p:nvPr/>
+            </p:nvSpPr>
+            <p:spPr>
+              <a:xfrm>
+                <a:off x="7480557" y="3512687"/>
+                <a:ext cx="458369" cy="458369"/>
+              </a:xfrm>
+              <a:prstGeom prst="ellipse">
+                <a:avLst/>
+              </a:prstGeom>
+            </p:spPr>
+            <p:style>
+              <a:lnRef idx="2">
+                <a:schemeClr val="dk1"/>
+              </a:lnRef>
+              <a:fillRef idx="1">
+                <a:schemeClr val="lt1"/>
+              </a:fillRef>
+              <a:effectRef idx="0">
+                <a:schemeClr val="dk1"/>
+              </a:effectRef>
+              <a:fontRef idx="minor">
+                <a:schemeClr val="dk1"/>
+              </a:fontRef>
+            </p:style>
+            <p:txBody>
+              <a:bodyPr rtlCol="0" anchor="ctr"/>
+              <a:lstStyle/>
+              <a:p>
+                <a:pPr algn="ctr"/>
+                <a:endParaRPr lang="en-US"/>
+              </a:p>
+            </p:txBody>
+          </p:sp>
+          <p:sp>
+            <p:nvSpPr>
+              <p:cNvPr id="122" name="Oval 121">
+                <a:extLst>
+                  <a:ext uri="{FF2B5EF4-FFF2-40B4-BE49-F238E27FC236}">
+                    <a16:creationId xmlns:a16="http://schemas.microsoft.com/office/drawing/2014/main" id="{B90A0BAD-227B-7CCB-B39E-4E81B5C634C5}"/>
+                  </a:ext>
+                </a:extLst>
+              </p:cNvPr>
+              <p:cNvSpPr/>
+              <p:nvPr/>
+            </p:nvSpPr>
+            <p:spPr>
+              <a:xfrm>
+                <a:off x="8570573" y="3512687"/>
+                <a:ext cx="458369" cy="458369"/>
+              </a:xfrm>
+              <a:prstGeom prst="ellipse">
+                <a:avLst/>
+              </a:prstGeom>
+            </p:spPr>
+            <p:style>
+              <a:lnRef idx="2">
+                <a:schemeClr val="dk1"/>
+              </a:lnRef>
+              <a:fillRef idx="1">
+                <a:schemeClr val="lt1"/>
+              </a:fillRef>
+              <a:effectRef idx="0">
+                <a:schemeClr val="dk1"/>
+              </a:effectRef>
+              <a:fontRef idx="minor">
+                <a:schemeClr val="dk1"/>
+              </a:fontRef>
+            </p:style>
+            <p:txBody>
+              <a:bodyPr rtlCol="0" anchor="ctr"/>
+              <a:lstStyle/>
+              <a:p>
+                <a:pPr algn="ctr"/>
+                <a:endParaRPr lang="en-US"/>
+              </a:p>
+            </p:txBody>
+          </p:sp>
+          <p:sp>
+            <p:nvSpPr>
+              <p:cNvPr id="123" name="Oval 122">
+                <a:extLst>
+                  <a:ext uri="{FF2B5EF4-FFF2-40B4-BE49-F238E27FC236}">
+                    <a16:creationId xmlns:a16="http://schemas.microsoft.com/office/drawing/2014/main" id="{0F155BBB-48CB-E971-438A-76B70FFB5622}"/>
+                  </a:ext>
+                </a:extLst>
+              </p:cNvPr>
+              <p:cNvSpPr/>
+              <p:nvPr/>
+            </p:nvSpPr>
+            <p:spPr>
+              <a:xfrm>
+                <a:off x="7480557" y="4167321"/>
+                <a:ext cx="458369" cy="458369"/>
+              </a:xfrm>
+              <a:prstGeom prst="ellipse">
+                <a:avLst/>
+              </a:prstGeom>
+            </p:spPr>
+            <p:style>
+              <a:lnRef idx="2">
+                <a:schemeClr val="dk1"/>
+              </a:lnRef>
+              <a:fillRef idx="1">
+                <a:schemeClr val="lt1"/>
+              </a:fillRef>
+              <a:effectRef idx="0">
+                <a:schemeClr val="dk1"/>
+              </a:effectRef>
+              <a:fontRef idx="minor">
+                <a:schemeClr val="dk1"/>
+              </a:fontRef>
+            </p:style>
+            <p:txBody>
+              <a:bodyPr rtlCol="0" anchor="ctr"/>
+              <a:lstStyle/>
+              <a:p>
+                <a:pPr algn="ctr"/>
+                <a:endParaRPr lang="en-US"/>
+              </a:p>
+            </p:txBody>
+          </p:sp>
+          <p:sp>
+            <p:nvSpPr>
+              <p:cNvPr id="124" name="Oval 123">
+                <a:extLst>
+                  <a:ext uri="{FF2B5EF4-FFF2-40B4-BE49-F238E27FC236}">
+                    <a16:creationId xmlns:a16="http://schemas.microsoft.com/office/drawing/2014/main" id="{9AF0B8D7-2096-54C1-C1A3-940CD48B1548}"/>
+                  </a:ext>
+                </a:extLst>
+              </p:cNvPr>
+              <p:cNvSpPr/>
+              <p:nvPr/>
+            </p:nvSpPr>
+            <p:spPr>
+              <a:xfrm>
+                <a:off x="8570573" y="4167321"/>
+                <a:ext cx="458369" cy="458369"/>
+              </a:xfrm>
+              <a:prstGeom prst="ellipse">
+                <a:avLst/>
+              </a:prstGeom>
+            </p:spPr>
+            <p:style>
+              <a:lnRef idx="2">
+                <a:schemeClr val="dk1"/>
+              </a:lnRef>
+              <a:fillRef idx="1">
+                <a:schemeClr val="lt1"/>
+              </a:fillRef>
+              <a:effectRef idx="0">
+                <a:schemeClr val="dk1"/>
+              </a:effectRef>
+              <a:fontRef idx="minor">
+                <a:schemeClr val="dk1"/>
+              </a:fontRef>
+            </p:style>
+            <p:txBody>
+              <a:bodyPr rtlCol="0" anchor="ctr"/>
+              <a:lstStyle/>
+              <a:p>
+                <a:pPr algn="ctr"/>
+                <a:endParaRPr lang="en-US"/>
+              </a:p>
+            </p:txBody>
+          </p:sp>
+        </p:grpSp>
+        <p:grpSp>
+          <p:nvGrpSpPr>
+            <p:cNvPr id="125" name="Group 124">
+              <a:extLst>
+                <a:ext uri="{FF2B5EF4-FFF2-40B4-BE49-F238E27FC236}">
+                  <a16:creationId xmlns:a16="http://schemas.microsoft.com/office/drawing/2014/main" id="{5E2E00E3-481E-2DDC-50DC-CF92CF33C4C7}"/>
+                </a:ext>
+              </a:extLst>
+            </p:cNvPr>
+            <p:cNvGrpSpPr/>
+            <p:nvPr/>
+          </p:nvGrpSpPr>
+          <p:grpSpPr>
+            <a:xfrm>
+              <a:off x="2259485" y="5495736"/>
+              <a:ext cx="1371600" cy="1371600"/>
+              <a:chOff x="1298501" y="962272"/>
+              <a:chExt cx="1371600" cy="1371600"/>
+            </a:xfrm>
+          </p:grpSpPr>
+          <p:sp>
+            <p:nvSpPr>
+              <p:cNvPr id="126" name="Rectangle 125">
+                <a:extLst>
+                  <a:ext uri="{FF2B5EF4-FFF2-40B4-BE49-F238E27FC236}">
+                    <a16:creationId xmlns:a16="http://schemas.microsoft.com/office/drawing/2014/main" id="{381458B9-6C49-2FA1-F8E1-85C9205E31CD}"/>
+                  </a:ext>
+                </a:extLst>
+              </p:cNvPr>
+              <p:cNvSpPr/>
+              <p:nvPr/>
+            </p:nvSpPr>
+            <p:spPr>
+              <a:xfrm>
+                <a:off x="1298501" y="962272"/>
+                <a:ext cx="1371600" cy="1371600"/>
+              </a:xfrm>
+              <a:prstGeom prst="rect">
+                <a:avLst/>
+              </a:prstGeom>
+              <a:noFill/>
+              <a:ln w="76200">
+                <a:solidFill>
+                  <a:schemeClr val="tx1"/>
+                </a:solidFill>
+              </a:ln>
+            </p:spPr>
+            <p:style>
+              <a:lnRef idx="2">
+                <a:schemeClr val="accent1">
+                  <a:shade val="50000"/>
+                </a:schemeClr>
+              </a:lnRef>
+              <a:fillRef idx="1">
+                <a:schemeClr val="accent1"/>
+              </a:fillRef>
+              <a:effectRef idx="0">
+                <a:schemeClr val="accent1"/>
+              </a:effectRef>
+              <a:fontRef idx="minor">
+                <a:schemeClr val="lt1"/>
+              </a:fontRef>
+            </p:style>
+            <p:txBody>
+              <a:bodyPr rtlCol="0" anchor="ctr"/>
+              <a:lstStyle/>
+              <a:p>
+                <a:pPr algn="ctr"/>
+                <a:endParaRPr lang="en-US"/>
+              </a:p>
+            </p:txBody>
+          </p:sp>
+          <p:sp>
+            <p:nvSpPr>
+              <p:cNvPr id="127" name="Arrow: Pentagon 126">
+                <a:extLst>
+                  <a:ext uri="{FF2B5EF4-FFF2-40B4-BE49-F238E27FC236}">
+                    <a16:creationId xmlns:a16="http://schemas.microsoft.com/office/drawing/2014/main" id="{71967356-3E44-C94E-5B8A-EC5A97CB1291}"/>
+                  </a:ext>
+                </a:extLst>
+              </p:cNvPr>
+              <p:cNvSpPr/>
+              <p:nvPr/>
+            </p:nvSpPr>
+            <p:spPr>
+              <a:xfrm rot="5400000">
+                <a:off x="1435661" y="1173775"/>
+                <a:ext cx="1097280" cy="1097280"/>
+              </a:xfrm>
+              <a:prstGeom prst="homePlate">
+                <a:avLst/>
+              </a:prstGeom>
+              <a:noFill/>
+              <a:ln w="38100" cap="flat" cmpd="sng" algn="ctr">
+                <a:solidFill>
+                  <a:schemeClr val="dk1"/>
+                </a:solidFill>
+                <a:prstDash val="solid"/>
+                <a:round/>
+                <a:headEnd type="none" w="med" len="med"/>
+                <a:tailEnd type="none" w="med" len="med"/>
+              </a:ln>
+            </p:spPr>
+            <p:style>
+              <a:lnRef idx="0">
+                <a:scrgbClr r="0" g="0" b="0"/>
+              </a:lnRef>
+              <a:fillRef idx="0">
+                <a:scrgbClr r="0" g="0" b="0"/>
+              </a:fillRef>
+              <a:effectRef idx="0">
+                <a:scrgbClr r="0" g="0" b="0"/>
+              </a:effectRef>
+              <a:fontRef idx="minor">
+                <a:schemeClr val="dk1"/>
+              </a:fontRef>
+            </p:style>
+            <p:txBody>
+              <a:bodyPr rtlCol="0" anchor="ctr"/>
+              <a:lstStyle/>
+              <a:p>
+                <a:pPr algn="ctr"/>
+                <a:endParaRPr lang="en-US"/>
+              </a:p>
+            </p:txBody>
+          </p:sp>
+        </p:grpSp>
+      </p:grpSp>
+      <p:grpSp>
+        <p:nvGrpSpPr>
+          <p:cNvPr id="130" name="Group 129">
+            <a:extLst>
+              <a:ext uri="{FF2B5EF4-FFF2-40B4-BE49-F238E27FC236}">
+                <a16:creationId xmlns:a16="http://schemas.microsoft.com/office/drawing/2014/main" id="{5F292E58-1623-C95C-98B7-C753B7D5DD09}"/>
+              </a:ext>
+            </a:extLst>
+          </p:cNvPr>
+          <p:cNvGrpSpPr/>
+          <p:nvPr/>
+        </p:nvGrpSpPr>
+        <p:grpSpPr>
+          <a:xfrm>
+            <a:off x="180817" y="5390177"/>
+            <a:ext cx="1371600" cy="1371600"/>
+            <a:chOff x="243475" y="146351"/>
+            <a:chExt cx="1371600" cy="1371600"/>
+          </a:xfrm>
+        </p:grpSpPr>
+        <p:grpSp>
+          <p:nvGrpSpPr>
+            <p:cNvPr id="131" name="Group 130">
+              <a:extLst>
+                <a:ext uri="{FF2B5EF4-FFF2-40B4-BE49-F238E27FC236}">
+                  <a16:creationId xmlns:a16="http://schemas.microsoft.com/office/drawing/2014/main" id="{A6A14D18-C9E6-58A8-F0EE-B1ECE4CF3D11}"/>
+                </a:ext>
+              </a:extLst>
+            </p:cNvPr>
+            <p:cNvGrpSpPr/>
+            <p:nvPr/>
+          </p:nvGrpSpPr>
+          <p:grpSpPr>
+            <a:xfrm>
+              <a:off x="243475" y="146351"/>
+              <a:ext cx="1371600" cy="1371600"/>
+              <a:chOff x="1298501" y="962272"/>
+              <a:chExt cx="1371600" cy="1371600"/>
+            </a:xfrm>
+          </p:grpSpPr>
+          <p:sp>
+            <p:nvSpPr>
+              <p:cNvPr id="157" name="Rectangle 156">
+                <a:extLst>
+                  <a:ext uri="{FF2B5EF4-FFF2-40B4-BE49-F238E27FC236}">
+                    <a16:creationId xmlns:a16="http://schemas.microsoft.com/office/drawing/2014/main" id="{1F00A8C5-04C2-C708-5FB1-D2288907E83E}"/>
+                  </a:ext>
+                </a:extLst>
+              </p:cNvPr>
+              <p:cNvSpPr/>
+              <p:nvPr/>
+            </p:nvSpPr>
+            <p:spPr>
+              <a:xfrm>
+                <a:off x="1298501" y="962272"/>
+                <a:ext cx="1371600" cy="1371600"/>
+              </a:xfrm>
+              <a:prstGeom prst="rect">
+                <a:avLst/>
+              </a:prstGeom>
+              <a:noFill/>
+              <a:ln w="76200">
+                <a:solidFill>
+                  <a:schemeClr val="tx1"/>
+                </a:solidFill>
+              </a:ln>
+            </p:spPr>
+            <p:style>
+              <a:lnRef idx="2">
+                <a:schemeClr val="accent1">
+                  <a:shade val="50000"/>
+                </a:schemeClr>
+              </a:lnRef>
+              <a:fillRef idx="1">
+                <a:schemeClr val="accent1"/>
+              </a:fillRef>
+              <a:effectRef idx="0">
+                <a:schemeClr val="accent1"/>
+              </a:effectRef>
+              <a:fontRef idx="minor">
+                <a:schemeClr val="lt1"/>
+              </a:fontRef>
+            </p:style>
+            <p:txBody>
+              <a:bodyPr rtlCol="0" anchor="ctr"/>
+              <a:lstStyle/>
+              <a:p>
+                <a:pPr algn="ctr"/>
+                <a:endParaRPr lang="en-US"/>
+              </a:p>
+            </p:txBody>
+          </p:sp>
+          <p:sp>
+            <p:nvSpPr>
+              <p:cNvPr id="158" name="Arrow: Pentagon 157">
+                <a:extLst>
+                  <a:ext uri="{FF2B5EF4-FFF2-40B4-BE49-F238E27FC236}">
+                    <a16:creationId xmlns:a16="http://schemas.microsoft.com/office/drawing/2014/main" id="{A466F8C8-ADC3-DB20-A030-A0A8912CA9A0}"/>
+                  </a:ext>
+                </a:extLst>
+              </p:cNvPr>
+              <p:cNvSpPr/>
+              <p:nvPr/>
+            </p:nvSpPr>
+            <p:spPr>
+              <a:xfrm rot="5400000">
+                <a:off x="1435661" y="1173775"/>
+                <a:ext cx="1097280" cy="1097280"/>
+              </a:xfrm>
+              <a:prstGeom prst="homePlate">
+                <a:avLst/>
+              </a:prstGeom>
+              <a:noFill/>
+              <a:ln w="38100" cap="flat" cmpd="sng" algn="ctr">
+                <a:solidFill>
+                  <a:schemeClr val="dk1"/>
+                </a:solidFill>
+                <a:prstDash val="solid"/>
+                <a:round/>
+                <a:headEnd type="none" w="med" len="med"/>
+                <a:tailEnd type="none" w="med" len="med"/>
+              </a:ln>
+            </p:spPr>
+            <p:style>
+              <a:lnRef idx="0">
+                <a:scrgbClr r="0" g="0" b="0"/>
+              </a:lnRef>
+              <a:fillRef idx="0">
+                <a:scrgbClr r="0" g="0" b="0"/>
+              </a:fillRef>
+              <a:effectRef idx="0">
+                <a:scrgbClr r="0" g="0" b="0"/>
+              </a:effectRef>
+              <a:fontRef idx="minor">
+                <a:schemeClr val="dk1"/>
+              </a:fontRef>
+            </p:style>
+            <p:txBody>
+              <a:bodyPr rtlCol="0" anchor="ctr"/>
+              <a:lstStyle/>
+              <a:p>
+                <a:pPr algn="ctr"/>
+                <a:endParaRPr lang="en-US"/>
+              </a:p>
+            </p:txBody>
+          </p:sp>
+        </p:grpSp>
+        <p:grpSp>
+          <p:nvGrpSpPr>
+            <p:cNvPr id="133" name="Group 132">
+              <a:extLst>
+                <a:ext uri="{FF2B5EF4-FFF2-40B4-BE49-F238E27FC236}">
+                  <a16:creationId xmlns:a16="http://schemas.microsoft.com/office/drawing/2014/main" id="{854231A7-B370-1C74-88F1-0CB8B58AD926}"/>
+                </a:ext>
+              </a:extLst>
+            </p:cNvPr>
+            <p:cNvGrpSpPr/>
+            <p:nvPr/>
+          </p:nvGrpSpPr>
+          <p:grpSpPr>
+            <a:xfrm>
+              <a:off x="422295" y="508928"/>
+              <a:ext cx="884120" cy="519527"/>
+              <a:chOff x="1858637" y="2247118"/>
+              <a:chExt cx="3556602" cy="2089932"/>
+            </a:xfrm>
+          </p:grpSpPr>
+          <p:sp>
+            <p:nvSpPr>
+              <p:cNvPr id="134" name="Rectangle 133">
+                <a:extLst>
+                  <a:ext uri="{FF2B5EF4-FFF2-40B4-BE49-F238E27FC236}">
+                    <a16:creationId xmlns:a16="http://schemas.microsoft.com/office/drawing/2014/main" id="{B3FABB1E-BC2A-FCB5-4094-ADDDA2A36FCC}"/>
+                  </a:ext>
+                </a:extLst>
+              </p:cNvPr>
+              <p:cNvSpPr/>
+              <p:nvPr/>
+            </p:nvSpPr>
+            <p:spPr>
+              <a:xfrm>
+                <a:off x="3241413" y="2942864"/>
+                <a:ext cx="1848262" cy="248868"/>
+              </a:xfrm>
+              <a:prstGeom prst="rect">
+                <a:avLst/>
+              </a:prstGeom>
+            </p:spPr>
+            <p:style>
+              <a:lnRef idx="2">
+                <a:schemeClr val="dk1">
+                  <a:shade val="50000"/>
+                </a:schemeClr>
+              </a:lnRef>
+              <a:fillRef idx="1">
+                <a:schemeClr val="dk1"/>
+              </a:fillRef>
+              <a:effectRef idx="0">
+                <a:schemeClr val="dk1"/>
+              </a:effectRef>
+              <a:fontRef idx="minor">
+                <a:schemeClr val="lt1"/>
+              </a:fontRef>
+            </p:style>
+            <p:txBody>
+              <a:bodyPr rtlCol="0" anchor="ctr"/>
+              <a:lstStyle/>
+              <a:p>
+                <a:pPr algn="ctr"/>
+                <a:endParaRPr lang="en-US"/>
+              </a:p>
+            </p:txBody>
+          </p:sp>
+          <p:sp>
+            <p:nvSpPr>
+              <p:cNvPr id="135" name="Rectangle 134">
+                <a:extLst>
+                  <a:ext uri="{FF2B5EF4-FFF2-40B4-BE49-F238E27FC236}">
+                    <a16:creationId xmlns:a16="http://schemas.microsoft.com/office/drawing/2014/main" id="{212E7F84-5B45-77BC-80EE-58C693B4BA7E}"/>
+                  </a:ext>
+                </a:extLst>
+              </p:cNvPr>
+              <p:cNvSpPr/>
+              <p:nvPr/>
+            </p:nvSpPr>
+            <p:spPr>
+              <a:xfrm rot="19876836">
+                <a:off x="2246449" y="3191249"/>
+                <a:ext cx="1097536" cy="248868"/>
+              </a:xfrm>
+              <a:prstGeom prst="rect">
+                <a:avLst/>
+              </a:prstGeom>
+            </p:spPr>
+            <p:style>
+              <a:lnRef idx="2">
+                <a:schemeClr val="dk1">
+                  <a:shade val="50000"/>
+                </a:schemeClr>
+              </a:lnRef>
+              <a:fillRef idx="1">
+                <a:schemeClr val="dk1"/>
+              </a:fillRef>
+              <a:effectRef idx="0">
+                <a:schemeClr val="dk1"/>
+              </a:effectRef>
+              <a:fontRef idx="minor">
+                <a:schemeClr val="lt1"/>
+              </a:fontRef>
+            </p:style>
+            <p:txBody>
+              <a:bodyPr rtlCol="0" anchor="ctr"/>
+              <a:lstStyle/>
+              <a:p>
+                <a:pPr algn="ctr"/>
+                <a:endParaRPr lang="en-US"/>
+              </a:p>
+            </p:txBody>
+          </p:sp>
+          <p:sp>
+            <p:nvSpPr>
+              <p:cNvPr id="136" name="Rectangle 135">
+                <a:extLst>
+                  <a:ext uri="{FF2B5EF4-FFF2-40B4-BE49-F238E27FC236}">
+                    <a16:creationId xmlns:a16="http://schemas.microsoft.com/office/drawing/2014/main" id="{1CF90107-A265-8B84-5456-D5F8D1DCFFE8}"/>
+                  </a:ext>
+                </a:extLst>
+              </p:cNvPr>
+              <p:cNvSpPr/>
+              <p:nvPr/>
+            </p:nvSpPr>
+            <p:spPr>
+              <a:xfrm rot="3856563">
+                <a:off x="4763390" y="3211519"/>
+                <a:ext cx="752766" cy="248868"/>
+              </a:xfrm>
+              <a:prstGeom prst="rect">
+                <a:avLst/>
+              </a:prstGeom>
+            </p:spPr>
+            <p:style>
+              <a:lnRef idx="2">
+                <a:schemeClr val="dk1">
+                  <a:shade val="50000"/>
+                </a:schemeClr>
+              </a:lnRef>
+              <a:fillRef idx="1">
+                <a:schemeClr val="dk1"/>
+              </a:fillRef>
+              <a:effectRef idx="0">
+                <a:schemeClr val="dk1"/>
+              </a:effectRef>
+              <a:fontRef idx="minor">
+                <a:schemeClr val="lt1"/>
+              </a:fontRef>
+            </p:style>
+            <p:txBody>
+              <a:bodyPr rtlCol="0" anchor="ctr"/>
+              <a:lstStyle/>
+              <a:p>
+                <a:pPr algn="ctr"/>
+                <a:endParaRPr lang="en-US"/>
+              </a:p>
+            </p:txBody>
+          </p:sp>
+          <p:sp>
+            <p:nvSpPr>
+              <p:cNvPr id="137" name="Rectangle 136">
+                <a:extLst>
+                  <a:ext uri="{FF2B5EF4-FFF2-40B4-BE49-F238E27FC236}">
+                    <a16:creationId xmlns:a16="http://schemas.microsoft.com/office/drawing/2014/main" id="{C711D3E0-24C4-784F-1077-CDFF039E03EA}"/>
+                  </a:ext>
+                </a:extLst>
+              </p:cNvPr>
+              <p:cNvSpPr/>
+              <p:nvPr/>
+            </p:nvSpPr>
+            <p:spPr>
+              <a:xfrm>
+                <a:off x="2254160" y="3467849"/>
+                <a:ext cx="3161079" cy="522388"/>
+              </a:xfrm>
+              <a:prstGeom prst="rect">
+                <a:avLst/>
+              </a:prstGeom>
+            </p:spPr>
+            <p:style>
+              <a:lnRef idx="2">
+                <a:schemeClr val="dk1">
+                  <a:shade val="50000"/>
+                </a:schemeClr>
+              </a:lnRef>
+              <a:fillRef idx="1">
+                <a:schemeClr val="dk1"/>
+              </a:fillRef>
+              <a:effectRef idx="0">
+                <a:schemeClr val="dk1"/>
+              </a:effectRef>
+              <a:fontRef idx="minor">
+                <a:schemeClr val="lt1"/>
+              </a:fontRef>
+            </p:style>
+            <p:txBody>
+              <a:bodyPr rtlCol="0" anchor="ctr"/>
+              <a:lstStyle/>
+              <a:p>
+                <a:pPr algn="ctr"/>
+                <a:endParaRPr lang="en-US"/>
+              </a:p>
+            </p:txBody>
+          </p:sp>
+          <p:sp>
+            <p:nvSpPr>
+              <p:cNvPr id="138" name="Oval 137">
+                <a:extLst>
+                  <a:ext uri="{FF2B5EF4-FFF2-40B4-BE49-F238E27FC236}">
+                    <a16:creationId xmlns:a16="http://schemas.microsoft.com/office/drawing/2014/main" id="{DAC33096-BCD2-0051-558F-97E451268A20}"/>
+                  </a:ext>
+                </a:extLst>
+              </p:cNvPr>
+              <p:cNvSpPr/>
+              <p:nvPr/>
+            </p:nvSpPr>
+            <p:spPr>
+              <a:xfrm>
+                <a:off x="2518799" y="3643429"/>
+                <a:ext cx="693622" cy="693621"/>
+              </a:xfrm>
+              <a:prstGeom prst="ellipse">
+                <a:avLst/>
+              </a:prstGeom>
+              <a:ln w="76200"/>
+            </p:spPr>
+            <p:style>
+              <a:lnRef idx="2">
+                <a:schemeClr val="dk1"/>
+              </a:lnRef>
+              <a:fillRef idx="1">
+                <a:schemeClr val="lt1"/>
+              </a:fillRef>
+              <a:effectRef idx="0">
+                <a:schemeClr val="dk1"/>
+              </a:effectRef>
+              <a:fontRef idx="minor">
+                <a:schemeClr val="dk1"/>
+              </a:fontRef>
+            </p:style>
+            <p:txBody>
+              <a:bodyPr rtlCol="0" anchor="ctr"/>
+              <a:lstStyle/>
+              <a:p>
+                <a:pPr algn="ctr"/>
+                <a:endParaRPr lang="en-US"/>
+              </a:p>
+            </p:txBody>
+          </p:sp>
+          <p:sp>
+            <p:nvSpPr>
+              <p:cNvPr id="139" name="Oval 138">
+                <a:extLst>
+                  <a:ext uri="{FF2B5EF4-FFF2-40B4-BE49-F238E27FC236}">
+                    <a16:creationId xmlns:a16="http://schemas.microsoft.com/office/drawing/2014/main" id="{D5769792-68E4-358B-4DA7-FA374971FD17}"/>
+                  </a:ext>
+                </a:extLst>
+              </p:cNvPr>
+              <p:cNvSpPr/>
+              <p:nvPr/>
+            </p:nvSpPr>
+            <p:spPr>
+              <a:xfrm>
+                <a:off x="3775260" y="3643429"/>
+                <a:ext cx="693622" cy="693621"/>
+              </a:xfrm>
+              <a:prstGeom prst="ellipse">
+                <a:avLst/>
+              </a:prstGeom>
+              <a:ln w="76200"/>
+            </p:spPr>
+            <p:style>
+              <a:lnRef idx="2">
+                <a:schemeClr val="dk1"/>
+              </a:lnRef>
+              <a:fillRef idx="1">
+                <a:schemeClr val="lt1"/>
+              </a:fillRef>
+              <a:effectRef idx="0">
+                <a:schemeClr val="dk1"/>
+              </a:effectRef>
+              <a:fontRef idx="minor">
+                <a:schemeClr val="dk1"/>
+              </a:fontRef>
+            </p:style>
+            <p:txBody>
+              <a:bodyPr rtlCol="0" anchor="ctr"/>
+              <a:lstStyle/>
+              <a:p>
+                <a:pPr algn="ctr"/>
+                <a:endParaRPr lang="en-US"/>
+              </a:p>
+            </p:txBody>
+          </p:sp>
+          <p:sp>
+            <p:nvSpPr>
+              <p:cNvPr id="140" name="Oval 139">
+                <a:extLst>
+                  <a:ext uri="{FF2B5EF4-FFF2-40B4-BE49-F238E27FC236}">
+                    <a16:creationId xmlns:a16="http://schemas.microsoft.com/office/drawing/2014/main" id="{8B976AF7-CC7D-4FC1-B04B-C15A767B4640}"/>
+                  </a:ext>
+                </a:extLst>
+              </p:cNvPr>
+              <p:cNvSpPr/>
+              <p:nvPr/>
+            </p:nvSpPr>
+            <p:spPr>
+              <a:xfrm>
+                <a:off x="4612351" y="3643429"/>
+                <a:ext cx="693622" cy="693621"/>
+              </a:xfrm>
+              <a:prstGeom prst="ellipse">
+                <a:avLst/>
+              </a:prstGeom>
+              <a:ln w="76200"/>
+            </p:spPr>
+            <p:style>
+              <a:lnRef idx="2">
+                <a:schemeClr val="dk1"/>
+              </a:lnRef>
+              <a:fillRef idx="1">
+                <a:schemeClr val="lt1"/>
+              </a:fillRef>
+              <a:effectRef idx="0">
+                <a:schemeClr val="dk1"/>
+              </a:effectRef>
+              <a:fontRef idx="minor">
+                <a:schemeClr val="dk1"/>
+              </a:fontRef>
+            </p:style>
+            <p:txBody>
+              <a:bodyPr rtlCol="0" anchor="ctr"/>
+              <a:lstStyle/>
+              <a:p>
+                <a:pPr algn="ctr"/>
+                <a:endParaRPr lang="en-US"/>
+              </a:p>
+            </p:txBody>
+          </p:sp>
+          <p:sp>
+            <p:nvSpPr>
+              <p:cNvPr id="141" name="Rectangle: Single Corner Snipped 140">
+                <a:extLst>
+                  <a:ext uri="{FF2B5EF4-FFF2-40B4-BE49-F238E27FC236}">
+                    <a16:creationId xmlns:a16="http://schemas.microsoft.com/office/drawing/2014/main" id="{84F81E0B-D1BB-4DFF-F949-AEEFF30666E6}"/>
+                  </a:ext>
+                </a:extLst>
+              </p:cNvPr>
+              <p:cNvSpPr/>
+              <p:nvPr/>
+            </p:nvSpPr>
+            <p:spPr>
+              <a:xfrm flipH="1" flipV="1">
+                <a:off x="3799869" y="2247118"/>
+                <a:ext cx="903248" cy="688340"/>
+              </a:xfrm>
+              <a:prstGeom prst="snip1Rect">
+                <a:avLst>
+                  <a:gd name="adj" fmla="val 50000"/>
+                </a:avLst>
+              </a:prstGeom>
+            </p:spPr>
+            <p:style>
+              <a:lnRef idx="2">
+                <a:schemeClr val="dk1">
+                  <a:shade val="50000"/>
+                </a:schemeClr>
+              </a:lnRef>
+              <a:fillRef idx="1">
+                <a:schemeClr val="dk1"/>
+              </a:fillRef>
+              <a:effectRef idx="0">
+                <a:schemeClr val="dk1"/>
+              </a:effectRef>
+              <a:fontRef idx="minor">
+                <a:schemeClr val="lt1"/>
+              </a:fontRef>
+            </p:style>
+            <p:txBody>
+              <a:bodyPr rtlCol="0" anchor="ctr"/>
+              <a:lstStyle/>
+              <a:p>
+                <a:pPr algn="ctr"/>
+                <a:endParaRPr lang="en-US"/>
+              </a:p>
+            </p:txBody>
+          </p:sp>
+          <p:pic>
+            <p:nvPicPr>
+              <p:cNvPr id="142" name="Picture 10" descr="✓ flamethrower free vector eps, cdr, ai, svg vector illustration graphic art">
+                <a:extLst>
+                  <a:ext uri="{FF2B5EF4-FFF2-40B4-BE49-F238E27FC236}">
+                    <a16:creationId xmlns:a16="http://schemas.microsoft.com/office/drawing/2014/main" id="{C331E98E-7679-779E-1852-0665ED0659F0}"/>
+                  </a:ext>
+                </a:extLst>
+              </p:cNvPr>
+              <p:cNvPicPr>
+                <a:picLocks noChangeAspect="1" noChangeArrowheads="1"/>
+              </p:cNvPicPr>
+              <p:nvPr/>
+            </p:nvPicPr>
+            <p:blipFill rotWithShape="1">
+              <a:blip r:embed="rId5">
+                <a:extLst>
+                  <a:ext uri="{28A0092B-C50C-407E-A947-70E740481C1C}">
+                    <a14:useLocalDpi xmlns:a14="http://schemas.microsoft.com/office/drawing/2010/main" val="0"/>
+                  </a:ext>
+                </a:extLst>
+              </a:blip>
+              <a:srcRect l="29258" b="25887"/>
+              <a:stretch/>
+            </p:blipFill>
+            <p:spPr bwMode="auto">
+              <a:xfrm rot="10405411">
+                <a:off x="1858637" y="2508599"/>
+                <a:ext cx="1848262" cy="416708"/>
+              </a:xfrm>
+              <a:prstGeom prst="rect">
+                <a:avLst/>
+              </a:prstGeom>
+              <a:noFill/>
+              <a:extLst>
+                <a:ext uri="{909E8E84-426E-40DD-AFC4-6F175D3DCCD1}">
+                  <a14:hiddenFill xmlns:a14="http://schemas.microsoft.com/office/drawing/2010/main">
+                    <a:solidFill>
+                      <a:srgbClr val="FFFFFF"/>
+                    </a:solidFill>
+                  </a14:hiddenFill>
+                </a:ext>
+              </a:extLst>
+            </p:spPr>
+          </p:pic>
+        </p:grpSp>
+      </p:grpSp>
+      <p:grpSp>
+        <p:nvGrpSpPr>
+          <p:cNvPr id="159" name="Group 158">
+            <a:extLst>
+              <a:ext uri="{FF2B5EF4-FFF2-40B4-BE49-F238E27FC236}">
+                <a16:creationId xmlns:a16="http://schemas.microsoft.com/office/drawing/2014/main" id="{AF1C2160-2340-6ECD-5D9B-9E6DED3A13D7}"/>
+              </a:ext>
+            </a:extLst>
+          </p:cNvPr>
+          <p:cNvGrpSpPr/>
+          <p:nvPr/>
+        </p:nvGrpSpPr>
+        <p:grpSpPr>
+          <a:xfrm>
+            <a:off x="1753154" y="5441259"/>
+            <a:ext cx="1371600" cy="1371600"/>
+            <a:chOff x="827965" y="2006552"/>
+            <a:chExt cx="1371600" cy="1371600"/>
+          </a:xfrm>
+        </p:grpSpPr>
+        <p:grpSp>
+          <p:nvGrpSpPr>
+            <p:cNvPr id="176" name="Group 175">
+              <a:extLst>
+                <a:ext uri="{FF2B5EF4-FFF2-40B4-BE49-F238E27FC236}">
+                  <a16:creationId xmlns:a16="http://schemas.microsoft.com/office/drawing/2014/main" id="{020FB8FA-A247-891C-CB92-DD8242BBB914}"/>
+                </a:ext>
+              </a:extLst>
+            </p:cNvPr>
+            <p:cNvGrpSpPr/>
+            <p:nvPr/>
+          </p:nvGrpSpPr>
+          <p:grpSpPr>
+            <a:xfrm>
+              <a:off x="827965" y="2006552"/>
+              <a:ext cx="1371600" cy="1371600"/>
+              <a:chOff x="1298501" y="962272"/>
+              <a:chExt cx="1371600" cy="1371600"/>
+            </a:xfrm>
+          </p:grpSpPr>
+          <p:sp>
+            <p:nvSpPr>
+              <p:cNvPr id="188" name="Rectangle 187">
+                <a:extLst>
+                  <a:ext uri="{FF2B5EF4-FFF2-40B4-BE49-F238E27FC236}">
+                    <a16:creationId xmlns:a16="http://schemas.microsoft.com/office/drawing/2014/main" id="{BD2A6F8B-BE8B-9D23-074A-7FEA724D4B44}"/>
+                  </a:ext>
+                </a:extLst>
+              </p:cNvPr>
+              <p:cNvSpPr/>
+              <p:nvPr/>
+            </p:nvSpPr>
+            <p:spPr>
+              <a:xfrm>
+                <a:off x="1298501" y="962272"/>
+                <a:ext cx="1371600" cy="1371600"/>
+              </a:xfrm>
+              <a:prstGeom prst="rect">
+                <a:avLst/>
+              </a:prstGeom>
+              <a:noFill/>
+              <a:ln w="76200">
+                <a:solidFill>
+                  <a:schemeClr val="tx1"/>
+                </a:solidFill>
+              </a:ln>
+            </p:spPr>
+            <p:style>
+              <a:lnRef idx="2">
+                <a:schemeClr val="accent1">
+                  <a:shade val="50000"/>
+                </a:schemeClr>
+              </a:lnRef>
+              <a:fillRef idx="1">
+                <a:schemeClr val="accent1"/>
+              </a:fillRef>
+              <a:effectRef idx="0">
+                <a:schemeClr val="accent1"/>
+              </a:effectRef>
+              <a:fontRef idx="minor">
+                <a:schemeClr val="lt1"/>
+              </a:fontRef>
+            </p:style>
+            <p:txBody>
+              <a:bodyPr rtlCol="0" anchor="ctr"/>
+              <a:lstStyle/>
+              <a:p>
+                <a:pPr algn="ctr"/>
+                <a:endParaRPr lang="en-US"/>
+              </a:p>
+            </p:txBody>
+          </p:sp>
+          <p:sp>
+            <p:nvSpPr>
+              <p:cNvPr id="189" name="Arrow: Pentagon 188">
+                <a:extLst>
+                  <a:ext uri="{FF2B5EF4-FFF2-40B4-BE49-F238E27FC236}">
+                    <a16:creationId xmlns:a16="http://schemas.microsoft.com/office/drawing/2014/main" id="{D25FAAE0-1B80-C10C-D9BF-D9F6DA66AEB7}"/>
+                  </a:ext>
+                </a:extLst>
+              </p:cNvPr>
+              <p:cNvSpPr/>
+              <p:nvPr/>
+            </p:nvSpPr>
+            <p:spPr>
+              <a:xfrm rot="5400000">
+                <a:off x="1435661" y="1173775"/>
+                <a:ext cx="1097280" cy="1097280"/>
+              </a:xfrm>
+              <a:prstGeom prst="homePlate">
+                <a:avLst/>
+              </a:prstGeom>
+              <a:noFill/>
+              <a:ln w="38100" cap="flat" cmpd="sng" algn="ctr">
+                <a:solidFill>
+                  <a:schemeClr val="dk1"/>
+                </a:solidFill>
+                <a:prstDash val="solid"/>
+                <a:round/>
+                <a:headEnd type="none" w="med" len="med"/>
+                <a:tailEnd type="none" w="med" len="med"/>
+              </a:ln>
+            </p:spPr>
+            <p:style>
+              <a:lnRef idx="0">
+                <a:scrgbClr r="0" g="0" b="0"/>
+              </a:lnRef>
+              <a:fillRef idx="0">
+                <a:scrgbClr r="0" g="0" b="0"/>
+              </a:fillRef>
+              <a:effectRef idx="0">
+                <a:scrgbClr r="0" g="0" b="0"/>
+              </a:effectRef>
+              <a:fontRef idx="minor">
+                <a:schemeClr val="dk1"/>
+              </a:fontRef>
+            </p:style>
+            <p:txBody>
+              <a:bodyPr rtlCol="0" anchor="ctr"/>
+              <a:lstStyle/>
+              <a:p>
+                <a:pPr algn="ctr"/>
+                <a:endParaRPr lang="en-US"/>
+              </a:p>
+            </p:txBody>
+          </p:sp>
+        </p:grpSp>
+        <p:grpSp>
+          <p:nvGrpSpPr>
+            <p:cNvPr id="177" name="Group 176">
+              <a:extLst>
+                <a:ext uri="{FF2B5EF4-FFF2-40B4-BE49-F238E27FC236}">
+                  <a16:creationId xmlns:a16="http://schemas.microsoft.com/office/drawing/2014/main" id="{841B93C7-9B9B-3BA7-447C-BBBD359D9496}"/>
+                </a:ext>
+              </a:extLst>
+            </p:cNvPr>
+            <p:cNvGrpSpPr/>
+            <p:nvPr/>
+          </p:nvGrpSpPr>
+          <p:grpSpPr>
+            <a:xfrm>
+              <a:off x="1007024" y="2298700"/>
+              <a:ext cx="941781" cy="527050"/>
+              <a:chOff x="3151975" y="2276550"/>
+              <a:chExt cx="3511685" cy="1965250"/>
+            </a:xfrm>
+          </p:grpSpPr>
+          <p:sp>
+            <p:nvSpPr>
+              <p:cNvPr id="178" name="Oval 177">
+                <a:extLst>
+                  <a:ext uri="{FF2B5EF4-FFF2-40B4-BE49-F238E27FC236}">
+                    <a16:creationId xmlns:a16="http://schemas.microsoft.com/office/drawing/2014/main" id="{B0051498-7DD7-09B8-2A47-250A89EF7290}"/>
+                  </a:ext>
+                </a:extLst>
+              </p:cNvPr>
+              <p:cNvSpPr/>
+              <p:nvPr/>
+            </p:nvSpPr>
+            <p:spPr>
+              <a:xfrm>
+                <a:off x="4900694" y="2644379"/>
+                <a:ext cx="416527" cy="245033"/>
+              </a:xfrm>
+              <a:prstGeom prst="ellipse">
+                <a:avLst/>
+              </a:prstGeom>
+              <a:ln w="19050"/>
+            </p:spPr>
+            <p:style>
+              <a:lnRef idx="2">
+                <a:schemeClr val="dk1"/>
+              </a:lnRef>
+              <a:fillRef idx="1">
+                <a:schemeClr val="lt1"/>
+              </a:fillRef>
+              <a:effectRef idx="0">
+                <a:schemeClr val="dk1"/>
+              </a:effectRef>
+              <a:fontRef idx="minor">
+                <a:schemeClr val="dk1"/>
+              </a:fontRef>
+            </p:style>
+            <p:txBody>
+              <a:bodyPr rtlCol="0" anchor="ctr"/>
+              <a:lstStyle/>
+              <a:p>
+                <a:pPr algn="ctr"/>
+                <a:endParaRPr lang="en-US"/>
+              </a:p>
+            </p:txBody>
+          </p:sp>
+          <p:sp>
+            <p:nvSpPr>
+              <p:cNvPr id="179" name="Oval 178">
+                <a:extLst>
+                  <a:ext uri="{FF2B5EF4-FFF2-40B4-BE49-F238E27FC236}">
+                    <a16:creationId xmlns:a16="http://schemas.microsoft.com/office/drawing/2014/main" id="{770A30A8-34EB-B684-74C1-F3EED3611450}"/>
+                  </a:ext>
+                </a:extLst>
+              </p:cNvPr>
+              <p:cNvSpPr/>
+              <p:nvPr/>
+            </p:nvSpPr>
+            <p:spPr>
+              <a:xfrm>
+                <a:off x="4900695" y="2318626"/>
+                <a:ext cx="416527" cy="245033"/>
+              </a:xfrm>
+              <a:prstGeom prst="ellipse">
+                <a:avLst/>
+              </a:prstGeom>
+              <a:ln w="19050"/>
+            </p:spPr>
+            <p:style>
+              <a:lnRef idx="2">
+                <a:schemeClr val="dk1"/>
+              </a:lnRef>
+              <a:fillRef idx="1">
+                <a:schemeClr val="lt1"/>
+              </a:fillRef>
+              <a:effectRef idx="0">
+                <a:schemeClr val="dk1"/>
+              </a:effectRef>
+              <a:fontRef idx="minor">
+                <a:schemeClr val="dk1"/>
+              </a:fontRef>
+            </p:style>
+            <p:txBody>
+              <a:bodyPr rtlCol="0" anchor="ctr"/>
+              <a:lstStyle/>
+              <a:p>
+                <a:pPr algn="ctr"/>
+                <a:endParaRPr lang="en-US"/>
+              </a:p>
+            </p:txBody>
+          </p:sp>
+          <p:sp>
+            <p:nvSpPr>
+              <p:cNvPr id="180" name="Rectangle 179">
+                <a:extLst>
+                  <a:ext uri="{FF2B5EF4-FFF2-40B4-BE49-F238E27FC236}">
+                    <a16:creationId xmlns:a16="http://schemas.microsoft.com/office/drawing/2014/main" id="{B73787A2-F72B-6B6A-A1D1-05B14CBCF617}"/>
+                  </a:ext>
+                </a:extLst>
+              </p:cNvPr>
+              <p:cNvSpPr/>
+              <p:nvPr/>
+            </p:nvSpPr>
+            <p:spPr>
+              <a:xfrm>
+                <a:off x="4680918" y="3141347"/>
+                <a:ext cx="1293843" cy="264953"/>
+              </a:xfrm>
+              <a:prstGeom prst="rect">
+                <a:avLst/>
+              </a:prstGeom>
+            </p:spPr>
+            <p:style>
+              <a:lnRef idx="2">
+                <a:schemeClr val="dk1">
+                  <a:shade val="50000"/>
+                </a:schemeClr>
+              </a:lnRef>
+              <a:fillRef idx="1">
+                <a:schemeClr val="dk1"/>
+              </a:fillRef>
+              <a:effectRef idx="0">
+                <a:schemeClr val="dk1"/>
+              </a:effectRef>
+              <a:fontRef idx="minor">
+                <a:schemeClr val="lt1"/>
+              </a:fontRef>
+            </p:style>
+            <p:txBody>
+              <a:bodyPr rtlCol="0" anchor="ctr"/>
+              <a:lstStyle/>
+              <a:p>
+                <a:pPr algn="ctr"/>
+                <a:endParaRPr lang="en-US"/>
+              </a:p>
+            </p:txBody>
+          </p:sp>
+          <p:sp>
+            <p:nvSpPr>
+              <p:cNvPr id="181" name="Rectangle 180">
+                <a:extLst>
+                  <a:ext uri="{FF2B5EF4-FFF2-40B4-BE49-F238E27FC236}">
+                    <a16:creationId xmlns:a16="http://schemas.microsoft.com/office/drawing/2014/main" id="{760B4293-23BD-765F-BB58-8BD254DB499E}"/>
+                  </a:ext>
+                </a:extLst>
+              </p:cNvPr>
+              <p:cNvSpPr/>
+              <p:nvPr/>
+            </p:nvSpPr>
+            <p:spPr>
+              <a:xfrm rot="18924703">
+                <a:off x="3786366" y="3518395"/>
+                <a:ext cx="1168464" cy="264953"/>
+              </a:xfrm>
+              <a:prstGeom prst="rect">
+                <a:avLst/>
+              </a:prstGeom>
+            </p:spPr>
+            <p:style>
+              <a:lnRef idx="2">
+                <a:schemeClr val="dk1">
+                  <a:shade val="50000"/>
+                </a:schemeClr>
+              </a:lnRef>
+              <a:fillRef idx="1">
+                <a:schemeClr val="dk1"/>
+              </a:fillRef>
+              <a:effectRef idx="0">
+                <a:schemeClr val="dk1"/>
+              </a:effectRef>
+              <a:fontRef idx="minor">
+                <a:schemeClr val="lt1"/>
+              </a:fontRef>
+            </p:style>
+            <p:txBody>
+              <a:bodyPr rtlCol="0" anchor="ctr"/>
+              <a:lstStyle/>
+              <a:p>
+                <a:pPr algn="ctr"/>
+                <a:endParaRPr lang="en-US"/>
+              </a:p>
+            </p:txBody>
+          </p:sp>
+          <p:sp>
+            <p:nvSpPr>
+              <p:cNvPr id="182" name="Rectangle 181">
+                <a:extLst>
+                  <a:ext uri="{FF2B5EF4-FFF2-40B4-BE49-F238E27FC236}">
+                    <a16:creationId xmlns:a16="http://schemas.microsoft.com/office/drawing/2014/main" id="{BB894740-B994-95DC-C286-54FCCFAD009A}"/>
+                  </a:ext>
+                </a:extLst>
+              </p:cNvPr>
+              <p:cNvSpPr/>
+              <p:nvPr/>
+            </p:nvSpPr>
+            <p:spPr>
+              <a:xfrm rot="5400000">
+                <a:off x="4997481" y="2316923"/>
+                <a:ext cx="855031" cy="774285"/>
+              </a:xfrm>
+              <a:prstGeom prst="rect">
+                <a:avLst/>
+              </a:prstGeom>
+            </p:spPr>
+            <p:style>
+              <a:lnRef idx="2">
+                <a:schemeClr val="dk1">
+                  <a:shade val="50000"/>
+                </a:schemeClr>
+              </a:lnRef>
+              <a:fillRef idx="1">
+                <a:schemeClr val="dk1"/>
+              </a:fillRef>
+              <a:effectRef idx="0">
+                <a:schemeClr val="dk1"/>
+              </a:effectRef>
+              <a:fontRef idx="minor">
+                <a:schemeClr val="lt1"/>
+              </a:fontRef>
+            </p:style>
+            <p:txBody>
+              <a:bodyPr rtlCol="0" anchor="ctr"/>
+              <a:lstStyle/>
+              <a:p>
+                <a:pPr algn="ctr"/>
+                <a:endParaRPr lang="en-US"/>
+              </a:p>
+            </p:txBody>
+          </p:sp>
+          <p:sp>
+            <p:nvSpPr>
+              <p:cNvPr id="183" name="Rectangle 182">
+                <a:extLst>
+                  <a:ext uri="{FF2B5EF4-FFF2-40B4-BE49-F238E27FC236}">
+                    <a16:creationId xmlns:a16="http://schemas.microsoft.com/office/drawing/2014/main" id="{38CEE4F4-EC35-FAF8-C7C7-24ACCBCAFE2E}"/>
+                  </a:ext>
+                </a:extLst>
+              </p:cNvPr>
+              <p:cNvSpPr/>
+              <p:nvPr/>
+            </p:nvSpPr>
+            <p:spPr>
+              <a:xfrm rot="13813249">
+                <a:off x="5671555" y="3510875"/>
+                <a:ext cx="1085838" cy="264952"/>
+              </a:xfrm>
+              <a:prstGeom prst="rect">
+                <a:avLst/>
+              </a:prstGeom>
+            </p:spPr>
+            <p:style>
+              <a:lnRef idx="2">
+                <a:schemeClr val="dk1">
+                  <a:shade val="50000"/>
+                </a:schemeClr>
+              </a:lnRef>
+              <a:fillRef idx="1">
+                <a:schemeClr val="dk1"/>
+              </a:fillRef>
+              <a:effectRef idx="0">
+                <a:schemeClr val="dk1"/>
+              </a:effectRef>
+              <a:fontRef idx="minor">
+                <a:schemeClr val="lt1"/>
+              </a:fontRef>
+            </p:style>
+            <p:txBody>
+              <a:bodyPr rtlCol="0" anchor="ctr"/>
+              <a:lstStyle/>
+              <a:p>
+                <a:pPr algn="ctr"/>
+                <a:endParaRPr lang="en-US"/>
+              </a:p>
+            </p:txBody>
+          </p:sp>
+          <p:sp>
+            <p:nvSpPr>
+              <p:cNvPr id="184" name="Rectangle 183">
+                <a:extLst>
+                  <a:ext uri="{FF2B5EF4-FFF2-40B4-BE49-F238E27FC236}">
+                    <a16:creationId xmlns:a16="http://schemas.microsoft.com/office/drawing/2014/main" id="{92E3FDD2-0BBA-19AF-1A3F-6269B63D266B}"/>
+                  </a:ext>
+                </a:extLst>
+              </p:cNvPr>
+              <p:cNvSpPr/>
+              <p:nvPr/>
+            </p:nvSpPr>
+            <p:spPr>
+              <a:xfrm>
+                <a:off x="3853893" y="3976847"/>
+                <a:ext cx="2809767" cy="264953"/>
+              </a:xfrm>
+              <a:prstGeom prst="rect">
+                <a:avLst/>
+              </a:prstGeom>
+            </p:spPr>
+            <p:style>
+              <a:lnRef idx="2">
+                <a:schemeClr val="dk1">
+                  <a:shade val="50000"/>
+                </a:schemeClr>
+              </a:lnRef>
+              <a:fillRef idx="1">
+                <a:schemeClr val="dk1"/>
+              </a:fillRef>
+              <a:effectRef idx="0">
+                <a:schemeClr val="dk1"/>
+              </a:effectRef>
+              <a:fontRef idx="minor">
+                <a:schemeClr val="lt1"/>
+              </a:fontRef>
+            </p:style>
+            <p:txBody>
+              <a:bodyPr rtlCol="0" anchor="ctr"/>
+              <a:lstStyle/>
+              <a:p>
+                <a:pPr algn="ctr"/>
+                <a:endParaRPr lang="en-US"/>
+              </a:p>
+            </p:txBody>
+          </p:sp>
+          <p:sp>
+            <p:nvSpPr>
+              <p:cNvPr id="185" name="Rectangle 184">
+                <a:extLst>
+                  <a:ext uri="{FF2B5EF4-FFF2-40B4-BE49-F238E27FC236}">
+                    <a16:creationId xmlns:a16="http://schemas.microsoft.com/office/drawing/2014/main" id="{0B276AD9-E91C-73DA-D472-1B496D58C5DC}"/>
+                  </a:ext>
+                </a:extLst>
+              </p:cNvPr>
+              <p:cNvSpPr/>
+              <p:nvPr/>
+            </p:nvSpPr>
+            <p:spPr>
+              <a:xfrm>
+                <a:off x="4231210" y="3678253"/>
+                <a:ext cx="2151835" cy="427677"/>
+              </a:xfrm>
+              <a:prstGeom prst="rect">
+                <a:avLst/>
+              </a:prstGeom>
+            </p:spPr>
+            <p:style>
+              <a:lnRef idx="2">
+                <a:schemeClr val="dk1">
+                  <a:shade val="50000"/>
+                </a:schemeClr>
+              </a:lnRef>
+              <a:fillRef idx="1">
+                <a:schemeClr val="dk1"/>
+              </a:fillRef>
+              <a:effectRef idx="0">
+                <a:schemeClr val="dk1"/>
+              </a:effectRef>
+              <a:fontRef idx="minor">
+                <a:schemeClr val="lt1"/>
+              </a:fontRef>
+            </p:style>
+            <p:txBody>
+              <a:bodyPr rtlCol="0" anchor="ctr"/>
+              <a:lstStyle/>
+              <a:p>
+                <a:pPr algn="ctr"/>
+                <a:endParaRPr lang="en-US"/>
+              </a:p>
+            </p:txBody>
+          </p:sp>
+          <p:pic>
+            <p:nvPicPr>
+              <p:cNvPr id="186" name="Picture 10" descr="✓ flamethrower free vector eps, cdr, ai, svg vector illustration graphic art">
+                <a:extLst>
+                  <a:ext uri="{FF2B5EF4-FFF2-40B4-BE49-F238E27FC236}">
+                    <a16:creationId xmlns:a16="http://schemas.microsoft.com/office/drawing/2014/main" id="{43A20FB9-4800-281F-823C-C502717F1532}"/>
+                  </a:ext>
+                </a:extLst>
+              </p:cNvPr>
+              <p:cNvPicPr>
+                <a:picLocks noChangeAspect="1" noChangeArrowheads="1"/>
+              </p:cNvPicPr>
+              <p:nvPr/>
+            </p:nvPicPr>
+            <p:blipFill rotWithShape="1">
+              <a:blip r:embed="rId5">
+                <a:extLst>
+                  <a:ext uri="{28A0092B-C50C-407E-A947-70E740481C1C}">
+                    <a14:useLocalDpi xmlns:a14="http://schemas.microsoft.com/office/drawing/2010/main" val="0"/>
+                  </a:ext>
+                </a:extLst>
+              </a:blip>
+              <a:srcRect l="29258" b="25887"/>
+              <a:stretch/>
+            </p:blipFill>
+            <p:spPr bwMode="auto">
+              <a:xfrm rot="10405411">
+                <a:off x="3151975" y="2371698"/>
+                <a:ext cx="1711232" cy="385815"/>
+              </a:xfrm>
+              <a:prstGeom prst="rect">
+                <a:avLst/>
+              </a:prstGeom>
+              <a:noFill/>
+              <a:extLst>
+                <a:ext uri="{909E8E84-426E-40DD-AFC4-6F175D3DCCD1}">
+                  <a14:hiddenFill xmlns:a14="http://schemas.microsoft.com/office/drawing/2010/main">
+                    <a:solidFill>
+                      <a:srgbClr val="FFFFFF"/>
+                    </a:solidFill>
+                  </a14:hiddenFill>
+                </a:ext>
+              </a:extLst>
+            </p:spPr>
+          </p:pic>
+          <p:pic>
+            <p:nvPicPr>
+              <p:cNvPr id="187" name="Picture 10" descr="✓ flamethrower free vector eps, cdr, ai, svg vector illustration graphic art">
+                <a:extLst>
+                  <a:ext uri="{FF2B5EF4-FFF2-40B4-BE49-F238E27FC236}">
+                    <a16:creationId xmlns:a16="http://schemas.microsoft.com/office/drawing/2014/main" id="{E0059DD8-232B-6BF1-F773-4DA2EA2840EF}"/>
+                  </a:ext>
+                </a:extLst>
+              </p:cNvPr>
+              <p:cNvPicPr>
+                <a:picLocks noChangeAspect="1" noChangeArrowheads="1"/>
+              </p:cNvPicPr>
+              <p:nvPr/>
+            </p:nvPicPr>
+            <p:blipFill rotWithShape="1">
+              <a:blip r:embed="rId5">
+                <a:extLst>
+                  <a:ext uri="{28A0092B-C50C-407E-A947-70E740481C1C}">
+                    <a14:useLocalDpi xmlns:a14="http://schemas.microsoft.com/office/drawing/2010/main" val="0"/>
+                  </a:ext>
+                </a:extLst>
+              </a:blip>
+              <a:srcRect l="29258" b="25887"/>
+              <a:stretch/>
+            </p:blipFill>
+            <p:spPr bwMode="auto">
+              <a:xfrm rot="10405411">
+                <a:off x="3172999" y="2759003"/>
+                <a:ext cx="1711232" cy="385815"/>
+              </a:xfrm>
+              <a:prstGeom prst="rect">
+                <a:avLst/>
+              </a:prstGeom>
+              <a:noFill/>
+              <a:extLst>
+                <a:ext uri="{909E8E84-426E-40DD-AFC4-6F175D3DCCD1}">
+                  <a14:hiddenFill xmlns:a14="http://schemas.microsoft.com/office/drawing/2010/main">
+                    <a:solidFill>
+                      <a:srgbClr val="FFFFFF"/>
+                    </a:solidFill>
+                  </a14:hiddenFill>
+                </a:ext>
+              </a:extLst>
+            </p:spPr>
+          </p:pic>
+        </p:grpSp>
+      </p:grpSp>
+      <p:grpSp>
+        <p:nvGrpSpPr>
+          <p:cNvPr id="190" name="Group 189">
+            <a:extLst>
+              <a:ext uri="{FF2B5EF4-FFF2-40B4-BE49-F238E27FC236}">
+                <a16:creationId xmlns:a16="http://schemas.microsoft.com/office/drawing/2014/main" id="{B4E527ED-C855-F16F-83EE-9791A4ACE499}"/>
+              </a:ext>
+            </a:extLst>
+          </p:cNvPr>
+          <p:cNvGrpSpPr/>
+          <p:nvPr/>
+        </p:nvGrpSpPr>
+        <p:grpSpPr>
+          <a:xfrm>
+            <a:off x="6845317" y="5459212"/>
+            <a:ext cx="1371600" cy="1371600"/>
+            <a:chOff x="3505447" y="2057400"/>
+            <a:chExt cx="1371600" cy="1371600"/>
+          </a:xfrm>
+        </p:grpSpPr>
+        <p:grpSp>
+          <p:nvGrpSpPr>
+            <p:cNvPr id="191" name="Group 190">
+              <a:extLst>
+                <a:ext uri="{FF2B5EF4-FFF2-40B4-BE49-F238E27FC236}">
+                  <a16:creationId xmlns:a16="http://schemas.microsoft.com/office/drawing/2014/main" id="{CC879EFF-D6AD-B749-C607-4FCD95305842}"/>
+                </a:ext>
+              </a:extLst>
+            </p:cNvPr>
+            <p:cNvGrpSpPr/>
+            <p:nvPr/>
+          </p:nvGrpSpPr>
+          <p:grpSpPr>
+            <a:xfrm>
+              <a:off x="3505447" y="2057400"/>
+              <a:ext cx="1371600" cy="1371600"/>
+              <a:chOff x="1298501" y="962272"/>
+              <a:chExt cx="1371600" cy="1371600"/>
+            </a:xfrm>
+          </p:grpSpPr>
+          <p:sp>
+            <p:nvSpPr>
+              <p:cNvPr id="201" name="Rectangle 200">
+                <a:extLst>
+                  <a:ext uri="{FF2B5EF4-FFF2-40B4-BE49-F238E27FC236}">
+                    <a16:creationId xmlns:a16="http://schemas.microsoft.com/office/drawing/2014/main" id="{2883E491-1EA4-642D-87C0-003037C65BAF}"/>
+                  </a:ext>
+                </a:extLst>
+              </p:cNvPr>
+              <p:cNvSpPr/>
+              <p:nvPr/>
+            </p:nvSpPr>
+            <p:spPr>
+              <a:xfrm>
+                <a:off x="1298501" y="962272"/>
+                <a:ext cx="1371600" cy="1371600"/>
+              </a:xfrm>
+              <a:prstGeom prst="rect">
+                <a:avLst/>
+              </a:prstGeom>
+              <a:noFill/>
+              <a:ln w="76200">
+                <a:solidFill>
+                  <a:schemeClr val="tx1"/>
+                </a:solidFill>
+              </a:ln>
+            </p:spPr>
+            <p:style>
+              <a:lnRef idx="2">
+                <a:schemeClr val="accent1">
+                  <a:shade val="50000"/>
+                </a:schemeClr>
+              </a:lnRef>
+              <a:fillRef idx="1">
+                <a:schemeClr val="accent1"/>
+              </a:fillRef>
+              <a:effectRef idx="0">
+                <a:schemeClr val="accent1"/>
+              </a:effectRef>
+              <a:fontRef idx="minor">
+                <a:schemeClr val="lt1"/>
+              </a:fontRef>
+            </p:style>
+            <p:txBody>
+              <a:bodyPr rtlCol="0" anchor="ctr"/>
+              <a:lstStyle/>
+              <a:p>
+                <a:pPr algn="ctr"/>
+                <a:endParaRPr lang="en-US"/>
+              </a:p>
+            </p:txBody>
+          </p:sp>
+          <p:sp>
+            <p:nvSpPr>
+              <p:cNvPr id="202" name="Arrow: Pentagon 201">
+                <a:extLst>
+                  <a:ext uri="{FF2B5EF4-FFF2-40B4-BE49-F238E27FC236}">
+                    <a16:creationId xmlns:a16="http://schemas.microsoft.com/office/drawing/2014/main" id="{0D753BBE-FAC4-D15E-EA3E-805D3B206945}"/>
+                  </a:ext>
+                </a:extLst>
+              </p:cNvPr>
+              <p:cNvSpPr/>
+              <p:nvPr/>
+            </p:nvSpPr>
+            <p:spPr>
+              <a:xfrm rot="5400000">
+                <a:off x="1435661" y="1173775"/>
+                <a:ext cx="1097280" cy="1097280"/>
+              </a:xfrm>
+              <a:prstGeom prst="homePlate">
+                <a:avLst/>
+              </a:prstGeom>
+              <a:noFill/>
+              <a:ln w="38100" cap="flat" cmpd="sng" algn="ctr">
+                <a:solidFill>
+                  <a:schemeClr val="dk1"/>
+                </a:solidFill>
+                <a:prstDash val="solid"/>
+                <a:round/>
+                <a:headEnd type="none" w="med" len="med"/>
+                <a:tailEnd type="none" w="med" len="med"/>
+              </a:ln>
+            </p:spPr>
+            <p:style>
+              <a:lnRef idx="0">
+                <a:scrgbClr r="0" g="0" b="0"/>
+              </a:lnRef>
+              <a:fillRef idx="0">
+                <a:scrgbClr r="0" g="0" b="0"/>
+              </a:fillRef>
+              <a:effectRef idx="0">
+                <a:scrgbClr r="0" g="0" b="0"/>
+              </a:effectRef>
+              <a:fontRef idx="minor">
+                <a:schemeClr val="dk1"/>
+              </a:fontRef>
+            </p:style>
+            <p:txBody>
+              <a:bodyPr rtlCol="0" anchor="ctr"/>
+              <a:lstStyle/>
+              <a:p>
+                <a:pPr algn="ctr"/>
+                <a:endParaRPr lang="en-US"/>
+              </a:p>
+            </p:txBody>
+          </p:sp>
+        </p:grpSp>
+        <p:grpSp>
+          <p:nvGrpSpPr>
+            <p:cNvPr id="192" name="Group 191">
+              <a:extLst>
+                <a:ext uri="{FF2B5EF4-FFF2-40B4-BE49-F238E27FC236}">
+                  <a16:creationId xmlns:a16="http://schemas.microsoft.com/office/drawing/2014/main" id="{CA7CE95B-A6EB-1766-1106-B6411BA9081E}"/>
+                </a:ext>
+              </a:extLst>
+            </p:cNvPr>
+            <p:cNvGrpSpPr/>
+            <p:nvPr/>
+          </p:nvGrpSpPr>
+          <p:grpSpPr>
+            <a:xfrm>
+              <a:off x="3833985" y="2339828"/>
+              <a:ext cx="714523" cy="781908"/>
+              <a:chOff x="6264127" y="1307188"/>
+              <a:chExt cx="1391653" cy="1522897"/>
+            </a:xfrm>
+          </p:grpSpPr>
+          <p:sp>
+            <p:nvSpPr>
+              <p:cNvPr id="193" name="Rectangle 192">
+                <a:extLst>
+                  <a:ext uri="{FF2B5EF4-FFF2-40B4-BE49-F238E27FC236}">
+                    <a16:creationId xmlns:a16="http://schemas.microsoft.com/office/drawing/2014/main" id="{00CAD98A-0E5C-7F1F-D0C2-3987E99569ED}"/>
+                  </a:ext>
+                </a:extLst>
+              </p:cNvPr>
+              <p:cNvSpPr/>
+              <p:nvPr/>
+            </p:nvSpPr>
+            <p:spPr>
+              <a:xfrm>
+                <a:off x="6521307" y="1710168"/>
+                <a:ext cx="369217" cy="471814"/>
+              </a:xfrm>
+              <a:prstGeom prst="rect">
+                <a:avLst/>
+              </a:prstGeom>
+            </p:spPr>
+            <p:style>
+              <a:lnRef idx="2">
+                <a:schemeClr val="dk1">
+                  <a:shade val="50000"/>
+                </a:schemeClr>
+              </a:lnRef>
+              <a:fillRef idx="1">
+                <a:schemeClr val="dk1"/>
+              </a:fillRef>
+              <a:effectRef idx="0">
+                <a:schemeClr val="dk1"/>
+              </a:effectRef>
+              <a:fontRef idx="minor">
+                <a:schemeClr val="lt1"/>
+              </a:fontRef>
+            </p:style>
+            <p:txBody>
+              <a:bodyPr rtlCol="0" anchor="ctr"/>
+              <a:lstStyle/>
+              <a:p>
+                <a:pPr algn="ctr"/>
+                <a:endParaRPr lang="en-US"/>
+              </a:p>
+            </p:txBody>
+          </p:sp>
+          <p:sp>
+            <p:nvSpPr>
+              <p:cNvPr id="194" name="Rectangle 193">
+                <a:extLst>
+                  <a:ext uri="{FF2B5EF4-FFF2-40B4-BE49-F238E27FC236}">
+                    <a16:creationId xmlns:a16="http://schemas.microsoft.com/office/drawing/2014/main" id="{36C9DA6E-7F46-CA0D-A63C-C21F32EEF218}"/>
+                  </a:ext>
+                </a:extLst>
+              </p:cNvPr>
+              <p:cNvSpPr/>
+              <p:nvPr/>
+            </p:nvSpPr>
+            <p:spPr>
+              <a:xfrm flipH="1">
+                <a:off x="7011908" y="1710134"/>
+                <a:ext cx="369217" cy="471814"/>
+              </a:xfrm>
+              <a:prstGeom prst="rect">
+                <a:avLst/>
+              </a:prstGeom>
+            </p:spPr>
+            <p:style>
+              <a:lnRef idx="2">
+                <a:schemeClr val="dk1">
+                  <a:shade val="50000"/>
+                </a:schemeClr>
+              </a:lnRef>
+              <a:fillRef idx="1">
+                <a:schemeClr val="dk1"/>
+              </a:fillRef>
+              <a:effectRef idx="0">
+                <a:schemeClr val="dk1"/>
+              </a:effectRef>
+              <a:fontRef idx="minor">
+                <a:schemeClr val="lt1"/>
+              </a:fontRef>
+            </p:style>
+            <p:txBody>
+              <a:bodyPr rtlCol="0" anchor="ctr"/>
+              <a:lstStyle/>
+              <a:p>
+                <a:pPr algn="ctr"/>
+                <a:endParaRPr lang="en-US"/>
+              </a:p>
+            </p:txBody>
+          </p:sp>
+          <p:sp>
+            <p:nvSpPr>
+              <p:cNvPr id="195" name="Isosceles Triangle 194">
+                <a:extLst>
+                  <a:ext uri="{FF2B5EF4-FFF2-40B4-BE49-F238E27FC236}">
+                    <a16:creationId xmlns:a16="http://schemas.microsoft.com/office/drawing/2014/main" id="{5A36E031-5098-AB55-3F38-24563219B5FE}"/>
+                  </a:ext>
+                </a:extLst>
+              </p:cNvPr>
+              <p:cNvSpPr/>
+              <p:nvPr/>
+            </p:nvSpPr>
+            <p:spPr>
+              <a:xfrm rot="10800000">
+                <a:off x="6775345" y="2266431"/>
+                <a:ext cx="369217" cy="563654"/>
+              </a:xfrm>
+              <a:prstGeom prst="triangle">
+                <a:avLst/>
+              </a:prstGeom>
+            </p:spPr>
+            <p:style>
+              <a:lnRef idx="2">
+                <a:schemeClr val="dk1">
+                  <a:shade val="50000"/>
+                </a:schemeClr>
+              </a:lnRef>
+              <a:fillRef idx="1">
+                <a:schemeClr val="dk1"/>
+              </a:fillRef>
+              <a:effectRef idx="0">
+                <a:schemeClr val="dk1"/>
+              </a:effectRef>
+              <a:fontRef idx="minor">
+                <a:schemeClr val="lt1"/>
+              </a:fontRef>
+            </p:style>
+            <p:txBody>
+              <a:bodyPr rtlCol="0" anchor="ctr"/>
+              <a:lstStyle/>
+              <a:p>
+                <a:pPr algn="ctr"/>
+                <a:endParaRPr lang="en-US"/>
+              </a:p>
+            </p:txBody>
+          </p:sp>
+          <p:sp>
+            <p:nvSpPr>
+              <p:cNvPr id="196" name="Isosceles Triangle 195">
+                <a:extLst>
+                  <a:ext uri="{FF2B5EF4-FFF2-40B4-BE49-F238E27FC236}">
+                    <a16:creationId xmlns:a16="http://schemas.microsoft.com/office/drawing/2014/main" id="{1F98A65B-59C7-2D4F-0889-014237F86382}"/>
+                  </a:ext>
+                </a:extLst>
+              </p:cNvPr>
+              <p:cNvSpPr/>
+              <p:nvPr/>
+            </p:nvSpPr>
+            <p:spPr>
+              <a:xfrm rot="10800000" flipV="1">
+                <a:off x="6775345" y="1312217"/>
+                <a:ext cx="369217" cy="365940"/>
+              </a:xfrm>
+              <a:prstGeom prst="triangle">
+                <a:avLst/>
+              </a:prstGeom>
+            </p:spPr>
+            <p:style>
+              <a:lnRef idx="2">
+                <a:schemeClr val="dk1">
+                  <a:shade val="50000"/>
+                </a:schemeClr>
+              </a:lnRef>
+              <a:fillRef idx="1">
+                <a:schemeClr val="dk1"/>
+              </a:fillRef>
+              <a:effectRef idx="0">
+                <a:schemeClr val="dk1"/>
+              </a:effectRef>
+              <a:fontRef idx="minor">
+                <a:schemeClr val="lt1"/>
+              </a:fontRef>
+            </p:style>
+            <p:txBody>
+              <a:bodyPr rtlCol="0" anchor="ctr"/>
+              <a:lstStyle/>
+              <a:p>
+                <a:pPr algn="ctr"/>
+                <a:endParaRPr lang="en-US"/>
+              </a:p>
+            </p:txBody>
+          </p:sp>
+          <p:sp>
+            <p:nvSpPr>
+              <p:cNvPr id="197" name="Rectangle 196">
+                <a:extLst>
+                  <a:ext uri="{FF2B5EF4-FFF2-40B4-BE49-F238E27FC236}">
+                    <a16:creationId xmlns:a16="http://schemas.microsoft.com/office/drawing/2014/main" id="{E771373C-063A-B02C-748E-FE49A4014B20}"/>
+                  </a:ext>
+                </a:extLst>
+              </p:cNvPr>
+              <p:cNvSpPr/>
+              <p:nvPr/>
+            </p:nvSpPr>
+            <p:spPr>
+              <a:xfrm>
+                <a:off x="6658821" y="1315488"/>
+                <a:ext cx="94188" cy="394646"/>
+              </a:xfrm>
+              <a:prstGeom prst="rect">
+                <a:avLst/>
+              </a:prstGeom>
+            </p:spPr>
+            <p:style>
+              <a:lnRef idx="2">
+                <a:schemeClr val="dk1">
+                  <a:shade val="50000"/>
+                </a:schemeClr>
+              </a:lnRef>
+              <a:fillRef idx="1">
+                <a:schemeClr val="dk1"/>
+              </a:fillRef>
+              <a:effectRef idx="0">
+                <a:schemeClr val="dk1"/>
+              </a:effectRef>
+              <a:fontRef idx="minor">
+                <a:schemeClr val="lt1"/>
+              </a:fontRef>
+            </p:style>
+            <p:txBody>
+              <a:bodyPr rtlCol="0" anchor="ctr"/>
+              <a:lstStyle/>
+              <a:p>
+                <a:pPr algn="ctr"/>
+                <a:endParaRPr lang="en-US"/>
+              </a:p>
+            </p:txBody>
+          </p:sp>
+          <p:sp>
+            <p:nvSpPr>
+              <p:cNvPr id="198" name="Rectangle 197">
+                <a:extLst>
+                  <a:ext uri="{FF2B5EF4-FFF2-40B4-BE49-F238E27FC236}">
+                    <a16:creationId xmlns:a16="http://schemas.microsoft.com/office/drawing/2014/main" id="{EB82AEFC-8F58-D7B1-6BB5-74B6EBD82FAA}"/>
+                  </a:ext>
+                </a:extLst>
+              </p:cNvPr>
+              <p:cNvSpPr/>
+              <p:nvPr/>
+            </p:nvSpPr>
+            <p:spPr>
+              <a:xfrm>
+                <a:off x="7163130" y="1307188"/>
+                <a:ext cx="94188" cy="394646"/>
+              </a:xfrm>
+              <a:prstGeom prst="rect">
+                <a:avLst/>
+              </a:prstGeom>
+            </p:spPr>
+            <p:style>
+              <a:lnRef idx="2">
+                <a:schemeClr val="dk1">
+                  <a:shade val="50000"/>
+                </a:schemeClr>
+              </a:lnRef>
+              <a:fillRef idx="1">
+                <a:schemeClr val="dk1"/>
+              </a:fillRef>
+              <a:effectRef idx="0">
+                <a:schemeClr val="dk1"/>
+              </a:effectRef>
+              <a:fontRef idx="minor">
+                <a:schemeClr val="lt1"/>
+              </a:fontRef>
+            </p:style>
+            <p:txBody>
+              <a:bodyPr rtlCol="0" anchor="ctr"/>
+              <a:lstStyle/>
+              <a:p>
+                <a:pPr algn="ctr"/>
+                <a:endParaRPr lang="en-US"/>
+              </a:p>
+            </p:txBody>
+          </p:sp>
+          <p:sp>
+            <p:nvSpPr>
+              <p:cNvPr id="199" name="Moon 198">
+                <a:extLst>
+                  <a:ext uri="{FF2B5EF4-FFF2-40B4-BE49-F238E27FC236}">
+                    <a16:creationId xmlns:a16="http://schemas.microsoft.com/office/drawing/2014/main" id="{E71F3053-EB02-8211-2C85-DDA6F16D766D}"/>
+                  </a:ext>
+                </a:extLst>
+              </p:cNvPr>
+              <p:cNvSpPr/>
+              <p:nvPr/>
+            </p:nvSpPr>
+            <p:spPr>
+              <a:xfrm rot="20131114">
+                <a:off x="6264127" y="1862570"/>
+                <a:ext cx="419100" cy="902348"/>
+              </a:xfrm>
+              <a:prstGeom prst="moon">
+                <a:avLst/>
+              </a:prstGeom>
+            </p:spPr>
+            <p:style>
+              <a:lnRef idx="2">
+                <a:schemeClr val="dk1">
+                  <a:shade val="50000"/>
+                </a:schemeClr>
+              </a:lnRef>
+              <a:fillRef idx="1">
+                <a:schemeClr val="dk1"/>
+              </a:fillRef>
+              <a:effectRef idx="0">
+                <a:schemeClr val="dk1"/>
+              </a:effectRef>
+              <a:fontRef idx="minor">
+                <a:schemeClr val="lt1"/>
+              </a:fontRef>
+            </p:style>
+            <p:txBody>
+              <a:bodyPr rtlCol="0" anchor="ctr"/>
+              <a:lstStyle/>
+              <a:p>
+                <a:pPr algn="ctr"/>
+                <a:endParaRPr lang="en-US"/>
+              </a:p>
+            </p:txBody>
+          </p:sp>
+          <p:sp>
+            <p:nvSpPr>
+              <p:cNvPr id="200" name="Moon 199">
+                <a:extLst>
+                  <a:ext uri="{FF2B5EF4-FFF2-40B4-BE49-F238E27FC236}">
+                    <a16:creationId xmlns:a16="http://schemas.microsoft.com/office/drawing/2014/main" id="{56141787-B4A6-D4DB-07EC-CDB94D26AFFA}"/>
+                  </a:ext>
+                </a:extLst>
+              </p:cNvPr>
+              <p:cNvSpPr/>
+              <p:nvPr/>
+            </p:nvSpPr>
+            <p:spPr>
+              <a:xfrm rot="1468886" flipH="1">
+                <a:off x="7236680" y="1853886"/>
+                <a:ext cx="419100" cy="902348"/>
+              </a:xfrm>
+              <a:prstGeom prst="moon">
+                <a:avLst/>
+              </a:prstGeom>
+            </p:spPr>
+            <p:style>
+              <a:lnRef idx="2">
+                <a:schemeClr val="dk1">
+                  <a:shade val="50000"/>
+                </a:schemeClr>
+              </a:lnRef>
+              <a:fillRef idx="1">
+                <a:schemeClr val="dk1"/>
+              </a:fillRef>
+              <a:effectRef idx="0">
+                <a:schemeClr val="dk1"/>
+              </a:effectRef>
+              <a:fontRef idx="minor">
+                <a:schemeClr val="lt1"/>
+              </a:fontRef>
+            </p:style>
+            <p:txBody>
+              <a:bodyPr rtlCol="0" anchor="ctr"/>
+              <a:lstStyle/>
+              <a:p>
+                <a:pPr algn="ctr"/>
+                <a:endParaRPr lang="en-US"/>
+              </a:p>
+            </p:txBody>
+          </p:sp>
+        </p:grpSp>
+      </p:grpSp>
+      <p:grpSp>
+        <p:nvGrpSpPr>
+          <p:cNvPr id="203" name="Group 202">
+            <a:extLst>
+              <a:ext uri="{FF2B5EF4-FFF2-40B4-BE49-F238E27FC236}">
+                <a16:creationId xmlns:a16="http://schemas.microsoft.com/office/drawing/2014/main" id="{C7EB9757-33F3-9FF5-CA93-B849058C6A92}"/>
+              </a:ext>
+            </a:extLst>
+          </p:cNvPr>
+          <p:cNvGrpSpPr/>
+          <p:nvPr/>
+        </p:nvGrpSpPr>
+        <p:grpSpPr>
+          <a:xfrm>
+            <a:off x="8349845" y="5459212"/>
+            <a:ext cx="1371600" cy="1371600"/>
+            <a:chOff x="5009975" y="2057400"/>
+            <a:chExt cx="1371600" cy="1371600"/>
+          </a:xfrm>
+        </p:grpSpPr>
+        <p:grpSp>
+          <p:nvGrpSpPr>
+            <p:cNvPr id="204" name="Group 203">
+              <a:extLst>
+                <a:ext uri="{FF2B5EF4-FFF2-40B4-BE49-F238E27FC236}">
+                  <a16:creationId xmlns:a16="http://schemas.microsoft.com/office/drawing/2014/main" id="{1BB9C3D4-E6FA-2446-B18E-5E02F49C6653}"/>
+                </a:ext>
+              </a:extLst>
+            </p:cNvPr>
+            <p:cNvGrpSpPr/>
+            <p:nvPr/>
+          </p:nvGrpSpPr>
+          <p:grpSpPr>
+            <a:xfrm>
+              <a:off x="5009975" y="2057400"/>
+              <a:ext cx="1371600" cy="1371600"/>
+              <a:chOff x="1298501" y="962272"/>
+              <a:chExt cx="1371600" cy="1371600"/>
+            </a:xfrm>
+          </p:grpSpPr>
+          <p:sp>
+            <p:nvSpPr>
+              <p:cNvPr id="212" name="Rectangle 211">
+                <a:extLst>
+                  <a:ext uri="{FF2B5EF4-FFF2-40B4-BE49-F238E27FC236}">
+                    <a16:creationId xmlns:a16="http://schemas.microsoft.com/office/drawing/2014/main" id="{403F25F4-B361-49D4-7219-372DFF5090E7}"/>
+                  </a:ext>
+                </a:extLst>
+              </p:cNvPr>
+              <p:cNvSpPr/>
+              <p:nvPr/>
+            </p:nvSpPr>
+            <p:spPr>
+              <a:xfrm>
+                <a:off x="1298501" y="962272"/>
+                <a:ext cx="1371600" cy="1371600"/>
+              </a:xfrm>
+              <a:prstGeom prst="rect">
+                <a:avLst/>
+              </a:prstGeom>
+              <a:noFill/>
+              <a:ln w="76200">
+                <a:solidFill>
+                  <a:schemeClr val="tx1"/>
+                </a:solidFill>
+              </a:ln>
+            </p:spPr>
+            <p:style>
+              <a:lnRef idx="2">
+                <a:schemeClr val="accent1">
+                  <a:shade val="50000"/>
+                </a:schemeClr>
+              </a:lnRef>
+              <a:fillRef idx="1">
+                <a:schemeClr val="accent1"/>
+              </a:fillRef>
+              <a:effectRef idx="0">
+                <a:schemeClr val="accent1"/>
+              </a:effectRef>
+              <a:fontRef idx="minor">
+                <a:schemeClr val="lt1"/>
+              </a:fontRef>
+            </p:style>
+            <p:txBody>
+              <a:bodyPr rtlCol="0" anchor="ctr"/>
+              <a:lstStyle/>
+              <a:p>
+                <a:pPr algn="ctr"/>
+                <a:endParaRPr lang="en-US"/>
+              </a:p>
+            </p:txBody>
+          </p:sp>
+          <p:sp>
+            <p:nvSpPr>
+              <p:cNvPr id="213" name="Arrow: Pentagon 212">
+                <a:extLst>
+                  <a:ext uri="{FF2B5EF4-FFF2-40B4-BE49-F238E27FC236}">
+                    <a16:creationId xmlns:a16="http://schemas.microsoft.com/office/drawing/2014/main" id="{4393A72D-008E-104C-2391-A8E81491B5CE}"/>
+                  </a:ext>
+                </a:extLst>
+              </p:cNvPr>
+              <p:cNvSpPr/>
+              <p:nvPr/>
+            </p:nvSpPr>
+            <p:spPr>
+              <a:xfrm rot="5400000">
+                <a:off x="1435661" y="1173775"/>
+                <a:ext cx="1097280" cy="1097280"/>
+              </a:xfrm>
+              <a:prstGeom prst="homePlate">
+                <a:avLst/>
+              </a:prstGeom>
+              <a:noFill/>
+              <a:ln w="38100" cap="flat" cmpd="sng" algn="ctr">
+                <a:solidFill>
+                  <a:schemeClr val="dk1"/>
+                </a:solidFill>
+                <a:prstDash val="solid"/>
+                <a:round/>
+                <a:headEnd type="none" w="med" len="med"/>
+                <a:tailEnd type="none" w="med" len="med"/>
+              </a:ln>
+            </p:spPr>
+            <p:style>
+              <a:lnRef idx="0">
+                <a:scrgbClr r="0" g="0" b="0"/>
+              </a:lnRef>
+              <a:fillRef idx="0">
+                <a:scrgbClr r="0" g="0" b="0"/>
+              </a:fillRef>
+              <a:effectRef idx="0">
+                <a:scrgbClr r="0" g="0" b="0"/>
+              </a:effectRef>
+              <a:fontRef idx="minor">
+                <a:schemeClr val="dk1"/>
+              </a:fontRef>
+            </p:style>
+            <p:txBody>
+              <a:bodyPr rtlCol="0" anchor="ctr"/>
+              <a:lstStyle/>
+              <a:p>
+                <a:pPr algn="ctr"/>
+                <a:endParaRPr lang="en-US"/>
+              </a:p>
+            </p:txBody>
+          </p:sp>
+        </p:grpSp>
+        <p:grpSp>
+          <p:nvGrpSpPr>
+            <p:cNvPr id="205" name="Group 204">
+              <a:extLst>
+                <a:ext uri="{FF2B5EF4-FFF2-40B4-BE49-F238E27FC236}">
+                  <a16:creationId xmlns:a16="http://schemas.microsoft.com/office/drawing/2014/main" id="{8EBBE19C-B08E-1324-69CE-2F06CA721042}"/>
+                </a:ext>
+              </a:extLst>
+            </p:cNvPr>
+            <p:cNvGrpSpPr/>
+            <p:nvPr/>
+          </p:nvGrpSpPr>
+          <p:grpSpPr>
+            <a:xfrm rot="2403354">
+              <a:off x="5520349" y="2333220"/>
+              <a:ext cx="478022" cy="763020"/>
+              <a:chOff x="7639767" y="607131"/>
+              <a:chExt cx="1348536" cy="2152538"/>
+            </a:xfrm>
+          </p:grpSpPr>
+          <p:sp>
+            <p:nvSpPr>
+              <p:cNvPr id="206" name="Oval 205">
+                <a:extLst>
+                  <a:ext uri="{FF2B5EF4-FFF2-40B4-BE49-F238E27FC236}">
+                    <a16:creationId xmlns:a16="http://schemas.microsoft.com/office/drawing/2014/main" id="{323B5CF8-EECA-3149-2043-8EDC418A2B4E}"/>
+                  </a:ext>
+                </a:extLst>
+              </p:cNvPr>
+              <p:cNvSpPr/>
+              <p:nvPr/>
+            </p:nvSpPr>
+            <p:spPr>
+              <a:xfrm>
+                <a:off x="8043666" y="607131"/>
+                <a:ext cx="535184" cy="755481"/>
+              </a:xfrm>
+              <a:prstGeom prst="ellipse">
+                <a:avLst/>
+              </a:prstGeom>
+              <a:ln w="19050"/>
+            </p:spPr>
+            <p:style>
+              <a:lnRef idx="2">
+                <a:schemeClr val="dk1"/>
+              </a:lnRef>
+              <a:fillRef idx="1">
+                <a:schemeClr val="lt1"/>
+              </a:fillRef>
+              <a:effectRef idx="0">
+                <a:schemeClr val="dk1"/>
+              </a:effectRef>
+              <a:fontRef idx="minor">
+                <a:schemeClr val="dk1"/>
+              </a:fontRef>
+            </p:style>
+            <p:txBody>
+              <a:bodyPr rtlCol="0" anchor="ctr"/>
+              <a:lstStyle/>
+              <a:p>
+                <a:pPr algn="ctr"/>
+                <a:endParaRPr lang="en-US"/>
+              </a:p>
+            </p:txBody>
+          </p:sp>
+          <p:sp>
+            <p:nvSpPr>
+              <p:cNvPr id="207" name="Rectangle 206">
+                <a:extLst>
+                  <a:ext uri="{FF2B5EF4-FFF2-40B4-BE49-F238E27FC236}">
+                    <a16:creationId xmlns:a16="http://schemas.microsoft.com/office/drawing/2014/main" id="{A04ECD2A-FD47-9737-3C24-7D72D1BBFF32}"/>
+                  </a:ext>
+                </a:extLst>
+              </p:cNvPr>
+              <p:cNvSpPr/>
+              <p:nvPr/>
+            </p:nvSpPr>
+            <p:spPr>
+              <a:xfrm>
+                <a:off x="8043666" y="939800"/>
+                <a:ext cx="535184" cy="1819116"/>
+              </a:xfrm>
+              <a:prstGeom prst="rect">
+                <a:avLst/>
+              </a:prstGeom>
+            </p:spPr>
+            <p:style>
+              <a:lnRef idx="2">
+                <a:schemeClr val="dk1">
+                  <a:shade val="50000"/>
+                </a:schemeClr>
+              </a:lnRef>
+              <a:fillRef idx="1">
+                <a:schemeClr val="dk1"/>
+              </a:fillRef>
+              <a:effectRef idx="0">
+                <a:schemeClr val="dk1"/>
+              </a:effectRef>
+              <a:fontRef idx="minor">
+                <a:schemeClr val="lt1"/>
+              </a:fontRef>
+            </p:style>
+            <p:txBody>
+              <a:bodyPr rtlCol="0" anchor="ctr"/>
+              <a:lstStyle/>
+              <a:p>
+                <a:pPr algn="ctr"/>
+                <a:endParaRPr lang="en-US"/>
+              </a:p>
+            </p:txBody>
+          </p:sp>
+          <p:sp>
+            <p:nvSpPr>
+              <p:cNvPr id="208" name="Right Triangle 207">
+                <a:extLst>
+                  <a:ext uri="{FF2B5EF4-FFF2-40B4-BE49-F238E27FC236}">
+                    <a16:creationId xmlns:a16="http://schemas.microsoft.com/office/drawing/2014/main" id="{01B959A6-4776-F890-9E2E-418D558ED4CF}"/>
+                  </a:ext>
+                </a:extLst>
+              </p:cNvPr>
+              <p:cNvSpPr/>
+              <p:nvPr/>
+            </p:nvSpPr>
+            <p:spPr>
+              <a:xfrm>
+                <a:off x="8638501" y="1309133"/>
+                <a:ext cx="247895" cy="419100"/>
+              </a:xfrm>
+              <a:prstGeom prst="rtTriangle">
+                <a:avLst/>
+              </a:prstGeom>
+            </p:spPr>
+            <p:style>
+              <a:lnRef idx="2">
+                <a:schemeClr val="dk1">
+                  <a:shade val="50000"/>
+                </a:schemeClr>
+              </a:lnRef>
+              <a:fillRef idx="1">
+                <a:schemeClr val="dk1"/>
+              </a:fillRef>
+              <a:effectRef idx="0">
+                <a:schemeClr val="dk1"/>
+              </a:effectRef>
+              <a:fontRef idx="minor">
+                <a:schemeClr val="lt1"/>
+              </a:fontRef>
+            </p:style>
+            <p:txBody>
+              <a:bodyPr rtlCol="0" anchor="ctr"/>
+              <a:lstStyle/>
+              <a:p>
+                <a:pPr algn="ctr"/>
+                <a:endParaRPr lang="en-US"/>
+              </a:p>
+            </p:txBody>
+          </p:sp>
+          <p:sp>
+            <p:nvSpPr>
+              <p:cNvPr id="209" name="Right Triangle 208">
+                <a:extLst>
+                  <a:ext uri="{FF2B5EF4-FFF2-40B4-BE49-F238E27FC236}">
+                    <a16:creationId xmlns:a16="http://schemas.microsoft.com/office/drawing/2014/main" id="{BC919DB5-44F7-5148-B21C-F9764F51AED5}"/>
+                  </a:ext>
+                </a:extLst>
+              </p:cNvPr>
+              <p:cNvSpPr/>
+              <p:nvPr/>
+            </p:nvSpPr>
+            <p:spPr>
+              <a:xfrm>
+                <a:off x="8638501" y="2202347"/>
+                <a:ext cx="349802" cy="557322"/>
+              </a:xfrm>
+              <a:prstGeom prst="rtTriangle">
+                <a:avLst/>
+              </a:prstGeom>
+            </p:spPr>
+            <p:style>
+              <a:lnRef idx="2">
+                <a:schemeClr val="dk1">
+                  <a:shade val="50000"/>
+                </a:schemeClr>
+              </a:lnRef>
+              <a:fillRef idx="1">
+                <a:schemeClr val="dk1"/>
+              </a:fillRef>
+              <a:effectRef idx="0">
+                <a:schemeClr val="dk1"/>
+              </a:effectRef>
+              <a:fontRef idx="minor">
+                <a:schemeClr val="lt1"/>
+              </a:fontRef>
+            </p:style>
+            <p:txBody>
+              <a:bodyPr rtlCol="0" anchor="ctr"/>
+              <a:lstStyle/>
+              <a:p>
+                <a:pPr algn="ctr"/>
+                <a:endParaRPr lang="en-US"/>
+              </a:p>
+            </p:txBody>
+          </p:sp>
+          <p:sp>
+            <p:nvSpPr>
+              <p:cNvPr id="210" name="Right Triangle 209">
+                <a:extLst>
+                  <a:ext uri="{FF2B5EF4-FFF2-40B4-BE49-F238E27FC236}">
+                    <a16:creationId xmlns:a16="http://schemas.microsoft.com/office/drawing/2014/main" id="{E4B56F33-AC59-B4AB-0C8D-696AFD82762F}"/>
+                  </a:ext>
+                </a:extLst>
+              </p:cNvPr>
+              <p:cNvSpPr/>
+              <p:nvPr/>
+            </p:nvSpPr>
+            <p:spPr>
+              <a:xfrm flipH="1">
+                <a:off x="7747717" y="1287886"/>
+                <a:ext cx="247895" cy="419100"/>
+              </a:xfrm>
+              <a:prstGeom prst="rtTriangle">
+                <a:avLst/>
+              </a:prstGeom>
+            </p:spPr>
+            <p:style>
+              <a:lnRef idx="2">
+                <a:schemeClr val="dk1">
+                  <a:shade val="50000"/>
+                </a:schemeClr>
+              </a:lnRef>
+              <a:fillRef idx="1">
+                <a:schemeClr val="dk1"/>
+              </a:fillRef>
+              <a:effectRef idx="0">
+                <a:schemeClr val="dk1"/>
+              </a:effectRef>
+              <a:fontRef idx="minor">
+                <a:schemeClr val="lt1"/>
+              </a:fontRef>
+            </p:style>
+            <p:txBody>
+              <a:bodyPr rtlCol="0" anchor="ctr"/>
+              <a:lstStyle/>
+              <a:p>
+                <a:pPr algn="ctr"/>
+                <a:endParaRPr lang="en-US"/>
+              </a:p>
+            </p:txBody>
+          </p:sp>
+          <p:sp>
+            <p:nvSpPr>
+              <p:cNvPr id="211" name="Right Triangle 210">
+                <a:extLst>
+                  <a:ext uri="{FF2B5EF4-FFF2-40B4-BE49-F238E27FC236}">
+                    <a16:creationId xmlns:a16="http://schemas.microsoft.com/office/drawing/2014/main" id="{F240BE8C-47CF-F48A-622F-E78795C08A3B}"/>
+                  </a:ext>
+                </a:extLst>
+              </p:cNvPr>
+              <p:cNvSpPr/>
+              <p:nvPr/>
+            </p:nvSpPr>
+            <p:spPr>
+              <a:xfrm flipH="1">
+                <a:off x="7639767" y="2181100"/>
+                <a:ext cx="349802" cy="557322"/>
+              </a:xfrm>
+              <a:prstGeom prst="rtTriangle">
+                <a:avLst/>
+              </a:prstGeom>
+            </p:spPr>
+            <p:style>
+              <a:lnRef idx="2">
+                <a:schemeClr val="dk1">
+                  <a:shade val="50000"/>
+                </a:schemeClr>
+              </a:lnRef>
+              <a:fillRef idx="1">
+                <a:schemeClr val="dk1"/>
+              </a:fillRef>
+              <a:effectRef idx="0">
+                <a:schemeClr val="dk1"/>
+              </a:effectRef>
+              <a:fontRef idx="minor">
+                <a:schemeClr val="lt1"/>
+              </a:fontRef>
+            </p:style>
+            <p:txBody>
+              <a:bodyPr rtlCol="0" anchor="ctr"/>
+              <a:lstStyle/>
+              <a:p>
+                <a:pPr algn="ctr"/>
+                <a:endParaRPr lang="en-US"/>
+              </a:p>
+            </p:txBody>
+          </p:sp>
+        </p:grpSp>
       </p:grpSp>
     </p:spTree>
     <p:extLst>
@@ -34113,750 +36912,6 @@
             </p:txBody>
           </p:sp>
         </p:grpSp>
-      </p:grpSp>
-      <p:grpSp>
-        <p:nvGrpSpPr>
-          <p:cNvPr id="14" name="Group 13">
-            <a:extLst>
-              <a:ext uri="{FF2B5EF4-FFF2-40B4-BE49-F238E27FC236}">
-                <a16:creationId xmlns:a16="http://schemas.microsoft.com/office/drawing/2014/main" id="{A565361B-D1B3-E892-B8A5-A85F03C76292}"/>
-              </a:ext>
-            </a:extLst>
-          </p:cNvPr>
-          <p:cNvGrpSpPr/>
-          <p:nvPr/>
-        </p:nvGrpSpPr>
-        <p:grpSpPr>
-          <a:xfrm>
-            <a:off x="5410200" y="221426"/>
-            <a:ext cx="1371600" cy="1371600"/>
-            <a:chOff x="1298501" y="962272"/>
-            <a:chExt cx="1371600" cy="1371600"/>
-          </a:xfrm>
-        </p:grpSpPr>
-        <p:sp>
-          <p:nvSpPr>
-            <p:cNvPr id="30" name="Rectangle 29">
-              <a:extLst>
-                <a:ext uri="{FF2B5EF4-FFF2-40B4-BE49-F238E27FC236}">
-                  <a16:creationId xmlns:a16="http://schemas.microsoft.com/office/drawing/2014/main" id="{85DC672F-078E-86F7-6992-3E3835492468}"/>
-                </a:ext>
-              </a:extLst>
-            </p:cNvPr>
-            <p:cNvSpPr/>
-            <p:nvPr/>
-          </p:nvSpPr>
-          <p:spPr>
-            <a:xfrm>
-              <a:off x="1298501" y="962272"/>
-              <a:ext cx="1371600" cy="1371600"/>
-            </a:xfrm>
-            <a:prstGeom prst="rect">
-              <a:avLst/>
-            </a:prstGeom>
-            <a:noFill/>
-            <a:ln w="76200">
-              <a:solidFill>
-                <a:schemeClr val="tx1"/>
-              </a:solidFill>
-            </a:ln>
-          </p:spPr>
-          <p:style>
-            <a:lnRef idx="2">
-              <a:schemeClr val="accent1">
-                <a:shade val="50000"/>
-              </a:schemeClr>
-            </a:lnRef>
-            <a:fillRef idx="1">
-              <a:schemeClr val="accent1"/>
-            </a:fillRef>
-            <a:effectRef idx="0">
-              <a:schemeClr val="accent1"/>
-            </a:effectRef>
-            <a:fontRef idx="minor">
-              <a:schemeClr val="lt1"/>
-            </a:fontRef>
-          </p:style>
-          <p:txBody>
-            <a:bodyPr rtlCol="0" anchor="ctr"/>
-            <a:lstStyle/>
-            <a:p>
-              <a:pPr algn="ctr"/>
-              <a:endParaRPr lang="en-US"/>
-            </a:p>
-          </p:txBody>
-        </p:sp>
-        <p:sp>
-          <p:nvSpPr>
-            <p:cNvPr id="34" name="Arrow: Pentagon 33">
-              <a:extLst>
-                <a:ext uri="{FF2B5EF4-FFF2-40B4-BE49-F238E27FC236}">
-                  <a16:creationId xmlns:a16="http://schemas.microsoft.com/office/drawing/2014/main" id="{922F7BD9-14B2-69A7-7E42-82ADB159EC59}"/>
-                </a:ext>
-              </a:extLst>
-            </p:cNvPr>
-            <p:cNvSpPr/>
-            <p:nvPr/>
-          </p:nvSpPr>
-          <p:spPr>
-            <a:xfrm rot="5400000">
-              <a:off x="1435661" y="1173775"/>
-              <a:ext cx="1097280" cy="1097280"/>
-            </a:xfrm>
-            <a:prstGeom prst="homePlate">
-              <a:avLst/>
-            </a:prstGeom>
-            <a:noFill/>
-            <a:ln w="38100" cap="flat" cmpd="sng" algn="ctr">
-              <a:solidFill>
-                <a:schemeClr val="dk1"/>
-              </a:solidFill>
-              <a:prstDash val="solid"/>
-              <a:round/>
-              <a:headEnd type="none" w="med" len="med"/>
-              <a:tailEnd type="none" w="med" len="med"/>
-            </a:ln>
-          </p:spPr>
-          <p:style>
-            <a:lnRef idx="0">
-              <a:scrgbClr r="0" g="0" b="0"/>
-            </a:lnRef>
-            <a:fillRef idx="0">
-              <a:scrgbClr r="0" g="0" b="0"/>
-            </a:fillRef>
-            <a:effectRef idx="0">
-              <a:scrgbClr r="0" g="0" b="0"/>
-            </a:effectRef>
-            <a:fontRef idx="minor">
-              <a:schemeClr val="dk1"/>
-            </a:fontRef>
-          </p:style>
-          <p:txBody>
-            <a:bodyPr rtlCol="0" anchor="ctr"/>
-            <a:lstStyle/>
-            <a:p>
-              <a:pPr algn="ctr"/>
-              <a:endParaRPr lang="en-US"/>
-            </a:p>
-          </p:txBody>
-        </p:sp>
-      </p:grpSp>
-      <p:grpSp>
-        <p:nvGrpSpPr>
-          <p:cNvPr id="66" name="Group 65">
-            <a:extLst>
-              <a:ext uri="{FF2B5EF4-FFF2-40B4-BE49-F238E27FC236}">
-                <a16:creationId xmlns:a16="http://schemas.microsoft.com/office/drawing/2014/main" id="{190F21FA-0FD6-7EA8-A718-ADDF7B488C35}"/>
-              </a:ext>
-            </a:extLst>
-          </p:cNvPr>
-          <p:cNvGrpSpPr/>
-          <p:nvPr/>
-        </p:nvGrpSpPr>
-        <p:grpSpPr>
-          <a:xfrm>
-            <a:off x="5683529" y="473007"/>
-            <a:ext cx="824942" cy="550241"/>
-            <a:chOff x="2788414" y="3003550"/>
-            <a:chExt cx="2665648" cy="1778000"/>
-          </a:xfrm>
-        </p:grpSpPr>
-        <p:sp>
-          <p:nvSpPr>
-            <p:cNvPr id="36" name="Oval 35">
-              <a:extLst>
-                <a:ext uri="{FF2B5EF4-FFF2-40B4-BE49-F238E27FC236}">
-                  <a16:creationId xmlns:a16="http://schemas.microsoft.com/office/drawing/2014/main" id="{AC2BCBBD-A6B2-5611-903A-3FB0AE560434}"/>
-                </a:ext>
-              </a:extLst>
-            </p:cNvPr>
-            <p:cNvSpPr/>
-            <p:nvPr/>
-          </p:nvSpPr>
-          <p:spPr>
-            <a:xfrm>
-              <a:off x="3903803" y="3003550"/>
-              <a:ext cx="439245" cy="1778000"/>
-            </a:xfrm>
-            <a:prstGeom prst="ellipse">
-              <a:avLst/>
-            </a:prstGeom>
-          </p:spPr>
-          <p:style>
-            <a:lnRef idx="2">
-              <a:schemeClr val="dk1">
-                <a:shade val="50000"/>
-              </a:schemeClr>
-            </a:lnRef>
-            <a:fillRef idx="1">
-              <a:schemeClr val="dk1"/>
-            </a:fillRef>
-            <a:effectRef idx="0">
-              <a:schemeClr val="dk1"/>
-            </a:effectRef>
-            <a:fontRef idx="minor">
-              <a:schemeClr val="lt1"/>
-            </a:fontRef>
-          </p:style>
-          <p:txBody>
-            <a:bodyPr rtlCol="0" anchor="ctr"/>
-            <a:lstStyle/>
-            <a:p>
-              <a:pPr algn="ctr"/>
-              <a:endParaRPr lang="en-US"/>
-            </a:p>
-          </p:txBody>
-        </p:sp>
-        <p:sp>
-          <p:nvSpPr>
-            <p:cNvPr id="38" name="Isosceles Triangle 37">
-              <a:extLst>
-                <a:ext uri="{FF2B5EF4-FFF2-40B4-BE49-F238E27FC236}">
-                  <a16:creationId xmlns:a16="http://schemas.microsoft.com/office/drawing/2014/main" id="{185CD5BD-54AA-2E6E-5A64-BE9D833FEF31}"/>
-                </a:ext>
-              </a:extLst>
-            </p:cNvPr>
-            <p:cNvSpPr/>
-            <p:nvPr/>
-          </p:nvSpPr>
-          <p:spPr>
-            <a:xfrm>
-              <a:off x="2788414" y="3612890"/>
-              <a:ext cx="2665648" cy="1168660"/>
-            </a:xfrm>
-            <a:prstGeom prst="triangle">
-              <a:avLst/>
-            </a:prstGeom>
-          </p:spPr>
-          <p:style>
-            <a:lnRef idx="2">
-              <a:schemeClr val="dk1">
-                <a:shade val="50000"/>
-              </a:schemeClr>
-            </a:lnRef>
-            <a:fillRef idx="1">
-              <a:schemeClr val="dk1"/>
-            </a:fillRef>
-            <a:effectRef idx="0">
-              <a:schemeClr val="dk1"/>
-            </a:effectRef>
-            <a:fontRef idx="minor">
-              <a:schemeClr val="lt1"/>
-            </a:fontRef>
-          </p:style>
-          <p:txBody>
-            <a:bodyPr rtlCol="0" anchor="ctr"/>
-            <a:lstStyle/>
-            <a:p>
-              <a:pPr algn="ctr"/>
-              <a:endParaRPr lang="en-US"/>
-            </a:p>
-          </p:txBody>
-        </p:sp>
-        <p:sp>
-          <p:nvSpPr>
-            <p:cNvPr id="53" name="Oval 52">
-              <a:extLst>
-                <a:ext uri="{FF2B5EF4-FFF2-40B4-BE49-F238E27FC236}">
-                  <a16:creationId xmlns:a16="http://schemas.microsoft.com/office/drawing/2014/main" id="{9DF49ED0-E56C-2F63-DA42-7D534C286B42}"/>
-                </a:ext>
-              </a:extLst>
-            </p:cNvPr>
-            <p:cNvSpPr/>
-            <p:nvPr/>
-          </p:nvSpPr>
-          <p:spPr>
-            <a:xfrm>
-              <a:off x="3346707" y="4263156"/>
-              <a:ext cx="458369" cy="458369"/>
-            </a:xfrm>
-            <a:prstGeom prst="ellipse">
-              <a:avLst/>
-            </a:prstGeom>
-          </p:spPr>
-          <p:style>
-            <a:lnRef idx="2">
-              <a:schemeClr val="dk1"/>
-            </a:lnRef>
-            <a:fillRef idx="1">
-              <a:schemeClr val="lt1"/>
-            </a:fillRef>
-            <a:effectRef idx="0">
-              <a:schemeClr val="dk1"/>
-            </a:effectRef>
-            <a:fontRef idx="minor">
-              <a:schemeClr val="dk1"/>
-            </a:fontRef>
-          </p:style>
-          <p:txBody>
-            <a:bodyPr rtlCol="0" anchor="ctr"/>
-            <a:lstStyle/>
-            <a:p>
-              <a:pPr algn="ctr"/>
-              <a:endParaRPr lang="en-US"/>
-            </a:p>
-          </p:txBody>
-        </p:sp>
-        <p:sp>
-          <p:nvSpPr>
-            <p:cNvPr id="54" name="Oval 53">
-              <a:extLst>
-                <a:ext uri="{FF2B5EF4-FFF2-40B4-BE49-F238E27FC236}">
-                  <a16:creationId xmlns:a16="http://schemas.microsoft.com/office/drawing/2014/main" id="{46F060C6-AD38-DA21-F39D-93FB72E0EE81}"/>
-                </a:ext>
-              </a:extLst>
-            </p:cNvPr>
-            <p:cNvSpPr/>
-            <p:nvPr/>
-          </p:nvSpPr>
-          <p:spPr>
-            <a:xfrm>
-              <a:off x="4436723" y="4263156"/>
-              <a:ext cx="458369" cy="458369"/>
-            </a:xfrm>
-            <a:prstGeom prst="ellipse">
-              <a:avLst/>
-            </a:prstGeom>
-          </p:spPr>
-          <p:style>
-            <a:lnRef idx="2">
-              <a:schemeClr val="dk1"/>
-            </a:lnRef>
-            <a:fillRef idx="1">
-              <a:schemeClr val="lt1"/>
-            </a:fillRef>
-            <a:effectRef idx="0">
-              <a:schemeClr val="dk1"/>
-            </a:effectRef>
-            <a:fontRef idx="minor">
-              <a:schemeClr val="dk1"/>
-            </a:fontRef>
-          </p:style>
-          <p:txBody>
-            <a:bodyPr rtlCol="0" anchor="ctr"/>
-            <a:lstStyle/>
-            <a:p>
-              <a:pPr algn="ctr"/>
-              <a:endParaRPr lang="en-US"/>
-            </a:p>
-          </p:txBody>
-        </p:sp>
-      </p:grpSp>
-      <p:grpSp>
-        <p:nvGrpSpPr>
-          <p:cNvPr id="65" name="Group 64">
-            <a:extLst>
-              <a:ext uri="{FF2B5EF4-FFF2-40B4-BE49-F238E27FC236}">
-                <a16:creationId xmlns:a16="http://schemas.microsoft.com/office/drawing/2014/main" id="{1D60BB50-A86F-6A8C-9E06-CC7CAD599DA7}"/>
-              </a:ext>
-            </a:extLst>
-          </p:cNvPr>
-          <p:cNvGrpSpPr/>
-          <p:nvPr/>
-        </p:nvGrpSpPr>
-        <p:grpSpPr>
-          <a:xfrm>
-            <a:off x="7253835" y="514121"/>
-            <a:ext cx="770328" cy="575178"/>
-            <a:chOff x="7066650" y="3003550"/>
-            <a:chExt cx="2381250" cy="1778000"/>
-          </a:xfrm>
-        </p:grpSpPr>
-        <p:sp>
-          <p:nvSpPr>
-            <p:cNvPr id="62" name="Rectangle 61">
-              <a:extLst>
-                <a:ext uri="{FF2B5EF4-FFF2-40B4-BE49-F238E27FC236}">
-                  <a16:creationId xmlns:a16="http://schemas.microsoft.com/office/drawing/2014/main" id="{57B154D4-ED69-F1D3-9B28-42BE1780598C}"/>
-                </a:ext>
-              </a:extLst>
-            </p:cNvPr>
-            <p:cNvSpPr/>
-            <p:nvPr/>
-          </p:nvSpPr>
-          <p:spPr>
-            <a:xfrm>
-              <a:off x="7066650" y="3429000"/>
-              <a:ext cx="2381250" cy="1352550"/>
-            </a:xfrm>
-            <a:prstGeom prst="rect">
-              <a:avLst/>
-            </a:prstGeom>
-          </p:spPr>
-          <p:style>
-            <a:lnRef idx="2">
-              <a:schemeClr val="dk1">
-                <a:shade val="50000"/>
-              </a:schemeClr>
-            </a:lnRef>
-            <a:fillRef idx="1">
-              <a:schemeClr val="dk1"/>
-            </a:fillRef>
-            <a:effectRef idx="0">
-              <a:schemeClr val="dk1"/>
-            </a:effectRef>
-            <a:fontRef idx="minor">
-              <a:schemeClr val="lt1"/>
-            </a:fontRef>
-          </p:style>
-          <p:txBody>
-            <a:bodyPr rtlCol="0" anchor="ctr"/>
-            <a:lstStyle/>
-            <a:p>
-              <a:pPr algn="ctr"/>
-              <a:endParaRPr lang="en-US"/>
-            </a:p>
-          </p:txBody>
-        </p:sp>
-        <p:sp>
-          <p:nvSpPr>
-            <p:cNvPr id="57" name="Oval 56">
-              <a:extLst>
-                <a:ext uri="{FF2B5EF4-FFF2-40B4-BE49-F238E27FC236}">
-                  <a16:creationId xmlns:a16="http://schemas.microsoft.com/office/drawing/2014/main" id="{60E26D81-2B4E-3E99-6951-414CC2576DFE}"/>
-                </a:ext>
-              </a:extLst>
-            </p:cNvPr>
-            <p:cNvSpPr/>
-            <p:nvPr/>
-          </p:nvSpPr>
-          <p:spPr>
-            <a:xfrm>
-              <a:off x="8037653" y="3003550"/>
-              <a:ext cx="439245" cy="1778000"/>
-            </a:xfrm>
-            <a:prstGeom prst="ellipse">
-              <a:avLst/>
-            </a:prstGeom>
-          </p:spPr>
-          <p:style>
-            <a:lnRef idx="2">
-              <a:schemeClr val="dk1">
-                <a:shade val="50000"/>
-              </a:schemeClr>
-            </a:lnRef>
-            <a:fillRef idx="1">
-              <a:schemeClr val="dk1"/>
-            </a:fillRef>
-            <a:effectRef idx="0">
-              <a:schemeClr val="dk1"/>
-            </a:effectRef>
-            <a:fontRef idx="minor">
-              <a:schemeClr val="lt1"/>
-            </a:fontRef>
-          </p:style>
-          <p:txBody>
-            <a:bodyPr rtlCol="0" anchor="ctr"/>
-            <a:lstStyle/>
-            <a:p>
-              <a:pPr algn="ctr"/>
-              <a:endParaRPr lang="en-US"/>
-            </a:p>
-          </p:txBody>
-        </p:sp>
-        <p:sp>
-          <p:nvSpPr>
-            <p:cNvPr id="58" name="Oval 57">
-              <a:extLst>
-                <a:ext uri="{FF2B5EF4-FFF2-40B4-BE49-F238E27FC236}">
-                  <a16:creationId xmlns:a16="http://schemas.microsoft.com/office/drawing/2014/main" id="{1EAAD573-AE7F-038C-AA6A-C4FC18589CFC}"/>
-                </a:ext>
-              </a:extLst>
-            </p:cNvPr>
-            <p:cNvSpPr/>
-            <p:nvPr/>
-          </p:nvSpPr>
-          <p:spPr>
-            <a:xfrm>
-              <a:off x="7480557" y="3512687"/>
-              <a:ext cx="458369" cy="458369"/>
-            </a:xfrm>
-            <a:prstGeom prst="ellipse">
-              <a:avLst/>
-            </a:prstGeom>
-          </p:spPr>
-          <p:style>
-            <a:lnRef idx="2">
-              <a:schemeClr val="dk1"/>
-            </a:lnRef>
-            <a:fillRef idx="1">
-              <a:schemeClr val="lt1"/>
-            </a:fillRef>
-            <a:effectRef idx="0">
-              <a:schemeClr val="dk1"/>
-            </a:effectRef>
-            <a:fontRef idx="minor">
-              <a:schemeClr val="dk1"/>
-            </a:fontRef>
-          </p:style>
-          <p:txBody>
-            <a:bodyPr rtlCol="0" anchor="ctr"/>
-            <a:lstStyle/>
-            <a:p>
-              <a:pPr algn="ctr"/>
-              <a:endParaRPr lang="en-US"/>
-            </a:p>
-          </p:txBody>
-        </p:sp>
-        <p:sp>
-          <p:nvSpPr>
-            <p:cNvPr id="61" name="Oval 60">
-              <a:extLst>
-                <a:ext uri="{FF2B5EF4-FFF2-40B4-BE49-F238E27FC236}">
-                  <a16:creationId xmlns:a16="http://schemas.microsoft.com/office/drawing/2014/main" id="{19E40176-D9B8-40ED-2980-6BE673F2ADB0}"/>
-                </a:ext>
-              </a:extLst>
-            </p:cNvPr>
-            <p:cNvSpPr/>
-            <p:nvPr/>
-          </p:nvSpPr>
-          <p:spPr>
-            <a:xfrm>
-              <a:off x="8570573" y="3512687"/>
-              <a:ext cx="458369" cy="458369"/>
-            </a:xfrm>
-            <a:prstGeom prst="ellipse">
-              <a:avLst/>
-            </a:prstGeom>
-          </p:spPr>
-          <p:style>
-            <a:lnRef idx="2">
-              <a:schemeClr val="dk1"/>
-            </a:lnRef>
-            <a:fillRef idx="1">
-              <a:schemeClr val="lt1"/>
-            </a:fillRef>
-            <a:effectRef idx="0">
-              <a:schemeClr val="dk1"/>
-            </a:effectRef>
-            <a:fontRef idx="minor">
-              <a:schemeClr val="dk1"/>
-            </a:fontRef>
-          </p:style>
-          <p:txBody>
-            <a:bodyPr rtlCol="0" anchor="ctr"/>
-            <a:lstStyle/>
-            <a:p>
-              <a:pPr algn="ctr"/>
-              <a:endParaRPr lang="en-US"/>
-            </a:p>
-          </p:txBody>
-        </p:sp>
-        <p:sp>
-          <p:nvSpPr>
-            <p:cNvPr id="63" name="Oval 62">
-              <a:extLst>
-                <a:ext uri="{FF2B5EF4-FFF2-40B4-BE49-F238E27FC236}">
-                  <a16:creationId xmlns:a16="http://schemas.microsoft.com/office/drawing/2014/main" id="{5CE3E423-54A6-774B-CF2F-AEFB806F52F3}"/>
-                </a:ext>
-              </a:extLst>
-            </p:cNvPr>
-            <p:cNvSpPr/>
-            <p:nvPr/>
-          </p:nvSpPr>
-          <p:spPr>
-            <a:xfrm>
-              <a:off x="7480557" y="4167321"/>
-              <a:ext cx="458369" cy="458369"/>
-            </a:xfrm>
-            <a:prstGeom prst="ellipse">
-              <a:avLst/>
-            </a:prstGeom>
-          </p:spPr>
-          <p:style>
-            <a:lnRef idx="2">
-              <a:schemeClr val="dk1"/>
-            </a:lnRef>
-            <a:fillRef idx="1">
-              <a:schemeClr val="lt1"/>
-            </a:fillRef>
-            <a:effectRef idx="0">
-              <a:schemeClr val="dk1"/>
-            </a:effectRef>
-            <a:fontRef idx="minor">
-              <a:schemeClr val="dk1"/>
-            </a:fontRef>
-          </p:style>
-          <p:txBody>
-            <a:bodyPr rtlCol="0" anchor="ctr"/>
-            <a:lstStyle/>
-            <a:p>
-              <a:pPr algn="ctr"/>
-              <a:endParaRPr lang="en-US"/>
-            </a:p>
-          </p:txBody>
-        </p:sp>
-        <p:sp>
-          <p:nvSpPr>
-            <p:cNvPr id="64" name="Oval 63">
-              <a:extLst>
-                <a:ext uri="{FF2B5EF4-FFF2-40B4-BE49-F238E27FC236}">
-                  <a16:creationId xmlns:a16="http://schemas.microsoft.com/office/drawing/2014/main" id="{6D30A8C5-61B7-B967-A1E5-AD845CD0AAC8}"/>
-                </a:ext>
-              </a:extLst>
-            </p:cNvPr>
-            <p:cNvSpPr/>
-            <p:nvPr/>
-          </p:nvSpPr>
-          <p:spPr>
-            <a:xfrm>
-              <a:off x="8570573" y="4167321"/>
-              <a:ext cx="458369" cy="458369"/>
-            </a:xfrm>
-            <a:prstGeom prst="ellipse">
-              <a:avLst/>
-            </a:prstGeom>
-          </p:spPr>
-          <p:style>
-            <a:lnRef idx="2">
-              <a:schemeClr val="dk1"/>
-            </a:lnRef>
-            <a:fillRef idx="1">
-              <a:schemeClr val="lt1"/>
-            </a:fillRef>
-            <a:effectRef idx="0">
-              <a:schemeClr val="dk1"/>
-            </a:effectRef>
-            <a:fontRef idx="minor">
-              <a:schemeClr val="dk1"/>
-            </a:fontRef>
-          </p:style>
-          <p:txBody>
-            <a:bodyPr rtlCol="0" anchor="ctr"/>
-            <a:lstStyle/>
-            <a:p>
-              <a:pPr algn="ctr"/>
-              <a:endParaRPr lang="en-US"/>
-            </a:p>
-          </p:txBody>
-        </p:sp>
-      </p:grpSp>
-      <p:grpSp>
-        <p:nvGrpSpPr>
-          <p:cNvPr id="67" name="Group 66">
-            <a:extLst>
-              <a:ext uri="{FF2B5EF4-FFF2-40B4-BE49-F238E27FC236}">
-                <a16:creationId xmlns:a16="http://schemas.microsoft.com/office/drawing/2014/main" id="{482DF19A-4B0D-8758-DC4E-573890DEF054}"/>
-              </a:ext>
-            </a:extLst>
-          </p:cNvPr>
-          <p:cNvGrpSpPr/>
-          <p:nvPr/>
-        </p:nvGrpSpPr>
-        <p:grpSpPr>
-          <a:xfrm>
-            <a:off x="6954576" y="230762"/>
-            <a:ext cx="1371600" cy="1371600"/>
-            <a:chOff x="1298501" y="962272"/>
-            <a:chExt cx="1371600" cy="1371600"/>
-          </a:xfrm>
-        </p:grpSpPr>
-        <p:sp>
-          <p:nvSpPr>
-            <p:cNvPr id="72" name="Rectangle 71">
-              <a:extLst>
-                <a:ext uri="{FF2B5EF4-FFF2-40B4-BE49-F238E27FC236}">
-                  <a16:creationId xmlns:a16="http://schemas.microsoft.com/office/drawing/2014/main" id="{75391A79-2257-A007-CDA1-3BD2DAA828FE}"/>
-                </a:ext>
-              </a:extLst>
-            </p:cNvPr>
-            <p:cNvSpPr/>
-            <p:nvPr/>
-          </p:nvSpPr>
-          <p:spPr>
-            <a:xfrm>
-              <a:off x="1298501" y="962272"/>
-              <a:ext cx="1371600" cy="1371600"/>
-            </a:xfrm>
-            <a:prstGeom prst="rect">
-              <a:avLst/>
-            </a:prstGeom>
-            <a:noFill/>
-            <a:ln w="76200">
-              <a:solidFill>
-                <a:schemeClr val="tx1"/>
-              </a:solidFill>
-            </a:ln>
-          </p:spPr>
-          <p:style>
-            <a:lnRef idx="2">
-              <a:schemeClr val="accent1">
-                <a:shade val="50000"/>
-              </a:schemeClr>
-            </a:lnRef>
-            <a:fillRef idx="1">
-              <a:schemeClr val="accent1"/>
-            </a:fillRef>
-            <a:effectRef idx="0">
-              <a:schemeClr val="accent1"/>
-            </a:effectRef>
-            <a:fontRef idx="minor">
-              <a:schemeClr val="lt1"/>
-            </a:fontRef>
-          </p:style>
-          <p:txBody>
-            <a:bodyPr rtlCol="0" anchor="ctr"/>
-            <a:lstStyle/>
-            <a:p>
-              <a:pPr algn="ctr"/>
-              <a:endParaRPr lang="en-US"/>
-            </a:p>
-          </p:txBody>
-        </p:sp>
-        <p:sp>
-          <p:nvSpPr>
-            <p:cNvPr id="77" name="Arrow: Pentagon 76">
-              <a:extLst>
-                <a:ext uri="{FF2B5EF4-FFF2-40B4-BE49-F238E27FC236}">
-                  <a16:creationId xmlns:a16="http://schemas.microsoft.com/office/drawing/2014/main" id="{46094833-5784-28D6-A952-8CD6B5F92095}"/>
-                </a:ext>
-              </a:extLst>
-            </p:cNvPr>
-            <p:cNvSpPr/>
-            <p:nvPr/>
-          </p:nvSpPr>
-          <p:spPr>
-            <a:xfrm rot="5400000">
-              <a:off x="1435661" y="1173775"/>
-              <a:ext cx="1097280" cy="1097280"/>
-            </a:xfrm>
-            <a:prstGeom prst="homePlate">
-              <a:avLst/>
-            </a:prstGeom>
-            <a:noFill/>
-            <a:ln w="38100" cap="flat" cmpd="sng" algn="ctr">
-              <a:solidFill>
-                <a:schemeClr val="dk1"/>
-              </a:solidFill>
-              <a:prstDash val="solid"/>
-              <a:round/>
-              <a:headEnd type="none" w="med" len="med"/>
-              <a:tailEnd type="none" w="med" len="med"/>
-            </a:ln>
-          </p:spPr>
-          <p:style>
-            <a:lnRef idx="0">
-              <a:scrgbClr r="0" g="0" b="0"/>
-            </a:lnRef>
-            <a:fillRef idx="0">
-              <a:scrgbClr r="0" g="0" b="0"/>
-            </a:fillRef>
-            <a:effectRef idx="0">
-              <a:scrgbClr r="0" g="0" b="0"/>
-            </a:effectRef>
-            <a:fontRef idx="minor">
-              <a:schemeClr val="dk1"/>
-            </a:fontRef>
-          </p:style>
-          <p:txBody>
-            <a:bodyPr rtlCol="0" anchor="ctr"/>
-            <a:lstStyle/>
-            <a:p>
-              <a:pPr algn="ctr"/>
-              <a:endParaRPr lang="en-US"/>
-            </a:p>
-          </p:txBody>
-        </p:sp>
       </p:grpSp>
     </p:spTree>
     <p:extLst>

--- a/image process/drawings sifi.pptx
+++ b/image process/drawings sifi.pptx
@@ -200,7 +200,7 @@
           <a:p>
             <a:fld id="{7700C406-2328-4788-AE79-437B6607AD22}" type="datetimeFigureOut">
               <a:rPr lang="en-US" smtClean="0"/>
-              <a:t>1/7/2023</a:t>
+              <a:t>1/25/2023</a:t>
             </a:fld>
             <a:endParaRPr lang="en-US"/>
           </a:p>
@@ -614,7 +614,7 @@
           <a:p>
             <a:fld id="{9EC8CD53-0620-48F2-A3BB-2B10BDA60E52}" type="datetimeFigureOut">
               <a:rPr lang="en-US" smtClean="0"/>
-              <a:t>1/7/2023</a:t>
+              <a:t>1/25/2023</a:t>
             </a:fld>
             <a:endParaRPr lang="en-US"/>
           </a:p>
@@ -812,7 +812,7 @@
           <a:p>
             <a:fld id="{9EC8CD53-0620-48F2-A3BB-2B10BDA60E52}" type="datetimeFigureOut">
               <a:rPr lang="en-US" smtClean="0"/>
-              <a:t>1/7/2023</a:t>
+              <a:t>1/25/2023</a:t>
             </a:fld>
             <a:endParaRPr lang="en-US"/>
           </a:p>
@@ -1020,7 +1020,7 @@
           <a:p>
             <a:fld id="{9EC8CD53-0620-48F2-A3BB-2B10BDA60E52}" type="datetimeFigureOut">
               <a:rPr lang="en-US" smtClean="0"/>
-              <a:t>1/7/2023</a:t>
+              <a:t>1/25/2023</a:t>
             </a:fld>
             <a:endParaRPr lang="en-US"/>
           </a:p>
@@ -1218,7 +1218,7 @@
           <a:p>
             <a:fld id="{9EC8CD53-0620-48F2-A3BB-2B10BDA60E52}" type="datetimeFigureOut">
               <a:rPr lang="en-US" smtClean="0"/>
-              <a:t>1/7/2023</a:t>
+              <a:t>1/25/2023</a:t>
             </a:fld>
             <a:endParaRPr lang="en-US"/>
           </a:p>
@@ -1493,7 +1493,7 @@
           <a:p>
             <a:fld id="{9EC8CD53-0620-48F2-A3BB-2B10BDA60E52}" type="datetimeFigureOut">
               <a:rPr lang="en-US" smtClean="0"/>
-              <a:t>1/7/2023</a:t>
+              <a:t>1/25/2023</a:t>
             </a:fld>
             <a:endParaRPr lang="en-US"/>
           </a:p>
@@ -1758,7 +1758,7 @@
           <a:p>
             <a:fld id="{9EC8CD53-0620-48F2-A3BB-2B10BDA60E52}" type="datetimeFigureOut">
               <a:rPr lang="en-US" smtClean="0"/>
-              <a:t>1/7/2023</a:t>
+              <a:t>1/25/2023</a:t>
             </a:fld>
             <a:endParaRPr lang="en-US"/>
           </a:p>
@@ -2170,7 +2170,7 @@
           <a:p>
             <a:fld id="{9EC8CD53-0620-48F2-A3BB-2B10BDA60E52}" type="datetimeFigureOut">
               <a:rPr lang="en-US" smtClean="0"/>
-              <a:t>1/7/2023</a:t>
+              <a:t>1/25/2023</a:t>
             </a:fld>
             <a:endParaRPr lang="en-US"/>
           </a:p>
@@ -2311,7 +2311,7 @@
           <a:p>
             <a:fld id="{9EC8CD53-0620-48F2-A3BB-2B10BDA60E52}" type="datetimeFigureOut">
               <a:rPr lang="en-US" smtClean="0"/>
-              <a:t>1/7/2023</a:t>
+              <a:t>1/25/2023</a:t>
             </a:fld>
             <a:endParaRPr lang="en-US"/>
           </a:p>
@@ -2424,7 +2424,7 @@
           <a:p>
             <a:fld id="{9EC8CD53-0620-48F2-A3BB-2B10BDA60E52}" type="datetimeFigureOut">
               <a:rPr lang="en-US" smtClean="0"/>
-              <a:t>1/7/2023</a:t>
+              <a:t>1/25/2023</a:t>
             </a:fld>
             <a:endParaRPr lang="en-US"/>
           </a:p>
@@ -2735,7 +2735,7 @@
           <a:p>
             <a:fld id="{9EC8CD53-0620-48F2-A3BB-2B10BDA60E52}" type="datetimeFigureOut">
               <a:rPr lang="en-US" smtClean="0"/>
-              <a:t>1/7/2023</a:t>
+              <a:t>1/25/2023</a:t>
             </a:fld>
             <a:endParaRPr lang="en-US"/>
           </a:p>
@@ -3023,7 +3023,7 @@
           <a:p>
             <a:fld id="{9EC8CD53-0620-48F2-A3BB-2B10BDA60E52}" type="datetimeFigureOut">
               <a:rPr lang="en-US" smtClean="0"/>
-              <a:t>1/7/2023</a:t>
+              <a:t>1/25/2023</a:t>
             </a:fld>
             <a:endParaRPr lang="en-US"/>
           </a:p>
@@ -3264,7 +3264,7 @@
           <a:p>
             <a:fld id="{9EC8CD53-0620-48F2-A3BB-2B10BDA60E52}" type="datetimeFigureOut">
               <a:rPr lang="en-US" smtClean="0"/>
-              <a:t>1/7/2023</a:t>
+              <a:t>1/25/2023</a:t>
             </a:fld>
             <a:endParaRPr lang="en-US"/>
           </a:p>
@@ -29137,6 +29137,312 @@
           </a:prstGeom>
         </p:spPr>
       </p:pic>
+      <p:grpSp>
+        <p:nvGrpSpPr>
+          <p:cNvPr id="11" name="Group 10">
+            <a:extLst>
+              <a:ext uri="{FF2B5EF4-FFF2-40B4-BE49-F238E27FC236}">
+                <a16:creationId xmlns:a16="http://schemas.microsoft.com/office/drawing/2014/main" id="{DF9E5501-47AC-8BC6-0FDC-1B7AAA7C6569}"/>
+              </a:ext>
+            </a:extLst>
+          </p:cNvPr>
+          <p:cNvGrpSpPr/>
+          <p:nvPr/>
+        </p:nvGrpSpPr>
+        <p:grpSpPr>
+          <a:xfrm>
+            <a:off x="9300652" y="2060820"/>
+            <a:ext cx="1371600" cy="1371600"/>
+            <a:chOff x="158299" y="2008913"/>
+            <a:chExt cx="1371600" cy="1371600"/>
+          </a:xfrm>
+        </p:grpSpPr>
+        <p:grpSp>
+          <p:nvGrpSpPr>
+            <p:cNvPr id="12" name="Group 11">
+              <a:extLst>
+                <a:ext uri="{FF2B5EF4-FFF2-40B4-BE49-F238E27FC236}">
+                  <a16:creationId xmlns:a16="http://schemas.microsoft.com/office/drawing/2014/main" id="{5507363A-2EE8-8B5A-3CE6-BC75DBBEC962}"/>
+                </a:ext>
+              </a:extLst>
+            </p:cNvPr>
+            <p:cNvGrpSpPr/>
+            <p:nvPr/>
+          </p:nvGrpSpPr>
+          <p:grpSpPr>
+            <a:xfrm>
+              <a:off x="158299" y="2008913"/>
+              <a:ext cx="1371600" cy="1371600"/>
+              <a:chOff x="427081" y="263129"/>
+              <a:chExt cx="1371600" cy="1371600"/>
+            </a:xfrm>
+          </p:grpSpPr>
+          <p:sp>
+            <p:nvSpPr>
+              <p:cNvPr id="30" name="Rectangle 29">
+                <a:extLst>
+                  <a:ext uri="{FF2B5EF4-FFF2-40B4-BE49-F238E27FC236}">
+                    <a16:creationId xmlns:a16="http://schemas.microsoft.com/office/drawing/2014/main" id="{F83AF1B2-1BE8-9D2B-E6B0-8168F817C606}"/>
+                  </a:ext>
+                </a:extLst>
+              </p:cNvPr>
+              <p:cNvSpPr/>
+              <p:nvPr/>
+            </p:nvSpPr>
+            <p:spPr>
+              <a:xfrm>
+                <a:off x="427081" y="263129"/>
+                <a:ext cx="1371600" cy="1371600"/>
+              </a:xfrm>
+              <a:prstGeom prst="rect">
+                <a:avLst/>
+              </a:prstGeom>
+              <a:noFill/>
+              <a:ln w="76200">
+                <a:solidFill>
+                  <a:schemeClr val="tx1"/>
+                </a:solidFill>
+              </a:ln>
+            </p:spPr>
+            <p:style>
+              <a:lnRef idx="2">
+                <a:schemeClr val="accent1">
+                  <a:shade val="50000"/>
+                </a:schemeClr>
+              </a:lnRef>
+              <a:fillRef idx="1">
+                <a:schemeClr val="accent1"/>
+              </a:fillRef>
+              <a:effectRef idx="0">
+                <a:schemeClr val="accent1"/>
+              </a:effectRef>
+              <a:fontRef idx="minor">
+                <a:schemeClr val="lt1"/>
+              </a:fontRef>
+            </p:style>
+            <p:txBody>
+              <a:bodyPr rtlCol="0" anchor="ctr"/>
+              <a:lstStyle/>
+              <a:p>
+                <a:pPr algn="ctr"/>
+                <a:endParaRPr lang="en-US"/>
+              </a:p>
+            </p:txBody>
+          </p:sp>
+          <p:sp>
+            <p:nvSpPr>
+              <p:cNvPr id="31" name="Plaque 30">
+                <a:extLst>
+                  <a:ext uri="{FF2B5EF4-FFF2-40B4-BE49-F238E27FC236}">
+                    <a16:creationId xmlns:a16="http://schemas.microsoft.com/office/drawing/2014/main" id="{C5DD2C45-310B-8170-EFDD-6475A642EA1B}"/>
+                  </a:ext>
+                </a:extLst>
+              </p:cNvPr>
+              <p:cNvSpPr/>
+              <p:nvPr/>
+            </p:nvSpPr>
+            <p:spPr>
+              <a:xfrm>
+                <a:off x="566683" y="478473"/>
+                <a:ext cx="1097280" cy="1097280"/>
+              </a:xfrm>
+              <a:prstGeom prst="plaque">
+                <a:avLst/>
+              </a:prstGeom>
+              <a:noFill/>
+              <a:ln w="38100" cap="flat" cmpd="sng" algn="ctr">
+                <a:solidFill>
+                  <a:schemeClr val="dk1"/>
+                </a:solidFill>
+                <a:prstDash val="solid"/>
+                <a:round/>
+                <a:headEnd type="none" w="med" len="med"/>
+                <a:tailEnd type="none" w="med" len="med"/>
+              </a:ln>
+            </p:spPr>
+            <p:style>
+              <a:lnRef idx="0">
+                <a:scrgbClr r="0" g="0" b="0"/>
+              </a:lnRef>
+              <a:fillRef idx="0">
+                <a:scrgbClr r="0" g="0" b="0"/>
+              </a:fillRef>
+              <a:effectRef idx="0">
+                <a:scrgbClr r="0" g="0" b="0"/>
+              </a:effectRef>
+              <a:fontRef idx="minor">
+                <a:schemeClr val="dk1"/>
+              </a:fontRef>
+            </p:style>
+            <p:txBody>
+              <a:bodyPr rtlCol="0" anchor="ctr"/>
+              <a:lstStyle/>
+              <a:p>
+                <a:pPr algn="ctr"/>
+                <a:endParaRPr lang="en-US" dirty="0"/>
+              </a:p>
+            </p:txBody>
+          </p:sp>
+        </p:grpSp>
+        <p:grpSp>
+          <p:nvGrpSpPr>
+            <p:cNvPr id="14" name="Group 13">
+              <a:extLst>
+                <a:ext uri="{FF2B5EF4-FFF2-40B4-BE49-F238E27FC236}">
+                  <a16:creationId xmlns:a16="http://schemas.microsoft.com/office/drawing/2014/main" id="{50CACE62-2D52-49BC-2108-1A802F8CD4A4}"/>
+                </a:ext>
+              </a:extLst>
+            </p:cNvPr>
+            <p:cNvGrpSpPr/>
+            <p:nvPr/>
+          </p:nvGrpSpPr>
+          <p:grpSpPr>
+            <a:xfrm>
+              <a:off x="428659" y="2417053"/>
+              <a:ext cx="830879" cy="711687"/>
+              <a:chOff x="5132466" y="3429000"/>
+              <a:chExt cx="2001640" cy="1714500"/>
+            </a:xfrm>
+          </p:grpSpPr>
+          <p:pic>
+            <p:nvPicPr>
+              <p:cNvPr id="27" name="Picture 10" descr="Angel Wings Vector&quot; Images – Browse 68 Stock Photos, Vectors, and Video |  Adobe Stock">
+                <a:extLst>
+                  <a:ext uri="{FF2B5EF4-FFF2-40B4-BE49-F238E27FC236}">
+                    <a16:creationId xmlns:a16="http://schemas.microsoft.com/office/drawing/2014/main" id="{85E9458B-124B-0A3A-0F82-4F1FD8F4DFB5}"/>
+                  </a:ext>
+                </a:extLst>
+              </p:cNvPr>
+              <p:cNvPicPr>
+                <a:picLocks noChangeAspect="1" noChangeArrowheads="1"/>
+              </p:cNvPicPr>
+              <p:nvPr/>
+            </p:nvPicPr>
+            <p:blipFill rotWithShape="1">
+              <a:blip r:embed="rId11">
+                <a:extLst>
+                  <a:ext uri="{28A0092B-C50C-407E-A947-70E740481C1C}">
+                    <a14:useLocalDpi xmlns:a14="http://schemas.microsoft.com/office/drawing/2010/main" val="0"/>
+                  </a:ext>
+                </a:extLst>
+              </a:blip>
+              <a:srcRect l="32998" t="50000" r="54564"/>
+              <a:stretch/>
+            </p:blipFill>
+            <p:spPr bwMode="auto">
+              <a:xfrm>
+                <a:off x="5132466" y="3429000"/>
+                <a:ext cx="704886" cy="1714500"/>
+              </a:xfrm>
+              <a:prstGeom prst="rect">
+                <a:avLst/>
+              </a:prstGeom>
+              <a:noFill/>
+              <a:extLst>
+                <a:ext uri="{909E8E84-426E-40DD-AFC4-6F175D3DCCD1}">
+                  <a14:hiddenFill xmlns:a14="http://schemas.microsoft.com/office/drawing/2010/main">
+                    <a:solidFill>
+                      <a:srgbClr val="FFFFFF"/>
+                    </a:solidFill>
+                  </a14:hiddenFill>
+                </a:ext>
+              </a:extLst>
+            </p:spPr>
+          </p:pic>
+          <p:pic>
+            <p:nvPicPr>
+              <p:cNvPr id="28" name="Picture 10" descr="Angel Wings Vector&quot; Images – Browse 68 Stock Photos, Vectors, and Video |  Adobe Stock">
+                <a:extLst>
+                  <a:ext uri="{FF2B5EF4-FFF2-40B4-BE49-F238E27FC236}">
+                    <a16:creationId xmlns:a16="http://schemas.microsoft.com/office/drawing/2014/main" id="{406BEB3C-F0E3-0650-6F7F-AABBBB02D8B6}"/>
+                  </a:ext>
+                </a:extLst>
+              </p:cNvPr>
+              <p:cNvPicPr>
+                <a:picLocks noChangeAspect="1" noChangeArrowheads="1"/>
+              </p:cNvPicPr>
+              <p:nvPr/>
+            </p:nvPicPr>
+            <p:blipFill rotWithShape="1">
+              <a:blip r:embed="rId11">
+                <a:extLst>
+                  <a:ext uri="{28A0092B-C50C-407E-A947-70E740481C1C}">
+                    <a14:useLocalDpi xmlns:a14="http://schemas.microsoft.com/office/drawing/2010/main" val="0"/>
+                  </a:ext>
+                </a:extLst>
+              </a:blip>
+              <a:srcRect l="32998" t="50000" r="54564"/>
+              <a:stretch/>
+            </p:blipFill>
+            <p:spPr bwMode="auto">
+              <a:xfrm flipH="1">
+                <a:off x="6429220" y="3429000"/>
+                <a:ext cx="704886" cy="1714500"/>
+              </a:xfrm>
+              <a:prstGeom prst="rect">
+                <a:avLst/>
+              </a:prstGeom>
+              <a:noFill/>
+              <a:extLst>
+                <a:ext uri="{909E8E84-426E-40DD-AFC4-6F175D3DCCD1}">
+                  <a14:hiddenFill xmlns:a14="http://schemas.microsoft.com/office/drawing/2010/main">
+                    <a:solidFill>
+                      <a:srgbClr val="FFFFFF"/>
+                    </a:solidFill>
+                  </a14:hiddenFill>
+                </a:ext>
+              </a:extLst>
+            </p:spPr>
+          </p:pic>
+          <p:pic>
+            <p:nvPicPr>
+              <p:cNvPr id="29" name="Picture 8" descr="Shield Badge With Outline - Badge Vector Png - 882x980 PNG Download - PNGkit">
+                <a:extLst>
+                  <a:ext uri="{FF2B5EF4-FFF2-40B4-BE49-F238E27FC236}">
+                    <a16:creationId xmlns:a16="http://schemas.microsoft.com/office/drawing/2014/main" id="{1D0AB656-F39B-6DDF-E101-124ACC4924FF}"/>
+                  </a:ext>
+                </a:extLst>
+              </p:cNvPr>
+              <p:cNvPicPr>
+                <a:picLocks noChangeAspect="1" noChangeArrowheads="1"/>
+              </p:cNvPicPr>
+              <p:nvPr/>
+            </p:nvPicPr>
+            <p:blipFill>
+              <a:blip r:embed="rId12">
+                <a:extLst>
+                  <a:ext uri="{28A0092B-C50C-407E-A947-70E740481C1C}">
+                    <a14:useLocalDpi xmlns:a14="http://schemas.microsoft.com/office/drawing/2010/main" val="0"/>
+                  </a:ext>
+                </a:extLst>
+              </a:blip>
+              <a:srcRect/>
+              <a:stretch>
+                <a:fillRect/>
+              </a:stretch>
+            </p:blipFill>
+            <p:spPr bwMode="auto">
+              <a:xfrm>
+                <a:off x="5713801" y="4020496"/>
+                <a:ext cx="858582" cy="995726"/>
+              </a:xfrm>
+              <a:prstGeom prst="rect">
+                <a:avLst/>
+              </a:prstGeom>
+              <a:noFill/>
+              <a:extLst>
+                <a:ext uri="{909E8E84-426E-40DD-AFC4-6F175D3DCCD1}">
+                  <a14:hiddenFill xmlns:a14="http://schemas.microsoft.com/office/drawing/2010/main">
+                    <a:solidFill>
+                      <a:srgbClr val="FFFFFF"/>
+                    </a:solidFill>
+                  </a14:hiddenFill>
+                </a:ext>
+              </a:extLst>
+            </p:spPr>
+          </p:pic>
+        </p:grpSp>
+      </p:grpSp>
     </p:spTree>
     <p:extLst>
       <p:ext uri="{BB962C8B-B14F-4D97-AF65-F5344CB8AC3E}">
@@ -29346,104 +29652,6 @@
       </p:grpSp>
       <p:grpSp>
         <p:nvGrpSpPr>
-          <p:cNvPr id="52" name="Group 51">
-            <a:extLst>
-              <a:ext uri="{FF2B5EF4-FFF2-40B4-BE49-F238E27FC236}">
-                <a16:creationId xmlns:a16="http://schemas.microsoft.com/office/drawing/2014/main" id="{D933A3CF-6B78-A803-B848-269E55B096F9}"/>
-              </a:ext>
-            </a:extLst>
-          </p:cNvPr>
-          <p:cNvGrpSpPr/>
-          <p:nvPr/>
-        </p:nvGrpSpPr>
-        <p:grpSpPr>
-          <a:xfrm rot="19612112">
-            <a:off x="8012950" y="3974742"/>
-            <a:ext cx="1147676" cy="521834"/>
-            <a:chOff x="3722644" y="3927567"/>
-            <a:chExt cx="2346446" cy="1066900"/>
-          </a:xfrm>
-        </p:grpSpPr>
-        <p:pic>
-          <p:nvPicPr>
-            <p:cNvPr id="155" name="Picture 8" descr="31 Great Fire Wings Tattoo ideas | wings tattoo, wings, tattoos">
-              <a:extLst>
-                <a:ext uri="{FF2B5EF4-FFF2-40B4-BE49-F238E27FC236}">
-                  <a16:creationId xmlns:a16="http://schemas.microsoft.com/office/drawing/2014/main" id="{F102135B-722C-D9A8-7A5B-C1F76A7140FF}"/>
-                </a:ext>
-              </a:extLst>
-            </p:cNvPr>
-            <p:cNvPicPr>
-              <a:picLocks noChangeAspect="1" noChangeArrowheads="1"/>
-            </p:cNvPicPr>
-            <p:nvPr/>
-          </p:nvPicPr>
-          <p:blipFill>
-            <a:blip r:embed="rId4">
-              <a:extLst>
-                <a:ext uri="{28A0092B-C50C-407E-A947-70E740481C1C}">
-                  <a14:useLocalDpi xmlns:a14="http://schemas.microsoft.com/office/drawing/2010/main" val="0"/>
-                </a:ext>
-              </a:extLst>
-            </a:blip>
-            <a:srcRect/>
-            <a:stretch>
-              <a:fillRect/>
-            </a:stretch>
-          </p:blipFill>
-          <p:spPr bwMode="auto">
-            <a:xfrm>
-              <a:off x="3722644" y="3927567"/>
-              <a:ext cx="2346446" cy="1066900"/>
-            </a:xfrm>
-            <a:prstGeom prst="rect">
-              <a:avLst/>
-            </a:prstGeom>
-            <a:noFill/>
-            <a:extLst>
-              <a:ext uri="{909E8E84-426E-40DD-AFC4-6F175D3DCCD1}">
-                <a14:hiddenFill xmlns:a14="http://schemas.microsoft.com/office/drawing/2010/main">
-                  <a:solidFill>
-                    <a:srgbClr val="FFFFFF"/>
-                  </a:solidFill>
-                </a14:hiddenFill>
-              </a:ext>
-            </a:extLst>
-          </p:spPr>
-        </p:pic>
-        <p:pic>
-          <p:nvPicPr>
-            <p:cNvPr id="51" name="Picture 50">
-              <a:extLst>
-                <a:ext uri="{FF2B5EF4-FFF2-40B4-BE49-F238E27FC236}">
-                  <a16:creationId xmlns:a16="http://schemas.microsoft.com/office/drawing/2014/main" id="{2C192A3F-BE70-0352-F945-B0D0A3948BD9}"/>
-                </a:ext>
-              </a:extLst>
-            </p:cNvPr>
-            <p:cNvPicPr>
-              <a:picLocks noChangeAspect="1"/>
-            </p:cNvPicPr>
-            <p:nvPr/>
-          </p:nvPicPr>
-          <p:blipFill>
-            <a:blip r:embed="rId5"/>
-            <a:stretch>
-              <a:fillRect/>
-            </a:stretch>
-          </p:blipFill>
-          <p:spPr>
-            <a:xfrm>
-              <a:off x="4657437" y="4197944"/>
-              <a:ext cx="476859" cy="702740"/>
-            </a:xfrm>
-            <a:prstGeom prst="rect">
-              <a:avLst/>
-            </a:prstGeom>
-          </p:spPr>
-        </p:pic>
-      </p:grpSp>
-      <p:grpSp>
-        <p:nvGrpSpPr>
           <p:cNvPr id="45" name="Group 44">
             <a:extLst>
               <a:ext uri="{FF2B5EF4-FFF2-40B4-BE49-F238E27FC236}">
@@ -29477,7 +29685,7 @@
             <p:nvPr/>
           </p:nvPicPr>
           <p:blipFill>
-            <a:blip r:embed="rId6"/>
+            <a:blip r:embed="rId4"/>
             <a:stretch>
               <a:fillRect/>
             </a:stretch>
@@ -29507,7 +29715,7 @@
             <p:nvPr/>
           </p:nvPicPr>
           <p:blipFill rotWithShape="1">
-            <a:blip r:embed="rId7">
+            <a:blip r:embed="rId5">
               <a:extLst>
                 <a:ext uri="{28A0092B-C50C-407E-A947-70E740481C1C}">
                   <a14:useLocalDpi xmlns:a14="http://schemas.microsoft.com/office/drawing/2010/main" val="0"/>
@@ -29553,7 +29761,7 @@
           <p:nvPr/>
         </p:nvPicPr>
         <p:blipFill rotWithShape="1">
-          <a:blip r:embed="rId8">
+          <a:blip r:embed="rId6">
             <a:extLst>
               <a:ext uri="{28A0092B-C50C-407E-A947-70E740481C1C}">
                 <a14:useLocalDpi xmlns:a14="http://schemas.microsoft.com/office/drawing/2010/main" val="0"/>
@@ -29618,7 +29826,7 @@
             <p:nvPr/>
           </p:nvPicPr>
           <p:blipFill>
-            <a:blip r:embed="rId9"/>
+            <a:blip r:embed="rId7"/>
             <a:stretch>
               <a:fillRect/>
             </a:stretch>
@@ -29648,7 +29856,7 @@
             <p:nvPr/>
           </p:nvPicPr>
           <p:blipFill>
-            <a:blip r:embed="rId10"/>
+            <a:blip r:embed="rId8"/>
             <a:stretch>
               <a:fillRect/>
             </a:stretch>
@@ -29699,7 +29907,7 @@
             <p:nvPr/>
           </p:nvPicPr>
           <p:blipFill>
-            <a:blip r:embed="rId11"/>
+            <a:blip r:embed="rId9"/>
             <a:stretch>
               <a:fillRect/>
             </a:stretch>
@@ -30559,7 +30767,7 @@
             <p:nvPr/>
           </p:nvPicPr>
           <p:blipFill rotWithShape="1">
-            <a:blip r:embed="rId12">
+            <a:blip r:embed="rId10">
               <a:extLst>
                 <a:ext uri="{28A0092B-C50C-407E-A947-70E740481C1C}">
                   <a14:useLocalDpi xmlns:a14="http://schemas.microsoft.com/office/drawing/2010/main" val="0"/>
@@ -30604,7 +30812,7 @@
             <p:nvPr/>
           </p:nvPicPr>
           <p:blipFill rotWithShape="1">
-            <a:blip r:embed="rId9"/>
+            <a:blip r:embed="rId7"/>
             <a:srcRect b="41100"/>
             <a:stretch/>
           </p:blipFill>
@@ -30866,7 +31074,7 @@
             <p:nvPr/>
           </p:nvPicPr>
           <p:blipFill>
-            <a:blip r:embed="rId13"/>
+            <a:blip r:embed="rId11"/>
             <a:stretch>
               <a:fillRect/>
             </a:stretch>
@@ -30917,7 +31125,7 @@
             <p:nvPr/>
           </p:nvPicPr>
           <p:blipFill rotWithShape="1">
-            <a:blip r:embed="rId7">
+            <a:blip r:embed="rId5">
               <a:extLst>
                 <a:ext uri="{28A0092B-C50C-407E-A947-70E740481C1C}">
                   <a14:useLocalDpi xmlns:a14="http://schemas.microsoft.com/office/drawing/2010/main" val="0"/>
@@ -30982,7 +31190,7 @@
               <p:nvPr/>
             </p:nvPicPr>
             <p:blipFill>
-              <a:blip r:embed="rId14">
+              <a:blip r:embed="rId12">
                 <a:extLst>
                   <a:ext uri="{28A0092B-C50C-407E-A947-70E740481C1C}">
                     <a14:useLocalDpi xmlns:a14="http://schemas.microsoft.com/office/drawing/2010/main" val="0"/>
@@ -31029,7 +31237,7 @@
               <p:nvPr/>
             </p:nvPicPr>
             <p:blipFill>
-              <a:blip r:embed="rId14">
+              <a:blip r:embed="rId12">
                 <a:extLst>
                   <a:ext uri="{28A0092B-C50C-407E-A947-70E740481C1C}">
                     <a14:useLocalDpi xmlns:a14="http://schemas.microsoft.com/office/drawing/2010/main" val="0"/>
@@ -31076,7 +31284,7 @@
               <p:nvPr/>
             </p:nvPicPr>
             <p:blipFill>
-              <a:blip r:embed="rId14">
+              <a:blip r:embed="rId12">
                 <a:extLst>
                   <a:ext uri="{28A0092B-C50C-407E-A947-70E740481C1C}">
                     <a14:useLocalDpi xmlns:a14="http://schemas.microsoft.com/office/drawing/2010/main" val="0"/>
@@ -31239,133 +31447,6 @@
       </p:grpSp>
       <p:grpSp>
         <p:nvGrpSpPr>
-          <p:cNvPr id="89" name="Group 88">
-            <a:extLst>
-              <a:ext uri="{FF2B5EF4-FFF2-40B4-BE49-F238E27FC236}">
-                <a16:creationId xmlns:a16="http://schemas.microsoft.com/office/drawing/2014/main" id="{06CF1EAE-C868-8E9F-764F-5DE114A460EC}"/>
-              </a:ext>
-            </a:extLst>
-          </p:cNvPr>
-          <p:cNvGrpSpPr/>
-          <p:nvPr/>
-        </p:nvGrpSpPr>
-        <p:grpSpPr>
-          <a:xfrm>
-            <a:off x="1760211" y="1992864"/>
-            <a:ext cx="1371600" cy="1371600"/>
-            <a:chOff x="213377" y="483633"/>
-            <a:chExt cx="1371600" cy="1371600"/>
-          </a:xfrm>
-        </p:grpSpPr>
-        <p:sp>
-          <p:nvSpPr>
-            <p:cNvPr id="90" name="Rectangle 89">
-              <a:extLst>
-                <a:ext uri="{FF2B5EF4-FFF2-40B4-BE49-F238E27FC236}">
-                  <a16:creationId xmlns:a16="http://schemas.microsoft.com/office/drawing/2014/main" id="{80C943E6-D0AE-C99E-289A-31E9B46F6A72}"/>
-                </a:ext>
-              </a:extLst>
-            </p:cNvPr>
-            <p:cNvSpPr/>
-            <p:nvPr/>
-          </p:nvSpPr>
-          <p:spPr>
-            <a:xfrm>
-              <a:off x="213377" y="483633"/>
-              <a:ext cx="1371600" cy="1371600"/>
-            </a:xfrm>
-            <a:prstGeom prst="rect">
-              <a:avLst/>
-            </a:prstGeom>
-            <a:noFill/>
-            <a:ln w="76200">
-              <a:solidFill>
-                <a:schemeClr val="tx1"/>
-              </a:solidFill>
-            </a:ln>
-          </p:spPr>
-          <p:style>
-            <a:lnRef idx="2">
-              <a:schemeClr val="accent1">
-                <a:shade val="50000"/>
-              </a:schemeClr>
-            </a:lnRef>
-            <a:fillRef idx="1">
-              <a:schemeClr val="accent1"/>
-            </a:fillRef>
-            <a:effectRef idx="0">
-              <a:schemeClr val="accent1"/>
-            </a:effectRef>
-            <a:fontRef idx="minor">
-              <a:schemeClr val="lt1"/>
-            </a:fontRef>
-          </p:style>
-          <p:txBody>
-            <a:bodyPr rtlCol="0" anchor="ctr"/>
-            <a:lstStyle/>
-            <a:p>
-              <a:pPr algn="ctr"/>
-              <a:endParaRPr lang="en-US"/>
-            </a:p>
-          </p:txBody>
-        </p:sp>
-        <p:sp>
-          <p:nvSpPr>
-            <p:cNvPr id="91" name="Hexagon 90">
-              <a:extLst>
-                <a:ext uri="{FF2B5EF4-FFF2-40B4-BE49-F238E27FC236}">
-                  <a16:creationId xmlns:a16="http://schemas.microsoft.com/office/drawing/2014/main" id="{A2C23FCF-AF71-59D9-F6E6-65D8F507C248}"/>
-                </a:ext>
-              </a:extLst>
-            </p:cNvPr>
-            <p:cNvSpPr/>
-            <p:nvPr/>
-          </p:nvSpPr>
-          <p:spPr>
-            <a:xfrm>
-              <a:off x="304817" y="699533"/>
-              <a:ext cx="1188720" cy="1097280"/>
-            </a:xfrm>
-            <a:prstGeom prst="hexagon">
-              <a:avLst/>
-            </a:prstGeom>
-            <a:noFill/>
-            <a:ln w="38100" cap="flat" cmpd="sng" algn="ctr">
-              <a:solidFill>
-                <a:schemeClr val="dk1"/>
-              </a:solidFill>
-              <a:prstDash val="solid"/>
-              <a:round/>
-              <a:headEnd type="none" w="med" len="med"/>
-              <a:tailEnd type="none" w="med" len="med"/>
-            </a:ln>
-          </p:spPr>
-          <p:style>
-            <a:lnRef idx="0">
-              <a:scrgbClr r="0" g="0" b="0"/>
-            </a:lnRef>
-            <a:fillRef idx="0">
-              <a:scrgbClr r="0" g="0" b="0"/>
-            </a:fillRef>
-            <a:effectRef idx="0">
-              <a:scrgbClr r="0" g="0" b="0"/>
-            </a:effectRef>
-            <a:fontRef idx="minor">
-              <a:schemeClr val="dk1"/>
-            </a:fontRef>
-          </p:style>
-          <p:txBody>
-            <a:bodyPr rtlCol="0" anchor="ctr"/>
-            <a:lstStyle/>
-            <a:p>
-              <a:pPr algn="ctr"/>
-              <a:endParaRPr lang="en-US"/>
-            </a:p>
-          </p:txBody>
-        </p:sp>
-      </p:grpSp>
-      <p:grpSp>
-        <p:nvGrpSpPr>
           <p:cNvPr id="92" name="Group 91">
             <a:extLst>
               <a:ext uri="{FF2B5EF4-FFF2-40B4-BE49-F238E27FC236}">
@@ -31493,928 +31574,6 @@
       </p:grpSp>
       <p:grpSp>
         <p:nvGrpSpPr>
-          <p:cNvPr id="95" name="Group 94">
-            <a:extLst>
-              <a:ext uri="{FF2B5EF4-FFF2-40B4-BE49-F238E27FC236}">
-                <a16:creationId xmlns:a16="http://schemas.microsoft.com/office/drawing/2014/main" id="{3ACFF0E3-EE75-33F0-BC05-D150F24B88AA}"/>
-              </a:ext>
-            </a:extLst>
-          </p:cNvPr>
-          <p:cNvGrpSpPr/>
-          <p:nvPr/>
-        </p:nvGrpSpPr>
-        <p:grpSpPr>
-          <a:xfrm>
-            <a:off x="1760211" y="3606797"/>
-            <a:ext cx="1371600" cy="1371600"/>
-            <a:chOff x="213377" y="483633"/>
-            <a:chExt cx="1371600" cy="1371600"/>
-          </a:xfrm>
-        </p:grpSpPr>
-        <p:sp>
-          <p:nvSpPr>
-            <p:cNvPr id="96" name="Rectangle 95">
-              <a:extLst>
-                <a:ext uri="{FF2B5EF4-FFF2-40B4-BE49-F238E27FC236}">
-                  <a16:creationId xmlns:a16="http://schemas.microsoft.com/office/drawing/2014/main" id="{53745321-0C83-CCAF-E6C1-D5AFCE566BE4}"/>
-                </a:ext>
-              </a:extLst>
-            </p:cNvPr>
-            <p:cNvSpPr/>
-            <p:nvPr/>
-          </p:nvSpPr>
-          <p:spPr>
-            <a:xfrm>
-              <a:off x="213377" y="483633"/>
-              <a:ext cx="1371600" cy="1371600"/>
-            </a:xfrm>
-            <a:prstGeom prst="rect">
-              <a:avLst/>
-            </a:prstGeom>
-            <a:noFill/>
-            <a:ln w="76200">
-              <a:solidFill>
-                <a:schemeClr val="tx1"/>
-              </a:solidFill>
-            </a:ln>
-          </p:spPr>
-          <p:style>
-            <a:lnRef idx="2">
-              <a:schemeClr val="accent1">
-                <a:shade val="50000"/>
-              </a:schemeClr>
-            </a:lnRef>
-            <a:fillRef idx="1">
-              <a:schemeClr val="accent1"/>
-            </a:fillRef>
-            <a:effectRef idx="0">
-              <a:schemeClr val="accent1"/>
-            </a:effectRef>
-            <a:fontRef idx="minor">
-              <a:schemeClr val="lt1"/>
-            </a:fontRef>
-          </p:style>
-          <p:txBody>
-            <a:bodyPr rtlCol="0" anchor="ctr"/>
-            <a:lstStyle/>
-            <a:p>
-              <a:pPr algn="ctr"/>
-              <a:endParaRPr lang="en-US"/>
-            </a:p>
-          </p:txBody>
-        </p:sp>
-        <p:sp>
-          <p:nvSpPr>
-            <p:cNvPr id="97" name="Hexagon 96">
-              <a:extLst>
-                <a:ext uri="{FF2B5EF4-FFF2-40B4-BE49-F238E27FC236}">
-                  <a16:creationId xmlns:a16="http://schemas.microsoft.com/office/drawing/2014/main" id="{A9232A6D-CA56-BEB8-2BAF-0A81D270D487}"/>
-                </a:ext>
-              </a:extLst>
-            </p:cNvPr>
-            <p:cNvSpPr/>
-            <p:nvPr/>
-          </p:nvSpPr>
-          <p:spPr>
-            <a:xfrm>
-              <a:off x="304817" y="699533"/>
-              <a:ext cx="1188720" cy="1097280"/>
-            </a:xfrm>
-            <a:prstGeom prst="hexagon">
-              <a:avLst/>
-            </a:prstGeom>
-            <a:noFill/>
-            <a:ln w="38100" cap="flat" cmpd="sng" algn="ctr">
-              <a:solidFill>
-                <a:schemeClr val="dk1"/>
-              </a:solidFill>
-              <a:prstDash val="solid"/>
-              <a:round/>
-              <a:headEnd type="none" w="med" len="med"/>
-              <a:tailEnd type="none" w="med" len="med"/>
-            </a:ln>
-          </p:spPr>
-          <p:style>
-            <a:lnRef idx="0">
-              <a:scrgbClr r="0" g="0" b="0"/>
-            </a:lnRef>
-            <a:fillRef idx="0">
-              <a:scrgbClr r="0" g="0" b="0"/>
-            </a:fillRef>
-            <a:effectRef idx="0">
-              <a:scrgbClr r="0" g="0" b="0"/>
-            </a:effectRef>
-            <a:fontRef idx="minor">
-              <a:schemeClr val="dk1"/>
-            </a:fontRef>
-          </p:style>
-          <p:txBody>
-            <a:bodyPr rtlCol="0" anchor="ctr"/>
-            <a:lstStyle/>
-            <a:p>
-              <a:pPr algn="ctr"/>
-              <a:endParaRPr lang="en-US"/>
-            </a:p>
-          </p:txBody>
-        </p:sp>
-      </p:grpSp>
-      <p:grpSp>
-        <p:nvGrpSpPr>
-          <p:cNvPr id="98" name="Group 97">
-            <a:extLst>
-              <a:ext uri="{FF2B5EF4-FFF2-40B4-BE49-F238E27FC236}">
-                <a16:creationId xmlns:a16="http://schemas.microsoft.com/office/drawing/2014/main" id="{FDBF5770-7B45-F385-3742-28E304929C10}"/>
-              </a:ext>
-            </a:extLst>
-          </p:cNvPr>
-          <p:cNvGrpSpPr/>
-          <p:nvPr/>
-        </p:nvGrpSpPr>
-        <p:grpSpPr>
-          <a:xfrm>
-            <a:off x="2060921" y="2519939"/>
-            <a:ext cx="770179" cy="474929"/>
-            <a:chOff x="4366971" y="1518683"/>
-            <a:chExt cx="1632818" cy="1006873"/>
-          </a:xfrm>
-        </p:grpSpPr>
-        <p:sp>
-          <p:nvSpPr>
-            <p:cNvPr id="99" name="Moon 98">
-              <a:extLst>
-                <a:ext uri="{FF2B5EF4-FFF2-40B4-BE49-F238E27FC236}">
-                  <a16:creationId xmlns:a16="http://schemas.microsoft.com/office/drawing/2014/main" id="{133502E2-A9F6-F9CF-C975-588533B801B2}"/>
-                </a:ext>
-              </a:extLst>
-            </p:cNvPr>
-            <p:cNvSpPr/>
-            <p:nvPr/>
-          </p:nvSpPr>
-          <p:spPr>
-            <a:xfrm rot="5400000">
-              <a:off x="4929704" y="1543410"/>
-              <a:ext cx="469900" cy="1494392"/>
-            </a:xfrm>
-            <a:prstGeom prst="moon">
-              <a:avLst>
-                <a:gd name="adj" fmla="val 87500"/>
-              </a:avLst>
-            </a:prstGeom>
-          </p:spPr>
-          <p:style>
-            <a:lnRef idx="2">
-              <a:schemeClr val="dk1">
-                <a:shade val="50000"/>
-              </a:schemeClr>
-            </a:lnRef>
-            <a:fillRef idx="1">
-              <a:schemeClr val="dk1"/>
-            </a:fillRef>
-            <a:effectRef idx="0">
-              <a:schemeClr val="dk1"/>
-            </a:effectRef>
-            <a:fontRef idx="minor">
-              <a:schemeClr val="lt1"/>
-            </a:fontRef>
-          </p:style>
-          <p:txBody>
-            <a:bodyPr rtlCol="0" anchor="ctr"/>
-            <a:lstStyle/>
-            <a:p>
-              <a:pPr algn="ctr"/>
-              <a:endParaRPr lang="en-US"/>
-            </a:p>
-          </p:txBody>
-        </p:sp>
-        <p:grpSp>
-          <p:nvGrpSpPr>
-            <p:cNvPr id="100" name="Group 99">
-              <a:extLst>
-                <a:ext uri="{FF2B5EF4-FFF2-40B4-BE49-F238E27FC236}">
-                  <a16:creationId xmlns:a16="http://schemas.microsoft.com/office/drawing/2014/main" id="{424BF354-937B-4069-BBD5-08BAB2003875}"/>
-                </a:ext>
-              </a:extLst>
-            </p:cNvPr>
-            <p:cNvGrpSpPr/>
-            <p:nvPr/>
-          </p:nvGrpSpPr>
-          <p:grpSpPr>
-            <a:xfrm>
-              <a:off x="4366971" y="1555986"/>
-              <a:ext cx="574646" cy="861619"/>
-              <a:chOff x="4398721" y="1536936"/>
-              <a:chExt cx="574646" cy="861619"/>
-            </a:xfrm>
-          </p:grpSpPr>
-          <p:sp>
-            <p:nvSpPr>
-              <p:cNvPr id="105" name="Isosceles Triangle 104">
-                <a:extLst>
-                  <a:ext uri="{FF2B5EF4-FFF2-40B4-BE49-F238E27FC236}">
-                    <a16:creationId xmlns:a16="http://schemas.microsoft.com/office/drawing/2014/main" id="{09B474AA-63E0-2D2A-91BD-341F613184DA}"/>
-                  </a:ext>
-                </a:extLst>
-              </p:cNvPr>
-              <p:cNvSpPr/>
-              <p:nvPr/>
-            </p:nvSpPr>
-            <p:spPr>
-              <a:xfrm rot="19469091">
-                <a:off x="4398721" y="1712755"/>
-                <a:ext cx="230742" cy="685800"/>
-              </a:xfrm>
-              <a:prstGeom prst="triangle">
-                <a:avLst/>
-              </a:prstGeom>
-            </p:spPr>
-            <p:style>
-              <a:lnRef idx="2">
-                <a:schemeClr val="dk1">
-                  <a:shade val="50000"/>
-                </a:schemeClr>
-              </a:lnRef>
-              <a:fillRef idx="1">
-                <a:schemeClr val="dk1"/>
-              </a:fillRef>
-              <a:effectRef idx="0">
-                <a:schemeClr val="dk1"/>
-              </a:effectRef>
-              <a:fontRef idx="minor">
-                <a:schemeClr val="lt1"/>
-              </a:fontRef>
-            </p:style>
-            <p:txBody>
-              <a:bodyPr rtlCol="0" anchor="ctr"/>
-              <a:lstStyle/>
-              <a:p>
-                <a:pPr algn="ctr"/>
-                <a:endParaRPr lang="en-US"/>
-              </a:p>
-            </p:txBody>
-          </p:sp>
-          <p:sp>
-            <p:nvSpPr>
-              <p:cNvPr id="106" name="Isosceles Triangle 105">
-                <a:extLst>
-                  <a:ext uri="{FF2B5EF4-FFF2-40B4-BE49-F238E27FC236}">
-                    <a16:creationId xmlns:a16="http://schemas.microsoft.com/office/drawing/2014/main" id="{E44ABF4E-C5E5-D6EB-8789-FFE30F717BF4}"/>
-                  </a:ext>
-                </a:extLst>
-              </p:cNvPr>
-              <p:cNvSpPr/>
-              <p:nvPr/>
-            </p:nvSpPr>
-            <p:spPr>
-              <a:xfrm rot="20688119">
-                <a:off x="4742625" y="1536936"/>
-                <a:ext cx="230742" cy="685800"/>
-              </a:xfrm>
-              <a:prstGeom prst="triangle">
-                <a:avLst/>
-              </a:prstGeom>
-            </p:spPr>
-            <p:style>
-              <a:lnRef idx="2">
-                <a:schemeClr val="dk1">
-                  <a:shade val="50000"/>
-                </a:schemeClr>
-              </a:lnRef>
-              <a:fillRef idx="1">
-                <a:schemeClr val="dk1"/>
-              </a:fillRef>
-              <a:effectRef idx="0">
-                <a:schemeClr val="dk1"/>
-              </a:effectRef>
-              <a:fontRef idx="minor">
-                <a:schemeClr val="lt1"/>
-              </a:fontRef>
-            </p:style>
-            <p:txBody>
-              <a:bodyPr rtlCol="0" anchor="ctr"/>
-              <a:lstStyle/>
-              <a:p>
-                <a:pPr algn="ctr"/>
-                <a:endParaRPr lang="en-US"/>
-              </a:p>
-            </p:txBody>
-          </p:sp>
-        </p:grpSp>
-        <p:grpSp>
-          <p:nvGrpSpPr>
-            <p:cNvPr id="101" name="Group 100">
-              <a:extLst>
-                <a:ext uri="{FF2B5EF4-FFF2-40B4-BE49-F238E27FC236}">
-                  <a16:creationId xmlns:a16="http://schemas.microsoft.com/office/drawing/2014/main" id="{B963DCF6-71B5-927F-9F04-F3242378767F}"/>
-                </a:ext>
-              </a:extLst>
-            </p:cNvPr>
-            <p:cNvGrpSpPr/>
-            <p:nvPr/>
-          </p:nvGrpSpPr>
-          <p:grpSpPr>
-            <a:xfrm flipH="1">
-              <a:off x="5425143" y="1565156"/>
-              <a:ext cx="574646" cy="861619"/>
-              <a:chOff x="4551121" y="1689336"/>
-              <a:chExt cx="574646" cy="861619"/>
-            </a:xfrm>
-          </p:grpSpPr>
-          <p:sp>
-            <p:nvSpPr>
-              <p:cNvPr id="103" name="Isosceles Triangle 102">
-                <a:extLst>
-                  <a:ext uri="{FF2B5EF4-FFF2-40B4-BE49-F238E27FC236}">
-                    <a16:creationId xmlns:a16="http://schemas.microsoft.com/office/drawing/2014/main" id="{205F67CA-7163-56E8-DBDF-47981FEB31C4}"/>
-                  </a:ext>
-                </a:extLst>
-              </p:cNvPr>
-              <p:cNvSpPr/>
-              <p:nvPr/>
-            </p:nvSpPr>
-            <p:spPr>
-              <a:xfrm rot="19469091">
-                <a:off x="4551121" y="1865155"/>
-                <a:ext cx="230742" cy="685800"/>
-              </a:xfrm>
-              <a:prstGeom prst="triangle">
-                <a:avLst/>
-              </a:prstGeom>
-            </p:spPr>
-            <p:style>
-              <a:lnRef idx="2">
-                <a:schemeClr val="dk1">
-                  <a:shade val="50000"/>
-                </a:schemeClr>
-              </a:lnRef>
-              <a:fillRef idx="1">
-                <a:schemeClr val="dk1"/>
-              </a:fillRef>
-              <a:effectRef idx="0">
-                <a:schemeClr val="dk1"/>
-              </a:effectRef>
-              <a:fontRef idx="minor">
-                <a:schemeClr val="lt1"/>
-              </a:fontRef>
-            </p:style>
-            <p:txBody>
-              <a:bodyPr rtlCol="0" anchor="ctr"/>
-              <a:lstStyle/>
-              <a:p>
-                <a:pPr algn="ctr"/>
-                <a:endParaRPr lang="en-US"/>
-              </a:p>
-            </p:txBody>
-          </p:sp>
-          <p:sp>
-            <p:nvSpPr>
-              <p:cNvPr id="104" name="Isosceles Triangle 103">
-                <a:extLst>
-                  <a:ext uri="{FF2B5EF4-FFF2-40B4-BE49-F238E27FC236}">
-                    <a16:creationId xmlns:a16="http://schemas.microsoft.com/office/drawing/2014/main" id="{0D075012-34C9-667B-2E5D-79B64A304100}"/>
-                  </a:ext>
-                </a:extLst>
-              </p:cNvPr>
-              <p:cNvSpPr/>
-              <p:nvPr/>
-            </p:nvSpPr>
-            <p:spPr>
-              <a:xfrm rot="20688119">
-                <a:off x="4895025" y="1689336"/>
-                <a:ext cx="230742" cy="685800"/>
-              </a:xfrm>
-              <a:prstGeom prst="triangle">
-                <a:avLst/>
-              </a:prstGeom>
-            </p:spPr>
-            <p:style>
-              <a:lnRef idx="2">
-                <a:schemeClr val="dk1">
-                  <a:shade val="50000"/>
-                </a:schemeClr>
-              </a:lnRef>
-              <a:fillRef idx="1">
-                <a:schemeClr val="dk1"/>
-              </a:fillRef>
-              <a:effectRef idx="0">
-                <a:schemeClr val="dk1"/>
-              </a:effectRef>
-              <a:fontRef idx="minor">
-                <a:schemeClr val="lt1"/>
-              </a:fontRef>
-            </p:style>
-            <p:txBody>
-              <a:bodyPr rtlCol="0" anchor="ctr"/>
-              <a:lstStyle/>
-              <a:p>
-                <a:pPr algn="ctr"/>
-                <a:endParaRPr lang="en-US"/>
-              </a:p>
-            </p:txBody>
-          </p:sp>
-        </p:grpSp>
-        <p:sp>
-          <p:nvSpPr>
-            <p:cNvPr id="102" name="Isosceles Triangle 101">
-              <a:extLst>
-                <a:ext uri="{FF2B5EF4-FFF2-40B4-BE49-F238E27FC236}">
-                  <a16:creationId xmlns:a16="http://schemas.microsoft.com/office/drawing/2014/main" id="{F1DB5FBD-742E-2BD8-2E9C-D3C18EACECF6}"/>
-                </a:ext>
-              </a:extLst>
-            </p:cNvPr>
-            <p:cNvSpPr/>
-            <p:nvPr/>
-          </p:nvSpPr>
-          <p:spPr>
-            <a:xfrm flipH="1">
-              <a:off x="5070860" y="1518683"/>
-              <a:ext cx="230742" cy="685800"/>
-            </a:xfrm>
-            <a:prstGeom prst="triangle">
-              <a:avLst/>
-            </a:prstGeom>
-          </p:spPr>
-          <p:style>
-            <a:lnRef idx="2">
-              <a:schemeClr val="dk1">
-                <a:shade val="50000"/>
-              </a:schemeClr>
-            </a:lnRef>
-            <a:fillRef idx="1">
-              <a:schemeClr val="dk1"/>
-            </a:fillRef>
-            <a:effectRef idx="0">
-              <a:schemeClr val="dk1"/>
-            </a:effectRef>
-            <a:fontRef idx="minor">
-              <a:schemeClr val="lt1"/>
-            </a:fontRef>
-          </p:style>
-          <p:txBody>
-            <a:bodyPr rtlCol="0" anchor="ctr"/>
-            <a:lstStyle/>
-            <a:p>
-              <a:pPr algn="ctr"/>
-              <a:endParaRPr lang="en-US"/>
-            </a:p>
-          </p:txBody>
-        </p:sp>
-      </p:grpSp>
-      <p:grpSp>
-        <p:nvGrpSpPr>
-          <p:cNvPr id="107" name="Group 106">
-            <a:extLst>
-              <a:ext uri="{FF2B5EF4-FFF2-40B4-BE49-F238E27FC236}">
-                <a16:creationId xmlns:a16="http://schemas.microsoft.com/office/drawing/2014/main" id="{8FD23CA3-C491-B1C3-F8B7-53B901341FD5}"/>
-              </a:ext>
-            </a:extLst>
-          </p:cNvPr>
-          <p:cNvGrpSpPr/>
-          <p:nvPr/>
-        </p:nvGrpSpPr>
-        <p:grpSpPr>
-          <a:xfrm>
-            <a:off x="2094826" y="3931428"/>
-            <a:ext cx="702370" cy="722337"/>
-            <a:chOff x="6950179" y="209368"/>
-            <a:chExt cx="2475607" cy="2545983"/>
-          </a:xfrm>
-        </p:grpSpPr>
-        <p:sp>
-          <p:nvSpPr>
-            <p:cNvPr id="108" name="Moon 107">
-              <a:extLst>
-                <a:ext uri="{FF2B5EF4-FFF2-40B4-BE49-F238E27FC236}">
-                  <a16:creationId xmlns:a16="http://schemas.microsoft.com/office/drawing/2014/main" id="{E8CD6C4D-DD7C-313C-26D8-E5ED7CCD9F63}"/>
-                </a:ext>
-              </a:extLst>
-            </p:cNvPr>
-            <p:cNvSpPr/>
-            <p:nvPr/>
-          </p:nvSpPr>
-          <p:spPr>
-            <a:xfrm rot="5400000">
-              <a:off x="7798765" y="1128330"/>
-              <a:ext cx="778435" cy="2475607"/>
-            </a:xfrm>
-            <a:prstGeom prst="moon">
-              <a:avLst>
-                <a:gd name="adj" fmla="val 87500"/>
-              </a:avLst>
-            </a:prstGeom>
-          </p:spPr>
-          <p:style>
-            <a:lnRef idx="2">
-              <a:schemeClr val="dk1">
-                <a:shade val="50000"/>
-              </a:schemeClr>
-            </a:lnRef>
-            <a:fillRef idx="1">
-              <a:schemeClr val="dk1"/>
-            </a:fillRef>
-            <a:effectRef idx="0">
-              <a:schemeClr val="dk1"/>
-            </a:effectRef>
-            <a:fontRef idx="minor">
-              <a:schemeClr val="lt1"/>
-            </a:fontRef>
-          </p:style>
-          <p:txBody>
-            <a:bodyPr rtlCol="0" anchor="ctr"/>
-            <a:lstStyle/>
-            <a:p>
-              <a:pPr algn="ctr"/>
-              <a:endParaRPr lang="en-US"/>
-            </a:p>
-          </p:txBody>
-        </p:sp>
-        <p:grpSp>
-          <p:nvGrpSpPr>
-            <p:cNvPr id="109" name="Group 108">
-              <a:extLst>
-                <a:ext uri="{FF2B5EF4-FFF2-40B4-BE49-F238E27FC236}">
-                  <a16:creationId xmlns:a16="http://schemas.microsoft.com/office/drawing/2014/main" id="{5ACB9EB3-D072-A731-F2A6-21FC005F6E11}"/>
-                </a:ext>
-              </a:extLst>
-            </p:cNvPr>
-            <p:cNvGrpSpPr/>
-            <p:nvPr/>
-          </p:nvGrpSpPr>
-          <p:grpSpPr>
-            <a:xfrm>
-              <a:off x="7048732" y="209368"/>
-              <a:ext cx="2278499" cy="2002129"/>
-              <a:chOff x="3753737" y="1365068"/>
-              <a:chExt cx="2278499" cy="2002129"/>
-            </a:xfrm>
-          </p:grpSpPr>
-          <p:sp>
-            <p:nvSpPr>
-              <p:cNvPr id="110" name="Isosceles Triangle 109">
-                <a:extLst>
-                  <a:ext uri="{FF2B5EF4-FFF2-40B4-BE49-F238E27FC236}">
-                    <a16:creationId xmlns:a16="http://schemas.microsoft.com/office/drawing/2014/main" id="{8998A6A4-D158-BE60-C0D2-4FE90D0EEB54}"/>
-                  </a:ext>
-                </a:extLst>
-              </p:cNvPr>
-              <p:cNvSpPr/>
-              <p:nvPr/>
-            </p:nvSpPr>
-            <p:spPr>
-              <a:xfrm flipH="1">
-                <a:off x="4555226" y="1365068"/>
-                <a:ext cx="673630" cy="2002129"/>
-              </a:xfrm>
-              <a:prstGeom prst="triangle">
-                <a:avLst/>
-              </a:prstGeom>
-            </p:spPr>
-            <p:style>
-              <a:lnRef idx="2">
-                <a:schemeClr val="dk1">
-                  <a:shade val="50000"/>
-                </a:schemeClr>
-              </a:lnRef>
-              <a:fillRef idx="1">
-                <a:schemeClr val="dk1"/>
-              </a:fillRef>
-              <a:effectRef idx="0">
-                <a:schemeClr val="dk1"/>
-              </a:effectRef>
-              <a:fontRef idx="minor">
-                <a:schemeClr val="lt1"/>
-              </a:fontRef>
-            </p:style>
-            <p:txBody>
-              <a:bodyPr rtlCol="0" anchor="ctr"/>
-              <a:lstStyle/>
-              <a:p>
-                <a:pPr algn="ctr"/>
-                <a:endParaRPr lang="en-US"/>
-              </a:p>
-            </p:txBody>
-          </p:sp>
-          <p:grpSp>
-            <p:nvGrpSpPr>
-              <p:cNvPr id="111" name="Group 110">
-                <a:extLst>
-                  <a:ext uri="{FF2B5EF4-FFF2-40B4-BE49-F238E27FC236}">
-                    <a16:creationId xmlns:a16="http://schemas.microsoft.com/office/drawing/2014/main" id="{31184E7C-818D-1038-12DB-BF16B792250E}"/>
-                  </a:ext>
-                </a:extLst>
-              </p:cNvPr>
-              <p:cNvGrpSpPr/>
-              <p:nvPr/>
-            </p:nvGrpSpPr>
-            <p:grpSpPr>
-              <a:xfrm>
-                <a:off x="3753737" y="2018274"/>
-                <a:ext cx="940920" cy="1047698"/>
-                <a:chOff x="3753737" y="2018274"/>
-                <a:chExt cx="940920" cy="1047698"/>
-              </a:xfrm>
-            </p:grpSpPr>
-            <p:sp>
-              <p:nvSpPr>
-                <p:cNvPr id="116" name="Isosceles Triangle 115">
-                  <a:extLst>
-                    <a:ext uri="{FF2B5EF4-FFF2-40B4-BE49-F238E27FC236}">
-                      <a16:creationId xmlns:a16="http://schemas.microsoft.com/office/drawing/2014/main" id="{BE254664-46DB-15BA-55A6-633CBC8DF6E2}"/>
-                    </a:ext>
-                  </a:extLst>
-                </p:cNvPr>
-                <p:cNvSpPr/>
-                <p:nvPr/>
-              </p:nvSpPr>
-              <p:spPr>
-                <a:xfrm rot="16779459">
-                  <a:off x="4296631" y="1899647"/>
-                  <a:ext cx="279400" cy="516653"/>
-                </a:xfrm>
-                <a:prstGeom prst="triangle">
-                  <a:avLst/>
-                </a:prstGeom>
-              </p:spPr>
-              <p:style>
-                <a:lnRef idx="2">
-                  <a:schemeClr val="dk1">
-                    <a:shade val="50000"/>
-                  </a:schemeClr>
-                </a:lnRef>
-                <a:fillRef idx="1">
-                  <a:schemeClr val="dk1"/>
-                </a:fillRef>
-                <a:effectRef idx="0">
-                  <a:schemeClr val="dk1"/>
-                </a:effectRef>
-                <a:fontRef idx="minor">
-                  <a:schemeClr val="lt1"/>
-                </a:fontRef>
-              </p:style>
-              <p:txBody>
-                <a:bodyPr rtlCol="0" anchor="ctr"/>
-                <a:lstStyle/>
-                <a:p>
-                  <a:pPr algn="ctr"/>
-                  <a:endParaRPr lang="en-US"/>
-                </a:p>
-              </p:txBody>
-            </p:sp>
-            <p:sp>
-              <p:nvSpPr>
-                <p:cNvPr id="117" name="Isosceles Triangle 116">
-                  <a:extLst>
-                    <a:ext uri="{FF2B5EF4-FFF2-40B4-BE49-F238E27FC236}">
-                      <a16:creationId xmlns:a16="http://schemas.microsoft.com/office/drawing/2014/main" id="{EB359D96-FAD5-DFC4-7C29-D80EB9D02AF1}"/>
-                    </a:ext>
-                  </a:extLst>
-                </p:cNvPr>
-                <p:cNvSpPr/>
-                <p:nvPr/>
-              </p:nvSpPr>
-              <p:spPr>
-                <a:xfrm rot="16779459">
-                  <a:off x="4023093" y="2517216"/>
-                  <a:ext cx="279400" cy="818112"/>
-                </a:xfrm>
-                <a:prstGeom prst="triangle">
-                  <a:avLst/>
-                </a:prstGeom>
-              </p:spPr>
-              <p:style>
-                <a:lnRef idx="2">
-                  <a:schemeClr val="dk1">
-                    <a:shade val="50000"/>
-                  </a:schemeClr>
-                </a:lnRef>
-                <a:fillRef idx="1">
-                  <a:schemeClr val="dk1"/>
-                </a:fillRef>
-                <a:effectRef idx="0">
-                  <a:schemeClr val="dk1"/>
-                </a:effectRef>
-                <a:fontRef idx="minor">
-                  <a:schemeClr val="lt1"/>
-                </a:fontRef>
-              </p:style>
-              <p:txBody>
-                <a:bodyPr rtlCol="0" anchor="ctr"/>
-                <a:lstStyle/>
-                <a:p>
-                  <a:pPr algn="ctr"/>
-                  <a:endParaRPr lang="en-US"/>
-                </a:p>
-              </p:txBody>
-            </p:sp>
-            <p:sp>
-              <p:nvSpPr>
-                <p:cNvPr id="118" name="Isosceles Triangle 117">
-                  <a:extLst>
-                    <a:ext uri="{FF2B5EF4-FFF2-40B4-BE49-F238E27FC236}">
-                      <a16:creationId xmlns:a16="http://schemas.microsoft.com/office/drawing/2014/main" id="{2555B9CA-BF14-96BC-5287-09CB362E1702}"/>
-                    </a:ext>
-                  </a:extLst>
-                </p:cNvPr>
-                <p:cNvSpPr/>
-                <p:nvPr/>
-              </p:nvSpPr>
-              <p:spPr>
-                <a:xfrm rot="16779459">
-                  <a:off x="4169431" y="2180356"/>
-                  <a:ext cx="279400" cy="656846"/>
-                </a:xfrm>
-                <a:prstGeom prst="triangle">
-                  <a:avLst/>
-                </a:prstGeom>
-              </p:spPr>
-              <p:style>
-                <a:lnRef idx="2">
-                  <a:schemeClr val="dk1">
-                    <a:shade val="50000"/>
-                  </a:schemeClr>
-                </a:lnRef>
-                <a:fillRef idx="1">
-                  <a:schemeClr val="dk1"/>
-                </a:fillRef>
-                <a:effectRef idx="0">
-                  <a:schemeClr val="dk1"/>
-                </a:effectRef>
-                <a:fontRef idx="minor">
-                  <a:schemeClr val="lt1"/>
-                </a:fontRef>
-              </p:style>
-              <p:txBody>
-                <a:bodyPr rtlCol="0" anchor="ctr"/>
-                <a:lstStyle/>
-                <a:p>
-                  <a:pPr algn="ctr"/>
-                  <a:endParaRPr lang="en-US"/>
-                </a:p>
-              </p:txBody>
-            </p:sp>
-          </p:grpSp>
-          <p:grpSp>
-            <p:nvGrpSpPr>
-              <p:cNvPr id="112" name="Group 111">
-                <a:extLst>
-                  <a:ext uri="{FF2B5EF4-FFF2-40B4-BE49-F238E27FC236}">
-                    <a16:creationId xmlns:a16="http://schemas.microsoft.com/office/drawing/2014/main" id="{975210B1-C581-916B-464E-7CB4EC58A7D6}"/>
-                  </a:ext>
-                </a:extLst>
-              </p:cNvPr>
-              <p:cNvGrpSpPr/>
-              <p:nvPr/>
-            </p:nvGrpSpPr>
-            <p:grpSpPr>
-              <a:xfrm flipH="1">
-                <a:off x="5091316" y="2020148"/>
-                <a:ext cx="940920" cy="1047698"/>
-                <a:chOff x="3753737" y="2018274"/>
-                <a:chExt cx="940920" cy="1047698"/>
-              </a:xfrm>
-            </p:grpSpPr>
-            <p:sp>
-              <p:nvSpPr>
-                <p:cNvPr id="113" name="Isosceles Triangle 112">
-                  <a:extLst>
-                    <a:ext uri="{FF2B5EF4-FFF2-40B4-BE49-F238E27FC236}">
-                      <a16:creationId xmlns:a16="http://schemas.microsoft.com/office/drawing/2014/main" id="{9689A571-4995-CC2B-997E-8FD391C20D27}"/>
-                    </a:ext>
-                  </a:extLst>
-                </p:cNvPr>
-                <p:cNvSpPr/>
-                <p:nvPr/>
-              </p:nvSpPr>
-              <p:spPr>
-                <a:xfrm rot="16779459">
-                  <a:off x="4296631" y="1899647"/>
-                  <a:ext cx="279400" cy="516653"/>
-                </a:xfrm>
-                <a:prstGeom prst="triangle">
-                  <a:avLst/>
-                </a:prstGeom>
-              </p:spPr>
-              <p:style>
-                <a:lnRef idx="2">
-                  <a:schemeClr val="dk1">
-                    <a:shade val="50000"/>
-                  </a:schemeClr>
-                </a:lnRef>
-                <a:fillRef idx="1">
-                  <a:schemeClr val="dk1"/>
-                </a:fillRef>
-                <a:effectRef idx="0">
-                  <a:schemeClr val="dk1"/>
-                </a:effectRef>
-                <a:fontRef idx="minor">
-                  <a:schemeClr val="lt1"/>
-                </a:fontRef>
-              </p:style>
-              <p:txBody>
-                <a:bodyPr rtlCol="0" anchor="ctr"/>
-                <a:lstStyle/>
-                <a:p>
-                  <a:pPr algn="ctr"/>
-                  <a:endParaRPr lang="en-US"/>
-                </a:p>
-              </p:txBody>
-            </p:sp>
-            <p:sp>
-              <p:nvSpPr>
-                <p:cNvPr id="114" name="Isosceles Triangle 113">
-                  <a:extLst>
-                    <a:ext uri="{FF2B5EF4-FFF2-40B4-BE49-F238E27FC236}">
-                      <a16:creationId xmlns:a16="http://schemas.microsoft.com/office/drawing/2014/main" id="{CDB90B00-58A9-8743-4722-6BD00B4A489D}"/>
-                    </a:ext>
-                  </a:extLst>
-                </p:cNvPr>
-                <p:cNvSpPr/>
-                <p:nvPr/>
-              </p:nvSpPr>
-              <p:spPr>
-                <a:xfrm rot="16779459">
-                  <a:off x="4023093" y="2517216"/>
-                  <a:ext cx="279400" cy="818112"/>
-                </a:xfrm>
-                <a:prstGeom prst="triangle">
-                  <a:avLst/>
-                </a:prstGeom>
-              </p:spPr>
-              <p:style>
-                <a:lnRef idx="2">
-                  <a:schemeClr val="dk1">
-                    <a:shade val="50000"/>
-                  </a:schemeClr>
-                </a:lnRef>
-                <a:fillRef idx="1">
-                  <a:schemeClr val="dk1"/>
-                </a:fillRef>
-                <a:effectRef idx="0">
-                  <a:schemeClr val="dk1"/>
-                </a:effectRef>
-                <a:fontRef idx="minor">
-                  <a:schemeClr val="lt1"/>
-                </a:fontRef>
-              </p:style>
-              <p:txBody>
-                <a:bodyPr rtlCol="0" anchor="ctr"/>
-                <a:lstStyle/>
-                <a:p>
-                  <a:pPr algn="ctr"/>
-                  <a:endParaRPr lang="en-US"/>
-                </a:p>
-              </p:txBody>
-            </p:sp>
-            <p:sp>
-              <p:nvSpPr>
-                <p:cNvPr id="115" name="Isosceles Triangle 114">
-                  <a:extLst>
-                    <a:ext uri="{FF2B5EF4-FFF2-40B4-BE49-F238E27FC236}">
-                      <a16:creationId xmlns:a16="http://schemas.microsoft.com/office/drawing/2014/main" id="{537522A5-45B2-AF42-ABE9-886D16420C79}"/>
-                    </a:ext>
-                  </a:extLst>
-                </p:cNvPr>
-                <p:cNvSpPr/>
-                <p:nvPr/>
-              </p:nvSpPr>
-              <p:spPr>
-                <a:xfrm rot="16779459">
-                  <a:off x="4169431" y="2180356"/>
-                  <a:ext cx="279400" cy="656846"/>
-                </a:xfrm>
-                <a:prstGeom prst="triangle">
-                  <a:avLst/>
-                </a:prstGeom>
-              </p:spPr>
-              <p:style>
-                <a:lnRef idx="2">
-                  <a:schemeClr val="dk1">
-                    <a:shade val="50000"/>
-                  </a:schemeClr>
-                </a:lnRef>
-                <a:fillRef idx="1">
-                  <a:schemeClr val="dk1"/>
-                </a:fillRef>
-                <a:effectRef idx="0">
-                  <a:schemeClr val="dk1"/>
-                </a:effectRef>
-                <a:fontRef idx="minor">
-                  <a:schemeClr val="lt1"/>
-                </a:fontRef>
-              </p:style>
-              <p:txBody>
-                <a:bodyPr rtlCol="0" anchor="ctr"/>
-                <a:lstStyle/>
-                <a:p>
-                  <a:pPr algn="ctr"/>
-                  <a:endParaRPr lang="en-US"/>
-                </a:p>
-              </p:txBody>
-            </p:sp>
-          </p:grpSp>
-        </p:grpSp>
-      </p:grpSp>
-      <p:grpSp>
-        <p:nvGrpSpPr>
           <p:cNvPr id="3" name="Group 2">
             <a:extLst>
               <a:ext uri="{FF2B5EF4-FFF2-40B4-BE49-F238E27FC236}">
@@ -32448,7 +31607,7 @@
             <p:nvPr/>
           </p:nvPicPr>
           <p:blipFill rotWithShape="1">
-            <a:blip r:embed="rId15">
+            <a:blip r:embed="rId13">
               <a:extLst>
                 <a:ext uri="{28A0092B-C50C-407E-A947-70E740481C1C}">
                   <a14:useLocalDpi xmlns:a14="http://schemas.microsoft.com/office/drawing/2010/main" val="0"/>
@@ -32493,7 +31652,7 @@
             <p:nvPr/>
           </p:nvPicPr>
           <p:blipFill rotWithShape="1">
-            <a:blip r:embed="rId15">
+            <a:blip r:embed="rId13">
               <a:extLst>
                 <a:ext uri="{28A0092B-C50C-407E-A947-70E740481C1C}">
                   <a14:useLocalDpi xmlns:a14="http://schemas.microsoft.com/office/drawing/2010/main" val="0"/>
@@ -32867,7 +32026,7 @@
             <p:nvPr/>
           </p:nvPicPr>
           <p:blipFill rotWithShape="1">
-            <a:blip r:embed="rId15">
+            <a:blip r:embed="rId13">
               <a:extLst>
                 <a:ext uri="{28A0092B-C50C-407E-A947-70E740481C1C}">
                   <a14:useLocalDpi xmlns:a14="http://schemas.microsoft.com/office/drawing/2010/main" val="0"/>
@@ -32912,7 +32071,7 @@
             <p:nvPr/>
           </p:nvPicPr>
           <p:blipFill rotWithShape="1">
-            <a:blip r:embed="rId15">
+            <a:blip r:embed="rId13">
               <a:extLst>
                 <a:ext uri="{28A0092B-C50C-407E-A947-70E740481C1C}">
                   <a14:useLocalDpi xmlns:a14="http://schemas.microsoft.com/office/drawing/2010/main" val="0"/>
@@ -33070,133 +32229,6 @@
           </p:txBody>
         </p:sp>
       </p:grpSp>
-      <p:grpSp>
-        <p:nvGrpSpPr>
-          <p:cNvPr id="148" name="Group 147">
-            <a:extLst>
-              <a:ext uri="{FF2B5EF4-FFF2-40B4-BE49-F238E27FC236}">
-                <a16:creationId xmlns:a16="http://schemas.microsoft.com/office/drawing/2014/main" id="{7053A8E6-5A0B-D0B0-DACF-7ADD520558A9}"/>
-              </a:ext>
-            </a:extLst>
-          </p:cNvPr>
-          <p:cNvGrpSpPr/>
-          <p:nvPr/>
-        </p:nvGrpSpPr>
-        <p:grpSpPr>
-          <a:xfrm>
-            <a:off x="7895166" y="3464634"/>
-            <a:ext cx="1371600" cy="1371600"/>
-            <a:chOff x="213377" y="483633"/>
-            <a:chExt cx="1371600" cy="1371600"/>
-          </a:xfrm>
-        </p:grpSpPr>
-        <p:sp>
-          <p:nvSpPr>
-            <p:cNvPr id="149" name="Rectangle 148">
-              <a:extLst>
-                <a:ext uri="{FF2B5EF4-FFF2-40B4-BE49-F238E27FC236}">
-                  <a16:creationId xmlns:a16="http://schemas.microsoft.com/office/drawing/2014/main" id="{5E1A682F-AF5A-A55D-D64E-B749A5546E6B}"/>
-                </a:ext>
-              </a:extLst>
-            </p:cNvPr>
-            <p:cNvSpPr/>
-            <p:nvPr/>
-          </p:nvSpPr>
-          <p:spPr>
-            <a:xfrm>
-              <a:off x="213377" y="483633"/>
-              <a:ext cx="1371600" cy="1371600"/>
-            </a:xfrm>
-            <a:prstGeom prst="rect">
-              <a:avLst/>
-            </a:prstGeom>
-            <a:noFill/>
-            <a:ln w="76200">
-              <a:solidFill>
-                <a:schemeClr val="tx1"/>
-              </a:solidFill>
-            </a:ln>
-          </p:spPr>
-          <p:style>
-            <a:lnRef idx="2">
-              <a:schemeClr val="accent1">
-                <a:shade val="50000"/>
-              </a:schemeClr>
-            </a:lnRef>
-            <a:fillRef idx="1">
-              <a:schemeClr val="accent1"/>
-            </a:fillRef>
-            <a:effectRef idx="0">
-              <a:schemeClr val="accent1"/>
-            </a:effectRef>
-            <a:fontRef idx="minor">
-              <a:schemeClr val="lt1"/>
-            </a:fontRef>
-          </p:style>
-          <p:txBody>
-            <a:bodyPr rtlCol="0" anchor="ctr"/>
-            <a:lstStyle/>
-            <a:p>
-              <a:pPr algn="ctr"/>
-              <a:endParaRPr lang="en-US"/>
-            </a:p>
-          </p:txBody>
-        </p:sp>
-        <p:sp>
-          <p:nvSpPr>
-            <p:cNvPr id="150" name="Hexagon 149">
-              <a:extLst>
-                <a:ext uri="{FF2B5EF4-FFF2-40B4-BE49-F238E27FC236}">
-                  <a16:creationId xmlns:a16="http://schemas.microsoft.com/office/drawing/2014/main" id="{546C48F3-B069-4BF0-85D7-144EB2E0DDB9}"/>
-                </a:ext>
-              </a:extLst>
-            </p:cNvPr>
-            <p:cNvSpPr/>
-            <p:nvPr/>
-          </p:nvSpPr>
-          <p:spPr>
-            <a:xfrm>
-              <a:off x="304817" y="705883"/>
-              <a:ext cx="1188720" cy="1097280"/>
-            </a:xfrm>
-            <a:prstGeom prst="hexagon">
-              <a:avLst/>
-            </a:prstGeom>
-            <a:noFill/>
-            <a:ln w="38100" cap="flat" cmpd="sng" algn="ctr">
-              <a:solidFill>
-                <a:schemeClr val="dk1"/>
-              </a:solidFill>
-              <a:prstDash val="solid"/>
-              <a:round/>
-              <a:headEnd type="none" w="med" len="med"/>
-              <a:tailEnd type="none" w="med" len="med"/>
-            </a:ln>
-          </p:spPr>
-          <p:style>
-            <a:lnRef idx="0">
-              <a:scrgbClr r="0" g="0" b="0"/>
-            </a:lnRef>
-            <a:fillRef idx="0">
-              <a:scrgbClr r="0" g="0" b="0"/>
-            </a:fillRef>
-            <a:effectRef idx="0">
-              <a:scrgbClr r="0" g="0" b="0"/>
-            </a:effectRef>
-            <a:fontRef idx="minor">
-              <a:schemeClr val="dk1"/>
-            </a:fontRef>
-          </p:style>
-          <p:txBody>
-            <a:bodyPr rtlCol="0" anchor="ctr"/>
-            <a:lstStyle/>
-            <a:p>
-              <a:pPr algn="ctr"/>
-              <a:endParaRPr lang="en-US"/>
-            </a:p>
-          </p:txBody>
-        </p:sp>
-      </p:grpSp>
       <p:pic>
         <p:nvPicPr>
           <p:cNvPr id="1038" name="Picture 14" descr="2,970 Queen Bee Stock Vector Illustration and Royalty Free Queen Bee Clipart">
@@ -33212,7 +32244,7 @@
           <p:nvPr/>
         </p:nvPicPr>
         <p:blipFill>
-          <a:blip r:embed="rId16">
+          <a:blip r:embed="rId14">
             <a:extLst>
               <a:ext uri="{28A0092B-C50C-407E-A947-70E740481C1C}">
                 <a14:useLocalDpi xmlns:a14="http://schemas.microsoft.com/office/drawing/2010/main" val="0"/>
@@ -33373,229 +32405,6 @@
       </p:grpSp>
       <p:grpSp>
         <p:nvGrpSpPr>
-          <p:cNvPr id="7" name="Group 6">
-            <a:extLst>
-              <a:ext uri="{FF2B5EF4-FFF2-40B4-BE49-F238E27FC236}">
-                <a16:creationId xmlns:a16="http://schemas.microsoft.com/office/drawing/2014/main" id="{EAAA08AF-49E9-532D-06DD-E0AC18A30215}"/>
-              </a:ext>
-            </a:extLst>
-          </p:cNvPr>
-          <p:cNvGrpSpPr/>
-          <p:nvPr/>
-        </p:nvGrpSpPr>
-        <p:grpSpPr>
-          <a:xfrm>
-            <a:off x="9773710" y="2248932"/>
-            <a:ext cx="718107" cy="1009156"/>
-            <a:chOff x="4749318" y="4046015"/>
-            <a:chExt cx="718107" cy="1009156"/>
-          </a:xfrm>
-        </p:grpSpPr>
-        <p:pic>
-          <p:nvPicPr>
-            <p:cNvPr id="163" name="Picture 162">
-              <a:extLst>
-                <a:ext uri="{FF2B5EF4-FFF2-40B4-BE49-F238E27FC236}">
-                  <a16:creationId xmlns:a16="http://schemas.microsoft.com/office/drawing/2014/main" id="{F2E6589B-FD4F-D20F-4ED7-6CD011F3AEED}"/>
-                </a:ext>
-              </a:extLst>
-            </p:cNvPr>
-            <p:cNvPicPr>
-              <a:picLocks noChangeAspect="1"/>
-            </p:cNvPicPr>
-            <p:nvPr/>
-          </p:nvPicPr>
-          <p:blipFill>
-            <a:blip r:embed="rId13"/>
-            <a:stretch>
-              <a:fillRect/>
-            </a:stretch>
-          </p:blipFill>
-          <p:spPr>
-            <a:xfrm>
-              <a:off x="4912582" y="4046015"/>
-              <a:ext cx="554843" cy="508021"/>
-            </a:xfrm>
-            <a:prstGeom prst="rect">
-              <a:avLst/>
-            </a:prstGeom>
-          </p:spPr>
-        </p:pic>
-        <p:pic>
-          <p:nvPicPr>
-            <p:cNvPr id="158" name="Picture 4" descr="2,174 Hornet Vector Illustrations &amp; Clip Art - iStock">
-              <a:extLst>
-                <a:ext uri="{FF2B5EF4-FFF2-40B4-BE49-F238E27FC236}">
-                  <a16:creationId xmlns:a16="http://schemas.microsoft.com/office/drawing/2014/main" id="{CC8B72D1-F6D9-0D6A-160F-6747604DA249}"/>
-                </a:ext>
-              </a:extLst>
-            </p:cNvPr>
-            <p:cNvPicPr>
-              <a:picLocks noChangeAspect="1" noChangeArrowheads="1"/>
-            </p:cNvPicPr>
-            <p:nvPr/>
-          </p:nvPicPr>
-          <p:blipFill rotWithShape="1">
-            <a:blip r:embed="rId15">
-              <a:extLst>
-                <a:ext uri="{28A0092B-C50C-407E-A947-70E740481C1C}">
-                  <a14:useLocalDpi xmlns:a14="http://schemas.microsoft.com/office/drawing/2010/main" val="0"/>
-                </a:ext>
-              </a:extLst>
-            </a:blip>
-            <a:srcRect l="20806" t="14492" r="21220" b="15205"/>
-            <a:stretch/>
-          </p:blipFill>
-          <p:spPr bwMode="auto">
-            <a:xfrm>
-              <a:off x="4749318" y="4500457"/>
-              <a:ext cx="457426" cy="554714"/>
-            </a:xfrm>
-            <a:prstGeom prst="rect">
-              <a:avLst/>
-            </a:prstGeom>
-            <a:noFill/>
-            <a:extLst>
-              <a:ext uri="{909E8E84-426E-40DD-AFC4-6F175D3DCCD1}">
-                <a14:hiddenFill xmlns:a14="http://schemas.microsoft.com/office/drawing/2010/main">
-                  <a:solidFill>
-                    <a:srgbClr val="FFFFFF"/>
-                  </a:solidFill>
-                </a14:hiddenFill>
-              </a:ext>
-            </a:extLst>
-          </p:spPr>
-        </p:pic>
-      </p:grpSp>
-      <p:grpSp>
-        <p:nvGrpSpPr>
-          <p:cNvPr id="160" name="Group 159">
-            <a:extLst>
-              <a:ext uri="{FF2B5EF4-FFF2-40B4-BE49-F238E27FC236}">
-                <a16:creationId xmlns:a16="http://schemas.microsoft.com/office/drawing/2014/main" id="{B43878E5-98CF-4B37-B8F2-CDF8BD9D1855}"/>
-              </a:ext>
-            </a:extLst>
-          </p:cNvPr>
-          <p:cNvGrpSpPr/>
-          <p:nvPr/>
-        </p:nvGrpSpPr>
-        <p:grpSpPr>
-          <a:xfrm>
-            <a:off x="9400072" y="1989758"/>
-            <a:ext cx="1371600" cy="1371600"/>
-            <a:chOff x="213377" y="483633"/>
-            <a:chExt cx="1371600" cy="1371600"/>
-          </a:xfrm>
-        </p:grpSpPr>
-        <p:sp>
-          <p:nvSpPr>
-            <p:cNvPr id="161" name="Rectangle 160">
-              <a:extLst>
-                <a:ext uri="{FF2B5EF4-FFF2-40B4-BE49-F238E27FC236}">
-                  <a16:creationId xmlns:a16="http://schemas.microsoft.com/office/drawing/2014/main" id="{E0D51FF4-706D-F88A-6972-348AAEF50E36}"/>
-                </a:ext>
-              </a:extLst>
-            </p:cNvPr>
-            <p:cNvSpPr/>
-            <p:nvPr/>
-          </p:nvSpPr>
-          <p:spPr>
-            <a:xfrm>
-              <a:off x="213377" y="483633"/>
-              <a:ext cx="1371600" cy="1371600"/>
-            </a:xfrm>
-            <a:prstGeom prst="rect">
-              <a:avLst/>
-            </a:prstGeom>
-            <a:noFill/>
-            <a:ln w="76200">
-              <a:solidFill>
-                <a:schemeClr val="tx1"/>
-              </a:solidFill>
-            </a:ln>
-          </p:spPr>
-          <p:style>
-            <a:lnRef idx="2">
-              <a:schemeClr val="accent1">
-                <a:shade val="50000"/>
-              </a:schemeClr>
-            </a:lnRef>
-            <a:fillRef idx="1">
-              <a:schemeClr val="accent1"/>
-            </a:fillRef>
-            <a:effectRef idx="0">
-              <a:schemeClr val="accent1"/>
-            </a:effectRef>
-            <a:fontRef idx="minor">
-              <a:schemeClr val="lt1"/>
-            </a:fontRef>
-          </p:style>
-          <p:txBody>
-            <a:bodyPr rtlCol="0" anchor="ctr"/>
-            <a:lstStyle/>
-            <a:p>
-              <a:pPr algn="ctr"/>
-              <a:endParaRPr lang="en-US"/>
-            </a:p>
-          </p:txBody>
-        </p:sp>
-        <p:sp>
-          <p:nvSpPr>
-            <p:cNvPr id="162" name="Hexagon 161">
-              <a:extLst>
-                <a:ext uri="{FF2B5EF4-FFF2-40B4-BE49-F238E27FC236}">
-                  <a16:creationId xmlns:a16="http://schemas.microsoft.com/office/drawing/2014/main" id="{4CFE4FAE-EEF3-BC9D-0EC4-488B22A1B829}"/>
-                </a:ext>
-              </a:extLst>
-            </p:cNvPr>
-            <p:cNvSpPr/>
-            <p:nvPr/>
-          </p:nvSpPr>
-          <p:spPr>
-            <a:xfrm>
-              <a:off x="304817" y="699533"/>
-              <a:ext cx="1188720" cy="1097280"/>
-            </a:xfrm>
-            <a:prstGeom prst="hexagon">
-              <a:avLst/>
-            </a:prstGeom>
-            <a:noFill/>
-            <a:ln w="38100" cap="flat" cmpd="sng" algn="ctr">
-              <a:solidFill>
-                <a:schemeClr val="dk1"/>
-              </a:solidFill>
-              <a:prstDash val="solid"/>
-              <a:round/>
-              <a:headEnd type="none" w="med" len="med"/>
-              <a:tailEnd type="none" w="med" len="med"/>
-            </a:ln>
-          </p:spPr>
-          <p:style>
-            <a:lnRef idx="0">
-              <a:scrgbClr r="0" g="0" b="0"/>
-            </a:lnRef>
-            <a:fillRef idx="0">
-              <a:scrgbClr r="0" g="0" b="0"/>
-            </a:fillRef>
-            <a:effectRef idx="0">
-              <a:scrgbClr r="0" g="0" b="0"/>
-            </a:effectRef>
-            <a:fontRef idx="minor">
-              <a:schemeClr val="dk1"/>
-            </a:fontRef>
-          </p:style>
-          <p:txBody>
-            <a:bodyPr rtlCol="0" anchor="ctr"/>
-            <a:lstStyle/>
-            <a:p>
-              <a:pPr algn="ctr"/>
-              <a:endParaRPr lang="en-US"/>
-            </a:p>
-          </p:txBody>
-        </p:sp>
-      </p:grpSp>
-      <p:grpSp>
-        <p:nvGrpSpPr>
           <p:cNvPr id="169" name="Group 168">
             <a:extLst>
               <a:ext uri="{FF2B5EF4-FFF2-40B4-BE49-F238E27FC236}">
@@ -33756,7 +32565,7 @@
             <p:nvPr/>
           </p:nvPicPr>
           <p:blipFill rotWithShape="1">
-            <a:blip r:embed="rId11"/>
+            <a:blip r:embed="rId9"/>
             <a:srcRect b="61242"/>
             <a:stretch/>
           </p:blipFill>
@@ -34140,7 +32949,7 @@
             <p:nvPr/>
           </p:nvPicPr>
           <p:blipFill rotWithShape="1">
-            <a:blip r:embed="rId15">
+            <a:blip r:embed="rId13">
               <a:extLst>
                 <a:ext uri="{28A0092B-C50C-407E-A947-70E740481C1C}">
                   <a14:useLocalDpi xmlns:a14="http://schemas.microsoft.com/office/drawing/2010/main" val="0"/>
@@ -34185,7 +32994,7 @@
             <p:nvPr/>
           </p:nvPicPr>
           <p:blipFill rotWithShape="1">
-            <a:blip r:embed="rId15">
+            <a:blip r:embed="rId13">
               <a:extLst>
                 <a:ext uri="{28A0092B-C50C-407E-A947-70E740481C1C}">
                   <a14:useLocalDpi xmlns:a14="http://schemas.microsoft.com/office/drawing/2010/main" val="0"/>
@@ -34475,7 +33284,7 @@
           <p:nvPr/>
         </p:nvPicPr>
         <p:blipFill rotWithShape="1">
-          <a:blip r:embed="rId17">
+          <a:blip r:embed="rId15">
             <a:extLst>
               <a:ext uri="{28A0092B-C50C-407E-A947-70E740481C1C}">
                 <a14:useLocalDpi xmlns:a14="http://schemas.microsoft.com/office/drawing/2010/main" val="0"/>
@@ -34520,7 +33329,7 @@
           <p:nvPr/>
         </p:nvPicPr>
         <p:blipFill rotWithShape="1">
-          <a:blip r:embed="rId17">
+          <a:blip r:embed="rId15">
             <a:extLst>
               <a:ext uri="{28A0092B-C50C-407E-A947-70E740481C1C}">
                 <a14:useLocalDpi xmlns:a14="http://schemas.microsoft.com/office/drawing/2010/main" val="0"/>
@@ -35020,7 +33829,7 @@
             <p:nvPr/>
           </p:nvPicPr>
           <p:blipFill rotWithShape="1">
-            <a:blip r:embed="rId17">
+            <a:blip r:embed="rId15">
               <a:extLst>
                 <a:ext uri="{28A0092B-C50C-407E-A947-70E740481C1C}">
                   <a14:useLocalDpi xmlns:a14="http://schemas.microsoft.com/office/drawing/2010/main" val="0"/>
@@ -35366,6 +34175,1981 @@
               </a:fillRef>
               <a:effectRef idx="0">
                 <a:schemeClr val="dk1"/>
+              </a:effectRef>
+              <a:fontRef idx="minor">
+                <a:schemeClr val="dk1"/>
+              </a:fontRef>
+            </p:style>
+            <p:txBody>
+              <a:bodyPr rtlCol="0" anchor="ctr"/>
+              <a:lstStyle/>
+              <a:p>
+                <a:pPr algn="ctr"/>
+                <a:endParaRPr lang="en-US"/>
+              </a:p>
+            </p:txBody>
+          </p:sp>
+        </p:grpSp>
+      </p:grpSp>
+      <p:grpSp>
+        <p:nvGrpSpPr>
+          <p:cNvPr id="25" name="Group 24">
+            <a:extLst>
+              <a:ext uri="{FF2B5EF4-FFF2-40B4-BE49-F238E27FC236}">
+                <a16:creationId xmlns:a16="http://schemas.microsoft.com/office/drawing/2014/main" id="{142FA408-7BCC-DF05-6F27-79A4492845B8}"/>
+              </a:ext>
+            </a:extLst>
+          </p:cNvPr>
+          <p:cNvGrpSpPr/>
+          <p:nvPr/>
+        </p:nvGrpSpPr>
+        <p:grpSpPr>
+          <a:xfrm>
+            <a:off x="7915959" y="3479767"/>
+            <a:ext cx="1371600" cy="1371600"/>
+            <a:chOff x="3269727" y="147083"/>
+            <a:chExt cx="1371600" cy="1371600"/>
+          </a:xfrm>
+        </p:grpSpPr>
+        <p:grpSp>
+          <p:nvGrpSpPr>
+            <p:cNvPr id="5" name="Group 4">
+              <a:extLst>
+                <a:ext uri="{FF2B5EF4-FFF2-40B4-BE49-F238E27FC236}">
+                  <a16:creationId xmlns:a16="http://schemas.microsoft.com/office/drawing/2014/main" id="{E99443FE-C927-FA69-C5C9-D9E012607DE6}"/>
+                </a:ext>
+              </a:extLst>
+            </p:cNvPr>
+            <p:cNvGrpSpPr/>
+            <p:nvPr/>
+          </p:nvGrpSpPr>
+          <p:grpSpPr>
+            <a:xfrm rot="1987888" flipH="1">
+              <a:off x="3381689" y="642528"/>
+              <a:ext cx="1147676" cy="521834"/>
+              <a:chOff x="3722644" y="3927567"/>
+              <a:chExt cx="2346446" cy="1066900"/>
+            </a:xfrm>
+          </p:grpSpPr>
+          <p:pic>
+            <p:nvPicPr>
+              <p:cNvPr id="8" name="Picture 8" descr="31 Great Fire Wings Tattoo ideas | wings tattoo, wings, tattoos">
+                <a:extLst>
+                  <a:ext uri="{FF2B5EF4-FFF2-40B4-BE49-F238E27FC236}">
+                    <a16:creationId xmlns:a16="http://schemas.microsoft.com/office/drawing/2014/main" id="{FAE04BAE-F100-4A8D-AB46-33642D8E0CDB}"/>
+                  </a:ext>
+                </a:extLst>
+              </p:cNvPr>
+              <p:cNvPicPr>
+                <a:picLocks noChangeAspect="1" noChangeArrowheads="1"/>
+              </p:cNvPicPr>
+              <p:nvPr/>
+            </p:nvPicPr>
+            <p:blipFill>
+              <a:blip r:embed="rId16">
+                <a:extLst>
+                  <a:ext uri="{28A0092B-C50C-407E-A947-70E740481C1C}">
+                    <a14:useLocalDpi xmlns:a14="http://schemas.microsoft.com/office/drawing/2010/main" val="0"/>
+                  </a:ext>
+                </a:extLst>
+              </a:blip>
+              <a:srcRect/>
+              <a:stretch>
+                <a:fillRect/>
+              </a:stretch>
+            </p:blipFill>
+            <p:spPr bwMode="auto">
+              <a:xfrm>
+                <a:off x="3722644" y="3927567"/>
+                <a:ext cx="2346446" cy="1066900"/>
+              </a:xfrm>
+              <a:prstGeom prst="rect">
+                <a:avLst/>
+              </a:prstGeom>
+              <a:noFill/>
+              <a:extLst>
+                <a:ext uri="{909E8E84-426E-40DD-AFC4-6F175D3DCCD1}">
+                  <a14:hiddenFill xmlns:a14="http://schemas.microsoft.com/office/drawing/2010/main">
+                    <a:solidFill>
+                      <a:srgbClr val="FFFFFF"/>
+                    </a:solidFill>
+                  </a14:hiddenFill>
+                </a:ext>
+              </a:extLst>
+            </p:spPr>
+          </p:pic>
+          <p:pic>
+            <p:nvPicPr>
+              <p:cNvPr id="9" name="Picture 8">
+                <a:extLst>
+                  <a:ext uri="{FF2B5EF4-FFF2-40B4-BE49-F238E27FC236}">
+                    <a16:creationId xmlns:a16="http://schemas.microsoft.com/office/drawing/2014/main" id="{14753C06-BA53-2C98-6C94-8061724D2F5D}"/>
+                  </a:ext>
+                </a:extLst>
+              </p:cNvPr>
+              <p:cNvPicPr>
+                <a:picLocks noChangeAspect="1"/>
+              </p:cNvPicPr>
+              <p:nvPr/>
+            </p:nvPicPr>
+            <p:blipFill>
+              <a:blip r:embed="rId17"/>
+              <a:stretch>
+                <a:fillRect/>
+              </a:stretch>
+            </p:blipFill>
+            <p:spPr>
+              <a:xfrm>
+                <a:off x="4657437" y="4197944"/>
+                <a:ext cx="476859" cy="702740"/>
+              </a:xfrm>
+              <a:prstGeom prst="rect">
+                <a:avLst/>
+              </a:prstGeom>
+            </p:spPr>
+          </p:pic>
+        </p:grpSp>
+        <p:grpSp>
+          <p:nvGrpSpPr>
+            <p:cNvPr id="10" name="Group 9">
+              <a:extLst>
+                <a:ext uri="{FF2B5EF4-FFF2-40B4-BE49-F238E27FC236}">
+                  <a16:creationId xmlns:a16="http://schemas.microsoft.com/office/drawing/2014/main" id="{851254AB-32A5-D2A9-77AC-A70AD9028228}"/>
+                </a:ext>
+              </a:extLst>
+            </p:cNvPr>
+            <p:cNvGrpSpPr/>
+            <p:nvPr/>
+          </p:nvGrpSpPr>
+          <p:grpSpPr>
+            <a:xfrm>
+              <a:off x="3269727" y="147083"/>
+              <a:ext cx="1371600" cy="1371600"/>
+              <a:chOff x="213377" y="483633"/>
+              <a:chExt cx="1371600" cy="1371600"/>
+            </a:xfrm>
+          </p:grpSpPr>
+          <p:sp>
+            <p:nvSpPr>
+              <p:cNvPr id="11" name="Rectangle 10">
+                <a:extLst>
+                  <a:ext uri="{FF2B5EF4-FFF2-40B4-BE49-F238E27FC236}">
+                    <a16:creationId xmlns:a16="http://schemas.microsoft.com/office/drawing/2014/main" id="{F4EC4247-A1F5-5928-45E2-9B26C8A3D759}"/>
+                  </a:ext>
+                </a:extLst>
+              </p:cNvPr>
+              <p:cNvSpPr/>
+              <p:nvPr/>
+            </p:nvSpPr>
+            <p:spPr>
+              <a:xfrm>
+                <a:off x="213377" y="483633"/>
+                <a:ext cx="1371600" cy="1371600"/>
+              </a:xfrm>
+              <a:prstGeom prst="rect">
+                <a:avLst/>
+              </a:prstGeom>
+              <a:noFill/>
+              <a:ln w="76200">
+                <a:solidFill>
+                  <a:schemeClr val="tx1"/>
+                </a:solidFill>
+              </a:ln>
+            </p:spPr>
+            <p:style>
+              <a:lnRef idx="2">
+                <a:schemeClr val="accent1">
+                  <a:shade val="50000"/>
+                </a:schemeClr>
+              </a:lnRef>
+              <a:fillRef idx="1">
+                <a:schemeClr val="accent1"/>
+              </a:fillRef>
+              <a:effectRef idx="0">
+                <a:schemeClr val="accent1"/>
+              </a:effectRef>
+              <a:fontRef idx="minor">
+                <a:schemeClr val="lt1"/>
+              </a:fontRef>
+            </p:style>
+            <p:txBody>
+              <a:bodyPr rtlCol="0" anchor="ctr"/>
+              <a:lstStyle/>
+              <a:p>
+                <a:pPr algn="ctr"/>
+                <a:endParaRPr lang="en-US"/>
+              </a:p>
+            </p:txBody>
+          </p:sp>
+          <p:sp>
+            <p:nvSpPr>
+              <p:cNvPr id="12" name="Hexagon 11">
+                <a:extLst>
+                  <a:ext uri="{FF2B5EF4-FFF2-40B4-BE49-F238E27FC236}">
+                    <a16:creationId xmlns:a16="http://schemas.microsoft.com/office/drawing/2014/main" id="{D80985CE-5B41-5A92-3A21-2B8B6EB147AB}"/>
+                  </a:ext>
+                </a:extLst>
+              </p:cNvPr>
+              <p:cNvSpPr/>
+              <p:nvPr/>
+            </p:nvSpPr>
+            <p:spPr>
+              <a:xfrm>
+                <a:off x="304817" y="705883"/>
+                <a:ext cx="1188720" cy="1097280"/>
+              </a:xfrm>
+              <a:prstGeom prst="hexagon">
+                <a:avLst/>
+              </a:prstGeom>
+              <a:noFill/>
+              <a:ln w="38100" cap="flat" cmpd="sng" algn="ctr">
+                <a:solidFill>
+                  <a:schemeClr val="dk1"/>
+                </a:solidFill>
+                <a:prstDash val="solid"/>
+                <a:round/>
+                <a:headEnd type="none" w="med" len="med"/>
+                <a:tailEnd type="none" w="med" len="med"/>
+              </a:ln>
+            </p:spPr>
+            <p:style>
+              <a:lnRef idx="0">
+                <a:scrgbClr r="0" g="0" b="0"/>
+              </a:lnRef>
+              <a:fillRef idx="0">
+                <a:scrgbClr r="0" g="0" b="0"/>
+              </a:fillRef>
+              <a:effectRef idx="0">
+                <a:scrgbClr r="0" g="0" b="0"/>
+              </a:effectRef>
+              <a:fontRef idx="minor">
+                <a:schemeClr val="dk1"/>
+              </a:fontRef>
+            </p:style>
+            <p:txBody>
+              <a:bodyPr rtlCol="0" anchor="ctr"/>
+              <a:lstStyle/>
+              <a:p>
+                <a:pPr algn="ctr"/>
+                <a:endParaRPr lang="en-US"/>
+              </a:p>
+            </p:txBody>
+          </p:sp>
+        </p:grpSp>
+      </p:grpSp>
+      <p:grpSp>
+        <p:nvGrpSpPr>
+          <p:cNvPr id="26" name="Group 25">
+            <a:extLst>
+              <a:ext uri="{FF2B5EF4-FFF2-40B4-BE49-F238E27FC236}">
+                <a16:creationId xmlns:a16="http://schemas.microsoft.com/office/drawing/2014/main" id="{EA68341B-F86D-A69B-4414-23042B655983}"/>
+              </a:ext>
+            </a:extLst>
+          </p:cNvPr>
+          <p:cNvGrpSpPr/>
+          <p:nvPr/>
+        </p:nvGrpSpPr>
+        <p:grpSpPr>
+          <a:xfrm>
+            <a:off x="1760211" y="3606797"/>
+            <a:ext cx="1371600" cy="1371600"/>
+            <a:chOff x="1760211" y="3606797"/>
+            <a:chExt cx="1371600" cy="1371600"/>
+          </a:xfrm>
+        </p:grpSpPr>
+        <p:grpSp>
+          <p:nvGrpSpPr>
+            <p:cNvPr id="27" name="Group 26">
+              <a:extLst>
+                <a:ext uri="{FF2B5EF4-FFF2-40B4-BE49-F238E27FC236}">
+                  <a16:creationId xmlns:a16="http://schemas.microsoft.com/office/drawing/2014/main" id="{6D8BF590-769C-263E-36F0-47D576CAEA3E}"/>
+                </a:ext>
+              </a:extLst>
+            </p:cNvPr>
+            <p:cNvGrpSpPr/>
+            <p:nvPr/>
+          </p:nvGrpSpPr>
+          <p:grpSpPr>
+            <a:xfrm>
+              <a:off x="1760211" y="3606797"/>
+              <a:ext cx="1371600" cy="1371600"/>
+              <a:chOff x="213377" y="483633"/>
+              <a:chExt cx="1371600" cy="1371600"/>
+            </a:xfrm>
+          </p:grpSpPr>
+          <p:sp>
+            <p:nvSpPr>
+              <p:cNvPr id="59" name="Rectangle 58">
+                <a:extLst>
+                  <a:ext uri="{FF2B5EF4-FFF2-40B4-BE49-F238E27FC236}">
+                    <a16:creationId xmlns:a16="http://schemas.microsoft.com/office/drawing/2014/main" id="{39CAA6FC-9B9B-8855-A749-3DAE06DECA06}"/>
+                  </a:ext>
+                </a:extLst>
+              </p:cNvPr>
+              <p:cNvSpPr/>
+              <p:nvPr/>
+            </p:nvSpPr>
+            <p:spPr>
+              <a:xfrm>
+                <a:off x="213377" y="483633"/>
+                <a:ext cx="1371600" cy="1371600"/>
+              </a:xfrm>
+              <a:prstGeom prst="rect">
+                <a:avLst/>
+              </a:prstGeom>
+              <a:noFill/>
+              <a:ln w="76200">
+                <a:solidFill>
+                  <a:schemeClr val="tx1"/>
+                </a:solidFill>
+              </a:ln>
+            </p:spPr>
+            <p:style>
+              <a:lnRef idx="2">
+                <a:schemeClr val="accent1">
+                  <a:shade val="50000"/>
+                </a:schemeClr>
+              </a:lnRef>
+              <a:fillRef idx="1">
+                <a:schemeClr val="accent1"/>
+              </a:fillRef>
+              <a:effectRef idx="0">
+                <a:schemeClr val="accent1"/>
+              </a:effectRef>
+              <a:fontRef idx="minor">
+                <a:schemeClr val="lt1"/>
+              </a:fontRef>
+            </p:style>
+            <p:txBody>
+              <a:bodyPr rtlCol="0" anchor="ctr"/>
+              <a:lstStyle/>
+              <a:p>
+                <a:pPr algn="ctr"/>
+                <a:endParaRPr lang="en-US"/>
+              </a:p>
+            </p:txBody>
+          </p:sp>
+          <p:sp>
+            <p:nvSpPr>
+              <p:cNvPr id="69" name="Hexagon 68">
+                <a:extLst>
+                  <a:ext uri="{FF2B5EF4-FFF2-40B4-BE49-F238E27FC236}">
+                    <a16:creationId xmlns:a16="http://schemas.microsoft.com/office/drawing/2014/main" id="{FD4F2797-5561-8AF4-6DDB-E9E2336ECC17}"/>
+                  </a:ext>
+                </a:extLst>
+              </p:cNvPr>
+              <p:cNvSpPr/>
+              <p:nvPr/>
+            </p:nvSpPr>
+            <p:spPr>
+              <a:xfrm>
+                <a:off x="304817" y="699533"/>
+                <a:ext cx="1188720" cy="1097280"/>
+              </a:xfrm>
+              <a:prstGeom prst="hexagon">
+                <a:avLst/>
+              </a:prstGeom>
+              <a:noFill/>
+              <a:ln w="38100" cap="flat" cmpd="sng" algn="ctr">
+                <a:solidFill>
+                  <a:schemeClr val="dk1"/>
+                </a:solidFill>
+                <a:prstDash val="solid"/>
+                <a:round/>
+                <a:headEnd type="none" w="med" len="med"/>
+                <a:tailEnd type="none" w="med" len="med"/>
+              </a:ln>
+            </p:spPr>
+            <p:style>
+              <a:lnRef idx="0">
+                <a:scrgbClr r="0" g="0" b="0"/>
+              </a:lnRef>
+              <a:fillRef idx="0">
+                <a:scrgbClr r="0" g="0" b="0"/>
+              </a:fillRef>
+              <a:effectRef idx="0">
+                <a:scrgbClr r="0" g="0" b="0"/>
+              </a:effectRef>
+              <a:fontRef idx="minor">
+                <a:schemeClr val="dk1"/>
+              </a:fontRef>
+            </p:style>
+            <p:txBody>
+              <a:bodyPr rtlCol="0" anchor="ctr"/>
+              <a:lstStyle/>
+              <a:p>
+                <a:pPr algn="ctr"/>
+                <a:endParaRPr lang="en-US"/>
+              </a:p>
+            </p:txBody>
+          </p:sp>
+        </p:grpSp>
+        <p:grpSp>
+          <p:nvGrpSpPr>
+            <p:cNvPr id="28" name="Group 27">
+              <a:extLst>
+                <a:ext uri="{FF2B5EF4-FFF2-40B4-BE49-F238E27FC236}">
+                  <a16:creationId xmlns:a16="http://schemas.microsoft.com/office/drawing/2014/main" id="{428599A2-E0FD-AAED-48DB-2398E03CF629}"/>
+                </a:ext>
+              </a:extLst>
+            </p:cNvPr>
+            <p:cNvGrpSpPr/>
+            <p:nvPr/>
+          </p:nvGrpSpPr>
+          <p:grpSpPr>
+            <a:xfrm>
+              <a:off x="2087305" y="4121928"/>
+              <a:ext cx="702370" cy="722337"/>
+              <a:chOff x="6950179" y="209368"/>
+              <a:chExt cx="2475607" cy="2545983"/>
+            </a:xfrm>
+          </p:grpSpPr>
+          <p:sp>
+            <p:nvSpPr>
+              <p:cNvPr id="30" name="Moon 29">
+                <a:extLst>
+                  <a:ext uri="{FF2B5EF4-FFF2-40B4-BE49-F238E27FC236}">
+                    <a16:creationId xmlns:a16="http://schemas.microsoft.com/office/drawing/2014/main" id="{97BFC123-10EE-BF82-2087-9E11B99FB5FC}"/>
+                  </a:ext>
+                </a:extLst>
+              </p:cNvPr>
+              <p:cNvSpPr/>
+              <p:nvPr/>
+            </p:nvSpPr>
+            <p:spPr>
+              <a:xfrm rot="5400000">
+                <a:off x="7798765" y="1128330"/>
+                <a:ext cx="778435" cy="2475607"/>
+              </a:xfrm>
+              <a:prstGeom prst="moon">
+                <a:avLst>
+                  <a:gd name="adj" fmla="val 87500"/>
+                </a:avLst>
+              </a:prstGeom>
+            </p:spPr>
+            <p:style>
+              <a:lnRef idx="2">
+                <a:schemeClr val="dk1">
+                  <a:shade val="50000"/>
+                </a:schemeClr>
+              </a:lnRef>
+              <a:fillRef idx="1">
+                <a:schemeClr val="dk1"/>
+              </a:fillRef>
+              <a:effectRef idx="0">
+                <a:schemeClr val="dk1"/>
+              </a:effectRef>
+              <a:fontRef idx="minor">
+                <a:schemeClr val="lt1"/>
+              </a:fontRef>
+            </p:style>
+            <p:txBody>
+              <a:bodyPr rtlCol="0" anchor="ctr"/>
+              <a:lstStyle/>
+              <a:p>
+                <a:pPr algn="ctr"/>
+                <a:endParaRPr lang="en-US"/>
+              </a:p>
+            </p:txBody>
+          </p:sp>
+          <p:grpSp>
+            <p:nvGrpSpPr>
+              <p:cNvPr id="31" name="Group 30">
+                <a:extLst>
+                  <a:ext uri="{FF2B5EF4-FFF2-40B4-BE49-F238E27FC236}">
+                    <a16:creationId xmlns:a16="http://schemas.microsoft.com/office/drawing/2014/main" id="{6AE6F4DD-7CA7-52A8-E214-554BD14AB4FF}"/>
+                  </a:ext>
+                </a:extLst>
+              </p:cNvPr>
+              <p:cNvGrpSpPr/>
+              <p:nvPr/>
+            </p:nvGrpSpPr>
+            <p:grpSpPr>
+              <a:xfrm>
+                <a:off x="7048732" y="209368"/>
+                <a:ext cx="2278499" cy="2002129"/>
+                <a:chOff x="3753737" y="1365068"/>
+                <a:chExt cx="2278499" cy="2002129"/>
+              </a:xfrm>
+            </p:grpSpPr>
+            <p:sp>
+              <p:nvSpPr>
+                <p:cNvPr id="32" name="Isosceles Triangle 31">
+                  <a:extLst>
+                    <a:ext uri="{FF2B5EF4-FFF2-40B4-BE49-F238E27FC236}">
+                      <a16:creationId xmlns:a16="http://schemas.microsoft.com/office/drawing/2014/main" id="{2812421A-77AB-4245-3A6B-97BD3404C514}"/>
+                    </a:ext>
+                  </a:extLst>
+                </p:cNvPr>
+                <p:cNvSpPr/>
+                <p:nvPr/>
+              </p:nvSpPr>
+              <p:spPr>
+                <a:xfrm flipH="1">
+                  <a:off x="4555226" y="1365068"/>
+                  <a:ext cx="673630" cy="2002129"/>
+                </a:xfrm>
+                <a:prstGeom prst="triangle">
+                  <a:avLst/>
+                </a:prstGeom>
+              </p:spPr>
+              <p:style>
+                <a:lnRef idx="2">
+                  <a:schemeClr val="dk1">
+                    <a:shade val="50000"/>
+                  </a:schemeClr>
+                </a:lnRef>
+                <a:fillRef idx="1">
+                  <a:schemeClr val="dk1"/>
+                </a:fillRef>
+                <a:effectRef idx="0">
+                  <a:schemeClr val="dk1"/>
+                </a:effectRef>
+                <a:fontRef idx="minor">
+                  <a:schemeClr val="lt1"/>
+                </a:fontRef>
+              </p:style>
+              <p:txBody>
+                <a:bodyPr rtlCol="0" anchor="ctr"/>
+                <a:lstStyle/>
+                <a:p>
+                  <a:pPr algn="ctr"/>
+                  <a:endParaRPr lang="en-US"/>
+                </a:p>
+              </p:txBody>
+            </p:sp>
+            <p:grpSp>
+              <p:nvGrpSpPr>
+                <p:cNvPr id="33" name="Group 32">
+                  <a:extLst>
+                    <a:ext uri="{FF2B5EF4-FFF2-40B4-BE49-F238E27FC236}">
+                      <a16:creationId xmlns:a16="http://schemas.microsoft.com/office/drawing/2014/main" id="{E70352B2-AEE1-C5D1-64C6-7EB48212065B}"/>
+                    </a:ext>
+                  </a:extLst>
+                </p:cNvPr>
+                <p:cNvGrpSpPr/>
+                <p:nvPr/>
+              </p:nvGrpSpPr>
+              <p:grpSpPr>
+                <a:xfrm>
+                  <a:off x="3753737" y="2018274"/>
+                  <a:ext cx="940920" cy="1047698"/>
+                  <a:chOff x="3753737" y="2018274"/>
+                  <a:chExt cx="940920" cy="1047698"/>
+                </a:xfrm>
+              </p:grpSpPr>
+              <p:sp>
+                <p:nvSpPr>
+                  <p:cNvPr id="39" name="Isosceles Triangle 38">
+                    <a:extLst>
+                      <a:ext uri="{FF2B5EF4-FFF2-40B4-BE49-F238E27FC236}">
+                        <a16:creationId xmlns:a16="http://schemas.microsoft.com/office/drawing/2014/main" id="{C7ED3DB7-F105-D459-D670-6ABDB1167459}"/>
+                      </a:ext>
+                    </a:extLst>
+                  </p:cNvPr>
+                  <p:cNvSpPr/>
+                  <p:nvPr/>
+                </p:nvSpPr>
+                <p:spPr>
+                  <a:xfrm rot="16779459">
+                    <a:off x="4296631" y="1899647"/>
+                    <a:ext cx="279400" cy="516653"/>
+                  </a:xfrm>
+                  <a:prstGeom prst="triangle">
+                    <a:avLst/>
+                  </a:prstGeom>
+                </p:spPr>
+                <p:style>
+                  <a:lnRef idx="2">
+                    <a:schemeClr val="dk1">
+                      <a:shade val="50000"/>
+                    </a:schemeClr>
+                  </a:lnRef>
+                  <a:fillRef idx="1">
+                    <a:schemeClr val="dk1"/>
+                  </a:fillRef>
+                  <a:effectRef idx="0">
+                    <a:schemeClr val="dk1"/>
+                  </a:effectRef>
+                  <a:fontRef idx="minor">
+                    <a:schemeClr val="lt1"/>
+                  </a:fontRef>
+                </p:style>
+                <p:txBody>
+                  <a:bodyPr rtlCol="0" anchor="ctr"/>
+                  <a:lstStyle/>
+                  <a:p>
+                    <a:pPr algn="ctr"/>
+                    <a:endParaRPr lang="en-US"/>
+                  </a:p>
+                </p:txBody>
+              </p:sp>
+              <p:sp>
+                <p:nvSpPr>
+                  <p:cNvPr id="53" name="Isosceles Triangle 52">
+                    <a:extLst>
+                      <a:ext uri="{FF2B5EF4-FFF2-40B4-BE49-F238E27FC236}">
+                        <a16:creationId xmlns:a16="http://schemas.microsoft.com/office/drawing/2014/main" id="{27922155-C4C3-AE09-FE2A-1A48EB948066}"/>
+                      </a:ext>
+                    </a:extLst>
+                  </p:cNvPr>
+                  <p:cNvSpPr/>
+                  <p:nvPr/>
+                </p:nvSpPr>
+                <p:spPr>
+                  <a:xfrm rot="16779459">
+                    <a:off x="4023093" y="2517216"/>
+                    <a:ext cx="279400" cy="818112"/>
+                  </a:xfrm>
+                  <a:prstGeom prst="triangle">
+                    <a:avLst/>
+                  </a:prstGeom>
+                </p:spPr>
+                <p:style>
+                  <a:lnRef idx="2">
+                    <a:schemeClr val="dk1">
+                      <a:shade val="50000"/>
+                    </a:schemeClr>
+                  </a:lnRef>
+                  <a:fillRef idx="1">
+                    <a:schemeClr val="dk1"/>
+                  </a:fillRef>
+                  <a:effectRef idx="0">
+                    <a:schemeClr val="dk1"/>
+                  </a:effectRef>
+                  <a:fontRef idx="minor">
+                    <a:schemeClr val="lt1"/>
+                  </a:fontRef>
+                </p:style>
+                <p:txBody>
+                  <a:bodyPr rtlCol="0" anchor="ctr"/>
+                  <a:lstStyle/>
+                  <a:p>
+                    <a:pPr algn="ctr"/>
+                    <a:endParaRPr lang="en-US"/>
+                  </a:p>
+                </p:txBody>
+              </p:sp>
+              <p:sp>
+                <p:nvSpPr>
+                  <p:cNvPr id="57" name="Isosceles Triangle 56">
+                    <a:extLst>
+                      <a:ext uri="{FF2B5EF4-FFF2-40B4-BE49-F238E27FC236}">
+                        <a16:creationId xmlns:a16="http://schemas.microsoft.com/office/drawing/2014/main" id="{DC393E2B-B62C-F385-CC1A-7E20BD27E964}"/>
+                      </a:ext>
+                    </a:extLst>
+                  </p:cNvPr>
+                  <p:cNvSpPr/>
+                  <p:nvPr/>
+                </p:nvSpPr>
+                <p:spPr>
+                  <a:xfrm rot="16779459">
+                    <a:off x="4169431" y="2180356"/>
+                    <a:ext cx="279400" cy="656846"/>
+                  </a:xfrm>
+                  <a:prstGeom prst="triangle">
+                    <a:avLst/>
+                  </a:prstGeom>
+                </p:spPr>
+                <p:style>
+                  <a:lnRef idx="2">
+                    <a:schemeClr val="dk1">
+                      <a:shade val="50000"/>
+                    </a:schemeClr>
+                  </a:lnRef>
+                  <a:fillRef idx="1">
+                    <a:schemeClr val="dk1"/>
+                  </a:fillRef>
+                  <a:effectRef idx="0">
+                    <a:schemeClr val="dk1"/>
+                  </a:effectRef>
+                  <a:fontRef idx="minor">
+                    <a:schemeClr val="lt1"/>
+                  </a:fontRef>
+                </p:style>
+                <p:txBody>
+                  <a:bodyPr rtlCol="0" anchor="ctr"/>
+                  <a:lstStyle/>
+                  <a:p>
+                    <a:pPr algn="ctr"/>
+                    <a:endParaRPr lang="en-US"/>
+                  </a:p>
+                </p:txBody>
+              </p:sp>
+            </p:grpSp>
+            <p:grpSp>
+              <p:nvGrpSpPr>
+                <p:cNvPr id="34" name="Group 33">
+                  <a:extLst>
+                    <a:ext uri="{FF2B5EF4-FFF2-40B4-BE49-F238E27FC236}">
+                      <a16:creationId xmlns:a16="http://schemas.microsoft.com/office/drawing/2014/main" id="{F937A311-E9FC-7421-A07E-8BE031BD46AD}"/>
+                    </a:ext>
+                  </a:extLst>
+                </p:cNvPr>
+                <p:cNvGrpSpPr/>
+                <p:nvPr/>
+              </p:nvGrpSpPr>
+              <p:grpSpPr>
+                <a:xfrm flipH="1">
+                  <a:off x="5091316" y="2020148"/>
+                  <a:ext cx="940920" cy="1047698"/>
+                  <a:chOff x="3753737" y="2018274"/>
+                  <a:chExt cx="940920" cy="1047698"/>
+                </a:xfrm>
+              </p:grpSpPr>
+              <p:sp>
+                <p:nvSpPr>
+                  <p:cNvPr id="35" name="Isosceles Triangle 34">
+                    <a:extLst>
+                      <a:ext uri="{FF2B5EF4-FFF2-40B4-BE49-F238E27FC236}">
+                        <a16:creationId xmlns:a16="http://schemas.microsoft.com/office/drawing/2014/main" id="{6D3B3D7F-28E8-039F-3500-F6FB4DAD55C8}"/>
+                      </a:ext>
+                    </a:extLst>
+                  </p:cNvPr>
+                  <p:cNvSpPr/>
+                  <p:nvPr/>
+                </p:nvSpPr>
+                <p:spPr>
+                  <a:xfrm rot="16779459">
+                    <a:off x="4296631" y="1899647"/>
+                    <a:ext cx="279400" cy="516653"/>
+                  </a:xfrm>
+                  <a:prstGeom prst="triangle">
+                    <a:avLst/>
+                  </a:prstGeom>
+                </p:spPr>
+                <p:style>
+                  <a:lnRef idx="2">
+                    <a:schemeClr val="dk1">
+                      <a:shade val="50000"/>
+                    </a:schemeClr>
+                  </a:lnRef>
+                  <a:fillRef idx="1">
+                    <a:schemeClr val="dk1"/>
+                  </a:fillRef>
+                  <a:effectRef idx="0">
+                    <a:schemeClr val="dk1"/>
+                  </a:effectRef>
+                  <a:fontRef idx="minor">
+                    <a:schemeClr val="lt1"/>
+                  </a:fontRef>
+                </p:style>
+                <p:txBody>
+                  <a:bodyPr rtlCol="0" anchor="ctr"/>
+                  <a:lstStyle/>
+                  <a:p>
+                    <a:pPr algn="ctr"/>
+                    <a:endParaRPr lang="en-US"/>
+                  </a:p>
+                </p:txBody>
+              </p:sp>
+              <p:sp>
+                <p:nvSpPr>
+                  <p:cNvPr id="36" name="Isosceles Triangle 35">
+                    <a:extLst>
+                      <a:ext uri="{FF2B5EF4-FFF2-40B4-BE49-F238E27FC236}">
+                        <a16:creationId xmlns:a16="http://schemas.microsoft.com/office/drawing/2014/main" id="{A4FC4E43-6EB4-8F62-C577-BF073ABC6AB5}"/>
+                      </a:ext>
+                    </a:extLst>
+                  </p:cNvPr>
+                  <p:cNvSpPr/>
+                  <p:nvPr/>
+                </p:nvSpPr>
+                <p:spPr>
+                  <a:xfrm rot="16779459">
+                    <a:off x="4023093" y="2517216"/>
+                    <a:ext cx="279400" cy="818112"/>
+                  </a:xfrm>
+                  <a:prstGeom prst="triangle">
+                    <a:avLst/>
+                  </a:prstGeom>
+                </p:spPr>
+                <p:style>
+                  <a:lnRef idx="2">
+                    <a:schemeClr val="dk1">
+                      <a:shade val="50000"/>
+                    </a:schemeClr>
+                  </a:lnRef>
+                  <a:fillRef idx="1">
+                    <a:schemeClr val="dk1"/>
+                  </a:fillRef>
+                  <a:effectRef idx="0">
+                    <a:schemeClr val="dk1"/>
+                  </a:effectRef>
+                  <a:fontRef idx="minor">
+                    <a:schemeClr val="lt1"/>
+                  </a:fontRef>
+                </p:style>
+                <p:txBody>
+                  <a:bodyPr rtlCol="0" anchor="ctr"/>
+                  <a:lstStyle/>
+                  <a:p>
+                    <a:pPr algn="ctr"/>
+                    <a:endParaRPr lang="en-US"/>
+                  </a:p>
+                </p:txBody>
+              </p:sp>
+              <p:sp>
+                <p:nvSpPr>
+                  <p:cNvPr id="37" name="Isosceles Triangle 36">
+                    <a:extLst>
+                      <a:ext uri="{FF2B5EF4-FFF2-40B4-BE49-F238E27FC236}">
+                        <a16:creationId xmlns:a16="http://schemas.microsoft.com/office/drawing/2014/main" id="{F60F3047-2ED3-F2D4-1AF0-79C74C78DEBA}"/>
+                      </a:ext>
+                    </a:extLst>
+                  </p:cNvPr>
+                  <p:cNvSpPr/>
+                  <p:nvPr/>
+                </p:nvSpPr>
+                <p:spPr>
+                  <a:xfrm rot="16779459">
+                    <a:off x="4169431" y="2180356"/>
+                    <a:ext cx="279400" cy="656846"/>
+                  </a:xfrm>
+                  <a:prstGeom prst="triangle">
+                    <a:avLst/>
+                  </a:prstGeom>
+                </p:spPr>
+                <p:style>
+                  <a:lnRef idx="2">
+                    <a:schemeClr val="dk1">
+                      <a:shade val="50000"/>
+                    </a:schemeClr>
+                  </a:lnRef>
+                  <a:fillRef idx="1">
+                    <a:schemeClr val="dk1"/>
+                  </a:fillRef>
+                  <a:effectRef idx="0">
+                    <a:schemeClr val="dk1"/>
+                  </a:effectRef>
+                  <a:fontRef idx="minor">
+                    <a:schemeClr val="lt1"/>
+                  </a:fontRef>
+                </p:style>
+                <p:txBody>
+                  <a:bodyPr rtlCol="0" anchor="ctr"/>
+                  <a:lstStyle/>
+                  <a:p>
+                    <a:pPr algn="ctr"/>
+                    <a:endParaRPr lang="en-US"/>
+                  </a:p>
+                </p:txBody>
+              </p:sp>
+            </p:grpSp>
+          </p:grpSp>
+        </p:grpSp>
+        <p:pic>
+          <p:nvPicPr>
+            <p:cNvPr id="29" name="Picture 28">
+              <a:extLst>
+                <a:ext uri="{FF2B5EF4-FFF2-40B4-BE49-F238E27FC236}">
+                  <a16:creationId xmlns:a16="http://schemas.microsoft.com/office/drawing/2014/main" id="{F3468353-6C77-6EF7-73B9-D4BF3A29BF54}"/>
+                </a:ext>
+              </a:extLst>
+            </p:cNvPr>
+            <p:cNvPicPr>
+              <a:picLocks noChangeAspect="1"/>
+            </p:cNvPicPr>
+            <p:nvPr/>
+          </p:nvPicPr>
+          <p:blipFill>
+            <a:blip r:embed="rId4"/>
+            <a:stretch>
+              <a:fillRect/>
+            </a:stretch>
+          </p:blipFill>
+          <p:spPr>
+            <a:xfrm rot="1649722">
+              <a:off x="2040384" y="3922804"/>
+              <a:ext cx="230431" cy="497549"/>
+            </a:xfrm>
+            <a:prstGeom prst="rect">
+              <a:avLst/>
+            </a:prstGeom>
+          </p:spPr>
+        </p:pic>
+      </p:grpSp>
+      <p:grpSp>
+        <p:nvGrpSpPr>
+          <p:cNvPr id="70" name="Group 69">
+            <a:extLst>
+              <a:ext uri="{FF2B5EF4-FFF2-40B4-BE49-F238E27FC236}">
+                <a16:creationId xmlns:a16="http://schemas.microsoft.com/office/drawing/2014/main" id="{D4986E56-051F-20D1-945E-E0CCC78CD82D}"/>
+              </a:ext>
+            </a:extLst>
+          </p:cNvPr>
+          <p:cNvGrpSpPr/>
+          <p:nvPr/>
+        </p:nvGrpSpPr>
+        <p:grpSpPr>
+          <a:xfrm>
+            <a:off x="1760211" y="1992864"/>
+            <a:ext cx="1371600" cy="1371600"/>
+            <a:chOff x="1760211" y="1992864"/>
+            <a:chExt cx="1371600" cy="1371600"/>
+          </a:xfrm>
+        </p:grpSpPr>
+        <p:grpSp>
+          <p:nvGrpSpPr>
+            <p:cNvPr id="73" name="Group 72">
+              <a:extLst>
+                <a:ext uri="{FF2B5EF4-FFF2-40B4-BE49-F238E27FC236}">
+                  <a16:creationId xmlns:a16="http://schemas.microsoft.com/office/drawing/2014/main" id="{0BFB0530-239F-3557-73B9-99423420CBA6}"/>
+                </a:ext>
+              </a:extLst>
+            </p:cNvPr>
+            <p:cNvGrpSpPr/>
+            <p:nvPr/>
+          </p:nvGrpSpPr>
+          <p:grpSpPr>
+            <a:xfrm>
+              <a:off x="1760211" y="1992864"/>
+              <a:ext cx="1371600" cy="1371600"/>
+              <a:chOff x="213377" y="483633"/>
+              <a:chExt cx="1371600" cy="1371600"/>
+            </a:xfrm>
+          </p:grpSpPr>
+          <p:sp>
+            <p:nvSpPr>
+              <p:cNvPr id="1033" name="Rectangle 1032">
+                <a:extLst>
+                  <a:ext uri="{FF2B5EF4-FFF2-40B4-BE49-F238E27FC236}">
+                    <a16:creationId xmlns:a16="http://schemas.microsoft.com/office/drawing/2014/main" id="{24803923-C699-6AEC-3F1C-2900D304FD31}"/>
+                  </a:ext>
+                </a:extLst>
+              </p:cNvPr>
+              <p:cNvSpPr/>
+              <p:nvPr/>
+            </p:nvSpPr>
+            <p:spPr>
+              <a:xfrm>
+                <a:off x="213377" y="483633"/>
+                <a:ext cx="1371600" cy="1371600"/>
+              </a:xfrm>
+              <a:prstGeom prst="rect">
+                <a:avLst/>
+              </a:prstGeom>
+              <a:noFill/>
+              <a:ln w="76200">
+                <a:solidFill>
+                  <a:schemeClr val="tx1"/>
+                </a:solidFill>
+              </a:ln>
+            </p:spPr>
+            <p:style>
+              <a:lnRef idx="2">
+                <a:schemeClr val="accent1">
+                  <a:shade val="50000"/>
+                </a:schemeClr>
+              </a:lnRef>
+              <a:fillRef idx="1">
+                <a:schemeClr val="accent1"/>
+              </a:fillRef>
+              <a:effectRef idx="0">
+                <a:schemeClr val="accent1"/>
+              </a:effectRef>
+              <a:fontRef idx="minor">
+                <a:schemeClr val="lt1"/>
+              </a:fontRef>
+            </p:style>
+            <p:txBody>
+              <a:bodyPr rtlCol="0" anchor="ctr"/>
+              <a:lstStyle/>
+              <a:p>
+                <a:pPr algn="ctr"/>
+                <a:endParaRPr lang="en-US"/>
+              </a:p>
+            </p:txBody>
+          </p:sp>
+          <p:sp>
+            <p:nvSpPr>
+              <p:cNvPr id="1034" name="Hexagon 1033">
+                <a:extLst>
+                  <a:ext uri="{FF2B5EF4-FFF2-40B4-BE49-F238E27FC236}">
+                    <a16:creationId xmlns:a16="http://schemas.microsoft.com/office/drawing/2014/main" id="{017309F6-6284-6D83-2690-ACA24B8B12D3}"/>
+                  </a:ext>
+                </a:extLst>
+              </p:cNvPr>
+              <p:cNvSpPr/>
+              <p:nvPr/>
+            </p:nvSpPr>
+            <p:spPr>
+              <a:xfrm>
+                <a:off x="304817" y="699533"/>
+                <a:ext cx="1188720" cy="1097280"/>
+              </a:xfrm>
+              <a:prstGeom prst="hexagon">
+                <a:avLst/>
+              </a:prstGeom>
+              <a:noFill/>
+              <a:ln w="38100" cap="flat" cmpd="sng" algn="ctr">
+                <a:solidFill>
+                  <a:schemeClr val="dk1"/>
+                </a:solidFill>
+                <a:prstDash val="solid"/>
+                <a:round/>
+                <a:headEnd type="none" w="med" len="med"/>
+                <a:tailEnd type="none" w="med" len="med"/>
+              </a:ln>
+            </p:spPr>
+            <p:style>
+              <a:lnRef idx="0">
+                <a:scrgbClr r="0" g="0" b="0"/>
+              </a:lnRef>
+              <a:fillRef idx="0">
+                <a:scrgbClr r="0" g="0" b="0"/>
+              </a:fillRef>
+              <a:effectRef idx="0">
+                <a:scrgbClr r="0" g="0" b="0"/>
+              </a:effectRef>
+              <a:fontRef idx="minor">
+                <a:schemeClr val="dk1"/>
+              </a:fontRef>
+            </p:style>
+            <p:txBody>
+              <a:bodyPr rtlCol="0" anchor="ctr"/>
+              <a:lstStyle/>
+              <a:p>
+                <a:pPr algn="ctr"/>
+                <a:endParaRPr lang="en-US"/>
+              </a:p>
+            </p:txBody>
+          </p:sp>
+        </p:grpSp>
+        <p:grpSp>
+          <p:nvGrpSpPr>
+            <p:cNvPr id="74" name="Group 73">
+              <a:extLst>
+                <a:ext uri="{FF2B5EF4-FFF2-40B4-BE49-F238E27FC236}">
+                  <a16:creationId xmlns:a16="http://schemas.microsoft.com/office/drawing/2014/main" id="{4B744056-2906-A517-3BD1-0988BAB0EB47}"/>
+                </a:ext>
+              </a:extLst>
+            </p:cNvPr>
+            <p:cNvGrpSpPr/>
+            <p:nvPr/>
+          </p:nvGrpSpPr>
+          <p:grpSpPr>
+            <a:xfrm>
+              <a:off x="2060652" y="2720665"/>
+              <a:ext cx="770179" cy="474929"/>
+              <a:chOff x="4366971" y="1518683"/>
+              <a:chExt cx="1632818" cy="1006873"/>
+            </a:xfrm>
+          </p:grpSpPr>
+          <p:sp>
+            <p:nvSpPr>
+              <p:cNvPr id="121" name="Moon 120">
+                <a:extLst>
+                  <a:ext uri="{FF2B5EF4-FFF2-40B4-BE49-F238E27FC236}">
+                    <a16:creationId xmlns:a16="http://schemas.microsoft.com/office/drawing/2014/main" id="{9B7CB9B4-B10A-24DB-1FBC-D00A9F7CDB54}"/>
+                  </a:ext>
+                </a:extLst>
+              </p:cNvPr>
+              <p:cNvSpPr/>
+              <p:nvPr/>
+            </p:nvSpPr>
+            <p:spPr>
+              <a:xfrm rot="5400000">
+                <a:off x="4929704" y="1543410"/>
+                <a:ext cx="469900" cy="1494392"/>
+              </a:xfrm>
+              <a:prstGeom prst="moon">
+                <a:avLst>
+                  <a:gd name="adj" fmla="val 87500"/>
+                </a:avLst>
+              </a:prstGeom>
+            </p:spPr>
+            <p:style>
+              <a:lnRef idx="2">
+                <a:schemeClr val="dk1">
+                  <a:shade val="50000"/>
+                </a:schemeClr>
+              </a:lnRef>
+              <a:fillRef idx="1">
+                <a:schemeClr val="dk1"/>
+              </a:fillRef>
+              <a:effectRef idx="0">
+                <a:schemeClr val="dk1"/>
+              </a:effectRef>
+              <a:fontRef idx="minor">
+                <a:schemeClr val="lt1"/>
+              </a:fontRef>
+            </p:style>
+            <p:txBody>
+              <a:bodyPr rtlCol="0" anchor="ctr"/>
+              <a:lstStyle/>
+              <a:p>
+                <a:pPr algn="ctr"/>
+                <a:endParaRPr lang="en-US"/>
+              </a:p>
+            </p:txBody>
+          </p:sp>
+          <p:grpSp>
+            <p:nvGrpSpPr>
+              <p:cNvPr id="124" name="Group 123">
+                <a:extLst>
+                  <a:ext uri="{FF2B5EF4-FFF2-40B4-BE49-F238E27FC236}">
+                    <a16:creationId xmlns:a16="http://schemas.microsoft.com/office/drawing/2014/main" id="{FB0E657D-3819-3DF6-7561-7D0A3E9D57F8}"/>
+                  </a:ext>
+                </a:extLst>
+              </p:cNvPr>
+              <p:cNvGrpSpPr/>
+              <p:nvPr/>
+            </p:nvGrpSpPr>
+            <p:grpSpPr>
+              <a:xfrm>
+                <a:off x="4366971" y="1555986"/>
+                <a:ext cx="574646" cy="861619"/>
+                <a:chOff x="4398721" y="1536936"/>
+                <a:chExt cx="574646" cy="861619"/>
+              </a:xfrm>
+            </p:grpSpPr>
+            <p:sp>
+              <p:nvSpPr>
+                <p:cNvPr id="1030" name="Isosceles Triangle 1029">
+                  <a:extLst>
+                    <a:ext uri="{FF2B5EF4-FFF2-40B4-BE49-F238E27FC236}">
+                      <a16:creationId xmlns:a16="http://schemas.microsoft.com/office/drawing/2014/main" id="{4F1F9957-051B-7472-2F0A-FE4742BF530F}"/>
+                    </a:ext>
+                  </a:extLst>
+                </p:cNvPr>
+                <p:cNvSpPr/>
+                <p:nvPr/>
+              </p:nvSpPr>
+              <p:spPr>
+                <a:xfrm rot="19469091">
+                  <a:off x="4398721" y="1712755"/>
+                  <a:ext cx="230742" cy="685800"/>
+                </a:xfrm>
+                <a:prstGeom prst="triangle">
+                  <a:avLst/>
+                </a:prstGeom>
+              </p:spPr>
+              <p:style>
+                <a:lnRef idx="2">
+                  <a:schemeClr val="dk1">
+                    <a:shade val="50000"/>
+                  </a:schemeClr>
+                </a:lnRef>
+                <a:fillRef idx="1">
+                  <a:schemeClr val="dk1"/>
+                </a:fillRef>
+                <a:effectRef idx="0">
+                  <a:schemeClr val="dk1"/>
+                </a:effectRef>
+                <a:fontRef idx="minor">
+                  <a:schemeClr val="lt1"/>
+                </a:fontRef>
+              </p:style>
+              <p:txBody>
+                <a:bodyPr rtlCol="0" anchor="ctr"/>
+                <a:lstStyle/>
+                <a:p>
+                  <a:pPr algn="ctr"/>
+                  <a:endParaRPr lang="en-US"/>
+                </a:p>
+              </p:txBody>
+            </p:sp>
+            <p:sp>
+              <p:nvSpPr>
+                <p:cNvPr id="1031" name="Isosceles Triangle 1030">
+                  <a:extLst>
+                    <a:ext uri="{FF2B5EF4-FFF2-40B4-BE49-F238E27FC236}">
+                      <a16:creationId xmlns:a16="http://schemas.microsoft.com/office/drawing/2014/main" id="{9A4006F1-158F-0ED8-AAB2-96CD5328A551}"/>
+                    </a:ext>
+                  </a:extLst>
+                </p:cNvPr>
+                <p:cNvSpPr/>
+                <p:nvPr/>
+              </p:nvSpPr>
+              <p:spPr>
+                <a:xfrm rot="20688119">
+                  <a:off x="4742625" y="1536936"/>
+                  <a:ext cx="230742" cy="685800"/>
+                </a:xfrm>
+                <a:prstGeom prst="triangle">
+                  <a:avLst/>
+                </a:prstGeom>
+              </p:spPr>
+              <p:style>
+                <a:lnRef idx="2">
+                  <a:schemeClr val="dk1">
+                    <a:shade val="50000"/>
+                  </a:schemeClr>
+                </a:lnRef>
+                <a:fillRef idx="1">
+                  <a:schemeClr val="dk1"/>
+                </a:fillRef>
+                <a:effectRef idx="0">
+                  <a:schemeClr val="dk1"/>
+                </a:effectRef>
+                <a:fontRef idx="minor">
+                  <a:schemeClr val="lt1"/>
+                </a:fontRef>
+              </p:style>
+              <p:txBody>
+                <a:bodyPr rtlCol="0" anchor="ctr"/>
+                <a:lstStyle/>
+                <a:p>
+                  <a:pPr algn="ctr"/>
+                  <a:endParaRPr lang="en-US"/>
+                </a:p>
+              </p:txBody>
+            </p:sp>
+          </p:grpSp>
+          <p:grpSp>
+            <p:nvGrpSpPr>
+              <p:cNvPr id="1024" name="Group 1023">
+                <a:extLst>
+                  <a:ext uri="{FF2B5EF4-FFF2-40B4-BE49-F238E27FC236}">
+                    <a16:creationId xmlns:a16="http://schemas.microsoft.com/office/drawing/2014/main" id="{F851F4F9-8505-60D8-1F6D-AC5C0A5B2965}"/>
+                  </a:ext>
+                </a:extLst>
+              </p:cNvPr>
+              <p:cNvGrpSpPr/>
+              <p:nvPr/>
+            </p:nvGrpSpPr>
+            <p:grpSpPr>
+              <a:xfrm flipH="1">
+                <a:off x="5425143" y="1565156"/>
+                <a:ext cx="574646" cy="861619"/>
+                <a:chOff x="4551121" y="1689336"/>
+                <a:chExt cx="574646" cy="861619"/>
+              </a:xfrm>
+            </p:grpSpPr>
+            <p:sp>
+              <p:nvSpPr>
+                <p:cNvPr id="1027" name="Isosceles Triangle 1026">
+                  <a:extLst>
+                    <a:ext uri="{FF2B5EF4-FFF2-40B4-BE49-F238E27FC236}">
+                      <a16:creationId xmlns:a16="http://schemas.microsoft.com/office/drawing/2014/main" id="{3E16D53D-17A5-8EF1-B560-3077B653C2F9}"/>
+                    </a:ext>
+                  </a:extLst>
+                </p:cNvPr>
+                <p:cNvSpPr/>
+                <p:nvPr/>
+              </p:nvSpPr>
+              <p:spPr>
+                <a:xfrm rot="19469091">
+                  <a:off x="4551121" y="1865155"/>
+                  <a:ext cx="230742" cy="685800"/>
+                </a:xfrm>
+                <a:prstGeom prst="triangle">
+                  <a:avLst/>
+                </a:prstGeom>
+              </p:spPr>
+              <p:style>
+                <a:lnRef idx="2">
+                  <a:schemeClr val="dk1">
+                    <a:shade val="50000"/>
+                  </a:schemeClr>
+                </a:lnRef>
+                <a:fillRef idx="1">
+                  <a:schemeClr val="dk1"/>
+                </a:fillRef>
+                <a:effectRef idx="0">
+                  <a:schemeClr val="dk1"/>
+                </a:effectRef>
+                <a:fontRef idx="minor">
+                  <a:schemeClr val="lt1"/>
+                </a:fontRef>
+              </p:style>
+              <p:txBody>
+                <a:bodyPr rtlCol="0" anchor="ctr"/>
+                <a:lstStyle/>
+                <a:p>
+                  <a:pPr algn="ctr"/>
+                  <a:endParaRPr lang="en-US"/>
+                </a:p>
+              </p:txBody>
+            </p:sp>
+            <p:sp>
+              <p:nvSpPr>
+                <p:cNvPr id="1029" name="Isosceles Triangle 1028">
+                  <a:extLst>
+                    <a:ext uri="{FF2B5EF4-FFF2-40B4-BE49-F238E27FC236}">
+                      <a16:creationId xmlns:a16="http://schemas.microsoft.com/office/drawing/2014/main" id="{1E3EE6C4-8985-098E-1941-50978F12B9A6}"/>
+                    </a:ext>
+                  </a:extLst>
+                </p:cNvPr>
+                <p:cNvSpPr/>
+                <p:nvPr/>
+              </p:nvSpPr>
+              <p:spPr>
+                <a:xfrm rot="20688119">
+                  <a:off x="4895025" y="1689336"/>
+                  <a:ext cx="230742" cy="685800"/>
+                </a:xfrm>
+                <a:prstGeom prst="triangle">
+                  <a:avLst/>
+                </a:prstGeom>
+              </p:spPr>
+              <p:style>
+                <a:lnRef idx="2">
+                  <a:schemeClr val="dk1">
+                    <a:shade val="50000"/>
+                  </a:schemeClr>
+                </a:lnRef>
+                <a:fillRef idx="1">
+                  <a:schemeClr val="dk1"/>
+                </a:fillRef>
+                <a:effectRef idx="0">
+                  <a:schemeClr val="dk1"/>
+                </a:effectRef>
+                <a:fontRef idx="minor">
+                  <a:schemeClr val="lt1"/>
+                </a:fontRef>
+              </p:style>
+              <p:txBody>
+                <a:bodyPr rtlCol="0" anchor="ctr"/>
+                <a:lstStyle/>
+                <a:p>
+                  <a:pPr algn="ctr"/>
+                  <a:endParaRPr lang="en-US"/>
+                </a:p>
+              </p:txBody>
+            </p:sp>
+          </p:grpSp>
+          <p:sp>
+            <p:nvSpPr>
+              <p:cNvPr id="1025" name="Isosceles Triangle 1024">
+                <a:extLst>
+                  <a:ext uri="{FF2B5EF4-FFF2-40B4-BE49-F238E27FC236}">
+                    <a16:creationId xmlns:a16="http://schemas.microsoft.com/office/drawing/2014/main" id="{D4EB8725-7F7F-A04E-F4B6-70CD517D2DB7}"/>
+                  </a:ext>
+                </a:extLst>
+              </p:cNvPr>
+              <p:cNvSpPr/>
+              <p:nvPr/>
+            </p:nvSpPr>
+            <p:spPr>
+              <a:xfrm flipH="1">
+                <a:off x="5070860" y="1518683"/>
+                <a:ext cx="230742" cy="685800"/>
+              </a:xfrm>
+              <a:prstGeom prst="triangle">
+                <a:avLst/>
+              </a:prstGeom>
+            </p:spPr>
+            <p:style>
+              <a:lnRef idx="2">
+                <a:schemeClr val="dk1">
+                  <a:shade val="50000"/>
+                </a:schemeClr>
+              </a:lnRef>
+              <a:fillRef idx="1">
+                <a:schemeClr val="dk1"/>
+              </a:fillRef>
+              <a:effectRef idx="0">
+                <a:schemeClr val="dk1"/>
+              </a:effectRef>
+              <a:fontRef idx="minor">
+                <a:schemeClr val="lt1"/>
+              </a:fontRef>
+            </p:style>
+            <p:txBody>
+              <a:bodyPr rtlCol="0" anchor="ctr"/>
+              <a:lstStyle/>
+              <a:p>
+                <a:pPr algn="ctr"/>
+                <a:endParaRPr lang="en-US"/>
+              </a:p>
+            </p:txBody>
+          </p:sp>
+        </p:grpSp>
+        <p:grpSp>
+          <p:nvGrpSpPr>
+            <p:cNvPr id="76" name="Group 75">
+              <a:extLst>
+                <a:ext uri="{FF2B5EF4-FFF2-40B4-BE49-F238E27FC236}">
+                  <a16:creationId xmlns:a16="http://schemas.microsoft.com/office/drawing/2014/main" id="{79B97505-9B1A-6BF7-3FC8-8BD479565B23}"/>
+                </a:ext>
+              </a:extLst>
+            </p:cNvPr>
+            <p:cNvGrpSpPr/>
+            <p:nvPr/>
+          </p:nvGrpSpPr>
+          <p:grpSpPr>
+            <a:xfrm rot="1941197">
+              <a:off x="2146967" y="2269300"/>
+              <a:ext cx="531164" cy="503494"/>
+              <a:chOff x="6409710" y="756261"/>
+              <a:chExt cx="2695643" cy="2555218"/>
+            </a:xfrm>
+          </p:grpSpPr>
+          <p:pic>
+            <p:nvPicPr>
+              <p:cNvPr id="77" name="Picture 2" descr="Lance Icon #332107 - Free Icons Library">
+                <a:extLst>
+                  <a:ext uri="{FF2B5EF4-FFF2-40B4-BE49-F238E27FC236}">
+                    <a16:creationId xmlns:a16="http://schemas.microsoft.com/office/drawing/2014/main" id="{8D4C2D64-D14B-5731-E17A-E46C5ED3B2E8}"/>
+                  </a:ext>
+                </a:extLst>
+              </p:cNvPr>
+              <p:cNvPicPr>
+                <a:picLocks noChangeAspect="1" noChangeArrowheads="1"/>
+              </p:cNvPicPr>
+              <p:nvPr/>
+            </p:nvPicPr>
+            <p:blipFill>
+              <a:blip r:embed="rId12">
+                <a:extLst>
+                  <a:ext uri="{28A0092B-C50C-407E-A947-70E740481C1C}">
+                    <a14:useLocalDpi xmlns:a14="http://schemas.microsoft.com/office/drawing/2010/main" val="0"/>
+                  </a:ext>
+                </a:extLst>
+              </a:blip>
+              <a:srcRect/>
+              <a:stretch>
+                <a:fillRect/>
+              </a:stretch>
+            </p:blipFill>
+            <p:spPr bwMode="auto">
+              <a:xfrm rot="18882740">
+                <a:off x="6774550" y="756261"/>
+                <a:ext cx="1899003" cy="1899003"/>
+              </a:xfrm>
+              <a:prstGeom prst="rect">
+                <a:avLst/>
+              </a:prstGeom>
+              <a:noFill/>
+              <a:extLst>
+                <a:ext uri="{909E8E84-426E-40DD-AFC4-6F175D3DCCD1}">
+                  <a14:hiddenFill xmlns:a14="http://schemas.microsoft.com/office/drawing/2010/main">
+                    <a:solidFill>
+                      <a:srgbClr val="FFFFFF"/>
+                    </a:solidFill>
+                  </a14:hiddenFill>
+                </a:ext>
+              </a:extLst>
+            </p:spPr>
+          </p:pic>
+          <p:pic>
+            <p:nvPicPr>
+              <p:cNvPr id="78" name="Picture 2" descr="Lance Icon #332107 - Free Icons Library">
+                <a:extLst>
+                  <a:ext uri="{FF2B5EF4-FFF2-40B4-BE49-F238E27FC236}">
+                    <a16:creationId xmlns:a16="http://schemas.microsoft.com/office/drawing/2014/main" id="{B3708538-93B1-DAEE-2C47-1D7EE30F9CEF}"/>
+                  </a:ext>
+                </a:extLst>
+              </p:cNvPr>
+              <p:cNvPicPr>
+                <a:picLocks noChangeAspect="1" noChangeArrowheads="1"/>
+              </p:cNvPicPr>
+              <p:nvPr/>
+            </p:nvPicPr>
+            <p:blipFill>
+              <a:blip r:embed="rId12">
+                <a:extLst>
+                  <a:ext uri="{28A0092B-C50C-407E-A947-70E740481C1C}">
+                    <a14:useLocalDpi xmlns:a14="http://schemas.microsoft.com/office/drawing/2010/main" val="0"/>
+                  </a:ext>
+                </a:extLst>
+              </a:blip>
+              <a:srcRect/>
+              <a:stretch>
+                <a:fillRect/>
+              </a:stretch>
+            </p:blipFill>
+            <p:spPr bwMode="auto">
+              <a:xfrm rot="18882740">
+                <a:off x="7206350" y="1027415"/>
+                <a:ext cx="1899003" cy="1899003"/>
+              </a:xfrm>
+              <a:prstGeom prst="rect">
+                <a:avLst/>
+              </a:prstGeom>
+              <a:noFill/>
+              <a:extLst>
+                <a:ext uri="{909E8E84-426E-40DD-AFC4-6F175D3DCCD1}">
+                  <a14:hiddenFill xmlns:a14="http://schemas.microsoft.com/office/drawing/2010/main">
+                    <a:solidFill>
+                      <a:srgbClr val="FFFFFF"/>
+                    </a:solidFill>
+                  </a14:hiddenFill>
+                </a:ext>
+              </a:extLst>
+            </p:spPr>
+          </p:pic>
+          <p:pic>
+            <p:nvPicPr>
+              <p:cNvPr id="79" name="Picture 2" descr="Lance Icon #332107 - Free Icons Library">
+                <a:extLst>
+                  <a:ext uri="{FF2B5EF4-FFF2-40B4-BE49-F238E27FC236}">
+                    <a16:creationId xmlns:a16="http://schemas.microsoft.com/office/drawing/2014/main" id="{D2FF3E68-7F22-06D5-5458-4EC782E9E591}"/>
+                  </a:ext>
+                </a:extLst>
+              </p:cNvPr>
+              <p:cNvPicPr>
+                <a:picLocks noChangeAspect="1" noChangeArrowheads="1"/>
+              </p:cNvPicPr>
+              <p:nvPr/>
+            </p:nvPicPr>
+            <p:blipFill>
+              <a:blip r:embed="rId12">
+                <a:extLst>
+                  <a:ext uri="{28A0092B-C50C-407E-A947-70E740481C1C}">
+                    <a14:useLocalDpi xmlns:a14="http://schemas.microsoft.com/office/drawing/2010/main" val="0"/>
+                  </a:ext>
+                </a:extLst>
+              </a:blip>
+              <a:srcRect/>
+              <a:stretch>
+                <a:fillRect/>
+              </a:stretch>
+            </p:blipFill>
+            <p:spPr bwMode="auto">
+              <a:xfrm rot="18882740">
+                <a:off x="6409710" y="1412476"/>
+                <a:ext cx="1899003" cy="1899003"/>
+              </a:xfrm>
+              <a:prstGeom prst="rect">
+                <a:avLst/>
+              </a:prstGeom>
+              <a:noFill/>
+              <a:extLst>
+                <a:ext uri="{909E8E84-426E-40DD-AFC4-6F175D3DCCD1}">
+                  <a14:hiddenFill xmlns:a14="http://schemas.microsoft.com/office/drawing/2010/main">
+                    <a:solidFill>
+                      <a:srgbClr val="FFFFFF"/>
+                    </a:solidFill>
+                  </a14:hiddenFill>
+                </a:ext>
+              </a:extLst>
+            </p:spPr>
+          </p:pic>
+        </p:grpSp>
+      </p:grpSp>
+      <p:grpSp>
+        <p:nvGrpSpPr>
+          <p:cNvPr id="1035" name="Group 1034">
+            <a:extLst>
+              <a:ext uri="{FF2B5EF4-FFF2-40B4-BE49-F238E27FC236}">
+                <a16:creationId xmlns:a16="http://schemas.microsoft.com/office/drawing/2014/main" id="{F138D58E-64D1-D4FB-6D71-596C02483414}"/>
+              </a:ext>
+            </a:extLst>
+          </p:cNvPr>
+          <p:cNvGrpSpPr/>
+          <p:nvPr/>
+        </p:nvGrpSpPr>
+        <p:grpSpPr>
+          <a:xfrm>
+            <a:off x="3301456" y="3613148"/>
+            <a:ext cx="1371600" cy="1371600"/>
+            <a:chOff x="158299" y="147083"/>
+            <a:chExt cx="1371600" cy="1371600"/>
+          </a:xfrm>
+        </p:grpSpPr>
+        <p:pic>
+          <p:nvPicPr>
+            <p:cNvPr id="1037" name="Picture 2" descr="Mantis Silhouette Design Stock Vector (Royalty Free) 696869110 |  Shutterstock">
+              <a:extLst>
+                <a:ext uri="{FF2B5EF4-FFF2-40B4-BE49-F238E27FC236}">
+                  <a16:creationId xmlns:a16="http://schemas.microsoft.com/office/drawing/2014/main" id="{98B4D5F9-7053-78CE-39F3-F2B3D2FB1966}"/>
+                </a:ext>
+              </a:extLst>
+            </p:cNvPr>
+            <p:cNvPicPr>
+              <a:picLocks noChangeAspect="1" noChangeArrowheads="1"/>
+            </p:cNvPicPr>
+            <p:nvPr/>
+          </p:nvPicPr>
+          <p:blipFill rotWithShape="1">
+            <a:blip r:embed="rId15">
+              <a:extLst>
+                <a:ext uri="{28A0092B-C50C-407E-A947-70E740481C1C}">
+                  <a14:useLocalDpi xmlns:a14="http://schemas.microsoft.com/office/drawing/2010/main" val="0"/>
+                </a:ext>
+              </a:extLst>
+            </a:blip>
+            <a:srcRect l="10735" t="16411" r="13266" b="22473"/>
+            <a:stretch/>
+          </p:blipFill>
+          <p:spPr bwMode="auto">
+            <a:xfrm flipH="1">
+              <a:off x="456976" y="803261"/>
+              <a:ext cx="798847" cy="589755"/>
+            </a:xfrm>
+            <a:prstGeom prst="rect">
+              <a:avLst/>
+            </a:prstGeom>
+            <a:noFill/>
+            <a:extLst>
+              <a:ext uri="{909E8E84-426E-40DD-AFC4-6F175D3DCCD1}">
+                <a14:hiddenFill xmlns:a14="http://schemas.microsoft.com/office/drawing/2010/main">
+                  <a:solidFill>
+                    <a:srgbClr val="FFFFFF"/>
+                  </a:solidFill>
+                </a14:hiddenFill>
+              </a:ext>
+            </a:extLst>
+          </p:spPr>
+        </p:pic>
+        <p:grpSp>
+          <p:nvGrpSpPr>
+            <p:cNvPr id="1039" name="Group 1038">
+              <a:extLst>
+                <a:ext uri="{FF2B5EF4-FFF2-40B4-BE49-F238E27FC236}">
+                  <a16:creationId xmlns:a16="http://schemas.microsoft.com/office/drawing/2014/main" id="{A1FC76FF-C813-849D-751C-96EAA761BF0A}"/>
+                </a:ext>
+              </a:extLst>
+            </p:cNvPr>
+            <p:cNvGrpSpPr/>
+            <p:nvPr/>
+          </p:nvGrpSpPr>
+          <p:grpSpPr>
+            <a:xfrm>
+              <a:off x="158299" y="147083"/>
+              <a:ext cx="1371600" cy="1371600"/>
+              <a:chOff x="213377" y="483633"/>
+              <a:chExt cx="1371600" cy="1371600"/>
+            </a:xfrm>
+          </p:grpSpPr>
+          <p:sp>
+            <p:nvSpPr>
+              <p:cNvPr id="1041" name="Rectangle 1040">
+                <a:extLst>
+                  <a:ext uri="{FF2B5EF4-FFF2-40B4-BE49-F238E27FC236}">
+                    <a16:creationId xmlns:a16="http://schemas.microsoft.com/office/drawing/2014/main" id="{2E67DA94-9F14-4465-5419-CB7F0DD09577}"/>
+                  </a:ext>
+                </a:extLst>
+              </p:cNvPr>
+              <p:cNvSpPr/>
+              <p:nvPr/>
+            </p:nvSpPr>
+            <p:spPr>
+              <a:xfrm>
+                <a:off x="213377" y="483633"/>
+                <a:ext cx="1371600" cy="1371600"/>
+              </a:xfrm>
+              <a:prstGeom prst="rect">
+                <a:avLst/>
+              </a:prstGeom>
+              <a:noFill/>
+              <a:ln w="76200">
+                <a:solidFill>
+                  <a:schemeClr val="tx1"/>
+                </a:solidFill>
+              </a:ln>
+            </p:spPr>
+            <p:style>
+              <a:lnRef idx="2">
+                <a:schemeClr val="accent1">
+                  <a:shade val="50000"/>
+                </a:schemeClr>
+              </a:lnRef>
+              <a:fillRef idx="1">
+                <a:schemeClr val="accent1"/>
+              </a:fillRef>
+              <a:effectRef idx="0">
+                <a:schemeClr val="accent1"/>
+              </a:effectRef>
+              <a:fontRef idx="minor">
+                <a:schemeClr val="lt1"/>
+              </a:fontRef>
+            </p:style>
+            <p:txBody>
+              <a:bodyPr rtlCol="0" anchor="ctr"/>
+              <a:lstStyle/>
+              <a:p>
+                <a:pPr algn="ctr"/>
+                <a:endParaRPr lang="en-US"/>
+              </a:p>
+            </p:txBody>
+          </p:sp>
+          <p:sp>
+            <p:nvSpPr>
+              <p:cNvPr id="1042" name="Hexagon 1041">
+                <a:extLst>
+                  <a:ext uri="{FF2B5EF4-FFF2-40B4-BE49-F238E27FC236}">
+                    <a16:creationId xmlns:a16="http://schemas.microsoft.com/office/drawing/2014/main" id="{794DE14D-81DC-E1AE-CC5E-F7515D4A22BD}"/>
+                  </a:ext>
+                </a:extLst>
+              </p:cNvPr>
+              <p:cNvSpPr/>
+              <p:nvPr/>
+            </p:nvSpPr>
+            <p:spPr>
+              <a:xfrm>
+                <a:off x="304817" y="699533"/>
+                <a:ext cx="1188720" cy="1097280"/>
+              </a:xfrm>
+              <a:prstGeom prst="hexagon">
+                <a:avLst/>
+              </a:prstGeom>
+              <a:noFill/>
+              <a:ln w="38100" cap="flat" cmpd="sng" algn="ctr">
+                <a:solidFill>
+                  <a:schemeClr val="dk1"/>
+                </a:solidFill>
+                <a:prstDash val="solid"/>
+                <a:round/>
+                <a:headEnd type="none" w="med" len="med"/>
+                <a:tailEnd type="none" w="med" len="med"/>
+              </a:ln>
+            </p:spPr>
+            <p:style>
+              <a:lnRef idx="0">
+                <a:scrgbClr r="0" g="0" b="0"/>
+              </a:lnRef>
+              <a:fillRef idx="0">
+                <a:scrgbClr r="0" g="0" b="0"/>
+              </a:fillRef>
+              <a:effectRef idx="0">
+                <a:scrgbClr r="0" g="0" b="0"/>
+              </a:effectRef>
+              <a:fontRef idx="minor">
+                <a:schemeClr val="dk1"/>
+              </a:fontRef>
+            </p:style>
+            <p:txBody>
+              <a:bodyPr rtlCol="0" anchor="ctr"/>
+              <a:lstStyle/>
+              <a:p>
+                <a:pPr algn="ctr"/>
+                <a:endParaRPr lang="en-US"/>
+              </a:p>
+            </p:txBody>
+          </p:sp>
+        </p:grpSp>
+        <p:pic>
+          <p:nvPicPr>
+            <p:cNvPr id="1040" name="Picture 2" descr="Claw, slashes 아이콘 에 Game Icons">
+              <a:extLst>
+                <a:ext uri="{FF2B5EF4-FFF2-40B4-BE49-F238E27FC236}">
+                  <a16:creationId xmlns:a16="http://schemas.microsoft.com/office/drawing/2014/main" id="{CE4728EB-7F37-FFF4-CE09-553D702262EF}"/>
+                </a:ext>
+              </a:extLst>
+            </p:cNvPr>
+            <p:cNvPicPr>
+              <a:picLocks noChangeAspect="1" noChangeArrowheads="1"/>
+            </p:cNvPicPr>
+            <p:nvPr/>
+          </p:nvPicPr>
+          <p:blipFill rotWithShape="1">
+            <a:blip r:embed="rId18">
+              <a:extLst>
+                <a:ext uri="{28A0092B-C50C-407E-A947-70E740481C1C}">
+                  <a14:useLocalDpi xmlns:a14="http://schemas.microsoft.com/office/drawing/2010/main" val="0"/>
+                </a:ext>
+              </a:extLst>
+            </a:blip>
+            <a:srcRect l="5260" t="5109" b="5112"/>
+            <a:stretch/>
+          </p:blipFill>
+          <p:spPr bwMode="auto">
+            <a:xfrm rot="18480546">
+              <a:off x="662583" y="488230"/>
+              <a:ext cx="514391" cy="487445"/>
+            </a:xfrm>
+            <a:prstGeom prst="rect">
+              <a:avLst/>
+            </a:prstGeom>
+            <a:noFill/>
+            <a:extLst>
+              <a:ext uri="{909E8E84-426E-40DD-AFC4-6F175D3DCCD1}">
+                <a14:hiddenFill xmlns:a14="http://schemas.microsoft.com/office/drawing/2010/main">
+                  <a:solidFill>
+                    <a:srgbClr val="FFFFFF"/>
+                  </a:solidFill>
+                </a14:hiddenFill>
+              </a:ext>
+            </a:extLst>
+          </p:spPr>
+        </p:pic>
+      </p:grpSp>
+      <p:grpSp>
+        <p:nvGrpSpPr>
+          <p:cNvPr id="1043" name="Group 1042">
+            <a:extLst>
+              <a:ext uri="{FF2B5EF4-FFF2-40B4-BE49-F238E27FC236}">
+                <a16:creationId xmlns:a16="http://schemas.microsoft.com/office/drawing/2014/main" id="{D3FC417A-6A12-3680-FAAE-55093D591A98}"/>
+              </a:ext>
+            </a:extLst>
+          </p:cNvPr>
+          <p:cNvGrpSpPr/>
+          <p:nvPr/>
+        </p:nvGrpSpPr>
+        <p:grpSpPr>
+          <a:xfrm>
+            <a:off x="9383774" y="1977377"/>
+            <a:ext cx="1371600" cy="1371600"/>
+            <a:chOff x="1696069" y="136579"/>
+            <a:chExt cx="1371600" cy="1371600"/>
+          </a:xfrm>
+        </p:grpSpPr>
+        <p:pic>
+          <p:nvPicPr>
+            <p:cNvPr id="1044" name="Picture 1043">
+              <a:extLst>
+                <a:ext uri="{FF2B5EF4-FFF2-40B4-BE49-F238E27FC236}">
+                  <a16:creationId xmlns:a16="http://schemas.microsoft.com/office/drawing/2014/main" id="{FDDE8CB8-4A3C-FB27-F8C5-AB4EF3FC888E}"/>
+                </a:ext>
+              </a:extLst>
+            </p:cNvPr>
+            <p:cNvPicPr>
+              <a:picLocks noChangeAspect="1"/>
+            </p:cNvPicPr>
+            <p:nvPr/>
+          </p:nvPicPr>
+          <p:blipFill>
+            <a:blip r:embed="rId19"/>
+            <a:stretch>
+              <a:fillRect/>
+            </a:stretch>
+          </p:blipFill>
+          <p:spPr>
+            <a:xfrm flipH="1">
+              <a:off x="2199689" y="841347"/>
+              <a:ext cx="639120" cy="513844"/>
+            </a:xfrm>
+            <a:prstGeom prst="rect">
+              <a:avLst/>
+            </a:prstGeom>
+          </p:spPr>
+        </p:pic>
+        <p:pic>
+          <p:nvPicPr>
+            <p:cNvPr id="1045" name="Picture 1044">
+              <a:extLst>
+                <a:ext uri="{FF2B5EF4-FFF2-40B4-BE49-F238E27FC236}">
+                  <a16:creationId xmlns:a16="http://schemas.microsoft.com/office/drawing/2014/main" id="{CE5F710B-1003-7266-EF7B-BE0D4D026D60}"/>
+                </a:ext>
+              </a:extLst>
+            </p:cNvPr>
+            <p:cNvPicPr>
+              <a:picLocks noChangeAspect="1"/>
+            </p:cNvPicPr>
+            <p:nvPr/>
+          </p:nvPicPr>
+          <p:blipFill>
+            <a:blip r:embed="rId11"/>
+            <a:stretch>
+              <a:fillRect/>
+            </a:stretch>
+          </p:blipFill>
+          <p:spPr>
+            <a:xfrm>
+              <a:off x="2009906" y="423993"/>
+              <a:ext cx="554843" cy="508021"/>
+            </a:xfrm>
+            <a:prstGeom prst="rect">
+              <a:avLst/>
+            </a:prstGeom>
+          </p:spPr>
+        </p:pic>
+        <p:grpSp>
+          <p:nvGrpSpPr>
+            <p:cNvPr id="1046" name="Group 1045">
+              <a:extLst>
+                <a:ext uri="{FF2B5EF4-FFF2-40B4-BE49-F238E27FC236}">
+                  <a16:creationId xmlns:a16="http://schemas.microsoft.com/office/drawing/2014/main" id="{D826F50A-3D12-1FA4-BFB3-FEC22C02D334}"/>
+                </a:ext>
+              </a:extLst>
+            </p:cNvPr>
+            <p:cNvGrpSpPr/>
+            <p:nvPr/>
+          </p:nvGrpSpPr>
+          <p:grpSpPr>
+            <a:xfrm>
+              <a:off x="1696069" y="136579"/>
+              <a:ext cx="1371600" cy="1371600"/>
+              <a:chOff x="213377" y="483633"/>
+              <a:chExt cx="1371600" cy="1371600"/>
+            </a:xfrm>
+          </p:grpSpPr>
+          <p:sp>
+            <p:nvSpPr>
+              <p:cNvPr id="1047" name="Rectangle 1046">
+                <a:extLst>
+                  <a:ext uri="{FF2B5EF4-FFF2-40B4-BE49-F238E27FC236}">
+                    <a16:creationId xmlns:a16="http://schemas.microsoft.com/office/drawing/2014/main" id="{DFE67C7A-6E45-EA34-1609-BD01916F6507}"/>
+                  </a:ext>
+                </a:extLst>
+              </p:cNvPr>
+              <p:cNvSpPr/>
+              <p:nvPr/>
+            </p:nvSpPr>
+            <p:spPr>
+              <a:xfrm>
+                <a:off x="213377" y="483633"/>
+                <a:ext cx="1371600" cy="1371600"/>
+              </a:xfrm>
+              <a:prstGeom prst="rect">
+                <a:avLst/>
+              </a:prstGeom>
+              <a:noFill/>
+              <a:ln w="76200">
+                <a:solidFill>
+                  <a:schemeClr val="tx1"/>
+                </a:solidFill>
+              </a:ln>
+            </p:spPr>
+            <p:style>
+              <a:lnRef idx="2">
+                <a:schemeClr val="accent1">
+                  <a:shade val="50000"/>
+                </a:schemeClr>
+              </a:lnRef>
+              <a:fillRef idx="1">
+                <a:schemeClr val="accent1"/>
+              </a:fillRef>
+              <a:effectRef idx="0">
+                <a:schemeClr val="accent1"/>
+              </a:effectRef>
+              <a:fontRef idx="minor">
+                <a:schemeClr val="lt1"/>
+              </a:fontRef>
+            </p:style>
+            <p:txBody>
+              <a:bodyPr rtlCol="0" anchor="ctr"/>
+              <a:lstStyle/>
+              <a:p>
+                <a:pPr algn="ctr"/>
+                <a:endParaRPr lang="en-US"/>
+              </a:p>
+            </p:txBody>
+          </p:sp>
+          <p:sp>
+            <p:nvSpPr>
+              <p:cNvPr id="1048" name="Hexagon 1047">
+                <a:extLst>
+                  <a:ext uri="{FF2B5EF4-FFF2-40B4-BE49-F238E27FC236}">
+                    <a16:creationId xmlns:a16="http://schemas.microsoft.com/office/drawing/2014/main" id="{0133C1A9-D5E3-EF68-1043-C75EB99F0181}"/>
+                  </a:ext>
+                </a:extLst>
+              </p:cNvPr>
+              <p:cNvSpPr/>
+              <p:nvPr/>
+            </p:nvSpPr>
+            <p:spPr>
+              <a:xfrm>
+                <a:off x="304817" y="705883"/>
+                <a:ext cx="1188720" cy="1097280"/>
+              </a:xfrm>
+              <a:prstGeom prst="hexagon">
+                <a:avLst/>
+              </a:prstGeom>
+              <a:noFill/>
+              <a:ln w="38100" cap="flat" cmpd="sng" algn="ctr">
+                <a:solidFill>
+                  <a:schemeClr val="dk1"/>
+                </a:solidFill>
+                <a:prstDash val="solid"/>
+                <a:round/>
+                <a:headEnd type="none" w="med" len="med"/>
+                <a:tailEnd type="none" w="med" len="med"/>
+              </a:ln>
+            </p:spPr>
+            <p:style>
+              <a:lnRef idx="0">
+                <a:scrgbClr r="0" g="0" b="0"/>
+              </a:lnRef>
+              <a:fillRef idx="0">
+                <a:scrgbClr r="0" g="0" b="0"/>
+              </a:fillRef>
+              <a:effectRef idx="0">
+                <a:scrgbClr r="0" g="0" b="0"/>
               </a:effectRef>
               <a:fontRef idx="minor">
                 <a:schemeClr val="dk1"/>
@@ -35412,102 +36196,110 @@
           <a:chExt cx="0" cy="0"/>
         </a:xfrm>
       </p:grpSpPr>
-      <p:pic>
-        <p:nvPicPr>
-          <p:cNvPr id="60" name="Picture 2" descr="Mantis Silhouette Design Stock Vector (Royalty Free) 696869110 |  Shutterstock">
+      <p:grpSp>
+        <p:nvGrpSpPr>
+          <p:cNvPr id="9" name="Group 8">
             <a:extLst>
               <a:ext uri="{FF2B5EF4-FFF2-40B4-BE49-F238E27FC236}">
-                <a16:creationId xmlns:a16="http://schemas.microsoft.com/office/drawing/2014/main" id="{C595E614-21C8-AF74-3CA3-2615FCDE53BE}"/>
+                <a16:creationId xmlns:a16="http://schemas.microsoft.com/office/drawing/2014/main" id="{5008BB9C-DFC9-BBD7-0039-3D52842CE693}"/>
               </a:ext>
             </a:extLst>
           </p:cNvPr>
-          <p:cNvPicPr>
-            <a:picLocks noChangeAspect="1" noChangeArrowheads="1"/>
-          </p:cNvPicPr>
+          <p:cNvGrpSpPr/>
           <p:nvPr/>
-        </p:nvPicPr>
-        <p:blipFill rotWithShape="1">
-          <a:blip r:embed="rId2">
+        </p:nvGrpSpPr>
+        <p:grpSpPr>
+          <a:xfrm rot="1987888" flipH="1">
+            <a:off x="3381689" y="642528"/>
+            <a:ext cx="1147676" cy="521834"/>
+            <a:chOff x="3722644" y="3927567"/>
+            <a:chExt cx="2346446" cy="1066900"/>
+          </a:xfrm>
+        </p:grpSpPr>
+        <p:pic>
+          <p:nvPicPr>
+            <p:cNvPr id="10" name="Picture 8" descr="31 Great Fire Wings Tattoo ideas | wings tattoo, wings, tattoos">
+              <a:extLst>
+                <a:ext uri="{FF2B5EF4-FFF2-40B4-BE49-F238E27FC236}">
+                  <a16:creationId xmlns:a16="http://schemas.microsoft.com/office/drawing/2014/main" id="{5695BA79-0843-B25B-CBEB-3724A8C8CF60}"/>
+                </a:ext>
+              </a:extLst>
+            </p:cNvPr>
+            <p:cNvPicPr>
+              <a:picLocks noChangeAspect="1" noChangeArrowheads="1"/>
+            </p:cNvPicPr>
+            <p:nvPr/>
+          </p:nvPicPr>
+          <p:blipFill>
+            <a:blip r:embed="rId2">
+              <a:extLst>
+                <a:ext uri="{28A0092B-C50C-407E-A947-70E740481C1C}">
+                  <a14:useLocalDpi xmlns:a14="http://schemas.microsoft.com/office/drawing/2010/main" val="0"/>
+                </a:ext>
+              </a:extLst>
+            </a:blip>
+            <a:srcRect/>
+            <a:stretch>
+              <a:fillRect/>
+            </a:stretch>
+          </p:blipFill>
+          <p:spPr bwMode="auto">
+            <a:xfrm>
+              <a:off x="3722644" y="3927567"/>
+              <a:ext cx="2346446" cy="1066900"/>
+            </a:xfrm>
+            <a:prstGeom prst="rect">
+              <a:avLst/>
+            </a:prstGeom>
+            <a:noFill/>
             <a:extLst>
-              <a:ext uri="{28A0092B-C50C-407E-A947-70E740481C1C}">
-                <a14:useLocalDpi xmlns:a14="http://schemas.microsoft.com/office/drawing/2010/main" val="0"/>
+              <a:ext uri="{909E8E84-426E-40DD-AFC4-6F175D3DCCD1}">
+                <a14:hiddenFill xmlns:a14="http://schemas.microsoft.com/office/drawing/2010/main">
+                  <a:solidFill>
+                    <a:srgbClr val="FFFFFF"/>
+                  </a:solidFill>
+                </a14:hiddenFill>
               </a:ext>
             </a:extLst>
-          </a:blip>
-          <a:srcRect l="10735" t="16411" r="13266" b="22473"/>
-          <a:stretch/>
-        </p:blipFill>
-        <p:spPr bwMode="auto">
-          <a:xfrm flipH="1">
-            <a:off x="1989567" y="734957"/>
-            <a:ext cx="798847" cy="589755"/>
-          </a:xfrm>
-          <a:prstGeom prst="rect">
-            <a:avLst/>
-          </a:prstGeom>
-          <a:noFill/>
-          <a:extLst>
-            <a:ext uri="{909E8E84-426E-40DD-AFC4-6F175D3DCCD1}">
-              <a14:hiddenFill xmlns:a14="http://schemas.microsoft.com/office/drawing/2010/main">
-                <a:solidFill>
-                  <a:srgbClr val="FFFFFF"/>
-                </a:solidFill>
-              </a14:hiddenFill>
-            </a:ext>
-          </a:extLst>
-        </p:spPr>
-      </p:pic>
-      <p:pic>
-        <p:nvPicPr>
-          <p:cNvPr id="55" name="Picture 2" descr="Mantis Silhouette Design Stock Vector (Royalty Free) 696869110 |  Shutterstock">
+          </p:spPr>
+        </p:pic>
+        <p:pic>
+          <p:nvPicPr>
+            <p:cNvPr id="11" name="Picture 10">
+              <a:extLst>
+                <a:ext uri="{FF2B5EF4-FFF2-40B4-BE49-F238E27FC236}">
+                  <a16:creationId xmlns:a16="http://schemas.microsoft.com/office/drawing/2014/main" id="{F82F0D3C-C8CB-7FD2-0CE4-E8D71B78E950}"/>
+                </a:ext>
+              </a:extLst>
+            </p:cNvPr>
+            <p:cNvPicPr>
+              <a:picLocks noChangeAspect="1"/>
+            </p:cNvPicPr>
+            <p:nvPr/>
+          </p:nvPicPr>
+          <p:blipFill>
+            <a:blip r:embed="rId3"/>
+            <a:stretch>
+              <a:fillRect/>
+            </a:stretch>
+          </p:blipFill>
+          <p:spPr>
+            <a:xfrm>
+              <a:off x="4657437" y="4197944"/>
+              <a:ext cx="476859" cy="702740"/>
+            </a:xfrm>
+            <a:prstGeom prst="rect">
+              <a:avLst/>
+            </a:prstGeom>
+          </p:spPr>
+        </p:pic>
+      </p:grpSp>
+      <p:grpSp>
+        <p:nvGrpSpPr>
+          <p:cNvPr id="13" name="Group 12">
             <a:extLst>
               <a:ext uri="{FF2B5EF4-FFF2-40B4-BE49-F238E27FC236}">
-                <a16:creationId xmlns:a16="http://schemas.microsoft.com/office/drawing/2014/main" id="{87471417-172C-894A-4863-F4044117D8E9}"/>
-              </a:ext>
-            </a:extLst>
-          </p:cNvPr>
-          <p:cNvPicPr>
-            <a:picLocks noChangeAspect="1" noChangeArrowheads="1"/>
-          </p:cNvPicPr>
-          <p:nvPr/>
-        </p:nvPicPr>
-        <p:blipFill rotWithShape="1">
-          <a:blip r:embed="rId2">
-            <a:extLst>
-              <a:ext uri="{28A0092B-C50C-407E-A947-70E740481C1C}">
-                <a14:useLocalDpi xmlns:a14="http://schemas.microsoft.com/office/drawing/2010/main" val="0"/>
-              </a:ext>
-            </a:extLst>
-          </a:blip>
-          <a:srcRect l="10735" t="16411" r="13266" b="22473"/>
-          <a:stretch/>
-        </p:blipFill>
-        <p:spPr bwMode="auto">
-          <a:xfrm flipH="1">
-            <a:off x="454426" y="616745"/>
-            <a:ext cx="798847" cy="589755"/>
-          </a:xfrm>
-          <a:prstGeom prst="rect">
-            <a:avLst/>
-          </a:prstGeom>
-          <a:noFill/>
-          <a:extLst>
-            <a:ext uri="{909E8E84-426E-40DD-AFC4-6F175D3DCCD1}">
-              <a14:hiddenFill xmlns:a14="http://schemas.microsoft.com/office/drawing/2010/main">
-                <a:solidFill>
-                  <a:srgbClr val="FFFFFF"/>
-                </a:solidFill>
-              </a14:hiddenFill>
-            </a:ext>
-          </a:extLst>
-        </p:spPr>
-      </p:pic>
-      <p:grpSp>
-        <p:nvGrpSpPr>
-          <p:cNvPr id="41" name="Group 40">
-            <a:extLst>
-              <a:ext uri="{FF2B5EF4-FFF2-40B4-BE49-F238E27FC236}">
-                <a16:creationId xmlns:a16="http://schemas.microsoft.com/office/drawing/2014/main" id="{BD5A39ED-286D-3F33-BF59-7EB8458F8A92}"/>
+                <a16:creationId xmlns:a16="http://schemas.microsoft.com/office/drawing/2014/main" id="{05E121CC-B119-06B3-A52A-BA851A8EAD3B}"/>
               </a:ext>
             </a:extLst>
           </p:cNvPr>
@@ -35516,7 +36308,7 @@
         </p:nvGrpSpPr>
         <p:grpSpPr>
           <a:xfrm>
-            <a:off x="158299" y="147083"/>
+            <a:off x="3269727" y="147083"/>
             <a:ext cx="1371600" cy="1371600"/>
             <a:chOff x="213377" y="483633"/>
             <a:chExt cx="1371600" cy="1371600"/>
@@ -35524,10 +36316,10 @@
         </p:grpSpPr>
         <p:sp>
           <p:nvSpPr>
-            <p:cNvPr id="42" name="Rectangle 41">
-              <a:extLst>
-                <a:ext uri="{FF2B5EF4-FFF2-40B4-BE49-F238E27FC236}">
-                  <a16:creationId xmlns:a16="http://schemas.microsoft.com/office/drawing/2014/main" id="{F55E4EFD-A40A-C2EC-924D-ED00A08530B8}"/>
+            <p:cNvPr id="14" name="Rectangle 13">
+              <a:extLst>
+                <a:ext uri="{FF2B5EF4-FFF2-40B4-BE49-F238E27FC236}">
+                  <a16:creationId xmlns:a16="http://schemas.microsoft.com/office/drawing/2014/main" id="{F477A4F4-2A7E-D239-59F9-0935C449E265}"/>
                 </a:ext>
               </a:extLst>
             </p:cNvPr>
@@ -35576,10 +36368,10 @@
         </p:sp>
         <p:sp>
           <p:nvSpPr>
-            <p:cNvPr id="43" name="Hexagon 42">
-              <a:extLst>
-                <a:ext uri="{FF2B5EF4-FFF2-40B4-BE49-F238E27FC236}">
-                  <a16:creationId xmlns:a16="http://schemas.microsoft.com/office/drawing/2014/main" id="{A0E811B9-07C5-32B6-2099-B4B31077252E}"/>
+            <p:cNvPr id="15" name="Hexagon 14">
+              <a:extLst>
+                <a:ext uri="{FF2B5EF4-FFF2-40B4-BE49-F238E27FC236}">
+                  <a16:creationId xmlns:a16="http://schemas.microsoft.com/office/drawing/2014/main" id="{09DCD5C0-BD56-EC2D-0EAF-7296E340D8A8}"/>
                 </a:ext>
               </a:extLst>
             </p:cNvPr>
@@ -35588,7 +36380,7 @@
           </p:nvSpPr>
           <p:spPr>
             <a:xfrm>
-              <a:off x="304817" y="699533"/>
+              <a:off x="304817" y="705883"/>
               <a:ext cx="1188720" cy="1097280"/>
             </a:xfrm>
             <a:prstGeom prst="hexagon">
@@ -35631,10 +36423,10 @@
       </p:grpSp>
       <p:grpSp>
         <p:nvGrpSpPr>
-          <p:cNvPr id="44" name="Group 43">
+          <p:cNvPr id="89" name="Group 88">
             <a:extLst>
               <a:ext uri="{FF2B5EF4-FFF2-40B4-BE49-F238E27FC236}">
-                <a16:creationId xmlns:a16="http://schemas.microsoft.com/office/drawing/2014/main" id="{E752F04A-6491-0A7F-EE9C-62724EA95B0A}"/>
+                <a16:creationId xmlns:a16="http://schemas.microsoft.com/office/drawing/2014/main" id="{1D8CD6AD-7F18-171C-61FE-E87A3D31FF6D}"/>
               </a:ext>
             </a:extLst>
           </p:cNvPr>
@@ -35643,371 +36435,18 @@
         </p:nvGrpSpPr>
         <p:grpSpPr>
           <a:xfrm>
-            <a:off x="1726749" y="147083"/>
+            <a:off x="6311847" y="155547"/>
             <a:ext cx="1371600" cy="1371600"/>
-            <a:chOff x="213377" y="483633"/>
+            <a:chOff x="1760211" y="3606797"/>
             <a:chExt cx="1371600" cy="1371600"/>
           </a:xfrm>
         </p:grpSpPr>
-        <p:sp>
-          <p:nvSpPr>
-            <p:cNvPr id="45" name="Rectangle 44">
-              <a:extLst>
-                <a:ext uri="{FF2B5EF4-FFF2-40B4-BE49-F238E27FC236}">
-                  <a16:creationId xmlns:a16="http://schemas.microsoft.com/office/drawing/2014/main" id="{B58F6939-C302-91EC-F03E-95A2D7F1356B}"/>
-                </a:ext>
-              </a:extLst>
-            </p:cNvPr>
-            <p:cNvSpPr/>
-            <p:nvPr/>
-          </p:nvSpPr>
-          <p:spPr>
-            <a:xfrm>
-              <a:off x="213377" y="483633"/>
-              <a:ext cx="1371600" cy="1371600"/>
-            </a:xfrm>
-            <a:prstGeom prst="rect">
-              <a:avLst/>
-            </a:prstGeom>
-            <a:noFill/>
-            <a:ln w="76200">
-              <a:solidFill>
-                <a:schemeClr val="tx1"/>
-              </a:solidFill>
-            </a:ln>
-          </p:spPr>
-          <p:style>
-            <a:lnRef idx="2">
-              <a:schemeClr val="accent1">
-                <a:shade val="50000"/>
-              </a:schemeClr>
-            </a:lnRef>
-            <a:fillRef idx="1">
-              <a:schemeClr val="accent1"/>
-            </a:fillRef>
-            <a:effectRef idx="0">
-              <a:schemeClr val="accent1"/>
-            </a:effectRef>
-            <a:fontRef idx="minor">
-              <a:schemeClr val="lt1"/>
-            </a:fontRef>
-          </p:style>
-          <p:txBody>
-            <a:bodyPr rtlCol="0" anchor="ctr"/>
-            <a:lstStyle/>
-            <a:p>
-              <a:pPr algn="ctr"/>
-              <a:endParaRPr lang="en-US"/>
-            </a:p>
-          </p:txBody>
-        </p:sp>
-        <p:sp>
-          <p:nvSpPr>
-            <p:cNvPr id="46" name="Hexagon 45">
-              <a:extLst>
-                <a:ext uri="{FF2B5EF4-FFF2-40B4-BE49-F238E27FC236}">
-                  <a16:creationId xmlns:a16="http://schemas.microsoft.com/office/drawing/2014/main" id="{1C8B4954-50D7-11C0-E16F-8D286D1F98EC}"/>
-                </a:ext>
-              </a:extLst>
-            </p:cNvPr>
-            <p:cNvSpPr/>
-            <p:nvPr/>
-          </p:nvSpPr>
-          <p:spPr>
-            <a:xfrm>
-              <a:off x="304817" y="699533"/>
-              <a:ext cx="1188720" cy="1097280"/>
-            </a:xfrm>
-            <a:prstGeom prst="hexagon">
-              <a:avLst/>
-            </a:prstGeom>
-            <a:noFill/>
-            <a:ln w="38100" cap="flat" cmpd="sng" algn="ctr">
-              <a:solidFill>
-                <a:schemeClr val="dk1"/>
-              </a:solidFill>
-              <a:prstDash val="solid"/>
-              <a:round/>
-              <a:headEnd type="none" w="med" len="med"/>
-              <a:tailEnd type="none" w="med" len="med"/>
-            </a:ln>
-          </p:spPr>
-          <p:style>
-            <a:lnRef idx="0">
-              <a:scrgbClr r="0" g="0" b="0"/>
-            </a:lnRef>
-            <a:fillRef idx="0">
-              <a:scrgbClr r="0" g="0" b="0"/>
-            </a:fillRef>
-            <a:effectRef idx="0">
-              <a:scrgbClr r="0" g="0" b="0"/>
-            </a:effectRef>
-            <a:fontRef idx="minor">
-              <a:schemeClr val="dk1"/>
-            </a:fontRef>
-          </p:style>
-          <p:txBody>
-            <a:bodyPr rtlCol="0" anchor="ctr"/>
-            <a:lstStyle/>
-            <a:p>
-              <a:pPr algn="ctr"/>
-              <a:endParaRPr lang="en-US"/>
-            </a:p>
-          </p:txBody>
-        </p:sp>
-      </p:grpSp>
-      <p:grpSp>
-        <p:nvGrpSpPr>
-          <p:cNvPr id="47" name="Group 46">
-            <a:extLst>
-              <a:ext uri="{FF2B5EF4-FFF2-40B4-BE49-F238E27FC236}">
-                <a16:creationId xmlns:a16="http://schemas.microsoft.com/office/drawing/2014/main" id="{7EB71830-93DF-CF53-DB55-593B830D22FE}"/>
-              </a:ext>
-            </a:extLst>
-          </p:cNvPr>
-          <p:cNvGrpSpPr/>
-          <p:nvPr/>
-        </p:nvGrpSpPr>
-        <p:grpSpPr>
-          <a:xfrm>
-            <a:off x="155308" y="1761016"/>
-            <a:ext cx="1371600" cy="1371600"/>
-            <a:chOff x="213377" y="483633"/>
-            <a:chExt cx="1371600" cy="1371600"/>
-          </a:xfrm>
-        </p:grpSpPr>
-        <p:sp>
-          <p:nvSpPr>
-            <p:cNvPr id="48" name="Rectangle 47">
-              <a:extLst>
-                <a:ext uri="{FF2B5EF4-FFF2-40B4-BE49-F238E27FC236}">
-                  <a16:creationId xmlns:a16="http://schemas.microsoft.com/office/drawing/2014/main" id="{37DF4839-20A5-417F-9D2D-6BF2A2967771}"/>
-                </a:ext>
-              </a:extLst>
-            </p:cNvPr>
-            <p:cNvSpPr/>
-            <p:nvPr/>
-          </p:nvSpPr>
-          <p:spPr>
-            <a:xfrm>
-              <a:off x="213377" y="483633"/>
-              <a:ext cx="1371600" cy="1371600"/>
-            </a:xfrm>
-            <a:prstGeom prst="rect">
-              <a:avLst/>
-            </a:prstGeom>
-            <a:noFill/>
-            <a:ln w="76200">
-              <a:solidFill>
-                <a:schemeClr val="tx1"/>
-              </a:solidFill>
-            </a:ln>
-          </p:spPr>
-          <p:style>
-            <a:lnRef idx="2">
-              <a:schemeClr val="accent1">
-                <a:shade val="50000"/>
-              </a:schemeClr>
-            </a:lnRef>
-            <a:fillRef idx="1">
-              <a:schemeClr val="accent1"/>
-            </a:fillRef>
-            <a:effectRef idx="0">
-              <a:schemeClr val="accent1"/>
-            </a:effectRef>
-            <a:fontRef idx="minor">
-              <a:schemeClr val="lt1"/>
-            </a:fontRef>
-          </p:style>
-          <p:txBody>
-            <a:bodyPr rtlCol="0" anchor="ctr"/>
-            <a:lstStyle/>
-            <a:p>
-              <a:pPr algn="ctr"/>
-              <a:endParaRPr lang="en-US"/>
-            </a:p>
-          </p:txBody>
-        </p:sp>
-        <p:sp>
-          <p:nvSpPr>
-            <p:cNvPr id="49" name="Hexagon 48">
-              <a:extLst>
-                <a:ext uri="{FF2B5EF4-FFF2-40B4-BE49-F238E27FC236}">
-                  <a16:creationId xmlns:a16="http://schemas.microsoft.com/office/drawing/2014/main" id="{9B82B2E6-6D23-A605-72D7-A979E64A4B25}"/>
-                </a:ext>
-              </a:extLst>
-            </p:cNvPr>
-            <p:cNvSpPr/>
-            